--- a/AI-Coding-工具能力赋能-16页华为企业方案风格版.pptx
+++ b/AI-Coding-工具能力赋能-16页华为企业方案风格版.pptx
@@ -2,28 +2,28 @@
 <file path=ppt/presentation.xml><?xml version="1.0" encoding="utf-8"?>
 <p:presentation xmlns:p="http://schemas.openxmlformats.org/presentationml/2006/main">
   <p:sldMasterIdLst>
-    <p:sldMasterId xmlns:r="http://schemas.openxmlformats.org/officeDocument/2006/relationships" id="2147483648" r:id="R353f3c622105486b"/>
+    <p:sldMasterId xmlns:r="http://schemas.openxmlformats.org/officeDocument/2006/relationships" id="2147483648" r:id="R6fd5a25148a34a4a"/>
   </p:sldMasterIdLst>
   <p:notesMasterIdLst>
-    <p:notesMasterId xmlns:r="http://schemas.openxmlformats.org/officeDocument/2006/relationships" r:id="R7e5019e4446b4941"/>
+    <p:notesMasterId xmlns:r="http://schemas.openxmlformats.org/officeDocument/2006/relationships" r:id="R8c87efb8f7aa4fcf"/>
   </p:notesMasterIdLst>
   <p:sldIdLst>
-    <p:sldId xmlns:r="http://schemas.openxmlformats.org/officeDocument/2006/relationships" id="256" r:id="Rbfc58d559c384da8"/>
-    <p:sldId xmlns:r="http://schemas.openxmlformats.org/officeDocument/2006/relationships" id="257" r:id="R35327538f3b74dae"/>
-    <p:sldId xmlns:r="http://schemas.openxmlformats.org/officeDocument/2006/relationships" id="258" r:id="Rd3e1480425504073"/>
-    <p:sldId xmlns:r="http://schemas.openxmlformats.org/officeDocument/2006/relationships" id="259" r:id="R025685e430204c28"/>
-    <p:sldId xmlns:r="http://schemas.openxmlformats.org/officeDocument/2006/relationships" id="260" r:id="Rb11cf0cc375e47d8"/>
-    <p:sldId xmlns:r="http://schemas.openxmlformats.org/officeDocument/2006/relationships" id="261" r:id="R6702b7e168a947c8"/>
-    <p:sldId xmlns:r="http://schemas.openxmlformats.org/officeDocument/2006/relationships" id="262" r:id="R2dca8bbd0d7d40a9"/>
-    <p:sldId xmlns:r="http://schemas.openxmlformats.org/officeDocument/2006/relationships" id="263" r:id="R9975c80f0b0544ec"/>
-    <p:sldId xmlns:r="http://schemas.openxmlformats.org/officeDocument/2006/relationships" id="264" r:id="R671e2693d32d4516"/>
-    <p:sldId xmlns:r="http://schemas.openxmlformats.org/officeDocument/2006/relationships" id="265" r:id="R4ef5fc07cd6a4359"/>
-    <p:sldId xmlns:r="http://schemas.openxmlformats.org/officeDocument/2006/relationships" id="266" r:id="Re4f67c8a6f924d39"/>
-    <p:sldId xmlns:r="http://schemas.openxmlformats.org/officeDocument/2006/relationships" id="267" r:id="R90fc95abb88b4495"/>
-    <p:sldId xmlns:r="http://schemas.openxmlformats.org/officeDocument/2006/relationships" id="268" r:id="R9ec386303c14443b"/>
-    <p:sldId xmlns:r="http://schemas.openxmlformats.org/officeDocument/2006/relationships" id="269" r:id="R5bb471c504d34cc2"/>
-    <p:sldId xmlns:r="http://schemas.openxmlformats.org/officeDocument/2006/relationships" id="270" r:id="Rce7b684dd19440da"/>
-    <p:sldId xmlns:r="http://schemas.openxmlformats.org/officeDocument/2006/relationships" id="271" r:id="R72789425cb9d43f9"/>
+    <p:sldId xmlns:r="http://schemas.openxmlformats.org/officeDocument/2006/relationships" id="256" r:id="R59cb555cdf3840a4"/>
+    <p:sldId xmlns:r="http://schemas.openxmlformats.org/officeDocument/2006/relationships" id="257" r:id="R4d188e043c1a4688"/>
+    <p:sldId xmlns:r="http://schemas.openxmlformats.org/officeDocument/2006/relationships" id="258" r:id="Re703d830519c4ca1"/>
+    <p:sldId xmlns:r="http://schemas.openxmlformats.org/officeDocument/2006/relationships" id="259" r:id="Rf2bad275575d4a6f"/>
+    <p:sldId xmlns:r="http://schemas.openxmlformats.org/officeDocument/2006/relationships" id="260" r:id="R1a7313ccec4846b2"/>
+    <p:sldId xmlns:r="http://schemas.openxmlformats.org/officeDocument/2006/relationships" id="261" r:id="R899930a77f744973"/>
+    <p:sldId xmlns:r="http://schemas.openxmlformats.org/officeDocument/2006/relationships" id="262" r:id="R83724a8dceab4b27"/>
+    <p:sldId xmlns:r="http://schemas.openxmlformats.org/officeDocument/2006/relationships" id="263" r:id="R6f36517587264eb3"/>
+    <p:sldId xmlns:r="http://schemas.openxmlformats.org/officeDocument/2006/relationships" id="264" r:id="Rd370cdc709064194"/>
+    <p:sldId xmlns:r="http://schemas.openxmlformats.org/officeDocument/2006/relationships" id="265" r:id="R4303492d773a4647"/>
+    <p:sldId xmlns:r="http://schemas.openxmlformats.org/officeDocument/2006/relationships" id="266" r:id="R71a0fe650a9c4c3e"/>
+    <p:sldId xmlns:r="http://schemas.openxmlformats.org/officeDocument/2006/relationships" id="267" r:id="Rf23d41c3c0624462"/>
+    <p:sldId xmlns:r="http://schemas.openxmlformats.org/officeDocument/2006/relationships" id="268" r:id="Rd949b9d4a3b64ebf"/>
+    <p:sldId xmlns:r="http://schemas.openxmlformats.org/officeDocument/2006/relationships" id="269" r:id="R50ee40f4c8204b01"/>
+    <p:sldId xmlns:r="http://schemas.openxmlformats.org/officeDocument/2006/relationships" id="270" r:id="R73b87a44c8b74113"/>
+    <p:sldId xmlns:r="http://schemas.openxmlformats.org/officeDocument/2006/relationships" id="271" r:id="R2a8faf7186864b6c"/>
   </p:sldIdLst>
   <p:sldSz cx="12192000" cy="6858000"/>
   <p:notesSz cx="6858000" cy="9144000"/>
@@ -1606,7 +1606,7 @@
   </p:cSld>
   <p:clrMap bg1="lt1" tx1="dk1" bg2="lt2" tx2="dk2" accent1="accent1" accent2="accent2" accent3="accent3" accent4="accent4" accent5="accent5" accent6="accent6" hlink="hlink" folHlink="folHlink"/>
   <p:sldLayoutIdLst>
-    <p:sldLayoutId xmlns:r="http://schemas.openxmlformats.org/officeDocument/2006/relationships" id="2147483649" r:id="Rc77d73b618f34be2"/>
+    <p:sldLayoutId xmlns:r="http://schemas.openxmlformats.org/officeDocument/2006/relationships" id="2147483649" r:id="Rf2f8cca344bf495d"/>
   </p:sldLayoutIdLst>
   <p:txStyles>
     <p:titleStyle>
@@ -2161,7 +2161,7 @@
           <p:nvPr/>
         </p:nvPicPr>
         <p:blipFill>
-          <a:blip xmlns:r="http://schemas.openxmlformats.org/officeDocument/2006/relationships" xmlns:a="http://schemas.openxmlformats.org/drawingml/2006/main" r:embed="R70e501aa2d954167"/>
+          <a:blip xmlns:r="http://schemas.openxmlformats.org/officeDocument/2006/relationships" xmlns:a="http://schemas.openxmlformats.org/drawingml/2006/main" r:embed="R979cc25e27034aae"/>
           <a:srcRect xmlns:a="http://schemas.openxmlformats.org/drawingml/2006/main" l="0" t="27" r="0" b="27"/>
           <a:stretch xmlns:a="http://schemas.openxmlformats.org/drawingml/2006/main">
             <a:fillRect l="0" t="0" r="0" b="0"/>
@@ -2182,7 +2182,7 @@
           <p:cNvPr id="2" name="">
             <a:extLst xmlns:a="http://schemas.openxmlformats.org/drawingml/2006/main">
               <a:ext uri="{FF2B5EF4-FFF2-40B4-BE49-F238E27FC236}">
-                <a16:creationId xmlns:a16="http://schemas.microsoft.com/office/drawing/2014/main" id="{5F5C2C6F-5BCA-445C-966E-10EBDDEFAABB}"/>
+                <a16:creationId xmlns:a16="http://schemas.microsoft.com/office/drawing/2014/main" id="{047E696C-84E7-4E2E-B6FA-04A939C858F5}"/>
               </a:ext>
             </a:extLst>
           </p:cNvPr>
@@ -2215,7 +2215,7 @@
           <p:cNvPr id="3" name="">
             <a:extLst xmlns:a="http://schemas.openxmlformats.org/drawingml/2006/main">
               <a:ext uri="{FF2B5EF4-FFF2-40B4-BE49-F238E27FC236}">
-                <a16:creationId xmlns:a16="http://schemas.microsoft.com/office/drawing/2014/main" id="{1939EF10-14E3-405B-A0DA-F9DC2D082F0E}"/>
+                <a16:creationId xmlns:a16="http://schemas.microsoft.com/office/drawing/2014/main" id="{B6E9D745-EA03-4749-A7D5-A197E1ACCA62}"/>
               </a:ext>
             </a:extLst>
           </p:cNvPr>
@@ -2273,7 +2273,7 @@
           <p:cNvPr id="4" name="">
             <a:extLst xmlns:a="http://schemas.openxmlformats.org/drawingml/2006/main">
               <a:ext uri="{FF2B5EF4-FFF2-40B4-BE49-F238E27FC236}">
-                <a16:creationId xmlns:a16="http://schemas.microsoft.com/office/drawing/2014/main" id="{720DBA2E-8679-4D1F-818A-734BD416CBDD}"/>
+                <a16:creationId xmlns:a16="http://schemas.microsoft.com/office/drawing/2014/main" id="{70D0407F-DC57-4D5D-95B6-C92576EE04ED}"/>
               </a:ext>
             </a:extLst>
           </p:cNvPr>
@@ -2331,7 +2331,7 @@
           <p:cNvPr id="5" name="">
             <a:extLst xmlns:a="http://schemas.openxmlformats.org/drawingml/2006/main">
               <a:ext uri="{FF2B5EF4-FFF2-40B4-BE49-F238E27FC236}">
-                <a16:creationId xmlns:a16="http://schemas.microsoft.com/office/drawing/2014/main" id="{9F420D93-2038-47A3-AA5F-E51F0CB38086}"/>
+                <a16:creationId xmlns:a16="http://schemas.microsoft.com/office/drawing/2014/main" id="{E92175A9-FD61-4985-89C0-C4A72B8FF8AF}"/>
               </a:ext>
             </a:extLst>
           </p:cNvPr>
@@ -2364,7 +2364,7 @@
           <p:cNvPr id="6" name="">
             <a:extLst xmlns:a="http://schemas.openxmlformats.org/drawingml/2006/main">
               <a:ext uri="{FF2B5EF4-FFF2-40B4-BE49-F238E27FC236}">
-                <a16:creationId xmlns:a16="http://schemas.microsoft.com/office/drawing/2014/main" id="{F71EB1A3-FA31-4ED4-B72B-2037805F988B}"/>
+                <a16:creationId xmlns:a16="http://schemas.microsoft.com/office/drawing/2014/main" id="{58B23479-E358-4D55-B599-B9EB1D8FD598}"/>
               </a:ext>
             </a:extLst>
           </p:cNvPr>
@@ -2422,7 +2422,7 @@
           <p:cNvPr id="7" name="">
             <a:extLst xmlns:a="http://schemas.openxmlformats.org/drawingml/2006/main">
               <a:ext uri="{FF2B5EF4-FFF2-40B4-BE49-F238E27FC236}">
-                <a16:creationId xmlns:a16="http://schemas.microsoft.com/office/drawing/2014/main" id="{48A556CD-4320-4A4A-A482-22C32489FDFE}"/>
+                <a16:creationId xmlns:a16="http://schemas.microsoft.com/office/drawing/2014/main" id="{862B570D-14C0-4B52-B309-14EDA98F3400}"/>
               </a:ext>
             </a:extLst>
           </p:cNvPr>
@@ -2480,7 +2480,7 @@
           <p:cNvPr id="8" name="">
             <a:extLst xmlns:a="http://schemas.openxmlformats.org/drawingml/2006/main">
               <a:ext uri="{FF2B5EF4-FFF2-40B4-BE49-F238E27FC236}">
-                <a16:creationId xmlns:a16="http://schemas.microsoft.com/office/drawing/2014/main" id="{78202817-C8F8-40AA-A369-52E6D9178D51}"/>
+                <a16:creationId xmlns:a16="http://schemas.microsoft.com/office/drawing/2014/main" id="{BB8CDFE4-6E07-4523-A34B-D20F3661C3EB}"/>
               </a:ext>
             </a:extLst>
           </p:cNvPr>
@@ -2538,7 +2538,7 @@
           <p:cNvPr id="9" name="">
             <a:extLst xmlns:a="http://schemas.openxmlformats.org/drawingml/2006/main">
               <a:ext uri="{FF2B5EF4-FFF2-40B4-BE49-F238E27FC236}">
-                <a16:creationId xmlns:a16="http://schemas.microsoft.com/office/drawing/2014/main" id="{BBFA7384-F054-46F4-BF1E-A1E07C047054}"/>
+                <a16:creationId xmlns:a16="http://schemas.microsoft.com/office/drawing/2014/main" id="{8F166A58-615D-4BDE-99E3-2A1EAB546862}"/>
               </a:ext>
             </a:extLst>
           </p:cNvPr>
@@ -2596,7 +2596,7 @@
           <p:cNvPr id="10" name="">
             <a:extLst xmlns:a="http://schemas.openxmlformats.org/drawingml/2006/main">
               <a:ext uri="{FF2B5EF4-FFF2-40B4-BE49-F238E27FC236}">
-                <a16:creationId xmlns:a16="http://schemas.microsoft.com/office/drawing/2014/main" id="{42842797-E1ED-42D8-9A34-F748528D9FA1}"/>
+                <a16:creationId xmlns:a16="http://schemas.microsoft.com/office/drawing/2014/main" id="{F5089CEF-3F35-48D6-8B15-0F061C77C515}"/>
               </a:ext>
             </a:extLst>
           </p:cNvPr>
@@ -2629,7 +2629,7 @@
           <p:cNvPr id="11" name="">
             <a:extLst xmlns:a="http://schemas.openxmlformats.org/drawingml/2006/main">
               <a:ext uri="{FF2B5EF4-FFF2-40B4-BE49-F238E27FC236}">
-                <a16:creationId xmlns:a16="http://schemas.microsoft.com/office/drawing/2014/main" id="{F8AEDD79-258E-409B-991B-38E8A969B3B2}"/>
+                <a16:creationId xmlns:a16="http://schemas.microsoft.com/office/drawing/2014/main" id="{E0294B0F-7E16-43F8-9637-A2C432FF1DD8}"/>
               </a:ext>
             </a:extLst>
           </p:cNvPr>
@@ -2687,7 +2687,7 @@
           <p:cNvPr id="12" name="">
             <a:extLst xmlns:a="http://schemas.openxmlformats.org/drawingml/2006/main">
               <a:ext uri="{FF2B5EF4-FFF2-40B4-BE49-F238E27FC236}">
-                <a16:creationId xmlns:a16="http://schemas.microsoft.com/office/drawing/2014/main" id="{AEBFA997-14C9-435E-BA8E-F953A3D30917}"/>
+                <a16:creationId xmlns:a16="http://schemas.microsoft.com/office/drawing/2014/main" id="{AE77E2FE-8D6A-4EFF-B047-0F9A4F4BF7AA}"/>
               </a:ext>
             </a:extLst>
           </p:cNvPr>
@@ -2745,7 +2745,7 @@
           <p:cNvPr id="13" name="">
             <a:extLst xmlns:a="http://schemas.openxmlformats.org/drawingml/2006/main">
               <a:ext uri="{FF2B5EF4-FFF2-40B4-BE49-F238E27FC236}">
-                <a16:creationId xmlns:a16="http://schemas.microsoft.com/office/drawing/2014/main" id="{F137A322-7F99-47FE-8136-170C4DCBCEF9}"/>
+                <a16:creationId xmlns:a16="http://schemas.microsoft.com/office/drawing/2014/main" id="{A7897B11-89ED-4111-BBD2-923C78E822D5}"/>
               </a:ext>
             </a:extLst>
           </p:cNvPr>
@@ -2778,7 +2778,7 @@
           <p:cNvPr id="14" name="">
             <a:extLst xmlns:a="http://schemas.openxmlformats.org/drawingml/2006/main">
               <a:ext uri="{FF2B5EF4-FFF2-40B4-BE49-F238E27FC236}">
-                <a16:creationId xmlns:a16="http://schemas.microsoft.com/office/drawing/2014/main" id="{3F201BBF-ACA7-4CE9-9476-5E9A95D81C52}"/>
+                <a16:creationId xmlns:a16="http://schemas.microsoft.com/office/drawing/2014/main" id="{251CFC71-9595-4903-8746-E9AC69403088}"/>
               </a:ext>
             </a:extLst>
           </p:cNvPr>
@@ -2836,7 +2836,7 @@
           <p:cNvPr id="15" name="">
             <a:extLst xmlns:a="http://schemas.openxmlformats.org/drawingml/2006/main">
               <a:ext uri="{FF2B5EF4-FFF2-40B4-BE49-F238E27FC236}">
-                <a16:creationId xmlns:a16="http://schemas.microsoft.com/office/drawing/2014/main" id="{C383E955-1AD9-4B77-965C-C5220488B39D}"/>
+                <a16:creationId xmlns:a16="http://schemas.microsoft.com/office/drawing/2014/main" id="{DE5FEB77-E183-4BEB-8841-6D93F95CE703}"/>
               </a:ext>
             </a:extLst>
           </p:cNvPr>
@@ -2894,7 +2894,7 @@
           <p:cNvPr id="16" name="">
             <a:extLst xmlns:a="http://schemas.openxmlformats.org/drawingml/2006/main">
               <a:ext uri="{FF2B5EF4-FFF2-40B4-BE49-F238E27FC236}">
-                <a16:creationId xmlns:a16="http://schemas.microsoft.com/office/drawing/2014/main" id="{C186DAB3-8278-4596-B19F-7073B8276BD2}"/>
+                <a16:creationId xmlns:a16="http://schemas.microsoft.com/office/drawing/2014/main" id="{6289F198-9A1E-43BA-BB56-B01000F92EBE}"/>
               </a:ext>
             </a:extLst>
           </p:cNvPr>
@@ -2927,7 +2927,7 @@
           <p:cNvPr id="17" name="">
             <a:extLst xmlns:a="http://schemas.openxmlformats.org/drawingml/2006/main">
               <a:ext uri="{FF2B5EF4-FFF2-40B4-BE49-F238E27FC236}">
-                <a16:creationId xmlns:a16="http://schemas.microsoft.com/office/drawing/2014/main" id="{76A064E0-E63E-40BF-AEAE-33511256CD2A}"/>
+                <a16:creationId xmlns:a16="http://schemas.microsoft.com/office/drawing/2014/main" id="{4C9DCB34-5174-461E-91C6-EA6DD378FA64}"/>
               </a:ext>
             </a:extLst>
           </p:cNvPr>
@@ -2985,7 +2985,7 @@
           <p:cNvPr id="18" name="">
             <a:extLst xmlns:a="http://schemas.openxmlformats.org/drawingml/2006/main">
               <a:ext uri="{FF2B5EF4-FFF2-40B4-BE49-F238E27FC236}">
-                <a16:creationId xmlns:a16="http://schemas.microsoft.com/office/drawing/2014/main" id="{CC5E2355-7FB5-4AE9-874E-E69DA88B4CBE}"/>
+                <a16:creationId xmlns:a16="http://schemas.microsoft.com/office/drawing/2014/main" id="{8DC8B116-CEF8-4F25-A5EE-B21EE7500CE7}"/>
               </a:ext>
             </a:extLst>
           </p:cNvPr>
@@ -3043,7 +3043,7 @@
           <p:cNvPr id="19" name="">
             <a:extLst xmlns:a="http://schemas.openxmlformats.org/drawingml/2006/main">
               <a:ext uri="{FF2B5EF4-FFF2-40B4-BE49-F238E27FC236}">
-                <a16:creationId xmlns:a16="http://schemas.microsoft.com/office/drawing/2014/main" id="{5A9CCE9E-4705-4CCF-B515-FA6C7CD4AA72}"/>
+                <a16:creationId xmlns:a16="http://schemas.microsoft.com/office/drawing/2014/main" id="{148659A7-6A4F-4BD8-B181-580E32608444}"/>
               </a:ext>
             </a:extLst>
           </p:cNvPr>
@@ -3071,57 +3071,46 @@
           </a:ln>
         </p:spPr>
       </p:sp>
-      <p:sp>
-        <p:nvSpPr>
-          <p:cNvPr id="20" name="">
-            <a:extLst xmlns:a="http://schemas.openxmlformats.org/drawingml/2006/main">
-              <a:ext uri="{FF2B5EF4-FFF2-40B4-BE49-F238E27FC236}">
-                <a16:creationId xmlns:a16="http://schemas.microsoft.com/office/drawing/2014/main" id="{FE3AFA09-ECC4-40E1-A104-5987FE516113}"/>
-              </a:ext>
-            </a:extLst>
-          </p:cNvPr>
-          <p:cNvSpPr>
-            <a:spLocks xmlns:a="http://schemas.openxmlformats.org/drawingml/2006/main" noGrp="1"/>
-          </p:cNvSpPr>
-          <p:nvPr/>
-        </p:nvSpPr>
-        <p:spPr>
-          <a:xfrm xmlns:a="http://schemas.openxmlformats.org/drawingml/2006/main">
-            <a:off x="9810750" y="5810250"/>
-            <a:ext cx="1790700" cy="552450"/>
-          </a:xfrm>
-          <a:prstGeom xmlns:a="http://schemas.openxmlformats.org/drawingml/2006/main" prst="rect">
-            <a:avLst/>
-          </a:prstGeom>
-          <a:solidFill xmlns:a="http://schemas.openxmlformats.org/drawingml/2006/main">
-            <a:srgbClr val="FFFFFF"/>
-          </a:solidFill>
-          <a:ln xmlns:a="http://schemas.openxmlformats.org/drawingml/2006/main" w="11430">
-            <a:solidFill>
-              <a:srgbClr val="C7000B"/>
-            </a:solidFill>
-            <a:prstDash val="solid"/>
-          </a:ln>
-        </p:spPr>
-      </p:sp>
+      <p:pic>
+        <p:nvPicPr>
+          <p:cNvPr id="42" name=""/>
+          <p:cNvPicPr>
+            <a:picLocks xmlns:a="http://schemas.openxmlformats.org/drawingml/2006/main" noChangeAspect="1"/>
+          </p:cNvPicPr>
+          <p:nvPr/>
+        </p:nvPicPr>
+        <p:blipFill>
+          <a:blip xmlns:r="http://schemas.openxmlformats.org/officeDocument/2006/relationships" xmlns:a="http://schemas.openxmlformats.org/drawingml/2006/main" r:embed="R4e143c37b7554f04"/>
+          <a:stretch xmlns:a="http://schemas.openxmlformats.org/drawingml/2006/main"/>
+        </p:blipFill>
+        <p:spPr>
+          <a:xfrm xmlns:a="http://schemas.openxmlformats.org/drawingml/2006/main">
+            <a:off x="9715500" y="5811861"/>
+            <a:ext cx="1885950" cy="425402"/>
+          </a:xfrm>
+          <a:prstGeom xmlns:a="http://schemas.openxmlformats.org/drawingml/2006/main" prst="rect">
+            <a:avLst/>
+          </a:prstGeom>
+        </p:spPr>
+      </p:pic>
       <p:sp>
         <p:nvSpPr>
           <p:cNvPr id="21" name="">
             <a:extLst xmlns:a="http://schemas.openxmlformats.org/drawingml/2006/main">
               <a:ext uri="{FF2B5EF4-FFF2-40B4-BE49-F238E27FC236}">
-                <a16:creationId xmlns:a16="http://schemas.microsoft.com/office/drawing/2014/main" id="{2A19859A-1809-48E0-98B2-6DE717E8DEE4}"/>
-              </a:ext>
-            </a:extLst>
-          </p:cNvPr>
-          <p:cNvSpPr>
-            <a:spLocks xmlns:a="http://schemas.openxmlformats.org/drawingml/2006/main" noGrp="1"/>
-          </p:cNvSpPr>
-          <p:nvPr/>
-        </p:nvSpPr>
-        <p:spPr>
-          <a:xfrm xmlns:a="http://schemas.openxmlformats.org/drawingml/2006/main">
-            <a:off x="9963150" y="5962650"/>
-            <a:ext cx="1485900" cy="238125"/>
+                <a16:creationId xmlns:a16="http://schemas.microsoft.com/office/drawing/2014/main" id="{7BF45D08-2D24-441F-B343-E061BAAAD8DD}"/>
+              </a:ext>
+            </a:extLst>
+          </p:cNvPr>
+          <p:cNvSpPr>
+            <a:spLocks xmlns:a="http://schemas.openxmlformats.org/drawingml/2006/main" noGrp="1"/>
+          </p:cNvSpPr>
+          <p:nvPr/>
+        </p:nvSpPr>
+        <p:spPr>
+          <a:xfrm xmlns:a="http://schemas.openxmlformats.org/drawingml/2006/main">
+            <a:off x="9077325" y="6296025"/>
+            <a:ext cx="2524125" cy="123825"/>
           </a:xfrm>
           <a:prstGeom xmlns:a="http://schemas.openxmlformats.org/drawingml/2006/main" prst="rect">
             <a:avLst/>
@@ -3138,26 +3127,26 @@
           </a:bodyPr>
           <a:lstStyle xmlns:a="http://schemas.openxmlformats.org/drawingml/2006/main"/>
           <a:p xmlns:a="http://schemas.openxmlformats.org/drawingml/2006/main">
-            <a:pPr algn="ctr">
-              <a:defRPr sz="1050" b="1">
-                <a:solidFill>
-                  <a:srgbClr val="C7000B"/>
-                </a:solidFill>
-                <a:latin typeface="Microsoft YaHei"/>
-                <a:ea typeface="Microsoft YaHei"/>
-                <a:cs typeface="Microsoft YaHei"/>
-              </a:defRPr>
-            </a:pPr>
-            <a:r>
-              <a:rPr sz="1050" b="1">
-                <a:solidFill>
-                  <a:srgbClr val="C7000B"/>
-                </a:solidFill>
-                <a:latin typeface="Microsoft YaHei"/>
-                <a:ea typeface="Microsoft YaHei"/>
-                <a:cs typeface="Microsoft YaHei"/>
-              </a:rPr>
-              <a:t>品牌标识占位</a:t>
+            <a:pPr algn="r">
+              <a:defRPr sz="563" b="0">
+                <a:solidFill>
+                  <a:srgbClr val="898989"/>
+                </a:solidFill>
+                <a:latin typeface="Microsoft YaHei"/>
+                <a:ea typeface="Microsoft YaHei"/>
+                <a:cs typeface="Microsoft YaHei"/>
+              </a:defRPr>
+            </a:pPr>
+            <a:r>
+              <a:rPr sz="563" b="0">
+                <a:solidFill>
+                  <a:srgbClr val="898989"/>
+                </a:solidFill>
+                <a:latin typeface="Microsoft YaHei"/>
+                <a:ea typeface="Microsoft YaHei"/>
+                <a:cs typeface="Microsoft YaHei"/>
+              </a:rPr>
+              <a:t>HUAWEI 与华为标识为华为技术有限公司商标</a:t>
             </a:r>
           </a:p>
         </p:txBody>
@@ -3167,7 +3156,7 @@
           <p:cNvPr id="22" name="">
             <a:extLst xmlns:a="http://schemas.openxmlformats.org/drawingml/2006/main">
               <a:ext uri="{FF2B5EF4-FFF2-40B4-BE49-F238E27FC236}">
-                <a16:creationId xmlns:a16="http://schemas.microsoft.com/office/drawing/2014/main" id="{429BF3D2-68E4-4922-A652-6CE36844051E}"/>
+                <a16:creationId xmlns:a16="http://schemas.microsoft.com/office/drawing/2014/main" id="{F4EC5A75-524C-415E-8937-0260944CDC8E}"/>
               </a:ext>
             </a:extLst>
           </p:cNvPr>
@@ -3223,7 +3212,7 @@
     </p:spTree>
     <p:extLst>
       <p:ext uri="{BB962C8B-B14F-4D97-AF65-F5344CB8AC3E}">
-        <p14:creationId xmlns:p14="http://schemas.microsoft.com/office/powerpoint/2010/main" val="957642038"/>
+        <p14:creationId xmlns:p14="http://schemas.microsoft.com/office/powerpoint/2010/main" val="1806421579"/>
       </p:ext>
     </p:extLst>
   </p:cSld>
@@ -3254,7 +3243,7 @@
           <p:cNvPr id="47" name="">
             <a:extLst xmlns:a="http://schemas.openxmlformats.org/drawingml/2006/main">
               <a:ext uri="{FF2B5EF4-FFF2-40B4-BE49-F238E27FC236}">
-                <a16:creationId xmlns:a16="http://schemas.microsoft.com/office/drawing/2014/main" id="{9063BE81-BDA3-483D-80A4-CDEE49ECD391}"/>
+                <a16:creationId xmlns:a16="http://schemas.microsoft.com/office/drawing/2014/main" id="{C26BB472-6EBB-4750-86A8-0274F1C033CA}"/>
               </a:ext>
             </a:extLst>
           </p:cNvPr>
@@ -3287,7 +3276,7 @@
           <p:cNvPr id="2" name="">
             <a:extLst xmlns:a="http://schemas.openxmlformats.org/drawingml/2006/main">
               <a:ext uri="{FF2B5EF4-FFF2-40B4-BE49-F238E27FC236}">
-                <a16:creationId xmlns:a16="http://schemas.microsoft.com/office/drawing/2014/main" id="{B46B7686-485A-4480-B91B-FF27E88AB057}"/>
+                <a16:creationId xmlns:a16="http://schemas.microsoft.com/office/drawing/2014/main" id="{B617F477-BDE7-4BE9-BCDB-631499EE0636}"/>
               </a:ext>
             </a:extLst>
           </p:cNvPr>
@@ -3345,7 +3334,7 @@
           <p:cNvPr id="3" name="">
             <a:extLst xmlns:a="http://schemas.openxmlformats.org/drawingml/2006/main">
               <a:ext uri="{FF2B5EF4-FFF2-40B4-BE49-F238E27FC236}">
-                <a16:creationId xmlns:a16="http://schemas.microsoft.com/office/drawing/2014/main" id="{2AF0913D-8619-4A6E-A6B8-A65033A9EB52}"/>
+                <a16:creationId xmlns:a16="http://schemas.microsoft.com/office/drawing/2014/main" id="{05826101-7E73-431A-AB52-8C25B1770455}"/>
               </a:ext>
             </a:extLst>
           </p:cNvPr>
@@ -3403,7 +3392,7 @@
           <p:cNvPr id="4" name="">
             <a:extLst xmlns:a="http://schemas.openxmlformats.org/drawingml/2006/main">
               <a:ext uri="{FF2B5EF4-FFF2-40B4-BE49-F238E27FC236}">
-                <a16:creationId xmlns:a16="http://schemas.microsoft.com/office/drawing/2014/main" id="{6CD27194-FDCA-4CBB-9A9B-EF21E1765EAF}"/>
+                <a16:creationId xmlns:a16="http://schemas.microsoft.com/office/drawing/2014/main" id="{06E8131C-6CD7-4A4B-A8A9-6A1179EE153B}"/>
               </a:ext>
             </a:extLst>
           </p:cNvPr>
@@ -3440,7 +3429,7 @@
           <p:nvPr/>
         </p:nvPicPr>
         <p:blipFill>
-          <a:blip xmlns:r="http://schemas.openxmlformats.org/officeDocument/2006/relationships" xmlns:a="http://schemas.openxmlformats.org/drawingml/2006/main" r:embed="R5bf9e6f72aa24bcf"/>
+          <a:blip xmlns:r="http://schemas.openxmlformats.org/officeDocument/2006/relationships" xmlns:a="http://schemas.openxmlformats.org/drawingml/2006/main" r:embed="R741fd76f9f83462c"/>
           <a:stretch xmlns:a="http://schemas.openxmlformats.org/drawingml/2006/main"/>
         </p:blipFill>
         <p:spPr>
@@ -3458,7 +3447,7 @@
           <p:cNvPr id="6" name="">
             <a:extLst xmlns:a="http://schemas.openxmlformats.org/drawingml/2006/main">
               <a:ext uri="{FF2B5EF4-FFF2-40B4-BE49-F238E27FC236}">
-                <a16:creationId xmlns:a16="http://schemas.microsoft.com/office/drawing/2014/main" id="{845DACBB-AC3C-4BE2-83BC-7A20371BE310}"/>
+                <a16:creationId xmlns:a16="http://schemas.microsoft.com/office/drawing/2014/main" id="{E67876E1-52BB-4455-94D2-F70168879FF1}"/>
               </a:ext>
             </a:extLst>
           </p:cNvPr>
@@ -3491,7 +3480,7 @@
           <p:cNvPr id="7" name="">
             <a:extLst xmlns:a="http://schemas.openxmlformats.org/drawingml/2006/main">
               <a:ext uri="{FF2B5EF4-FFF2-40B4-BE49-F238E27FC236}">
-                <a16:creationId xmlns:a16="http://schemas.microsoft.com/office/drawing/2014/main" id="{AF4F7617-A506-418D-B1F2-3747D66105D9}"/>
+                <a16:creationId xmlns:a16="http://schemas.microsoft.com/office/drawing/2014/main" id="{343B78C6-1F1A-48FE-B19E-452698E8D7AC}"/>
               </a:ext>
             </a:extLst>
           </p:cNvPr>
@@ -3549,7 +3538,7 @@
           <p:cNvPr id="8" name="">
             <a:extLst xmlns:a="http://schemas.openxmlformats.org/drawingml/2006/main">
               <a:ext uri="{FF2B5EF4-FFF2-40B4-BE49-F238E27FC236}">
-                <a16:creationId xmlns:a16="http://schemas.microsoft.com/office/drawing/2014/main" id="{3880FBCE-6340-4930-B180-F81545C86250}"/>
+                <a16:creationId xmlns:a16="http://schemas.microsoft.com/office/drawing/2014/main" id="{9E4EF747-AC7F-459D-9EA9-27CA9C22C145}"/>
               </a:ext>
             </a:extLst>
           </p:cNvPr>
@@ -3607,7 +3596,7 @@
           <p:cNvPr id="9" name="">
             <a:extLst xmlns:a="http://schemas.openxmlformats.org/drawingml/2006/main">
               <a:ext uri="{FF2B5EF4-FFF2-40B4-BE49-F238E27FC236}">
-                <a16:creationId xmlns:a16="http://schemas.microsoft.com/office/drawing/2014/main" id="{34A3F649-CB54-46EA-B775-C18D36399B31}"/>
+                <a16:creationId xmlns:a16="http://schemas.microsoft.com/office/drawing/2014/main" id="{7D9F08CC-2808-4B47-9DB5-000C81E2656E}"/>
               </a:ext>
             </a:extLst>
           </p:cNvPr>
@@ -3665,7 +3654,7 @@
           <p:cNvPr id="10" name="">
             <a:extLst xmlns:a="http://schemas.openxmlformats.org/drawingml/2006/main">
               <a:ext uri="{FF2B5EF4-FFF2-40B4-BE49-F238E27FC236}">
-                <a16:creationId xmlns:a16="http://schemas.microsoft.com/office/drawing/2014/main" id="{66440F89-EFA2-4531-9841-B18B9E4FAC8E}"/>
+                <a16:creationId xmlns:a16="http://schemas.microsoft.com/office/drawing/2014/main" id="{16D61BAF-7B9C-451F-BE9F-D5CDE52B7593}"/>
               </a:ext>
             </a:extLst>
           </p:cNvPr>
@@ -3698,7 +3687,7 @@
           <p:cNvPr id="11" name="">
             <a:extLst xmlns:a="http://schemas.openxmlformats.org/drawingml/2006/main">
               <a:ext uri="{FF2B5EF4-FFF2-40B4-BE49-F238E27FC236}">
-                <a16:creationId xmlns:a16="http://schemas.microsoft.com/office/drawing/2014/main" id="{67CA82F1-3F6C-4388-95B9-6AA387850556}"/>
+                <a16:creationId xmlns:a16="http://schemas.microsoft.com/office/drawing/2014/main" id="{195C7A3B-1488-4653-A5BF-9E52041AFB04}"/>
               </a:ext>
             </a:extLst>
           </p:cNvPr>
@@ -3756,7 +3745,7 @@
           <p:cNvPr id="12" name="">
             <a:extLst xmlns:a="http://schemas.openxmlformats.org/drawingml/2006/main">
               <a:ext uri="{FF2B5EF4-FFF2-40B4-BE49-F238E27FC236}">
-                <a16:creationId xmlns:a16="http://schemas.microsoft.com/office/drawing/2014/main" id="{2677B31B-FA7A-4440-972C-1CD276324F7E}"/>
+                <a16:creationId xmlns:a16="http://schemas.microsoft.com/office/drawing/2014/main" id="{611A3FB0-AE34-4126-A450-8AA1494349BE}"/>
               </a:ext>
             </a:extLst>
           </p:cNvPr>
@@ -3814,7 +3803,7 @@
           <p:cNvPr id="13" name="">
             <a:extLst xmlns:a="http://schemas.openxmlformats.org/drawingml/2006/main">
               <a:ext uri="{FF2B5EF4-FFF2-40B4-BE49-F238E27FC236}">
-                <a16:creationId xmlns:a16="http://schemas.microsoft.com/office/drawing/2014/main" id="{7D24D258-A032-46E9-9C28-6ED39AD5B17A}"/>
+                <a16:creationId xmlns:a16="http://schemas.microsoft.com/office/drawing/2014/main" id="{9D6E9308-B760-4EED-9434-993B26373EE6}"/>
               </a:ext>
             </a:extLst>
           </p:cNvPr>
@@ -3872,7 +3861,7 @@
           <p:cNvPr id="14" name="">
             <a:extLst xmlns:a="http://schemas.openxmlformats.org/drawingml/2006/main">
               <a:ext uri="{FF2B5EF4-FFF2-40B4-BE49-F238E27FC236}">
-                <a16:creationId xmlns:a16="http://schemas.microsoft.com/office/drawing/2014/main" id="{5B5E4906-0ACC-49C2-9FDB-9AED8810D0A9}"/>
+                <a16:creationId xmlns:a16="http://schemas.microsoft.com/office/drawing/2014/main" id="{1B4B765E-EEEB-4BD2-AC5F-A282BE871567}"/>
               </a:ext>
             </a:extLst>
           </p:cNvPr>
@@ -3905,7 +3894,7 @@
           <p:cNvPr id="15" name="">
             <a:extLst xmlns:a="http://schemas.openxmlformats.org/drawingml/2006/main">
               <a:ext uri="{FF2B5EF4-FFF2-40B4-BE49-F238E27FC236}">
-                <a16:creationId xmlns:a16="http://schemas.microsoft.com/office/drawing/2014/main" id="{DB072CD7-181C-42A7-9059-B556962AD9FD}"/>
+                <a16:creationId xmlns:a16="http://schemas.microsoft.com/office/drawing/2014/main" id="{569CAD8C-F603-49B0-8696-4BBC63ECEDA7}"/>
               </a:ext>
             </a:extLst>
           </p:cNvPr>
@@ -3963,7 +3952,7 @@
           <p:cNvPr id="16" name="">
             <a:extLst xmlns:a="http://schemas.openxmlformats.org/drawingml/2006/main">
               <a:ext uri="{FF2B5EF4-FFF2-40B4-BE49-F238E27FC236}">
-                <a16:creationId xmlns:a16="http://schemas.microsoft.com/office/drawing/2014/main" id="{2A489580-63E1-4289-B6C0-7E1044BED4ED}"/>
+                <a16:creationId xmlns:a16="http://schemas.microsoft.com/office/drawing/2014/main" id="{4B1A840F-4909-43C2-AE1F-E8A7C5AB2D63}"/>
               </a:ext>
             </a:extLst>
           </p:cNvPr>
@@ -4021,7 +4010,7 @@
           <p:cNvPr id="17" name="">
             <a:extLst xmlns:a="http://schemas.openxmlformats.org/drawingml/2006/main">
               <a:ext uri="{FF2B5EF4-FFF2-40B4-BE49-F238E27FC236}">
-                <a16:creationId xmlns:a16="http://schemas.microsoft.com/office/drawing/2014/main" id="{17B2C64D-19B0-47B2-8D16-BE3398A8EE16}"/>
+                <a16:creationId xmlns:a16="http://schemas.microsoft.com/office/drawing/2014/main" id="{3FC005AE-04AC-4B12-8836-C68371B3E7C7}"/>
               </a:ext>
             </a:extLst>
           </p:cNvPr>
@@ -4079,7 +4068,7 @@
           <p:cNvPr id="18" name="">
             <a:extLst xmlns:a="http://schemas.openxmlformats.org/drawingml/2006/main">
               <a:ext uri="{FF2B5EF4-FFF2-40B4-BE49-F238E27FC236}">
-                <a16:creationId xmlns:a16="http://schemas.microsoft.com/office/drawing/2014/main" id="{28015AC3-E5AA-447C-A61E-93895FE45E08}"/>
+                <a16:creationId xmlns:a16="http://schemas.microsoft.com/office/drawing/2014/main" id="{89B8ED01-D984-4203-97CD-9F238BDEF78D}"/>
               </a:ext>
             </a:extLst>
           </p:cNvPr>
@@ -4112,7 +4101,7 @@
           <p:cNvPr id="19" name="">
             <a:extLst xmlns:a="http://schemas.openxmlformats.org/drawingml/2006/main">
               <a:ext uri="{FF2B5EF4-FFF2-40B4-BE49-F238E27FC236}">
-                <a16:creationId xmlns:a16="http://schemas.microsoft.com/office/drawing/2014/main" id="{0322CE49-E89F-40F8-A055-7C1C0536A847}"/>
+                <a16:creationId xmlns:a16="http://schemas.microsoft.com/office/drawing/2014/main" id="{0DFE69D3-2746-4DC6-AB74-6388AA4426DB}"/>
               </a:ext>
             </a:extLst>
           </p:cNvPr>
@@ -4170,7 +4159,7 @@
           <p:cNvPr id="20" name="">
             <a:extLst xmlns:a="http://schemas.openxmlformats.org/drawingml/2006/main">
               <a:ext uri="{FF2B5EF4-FFF2-40B4-BE49-F238E27FC236}">
-                <a16:creationId xmlns:a16="http://schemas.microsoft.com/office/drawing/2014/main" id="{CDF5195D-3583-42BB-A90B-63BFD160F377}"/>
+                <a16:creationId xmlns:a16="http://schemas.microsoft.com/office/drawing/2014/main" id="{E221A097-12A1-4DDF-9C63-F4E1D8359E0A}"/>
               </a:ext>
             </a:extLst>
           </p:cNvPr>
@@ -4228,7 +4217,7 @@
           <p:cNvPr id="21" name="">
             <a:extLst xmlns:a="http://schemas.openxmlformats.org/drawingml/2006/main">
               <a:ext uri="{FF2B5EF4-FFF2-40B4-BE49-F238E27FC236}">
-                <a16:creationId xmlns:a16="http://schemas.microsoft.com/office/drawing/2014/main" id="{4203F8C5-01D3-4056-84DE-30EC05875568}"/>
+                <a16:creationId xmlns:a16="http://schemas.microsoft.com/office/drawing/2014/main" id="{5DA3D0B2-BF80-4890-AEAB-217326E4D2D8}"/>
               </a:ext>
             </a:extLst>
           </p:cNvPr>
@@ -4286,7 +4275,7 @@
           <p:cNvPr id="22" name="">
             <a:extLst xmlns:a="http://schemas.openxmlformats.org/drawingml/2006/main">
               <a:ext uri="{FF2B5EF4-FFF2-40B4-BE49-F238E27FC236}">
-                <a16:creationId xmlns:a16="http://schemas.microsoft.com/office/drawing/2014/main" id="{3AED0121-3301-400C-9D6D-5EF7608C5F9D}"/>
+                <a16:creationId xmlns:a16="http://schemas.microsoft.com/office/drawing/2014/main" id="{95A57BD7-4744-400B-A2A5-9532D2217A90}"/>
               </a:ext>
             </a:extLst>
           </p:cNvPr>
@@ -4319,7 +4308,7 @@
           <p:cNvPr id="23" name="">
             <a:extLst xmlns:a="http://schemas.openxmlformats.org/drawingml/2006/main">
               <a:ext uri="{FF2B5EF4-FFF2-40B4-BE49-F238E27FC236}">
-                <a16:creationId xmlns:a16="http://schemas.microsoft.com/office/drawing/2014/main" id="{C3A0C51E-D972-4D00-8E42-BC322A14BAE5}"/>
+                <a16:creationId xmlns:a16="http://schemas.microsoft.com/office/drawing/2014/main" id="{A4FA802C-3B62-4912-BE21-B96E766268CE}"/>
               </a:ext>
             </a:extLst>
           </p:cNvPr>
@@ -4377,7 +4366,7 @@
           <p:cNvPr id="24" name="">
             <a:extLst xmlns:a="http://schemas.openxmlformats.org/drawingml/2006/main">
               <a:ext uri="{FF2B5EF4-FFF2-40B4-BE49-F238E27FC236}">
-                <a16:creationId xmlns:a16="http://schemas.microsoft.com/office/drawing/2014/main" id="{C4E3F093-F462-43BD-A78E-12B5C5F10A3C}"/>
+                <a16:creationId xmlns:a16="http://schemas.microsoft.com/office/drawing/2014/main" id="{D1AA1826-F2C1-45C6-BD81-8A954759818E}"/>
               </a:ext>
             </a:extLst>
           </p:cNvPr>
@@ -4435,7 +4424,7 @@
           <p:cNvPr id="25" name="">
             <a:extLst xmlns:a="http://schemas.openxmlformats.org/drawingml/2006/main">
               <a:ext uri="{FF2B5EF4-FFF2-40B4-BE49-F238E27FC236}">
-                <a16:creationId xmlns:a16="http://schemas.microsoft.com/office/drawing/2014/main" id="{A16B808E-1A04-49B0-8D65-54D6DBFA03B0}"/>
+                <a16:creationId xmlns:a16="http://schemas.microsoft.com/office/drawing/2014/main" id="{9583B26D-FF7B-4044-A2B8-24E867AD53C6}"/>
               </a:ext>
             </a:extLst>
           </p:cNvPr>
@@ -4493,7 +4482,7 @@
           <p:cNvPr id="26" name="">
             <a:extLst xmlns:a="http://schemas.openxmlformats.org/drawingml/2006/main">
               <a:ext uri="{FF2B5EF4-FFF2-40B4-BE49-F238E27FC236}">
-                <a16:creationId xmlns:a16="http://schemas.microsoft.com/office/drawing/2014/main" id="{26C9917D-EAF4-432F-8B7C-8BF6D540A61F}"/>
+                <a16:creationId xmlns:a16="http://schemas.microsoft.com/office/drawing/2014/main" id="{757835D1-45A9-4B6F-B508-236F3F208F8C}"/>
               </a:ext>
             </a:extLst>
           </p:cNvPr>
@@ -4526,7 +4515,7 @@
           <p:cNvPr id="27" name="">
             <a:extLst xmlns:a="http://schemas.openxmlformats.org/drawingml/2006/main">
               <a:ext uri="{FF2B5EF4-FFF2-40B4-BE49-F238E27FC236}">
-                <a16:creationId xmlns:a16="http://schemas.microsoft.com/office/drawing/2014/main" id="{7140881A-79D7-4348-BCEA-CB6596FBC520}"/>
+                <a16:creationId xmlns:a16="http://schemas.microsoft.com/office/drawing/2014/main" id="{1930C4B2-E3F7-4679-87E0-926EDC157D70}"/>
               </a:ext>
             </a:extLst>
           </p:cNvPr>
@@ -4584,7 +4573,7 @@
           <p:cNvPr id="28" name="">
             <a:extLst xmlns:a="http://schemas.openxmlformats.org/drawingml/2006/main">
               <a:ext uri="{FF2B5EF4-FFF2-40B4-BE49-F238E27FC236}">
-                <a16:creationId xmlns:a16="http://schemas.microsoft.com/office/drawing/2014/main" id="{86E64B25-3F9B-4ACF-958A-61B41150F6A7}"/>
+                <a16:creationId xmlns:a16="http://schemas.microsoft.com/office/drawing/2014/main" id="{A2F016CE-89AE-4AE3-B1EC-C409F8A93A37}"/>
               </a:ext>
             </a:extLst>
           </p:cNvPr>
@@ -4642,7 +4631,7 @@
           <p:cNvPr id="29" name="">
             <a:extLst xmlns:a="http://schemas.openxmlformats.org/drawingml/2006/main">
               <a:ext uri="{FF2B5EF4-FFF2-40B4-BE49-F238E27FC236}">
-                <a16:creationId xmlns:a16="http://schemas.microsoft.com/office/drawing/2014/main" id="{37EFA444-3A37-4B9C-B91F-0F90E40E177A}"/>
+                <a16:creationId xmlns:a16="http://schemas.microsoft.com/office/drawing/2014/main" id="{5ADD19E3-85CD-4515-9520-99F5CFBB23FD}"/>
               </a:ext>
             </a:extLst>
           </p:cNvPr>
@@ -4700,7 +4689,7 @@
           <p:cNvPr id="30" name="">
             <a:extLst xmlns:a="http://schemas.openxmlformats.org/drawingml/2006/main">
               <a:ext uri="{FF2B5EF4-FFF2-40B4-BE49-F238E27FC236}">
-                <a16:creationId xmlns:a16="http://schemas.microsoft.com/office/drawing/2014/main" id="{1DC73DA9-BE31-4CAD-8789-5056C9F1D5BF}"/>
+                <a16:creationId xmlns:a16="http://schemas.microsoft.com/office/drawing/2014/main" id="{CAFFDDA5-CBFB-46B2-8972-88987663B480}"/>
               </a:ext>
             </a:extLst>
           </p:cNvPr>
@@ -4733,7 +4722,7 @@
           <p:cNvPr id="31" name="">
             <a:extLst xmlns:a="http://schemas.openxmlformats.org/drawingml/2006/main">
               <a:ext uri="{FF2B5EF4-FFF2-40B4-BE49-F238E27FC236}">
-                <a16:creationId xmlns:a16="http://schemas.microsoft.com/office/drawing/2014/main" id="{7676127F-1450-4046-8A88-B369EB21C752}"/>
+                <a16:creationId xmlns:a16="http://schemas.microsoft.com/office/drawing/2014/main" id="{908DAC15-4EB6-4E90-B2A7-F24182C91483}"/>
               </a:ext>
             </a:extLst>
           </p:cNvPr>
@@ -4791,7 +4780,7 @@
           <p:cNvPr id="32" name="">
             <a:extLst xmlns:a="http://schemas.openxmlformats.org/drawingml/2006/main">
               <a:ext uri="{FF2B5EF4-FFF2-40B4-BE49-F238E27FC236}">
-                <a16:creationId xmlns:a16="http://schemas.microsoft.com/office/drawing/2014/main" id="{82F1860A-AD92-489E-BB6E-1FC7476F9FD5}"/>
+                <a16:creationId xmlns:a16="http://schemas.microsoft.com/office/drawing/2014/main" id="{2D991818-4225-4668-A811-C43C20153137}"/>
               </a:ext>
             </a:extLst>
           </p:cNvPr>
@@ -4824,7 +4813,7 @@
           <p:cNvPr id="33" name="">
             <a:extLst xmlns:a="http://schemas.openxmlformats.org/drawingml/2006/main">
               <a:ext uri="{FF2B5EF4-FFF2-40B4-BE49-F238E27FC236}">
-                <a16:creationId xmlns:a16="http://schemas.microsoft.com/office/drawing/2014/main" id="{79FC8B95-B0E6-42FC-B0D8-2751F88433A3}"/>
+                <a16:creationId xmlns:a16="http://schemas.microsoft.com/office/drawing/2014/main" id="{808FD72E-3F57-4A29-9F57-3D9CA7C69C01}"/>
               </a:ext>
             </a:extLst>
           </p:cNvPr>
@@ -4882,7 +4871,7 @@
           <p:cNvPr id="34" name="">
             <a:extLst xmlns:a="http://schemas.openxmlformats.org/drawingml/2006/main">
               <a:ext uri="{FF2B5EF4-FFF2-40B4-BE49-F238E27FC236}">
-                <a16:creationId xmlns:a16="http://schemas.microsoft.com/office/drawing/2014/main" id="{B5DC40AE-D995-4A64-B08F-6CC29B919FC4}"/>
+                <a16:creationId xmlns:a16="http://schemas.microsoft.com/office/drawing/2014/main" id="{5D35A020-B701-4CFA-9047-8FAC4E640AE2}"/>
               </a:ext>
             </a:extLst>
           </p:cNvPr>
@@ -4915,7 +4904,7 @@
           <p:cNvPr id="35" name="">
             <a:extLst xmlns:a="http://schemas.openxmlformats.org/drawingml/2006/main">
               <a:ext uri="{FF2B5EF4-FFF2-40B4-BE49-F238E27FC236}">
-                <a16:creationId xmlns:a16="http://schemas.microsoft.com/office/drawing/2014/main" id="{5356DFF3-D024-4A15-85BA-9AC891036198}"/>
+                <a16:creationId xmlns:a16="http://schemas.microsoft.com/office/drawing/2014/main" id="{F77DAD00-DF8D-4616-80AD-43F475569B22}"/>
               </a:ext>
             </a:extLst>
           </p:cNvPr>
@@ -4973,7 +4962,7 @@
           <p:cNvPr id="36" name="">
             <a:extLst xmlns:a="http://schemas.openxmlformats.org/drawingml/2006/main">
               <a:ext uri="{FF2B5EF4-FFF2-40B4-BE49-F238E27FC236}">
-                <a16:creationId xmlns:a16="http://schemas.microsoft.com/office/drawing/2014/main" id="{C84E67EF-AC89-478F-A0AB-CFCA9B025E1C}"/>
+                <a16:creationId xmlns:a16="http://schemas.microsoft.com/office/drawing/2014/main" id="{FC81B066-00C7-4810-87D2-3FB3DCD89A23}"/>
               </a:ext>
             </a:extLst>
           </p:cNvPr>
@@ -5006,7 +4995,7 @@
           <p:cNvPr id="37" name="">
             <a:extLst xmlns:a="http://schemas.openxmlformats.org/drawingml/2006/main">
               <a:ext uri="{FF2B5EF4-FFF2-40B4-BE49-F238E27FC236}">
-                <a16:creationId xmlns:a16="http://schemas.microsoft.com/office/drawing/2014/main" id="{B670E1BB-FD1F-4EB1-969A-CAA506FF2073}"/>
+                <a16:creationId xmlns:a16="http://schemas.microsoft.com/office/drawing/2014/main" id="{2EEAAD22-DDA7-4111-97F9-2F78E5184951}"/>
               </a:ext>
             </a:extLst>
           </p:cNvPr>
@@ -5064,7 +5053,7 @@
           <p:cNvPr id="38" name="">
             <a:extLst xmlns:a="http://schemas.openxmlformats.org/drawingml/2006/main">
               <a:ext uri="{FF2B5EF4-FFF2-40B4-BE49-F238E27FC236}">
-                <a16:creationId xmlns:a16="http://schemas.microsoft.com/office/drawing/2014/main" id="{E0717561-7878-4A89-AD8C-BC3553A84C5D}"/>
+                <a16:creationId xmlns:a16="http://schemas.microsoft.com/office/drawing/2014/main" id="{00B83571-718F-4287-A239-D6D427F33B31}"/>
               </a:ext>
             </a:extLst>
           </p:cNvPr>
@@ -5097,7 +5086,7 @@
           <p:cNvPr id="39" name="">
             <a:extLst xmlns:a="http://schemas.openxmlformats.org/drawingml/2006/main">
               <a:ext uri="{FF2B5EF4-FFF2-40B4-BE49-F238E27FC236}">
-                <a16:creationId xmlns:a16="http://schemas.microsoft.com/office/drawing/2014/main" id="{F2369C22-48C5-43B6-988B-CDF1487667DB}"/>
+                <a16:creationId xmlns:a16="http://schemas.microsoft.com/office/drawing/2014/main" id="{C29A3924-6FD8-4BD6-945C-D3AB8C562218}"/>
               </a:ext>
             </a:extLst>
           </p:cNvPr>
@@ -5155,7 +5144,7 @@
           <p:cNvPr id="40" name="">
             <a:extLst xmlns:a="http://schemas.openxmlformats.org/drawingml/2006/main">
               <a:ext uri="{FF2B5EF4-FFF2-40B4-BE49-F238E27FC236}">
-                <a16:creationId xmlns:a16="http://schemas.microsoft.com/office/drawing/2014/main" id="{E42567AA-E36D-4349-883C-D1C2EDB2B619}"/>
+                <a16:creationId xmlns:a16="http://schemas.microsoft.com/office/drawing/2014/main" id="{5663F66B-31B4-4092-A1A1-FFE69FB718EF}"/>
               </a:ext>
             </a:extLst>
           </p:cNvPr>
@@ -5188,7 +5177,7 @@
           <p:cNvPr id="41" name="">
             <a:extLst xmlns:a="http://schemas.openxmlformats.org/drawingml/2006/main">
               <a:ext uri="{FF2B5EF4-FFF2-40B4-BE49-F238E27FC236}">
-                <a16:creationId xmlns:a16="http://schemas.microsoft.com/office/drawing/2014/main" id="{1D404C45-89A2-489E-8D80-3DC5799598C4}"/>
+                <a16:creationId xmlns:a16="http://schemas.microsoft.com/office/drawing/2014/main" id="{A00D6E66-1826-41E3-A99E-F1B180AF1212}"/>
               </a:ext>
             </a:extLst>
           </p:cNvPr>
@@ -5246,7 +5235,7 @@
           <p:cNvPr id="42" name="">
             <a:extLst xmlns:a="http://schemas.openxmlformats.org/drawingml/2006/main">
               <a:ext uri="{FF2B5EF4-FFF2-40B4-BE49-F238E27FC236}">
-                <a16:creationId xmlns:a16="http://schemas.microsoft.com/office/drawing/2014/main" id="{03670892-C586-4EAD-8304-A80E0C59A0EB}"/>
+                <a16:creationId xmlns:a16="http://schemas.microsoft.com/office/drawing/2014/main" id="{BE890397-45EC-4EB7-A73D-F9287722879E}"/>
               </a:ext>
             </a:extLst>
           </p:cNvPr>
@@ -5279,7 +5268,7 @@
           <p:cNvPr id="43" name="">
             <a:extLst xmlns:a="http://schemas.openxmlformats.org/drawingml/2006/main">
               <a:ext uri="{FF2B5EF4-FFF2-40B4-BE49-F238E27FC236}">
-                <a16:creationId xmlns:a16="http://schemas.microsoft.com/office/drawing/2014/main" id="{769E42D1-D072-4AA8-85D4-21761A9D17C7}"/>
+                <a16:creationId xmlns:a16="http://schemas.microsoft.com/office/drawing/2014/main" id="{826B19D4-4F0A-44B8-8C28-08F03E502477}"/>
               </a:ext>
             </a:extLst>
           </p:cNvPr>
@@ -5337,7 +5326,7 @@
           <p:cNvPr id="44" name="">
             <a:extLst xmlns:a="http://schemas.openxmlformats.org/drawingml/2006/main">
               <a:ext uri="{FF2B5EF4-FFF2-40B4-BE49-F238E27FC236}">
-                <a16:creationId xmlns:a16="http://schemas.microsoft.com/office/drawing/2014/main" id="{0B57D01B-2623-4129-B2C8-A1C89E71FD7F}"/>
+                <a16:creationId xmlns:a16="http://schemas.microsoft.com/office/drawing/2014/main" id="{7EDBEE4A-4746-4214-B03A-29E898A093D9}"/>
               </a:ext>
             </a:extLst>
           </p:cNvPr>
@@ -5370,7 +5359,7 @@
           <p:cNvPr id="45" name="">
             <a:extLst xmlns:a="http://schemas.openxmlformats.org/drawingml/2006/main">
               <a:ext uri="{FF2B5EF4-FFF2-40B4-BE49-F238E27FC236}">
-                <a16:creationId xmlns:a16="http://schemas.microsoft.com/office/drawing/2014/main" id="{6F6998AE-C4D4-43FD-838A-E434A0656DDC}"/>
+                <a16:creationId xmlns:a16="http://schemas.microsoft.com/office/drawing/2014/main" id="{9F013F9A-A82C-42FC-9EFB-8722F8C4A953}"/>
               </a:ext>
             </a:extLst>
           </p:cNvPr>
@@ -5428,7 +5417,7 @@
                 <a:latin typeface="Microsoft YaHei"/>
                 <a:ea typeface="Microsoft YaHei"/>
                 <a:cs typeface="Microsoft YaHei"/>
-                <a:hlinkClick xmlns:r="http://schemas.openxmlformats.org/officeDocument/2006/relationships" r:id="R821fc3e5965840fd"/>
+                <a:hlinkClick xmlns:r="http://schemas.openxmlformats.org/officeDocument/2006/relationships" r:id="Ra091f5c3a5e045bf"/>
               </a:rPr>
               <a:t>Trae Figma to Code</a:t>
             </a:r>
@@ -5440,7 +5429,7 @@
                 <a:latin typeface="Microsoft YaHei"/>
                 <a:ea typeface="Microsoft YaHei"/>
                 <a:cs typeface="Microsoft YaHei"/>
-                <a:hlinkClick xmlns:r="http://schemas.openxmlformats.org/officeDocument/2006/relationships" r:id="R0dbafc8a8ec54547"/>
+                <a:hlinkClick xmlns:r="http://schemas.openxmlformats.org/officeDocument/2006/relationships" r:id="Rf74cb294912f47ae"/>
               </a:rPr>
               <a:t> · Figma Dev Mode</a:t>
             </a:r>
@@ -5452,7 +5441,7 @@
           <p:cNvPr id="46" name="">
             <a:extLst xmlns:a="http://schemas.openxmlformats.org/drawingml/2006/main">
               <a:ext uri="{FF2B5EF4-FFF2-40B4-BE49-F238E27FC236}">
-                <a16:creationId xmlns:a16="http://schemas.microsoft.com/office/drawing/2014/main" id="{B5E25168-533C-4BB1-ACB0-E405D5914C02}"/>
+                <a16:creationId xmlns:a16="http://schemas.microsoft.com/office/drawing/2014/main" id="{9AE05C26-11F7-49D0-B7BF-903CAC4B21D7}"/>
               </a:ext>
             </a:extLst>
           </p:cNvPr>
@@ -5508,7 +5497,7 @@
     </p:spTree>
     <p:extLst>
       <p:ext uri="{BB962C8B-B14F-4D97-AF65-F5344CB8AC3E}">
-        <p14:creationId xmlns:p14="http://schemas.microsoft.com/office/powerpoint/2010/main" val="1774105684"/>
+        <p14:creationId xmlns:p14="http://schemas.microsoft.com/office/powerpoint/2010/main" val="2076714417"/>
       </p:ext>
     </p:extLst>
   </p:cSld>
@@ -5539,7 +5528,7 @@
           <p:cNvPr id="64" name="">
             <a:extLst xmlns:a="http://schemas.openxmlformats.org/drawingml/2006/main">
               <a:ext uri="{FF2B5EF4-FFF2-40B4-BE49-F238E27FC236}">
-                <a16:creationId xmlns:a16="http://schemas.microsoft.com/office/drawing/2014/main" id="{F7049A7E-576C-4A33-A630-F8C1D735221C}"/>
+                <a16:creationId xmlns:a16="http://schemas.microsoft.com/office/drawing/2014/main" id="{3F390605-C185-4207-B3A8-4BE8C37AB254}"/>
               </a:ext>
             </a:extLst>
           </p:cNvPr>
@@ -5572,7 +5561,7 @@
           <p:cNvPr id="2" name="">
             <a:extLst xmlns:a="http://schemas.openxmlformats.org/drawingml/2006/main">
               <a:ext uri="{FF2B5EF4-FFF2-40B4-BE49-F238E27FC236}">
-                <a16:creationId xmlns:a16="http://schemas.microsoft.com/office/drawing/2014/main" id="{ED197F03-1BF9-4940-96BF-96E8BF96B461}"/>
+                <a16:creationId xmlns:a16="http://schemas.microsoft.com/office/drawing/2014/main" id="{D339E117-A1FE-410A-A594-8C555296056C}"/>
               </a:ext>
             </a:extLst>
           </p:cNvPr>
@@ -5630,7 +5619,7 @@
           <p:cNvPr id="3" name="">
             <a:extLst xmlns:a="http://schemas.openxmlformats.org/drawingml/2006/main">
               <a:ext uri="{FF2B5EF4-FFF2-40B4-BE49-F238E27FC236}">
-                <a16:creationId xmlns:a16="http://schemas.microsoft.com/office/drawing/2014/main" id="{D061CD86-FA4B-4C8A-88B2-49308B0EB180}"/>
+                <a16:creationId xmlns:a16="http://schemas.microsoft.com/office/drawing/2014/main" id="{5EEF05A4-9A6C-4696-9C4C-1C03F45330FB}"/>
               </a:ext>
             </a:extLst>
           </p:cNvPr>
@@ -5688,7 +5677,7 @@
           <p:cNvPr id="4" name="">
             <a:extLst xmlns:a="http://schemas.openxmlformats.org/drawingml/2006/main">
               <a:ext uri="{FF2B5EF4-FFF2-40B4-BE49-F238E27FC236}">
-                <a16:creationId xmlns:a16="http://schemas.microsoft.com/office/drawing/2014/main" id="{2077C46B-69C4-47FB-B616-E383AD46F4A1}"/>
+                <a16:creationId xmlns:a16="http://schemas.microsoft.com/office/drawing/2014/main" id="{344A8C29-7D1E-45AC-9EA7-ECAFF4010ACF}"/>
               </a:ext>
             </a:extLst>
           </p:cNvPr>
@@ -5721,7 +5710,7 @@
           <p:cNvPr id="5" name="">
             <a:extLst xmlns:a="http://schemas.openxmlformats.org/drawingml/2006/main">
               <a:ext uri="{FF2B5EF4-FFF2-40B4-BE49-F238E27FC236}">
-                <a16:creationId xmlns:a16="http://schemas.microsoft.com/office/drawing/2014/main" id="{6FA5A6A4-9F57-4194-A046-9F2AC2D2ED98}"/>
+                <a16:creationId xmlns:a16="http://schemas.microsoft.com/office/drawing/2014/main" id="{F688EBAC-1D46-462B-A482-8AD6881F9499}"/>
               </a:ext>
             </a:extLst>
           </p:cNvPr>
@@ -5779,7 +5768,7 @@
           <p:cNvPr id="6" name="">
             <a:extLst xmlns:a="http://schemas.openxmlformats.org/drawingml/2006/main">
               <a:ext uri="{FF2B5EF4-FFF2-40B4-BE49-F238E27FC236}">
-                <a16:creationId xmlns:a16="http://schemas.microsoft.com/office/drawing/2014/main" id="{8B0C2A1A-B291-4B86-BBAE-FE5EC29C91D9}"/>
+                <a16:creationId xmlns:a16="http://schemas.microsoft.com/office/drawing/2014/main" id="{8CC8B4E1-1016-4A14-B156-F6215866A5FA}"/>
               </a:ext>
             </a:extLst>
           </p:cNvPr>
@@ -5837,7 +5826,7 @@
           <p:cNvPr id="7" name="">
             <a:extLst xmlns:a="http://schemas.openxmlformats.org/drawingml/2006/main">
               <a:ext uri="{FF2B5EF4-FFF2-40B4-BE49-F238E27FC236}">
-                <a16:creationId xmlns:a16="http://schemas.microsoft.com/office/drawing/2014/main" id="{9ED96BE2-02E5-4291-8828-01B8BDEBBFEE}"/>
+                <a16:creationId xmlns:a16="http://schemas.microsoft.com/office/drawing/2014/main" id="{3956CB29-1A8E-436A-8339-0A716B2EE952}"/>
               </a:ext>
             </a:extLst>
           </p:cNvPr>
@@ -5895,7 +5884,7 @@
           <p:cNvPr id="8" name="">
             <a:extLst xmlns:a="http://schemas.openxmlformats.org/drawingml/2006/main">
               <a:ext uri="{FF2B5EF4-FFF2-40B4-BE49-F238E27FC236}">
-                <a16:creationId xmlns:a16="http://schemas.microsoft.com/office/drawing/2014/main" id="{797A9289-47E8-4702-AA84-07BC1A41042A}"/>
+                <a16:creationId xmlns:a16="http://schemas.microsoft.com/office/drawing/2014/main" id="{B3C0F131-AC57-4706-AB69-072922C3BC52}"/>
               </a:ext>
             </a:extLst>
           </p:cNvPr>
@@ -5928,7 +5917,7 @@
           <p:cNvPr id="9" name="">
             <a:extLst xmlns:a="http://schemas.openxmlformats.org/drawingml/2006/main">
               <a:ext uri="{FF2B5EF4-FFF2-40B4-BE49-F238E27FC236}">
-                <a16:creationId xmlns:a16="http://schemas.microsoft.com/office/drawing/2014/main" id="{715BD55A-BFFB-4BFA-A07A-225E245BAC30}"/>
+                <a16:creationId xmlns:a16="http://schemas.microsoft.com/office/drawing/2014/main" id="{490848BF-9BEC-408D-9474-F51FE5237659}"/>
               </a:ext>
             </a:extLst>
           </p:cNvPr>
@@ -5961,7 +5950,7 @@
           <p:cNvPr id="10" name="">
             <a:extLst xmlns:a="http://schemas.openxmlformats.org/drawingml/2006/main">
               <a:ext uri="{FF2B5EF4-FFF2-40B4-BE49-F238E27FC236}">
-                <a16:creationId xmlns:a16="http://schemas.microsoft.com/office/drawing/2014/main" id="{57EB7ECA-85C5-465A-B161-5C693B5545D1}"/>
+                <a16:creationId xmlns:a16="http://schemas.microsoft.com/office/drawing/2014/main" id="{A20ED5B7-AE48-436E-9E4D-D4C424B51D8B}"/>
               </a:ext>
             </a:extLst>
           </p:cNvPr>
@@ -5994,7 +5983,7 @@
           <p:cNvPr id="11" name="">
             <a:extLst xmlns:a="http://schemas.openxmlformats.org/drawingml/2006/main">
               <a:ext uri="{FF2B5EF4-FFF2-40B4-BE49-F238E27FC236}">
-                <a16:creationId xmlns:a16="http://schemas.microsoft.com/office/drawing/2014/main" id="{9D81CB73-4C35-4D46-92B6-70746258C5C1}"/>
+                <a16:creationId xmlns:a16="http://schemas.microsoft.com/office/drawing/2014/main" id="{E0BC550D-5467-4BFC-B670-D1C7490E064E}"/>
               </a:ext>
             </a:extLst>
           </p:cNvPr>
@@ -6052,7 +6041,7 @@
           <p:cNvPr id="12" name="">
             <a:extLst xmlns:a="http://schemas.openxmlformats.org/drawingml/2006/main">
               <a:ext uri="{FF2B5EF4-FFF2-40B4-BE49-F238E27FC236}">
-                <a16:creationId xmlns:a16="http://schemas.microsoft.com/office/drawing/2014/main" id="{C1672C4B-5B82-487C-BDB5-357B100A0F69}"/>
+                <a16:creationId xmlns:a16="http://schemas.microsoft.com/office/drawing/2014/main" id="{195F5B8E-1DA1-488D-B2A7-E08B3E579AF3}"/>
               </a:ext>
             </a:extLst>
           </p:cNvPr>
@@ -6110,7 +6099,7 @@
           <p:cNvPr id="13" name="">
             <a:extLst xmlns:a="http://schemas.openxmlformats.org/drawingml/2006/main">
               <a:ext uri="{FF2B5EF4-FFF2-40B4-BE49-F238E27FC236}">
-                <a16:creationId xmlns:a16="http://schemas.microsoft.com/office/drawing/2014/main" id="{193CE54C-00A8-4AC1-A67A-1EF9ACA542B0}"/>
+                <a16:creationId xmlns:a16="http://schemas.microsoft.com/office/drawing/2014/main" id="{20117C97-08CF-4EE8-9F31-B2BAC2540181}"/>
               </a:ext>
             </a:extLst>
           </p:cNvPr>
@@ -6168,7 +6157,7 @@
           <p:cNvPr id="14" name="">
             <a:extLst xmlns:a="http://schemas.openxmlformats.org/drawingml/2006/main">
               <a:ext uri="{FF2B5EF4-FFF2-40B4-BE49-F238E27FC236}">
-                <a16:creationId xmlns:a16="http://schemas.microsoft.com/office/drawing/2014/main" id="{966B4393-BE85-4552-A607-EBBF36C41085}"/>
+                <a16:creationId xmlns:a16="http://schemas.microsoft.com/office/drawing/2014/main" id="{F85874FD-757F-425C-B4A9-D3E432A03387}"/>
               </a:ext>
             </a:extLst>
           </p:cNvPr>
@@ -6201,7 +6190,7 @@
           <p:cNvPr id="15" name="">
             <a:extLst xmlns:a="http://schemas.openxmlformats.org/drawingml/2006/main">
               <a:ext uri="{FF2B5EF4-FFF2-40B4-BE49-F238E27FC236}">
-                <a16:creationId xmlns:a16="http://schemas.microsoft.com/office/drawing/2014/main" id="{D2D55FEC-CF7A-45B5-8A40-63829EE98176}"/>
+                <a16:creationId xmlns:a16="http://schemas.microsoft.com/office/drawing/2014/main" id="{5C692C77-AA23-445E-A049-C2EE355A5151}"/>
               </a:ext>
             </a:extLst>
           </p:cNvPr>
@@ -6234,7 +6223,7 @@
           <p:cNvPr id="16" name="">
             <a:extLst xmlns:a="http://schemas.openxmlformats.org/drawingml/2006/main">
               <a:ext uri="{FF2B5EF4-FFF2-40B4-BE49-F238E27FC236}">
-                <a16:creationId xmlns:a16="http://schemas.microsoft.com/office/drawing/2014/main" id="{A7879243-9784-47AA-87D9-15F457BD3937}"/>
+                <a16:creationId xmlns:a16="http://schemas.microsoft.com/office/drawing/2014/main" id="{B424D416-3C8F-4B04-845C-4D74BDF5F3B1}"/>
               </a:ext>
             </a:extLst>
           </p:cNvPr>
@@ -6267,7 +6256,7 @@
           <p:cNvPr id="17" name="">
             <a:extLst xmlns:a="http://schemas.openxmlformats.org/drawingml/2006/main">
               <a:ext uri="{FF2B5EF4-FFF2-40B4-BE49-F238E27FC236}">
-                <a16:creationId xmlns:a16="http://schemas.microsoft.com/office/drawing/2014/main" id="{B48F0407-5AD4-44FD-A853-BFD430A9FAF0}"/>
+                <a16:creationId xmlns:a16="http://schemas.microsoft.com/office/drawing/2014/main" id="{FF9BF274-7FE6-4848-9BA9-98D6C362DDB8}"/>
               </a:ext>
             </a:extLst>
           </p:cNvPr>
@@ -6325,7 +6314,7 @@
           <p:cNvPr id="18" name="">
             <a:extLst xmlns:a="http://schemas.openxmlformats.org/drawingml/2006/main">
               <a:ext uri="{FF2B5EF4-FFF2-40B4-BE49-F238E27FC236}">
-                <a16:creationId xmlns:a16="http://schemas.microsoft.com/office/drawing/2014/main" id="{3D855814-69B8-443E-8F96-3D23F3AB1468}"/>
+                <a16:creationId xmlns:a16="http://schemas.microsoft.com/office/drawing/2014/main" id="{5354A0AD-6B3E-4537-ABB5-FD9C919A274B}"/>
               </a:ext>
             </a:extLst>
           </p:cNvPr>
@@ -6383,7 +6372,7 @@
           <p:cNvPr id="19" name="">
             <a:extLst xmlns:a="http://schemas.openxmlformats.org/drawingml/2006/main">
               <a:ext uri="{FF2B5EF4-FFF2-40B4-BE49-F238E27FC236}">
-                <a16:creationId xmlns:a16="http://schemas.microsoft.com/office/drawing/2014/main" id="{CAD72411-C516-4D1B-ACB8-B996100BBF7A}"/>
+                <a16:creationId xmlns:a16="http://schemas.microsoft.com/office/drawing/2014/main" id="{E477D6E3-4C79-4688-8D01-7514F7005C93}"/>
               </a:ext>
             </a:extLst>
           </p:cNvPr>
@@ -6441,7 +6430,7 @@
           <p:cNvPr id="20" name="">
             <a:extLst xmlns:a="http://schemas.openxmlformats.org/drawingml/2006/main">
               <a:ext uri="{FF2B5EF4-FFF2-40B4-BE49-F238E27FC236}">
-                <a16:creationId xmlns:a16="http://schemas.microsoft.com/office/drawing/2014/main" id="{78C94B11-91F7-4979-936A-29D86338FEB4}"/>
+                <a16:creationId xmlns:a16="http://schemas.microsoft.com/office/drawing/2014/main" id="{75A48060-BF77-4F85-834A-78D7EBFDF4BC}"/>
               </a:ext>
             </a:extLst>
           </p:cNvPr>
@@ -6474,7 +6463,7 @@
           <p:cNvPr id="21" name="">
             <a:extLst xmlns:a="http://schemas.openxmlformats.org/drawingml/2006/main">
               <a:ext uri="{FF2B5EF4-FFF2-40B4-BE49-F238E27FC236}">
-                <a16:creationId xmlns:a16="http://schemas.microsoft.com/office/drawing/2014/main" id="{1D46D837-C016-486E-8E0E-0971B6FBC24F}"/>
+                <a16:creationId xmlns:a16="http://schemas.microsoft.com/office/drawing/2014/main" id="{509D77E5-E097-4426-9E1E-1233B8756C99}"/>
               </a:ext>
             </a:extLst>
           </p:cNvPr>
@@ -6507,7 +6496,7 @@
           <p:cNvPr id="22" name="">
             <a:extLst xmlns:a="http://schemas.openxmlformats.org/drawingml/2006/main">
               <a:ext uri="{FF2B5EF4-FFF2-40B4-BE49-F238E27FC236}">
-                <a16:creationId xmlns:a16="http://schemas.microsoft.com/office/drawing/2014/main" id="{CC1B94AD-8965-4534-AF81-E69A723DA1F8}"/>
+                <a16:creationId xmlns:a16="http://schemas.microsoft.com/office/drawing/2014/main" id="{4B61E055-04B1-4139-9966-646A22342B2F}"/>
               </a:ext>
             </a:extLst>
           </p:cNvPr>
@@ -6540,7 +6529,7 @@
           <p:cNvPr id="23" name="">
             <a:extLst xmlns:a="http://schemas.openxmlformats.org/drawingml/2006/main">
               <a:ext uri="{FF2B5EF4-FFF2-40B4-BE49-F238E27FC236}">
-                <a16:creationId xmlns:a16="http://schemas.microsoft.com/office/drawing/2014/main" id="{0600F9B4-BF9D-4EC8-8279-FCE3CFF4E3D5}"/>
+                <a16:creationId xmlns:a16="http://schemas.microsoft.com/office/drawing/2014/main" id="{1DD71D39-BA1D-4C16-83EA-A60B67FB5D5E}"/>
               </a:ext>
             </a:extLst>
           </p:cNvPr>
@@ -6598,7 +6587,7 @@
           <p:cNvPr id="24" name="">
             <a:extLst xmlns:a="http://schemas.openxmlformats.org/drawingml/2006/main">
               <a:ext uri="{FF2B5EF4-FFF2-40B4-BE49-F238E27FC236}">
-                <a16:creationId xmlns:a16="http://schemas.microsoft.com/office/drawing/2014/main" id="{7B96C3D8-3C0E-4531-9F9B-46C861E4D795}"/>
+                <a16:creationId xmlns:a16="http://schemas.microsoft.com/office/drawing/2014/main" id="{2055F0A3-EB0A-4455-9990-129A6FBF669B}"/>
               </a:ext>
             </a:extLst>
           </p:cNvPr>
@@ -6656,7 +6645,7 @@
           <p:cNvPr id="25" name="">
             <a:extLst xmlns:a="http://schemas.openxmlformats.org/drawingml/2006/main">
               <a:ext uri="{FF2B5EF4-FFF2-40B4-BE49-F238E27FC236}">
-                <a16:creationId xmlns:a16="http://schemas.microsoft.com/office/drawing/2014/main" id="{2A572609-AAF1-4A95-ADF9-51D432C4C7D6}"/>
+                <a16:creationId xmlns:a16="http://schemas.microsoft.com/office/drawing/2014/main" id="{05EB2224-6971-4190-A1AA-254ABC915A35}"/>
               </a:ext>
             </a:extLst>
           </p:cNvPr>
@@ -6714,7 +6703,7 @@
           <p:cNvPr id="26" name="">
             <a:extLst xmlns:a="http://schemas.openxmlformats.org/drawingml/2006/main">
               <a:ext uri="{FF2B5EF4-FFF2-40B4-BE49-F238E27FC236}">
-                <a16:creationId xmlns:a16="http://schemas.microsoft.com/office/drawing/2014/main" id="{13AE9B90-5DAF-435E-B6F0-17DB6F6A19BF}"/>
+                <a16:creationId xmlns:a16="http://schemas.microsoft.com/office/drawing/2014/main" id="{A8D9DA6D-4578-44D3-A6DD-B2C909633A54}"/>
               </a:ext>
             </a:extLst>
           </p:cNvPr>
@@ -6747,7 +6736,7 @@
           <p:cNvPr id="27" name="">
             <a:extLst xmlns:a="http://schemas.openxmlformats.org/drawingml/2006/main">
               <a:ext uri="{FF2B5EF4-FFF2-40B4-BE49-F238E27FC236}">
-                <a16:creationId xmlns:a16="http://schemas.microsoft.com/office/drawing/2014/main" id="{1C2C0300-219B-4062-947C-6623D334FC49}"/>
+                <a16:creationId xmlns:a16="http://schemas.microsoft.com/office/drawing/2014/main" id="{FEE63273-90E9-404C-A80A-FC90459AF675}"/>
               </a:ext>
             </a:extLst>
           </p:cNvPr>
@@ -6780,7 +6769,7 @@
           <p:cNvPr id="28" name="">
             <a:extLst xmlns:a="http://schemas.openxmlformats.org/drawingml/2006/main">
               <a:ext uri="{FF2B5EF4-FFF2-40B4-BE49-F238E27FC236}">
-                <a16:creationId xmlns:a16="http://schemas.microsoft.com/office/drawing/2014/main" id="{6F930203-3BE5-4206-8AE4-4F0B217939AF}"/>
+                <a16:creationId xmlns:a16="http://schemas.microsoft.com/office/drawing/2014/main" id="{D1880A11-31B8-4DA5-8649-C5FEE488917F}"/>
               </a:ext>
             </a:extLst>
           </p:cNvPr>
@@ -6813,7 +6802,7 @@
           <p:cNvPr id="29" name="">
             <a:extLst xmlns:a="http://schemas.openxmlformats.org/drawingml/2006/main">
               <a:ext uri="{FF2B5EF4-FFF2-40B4-BE49-F238E27FC236}">
-                <a16:creationId xmlns:a16="http://schemas.microsoft.com/office/drawing/2014/main" id="{281AF270-602E-46E5-A89B-69A788A535FF}"/>
+                <a16:creationId xmlns:a16="http://schemas.microsoft.com/office/drawing/2014/main" id="{77F6D57B-FAFE-468D-AAD9-22058FDCE5F9}"/>
               </a:ext>
             </a:extLst>
           </p:cNvPr>
@@ -6871,7 +6860,7 @@
           <p:cNvPr id="30" name="">
             <a:extLst xmlns:a="http://schemas.openxmlformats.org/drawingml/2006/main">
               <a:ext uri="{FF2B5EF4-FFF2-40B4-BE49-F238E27FC236}">
-                <a16:creationId xmlns:a16="http://schemas.microsoft.com/office/drawing/2014/main" id="{7AE446EA-5CCD-4EDE-9AF9-37A5592C9914}"/>
+                <a16:creationId xmlns:a16="http://schemas.microsoft.com/office/drawing/2014/main" id="{F65ACECC-D0A9-43A3-82FE-6709553F6B32}"/>
               </a:ext>
             </a:extLst>
           </p:cNvPr>
@@ -6929,7 +6918,7 @@
           <p:cNvPr id="31" name="">
             <a:extLst xmlns:a="http://schemas.openxmlformats.org/drawingml/2006/main">
               <a:ext uri="{FF2B5EF4-FFF2-40B4-BE49-F238E27FC236}">
-                <a16:creationId xmlns:a16="http://schemas.microsoft.com/office/drawing/2014/main" id="{7A3264F9-BDEB-4520-938F-96E59CB81B08}"/>
+                <a16:creationId xmlns:a16="http://schemas.microsoft.com/office/drawing/2014/main" id="{04B38B19-C400-445F-8859-5405BCD848A5}"/>
               </a:ext>
             </a:extLst>
           </p:cNvPr>
@@ -6987,7 +6976,7 @@
           <p:cNvPr id="32" name="">
             <a:extLst xmlns:a="http://schemas.openxmlformats.org/drawingml/2006/main">
               <a:ext uri="{FF2B5EF4-FFF2-40B4-BE49-F238E27FC236}">
-                <a16:creationId xmlns:a16="http://schemas.microsoft.com/office/drawing/2014/main" id="{C1945E54-F5B1-4516-9AC3-B5882A1FBFF2}"/>
+                <a16:creationId xmlns:a16="http://schemas.microsoft.com/office/drawing/2014/main" id="{0357C216-B65D-4CDC-A645-C49C7804193E}"/>
               </a:ext>
             </a:extLst>
           </p:cNvPr>
@@ -7020,7 +7009,7 @@
           <p:cNvPr id="33" name="">
             <a:extLst xmlns:a="http://schemas.openxmlformats.org/drawingml/2006/main">
               <a:ext uri="{FF2B5EF4-FFF2-40B4-BE49-F238E27FC236}">
-                <a16:creationId xmlns:a16="http://schemas.microsoft.com/office/drawing/2014/main" id="{39BA25C8-72F8-44F6-AFB8-C8351F92ECB4}"/>
+                <a16:creationId xmlns:a16="http://schemas.microsoft.com/office/drawing/2014/main" id="{5EC2D133-F88E-4A0E-9504-CC709B5406B4}"/>
               </a:ext>
             </a:extLst>
           </p:cNvPr>
@@ -7053,7 +7042,7 @@
           <p:cNvPr id="34" name="">
             <a:extLst xmlns:a="http://schemas.openxmlformats.org/drawingml/2006/main">
               <a:ext uri="{FF2B5EF4-FFF2-40B4-BE49-F238E27FC236}">
-                <a16:creationId xmlns:a16="http://schemas.microsoft.com/office/drawing/2014/main" id="{C38B9680-A7A0-4B90-86BC-0169622732AF}"/>
+                <a16:creationId xmlns:a16="http://schemas.microsoft.com/office/drawing/2014/main" id="{33BF4A57-684A-4A58-B5F5-3CEF16FA27D8}"/>
               </a:ext>
             </a:extLst>
           </p:cNvPr>
@@ -7086,7 +7075,7 @@
           <p:cNvPr id="35" name="">
             <a:extLst xmlns:a="http://schemas.openxmlformats.org/drawingml/2006/main">
               <a:ext uri="{FF2B5EF4-FFF2-40B4-BE49-F238E27FC236}">
-                <a16:creationId xmlns:a16="http://schemas.microsoft.com/office/drawing/2014/main" id="{CB844E99-F388-40B0-8320-923E9C709075}"/>
+                <a16:creationId xmlns:a16="http://schemas.microsoft.com/office/drawing/2014/main" id="{F2E7513B-E416-4C33-8BA1-4CCDDF8873BE}"/>
               </a:ext>
             </a:extLst>
           </p:cNvPr>
@@ -7144,7 +7133,7 @@
           <p:cNvPr id="36" name="">
             <a:extLst xmlns:a="http://schemas.openxmlformats.org/drawingml/2006/main">
               <a:ext uri="{FF2B5EF4-FFF2-40B4-BE49-F238E27FC236}">
-                <a16:creationId xmlns:a16="http://schemas.microsoft.com/office/drawing/2014/main" id="{AA051EDD-5E3E-4303-A4C1-05A4F2570F9A}"/>
+                <a16:creationId xmlns:a16="http://schemas.microsoft.com/office/drawing/2014/main" id="{705A6E4D-4D0F-4D3C-A1F8-10F365929A16}"/>
               </a:ext>
             </a:extLst>
           </p:cNvPr>
@@ -7202,7 +7191,7 @@
           <p:cNvPr id="37" name="">
             <a:extLst xmlns:a="http://schemas.openxmlformats.org/drawingml/2006/main">
               <a:ext uri="{FF2B5EF4-FFF2-40B4-BE49-F238E27FC236}">
-                <a16:creationId xmlns:a16="http://schemas.microsoft.com/office/drawing/2014/main" id="{0B7C16E0-6FE5-4E37-974E-3988FCFFABD4}"/>
+                <a16:creationId xmlns:a16="http://schemas.microsoft.com/office/drawing/2014/main" id="{A19C5B7E-AD1C-44E9-86C1-FBAE6485D3BA}"/>
               </a:ext>
             </a:extLst>
           </p:cNvPr>
@@ -7260,7 +7249,7 @@
           <p:cNvPr id="38" name="">
             <a:extLst xmlns:a="http://schemas.openxmlformats.org/drawingml/2006/main">
               <a:ext uri="{FF2B5EF4-FFF2-40B4-BE49-F238E27FC236}">
-                <a16:creationId xmlns:a16="http://schemas.microsoft.com/office/drawing/2014/main" id="{162CBCBD-C8C6-46FA-AC2C-AF45FB8B9036}"/>
+                <a16:creationId xmlns:a16="http://schemas.microsoft.com/office/drawing/2014/main" id="{F3B0B2DA-8BFE-4060-A308-0816AE896BC2}"/>
               </a:ext>
             </a:extLst>
           </p:cNvPr>
@@ -7318,7 +7307,7 @@
           <p:cNvPr id="39" name="">
             <a:extLst xmlns:a="http://schemas.openxmlformats.org/drawingml/2006/main">
               <a:ext uri="{FF2B5EF4-FFF2-40B4-BE49-F238E27FC236}">
-                <a16:creationId xmlns:a16="http://schemas.microsoft.com/office/drawing/2014/main" id="{C3C26832-4E22-4D72-9C9E-C07470EEDB40}"/>
+                <a16:creationId xmlns:a16="http://schemas.microsoft.com/office/drawing/2014/main" id="{9FE0FB0B-7A1C-4609-9273-A98CDBF45079}"/>
               </a:ext>
             </a:extLst>
           </p:cNvPr>
@@ -7351,7 +7340,7 @@
           <p:cNvPr id="40" name="">
             <a:extLst xmlns:a="http://schemas.openxmlformats.org/drawingml/2006/main">
               <a:ext uri="{FF2B5EF4-FFF2-40B4-BE49-F238E27FC236}">
-                <a16:creationId xmlns:a16="http://schemas.microsoft.com/office/drawing/2014/main" id="{3A217C84-350D-45F4-BDB9-600B7BE32AED}"/>
+                <a16:creationId xmlns:a16="http://schemas.microsoft.com/office/drawing/2014/main" id="{633123E3-F218-49BD-B444-2D66B5E308B4}"/>
               </a:ext>
             </a:extLst>
           </p:cNvPr>
@@ -7409,7 +7398,7 @@
           <p:cNvPr id="41" name="">
             <a:extLst xmlns:a="http://schemas.openxmlformats.org/drawingml/2006/main">
               <a:ext uri="{FF2B5EF4-FFF2-40B4-BE49-F238E27FC236}">
-                <a16:creationId xmlns:a16="http://schemas.microsoft.com/office/drawing/2014/main" id="{18ABB1FE-E56D-4D89-9A0A-4C1EF9CD5CD7}"/>
+                <a16:creationId xmlns:a16="http://schemas.microsoft.com/office/drawing/2014/main" id="{F86CB7B2-2BCC-44DC-ADA5-4DB7E2603B32}"/>
               </a:ext>
             </a:extLst>
           </p:cNvPr>
@@ -7467,7 +7456,7 @@
           <p:cNvPr id="42" name="">
             <a:extLst xmlns:a="http://schemas.openxmlformats.org/drawingml/2006/main">
               <a:ext uri="{FF2B5EF4-FFF2-40B4-BE49-F238E27FC236}">
-                <a16:creationId xmlns:a16="http://schemas.microsoft.com/office/drawing/2014/main" id="{95580F0D-7571-4287-9828-703F89B8FF33}"/>
+                <a16:creationId xmlns:a16="http://schemas.microsoft.com/office/drawing/2014/main" id="{567B1D3F-7E7A-4328-B380-9F2EB8562176}"/>
               </a:ext>
             </a:extLst>
           </p:cNvPr>
@@ -7500,7 +7489,7 @@
           <p:cNvPr id="43" name="">
             <a:extLst xmlns:a="http://schemas.openxmlformats.org/drawingml/2006/main">
               <a:ext uri="{FF2B5EF4-FFF2-40B4-BE49-F238E27FC236}">
-                <a16:creationId xmlns:a16="http://schemas.microsoft.com/office/drawing/2014/main" id="{1BEA3D6B-25CE-4AAE-8ED8-2DE4780F4FA0}"/>
+                <a16:creationId xmlns:a16="http://schemas.microsoft.com/office/drawing/2014/main" id="{2922ECB3-4F8E-4A40-A9A6-9B12828B89EF}"/>
               </a:ext>
             </a:extLst>
           </p:cNvPr>
@@ -7558,7 +7547,7 @@
           <p:cNvPr id="44" name="">
             <a:extLst xmlns:a="http://schemas.openxmlformats.org/drawingml/2006/main">
               <a:ext uri="{FF2B5EF4-FFF2-40B4-BE49-F238E27FC236}">
-                <a16:creationId xmlns:a16="http://schemas.microsoft.com/office/drawing/2014/main" id="{8DF8C853-F6AE-4D9A-A539-C1C828052693}"/>
+                <a16:creationId xmlns:a16="http://schemas.microsoft.com/office/drawing/2014/main" id="{0DAD7ECC-538E-49D3-BA5F-ED1642800C24}"/>
               </a:ext>
             </a:extLst>
           </p:cNvPr>
@@ -7616,7 +7605,7 @@
           <p:cNvPr id="45" name="">
             <a:extLst xmlns:a="http://schemas.openxmlformats.org/drawingml/2006/main">
               <a:ext uri="{FF2B5EF4-FFF2-40B4-BE49-F238E27FC236}">
-                <a16:creationId xmlns:a16="http://schemas.microsoft.com/office/drawing/2014/main" id="{52D40B0A-621D-463C-BAD7-8BAEA036E117}"/>
+                <a16:creationId xmlns:a16="http://schemas.microsoft.com/office/drawing/2014/main" id="{4BD8D089-555B-405B-93DE-C006D3C80FA1}"/>
               </a:ext>
             </a:extLst>
           </p:cNvPr>
@@ -7649,7 +7638,7 @@
           <p:cNvPr id="46" name="">
             <a:extLst xmlns:a="http://schemas.openxmlformats.org/drawingml/2006/main">
               <a:ext uri="{FF2B5EF4-FFF2-40B4-BE49-F238E27FC236}">
-                <a16:creationId xmlns:a16="http://schemas.microsoft.com/office/drawing/2014/main" id="{0E8401E0-0AD1-43E4-9419-0A54FEA237E3}"/>
+                <a16:creationId xmlns:a16="http://schemas.microsoft.com/office/drawing/2014/main" id="{33DFEB4D-D14C-4EE4-88D5-A30C7AB3F018}"/>
               </a:ext>
             </a:extLst>
           </p:cNvPr>
@@ -7707,7 +7696,7 @@
           <p:cNvPr id="47" name="">
             <a:extLst xmlns:a="http://schemas.openxmlformats.org/drawingml/2006/main">
               <a:ext uri="{FF2B5EF4-FFF2-40B4-BE49-F238E27FC236}">
-                <a16:creationId xmlns:a16="http://schemas.microsoft.com/office/drawing/2014/main" id="{86B27947-5B5E-4B80-8EE5-12EDFBB1C893}"/>
+                <a16:creationId xmlns:a16="http://schemas.microsoft.com/office/drawing/2014/main" id="{B8E65EB0-6C1E-4BE9-AFD0-EF2E2599CEFE}"/>
               </a:ext>
             </a:extLst>
           </p:cNvPr>
@@ -7765,7 +7754,7 @@
           <p:cNvPr id="48" name="">
             <a:extLst xmlns:a="http://schemas.openxmlformats.org/drawingml/2006/main">
               <a:ext uri="{FF2B5EF4-FFF2-40B4-BE49-F238E27FC236}">
-                <a16:creationId xmlns:a16="http://schemas.microsoft.com/office/drawing/2014/main" id="{8AB56A02-A7D5-47BD-9D50-467097802981}"/>
+                <a16:creationId xmlns:a16="http://schemas.microsoft.com/office/drawing/2014/main" id="{CC6EC40E-67CF-4CB6-B388-63C99A90787B}"/>
               </a:ext>
             </a:extLst>
           </p:cNvPr>
@@ -7798,7 +7787,7 @@
           <p:cNvPr id="49" name="">
             <a:extLst xmlns:a="http://schemas.openxmlformats.org/drawingml/2006/main">
               <a:ext uri="{FF2B5EF4-FFF2-40B4-BE49-F238E27FC236}">
-                <a16:creationId xmlns:a16="http://schemas.microsoft.com/office/drawing/2014/main" id="{513906B5-4AF4-4716-9477-022FF0C1DA60}"/>
+                <a16:creationId xmlns:a16="http://schemas.microsoft.com/office/drawing/2014/main" id="{0332C394-8BF9-495F-BDAB-542C70E9A84D}"/>
               </a:ext>
             </a:extLst>
           </p:cNvPr>
@@ -7856,7 +7845,7 @@
           <p:cNvPr id="50" name="">
             <a:extLst xmlns:a="http://schemas.openxmlformats.org/drawingml/2006/main">
               <a:ext uri="{FF2B5EF4-FFF2-40B4-BE49-F238E27FC236}">
-                <a16:creationId xmlns:a16="http://schemas.microsoft.com/office/drawing/2014/main" id="{42976573-827F-4C15-8933-8CB2A36A8176}"/>
+                <a16:creationId xmlns:a16="http://schemas.microsoft.com/office/drawing/2014/main" id="{0EA63678-B74B-413D-903B-237DCA205CB1}"/>
               </a:ext>
             </a:extLst>
           </p:cNvPr>
@@ -7889,7 +7878,7 @@
           <p:cNvPr id="51" name="">
             <a:extLst xmlns:a="http://schemas.openxmlformats.org/drawingml/2006/main">
               <a:ext uri="{FF2B5EF4-FFF2-40B4-BE49-F238E27FC236}">
-                <a16:creationId xmlns:a16="http://schemas.microsoft.com/office/drawing/2014/main" id="{1D466669-C82F-413F-AF0B-47E9BE56D1AD}"/>
+                <a16:creationId xmlns:a16="http://schemas.microsoft.com/office/drawing/2014/main" id="{690742BE-2422-40F6-9F82-C1655F306C2D}"/>
               </a:ext>
             </a:extLst>
           </p:cNvPr>
@@ -7947,7 +7936,7 @@
           <p:cNvPr id="52" name="">
             <a:extLst xmlns:a="http://schemas.openxmlformats.org/drawingml/2006/main">
               <a:ext uri="{FF2B5EF4-FFF2-40B4-BE49-F238E27FC236}">
-                <a16:creationId xmlns:a16="http://schemas.microsoft.com/office/drawing/2014/main" id="{4008C849-4288-4453-9680-9AF63A620E8F}"/>
+                <a16:creationId xmlns:a16="http://schemas.microsoft.com/office/drawing/2014/main" id="{25E8E3BA-3D98-452A-A63C-6458A1D802CB}"/>
               </a:ext>
             </a:extLst>
           </p:cNvPr>
@@ -7980,7 +7969,7 @@
           <p:cNvPr id="53" name="">
             <a:extLst xmlns:a="http://schemas.openxmlformats.org/drawingml/2006/main">
               <a:ext uri="{FF2B5EF4-FFF2-40B4-BE49-F238E27FC236}">
-                <a16:creationId xmlns:a16="http://schemas.microsoft.com/office/drawing/2014/main" id="{508A57F3-E788-4700-93CF-2F7D47066E3D}"/>
+                <a16:creationId xmlns:a16="http://schemas.microsoft.com/office/drawing/2014/main" id="{E6B0CFBF-7178-42FD-A02A-D4C6EA2B29B5}"/>
               </a:ext>
             </a:extLst>
           </p:cNvPr>
@@ -8038,7 +8027,7 @@
           <p:cNvPr id="54" name="">
             <a:extLst xmlns:a="http://schemas.openxmlformats.org/drawingml/2006/main">
               <a:ext uri="{FF2B5EF4-FFF2-40B4-BE49-F238E27FC236}">
-                <a16:creationId xmlns:a16="http://schemas.microsoft.com/office/drawing/2014/main" id="{54FF8D24-A58D-4794-A52D-AFDB92B8B80A}"/>
+                <a16:creationId xmlns:a16="http://schemas.microsoft.com/office/drawing/2014/main" id="{BC504E0A-E723-4F08-9A1B-0C82CFE93C7B}"/>
               </a:ext>
             </a:extLst>
           </p:cNvPr>
@@ -8071,7 +8060,7 @@
           <p:cNvPr id="55" name="">
             <a:extLst xmlns:a="http://schemas.openxmlformats.org/drawingml/2006/main">
               <a:ext uri="{FF2B5EF4-FFF2-40B4-BE49-F238E27FC236}">
-                <a16:creationId xmlns:a16="http://schemas.microsoft.com/office/drawing/2014/main" id="{77FDCAB5-91FA-4C93-A846-886E652165F6}"/>
+                <a16:creationId xmlns:a16="http://schemas.microsoft.com/office/drawing/2014/main" id="{223FFB7D-E9DB-476B-87CE-42777499E412}"/>
               </a:ext>
             </a:extLst>
           </p:cNvPr>
@@ -8129,7 +8118,7 @@
           <p:cNvPr id="56" name="">
             <a:extLst xmlns:a="http://schemas.openxmlformats.org/drawingml/2006/main">
               <a:ext uri="{FF2B5EF4-FFF2-40B4-BE49-F238E27FC236}">
-                <a16:creationId xmlns:a16="http://schemas.microsoft.com/office/drawing/2014/main" id="{1E1E1D10-C280-4882-A266-F739E6CC8A28}"/>
+                <a16:creationId xmlns:a16="http://schemas.microsoft.com/office/drawing/2014/main" id="{CBBCB79E-2096-46DC-AF64-9C6209D3ACEF}"/>
               </a:ext>
             </a:extLst>
           </p:cNvPr>
@@ -8162,7 +8151,7 @@
           <p:cNvPr id="57" name="">
             <a:extLst xmlns:a="http://schemas.openxmlformats.org/drawingml/2006/main">
               <a:ext uri="{FF2B5EF4-FFF2-40B4-BE49-F238E27FC236}">
-                <a16:creationId xmlns:a16="http://schemas.microsoft.com/office/drawing/2014/main" id="{A2EA476F-F91A-446A-B47C-51524B96AF01}"/>
+                <a16:creationId xmlns:a16="http://schemas.microsoft.com/office/drawing/2014/main" id="{BC719714-3849-40AD-9C3B-DE034D3EA211}"/>
               </a:ext>
             </a:extLst>
           </p:cNvPr>
@@ -8220,7 +8209,7 @@
           <p:cNvPr id="58" name="">
             <a:extLst xmlns:a="http://schemas.openxmlformats.org/drawingml/2006/main">
               <a:ext uri="{FF2B5EF4-FFF2-40B4-BE49-F238E27FC236}">
-                <a16:creationId xmlns:a16="http://schemas.microsoft.com/office/drawing/2014/main" id="{D09ACB35-3255-4BD5-B767-CEA0A9B0C5FF}"/>
+                <a16:creationId xmlns:a16="http://schemas.microsoft.com/office/drawing/2014/main" id="{F4162905-B375-4DDF-80CC-EA096EC7EBDA}"/>
               </a:ext>
             </a:extLst>
           </p:cNvPr>
@@ -8253,7 +8242,7 @@
           <p:cNvPr id="59" name="">
             <a:extLst xmlns:a="http://schemas.openxmlformats.org/drawingml/2006/main">
               <a:ext uri="{FF2B5EF4-FFF2-40B4-BE49-F238E27FC236}">
-                <a16:creationId xmlns:a16="http://schemas.microsoft.com/office/drawing/2014/main" id="{47BAB05C-C29B-4033-9310-A635A9784E85}"/>
+                <a16:creationId xmlns:a16="http://schemas.microsoft.com/office/drawing/2014/main" id="{ACDBED65-FA9B-415B-A01D-BC3FD1CA0817}"/>
               </a:ext>
             </a:extLst>
           </p:cNvPr>
@@ -8311,7 +8300,7 @@
           <p:cNvPr id="60" name="">
             <a:extLst xmlns:a="http://schemas.openxmlformats.org/drawingml/2006/main">
               <a:ext uri="{FF2B5EF4-FFF2-40B4-BE49-F238E27FC236}">
-                <a16:creationId xmlns:a16="http://schemas.microsoft.com/office/drawing/2014/main" id="{9FF92F5E-A548-4E00-BAB1-F1A0A1BEDA39}"/>
+                <a16:creationId xmlns:a16="http://schemas.microsoft.com/office/drawing/2014/main" id="{D8271FAA-E6B6-46EF-A636-FF7A6BAB3541}"/>
               </a:ext>
             </a:extLst>
           </p:cNvPr>
@@ -8369,7 +8358,7 @@
           <p:cNvPr id="61" name="">
             <a:extLst xmlns:a="http://schemas.openxmlformats.org/drawingml/2006/main">
               <a:ext uri="{FF2B5EF4-FFF2-40B4-BE49-F238E27FC236}">
-                <a16:creationId xmlns:a16="http://schemas.microsoft.com/office/drawing/2014/main" id="{F7A24F2A-DC63-4CD9-B9E2-6257F4F6CA4F}"/>
+                <a16:creationId xmlns:a16="http://schemas.microsoft.com/office/drawing/2014/main" id="{F848604A-E712-461B-A2B4-98841E2BF909}"/>
               </a:ext>
             </a:extLst>
           </p:cNvPr>
@@ -8402,7 +8391,7 @@
           <p:cNvPr id="62" name="">
             <a:extLst xmlns:a="http://schemas.openxmlformats.org/drawingml/2006/main">
               <a:ext uri="{FF2B5EF4-FFF2-40B4-BE49-F238E27FC236}">
-                <a16:creationId xmlns:a16="http://schemas.microsoft.com/office/drawing/2014/main" id="{BD3A2AF2-298A-4C7F-9A81-1197BF8F32EA}"/>
+                <a16:creationId xmlns:a16="http://schemas.microsoft.com/office/drawing/2014/main" id="{12856E48-B1B8-47F5-ABD6-8364D9E5CF15}"/>
               </a:ext>
             </a:extLst>
           </p:cNvPr>
@@ -8460,7 +8449,7 @@
                 <a:latin typeface="Microsoft YaHei"/>
                 <a:ea typeface="Microsoft YaHei"/>
                 <a:cs typeface="Microsoft YaHei"/>
-                <a:hlinkClick xmlns:r="http://schemas.openxmlformats.org/officeDocument/2006/relationships" r:id="R6c8214d4f6d54abb"/>
+                <a:hlinkClick xmlns:r="http://schemas.openxmlformats.org/officeDocument/2006/relationships" r:id="Ra8fed153cde94ef8"/>
               </a:rPr>
               <a:t>Codex Browser</a:t>
             </a:r>
@@ -8472,7 +8461,7 @@
                 <a:latin typeface="Microsoft YaHei"/>
                 <a:ea typeface="Microsoft YaHei"/>
                 <a:cs typeface="Microsoft YaHei"/>
-                <a:hlinkClick xmlns:r="http://schemas.openxmlformats.org/officeDocument/2006/relationships" r:id="Rb9d28e172f404f02"/>
+                <a:hlinkClick xmlns:r="http://schemas.openxmlformats.org/officeDocument/2006/relationships" r:id="Rb3db07298d5b4995"/>
               </a:rPr>
               <a:t> · Trae Browser &amp; Preview</a:t>
             </a:r>
@@ -8484,7 +8473,7 @@
                 <a:latin typeface="Microsoft YaHei"/>
                 <a:ea typeface="Microsoft YaHei"/>
                 <a:cs typeface="Microsoft YaHei"/>
-                <a:hlinkClick xmlns:r="http://schemas.openxmlformats.org/officeDocument/2006/relationships" r:id="R977aecf736314044"/>
+                <a:hlinkClick xmlns:r="http://schemas.openxmlformats.org/officeDocument/2006/relationships" r:id="Rce1a77f2f1904481"/>
               </a:rPr>
               <a:t> · Playwright Best Practices</a:t>
             </a:r>
@@ -8496,7 +8485,7 @@
           <p:cNvPr id="63" name="">
             <a:extLst xmlns:a="http://schemas.openxmlformats.org/drawingml/2006/main">
               <a:ext uri="{FF2B5EF4-FFF2-40B4-BE49-F238E27FC236}">
-                <a16:creationId xmlns:a16="http://schemas.microsoft.com/office/drawing/2014/main" id="{A1FAE329-2029-47F0-BD0A-364E502007FA}"/>
+                <a16:creationId xmlns:a16="http://schemas.microsoft.com/office/drawing/2014/main" id="{21CC33A0-2905-4CA5-AA13-0108ADEFA48C}"/>
               </a:ext>
             </a:extLst>
           </p:cNvPr>
@@ -8552,7 +8541,7 @@
     </p:spTree>
     <p:extLst>
       <p:ext uri="{BB962C8B-B14F-4D97-AF65-F5344CB8AC3E}">
-        <p14:creationId xmlns:p14="http://schemas.microsoft.com/office/powerpoint/2010/main" val="1904955099"/>
+        <p14:creationId xmlns:p14="http://schemas.microsoft.com/office/powerpoint/2010/main" val="281296523"/>
       </p:ext>
     </p:extLst>
   </p:cSld>
@@ -8583,7 +8572,7 @@
           <p:cNvPr id="72" name="">
             <a:extLst xmlns:a="http://schemas.openxmlformats.org/drawingml/2006/main">
               <a:ext uri="{FF2B5EF4-FFF2-40B4-BE49-F238E27FC236}">
-                <a16:creationId xmlns:a16="http://schemas.microsoft.com/office/drawing/2014/main" id="{CA820AED-7328-43CC-87AC-413705E80C29}"/>
+                <a16:creationId xmlns:a16="http://schemas.microsoft.com/office/drawing/2014/main" id="{20926F5C-1477-4AC4-BDA8-9EE3F53710E7}"/>
               </a:ext>
             </a:extLst>
           </p:cNvPr>
@@ -8616,7 +8605,7 @@
           <p:cNvPr id="2" name="">
             <a:extLst xmlns:a="http://schemas.openxmlformats.org/drawingml/2006/main">
               <a:ext uri="{FF2B5EF4-FFF2-40B4-BE49-F238E27FC236}">
-                <a16:creationId xmlns:a16="http://schemas.microsoft.com/office/drawing/2014/main" id="{EBFCADC7-6473-4864-85B5-4AE2F732F48B}"/>
+                <a16:creationId xmlns:a16="http://schemas.microsoft.com/office/drawing/2014/main" id="{9C4C878A-554B-4AC6-BB0F-A8C0D904BCB0}"/>
               </a:ext>
             </a:extLst>
           </p:cNvPr>
@@ -8674,7 +8663,7 @@
           <p:cNvPr id="3" name="">
             <a:extLst xmlns:a="http://schemas.openxmlformats.org/drawingml/2006/main">
               <a:ext uri="{FF2B5EF4-FFF2-40B4-BE49-F238E27FC236}">
-                <a16:creationId xmlns:a16="http://schemas.microsoft.com/office/drawing/2014/main" id="{139937C0-4E9B-4B02-A0D5-3A1CF9CDD11E}"/>
+                <a16:creationId xmlns:a16="http://schemas.microsoft.com/office/drawing/2014/main" id="{6CCE3313-6DC6-4731-A7F8-D694E084F7C4}"/>
               </a:ext>
             </a:extLst>
           </p:cNvPr>
@@ -8732,7 +8721,7 @@
           <p:cNvPr id="4" name="">
             <a:extLst xmlns:a="http://schemas.openxmlformats.org/drawingml/2006/main">
               <a:ext uri="{FF2B5EF4-FFF2-40B4-BE49-F238E27FC236}">
-                <a16:creationId xmlns:a16="http://schemas.microsoft.com/office/drawing/2014/main" id="{A581BCD6-EE3F-45B4-8B9D-5610131EFE33}"/>
+                <a16:creationId xmlns:a16="http://schemas.microsoft.com/office/drawing/2014/main" id="{6CD4823C-3B75-43C8-A602-71316F360EE2}"/>
               </a:ext>
             </a:extLst>
           </p:cNvPr>
@@ -8765,7 +8754,7 @@
           <p:cNvPr id="5" name="">
             <a:extLst xmlns:a="http://schemas.openxmlformats.org/drawingml/2006/main">
               <a:ext uri="{FF2B5EF4-FFF2-40B4-BE49-F238E27FC236}">
-                <a16:creationId xmlns:a16="http://schemas.microsoft.com/office/drawing/2014/main" id="{9DA7AC72-EFA8-452A-9FFE-4ED0C5DC3AAC}"/>
+                <a16:creationId xmlns:a16="http://schemas.microsoft.com/office/drawing/2014/main" id="{2A4F91D2-C3D9-40FB-A3EB-5501F043CF0D}"/>
               </a:ext>
             </a:extLst>
           </p:cNvPr>
@@ -8823,7 +8812,7 @@
           <p:cNvPr id="6" name="">
             <a:extLst xmlns:a="http://schemas.openxmlformats.org/drawingml/2006/main">
               <a:ext uri="{FF2B5EF4-FFF2-40B4-BE49-F238E27FC236}">
-                <a16:creationId xmlns:a16="http://schemas.microsoft.com/office/drawing/2014/main" id="{A17C683A-119A-47D3-932E-A131101AD1A5}"/>
+                <a16:creationId xmlns:a16="http://schemas.microsoft.com/office/drawing/2014/main" id="{64603AEC-D28E-4342-992D-42439FADB999}"/>
               </a:ext>
             </a:extLst>
           </p:cNvPr>
@@ -8881,7 +8870,7 @@
           <p:cNvPr id="7" name="">
             <a:extLst xmlns:a="http://schemas.openxmlformats.org/drawingml/2006/main">
               <a:ext uri="{FF2B5EF4-FFF2-40B4-BE49-F238E27FC236}">
-                <a16:creationId xmlns:a16="http://schemas.microsoft.com/office/drawing/2014/main" id="{650377B9-4B72-4862-948E-F0B50DCD9E97}"/>
+                <a16:creationId xmlns:a16="http://schemas.microsoft.com/office/drawing/2014/main" id="{F92D6857-316E-4ED5-BDBF-26391A079ED2}"/>
               </a:ext>
             </a:extLst>
           </p:cNvPr>
@@ -8939,7 +8928,7 @@
           <p:cNvPr id="8" name="">
             <a:extLst xmlns:a="http://schemas.openxmlformats.org/drawingml/2006/main">
               <a:ext uri="{FF2B5EF4-FFF2-40B4-BE49-F238E27FC236}">
-                <a16:creationId xmlns:a16="http://schemas.microsoft.com/office/drawing/2014/main" id="{6F79BCCC-B9A5-4204-82D4-2D0F41B11DA0}"/>
+                <a16:creationId xmlns:a16="http://schemas.microsoft.com/office/drawing/2014/main" id="{6DA3F3F9-1C6E-4537-A19B-DC92FBEBEAD9}"/>
               </a:ext>
             </a:extLst>
           </p:cNvPr>
@@ -8972,7 +8961,7 @@
           <p:cNvPr id="9" name="">
             <a:extLst xmlns:a="http://schemas.openxmlformats.org/drawingml/2006/main">
               <a:ext uri="{FF2B5EF4-FFF2-40B4-BE49-F238E27FC236}">
-                <a16:creationId xmlns:a16="http://schemas.microsoft.com/office/drawing/2014/main" id="{B4E3635D-EB85-4E0B-AA91-7DF795F375F0}"/>
+                <a16:creationId xmlns:a16="http://schemas.microsoft.com/office/drawing/2014/main" id="{E47203C9-D9C2-4085-96A5-D5354F695344}"/>
               </a:ext>
             </a:extLst>
           </p:cNvPr>
@@ -9005,7 +8994,7 @@
           <p:cNvPr id="10" name="">
             <a:extLst xmlns:a="http://schemas.openxmlformats.org/drawingml/2006/main">
               <a:ext uri="{FF2B5EF4-FFF2-40B4-BE49-F238E27FC236}">
-                <a16:creationId xmlns:a16="http://schemas.microsoft.com/office/drawing/2014/main" id="{1B7C80DF-FE2D-49A5-86C0-3B6040E64656}"/>
+                <a16:creationId xmlns:a16="http://schemas.microsoft.com/office/drawing/2014/main" id="{C2D950B2-ECEB-4D48-AD80-8035CDF55B22}"/>
               </a:ext>
             </a:extLst>
           </p:cNvPr>
@@ -9038,7 +9027,7 @@
           <p:cNvPr id="11" name="">
             <a:extLst xmlns:a="http://schemas.openxmlformats.org/drawingml/2006/main">
               <a:ext uri="{FF2B5EF4-FFF2-40B4-BE49-F238E27FC236}">
-                <a16:creationId xmlns:a16="http://schemas.microsoft.com/office/drawing/2014/main" id="{2086DDDC-3B27-4855-8132-CFC1D7876945}"/>
+                <a16:creationId xmlns:a16="http://schemas.microsoft.com/office/drawing/2014/main" id="{25EC38DF-7B4A-49D3-BF6F-FDFFA6DD85F0}"/>
               </a:ext>
             </a:extLst>
           </p:cNvPr>
@@ -9096,7 +9085,7 @@
           <p:cNvPr id="12" name="">
             <a:extLst xmlns:a="http://schemas.openxmlformats.org/drawingml/2006/main">
               <a:ext uri="{FF2B5EF4-FFF2-40B4-BE49-F238E27FC236}">
-                <a16:creationId xmlns:a16="http://schemas.microsoft.com/office/drawing/2014/main" id="{249DA436-F92B-41AE-9237-9D93AA2C0CE7}"/>
+                <a16:creationId xmlns:a16="http://schemas.microsoft.com/office/drawing/2014/main" id="{920AE4A1-E7DC-47E0-8824-6D4D0BE3346D}"/>
               </a:ext>
             </a:extLst>
           </p:cNvPr>
@@ -9154,7 +9143,7 @@
           <p:cNvPr id="13" name="">
             <a:extLst xmlns:a="http://schemas.openxmlformats.org/drawingml/2006/main">
               <a:ext uri="{FF2B5EF4-FFF2-40B4-BE49-F238E27FC236}">
-                <a16:creationId xmlns:a16="http://schemas.microsoft.com/office/drawing/2014/main" id="{551D3805-8003-47F5-87A7-4A80BF7FE7F9}"/>
+                <a16:creationId xmlns:a16="http://schemas.microsoft.com/office/drawing/2014/main" id="{AFCD48B7-7A06-40B9-BB99-30C2E86AE036}"/>
               </a:ext>
             </a:extLst>
           </p:cNvPr>
@@ -9212,7 +9201,7 @@
           <p:cNvPr id="14" name="">
             <a:extLst xmlns:a="http://schemas.openxmlformats.org/drawingml/2006/main">
               <a:ext uri="{FF2B5EF4-FFF2-40B4-BE49-F238E27FC236}">
-                <a16:creationId xmlns:a16="http://schemas.microsoft.com/office/drawing/2014/main" id="{1405CFCC-DF58-4578-8586-69F853D5C588}"/>
+                <a16:creationId xmlns:a16="http://schemas.microsoft.com/office/drawing/2014/main" id="{089C7E0C-DE6F-4922-9E0E-FD93D99F7216}"/>
               </a:ext>
             </a:extLst>
           </p:cNvPr>
@@ -9245,7 +9234,7 @@
           <p:cNvPr id="15" name="">
             <a:extLst xmlns:a="http://schemas.openxmlformats.org/drawingml/2006/main">
               <a:ext uri="{FF2B5EF4-FFF2-40B4-BE49-F238E27FC236}">
-                <a16:creationId xmlns:a16="http://schemas.microsoft.com/office/drawing/2014/main" id="{9203C959-7373-402F-8A8C-CDE9DE0D9386}"/>
+                <a16:creationId xmlns:a16="http://schemas.microsoft.com/office/drawing/2014/main" id="{6D72B0D8-0A29-44D9-8AC9-AFF57C465FEB}"/>
               </a:ext>
             </a:extLst>
           </p:cNvPr>
@@ -9278,7 +9267,7 @@
           <p:cNvPr id="16" name="">
             <a:extLst xmlns:a="http://schemas.openxmlformats.org/drawingml/2006/main">
               <a:ext uri="{FF2B5EF4-FFF2-40B4-BE49-F238E27FC236}">
-                <a16:creationId xmlns:a16="http://schemas.microsoft.com/office/drawing/2014/main" id="{AD6E31C8-6B48-4646-ADBB-784A7306B5FE}"/>
+                <a16:creationId xmlns:a16="http://schemas.microsoft.com/office/drawing/2014/main" id="{FF27B636-9AE2-4439-9ACB-90A45490A6D4}"/>
               </a:ext>
             </a:extLst>
           </p:cNvPr>
@@ -9311,7 +9300,7 @@
           <p:cNvPr id="17" name="">
             <a:extLst xmlns:a="http://schemas.openxmlformats.org/drawingml/2006/main">
               <a:ext uri="{FF2B5EF4-FFF2-40B4-BE49-F238E27FC236}">
-                <a16:creationId xmlns:a16="http://schemas.microsoft.com/office/drawing/2014/main" id="{2968337B-73D4-43C1-A000-40350115775A}"/>
+                <a16:creationId xmlns:a16="http://schemas.microsoft.com/office/drawing/2014/main" id="{B524D544-A61A-41F9-BA36-AC02D868B9E4}"/>
               </a:ext>
             </a:extLst>
           </p:cNvPr>
@@ -9369,7 +9358,7 @@
           <p:cNvPr id="18" name="">
             <a:extLst xmlns:a="http://schemas.openxmlformats.org/drawingml/2006/main">
               <a:ext uri="{FF2B5EF4-FFF2-40B4-BE49-F238E27FC236}">
-                <a16:creationId xmlns:a16="http://schemas.microsoft.com/office/drawing/2014/main" id="{88CC4AB4-F6C7-4AF7-80CE-90FB9AC80375}"/>
+                <a16:creationId xmlns:a16="http://schemas.microsoft.com/office/drawing/2014/main" id="{979447A7-BCD7-4E98-9132-F46F33A4FAC9}"/>
               </a:ext>
             </a:extLst>
           </p:cNvPr>
@@ -9427,7 +9416,7 @@
           <p:cNvPr id="19" name="">
             <a:extLst xmlns:a="http://schemas.openxmlformats.org/drawingml/2006/main">
               <a:ext uri="{FF2B5EF4-FFF2-40B4-BE49-F238E27FC236}">
-                <a16:creationId xmlns:a16="http://schemas.microsoft.com/office/drawing/2014/main" id="{D6EB0A10-0691-4B10-BD58-CA141FFDB77C}"/>
+                <a16:creationId xmlns:a16="http://schemas.microsoft.com/office/drawing/2014/main" id="{62DDF7A2-CE62-43AA-87CB-E538496B4003}"/>
               </a:ext>
             </a:extLst>
           </p:cNvPr>
@@ -9485,7 +9474,7 @@
           <p:cNvPr id="20" name="">
             <a:extLst xmlns:a="http://schemas.openxmlformats.org/drawingml/2006/main">
               <a:ext uri="{FF2B5EF4-FFF2-40B4-BE49-F238E27FC236}">
-                <a16:creationId xmlns:a16="http://schemas.microsoft.com/office/drawing/2014/main" id="{3E86DECF-A900-470F-8639-5136D4467722}"/>
+                <a16:creationId xmlns:a16="http://schemas.microsoft.com/office/drawing/2014/main" id="{F74675FA-5A1F-4B26-B8B4-007DB6A79FDD}"/>
               </a:ext>
             </a:extLst>
           </p:cNvPr>
@@ -9518,7 +9507,7 @@
           <p:cNvPr id="21" name="">
             <a:extLst xmlns:a="http://schemas.openxmlformats.org/drawingml/2006/main">
               <a:ext uri="{FF2B5EF4-FFF2-40B4-BE49-F238E27FC236}">
-                <a16:creationId xmlns:a16="http://schemas.microsoft.com/office/drawing/2014/main" id="{425A3631-E7C4-425A-89A9-A2389F5B4F5A}"/>
+                <a16:creationId xmlns:a16="http://schemas.microsoft.com/office/drawing/2014/main" id="{8F3AB5DB-3F18-40EB-82C6-FA18C7B8D01B}"/>
               </a:ext>
             </a:extLst>
           </p:cNvPr>
@@ -9551,7 +9540,7 @@
           <p:cNvPr id="22" name="">
             <a:extLst xmlns:a="http://schemas.openxmlformats.org/drawingml/2006/main">
               <a:ext uri="{FF2B5EF4-FFF2-40B4-BE49-F238E27FC236}">
-                <a16:creationId xmlns:a16="http://schemas.microsoft.com/office/drawing/2014/main" id="{794773F1-D006-4E20-BBD7-239E253B5C44}"/>
+                <a16:creationId xmlns:a16="http://schemas.microsoft.com/office/drawing/2014/main" id="{6DC95DCA-024C-4DC1-A566-D3EE29ABD78D}"/>
               </a:ext>
             </a:extLst>
           </p:cNvPr>
@@ -9584,7 +9573,7 @@
           <p:cNvPr id="23" name="">
             <a:extLst xmlns:a="http://schemas.openxmlformats.org/drawingml/2006/main">
               <a:ext uri="{FF2B5EF4-FFF2-40B4-BE49-F238E27FC236}">
-                <a16:creationId xmlns:a16="http://schemas.microsoft.com/office/drawing/2014/main" id="{A29AAAB1-0156-48F1-BF94-09364060F681}"/>
+                <a16:creationId xmlns:a16="http://schemas.microsoft.com/office/drawing/2014/main" id="{AAE9C0AC-3AC4-47BF-AC17-484682F59F8F}"/>
               </a:ext>
             </a:extLst>
           </p:cNvPr>
@@ -9642,7 +9631,7 @@
           <p:cNvPr id="24" name="">
             <a:extLst xmlns:a="http://schemas.openxmlformats.org/drawingml/2006/main">
               <a:ext uri="{FF2B5EF4-FFF2-40B4-BE49-F238E27FC236}">
-                <a16:creationId xmlns:a16="http://schemas.microsoft.com/office/drawing/2014/main" id="{A012CDC9-EF0B-4358-876D-19A2523C2C38}"/>
+                <a16:creationId xmlns:a16="http://schemas.microsoft.com/office/drawing/2014/main" id="{1E103AB4-92B3-46A5-8380-E9B3F3A4C303}"/>
               </a:ext>
             </a:extLst>
           </p:cNvPr>
@@ -9700,7 +9689,7 @@
           <p:cNvPr id="25" name="">
             <a:extLst xmlns:a="http://schemas.openxmlformats.org/drawingml/2006/main">
               <a:ext uri="{FF2B5EF4-FFF2-40B4-BE49-F238E27FC236}">
-                <a16:creationId xmlns:a16="http://schemas.microsoft.com/office/drawing/2014/main" id="{8E4C3092-8876-4367-B169-A46B56BD2BD0}"/>
+                <a16:creationId xmlns:a16="http://schemas.microsoft.com/office/drawing/2014/main" id="{0FD8676C-C1E7-45CD-9560-3693E63D3598}"/>
               </a:ext>
             </a:extLst>
           </p:cNvPr>
@@ -9758,7 +9747,7 @@
           <p:cNvPr id="26" name="">
             <a:extLst xmlns:a="http://schemas.openxmlformats.org/drawingml/2006/main">
               <a:ext uri="{FF2B5EF4-FFF2-40B4-BE49-F238E27FC236}">
-                <a16:creationId xmlns:a16="http://schemas.microsoft.com/office/drawing/2014/main" id="{AC985256-8261-42D8-88D2-C6BC0F972368}"/>
+                <a16:creationId xmlns:a16="http://schemas.microsoft.com/office/drawing/2014/main" id="{6E538226-FC45-4D0C-AEBC-6D0026FC3BBA}"/>
               </a:ext>
             </a:extLst>
           </p:cNvPr>
@@ -9791,7 +9780,7 @@
           <p:cNvPr id="27" name="">
             <a:extLst xmlns:a="http://schemas.openxmlformats.org/drawingml/2006/main">
               <a:ext uri="{FF2B5EF4-FFF2-40B4-BE49-F238E27FC236}">
-                <a16:creationId xmlns:a16="http://schemas.microsoft.com/office/drawing/2014/main" id="{BD0CEF2D-9DE9-4208-A874-9EB5F91CB7DC}"/>
+                <a16:creationId xmlns:a16="http://schemas.microsoft.com/office/drawing/2014/main" id="{54E52690-3558-442C-BDA8-5CFBCFAAF764}"/>
               </a:ext>
             </a:extLst>
           </p:cNvPr>
@@ -9824,7 +9813,7 @@
           <p:cNvPr id="28" name="">
             <a:extLst xmlns:a="http://schemas.openxmlformats.org/drawingml/2006/main">
               <a:ext uri="{FF2B5EF4-FFF2-40B4-BE49-F238E27FC236}">
-                <a16:creationId xmlns:a16="http://schemas.microsoft.com/office/drawing/2014/main" id="{8FD075FB-938D-4AA1-805A-88952044689D}"/>
+                <a16:creationId xmlns:a16="http://schemas.microsoft.com/office/drawing/2014/main" id="{5F9A619A-39E8-4E3D-BF74-F0CD3A49D57B}"/>
               </a:ext>
             </a:extLst>
           </p:cNvPr>
@@ -9857,7 +9846,7 @@
           <p:cNvPr id="29" name="">
             <a:extLst xmlns:a="http://schemas.openxmlformats.org/drawingml/2006/main">
               <a:ext uri="{FF2B5EF4-FFF2-40B4-BE49-F238E27FC236}">
-                <a16:creationId xmlns:a16="http://schemas.microsoft.com/office/drawing/2014/main" id="{3596BB9F-9834-4CCE-83EE-DF41E0299048}"/>
+                <a16:creationId xmlns:a16="http://schemas.microsoft.com/office/drawing/2014/main" id="{3680053C-04A7-4FA3-AB95-192DD9C8869C}"/>
               </a:ext>
             </a:extLst>
           </p:cNvPr>
@@ -9915,7 +9904,7 @@
           <p:cNvPr id="30" name="">
             <a:extLst xmlns:a="http://schemas.openxmlformats.org/drawingml/2006/main">
               <a:ext uri="{FF2B5EF4-FFF2-40B4-BE49-F238E27FC236}">
-                <a16:creationId xmlns:a16="http://schemas.microsoft.com/office/drawing/2014/main" id="{AA1A462D-AE1E-4A14-89E7-3345B1D6D49A}"/>
+                <a16:creationId xmlns:a16="http://schemas.microsoft.com/office/drawing/2014/main" id="{EDB0F447-CF46-4053-A643-00F8E8E1A984}"/>
               </a:ext>
             </a:extLst>
           </p:cNvPr>
@@ -9973,7 +9962,7 @@
           <p:cNvPr id="31" name="">
             <a:extLst xmlns:a="http://schemas.openxmlformats.org/drawingml/2006/main">
               <a:ext uri="{FF2B5EF4-FFF2-40B4-BE49-F238E27FC236}">
-                <a16:creationId xmlns:a16="http://schemas.microsoft.com/office/drawing/2014/main" id="{28957CED-4500-4EA3-8029-5009BB7D4A4D}"/>
+                <a16:creationId xmlns:a16="http://schemas.microsoft.com/office/drawing/2014/main" id="{F63F0106-4092-48E5-82B2-C687A5FBEFD9}"/>
               </a:ext>
             </a:extLst>
           </p:cNvPr>
@@ -10031,7 +10020,7 @@
           <p:cNvPr id="32" name="">
             <a:extLst xmlns:a="http://schemas.openxmlformats.org/drawingml/2006/main">
               <a:ext uri="{FF2B5EF4-FFF2-40B4-BE49-F238E27FC236}">
-                <a16:creationId xmlns:a16="http://schemas.microsoft.com/office/drawing/2014/main" id="{8CD45902-EE06-423C-82DD-9F998B1314C2}"/>
+                <a16:creationId xmlns:a16="http://schemas.microsoft.com/office/drawing/2014/main" id="{C559CE0C-7E66-4F71-AC5E-8BBBE5AC3FE1}"/>
               </a:ext>
             </a:extLst>
           </p:cNvPr>
@@ -10064,7 +10053,7 @@
           <p:cNvPr id="33" name="">
             <a:extLst xmlns:a="http://schemas.openxmlformats.org/drawingml/2006/main">
               <a:ext uri="{FF2B5EF4-FFF2-40B4-BE49-F238E27FC236}">
-                <a16:creationId xmlns:a16="http://schemas.microsoft.com/office/drawing/2014/main" id="{00CF98CE-EEBE-47EE-9371-48AEBB1272E5}"/>
+                <a16:creationId xmlns:a16="http://schemas.microsoft.com/office/drawing/2014/main" id="{74771EC1-F720-4264-976F-50E10AFD720E}"/>
               </a:ext>
             </a:extLst>
           </p:cNvPr>
@@ -10097,7 +10086,7 @@
           <p:cNvPr id="34" name="">
             <a:extLst xmlns:a="http://schemas.openxmlformats.org/drawingml/2006/main">
               <a:ext uri="{FF2B5EF4-FFF2-40B4-BE49-F238E27FC236}">
-                <a16:creationId xmlns:a16="http://schemas.microsoft.com/office/drawing/2014/main" id="{ED39DA0B-6F77-4B6D-A2B6-64BFA117B13C}"/>
+                <a16:creationId xmlns:a16="http://schemas.microsoft.com/office/drawing/2014/main" id="{186E8824-2672-4BE9-8874-34B047377563}"/>
               </a:ext>
             </a:extLst>
           </p:cNvPr>
@@ -10130,7 +10119,7 @@
           <p:cNvPr id="35" name="">
             <a:extLst xmlns:a="http://schemas.openxmlformats.org/drawingml/2006/main">
               <a:ext uri="{FF2B5EF4-FFF2-40B4-BE49-F238E27FC236}">
-                <a16:creationId xmlns:a16="http://schemas.microsoft.com/office/drawing/2014/main" id="{BD638DAE-11FF-44E4-B8C1-5BAB5A19D9B2}"/>
+                <a16:creationId xmlns:a16="http://schemas.microsoft.com/office/drawing/2014/main" id="{8E9A05AD-844B-4DEB-A86E-A9DE1C0E291D}"/>
               </a:ext>
             </a:extLst>
           </p:cNvPr>
@@ -10188,7 +10177,7 @@
           <p:cNvPr id="36" name="">
             <a:extLst xmlns:a="http://schemas.openxmlformats.org/drawingml/2006/main">
               <a:ext uri="{FF2B5EF4-FFF2-40B4-BE49-F238E27FC236}">
-                <a16:creationId xmlns:a16="http://schemas.microsoft.com/office/drawing/2014/main" id="{3F398AC2-D682-4DD2-911D-B4505C417844}"/>
+                <a16:creationId xmlns:a16="http://schemas.microsoft.com/office/drawing/2014/main" id="{0A908CE1-0FC5-4F67-A7BF-92CD0BA7A5A2}"/>
               </a:ext>
             </a:extLst>
           </p:cNvPr>
@@ -10246,7 +10235,7 @@
           <p:cNvPr id="37" name="">
             <a:extLst xmlns:a="http://schemas.openxmlformats.org/drawingml/2006/main">
               <a:ext uri="{FF2B5EF4-FFF2-40B4-BE49-F238E27FC236}">
-                <a16:creationId xmlns:a16="http://schemas.microsoft.com/office/drawing/2014/main" id="{4AD39980-2BEF-4818-9A0C-29D222F6DB32}"/>
+                <a16:creationId xmlns:a16="http://schemas.microsoft.com/office/drawing/2014/main" id="{A395AD85-9BA3-4CDE-BDD7-3EA6F95EE7DF}"/>
               </a:ext>
             </a:extLst>
           </p:cNvPr>
@@ -10304,7 +10293,7 @@
           <p:cNvPr id="38" name="">
             <a:extLst xmlns:a="http://schemas.openxmlformats.org/drawingml/2006/main">
               <a:ext uri="{FF2B5EF4-FFF2-40B4-BE49-F238E27FC236}">
-                <a16:creationId xmlns:a16="http://schemas.microsoft.com/office/drawing/2014/main" id="{E6784A2F-0075-4EF8-A883-6185723F613C}"/>
+                <a16:creationId xmlns:a16="http://schemas.microsoft.com/office/drawing/2014/main" id="{6AEFFCE9-BB12-4D6A-AA97-3413C2B883D6}"/>
               </a:ext>
             </a:extLst>
           </p:cNvPr>
@@ -10337,7 +10326,7 @@
           <p:cNvPr id="39" name="">
             <a:extLst xmlns:a="http://schemas.openxmlformats.org/drawingml/2006/main">
               <a:ext uri="{FF2B5EF4-FFF2-40B4-BE49-F238E27FC236}">
-                <a16:creationId xmlns:a16="http://schemas.microsoft.com/office/drawing/2014/main" id="{865A2236-4EC1-4672-A490-F2FAF95FDF63}"/>
+                <a16:creationId xmlns:a16="http://schemas.microsoft.com/office/drawing/2014/main" id="{197EAB0F-B7FF-4040-AAD1-98A16278D6C2}"/>
               </a:ext>
             </a:extLst>
           </p:cNvPr>
@@ -10370,7 +10359,7 @@
           <p:cNvPr id="40" name="">
             <a:extLst xmlns:a="http://schemas.openxmlformats.org/drawingml/2006/main">
               <a:ext uri="{FF2B5EF4-FFF2-40B4-BE49-F238E27FC236}">
-                <a16:creationId xmlns:a16="http://schemas.microsoft.com/office/drawing/2014/main" id="{D0BB8448-D558-4553-878C-C6B30928C72F}"/>
+                <a16:creationId xmlns:a16="http://schemas.microsoft.com/office/drawing/2014/main" id="{73EF0842-6C5F-4049-B6C3-8ADBC0B83972}"/>
               </a:ext>
             </a:extLst>
           </p:cNvPr>
@@ -10403,7 +10392,7 @@
           <p:cNvPr id="41" name="">
             <a:extLst xmlns:a="http://schemas.openxmlformats.org/drawingml/2006/main">
               <a:ext uri="{FF2B5EF4-FFF2-40B4-BE49-F238E27FC236}">
-                <a16:creationId xmlns:a16="http://schemas.microsoft.com/office/drawing/2014/main" id="{F1428D28-B05F-4BFC-A3D2-73516F08146F}"/>
+                <a16:creationId xmlns:a16="http://schemas.microsoft.com/office/drawing/2014/main" id="{037B15F4-3864-4A82-9BA4-2CE4AE8A7AC6}"/>
               </a:ext>
             </a:extLst>
           </p:cNvPr>
@@ -10461,7 +10450,7 @@
           <p:cNvPr id="42" name="">
             <a:extLst xmlns:a="http://schemas.openxmlformats.org/drawingml/2006/main">
               <a:ext uri="{FF2B5EF4-FFF2-40B4-BE49-F238E27FC236}">
-                <a16:creationId xmlns:a16="http://schemas.microsoft.com/office/drawing/2014/main" id="{850D4717-3761-4D53-BEA7-CE799C2FC32A}"/>
+                <a16:creationId xmlns:a16="http://schemas.microsoft.com/office/drawing/2014/main" id="{FAB43845-C002-4CB6-B70C-F4F8B8BD51B3}"/>
               </a:ext>
             </a:extLst>
           </p:cNvPr>
@@ -10519,7 +10508,7 @@
           <p:cNvPr id="43" name="">
             <a:extLst xmlns:a="http://schemas.openxmlformats.org/drawingml/2006/main">
               <a:ext uri="{FF2B5EF4-FFF2-40B4-BE49-F238E27FC236}">
-                <a16:creationId xmlns:a16="http://schemas.microsoft.com/office/drawing/2014/main" id="{92AB14B7-5E9D-4A3F-AAA7-57A6B51B7A7D}"/>
+                <a16:creationId xmlns:a16="http://schemas.microsoft.com/office/drawing/2014/main" id="{E18F12C4-A3DA-4FDC-9121-2D7CC4CF4656}"/>
               </a:ext>
             </a:extLst>
           </p:cNvPr>
@@ -10577,7 +10566,7 @@
           <p:cNvPr id="44" name="">
             <a:extLst xmlns:a="http://schemas.openxmlformats.org/drawingml/2006/main">
               <a:ext uri="{FF2B5EF4-FFF2-40B4-BE49-F238E27FC236}">
-                <a16:creationId xmlns:a16="http://schemas.microsoft.com/office/drawing/2014/main" id="{3AADD73E-E703-4F3D-9CAD-A8578455E171}"/>
+                <a16:creationId xmlns:a16="http://schemas.microsoft.com/office/drawing/2014/main" id="{63AF96FD-2327-4027-94FD-57F309F3761E}"/>
               </a:ext>
             </a:extLst>
           </p:cNvPr>
@@ -10610,7 +10599,7 @@
           <p:cNvPr id="45" name="">
             <a:extLst xmlns:a="http://schemas.openxmlformats.org/drawingml/2006/main">
               <a:ext uri="{FF2B5EF4-FFF2-40B4-BE49-F238E27FC236}">
-                <a16:creationId xmlns:a16="http://schemas.microsoft.com/office/drawing/2014/main" id="{6099B4CD-54EA-44A0-A4D2-A3C7B13B522F}"/>
+                <a16:creationId xmlns:a16="http://schemas.microsoft.com/office/drawing/2014/main" id="{268D220B-E1A1-4878-96D5-21EE66ED3C0A}"/>
               </a:ext>
             </a:extLst>
           </p:cNvPr>
@@ -10668,7 +10657,7 @@
           <p:cNvPr id="46" name="">
             <a:extLst xmlns:a="http://schemas.openxmlformats.org/drawingml/2006/main">
               <a:ext uri="{FF2B5EF4-FFF2-40B4-BE49-F238E27FC236}">
-                <a16:creationId xmlns:a16="http://schemas.microsoft.com/office/drawing/2014/main" id="{CE612B72-762C-4E5E-99E3-11BAC1BA1E90}"/>
+                <a16:creationId xmlns:a16="http://schemas.microsoft.com/office/drawing/2014/main" id="{F9AF1E82-68BA-49EF-81A4-32225679675D}"/>
               </a:ext>
             </a:extLst>
           </p:cNvPr>
@@ -10701,7 +10690,7 @@
           <p:cNvPr id="47" name="">
             <a:extLst xmlns:a="http://schemas.openxmlformats.org/drawingml/2006/main">
               <a:ext uri="{FF2B5EF4-FFF2-40B4-BE49-F238E27FC236}">
-                <a16:creationId xmlns:a16="http://schemas.microsoft.com/office/drawing/2014/main" id="{8E471957-7BA0-4CEC-B4A1-44A975138903}"/>
+                <a16:creationId xmlns:a16="http://schemas.microsoft.com/office/drawing/2014/main" id="{036C64BF-19C6-419F-9F67-B303CB2DEFC7}"/>
               </a:ext>
             </a:extLst>
           </p:cNvPr>
@@ -10759,7 +10748,7 @@
           <p:cNvPr id="48" name="">
             <a:extLst xmlns:a="http://schemas.openxmlformats.org/drawingml/2006/main">
               <a:ext uri="{FF2B5EF4-FFF2-40B4-BE49-F238E27FC236}">
-                <a16:creationId xmlns:a16="http://schemas.microsoft.com/office/drawing/2014/main" id="{B5A7C452-C635-4C09-93EB-5F06019534E7}"/>
+                <a16:creationId xmlns:a16="http://schemas.microsoft.com/office/drawing/2014/main" id="{E4AED339-8CE4-4BD9-8E65-68A423332588}"/>
               </a:ext>
             </a:extLst>
           </p:cNvPr>
@@ -10792,7 +10781,7 @@
           <p:cNvPr id="49" name="">
             <a:extLst xmlns:a="http://schemas.openxmlformats.org/drawingml/2006/main">
               <a:ext uri="{FF2B5EF4-FFF2-40B4-BE49-F238E27FC236}">
-                <a16:creationId xmlns:a16="http://schemas.microsoft.com/office/drawing/2014/main" id="{85B08E99-82FA-4AAD-801C-02BBC755963E}"/>
+                <a16:creationId xmlns:a16="http://schemas.microsoft.com/office/drawing/2014/main" id="{9E62651D-ABE6-4FE5-8281-65A569B31C96}"/>
               </a:ext>
             </a:extLst>
           </p:cNvPr>
@@ -10850,7 +10839,7 @@
           <p:cNvPr id="50" name="">
             <a:extLst xmlns:a="http://schemas.openxmlformats.org/drawingml/2006/main">
               <a:ext uri="{FF2B5EF4-FFF2-40B4-BE49-F238E27FC236}">
-                <a16:creationId xmlns:a16="http://schemas.microsoft.com/office/drawing/2014/main" id="{9564CB7D-0456-4FA7-9990-2852E9D3F5E7}"/>
+                <a16:creationId xmlns:a16="http://schemas.microsoft.com/office/drawing/2014/main" id="{57092823-100C-408E-8664-233BAD7321EB}"/>
               </a:ext>
             </a:extLst>
           </p:cNvPr>
@@ -10883,7 +10872,7 @@
           <p:cNvPr id="51" name="">
             <a:extLst xmlns:a="http://schemas.openxmlformats.org/drawingml/2006/main">
               <a:ext uri="{FF2B5EF4-FFF2-40B4-BE49-F238E27FC236}">
-                <a16:creationId xmlns:a16="http://schemas.microsoft.com/office/drawing/2014/main" id="{80115AFE-C7AF-4C87-B560-6FA7A5F1EB67}"/>
+                <a16:creationId xmlns:a16="http://schemas.microsoft.com/office/drawing/2014/main" id="{C05BF2E3-31F8-4AF0-BB6F-2467842DB3CC}"/>
               </a:ext>
             </a:extLst>
           </p:cNvPr>
@@ -10941,7 +10930,7 @@
           <p:cNvPr id="52" name="">
             <a:extLst xmlns:a="http://schemas.openxmlformats.org/drawingml/2006/main">
               <a:ext uri="{FF2B5EF4-FFF2-40B4-BE49-F238E27FC236}">
-                <a16:creationId xmlns:a16="http://schemas.microsoft.com/office/drawing/2014/main" id="{FAEB7BD5-F62A-4755-80C4-1568CB6B0EAF}"/>
+                <a16:creationId xmlns:a16="http://schemas.microsoft.com/office/drawing/2014/main" id="{6C2AD3A8-791F-48C7-9E6C-C56567344E1B}"/>
               </a:ext>
             </a:extLst>
           </p:cNvPr>
@@ -10974,7 +10963,7 @@
           <p:cNvPr id="53" name="">
             <a:extLst xmlns:a="http://schemas.openxmlformats.org/drawingml/2006/main">
               <a:ext uri="{FF2B5EF4-FFF2-40B4-BE49-F238E27FC236}">
-                <a16:creationId xmlns:a16="http://schemas.microsoft.com/office/drawing/2014/main" id="{23A5F816-E22C-4471-BCC1-3C25F9D3E4F5}"/>
+                <a16:creationId xmlns:a16="http://schemas.microsoft.com/office/drawing/2014/main" id="{6DD360A8-9873-4772-864E-D9FBD645D0F5}"/>
               </a:ext>
             </a:extLst>
           </p:cNvPr>
@@ -11032,7 +11021,7 @@
           <p:cNvPr id="54" name="">
             <a:extLst xmlns:a="http://schemas.openxmlformats.org/drawingml/2006/main">
               <a:ext uri="{FF2B5EF4-FFF2-40B4-BE49-F238E27FC236}">
-                <a16:creationId xmlns:a16="http://schemas.microsoft.com/office/drawing/2014/main" id="{90E9007C-15D9-457C-A3A0-19785991F78A}"/>
+                <a16:creationId xmlns:a16="http://schemas.microsoft.com/office/drawing/2014/main" id="{90DE1BAE-9ED4-48A9-A5E8-A1227F86ADC4}"/>
               </a:ext>
             </a:extLst>
           </p:cNvPr>
@@ -11065,7 +11054,7 @@
           <p:cNvPr id="55" name="">
             <a:extLst xmlns:a="http://schemas.openxmlformats.org/drawingml/2006/main">
               <a:ext uri="{FF2B5EF4-FFF2-40B4-BE49-F238E27FC236}">
-                <a16:creationId xmlns:a16="http://schemas.microsoft.com/office/drawing/2014/main" id="{37CDA62A-BE97-4949-B8A8-80027C990569}"/>
+                <a16:creationId xmlns:a16="http://schemas.microsoft.com/office/drawing/2014/main" id="{7C91F424-B12B-4C58-B486-3AC14C4A6D33}"/>
               </a:ext>
             </a:extLst>
           </p:cNvPr>
@@ -11123,7 +11112,7 @@
           <p:cNvPr id="56" name="">
             <a:extLst xmlns:a="http://schemas.openxmlformats.org/drawingml/2006/main">
               <a:ext uri="{FF2B5EF4-FFF2-40B4-BE49-F238E27FC236}">
-                <a16:creationId xmlns:a16="http://schemas.microsoft.com/office/drawing/2014/main" id="{4018BAE4-0048-40BA-9474-A3E1D5AB882A}"/>
+                <a16:creationId xmlns:a16="http://schemas.microsoft.com/office/drawing/2014/main" id="{080CFACF-FDF1-4B60-96F1-A03AC971380A}"/>
               </a:ext>
             </a:extLst>
           </p:cNvPr>
@@ -11156,7 +11145,7 @@
           <p:cNvPr id="57" name="">
             <a:extLst xmlns:a="http://schemas.openxmlformats.org/drawingml/2006/main">
               <a:ext uri="{FF2B5EF4-FFF2-40B4-BE49-F238E27FC236}">
-                <a16:creationId xmlns:a16="http://schemas.microsoft.com/office/drawing/2014/main" id="{8710B22F-7086-41A0-802E-6BB4D5E9F98F}"/>
+                <a16:creationId xmlns:a16="http://schemas.microsoft.com/office/drawing/2014/main" id="{A5F2092E-DB1B-479D-8A9F-B3160628F1C7}"/>
               </a:ext>
             </a:extLst>
           </p:cNvPr>
@@ -11214,7 +11203,7 @@
           <p:cNvPr id="58" name="">
             <a:extLst xmlns:a="http://schemas.openxmlformats.org/drawingml/2006/main">
               <a:ext uri="{FF2B5EF4-FFF2-40B4-BE49-F238E27FC236}">
-                <a16:creationId xmlns:a16="http://schemas.microsoft.com/office/drawing/2014/main" id="{F7D2F670-D49A-4F3C-AA44-AB12D7C872A2}"/>
+                <a16:creationId xmlns:a16="http://schemas.microsoft.com/office/drawing/2014/main" id="{B10C283E-5605-4B70-8B40-14916343A371}"/>
               </a:ext>
             </a:extLst>
           </p:cNvPr>
@@ -11247,7 +11236,7 @@
           <p:cNvPr id="59" name="">
             <a:extLst xmlns:a="http://schemas.openxmlformats.org/drawingml/2006/main">
               <a:ext uri="{FF2B5EF4-FFF2-40B4-BE49-F238E27FC236}">
-                <a16:creationId xmlns:a16="http://schemas.microsoft.com/office/drawing/2014/main" id="{B268DFBF-78F0-466F-A771-AFD9A7624C93}"/>
+                <a16:creationId xmlns:a16="http://schemas.microsoft.com/office/drawing/2014/main" id="{ACCEBF0F-673E-4569-9D8C-7FE759A87AB5}"/>
               </a:ext>
             </a:extLst>
           </p:cNvPr>
@@ -11305,7 +11294,7 @@
           <p:cNvPr id="60" name="">
             <a:extLst xmlns:a="http://schemas.openxmlformats.org/drawingml/2006/main">
               <a:ext uri="{FF2B5EF4-FFF2-40B4-BE49-F238E27FC236}">
-                <a16:creationId xmlns:a16="http://schemas.microsoft.com/office/drawing/2014/main" id="{F4B7B3D5-63FB-4DAC-B4AB-F1BAFC3F2F78}"/>
+                <a16:creationId xmlns:a16="http://schemas.microsoft.com/office/drawing/2014/main" id="{FE73D130-F1C1-49FD-B574-35862ACB5B40}"/>
               </a:ext>
             </a:extLst>
           </p:cNvPr>
@@ -11338,7 +11327,7 @@
           <p:cNvPr id="61" name="">
             <a:extLst xmlns:a="http://schemas.openxmlformats.org/drawingml/2006/main">
               <a:ext uri="{FF2B5EF4-FFF2-40B4-BE49-F238E27FC236}">
-                <a16:creationId xmlns:a16="http://schemas.microsoft.com/office/drawing/2014/main" id="{A387C9DD-C0D8-480C-B65C-F4145046A259}"/>
+                <a16:creationId xmlns:a16="http://schemas.microsoft.com/office/drawing/2014/main" id="{44FFA802-01B3-4BEE-840A-441A696A9F24}"/>
               </a:ext>
             </a:extLst>
           </p:cNvPr>
@@ -11396,7 +11385,7 @@
           <p:cNvPr id="62" name="">
             <a:extLst xmlns:a="http://schemas.openxmlformats.org/drawingml/2006/main">
               <a:ext uri="{FF2B5EF4-FFF2-40B4-BE49-F238E27FC236}">
-                <a16:creationId xmlns:a16="http://schemas.microsoft.com/office/drawing/2014/main" id="{D68CF6BD-270D-458F-87D3-162F9E3C5379}"/>
+                <a16:creationId xmlns:a16="http://schemas.microsoft.com/office/drawing/2014/main" id="{56B2542F-4572-46FC-A140-C27419B9BC4E}"/>
               </a:ext>
             </a:extLst>
           </p:cNvPr>
@@ -11429,7 +11418,7 @@
           <p:cNvPr id="63" name="">
             <a:extLst xmlns:a="http://schemas.openxmlformats.org/drawingml/2006/main">
               <a:ext uri="{FF2B5EF4-FFF2-40B4-BE49-F238E27FC236}">
-                <a16:creationId xmlns:a16="http://schemas.microsoft.com/office/drawing/2014/main" id="{DA451642-2B54-4F0B-95C5-D5A6042E74D5}"/>
+                <a16:creationId xmlns:a16="http://schemas.microsoft.com/office/drawing/2014/main" id="{B0982E86-69CF-4880-AD07-0F64575AD48C}"/>
               </a:ext>
             </a:extLst>
           </p:cNvPr>
@@ -11487,7 +11476,7 @@
           <p:cNvPr id="64" name="">
             <a:extLst xmlns:a="http://schemas.openxmlformats.org/drawingml/2006/main">
               <a:ext uri="{FF2B5EF4-FFF2-40B4-BE49-F238E27FC236}">
-                <a16:creationId xmlns:a16="http://schemas.microsoft.com/office/drawing/2014/main" id="{DC50B076-55E5-4255-B7BF-F93904848CE7}"/>
+                <a16:creationId xmlns:a16="http://schemas.microsoft.com/office/drawing/2014/main" id="{CEC47E22-5E42-4B98-8091-89DD4B7FD120}"/>
               </a:ext>
             </a:extLst>
           </p:cNvPr>
@@ -11520,7 +11509,7 @@
           <p:cNvPr id="65" name="">
             <a:extLst xmlns:a="http://schemas.openxmlformats.org/drawingml/2006/main">
               <a:ext uri="{FF2B5EF4-FFF2-40B4-BE49-F238E27FC236}">
-                <a16:creationId xmlns:a16="http://schemas.microsoft.com/office/drawing/2014/main" id="{4C2C8E1C-3DC2-483F-ABC3-A6E45F60A33B}"/>
+                <a16:creationId xmlns:a16="http://schemas.microsoft.com/office/drawing/2014/main" id="{174F3AD9-C39C-4179-822C-EC7F38431F0D}"/>
               </a:ext>
             </a:extLst>
           </p:cNvPr>
@@ -11578,7 +11567,7 @@
           <p:cNvPr id="66" name="">
             <a:extLst xmlns:a="http://schemas.openxmlformats.org/drawingml/2006/main">
               <a:ext uri="{FF2B5EF4-FFF2-40B4-BE49-F238E27FC236}">
-                <a16:creationId xmlns:a16="http://schemas.microsoft.com/office/drawing/2014/main" id="{87D2ED01-101D-4036-8B74-9B02F8AAB57A}"/>
+                <a16:creationId xmlns:a16="http://schemas.microsoft.com/office/drawing/2014/main" id="{BF39F119-CFAB-46AD-82CE-D016402F87C1}"/>
               </a:ext>
             </a:extLst>
           </p:cNvPr>
@@ -11611,7 +11600,7 @@
           <p:cNvPr id="67" name="">
             <a:extLst xmlns:a="http://schemas.openxmlformats.org/drawingml/2006/main">
               <a:ext uri="{FF2B5EF4-FFF2-40B4-BE49-F238E27FC236}">
-                <a16:creationId xmlns:a16="http://schemas.microsoft.com/office/drawing/2014/main" id="{87B4DFBF-1D53-4162-82BF-E58B7363F2A4}"/>
+                <a16:creationId xmlns:a16="http://schemas.microsoft.com/office/drawing/2014/main" id="{8AD05915-B584-4385-A7EB-F32EDC471483}"/>
               </a:ext>
             </a:extLst>
           </p:cNvPr>
@@ -11669,7 +11658,7 @@
           <p:cNvPr id="68" name="">
             <a:extLst xmlns:a="http://schemas.openxmlformats.org/drawingml/2006/main">
               <a:ext uri="{FF2B5EF4-FFF2-40B4-BE49-F238E27FC236}">
-                <a16:creationId xmlns:a16="http://schemas.microsoft.com/office/drawing/2014/main" id="{AFB9A443-9C8A-4A98-8D97-A5F7E572BB6A}"/>
+                <a16:creationId xmlns:a16="http://schemas.microsoft.com/office/drawing/2014/main" id="{AFCDD1E8-2D19-4FB4-A814-B137A425354C}"/>
               </a:ext>
             </a:extLst>
           </p:cNvPr>
@@ -11727,7 +11716,7 @@
           <p:cNvPr id="69" name="">
             <a:extLst xmlns:a="http://schemas.openxmlformats.org/drawingml/2006/main">
               <a:ext uri="{FF2B5EF4-FFF2-40B4-BE49-F238E27FC236}">
-                <a16:creationId xmlns:a16="http://schemas.microsoft.com/office/drawing/2014/main" id="{782E681F-CCD6-4188-AAB0-5A607E69AF7C}"/>
+                <a16:creationId xmlns:a16="http://schemas.microsoft.com/office/drawing/2014/main" id="{CE33FD73-1B44-463D-B5CB-C013270113FF}"/>
               </a:ext>
             </a:extLst>
           </p:cNvPr>
@@ -11760,7 +11749,7 @@
           <p:cNvPr id="70" name="">
             <a:extLst xmlns:a="http://schemas.openxmlformats.org/drawingml/2006/main">
               <a:ext uri="{FF2B5EF4-FFF2-40B4-BE49-F238E27FC236}">
-                <a16:creationId xmlns:a16="http://schemas.microsoft.com/office/drawing/2014/main" id="{9080BB1C-5992-47C5-836B-08809FCD6F77}"/>
+                <a16:creationId xmlns:a16="http://schemas.microsoft.com/office/drawing/2014/main" id="{86D43AC3-C047-448D-81B0-76CC09B9F9B1}"/>
               </a:ext>
             </a:extLst>
           </p:cNvPr>
@@ -11818,7 +11807,7 @@
                 <a:latin typeface="Microsoft YaHei"/>
                 <a:ea typeface="Microsoft YaHei"/>
                 <a:cs typeface="Microsoft YaHei"/>
-                <a:hlinkClick xmlns:r="http://schemas.openxmlformats.org/officeDocument/2006/relationships" r:id="Ra44a3a91e0444ede"/>
+                <a:hlinkClick xmlns:r="http://schemas.openxmlformats.org/officeDocument/2006/relationships" r:id="Ra69b40c964f544e6"/>
               </a:rPr>
               <a:t>Superpowers GitHub</a:t>
             </a:r>
@@ -11830,7 +11819,7 @@
           <p:cNvPr id="71" name="">
             <a:extLst xmlns:a="http://schemas.openxmlformats.org/drawingml/2006/main">
               <a:ext uri="{FF2B5EF4-FFF2-40B4-BE49-F238E27FC236}">
-                <a16:creationId xmlns:a16="http://schemas.microsoft.com/office/drawing/2014/main" id="{B3C9ECD0-204C-483C-9ABA-7ED21B63EF63}"/>
+                <a16:creationId xmlns:a16="http://schemas.microsoft.com/office/drawing/2014/main" id="{0D1ECB72-8221-48EA-BC0B-550F4233568D}"/>
               </a:ext>
             </a:extLst>
           </p:cNvPr>
@@ -11886,7 +11875,7 @@
     </p:spTree>
     <p:extLst>
       <p:ext uri="{BB962C8B-B14F-4D97-AF65-F5344CB8AC3E}">
-        <p14:creationId xmlns:p14="http://schemas.microsoft.com/office/powerpoint/2010/main" val="600344951"/>
+        <p14:creationId xmlns:p14="http://schemas.microsoft.com/office/powerpoint/2010/main" val="993532319"/>
       </p:ext>
     </p:extLst>
   </p:cSld>
@@ -11917,7 +11906,7 @@
           <p:cNvPr id="38" name="">
             <a:extLst xmlns:a="http://schemas.openxmlformats.org/drawingml/2006/main">
               <a:ext uri="{FF2B5EF4-FFF2-40B4-BE49-F238E27FC236}">
-                <a16:creationId xmlns:a16="http://schemas.microsoft.com/office/drawing/2014/main" id="{CB039738-6215-42AD-9158-71C5D05B6326}"/>
+                <a16:creationId xmlns:a16="http://schemas.microsoft.com/office/drawing/2014/main" id="{484EE9A0-D4B5-419B-B76C-2AE156F0B3BF}"/>
               </a:ext>
             </a:extLst>
           </p:cNvPr>
@@ -11950,7 +11939,7 @@
           <p:cNvPr id="2" name="">
             <a:extLst xmlns:a="http://schemas.openxmlformats.org/drawingml/2006/main">
               <a:ext uri="{FF2B5EF4-FFF2-40B4-BE49-F238E27FC236}">
-                <a16:creationId xmlns:a16="http://schemas.microsoft.com/office/drawing/2014/main" id="{C53F0131-D22C-4141-9FA8-973546E484BE}"/>
+                <a16:creationId xmlns:a16="http://schemas.microsoft.com/office/drawing/2014/main" id="{05BE4C46-2E2E-418F-81B3-960720CB91A2}"/>
               </a:ext>
             </a:extLst>
           </p:cNvPr>
@@ -12008,7 +11997,7 @@
           <p:cNvPr id="3" name="">
             <a:extLst xmlns:a="http://schemas.openxmlformats.org/drawingml/2006/main">
               <a:ext uri="{FF2B5EF4-FFF2-40B4-BE49-F238E27FC236}">
-                <a16:creationId xmlns:a16="http://schemas.microsoft.com/office/drawing/2014/main" id="{5AA62CA7-B1D0-412A-8490-BD6B60BA4A88}"/>
+                <a16:creationId xmlns:a16="http://schemas.microsoft.com/office/drawing/2014/main" id="{0D402D61-BCCC-441F-8921-238E31169ACA}"/>
               </a:ext>
             </a:extLst>
           </p:cNvPr>
@@ -12066,7 +12055,7 @@
           <p:cNvPr id="4" name="">
             <a:extLst xmlns:a="http://schemas.openxmlformats.org/drawingml/2006/main">
               <a:ext uri="{FF2B5EF4-FFF2-40B4-BE49-F238E27FC236}">
-                <a16:creationId xmlns:a16="http://schemas.microsoft.com/office/drawing/2014/main" id="{03F0A580-CA7D-414F-BA2E-2886F4D3996D}"/>
+                <a16:creationId xmlns:a16="http://schemas.microsoft.com/office/drawing/2014/main" id="{C7C8B37E-3B00-4294-A6D8-1003F9850C35}"/>
               </a:ext>
             </a:extLst>
           </p:cNvPr>
@@ -12099,7 +12088,7 @@
           <p:cNvPr id="5" name="">
             <a:extLst xmlns:a="http://schemas.openxmlformats.org/drawingml/2006/main">
               <a:ext uri="{FF2B5EF4-FFF2-40B4-BE49-F238E27FC236}">
-                <a16:creationId xmlns:a16="http://schemas.microsoft.com/office/drawing/2014/main" id="{AE0803DB-6C1F-4E31-A4F2-F3D5C4D2074F}"/>
+                <a16:creationId xmlns:a16="http://schemas.microsoft.com/office/drawing/2014/main" id="{F99CD3ED-8EC8-47E8-BA56-255E855775C2}"/>
               </a:ext>
             </a:extLst>
           </p:cNvPr>
@@ -12157,7 +12146,7 @@
           <p:cNvPr id="6" name="">
             <a:extLst xmlns:a="http://schemas.openxmlformats.org/drawingml/2006/main">
               <a:ext uri="{FF2B5EF4-FFF2-40B4-BE49-F238E27FC236}">
-                <a16:creationId xmlns:a16="http://schemas.microsoft.com/office/drawing/2014/main" id="{E9DDCA33-023F-4D2B-B07D-7A0B43627242}"/>
+                <a16:creationId xmlns:a16="http://schemas.microsoft.com/office/drawing/2014/main" id="{F6DA468E-4C8A-4ED0-8404-CFA6EE7EAD15}"/>
               </a:ext>
             </a:extLst>
           </p:cNvPr>
@@ -12261,7 +12250,7 @@
           <p:cNvPr id="7" name="">
             <a:extLst xmlns:a="http://schemas.openxmlformats.org/drawingml/2006/main">
               <a:ext uri="{FF2B5EF4-FFF2-40B4-BE49-F238E27FC236}">
-                <a16:creationId xmlns:a16="http://schemas.microsoft.com/office/drawing/2014/main" id="{48EB9D33-CB60-473D-91EC-E909F713361B}"/>
+                <a16:creationId xmlns:a16="http://schemas.microsoft.com/office/drawing/2014/main" id="{3E7CD6F2-0787-43FF-B460-FB0818231CD5}"/>
               </a:ext>
             </a:extLst>
           </p:cNvPr>
@@ -12294,7 +12283,7 @@
           <p:cNvPr id="8" name="">
             <a:extLst xmlns:a="http://schemas.openxmlformats.org/drawingml/2006/main">
               <a:ext uri="{FF2B5EF4-FFF2-40B4-BE49-F238E27FC236}">
-                <a16:creationId xmlns:a16="http://schemas.microsoft.com/office/drawing/2014/main" id="{638DDF38-B7D6-4F48-A1BD-8659FA737AF2}"/>
+                <a16:creationId xmlns:a16="http://schemas.microsoft.com/office/drawing/2014/main" id="{B4F10D9E-28F6-4C56-958F-DC669B447E7C}"/>
               </a:ext>
             </a:extLst>
           </p:cNvPr>
@@ -12327,7 +12316,7 @@
           <p:cNvPr id="9" name="">
             <a:extLst xmlns:a="http://schemas.openxmlformats.org/drawingml/2006/main">
               <a:ext uri="{FF2B5EF4-FFF2-40B4-BE49-F238E27FC236}">
-                <a16:creationId xmlns:a16="http://schemas.microsoft.com/office/drawing/2014/main" id="{8887CD7D-E040-4E4F-97C7-B069188006AD}"/>
+                <a16:creationId xmlns:a16="http://schemas.microsoft.com/office/drawing/2014/main" id="{95D2163E-6780-479A-9B5F-889A5545B18F}"/>
               </a:ext>
             </a:extLst>
           </p:cNvPr>
@@ -12360,7 +12349,7 @@
           <p:cNvPr id="10" name="">
             <a:extLst xmlns:a="http://schemas.openxmlformats.org/drawingml/2006/main">
               <a:ext uri="{FF2B5EF4-FFF2-40B4-BE49-F238E27FC236}">
-                <a16:creationId xmlns:a16="http://schemas.microsoft.com/office/drawing/2014/main" id="{5A796821-EF85-4F79-8EC7-074EC6C116E1}"/>
+                <a16:creationId xmlns:a16="http://schemas.microsoft.com/office/drawing/2014/main" id="{130516C1-39DE-44C7-8EC3-BF28600A36A1}"/>
               </a:ext>
             </a:extLst>
           </p:cNvPr>
@@ -12418,7 +12407,7 @@
           <p:cNvPr id="11" name="">
             <a:extLst xmlns:a="http://schemas.openxmlformats.org/drawingml/2006/main">
               <a:ext uri="{FF2B5EF4-FFF2-40B4-BE49-F238E27FC236}">
-                <a16:creationId xmlns:a16="http://schemas.microsoft.com/office/drawing/2014/main" id="{F33F75BF-9DE7-45C8-8C36-897A10ED188D}"/>
+                <a16:creationId xmlns:a16="http://schemas.microsoft.com/office/drawing/2014/main" id="{E00E77C9-A757-4198-82B6-C166BC943B5B}"/>
               </a:ext>
             </a:extLst>
           </p:cNvPr>
@@ -12545,7 +12534,7 @@
           <p:cNvPr id="12" name="">
             <a:extLst xmlns:a="http://schemas.openxmlformats.org/drawingml/2006/main">
               <a:ext uri="{FF2B5EF4-FFF2-40B4-BE49-F238E27FC236}">
-                <a16:creationId xmlns:a16="http://schemas.microsoft.com/office/drawing/2014/main" id="{E43A0BDC-AC13-40BE-9758-373ADD4073D0}"/>
+                <a16:creationId xmlns:a16="http://schemas.microsoft.com/office/drawing/2014/main" id="{39474182-8168-4A16-B3CA-36D2E1C27F54}"/>
               </a:ext>
             </a:extLst>
           </p:cNvPr>
@@ -12578,7 +12567,7 @@
           <p:cNvPr id="13" name="">
             <a:extLst xmlns:a="http://schemas.openxmlformats.org/drawingml/2006/main">
               <a:ext uri="{FF2B5EF4-FFF2-40B4-BE49-F238E27FC236}">
-                <a16:creationId xmlns:a16="http://schemas.microsoft.com/office/drawing/2014/main" id="{07850436-A4A8-473D-A280-7CE443069B06}"/>
+                <a16:creationId xmlns:a16="http://schemas.microsoft.com/office/drawing/2014/main" id="{23FEC7CE-0F7C-4F37-86A0-7D0360558943}"/>
               </a:ext>
             </a:extLst>
           </p:cNvPr>
@@ -12611,7 +12600,7 @@
           <p:cNvPr id="14" name="">
             <a:extLst xmlns:a="http://schemas.openxmlformats.org/drawingml/2006/main">
               <a:ext uri="{FF2B5EF4-FFF2-40B4-BE49-F238E27FC236}">
-                <a16:creationId xmlns:a16="http://schemas.microsoft.com/office/drawing/2014/main" id="{08315548-6AB6-4948-809E-28821D97217B}"/>
+                <a16:creationId xmlns:a16="http://schemas.microsoft.com/office/drawing/2014/main" id="{D3A8559C-2C4E-43B8-ABD9-3C2877DB46C3}"/>
               </a:ext>
             </a:extLst>
           </p:cNvPr>
@@ -12644,7 +12633,7 @@
           <p:cNvPr id="15" name="">
             <a:extLst xmlns:a="http://schemas.openxmlformats.org/drawingml/2006/main">
               <a:ext uri="{FF2B5EF4-FFF2-40B4-BE49-F238E27FC236}">
-                <a16:creationId xmlns:a16="http://schemas.microsoft.com/office/drawing/2014/main" id="{884AC32F-423F-429A-B3B4-59049B4FB096}"/>
+                <a16:creationId xmlns:a16="http://schemas.microsoft.com/office/drawing/2014/main" id="{9A608CD1-0396-4F1B-9EDC-4C8530767454}"/>
               </a:ext>
             </a:extLst>
           </p:cNvPr>
@@ -12702,7 +12691,7 @@
           <p:cNvPr id="16" name="">
             <a:extLst xmlns:a="http://schemas.openxmlformats.org/drawingml/2006/main">
               <a:ext uri="{FF2B5EF4-FFF2-40B4-BE49-F238E27FC236}">
-                <a16:creationId xmlns:a16="http://schemas.microsoft.com/office/drawing/2014/main" id="{DDC5720C-0D63-4662-88B0-276C791A5D5C}"/>
+                <a16:creationId xmlns:a16="http://schemas.microsoft.com/office/drawing/2014/main" id="{E6A32B3B-142A-42D1-B7D8-BC99280FE121}"/>
               </a:ext>
             </a:extLst>
           </p:cNvPr>
@@ -12806,7 +12795,7 @@
           <p:cNvPr id="17" name="">
             <a:extLst xmlns:a="http://schemas.openxmlformats.org/drawingml/2006/main">
               <a:ext uri="{FF2B5EF4-FFF2-40B4-BE49-F238E27FC236}">
-                <a16:creationId xmlns:a16="http://schemas.microsoft.com/office/drawing/2014/main" id="{B58B49CA-6A7F-42C3-A463-DFCDAF1A705F}"/>
+                <a16:creationId xmlns:a16="http://schemas.microsoft.com/office/drawing/2014/main" id="{CA1482C0-2BE3-494C-B032-BD35190B988E}"/>
               </a:ext>
             </a:extLst>
           </p:cNvPr>
@@ -12839,7 +12828,7 @@
           <p:cNvPr id="18" name="">
             <a:extLst xmlns:a="http://schemas.openxmlformats.org/drawingml/2006/main">
               <a:ext uri="{FF2B5EF4-FFF2-40B4-BE49-F238E27FC236}">
-                <a16:creationId xmlns:a16="http://schemas.microsoft.com/office/drawing/2014/main" id="{C5ADB351-1EC3-44A9-B1DE-13D970A22858}"/>
+                <a16:creationId xmlns:a16="http://schemas.microsoft.com/office/drawing/2014/main" id="{584B8EDE-3F30-4CE1-BDF5-012628BB5E64}"/>
               </a:ext>
             </a:extLst>
           </p:cNvPr>
@@ -12897,7 +12886,7 @@
           <p:cNvPr id="19" name="">
             <a:extLst xmlns:a="http://schemas.openxmlformats.org/drawingml/2006/main">
               <a:ext uri="{FF2B5EF4-FFF2-40B4-BE49-F238E27FC236}">
-                <a16:creationId xmlns:a16="http://schemas.microsoft.com/office/drawing/2014/main" id="{0C288AF3-F919-4683-AA77-A8FF8F2E8BFF}"/>
+                <a16:creationId xmlns:a16="http://schemas.microsoft.com/office/drawing/2014/main" id="{A7D347E7-4AF3-4ACF-89F4-70391CB0F0F7}"/>
               </a:ext>
             </a:extLst>
           </p:cNvPr>
@@ -12955,7 +12944,7 @@
           <p:cNvPr id="20" name="">
             <a:extLst xmlns:a="http://schemas.openxmlformats.org/drawingml/2006/main">
               <a:ext uri="{FF2B5EF4-FFF2-40B4-BE49-F238E27FC236}">
-                <a16:creationId xmlns:a16="http://schemas.microsoft.com/office/drawing/2014/main" id="{8267F14D-A7B7-4A86-82E7-B6D278DB1539}"/>
+                <a16:creationId xmlns:a16="http://schemas.microsoft.com/office/drawing/2014/main" id="{4C5112ED-B697-439E-B691-A9C2304A6031}"/>
               </a:ext>
             </a:extLst>
           </p:cNvPr>
@@ -12988,7 +12977,7 @@
           <p:cNvPr id="21" name="">
             <a:extLst xmlns:a="http://schemas.openxmlformats.org/drawingml/2006/main">
               <a:ext uri="{FF2B5EF4-FFF2-40B4-BE49-F238E27FC236}">
-                <a16:creationId xmlns:a16="http://schemas.microsoft.com/office/drawing/2014/main" id="{6714466A-C87B-48D2-AB49-F5175B1F2741}"/>
+                <a16:creationId xmlns:a16="http://schemas.microsoft.com/office/drawing/2014/main" id="{F9F741D8-BD96-418C-8995-DD16D8A2B9F5}"/>
               </a:ext>
             </a:extLst>
           </p:cNvPr>
@@ -13046,7 +13035,7 @@
           <p:cNvPr id="22" name="">
             <a:extLst xmlns:a="http://schemas.openxmlformats.org/drawingml/2006/main">
               <a:ext uri="{FF2B5EF4-FFF2-40B4-BE49-F238E27FC236}">
-                <a16:creationId xmlns:a16="http://schemas.microsoft.com/office/drawing/2014/main" id="{BBDFE894-5E73-4D7F-9347-E572731D1311}"/>
+                <a16:creationId xmlns:a16="http://schemas.microsoft.com/office/drawing/2014/main" id="{E6BA8343-42F3-49E8-8ACB-8542AA25775B}"/>
               </a:ext>
             </a:extLst>
           </p:cNvPr>
@@ -13104,7 +13093,7 @@
           <p:cNvPr id="23" name="">
             <a:extLst xmlns:a="http://schemas.openxmlformats.org/drawingml/2006/main">
               <a:ext uri="{FF2B5EF4-FFF2-40B4-BE49-F238E27FC236}">
-                <a16:creationId xmlns:a16="http://schemas.microsoft.com/office/drawing/2014/main" id="{D854D415-C556-4658-B9AA-7E8266231BFC}"/>
+                <a16:creationId xmlns:a16="http://schemas.microsoft.com/office/drawing/2014/main" id="{70E6456C-9D9D-4753-A5D0-95933AC33609}"/>
               </a:ext>
             </a:extLst>
           </p:cNvPr>
@@ -13137,7 +13126,7 @@
           <p:cNvPr id="24" name="">
             <a:extLst xmlns:a="http://schemas.openxmlformats.org/drawingml/2006/main">
               <a:ext uri="{FF2B5EF4-FFF2-40B4-BE49-F238E27FC236}">
-                <a16:creationId xmlns:a16="http://schemas.microsoft.com/office/drawing/2014/main" id="{61FBEBCB-E946-4F75-98A5-FDC6E6467AAB}"/>
+                <a16:creationId xmlns:a16="http://schemas.microsoft.com/office/drawing/2014/main" id="{B4FA27E5-0073-4F79-AA57-79D9B7F36AF2}"/>
               </a:ext>
             </a:extLst>
           </p:cNvPr>
@@ -13195,7 +13184,7 @@
           <p:cNvPr id="25" name="">
             <a:extLst xmlns:a="http://schemas.openxmlformats.org/drawingml/2006/main">
               <a:ext uri="{FF2B5EF4-FFF2-40B4-BE49-F238E27FC236}">
-                <a16:creationId xmlns:a16="http://schemas.microsoft.com/office/drawing/2014/main" id="{E6C15830-E9A7-4A84-B30A-0993D6857118}"/>
+                <a16:creationId xmlns:a16="http://schemas.microsoft.com/office/drawing/2014/main" id="{D811CDBA-4947-42C2-86DD-13B71C86AB59}"/>
               </a:ext>
             </a:extLst>
           </p:cNvPr>
@@ -13253,7 +13242,7 @@
           <p:cNvPr id="26" name="">
             <a:extLst xmlns:a="http://schemas.openxmlformats.org/drawingml/2006/main">
               <a:ext uri="{FF2B5EF4-FFF2-40B4-BE49-F238E27FC236}">
-                <a16:creationId xmlns:a16="http://schemas.microsoft.com/office/drawing/2014/main" id="{C203CC74-40A7-4C73-8F14-C45894B3AA79}"/>
+                <a16:creationId xmlns:a16="http://schemas.microsoft.com/office/drawing/2014/main" id="{65D68B80-B326-437F-BAB8-551CB2E1930B}"/>
               </a:ext>
             </a:extLst>
           </p:cNvPr>
@@ -13286,7 +13275,7 @@
           <p:cNvPr id="27" name="">
             <a:extLst xmlns:a="http://schemas.openxmlformats.org/drawingml/2006/main">
               <a:ext uri="{FF2B5EF4-FFF2-40B4-BE49-F238E27FC236}">
-                <a16:creationId xmlns:a16="http://schemas.microsoft.com/office/drawing/2014/main" id="{846304C2-9935-4B2C-B977-C0AE45F0E9E8}"/>
+                <a16:creationId xmlns:a16="http://schemas.microsoft.com/office/drawing/2014/main" id="{6FA1C5D0-7905-460F-9921-DD5EACB22B63}"/>
               </a:ext>
             </a:extLst>
           </p:cNvPr>
@@ -13344,7 +13333,7 @@
           <p:cNvPr id="28" name="">
             <a:extLst xmlns:a="http://schemas.openxmlformats.org/drawingml/2006/main">
               <a:ext uri="{FF2B5EF4-FFF2-40B4-BE49-F238E27FC236}">
-                <a16:creationId xmlns:a16="http://schemas.microsoft.com/office/drawing/2014/main" id="{A6875E3A-B961-46E4-9E96-197BA0F7B26A}"/>
+                <a16:creationId xmlns:a16="http://schemas.microsoft.com/office/drawing/2014/main" id="{242932EF-978B-439F-B303-A8C53633B69F}"/>
               </a:ext>
             </a:extLst>
           </p:cNvPr>
@@ -13402,7 +13391,7 @@
           <p:cNvPr id="29" name="">
             <a:extLst xmlns:a="http://schemas.openxmlformats.org/drawingml/2006/main">
               <a:ext uri="{FF2B5EF4-FFF2-40B4-BE49-F238E27FC236}">
-                <a16:creationId xmlns:a16="http://schemas.microsoft.com/office/drawing/2014/main" id="{0F5F7505-29F6-4A55-B7A9-6BE8ABC09156}"/>
+                <a16:creationId xmlns:a16="http://schemas.microsoft.com/office/drawing/2014/main" id="{6162685C-6C83-48AC-93D5-99507F3C001E}"/>
               </a:ext>
             </a:extLst>
           </p:cNvPr>
@@ -13435,7 +13424,7 @@
           <p:cNvPr id="30" name="">
             <a:extLst xmlns:a="http://schemas.openxmlformats.org/drawingml/2006/main">
               <a:ext uri="{FF2B5EF4-FFF2-40B4-BE49-F238E27FC236}">
-                <a16:creationId xmlns:a16="http://schemas.microsoft.com/office/drawing/2014/main" id="{B60CBBE1-E750-452C-BCB0-208000F1BE1D}"/>
+                <a16:creationId xmlns:a16="http://schemas.microsoft.com/office/drawing/2014/main" id="{08E924C6-4519-49AA-BA01-A8BEBA40C30B}"/>
               </a:ext>
             </a:extLst>
           </p:cNvPr>
@@ -13493,7 +13482,7 @@
           <p:cNvPr id="31" name="">
             <a:extLst xmlns:a="http://schemas.openxmlformats.org/drawingml/2006/main">
               <a:ext uri="{FF2B5EF4-FFF2-40B4-BE49-F238E27FC236}">
-                <a16:creationId xmlns:a16="http://schemas.microsoft.com/office/drawing/2014/main" id="{19654592-53A5-4BA5-92AD-C5A90F6D1A6A}"/>
+                <a16:creationId xmlns:a16="http://schemas.microsoft.com/office/drawing/2014/main" id="{7657B70E-1A9B-446B-B01F-1AACEC9EFFAE}"/>
               </a:ext>
             </a:extLst>
           </p:cNvPr>
@@ -13551,7 +13540,7 @@
           <p:cNvPr id="32" name="">
             <a:extLst xmlns:a="http://schemas.openxmlformats.org/drawingml/2006/main">
               <a:ext uri="{FF2B5EF4-FFF2-40B4-BE49-F238E27FC236}">
-                <a16:creationId xmlns:a16="http://schemas.microsoft.com/office/drawing/2014/main" id="{267FC4C0-D65B-4964-9E9C-B7295D5A9C30}"/>
+                <a16:creationId xmlns:a16="http://schemas.microsoft.com/office/drawing/2014/main" id="{CAFBAD0E-C8F4-47ED-9705-65837F20E80D}"/>
               </a:ext>
             </a:extLst>
           </p:cNvPr>
@@ -13584,7 +13573,7 @@
           <p:cNvPr id="33" name="">
             <a:extLst xmlns:a="http://schemas.openxmlformats.org/drawingml/2006/main">
               <a:ext uri="{FF2B5EF4-FFF2-40B4-BE49-F238E27FC236}">
-                <a16:creationId xmlns:a16="http://schemas.microsoft.com/office/drawing/2014/main" id="{6698AFE1-0E6B-40C5-9609-3B718C3CA419}"/>
+                <a16:creationId xmlns:a16="http://schemas.microsoft.com/office/drawing/2014/main" id="{AFDCE8EA-C259-49E5-85CF-C9809C599AF8}"/>
               </a:ext>
             </a:extLst>
           </p:cNvPr>
@@ -13642,7 +13631,7 @@
           <p:cNvPr id="34" name="">
             <a:extLst xmlns:a="http://schemas.openxmlformats.org/drawingml/2006/main">
               <a:ext uri="{FF2B5EF4-FFF2-40B4-BE49-F238E27FC236}">
-                <a16:creationId xmlns:a16="http://schemas.microsoft.com/office/drawing/2014/main" id="{7576D5FC-5084-4989-822C-12C926250FA8}"/>
+                <a16:creationId xmlns:a16="http://schemas.microsoft.com/office/drawing/2014/main" id="{1C6B0F67-F09A-4B4B-A207-FD9DF3971A16}"/>
               </a:ext>
             </a:extLst>
           </p:cNvPr>
@@ -13700,7 +13689,7 @@
           <p:cNvPr id="35" name="">
             <a:extLst xmlns:a="http://schemas.openxmlformats.org/drawingml/2006/main">
               <a:ext uri="{FF2B5EF4-FFF2-40B4-BE49-F238E27FC236}">
-                <a16:creationId xmlns:a16="http://schemas.microsoft.com/office/drawing/2014/main" id="{1BB91C92-BA92-4DEE-B56B-5ACB5DDA7E9D}"/>
+                <a16:creationId xmlns:a16="http://schemas.microsoft.com/office/drawing/2014/main" id="{FB0E61EF-2214-4949-9B57-1FEF3F6D6499}"/>
               </a:ext>
             </a:extLst>
           </p:cNvPr>
@@ -13733,7 +13722,7 @@
           <p:cNvPr id="36" name="">
             <a:extLst xmlns:a="http://schemas.openxmlformats.org/drawingml/2006/main">
               <a:ext uri="{FF2B5EF4-FFF2-40B4-BE49-F238E27FC236}">
-                <a16:creationId xmlns:a16="http://schemas.microsoft.com/office/drawing/2014/main" id="{2A517542-95C8-400F-B3B8-E364911DF125}"/>
+                <a16:creationId xmlns:a16="http://schemas.microsoft.com/office/drawing/2014/main" id="{448DDEFA-7C10-47A8-AFCD-71905D71B290}"/>
               </a:ext>
             </a:extLst>
           </p:cNvPr>
@@ -13791,7 +13780,7 @@
                 <a:latin typeface="Microsoft YaHei"/>
                 <a:ea typeface="Microsoft YaHei"/>
                 <a:cs typeface="Microsoft YaHei"/>
-                <a:hlinkClick xmlns:r="http://schemas.openxmlformats.org/officeDocument/2006/relationships" r:id="R1fe9f2fa25f949a5"/>
+                <a:hlinkClick xmlns:r="http://schemas.openxmlformats.org/officeDocument/2006/relationships" r:id="R2ea35dba60b9464f"/>
               </a:rPr>
               <a:t>OpenSpec GitHub</a:t>
             </a:r>
@@ -13803,7 +13792,7 @@
           <p:cNvPr id="37" name="">
             <a:extLst xmlns:a="http://schemas.openxmlformats.org/drawingml/2006/main">
               <a:ext uri="{FF2B5EF4-FFF2-40B4-BE49-F238E27FC236}">
-                <a16:creationId xmlns:a16="http://schemas.microsoft.com/office/drawing/2014/main" id="{F0EB62D4-24AD-4B07-8D5F-D4E70A1C93D7}"/>
+                <a16:creationId xmlns:a16="http://schemas.microsoft.com/office/drawing/2014/main" id="{BDDE8020-800D-4CFB-A606-17E91CD48E5E}"/>
               </a:ext>
             </a:extLst>
           </p:cNvPr>
@@ -13859,7 +13848,7 @@
     </p:spTree>
     <p:extLst>
       <p:ext uri="{BB962C8B-B14F-4D97-AF65-F5344CB8AC3E}">
-        <p14:creationId xmlns:p14="http://schemas.microsoft.com/office/powerpoint/2010/main" val="454533010"/>
+        <p14:creationId xmlns:p14="http://schemas.microsoft.com/office/powerpoint/2010/main" val="1024757549"/>
       </p:ext>
     </p:extLst>
   </p:cSld>
@@ -13890,7 +13879,7 @@
           <p:cNvPr id="59" name="">
             <a:extLst xmlns:a="http://schemas.openxmlformats.org/drawingml/2006/main">
               <a:ext uri="{FF2B5EF4-FFF2-40B4-BE49-F238E27FC236}">
-                <a16:creationId xmlns:a16="http://schemas.microsoft.com/office/drawing/2014/main" id="{DE2771C5-50F5-481F-8088-4177E228E252}"/>
+                <a16:creationId xmlns:a16="http://schemas.microsoft.com/office/drawing/2014/main" id="{015B827A-B3CD-4642-86FC-E60D363CF575}"/>
               </a:ext>
             </a:extLst>
           </p:cNvPr>
@@ -13923,7 +13912,7 @@
           <p:cNvPr id="2" name="">
             <a:extLst xmlns:a="http://schemas.openxmlformats.org/drawingml/2006/main">
               <a:ext uri="{FF2B5EF4-FFF2-40B4-BE49-F238E27FC236}">
-                <a16:creationId xmlns:a16="http://schemas.microsoft.com/office/drawing/2014/main" id="{D6B37717-BF97-40C1-A97E-C857B3E23134}"/>
+                <a16:creationId xmlns:a16="http://schemas.microsoft.com/office/drawing/2014/main" id="{880570BC-19BE-4B12-A5F5-E7A1384DC308}"/>
               </a:ext>
             </a:extLst>
           </p:cNvPr>
@@ -13981,7 +13970,7 @@
           <p:cNvPr id="3" name="">
             <a:extLst xmlns:a="http://schemas.openxmlformats.org/drawingml/2006/main">
               <a:ext uri="{FF2B5EF4-FFF2-40B4-BE49-F238E27FC236}">
-                <a16:creationId xmlns:a16="http://schemas.microsoft.com/office/drawing/2014/main" id="{EAC4F0A6-5631-49BB-970D-1400B394245C}"/>
+                <a16:creationId xmlns:a16="http://schemas.microsoft.com/office/drawing/2014/main" id="{6D30355E-225C-4F0A-AE8C-C61D45362196}"/>
               </a:ext>
             </a:extLst>
           </p:cNvPr>
@@ -14039,7 +14028,7 @@
           <p:cNvPr id="4" name="">
             <a:extLst xmlns:a="http://schemas.openxmlformats.org/drawingml/2006/main">
               <a:ext uri="{FF2B5EF4-FFF2-40B4-BE49-F238E27FC236}">
-                <a16:creationId xmlns:a16="http://schemas.microsoft.com/office/drawing/2014/main" id="{C23A3165-EA8B-4B75-BEAC-AB039AB22C92}"/>
+                <a16:creationId xmlns:a16="http://schemas.microsoft.com/office/drawing/2014/main" id="{2CD48820-C807-4E7F-AF37-5FC4F3D97E4D}"/>
               </a:ext>
             </a:extLst>
           </p:cNvPr>
@@ -14072,7 +14061,7 @@
           <p:cNvPr id="5" name="">
             <a:extLst xmlns:a="http://schemas.openxmlformats.org/drawingml/2006/main">
               <a:ext uri="{FF2B5EF4-FFF2-40B4-BE49-F238E27FC236}">
-                <a16:creationId xmlns:a16="http://schemas.microsoft.com/office/drawing/2014/main" id="{5369F8D7-66B6-48B7-A48B-34EDF66F3008}"/>
+                <a16:creationId xmlns:a16="http://schemas.microsoft.com/office/drawing/2014/main" id="{E2A1F0B0-DD60-4390-80DA-9BA86AF10180}"/>
               </a:ext>
             </a:extLst>
           </p:cNvPr>
@@ -14130,7 +14119,7 @@
           <p:cNvPr id="6" name="">
             <a:extLst xmlns:a="http://schemas.openxmlformats.org/drawingml/2006/main">
               <a:ext uri="{FF2B5EF4-FFF2-40B4-BE49-F238E27FC236}">
-                <a16:creationId xmlns:a16="http://schemas.microsoft.com/office/drawing/2014/main" id="{DA648D52-A0C5-44F4-98DB-0FE33D64273F}"/>
+                <a16:creationId xmlns:a16="http://schemas.microsoft.com/office/drawing/2014/main" id="{AFAA14C4-DFFA-4E8D-B9CF-AF75137D34F6}"/>
               </a:ext>
             </a:extLst>
           </p:cNvPr>
@@ -14163,7 +14152,7 @@
           <p:cNvPr id="7" name="">
             <a:extLst xmlns:a="http://schemas.openxmlformats.org/drawingml/2006/main">
               <a:ext uri="{FF2B5EF4-FFF2-40B4-BE49-F238E27FC236}">
-                <a16:creationId xmlns:a16="http://schemas.microsoft.com/office/drawing/2014/main" id="{B99B254D-A4B7-4DC2-907D-6E270F789BC7}"/>
+                <a16:creationId xmlns:a16="http://schemas.microsoft.com/office/drawing/2014/main" id="{2C3C9689-FB08-4262-928A-42E71614E704}"/>
               </a:ext>
             </a:extLst>
           </p:cNvPr>
@@ -14221,7 +14210,7 @@
           <p:cNvPr id="8" name="">
             <a:extLst xmlns:a="http://schemas.openxmlformats.org/drawingml/2006/main">
               <a:ext uri="{FF2B5EF4-FFF2-40B4-BE49-F238E27FC236}">
-                <a16:creationId xmlns:a16="http://schemas.microsoft.com/office/drawing/2014/main" id="{F631006F-B937-46F0-B638-0584002910F9}"/>
+                <a16:creationId xmlns:a16="http://schemas.microsoft.com/office/drawing/2014/main" id="{7CC2840D-8CA7-4B5A-8E7A-7CD5561A7063}"/>
               </a:ext>
             </a:extLst>
           </p:cNvPr>
@@ -14254,7 +14243,7 @@
           <p:cNvPr id="9" name="">
             <a:extLst xmlns:a="http://schemas.openxmlformats.org/drawingml/2006/main">
               <a:ext uri="{FF2B5EF4-FFF2-40B4-BE49-F238E27FC236}">
-                <a16:creationId xmlns:a16="http://schemas.microsoft.com/office/drawing/2014/main" id="{1EA13D24-8B45-4AA7-9270-BC0387E33062}"/>
+                <a16:creationId xmlns:a16="http://schemas.microsoft.com/office/drawing/2014/main" id="{A8086234-4065-4BB8-A9CF-EE53A86CFFD8}"/>
               </a:ext>
             </a:extLst>
           </p:cNvPr>
@@ -14312,7 +14301,7 @@
           <p:cNvPr id="10" name="">
             <a:extLst xmlns:a="http://schemas.openxmlformats.org/drawingml/2006/main">
               <a:ext uri="{FF2B5EF4-FFF2-40B4-BE49-F238E27FC236}">
-                <a16:creationId xmlns:a16="http://schemas.microsoft.com/office/drawing/2014/main" id="{7BB68676-6C5C-4A8D-90B7-E114CAFCCF4E}"/>
+                <a16:creationId xmlns:a16="http://schemas.microsoft.com/office/drawing/2014/main" id="{8908D5F5-9677-4DAE-BDAB-949D7790C225}"/>
               </a:ext>
             </a:extLst>
           </p:cNvPr>
@@ -14345,7 +14334,7 @@
           <p:cNvPr id="11" name="">
             <a:extLst xmlns:a="http://schemas.openxmlformats.org/drawingml/2006/main">
               <a:ext uri="{FF2B5EF4-FFF2-40B4-BE49-F238E27FC236}">
-                <a16:creationId xmlns:a16="http://schemas.microsoft.com/office/drawing/2014/main" id="{D670E077-22EC-486F-8A29-073DD186589D}"/>
+                <a16:creationId xmlns:a16="http://schemas.microsoft.com/office/drawing/2014/main" id="{0A3A9474-1FC9-41D1-B541-AFD419A17340}"/>
               </a:ext>
             </a:extLst>
           </p:cNvPr>
@@ -14403,7 +14392,7 @@
           <p:cNvPr id="12" name="">
             <a:extLst xmlns:a="http://schemas.openxmlformats.org/drawingml/2006/main">
               <a:ext uri="{FF2B5EF4-FFF2-40B4-BE49-F238E27FC236}">
-                <a16:creationId xmlns:a16="http://schemas.microsoft.com/office/drawing/2014/main" id="{9D959345-7AB7-4CF3-94DF-83CA148B1E61}"/>
+                <a16:creationId xmlns:a16="http://schemas.microsoft.com/office/drawing/2014/main" id="{3BA7575A-27F3-43B3-83EC-A7A77B1C00B5}"/>
               </a:ext>
             </a:extLst>
           </p:cNvPr>
@@ -14436,7 +14425,7 @@
           <p:cNvPr id="13" name="">
             <a:extLst xmlns:a="http://schemas.openxmlformats.org/drawingml/2006/main">
               <a:ext uri="{FF2B5EF4-FFF2-40B4-BE49-F238E27FC236}">
-                <a16:creationId xmlns:a16="http://schemas.microsoft.com/office/drawing/2014/main" id="{5256B831-E436-469D-9A71-F1C37103C8C7}"/>
+                <a16:creationId xmlns:a16="http://schemas.microsoft.com/office/drawing/2014/main" id="{E2E56F7F-5EEA-484D-ADE5-1CAF47D10587}"/>
               </a:ext>
             </a:extLst>
           </p:cNvPr>
@@ -14494,7 +14483,7 @@
           <p:cNvPr id="14" name="">
             <a:extLst xmlns:a="http://schemas.openxmlformats.org/drawingml/2006/main">
               <a:ext uri="{FF2B5EF4-FFF2-40B4-BE49-F238E27FC236}">
-                <a16:creationId xmlns:a16="http://schemas.microsoft.com/office/drawing/2014/main" id="{4173D2A2-136E-4C21-B198-25FC4F69F963}"/>
+                <a16:creationId xmlns:a16="http://schemas.microsoft.com/office/drawing/2014/main" id="{BA4462D3-CA17-4286-A3EE-7ADFB46AF2E7}"/>
               </a:ext>
             </a:extLst>
           </p:cNvPr>
@@ -14527,7 +14516,7 @@
           <p:cNvPr id="15" name="">
             <a:extLst xmlns:a="http://schemas.openxmlformats.org/drawingml/2006/main">
               <a:ext uri="{FF2B5EF4-FFF2-40B4-BE49-F238E27FC236}">
-                <a16:creationId xmlns:a16="http://schemas.microsoft.com/office/drawing/2014/main" id="{14DB6615-03C3-4284-BBC2-180267820BB5}"/>
+                <a16:creationId xmlns:a16="http://schemas.microsoft.com/office/drawing/2014/main" id="{52AD2D41-4F7B-4065-892F-D58048F29F67}"/>
               </a:ext>
             </a:extLst>
           </p:cNvPr>
@@ -14585,7 +14574,7 @@
           <p:cNvPr id="16" name="">
             <a:extLst xmlns:a="http://schemas.openxmlformats.org/drawingml/2006/main">
               <a:ext uri="{FF2B5EF4-FFF2-40B4-BE49-F238E27FC236}">
-                <a16:creationId xmlns:a16="http://schemas.microsoft.com/office/drawing/2014/main" id="{450B62EB-5691-4F52-80F1-4AC7DD096E39}"/>
+                <a16:creationId xmlns:a16="http://schemas.microsoft.com/office/drawing/2014/main" id="{3DB91B1C-7361-42BE-8B63-88330375C173}"/>
               </a:ext>
             </a:extLst>
           </p:cNvPr>
@@ -14618,7 +14607,7 @@
           <p:cNvPr id="17" name="">
             <a:extLst xmlns:a="http://schemas.openxmlformats.org/drawingml/2006/main">
               <a:ext uri="{FF2B5EF4-FFF2-40B4-BE49-F238E27FC236}">
-                <a16:creationId xmlns:a16="http://schemas.microsoft.com/office/drawing/2014/main" id="{2D1F1FE7-45F5-4E95-8C18-BE47BDF08D87}"/>
+                <a16:creationId xmlns:a16="http://schemas.microsoft.com/office/drawing/2014/main" id="{D5FE77DB-F4ED-4B81-8683-C302FB6858AB}"/>
               </a:ext>
             </a:extLst>
           </p:cNvPr>
@@ -14676,7 +14665,7 @@
           <p:cNvPr id="18" name="">
             <a:extLst xmlns:a="http://schemas.openxmlformats.org/drawingml/2006/main">
               <a:ext uri="{FF2B5EF4-FFF2-40B4-BE49-F238E27FC236}">
-                <a16:creationId xmlns:a16="http://schemas.microsoft.com/office/drawing/2014/main" id="{4C0344B5-44D9-4A34-972A-8FDD1B35A173}"/>
+                <a16:creationId xmlns:a16="http://schemas.microsoft.com/office/drawing/2014/main" id="{3A335B9C-B1B7-4CC0-A91A-B67F9895F112}"/>
               </a:ext>
             </a:extLst>
           </p:cNvPr>
@@ -14709,7 +14698,7 @@
           <p:cNvPr id="19" name="">
             <a:extLst xmlns:a="http://schemas.openxmlformats.org/drawingml/2006/main">
               <a:ext uri="{FF2B5EF4-FFF2-40B4-BE49-F238E27FC236}">
-                <a16:creationId xmlns:a16="http://schemas.microsoft.com/office/drawing/2014/main" id="{812E02F3-54ED-41FF-A106-1E3CBE307560}"/>
+                <a16:creationId xmlns:a16="http://schemas.microsoft.com/office/drawing/2014/main" id="{E6DC0159-158F-4FD9-B753-6F45D29584C2}"/>
               </a:ext>
             </a:extLst>
           </p:cNvPr>
@@ -14767,7 +14756,7 @@
           <p:cNvPr id="20" name="">
             <a:extLst xmlns:a="http://schemas.openxmlformats.org/drawingml/2006/main">
               <a:ext uri="{FF2B5EF4-FFF2-40B4-BE49-F238E27FC236}">
-                <a16:creationId xmlns:a16="http://schemas.microsoft.com/office/drawing/2014/main" id="{C03D69CD-D137-4E61-B6EE-5C98F8155850}"/>
+                <a16:creationId xmlns:a16="http://schemas.microsoft.com/office/drawing/2014/main" id="{A16DF3B5-D89A-4677-895F-CC29B029991B}"/>
               </a:ext>
             </a:extLst>
           </p:cNvPr>
@@ -14800,7 +14789,7 @@
           <p:cNvPr id="21" name="">
             <a:extLst xmlns:a="http://schemas.openxmlformats.org/drawingml/2006/main">
               <a:ext uri="{FF2B5EF4-FFF2-40B4-BE49-F238E27FC236}">
-                <a16:creationId xmlns:a16="http://schemas.microsoft.com/office/drawing/2014/main" id="{B40FEBC6-BD79-46A7-9763-B892A2A840A6}"/>
+                <a16:creationId xmlns:a16="http://schemas.microsoft.com/office/drawing/2014/main" id="{F77CD307-7ECB-4061-8068-8C48775B00F1}"/>
               </a:ext>
             </a:extLst>
           </p:cNvPr>
@@ -14858,7 +14847,7 @@
           <p:cNvPr id="22" name="">
             <a:extLst xmlns:a="http://schemas.openxmlformats.org/drawingml/2006/main">
               <a:ext uri="{FF2B5EF4-FFF2-40B4-BE49-F238E27FC236}">
-                <a16:creationId xmlns:a16="http://schemas.microsoft.com/office/drawing/2014/main" id="{A421125B-2576-49AE-A23C-DC762878EF08}"/>
+                <a16:creationId xmlns:a16="http://schemas.microsoft.com/office/drawing/2014/main" id="{F5733665-1D92-4E2C-BD32-7A08F3EC1369}"/>
               </a:ext>
             </a:extLst>
           </p:cNvPr>
@@ -14891,7 +14880,7 @@
           <p:cNvPr id="23" name="">
             <a:extLst xmlns:a="http://schemas.openxmlformats.org/drawingml/2006/main">
               <a:ext uri="{FF2B5EF4-FFF2-40B4-BE49-F238E27FC236}">
-                <a16:creationId xmlns:a16="http://schemas.microsoft.com/office/drawing/2014/main" id="{DAD864DA-E2F0-4F99-B5DD-690FDACC326C}"/>
+                <a16:creationId xmlns:a16="http://schemas.microsoft.com/office/drawing/2014/main" id="{AFBB50EA-AF10-4522-B1AC-08D098770053}"/>
               </a:ext>
             </a:extLst>
           </p:cNvPr>
@@ -14949,7 +14938,7 @@
           <p:cNvPr id="24" name="">
             <a:extLst xmlns:a="http://schemas.openxmlformats.org/drawingml/2006/main">
               <a:ext uri="{FF2B5EF4-FFF2-40B4-BE49-F238E27FC236}">
-                <a16:creationId xmlns:a16="http://schemas.microsoft.com/office/drawing/2014/main" id="{ED856241-74DC-493D-80CB-6E2AEB287022}"/>
+                <a16:creationId xmlns:a16="http://schemas.microsoft.com/office/drawing/2014/main" id="{BBF497F6-9D47-48C0-A7B9-F375CA10366A}"/>
               </a:ext>
             </a:extLst>
           </p:cNvPr>
@@ -14982,7 +14971,7 @@
           <p:cNvPr id="25" name="">
             <a:extLst xmlns:a="http://schemas.openxmlformats.org/drawingml/2006/main">
               <a:ext uri="{FF2B5EF4-FFF2-40B4-BE49-F238E27FC236}">
-                <a16:creationId xmlns:a16="http://schemas.microsoft.com/office/drawing/2014/main" id="{0235819C-C95D-4FC4-A911-35E20D41E644}"/>
+                <a16:creationId xmlns:a16="http://schemas.microsoft.com/office/drawing/2014/main" id="{668459FE-5FA2-4268-BF9C-0F0EBF421E1A}"/>
               </a:ext>
             </a:extLst>
           </p:cNvPr>
@@ -15040,7 +15029,7 @@
           <p:cNvPr id="26" name="">
             <a:extLst xmlns:a="http://schemas.openxmlformats.org/drawingml/2006/main">
               <a:ext uri="{FF2B5EF4-FFF2-40B4-BE49-F238E27FC236}">
-                <a16:creationId xmlns:a16="http://schemas.microsoft.com/office/drawing/2014/main" id="{445E5317-E287-4FBE-A704-78A197476D5E}"/>
+                <a16:creationId xmlns:a16="http://schemas.microsoft.com/office/drawing/2014/main" id="{E42C0E35-DF19-43CC-8991-35C39885C5BB}"/>
               </a:ext>
             </a:extLst>
           </p:cNvPr>
@@ -15073,7 +15062,7 @@
           <p:cNvPr id="27" name="">
             <a:extLst xmlns:a="http://schemas.openxmlformats.org/drawingml/2006/main">
               <a:ext uri="{FF2B5EF4-FFF2-40B4-BE49-F238E27FC236}">
-                <a16:creationId xmlns:a16="http://schemas.microsoft.com/office/drawing/2014/main" id="{1DFE02A2-F1C0-4647-A94F-16475C8C6DC2}"/>
+                <a16:creationId xmlns:a16="http://schemas.microsoft.com/office/drawing/2014/main" id="{4AAF1357-42C0-4B38-BD48-553AE0A5E1BA}"/>
               </a:ext>
             </a:extLst>
           </p:cNvPr>
@@ -15131,7 +15120,7 @@
           <p:cNvPr id="28" name="">
             <a:extLst xmlns:a="http://schemas.openxmlformats.org/drawingml/2006/main">
               <a:ext uri="{FF2B5EF4-FFF2-40B4-BE49-F238E27FC236}">
-                <a16:creationId xmlns:a16="http://schemas.microsoft.com/office/drawing/2014/main" id="{C38FC42E-10C4-4A06-88F7-5596D2B1F949}"/>
+                <a16:creationId xmlns:a16="http://schemas.microsoft.com/office/drawing/2014/main" id="{16577099-2EAB-4F36-A90E-CF849FE56090}"/>
               </a:ext>
             </a:extLst>
           </p:cNvPr>
@@ -15164,7 +15153,7 @@
           <p:cNvPr id="29" name="">
             <a:extLst xmlns:a="http://schemas.openxmlformats.org/drawingml/2006/main">
               <a:ext uri="{FF2B5EF4-FFF2-40B4-BE49-F238E27FC236}">
-                <a16:creationId xmlns:a16="http://schemas.microsoft.com/office/drawing/2014/main" id="{5B9450EA-6109-488F-8CA8-D41439A68504}"/>
+                <a16:creationId xmlns:a16="http://schemas.microsoft.com/office/drawing/2014/main" id="{54749223-0AA4-49AF-844A-2487F310B396}"/>
               </a:ext>
             </a:extLst>
           </p:cNvPr>
@@ -15222,7 +15211,7 @@
           <p:cNvPr id="30" name="">
             <a:extLst xmlns:a="http://schemas.openxmlformats.org/drawingml/2006/main">
               <a:ext uri="{FF2B5EF4-FFF2-40B4-BE49-F238E27FC236}">
-                <a16:creationId xmlns:a16="http://schemas.microsoft.com/office/drawing/2014/main" id="{67286A03-E809-4E45-A36E-FC16DEEC601C}"/>
+                <a16:creationId xmlns:a16="http://schemas.microsoft.com/office/drawing/2014/main" id="{389632FB-4AAF-4BFD-AE0B-6E0BB1C1AE1A}"/>
               </a:ext>
             </a:extLst>
           </p:cNvPr>
@@ -15255,7 +15244,7 @@
           <p:cNvPr id="31" name="">
             <a:extLst xmlns:a="http://schemas.openxmlformats.org/drawingml/2006/main">
               <a:ext uri="{FF2B5EF4-FFF2-40B4-BE49-F238E27FC236}">
-                <a16:creationId xmlns:a16="http://schemas.microsoft.com/office/drawing/2014/main" id="{89E3A3B7-5120-4072-9868-3AF444F89832}"/>
+                <a16:creationId xmlns:a16="http://schemas.microsoft.com/office/drawing/2014/main" id="{E50D65CC-1C4E-4973-B2AE-1ADD730EC018}"/>
               </a:ext>
             </a:extLst>
           </p:cNvPr>
@@ -15313,7 +15302,7 @@
           <p:cNvPr id="32" name="">
             <a:extLst xmlns:a="http://schemas.openxmlformats.org/drawingml/2006/main">
               <a:ext uri="{FF2B5EF4-FFF2-40B4-BE49-F238E27FC236}">
-                <a16:creationId xmlns:a16="http://schemas.microsoft.com/office/drawing/2014/main" id="{F35125DF-3453-401F-A06D-826E6A72D8B5}"/>
+                <a16:creationId xmlns:a16="http://schemas.microsoft.com/office/drawing/2014/main" id="{CAC34C11-DF00-46FD-A8D9-21E852821516}"/>
               </a:ext>
             </a:extLst>
           </p:cNvPr>
@@ -15346,7 +15335,7 @@
           <p:cNvPr id="33" name="">
             <a:extLst xmlns:a="http://schemas.openxmlformats.org/drawingml/2006/main">
               <a:ext uri="{FF2B5EF4-FFF2-40B4-BE49-F238E27FC236}">
-                <a16:creationId xmlns:a16="http://schemas.microsoft.com/office/drawing/2014/main" id="{F555B140-5428-4D37-AEF7-E7FC9DB0AAA5}"/>
+                <a16:creationId xmlns:a16="http://schemas.microsoft.com/office/drawing/2014/main" id="{E7CCA47C-681C-4460-B810-45DF9341D46A}"/>
               </a:ext>
             </a:extLst>
           </p:cNvPr>
@@ -15404,7 +15393,7 @@
           <p:cNvPr id="34" name="">
             <a:extLst xmlns:a="http://schemas.openxmlformats.org/drawingml/2006/main">
               <a:ext uri="{FF2B5EF4-FFF2-40B4-BE49-F238E27FC236}">
-                <a16:creationId xmlns:a16="http://schemas.microsoft.com/office/drawing/2014/main" id="{C340FB64-7A08-4185-8189-120E4129656F}"/>
+                <a16:creationId xmlns:a16="http://schemas.microsoft.com/office/drawing/2014/main" id="{E6A6478E-0AE7-4F74-80A2-6749396ACDD1}"/>
               </a:ext>
             </a:extLst>
           </p:cNvPr>
@@ -15437,7 +15426,7 @@
           <p:cNvPr id="35" name="">
             <a:extLst xmlns:a="http://schemas.openxmlformats.org/drawingml/2006/main">
               <a:ext uri="{FF2B5EF4-FFF2-40B4-BE49-F238E27FC236}">
-                <a16:creationId xmlns:a16="http://schemas.microsoft.com/office/drawing/2014/main" id="{F8DF9732-3D30-4E4E-A06B-AEEFDB30D8BF}"/>
+                <a16:creationId xmlns:a16="http://schemas.microsoft.com/office/drawing/2014/main" id="{EDD9B90B-9445-4BC2-8E3D-DD23FA65DA53}"/>
               </a:ext>
             </a:extLst>
           </p:cNvPr>
@@ -15495,7 +15484,7 @@
           <p:cNvPr id="36" name="">
             <a:extLst xmlns:a="http://schemas.openxmlformats.org/drawingml/2006/main">
               <a:ext uri="{FF2B5EF4-FFF2-40B4-BE49-F238E27FC236}">
-                <a16:creationId xmlns:a16="http://schemas.microsoft.com/office/drawing/2014/main" id="{C49B3405-DB0F-4EE1-B862-F06B8425E4AD}"/>
+                <a16:creationId xmlns:a16="http://schemas.microsoft.com/office/drawing/2014/main" id="{B38F288C-82C1-4D06-BEFB-67439BC5C6FE}"/>
               </a:ext>
             </a:extLst>
           </p:cNvPr>
@@ -15528,7 +15517,7 @@
           <p:cNvPr id="37" name="">
             <a:extLst xmlns:a="http://schemas.openxmlformats.org/drawingml/2006/main">
               <a:ext uri="{FF2B5EF4-FFF2-40B4-BE49-F238E27FC236}">
-                <a16:creationId xmlns:a16="http://schemas.microsoft.com/office/drawing/2014/main" id="{9670BAC6-A79D-44FB-BA28-1A46B084A621}"/>
+                <a16:creationId xmlns:a16="http://schemas.microsoft.com/office/drawing/2014/main" id="{E0142D89-FC93-418C-A740-EEFA25003756}"/>
               </a:ext>
             </a:extLst>
           </p:cNvPr>
@@ -15586,7 +15575,7 @@
           <p:cNvPr id="38" name="">
             <a:extLst xmlns:a="http://schemas.openxmlformats.org/drawingml/2006/main">
               <a:ext uri="{FF2B5EF4-FFF2-40B4-BE49-F238E27FC236}">
-                <a16:creationId xmlns:a16="http://schemas.microsoft.com/office/drawing/2014/main" id="{F4469E4A-C803-44F4-9393-A63288EA95E7}"/>
+                <a16:creationId xmlns:a16="http://schemas.microsoft.com/office/drawing/2014/main" id="{5B00954D-828D-4A2E-8B70-D1B87C83EB2A}"/>
               </a:ext>
             </a:extLst>
           </p:cNvPr>
@@ -15619,7 +15608,7 @@
           <p:cNvPr id="39" name="">
             <a:extLst xmlns:a="http://schemas.openxmlformats.org/drawingml/2006/main">
               <a:ext uri="{FF2B5EF4-FFF2-40B4-BE49-F238E27FC236}">
-                <a16:creationId xmlns:a16="http://schemas.microsoft.com/office/drawing/2014/main" id="{0A29789C-CE3E-4D3A-906F-147CEBB5FEAB}"/>
+                <a16:creationId xmlns:a16="http://schemas.microsoft.com/office/drawing/2014/main" id="{E2BA1320-F1F3-481E-BE15-8FD16544A320}"/>
               </a:ext>
             </a:extLst>
           </p:cNvPr>
@@ -15677,7 +15666,7 @@
           <p:cNvPr id="40" name="">
             <a:extLst xmlns:a="http://schemas.openxmlformats.org/drawingml/2006/main">
               <a:ext uri="{FF2B5EF4-FFF2-40B4-BE49-F238E27FC236}">
-                <a16:creationId xmlns:a16="http://schemas.microsoft.com/office/drawing/2014/main" id="{B8BB928C-029D-41D4-A526-2FA16EF812BB}"/>
+                <a16:creationId xmlns:a16="http://schemas.microsoft.com/office/drawing/2014/main" id="{D08E161E-C8C5-4E87-B718-56DF88EEE576}"/>
               </a:ext>
             </a:extLst>
           </p:cNvPr>
@@ -15710,7 +15699,7 @@
           <p:cNvPr id="41" name="">
             <a:extLst xmlns:a="http://schemas.openxmlformats.org/drawingml/2006/main">
               <a:ext uri="{FF2B5EF4-FFF2-40B4-BE49-F238E27FC236}">
-                <a16:creationId xmlns:a16="http://schemas.microsoft.com/office/drawing/2014/main" id="{41067359-24ED-49F1-9073-D1202E36E722}"/>
+                <a16:creationId xmlns:a16="http://schemas.microsoft.com/office/drawing/2014/main" id="{24962752-77F4-4B44-8CA4-AA545413012E}"/>
               </a:ext>
             </a:extLst>
           </p:cNvPr>
@@ -15768,7 +15757,7 @@
           <p:cNvPr id="42" name="">
             <a:extLst xmlns:a="http://schemas.openxmlformats.org/drawingml/2006/main">
               <a:ext uri="{FF2B5EF4-FFF2-40B4-BE49-F238E27FC236}">
-                <a16:creationId xmlns:a16="http://schemas.microsoft.com/office/drawing/2014/main" id="{7CA46838-234E-4FBA-8E33-84F003A87D28}"/>
+                <a16:creationId xmlns:a16="http://schemas.microsoft.com/office/drawing/2014/main" id="{9781EA37-87CC-4A98-BC09-8FFB58624CA7}"/>
               </a:ext>
             </a:extLst>
           </p:cNvPr>
@@ -15801,7 +15790,7 @@
           <p:cNvPr id="43" name="">
             <a:extLst xmlns:a="http://schemas.openxmlformats.org/drawingml/2006/main">
               <a:ext uri="{FF2B5EF4-FFF2-40B4-BE49-F238E27FC236}">
-                <a16:creationId xmlns:a16="http://schemas.microsoft.com/office/drawing/2014/main" id="{8B3A3C31-4C4C-4BA2-A19C-10B5774572CF}"/>
+                <a16:creationId xmlns:a16="http://schemas.microsoft.com/office/drawing/2014/main" id="{C948A0F1-7B9D-4102-8169-A6FDEEA6E8E4}"/>
               </a:ext>
             </a:extLst>
           </p:cNvPr>
@@ -15859,7 +15848,7 @@
           <p:cNvPr id="44" name="">
             <a:extLst xmlns:a="http://schemas.openxmlformats.org/drawingml/2006/main">
               <a:ext uri="{FF2B5EF4-FFF2-40B4-BE49-F238E27FC236}">
-                <a16:creationId xmlns:a16="http://schemas.microsoft.com/office/drawing/2014/main" id="{B28E5994-1B22-4281-86EA-CABDBA967C2D}"/>
+                <a16:creationId xmlns:a16="http://schemas.microsoft.com/office/drawing/2014/main" id="{6D1AB276-99B0-47F4-A051-8C2148FFE889}"/>
               </a:ext>
             </a:extLst>
           </p:cNvPr>
@@ -15892,7 +15881,7 @@
           <p:cNvPr id="45" name="">
             <a:extLst xmlns:a="http://schemas.openxmlformats.org/drawingml/2006/main">
               <a:ext uri="{FF2B5EF4-FFF2-40B4-BE49-F238E27FC236}">
-                <a16:creationId xmlns:a16="http://schemas.microsoft.com/office/drawing/2014/main" id="{324BAA17-4249-4AB9-BF4D-113F44740E5E}"/>
+                <a16:creationId xmlns:a16="http://schemas.microsoft.com/office/drawing/2014/main" id="{BD503AC3-BDB5-4AFB-8952-2B32DDF32E8E}"/>
               </a:ext>
             </a:extLst>
           </p:cNvPr>
@@ -15950,7 +15939,7 @@
           <p:cNvPr id="46" name="">
             <a:extLst xmlns:a="http://schemas.openxmlformats.org/drawingml/2006/main">
               <a:ext uri="{FF2B5EF4-FFF2-40B4-BE49-F238E27FC236}">
-                <a16:creationId xmlns:a16="http://schemas.microsoft.com/office/drawing/2014/main" id="{F64A4612-23C2-4F57-A8EB-9D18B3535226}"/>
+                <a16:creationId xmlns:a16="http://schemas.microsoft.com/office/drawing/2014/main" id="{087DDB02-8FE9-404D-80C0-ED2D55DCE025}"/>
               </a:ext>
             </a:extLst>
           </p:cNvPr>
@@ -15983,7 +15972,7 @@
           <p:cNvPr id="47" name="">
             <a:extLst xmlns:a="http://schemas.openxmlformats.org/drawingml/2006/main">
               <a:ext uri="{FF2B5EF4-FFF2-40B4-BE49-F238E27FC236}">
-                <a16:creationId xmlns:a16="http://schemas.microsoft.com/office/drawing/2014/main" id="{AAF6C013-81CB-4D38-BE9A-7EEE2C391323}"/>
+                <a16:creationId xmlns:a16="http://schemas.microsoft.com/office/drawing/2014/main" id="{8EAFAC79-3755-4CC0-835F-FBA05CAE220D}"/>
               </a:ext>
             </a:extLst>
           </p:cNvPr>
@@ -16041,7 +16030,7 @@
           <p:cNvPr id="48" name="">
             <a:extLst xmlns:a="http://schemas.openxmlformats.org/drawingml/2006/main">
               <a:ext uri="{FF2B5EF4-FFF2-40B4-BE49-F238E27FC236}">
-                <a16:creationId xmlns:a16="http://schemas.microsoft.com/office/drawing/2014/main" id="{4E48914E-A0A3-4D39-9A29-D271D9EF4488}"/>
+                <a16:creationId xmlns:a16="http://schemas.microsoft.com/office/drawing/2014/main" id="{DB4C24A3-5247-4F9C-B866-E907864378A5}"/>
               </a:ext>
             </a:extLst>
           </p:cNvPr>
@@ -16074,7 +16063,7 @@
           <p:cNvPr id="49" name="">
             <a:extLst xmlns:a="http://schemas.openxmlformats.org/drawingml/2006/main">
               <a:ext uri="{FF2B5EF4-FFF2-40B4-BE49-F238E27FC236}">
-                <a16:creationId xmlns:a16="http://schemas.microsoft.com/office/drawing/2014/main" id="{8FFF99BA-EB9C-436D-8579-E24F9C6B192D}"/>
+                <a16:creationId xmlns:a16="http://schemas.microsoft.com/office/drawing/2014/main" id="{AE1155D8-DD93-47C4-A372-464D3EE1F887}"/>
               </a:ext>
             </a:extLst>
           </p:cNvPr>
@@ -16132,7 +16121,7 @@
           <p:cNvPr id="50" name="">
             <a:extLst xmlns:a="http://schemas.openxmlformats.org/drawingml/2006/main">
               <a:ext uri="{FF2B5EF4-FFF2-40B4-BE49-F238E27FC236}">
-                <a16:creationId xmlns:a16="http://schemas.microsoft.com/office/drawing/2014/main" id="{271C465E-E47F-4C4C-B20D-8A7CF7B36021}"/>
+                <a16:creationId xmlns:a16="http://schemas.microsoft.com/office/drawing/2014/main" id="{E015BA6C-EA27-4A7F-AE03-B6CF0B2CBF1F}"/>
               </a:ext>
             </a:extLst>
           </p:cNvPr>
@@ -16165,7 +16154,7 @@
           <p:cNvPr id="51" name="">
             <a:extLst xmlns:a="http://schemas.openxmlformats.org/drawingml/2006/main">
               <a:ext uri="{FF2B5EF4-FFF2-40B4-BE49-F238E27FC236}">
-                <a16:creationId xmlns:a16="http://schemas.microsoft.com/office/drawing/2014/main" id="{755754B7-C14A-4132-9512-27563F7BA680}"/>
+                <a16:creationId xmlns:a16="http://schemas.microsoft.com/office/drawing/2014/main" id="{12D39099-331C-4E70-8616-334B091E2F0C}"/>
               </a:ext>
             </a:extLst>
           </p:cNvPr>
@@ -16223,7 +16212,7 @@
           <p:cNvPr id="52" name="">
             <a:extLst xmlns:a="http://schemas.openxmlformats.org/drawingml/2006/main">
               <a:ext uri="{FF2B5EF4-FFF2-40B4-BE49-F238E27FC236}">
-                <a16:creationId xmlns:a16="http://schemas.microsoft.com/office/drawing/2014/main" id="{6843FFAB-7DA5-4614-9B14-0D409B275812}"/>
+                <a16:creationId xmlns:a16="http://schemas.microsoft.com/office/drawing/2014/main" id="{D35E5898-9C02-4DB9-A031-7BCB0E9D1BB9}"/>
               </a:ext>
             </a:extLst>
           </p:cNvPr>
@@ -16256,7 +16245,7 @@
           <p:cNvPr id="53" name="">
             <a:extLst xmlns:a="http://schemas.openxmlformats.org/drawingml/2006/main">
               <a:ext uri="{FF2B5EF4-FFF2-40B4-BE49-F238E27FC236}">
-                <a16:creationId xmlns:a16="http://schemas.microsoft.com/office/drawing/2014/main" id="{BEB506BE-BF45-4E61-80C2-3FFB5B82867D}"/>
+                <a16:creationId xmlns:a16="http://schemas.microsoft.com/office/drawing/2014/main" id="{3C1B8774-798E-4379-AC63-4B7C696371CF}"/>
               </a:ext>
             </a:extLst>
           </p:cNvPr>
@@ -16314,7 +16303,7 @@
           <p:cNvPr id="54" name="">
             <a:extLst xmlns:a="http://schemas.openxmlformats.org/drawingml/2006/main">
               <a:ext uri="{FF2B5EF4-FFF2-40B4-BE49-F238E27FC236}">
-                <a16:creationId xmlns:a16="http://schemas.microsoft.com/office/drawing/2014/main" id="{1E467D0D-F4B0-4992-A155-8F2BB593076D}"/>
+                <a16:creationId xmlns:a16="http://schemas.microsoft.com/office/drawing/2014/main" id="{AB09CEBA-94A2-478C-B470-5F65642E43D3}"/>
               </a:ext>
             </a:extLst>
           </p:cNvPr>
@@ -16347,7 +16336,7 @@
           <p:cNvPr id="55" name="">
             <a:extLst xmlns:a="http://schemas.openxmlformats.org/drawingml/2006/main">
               <a:ext uri="{FF2B5EF4-FFF2-40B4-BE49-F238E27FC236}">
-                <a16:creationId xmlns:a16="http://schemas.microsoft.com/office/drawing/2014/main" id="{6A4FAE9B-7C38-4A8F-BF71-0A6FA6563FDB}"/>
+                <a16:creationId xmlns:a16="http://schemas.microsoft.com/office/drawing/2014/main" id="{32756E08-A23B-47B8-8D98-C7A57D9648BF}"/>
               </a:ext>
             </a:extLst>
           </p:cNvPr>
@@ -16405,7 +16394,7 @@
           <p:cNvPr id="56" name="">
             <a:extLst xmlns:a="http://schemas.openxmlformats.org/drawingml/2006/main">
               <a:ext uri="{FF2B5EF4-FFF2-40B4-BE49-F238E27FC236}">
-                <a16:creationId xmlns:a16="http://schemas.microsoft.com/office/drawing/2014/main" id="{039F9BFA-0346-40F4-8D2F-1BEEC71B9020}"/>
+                <a16:creationId xmlns:a16="http://schemas.microsoft.com/office/drawing/2014/main" id="{8837ADD2-3017-4569-9DB6-32F0758CFCDC}"/>
               </a:ext>
             </a:extLst>
           </p:cNvPr>
@@ -16438,7 +16427,7 @@
           <p:cNvPr id="57" name="">
             <a:extLst xmlns:a="http://schemas.openxmlformats.org/drawingml/2006/main">
               <a:ext uri="{FF2B5EF4-FFF2-40B4-BE49-F238E27FC236}">
-                <a16:creationId xmlns:a16="http://schemas.microsoft.com/office/drawing/2014/main" id="{EF86174A-B09A-4A57-968A-B24E3A4F1687}"/>
+                <a16:creationId xmlns:a16="http://schemas.microsoft.com/office/drawing/2014/main" id="{94670E71-B461-412F-881A-152CC4A965CD}"/>
               </a:ext>
             </a:extLst>
           </p:cNvPr>
@@ -16496,7 +16485,7 @@
                 <a:latin typeface="Microsoft YaHei"/>
                 <a:ea typeface="Microsoft YaHei"/>
                 <a:cs typeface="Microsoft YaHei"/>
-                <a:hlinkClick xmlns:r="http://schemas.openxmlformats.org/officeDocument/2006/relationships" r:id="R8a1adde981c2492c"/>
+                <a:hlinkClick xmlns:r="http://schemas.openxmlformats.org/officeDocument/2006/relationships" r:id="R313fb6c9698045c2"/>
               </a:rPr>
               <a:t>Codex节省用量建议</a:t>
             </a:r>
@@ -16508,7 +16497,7 @@
                 <a:latin typeface="Microsoft YaHei"/>
                 <a:ea typeface="Microsoft YaHei"/>
                 <a:cs typeface="Microsoft YaHei"/>
-                <a:hlinkClick xmlns:r="http://schemas.openxmlformats.org/officeDocument/2006/relationships" r:id="R433edd5f86ab40d2"/>
+                <a:hlinkClick xmlns:r="http://schemas.openxmlformats.org/officeDocument/2006/relationships" r:id="R035ea52829c4488b"/>
               </a:rPr>
               <a:t> · OpenAI Prompt Caching</a:t>
             </a:r>
@@ -16520,7 +16509,7 @@
                 <a:latin typeface="Microsoft YaHei"/>
                 <a:ea typeface="Microsoft YaHei"/>
                 <a:cs typeface="Microsoft YaHei"/>
-                <a:hlinkClick xmlns:r="http://schemas.openxmlformats.org/officeDocument/2006/relationships" r:id="R02be9f478b4b423d"/>
+                <a:hlinkClick xmlns:r="http://schemas.openxmlformats.org/officeDocument/2006/relationships" r:id="R66a3042ddd8541ec"/>
               </a:rPr>
               <a:t> · Qoder Context Compression</a:t>
             </a:r>
@@ -16532,7 +16521,7 @@
                 <a:latin typeface="Microsoft YaHei"/>
                 <a:ea typeface="Microsoft YaHei"/>
                 <a:cs typeface="Microsoft YaHei"/>
-                <a:hlinkClick xmlns:r="http://schemas.openxmlformats.org/officeDocument/2006/relationships" r:id="Rfa7f8374e7bd43f3"/>
+                <a:hlinkClick xmlns:r="http://schemas.openxmlformats.org/officeDocument/2006/relationships" r:id="R08c8ae0716de4a16"/>
               </a:rPr>
               <a:t> · Anthropic Prompt Caching</a:t>
             </a:r>
@@ -16544,7 +16533,7 @@
           <p:cNvPr id="58" name="">
             <a:extLst xmlns:a="http://schemas.openxmlformats.org/drawingml/2006/main">
               <a:ext uri="{FF2B5EF4-FFF2-40B4-BE49-F238E27FC236}">
-                <a16:creationId xmlns:a16="http://schemas.microsoft.com/office/drawing/2014/main" id="{CAC44388-D5F9-4F4A-97FF-95D1A91BBF1D}"/>
+                <a16:creationId xmlns:a16="http://schemas.microsoft.com/office/drawing/2014/main" id="{ED229A0A-599F-4D6B-B151-9658347257A7}"/>
               </a:ext>
             </a:extLst>
           </p:cNvPr>
@@ -16600,7 +16589,7 @@
     </p:spTree>
     <p:extLst>
       <p:ext uri="{BB962C8B-B14F-4D97-AF65-F5344CB8AC3E}">
-        <p14:creationId xmlns:p14="http://schemas.microsoft.com/office/powerpoint/2010/main" val="1905775761"/>
+        <p14:creationId xmlns:p14="http://schemas.microsoft.com/office/powerpoint/2010/main" val="1585900464"/>
       </p:ext>
     </p:extLst>
   </p:cSld>
@@ -16631,7 +16620,7 @@
           <p:cNvPr id="62" name="">
             <a:extLst xmlns:a="http://schemas.openxmlformats.org/drawingml/2006/main">
               <a:ext uri="{FF2B5EF4-FFF2-40B4-BE49-F238E27FC236}">
-                <a16:creationId xmlns:a16="http://schemas.microsoft.com/office/drawing/2014/main" id="{099452FA-BD92-4EDC-973D-11F4FFD5D0BE}"/>
+                <a16:creationId xmlns:a16="http://schemas.microsoft.com/office/drawing/2014/main" id="{59A06BA3-37AB-4251-A8F4-99B50AF9EEF4}"/>
               </a:ext>
             </a:extLst>
           </p:cNvPr>
@@ -16664,7 +16653,7 @@
           <p:cNvPr id="2" name="">
             <a:extLst xmlns:a="http://schemas.openxmlformats.org/drawingml/2006/main">
               <a:ext uri="{FF2B5EF4-FFF2-40B4-BE49-F238E27FC236}">
-                <a16:creationId xmlns:a16="http://schemas.microsoft.com/office/drawing/2014/main" id="{1AF34B9C-4B1C-4FE4-BF5C-623E15960FC8}"/>
+                <a16:creationId xmlns:a16="http://schemas.microsoft.com/office/drawing/2014/main" id="{A413DD96-FB7E-4C8F-A756-3ECE2E05440C}"/>
               </a:ext>
             </a:extLst>
           </p:cNvPr>
@@ -16722,7 +16711,7 @@
           <p:cNvPr id="3" name="">
             <a:extLst xmlns:a="http://schemas.openxmlformats.org/drawingml/2006/main">
               <a:ext uri="{FF2B5EF4-FFF2-40B4-BE49-F238E27FC236}">
-                <a16:creationId xmlns:a16="http://schemas.microsoft.com/office/drawing/2014/main" id="{7CF2D94C-DE8E-47C7-B78E-FF25484E0948}"/>
+                <a16:creationId xmlns:a16="http://schemas.microsoft.com/office/drawing/2014/main" id="{ABA0DFE8-9C56-4945-AE1D-996C66F9071B}"/>
               </a:ext>
             </a:extLst>
           </p:cNvPr>
@@ -16780,7 +16769,7 @@
           <p:cNvPr id="4" name="">
             <a:extLst xmlns:a="http://schemas.openxmlformats.org/drawingml/2006/main">
               <a:ext uri="{FF2B5EF4-FFF2-40B4-BE49-F238E27FC236}">
-                <a16:creationId xmlns:a16="http://schemas.microsoft.com/office/drawing/2014/main" id="{5FFFCEC6-2DAA-4C5F-8D51-4419F77D8336}"/>
+                <a16:creationId xmlns:a16="http://schemas.microsoft.com/office/drawing/2014/main" id="{EF12C987-FAED-43BA-9C8F-D99D9BA7E3D9}"/>
               </a:ext>
             </a:extLst>
           </p:cNvPr>
@@ -16817,7 +16806,7 @@
           <p:nvPr/>
         </p:nvPicPr>
         <p:blipFill>
-          <a:blip xmlns:r="http://schemas.openxmlformats.org/officeDocument/2006/relationships" xmlns:a="http://schemas.openxmlformats.org/drawingml/2006/main" r:embed="R6a585f6ba55040ac"/>
+          <a:blip xmlns:r="http://schemas.openxmlformats.org/officeDocument/2006/relationships" xmlns:a="http://schemas.openxmlformats.org/drawingml/2006/main" r:embed="Rc4815fda2fe04e0c"/>
           <a:stretch xmlns:a="http://schemas.openxmlformats.org/drawingml/2006/main"/>
         </p:blipFill>
         <p:spPr>
@@ -16835,7 +16824,7 @@
           <p:cNvPr id="6" name="">
             <a:extLst xmlns:a="http://schemas.openxmlformats.org/drawingml/2006/main">
               <a:ext uri="{FF2B5EF4-FFF2-40B4-BE49-F238E27FC236}">
-                <a16:creationId xmlns:a16="http://schemas.microsoft.com/office/drawing/2014/main" id="{CE17C2E5-23E2-4BE9-9619-22164999F411}"/>
+                <a16:creationId xmlns:a16="http://schemas.microsoft.com/office/drawing/2014/main" id="{0EC4C690-FBB5-4E80-9D58-FD78D980364F}"/>
               </a:ext>
             </a:extLst>
           </p:cNvPr>
@@ -16868,7 +16857,7 @@
           <p:cNvPr id="7" name="">
             <a:extLst xmlns:a="http://schemas.openxmlformats.org/drawingml/2006/main">
               <a:ext uri="{FF2B5EF4-FFF2-40B4-BE49-F238E27FC236}">
-                <a16:creationId xmlns:a16="http://schemas.microsoft.com/office/drawing/2014/main" id="{8B81A2B4-44BC-4221-A131-8C9FFC17CAFA}"/>
+                <a16:creationId xmlns:a16="http://schemas.microsoft.com/office/drawing/2014/main" id="{488FB66C-E371-43E7-9CDA-EC33600A7219}"/>
               </a:ext>
             </a:extLst>
           </p:cNvPr>
@@ -16926,7 +16915,7 @@
           <p:cNvPr id="8" name="">
             <a:extLst xmlns:a="http://schemas.openxmlformats.org/drawingml/2006/main">
               <a:ext uri="{FF2B5EF4-FFF2-40B4-BE49-F238E27FC236}">
-                <a16:creationId xmlns:a16="http://schemas.microsoft.com/office/drawing/2014/main" id="{258C9EC1-CC40-4622-A8CD-227AE53F27D6}"/>
+                <a16:creationId xmlns:a16="http://schemas.microsoft.com/office/drawing/2014/main" id="{AAFA62DF-3116-48DF-AAF8-F9C2C3D26D94}"/>
               </a:ext>
             </a:extLst>
           </p:cNvPr>
@@ -16984,7 +16973,7 @@
           <p:cNvPr id="9" name="">
             <a:extLst xmlns:a="http://schemas.openxmlformats.org/drawingml/2006/main">
               <a:ext uri="{FF2B5EF4-FFF2-40B4-BE49-F238E27FC236}">
-                <a16:creationId xmlns:a16="http://schemas.microsoft.com/office/drawing/2014/main" id="{26CC3E3B-B860-4686-AA12-659ECF5A36CA}"/>
+                <a16:creationId xmlns:a16="http://schemas.microsoft.com/office/drawing/2014/main" id="{610A60F3-FB60-4A1D-BE6D-B9B282751FF9}"/>
               </a:ext>
             </a:extLst>
           </p:cNvPr>
@@ -17042,7 +17031,7 @@
           <p:cNvPr id="10" name="">
             <a:extLst xmlns:a="http://schemas.openxmlformats.org/drawingml/2006/main">
               <a:ext uri="{FF2B5EF4-FFF2-40B4-BE49-F238E27FC236}">
-                <a16:creationId xmlns:a16="http://schemas.microsoft.com/office/drawing/2014/main" id="{7065A063-3A04-4F4B-9A8B-CB989823B17E}"/>
+                <a16:creationId xmlns:a16="http://schemas.microsoft.com/office/drawing/2014/main" id="{0F700DF1-9454-4BC4-BFB8-08321E86AAB5}"/>
               </a:ext>
             </a:extLst>
           </p:cNvPr>
@@ -17075,7 +17064,7 @@
           <p:cNvPr id="11" name="">
             <a:extLst xmlns:a="http://schemas.openxmlformats.org/drawingml/2006/main">
               <a:ext uri="{FF2B5EF4-FFF2-40B4-BE49-F238E27FC236}">
-                <a16:creationId xmlns:a16="http://schemas.microsoft.com/office/drawing/2014/main" id="{EEF27177-1745-4EC9-8615-275F46367307}"/>
+                <a16:creationId xmlns:a16="http://schemas.microsoft.com/office/drawing/2014/main" id="{67FBEACF-53FB-4D1F-9EA4-1CCA732BDC1A}"/>
               </a:ext>
             </a:extLst>
           </p:cNvPr>
@@ -17133,7 +17122,7 @@
           <p:cNvPr id="12" name="">
             <a:extLst xmlns:a="http://schemas.openxmlformats.org/drawingml/2006/main">
               <a:ext uri="{FF2B5EF4-FFF2-40B4-BE49-F238E27FC236}">
-                <a16:creationId xmlns:a16="http://schemas.microsoft.com/office/drawing/2014/main" id="{68DD128D-032A-496D-8355-00D072414063}"/>
+                <a16:creationId xmlns:a16="http://schemas.microsoft.com/office/drawing/2014/main" id="{4BDF2DC0-369B-4684-89FF-F627178D5026}"/>
               </a:ext>
             </a:extLst>
           </p:cNvPr>
@@ -17191,7 +17180,7 @@
           <p:cNvPr id="13" name="">
             <a:extLst xmlns:a="http://schemas.openxmlformats.org/drawingml/2006/main">
               <a:ext uri="{FF2B5EF4-FFF2-40B4-BE49-F238E27FC236}">
-                <a16:creationId xmlns:a16="http://schemas.microsoft.com/office/drawing/2014/main" id="{93FDC2FF-7ABF-4A8D-891B-351B8118269B}"/>
+                <a16:creationId xmlns:a16="http://schemas.microsoft.com/office/drawing/2014/main" id="{F8297C55-97E3-4BF6-8D52-49FDF34C60FB}"/>
               </a:ext>
             </a:extLst>
           </p:cNvPr>
@@ -17249,7 +17238,7 @@
           <p:cNvPr id="14" name="">
             <a:extLst xmlns:a="http://schemas.openxmlformats.org/drawingml/2006/main">
               <a:ext uri="{FF2B5EF4-FFF2-40B4-BE49-F238E27FC236}">
-                <a16:creationId xmlns:a16="http://schemas.microsoft.com/office/drawing/2014/main" id="{523C540F-3AE0-4634-87BB-6DDA92912AEE}"/>
+                <a16:creationId xmlns:a16="http://schemas.microsoft.com/office/drawing/2014/main" id="{370AC3BB-812D-4828-93DF-5E4CC7D7BD8B}"/>
               </a:ext>
             </a:extLst>
           </p:cNvPr>
@@ -17282,7 +17271,7 @@
           <p:cNvPr id="15" name="">
             <a:extLst xmlns:a="http://schemas.openxmlformats.org/drawingml/2006/main">
               <a:ext uri="{FF2B5EF4-FFF2-40B4-BE49-F238E27FC236}">
-                <a16:creationId xmlns:a16="http://schemas.microsoft.com/office/drawing/2014/main" id="{74B1F09E-40D9-4454-B43B-2BDC1DF754F5}"/>
+                <a16:creationId xmlns:a16="http://schemas.microsoft.com/office/drawing/2014/main" id="{D7F82D7C-D135-4F8F-B4B4-905525D79706}"/>
               </a:ext>
             </a:extLst>
           </p:cNvPr>
@@ -17340,7 +17329,7 @@
           <p:cNvPr id="16" name="">
             <a:extLst xmlns:a="http://schemas.openxmlformats.org/drawingml/2006/main">
               <a:ext uri="{FF2B5EF4-FFF2-40B4-BE49-F238E27FC236}">
-                <a16:creationId xmlns:a16="http://schemas.microsoft.com/office/drawing/2014/main" id="{435B5ED7-FABC-4C4C-B6D4-24C97F427732}"/>
+                <a16:creationId xmlns:a16="http://schemas.microsoft.com/office/drawing/2014/main" id="{BDEB5AD1-6913-49DB-9890-424AB5F6B249}"/>
               </a:ext>
             </a:extLst>
           </p:cNvPr>
@@ -17398,7 +17387,7 @@
           <p:cNvPr id="17" name="">
             <a:extLst xmlns:a="http://schemas.openxmlformats.org/drawingml/2006/main">
               <a:ext uri="{FF2B5EF4-FFF2-40B4-BE49-F238E27FC236}">
-                <a16:creationId xmlns:a16="http://schemas.microsoft.com/office/drawing/2014/main" id="{26B535F0-C98D-47DF-B180-3A91B6C9712F}"/>
+                <a16:creationId xmlns:a16="http://schemas.microsoft.com/office/drawing/2014/main" id="{B8AE68A8-FD6C-49B3-8EFE-DD97544C07D6}"/>
               </a:ext>
             </a:extLst>
           </p:cNvPr>
@@ -17456,7 +17445,7 @@
           <p:cNvPr id="18" name="">
             <a:extLst xmlns:a="http://schemas.openxmlformats.org/drawingml/2006/main">
               <a:ext uri="{FF2B5EF4-FFF2-40B4-BE49-F238E27FC236}">
-                <a16:creationId xmlns:a16="http://schemas.microsoft.com/office/drawing/2014/main" id="{418BCBD9-FD2F-4204-B8B0-0E412888212C}"/>
+                <a16:creationId xmlns:a16="http://schemas.microsoft.com/office/drawing/2014/main" id="{0007682E-8385-4467-BD6F-889B88225BA7}"/>
               </a:ext>
             </a:extLst>
           </p:cNvPr>
@@ -17489,7 +17478,7 @@
           <p:cNvPr id="19" name="">
             <a:extLst xmlns:a="http://schemas.openxmlformats.org/drawingml/2006/main">
               <a:ext uri="{FF2B5EF4-FFF2-40B4-BE49-F238E27FC236}">
-                <a16:creationId xmlns:a16="http://schemas.microsoft.com/office/drawing/2014/main" id="{E8CAEA44-B667-45C4-8D4B-683C0574A5C3}"/>
+                <a16:creationId xmlns:a16="http://schemas.microsoft.com/office/drawing/2014/main" id="{9AA47130-A1E7-46FC-8EF1-919F734DFECD}"/>
               </a:ext>
             </a:extLst>
           </p:cNvPr>
@@ -17547,7 +17536,7 @@
           <p:cNvPr id="20" name="">
             <a:extLst xmlns:a="http://schemas.openxmlformats.org/drawingml/2006/main">
               <a:ext uri="{FF2B5EF4-FFF2-40B4-BE49-F238E27FC236}">
-                <a16:creationId xmlns:a16="http://schemas.microsoft.com/office/drawing/2014/main" id="{652F4274-2E34-4D94-BB8D-94FE1C77C872}"/>
+                <a16:creationId xmlns:a16="http://schemas.microsoft.com/office/drawing/2014/main" id="{9A47D13B-51FD-4329-831C-65E256B95041}"/>
               </a:ext>
             </a:extLst>
           </p:cNvPr>
@@ -17580,7 +17569,7 @@
           <p:cNvPr id="21" name="">
             <a:extLst xmlns:a="http://schemas.openxmlformats.org/drawingml/2006/main">
               <a:ext uri="{FF2B5EF4-FFF2-40B4-BE49-F238E27FC236}">
-                <a16:creationId xmlns:a16="http://schemas.microsoft.com/office/drawing/2014/main" id="{6E8AEF1D-27FB-464A-9951-8BA02DE4130A}"/>
+                <a16:creationId xmlns:a16="http://schemas.microsoft.com/office/drawing/2014/main" id="{154CC050-F859-4A24-9068-B4FA53504C79}"/>
               </a:ext>
             </a:extLst>
           </p:cNvPr>
@@ -17638,7 +17627,7 @@
           <p:cNvPr id="22" name="">
             <a:extLst xmlns:a="http://schemas.openxmlformats.org/drawingml/2006/main">
               <a:ext uri="{FF2B5EF4-FFF2-40B4-BE49-F238E27FC236}">
-                <a16:creationId xmlns:a16="http://schemas.microsoft.com/office/drawing/2014/main" id="{F3E71672-800A-42AD-A5A1-B3126F28EC1D}"/>
+                <a16:creationId xmlns:a16="http://schemas.microsoft.com/office/drawing/2014/main" id="{18D14445-BFC8-43BA-BADD-69933A26939B}"/>
               </a:ext>
             </a:extLst>
           </p:cNvPr>
@@ -17671,7 +17660,7 @@
           <p:cNvPr id="23" name="">
             <a:extLst xmlns:a="http://schemas.openxmlformats.org/drawingml/2006/main">
               <a:ext uri="{FF2B5EF4-FFF2-40B4-BE49-F238E27FC236}">
-                <a16:creationId xmlns:a16="http://schemas.microsoft.com/office/drawing/2014/main" id="{C186329C-E5D5-465F-97D7-CECA91C0B0BE}"/>
+                <a16:creationId xmlns:a16="http://schemas.microsoft.com/office/drawing/2014/main" id="{027B01EA-DB75-49B6-9125-B18EA2B19CAA}"/>
               </a:ext>
             </a:extLst>
           </p:cNvPr>
@@ -17704,7 +17693,7 @@
           <p:cNvPr id="24" name="">
             <a:extLst xmlns:a="http://schemas.openxmlformats.org/drawingml/2006/main">
               <a:ext uri="{FF2B5EF4-FFF2-40B4-BE49-F238E27FC236}">
-                <a16:creationId xmlns:a16="http://schemas.microsoft.com/office/drawing/2014/main" id="{080A7953-6CDA-46C2-88D9-B2D0B21A8E35}"/>
+                <a16:creationId xmlns:a16="http://schemas.microsoft.com/office/drawing/2014/main" id="{F49DC0E7-7B45-4B0C-B7F2-B45385C2B718}"/>
               </a:ext>
             </a:extLst>
           </p:cNvPr>
@@ -17737,7 +17726,7 @@
           <p:cNvPr id="25" name="">
             <a:extLst xmlns:a="http://schemas.openxmlformats.org/drawingml/2006/main">
               <a:ext uri="{FF2B5EF4-FFF2-40B4-BE49-F238E27FC236}">
-                <a16:creationId xmlns:a16="http://schemas.microsoft.com/office/drawing/2014/main" id="{BA3F2CDE-D8F0-43C1-B741-01609F8050DD}"/>
+                <a16:creationId xmlns:a16="http://schemas.microsoft.com/office/drawing/2014/main" id="{043304CB-D5F4-4369-B802-5F59848618B3}"/>
               </a:ext>
             </a:extLst>
           </p:cNvPr>
@@ -17795,7 +17784,7 @@
           <p:cNvPr id="26" name="">
             <a:extLst xmlns:a="http://schemas.openxmlformats.org/drawingml/2006/main">
               <a:ext uri="{FF2B5EF4-FFF2-40B4-BE49-F238E27FC236}">
-                <a16:creationId xmlns:a16="http://schemas.microsoft.com/office/drawing/2014/main" id="{7844DC43-EC22-48B0-9FB4-9217C471DA3E}"/>
+                <a16:creationId xmlns:a16="http://schemas.microsoft.com/office/drawing/2014/main" id="{7C52768C-7866-424D-8138-D9EC234BCE2A}"/>
               </a:ext>
             </a:extLst>
           </p:cNvPr>
@@ -17828,7 +17817,7 @@
           <p:cNvPr id="27" name="">
             <a:extLst xmlns:a="http://schemas.openxmlformats.org/drawingml/2006/main">
               <a:ext uri="{FF2B5EF4-FFF2-40B4-BE49-F238E27FC236}">
-                <a16:creationId xmlns:a16="http://schemas.microsoft.com/office/drawing/2014/main" id="{E29F5E11-5F57-453D-AD70-27D4C701AD9B}"/>
+                <a16:creationId xmlns:a16="http://schemas.microsoft.com/office/drawing/2014/main" id="{4658297C-D8EE-4381-A7C1-D6E80540BA7C}"/>
               </a:ext>
             </a:extLst>
           </p:cNvPr>
@@ -17861,7 +17850,7 @@
           <p:cNvPr id="28" name="">
             <a:extLst xmlns:a="http://schemas.openxmlformats.org/drawingml/2006/main">
               <a:ext uri="{FF2B5EF4-FFF2-40B4-BE49-F238E27FC236}">
-                <a16:creationId xmlns:a16="http://schemas.microsoft.com/office/drawing/2014/main" id="{43413F90-19E8-49C4-A289-DB3228D27270}"/>
+                <a16:creationId xmlns:a16="http://schemas.microsoft.com/office/drawing/2014/main" id="{EE8714ED-A5E5-493F-A44A-DA194820E21A}"/>
               </a:ext>
             </a:extLst>
           </p:cNvPr>
@@ -17894,7 +17883,7 @@
           <p:cNvPr id="29" name="">
             <a:extLst xmlns:a="http://schemas.openxmlformats.org/drawingml/2006/main">
               <a:ext uri="{FF2B5EF4-FFF2-40B4-BE49-F238E27FC236}">
-                <a16:creationId xmlns:a16="http://schemas.microsoft.com/office/drawing/2014/main" id="{321987CA-0D2C-4C32-ACCA-8FD05ADAE59D}"/>
+                <a16:creationId xmlns:a16="http://schemas.microsoft.com/office/drawing/2014/main" id="{C79998B2-CDAA-4977-B50F-F73BF3BD4B19}"/>
               </a:ext>
             </a:extLst>
           </p:cNvPr>
@@ -17952,7 +17941,7 @@
           <p:cNvPr id="30" name="">
             <a:extLst xmlns:a="http://schemas.openxmlformats.org/drawingml/2006/main">
               <a:ext uri="{FF2B5EF4-FFF2-40B4-BE49-F238E27FC236}">
-                <a16:creationId xmlns:a16="http://schemas.microsoft.com/office/drawing/2014/main" id="{B11849EA-A7D7-4CF4-A918-EA09F8DB33E2}"/>
+                <a16:creationId xmlns:a16="http://schemas.microsoft.com/office/drawing/2014/main" id="{9F626DC4-E96B-44AD-8FFC-37284D028593}"/>
               </a:ext>
             </a:extLst>
           </p:cNvPr>
@@ -17985,7 +17974,7 @@
           <p:cNvPr id="31" name="">
             <a:extLst xmlns:a="http://schemas.openxmlformats.org/drawingml/2006/main">
               <a:ext uri="{FF2B5EF4-FFF2-40B4-BE49-F238E27FC236}">
-                <a16:creationId xmlns:a16="http://schemas.microsoft.com/office/drawing/2014/main" id="{287CD668-ECEF-41B2-B289-A68F2F398F85}"/>
+                <a16:creationId xmlns:a16="http://schemas.microsoft.com/office/drawing/2014/main" id="{BF659BEE-5147-4EAA-9069-D36DD47ADE5D}"/>
               </a:ext>
             </a:extLst>
           </p:cNvPr>
@@ -18018,7 +18007,7 @@
           <p:cNvPr id="32" name="">
             <a:extLst xmlns:a="http://schemas.openxmlformats.org/drawingml/2006/main">
               <a:ext uri="{FF2B5EF4-FFF2-40B4-BE49-F238E27FC236}">
-                <a16:creationId xmlns:a16="http://schemas.microsoft.com/office/drawing/2014/main" id="{802BB560-8375-4B09-9E04-5E937466878B}"/>
+                <a16:creationId xmlns:a16="http://schemas.microsoft.com/office/drawing/2014/main" id="{65CACB3D-EFE7-4B46-BF9E-DA835400AE92}"/>
               </a:ext>
             </a:extLst>
           </p:cNvPr>
@@ -18051,7 +18040,7 @@
           <p:cNvPr id="33" name="">
             <a:extLst xmlns:a="http://schemas.openxmlformats.org/drawingml/2006/main">
               <a:ext uri="{FF2B5EF4-FFF2-40B4-BE49-F238E27FC236}">
-                <a16:creationId xmlns:a16="http://schemas.microsoft.com/office/drawing/2014/main" id="{CDF105C6-1ED8-4526-81FF-6556B96F1AF0}"/>
+                <a16:creationId xmlns:a16="http://schemas.microsoft.com/office/drawing/2014/main" id="{88A68C78-B49E-4891-A8D0-B53168535F32}"/>
               </a:ext>
             </a:extLst>
           </p:cNvPr>
@@ -18109,7 +18098,7 @@
           <p:cNvPr id="34" name="">
             <a:extLst xmlns:a="http://schemas.openxmlformats.org/drawingml/2006/main">
               <a:ext uri="{FF2B5EF4-FFF2-40B4-BE49-F238E27FC236}">
-                <a16:creationId xmlns:a16="http://schemas.microsoft.com/office/drawing/2014/main" id="{4FA20CED-F143-417F-9942-2C6FDAE8D5D9}"/>
+                <a16:creationId xmlns:a16="http://schemas.microsoft.com/office/drawing/2014/main" id="{4A298711-8D5C-4408-A959-DF3F36C1EB91}"/>
               </a:ext>
             </a:extLst>
           </p:cNvPr>
@@ -18142,7 +18131,7 @@
           <p:cNvPr id="35" name="">
             <a:extLst xmlns:a="http://schemas.openxmlformats.org/drawingml/2006/main">
               <a:ext uri="{FF2B5EF4-FFF2-40B4-BE49-F238E27FC236}">
-                <a16:creationId xmlns:a16="http://schemas.microsoft.com/office/drawing/2014/main" id="{6F2F7081-AD0E-4535-97A7-C59EAE801030}"/>
+                <a16:creationId xmlns:a16="http://schemas.microsoft.com/office/drawing/2014/main" id="{A93858AB-61E8-4AF8-B822-2C861CEB8242}"/>
               </a:ext>
             </a:extLst>
           </p:cNvPr>
@@ -18175,7 +18164,7 @@
           <p:cNvPr id="36" name="">
             <a:extLst xmlns:a="http://schemas.openxmlformats.org/drawingml/2006/main">
               <a:ext uri="{FF2B5EF4-FFF2-40B4-BE49-F238E27FC236}">
-                <a16:creationId xmlns:a16="http://schemas.microsoft.com/office/drawing/2014/main" id="{876F7204-0086-4917-ACE0-2F93AAAC777A}"/>
+                <a16:creationId xmlns:a16="http://schemas.microsoft.com/office/drawing/2014/main" id="{B4D04808-D3E1-4863-8944-D3A1F5B7DE55}"/>
               </a:ext>
             </a:extLst>
           </p:cNvPr>
@@ -18208,7 +18197,7 @@
           <p:cNvPr id="37" name="">
             <a:extLst xmlns:a="http://schemas.openxmlformats.org/drawingml/2006/main">
               <a:ext uri="{FF2B5EF4-FFF2-40B4-BE49-F238E27FC236}">
-                <a16:creationId xmlns:a16="http://schemas.microsoft.com/office/drawing/2014/main" id="{472DA3ED-D100-46E0-9E9A-D601346FF29D}"/>
+                <a16:creationId xmlns:a16="http://schemas.microsoft.com/office/drawing/2014/main" id="{41E56375-AEEA-4FF5-83EA-9FD9A7AE39EA}"/>
               </a:ext>
             </a:extLst>
           </p:cNvPr>
@@ -18266,7 +18255,7 @@
           <p:cNvPr id="38" name="">
             <a:extLst xmlns:a="http://schemas.openxmlformats.org/drawingml/2006/main">
               <a:ext uri="{FF2B5EF4-FFF2-40B4-BE49-F238E27FC236}">
-                <a16:creationId xmlns:a16="http://schemas.microsoft.com/office/drawing/2014/main" id="{09AC0141-DED0-457E-A595-21EB2D885BC0}"/>
+                <a16:creationId xmlns:a16="http://schemas.microsoft.com/office/drawing/2014/main" id="{295FA7D9-8792-4F07-BDEC-2C39AF909A29}"/>
               </a:ext>
             </a:extLst>
           </p:cNvPr>
@@ -18299,7 +18288,7 @@
           <p:cNvPr id="39" name="">
             <a:extLst xmlns:a="http://schemas.openxmlformats.org/drawingml/2006/main">
               <a:ext uri="{FF2B5EF4-FFF2-40B4-BE49-F238E27FC236}">
-                <a16:creationId xmlns:a16="http://schemas.microsoft.com/office/drawing/2014/main" id="{33C1E35C-1AFA-462E-A1A4-E0EB7826F6C5}"/>
+                <a16:creationId xmlns:a16="http://schemas.microsoft.com/office/drawing/2014/main" id="{20AF4331-CEBA-4B03-B5E0-E81E4F4C3945}"/>
               </a:ext>
             </a:extLst>
           </p:cNvPr>
@@ -18332,7 +18321,7 @@
           <p:cNvPr id="40" name="">
             <a:extLst xmlns:a="http://schemas.openxmlformats.org/drawingml/2006/main">
               <a:ext uri="{FF2B5EF4-FFF2-40B4-BE49-F238E27FC236}">
-                <a16:creationId xmlns:a16="http://schemas.microsoft.com/office/drawing/2014/main" id="{D3A55FD6-E64D-4404-996B-15EB622B04F9}"/>
+                <a16:creationId xmlns:a16="http://schemas.microsoft.com/office/drawing/2014/main" id="{FEDF82CF-9BD7-49B1-99B9-D6953E9B73C2}"/>
               </a:ext>
             </a:extLst>
           </p:cNvPr>
@@ -18365,7 +18354,7 @@
           <p:cNvPr id="41" name="">
             <a:extLst xmlns:a="http://schemas.openxmlformats.org/drawingml/2006/main">
               <a:ext uri="{FF2B5EF4-FFF2-40B4-BE49-F238E27FC236}">
-                <a16:creationId xmlns:a16="http://schemas.microsoft.com/office/drawing/2014/main" id="{98EB1992-999B-49A4-AD3A-163CF1B1F546}"/>
+                <a16:creationId xmlns:a16="http://schemas.microsoft.com/office/drawing/2014/main" id="{33D1BED7-6835-4533-9BA5-C0102DD0F107}"/>
               </a:ext>
             </a:extLst>
           </p:cNvPr>
@@ -18423,7 +18412,7 @@
           <p:cNvPr id="42" name="">
             <a:extLst xmlns:a="http://schemas.openxmlformats.org/drawingml/2006/main">
               <a:ext uri="{FF2B5EF4-FFF2-40B4-BE49-F238E27FC236}">
-                <a16:creationId xmlns:a16="http://schemas.microsoft.com/office/drawing/2014/main" id="{E062B652-D090-43DC-9F3C-56B05F744F52}"/>
+                <a16:creationId xmlns:a16="http://schemas.microsoft.com/office/drawing/2014/main" id="{AF47181D-59AC-43B5-A56C-C1892C15AEE9}"/>
               </a:ext>
             </a:extLst>
           </p:cNvPr>
@@ -18456,7 +18445,7 @@
           <p:cNvPr id="43" name="">
             <a:extLst xmlns:a="http://schemas.openxmlformats.org/drawingml/2006/main">
               <a:ext uri="{FF2B5EF4-FFF2-40B4-BE49-F238E27FC236}">
-                <a16:creationId xmlns:a16="http://schemas.microsoft.com/office/drawing/2014/main" id="{4023988C-5980-462D-9337-CD0126C0D8B4}"/>
+                <a16:creationId xmlns:a16="http://schemas.microsoft.com/office/drawing/2014/main" id="{5B3D2B89-5943-416E-8B95-58FE69164B12}"/>
               </a:ext>
             </a:extLst>
           </p:cNvPr>
@@ -18489,7 +18478,7 @@
           <p:cNvPr id="44" name="">
             <a:extLst xmlns:a="http://schemas.openxmlformats.org/drawingml/2006/main">
               <a:ext uri="{FF2B5EF4-FFF2-40B4-BE49-F238E27FC236}">
-                <a16:creationId xmlns:a16="http://schemas.microsoft.com/office/drawing/2014/main" id="{3FD57913-8AD6-4B7A-A76A-44442B604C10}"/>
+                <a16:creationId xmlns:a16="http://schemas.microsoft.com/office/drawing/2014/main" id="{DE37D173-E04C-4CFF-BA0A-DE4894320F4C}"/>
               </a:ext>
             </a:extLst>
           </p:cNvPr>
@@ -18522,7 +18511,7 @@
           <p:cNvPr id="45" name="">
             <a:extLst xmlns:a="http://schemas.openxmlformats.org/drawingml/2006/main">
               <a:ext uri="{FF2B5EF4-FFF2-40B4-BE49-F238E27FC236}">
-                <a16:creationId xmlns:a16="http://schemas.microsoft.com/office/drawing/2014/main" id="{92D84233-98BA-451F-B48D-1165AA7DC68C}"/>
+                <a16:creationId xmlns:a16="http://schemas.microsoft.com/office/drawing/2014/main" id="{C372FC89-C20B-494E-9486-43290F611A13}"/>
               </a:ext>
             </a:extLst>
           </p:cNvPr>
@@ -18580,7 +18569,7 @@
           <p:cNvPr id="46" name="">
             <a:extLst xmlns:a="http://schemas.openxmlformats.org/drawingml/2006/main">
               <a:ext uri="{FF2B5EF4-FFF2-40B4-BE49-F238E27FC236}">
-                <a16:creationId xmlns:a16="http://schemas.microsoft.com/office/drawing/2014/main" id="{CF39BC8C-9590-477E-B235-253DCD048E58}"/>
+                <a16:creationId xmlns:a16="http://schemas.microsoft.com/office/drawing/2014/main" id="{2ED57BE7-671F-4FDC-8E4F-49EAEA58DAEB}"/>
               </a:ext>
             </a:extLst>
           </p:cNvPr>
@@ -18638,7 +18627,7 @@
           <p:cNvPr id="47" name="">
             <a:extLst xmlns:a="http://schemas.openxmlformats.org/drawingml/2006/main">
               <a:ext uri="{FF2B5EF4-FFF2-40B4-BE49-F238E27FC236}">
-                <a16:creationId xmlns:a16="http://schemas.microsoft.com/office/drawing/2014/main" id="{1D397132-6350-4C6D-B1BA-6AEBBBB3634D}"/>
+                <a16:creationId xmlns:a16="http://schemas.microsoft.com/office/drawing/2014/main" id="{74FE9FAB-6B6F-4E22-B8C0-A49C0410A7B3}"/>
               </a:ext>
             </a:extLst>
           </p:cNvPr>
@@ -18696,7 +18685,7 @@
           <p:cNvPr id="48" name="">
             <a:extLst xmlns:a="http://schemas.openxmlformats.org/drawingml/2006/main">
               <a:ext uri="{FF2B5EF4-FFF2-40B4-BE49-F238E27FC236}">
-                <a16:creationId xmlns:a16="http://schemas.microsoft.com/office/drawing/2014/main" id="{B196CB74-CC15-4600-8B91-A42F5C0911B7}"/>
+                <a16:creationId xmlns:a16="http://schemas.microsoft.com/office/drawing/2014/main" id="{DD7ADB76-8F06-43DB-B5C7-37D3E792A166}"/>
               </a:ext>
             </a:extLst>
           </p:cNvPr>
@@ -18754,7 +18743,7 @@
           <p:cNvPr id="49" name="">
             <a:extLst xmlns:a="http://schemas.openxmlformats.org/drawingml/2006/main">
               <a:ext uri="{FF2B5EF4-FFF2-40B4-BE49-F238E27FC236}">
-                <a16:creationId xmlns:a16="http://schemas.microsoft.com/office/drawing/2014/main" id="{D601F956-A4F1-4AE6-8ACB-2926D2A6132D}"/>
+                <a16:creationId xmlns:a16="http://schemas.microsoft.com/office/drawing/2014/main" id="{562DF5AD-072C-4F5D-BC13-4F3C00F8B4DB}"/>
               </a:ext>
             </a:extLst>
           </p:cNvPr>
@@ -18812,7 +18801,7 @@
           <p:cNvPr id="50" name="">
             <a:extLst xmlns:a="http://schemas.openxmlformats.org/drawingml/2006/main">
               <a:ext uri="{FF2B5EF4-FFF2-40B4-BE49-F238E27FC236}">
-                <a16:creationId xmlns:a16="http://schemas.microsoft.com/office/drawing/2014/main" id="{60424724-24A2-4F9A-A004-AAA0ED8CFC00}"/>
+                <a16:creationId xmlns:a16="http://schemas.microsoft.com/office/drawing/2014/main" id="{F6BF3345-5717-44F8-8E4C-4386073769FC}"/>
               </a:ext>
             </a:extLst>
           </p:cNvPr>
@@ -18870,7 +18859,7 @@
           <p:cNvPr id="51" name="">
             <a:extLst xmlns:a="http://schemas.openxmlformats.org/drawingml/2006/main">
               <a:ext uri="{FF2B5EF4-FFF2-40B4-BE49-F238E27FC236}">
-                <a16:creationId xmlns:a16="http://schemas.microsoft.com/office/drawing/2014/main" id="{5FF0C0A0-05F7-48EB-AB60-0757A314D2F8}"/>
+                <a16:creationId xmlns:a16="http://schemas.microsoft.com/office/drawing/2014/main" id="{030C3C63-0B11-4B78-A5B3-5B19D5EE9CC0}"/>
               </a:ext>
             </a:extLst>
           </p:cNvPr>
@@ -18928,7 +18917,7 @@
           <p:cNvPr id="52" name="">
             <a:extLst xmlns:a="http://schemas.openxmlformats.org/drawingml/2006/main">
               <a:ext uri="{FF2B5EF4-FFF2-40B4-BE49-F238E27FC236}">
-                <a16:creationId xmlns:a16="http://schemas.microsoft.com/office/drawing/2014/main" id="{A63DB639-EF30-4D46-B4D1-DFF6DF64C2E4}"/>
+                <a16:creationId xmlns:a16="http://schemas.microsoft.com/office/drawing/2014/main" id="{9ECA6EAD-3722-4667-B39C-0AAACD567FAE}"/>
               </a:ext>
             </a:extLst>
           </p:cNvPr>
@@ -18986,7 +18975,7 @@
           <p:cNvPr id="53" name="">
             <a:extLst xmlns:a="http://schemas.openxmlformats.org/drawingml/2006/main">
               <a:ext uri="{FF2B5EF4-FFF2-40B4-BE49-F238E27FC236}">
-                <a16:creationId xmlns:a16="http://schemas.microsoft.com/office/drawing/2014/main" id="{CE4B7C9A-97A3-4008-B305-A2DCFBA37312}"/>
+                <a16:creationId xmlns:a16="http://schemas.microsoft.com/office/drawing/2014/main" id="{50E7A5FB-388C-4806-AF9A-E9E966CB632C}"/>
               </a:ext>
             </a:extLst>
           </p:cNvPr>
@@ -19044,7 +19033,7 @@
           <p:cNvPr id="54" name="">
             <a:extLst xmlns:a="http://schemas.openxmlformats.org/drawingml/2006/main">
               <a:ext uri="{FF2B5EF4-FFF2-40B4-BE49-F238E27FC236}">
-                <a16:creationId xmlns:a16="http://schemas.microsoft.com/office/drawing/2014/main" id="{136B179E-EC0A-498E-851B-A7E74E46E180}"/>
+                <a16:creationId xmlns:a16="http://schemas.microsoft.com/office/drawing/2014/main" id="{574E89D5-3E05-46F0-BA7B-8F60F9341E22}"/>
               </a:ext>
             </a:extLst>
           </p:cNvPr>
@@ -19102,7 +19091,7 @@
           <p:cNvPr id="55" name="">
             <a:extLst xmlns:a="http://schemas.openxmlformats.org/drawingml/2006/main">
               <a:ext uri="{FF2B5EF4-FFF2-40B4-BE49-F238E27FC236}">
-                <a16:creationId xmlns:a16="http://schemas.microsoft.com/office/drawing/2014/main" id="{59BD4228-3886-4DF5-932B-BC3A8A891934}"/>
+                <a16:creationId xmlns:a16="http://schemas.microsoft.com/office/drawing/2014/main" id="{ADA07120-F032-441F-A3DA-224C1C466E2E}"/>
               </a:ext>
             </a:extLst>
           </p:cNvPr>
@@ -19160,7 +19149,7 @@
           <p:cNvPr id="56" name="">
             <a:extLst xmlns:a="http://schemas.openxmlformats.org/drawingml/2006/main">
               <a:ext uri="{FF2B5EF4-FFF2-40B4-BE49-F238E27FC236}">
-                <a16:creationId xmlns:a16="http://schemas.microsoft.com/office/drawing/2014/main" id="{A6F0EFD3-2BD3-4CD8-9B16-96AFC68A4048}"/>
+                <a16:creationId xmlns:a16="http://schemas.microsoft.com/office/drawing/2014/main" id="{8A7F0CE3-6FAF-4CCA-AFA9-C86C89F0801E}"/>
               </a:ext>
             </a:extLst>
           </p:cNvPr>
@@ -19218,7 +19207,7 @@
           <p:cNvPr id="57" name="">
             <a:extLst xmlns:a="http://schemas.openxmlformats.org/drawingml/2006/main">
               <a:ext uri="{FF2B5EF4-FFF2-40B4-BE49-F238E27FC236}">
-                <a16:creationId xmlns:a16="http://schemas.microsoft.com/office/drawing/2014/main" id="{355D0F73-EFBD-450A-A9A1-3BCCD682AF4A}"/>
+                <a16:creationId xmlns:a16="http://schemas.microsoft.com/office/drawing/2014/main" id="{5ABEA31B-35C2-4736-B335-F9935F80B5C3}"/>
               </a:ext>
             </a:extLst>
           </p:cNvPr>
@@ -19276,7 +19265,7 @@
           <p:cNvPr id="58" name="">
             <a:extLst xmlns:a="http://schemas.openxmlformats.org/drawingml/2006/main">
               <a:ext uri="{FF2B5EF4-FFF2-40B4-BE49-F238E27FC236}">
-                <a16:creationId xmlns:a16="http://schemas.microsoft.com/office/drawing/2014/main" id="{AFE0047C-0136-4B44-AD39-BC78CC181C0D}"/>
+                <a16:creationId xmlns:a16="http://schemas.microsoft.com/office/drawing/2014/main" id="{D648898F-4DA9-4691-B602-0F803381F97B}"/>
               </a:ext>
             </a:extLst>
           </p:cNvPr>
@@ -19334,7 +19323,7 @@
           <p:cNvPr id="59" name="">
             <a:extLst xmlns:a="http://schemas.openxmlformats.org/drawingml/2006/main">
               <a:ext uri="{FF2B5EF4-FFF2-40B4-BE49-F238E27FC236}">
-                <a16:creationId xmlns:a16="http://schemas.microsoft.com/office/drawing/2014/main" id="{7C924E07-6224-4A00-BE6C-FB55CE3F63EA}"/>
+                <a16:creationId xmlns:a16="http://schemas.microsoft.com/office/drawing/2014/main" id="{572AD07D-5F4B-43AC-8902-A4CEE5084136}"/>
               </a:ext>
             </a:extLst>
           </p:cNvPr>
@@ -19367,7 +19356,7 @@
           <p:cNvPr id="60" name="">
             <a:extLst xmlns:a="http://schemas.openxmlformats.org/drawingml/2006/main">
               <a:ext uri="{FF2B5EF4-FFF2-40B4-BE49-F238E27FC236}">
-                <a16:creationId xmlns:a16="http://schemas.microsoft.com/office/drawing/2014/main" id="{45736642-BB21-4F14-A255-27B6F0BFE826}"/>
+                <a16:creationId xmlns:a16="http://schemas.microsoft.com/office/drawing/2014/main" id="{8D1AD88F-C2A1-4D2A-A4A0-D39EEE334266}"/>
               </a:ext>
             </a:extLst>
           </p:cNvPr>
@@ -19425,7 +19414,7 @@
                 <a:latin typeface="Microsoft YaHei"/>
                 <a:ea typeface="Microsoft YaHei"/>
                 <a:cs typeface="Microsoft YaHei"/>
-                <a:hlinkClick xmlns:r="http://schemas.openxmlformats.org/officeDocument/2006/relationships" r:id="R73806b1a14fb4a73"/>
+                <a:hlinkClick xmlns:r="http://schemas.openxmlformats.org/officeDocument/2006/relationships" r:id="Redffe81a55474e33"/>
               </a:rPr>
               <a:t>智谱：Coding Agent工作原理</a:t>
             </a:r>
@@ -19437,7 +19426,7 @@
           <p:cNvPr id="61" name="">
             <a:extLst xmlns:a="http://schemas.openxmlformats.org/drawingml/2006/main">
               <a:ext uri="{FF2B5EF4-FFF2-40B4-BE49-F238E27FC236}">
-                <a16:creationId xmlns:a16="http://schemas.microsoft.com/office/drawing/2014/main" id="{8710ABB2-08FD-4706-AFFF-D060D1056825}"/>
+                <a16:creationId xmlns:a16="http://schemas.microsoft.com/office/drawing/2014/main" id="{030A3A71-A8FF-4CED-9BC7-7170B79869C7}"/>
               </a:ext>
             </a:extLst>
           </p:cNvPr>
@@ -19493,7 +19482,7 @@
     </p:spTree>
     <p:extLst>
       <p:ext uri="{BB962C8B-B14F-4D97-AF65-F5344CB8AC3E}">
-        <p14:creationId xmlns:p14="http://schemas.microsoft.com/office/powerpoint/2010/main" val="113556696"/>
+        <p14:creationId xmlns:p14="http://schemas.microsoft.com/office/powerpoint/2010/main" val="1374477156"/>
       </p:ext>
     </p:extLst>
   </p:cSld>
@@ -19524,7 +19513,7 @@
           <p:cNvPr id="68" name="">
             <a:extLst xmlns:a="http://schemas.openxmlformats.org/drawingml/2006/main">
               <a:ext uri="{FF2B5EF4-FFF2-40B4-BE49-F238E27FC236}">
-                <a16:creationId xmlns:a16="http://schemas.microsoft.com/office/drawing/2014/main" id="{C30FB296-154E-4408-8744-C329AA84B92B}"/>
+                <a16:creationId xmlns:a16="http://schemas.microsoft.com/office/drawing/2014/main" id="{12923210-F4E1-4FA5-AC0E-B7E503D33105}"/>
               </a:ext>
             </a:extLst>
           </p:cNvPr>
@@ -19557,7 +19546,7 @@
           <p:cNvPr id="2" name="">
             <a:extLst xmlns:a="http://schemas.openxmlformats.org/drawingml/2006/main">
               <a:ext uri="{FF2B5EF4-FFF2-40B4-BE49-F238E27FC236}">
-                <a16:creationId xmlns:a16="http://schemas.microsoft.com/office/drawing/2014/main" id="{18FB14CC-03F3-4447-B457-1812FFB77926}"/>
+                <a16:creationId xmlns:a16="http://schemas.microsoft.com/office/drawing/2014/main" id="{D4A7B960-4496-4B63-9BA1-72C9156CD562}"/>
               </a:ext>
             </a:extLst>
           </p:cNvPr>
@@ -19615,7 +19604,7 @@
           <p:cNvPr id="3" name="">
             <a:extLst xmlns:a="http://schemas.openxmlformats.org/drawingml/2006/main">
               <a:ext uri="{FF2B5EF4-FFF2-40B4-BE49-F238E27FC236}">
-                <a16:creationId xmlns:a16="http://schemas.microsoft.com/office/drawing/2014/main" id="{FFA9B2D7-45FC-4753-A531-19678BF4CE51}"/>
+                <a16:creationId xmlns:a16="http://schemas.microsoft.com/office/drawing/2014/main" id="{885D0A63-BAE7-4F55-81CA-5C8A7152A6CF}"/>
               </a:ext>
             </a:extLst>
           </p:cNvPr>
@@ -19673,7 +19662,7 @@
           <p:cNvPr id="4" name="">
             <a:extLst xmlns:a="http://schemas.openxmlformats.org/drawingml/2006/main">
               <a:ext uri="{FF2B5EF4-FFF2-40B4-BE49-F238E27FC236}">
-                <a16:creationId xmlns:a16="http://schemas.microsoft.com/office/drawing/2014/main" id="{962FBB26-A4A3-47C8-97BF-14467B4D89B8}"/>
+                <a16:creationId xmlns:a16="http://schemas.microsoft.com/office/drawing/2014/main" id="{A3219766-430B-43CD-99B8-038F83192436}"/>
               </a:ext>
             </a:extLst>
           </p:cNvPr>
@@ -19706,7 +19695,7 @@
           <p:cNvPr id="5" name="">
             <a:extLst xmlns:a="http://schemas.openxmlformats.org/drawingml/2006/main">
               <a:ext uri="{FF2B5EF4-FFF2-40B4-BE49-F238E27FC236}">
-                <a16:creationId xmlns:a16="http://schemas.microsoft.com/office/drawing/2014/main" id="{A21D9791-C2C6-44F9-8924-D8C1AB1D0E19}"/>
+                <a16:creationId xmlns:a16="http://schemas.microsoft.com/office/drawing/2014/main" id="{39800DED-5CA1-43B1-A147-9EF160EC7DB3}"/>
               </a:ext>
             </a:extLst>
           </p:cNvPr>
@@ -19764,7 +19753,7 @@
           <p:cNvPr id="6" name="">
             <a:extLst xmlns:a="http://schemas.openxmlformats.org/drawingml/2006/main">
               <a:ext uri="{FF2B5EF4-FFF2-40B4-BE49-F238E27FC236}">
-                <a16:creationId xmlns:a16="http://schemas.microsoft.com/office/drawing/2014/main" id="{F8397FA8-A01D-4D3A-8347-A6F72D5F03FC}"/>
+                <a16:creationId xmlns:a16="http://schemas.microsoft.com/office/drawing/2014/main" id="{6B80EC04-E865-407A-90D5-20519603335F}"/>
               </a:ext>
             </a:extLst>
           </p:cNvPr>
@@ -19822,7 +19811,7 @@
           <p:cNvPr id="7" name="">
             <a:extLst xmlns:a="http://schemas.openxmlformats.org/drawingml/2006/main">
               <a:ext uri="{FF2B5EF4-FFF2-40B4-BE49-F238E27FC236}">
-                <a16:creationId xmlns:a16="http://schemas.microsoft.com/office/drawing/2014/main" id="{C45E4AC5-F847-49ED-BDD6-BE72BD66F05E}"/>
+                <a16:creationId xmlns:a16="http://schemas.microsoft.com/office/drawing/2014/main" id="{1FBC3727-B4D2-428F-AC2D-6C3E61861263}"/>
               </a:ext>
             </a:extLst>
           </p:cNvPr>
@@ -19880,7 +19869,7 @@
           <p:cNvPr id="8" name="">
             <a:extLst xmlns:a="http://schemas.openxmlformats.org/drawingml/2006/main">
               <a:ext uri="{FF2B5EF4-FFF2-40B4-BE49-F238E27FC236}">
-                <a16:creationId xmlns:a16="http://schemas.microsoft.com/office/drawing/2014/main" id="{A305EA8D-A58D-4B97-8924-B8E1387C2FE3}"/>
+                <a16:creationId xmlns:a16="http://schemas.microsoft.com/office/drawing/2014/main" id="{5D20774E-63F4-4C63-8203-A003FDD4B3F7}"/>
               </a:ext>
             </a:extLst>
           </p:cNvPr>
@@ -19913,7 +19902,7 @@
           <p:cNvPr id="9" name="">
             <a:extLst xmlns:a="http://schemas.openxmlformats.org/drawingml/2006/main">
               <a:ext uri="{FF2B5EF4-FFF2-40B4-BE49-F238E27FC236}">
-                <a16:creationId xmlns:a16="http://schemas.microsoft.com/office/drawing/2014/main" id="{7417AD0A-156A-4711-9BDB-474F60B9E7BD}"/>
+                <a16:creationId xmlns:a16="http://schemas.microsoft.com/office/drawing/2014/main" id="{A77E76CD-EA26-417A-A0B0-596CFBA00284}"/>
               </a:ext>
             </a:extLst>
           </p:cNvPr>
@@ -19946,7 +19935,7 @@
           <p:cNvPr id="10" name="">
             <a:extLst xmlns:a="http://schemas.openxmlformats.org/drawingml/2006/main">
               <a:ext uri="{FF2B5EF4-FFF2-40B4-BE49-F238E27FC236}">
-                <a16:creationId xmlns:a16="http://schemas.microsoft.com/office/drawing/2014/main" id="{B549E625-FD6D-415A-AAF6-8E0344D07F0A}"/>
+                <a16:creationId xmlns:a16="http://schemas.microsoft.com/office/drawing/2014/main" id="{E767AE48-5B2A-4BC9-A0D6-712BDEEF2A67}"/>
               </a:ext>
             </a:extLst>
           </p:cNvPr>
@@ -19979,7 +19968,7 @@
           <p:cNvPr id="11" name="">
             <a:extLst xmlns:a="http://schemas.openxmlformats.org/drawingml/2006/main">
               <a:ext uri="{FF2B5EF4-FFF2-40B4-BE49-F238E27FC236}">
-                <a16:creationId xmlns:a16="http://schemas.microsoft.com/office/drawing/2014/main" id="{3639EFC9-DAD6-4D82-81B6-EB7DF680C730}"/>
+                <a16:creationId xmlns:a16="http://schemas.microsoft.com/office/drawing/2014/main" id="{05455888-3E0B-4239-96D2-CACB37E51F61}"/>
               </a:ext>
             </a:extLst>
           </p:cNvPr>
@@ -20037,7 +20026,7 @@
           <p:cNvPr id="12" name="">
             <a:extLst xmlns:a="http://schemas.openxmlformats.org/drawingml/2006/main">
               <a:ext uri="{FF2B5EF4-FFF2-40B4-BE49-F238E27FC236}">
-                <a16:creationId xmlns:a16="http://schemas.microsoft.com/office/drawing/2014/main" id="{085D9894-1E85-4C10-915D-18182A87ED1A}"/>
+                <a16:creationId xmlns:a16="http://schemas.microsoft.com/office/drawing/2014/main" id="{633CB64C-EA3A-4414-A20B-4299A2B7FA6E}"/>
               </a:ext>
             </a:extLst>
           </p:cNvPr>
@@ -20095,7 +20084,7 @@
           <p:cNvPr id="13" name="">
             <a:extLst xmlns:a="http://schemas.openxmlformats.org/drawingml/2006/main">
               <a:ext uri="{FF2B5EF4-FFF2-40B4-BE49-F238E27FC236}">
-                <a16:creationId xmlns:a16="http://schemas.microsoft.com/office/drawing/2014/main" id="{672953A8-6C5B-439D-B3FD-FA64E121C803}"/>
+                <a16:creationId xmlns:a16="http://schemas.microsoft.com/office/drawing/2014/main" id="{25B9B101-53E4-4281-8D31-92020A2D2EB3}"/>
               </a:ext>
             </a:extLst>
           </p:cNvPr>
@@ -20153,7 +20142,7 @@
           <p:cNvPr id="14" name="">
             <a:extLst xmlns:a="http://schemas.openxmlformats.org/drawingml/2006/main">
               <a:ext uri="{FF2B5EF4-FFF2-40B4-BE49-F238E27FC236}">
-                <a16:creationId xmlns:a16="http://schemas.microsoft.com/office/drawing/2014/main" id="{58690157-C6B8-4542-BB74-4E198FB21C18}"/>
+                <a16:creationId xmlns:a16="http://schemas.microsoft.com/office/drawing/2014/main" id="{897A1F29-4FBA-4ACC-8819-3FF7C56655BE}"/>
               </a:ext>
             </a:extLst>
           </p:cNvPr>
@@ -20186,7 +20175,7 @@
           <p:cNvPr id="15" name="">
             <a:extLst xmlns:a="http://schemas.openxmlformats.org/drawingml/2006/main">
               <a:ext uri="{FF2B5EF4-FFF2-40B4-BE49-F238E27FC236}">
-                <a16:creationId xmlns:a16="http://schemas.microsoft.com/office/drawing/2014/main" id="{0337CC38-A239-43C1-A275-52DBF045EC58}"/>
+                <a16:creationId xmlns:a16="http://schemas.microsoft.com/office/drawing/2014/main" id="{51E21E67-9DFD-411A-8D7E-78F909EC06EC}"/>
               </a:ext>
             </a:extLst>
           </p:cNvPr>
@@ -20219,7 +20208,7 @@
           <p:cNvPr id="16" name="">
             <a:extLst xmlns:a="http://schemas.openxmlformats.org/drawingml/2006/main">
               <a:ext uri="{FF2B5EF4-FFF2-40B4-BE49-F238E27FC236}">
-                <a16:creationId xmlns:a16="http://schemas.microsoft.com/office/drawing/2014/main" id="{8688319F-286D-4C37-BCD4-772C737587A2}"/>
+                <a16:creationId xmlns:a16="http://schemas.microsoft.com/office/drawing/2014/main" id="{73B46E5E-D1F7-4A66-AE7A-988DDC3B51F8}"/>
               </a:ext>
             </a:extLst>
           </p:cNvPr>
@@ -20252,7 +20241,7 @@
           <p:cNvPr id="17" name="">
             <a:extLst xmlns:a="http://schemas.openxmlformats.org/drawingml/2006/main">
               <a:ext uri="{FF2B5EF4-FFF2-40B4-BE49-F238E27FC236}">
-                <a16:creationId xmlns:a16="http://schemas.microsoft.com/office/drawing/2014/main" id="{DC85753E-2279-42DE-9B8D-11361BABAFAF}"/>
+                <a16:creationId xmlns:a16="http://schemas.microsoft.com/office/drawing/2014/main" id="{FF0FFEDD-77FF-4404-B247-0FEF9F7AD4B1}"/>
               </a:ext>
             </a:extLst>
           </p:cNvPr>
@@ -20310,7 +20299,7 @@
           <p:cNvPr id="18" name="">
             <a:extLst xmlns:a="http://schemas.openxmlformats.org/drawingml/2006/main">
               <a:ext uri="{FF2B5EF4-FFF2-40B4-BE49-F238E27FC236}">
-                <a16:creationId xmlns:a16="http://schemas.microsoft.com/office/drawing/2014/main" id="{049C0A34-F717-49A9-AC63-ED87E7E257E2}"/>
+                <a16:creationId xmlns:a16="http://schemas.microsoft.com/office/drawing/2014/main" id="{E9AE1866-6054-4A7E-B61C-D59E25F7AA91}"/>
               </a:ext>
             </a:extLst>
           </p:cNvPr>
@@ -20368,7 +20357,7 @@
           <p:cNvPr id="19" name="">
             <a:extLst xmlns:a="http://schemas.openxmlformats.org/drawingml/2006/main">
               <a:ext uri="{FF2B5EF4-FFF2-40B4-BE49-F238E27FC236}">
-                <a16:creationId xmlns:a16="http://schemas.microsoft.com/office/drawing/2014/main" id="{520B1F64-CD3A-4FFA-9B9B-68130E80B9DD}"/>
+                <a16:creationId xmlns:a16="http://schemas.microsoft.com/office/drawing/2014/main" id="{809BA597-610A-4339-92AB-B9D7ADED0436}"/>
               </a:ext>
             </a:extLst>
           </p:cNvPr>
@@ -20426,7 +20415,7 @@
           <p:cNvPr id="20" name="">
             <a:extLst xmlns:a="http://schemas.openxmlformats.org/drawingml/2006/main">
               <a:ext uri="{FF2B5EF4-FFF2-40B4-BE49-F238E27FC236}">
-                <a16:creationId xmlns:a16="http://schemas.microsoft.com/office/drawing/2014/main" id="{04464746-0AC8-4AA9-88CF-7560C41DA6C0}"/>
+                <a16:creationId xmlns:a16="http://schemas.microsoft.com/office/drawing/2014/main" id="{79484AA0-33D3-43F1-BF57-C762D8256699}"/>
               </a:ext>
             </a:extLst>
           </p:cNvPr>
@@ -20459,7 +20448,7 @@
           <p:cNvPr id="21" name="">
             <a:extLst xmlns:a="http://schemas.openxmlformats.org/drawingml/2006/main">
               <a:ext uri="{FF2B5EF4-FFF2-40B4-BE49-F238E27FC236}">
-                <a16:creationId xmlns:a16="http://schemas.microsoft.com/office/drawing/2014/main" id="{31EC9414-923B-4D3B-BF5E-8CAEDCF2FE81}"/>
+                <a16:creationId xmlns:a16="http://schemas.microsoft.com/office/drawing/2014/main" id="{5968B484-96D5-4300-9FB0-FF695BD075EF}"/>
               </a:ext>
             </a:extLst>
           </p:cNvPr>
@@ -20492,7 +20481,7 @@
           <p:cNvPr id="22" name="">
             <a:extLst xmlns:a="http://schemas.openxmlformats.org/drawingml/2006/main">
               <a:ext uri="{FF2B5EF4-FFF2-40B4-BE49-F238E27FC236}">
-                <a16:creationId xmlns:a16="http://schemas.microsoft.com/office/drawing/2014/main" id="{DDBFCC11-A58F-4499-A46B-7733B8659D29}"/>
+                <a16:creationId xmlns:a16="http://schemas.microsoft.com/office/drawing/2014/main" id="{7765B1B1-8B63-4F88-9D4E-DF651D697FF7}"/>
               </a:ext>
             </a:extLst>
           </p:cNvPr>
@@ -20525,7 +20514,7 @@
           <p:cNvPr id="23" name="">
             <a:extLst xmlns:a="http://schemas.openxmlformats.org/drawingml/2006/main">
               <a:ext uri="{FF2B5EF4-FFF2-40B4-BE49-F238E27FC236}">
-                <a16:creationId xmlns:a16="http://schemas.microsoft.com/office/drawing/2014/main" id="{8509A20A-7E41-4240-9238-43A5B8ACE556}"/>
+                <a16:creationId xmlns:a16="http://schemas.microsoft.com/office/drawing/2014/main" id="{93257A05-B56B-461C-878F-DB0CD12C5CA1}"/>
               </a:ext>
             </a:extLst>
           </p:cNvPr>
@@ -20583,7 +20572,7 @@
           <p:cNvPr id="24" name="">
             <a:extLst xmlns:a="http://schemas.openxmlformats.org/drawingml/2006/main">
               <a:ext uri="{FF2B5EF4-FFF2-40B4-BE49-F238E27FC236}">
-                <a16:creationId xmlns:a16="http://schemas.microsoft.com/office/drawing/2014/main" id="{DC18951F-A476-4DF4-9876-ACFD2B2C4727}"/>
+                <a16:creationId xmlns:a16="http://schemas.microsoft.com/office/drawing/2014/main" id="{6491FD72-B5F9-4E62-8910-559E34434603}"/>
               </a:ext>
             </a:extLst>
           </p:cNvPr>
@@ -20641,7 +20630,7 @@
           <p:cNvPr id="25" name="">
             <a:extLst xmlns:a="http://schemas.openxmlformats.org/drawingml/2006/main">
               <a:ext uri="{FF2B5EF4-FFF2-40B4-BE49-F238E27FC236}">
-                <a16:creationId xmlns:a16="http://schemas.microsoft.com/office/drawing/2014/main" id="{3795BBE1-A86C-425F-A155-8CB8816FEB34}"/>
+                <a16:creationId xmlns:a16="http://schemas.microsoft.com/office/drawing/2014/main" id="{14685B17-9699-4B41-8391-6929870162EF}"/>
               </a:ext>
             </a:extLst>
           </p:cNvPr>
@@ -20699,7 +20688,7 @@
           <p:cNvPr id="26" name="">
             <a:extLst xmlns:a="http://schemas.openxmlformats.org/drawingml/2006/main">
               <a:ext uri="{FF2B5EF4-FFF2-40B4-BE49-F238E27FC236}">
-                <a16:creationId xmlns:a16="http://schemas.microsoft.com/office/drawing/2014/main" id="{334E1714-ED57-47D3-81A0-EAB5386EBE23}"/>
+                <a16:creationId xmlns:a16="http://schemas.microsoft.com/office/drawing/2014/main" id="{54291240-88AF-4E20-B79E-620C15A31245}"/>
               </a:ext>
             </a:extLst>
           </p:cNvPr>
@@ -20732,7 +20721,7 @@
           <p:cNvPr id="27" name="">
             <a:extLst xmlns:a="http://schemas.openxmlformats.org/drawingml/2006/main">
               <a:ext uri="{FF2B5EF4-FFF2-40B4-BE49-F238E27FC236}">
-                <a16:creationId xmlns:a16="http://schemas.microsoft.com/office/drawing/2014/main" id="{9A840E25-0006-4D1C-9C32-782737D053DE}"/>
+                <a16:creationId xmlns:a16="http://schemas.microsoft.com/office/drawing/2014/main" id="{A6B7CFBE-BEF5-4770-8F65-00912E9D9D91}"/>
               </a:ext>
             </a:extLst>
           </p:cNvPr>
@@ -20765,7 +20754,7 @@
           <p:cNvPr id="28" name="">
             <a:extLst xmlns:a="http://schemas.openxmlformats.org/drawingml/2006/main">
               <a:ext uri="{FF2B5EF4-FFF2-40B4-BE49-F238E27FC236}">
-                <a16:creationId xmlns:a16="http://schemas.microsoft.com/office/drawing/2014/main" id="{9AB876AB-F094-4005-9074-FA0F9D1BE2EC}"/>
+                <a16:creationId xmlns:a16="http://schemas.microsoft.com/office/drawing/2014/main" id="{28C8224E-CA9E-4239-BBE5-4646A7AA8257}"/>
               </a:ext>
             </a:extLst>
           </p:cNvPr>
@@ -20798,7 +20787,7 @@
           <p:cNvPr id="29" name="">
             <a:extLst xmlns:a="http://schemas.openxmlformats.org/drawingml/2006/main">
               <a:ext uri="{FF2B5EF4-FFF2-40B4-BE49-F238E27FC236}">
-                <a16:creationId xmlns:a16="http://schemas.microsoft.com/office/drawing/2014/main" id="{4C6EE51D-C575-487D-AB8B-B4420C21F895}"/>
+                <a16:creationId xmlns:a16="http://schemas.microsoft.com/office/drawing/2014/main" id="{DE0114A3-617A-42C8-9617-88AF2E37FCA8}"/>
               </a:ext>
             </a:extLst>
           </p:cNvPr>
@@ -20856,7 +20845,7 @@
           <p:cNvPr id="30" name="">
             <a:extLst xmlns:a="http://schemas.openxmlformats.org/drawingml/2006/main">
               <a:ext uri="{FF2B5EF4-FFF2-40B4-BE49-F238E27FC236}">
-                <a16:creationId xmlns:a16="http://schemas.microsoft.com/office/drawing/2014/main" id="{0CD3D649-C1CC-4081-A7FE-D02B89B0BEB6}"/>
+                <a16:creationId xmlns:a16="http://schemas.microsoft.com/office/drawing/2014/main" id="{432CB832-3741-4A2F-8F22-EBE3D2F9DEDB}"/>
               </a:ext>
             </a:extLst>
           </p:cNvPr>
@@ -20914,7 +20903,7 @@
           <p:cNvPr id="31" name="">
             <a:extLst xmlns:a="http://schemas.openxmlformats.org/drawingml/2006/main">
               <a:ext uri="{FF2B5EF4-FFF2-40B4-BE49-F238E27FC236}">
-                <a16:creationId xmlns:a16="http://schemas.microsoft.com/office/drawing/2014/main" id="{AAB4B7D5-C788-489E-9ECC-DBE8476316C0}"/>
+                <a16:creationId xmlns:a16="http://schemas.microsoft.com/office/drawing/2014/main" id="{A24347E7-3D94-4CBA-81E9-799FE523C0F3}"/>
               </a:ext>
             </a:extLst>
           </p:cNvPr>
@@ -20972,7 +20961,7 @@
           <p:cNvPr id="32" name="">
             <a:extLst xmlns:a="http://schemas.openxmlformats.org/drawingml/2006/main">
               <a:ext uri="{FF2B5EF4-FFF2-40B4-BE49-F238E27FC236}">
-                <a16:creationId xmlns:a16="http://schemas.microsoft.com/office/drawing/2014/main" id="{FF43D323-C266-4F1F-AC00-CFFC8618353A}"/>
+                <a16:creationId xmlns:a16="http://schemas.microsoft.com/office/drawing/2014/main" id="{E8C74123-1479-434E-9863-053CBEC1A53B}"/>
               </a:ext>
             </a:extLst>
           </p:cNvPr>
@@ -21005,7 +20994,7 @@
           <p:cNvPr id="33" name="">
             <a:extLst xmlns:a="http://schemas.openxmlformats.org/drawingml/2006/main">
               <a:ext uri="{FF2B5EF4-FFF2-40B4-BE49-F238E27FC236}">
-                <a16:creationId xmlns:a16="http://schemas.microsoft.com/office/drawing/2014/main" id="{F9F5D8F7-9311-4326-AD72-B1797C812461}"/>
+                <a16:creationId xmlns:a16="http://schemas.microsoft.com/office/drawing/2014/main" id="{D4C16845-C462-4CB0-9AF9-9C010BCD0E31}"/>
               </a:ext>
             </a:extLst>
           </p:cNvPr>
@@ -21063,7 +21052,7 @@
           <p:cNvPr id="34" name="">
             <a:extLst xmlns:a="http://schemas.openxmlformats.org/drawingml/2006/main">
               <a:ext uri="{FF2B5EF4-FFF2-40B4-BE49-F238E27FC236}">
-                <a16:creationId xmlns:a16="http://schemas.microsoft.com/office/drawing/2014/main" id="{2ADC0D0C-4ADD-4288-B6BC-D8BA36DBB91D}"/>
+                <a16:creationId xmlns:a16="http://schemas.microsoft.com/office/drawing/2014/main" id="{4E5C4301-4955-48E5-912B-BE800853F5BE}"/>
               </a:ext>
             </a:extLst>
           </p:cNvPr>
@@ -21121,7 +21110,7 @@
           <p:cNvPr id="35" name="">
             <a:extLst xmlns:a="http://schemas.openxmlformats.org/drawingml/2006/main">
               <a:ext uri="{FF2B5EF4-FFF2-40B4-BE49-F238E27FC236}">
-                <a16:creationId xmlns:a16="http://schemas.microsoft.com/office/drawing/2014/main" id="{F4D0AF77-8FC1-4B70-9FD1-4BF5025817B9}"/>
+                <a16:creationId xmlns:a16="http://schemas.microsoft.com/office/drawing/2014/main" id="{945F4F4C-7823-4557-A632-D5C59BFD1DDB}"/>
               </a:ext>
             </a:extLst>
           </p:cNvPr>
@@ -21154,7 +21143,7 @@
           <p:cNvPr id="36" name="">
             <a:extLst xmlns:a="http://schemas.openxmlformats.org/drawingml/2006/main">
               <a:ext uri="{FF2B5EF4-FFF2-40B4-BE49-F238E27FC236}">
-                <a16:creationId xmlns:a16="http://schemas.microsoft.com/office/drawing/2014/main" id="{98CABE29-E460-4140-9F02-AB9B93828496}"/>
+                <a16:creationId xmlns:a16="http://schemas.microsoft.com/office/drawing/2014/main" id="{8A419EB1-D75E-475E-9538-F1C7CA847EF3}"/>
               </a:ext>
             </a:extLst>
           </p:cNvPr>
@@ -21212,7 +21201,7 @@
           <p:cNvPr id="37" name="">
             <a:extLst xmlns:a="http://schemas.openxmlformats.org/drawingml/2006/main">
               <a:ext uri="{FF2B5EF4-FFF2-40B4-BE49-F238E27FC236}">
-                <a16:creationId xmlns:a16="http://schemas.microsoft.com/office/drawing/2014/main" id="{CA47E01D-1723-4F3E-AD98-86BFDCB51DA1}"/>
+                <a16:creationId xmlns:a16="http://schemas.microsoft.com/office/drawing/2014/main" id="{E2CB3465-8C7A-4409-8B89-29EB4A409FBC}"/>
               </a:ext>
             </a:extLst>
           </p:cNvPr>
@@ -21245,7 +21234,7 @@
           <p:cNvPr id="38" name="">
             <a:extLst xmlns:a="http://schemas.openxmlformats.org/drawingml/2006/main">
               <a:ext uri="{FF2B5EF4-FFF2-40B4-BE49-F238E27FC236}">
-                <a16:creationId xmlns:a16="http://schemas.microsoft.com/office/drawing/2014/main" id="{74ED6D4E-64BB-4198-A906-7B76976EA110}"/>
+                <a16:creationId xmlns:a16="http://schemas.microsoft.com/office/drawing/2014/main" id="{9308BF8E-A866-4306-B6F2-7A14CF5C0382}"/>
               </a:ext>
             </a:extLst>
           </p:cNvPr>
@@ -21303,7 +21292,7 @@
           <p:cNvPr id="39" name="">
             <a:extLst xmlns:a="http://schemas.openxmlformats.org/drawingml/2006/main">
               <a:ext uri="{FF2B5EF4-FFF2-40B4-BE49-F238E27FC236}">
-                <a16:creationId xmlns:a16="http://schemas.microsoft.com/office/drawing/2014/main" id="{43CA2A68-FB72-4C9A-B3F5-4616EF187703}"/>
+                <a16:creationId xmlns:a16="http://schemas.microsoft.com/office/drawing/2014/main" id="{83145987-6C06-4F28-9B86-06B9B29BEE8E}"/>
               </a:ext>
             </a:extLst>
           </p:cNvPr>
@@ -21361,7 +21350,7 @@
           <p:cNvPr id="40" name="">
             <a:extLst xmlns:a="http://schemas.openxmlformats.org/drawingml/2006/main">
               <a:ext uri="{FF2B5EF4-FFF2-40B4-BE49-F238E27FC236}">
-                <a16:creationId xmlns:a16="http://schemas.microsoft.com/office/drawing/2014/main" id="{BFCE48EB-D704-4F40-8B52-CD3DF471B4A6}"/>
+                <a16:creationId xmlns:a16="http://schemas.microsoft.com/office/drawing/2014/main" id="{4A9283D3-97F0-4059-AC58-4D920D84334E}"/>
               </a:ext>
             </a:extLst>
           </p:cNvPr>
@@ -21394,7 +21383,7 @@
           <p:cNvPr id="41" name="">
             <a:extLst xmlns:a="http://schemas.openxmlformats.org/drawingml/2006/main">
               <a:ext uri="{FF2B5EF4-FFF2-40B4-BE49-F238E27FC236}">
-                <a16:creationId xmlns:a16="http://schemas.microsoft.com/office/drawing/2014/main" id="{337532CE-7A42-4B6A-AEAA-31952FB4484A}"/>
+                <a16:creationId xmlns:a16="http://schemas.microsoft.com/office/drawing/2014/main" id="{5F1747A4-BF9B-4204-88AE-AC416BA2D838}"/>
               </a:ext>
             </a:extLst>
           </p:cNvPr>
@@ -21452,7 +21441,7 @@
           <p:cNvPr id="42" name="">
             <a:extLst xmlns:a="http://schemas.openxmlformats.org/drawingml/2006/main">
               <a:ext uri="{FF2B5EF4-FFF2-40B4-BE49-F238E27FC236}">
-                <a16:creationId xmlns:a16="http://schemas.microsoft.com/office/drawing/2014/main" id="{3F6EB368-2F61-4E61-BFFE-38E1F7379687}"/>
+                <a16:creationId xmlns:a16="http://schemas.microsoft.com/office/drawing/2014/main" id="{D2E050B8-E56C-43FE-B0E6-A71BBE404FD8}"/>
               </a:ext>
             </a:extLst>
           </p:cNvPr>
@@ -21485,7 +21474,7 @@
           <p:cNvPr id="43" name="">
             <a:extLst xmlns:a="http://schemas.openxmlformats.org/drawingml/2006/main">
               <a:ext uri="{FF2B5EF4-FFF2-40B4-BE49-F238E27FC236}">
-                <a16:creationId xmlns:a16="http://schemas.microsoft.com/office/drawing/2014/main" id="{CBF8B5B0-8A80-4B92-B235-93D50FDB4606}"/>
+                <a16:creationId xmlns:a16="http://schemas.microsoft.com/office/drawing/2014/main" id="{F8289D31-6537-41A5-BE53-CA81DB50FA84}"/>
               </a:ext>
             </a:extLst>
           </p:cNvPr>
@@ -21543,7 +21532,7 @@
           <p:cNvPr id="44" name="">
             <a:extLst xmlns:a="http://schemas.openxmlformats.org/drawingml/2006/main">
               <a:ext uri="{FF2B5EF4-FFF2-40B4-BE49-F238E27FC236}">
-                <a16:creationId xmlns:a16="http://schemas.microsoft.com/office/drawing/2014/main" id="{09C31607-E8A8-41C9-A1C9-F347D0626764}"/>
+                <a16:creationId xmlns:a16="http://schemas.microsoft.com/office/drawing/2014/main" id="{A4934142-639B-4156-A447-2CCBA5C63315}"/>
               </a:ext>
             </a:extLst>
           </p:cNvPr>
@@ -21601,7 +21590,7 @@
           <p:cNvPr id="45" name="">
             <a:extLst xmlns:a="http://schemas.openxmlformats.org/drawingml/2006/main">
               <a:ext uri="{FF2B5EF4-FFF2-40B4-BE49-F238E27FC236}">
-                <a16:creationId xmlns:a16="http://schemas.microsoft.com/office/drawing/2014/main" id="{E4029AFA-1C59-4BAD-9104-C912A7BA88A7}"/>
+                <a16:creationId xmlns:a16="http://schemas.microsoft.com/office/drawing/2014/main" id="{CD67768C-6708-48AE-A8C8-664AA1305607}"/>
               </a:ext>
             </a:extLst>
           </p:cNvPr>
@@ -21634,7 +21623,7 @@
           <p:cNvPr id="46" name="">
             <a:extLst xmlns:a="http://schemas.openxmlformats.org/drawingml/2006/main">
               <a:ext uri="{FF2B5EF4-FFF2-40B4-BE49-F238E27FC236}">
-                <a16:creationId xmlns:a16="http://schemas.microsoft.com/office/drawing/2014/main" id="{49CE8784-F6D9-40C2-8D2F-18E3B63730E8}"/>
+                <a16:creationId xmlns:a16="http://schemas.microsoft.com/office/drawing/2014/main" id="{9BF6F69D-3B33-41EE-B01E-A544F1A007B5}"/>
               </a:ext>
             </a:extLst>
           </p:cNvPr>
@@ -21692,7 +21681,7 @@
           <p:cNvPr id="47" name="">
             <a:extLst xmlns:a="http://schemas.openxmlformats.org/drawingml/2006/main">
               <a:ext uri="{FF2B5EF4-FFF2-40B4-BE49-F238E27FC236}">
-                <a16:creationId xmlns:a16="http://schemas.microsoft.com/office/drawing/2014/main" id="{48889819-0772-4DF6-B4CA-481ABAC447B1}"/>
+                <a16:creationId xmlns:a16="http://schemas.microsoft.com/office/drawing/2014/main" id="{49D85874-29FE-414F-BD5E-53829B22E99D}"/>
               </a:ext>
             </a:extLst>
           </p:cNvPr>
@@ -21725,7 +21714,7 @@
           <p:cNvPr id="48" name="">
             <a:extLst xmlns:a="http://schemas.openxmlformats.org/drawingml/2006/main">
               <a:ext uri="{FF2B5EF4-FFF2-40B4-BE49-F238E27FC236}">
-                <a16:creationId xmlns:a16="http://schemas.microsoft.com/office/drawing/2014/main" id="{C71163B6-5DDC-4D65-B66B-7A8DCAB5C3E7}"/>
+                <a16:creationId xmlns:a16="http://schemas.microsoft.com/office/drawing/2014/main" id="{01C5AB7B-53BE-42B3-A95A-E3A5879499DD}"/>
               </a:ext>
             </a:extLst>
           </p:cNvPr>
@@ -21783,7 +21772,7 @@
           <p:cNvPr id="49" name="">
             <a:extLst xmlns:a="http://schemas.openxmlformats.org/drawingml/2006/main">
               <a:ext uri="{FF2B5EF4-FFF2-40B4-BE49-F238E27FC236}">
-                <a16:creationId xmlns:a16="http://schemas.microsoft.com/office/drawing/2014/main" id="{079FB831-AAF2-423F-92C4-E29E13E15DA4}"/>
+                <a16:creationId xmlns:a16="http://schemas.microsoft.com/office/drawing/2014/main" id="{C4584F8B-6401-4FBD-97BA-290FBC7BE1DC}"/>
               </a:ext>
             </a:extLst>
           </p:cNvPr>
@@ -21841,7 +21830,7 @@
           <p:cNvPr id="50" name="">
             <a:extLst xmlns:a="http://schemas.openxmlformats.org/drawingml/2006/main">
               <a:ext uri="{FF2B5EF4-FFF2-40B4-BE49-F238E27FC236}">
-                <a16:creationId xmlns:a16="http://schemas.microsoft.com/office/drawing/2014/main" id="{F2F86586-CA05-433C-AE7A-8EBB2405566B}"/>
+                <a16:creationId xmlns:a16="http://schemas.microsoft.com/office/drawing/2014/main" id="{8F90974D-42D9-47DD-849A-7A92148CF9CE}"/>
               </a:ext>
             </a:extLst>
           </p:cNvPr>
@@ -21874,7 +21863,7 @@
           <p:cNvPr id="51" name="">
             <a:extLst xmlns:a="http://schemas.openxmlformats.org/drawingml/2006/main">
               <a:ext uri="{FF2B5EF4-FFF2-40B4-BE49-F238E27FC236}">
-                <a16:creationId xmlns:a16="http://schemas.microsoft.com/office/drawing/2014/main" id="{AF14659C-1896-4696-8C54-5454F446DFEB}"/>
+                <a16:creationId xmlns:a16="http://schemas.microsoft.com/office/drawing/2014/main" id="{650C911B-AD5E-49A5-95F7-403BAC0E7F87}"/>
               </a:ext>
             </a:extLst>
           </p:cNvPr>
@@ -21932,7 +21921,7 @@
           <p:cNvPr id="52" name="">
             <a:extLst xmlns:a="http://schemas.openxmlformats.org/drawingml/2006/main">
               <a:ext uri="{FF2B5EF4-FFF2-40B4-BE49-F238E27FC236}">
-                <a16:creationId xmlns:a16="http://schemas.microsoft.com/office/drawing/2014/main" id="{BBD4D1F0-F828-4D37-A71F-D4D667245FDE}"/>
+                <a16:creationId xmlns:a16="http://schemas.microsoft.com/office/drawing/2014/main" id="{DE3D9CBE-1F6F-46D0-8159-CDB8C7BA4769}"/>
               </a:ext>
             </a:extLst>
           </p:cNvPr>
@@ -21965,7 +21954,7 @@
           <p:cNvPr id="53" name="">
             <a:extLst xmlns:a="http://schemas.openxmlformats.org/drawingml/2006/main">
               <a:ext uri="{FF2B5EF4-FFF2-40B4-BE49-F238E27FC236}">
-                <a16:creationId xmlns:a16="http://schemas.microsoft.com/office/drawing/2014/main" id="{F415453A-6704-44E1-806D-61C904E8B756}"/>
+                <a16:creationId xmlns:a16="http://schemas.microsoft.com/office/drawing/2014/main" id="{CA807BE2-9399-4BCD-A09A-269E1E9C16EA}"/>
               </a:ext>
             </a:extLst>
           </p:cNvPr>
@@ -22023,7 +22012,7 @@
           <p:cNvPr id="54" name="">
             <a:extLst xmlns:a="http://schemas.openxmlformats.org/drawingml/2006/main">
               <a:ext uri="{FF2B5EF4-FFF2-40B4-BE49-F238E27FC236}">
-                <a16:creationId xmlns:a16="http://schemas.microsoft.com/office/drawing/2014/main" id="{DFA43AF2-B9A8-48C5-A1E6-4DB47218F8A6}"/>
+                <a16:creationId xmlns:a16="http://schemas.microsoft.com/office/drawing/2014/main" id="{DDB4A4A5-5D6E-4CCD-883F-73DFD83BE349}"/>
               </a:ext>
             </a:extLst>
           </p:cNvPr>
@@ -22081,7 +22070,7 @@
           <p:cNvPr id="55" name="">
             <a:extLst xmlns:a="http://schemas.openxmlformats.org/drawingml/2006/main">
               <a:ext uri="{FF2B5EF4-FFF2-40B4-BE49-F238E27FC236}">
-                <a16:creationId xmlns:a16="http://schemas.microsoft.com/office/drawing/2014/main" id="{9DD21CBD-0CAD-4658-BAC3-90A82AED48ED}"/>
+                <a16:creationId xmlns:a16="http://schemas.microsoft.com/office/drawing/2014/main" id="{BD383B93-121F-4FE4-A95E-301803094416}"/>
               </a:ext>
             </a:extLst>
           </p:cNvPr>
@@ -22114,7 +22103,7 @@
           <p:cNvPr id="56" name="">
             <a:extLst xmlns:a="http://schemas.openxmlformats.org/drawingml/2006/main">
               <a:ext uri="{FF2B5EF4-FFF2-40B4-BE49-F238E27FC236}">
-                <a16:creationId xmlns:a16="http://schemas.microsoft.com/office/drawing/2014/main" id="{F8827AF0-E4FB-4F65-BFF9-5FC8AB55219B}"/>
+                <a16:creationId xmlns:a16="http://schemas.microsoft.com/office/drawing/2014/main" id="{DCF065ED-CC3D-4A95-A03B-C4A3FA86B280}"/>
               </a:ext>
             </a:extLst>
           </p:cNvPr>
@@ -22172,7 +22161,7 @@
           <p:cNvPr id="57" name="">
             <a:extLst xmlns:a="http://schemas.openxmlformats.org/drawingml/2006/main">
               <a:ext uri="{FF2B5EF4-FFF2-40B4-BE49-F238E27FC236}">
-                <a16:creationId xmlns:a16="http://schemas.microsoft.com/office/drawing/2014/main" id="{5EFE8D05-F85E-4E10-AE6D-3EA7B43AE2A5}"/>
+                <a16:creationId xmlns:a16="http://schemas.microsoft.com/office/drawing/2014/main" id="{4C10CEDA-9741-42E4-A7A1-C1D1F48D747C}"/>
               </a:ext>
             </a:extLst>
           </p:cNvPr>
@@ -22205,7 +22194,7 @@
           <p:cNvPr id="58" name="">
             <a:extLst xmlns:a="http://schemas.openxmlformats.org/drawingml/2006/main">
               <a:ext uri="{FF2B5EF4-FFF2-40B4-BE49-F238E27FC236}">
-                <a16:creationId xmlns:a16="http://schemas.microsoft.com/office/drawing/2014/main" id="{F6BD2920-860F-4F61-A1A7-FADCD948E3A0}"/>
+                <a16:creationId xmlns:a16="http://schemas.microsoft.com/office/drawing/2014/main" id="{749986FF-9CA5-43D5-96FB-DC42F9A34204}"/>
               </a:ext>
             </a:extLst>
           </p:cNvPr>
@@ -22263,7 +22252,7 @@
           <p:cNvPr id="59" name="">
             <a:extLst xmlns:a="http://schemas.openxmlformats.org/drawingml/2006/main">
               <a:ext uri="{FF2B5EF4-FFF2-40B4-BE49-F238E27FC236}">
-                <a16:creationId xmlns:a16="http://schemas.microsoft.com/office/drawing/2014/main" id="{AB6E4D8B-15B6-41AA-B417-7E52D0506F2B}"/>
+                <a16:creationId xmlns:a16="http://schemas.microsoft.com/office/drawing/2014/main" id="{DBE4B098-58AE-4550-8CEC-AD32BCC390E7}"/>
               </a:ext>
             </a:extLst>
           </p:cNvPr>
@@ -22321,7 +22310,7 @@
           <p:cNvPr id="60" name="">
             <a:extLst xmlns:a="http://schemas.openxmlformats.org/drawingml/2006/main">
               <a:ext uri="{FF2B5EF4-FFF2-40B4-BE49-F238E27FC236}">
-                <a16:creationId xmlns:a16="http://schemas.microsoft.com/office/drawing/2014/main" id="{D358068C-670E-4127-A8AC-4056BCC308B8}"/>
+                <a16:creationId xmlns:a16="http://schemas.microsoft.com/office/drawing/2014/main" id="{17F697CF-C789-4457-AA29-92BADC112783}"/>
               </a:ext>
             </a:extLst>
           </p:cNvPr>
@@ -22354,7 +22343,7 @@
           <p:cNvPr id="61" name="">
             <a:extLst xmlns:a="http://schemas.openxmlformats.org/drawingml/2006/main">
               <a:ext uri="{FF2B5EF4-FFF2-40B4-BE49-F238E27FC236}">
-                <a16:creationId xmlns:a16="http://schemas.microsoft.com/office/drawing/2014/main" id="{27A166DE-82C5-4624-B81E-F74F6FA0F3B8}"/>
+                <a16:creationId xmlns:a16="http://schemas.microsoft.com/office/drawing/2014/main" id="{2B0E521B-FB68-4D66-996D-1ED07F8E8AD1}"/>
               </a:ext>
             </a:extLst>
           </p:cNvPr>
@@ -22412,7 +22401,7 @@
           <p:cNvPr id="62" name="">
             <a:extLst xmlns:a="http://schemas.openxmlformats.org/drawingml/2006/main">
               <a:ext uri="{FF2B5EF4-FFF2-40B4-BE49-F238E27FC236}">
-                <a16:creationId xmlns:a16="http://schemas.microsoft.com/office/drawing/2014/main" id="{9EA11051-5E86-49AE-A3DF-40E48CBD4664}"/>
+                <a16:creationId xmlns:a16="http://schemas.microsoft.com/office/drawing/2014/main" id="{948BB914-4CC6-4B1C-BD80-B2EF90310030}"/>
               </a:ext>
             </a:extLst>
           </p:cNvPr>
@@ -22445,7 +22434,7 @@
           <p:cNvPr id="63" name="">
             <a:extLst xmlns:a="http://schemas.openxmlformats.org/drawingml/2006/main">
               <a:ext uri="{FF2B5EF4-FFF2-40B4-BE49-F238E27FC236}">
-                <a16:creationId xmlns:a16="http://schemas.microsoft.com/office/drawing/2014/main" id="{4683303E-85CC-4651-98B0-E489AAFBB5AE}"/>
+                <a16:creationId xmlns:a16="http://schemas.microsoft.com/office/drawing/2014/main" id="{398F465E-3772-4227-824E-B0A08B16F709}"/>
               </a:ext>
             </a:extLst>
           </p:cNvPr>
@@ -22503,7 +22492,7 @@
           <p:cNvPr id="64" name="">
             <a:extLst xmlns:a="http://schemas.openxmlformats.org/drawingml/2006/main">
               <a:ext uri="{FF2B5EF4-FFF2-40B4-BE49-F238E27FC236}">
-                <a16:creationId xmlns:a16="http://schemas.microsoft.com/office/drawing/2014/main" id="{48C60443-AABA-4CAF-BBED-C1DADA99B19D}"/>
+                <a16:creationId xmlns:a16="http://schemas.microsoft.com/office/drawing/2014/main" id="{35BE6409-CE1D-4D5E-80D0-53BE41F6E268}"/>
               </a:ext>
             </a:extLst>
           </p:cNvPr>
@@ -22561,7 +22550,7 @@
           <p:cNvPr id="65" name="">
             <a:extLst xmlns:a="http://schemas.openxmlformats.org/drawingml/2006/main">
               <a:ext uri="{FF2B5EF4-FFF2-40B4-BE49-F238E27FC236}">
-                <a16:creationId xmlns:a16="http://schemas.microsoft.com/office/drawing/2014/main" id="{803BFEFB-C50A-4988-AF99-7CCA5CE474B3}"/>
+                <a16:creationId xmlns:a16="http://schemas.microsoft.com/office/drawing/2014/main" id="{CF8DA774-43FF-4648-A506-278150B117AE}"/>
               </a:ext>
             </a:extLst>
           </p:cNvPr>
@@ -22594,7 +22583,7 @@
           <p:cNvPr id="66" name="">
             <a:extLst xmlns:a="http://schemas.openxmlformats.org/drawingml/2006/main">
               <a:ext uri="{FF2B5EF4-FFF2-40B4-BE49-F238E27FC236}">
-                <a16:creationId xmlns:a16="http://schemas.microsoft.com/office/drawing/2014/main" id="{7881542D-4C84-4C5B-B244-88AE59ECC881}"/>
+                <a16:creationId xmlns:a16="http://schemas.microsoft.com/office/drawing/2014/main" id="{A1DDC35D-2B1D-4A15-953E-0529F38F3F38}"/>
               </a:ext>
             </a:extLst>
           </p:cNvPr>
@@ -22652,7 +22641,7 @@
                 <a:latin typeface="Microsoft YaHei"/>
                 <a:ea typeface="Microsoft YaHei"/>
                 <a:cs typeface="Microsoft YaHei"/>
-                <a:hlinkClick xmlns:r="http://schemas.openxmlformats.org/officeDocument/2006/relationships" r:id="R42a2889d57df4b82"/>
+                <a:hlinkClick xmlns:r="http://schemas.openxmlformats.org/officeDocument/2006/relationships" r:id="Rd23464334c394ec9"/>
               </a:rPr>
               <a:t>智谱：常用工作流</a:t>
             </a:r>
@@ -22664,7 +22653,7 @@
           <p:cNvPr id="67" name="">
             <a:extLst xmlns:a="http://schemas.openxmlformats.org/drawingml/2006/main">
               <a:ext uri="{FF2B5EF4-FFF2-40B4-BE49-F238E27FC236}">
-                <a16:creationId xmlns:a16="http://schemas.microsoft.com/office/drawing/2014/main" id="{114609D6-DD21-47B8-BF57-D88B8EA5FC52}"/>
+                <a16:creationId xmlns:a16="http://schemas.microsoft.com/office/drawing/2014/main" id="{F87F9015-71EE-4359-AADB-6D045DC74E7A}"/>
               </a:ext>
             </a:extLst>
           </p:cNvPr>
@@ -22720,7 +22709,7 @@
     </p:spTree>
     <p:extLst>
       <p:ext uri="{BB962C8B-B14F-4D97-AF65-F5344CB8AC3E}">
-        <p14:creationId xmlns:p14="http://schemas.microsoft.com/office/powerpoint/2010/main" val="937257701"/>
+        <p14:creationId xmlns:p14="http://schemas.microsoft.com/office/powerpoint/2010/main" val="65513144"/>
       </p:ext>
     </p:extLst>
   </p:cSld>
@@ -22751,7 +22740,7 @@
           <p:cNvPr id="38" name="">
             <a:extLst xmlns:a="http://schemas.openxmlformats.org/drawingml/2006/main">
               <a:ext uri="{FF2B5EF4-FFF2-40B4-BE49-F238E27FC236}">
-                <a16:creationId xmlns:a16="http://schemas.microsoft.com/office/drawing/2014/main" id="{4BBFC334-2A13-4D86-8EB1-E9A84D13DE83}"/>
+                <a16:creationId xmlns:a16="http://schemas.microsoft.com/office/drawing/2014/main" id="{79056E9E-AA17-4CF0-97C6-54B94AAF98A0}"/>
               </a:ext>
             </a:extLst>
           </p:cNvPr>
@@ -22784,7 +22773,7 @@
           <p:cNvPr id="2" name="">
             <a:extLst xmlns:a="http://schemas.openxmlformats.org/drawingml/2006/main">
               <a:ext uri="{FF2B5EF4-FFF2-40B4-BE49-F238E27FC236}">
-                <a16:creationId xmlns:a16="http://schemas.microsoft.com/office/drawing/2014/main" id="{5D940389-F8A4-4122-8C3B-4071FC4AAB64}"/>
+                <a16:creationId xmlns:a16="http://schemas.microsoft.com/office/drawing/2014/main" id="{AF539356-5699-420E-8BC6-67488FE96695}"/>
               </a:ext>
             </a:extLst>
           </p:cNvPr>
@@ -22842,7 +22831,7 @@
           <p:cNvPr id="3" name="">
             <a:extLst xmlns:a="http://schemas.openxmlformats.org/drawingml/2006/main">
               <a:ext uri="{FF2B5EF4-FFF2-40B4-BE49-F238E27FC236}">
-                <a16:creationId xmlns:a16="http://schemas.microsoft.com/office/drawing/2014/main" id="{30B3BA2D-2AC0-4545-8334-0F52966DE83B}"/>
+                <a16:creationId xmlns:a16="http://schemas.microsoft.com/office/drawing/2014/main" id="{14F27BEE-CE8A-4DC8-AC88-7A2594EF6FDE}"/>
               </a:ext>
             </a:extLst>
           </p:cNvPr>
@@ -22900,7 +22889,7 @@
           <p:cNvPr id="4" name="">
             <a:extLst xmlns:a="http://schemas.openxmlformats.org/drawingml/2006/main">
               <a:ext uri="{FF2B5EF4-FFF2-40B4-BE49-F238E27FC236}">
-                <a16:creationId xmlns:a16="http://schemas.microsoft.com/office/drawing/2014/main" id="{2643F332-7112-4502-B7AE-8F43EF965D47}"/>
+                <a16:creationId xmlns:a16="http://schemas.microsoft.com/office/drawing/2014/main" id="{752F32CC-278E-4FAC-8DC3-FF073795B0DF}"/>
               </a:ext>
             </a:extLst>
           </p:cNvPr>
@@ -22933,7 +22922,7 @@
           <p:cNvPr id="5" name="">
             <a:extLst xmlns:a="http://schemas.openxmlformats.org/drawingml/2006/main">
               <a:ext uri="{FF2B5EF4-FFF2-40B4-BE49-F238E27FC236}">
-                <a16:creationId xmlns:a16="http://schemas.microsoft.com/office/drawing/2014/main" id="{47C28080-DCCF-4010-A81C-4A74667D8368}"/>
+                <a16:creationId xmlns:a16="http://schemas.microsoft.com/office/drawing/2014/main" id="{777123FA-3C53-4D79-954C-3ADCD2BE0840}"/>
               </a:ext>
             </a:extLst>
           </p:cNvPr>
@@ -22991,7 +22980,7 @@
           <p:cNvPr id="6" name="">
             <a:extLst xmlns:a="http://schemas.openxmlformats.org/drawingml/2006/main">
               <a:ext uri="{FF2B5EF4-FFF2-40B4-BE49-F238E27FC236}">
-                <a16:creationId xmlns:a16="http://schemas.microsoft.com/office/drawing/2014/main" id="{480AD4EF-92DB-4802-9287-6D7F12055D78}"/>
+                <a16:creationId xmlns:a16="http://schemas.microsoft.com/office/drawing/2014/main" id="{268FF9EB-95D0-4B99-9B07-71797192FDB9}"/>
               </a:ext>
             </a:extLst>
           </p:cNvPr>
@@ -23049,7 +23038,7 @@
           <p:cNvPr id="7" name="">
             <a:extLst xmlns:a="http://schemas.openxmlformats.org/drawingml/2006/main">
               <a:ext uri="{FF2B5EF4-FFF2-40B4-BE49-F238E27FC236}">
-                <a16:creationId xmlns:a16="http://schemas.microsoft.com/office/drawing/2014/main" id="{A730BCFA-4F9A-4EF4-80BD-387E3C5AC632}"/>
+                <a16:creationId xmlns:a16="http://schemas.microsoft.com/office/drawing/2014/main" id="{97BE5E8D-3A76-48A7-B76A-42E51701393D}"/>
               </a:ext>
             </a:extLst>
           </p:cNvPr>
@@ -23107,7 +23096,7 @@
           <p:cNvPr id="8" name="">
             <a:extLst xmlns:a="http://schemas.openxmlformats.org/drawingml/2006/main">
               <a:ext uri="{FF2B5EF4-FFF2-40B4-BE49-F238E27FC236}">
-                <a16:creationId xmlns:a16="http://schemas.microsoft.com/office/drawing/2014/main" id="{2892B885-BFBD-4EC2-A01D-E8895513BE95}"/>
+                <a16:creationId xmlns:a16="http://schemas.microsoft.com/office/drawing/2014/main" id="{4F6099A8-A77C-4116-93EE-1B7A365294E6}"/>
               </a:ext>
             </a:extLst>
           </p:cNvPr>
@@ -23165,7 +23154,7 @@
           <p:cNvPr id="9" name="">
             <a:extLst xmlns:a="http://schemas.openxmlformats.org/drawingml/2006/main">
               <a:ext uri="{FF2B5EF4-FFF2-40B4-BE49-F238E27FC236}">
-                <a16:creationId xmlns:a16="http://schemas.microsoft.com/office/drawing/2014/main" id="{FD6BC7B3-0CCE-46AE-8CBA-44B2E3E9CA4D}"/>
+                <a16:creationId xmlns:a16="http://schemas.microsoft.com/office/drawing/2014/main" id="{7EDA3F07-7A0F-4D27-893B-D472E41773FB}"/>
               </a:ext>
             </a:extLst>
           </p:cNvPr>
@@ -23198,7 +23187,7 @@
           <p:cNvPr id="10" name="">
             <a:extLst xmlns:a="http://schemas.openxmlformats.org/drawingml/2006/main">
               <a:ext uri="{FF2B5EF4-FFF2-40B4-BE49-F238E27FC236}">
-                <a16:creationId xmlns:a16="http://schemas.microsoft.com/office/drawing/2014/main" id="{AE5A2A88-F411-4E60-8DD5-B3369A038B95}"/>
+                <a16:creationId xmlns:a16="http://schemas.microsoft.com/office/drawing/2014/main" id="{422B7D6F-31BC-4326-80F3-ACCA266DDE4B}"/>
               </a:ext>
             </a:extLst>
           </p:cNvPr>
@@ -23256,7 +23245,7 @@
           <p:cNvPr id="11" name="">
             <a:extLst xmlns:a="http://schemas.openxmlformats.org/drawingml/2006/main">
               <a:ext uri="{FF2B5EF4-FFF2-40B4-BE49-F238E27FC236}">
-                <a16:creationId xmlns:a16="http://schemas.microsoft.com/office/drawing/2014/main" id="{785E2E49-44F7-4823-9021-2782E6AE20E7}"/>
+                <a16:creationId xmlns:a16="http://schemas.microsoft.com/office/drawing/2014/main" id="{BC00C98D-4044-4F6A-90BA-7256B867C998}"/>
               </a:ext>
             </a:extLst>
           </p:cNvPr>
@@ -23314,7 +23303,7 @@
           <p:cNvPr id="12" name="">
             <a:extLst xmlns:a="http://schemas.openxmlformats.org/drawingml/2006/main">
               <a:ext uri="{FF2B5EF4-FFF2-40B4-BE49-F238E27FC236}">
-                <a16:creationId xmlns:a16="http://schemas.microsoft.com/office/drawing/2014/main" id="{498540B4-D64E-4540-BAA5-FE8D18227794}"/>
+                <a16:creationId xmlns:a16="http://schemas.microsoft.com/office/drawing/2014/main" id="{FCC700A6-85D6-40DB-9FE6-163A895BFB86}"/>
               </a:ext>
             </a:extLst>
           </p:cNvPr>
@@ -23372,7 +23361,7 @@
           <p:cNvPr id="13" name="">
             <a:extLst xmlns:a="http://schemas.openxmlformats.org/drawingml/2006/main">
               <a:ext uri="{FF2B5EF4-FFF2-40B4-BE49-F238E27FC236}">
-                <a16:creationId xmlns:a16="http://schemas.microsoft.com/office/drawing/2014/main" id="{70B2408E-8293-4888-ACC1-CD09ADD9E4CD}"/>
+                <a16:creationId xmlns:a16="http://schemas.microsoft.com/office/drawing/2014/main" id="{B5E4C000-6030-43AA-9E54-34310BD7336B}"/>
               </a:ext>
             </a:extLst>
           </p:cNvPr>
@@ -23430,7 +23419,7 @@
           <p:cNvPr id="14" name="">
             <a:extLst xmlns:a="http://schemas.openxmlformats.org/drawingml/2006/main">
               <a:ext uri="{FF2B5EF4-FFF2-40B4-BE49-F238E27FC236}">
-                <a16:creationId xmlns:a16="http://schemas.microsoft.com/office/drawing/2014/main" id="{5F657096-623C-4F9E-B561-FB5D4F1E73A0}"/>
+                <a16:creationId xmlns:a16="http://schemas.microsoft.com/office/drawing/2014/main" id="{E995CAB1-6E8F-4871-90DE-8BC9DE765669}"/>
               </a:ext>
             </a:extLst>
           </p:cNvPr>
@@ -23463,7 +23452,7 @@
           <p:cNvPr id="15" name="">
             <a:extLst xmlns:a="http://schemas.openxmlformats.org/drawingml/2006/main">
               <a:ext uri="{FF2B5EF4-FFF2-40B4-BE49-F238E27FC236}">
-                <a16:creationId xmlns:a16="http://schemas.microsoft.com/office/drawing/2014/main" id="{B1FE919A-2D37-41E6-B3E2-DA6D2D4FDD34}"/>
+                <a16:creationId xmlns:a16="http://schemas.microsoft.com/office/drawing/2014/main" id="{894BE2D7-C194-4DE2-B080-C03F3E69C433}"/>
               </a:ext>
             </a:extLst>
           </p:cNvPr>
@@ -23521,7 +23510,7 @@
           <p:cNvPr id="16" name="">
             <a:extLst xmlns:a="http://schemas.openxmlformats.org/drawingml/2006/main">
               <a:ext uri="{FF2B5EF4-FFF2-40B4-BE49-F238E27FC236}">
-                <a16:creationId xmlns:a16="http://schemas.microsoft.com/office/drawing/2014/main" id="{C633380E-60A5-4CCC-8645-087B953E5671}"/>
+                <a16:creationId xmlns:a16="http://schemas.microsoft.com/office/drawing/2014/main" id="{2365DC24-87BD-4F8C-A228-B85D7ED11F86}"/>
               </a:ext>
             </a:extLst>
           </p:cNvPr>
@@ -23579,7 +23568,7 @@
           <p:cNvPr id="17" name="">
             <a:extLst xmlns:a="http://schemas.openxmlformats.org/drawingml/2006/main">
               <a:ext uri="{FF2B5EF4-FFF2-40B4-BE49-F238E27FC236}">
-                <a16:creationId xmlns:a16="http://schemas.microsoft.com/office/drawing/2014/main" id="{DF1CCB94-4D88-4B08-B4DC-3D620DF78F01}"/>
+                <a16:creationId xmlns:a16="http://schemas.microsoft.com/office/drawing/2014/main" id="{DC25437C-1151-4FE2-A6DD-9D1E66E0D72A}"/>
               </a:ext>
             </a:extLst>
           </p:cNvPr>
@@ -23637,7 +23626,7 @@
           <p:cNvPr id="18" name="">
             <a:extLst xmlns:a="http://schemas.openxmlformats.org/drawingml/2006/main">
               <a:ext uri="{FF2B5EF4-FFF2-40B4-BE49-F238E27FC236}">
-                <a16:creationId xmlns:a16="http://schemas.microsoft.com/office/drawing/2014/main" id="{F24F60FC-45B1-4D31-8283-A460845213CF}"/>
+                <a16:creationId xmlns:a16="http://schemas.microsoft.com/office/drawing/2014/main" id="{C1DABC0D-5038-4B33-A93F-D5FFF5D5E890}"/>
               </a:ext>
             </a:extLst>
           </p:cNvPr>
@@ -23695,7 +23684,7 @@
           <p:cNvPr id="19" name="">
             <a:extLst xmlns:a="http://schemas.openxmlformats.org/drawingml/2006/main">
               <a:ext uri="{FF2B5EF4-FFF2-40B4-BE49-F238E27FC236}">
-                <a16:creationId xmlns:a16="http://schemas.microsoft.com/office/drawing/2014/main" id="{F87953E3-337D-486F-A1EC-C990DC81CB5B}"/>
+                <a16:creationId xmlns:a16="http://schemas.microsoft.com/office/drawing/2014/main" id="{380DD541-A926-46D7-B7F2-77D052D43839}"/>
               </a:ext>
             </a:extLst>
           </p:cNvPr>
@@ -23728,7 +23717,7 @@
           <p:cNvPr id="20" name="">
             <a:extLst xmlns:a="http://schemas.openxmlformats.org/drawingml/2006/main">
               <a:ext uri="{FF2B5EF4-FFF2-40B4-BE49-F238E27FC236}">
-                <a16:creationId xmlns:a16="http://schemas.microsoft.com/office/drawing/2014/main" id="{63891B10-F372-4522-B0F4-7AAC7AB58960}"/>
+                <a16:creationId xmlns:a16="http://schemas.microsoft.com/office/drawing/2014/main" id="{1F7FD113-242E-48F2-8B98-DDD6E75E2F44}"/>
               </a:ext>
             </a:extLst>
           </p:cNvPr>
@@ -23786,7 +23775,7 @@
           <p:cNvPr id="21" name="">
             <a:extLst xmlns:a="http://schemas.openxmlformats.org/drawingml/2006/main">
               <a:ext uri="{FF2B5EF4-FFF2-40B4-BE49-F238E27FC236}">
-                <a16:creationId xmlns:a16="http://schemas.microsoft.com/office/drawing/2014/main" id="{6542BA53-B61D-4EE7-82AD-AFB40C83C7B4}"/>
+                <a16:creationId xmlns:a16="http://schemas.microsoft.com/office/drawing/2014/main" id="{555F0C9C-4717-4CC2-996D-7A31CDA7DCD9}"/>
               </a:ext>
             </a:extLst>
           </p:cNvPr>
@@ -23844,7 +23833,7 @@
           <p:cNvPr id="22" name="">
             <a:extLst xmlns:a="http://schemas.openxmlformats.org/drawingml/2006/main">
               <a:ext uri="{FF2B5EF4-FFF2-40B4-BE49-F238E27FC236}">
-                <a16:creationId xmlns:a16="http://schemas.microsoft.com/office/drawing/2014/main" id="{586E3EAC-E34E-4F17-866A-C0B167BE0241}"/>
+                <a16:creationId xmlns:a16="http://schemas.microsoft.com/office/drawing/2014/main" id="{FBCB7AB8-62B3-45C0-A625-371F975ED08F}"/>
               </a:ext>
             </a:extLst>
           </p:cNvPr>
@@ -23902,7 +23891,7 @@
           <p:cNvPr id="23" name="">
             <a:extLst xmlns:a="http://schemas.openxmlformats.org/drawingml/2006/main">
               <a:ext uri="{FF2B5EF4-FFF2-40B4-BE49-F238E27FC236}">
-                <a16:creationId xmlns:a16="http://schemas.microsoft.com/office/drawing/2014/main" id="{607B5831-E447-4C97-B9BD-23CF0A099922}"/>
+                <a16:creationId xmlns:a16="http://schemas.microsoft.com/office/drawing/2014/main" id="{76C58492-B7A9-48ED-8427-D1F7869DD109}"/>
               </a:ext>
             </a:extLst>
           </p:cNvPr>
@@ -23960,7 +23949,7 @@
           <p:cNvPr id="24" name="">
             <a:extLst xmlns:a="http://schemas.openxmlformats.org/drawingml/2006/main">
               <a:ext uri="{FF2B5EF4-FFF2-40B4-BE49-F238E27FC236}">
-                <a16:creationId xmlns:a16="http://schemas.microsoft.com/office/drawing/2014/main" id="{71AC14C7-05BC-4502-8448-8951AFD0B07D}"/>
+                <a16:creationId xmlns:a16="http://schemas.microsoft.com/office/drawing/2014/main" id="{195BE641-D910-40B2-91A9-185BF8B25499}"/>
               </a:ext>
             </a:extLst>
           </p:cNvPr>
@@ -23993,7 +23982,7 @@
           <p:cNvPr id="25" name="">
             <a:extLst xmlns:a="http://schemas.openxmlformats.org/drawingml/2006/main">
               <a:ext uri="{FF2B5EF4-FFF2-40B4-BE49-F238E27FC236}">
-                <a16:creationId xmlns:a16="http://schemas.microsoft.com/office/drawing/2014/main" id="{7CDA9B6F-1764-4D5E-A58A-F2A5CCE91C3B}"/>
+                <a16:creationId xmlns:a16="http://schemas.microsoft.com/office/drawing/2014/main" id="{6B501F10-6741-4A5B-8556-CC12F118BE66}"/>
               </a:ext>
             </a:extLst>
           </p:cNvPr>
@@ -24051,7 +24040,7 @@
           <p:cNvPr id="26" name="">
             <a:extLst xmlns:a="http://schemas.openxmlformats.org/drawingml/2006/main">
               <a:ext uri="{FF2B5EF4-FFF2-40B4-BE49-F238E27FC236}">
-                <a16:creationId xmlns:a16="http://schemas.microsoft.com/office/drawing/2014/main" id="{DDA4D055-D236-4A7E-B791-1F3EA040C7E2}"/>
+                <a16:creationId xmlns:a16="http://schemas.microsoft.com/office/drawing/2014/main" id="{5C41C3E8-2B98-4A7A-A048-7A3458D7D95F}"/>
               </a:ext>
             </a:extLst>
           </p:cNvPr>
@@ -24109,7 +24098,7 @@
           <p:cNvPr id="27" name="">
             <a:extLst xmlns:a="http://schemas.openxmlformats.org/drawingml/2006/main">
               <a:ext uri="{FF2B5EF4-FFF2-40B4-BE49-F238E27FC236}">
-                <a16:creationId xmlns:a16="http://schemas.microsoft.com/office/drawing/2014/main" id="{794D0DB5-52AA-4BFD-AB56-5C50C18F0EF8}"/>
+                <a16:creationId xmlns:a16="http://schemas.microsoft.com/office/drawing/2014/main" id="{ACCD7E27-0D96-45FA-9996-526C1A1B6C3E}"/>
               </a:ext>
             </a:extLst>
           </p:cNvPr>
@@ -24167,7 +24156,7 @@
           <p:cNvPr id="28" name="">
             <a:extLst xmlns:a="http://schemas.openxmlformats.org/drawingml/2006/main">
               <a:ext uri="{FF2B5EF4-FFF2-40B4-BE49-F238E27FC236}">
-                <a16:creationId xmlns:a16="http://schemas.microsoft.com/office/drawing/2014/main" id="{531D66AC-E4DA-4F73-8405-6CA2B8591823}"/>
+                <a16:creationId xmlns:a16="http://schemas.microsoft.com/office/drawing/2014/main" id="{69899BF5-EA86-4132-8112-5F7C13C14EA2}"/>
               </a:ext>
             </a:extLst>
           </p:cNvPr>
@@ -24225,7 +24214,7 @@
           <p:cNvPr id="29" name="">
             <a:extLst xmlns:a="http://schemas.openxmlformats.org/drawingml/2006/main">
               <a:ext uri="{FF2B5EF4-FFF2-40B4-BE49-F238E27FC236}">
-                <a16:creationId xmlns:a16="http://schemas.microsoft.com/office/drawing/2014/main" id="{DD1B7E10-4B79-4678-9E13-92A837423EF2}"/>
+                <a16:creationId xmlns:a16="http://schemas.microsoft.com/office/drawing/2014/main" id="{F6D3DC72-90DD-414C-BD30-59F133C1684F}"/>
               </a:ext>
             </a:extLst>
           </p:cNvPr>
@@ -24258,7 +24247,7 @@
           <p:cNvPr id="30" name="">
             <a:extLst xmlns:a="http://schemas.openxmlformats.org/drawingml/2006/main">
               <a:ext uri="{FF2B5EF4-FFF2-40B4-BE49-F238E27FC236}">
-                <a16:creationId xmlns:a16="http://schemas.microsoft.com/office/drawing/2014/main" id="{FA0F7261-F2C5-4FB4-8A45-0EFDF119DD5B}"/>
+                <a16:creationId xmlns:a16="http://schemas.microsoft.com/office/drawing/2014/main" id="{C88668B8-6B90-4BC3-B680-A37D511060A6}"/>
               </a:ext>
             </a:extLst>
           </p:cNvPr>
@@ -24316,7 +24305,7 @@
           <p:cNvPr id="31" name="">
             <a:extLst xmlns:a="http://schemas.openxmlformats.org/drawingml/2006/main">
               <a:ext uri="{FF2B5EF4-FFF2-40B4-BE49-F238E27FC236}">
-                <a16:creationId xmlns:a16="http://schemas.microsoft.com/office/drawing/2014/main" id="{D017DDBF-C44D-4665-80FE-3324CC7D43CA}"/>
+                <a16:creationId xmlns:a16="http://schemas.microsoft.com/office/drawing/2014/main" id="{178C88DB-4725-47AE-8116-3442209E944E}"/>
               </a:ext>
             </a:extLst>
           </p:cNvPr>
@@ -24374,7 +24363,7 @@
           <p:cNvPr id="32" name="">
             <a:extLst xmlns:a="http://schemas.openxmlformats.org/drawingml/2006/main">
               <a:ext uri="{FF2B5EF4-FFF2-40B4-BE49-F238E27FC236}">
-                <a16:creationId xmlns:a16="http://schemas.microsoft.com/office/drawing/2014/main" id="{EB06D04C-4E69-43B4-AD9A-33F2075FF744}"/>
+                <a16:creationId xmlns:a16="http://schemas.microsoft.com/office/drawing/2014/main" id="{2FCD075A-2AF4-4CB2-8306-A8AE73A6A5A3}"/>
               </a:ext>
             </a:extLst>
           </p:cNvPr>
@@ -24432,7 +24421,7 @@
           <p:cNvPr id="33" name="">
             <a:extLst xmlns:a="http://schemas.openxmlformats.org/drawingml/2006/main">
               <a:ext uri="{FF2B5EF4-FFF2-40B4-BE49-F238E27FC236}">
-                <a16:creationId xmlns:a16="http://schemas.microsoft.com/office/drawing/2014/main" id="{07E19839-83FE-423E-B3C1-BAEE18064372}"/>
+                <a16:creationId xmlns:a16="http://schemas.microsoft.com/office/drawing/2014/main" id="{4DE1712B-06FB-4A95-9AC0-75506DA24803}"/>
               </a:ext>
             </a:extLst>
           </p:cNvPr>
@@ -24490,7 +24479,7 @@
           <p:cNvPr id="34" name="">
             <a:extLst xmlns:a="http://schemas.openxmlformats.org/drawingml/2006/main">
               <a:ext uri="{FF2B5EF4-FFF2-40B4-BE49-F238E27FC236}">
-                <a16:creationId xmlns:a16="http://schemas.microsoft.com/office/drawing/2014/main" id="{68C39132-B259-4991-8131-809F5A95EC6D}"/>
+                <a16:creationId xmlns:a16="http://schemas.microsoft.com/office/drawing/2014/main" id="{C4E21BEA-A035-404B-9D3D-61E90FC331E3}"/>
               </a:ext>
             </a:extLst>
           </p:cNvPr>
@@ -24548,7 +24537,7 @@
           <p:cNvPr id="35" name="">
             <a:extLst xmlns:a="http://schemas.openxmlformats.org/drawingml/2006/main">
               <a:ext uri="{FF2B5EF4-FFF2-40B4-BE49-F238E27FC236}">
-                <a16:creationId xmlns:a16="http://schemas.microsoft.com/office/drawing/2014/main" id="{C9283BE3-6C21-4A35-A373-0084B2895957}"/>
+                <a16:creationId xmlns:a16="http://schemas.microsoft.com/office/drawing/2014/main" id="{800D02A0-7EF0-4A25-B8E2-B67E5DE7BA3A}"/>
               </a:ext>
             </a:extLst>
           </p:cNvPr>
@@ -24581,7 +24570,7 @@
           <p:cNvPr id="36" name="">
             <a:extLst xmlns:a="http://schemas.openxmlformats.org/drawingml/2006/main">
               <a:ext uri="{FF2B5EF4-FFF2-40B4-BE49-F238E27FC236}">
-                <a16:creationId xmlns:a16="http://schemas.microsoft.com/office/drawing/2014/main" id="{2819DBF9-A7D6-4DAA-BE3F-2D56C5569DBB}"/>
+                <a16:creationId xmlns:a16="http://schemas.microsoft.com/office/drawing/2014/main" id="{6248FFA5-6F12-43C2-8D1D-09C061B9F18C}"/>
               </a:ext>
             </a:extLst>
           </p:cNvPr>
@@ -24639,7 +24628,7 @@
                 <a:latin typeface="Microsoft YaHei"/>
                 <a:ea typeface="Microsoft YaHei"/>
                 <a:cs typeface="Microsoft YaHei"/>
-                <a:hlinkClick xmlns:r="http://schemas.openxmlformats.org/officeDocument/2006/relationships" r:id="Rd92fa86b0c774e5a"/>
+                <a:hlinkClick xmlns:r="http://schemas.openxmlformats.org/officeDocument/2006/relationships" r:id="R99bcaafaa4264729"/>
               </a:rPr>
               <a:t>码道</a:t>
             </a:r>
@@ -24651,7 +24640,7 @@
                 <a:latin typeface="Microsoft YaHei"/>
                 <a:ea typeface="Microsoft YaHei"/>
                 <a:cs typeface="Microsoft YaHei"/>
-                <a:hlinkClick xmlns:r="http://schemas.openxmlformats.org/officeDocument/2006/relationships" r:id="R9bd2f34b2ffb44a2"/>
+                <a:hlinkClick xmlns:r="http://schemas.openxmlformats.org/officeDocument/2006/relationships" r:id="R8efdd0f22d16496a"/>
               </a:rPr>
               <a:t> · Claude Code</a:t>
             </a:r>
@@ -24663,7 +24652,7 @@
                 <a:latin typeface="Microsoft YaHei"/>
                 <a:ea typeface="Microsoft YaHei"/>
                 <a:cs typeface="Microsoft YaHei"/>
-                <a:hlinkClick xmlns:r="http://schemas.openxmlformats.org/officeDocument/2006/relationships" r:id="R55b26aafcbae41d9"/>
+                <a:hlinkClick xmlns:r="http://schemas.openxmlformats.org/officeDocument/2006/relationships" r:id="Rc61fbc65f2f24643"/>
               </a:rPr>
               <a:t> · Qoder</a:t>
             </a:r>
@@ -24675,7 +24664,7 @@
                 <a:latin typeface="Microsoft YaHei"/>
                 <a:ea typeface="Microsoft YaHei"/>
                 <a:cs typeface="Microsoft YaHei"/>
-                <a:hlinkClick xmlns:r="http://schemas.openxmlformats.org/officeDocument/2006/relationships" r:id="R862d160e3a5b4d45"/>
+                <a:hlinkClick xmlns:r="http://schemas.openxmlformats.org/officeDocument/2006/relationships" r:id="R25ed9f7dcd6245b4"/>
               </a:rPr>
               <a:t> · Codex</a:t>
             </a:r>
@@ -24687,7 +24676,7 @@
           <p:cNvPr id="37" name="">
             <a:extLst xmlns:a="http://schemas.openxmlformats.org/drawingml/2006/main">
               <a:ext uri="{FF2B5EF4-FFF2-40B4-BE49-F238E27FC236}">
-                <a16:creationId xmlns:a16="http://schemas.microsoft.com/office/drawing/2014/main" id="{BDF977CF-51AE-48DF-B333-3423CBAED303}"/>
+                <a16:creationId xmlns:a16="http://schemas.microsoft.com/office/drawing/2014/main" id="{A493675A-DFFE-417B-85B6-8EFEEF5E4B7E}"/>
               </a:ext>
             </a:extLst>
           </p:cNvPr>
@@ -24743,7 +24732,7 @@
     </p:spTree>
     <p:extLst>
       <p:ext uri="{BB962C8B-B14F-4D97-AF65-F5344CB8AC3E}">
-        <p14:creationId xmlns:p14="http://schemas.microsoft.com/office/powerpoint/2010/main" val="1581057948"/>
+        <p14:creationId xmlns:p14="http://schemas.microsoft.com/office/powerpoint/2010/main" val="1834349977"/>
       </p:ext>
     </p:extLst>
   </p:cSld>
@@ -24774,7 +24763,7 @@
           <p:cNvPr id="66" name="">
             <a:extLst xmlns:a="http://schemas.openxmlformats.org/drawingml/2006/main">
               <a:ext uri="{FF2B5EF4-FFF2-40B4-BE49-F238E27FC236}">
-                <a16:creationId xmlns:a16="http://schemas.microsoft.com/office/drawing/2014/main" id="{F6C6CAB3-61DA-461C-ADD2-2D248E38C9E5}"/>
+                <a16:creationId xmlns:a16="http://schemas.microsoft.com/office/drawing/2014/main" id="{C2C25684-D1BF-4175-A2EC-F7E72311EC83}"/>
               </a:ext>
             </a:extLst>
           </p:cNvPr>
@@ -24807,7 +24796,7 @@
           <p:cNvPr id="2" name="">
             <a:extLst xmlns:a="http://schemas.openxmlformats.org/drawingml/2006/main">
               <a:ext uri="{FF2B5EF4-FFF2-40B4-BE49-F238E27FC236}">
-                <a16:creationId xmlns:a16="http://schemas.microsoft.com/office/drawing/2014/main" id="{54DE0E62-A2C8-4BF0-B60F-09285F0333BD}"/>
+                <a16:creationId xmlns:a16="http://schemas.microsoft.com/office/drawing/2014/main" id="{0A52C343-FA19-4A81-95C3-69B759A7012D}"/>
               </a:ext>
             </a:extLst>
           </p:cNvPr>
@@ -24865,7 +24854,7 @@
           <p:cNvPr id="3" name="">
             <a:extLst xmlns:a="http://schemas.openxmlformats.org/drawingml/2006/main">
               <a:ext uri="{FF2B5EF4-FFF2-40B4-BE49-F238E27FC236}">
-                <a16:creationId xmlns:a16="http://schemas.microsoft.com/office/drawing/2014/main" id="{0E1611E7-C796-4080-9CF2-2B58AF7C2EAD}"/>
+                <a16:creationId xmlns:a16="http://schemas.microsoft.com/office/drawing/2014/main" id="{027313D8-DAC1-4674-AEC8-A9C479A647D4}"/>
               </a:ext>
             </a:extLst>
           </p:cNvPr>
@@ -24923,7 +24912,7 @@
           <p:cNvPr id="4" name="">
             <a:extLst xmlns:a="http://schemas.openxmlformats.org/drawingml/2006/main">
               <a:ext uri="{FF2B5EF4-FFF2-40B4-BE49-F238E27FC236}">
-                <a16:creationId xmlns:a16="http://schemas.microsoft.com/office/drawing/2014/main" id="{0DDE6FF4-D292-49C1-B0E8-084B2E4E56B8}"/>
+                <a16:creationId xmlns:a16="http://schemas.microsoft.com/office/drawing/2014/main" id="{E67BA1A1-2D0B-4B64-8781-6D23BCAB8D22}"/>
               </a:ext>
             </a:extLst>
           </p:cNvPr>
@@ -24956,7 +24945,7 @@
           <p:cNvPr id="5" name="">
             <a:extLst xmlns:a="http://schemas.openxmlformats.org/drawingml/2006/main">
               <a:ext uri="{FF2B5EF4-FFF2-40B4-BE49-F238E27FC236}">
-                <a16:creationId xmlns:a16="http://schemas.microsoft.com/office/drawing/2014/main" id="{AC30A9F4-ADE7-4E2C-B19C-6EF6870BD930}"/>
+                <a16:creationId xmlns:a16="http://schemas.microsoft.com/office/drawing/2014/main" id="{74BB8A94-E626-4F41-8BDC-9148FF494E7A}"/>
               </a:ext>
             </a:extLst>
           </p:cNvPr>
@@ -25014,7 +25003,7 @@
           <p:cNvPr id="6" name="">
             <a:extLst xmlns:a="http://schemas.openxmlformats.org/drawingml/2006/main">
               <a:ext uri="{FF2B5EF4-FFF2-40B4-BE49-F238E27FC236}">
-                <a16:creationId xmlns:a16="http://schemas.microsoft.com/office/drawing/2014/main" id="{6D514494-7A50-43DE-A12C-704BBA214809}"/>
+                <a16:creationId xmlns:a16="http://schemas.microsoft.com/office/drawing/2014/main" id="{9E498DE9-6653-496F-AC26-4137ACCC3A2E}"/>
               </a:ext>
             </a:extLst>
           </p:cNvPr>
@@ -25047,7 +25036,7 @@
           <p:cNvPr id="7" name="">
             <a:extLst xmlns:a="http://schemas.openxmlformats.org/drawingml/2006/main">
               <a:ext uri="{FF2B5EF4-FFF2-40B4-BE49-F238E27FC236}">
-                <a16:creationId xmlns:a16="http://schemas.microsoft.com/office/drawing/2014/main" id="{260A9770-1F2A-4C21-9C62-FBEB07C68A99}"/>
+                <a16:creationId xmlns:a16="http://schemas.microsoft.com/office/drawing/2014/main" id="{E5C6075E-6C2A-4F19-B1AF-046882CD8BB4}"/>
               </a:ext>
             </a:extLst>
           </p:cNvPr>
@@ -25105,7 +25094,7 @@
           <p:cNvPr id="8" name="">
             <a:extLst xmlns:a="http://schemas.openxmlformats.org/drawingml/2006/main">
               <a:ext uri="{FF2B5EF4-FFF2-40B4-BE49-F238E27FC236}">
-                <a16:creationId xmlns:a16="http://schemas.microsoft.com/office/drawing/2014/main" id="{9EBAC903-02B2-4203-9E5D-47D525FA062B}"/>
+                <a16:creationId xmlns:a16="http://schemas.microsoft.com/office/drawing/2014/main" id="{7D3C3EEC-523B-45F5-BAE3-F7E523DF859E}"/>
               </a:ext>
             </a:extLst>
           </p:cNvPr>
@@ -25138,7 +25127,7 @@
           <p:cNvPr id="9" name="">
             <a:extLst xmlns:a="http://schemas.openxmlformats.org/drawingml/2006/main">
               <a:ext uri="{FF2B5EF4-FFF2-40B4-BE49-F238E27FC236}">
-                <a16:creationId xmlns:a16="http://schemas.microsoft.com/office/drawing/2014/main" id="{BB63B73A-68E3-4C21-86AD-A379DAF42769}"/>
+                <a16:creationId xmlns:a16="http://schemas.microsoft.com/office/drawing/2014/main" id="{5198FD8A-0E7C-4F9A-B42D-E7F39610151A}"/>
               </a:ext>
             </a:extLst>
           </p:cNvPr>
@@ -25196,7 +25185,7 @@
           <p:cNvPr id="10" name="">
             <a:extLst xmlns:a="http://schemas.openxmlformats.org/drawingml/2006/main">
               <a:ext uri="{FF2B5EF4-FFF2-40B4-BE49-F238E27FC236}">
-                <a16:creationId xmlns:a16="http://schemas.microsoft.com/office/drawing/2014/main" id="{C72D2BD1-392B-432A-898A-A5D3014C4F57}"/>
+                <a16:creationId xmlns:a16="http://schemas.microsoft.com/office/drawing/2014/main" id="{C2A5B564-99FC-4F44-9CB6-0D6228D83EC7}"/>
               </a:ext>
             </a:extLst>
           </p:cNvPr>
@@ -25229,7 +25218,7 @@
           <p:cNvPr id="11" name="">
             <a:extLst xmlns:a="http://schemas.openxmlformats.org/drawingml/2006/main">
               <a:ext uri="{FF2B5EF4-FFF2-40B4-BE49-F238E27FC236}">
-                <a16:creationId xmlns:a16="http://schemas.microsoft.com/office/drawing/2014/main" id="{849BB0A7-4CAE-4C9E-99CF-4B2BF96FE9B2}"/>
+                <a16:creationId xmlns:a16="http://schemas.microsoft.com/office/drawing/2014/main" id="{BD4A8DD5-FD11-49D2-AC11-2D187349108F}"/>
               </a:ext>
             </a:extLst>
           </p:cNvPr>
@@ -25287,7 +25276,7 @@
           <p:cNvPr id="12" name="">
             <a:extLst xmlns:a="http://schemas.openxmlformats.org/drawingml/2006/main">
               <a:ext uri="{FF2B5EF4-FFF2-40B4-BE49-F238E27FC236}">
-                <a16:creationId xmlns:a16="http://schemas.microsoft.com/office/drawing/2014/main" id="{E2864356-3BF1-4F42-9BB4-AFCA3615B2DE}"/>
+                <a16:creationId xmlns:a16="http://schemas.microsoft.com/office/drawing/2014/main" id="{FDF1C8CB-FC3C-426A-8430-56A5A11CA803}"/>
               </a:ext>
             </a:extLst>
           </p:cNvPr>
@@ -25320,7 +25309,7 @@
           <p:cNvPr id="13" name="">
             <a:extLst xmlns:a="http://schemas.openxmlformats.org/drawingml/2006/main">
               <a:ext uri="{FF2B5EF4-FFF2-40B4-BE49-F238E27FC236}">
-                <a16:creationId xmlns:a16="http://schemas.microsoft.com/office/drawing/2014/main" id="{E2C13530-D3FB-4B15-902A-8543B4EBF49D}"/>
+                <a16:creationId xmlns:a16="http://schemas.microsoft.com/office/drawing/2014/main" id="{B9BF9DDE-A53C-42A4-97AB-8436DA29B49F}"/>
               </a:ext>
             </a:extLst>
           </p:cNvPr>
@@ -25378,7 +25367,7 @@
           <p:cNvPr id="14" name="">
             <a:extLst xmlns:a="http://schemas.openxmlformats.org/drawingml/2006/main">
               <a:ext uri="{FF2B5EF4-FFF2-40B4-BE49-F238E27FC236}">
-                <a16:creationId xmlns:a16="http://schemas.microsoft.com/office/drawing/2014/main" id="{68EB5F26-4CCC-4223-AE9F-AB08B1859061}"/>
+                <a16:creationId xmlns:a16="http://schemas.microsoft.com/office/drawing/2014/main" id="{52408A84-5230-4551-A3CD-012AB6AFEB34}"/>
               </a:ext>
             </a:extLst>
           </p:cNvPr>
@@ -25411,7 +25400,7 @@
           <p:cNvPr id="15" name="">
             <a:extLst xmlns:a="http://schemas.openxmlformats.org/drawingml/2006/main">
               <a:ext uri="{FF2B5EF4-FFF2-40B4-BE49-F238E27FC236}">
-                <a16:creationId xmlns:a16="http://schemas.microsoft.com/office/drawing/2014/main" id="{97B60D73-A110-4C1A-915E-D002FE12DCF2}"/>
+                <a16:creationId xmlns:a16="http://schemas.microsoft.com/office/drawing/2014/main" id="{E2058829-9A96-4289-B026-3340BAF34E76}"/>
               </a:ext>
             </a:extLst>
           </p:cNvPr>
@@ -25469,7 +25458,7 @@
           <p:cNvPr id="16" name="">
             <a:extLst xmlns:a="http://schemas.openxmlformats.org/drawingml/2006/main">
               <a:ext uri="{FF2B5EF4-FFF2-40B4-BE49-F238E27FC236}">
-                <a16:creationId xmlns:a16="http://schemas.microsoft.com/office/drawing/2014/main" id="{DF87B219-56A7-409E-A730-C72028733AB4}"/>
+                <a16:creationId xmlns:a16="http://schemas.microsoft.com/office/drawing/2014/main" id="{8F6F833A-2BF6-4FCE-B2E4-2128C45CC235}"/>
               </a:ext>
             </a:extLst>
           </p:cNvPr>
@@ -25502,7 +25491,7 @@
           <p:cNvPr id="17" name="">
             <a:extLst xmlns:a="http://schemas.openxmlformats.org/drawingml/2006/main">
               <a:ext uri="{FF2B5EF4-FFF2-40B4-BE49-F238E27FC236}">
-                <a16:creationId xmlns:a16="http://schemas.microsoft.com/office/drawing/2014/main" id="{B7AA237C-7BA2-49FE-B3C6-7AA40945C788}"/>
+                <a16:creationId xmlns:a16="http://schemas.microsoft.com/office/drawing/2014/main" id="{6304ACC0-8629-4DAC-9B3E-DD5A83DCE8EA}"/>
               </a:ext>
             </a:extLst>
           </p:cNvPr>
@@ -25560,7 +25549,7 @@
           <p:cNvPr id="18" name="">
             <a:extLst xmlns:a="http://schemas.openxmlformats.org/drawingml/2006/main">
               <a:ext uri="{FF2B5EF4-FFF2-40B4-BE49-F238E27FC236}">
-                <a16:creationId xmlns:a16="http://schemas.microsoft.com/office/drawing/2014/main" id="{1A3A4CB3-CB8F-4321-8289-804693B99E78}"/>
+                <a16:creationId xmlns:a16="http://schemas.microsoft.com/office/drawing/2014/main" id="{343D0805-674D-4C7C-9EBD-8EACFA7B651C}"/>
               </a:ext>
             </a:extLst>
           </p:cNvPr>
@@ -25593,7 +25582,7 @@
           <p:cNvPr id="19" name="">
             <a:extLst xmlns:a="http://schemas.openxmlformats.org/drawingml/2006/main">
               <a:ext uri="{FF2B5EF4-FFF2-40B4-BE49-F238E27FC236}">
-                <a16:creationId xmlns:a16="http://schemas.microsoft.com/office/drawing/2014/main" id="{970794BE-846F-4FB1-90CF-905DA36B2687}"/>
+                <a16:creationId xmlns:a16="http://schemas.microsoft.com/office/drawing/2014/main" id="{0E943F8D-08AE-46DE-802C-BE048D3C6488}"/>
               </a:ext>
             </a:extLst>
           </p:cNvPr>
@@ -25651,7 +25640,7 @@
           <p:cNvPr id="20" name="">
             <a:extLst xmlns:a="http://schemas.openxmlformats.org/drawingml/2006/main">
               <a:ext uri="{FF2B5EF4-FFF2-40B4-BE49-F238E27FC236}">
-                <a16:creationId xmlns:a16="http://schemas.microsoft.com/office/drawing/2014/main" id="{3DDE978D-FC28-4EC4-84F5-65C578DC0C40}"/>
+                <a16:creationId xmlns:a16="http://schemas.microsoft.com/office/drawing/2014/main" id="{2D666122-12BE-436B-8895-4F063DF6F307}"/>
               </a:ext>
             </a:extLst>
           </p:cNvPr>
@@ -25684,7 +25673,7 @@
           <p:cNvPr id="21" name="">
             <a:extLst xmlns:a="http://schemas.openxmlformats.org/drawingml/2006/main">
               <a:ext uri="{FF2B5EF4-FFF2-40B4-BE49-F238E27FC236}">
-                <a16:creationId xmlns:a16="http://schemas.microsoft.com/office/drawing/2014/main" id="{7CEF7A42-D342-4C14-A44F-0BEBCDD3F3F5}"/>
+                <a16:creationId xmlns:a16="http://schemas.microsoft.com/office/drawing/2014/main" id="{8977CE3B-2E92-4C1F-B92F-75828EE539FB}"/>
               </a:ext>
             </a:extLst>
           </p:cNvPr>
@@ -25742,7 +25731,7 @@
           <p:cNvPr id="22" name="">
             <a:extLst xmlns:a="http://schemas.openxmlformats.org/drawingml/2006/main">
               <a:ext uri="{FF2B5EF4-FFF2-40B4-BE49-F238E27FC236}">
-                <a16:creationId xmlns:a16="http://schemas.microsoft.com/office/drawing/2014/main" id="{B3122770-1A8B-402A-9B51-452EE7279ACA}"/>
+                <a16:creationId xmlns:a16="http://schemas.microsoft.com/office/drawing/2014/main" id="{A8889E53-9509-4B70-8404-2CF45EB3968A}"/>
               </a:ext>
             </a:extLst>
           </p:cNvPr>
@@ -25775,7 +25764,7 @@
           <p:cNvPr id="23" name="">
             <a:extLst xmlns:a="http://schemas.openxmlformats.org/drawingml/2006/main">
               <a:ext uri="{FF2B5EF4-FFF2-40B4-BE49-F238E27FC236}">
-                <a16:creationId xmlns:a16="http://schemas.microsoft.com/office/drawing/2014/main" id="{65E7BFA7-5430-49F4-B800-8FD0B1DB25DB}"/>
+                <a16:creationId xmlns:a16="http://schemas.microsoft.com/office/drawing/2014/main" id="{68104E0A-1D2A-4230-AFB7-6CC09BDC608D}"/>
               </a:ext>
             </a:extLst>
           </p:cNvPr>
@@ -25833,7 +25822,7 @@
           <p:cNvPr id="24" name="">
             <a:extLst xmlns:a="http://schemas.openxmlformats.org/drawingml/2006/main">
               <a:ext uri="{FF2B5EF4-FFF2-40B4-BE49-F238E27FC236}">
-                <a16:creationId xmlns:a16="http://schemas.microsoft.com/office/drawing/2014/main" id="{A4DF524A-A234-4D85-957B-B96289DAEB32}"/>
+                <a16:creationId xmlns:a16="http://schemas.microsoft.com/office/drawing/2014/main" id="{7C60DE0C-83C0-41D3-87C9-421A201F4864}"/>
               </a:ext>
             </a:extLst>
           </p:cNvPr>
@@ -25866,7 +25855,7 @@
           <p:cNvPr id="25" name="">
             <a:extLst xmlns:a="http://schemas.openxmlformats.org/drawingml/2006/main">
               <a:ext uri="{FF2B5EF4-FFF2-40B4-BE49-F238E27FC236}">
-                <a16:creationId xmlns:a16="http://schemas.microsoft.com/office/drawing/2014/main" id="{D65DA3E0-801A-46AF-9EFA-703B052C6F82}"/>
+                <a16:creationId xmlns:a16="http://schemas.microsoft.com/office/drawing/2014/main" id="{1801D1B1-F7CC-446B-84EA-80F4AB454B81}"/>
               </a:ext>
             </a:extLst>
           </p:cNvPr>
@@ -25924,7 +25913,7 @@
           <p:cNvPr id="26" name="">
             <a:extLst xmlns:a="http://schemas.openxmlformats.org/drawingml/2006/main">
               <a:ext uri="{FF2B5EF4-FFF2-40B4-BE49-F238E27FC236}">
-                <a16:creationId xmlns:a16="http://schemas.microsoft.com/office/drawing/2014/main" id="{3FA25CC5-DE6A-4337-B21E-7B8276EE110C}"/>
+                <a16:creationId xmlns:a16="http://schemas.microsoft.com/office/drawing/2014/main" id="{D8B358A3-8C18-4649-919C-7EECCE2BE6EA}"/>
               </a:ext>
             </a:extLst>
           </p:cNvPr>
@@ -25957,7 +25946,7 @@
           <p:cNvPr id="27" name="">
             <a:extLst xmlns:a="http://schemas.openxmlformats.org/drawingml/2006/main">
               <a:ext uri="{FF2B5EF4-FFF2-40B4-BE49-F238E27FC236}">
-                <a16:creationId xmlns:a16="http://schemas.microsoft.com/office/drawing/2014/main" id="{C7E1C73D-E9DF-47F1-A170-21CE188D8219}"/>
+                <a16:creationId xmlns:a16="http://schemas.microsoft.com/office/drawing/2014/main" id="{4CC8CC7F-C462-478C-BEA2-7307A7000E9F}"/>
               </a:ext>
             </a:extLst>
           </p:cNvPr>
@@ -26015,7 +26004,7 @@
           <p:cNvPr id="28" name="">
             <a:extLst xmlns:a="http://schemas.openxmlformats.org/drawingml/2006/main">
               <a:ext uri="{FF2B5EF4-FFF2-40B4-BE49-F238E27FC236}">
-                <a16:creationId xmlns:a16="http://schemas.microsoft.com/office/drawing/2014/main" id="{9B29F5CB-9C14-4C70-8C6E-C83F93AA4ED1}"/>
+                <a16:creationId xmlns:a16="http://schemas.microsoft.com/office/drawing/2014/main" id="{5C1948E0-D894-472C-844C-2644CAF4F937}"/>
               </a:ext>
             </a:extLst>
           </p:cNvPr>
@@ -26048,7 +26037,7 @@
           <p:cNvPr id="29" name="">
             <a:extLst xmlns:a="http://schemas.openxmlformats.org/drawingml/2006/main">
               <a:ext uri="{FF2B5EF4-FFF2-40B4-BE49-F238E27FC236}">
-                <a16:creationId xmlns:a16="http://schemas.microsoft.com/office/drawing/2014/main" id="{E7C75920-A8A7-4C06-A222-B43558CE494B}"/>
+                <a16:creationId xmlns:a16="http://schemas.microsoft.com/office/drawing/2014/main" id="{5DFB68A5-3D55-426C-982F-6FAB6341074E}"/>
               </a:ext>
             </a:extLst>
           </p:cNvPr>
@@ -26106,7 +26095,7 @@
           <p:cNvPr id="30" name="">
             <a:extLst xmlns:a="http://schemas.openxmlformats.org/drawingml/2006/main">
               <a:ext uri="{FF2B5EF4-FFF2-40B4-BE49-F238E27FC236}">
-                <a16:creationId xmlns:a16="http://schemas.microsoft.com/office/drawing/2014/main" id="{D42261B7-D252-4D55-9850-0BDD3432D45F}"/>
+                <a16:creationId xmlns:a16="http://schemas.microsoft.com/office/drawing/2014/main" id="{FCC1E4DD-0F71-49CC-B27B-35E4446B61C0}"/>
               </a:ext>
             </a:extLst>
           </p:cNvPr>
@@ -26139,7 +26128,7 @@
           <p:cNvPr id="31" name="">
             <a:extLst xmlns:a="http://schemas.openxmlformats.org/drawingml/2006/main">
               <a:ext uri="{FF2B5EF4-FFF2-40B4-BE49-F238E27FC236}">
-                <a16:creationId xmlns:a16="http://schemas.microsoft.com/office/drawing/2014/main" id="{F9B4ED9F-C9E4-47B7-85D9-F663FBC38CCB}"/>
+                <a16:creationId xmlns:a16="http://schemas.microsoft.com/office/drawing/2014/main" id="{DCB82538-6389-46FE-BE61-63FF2964590D}"/>
               </a:ext>
             </a:extLst>
           </p:cNvPr>
@@ -26197,7 +26186,7 @@
           <p:cNvPr id="32" name="">
             <a:extLst xmlns:a="http://schemas.openxmlformats.org/drawingml/2006/main">
               <a:ext uri="{FF2B5EF4-FFF2-40B4-BE49-F238E27FC236}">
-                <a16:creationId xmlns:a16="http://schemas.microsoft.com/office/drawing/2014/main" id="{9748AC46-B783-4A49-9DF6-594587ECAC05}"/>
+                <a16:creationId xmlns:a16="http://schemas.microsoft.com/office/drawing/2014/main" id="{60DBFD7B-19ED-4D43-9547-0151C0325ADF}"/>
               </a:ext>
             </a:extLst>
           </p:cNvPr>
@@ -26230,7 +26219,7 @@
           <p:cNvPr id="33" name="">
             <a:extLst xmlns:a="http://schemas.openxmlformats.org/drawingml/2006/main">
               <a:ext uri="{FF2B5EF4-FFF2-40B4-BE49-F238E27FC236}">
-                <a16:creationId xmlns:a16="http://schemas.microsoft.com/office/drawing/2014/main" id="{19FE07DF-B06F-4851-BA0B-AB1882C0A49A}"/>
+                <a16:creationId xmlns:a16="http://schemas.microsoft.com/office/drawing/2014/main" id="{3F13B504-30BD-4001-8263-5C677109F0EE}"/>
               </a:ext>
             </a:extLst>
           </p:cNvPr>
@@ -26288,7 +26277,7 @@
           <p:cNvPr id="34" name="">
             <a:extLst xmlns:a="http://schemas.openxmlformats.org/drawingml/2006/main">
               <a:ext uri="{FF2B5EF4-FFF2-40B4-BE49-F238E27FC236}">
-                <a16:creationId xmlns:a16="http://schemas.microsoft.com/office/drawing/2014/main" id="{F3BA31A9-D284-4747-BAE3-BFA374A1AFC1}"/>
+                <a16:creationId xmlns:a16="http://schemas.microsoft.com/office/drawing/2014/main" id="{CC79E8CC-36D7-41A7-8E9B-33483CEE47A6}"/>
               </a:ext>
             </a:extLst>
           </p:cNvPr>
@@ -26321,7 +26310,7 @@
           <p:cNvPr id="35" name="">
             <a:extLst xmlns:a="http://schemas.openxmlformats.org/drawingml/2006/main">
               <a:ext uri="{FF2B5EF4-FFF2-40B4-BE49-F238E27FC236}">
-                <a16:creationId xmlns:a16="http://schemas.microsoft.com/office/drawing/2014/main" id="{398305A6-055D-430C-B49D-9D47CB8370F7}"/>
+                <a16:creationId xmlns:a16="http://schemas.microsoft.com/office/drawing/2014/main" id="{0E048D66-6179-4FEE-9884-B30CC527BD6A}"/>
               </a:ext>
             </a:extLst>
           </p:cNvPr>
@@ -26379,7 +26368,7 @@
           <p:cNvPr id="36" name="">
             <a:extLst xmlns:a="http://schemas.openxmlformats.org/drawingml/2006/main">
               <a:ext uri="{FF2B5EF4-FFF2-40B4-BE49-F238E27FC236}">
-                <a16:creationId xmlns:a16="http://schemas.microsoft.com/office/drawing/2014/main" id="{FFD9017E-8D95-4F3A-8ABF-35CFCA292C95}"/>
+                <a16:creationId xmlns:a16="http://schemas.microsoft.com/office/drawing/2014/main" id="{04B89A48-334B-4719-A067-28029EB288FC}"/>
               </a:ext>
             </a:extLst>
           </p:cNvPr>
@@ -26412,7 +26401,7 @@
           <p:cNvPr id="37" name="">
             <a:extLst xmlns:a="http://schemas.openxmlformats.org/drawingml/2006/main">
               <a:ext uri="{FF2B5EF4-FFF2-40B4-BE49-F238E27FC236}">
-                <a16:creationId xmlns:a16="http://schemas.microsoft.com/office/drawing/2014/main" id="{A4EF7F50-AACC-4356-8736-3D6616CA6141}"/>
+                <a16:creationId xmlns:a16="http://schemas.microsoft.com/office/drawing/2014/main" id="{DE2361E8-935D-4D38-BC45-E4DD07C93AD8}"/>
               </a:ext>
             </a:extLst>
           </p:cNvPr>
@@ -26470,7 +26459,7 @@
           <p:cNvPr id="38" name="">
             <a:extLst xmlns:a="http://schemas.openxmlformats.org/drawingml/2006/main">
               <a:ext uri="{FF2B5EF4-FFF2-40B4-BE49-F238E27FC236}">
-                <a16:creationId xmlns:a16="http://schemas.microsoft.com/office/drawing/2014/main" id="{1AAA9D64-88F1-44A4-A330-852A136F2972}"/>
+                <a16:creationId xmlns:a16="http://schemas.microsoft.com/office/drawing/2014/main" id="{F61868A9-D4B3-4028-B199-AA621243B4AD}"/>
               </a:ext>
             </a:extLst>
           </p:cNvPr>
@@ -26503,7 +26492,7 @@
           <p:cNvPr id="39" name="">
             <a:extLst xmlns:a="http://schemas.openxmlformats.org/drawingml/2006/main">
               <a:ext uri="{FF2B5EF4-FFF2-40B4-BE49-F238E27FC236}">
-                <a16:creationId xmlns:a16="http://schemas.microsoft.com/office/drawing/2014/main" id="{6742D30F-7972-4FE2-92B2-2A623983E1BD}"/>
+                <a16:creationId xmlns:a16="http://schemas.microsoft.com/office/drawing/2014/main" id="{A2255C0B-4916-4FF6-8D48-7F3A25EB2663}"/>
               </a:ext>
             </a:extLst>
           </p:cNvPr>
@@ -26561,7 +26550,7 @@
           <p:cNvPr id="40" name="">
             <a:extLst xmlns:a="http://schemas.openxmlformats.org/drawingml/2006/main">
               <a:ext uri="{FF2B5EF4-FFF2-40B4-BE49-F238E27FC236}">
-                <a16:creationId xmlns:a16="http://schemas.microsoft.com/office/drawing/2014/main" id="{6CCDE732-F0B4-42F3-89DB-B9BB0EE0C133}"/>
+                <a16:creationId xmlns:a16="http://schemas.microsoft.com/office/drawing/2014/main" id="{6BF884A9-6F69-4145-9902-D5469655228C}"/>
               </a:ext>
             </a:extLst>
           </p:cNvPr>
@@ -26594,7 +26583,7 @@
           <p:cNvPr id="41" name="">
             <a:extLst xmlns:a="http://schemas.openxmlformats.org/drawingml/2006/main">
               <a:ext uri="{FF2B5EF4-FFF2-40B4-BE49-F238E27FC236}">
-                <a16:creationId xmlns:a16="http://schemas.microsoft.com/office/drawing/2014/main" id="{9025851A-C8D9-467B-84AA-82420CAD0F90}"/>
+                <a16:creationId xmlns:a16="http://schemas.microsoft.com/office/drawing/2014/main" id="{F9365C6C-DB51-4B76-B615-8A8CF87FA1B1}"/>
               </a:ext>
             </a:extLst>
           </p:cNvPr>
@@ -26652,7 +26641,7 @@
           <p:cNvPr id="42" name="">
             <a:extLst xmlns:a="http://schemas.openxmlformats.org/drawingml/2006/main">
               <a:ext uri="{FF2B5EF4-FFF2-40B4-BE49-F238E27FC236}">
-                <a16:creationId xmlns:a16="http://schemas.microsoft.com/office/drawing/2014/main" id="{A40CA9AF-1F05-40B3-B62E-133DDD6AC36D}"/>
+                <a16:creationId xmlns:a16="http://schemas.microsoft.com/office/drawing/2014/main" id="{7FAAFF37-09BE-492C-8BC9-3269E7E1CF91}"/>
               </a:ext>
             </a:extLst>
           </p:cNvPr>
@@ -26685,7 +26674,7 @@
           <p:cNvPr id="43" name="">
             <a:extLst xmlns:a="http://schemas.openxmlformats.org/drawingml/2006/main">
               <a:ext uri="{FF2B5EF4-FFF2-40B4-BE49-F238E27FC236}">
-                <a16:creationId xmlns:a16="http://schemas.microsoft.com/office/drawing/2014/main" id="{25628A12-2112-48BF-A573-C321CFB8087A}"/>
+                <a16:creationId xmlns:a16="http://schemas.microsoft.com/office/drawing/2014/main" id="{94B8818A-F22E-423E-934E-5AB1B187E839}"/>
               </a:ext>
             </a:extLst>
           </p:cNvPr>
@@ -26743,7 +26732,7 @@
           <p:cNvPr id="44" name="">
             <a:extLst xmlns:a="http://schemas.openxmlformats.org/drawingml/2006/main">
               <a:ext uri="{FF2B5EF4-FFF2-40B4-BE49-F238E27FC236}">
-                <a16:creationId xmlns:a16="http://schemas.microsoft.com/office/drawing/2014/main" id="{A3AAA1A8-D913-4E0F-A447-73D960DFC648}"/>
+                <a16:creationId xmlns:a16="http://schemas.microsoft.com/office/drawing/2014/main" id="{18C2542A-01A2-439E-9427-8C8018398E53}"/>
               </a:ext>
             </a:extLst>
           </p:cNvPr>
@@ -26776,7 +26765,7 @@
           <p:cNvPr id="45" name="">
             <a:extLst xmlns:a="http://schemas.openxmlformats.org/drawingml/2006/main">
               <a:ext uri="{FF2B5EF4-FFF2-40B4-BE49-F238E27FC236}">
-                <a16:creationId xmlns:a16="http://schemas.microsoft.com/office/drawing/2014/main" id="{E98B0AFB-2C1E-4EC0-948D-C32796B27784}"/>
+                <a16:creationId xmlns:a16="http://schemas.microsoft.com/office/drawing/2014/main" id="{611B7B60-457B-41C2-A4C9-F7A2541CEE59}"/>
               </a:ext>
             </a:extLst>
           </p:cNvPr>
@@ -26834,7 +26823,7 @@
           <p:cNvPr id="46" name="">
             <a:extLst xmlns:a="http://schemas.openxmlformats.org/drawingml/2006/main">
               <a:ext uri="{FF2B5EF4-FFF2-40B4-BE49-F238E27FC236}">
-                <a16:creationId xmlns:a16="http://schemas.microsoft.com/office/drawing/2014/main" id="{F71E2F71-02D2-4D03-A963-A1348BF01AB4}"/>
+                <a16:creationId xmlns:a16="http://schemas.microsoft.com/office/drawing/2014/main" id="{A6612F41-80EE-4017-9703-6D9512E7C51B}"/>
               </a:ext>
             </a:extLst>
           </p:cNvPr>
@@ -26867,7 +26856,7 @@
           <p:cNvPr id="47" name="">
             <a:extLst xmlns:a="http://schemas.openxmlformats.org/drawingml/2006/main">
               <a:ext uri="{FF2B5EF4-FFF2-40B4-BE49-F238E27FC236}">
-                <a16:creationId xmlns:a16="http://schemas.microsoft.com/office/drawing/2014/main" id="{0A9AC5E3-A034-4870-B96B-22C0D2AAFDA0}"/>
+                <a16:creationId xmlns:a16="http://schemas.microsoft.com/office/drawing/2014/main" id="{4FE857F4-DE26-44FC-9A8A-C24B316F060A}"/>
               </a:ext>
             </a:extLst>
           </p:cNvPr>
@@ -26925,7 +26914,7 @@
           <p:cNvPr id="48" name="">
             <a:extLst xmlns:a="http://schemas.openxmlformats.org/drawingml/2006/main">
               <a:ext uri="{FF2B5EF4-FFF2-40B4-BE49-F238E27FC236}">
-                <a16:creationId xmlns:a16="http://schemas.microsoft.com/office/drawing/2014/main" id="{F019D69E-BF7B-4773-B711-19FDCDFF0932}"/>
+                <a16:creationId xmlns:a16="http://schemas.microsoft.com/office/drawing/2014/main" id="{B0773227-51C1-4C8F-B615-CE5D983558FA}"/>
               </a:ext>
             </a:extLst>
           </p:cNvPr>
@@ -26958,7 +26947,7 @@
           <p:cNvPr id="49" name="">
             <a:extLst xmlns:a="http://schemas.openxmlformats.org/drawingml/2006/main">
               <a:ext uri="{FF2B5EF4-FFF2-40B4-BE49-F238E27FC236}">
-                <a16:creationId xmlns:a16="http://schemas.microsoft.com/office/drawing/2014/main" id="{FB64C923-9B24-418E-92ED-29CCCBB23EF7}"/>
+                <a16:creationId xmlns:a16="http://schemas.microsoft.com/office/drawing/2014/main" id="{08B8DF8F-4374-42D5-8DEF-A37AC5538690}"/>
               </a:ext>
             </a:extLst>
           </p:cNvPr>
@@ -27016,7 +27005,7 @@
           <p:cNvPr id="50" name="">
             <a:extLst xmlns:a="http://schemas.openxmlformats.org/drawingml/2006/main">
               <a:ext uri="{FF2B5EF4-FFF2-40B4-BE49-F238E27FC236}">
-                <a16:creationId xmlns:a16="http://schemas.microsoft.com/office/drawing/2014/main" id="{AFAFA2B7-6DF1-48F3-8953-B7529FCE909E}"/>
+                <a16:creationId xmlns:a16="http://schemas.microsoft.com/office/drawing/2014/main" id="{E2ACF050-5228-4379-AFC0-2D4EBA0746DA}"/>
               </a:ext>
             </a:extLst>
           </p:cNvPr>
@@ -27049,7 +27038,7 @@
           <p:cNvPr id="51" name="">
             <a:extLst xmlns:a="http://schemas.openxmlformats.org/drawingml/2006/main">
               <a:ext uri="{FF2B5EF4-FFF2-40B4-BE49-F238E27FC236}">
-                <a16:creationId xmlns:a16="http://schemas.microsoft.com/office/drawing/2014/main" id="{2F08E767-969C-4198-841C-A312C20F2A63}"/>
+                <a16:creationId xmlns:a16="http://schemas.microsoft.com/office/drawing/2014/main" id="{43D429F7-D58E-40F9-A96D-09130E51882E}"/>
               </a:ext>
             </a:extLst>
           </p:cNvPr>
@@ -27107,7 +27096,7 @@
           <p:cNvPr id="52" name="">
             <a:extLst xmlns:a="http://schemas.openxmlformats.org/drawingml/2006/main">
               <a:ext uri="{FF2B5EF4-FFF2-40B4-BE49-F238E27FC236}">
-                <a16:creationId xmlns:a16="http://schemas.microsoft.com/office/drawing/2014/main" id="{B28297F8-5EDC-4C7C-B99E-11CF36530B93}"/>
+                <a16:creationId xmlns:a16="http://schemas.microsoft.com/office/drawing/2014/main" id="{98C03287-6DAB-41D3-B707-9A0AEB8856A5}"/>
               </a:ext>
             </a:extLst>
           </p:cNvPr>
@@ -27140,7 +27129,7 @@
           <p:cNvPr id="53" name="">
             <a:extLst xmlns:a="http://schemas.openxmlformats.org/drawingml/2006/main">
               <a:ext uri="{FF2B5EF4-FFF2-40B4-BE49-F238E27FC236}">
-                <a16:creationId xmlns:a16="http://schemas.microsoft.com/office/drawing/2014/main" id="{BA8D5E20-A360-4BD8-8678-1EAB16AFFFC6}"/>
+                <a16:creationId xmlns:a16="http://schemas.microsoft.com/office/drawing/2014/main" id="{19893E52-8F0B-4E8D-B3B7-6A9EF39DB64F}"/>
               </a:ext>
             </a:extLst>
           </p:cNvPr>
@@ -27198,7 +27187,7 @@
           <p:cNvPr id="54" name="">
             <a:extLst xmlns:a="http://schemas.openxmlformats.org/drawingml/2006/main">
               <a:ext uri="{FF2B5EF4-FFF2-40B4-BE49-F238E27FC236}">
-                <a16:creationId xmlns:a16="http://schemas.microsoft.com/office/drawing/2014/main" id="{F471FFB7-1CAC-4F46-A2FB-D7C2958304D7}"/>
+                <a16:creationId xmlns:a16="http://schemas.microsoft.com/office/drawing/2014/main" id="{A8058C4F-A206-4DA3-8FAA-01BBBF18357C}"/>
               </a:ext>
             </a:extLst>
           </p:cNvPr>
@@ -27231,7 +27220,7 @@
           <p:cNvPr id="55" name="">
             <a:extLst xmlns:a="http://schemas.openxmlformats.org/drawingml/2006/main">
               <a:ext uri="{FF2B5EF4-FFF2-40B4-BE49-F238E27FC236}">
-                <a16:creationId xmlns:a16="http://schemas.microsoft.com/office/drawing/2014/main" id="{9E334CA2-30A8-457D-9AE6-01C9619799B5}"/>
+                <a16:creationId xmlns:a16="http://schemas.microsoft.com/office/drawing/2014/main" id="{1FEE445D-FB0D-4E43-9FB0-37194FD5C9DD}"/>
               </a:ext>
             </a:extLst>
           </p:cNvPr>
@@ -27289,7 +27278,7 @@
           <p:cNvPr id="56" name="">
             <a:extLst xmlns:a="http://schemas.openxmlformats.org/drawingml/2006/main">
               <a:ext uri="{FF2B5EF4-FFF2-40B4-BE49-F238E27FC236}">
-                <a16:creationId xmlns:a16="http://schemas.microsoft.com/office/drawing/2014/main" id="{E79D833F-CE5F-4EB5-8C2A-90B73D19AB79}"/>
+                <a16:creationId xmlns:a16="http://schemas.microsoft.com/office/drawing/2014/main" id="{38F600A5-C1A5-4106-9651-AB4C3424163A}"/>
               </a:ext>
             </a:extLst>
           </p:cNvPr>
@@ -27322,7 +27311,7 @@
           <p:cNvPr id="57" name="">
             <a:extLst xmlns:a="http://schemas.openxmlformats.org/drawingml/2006/main">
               <a:ext uri="{FF2B5EF4-FFF2-40B4-BE49-F238E27FC236}">
-                <a16:creationId xmlns:a16="http://schemas.microsoft.com/office/drawing/2014/main" id="{692AFBB7-6833-4CD8-B8A6-79E90126F6BA}"/>
+                <a16:creationId xmlns:a16="http://schemas.microsoft.com/office/drawing/2014/main" id="{39B1DCA3-0F4D-4BE2-8102-08442F6DDC5B}"/>
               </a:ext>
             </a:extLst>
           </p:cNvPr>
@@ -27380,7 +27369,7 @@
           <p:cNvPr id="58" name="">
             <a:extLst xmlns:a="http://schemas.openxmlformats.org/drawingml/2006/main">
               <a:ext uri="{FF2B5EF4-FFF2-40B4-BE49-F238E27FC236}">
-                <a16:creationId xmlns:a16="http://schemas.microsoft.com/office/drawing/2014/main" id="{3358311C-344A-4248-9C5C-1BB8F60FB4E4}"/>
+                <a16:creationId xmlns:a16="http://schemas.microsoft.com/office/drawing/2014/main" id="{E4BA26D2-CE4A-41E5-8C6D-7442CB75398B}"/>
               </a:ext>
             </a:extLst>
           </p:cNvPr>
@@ -27413,7 +27402,7 @@
           <p:cNvPr id="59" name="">
             <a:extLst xmlns:a="http://schemas.openxmlformats.org/drawingml/2006/main">
               <a:ext uri="{FF2B5EF4-FFF2-40B4-BE49-F238E27FC236}">
-                <a16:creationId xmlns:a16="http://schemas.microsoft.com/office/drawing/2014/main" id="{9ABDFFE3-3DE6-475D-843F-380F4B0617A2}"/>
+                <a16:creationId xmlns:a16="http://schemas.microsoft.com/office/drawing/2014/main" id="{201E3F61-FCC4-477B-9180-2C9A6A10596D}"/>
               </a:ext>
             </a:extLst>
           </p:cNvPr>
@@ -27471,7 +27460,7 @@
           <p:cNvPr id="60" name="">
             <a:extLst xmlns:a="http://schemas.openxmlformats.org/drawingml/2006/main">
               <a:ext uri="{FF2B5EF4-FFF2-40B4-BE49-F238E27FC236}">
-                <a16:creationId xmlns:a16="http://schemas.microsoft.com/office/drawing/2014/main" id="{0875A303-36E8-44DB-8C5F-F5B4970C8252}"/>
+                <a16:creationId xmlns:a16="http://schemas.microsoft.com/office/drawing/2014/main" id="{40B33490-D67D-4DDB-AE74-B6AEFF4D3805}"/>
               </a:ext>
             </a:extLst>
           </p:cNvPr>
@@ -27504,7 +27493,7 @@
           <p:cNvPr id="61" name="">
             <a:extLst xmlns:a="http://schemas.openxmlformats.org/drawingml/2006/main">
               <a:ext uri="{FF2B5EF4-FFF2-40B4-BE49-F238E27FC236}">
-                <a16:creationId xmlns:a16="http://schemas.microsoft.com/office/drawing/2014/main" id="{DD29CCD6-E7C9-4220-A657-975FD4CDC182}"/>
+                <a16:creationId xmlns:a16="http://schemas.microsoft.com/office/drawing/2014/main" id="{C32F6CD2-1FD2-4694-965B-52B8B78D4120}"/>
               </a:ext>
             </a:extLst>
           </p:cNvPr>
@@ -27562,7 +27551,7 @@
           <p:cNvPr id="62" name="">
             <a:extLst xmlns:a="http://schemas.openxmlformats.org/drawingml/2006/main">
               <a:ext uri="{FF2B5EF4-FFF2-40B4-BE49-F238E27FC236}">
-                <a16:creationId xmlns:a16="http://schemas.microsoft.com/office/drawing/2014/main" id="{F5710D32-9026-4A12-87D0-AA356469A75A}"/>
+                <a16:creationId xmlns:a16="http://schemas.microsoft.com/office/drawing/2014/main" id="{896D6ABB-C07F-434B-B157-81A045A8151C}"/>
               </a:ext>
             </a:extLst>
           </p:cNvPr>
@@ -27620,7 +27609,7 @@
           <p:cNvPr id="63" name="">
             <a:extLst xmlns:a="http://schemas.openxmlformats.org/drawingml/2006/main">
               <a:ext uri="{FF2B5EF4-FFF2-40B4-BE49-F238E27FC236}">
-                <a16:creationId xmlns:a16="http://schemas.microsoft.com/office/drawing/2014/main" id="{EC85BDBD-07DF-4ACA-B7E6-B67FC07F91A3}"/>
+                <a16:creationId xmlns:a16="http://schemas.microsoft.com/office/drawing/2014/main" id="{32E8628E-8D2E-4C93-9466-F9529A8CB188}"/>
               </a:ext>
             </a:extLst>
           </p:cNvPr>
@@ -27653,7 +27642,7 @@
           <p:cNvPr id="64" name="">
             <a:extLst xmlns:a="http://schemas.openxmlformats.org/drawingml/2006/main">
               <a:ext uri="{FF2B5EF4-FFF2-40B4-BE49-F238E27FC236}">
-                <a16:creationId xmlns:a16="http://schemas.microsoft.com/office/drawing/2014/main" id="{6C20497A-F4C4-4888-9F9D-F79087A25DE8}"/>
+                <a16:creationId xmlns:a16="http://schemas.microsoft.com/office/drawing/2014/main" id="{509132B1-3ADA-48FF-AD4F-464889314893}"/>
               </a:ext>
             </a:extLst>
           </p:cNvPr>
@@ -27711,7 +27700,7 @@
                 <a:latin typeface="Microsoft YaHei"/>
                 <a:ea typeface="Microsoft YaHei"/>
                 <a:cs typeface="Microsoft YaHei"/>
-                <a:hlinkClick xmlns:r="http://schemas.openxmlformats.org/officeDocument/2006/relationships" r:id="Ra8255e682988412a"/>
+                <a:hlinkClick xmlns:r="http://schemas.openxmlformats.org/officeDocument/2006/relationships" r:id="Rc7c9e31283c84e88"/>
               </a:rPr>
               <a:t>码道定价</a:t>
             </a:r>
@@ -27723,7 +27712,7 @@
                 <a:latin typeface="Microsoft YaHei"/>
                 <a:ea typeface="Microsoft YaHei"/>
                 <a:cs typeface="Microsoft YaHei"/>
-                <a:hlinkClick xmlns:r="http://schemas.openxmlformats.org/officeDocument/2006/relationships" r:id="Rc820047ffd7a4e37"/>
+                <a:hlinkClick xmlns:r="http://schemas.openxmlformats.org/officeDocument/2006/relationships" r:id="Rfbe5ec8c638c4ff6"/>
               </a:rPr>
               <a:t> · Claude Plans</a:t>
             </a:r>
@@ -27735,7 +27724,7 @@
                 <a:latin typeface="Microsoft YaHei"/>
                 <a:ea typeface="Microsoft YaHei"/>
                 <a:cs typeface="Microsoft YaHei"/>
-                <a:hlinkClick xmlns:r="http://schemas.openxmlformats.org/officeDocument/2006/relationships" r:id="R318b3089eb924c92"/>
+                <a:hlinkClick xmlns:r="http://schemas.openxmlformats.org/officeDocument/2006/relationships" r:id="R1bdfecfbb1b04fb4"/>
               </a:rPr>
               <a:t> · Qoder Pricing</a:t>
             </a:r>
@@ -27747,7 +27736,7 @@
                 <a:latin typeface="Microsoft YaHei"/>
                 <a:ea typeface="Microsoft YaHei"/>
                 <a:cs typeface="Microsoft YaHei"/>
-                <a:hlinkClick xmlns:r="http://schemas.openxmlformats.org/officeDocument/2006/relationships" r:id="Rd743631a825149d0"/>
+                <a:hlinkClick xmlns:r="http://schemas.openxmlformats.org/officeDocument/2006/relationships" r:id="R8dee6572bcc94f34"/>
               </a:rPr>
               <a:t> · Codex Pricing</a:t>
             </a:r>
@@ -27759,7 +27748,7 @@
           <p:cNvPr id="65" name="">
             <a:extLst xmlns:a="http://schemas.openxmlformats.org/drawingml/2006/main">
               <a:ext uri="{FF2B5EF4-FFF2-40B4-BE49-F238E27FC236}">
-                <a16:creationId xmlns:a16="http://schemas.microsoft.com/office/drawing/2014/main" id="{4B9935F9-3F1F-47B6-A423-D5E6F594FFAC}"/>
+                <a16:creationId xmlns:a16="http://schemas.microsoft.com/office/drawing/2014/main" id="{E9B430A1-F8F4-4D15-A460-27E51C9A2DFF}"/>
               </a:ext>
             </a:extLst>
           </p:cNvPr>
@@ -27815,7 +27804,7 @@
     </p:spTree>
     <p:extLst>
       <p:ext uri="{BB962C8B-B14F-4D97-AF65-F5344CB8AC3E}">
-        <p14:creationId xmlns:p14="http://schemas.microsoft.com/office/powerpoint/2010/main" val="1684869125"/>
+        <p14:creationId xmlns:p14="http://schemas.microsoft.com/office/powerpoint/2010/main" val="27088910"/>
       </p:ext>
     </p:extLst>
   </p:cSld>
@@ -27846,7 +27835,7 @@
           <p:cNvPr id="48" name="">
             <a:extLst xmlns:a="http://schemas.openxmlformats.org/drawingml/2006/main">
               <a:ext uri="{FF2B5EF4-FFF2-40B4-BE49-F238E27FC236}">
-                <a16:creationId xmlns:a16="http://schemas.microsoft.com/office/drawing/2014/main" id="{18FE86AF-67A3-4FCF-8A0D-0FC9885F9022}"/>
+                <a16:creationId xmlns:a16="http://schemas.microsoft.com/office/drawing/2014/main" id="{AB339907-EA48-4ED8-970F-CB697102D55A}"/>
               </a:ext>
             </a:extLst>
           </p:cNvPr>
@@ -27879,7 +27868,7 @@
           <p:cNvPr id="2" name="">
             <a:extLst xmlns:a="http://schemas.openxmlformats.org/drawingml/2006/main">
               <a:ext uri="{FF2B5EF4-FFF2-40B4-BE49-F238E27FC236}">
-                <a16:creationId xmlns:a16="http://schemas.microsoft.com/office/drawing/2014/main" id="{BC982A62-27FD-492E-AF6F-AA0ED4E995A5}"/>
+                <a16:creationId xmlns:a16="http://schemas.microsoft.com/office/drawing/2014/main" id="{D44940D6-98F7-455B-917E-36FE30A31B29}"/>
               </a:ext>
             </a:extLst>
           </p:cNvPr>
@@ -27937,7 +27926,7 @@
           <p:cNvPr id="3" name="">
             <a:extLst xmlns:a="http://schemas.openxmlformats.org/drawingml/2006/main">
               <a:ext uri="{FF2B5EF4-FFF2-40B4-BE49-F238E27FC236}">
-                <a16:creationId xmlns:a16="http://schemas.microsoft.com/office/drawing/2014/main" id="{2A6C0ECE-07B9-4928-8A9A-AD20FF4AD6D7}"/>
+                <a16:creationId xmlns:a16="http://schemas.microsoft.com/office/drawing/2014/main" id="{7A05EA81-7FAE-40DB-A29B-938197A333FA}"/>
               </a:ext>
             </a:extLst>
           </p:cNvPr>
@@ -27995,7 +27984,7 @@
           <p:cNvPr id="4" name="">
             <a:extLst xmlns:a="http://schemas.openxmlformats.org/drawingml/2006/main">
               <a:ext uri="{FF2B5EF4-FFF2-40B4-BE49-F238E27FC236}">
-                <a16:creationId xmlns:a16="http://schemas.microsoft.com/office/drawing/2014/main" id="{7625C79A-26A9-4AFB-9F93-8E1AE9792289}"/>
+                <a16:creationId xmlns:a16="http://schemas.microsoft.com/office/drawing/2014/main" id="{9BA57A08-2D1B-4D4C-8C47-0D7D787CFBDF}"/>
               </a:ext>
             </a:extLst>
           </p:cNvPr>
@@ -28028,7 +28017,7 @@
           <p:cNvPr id="5" name="">
             <a:extLst xmlns:a="http://schemas.openxmlformats.org/drawingml/2006/main">
               <a:ext uri="{FF2B5EF4-FFF2-40B4-BE49-F238E27FC236}">
-                <a16:creationId xmlns:a16="http://schemas.microsoft.com/office/drawing/2014/main" id="{31B6B8F2-03E9-4148-865A-ACD3877D7B53}"/>
+                <a16:creationId xmlns:a16="http://schemas.microsoft.com/office/drawing/2014/main" id="{D3B8F815-68EC-4245-92B8-37D1E6E037DC}"/>
               </a:ext>
             </a:extLst>
           </p:cNvPr>
@@ -28086,7 +28075,7 @@
           <p:cNvPr id="6" name="">
             <a:extLst xmlns:a="http://schemas.openxmlformats.org/drawingml/2006/main">
               <a:ext uri="{FF2B5EF4-FFF2-40B4-BE49-F238E27FC236}">
-                <a16:creationId xmlns:a16="http://schemas.microsoft.com/office/drawing/2014/main" id="{73920F63-EF96-4104-B46B-CEA187E0719A}"/>
+                <a16:creationId xmlns:a16="http://schemas.microsoft.com/office/drawing/2014/main" id="{DD1D95A5-A5EC-40C3-8DF1-E7449F68E314}"/>
               </a:ext>
             </a:extLst>
           </p:cNvPr>
@@ -28119,7 +28108,7 @@
           <p:cNvPr id="7" name="">
             <a:extLst xmlns:a="http://schemas.openxmlformats.org/drawingml/2006/main">
               <a:ext uri="{FF2B5EF4-FFF2-40B4-BE49-F238E27FC236}">
-                <a16:creationId xmlns:a16="http://schemas.microsoft.com/office/drawing/2014/main" id="{C76CE308-59CD-4D74-A779-ED5D9A83D60C}"/>
+                <a16:creationId xmlns:a16="http://schemas.microsoft.com/office/drawing/2014/main" id="{902A1CB2-A3B9-4583-A20B-A68A4F065BF5}"/>
               </a:ext>
             </a:extLst>
           </p:cNvPr>
@@ -28177,7 +28166,7 @@
           <p:cNvPr id="8" name="">
             <a:extLst xmlns:a="http://schemas.openxmlformats.org/drawingml/2006/main">
               <a:ext uri="{FF2B5EF4-FFF2-40B4-BE49-F238E27FC236}">
-                <a16:creationId xmlns:a16="http://schemas.microsoft.com/office/drawing/2014/main" id="{10864E03-BA7D-4751-90B5-FAA0E342C4C4}"/>
+                <a16:creationId xmlns:a16="http://schemas.microsoft.com/office/drawing/2014/main" id="{4BCCA215-5242-4520-980A-AA77234867F2}"/>
               </a:ext>
             </a:extLst>
           </p:cNvPr>
@@ -28235,7 +28224,7 @@
           <p:cNvPr id="9" name="">
             <a:extLst xmlns:a="http://schemas.openxmlformats.org/drawingml/2006/main">
               <a:ext uri="{FF2B5EF4-FFF2-40B4-BE49-F238E27FC236}">
-                <a16:creationId xmlns:a16="http://schemas.microsoft.com/office/drawing/2014/main" id="{0233A32C-E197-45CF-97BA-E63AAC920B68}"/>
+                <a16:creationId xmlns:a16="http://schemas.microsoft.com/office/drawing/2014/main" id="{A1ED7A59-6663-44E5-815B-D703A9AC54B7}"/>
               </a:ext>
             </a:extLst>
           </p:cNvPr>
@@ -28293,7 +28282,7 @@
           <p:cNvPr id="10" name="">
             <a:extLst xmlns:a="http://schemas.openxmlformats.org/drawingml/2006/main">
               <a:ext uri="{FF2B5EF4-FFF2-40B4-BE49-F238E27FC236}">
-                <a16:creationId xmlns:a16="http://schemas.microsoft.com/office/drawing/2014/main" id="{4A2AB1A5-7388-44F9-AFF1-4BEBA0487113}"/>
+                <a16:creationId xmlns:a16="http://schemas.microsoft.com/office/drawing/2014/main" id="{918C602C-3DAF-4B57-B06B-AA44A8B54AFB}"/>
               </a:ext>
             </a:extLst>
           </p:cNvPr>
@@ -28326,7 +28315,7 @@
           <p:cNvPr id="11" name="">
             <a:extLst xmlns:a="http://schemas.openxmlformats.org/drawingml/2006/main">
               <a:ext uri="{FF2B5EF4-FFF2-40B4-BE49-F238E27FC236}">
-                <a16:creationId xmlns:a16="http://schemas.microsoft.com/office/drawing/2014/main" id="{1F5266F5-5FE2-4CDC-A8F1-C1CFA6257078}"/>
+                <a16:creationId xmlns:a16="http://schemas.microsoft.com/office/drawing/2014/main" id="{F333C3BB-4138-4068-BD01-9A0BE70D056C}"/>
               </a:ext>
             </a:extLst>
           </p:cNvPr>
@@ -28384,7 +28373,7 @@
           <p:cNvPr id="12" name="">
             <a:extLst xmlns:a="http://schemas.openxmlformats.org/drawingml/2006/main">
               <a:ext uri="{FF2B5EF4-FFF2-40B4-BE49-F238E27FC236}">
-                <a16:creationId xmlns:a16="http://schemas.microsoft.com/office/drawing/2014/main" id="{ADE5CB71-9F7D-49E9-8692-08BBC37A3CC1}"/>
+                <a16:creationId xmlns:a16="http://schemas.microsoft.com/office/drawing/2014/main" id="{F8A63A5C-9A3C-4E8B-A7ED-EF4C47AE1886}"/>
               </a:ext>
             </a:extLst>
           </p:cNvPr>
@@ -28417,7 +28406,7 @@
           <p:cNvPr id="13" name="">
             <a:extLst xmlns:a="http://schemas.openxmlformats.org/drawingml/2006/main">
               <a:ext uri="{FF2B5EF4-FFF2-40B4-BE49-F238E27FC236}">
-                <a16:creationId xmlns:a16="http://schemas.microsoft.com/office/drawing/2014/main" id="{60D067F3-1B9B-4698-819A-9D03DAFD6BCD}"/>
+                <a16:creationId xmlns:a16="http://schemas.microsoft.com/office/drawing/2014/main" id="{7FA63396-0E9F-4E88-B418-844E27E67E54}"/>
               </a:ext>
             </a:extLst>
           </p:cNvPr>
@@ -28475,7 +28464,7 @@
           <p:cNvPr id="14" name="">
             <a:extLst xmlns:a="http://schemas.openxmlformats.org/drawingml/2006/main">
               <a:ext uri="{FF2B5EF4-FFF2-40B4-BE49-F238E27FC236}">
-                <a16:creationId xmlns:a16="http://schemas.microsoft.com/office/drawing/2014/main" id="{5C0051A5-A2C4-49DE-9E4C-A247E6D3A193}"/>
+                <a16:creationId xmlns:a16="http://schemas.microsoft.com/office/drawing/2014/main" id="{EBA5988A-9FFA-41B3-94E9-3CA07205AAA5}"/>
               </a:ext>
             </a:extLst>
           </p:cNvPr>
@@ -28533,7 +28522,7 @@
           <p:cNvPr id="15" name="">
             <a:extLst xmlns:a="http://schemas.openxmlformats.org/drawingml/2006/main">
               <a:ext uri="{FF2B5EF4-FFF2-40B4-BE49-F238E27FC236}">
-                <a16:creationId xmlns:a16="http://schemas.microsoft.com/office/drawing/2014/main" id="{B53040E9-EBAC-4B5F-801C-9A0B56EA2136}"/>
+                <a16:creationId xmlns:a16="http://schemas.microsoft.com/office/drawing/2014/main" id="{FB3B6B0D-917D-433B-991A-B7FE3289B8CF}"/>
               </a:ext>
             </a:extLst>
           </p:cNvPr>
@@ -28591,7 +28580,7 @@
           <p:cNvPr id="16" name="">
             <a:extLst xmlns:a="http://schemas.openxmlformats.org/drawingml/2006/main">
               <a:ext uri="{FF2B5EF4-FFF2-40B4-BE49-F238E27FC236}">
-                <a16:creationId xmlns:a16="http://schemas.microsoft.com/office/drawing/2014/main" id="{6749CB22-CAE2-4B53-B886-85CD8984E157}"/>
+                <a16:creationId xmlns:a16="http://schemas.microsoft.com/office/drawing/2014/main" id="{533F27AC-87B8-4A99-8651-697FAD714434}"/>
               </a:ext>
             </a:extLst>
           </p:cNvPr>
@@ -28624,7 +28613,7 @@
           <p:cNvPr id="17" name="">
             <a:extLst xmlns:a="http://schemas.openxmlformats.org/drawingml/2006/main">
               <a:ext uri="{FF2B5EF4-FFF2-40B4-BE49-F238E27FC236}">
-                <a16:creationId xmlns:a16="http://schemas.microsoft.com/office/drawing/2014/main" id="{1E407FC2-9B5E-4DC1-A516-065B77E720D7}"/>
+                <a16:creationId xmlns:a16="http://schemas.microsoft.com/office/drawing/2014/main" id="{F5920F07-D69F-4D79-B00A-294163F46EA9}"/>
               </a:ext>
             </a:extLst>
           </p:cNvPr>
@@ -28682,7 +28671,7 @@
           <p:cNvPr id="18" name="">
             <a:extLst xmlns:a="http://schemas.openxmlformats.org/drawingml/2006/main">
               <a:ext uri="{FF2B5EF4-FFF2-40B4-BE49-F238E27FC236}">
-                <a16:creationId xmlns:a16="http://schemas.microsoft.com/office/drawing/2014/main" id="{613AEB76-2038-49E2-A81A-8ABBAB2F798B}"/>
+                <a16:creationId xmlns:a16="http://schemas.microsoft.com/office/drawing/2014/main" id="{B3EB3A5F-9A25-4307-8657-8B4838C53B8E}"/>
               </a:ext>
             </a:extLst>
           </p:cNvPr>
@@ -28715,7 +28704,7 @@
           <p:cNvPr id="19" name="">
             <a:extLst xmlns:a="http://schemas.openxmlformats.org/drawingml/2006/main">
               <a:ext uri="{FF2B5EF4-FFF2-40B4-BE49-F238E27FC236}">
-                <a16:creationId xmlns:a16="http://schemas.microsoft.com/office/drawing/2014/main" id="{C6BC1053-7BFD-4627-B19A-729631EE00B8}"/>
+                <a16:creationId xmlns:a16="http://schemas.microsoft.com/office/drawing/2014/main" id="{45ACE549-4EAF-48A4-B37D-8AE01B23D5EA}"/>
               </a:ext>
             </a:extLst>
           </p:cNvPr>
@@ -28773,7 +28762,7 @@
           <p:cNvPr id="20" name="">
             <a:extLst xmlns:a="http://schemas.openxmlformats.org/drawingml/2006/main">
               <a:ext uri="{FF2B5EF4-FFF2-40B4-BE49-F238E27FC236}">
-                <a16:creationId xmlns:a16="http://schemas.microsoft.com/office/drawing/2014/main" id="{113690AD-D1AD-4CCC-800B-B9105C99FAE2}"/>
+                <a16:creationId xmlns:a16="http://schemas.microsoft.com/office/drawing/2014/main" id="{702E962B-3092-4F4C-A6CE-60154A88CC42}"/>
               </a:ext>
             </a:extLst>
           </p:cNvPr>
@@ -28831,7 +28820,7 @@
           <p:cNvPr id="21" name="">
             <a:extLst xmlns:a="http://schemas.openxmlformats.org/drawingml/2006/main">
               <a:ext uri="{FF2B5EF4-FFF2-40B4-BE49-F238E27FC236}">
-                <a16:creationId xmlns:a16="http://schemas.microsoft.com/office/drawing/2014/main" id="{D677E7BF-0E01-4193-9201-D881B4C5D946}"/>
+                <a16:creationId xmlns:a16="http://schemas.microsoft.com/office/drawing/2014/main" id="{ED89772A-83B2-4E40-8A4C-7C6BD7BD70C9}"/>
               </a:ext>
             </a:extLst>
           </p:cNvPr>
@@ -28889,7 +28878,7 @@
           <p:cNvPr id="22" name="">
             <a:extLst xmlns:a="http://schemas.openxmlformats.org/drawingml/2006/main">
               <a:ext uri="{FF2B5EF4-FFF2-40B4-BE49-F238E27FC236}">
-                <a16:creationId xmlns:a16="http://schemas.microsoft.com/office/drawing/2014/main" id="{BB926446-F027-4E6D-A5E9-869F5D5D65FC}"/>
+                <a16:creationId xmlns:a16="http://schemas.microsoft.com/office/drawing/2014/main" id="{37ABF617-D75B-4C91-AAD6-3858F87B4F66}"/>
               </a:ext>
             </a:extLst>
           </p:cNvPr>
@@ -28922,7 +28911,7 @@
           <p:cNvPr id="23" name="">
             <a:extLst xmlns:a="http://schemas.openxmlformats.org/drawingml/2006/main">
               <a:ext uri="{FF2B5EF4-FFF2-40B4-BE49-F238E27FC236}">
-                <a16:creationId xmlns:a16="http://schemas.microsoft.com/office/drawing/2014/main" id="{AA57BB19-F731-494B-ACC8-C1B1BFA0A269}"/>
+                <a16:creationId xmlns:a16="http://schemas.microsoft.com/office/drawing/2014/main" id="{973CA9A7-D630-434D-9C2E-379EAD56FB72}"/>
               </a:ext>
             </a:extLst>
           </p:cNvPr>
@@ -28980,7 +28969,7 @@
           <p:cNvPr id="24" name="">
             <a:extLst xmlns:a="http://schemas.openxmlformats.org/drawingml/2006/main">
               <a:ext uri="{FF2B5EF4-FFF2-40B4-BE49-F238E27FC236}">
-                <a16:creationId xmlns:a16="http://schemas.microsoft.com/office/drawing/2014/main" id="{DAFE5AAF-71BA-488E-9AB8-E276639F2EC5}"/>
+                <a16:creationId xmlns:a16="http://schemas.microsoft.com/office/drawing/2014/main" id="{F756ECA3-2F9F-4287-982B-D7A7AB772448}"/>
               </a:ext>
             </a:extLst>
           </p:cNvPr>
@@ -29013,7 +29002,7 @@
           <p:cNvPr id="25" name="">
             <a:extLst xmlns:a="http://schemas.openxmlformats.org/drawingml/2006/main">
               <a:ext uri="{FF2B5EF4-FFF2-40B4-BE49-F238E27FC236}">
-                <a16:creationId xmlns:a16="http://schemas.microsoft.com/office/drawing/2014/main" id="{4A4504CE-63B9-4374-9154-629012753BBA}"/>
+                <a16:creationId xmlns:a16="http://schemas.microsoft.com/office/drawing/2014/main" id="{D0ED200B-8EBB-4040-8AFF-EB32C4BBB794}"/>
               </a:ext>
             </a:extLst>
           </p:cNvPr>
@@ -29071,7 +29060,7 @@
           <p:cNvPr id="26" name="">
             <a:extLst xmlns:a="http://schemas.openxmlformats.org/drawingml/2006/main">
               <a:ext uri="{FF2B5EF4-FFF2-40B4-BE49-F238E27FC236}">
-                <a16:creationId xmlns:a16="http://schemas.microsoft.com/office/drawing/2014/main" id="{21EB1152-1187-4C3A-BB45-402309F8AED9}"/>
+                <a16:creationId xmlns:a16="http://schemas.microsoft.com/office/drawing/2014/main" id="{12A1FFB8-7140-481D-995C-0EA6EC7D7521}"/>
               </a:ext>
             </a:extLst>
           </p:cNvPr>
@@ -29129,7 +29118,7 @@
           <p:cNvPr id="27" name="">
             <a:extLst xmlns:a="http://schemas.openxmlformats.org/drawingml/2006/main">
               <a:ext uri="{FF2B5EF4-FFF2-40B4-BE49-F238E27FC236}">
-                <a16:creationId xmlns:a16="http://schemas.microsoft.com/office/drawing/2014/main" id="{904E81DD-4902-4BB5-8E96-9FDA8B55CA2F}"/>
+                <a16:creationId xmlns:a16="http://schemas.microsoft.com/office/drawing/2014/main" id="{FE39EA40-AB60-4E7C-8AE4-FE0EA4D5795C}"/>
               </a:ext>
             </a:extLst>
           </p:cNvPr>
@@ -29187,7 +29176,7 @@
           <p:cNvPr id="28" name="">
             <a:extLst xmlns:a="http://schemas.openxmlformats.org/drawingml/2006/main">
               <a:ext uri="{FF2B5EF4-FFF2-40B4-BE49-F238E27FC236}">
-                <a16:creationId xmlns:a16="http://schemas.microsoft.com/office/drawing/2014/main" id="{35BB422D-536B-40DE-9574-EB15FB1038F3}"/>
+                <a16:creationId xmlns:a16="http://schemas.microsoft.com/office/drawing/2014/main" id="{2F339138-59CB-46E4-A657-1EAE48798B34}"/>
               </a:ext>
             </a:extLst>
           </p:cNvPr>
@@ -29220,7 +29209,7 @@
           <p:cNvPr id="29" name="">
             <a:extLst xmlns:a="http://schemas.openxmlformats.org/drawingml/2006/main">
               <a:ext uri="{FF2B5EF4-FFF2-40B4-BE49-F238E27FC236}">
-                <a16:creationId xmlns:a16="http://schemas.microsoft.com/office/drawing/2014/main" id="{C140714B-A856-4788-9374-6CED2B20C38E}"/>
+                <a16:creationId xmlns:a16="http://schemas.microsoft.com/office/drawing/2014/main" id="{4D5AA8E2-BC48-45EB-8D7B-BA0C7CF7C4CE}"/>
               </a:ext>
             </a:extLst>
           </p:cNvPr>
@@ -29278,7 +29267,7 @@
           <p:cNvPr id="30" name="">
             <a:extLst xmlns:a="http://schemas.openxmlformats.org/drawingml/2006/main">
               <a:ext uri="{FF2B5EF4-FFF2-40B4-BE49-F238E27FC236}">
-                <a16:creationId xmlns:a16="http://schemas.microsoft.com/office/drawing/2014/main" id="{E6D6BACF-72B4-484F-9C9A-C9233F2ABD89}"/>
+                <a16:creationId xmlns:a16="http://schemas.microsoft.com/office/drawing/2014/main" id="{EC0146B7-FD0C-47F6-BA03-157B645B72B1}"/>
               </a:ext>
             </a:extLst>
           </p:cNvPr>
@@ -29311,7 +29300,7 @@
           <p:cNvPr id="31" name="">
             <a:extLst xmlns:a="http://schemas.openxmlformats.org/drawingml/2006/main">
               <a:ext uri="{FF2B5EF4-FFF2-40B4-BE49-F238E27FC236}">
-                <a16:creationId xmlns:a16="http://schemas.microsoft.com/office/drawing/2014/main" id="{526DE245-D6CE-4BB0-8490-4E78BC135C95}"/>
+                <a16:creationId xmlns:a16="http://schemas.microsoft.com/office/drawing/2014/main" id="{3F605B1D-8A1A-4F15-90FC-994C3D06B1C9}"/>
               </a:ext>
             </a:extLst>
           </p:cNvPr>
@@ -29369,7 +29358,7 @@
           <p:cNvPr id="32" name="">
             <a:extLst xmlns:a="http://schemas.openxmlformats.org/drawingml/2006/main">
               <a:ext uri="{FF2B5EF4-FFF2-40B4-BE49-F238E27FC236}">
-                <a16:creationId xmlns:a16="http://schemas.microsoft.com/office/drawing/2014/main" id="{5F92234A-ACD3-4D22-9DA4-7511DA209910}"/>
+                <a16:creationId xmlns:a16="http://schemas.microsoft.com/office/drawing/2014/main" id="{9130A3A3-2A20-4D0A-BAB0-2C4D59F6DA68}"/>
               </a:ext>
             </a:extLst>
           </p:cNvPr>
@@ -29427,7 +29416,7 @@
           <p:cNvPr id="33" name="">
             <a:extLst xmlns:a="http://schemas.openxmlformats.org/drawingml/2006/main">
               <a:ext uri="{FF2B5EF4-FFF2-40B4-BE49-F238E27FC236}">
-                <a16:creationId xmlns:a16="http://schemas.microsoft.com/office/drawing/2014/main" id="{C864FC46-09AF-4B6E-8D69-4846A7197F01}"/>
+                <a16:creationId xmlns:a16="http://schemas.microsoft.com/office/drawing/2014/main" id="{F17EE206-31EB-4ED7-8C46-FD5A7ED72D5B}"/>
               </a:ext>
             </a:extLst>
           </p:cNvPr>
@@ -29485,7 +29474,7 @@
           <p:cNvPr id="34" name="">
             <a:extLst xmlns:a="http://schemas.openxmlformats.org/drawingml/2006/main">
               <a:ext uri="{FF2B5EF4-FFF2-40B4-BE49-F238E27FC236}">
-                <a16:creationId xmlns:a16="http://schemas.microsoft.com/office/drawing/2014/main" id="{5CA6A7A1-8EA8-4D7F-9564-464379BE5952}"/>
+                <a16:creationId xmlns:a16="http://schemas.microsoft.com/office/drawing/2014/main" id="{2CD8A895-8BBD-4971-BC15-0648E953C213}"/>
               </a:ext>
             </a:extLst>
           </p:cNvPr>
@@ -29518,7 +29507,7 @@
           <p:cNvPr id="35" name="">
             <a:extLst xmlns:a="http://schemas.openxmlformats.org/drawingml/2006/main">
               <a:ext uri="{FF2B5EF4-FFF2-40B4-BE49-F238E27FC236}">
-                <a16:creationId xmlns:a16="http://schemas.microsoft.com/office/drawing/2014/main" id="{F1BD5E95-C4B7-4981-8579-292657914352}"/>
+                <a16:creationId xmlns:a16="http://schemas.microsoft.com/office/drawing/2014/main" id="{00B7572F-AEE5-4E5F-9FF5-02E5FCF7BFE3}"/>
               </a:ext>
             </a:extLst>
           </p:cNvPr>
@@ -29576,7 +29565,7 @@
           <p:cNvPr id="36" name="">
             <a:extLst xmlns:a="http://schemas.openxmlformats.org/drawingml/2006/main">
               <a:ext uri="{FF2B5EF4-FFF2-40B4-BE49-F238E27FC236}">
-                <a16:creationId xmlns:a16="http://schemas.microsoft.com/office/drawing/2014/main" id="{3D31A283-8146-460C-9337-FB06857A429C}"/>
+                <a16:creationId xmlns:a16="http://schemas.microsoft.com/office/drawing/2014/main" id="{FEB6CA07-03E8-40F6-AC2B-65180B2A34E7}"/>
               </a:ext>
             </a:extLst>
           </p:cNvPr>
@@ -29609,7 +29598,7 @@
           <p:cNvPr id="37" name="">
             <a:extLst xmlns:a="http://schemas.openxmlformats.org/drawingml/2006/main">
               <a:ext uri="{FF2B5EF4-FFF2-40B4-BE49-F238E27FC236}">
-                <a16:creationId xmlns:a16="http://schemas.microsoft.com/office/drawing/2014/main" id="{CF78E76E-84D6-4D2A-8D48-D53B7D2FCE15}"/>
+                <a16:creationId xmlns:a16="http://schemas.microsoft.com/office/drawing/2014/main" id="{DD9FC380-DD6A-4A80-816C-6487530270D4}"/>
               </a:ext>
             </a:extLst>
           </p:cNvPr>
@@ -29667,7 +29656,7 @@
           <p:cNvPr id="38" name="">
             <a:extLst xmlns:a="http://schemas.openxmlformats.org/drawingml/2006/main">
               <a:ext uri="{FF2B5EF4-FFF2-40B4-BE49-F238E27FC236}">
-                <a16:creationId xmlns:a16="http://schemas.microsoft.com/office/drawing/2014/main" id="{C583CC2C-6B89-4114-8E24-DCF6ECCE3B67}"/>
+                <a16:creationId xmlns:a16="http://schemas.microsoft.com/office/drawing/2014/main" id="{ACB44245-7AEB-46B9-A5B6-21E1620FC144}"/>
               </a:ext>
             </a:extLst>
           </p:cNvPr>
@@ -29725,7 +29714,7 @@
           <p:cNvPr id="39" name="">
             <a:extLst xmlns:a="http://schemas.openxmlformats.org/drawingml/2006/main">
               <a:ext uri="{FF2B5EF4-FFF2-40B4-BE49-F238E27FC236}">
-                <a16:creationId xmlns:a16="http://schemas.microsoft.com/office/drawing/2014/main" id="{586FF002-1F6F-4F59-84DA-AF4AA39D0189}"/>
+                <a16:creationId xmlns:a16="http://schemas.microsoft.com/office/drawing/2014/main" id="{5DEE0C8B-D758-412D-81B4-4B78CFB25241}"/>
               </a:ext>
             </a:extLst>
           </p:cNvPr>
@@ -29783,7 +29772,7 @@
           <p:cNvPr id="40" name="">
             <a:extLst xmlns:a="http://schemas.openxmlformats.org/drawingml/2006/main">
               <a:ext uri="{FF2B5EF4-FFF2-40B4-BE49-F238E27FC236}">
-                <a16:creationId xmlns:a16="http://schemas.microsoft.com/office/drawing/2014/main" id="{4F5E800E-DA96-45AB-8D14-0351C2CA402C}"/>
+                <a16:creationId xmlns:a16="http://schemas.microsoft.com/office/drawing/2014/main" id="{23BAE97A-B2BF-4FF3-BBB0-5A4CB225BFCD}"/>
               </a:ext>
             </a:extLst>
           </p:cNvPr>
@@ -29816,7 +29805,7 @@
           <p:cNvPr id="41" name="">
             <a:extLst xmlns:a="http://schemas.openxmlformats.org/drawingml/2006/main">
               <a:ext uri="{FF2B5EF4-FFF2-40B4-BE49-F238E27FC236}">
-                <a16:creationId xmlns:a16="http://schemas.microsoft.com/office/drawing/2014/main" id="{DB81B55D-BD3F-4C98-A501-C754678E5881}"/>
+                <a16:creationId xmlns:a16="http://schemas.microsoft.com/office/drawing/2014/main" id="{9B143612-D24F-4CDC-947B-D15223C915D3}"/>
               </a:ext>
             </a:extLst>
           </p:cNvPr>
@@ -29874,7 +29863,7 @@
           <p:cNvPr id="42" name="">
             <a:extLst xmlns:a="http://schemas.openxmlformats.org/drawingml/2006/main">
               <a:ext uri="{FF2B5EF4-FFF2-40B4-BE49-F238E27FC236}">
-                <a16:creationId xmlns:a16="http://schemas.microsoft.com/office/drawing/2014/main" id="{18D663F7-5FAF-4457-B055-C9C76AC7A308}"/>
+                <a16:creationId xmlns:a16="http://schemas.microsoft.com/office/drawing/2014/main" id="{41EE910A-A1AA-4F08-8FEA-7AA4B3CA5641}"/>
               </a:ext>
             </a:extLst>
           </p:cNvPr>
@@ -29932,7 +29921,7 @@
           <p:cNvPr id="43" name="">
             <a:extLst xmlns:a="http://schemas.openxmlformats.org/drawingml/2006/main">
               <a:ext uri="{FF2B5EF4-FFF2-40B4-BE49-F238E27FC236}">
-                <a16:creationId xmlns:a16="http://schemas.microsoft.com/office/drawing/2014/main" id="{1167D94F-D7C3-4389-9CB6-BE059148CD3D}"/>
+                <a16:creationId xmlns:a16="http://schemas.microsoft.com/office/drawing/2014/main" id="{72E59C1A-9B71-4D93-B553-BF92001FCE02}"/>
               </a:ext>
             </a:extLst>
           </p:cNvPr>
@@ -29990,7 +29979,7 @@
           <p:cNvPr id="44" name="">
             <a:extLst xmlns:a="http://schemas.openxmlformats.org/drawingml/2006/main">
               <a:ext uri="{FF2B5EF4-FFF2-40B4-BE49-F238E27FC236}">
-                <a16:creationId xmlns:a16="http://schemas.microsoft.com/office/drawing/2014/main" id="{52F6D7EC-6F9B-4B72-87AA-2FDC79635338}"/>
+                <a16:creationId xmlns:a16="http://schemas.microsoft.com/office/drawing/2014/main" id="{0D598D75-D26A-4BF5-BAAC-5AC95AACCBAF}"/>
               </a:ext>
             </a:extLst>
           </p:cNvPr>
@@ -30048,7 +30037,7 @@
           <p:cNvPr id="45" name="">
             <a:extLst xmlns:a="http://schemas.openxmlformats.org/drawingml/2006/main">
               <a:ext uri="{FF2B5EF4-FFF2-40B4-BE49-F238E27FC236}">
-                <a16:creationId xmlns:a16="http://schemas.microsoft.com/office/drawing/2014/main" id="{894A1E0D-003F-4FF6-AD2E-B123FB906F36}"/>
+                <a16:creationId xmlns:a16="http://schemas.microsoft.com/office/drawing/2014/main" id="{CBA90CC1-F06F-4097-B346-C736A8F218AE}"/>
               </a:ext>
             </a:extLst>
           </p:cNvPr>
@@ -30081,7 +30070,7 @@
           <p:cNvPr id="46" name="">
             <a:extLst xmlns:a="http://schemas.openxmlformats.org/drawingml/2006/main">
               <a:ext uri="{FF2B5EF4-FFF2-40B4-BE49-F238E27FC236}">
-                <a16:creationId xmlns:a16="http://schemas.microsoft.com/office/drawing/2014/main" id="{A8C413B3-1A9F-4966-B956-66056807A827}"/>
+                <a16:creationId xmlns:a16="http://schemas.microsoft.com/office/drawing/2014/main" id="{8031B2C3-4133-4ECE-9ECE-BCD5B29FD0D0}"/>
               </a:ext>
             </a:extLst>
           </p:cNvPr>
@@ -30139,7 +30128,7 @@
                 <a:latin typeface="Microsoft YaHei"/>
                 <a:ea typeface="Microsoft YaHei"/>
                 <a:cs typeface="Microsoft YaHei"/>
-                <a:hlinkClick xmlns:r="http://schemas.openxmlformats.org/officeDocument/2006/relationships" r:id="Red4f095455fc42d3"/>
+                <a:hlinkClick xmlns:r="http://schemas.openxmlformats.org/officeDocument/2006/relationships" r:id="R688a32556ece4f57"/>
               </a:rPr>
               <a:t>码道定价</a:t>
             </a:r>
@@ -30151,7 +30140,7 @@
                 <a:latin typeface="Microsoft YaHei"/>
                 <a:ea typeface="Microsoft YaHei"/>
                 <a:cs typeface="Microsoft YaHei"/>
-                <a:hlinkClick xmlns:r="http://schemas.openxmlformats.org/officeDocument/2006/relationships" r:id="Rb6f6103477174c50"/>
+                <a:hlinkClick xmlns:r="http://schemas.openxmlformats.org/officeDocument/2006/relationships" r:id="R1e73ce69de9e4973"/>
               </a:rPr>
               <a:t> · Qoder Pricing</a:t>
             </a:r>
@@ -30163,7 +30152,7 @@
                 <a:latin typeface="Microsoft YaHei"/>
                 <a:ea typeface="Microsoft YaHei"/>
                 <a:cs typeface="Microsoft YaHei"/>
-                <a:hlinkClick xmlns:r="http://schemas.openxmlformats.org/officeDocument/2006/relationships" r:id="R549b18c43e154190"/>
+                <a:hlinkClick xmlns:r="http://schemas.openxmlformats.org/officeDocument/2006/relationships" r:id="R715a8cfb847f4b81"/>
               </a:rPr>
               <a:t> · Cursor Pricing</a:t>
             </a:r>
@@ -30175,7 +30164,7 @@
                 <a:latin typeface="Microsoft YaHei"/>
                 <a:ea typeface="Microsoft YaHei"/>
                 <a:cs typeface="Microsoft YaHei"/>
-                <a:hlinkClick xmlns:r="http://schemas.openxmlformats.org/officeDocument/2006/relationships" r:id="Rd022216b1d6f45b4"/>
+                <a:hlinkClick xmlns:r="http://schemas.openxmlformats.org/officeDocument/2006/relationships" r:id="R7b76840ad8204178"/>
               </a:rPr>
               <a:t> · Trae Pricing</a:t>
             </a:r>
@@ -30187,7 +30176,7 @@
           <p:cNvPr id="47" name="">
             <a:extLst xmlns:a="http://schemas.openxmlformats.org/drawingml/2006/main">
               <a:ext uri="{FF2B5EF4-FFF2-40B4-BE49-F238E27FC236}">
-                <a16:creationId xmlns:a16="http://schemas.microsoft.com/office/drawing/2014/main" id="{2A9335FD-FDF2-4F3E-958A-5C50EB04193C}"/>
+                <a16:creationId xmlns:a16="http://schemas.microsoft.com/office/drawing/2014/main" id="{6C6C628D-5B89-4D29-B76E-7401339A1180}"/>
               </a:ext>
             </a:extLst>
           </p:cNvPr>
@@ -30243,7 +30232,7 @@
     </p:spTree>
     <p:extLst>
       <p:ext uri="{BB962C8B-B14F-4D97-AF65-F5344CB8AC3E}">
-        <p14:creationId xmlns:p14="http://schemas.microsoft.com/office/powerpoint/2010/main" val="1694557629"/>
+        <p14:creationId xmlns:p14="http://schemas.microsoft.com/office/powerpoint/2010/main" val="1645562652"/>
       </p:ext>
     </p:extLst>
   </p:cSld>
@@ -30274,7 +30263,7 @@
           <p:cNvPr id="36" name="">
             <a:extLst xmlns:a="http://schemas.openxmlformats.org/drawingml/2006/main">
               <a:ext uri="{FF2B5EF4-FFF2-40B4-BE49-F238E27FC236}">
-                <a16:creationId xmlns:a16="http://schemas.microsoft.com/office/drawing/2014/main" id="{4313E364-3E3E-4B4C-BD42-D27C95E75755}"/>
+                <a16:creationId xmlns:a16="http://schemas.microsoft.com/office/drawing/2014/main" id="{17CB86BE-2DB5-41C7-9115-E6B805EA7B17}"/>
               </a:ext>
             </a:extLst>
           </p:cNvPr>
@@ -30307,7 +30296,7 @@
           <p:cNvPr id="2" name="">
             <a:extLst xmlns:a="http://schemas.openxmlformats.org/drawingml/2006/main">
               <a:ext uri="{FF2B5EF4-FFF2-40B4-BE49-F238E27FC236}">
-                <a16:creationId xmlns:a16="http://schemas.microsoft.com/office/drawing/2014/main" id="{D65FBB2C-5861-4282-A330-499295E19FD1}"/>
+                <a16:creationId xmlns:a16="http://schemas.microsoft.com/office/drawing/2014/main" id="{C90C3760-BEDC-4CFE-8E4C-B27BDAC91456}"/>
               </a:ext>
             </a:extLst>
           </p:cNvPr>
@@ -30365,7 +30354,7 @@
           <p:cNvPr id="3" name="">
             <a:extLst xmlns:a="http://schemas.openxmlformats.org/drawingml/2006/main">
               <a:ext uri="{FF2B5EF4-FFF2-40B4-BE49-F238E27FC236}">
-                <a16:creationId xmlns:a16="http://schemas.microsoft.com/office/drawing/2014/main" id="{CCA58689-0261-4FC5-8CE3-5257F8B9E133}"/>
+                <a16:creationId xmlns:a16="http://schemas.microsoft.com/office/drawing/2014/main" id="{254E4B15-2106-4CCE-A463-A36B8D28DDAA}"/>
               </a:ext>
             </a:extLst>
           </p:cNvPr>
@@ -30423,7 +30412,7 @@
           <p:cNvPr id="4" name="">
             <a:extLst xmlns:a="http://schemas.openxmlformats.org/drawingml/2006/main">
               <a:ext uri="{FF2B5EF4-FFF2-40B4-BE49-F238E27FC236}">
-                <a16:creationId xmlns:a16="http://schemas.microsoft.com/office/drawing/2014/main" id="{322F9300-DF10-4C9A-86CA-1DD6293BCAA6}"/>
+                <a16:creationId xmlns:a16="http://schemas.microsoft.com/office/drawing/2014/main" id="{A13801D8-1739-472E-BC8D-E17B611607C3}"/>
               </a:ext>
             </a:extLst>
           </p:cNvPr>
@@ -30460,7 +30449,7 @@
           <p:nvPr/>
         </p:nvPicPr>
         <p:blipFill>
-          <a:blip xmlns:r="http://schemas.openxmlformats.org/officeDocument/2006/relationships" xmlns:a="http://schemas.openxmlformats.org/drawingml/2006/main" r:embed="R4d4f7e4b88f5470b"/>
+          <a:blip xmlns:r="http://schemas.openxmlformats.org/officeDocument/2006/relationships" xmlns:a="http://schemas.openxmlformats.org/drawingml/2006/main" r:embed="Rd76c3cafba074716"/>
           <a:stretch xmlns:a="http://schemas.openxmlformats.org/drawingml/2006/main"/>
         </p:blipFill>
         <p:spPr>
@@ -30478,7 +30467,7 @@
           <p:cNvPr id="6" name="">
             <a:extLst xmlns:a="http://schemas.openxmlformats.org/drawingml/2006/main">
               <a:ext uri="{FF2B5EF4-FFF2-40B4-BE49-F238E27FC236}">
-                <a16:creationId xmlns:a16="http://schemas.microsoft.com/office/drawing/2014/main" id="{C2C30AE3-E958-46A4-A227-30D1F7B41D82}"/>
+                <a16:creationId xmlns:a16="http://schemas.microsoft.com/office/drawing/2014/main" id="{A44D1899-1E0E-4492-8274-B4DEEF55619D}"/>
               </a:ext>
             </a:extLst>
           </p:cNvPr>
@@ -30536,7 +30525,7 @@
           <p:cNvPr id="7" name="">
             <a:extLst xmlns:a="http://schemas.openxmlformats.org/drawingml/2006/main">
               <a:ext uri="{FF2B5EF4-FFF2-40B4-BE49-F238E27FC236}">
-                <a16:creationId xmlns:a16="http://schemas.microsoft.com/office/drawing/2014/main" id="{D447C96B-1E44-4817-9D0F-E46913CFD9E6}"/>
+                <a16:creationId xmlns:a16="http://schemas.microsoft.com/office/drawing/2014/main" id="{1032BF65-31C3-49EE-9A1E-5BAB4477E574}"/>
               </a:ext>
             </a:extLst>
           </p:cNvPr>
@@ -30594,7 +30583,7 @@
           <p:cNvPr id="8" name="">
             <a:extLst xmlns:a="http://schemas.openxmlformats.org/drawingml/2006/main">
               <a:ext uri="{FF2B5EF4-FFF2-40B4-BE49-F238E27FC236}">
-                <a16:creationId xmlns:a16="http://schemas.microsoft.com/office/drawing/2014/main" id="{DFC6C2C0-04AB-4ED2-8F6C-3F7DE6556513}"/>
+                <a16:creationId xmlns:a16="http://schemas.microsoft.com/office/drawing/2014/main" id="{6E939CB8-58DB-4EDA-B4BB-4DC09349ACA5}"/>
               </a:ext>
             </a:extLst>
           </p:cNvPr>
@@ -30652,7 +30641,7 @@
           <p:cNvPr id="9" name="">
             <a:extLst xmlns:a="http://schemas.openxmlformats.org/drawingml/2006/main">
               <a:ext uri="{FF2B5EF4-FFF2-40B4-BE49-F238E27FC236}">
-                <a16:creationId xmlns:a16="http://schemas.microsoft.com/office/drawing/2014/main" id="{CB1AEEDA-5B5A-41B9-BE9B-0E46C81E6721}"/>
+                <a16:creationId xmlns:a16="http://schemas.microsoft.com/office/drawing/2014/main" id="{D96FEF50-5241-4475-A652-686047D06002}"/>
               </a:ext>
             </a:extLst>
           </p:cNvPr>
@@ -30685,7 +30674,7 @@
           <p:cNvPr id="10" name="">
             <a:extLst xmlns:a="http://schemas.openxmlformats.org/drawingml/2006/main">
               <a:ext uri="{FF2B5EF4-FFF2-40B4-BE49-F238E27FC236}">
-                <a16:creationId xmlns:a16="http://schemas.microsoft.com/office/drawing/2014/main" id="{FA97B286-8678-4492-8665-175CAE6C9146}"/>
+                <a16:creationId xmlns:a16="http://schemas.microsoft.com/office/drawing/2014/main" id="{539A887B-23F4-4B77-A395-A02F610D1474}"/>
               </a:ext>
             </a:extLst>
           </p:cNvPr>
@@ -30743,7 +30732,7 @@
           <p:cNvPr id="11" name="">
             <a:extLst xmlns:a="http://schemas.openxmlformats.org/drawingml/2006/main">
               <a:ext uri="{FF2B5EF4-FFF2-40B4-BE49-F238E27FC236}">
-                <a16:creationId xmlns:a16="http://schemas.microsoft.com/office/drawing/2014/main" id="{C62364B4-7ED4-4DDE-B543-5D81CDFEB3CB}"/>
+                <a16:creationId xmlns:a16="http://schemas.microsoft.com/office/drawing/2014/main" id="{6A7C4F19-E66F-4F15-B8AF-DAA5360DEC2C}"/>
               </a:ext>
             </a:extLst>
           </p:cNvPr>
@@ -30801,7 +30790,7 @@
           <p:cNvPr id="12" name="">
             <a:extLst xmlns:a="http://schemas.openxmlformats.org/drawingml/2006/main">
               <a:ext uri="{FF2B5EF4-FFF2-40B4-BE49-F238E27FC236}">
-                <a16:creationId xmlns:a16="http://schemas.microsoft.com/office/drawing/2014/main" id="{135A3564-7FA2-4205-944D-75DF4F351B12}"/>
+                <a16:creationId xmlns:a16="http://schemas.microsoft.com/office/drawing/2014/main" id="{EE8ABCFB-7DC5-41EC-B328-83FB818ADE28}"/>
               </a:ext>
             </a:extLst>
           </p:cNvPr>
@@ -30859,7 +30848,7 @@
           <p:cNvPr id="13" name="">
             <a:extLst xmlns:a="http://schemas.openxmlformats.org/drawingml/2006/main">
               <a:ext uri="{FF2B5EF4-FFF2-40B4-BE49-F238E27FC236}">
-                <a16:creationId xmlns:a16="http://schemas.microsoft.com/office/drawing/2014/main" id="{7D3BD069-DAED-4FB1-A5B9-4EB016BB0CF4}"/>
+                <a16:creationId xmlns:a16="http://schemas.microsoft.com/office/drawing/2014/main" id="{EF867D93-0A99-4443-A634-75C82B84FDFA}"/>
               </a:ext>
             </a:extLst>
           </p:cNvPr>
@@ -30892,7 +30881,7 @@
           <p:cNvPr id="14" name="">
             <a:extLst xmlns:a="http://schemas.openxmlformats.org/drawingml/2006/main">
               <a:ext uri="{FF2B5EF4-FFF2-40B4-BE49-F238E27FC236}">
-                <a16:creationId xmlns:a16="http://schemas.microsoft.com/office/drawing/2014/main" id="{2D84D487-38E1-4CFE-9ABE-A0842670488B}"/>
+                <a16:creationId xmlns:a16="http://schemas.microsoft.com/office/drawing/2014/main" id="{D7D8D2B4-E95E-4B60-A540-D21EAC978B02}"/>
               </a:ext>
             </a:extLst>
           </p:cNvPr>
@@ -30950,7 +30939,7 @@
           <p:cNvPr id="15" name="">
             <a:extLst xmlns:a="http://schemas.openxmlformats.org/drawingml/2006/main">
               <a:ext uri="{FF2B5EF4-FFF2-40B4-BE49-F238E27FC236}">
-                <a16:creationId xmlns:a16="http://schemas.microsoft.com/office/drawing/2014/main" id="{E8B46A0C-FCCF-4A36-A0E3-C3F5662CA322}"/>
+                <a16:creationId xmlns:a16="http://schemas.microsoft.com/office/drawing/2014/main" id="{D994C622-9A25-4A0E-8F81-C088D5E20F3D}"/>
               </a:ext>
             </a:extLst>
           </p:cNvPr>
@@ -31008,7 +30997,7 @@
           <p:cNvPr id="16" name="">
             <a:extLst xmlns:a="http://schemas.openxmlformats.org/drawingml/2006/main">
               <a:ext uri="{FF2B5EF4-FFF2-40B4-BE49-F238E27FC236}">
-                <a16:creationId xmlns:a16="http://schemas.microsoft.com/office/drawing/2014/main" id="{B1800F14-23C5-4303-A521-9F531DE45D71}"/>
+                <a16:creationId xmlns:a16="http://schemas.microsoft.com/office/drawing/2014/main" id="{DFCD273C-B00B-45D1-836D-FFE44DB9E6D3}"/>
               </a:ext>
             </a:extLst>
           </p:cNvPr>
@@ -31066,7 +31055,7 @@
           <p:cNvPr id="17" name="">
             <a:extLst xmlns:a="http://schemas.openxmlformats.org/drawingml/2006/main">
               <a:ext uri="{FF2B5EF4-FFF2-40B4-BE49-F238E27FC236}">
-                <a16:creationId xmlns:a16="http://schemas.microsoft.com/office/drawing/2014/main" id="{3BFEE09A-C709-4C2F-9CD4-BE7430D5378C}"/>
+                <a16:creationId xmlns:a16="http://schemas.microsoft.com/office/drawing/2014/main" id="{B72BABF8-E2FB-4188-B03A-C2B80612AA20}"/>
               </a:ext>
             </a:extLst>
           </p:cNvPr>
@@ -31099,7 +31088,7 @@
           <p:cNvPr id="18" name="">
             <a:extLst xmlns:a="http://schemas.openxmlformats.org/drawingml/2006/main">
               <a:ext uri="{FF2B5EF4-FFF2-40B4-BE49-F238E27FC236}">
-                <a16:creationId xmlns:a16="http://schemas.microsoft.com/office/drawing/2014/main" id="{BCADC1B5-5585-4BD5-B0E1-41815ECC7C32}"/>
+                <a16:creationId xmlns:a16="http://schemas.microsoft.com/office/drawing/2014/main" id="{E14985A9-961F-48D3-BC0F-EB96BDB5E2C1}"/>
               </a:ext>
             </a:extLst>
           </p:cNvPr>
@@ -31157,7 +31146,7 @@
           <p:cNvPr id="19" name="">
             <a:extLst xmlns:a="http://schemas.openxmlformats.org/drawingml/2006/main">
               <a:ext uri="{FF2B5EF4-FFF2-40B4-BE49-F238E27FC236}">
-                <a16:creationId xmlns:a16="http://schemas.microsoft.com/office/drawing/2014/main" id="{758D2333-C7C9-4453-8871-A727A3EF3BC3}"/>
+                <a16:creationId xmlns:a16="http://schemas.microsoft.com/office/drawing/2014/main" id="{9B0213F4-276C-47A7-8C73-B5F0B780ABAF}"/>
               </a:ext>
             </a:extLst>
           </p:cNvPr>
@@ -31215,7 +31204,7 @@
           <p:cNvPr id="20" name="">
             <a:extLst xmlns:a="http://schemas.openxmlformats.org/drawingml/2006/main">
               <a:ext uri="{FF2B5EF4-FFF2-40B4-BE49-F238E27FC236}">
-                <a16:creationId xmlns:a16="http://schemas.microsoft.com/office/drawing/2014/main" id="{64838AD0-B868-4202-A782-0A1DA23A26C1}"/>
+                <a16:creationId xmlns:a16="http://schemas.microsoft.com/office/drawing/2014/main" id="{561868D0-6E14-4279-9E63-8A47C4882735}"/>
               </a:ext>
             </a:extLst>
           </p:cNvPr>
@@ -31273,7 +31262,7 @@
           <p:cNvPr id="21" name="">
             <a:extLst xmlns:a="http://schemas.openxmlformats.org/drawingml/2006/main">
               <a:ext uri="{FF2B5EF4-FFF2-40B4-BE49-F238E27FC236}">
-                <a16:creationId xmlns:a16="http://schemas.microsoft.com/office/drawing/2014/main" id="{ED48469F-DAAE-44CB-A418-9C0A9C496C8F}"/>
+                <a16:creationId xmlns:a16="http://schemas.microsoft.com/office/drawing/2014/main" id="{457B50DD-3C3D-4113-8B90-71F6E07FCAC0}"/>
               </a:ext>
             </a:extLst>
           </p:cNvPr>
@@ -31306,7 +31295,7 @@
           <p:cNvPr id="22" name="">
             <a:extLst xmlns:a="http://schemas.openxmlformats.org/drawingml/2006/main">
               <a:ext uri="{FF2B5EF4-FFF2-40B4-BE49-F238E27FC236}">
-                <a16:creationId xmlns:a16="http://schemas.microsoft.com/office/drawing/2014/main" id="{57A15656-D6EA-491D-9088-F0EC980614C2}"/>
+                <a16:creationId xmlns:a16="http://schemas.microsoft.com/office/drawing/2014/main" id="{052A6DE9-1452-44E1-8603-594762727874}"/>
               </a:ext>
             </a:extLst>
           </p:cNvPr>
@@ -31364,7 +31353,7 @@
           <p:cNvPr id="23" name="">
             <a:extLst xmlns:a="http://schemas.openxmlformats.org/drawingml/2006/main">
               <a:ext uri="{FF2B5EF4-FFF2-40B4-BE49-F238E27FC236}">
-                <a16:creationId xmlns:a16="http://schemas.microsoft.com/office/drawing/2014/main" id="{7C75331C-404E-4EFF-850B-526C2C4A0FAD}"/>
+                <a16:creationId xmlns:a16="http://schemas.microsoft.com/office/drawing/2014/main" id="{9461DE9F-BA73-4685-AB90-8B707537D5EB}"/>
               </a:ext>
             </a:extLst>
           </p:cNvPr>
@@ -31422,7 +31411,7 @@
           <p:cNvPr id="24" name="">
             <a:extLst xmlns:a="http://schemas.openxmlformats.org/drawingml/2006/main">
               <a:ext uri="{FF2B5EF4-FFF2-40B4-BE49-F238E27FC236}">
-                <a16:creationId xmlns:a16="http://schemas.microsoft.com/office/drawing/2014/main" id="{7AD6711E-ABAF-42BC-B4C1-3D340000CCE0}"/>
+                <a16:creationId xmlns:a16="http://schemas.microsoft.com/office/drawing/2014/main" id="{04D642C4-76A8-41DA-A823-69B79360404B}"/>
               </a:ext>
             </a:extLst>
           </p:cNvPr>
@@ -31480,7 +31469,7 @@
           <p:cNvPr id="25" name="">
             <a:extLst xmlns:a="http://schemas.openxmlformats.org/drawingml/2006/main">
               <a:ext uri="{FF2B5EF4-FFF2-40B4-BE49-F238E27FC236}">
-                <a16:creationId xmlns:a16="http://schemas.microsoft.com/office/drawing/2014/main" id="{B19B19AB-00EA-4B16-8936-707DB8A87BDE}"/>
+                <a16:creationId xmlns:a16="http://schemas.microsoft.com/office/drawing/2014/main" id="{A517A464-E5FE-4BCE-94E7-E82F735F7FFE}"/>
               </a:ext>
             </a:extLst>
           </p:cNvPr>
@@ -31513,7 +31502,7 @@
           <p:cNvPr id="26" name="">
             <a:extLst xmlns:a="http://schemas.openxmlformats.org/drawingml/2006/main">
               <a:ext uri="{FF2B5EF4-FFF2-40B4-BE49-F238E27FC236}">
-                <a16:creationId xmlns:a16="http://schemas.microsoft.com/office/drawing/2014/main" id="{4F48924F-9778-49DA-960C-71A2F9B9A3EE}"/>
+                <a16:creationId xmlns:a16="http://schemas.microsoft.com/office/drawing/2014/main" id="{40DB945F-07E7-490E-B974-20D0C1F4D717}"/>
               </a:ext>
             </a:extLst>
           </p:cNvPr>
@@ -31571,7 +31560,7 @@
           <p:cNvPr id="27" name="">
             <a:extLst xmlns:a="http://schemas.openxmlformats.org/drawingml/2006/main">
               <a:ext uri="{FF2B5EF4-FFF2-40B4-BE49-F238E27FC236}">
-                <a16:creationId xmlns:a16="http://schemas.microsoft.com/office/drawing/2014/main" id="{7C8B2415-9F2A-428D-A94B-6F3036CE2F88}"/>
+                <a16:creationId xmlns:a16="http://schemas.microsoft.com/office/drawing/2014/main" id="{C6173646-57C5-4A18-B179-4409649CC774}"/>
               </a:ext>
             </a:extLst>
           </p:cNvPr>
@@ -31604,7 +31593,7 @@
           <p:cNvPr id="28" name="">
             <a:extLst xmlns:a="http://schemas.openxmlformats.org/drawingml/2006/main">
               <a:ext uri="{FF2B5EF4-FFF2-40B4-BE49-F238E27FC236}">
-                <a16:creationId xmlns:a16="http://schemas.microsoft.com/office/drawing/2014/main" id="{AD990480-F2B6-4859-8AAF-615FA8996755}"/>
+                <a16:creationId xmlns:a16="http://schemas.microsoft.com/office/drawing/2014/main" id="{F56CEE02-EA8F-4926-ADA2-238B6CBA2092}"/>
               </a:ext>
             </a:extLst>
           </p:cNvPr>
@@ -31662,7 +31651,7 @@
           <p:cNvPr id="29" name="">
             <a:extLst xmlns:a="http://schemas.openxmlformats.org/drawingml/2006/main">
               <a:ext uri="{FF2B5EF4-FFF2-40B4-BE49-F238E27FC236}">
-                <a16:creationId xmlns:a16="http://schemas.microsoft.com/office/drawing/2014/main" id="{9FB8C859-68DD-4347-ACDA-6843A16AFCC9}"/>
+                <a16:creationId xmlns:a16="http://schemas.microsoft.com/office/drawing/2014/main" id="{974BD163-0B4A-401A-A972-5E52DD0E0B42}"/>
               </a:ext>
             </a:extLst>
           </p:cNvPr>
@@ -31695,7 +31684,7 @@
           <p:cNvPr id="30" name="">
             <a:extLst xmlns:a="http://schemas.openxmlformats.org/drawingml/2006/main">
               <a:ext uri="{FF2B5EF4-FFF2-40B4-BE49-F238E27FC236}">
-                <a16:creationId xmlns:a16="http://schemas.microsoft.com/office/drawing/2014/main" id="{4E1BFD06-8B9A-46DD-A376-BBCFE75110C9}"/>
+                <a16:creationId xmlns:a16="http://schemas.microsoft.com/office/drawing/2014/main" id="{D84704E0-E007-454C-9289-571F4BC265B3}"/>
               </a:ext>
             </a:extLst>
           </p:cNvPr>
@@ -31753,7 +31742,7 @@
           <p:cNvPr id="31" name="">
             <a:extLst xmlns:a="http://schemas.openxmlformats.org/drawingml/2006/main">
               <a:ext uri="{FF2B5EF4-FFF2-40B4-BE49-F238E27FC236}">
-                <a16:creationId xmlns:a16="http://schemas.microsoft.com/office/drawing/2014/main" id="{2E8113F1-4CAD-48FD-8F15-2D44E4EE0DBF}"/>
+                <a16:creationId xmlns:a16="http://schemas.microsoft.com/office/drawing/2014/main" id="{A501D509-DF9F-4FB4-ACE1-1D10FB47761D}"/>
               </a:ext>
             </a:extLst>
           </p:cNvPr>
@@ -31786,7 +31775,7 @@
           <p:cNvPr id="32" name="">
             <a:extLst xmlns:a="http://schemas.openxmlformats.org/drawingml/2006/main">
               <a:ext uri="{FF2B5EF4-FFF2-40B4-BE49-F238E27FC236}">
-                <a16:creationId xmlns:a16="http://schemas.microsoft.com/office/drawing/2014/main" id="{0811E594-71A8-4AFC-88EF-6D2BDFBFB2E2}"/>
+                <a16:creationId xmlns:a16="http://schemas.microsoft.com/office/drawing/2014/main" id="{9FB2F051-214C-4A61-A550-43EE5D5325C6}"/>
               </a:ext>
             </a:extLst>
           </p:cNvPr>
@@ -31844,7 +31833,7 @@
           <p:cNvPr id="33" name="">
             <a:extLst xmlns:a="http://schemas.openxmlformats.org/drawingml/2006/main">
               <a:ext uri="{FF2B5EF4-FFF2-40B4-BE49-F238E27FC236}">
-                <a16:creationId xmlns:a16="http://schemas.microsoft.com/office/drawing/2014/main" id="{C95B7FE3-E4D7-449C-B3E2-58F7A9DE913C}"/>
+                <a16:creationId xmlns:a16="http://schemas.microsoft.com/office/drawing/2014/main" id="{800B1418-5630-4886-9EE8-69097E0CC81C}"/>
               </a:ext>
             </a:extLst>
           </p:cNvPr>
@@ -31877,7 +31866,7 @@
           <p:cNvPr id="34" name="">
             <a:extLst xmlns:a="http://schemas.openxmlformats.org/drawingml/2006/main">
               <a:ext uri="{FF2B5EF4-FFF2-40B4-BE49-F238E27FC236}">
-                <a16:creationId xmlns:a16="http://schemas.microsoft.com/office/drawing/2014/main" id="{0298A6F2-070E-4313-A144-B5FCB75EE0B9}"/>
+                <a16:creationId xmlns:a16="http://schemas.microsoft.com/office/drawing/2014/main" id="{45AA596F-FDBB-4ED3-A44D-69CCAB0EF2FF}"/>
               </a:ext>
             </a:extLst>
           </p:cNvPr>
@@ -31935,7 +31924,7 @@
                 <a:latin typeface="Microsoft YaHei"/>
                 <a:ea typeface="Microsoft YaHei"/>
                 <a:cs typeface="Microsoft YaHei"/>
-                <a:hlinkClick xmlns:r="http://schemas.openxmlformats.org/officeDocument/2006/relationships" r:id="R2335f04372784c17"/>
+                <a:hlinkClick xmlns:r="http://schemas.openxmlformats.org/officeDocument/2006/relationships" r:id="R2572e0e819654167"/>
               </a:rPr>
               <a:t>Qoder Knowledge Engine</a:t>
             </a:r>
@@ -31947,7 +31936,7 @@
                 <a:latin typeface="Microsoft YaHei"/>
                 <a:ea typeface="Microsoft YaHei"/>
                 <a:cs typeface="Microsoft YaHei"/>
-                <a:hlinkClick xmlns:r="http://schemas.openxmlformats.org/officeDocument/2006/relationships" r:id="Rbad82ff8f6064f26"/>
+                <a:hlinkClick xmlns:r="http://schemas.openxmlformats.org/officeDocument/2006/relationships" r:id="R23d87277e33c4678"/>
               </a:rPr>
               <a:t> · Qoder 技术博客</a:t>
             </a:r>
@@ -31959,7 +31948,7 @@
                 <a:latin typeface="Microsoft YaHei"/>
                 <a:ea typeface="Microsoft YaHei"/>
                 <a:cs typeface="Microsoft YaHei"/>
-                <a:hlinkClick xmlns:r="http://schemas.openxmlformats.org/officeDocument/2006/relationships" r:id="R8550f65cdef64d37"/>
+                <a:hlinkClick xmlns:r="http://schemas.openxmlformats.org/officeDocument/2006/relationships" r:id="R9fd1ce294a214ed0"/>
               </a:rPr>
               <a:t> · 码道 Codebase</a:t>
             </a:r>
@@ -31971,7 +31960,7 @@
           <p:cNvPr id="35" name="">
             <a:extLst xmlns:a="http://schemas.openxmlformats.org/drawingml/2006/main">
               <a:ext uri="{FF2B5EF4-FFF2-40B4-BE49-F238E27FC236}">
-                <a16:creationId xmlns:a16="http://schemas.microsoft.com/office/drawing/2014/main" id="{73CBF294-383C-4587-AAD2-FB8C75FDEBF1}"/>
+                <a16:creationId xmlns:a16="http://schemas.microsoft.com/office/drawing/2014/main" id="{1C448146-C7C4-48B4-96EC-9243E6A3DCB4}"/>
               </a:ext>
             </a:extLst>
           </p:cNvPr>
@@ -32027,7 +32016,7 @@
     </p:spTree>
     <p:extLst>
       <p:ext uri="{BB962C8B-B14F-4D97-AF65-F5344CB8AC3E}">
-        <p14:creationId xmlns:p14="http://schemas.microsoft.com/office/powerpoint/2010/main" val="1042109054"/>
+        <p14:creationId xmlns:p14="http://schemas.microsoft.com/office/powerpoint/2010/main" val="1671235583"/>
       </p:ext>
     </p:extLst>
   </p:cSld>
@@ -32058,7 +32047,7 @@
           <p:cNvPr id="76" name="">
             <a:extLst xmlns:a="http://schemas.openxmlformats.org/drawingml/2006/main">
               <a:ext uri="{FF2B5EF4-FFF2-40B4-BE49-F238E27FC236}">
-                <a16:creationId xmlns:a16="http://schemas.microsoft.com/office/drawing/2014/main" id="{4CDED244-D804-438F-B2AB-F991607DA109}"/>
+                <a16:creationId xmlns:a16="http://schemas.microsoft.com/office/drawing/2014/main" id="{2578E023-906E-4160-A539-4776B7E6D326}"/>
               </a:ext>
             </a:extLst>
           </p:cNvPr>
@@ -32091,7 +32080,7 @@
           <p:cNvPr id="2" name="">
             <a:extLst xmlns:a="http://schemas.openxmlformats.org/drawingml/2006/main">
               <a:ext uri="{FF2B5EF4-FFF2-40B4-BE49-F238E27FC236}">
-                <a16:creationId xmlns:a16="http://schemas.microsoft.com/office/drawing/2014/main" id="{AD802138-1712-4B41-8E76-3D00B1658B59}"/>
+                <a16:creationId xmlns:a16="http://schemas.microsoft.com/office/drawing/2014/main" id="{A6B5125F-FCF3-4680-9B1D-3F23804D2787}"/>
               </a:ext>
             </a:extLst>
           </p:cNvPr>
@@ -32149,7 +32138,7 @@
           <p:cNvPr id="3" name="">
             <a:extLst xmlns:a="http://schemas.openxmlformats.org/drawingml/2006/main">
               <a:ext uri="{FF2B5EF4-FFF2-40B4-BE49-F238E27FC236}">
-                <a16:creationId xmlns:a16="http://schemas.microsoft.com/office/drawing/2014/main" id="{90300837-4F5B-4492-9958-826998254C68}"/>
+                <a16:creationId xmlns:a16="http://schemas.microsoft.com/office/drawing/2014/main" id="{89491CB8-1F37-4D73-9DA6-8F4F2D9EC890}"/>
               </a:ext>
             </a:extLst>
           </p:cNvPr>
@@ -32207,7 +32196,7 @@
           <p:cNvPr id="4" name="">
             <a:extLst xmlns:a="http://schemas.openxmlformats.org/drawingml/2006/main">
               <a:ext uri="{FF2B5EF4-FFF2-40B4-BE49-F238E27FC236}">
-                <a16:creationId xmlns:a16="http://schemas.microsoft.com/office/drawing/2014/main" id="{7A03C8F1-592E-48C0-A503-D6565FEA7728}"/>
+                <a16:creationId xmlns:a16="http://schemas.microsoft.com/office/drawing/2014/main" id="{70B626B2-6E18-46A7-8970-CAAE9A5D7031}"/>
               </a:ext>
             </a:extLst>
           </p:cNvPr>
@@ -32244,7 +32233,7 @@
           <p:nvPr/>
         </p:nvPicPr>
         <p:blipFill>
-          <a:blip xmlns:r="http://schemas.openxmlformats.org/officeDocument/2006/relationships" xmlns:a="http://schemas.openxmlformats.org/drawingml/2006/main" r:embed="R4851279524f24022"/>
+          <a:blip xmlns:r="http://schemas.openxmlformats.org/officeDocument/2006/relationships" xmlns:a="http://schemas.openxmlformats.org/drawingml/2006/main" r:embed="Re87750c36dd44213"/>
           <a:stretch xmlns:a="http://schemas.openxmlformats.org/drawingml/2006/main"/>
         </p:blipFill>
         <p:spPr>
@@ -32262,7 +32251,7 @@
           <p:cNvPr id="6" name="">
             <a:extLst xmlns:a="http://schemas.openxmlformats.org/drawingml/2006/main">
               <a:ext uri="{FF2B5EF4-FFF2-40B4-BE49-F238E27FC236}">
-                <a16:creationId xmlns:a16="http://schemas.microsoft.com/office/drawing/2014/main" id="{9013073C-A442-453B-A2A1-481DDB8F414B}"/>
+                <a16:creationId xmlns:a16="http://schemas.microsoft.com/office/drawing/2014/main" id="{738F6747-E522-41F0-9881-EF811FA187C5}"/>
               </a:ext>
             </a:extLst>
           </p:cNvPr>
@@ -32295,7 +32284,7 @@
           <p:cNvPr id="7" name="">
             <a:extLst xmlns:a="http://schemas.openxmlformats.org/drawingml/2006/main">
               <a:ext uri="{FF2B5EF4-FFF2-40B4-BE49-F238E27FC236}">
-                <a16:creationId xmlns:a16="http://schemas.microsoft.com/office/drawing/2014/main" id="{673B0D49-285E-48FF-B3A4-7CEDE3C71E6F}"/>
+                <a16:creationId xmlns:a16="http://schemas.microsoft.com/office/drawing/2014/main" id="{6C1AC6BD-6341-496B-A148-D2DD77B9AAE3}"/>
               </a:ext>
             </a:extLst>
           </p:cNvPr>
@@ -32353,7 +32342,7 @@
           <p:cNvPr id="8" name="">
             <a:extLst xmlns:a="http://schemas.openxmlformats.org/drawingml/2006/main">
               <a:ext uri="{FF2B5EF4-FFF2-40B4-BE49-F238E27FC236}">
-                <a16:creationId xmlns:a16="http://schemas.microsoft.com/office/drawing/2014/main" id="{4E085FE5-3A5B-48EB-B245-14AF19257DB1}"/>
+                <a16:creationId xmlns:a16="http://schemas.microsoft.com/office/drawing/2014/main" id="{62341FD9-4AC5-4EC9-9136-B2844DE89D97}"/>
               </a:ext>
             </a:extLst>
           </p:cNvPr>
@@ -32411,7 +32400,7 @@
           <p:cNvPr id="9" name="">
             <a:extLst xmlns:a="http://schemas.openxmlformats.org/drawingml/2006/main">
               <a:ext uri="{FF2B5EF4-FFF2-40B4-BE49-F238E27FC236}">
-                <a16:creationId xmlns:a16="http://schemas.microsoft.com/office/drawing/2014/main" id="{9559A39F-23F6-418D-B0BA-0108819958A3}"/>
+                <a16:creationId xmlns:a16="http://schemas.microsoft.com/office/drawing/2014/main" id="{64357F31-F6C9-4600-B776-8CE93C7D585C}"/>
               </a:ext>
             </a:extLst>
           </p:cNvPr>
@@ -32469,7 +32458,7 @@
           <p:cNvPr id="10" name="">
             <a:extLst xmlns:a="http://schemas.openxmlformats.org/drawingml/2006/main">
               <a:ext uri="{FF2B5EF4-FFF2-40B4-BE49-F238E27FC236}">
-                <a16:creationId xmlns:a16="http://schemas.microsoft.com/office/drawing/2014/main" id="{979B1A1F-BEF1-4EF9-9E9A-1C1317B203B9}"/>
+                <a16:creationId xmlns:a16="http://schemas.microsoft.com/office/drawing/2014/main" id="{5E244E77-DA62-4784-8329-3103ECD08C8C}"/>
               </a:ext>
             </a:extLst>
           </p:cNvPr>
@@ -32502,7 +32491,7 @@
           <p:cNvPr id="11" name="">
             <a:extLst xmlns:a="http://schemas.openxmlformats.org/drawingml/2006/main">
               <a:ext uri="{FF2B5EF4-FFF2-40B4-BE49-F238E27FC236}">
-                <a16:creationId xmlns:a16="http://schemas.microsoft.com/office/drawing/2014/main" id="{68949A9F-F2D1-4967-B6F1-85C969BD88F4}"/>
+                <a16:creationId xmlns:a16="http://schemas.microsoft.com/office/drawing/2014/main" id="{AE1D8E49-93E0-4D42-9158-5C4415E72304}"/>
               </a:ext>
             </a:extLst>
           </p:cNvPr>
@@ -32535,7 +32524,7 @@
           <p:cNvPr id="12" name="">
             <a:extLst xmlns:a="http://schemas.openxmlformats.org/drawingml/2006/main">
               <a:ext uri="{FF2B5EF4-FFF2-40B4-BE49-F238E27FC236}">
-                <a16:creationId xmlns:a16="http://schemas.microsoft.com/office/drawing/2014/main" id="{EA1188F7-746B-4897-8134-D8A96E301DEC}"/>
+                <a16:creationId xmlns:a16="http://schemas.microsoft.com/office/drawing/2014/main" id="{D1E4BBE9-0FB4-4B92-989A-F15BA3F406AB}"/>
               </a:ext>
             </a:extLst>
           </p:cNvPr>
@@ -32568,7 +32557,7 @@
           <p:cNvPr id="13" name="">
             <a:extLst xmlns:a="http://schemas.openxmlformats.org/drawingml/2006/main">
               <a:ext uri="{FF2B5EF4-FFF2-40B4-BE49-F238E27FC236}">
-                <a16:creationId xmlns:a16="http://schemas.microsoft.com/office/drawing/2014/main" id="{B993622E-4254-4404-815C-8B87BAFAB85D}"/>
+                <a16:creationId xmlns:a16="http://schemas.microsoft.com/office/drawing/2014/main" id="{0C2BB5A5-0165-4F57-A36F-BCB8177E09D6}"/>
               </a:ext>
             </a:extLst>
           </p:cNvPr>
@@ -32626,7 +32615,7 @@
           <p:cNvPr id="14" name="">
             <a:extLst xmlns:a="http://schemas.openxmlformats.org/drawingml/2006/main">
               <a:ext uri="{FF2B5EF4-FFF2-40B4-BE49-F238E27FC236}">
-                <a16:creationId xmlns:a16="http://schemas.microsoft.com/office/drawing/2014/main" id="{644D391F-FC85-4486-A7EE-152622990DD6}"/>
+                <a16:creationId xmlns:a16="http://schemas.microsoft.com/office/drawing/2014/main" id="{0840F6BF-CC6F-40A5-B76B-30C45A62E469}"/>
               </a:ext>
             </a:extLst>
           </p:cNvPr>
@@ -32684,7 +32673,7 @@
           <p:cNvPr id="15" name="">
             <a:extLst xmlns:a="http://schemas.openxmlformats.org/drawingml/2006/main">
               <a:ext uri="{FF2B5EF4-FFF2-40B4-BE49-F238E27FC236}">
-                <a16:creationId xmlns:a16="http://schemas.microsoft.com/office/drawing/2014/main" id="{369BB8D6-1FE0-464D-9169-ADDBA3C98765}"/>
+                <a16:creationId xmlns:a16="http://schemas.microsoft.com/office/drawing/2014/main" id="{8FB7CCB9-991F-473A-BA3B-D529C711002B}"/>
               </a:ext>
             </a:extLst>
           </p:cNvPr>
@@ -32742,7 +32731,7 @@
           <p:cNvPr id="16" name="">
             <a:extLst xmlns:a="http://schemas.openxmlformats.org/drawingml/2006/main">
               <a:ext uri="{FF2B5EF4-FFF2-40B4-BE49-F238E27FC236}">
-                <a16:creationId xmlns:a16="http://schemas.microsoft.com/office/drawing/2014/main" id="{A60E281B-052A-4F35-9AC8-D84CC20CA377}"/>
+                <a16:creationId xmlns:a16="http://schemas.microsoft.com/office/drawing/2014/main" id="{F35FD05D-8FDC-4153-9351-494731F742A1}"/>
               </a:ext>
             </a:extLst>
           </p:cNvPr>
@@ -32775,7 +32764,7 @@
           <p:cNvPr id="17" name="">
             <a:extLst xmlns:a="http://schemas.openxmlformats.org/drawingml/2006/main">
               <a:ext uri="{FF2B5EF4-FFF2-40B4-BE49-F238E27FC236}">
-                <a16:creationId xmlns:a16="http://schemas.microsoft.com/office/drawing/2014/main" id="{77447BFE-1D37-4F18-AEC8-5812FBC20AA9}"/>
+                <a16:creationId xmlns:a16="http://schemas.microsoft.com/office/drawing/2014/main" id="{772282D2-6BE0-41EE-9855-5F4EC0DDA1E7}"/>
               </a:ext>
             </a:extLst>
           </p:cNvPr>
@@ -32808,7 +32797,7 @@
           <p:cNvPr id="18" name="">
             <a:extLst xmlns:a="http://schemas.openxmlformats.org/drawingml/2006/main">
               <a:ext uri="{FF2B5EF4-FFF2-40B4-BE49-F238E27FC236}">
-                <a16:creationId xmlns:a16="http://schemas.microsoft.com/office/drawing/2014/main" id="{81F904EA-C2F1-4251-B42C-7763CCF1FFE6}"/>
+                <a16:creationId xmlns:a16="http://schemas.microsoft.com/office/drawing/2014/main" id="{B30800E5-D110-4B94-AF89-451EBD9D1471}"/>
               </a:ext>
             </a:extLst>
           </p:cNvPr>
@@ -32841,7 +32830,7 @@
           <p:cNvPr id="19" name="">
             <a:extLst xmlns:a="http://schemas.openxmlformats.org/drawingml/2006/main">
               <a:ext uri="{FF2B5EF4-FFF2-40B4-BE49-F238E27FC236}">
-                <a16:creationId xmlns:a16="http://schemas.microsoft.com/office/drawing/2014/main" id="{8DF6E617-0C5A-4626-A756-D3C69D54E8E4}"/>
+                <a16:creationId xmlns:a16="http://schemas.microsoft.com/office/drawing/2014/main" id="{1A3F5C62-E23F-43DC-A06B-FEB6B01CA488}"/>
               </a:ext>
             </a:extLst>
           </p:cNvPr>
@@ -32899,7 +32888,7 @@
           <p:cNvPr id="20" name="">
             <a:extLst xmlns:a="http://schemas.openxmlformats.org/drawingml/2006/main">
               <a:ext uri="{FF2B5EF4-FFF2-40B4-BE49-F238E27FC236}">
-                <a16:creationId xmlns:a16="http://schemas.microsoft.com/office/drawing/2014/main" id="{B455E9C6-4129-472D-A0F8-F5087D2B6947}"/>
+                <a16:creationId xmlns:a16="http://schemas.microsoft.com/office/drawing/2014/main" id="{F37DFD74-5EA1-4BBA-B306-CFF8C52B383E}"/>
               </a:ext>
             </a:extLst>
           </p:cNvPr>
@@ -32957,7 +32946,7 @@
           <p:cNvPr id="21" name="">
             <a:extLst xmlns:a="http://schemas.openxmlformats.org/drawingml/2006/main">
               <a:ext uri="{FF2B5EF4-FFF2-40B4-BE49-F238E27FC236}">
-                <a16:creationId xmlns:a16="http://schemas.microsoft.com/office/drawing/2014/main" id="{F4C275CE-C883-4B9C-AC62-42B4454B8B48}"/>
+                <a16:creationId xmlns:a16="http://schemas.microsoft.com/office/drawing/2014/main" id="{49E9F3A8-BBDB-4513-9F00-15953683924F}"/>
               </a:ext>
             </a:extLst>
           </p:cNvPr>
@@ -33015,7 +33004,7 @@
           <p:cNvPr id="22" name="">
             <a:extLst xmlns:a="http://schemas.openxmlformats.org/drawingml/2006/main">
               <a:ext uri="{FF2B5EF4-FFF2-40B4-BE49-F238E27FC236}">
-                <a16:creationId xmlns:a16="http://schemas.microsoft.com/office/drawing/2014/main" id="{53BCC90C-96A2-4273-BEDE-88CBDDA48F3B}"/>
+                <a16:creationId xmlns:a16="http://schemas.microsoft.com/office/drawing/2014/main" id="{31761326-7026-4108-B512-B78DE95F1A23}"/>
               </a:ext>
             </a:extLst>
           </p:cNvPr>
@@ -33048,7 +33037,7 @@
           <p:cNvPr id="23" name="">
             <a:extLst xmlns:a="http://schemas.openxmlformats.org/drawingml/2006/main">
               <a:ext uri="{FF2B5EF4-FFF2-40B4-BE49-F238E27FC236}">
-                <a16:creationId xmlns:a16="http://schemas.microsoft.com/office/drawing/2014/main" id="{678D6D9C-A282-42EC-B5ED-D6C7E5078B69}"/>
+                <a16:creationId xmlns:a16="http://schemas.microsoft.com/office/drawing/2014/main" id="{1365F0A0-CAB5-422B-85FC-26F019C9ED87}"/>
               </a:ext>
             </a:extLst>
           </p:cNvPr>
@@ -33081,7 +33070,7 @@
           <p:cNvPr id="24" name="">
             <a:extLst xmlns:a="http://schemas.openxmlformats.org/drawingml/2006/main">
               <a:ext uri="{FF2B5EF4-FFF2-40B4-BE49-F238E27FC236}">
-                <a16:creationId xmlns:a16="http://schemas.microsoft.com/office/drawing/2014/main" id="{32634255-533D-4E6B-AD9D-F8E08559AB0E}"/>
+                <a16:creationId xmlns:a16="http://schemas.microsoft.com/office/drawing/2014/main" id="{4EB870BE-F32C-48EB-AE72-A7FBEEEC7553}"/>
               </a:ext>
             </a:extLst>
           </p:cNvPr>
@@ -33114,7 +33103,7 @@
           <p:cNvPr id="25" name="">
             <a:extLst xmlns:a="http://schemas.openxmlformats.org/drawingml/2006/main">
               <a:ext uri="{FF2B5EF4-FFF2-40B4-BE49-F238E27FC236}">
-                <a16:creationId xmlns:a16="http://schemas.microsoft.com/office/drawing/2014/main" id="{A7BAE651-D39C-4BD6-B2C8-586830A35D77}"/>
+                <a16:creationId xmlns:a16="http://schemas.microsoft.com/office/drawing/2014/main" id="{C54D1CBD-7A7A-461E-9F49-0413AD65C8D5}"/>
               </a:ext>
             </a:extLst>
           </p:cNvPr>
@@ -33172,7 +33161,7 @@
           <p:cNvPr id="26" name="">
             <a:extLst xmlns:a="http://schemas.openxmlformats.org/drawingml/2006/main">
               <a:ext uri="{FF2B5EF4-FFF2-40B4-BE49-F238E27FC236}">
-                <a16:creationId xmlns:a16="http://schemas.microsoft.com/office/drawing/2014/main" id="{ED319CAF-20FD-4CD7-B613-8078EB1A6698}"/>
+                <a16:creationId xmlns:a16="http://schemas.microsoft.com/office/drawing/2014/main" id="{021335B5-6722-4C07-B9B5-FC719FCA5CBC}"/>
               </a:ext>
             </a:extLst>
           </p:cNvPr>
@@ -33230,7 +33219,7 @@
           <p:cNvPr id="27" name="">
             <a:extLst xmlns:a="http://schemas.openxmlformats.org/drawingml/2006/main">
               <a:ext uri="{FF2B5EF4-FFF2-40B4-BE49-F238E27FC236}">
-                <a16:creationId xmlns:a16="http://schemas.microsoft.com/office/drawing/2014/main" id="{0542598F-001B-48C3-8108-D9BEE9690A26}"/>
+                <a16:creationId xmlns:a16="http://schemas.microsoft.com/office/drawing/2014/main" id="{989AB40B-5525-489E-9AAF-4CEC11C830F9}"/>
               </a:ext>
             </a:extLst>
           </p:cNvPr>
@@ -33288,7 +33277,7 @@
           <p:cNvPr id="28" name="">
             <a:extLst xmlns:a="http://schemas.openxmlformats.org/drawingml/2006/main">
               <a:ext uri="{FF2B5EF4-FFF2-40B4-BE49-F238E27FC236}">
-                <a16:creationId xmlns:a16="http://schemas.microsoft.com/office/drawing/2014/main" id="{99E82D9B-F67F-493F-A04C-0557AC229134}"/>
+                <a16:creationId xmlns:a16="http://schemas.microsoft.com/office/drawing/2014/main" id="{AC236D91-03B2-4504-9A25-240200B958F2}"/>
               </a:ext>
             </a:extLst>
           </p:cNvPr>
@@ -33321,7 +33310,7 @@
           <p:cNvPr id="29" name="">
             <a:extLst xmlns:a="http://schemas.openxmlformats.org/drawingml/2006/main">
               <a:ext uri="{FF2B5EF4-FFF2-40B4-BE49-F238E27FC236}">
-                <a16:creationId xmlns:a16="http://schemas.microsoft.com/office/drawing/2014/main" id="{7B60A9E9-0C07-4382-A189-23DB58563035}"/>
+                <a16:creationId xmlns:a16="http://schemas.microsoft.com/office/drawing/2014/main" id="{DE370A69-377C-44EA-899C-CDE826F07F4A}"/>
               </a:ext>
             </a:extLst>
           </p:cNvPr>
@@ -33354,7 +33343,7 @@
           <p:cNvPr id="30" name="">
             <a:extLst xmlns:a="http://schemas.openxmlformats.org/drawingml/2006/main">
               <a:ext uri="{FF2B5EF4-FFF2-40B4-BE49-F238E27FC236}">
-                <a16:creationId xmlns:a16="http://schemas.microsoft.com/office/drawing/2014/main" id="{0CB8EADF-35CA-4681-9744-365B4071B8C8}"/>
+                <a16:creationId xmlns:a16="http://schemas.microsoft.com/office/drawing/2014/main" id="{82F9A94E-C5F3-43A3-A29C-7FFE1F6859F8}"/>
               </a:ext>
             </a:extLst>
           </p:cNvPr>
@@ -33387,7 +33376,7 @@
           <p:cNvPr id="31" name="">
             <a:extLst xmlns:a="http://schemas.openxmlformats.org/drawingml/2006/main">
               <a:ext uri="{FF2B5EF4-FFF2-40B4-BE49-F238E27FC236}">
-                <a16:creationId xmlns:a16="http://schemas.microsoft.com/office/drawing/2014/main" id="{9F27B473-AB57-47B9-A8E1-55B137B40FE3}"/>
+                <a16:creationId xmlns:a16="http://schemas.microsoft.com/office/drawing/2014/main" id="{F6B9C863-4E82-4BAA-897D-2436591D6149}"/>
               </a:ext>
             </a:extLst>
           </p:cNvPr>
@@ -33445,7 +33434,7 @@
           <p:cNvPr id="32" name="">
             <a:extLst xmlns:a="http://schemas.openxmlformats.org/drawingml/2006/main">
               <a:ext uri="{FF2B5EF4-FFF2-40B4-BE49-F238E27FC236}">
-                <a16:creationId xmlns:a16="http://schemas.microsoft.com/office/drawing/2014/main" id="{21F0E3C9-E59B-4E2B-9A04-AA63DB8F2639}"/>
+                <a16:creationId xmlns:a16="http://schemas.microsoft.com/office/drawing/2014/main" id="{7FE001DB-5F28-4EDC-ADAD-3E1C3DA6D26A}"/>
               </a:ext>
             </a:extLst>
           </p:cNvPr>
@@ -33503,7 +33492,7 @@
           <p:cNvPr id="33" name="">
             <a:extLst xmlns:a="http://schemas.openxmlformats.org/drawingml/2006/main">
               <a:ext uri="{FF2B5EF4-FFF2-40B4-BE49-F238E27FC236}">
-                <a16:creationId xmlns:a16="http://schemas.microsoft.com/office/drawing/2014/main" id="{3623B637-1384-477A-BDD6-0B9EB8892AB6}"/>
+                <a16:creationId xmlns:a16="http://schemas.microsoft.com/office/drawing/2014/main" id="{7EEF542C-BAD5-4F39-9EC2-31218E8985E7}"/>
               </a:ext>
             </a:extLst>
           </p:cNvPr>
@@ -33561,7 +33550,7 @@
           <p:cNvPr id="34" name="">
             <a:extLst xmlns:a="http://schemas.openxmlformats.org/drawingml/2006/main">
               <a:ext uri="{FF2B5EF4-FFF2-40B4-BE49-F238E27FC236}">
-                <a16:creationId xmlns:a16="http://schemas.microsoft.com/office/drawing/2014/main" id="{255A72E3-C35C-45D7-BA40-86F7E5DFA2CB}"/>
+                <a16:creationId xmlns:a16="http://schemas.microsoft.com/office/drawing/2014/main" id="{820A075E-4278-40A7-AD0C-51A102F5F3B0}"/>
               </a:ext>
             </a:extLst>
           </p:cNvPr>
@@ -33594,7 +33583,7 @@
           <p:cNvPr id="35" name="">
             <a:extLst xmlns:a="http://schemas.openxmlformats.org/drawingml/2006/main">
               <a:ext uri="{FF2B5EF4-FFF2-40B4-BE49-F238E27FC236}">
-                <a16:creationId xmlns:a16="http://schemas.microsoft.com/office/drawing/2014/main" id="{2DD24A84-7D20-4706-BBF8-BCA097040F8E}"/>
+                <a16:creationId xmlns:a16="http://schemas.microsoft.com/office/drawing/2014/main" id="{9ABC3529-6471-4BDA-949D-C8EEBF8D5269}"/>
               </a:ext>
             </a:extLst>
           </p:cNvPr>
@@ -33627,7 +33616,7 @@
           <p:cNvPr id="36" name="">
             <a:extLst xmlns:a="http://schemas.openxmlformats.org/drawingml/2006/main">
               <a:ext uri="{FF2B5EF4-FFF2-40B4-BE49-F238E27FC236}">
-                <a16:creationId xmlns:a16="http://schemas.microsoft.com/office/drawing/2014/main" id="{6F8269F7-E597-4716-9485-B10CEE413ABD}"/>
+                <a16:creationId xmlns:a16="http://schemas.microsoft.com/office/drawing/2014/main" id="{B44C196E-C1F3-46CD-9471-D8111244A2FC}"/>
               </a:ext>
             </a:extLst>
           </p:cNvPr>
@@ -33660,7 +33649,7 @@
           <p:cNvPr id="37" name="">
             <a:extLst xmlns:a="http://schemas.openxmlformats.org/drawingml/2006/main">
               <a:ext uri="{FF2B5EF4-FFF2-40B4-BE49-F238E27FC236}">
-                <a16:creationId xmlns:a16="http://schemas.microsoft.com/office/drawing/2014/main" id="{93BD267F-EA2F-4AB1-9F46-9EAA728337BB}"/>
+                <a16:creationId xmlns:a16="http://schemas.microsoft.com/office/drawing/2014/main" id="{BF0ED140-14EF-4752-8042-5463252145EB}"/>
               </a:ext>
             </a:extLst>
           </p:cNvPr>
@@ -33718,7 +33707,7 @@
           <p:cNvPr id="38" name="">
             <a:extLst xmlns:a="http://schemas.openxmlformats.org/drawingml/2006/main">
               <a:ext uri="{FF2B5EF4-FFF2-40B4-BE49-F238E27FC236}">
-                <a16:creationId xmlns:a16="http://schemas.microsoft.com/office/drawing/2014/main" id="{F43DBFF0-6914-41E6-B10A-BFED3DE5454E}"/>
+                <a16:creationId xmlns:a16="http://schemas.microsoft.com/office/drawing/2014/main" id="{D7F48A2D-7D3F-4514-8011-6969EA7E404D}"/>
               </a:ext>
             </a:extLst>
           </p:cNvPr>
@@ -33776,7 +33765,7 @@
           <p:cNvPr id="39" name="">
             <a:extLst xmlns:a="http://schemas.openxmlformats.org/drawingml/2006/main">
               <a:ext uri="{FF2B5EF4-FFF2-40B4-BE49-F238E27FC236}">
-                <a16:creationId xmlns:a16="http://schemas.microsoft.com/office/drawing/2014/main" id="{6D2949FE-8B45-42AC-8CCE-9CAB1715F0F3}"/>
+                <a16:creationId xmlns:a16="http://schemas.microsoft.com/office/drawing/2014/main" id="{B1A02E33-9383-4FBA-A0F2-3FB6DAF85F2B}"/>
               </a:ext>
             </a:extLst>
           </p:cNvPr>
@@ -33834,7 +33823,7 @@
           <p:cNvPr id="40" name="">
             <a:extLst xmlns:a="http://schemas.openxmlformats.org/drawingml/2006/main">
               <a:ext uri="{FF2B5EF4-FFF2-40B4-BE49-F238E27FC236}">
-                <a16:creationId xmlns:a16="http://schemas.microsoft.com/office/drawing/2014/main" id="{32CAA05B-81EA-4A60-9CDB-0E5064022F52}"/>
+                <a16:creationId xmlns:a16="http://schemas.microsoft.com/office/drawing/2014/main" id="{6451157D-CC2F-423C-A569-88923B6E03BF}"/>
               </a:ext>
             </a:extLst>
           </p:cNvPr>
@@ -33867,7 +33856,7 @@
           <p:cNvPr id="41" name="">
             <a:extLst xmlns:a="http://schemas.openxmlformats.org/drawingml/2006/main">
               <a:ext uri="{FF2B5EF4-FFF2-40B4-BE49-F238E27FC236}">
-                <a16:creationId xmlns:a16="http://schemas.microsoft.com/office/drawing/2014/main" id="{A75860FF-B17A-4F34-91C2-C504ED50C18D}"/>
+                <a16:creationId xmlns:a16="http://schemas.microsoft.com/office/drawing/2014/main" id="{E158DE19-51B3-4DAB-8F50-0FF213F63D9A}"/>
               </a:ext>
             </a:extLst>
           </p:cNvPr>
@@ -33925,7 +33914,7 @@
           <p:cNvPr id="42" name="">
             <a:extLst xmlns:a="http://schemas.openxmlformats.org/drawingml/2006/main">
               <a:ext uri="{FF2B5EF4-FFF2-40B4-BE49-F238E27FC236}">
-                <a16:creationId xmlns:a16="http://schemas.microsoft.com/office/drawing/2014/main" id="{3F003C0D-B773-4CAF-B212-347CC953638E}"/>
+                <a16:creationId xmlns:a16="http://schemas.microsoft.com/office/drawing/2014/main" id="{003F23E3-05CC-433F-B5A1-A0EFE944E67C}"/>
               </a:ext>
             </a:extLst>
           </p:cNvPr>
@@ -33958,7 +33947,7 @@
           <p:cNvPr id="43" name="">
             <a:extLst xmlns:a="http://schemas.openxmlformats.org/drawingml/2006/main">
               <a:ext uri="{FF2B5EF4-FFF2-40B4-BE49-F238E27FC236}">
-                <a16:creationId xmlns:a16="http://schemas.microsoft.com/office/drawing/2014/main" id="{150702EA-4B71-4824-8145-DB73E06AB9C7}"/>
+                <a16:creationId xmlns:a16="http://schemas.microsoft.com/office/drawing/2014/main" id="{29B8D281-275D-4ACB-BA59-3581E42E4EC2}"/>
               </a:ext>
             </a:extLst>
           </p:cNvPr>
@@ -34016,7 +34005,7 @@
           <p:cNvPr id="44" name="">
             <a:extLst xmlns:a="http://schemas.openxmlformats.org/drawingml/2006/main">
               <a:ext uri="{FF2B5EF4-FFF2-40B4-BE49-F238E27FC236}">
-                <a16:creationId xmlns:a16="http://schemas.microsoft.com/office/drawing/2014/main" id="{C00E827D-8701-4A6E-8C0A-81DAA0AD3EDF}"/>
+                <a16:creationId xmlns:a16="http://schemas.microsoft.com/office/drawing/2014/main" id="{8ED306B6-D37B-4EA5-A47F-D37A99A47DE9}"/>
               </a:ext>
             </a:extLst>
           </p:cNvPr>
@@ -34049,7 +34038,7 @@
           <p:cNvPr id="45" name="">
             <a:extLst xmlns:a="http://schemas.openxmlformats.org/drawingml/2006/main">
               <a:ext uri="{FF2B5EF4-FFF2-40B4-BE49-F238E27FC236}">
-                <a16:creationId xmlns:a16="http://schemas.microsoft.com/office/drawing/2014/main" id="{353E4D57-B661-42DB-BE0A-2391456DCAAE}"/>
+                <a16:creationId xmlns:a16="http://schemas.microsoft.com/office/drawing/2014/main" id="{B9260BB5-CE78-4BEB-8E4D-AB58E3CD0634}"/>
               </a:ext>
             </a:extLst>
           </p:cNvPr>
@@ -34107,7 +34096,7 @@
           <p:cNvPr id="46" name="">
             <a:extLst xmlns:a="http://schemas.openxmlformats.org/drawingml/2006/main">
               <a:ext uri="{FF2B5EF4-FFF2-40B4-BE49-F238E27FC236}">
-                <a16:creationId xmlns:a16="http://schemas.microsoft.com/office/drawing/2014/main" id="{C8D4D140-8FC8-4014-A96F-17B0C3BB46D3}"/>
+                <a16:creationId xmlns:a16="http://schemas.microsoft.com/office/drawing/2014/main" id="{CCEB6D51-A08B-4860-8F96-C670D6AE9C96}"/>
               </a:ext>
             </a:extLst>
           </p:cNvPr>
@@ -34140,7 +34129,7 @@
           <p:cNvPr id="47" name="">
             <a:extLst xmlns:a="http://schemas.openxmlformats.org/drawingml/2006/main">
               <a:ext uri="{FF2B5EF4-FFF2-40B4-BE49-F238E27FC236}">
-                <a16:creationId xmlns:a16="http://schemas.microsoft.com/office/drawing/2014/main" id="{FE8B73C2-1111-41BD-BAAD-4843CFA58BEA}"/>
+                <a16:creationId xmlns:a16="http://schemas.microsoft.com/office/drawing/2014/main" id="{17879169-441F-4DCC-BA7B-BC7843176F98}"/>
               </a:ext>
             </a:extLst>
           </p:cNvPr>
@@ -34198,7 +34187,7 @@
           <p:cNvPr id="48" name="">
             <a:extLst xmlns:a="http://schemas.openxmlformats.org/drawingml/2006/main">
               <a:ext uri="{FF2B5EF4-FFF2-40B4-BE49-F238E27FC236}">
-                <a16:creationId xmlns:a16="http://schemas.microsoft.com/office/drawing/2014/main" id="{A2C4F03E-CC4F-463C-8EF1-BA0BAEF85192}"/>
+                <a16:creationId xmlns:a16="http://schemas.microsoft.com/office/drawing/2014/main" id="{D7073438-4AF4-4A43-B130-3DF228112284}"/>
               </a:ext>
             </a:extLst>
           </p:cNvPr>
@@ -34231,7 +34220,7 @@
           <p:cNvPr id="49" name="">
             <a:extLst xmlns:a="http://schemas.openxmlformats.org/drawingml/2006/main">
               <a:ext uri="{FF2B5EF4-FFF2-40B4-BE49-F238E27FC236}">
-                <a16:creationId xmlns:a16="http://schemas.microsoft.com/office/drawing/2014/main" id="{64C9823D-0C82-4E8C-AA2D-9B8685F403F0}"/>
+                <a16:creationId xmlns:a16="http://schemas.microsoft.com/office/drawing/2014/main" id="{8E17424D-6A22-44C9-A93E-F17B73E0DB8C}"/>
               </a:ext>
             </a:extLst>
           </p:cNvPr>
@@ -34289,7 +34278,7 @@
           <p:cNvPr id="50" name="">
             <a:extLst xmlns:a="http://schemas.openxmlformats.org/drawingml/2006/main">
               <a:ext uri="{FF2B5EF4-FFF2-40B4-BE49-F238E27FC236}">
-                <a16:creationId xmlns:a16="http://schemas.microsoft.com/office/drawing/2014/main" id="{2EF50DDB-CA1D-41A8-ABC7-4C3857F50B32}"/>
+                <a16:creationId xmlns:a16="http://schemas.microsoft.com/office/drawing/2014/main" id="{560349D6-A842-4EE4-8326-81C24D6A97A4}"/>
               </a:ext>
             </a:extLst>
           </p:cNvPr>
@@ -34322,7 +34311,7 @@
           <p:cNvPr id="51" name="">
             <a:extLst xmlns:a="http://schemas.openxmlformats.org/drawingml/2006/main">
               <a:ext uri="{FF2B5EF4-FFF2-40B4-BE49-F238E27FC236}">
-                <a16:creationId xmlns:a16="http://schemas.microsoft.com/office/drawing/2014/main" id="{6BCF97FF-E3E0-48AE-9246-A917F14325C2}"/>
+                <a16:creationId xmlns:a16="http://schemas.microsoft.com/office/drawing/2014/main" id="{1479161F-EC7C-457A-B810-D4DCA9EBC886}"/>
               </a:ext>
             </a:extLst>
           </p:cNvPr>
@@ -34380,7 +34369,7 @@
           <p:cNvPr id="52" name="">
             <a:extLst xmlns:a="http://schemas.openxmlformats.org/drawingml/2006/main">
               <a:ext uri="{FF2B5EF4-FFF2-40B4-BE49-F238E27FC236}">
-                <a16:creationId xmlns:a16="http://schemas.microsoft.com/office/drawing/2014/main" id="{AF50B4D1-9BC0-4D02-94ED-0F3D1C371A12}"/>
+                <a16:creationId xmlns:a16="http://schemas.microsoft.com/office/drawing/2014/main" id="{01543C93-BA5F-4BCB-B4FC-8DC93C7E20A9}"/>
               </a:ext>
             </a:extLst>
           </p:cNvPr>
@@ -34413,7 +34402,7 @@
           <p:cNvPr id="53" name="">
             <a:extLst xmlns:a="http://schemas.openxmlformats.org/drawingml/2006/main">
               <a:ext uri="{FF2B5EF4-FFF2-40B4-BE49-F238E27FC236}">
-                <a16:creationId xmlns:a16="http://schemas.microsoft.com/office/drawing/2014/main" id="{6BC8FFBC-A0A1-4260-A6DF-44FB5428D9D3}"/>
+                <a16:creationId xmlns:a16="http://schemas.microsoft.com/office/drawing/2014/main" id="{C93A8593-708F-4EB9-9E06-D1022F13AEC1}"/>
               </a:ext>
             </a:extLst>
           </p:cNvPr>
@@ -34471,7 +34460,7 @@
           <p:cNvPr id="54" name="">
             <a:extLst xmlns:a="http://schemas.openxmlformats.org/drawingml/2006/main">
               <a:ext uri="{FF2B5EF4-FFF2-40B4-BE49-F238E27FC236}">
-                <a16:creationId xmlns:a16="http://schemas.microsoft.com/office/drawing/2014/main" id="{E22186DE-FE19-4170-9FD8-F24E4A944912}"/>
+                <a16:creationId xmlns:a16="http://schemas.microsoft.com/office/drawing/2014/main" id="{30DB45BE-08FD-4037-A29D-7FDF1B19C7EF}"/>
               </a:ext>
             </a:extLst>
           </p:cNvPr>
@@ -34504,7 +34493,7 @@
           <p:cNvPr id="55" name="">
             <a:extLst xmlns:a="http://schemas.openxmlformats.org/drawingml/2006/main">
               <a:ext uri="{FF2B5EF4-FFF2-40B4-BE49-F238E27FC236}">
-                <a16:creationId xmlns:a16="http://schemas.microsoft.com/office/drawing/2014/main" id="{84D309FE-4E34-4B73-9AA0-6AD06508E62A}"/>
+                <a16:creationId xmlns:a16="http://schemas.microsoft.com/office/drawing/2014/main" id="{D2F2730E-0095-4337-BB8B-6F0F9E737394}"/>
               </a:ext>
             </a:extLst>
           </p:cNvPr>
@@ -34562,7 +34551,7 @@
           <p:cNvPr id="56" name="">
             <a:extLst xmlns:a="http://schemas.openxmlformats.org/drawingml/2006/main">
               <a:ext uri="{FF2B5EF4-FFF2-40B4-BE49-F238E27FC236}">
-                <a16:creationId xmlns:a16="http://schemas.microsoft.com/office/drawing/2014/main" id="{1B3E4C45-188A-4568-B3FE-30F99313B37F}"/>
+                <a16:creationId xmlns:a16="http://schemas.microsoft.com/office/drawing/2014/main" id="{EF4D6691-60FA-46A5-8712-08AF2796D467}"/>
               </a:ext>
             </a:extLst>
           </p:cNvPr>
@@ -34595,7 +34584,7 @@
           <p:cNvPr id="57" name="">
             <a:extLst xmlns:a="http://schemas.openxmlformats.org/drawingml/2006/main">
               <a:ext uri="{FF2B5EF4-FFF2-40B4-BE49-F238E27FC236}">
-                <a16:creationId xmlns:a16="http://schemas.microsoft.com/office/drawing/2014/main" id="{A7ADF7F7-0BC4-4DE1-B97C-2DF7EFD331BD}"/>
+                <a16:creationId xmlns:a16="http://schemas.microsoft.com/office/drawing/2014/main" id="{9ABD1C83-88D3-4270-A8CF-BBB5E0628812}"/>
               </a:ext>
             </a:extLst>
           </p:cNvPr>
@@ -34653,7 +34642,7 @@
           <p:cNvPr id="58" name="">
             <a:extLst xmlns:a="http://schemas.openxmlformats.org/drawingml/2006/main">
               <a:ext uri="{FF2B5EF4-FFF2-40B4-BE49-F238E27FC236}">
-                <a16:creationId xmlns:a16="http://schemas.microsoft.com/office/drawing/2014/main" id="{F97AE74A-1500-4784-B892-B6B5F17C5125}"/>
+                <a16:creationId xmlns:a16="http://schemas.microsoft.com/office/drawing/2014/main" id="{EA5E8094-6D4A-4C9D-B160-36491AF7A5A2}"/>
               </a:ext>
             </a:extLst>
           </p:cNvPr>
@@ -34686,7 +34675,7 @@
           <p:cNvPr id="59" name="">
             <a:extLst xmlns:a="http://schemas.openxmlformats.org/drawingml/2006/main">
               <a:ext uri="{FF2B5EF4-FFF2-40B4-BE49-F238E27FC236}">
-                <a16:creationId xmlns:a16="http://schemas.microsoft.com/office/drawing/2014/main" id="{7316BA5C-F091-4DE3-86DB-17C179D54F86}"/>
+                <a16:creationId xmlns:a16="http://schemas.microsoft.com/office/drawing/2014/main" id="{8ECFF872-36D4-47C2-87BF-EEF689F0197D}"/>
               </a:ext>
             </a:extLst>
           </p:cNvPr>
@@ -34744,7 +34733,7 @@
           <p:cNvPr id="60" name="">
             <a:extLst xmlns:a="http://schemas.openxmlformats.org/drawingml/2006/main">
               <a:ext uri="{FF2B5EF4-FFF2-40B4-BE49-F238E27FC236}">
-                <a16:creationId xmlns:a16="http://schemas.microsoft.com/office/drawing/2014/main" id="{98642336-6977-442D-B2EB-1536D59E2D01}"/>
+                <a16:creationId xmlns:a16="http://schemas.microsoft.com/office/drawing/2014/main" id="{49821675-8CEE-48BB-9F8A-A1CB0B3B4C49}"/>
               </a:ext>
             </a:extLst>
           </p:cNvPr>
@@ -34777,7 +34766,7 @@
           <p:cNvPr id="61" name="">
             <a:extLst xmlns:a="http://schemas.openxmlformats.org/drawingml/2006/main">
               <a:ext uri="{FF2B5EF4-FFF2-40B4-BE49-F238E27FC236}">
-                <a16:creationId xmlns:a16="http://schemas.microsoft.com/office/drawing/2014/main" id="{834D7B45-9448-4034-80A4-D00D42E95829}"/>
+                <a16:creationId xmlns:a16="http://schemas.microsoft.com/office/drawing/2014/main" id="{10DDEFE1-2CCB-403B-8F48-DEDA8A6EDDC1}"/>
               </a:ext>
             </a:extLst>
           </p:cNvPr>
@@ -34835,7 +34824,7 @@
           <p:cNvPr id="62" name="">
             <a:extLst xmlns:a="http://schemas.openxmlformats.org/drawingml/2006/main">
               <a:ext uri="{FF2B5EF4-FFF2-40B4-BE49-F238E27FC236}">
-                <a16:creationId xmlns:a16="http://schemas.microsoft.com/office/drawing/2014/main" id="{53C0E709-20CB-42E4-8AEB-117E066A6A6F}"/>
+                <a16:creationId xmlns:a16="http://schemas.microsoft.com/office/drawing/2014/main" id="{360286FA-7A59-4297-81D6-F7928903D410}"/>
               </a:ext>
             </a:extLst>
           </p:cNvPr>
@@ -34868,7 +34857,7 @@
           <p:cNvPr id="63" name="">
             <a:extLst xmlns:a="http://schemas.openxmlformats.org/drawingml/2006/main">
               <a:ext uri="{FF2B5EF4-FFF2-40B4-BE49-F238E27FC236}">
-                <a16:creationId xmlns:a16="http://schemas.microsoft.com/office/drawing/2014/main" id="{66B7A944-4AE4-49AA-9E5D-873E01CE5ACF}"/>
+                <a16:creationId xmlns:a16="http://schemas.microsoft.com/office/drawing/2014/main" id="{0E9BB9C5-6EE5-4036-989F-E0162D2C1B7F}"/>
               </a:ext>
             </a:extLst>
           </p:cNvPr>
@@ -34926,7 +34915,7 @@
           <p:cNvPr id="64" name="">
             <a:extLst xmlns:a="http://schemas.openxmlformats.org/drawingml/2006/main">
               <a:ext uri="{FF2B5EF4-FFF2-40B4-BE49-F238E27FC236}">
-                <a16:creationId xmlns:a16="http://schemas.microsoft.com/office/drawing/2014/main" id="{60B762B9-0340-4CD8-AFEF-82AA6E43D08F}"/>
+                <a16:creationId xmlns:a16="http://schemas.microsoft.com/office/drawing/2014/main" id="{3AEA0D89-3A89-4112-A00F-907CC6E318C3}"/>
               </a:ext>
             </a:extLst>
           </p:cNvPr>
@@ -34959,7 +34948,7 @@
           <p:cNvPr id="65" name="">
             <a:extLst xmlns:a="http://schemas.openxmlformats.org/drawingml/2006/main">
               <a:ext uri="{FF2B5EF4-FFF2-40B4-BE49-F238E27FC236}">
-                <a16:creationId xmlns:a16="http://schemas.microsoft.com/office/drawing/2014/main" id="{12772870-82EC-4342-BEC6-AD3313624820}"/>
+                <a16:creationId xmlns:a16="http://schemas.microsoft.com/office/drawing/2014/main" id="{091156BA-686F-49A7-AAFB-DBAF8A3820B9}"/>
               </a:ext>
             </a:extLst>
           </p:cNvPr>
@@ -35017,7 +35006,7 @@
           <p:cNvPr id="66" name="">
             <a:extLst xmlns:a="http://schemas.openxmlformats.org/drawingml/2006/main">
               <a:ext uri="{FF2B5EF4-FFF2-40B4-BE49-F238E27FC236}">
-                <a16:creationId xmlns:a16="http://schemas.microsoft.com/office/drawing/2014/main" id="{D02A3119-F53A-4852-A36D-3FFA15BDE9FD}"/>
+                <a16:creationId xmlns:a16="http://schemas.microsoft.com/office/drawing/2014/main" id="{6A9458BA-9C5B-4262-A1C7-9FB5B8CAC17C}"/>
               </a:ext>
             </a:extLst>
           </p:cNvPr>
@@ -35050,7 +35039,7 @@
           <p:cNvPr id="67" name="">
             <a:extLst xmlns:a="http://schemas.openxmlformats.org/drawingml/2006/main">
               <a:ext uri="{FF2B5EF4-FFF2-40B4-BE49-F238E27FC236}">
-                <a16:creationId xmlns:a16="http://schemas.microsoft.com/office/drawing/2014/main" id="{85BE3B15-29CD-464A-8E4D-1E29D5D0416D}"/>
+                <a16:creationId xmlns:a16="http://schemas.microsoft.com/office/drawing/2014/main" id="{0086C493-C343-4E21-9DDB-D7C960CF5043}"/>
               </a:ext>
             </a:extLst>
           </p:cNvPr>
@@ -35108,7 +35097,7 @@
           <p:cNvPr id="68" name="">
             <a:extLst xmlns:a="http://schemas.openxmlformats.org/drawingml/2006/main">
               <a:ext uri="{FF2B5EF4-FFF2-40B4-BE49-F238E27FC236}">
-                <a16:creationId xmlns:a16="http://schemas.microsoft.com/office/drawing/2014/main" id="{B459CE00-858D-4BD9-87D2-18D1CE983DC7}"/>
+                <a16:creationId xmlns:a16="http://schemas.microsoft.com/office/drawing/2014/main" id="{FA4BC926-8E1B-4D02-BA82-F6C88AAB2828}"/>
               </a:ext>
             </a:extLst>
           </p:cNvPr>
@@ -35141,7 +35130,7 @@
           <p:cNvPr id="69" name="">
             <a:extLst xmlns:a="http://schemas.openxmlformats.org/drawingml/2006/main">
               <a:ext uri="{FF2B5EF4-FFF2-40B4-BE49-F238E27FC236}">
-                <a16:creationId xmlns:a16="http://schemas.microsoft.com/office/drawing/2014/main" id="{9D1544B3-FA2C-456E-854D-7A31488BB7EF}"/>
+                <a16:creationId xmlns:a16="http://schemas.microsoft.com/office/drawing/2014/main" id="{5404AE9F-ECA2-4B64-93C2-51A81A898895}"/>
               </a:ext>
             </a:extLst>
           </p:cNvPr>
@@ -35199,7 +35188,7 @@
           <p:cNvPr id="70" name="">
             <a:extLst xmlns:a="http://schemas.openxmlformats.org/drawingml/2006/main">
               <a:ext uri="{FF2B5EF4-FFF2-40B4-BE49-F238E27FC236}">
-                <a16:creationId xmlns:a16="http://schemas.microsoft.com/office/drawing/2014/main" id="{8BDFF1D9-31A3-4AAF-8AA9-7C24D1281B6A}"/>
+                <a16:creationId xmlns:a16="http://schemas.microsoft.com/office/drawing/2014/main" id="{0B6DCA00-F5D8-4D45-AA91-CD589062572C}"/>
               </a:ext>
             </a:extLst>
           </p:cNvPr>
@@ -35232,7 +35221,7 @@
           <p:cNvPr id="71" name="">
             <a:extLst xmlns:a="http://schemas.openxmlformats.org/drawingml/2006/main">
               <a:ext uri="{FF2B5EF4-FFF2-40B4-BE49-F238E27FC236}">
-                <a16:creationId xmlns:a16="http://schemas.microsoft.com/office/drawing/2014/main" id="{CEE4083A-691B-4615-9CE6-D56E04F40A48}"/>
+                <a16:creationId xmlns:a16="http://schemas.microsoft.com/office/drawing/2014/main" id="{89F8D725-A55D-4498-9A90-C1E9315423C3}"/>
               </a:ext>
             </a:extLst>
           </p:cNvPr>
@@ -35290,7 +35279,7 @@
           <p:cNvPr id="72" name="">
             <a:extLst xmlns:a="http://schemas.openxmlformats.org/drawingml/2006/main">
               <a:ext uri="{FF2B5EF4-FFF2-40B4-BE49-F238E27FC236}">
-                <a16:creationId xmlns:a16="http://schemas.microsoft.com/office/drawing/2014/main" id="{BC99B0D1-41A5-4BE5-8990-FFE25CF0CDDB}"/>
+                <a16:creationId xmlns:a16="http://schemas.microsoft.com/office/drawing/2014/main" id="{7F9B5812-95AD-41A4-8FAF-C7E45EA74E3B}"/>
               </a:ext>
             </a:extLst>
           </p:cNvPr>
@@ -35348,7 +35337,7 @@
           <p:cNvPr id="73" name="">
             <a:extLst xmlns:a="http://schemas.openxmlformats.org/drawingml/2006/main">
               <a:ext uri="{FF2B5EF4-FFF2-40B4-BE49-F238E27FC236}">
-                <a16:creationId xmlns:a16="http://schemas.microsoft.com/office/drawing/2014/main" id="{93D0F1CD-DDF2-4BBF-BFF7-2E7E002AE72A}"/>
+                <a16:creationId xmlns:a16="http://schemas.microsoft.com/office/drawing/2014/main" id="{37ABBE2D-3C67-4558-83AE-F9935DCEA72D}"/>
               </a:ext>
             </a:extLst>
           </p:cNvPr>
@@ -35381,7 +35370,7 @@
           <p:cNvPr id="74" name="">
             <a:extLst xmlns:a="http://schemas.openxmlformats.org/drawingml/2006/main">
               <a:ext uri="{FF2B5EF4-FFF2-40B4-BE49-F238E27FC236}">
-                <a16:creationId xmlns:a16="http://schemas.microsoft.com/office/drawing/2014/main" id="{7DC8C96C-875D-4E52-94AC-12F9D52C4CDC}"/>
+                <a16:creationId xmlns:a16="http://schemas.microsoft.com/office/drawing/2014/main" id="{1436A383-2FC4-458B-9426-F36625403DAD}"/>
               </a:ext>
             </a:extLst>
           </p:cNvPr>
@@ -35439,7 +35428,7 @@
                 <a:latin typeface="Microsoft YaHei"/>
                 <a:ea typeface="Microsoft YaHei"/>
                 <a:cs typeface="Microsoft YaHei"/>
-                <a:hlinkClick xmlns:r="http://schemas.openxmlformats.org/officeDocument/2006/relationships" r:id="Rae12e184f5c8420a"/>
+                <a:hlinkClick xmlns:r="http://schemas.openxmlformats.org/officeDocument/2006/relationships" r:id="R37927974316a4e05"/>
               </a:rPr>
               <a:t>Qoder 存量重写案例</a:t>
             </a:r>
@@ -35451,7 +35440,7 @@
                 <a:latin typeface="Microsoft YaHei"/>
                 <a:ea typeface="Microsoft YaHei"/>
                 <a:cs typeface="Microsoft YaHei"/>
-                <a:hlinkClick xmlns:r="http://schemas.openxmlformats.org/officeDocument/2006/relationships" r:id="R50bdd7e848cf4954"/>
+                <a:hlinkClick xmlns:r="http://schemas.openxmlformats.org/officeDocument/2006/relationships" r:id="R5f463cd46d8e4ac4"/>
               </a:rPr>
               <a:t> · Quest Worktree</a:t>
             </a:r>
@@ -35463,7 +35452,7 @@
           <p:cNvPr id="75" name="">
             <a:extLst xmlns:a="http://schemas.openxmlformats.org/drawingml/2006/main">
               <a:ext uri="{FF2B5EF4-FFF2-40B4-BE49-F238E27FC236}">
-                <a16:creationId xmlns:a16="http://schemas.microsoft.com/office/drawing/2014/main" id="{A8B802AD-6822-4967-A775-AD4E03AAB71F}"/>
+                <a16:creationId xmlns:a16="http://schemas.microsoft.com/office/drawing/2014/main" id="{6A81822F-F6EC-493A-B071-D7E3FB330C1E}"/>
               </a:ext>
             </a:extLst>
           </p:cNvPr>
@@ -35519,7 +35508,7 @@
     </p:spTree>
     <p:extLst>
       <p:ext uri="{BB962C8B-B14F-4D97-AF65-F5344CB8AC3E}">
-        <p14:creationId xmlns:p14="http://schemas.microsoft.com/office/powerpoint/2010/main" val="1135470640"/>
+        <p14:creationId xmlns:p14="http://schemas.microsoft.com/office/powerpoint/2010/main" val="1520175285"/>
       </p:ext>
     </p:extLst>
   </p:cSld>
@@ -35550,7 +35539,7 @@
           <p:cNvPr id="82" name="">
             <a:extLst xmlns:a="http://schemas.openxmlformats.org/drawingml/2006/main">
               <a:ext uri="{FF2B5EF4-FFF2-40B4-BE49-F238E27FC236}">
-                <a16:creationId xmlns:a16="http://schemas.microsoft.com/office/drawing/2014/main" id="{D59DE8C5-55AD-4438-AB93-5182D742897A}"/>
+                <a16:creationId xmlns:a16="http://schemas.microsoft.com/office/drawing/2014/main" id="{8EA1A7B4-6030-4193-AEED-45D9CFEEE750}"/>
               </a:ext>
             </a:extLst>
           </p:cNvPr>
@@ -35583,7 +35572,7 @@
           <p:cNvPr id="2" name="">
             <a:extLst xmlns:a="http://schemas.openxmlformats.org/drawingml/2006/main">
               <a:ext uri="{FF2B5EF4-FFF2-40B4-BE49-F238E27FC236}">
-                <a16:creationId xmlns:a16="http://schemas.microsoft.com/office/drawing/2014/main" id="{FCAB3E14-B7DD-484A-9930-5E3B7CF1D9CE}"/>
+                <a16:creationId xmlns:a16="http://schemas.microsoft.com/office/drawing/2014/main" id="{197176F6-3D34-4C4A-861F-1D5E759DFCB2}"/>
               </a:ext>
             </a:extLst>
           </p:cNvPr>
@@ -35641,7 +35630,7 @@
           <p:cNvPr id="3" name="">
             <a:extLst xmlns:a="http://schemas.openxmlformats.org/drawingml/2006/main">
               <a:ext uri="{FF2B5EF4-FFF2-40B4-BE49-F238E27FC236}">
-                <a16:creationId xmlns:a16="http://schemas.microsoft.com/office/drawing/2014/main" id="{7CD2FCFA-9B84-4108-AA7E-8BAD4B191763}"/>
+                <a16:creationId xmlns:a16="http://schemas.microsoft.com/office/drawing/2014/main" id="{A9EAB300-F26C-4C48-84F3-86DA99D5CFA9}"/>
               </a:ext>
             </a:extLst>
           </p:cNvPr>
@@ -35699,7 +35688,7 @@
           <p:cNvPr id="4" name="">
             <a:extLst xmlns:a="http://schemas.openxmlformats.org/drawingml/2006/main">
               <a:ext uri="{FF2B5EF4-FFF2-40B4-BE49-F238E27FC236}">
-                <a16:creationId xmlns:a16="http://schemas.microsoft.com/office/drawing/2014/main" id="{EA1B1A9E-2BCB-47CF-86AF-3DDAE0D5F702}"/>
+                <a16:creationId xmlns:a16="http://schemas.microsoft.com/office/drawing/2014/main" id="{64EBEFD6-2E05-4CC7-829B-CDE0DF15801A}"/>
               </a:ext>
             </a:extLst>
           </p:cNvPr>
@@ -35732,7 +35721,7 @@
           <p:cNvPr id="5" name="">
             <a:extLst xmlns:a="http://schemas.openxmlformats.org/drawingml/2006/main">
               <a:ext uri="{FF2B5EF4-FFF2-40B4-BE49-F238E27FC236}">
-                <a16:creationId xmlns:a16="http://schemas.microsoft.com/office/drawing/2014/main" id="{7571F2B4-C594-4845-87E5-E16838700FD8}"/>
+                <a16:creationId xmlns:a16="http://schemas.microsoft.com/office/drawing/2014/main" id="{F00C9C59-AFBC-4830-87F0-BBC9B4149AD4}"/>
               </a:ext>
             </a:extLst>
           </p:cNvPr>
@@ -35790,7 +35779,7 @@
           <p:cNvPr id="6" name="">
             <a:extLst xmlns:a="http://schemas.openxmlformats.org/drawingml/2006/main">
               <a:ext uri="{FF2B5EF4-FFF2-40B4-BE49-F238E27FC236}">
-                <a16:creationId xmlns:a16="http://schemas.microsoft.com/office/drawing/2014/main" id="{23FE7325-2820-4D8F-BDAD-33F6AE379C5C}"/>
+                <a16:creationId xmlns:a16="http://schemas.microsoft.com/office/drawing/2014/main" id="{84EDC7DF-80F0-4E4F-B5BE-8C847C854A4F}"/>
               </a:ext>
             </a:extLst>
           </p:cNvPr>
@@ -35848,7 +35837,7 @@
           <p:cNvPr id="7" name="">
             <a:extLst xmlns:a="http://schemas.openxmlformats.org/drawingml/2006/main">
               <a:ext uri="{FF2B5EF4-FFF2-40B4-BE49-F238E27FC236}">
-                <a16:creationId xmlns:a16="http://schemas.microsoft.com/office/drawing/2014/main" id="{C543E159-983B-4AF2-AB02-52320A6BF319}"/>
+                <a16:creationId xmlns:a16="http://schemas.microsoft.com/office/drawing/2014/main" id="{16A56164-0EB6-423D-BF05-E04DB9444C87}"/>
               </a:ext>
             </a:extLst>
           </p:cNvPr>
@@ -35881,7 +35870,7 @@
           <p:cNvPr id="8" name="">
             <a:extLst xmlns:a="http://schemas.openxmlformats.org/drawingml/2006/main">
               <a:ext uri="{FF2B5EF4-FFF2-40B4-BE49-F238E27FC236}">
-                <a16:creationId xmlns:a16="http://schemas.microsoft.com/office/drawing/2014/main" id="{6BB337E3-5142-40A9-A17A-E62BCB8CFB91}"/>
+                <a16:creationId xmlns:a16="http://schemas.microsoft.com/office/drawing/2014/main" id="{B9348817-1692-454A-B35D-B79EABC20549}"/>
               </a:ext>
             </a:extLst>
           </p:cNvPr>
@@ -35914,7 +35903,7 @@
           <p:cNvPr id="9" name="">
             <a:extLst xmlns:a="http://schemas.openxmlformats.org/drawingml/2006/main">
               <a:ext uri="{FF2B5EF4-FFF2-40B4-BE49-F238E27FC236}">
-                <a16:creationId xmlns:a16="http://schemas.microsoft.com/office/drawing/2014/main" id="{578A67C1-90FB-485E-B775-D04B6A612AA4}"/>
+                <a16:creationId xmlns:a16="http://schemas.microsoft.com/office/drawing/2014/main" id="{8A6773F2-5BC5-49DE-88F8-4D51D0B70E78}"/>
               </a:ext>
             </a:extLst>
           </p:cNvPr>
@@ -35947,7 +35936,7 @@
           <p:cNvPr id="10" name="">
             <a:extLst xmlns:a="http://schemas.openxmlformats.org/drawingml/2006/main">
               <a:ext uri="{FF2B5EF4-FFF2-40B4-BE49-F238E27FC236}">
-                <a16:creationId xmlns:a16="http://schemas.microsoft.com/office/drawing/2014/main" id="{8F1426D3-709B-4F38-B409-411F15136E2D}"/>
+                <a16:creationId xmlns:a16="http://schemas.microsoft.com/office/drawing/2014/main" id="{3835BD19-4DA5-4B00-A315-5F8B8D001BD9}"/>
               </a:ext>
             </a:extLst>
           </p:cNvPr>
@@ -36005,7 +35994,7 @@
           <p:cNvPr id="11" name="">
             <a:extLst xmlns:a="http://schemas.openxmlformats.org/drawingml/2006/main">
               <a:ext uri="{FF2B5EF4-FFF2-40B4-BE49-F238E27FC236}">
-                <a16:creationId xmlns:a16="http://schemas.microsoft.com/office/drawing/2014/main" id="{3F19AF4E-590F-42C1-8CE5-82ADA2F7EDCE}"/>
+                <a16:creationId xmlns:a16="http://schemas.microsoft.com/office/drawing/2014/main" id="{91511B6B-1B39-4F8C-801A-55572A0401AE}"/>
               </a:ext>
             </a:extLst>
           </p:cNvPr>
@@ -36063,7 +36052,7 @@
           <p:cNvPr id="12" name="">
             <a:extLst xmlns:a="http://schemas.openxmlformats.org/drawingml/2006/main">
               <a:ext uri="{FF2B5EF4-FFF2-40B4-BE49-F238E27FC236}">
-                <a16:creationId xmlns:a16="http://schemas.microsoft.com/office/drawing/2014/main" id="{45F7FEB1-06D5-4BF5-9D6E-108C6F107591}"/>
+                <a16:creationId xmlns:a16="http://schemas.microsoft.com/office/drawing/2014/main" id="{1AF595CD-DE31-46FC-95DC-9421ED6BB594}"/>
               </a:ext>
             </a:extLst>
           </p:cNvPr>
@@ -36096,7 +36085,7 @@
           <p:cNvPr id="13" name="">
             <a:extLst xmlns:a="http://schemas.openxmlformats.org/drawingml/2006/main">
               <a:ext uri="{FF2B5EF4-FFF2-40B4-BE49-F238E27FC236}">
-                <a16:creationId xmlns:a16="http://schemas.microsoft.com/office/drawing/2014/main" id="{7115BE87-43C7-4F80-B594-6312BCF1167A}"/>
+                <a16:creationId xmlns:a16="http://schemas.microsoft.com/office/drawing/2014/main" id="{C85FECC7-6DA3-4793-B9B1-32666497F6C7}"/>
               </a:ext>
             </a:extLst>
           </p:cNvPr>
@@ -36129,7 +36118,7 @@
           <p:cNvPr id="14" name="">
             <a:extLst xmlns:a="http://schemas.openxmlformats.org/drawingml/2006/main">
               <a:ext uri="{FF2B5EF4-FFF2-40B4-BE49-F238E27FC236}">
-                <a16:creationId xmlns:a16="http://schemas.microsoft.com/office/drawing/2014/main" id="{49F215B4-65C8-4E88-83FB-26A87D0956EF}"/>
+                <a16:creationId xmlns:a16="http://schemas.microsoft.com/office/drawing/2014/main" id="{3FAFB221-27B1-4232-9BD9-B01675679EC6}"/>
               </a:ext>
             </a:extLst>
           </p:cNvPr>
@@ -36162,7 +36151,7 @@
           <p:cNvPr id="15" name="">
             <a:extLst xmlns:a="http://schemas.openxmlformats.org/drawingml/2006/main">
               <a:ext uri="{FF2B5EF4-FFF2-40B4-BE49-F238E27FC236}">
-                <a16:creationId xmlns:a16="http://schemas.microsoft.com/office/drawing/2014/main" id="{F7B35C37-A746-4EA5-82E7-E3AAD3183291}"/>
+                <a16:creationId xmlns:a16="http://schemas.microsoft.com/office/drawing/2014/main" id="{FFFA83FB-FB0B-4AA0-AD6D-D78AF5B7643A}"/>
               </a:ext>
             </a:extLst>
           </p:cNvPr>
@@ -36220,7 +36209,7 @@
           <p:cNvPr id="16" name="">
             <a:extLst xmlns:a="http://schemas.openxmlformats.org/drawingml/2006/main">
               <a:ext uri="{FF2B5EF4-FFF2-40B4-BE49-F238E27FC236}">
-                <a16:creationId xmlns:a16="http://schemas.microsoft.com/office/drawing/2014/main" id="{246EA87C-0345-4FD7-9307-2176C20DF49B}"/>
+                <a16:creationId xmlns:a16="http://schemas.microsoft.com/office/drawing/2014/main" id="{8CF832E4-7C30-4795-A46A-DB62D8E9CB26}"/>
               </a:ext>
             </a:extLst>
           </p:cNvPr>
@@ -36278,7 +36267,7 @@
           <p:cNvPr id="17" name="">
             <a:extLst xmlns:a="http://schemas.openxmlformats.org/drawingml/2006/main">
               <a:ext uri="{FF2B5EF4-FFF2-40B4-BE49-F238E27FC236}">
-                <a16:creationId xmlns:a16="http://schemas.microsoft.com/office/drawing/2014/main" id="{0B723F14-A608-4DFA-847A-603752A80C2D}"/>
+                <a16:creationId xmlns:a16="http://schemas.microsoft.com/office/drawing/2014/main" id="{16DE2FAE-37AE-4C99-9668-7C7435D353F6}"/>
               </a:ext>
             </a:extLst>
           </p:cNvPr>
@@ -36311,7 +36300,7 @@
           <p:cNvPr id="18" name="">
             <a:extLst xmlns:a="http://schemas.openxmlformats.org/drawingml/2006/main">
               <a:ext uri="{FF2B5EF4-FFF2-40B4-BE49-F238E27FC236}">
-                <a16:creationId xmlns:a16="http://schemas.microsoft.com/office/drawing/2014/main" id="{75F42C68-AACF-4AF5-8F08-0D3BC964531D}"/>
+                <a16:creationId xmlns:a16="http://schemas.microsoft.com/office/drawing/2014/main" id="{63EAD96C-27D6-4F98-9B3E-280AE3A295E0}"/>
               </a:ext>
             </a:extLst>
           </p:cNvPr>
@@ -36344,7 +36333,7 @@
           <p:cNvPr id="19" name="">
             <a:extLst xmlns:a="http://schemas.openxmlformats.org/drawingml/2006/main">
               <a:ext uri="{FF2B5EF4-FFF2-40B4-BE49-F238E27FC236}">
-                <a16:creationId xmlns:a16="http://schemas.microsoft.com/office/drawing/2014/main" id="{2DFF39C0-64D9-43AB-B970-955F40774908}"/>
+                <a16:creationId xmlns:a16="http://schemas.microsoft.com/office/drawing/2014/main" id="{1ACBD27A-1008-4512-9E71-6AD58E235309}"/>
               </a:ext>
             </a:extLst>
           </p:cNvPr>
@@ -36377,7 +36366,7 @@
           <p:cNvPr id="20" name="">
             <a:extLst xmlns:a="http://schemas.openxmlformats.org/drawingml/2006/main">
               <a:ext uri="{FF2B5EF4-FFF2-40B4-BE49-F238E27FC236}">
-                <a16:creationId xmlns:a16="http://schemas.microsoft.com/office/drawing/2014/main" id="{BD715856-B0EB-48ED-8B52-2D02BE283F0D}"/>
+                <a16:creationId xmlns:a16="http://schemas.microsoft.com/office/drawing/2014/main" id="{36110346-B08F-40A2-A99F-A1F55D5AB853}"/>
               </a:ext>
             </a:extLst>
           </p:cNvPr>
@@ -36435,7 +36424,7 @@
           <p:cNvPr id="21" name="">
             <a:extLst xmlns:a="http://schemas.openxmlformats.org/drawingml/2006/main">
               <a:ext uri="{FF2B5EF4-FFF2-40B4-BE49-F238E27FC236}">
-                <a16:creationId xmlns:a16="http://schemas.microsoft.com/office/drawing/2014/main" id="{B1BD9FC1-8FE8-4C6C-82E8-660E2A81A412}"/>
+                <a16:creationId xmlns:a16="http://schemas.microsoft.com/office/drawing/2014/main" id="{2FFFA09B-7489-4E85-BC64-1DFE62E9E61B}"/>
               </a:ext>
             </a:extLst>
           </p:cNvPr>
@@ -36493,7 +36482,7 @@
           <p:cNvPr id="22" name="">
             <a:extLst xmlns:a="http://schemas.openxmlformats.org/drawingml/2006/main">
               <a:ext uri="{FF2B5EF4-FFF2-40B4-BE49-F238E27FC236}">
-                <a16:creationId xmlns:a16="http://schemas.microsoft.com/office/drawing/2014/main" id="{D1AE17C5-7F1A-491F-BB22-0957EA9D1F14}"/>
+                <a16:creationId xmlns:a16="http://schemas.microsoft.com/office/drawing/2014/main" id="{4A3F9ABC-5C43-4B92-A92B-748AEC994A2E}"/>
               </a:ext>
             </a:extLst>
           </p:cNvPr>
@@ -36526,7 +36515,7 @@
           <p:cNvPr id="23" name="">
             <a:extLst xmlns:a="http://schemas.openxmlformats.org/drawingml/2006/main">
               <a:ext uri="{FF2B5EF4-FFF2-40B4-BE49-F238E27FC236}">
-                <a16:creationId xmlns:a16="http://schemas.microsoft.com/office/drawing/2014/main" id="{063AF100-D334-4DFB-91AF-4E38B0401C6C}"/>
+                <a16:creationId xmlns:a16="http://schemas.microsoft.com/office/drawing/2014/main" id="{D7B1671D-94F9-48B4-B44A-23E6D9BDFAFF}"/>
               </a:ext>
             </a:extLst>
           </p:cNvPr>
@@ -36559,7 +36548,7 @@
           <p:cNvPr id="24" name="">
             <a:extLst xmlns:a="http://schemas.openxmlformats.org/drawingml/2006/main">
               <a:ext uri="{FF2B5EF4-FFF2-40B4-BE49-F238E27FC236}">
-                <a16:creationId xmlns:a16="http://schemas.microsoft.com/office/drawing/2014/main" id="{7B6D2F78-3994-4651-8CEA-9B004EEA00EA}"/>
+                <a16:creationId xmlns:a16="http://schemas.microsoft.com/office/drawing/2014/main" id="{2B2AE607-9745-4202-A6F1-08F3C44C118B}"/>
               </a:ext>
             </a:extLst>
           </p:cNvPr>
@@ -36592,7 +36581,7 @@
           <p:cNvPr id="25" name="">
             <a:extLst xmlns:a="http://schemas.openxmlformats.org/drawingml/2006/main">
               <a:ext uri="{FF2B5EF4-FFF2-40B4-BE49-F238E27FC236}">
-                <a16:creationId xmlns:a16="http://schemas.microsoft.com/office/drawing/2014/main" id="{71A29543-AD3B-4FA2-A7A9-FA10C2AB8414}"/>
+                <a16:creationId xmlns:a16="http://schemas.microsoft.com/office/drawing/2014/main" id="{A38AAC7A-5D1A-4B93-9490-36B4C610A8A9}"/>
               </a:ext>
             </a:extLst>
           </p:cNvPr>
@@ -36650,7 +36639,7 @@
           <p:cNvPr id="26" name="">
             <a:extLst xmlns:a="http://schemas.openxmlformats.org/drawingml/2006/main">
               <a:ext uri="{FF2B5EF4-FFF2-40B4-BE49-F238E27FC236}">
-                <a16:creationId xmlns:a16="http://schemas.microsoft.com/office/drawing/2014/main" id="{6E25239F-A9C7-48D6-83D8-B6A2328823B2}"/>
+                <a16:creationId xmlns:a16="http://schemas.microsoft.com/office/drawing/2014/main" id="{765C09C1-6258-42BE-B284-BC9A3869F78F}"/>
               </a:ext>
             </a:extLst>
           </p:cNvPr>
@@ -36708,7 +36697,7 @@
           <p:cNvPr id="27" name="">
             <a:extLst xmlns:a="http://schemas.openxmlformats.org/drawingml/2006/main">
               <a:ext uri="{FF2B5EF4-FFF2-40B4-BE49-F238E27FC236}">
-                <a16:creationId xmlns:a16="http://schemas.microsoft.com/office/drawing/2014/main" id="{3DBC860A-9EDB-48F2-90EE-03E3E3802E20}"/>
+                <a16:creationId xmlns:a16="http://schemas.microsoft.com/office/drawing/2014/main" id="{207B24DD-B8DB-4D00-92A3-04A831FECCBC}"/>
               </a:ext>
             </a:extLst>
           </p:cNvPr>
@@ -36766,7 +36755,7 @@
           <p:cNvPr id="28" name="">
             <a:extLst xmlns:a="http://schemas.openxmlformats.org/drawingml/2006/main">
               <a:ext uri="{FF2B5EF4-FFF2-40B4-BE49-F238E27FC236}">
-                <a16:creationId xmlns:a16="http://schemas.microsoft.com/office/drawing/2014/main" id="{9AF41D97-4EE7-4EA6-A0C9-7A43584C8582}"/>
+                <a16:creationId xmlns:a16="http://schemas.microsoft.com/office/drawing/2014/main" id="{8D8A9AB8-8791-4224-8BB6-6CE44910789B}"/>
               </a:ext>
             </a:extLst>
           </p:cNvPr>
@@ -36799,7 +36788,7 @@
           <p:cNvPr id="29" name="">
             <a:extLst xmlns:a="http://schemas.openxmlformats.org/drawingml/2006/main">
               <a:ext uri="{FF2B5EF4-FFF2-40B4-BE49-F238E27FC236}">
-                <a16:creationId xmlns:a16="http://schemas.microsoft.com/office/drawing/2014/main" id="{118453D5-95EA-4C57-8290-EC8F3780C9C4}"/>
+                <a16:creationId xmlns:a16="http://schemas.microsoft.com/office/drawing/2014/main" id="{DDA2ABAD-7629-44EB-BBAC-22C7143E2B62}"/>
               </a:ext>
             </a:extLst>
           </p:cNvPr>
@@ -36857,7 +36846,7 @@
           <p:cNvPr id="30" name="">
             <a:extLst xmlns:a="http://schemas.openxmlformats.org/drawingml/2006/main">
               <a:ext uri="{FF2B5EF4-FFF2-40B4-BE49-F238E27FC236}">
-                <a16:creationId xmlns:a16="http://schemas.microsoft.com/office/drawing/2014/main" id="{DE4B487E-4DA1-4B81-8237-BC57EEDCB33A}"/>
+                <a16:creationId xmlns:a16="http://schemas.microsoft.com/office/drawing/2014/main" id="{82D7D1DE-3650-4CBA-A3F6-533D3342012C}"/>
               </a:ext>
             </a:extLst>
           </p:cNvPr>
@@ -36890,7 +36879,7 @@
           <p:cNvPr id="31" name="">
             <a:extLst xmlns:a="http://schemas.openxmlformats.org/drawingml/2006/main">
               <a:ext uri="{FF2B5EF4-FFF2-40B4-BE49-F238E27FC236}">
-                <a16:creationId xmlns:a16="http://schemas.microsoft.com/office/drawing/2014/main" id="{9C39268E-8E09-48F7-8C6B-499D611CDBA2}"/>
+                <a16:creationId xmlns:a16="http://schemas.microsoft.com/office/drawing/2014/main" id="{C1F2D1BB-0AA3-4CD0-99C0-78D4C537EBEE}"/>
               </a:ext>
             </a:extLst>
           </p:cNvPr>
@@ -36948,7 +36937,7 @@
           <p:cNvPr id="32" name="">
             <a:extLst xmlns:a="http://schemas.openxmlformats.org/drawingml/2006/main">
               <a:ext uri="{FF2B5EF4-FFF2-40B4-BE49-F238E27FC236}">
-                <a16:creationId xmlns:a16="http://schemas.microsoft.com/office/drawing/2014/main" id="{932D6B5D-19BC-490C-B4D4-341B56BA6DA5}"/>
+                <a16:creationId xmlns:a16="http://schemas.microsoft.com/office/drawing/2014/main" id="{946EC6B6-301D-4895-A27A-AC3D69C0496C}"/>
               </a:ext>
             </a:extLst>
           </p:cNvPr>
@@ -36981,7 +36970,7 @@
           <p:cNvPr id="33" name="">
             <a:extLst xmlns:a="http://schemas.openxmlformats.org/drawingml/2006/main">
               <a:ext uri="{FF2B5EF4-FFF2-40B4-BE49-F238E27FC236}">
-                <a16:creationId xmlns:a16="http://schemas.microsoft.com/office/drawing/2014/main" id="{CB39930E-E4AF-4F8A-B924-85B559C32C8E}"/>
+                <a16:creationId xmlns:a16="http://schemas.microsoft.com/office/drawing/2014/main" id="{F64EBCCF-0810-4333-81BC-7E5869EA7EF1}"/>
               </a:ext>
             </a:extLst>
           </p:cNvPr>
@@ -37039,7 +37028,7 @@
           <p:cNvPr id="34" name="">
             <a:extLst xmlns:a="http://schemas.openxmlformats.org/drawingml/2006/main">
               <a:ext uri="{FF2B5EF4-FFF2-40B4-BE49-F238E27FC236}">
-                <a16:creationId xmlns:a16="http://schemas.microsoft.com/office/drawing/2014/main" id="{39D1A17F-DB95-4A5F-876F-9334BE845DD8}"/>
+                <a16:creationId xmlns:a16="http://schemas.microsoft.com/office/drawing/2014/main" id="{6F446CE4-7F6E-4C6C-A19D-88AAD5F02EA2}"/>
               </a:ext>
             </a:extLst>
           </p:cNvPr>
@@ -37072,7 +37061,7 @@
           <p:cNvPr id="35" name="">
             <a:extLst xmlns:a="http://schemas.openxmlformats.org/drawingml/2006/main">
               <a:ext uri="{FF2B5EF4-FFF2-40B4-BE49-F238E27FC236}">
-                <a16:creationId xmlns:a16="http://schemas.microsoft.com/office/drawing/2014/main" id="{890212E4-44AC-4179-BD06-1F89C52696D9}"/>
+                <a16:creationId xmlns:a16="http://schemas.microsoft.com/office/drawing/2014/main" id="{68CEC3E7-2C1D-4097-8E2A-87B939A392EC}"/>
               </a:ext>
             </a:extLst>
           </p:cNvPr>
@@ -37130,7 +37119,7 @@
           <p:cNvPr id="36" name="">
             <a:extLst xmlns:a="http://schemas.openxmlformats.org/drawingml/2006/main">
               <a:ext uri="{FF2B5EF4-FFF2-40B4-BE49-F238E27FC236}">
-                <a16:creationId xmlns:a16="http://schemas.microsoft.com/office/drawing/2014/main" id="{C22601E0-5E61-423F-ADE4-AB9092927F7C}"/>
+                <a16:creationId xmlns:a16="http://schemas.microsoft.com/office/drawing/2014/main" id="{BE9A5EE3-F685-4C52-8AB4-86DE63931A25}"/>
               </a:ext>
             </a:extLst>
           </p:cNvPr>
@@ -37163,7 +37152,7 @@
           <p:cNvPr id="37" name="">
             <a:extLst xmlns:a="http://schemas.openxmlformats.org/drawingml/2006/main">
               <a:ext uri="{FF2B5EF4-FFF2-40B4-BE49-F238E27FC236}">
-                <a16:creationId xmlns:a16="http://schemas.microsoft.com/office/drawing/2014/main" id="{043C3B0E-BCF7-417F-B24F-3C446CB18640}"/>
+                <a16:creationId xmlns:a16="http://schemas.microsoft.com/office/drawing/2014/main" id="{F6A6A246-4DB1-4BC7-8F94-8AF2779D237C}"/>
               </a:ext>
             </a:extLst>
           </p:cNvPr>
@@ -37221,7 +37210,7 @@
           <p:cNvPr id="38" name="">
             <a:extLst xmlns:a="http://schemas.openxmlformats.org/drawingml/2006/main">
               <a:ext uri="{FF2B5EF4-FFF2-40B4-BE49-F238E27FC236}">
-                <a16:creationId xmlns:a16="http://schemas.microsoft.com/office/drawing/2014/main" id="{3F896AAD-81AF-4DE2-98A8-709DE07F5A37}"/>
+                <a16:creationId xmlns:a16="http://schemas.microsoft.com/office/drawing/2014/main" id="{7D1731AC-A15E-475A-A6A9-05D2440D8FE0}"/>
               </a:ext>
             </a:extLst>
           </p:cNvPr>
@@ -37254,7 +37243,7 @@
           <p:cNvPr id="39" name="">
             <a:extLst xmlns:a="http://schemas.openxmlformats.org/drawingml/2006/main">
               <a:ext uri="{FF2B5EF4-FFF2-40B4-BE49-F238E27FC236}">
-                <a16:creationId xmlns:a16="http://schemas.microsoft.com/office/drawing/2014/main" id="{7F27D969-CED0-4232-AB0A-E5A98A62BFA9}"/>
+                <a16:creationId xmlns:a16="http://schemas.microsoft.com/office/drawing/2014/main" id="{85524F04-F7EB-45E5-815B-D77A3816D861}"/>
               </a:ext>
             </a:extLst>
           </p:cNvPr>
@@ -37312,7 +37301,7 @@
           <p:cNvPr id="40" name="">
             <a:extLst xmlns:a="http://schemas.openxmlformats.org/drawingml/2006/main">
               <a:ext uri="{FF2B5EF4-FFF2-40B4-BE49-F238E27FC236}">
-                <a16:creationId xmlns:a16="http://schemas.microsoft.com/office/drawing/2014/main" id="{03BBF68F-0124-42E6-8AD9-5AA814F29F60}"/>
+                <a16:creationId xmlns:a16="http://schemas.microsoft.com/office/drawing/2014/main" id="{93ABCC6A-89CE-46D0-933C-0FDE714ECC31}"/>
               </a:ext>
             </a:extLst>
           </p:cNvPr>
@@ -37345,7 +37334,7 @@
           <p:cNvPr id="41" name="">
             <a:extLst xmlns:a="http://schemas.openxmlformats.org/drawingml/2006/main">
               <a:ext uri="{FF2B5EF4-FFF2-40B4-BE49-F238E27FC236}">
-                <a16:creationId xmlns:a16="http://schemas.microsoft.com/office/drawing/2014/main" id="{5261E4D4-E224-49D7-AFED-FB7FD966121C}"/>
+                <a16:creationId xmlns:a16="http://schemas.microsoft.com/office/drawing/2014/main" id="{544CC4E2-F937-43A4-B40D-0B524E26FEF2}"/>
               </a:ext>
             </a:extLst>
           </p:cNvPr>
@@ -37403,7 +37392,7 @@
           <p:cNvPr id="42" name="">
             <a:extLst xmlns:a="http://schemas.openxmlformats.org/drawingml/2006/main">
               <a:ext uri="{FF2B5EF4-FFF2-40B4-BE49-F238E27FC236}">
-                <a16:creationId xmlns:a16="http://schemas.microsoft.com/office/drawing/2014/main" id="{5199E724-D16B-4F91-BF62-90BC48EEF5D5}"/>
+                <a16:creationId xmlns:a16="http://schemas.microsoft.com/office/drawing/2014/main" id="{A3DF39BE-22AF-4AC6-AF6F-73EF0E690930}"/>
               </a:ext>
             </a:extLst>
           </p:cNvPr>
@@ -37436,7 +37425,7 @@
           <p:cNvPr id="43" name="">
             <a:extLst xmlns:a="http://schemas.openxmlformats.org/drawingml/2006/main">
               <a:ext uri="{FF2B5EF4-FFF2-40B4-BE49-F238E27FC236}">
-                <a16:creationId xmlns:a16="http://schemas.microsoft.com/office/drawing/2014/main" id="{B1BF2274-99C1-46A9-9089-588DC74C63B9}"/>
+                <a16:creationId xmlns:a16="http://schemas.microsoft.com/office/drawing/2014/main" id="{3706C9EB-DAA2-4C48-9A38-4199875E6854}"/>
               </a:ext>
             </a:extLst>
           </p:cNvPr>
@@ -37494,7 +37483,7 @@
           <p:cNvPr id="44" name="">
             <a:extLst xmlns:a="http://schemas.openxmlformats.org/drawingml/2006/main">
               <a:ext uri="{FF2B5EF4-FFF2-40B4-BE49-F238E27FC236}">
-                <a16:creationId xmlns:a16="http://schemas.microsoft.com/office/drawing/2014/main" id="{6EF1DBF2-594D-4F98-B7FE-B72966D017BD}"/>
+                <a16:creationId xmlns:a16="http://schemas.microsoft.com/office/drawing/2014/main" id="{5397AC68-9430-4D02-8833-B2DC65404F24}"/>
               </a:ext>
             </a:extLst>
           </p:cNvPr>
@@ -37527,7 +37516,7 @@
           <p:cNvPr id="45" name="">
             <a:extLst xmlns:a="http://schemas.openxmlformats.org/drawingml/2006/main">
               <a:ext uri="{FF2B5EF4-FFF2-40B4-BE49-F238E27FC236}">
-                <a16:creationId xmlns:a16="http://schemas.microsoft.com/office/drawing/2014/main" id="{5A7C669D-A27A-4F69-AA96-FCA91CBDAB05}"/>
+                <a16:creationId xmlns:a16="http://schemas.microsoft.com/office/drawing/2014/main" id="{1ED3A6DD-E0E5-46F3-B8D1-B37CA82C5BF6}"/>
               </a:ext>
             </a:extLst>
           </p:cNvPr>
@@ -37585,7 +37574,7 @@
           <p:cNvPr id="46" name="">
             <a:extLst xmlns:a="http://schemas.openxmlformats.org/drawingml/2006/main">
               <a:ext uri="{FF2B5EF4-FFF2-40B4-BE49-F238E27FC236}">
-                <a16:creationId xmlns:a16="http://schemas.microsoft.com/office/drawing/2014/main" id="{7726ACBA-802C-4EC3-A026-38DD9C29F8F0}"/>
+                <a16:creationId xmlns:a16="http://schemas.microsoft.com/office/drawing/2014/main" id="{200A54CD-FA79-461E-9BD2-BFDE550597BE}"/>
               </a:ext>
             </a:extLst>
           </p:cNvPr>
@@ -37618,7 +37607,7 @@
           <p:cNvPr id="47" name="">
             <a:extLst xmlns:a="http://schemas.openxmlformats.org/drawingml/2006/main">
               <a:ext uri="{FF2B5EF4-FFF2-40B4-BE49-F238E27FC236}">
-                <a16:creationId xmlns:a16="http://schemas.microsoft.com/office/drawing/2014/main" id="{93C20C41-01B1-454B-902A-A9953DD21B6A}"/>
+                <a16:creationId xmlns:a16="http://schemas.microsoft.com/office/drawing/2014/main" id="{D55F630B-9A76-4C25-95FB-D359507716D7}"/>
               </a:ext>
             </a:extLst>
           </p:cNvPr>
@@ -37676,7 +37665,7 @@
           <p:cNvPr id="48" name="">
             <a:extLst xmlns:a="http://schemas.openxmlformats.org/drawingml/2006/main">
               <a:ext uri="{FF2B5EF4-FFF2-40B4-BE49-F238E27FC236}">
-                <a16:creationId xmlns:a16="http://schemas.microsoft.com/office/drawing/2014/main" id="{535A526A-F18D-4150-A35E-A40EB2EFAEEE}"/>
+                <a16:creationId xmlns:a16="http://schemas.microsoft.com/office/drawing/2014/main" id="{522BC901-BC46-4E6C-9B0B-459351646A82}"/>
               </a:ext>
             </a:extLst>
           </p:cNvPr>
@@ -37709,7 +37698,7 @@
           <p:cNvPr id="49" name="">
             <a:extLst xmlns:a="http://schemas.openxmlformats.org/drawingml/2006/main">
               <a:ext uri="{FF2B5EF4-FFF2-40B4-BE49-F238E27FC236}">
-                <a16:creationId xmlns:a16="http://schemas.microsoft.com/office/drawing/2014/main" id="{EE9DA3F0-E1FF-4539-B844-42C6AF1A812C}"/>
+                <a16:creationId xmlns:a16="http://schemas.microsoft.com/office/drawing/2014/main" id="{0AC702FD-F88B-481F-8719-864B085A0CB7}"/>
               </a:ext>
             </a:extLst>
           </p:cNvPr>
@@ -37767,7 +37756,7 @@
           <p:cNvPr id="50" name="">
             <a:extLst xmlns:a="http://schemas.openxmlformats.org/drawingml/2006/main">
               <a:ext uri="{FF2B5EF4-FFF2-40B4-BE49-F238E27FC236}">
-                <a16:creationId xmlns:a16="http://schemas.microsoft.com/office/drawing/2014/main" id="{3FC27811-958B-4D83-9F1C-17AAF9B49DE7}"/>
+                <a16:creationId xmlns:a16="http://schemas.microsoft.com/office/drawing/2014/main" id="{806573E5-7678-4AA5-8522-96BAD4F7B518}"/>
               </a:ext>
             </a:extLst>
           </p:cNvPr>
@@ -37800,7 +37789,7 @@
           <p:cNvPr id="51" name="">
             <a:extLst xmlns:a="http://schemas.openxmlformats.org/drawingml/2006/main">
               <a:ext uri="{FF2B5EF4-FFF2-40B4-BE49-F238E27FC236}">
-                <a16:creationId xmlns:a16="http://schemas.microsoft.com/office/drawing/2014/main" id="{58DF1026-D039-4262-87BD-D563B6B6BE2C}"/>
+                <a16:creationId xmlns:a16="http://schemas.microsoft.com/office/drawing/2014/main" id="{F66A39C0-277C-48D5-BC99-C2FD0D874A20}"/>
               </a:ext>
             </a:extLst>
           </p:cNvPr>
@@ -37858,7 +37847,7 @@
           <p:cNvPr id="52" name="">
             <a:extLst xmlns:a="http://schemas.openxmlformats.org/drawingml/2006/main">
               <a:ext uri="{FF2B5EF4-FFF2-40B4-BE49-F238E27FC236}">
-                <a16:creationId xmlns:a16="http://schemas.microsoft.com/office/drawing/2014/main" id="{78DB8FFB-4454-417B-B7FF-80F766960AB2}"/>
+                <a16:creationId xmlns:a16="http://schemas.microsoft.com/office/drawing/2014/main" id="{110EEF6D-9CFF-41D9-8663-CB23087F2668}"/>
               </a:ext>
             </a:extLst>
           </p:cNvPr>
@@ -37891,7 +37880,7 @@
           <p:cNvPr id="53" name="">
             <a:extLst xmlns:a="http://schemas.openxmlformats.org/drawingml/2006/main">
               <a:ext uri="{FF2B5EF4-FFF2-40B4-BE49-F238E27FC236}">
-                <a16:creationId xmlns:a16="http://schemas.microsoft.com/office/drawing/2014/main" id="{2ED10B01-E07C-4CC7-B0C6-71B143FC8BB3}"/>
+                <a16:creationId xmlns:a16="http://schemas.microsoft.com/office/drawing/2014/main" id="{1EC058BE-61F6-46A8-88F0-C284821E5363}"/>
               </a:ext>
             </a:extLst>
           </p:cNvPr>
@@ -37949,7 +37938,7 @@
           <p:cNvPr id="54" name="">
             <a:extLst xmlns:a="http://schemas.openxmlformats.org/drawingml/2006/main">
               <a:ext uri="{FF2B5EF4-FFF2-40B4-BE49-F238E27FC236}">
-                <a16:creationId xmlns:a16="http://schemas.microsoft.com/office/drawing/2014/main" id="{EEBAA015-F37C-460C-BF5A-428AFF93B094}"/>
+                <a16:creationId xmlns:a16="http://schemas.microsoft.com/office/drawing/2014/main" id="{26F1D5B1-4CA8-4713-BDFD-B93658BBE41B}"/>
               </a:ext>
             </a:extLst>
           </p:cNvPr>
@@ -37982,7 +37971,7 @@
           <p:cNvPr id="55" name="">
             <a:extLst xmlns:a="http://schemas.openxmlformats.org/drawingml/2006/main">
               <a:ext uri="{FF2B5EF4-FFF2-40B4-BE49-F238E27FC236}">
-                <a16:creationId xmlns:a16="http://schemas.microsoft.com/office/drawing/2014/main" id="{2E6BDF08-5474-4A44-9953-B4E3D94EB0E5}"/>
+                <a16:creationId xmlns:a16="http://schemas.microsoft.com/office/drawing/2014/main" id="{43DB6A3E-5738-4BE5-B139-F58DBC4D1327}"/>
               </a:ext>
             </a:extLst>
           </p:cNvPr>
@@ -38040,7 +38029,7 @@
           <p:cNvPr id="56" name="">
             <a:extLst xmlns:a="http://schemas.openxmlformats.org/drawingml/2006/main">
               <a:ext uri="{FF2B5EF4-FFF2-40B4-BE49-F238E27FC236}">
-                <a16:creationId xmlns:a16="http://schemas.microsoft.com/office/drawing/2014/main" id="{204283C7-207A-4625-A57E-5338BAD9E087}"/>
+                <a16:creationId xmlns:a16="http://schemas.microsoft.com/office/drawing/2014/main" id="{60882692-CA6B-425F-B42B-D678D8AE1237}"/>
               </a:ext>
             </a:extLst>
           </p:cNvPr>
@@ -38073,7 +38062,7 @@
           <p:cNvPr id="57" name="">
             <a:extLst xmlns:a="http://schemas.openxmlformats.org/drawingml/2006/main">
               <a:ext uri="{FF2B5EF4-FFF2-40B4-BE49-F238E27FC236}">
-                <a16:creationId xmlns:a16="http://schemas.microsoft.com/office/drawing/2014/main" id="{4BA56322-4A71-4B0D-BD8A-8081B69D3243}"/>
+                <a16:creationId xmlns:a16="http://schemas.microsoft.com/office/drawing/2014/main" id="{0596D4A0-3D4A-4486-9FBF-C5EA7622BD83}"/>
               </a:ext>
             </a:extLst>
           </p:cNvPr>
@@ -38131,7 +38120,7 @@
           <p:cNvPr id="58" name="">
             <a:extLst xmlns:a="http://schemas.openxmlformats.org/drawingml/2006/main">
               <a:ext uri="{FF2B5EF4-FFF2-40B4-BE49-F238E27FC236}">
-                <a16:creationId xmlns:a16="http://schemas.microsoft.com/office/drawing/2014/main" id="{AEB779BF-A262-4893-9191-FEC2D78001C5}"/>
+                <a16:creationId xmlns:a16="http://schemas.microsoft.com/office/drawing/2014/main" id="{B6A91014-F67E-4C72-A59D-61FECE79A913}"/>
               </a:ext>
             </a:extLst>
           </p:cNvPr>
@@ -38164,7 +38153,7 @@
           <p:cNvPr id="59" name="">
             <a:extLst xmlns:a="http://schemas.openxmlformats.org/drawingml/2006/main">
               <a:ext uri="{FF2B5EF4-FFF2-40B4-BE49-F238E27FC236}">
-                <a16:creationId xmlns:a16="http://schemas.microsoft.com/office/drawing/2014/main" id="{866DB157-BB4D-4271-8FC1-E1D6543DA9E7}"/>
+                <a16:creationId xmlns:a16="http://schemas.microsoft.com/office/drawing/2014/main" id="{E17C62BA-A6C5-4E45-9D9D-710CD208E277}"/>
               </a:ext>
             </a:extLst>
           </p:cNvPr>
@@ -38222,7 +38211,7 @@
           <p:cNvPr id="60" name="">
             <a:extLst xmlns:a="http://schemas.openxmlformats.org/drawingml/2006/main">
               <a:ext uri="{FF2B5EF4-FFF2-40B4-BE49-F238E27FC236}">
-                <a16:creationId xmlns:a16="http://schemas.microsoft.com/office/drawing/2014/main" id="{8CC44705-B24B-44B0-93A5-9CCD78486726}"/>
+                <a16:creationId xmlns:a16="http://schemas.microsoft.com/office/drawing/2014/main" id="{1C094ABD-6877-417C-A8D4-9D5714B9133B}"/>
               </a:ext>
             </a:extLst>
           </p:cNvPr>
@@ -38255,7 +38244,7 @@
           <p:cNvPr id="61" name="">
             <a:extLst xmlns:a="http://schemas.openxmlformats.org/drawingml/2006/main">
               <a:ext uri="{FF2B5EF4-FFF2-40B4-BE49-F238E27FC236}">
-                <a16:creationId xmlns:a16="http://schemas.microsoft.com/office/drawing/2014/main" id="{50D22A54-8AE4-45CA-AD35-6BC9C6F5CF9B}"/>
+                <a16:creationId xmlns:a16="http://schemas.microsoft.com/office/drawing/2014/main" id="{63D4AB3B-560B-4B08-91B0-B47598467400}"/>
               </a:ext>
             </a:extLst>
           </p:cNvPr>
@@ -38313,7 +38302,7 @@
           <p:cNvPr id="62" name="">
             <a:extLst xmlns:a="http://schemas.openxmlformats.org/drawingml/2006/main">
               <a:ext uri="{FF2B5EF4-FFF2-40B4-BE49-F238E27FC236}">
-                <a16:creationId xmlns:a16="http://schemas.microsoft.com/office/drawing/2014/main" id="{4F8C0691-0A88-4631-AD84-3D5750450288}"/>
+                <a16:creationId xmlns:a16="http://schemas.microsoft.com/office/drawing/2014/main" id="{D2F9B103-3D4B-4F91-AE6C-0D95AFFF51D2}"/>
               </a:ext>
             </a:extLst>
           </p:cNvPr>
@@ -38346,7 +38335,7 @@
           <p:cNvPr id="63" name="">
             <a:extLst xmlns:a="http://schemas.openxmlformats.org/drawingml/2006/main">
               <a:ext uri="{FF2B5EF4-FFF2-40B4-BE49-F238E27FC236}">
-                <a16:creationId xmlns:a16="http://schemas.microsoft.com/office/drawing/2014/main" id="{F7AC8367-BB52-46E7-938C-DEC81FCE0F3A}"/>
+                <a16:creationId xmlns:a16="http://schemas.microsoft.com/office/drawing/2014/main" id="{3BA57D2D-C07E-4921-A846-FF61DDABD263}"/>
               </a:ext>
             </a:extLst>
           </p:cNvPr>
@@ -38404,7 +38393,7 @@
           <p:cNvPr id="64" name="">
             <a:extLst xmlns:a="http://schemas.openxmlformats.org/drawingml/2006/main">
               <a:ext uri="{FF2B5EF4-FFF2-40B4-BE49-F238E27FC236}">
-                <a16:creationId xmlns:a16="http://schemas.microsoft.com/office/drawing/2014/main" id="{15409FAA-2E55-4361-B2F2-FBDD6BF6297B}"/>
+                <a16:creationId xmlns:a16="http://schemas.microsoft.com/office/drawing/2014/main" id="{240F3686-09AE-4D79-BBC6-5086791879D1}"/>
               </a:ext>
             </a:extLst>
           </p:cNvPr>
@@ -38437,7 +38426,7 @@
           <p:cNvPr id="65" name="">
             <a:extLst xmlns:a="http://schemas.openxmlformats.org/drawingml/2006/main">
               <a:ext uri="{FF2B5EF4-FFF2-40B4-BE49-F238E27FC236}">
-                <a16:creationId xmlns:a16="http://schemas.microsoft.com/office/drawing/2014/main" id="{41AA22B2-5BF2-4C99-A59B-9FC048619C46}"/>
+                <a16:creationId xmlns:a16="http://schemas.microsoft.com/office/drawing/2014/main" id="{007AC0FE-ED0F-450B-B802-D3FB368BAB5A}"/>
               </a:ext>
             </a:extLst>
           </p:cNvPr>
@@ -38495,7 +38484,7 @@
           <p:cNvPr id="66" name="">
             <a:extLst xmlns:a="http://schemas.openxmlformats.org/drawingml/2006/main">
               <a:ext uri="{FF2B5EF4-FFF2-40B4-BE49-F238E27FC236}">
-                <a16:creationId xmlns:a16="http://schemas.microsoft.com/office/drawing/2014/main" id="{E7CABB4F-67A4-4EA4-813D-C2C8B5B4AE7A}"/>
+                <a16:creationId xmlns:a16="http://schemas.microsoft.com/office/drawing/2014/main" id="{EFAE84DC-AF32-4AFC-AE71-951D3161DC28}"/>
               </a:ext>
             </a:extLst>
           </p:cNvPr>
@@ -38528,7 +38517,7 @@
           <p:cNvPr id="67" name="">
             <a:extLst xmlns:a="http://schemas.openxmlformats.org/drawingml/2006/main">
               <a:ext uri="{FF2B5EF4-FFF2-40B4-BE49-F238E27FC236}">
-                <a16:creationId xmlns:a16="http://schemas.microsoft.com/office/drawing/2014/main" id="{247E0244-60C6-46FD-93E5-58725CA25960}"/>
+                <a16:creationId xmlns:a16="http://schemas.microsoft.com/office/drawing/2014/main" id="{55F9706F-7374-4773-BE3E-EBAEDB0A9C3B}"/>
               </a:ext>
             </a:extLst>
           </p:cNvPr>
@@ -38586,7 +38575,7 @@
           <p:cNvPr id="68" name="">
             <a:extLst xmlns:a="http://schemas.openxmlformats.org/drawingml/2006/main">
               <a:ext uri="{FF2B5EF4-FFF2-40B4-BE49-F238E27FC236}">
-                <a16:creationId xmlns:a16="http://schemas.microsoft.com/office/drawing/2014/main" id="{2775D0E1-000D-41C2-B7FF-36B1275BEACB}"/>
+                <a16:creationId xmlns:a16="http://schemas.microsoft.com/office/drawing/2014/main" id="{4A00A89E-B049-487F-A237-C7DF89383A8A}"/>
               </a:ext>
             </a:extLst>
           </p:cNvPr>
@@ -38619,7 +38608,7 @@
           <p:cNvPr id="69" name="">
             <a:extLst xmlns:a="http://schemas.openxmlformats.org/drawingml/2006/main">
               <a:ext uri="{FF2B5EF4-FFF2-40B4-BE49-F238E27FC236}">
-                <a16:creationId xmlns:a16="http://schemas.microsoft.com/office/drawing/2014/main" id="{CFEE458C-AF64-44D4-8E5B-FE4A63EB5B1B}"/>
+                <a16:creationId xmlns:a16="http://schemas.microsoft.com/office/drawing/2014/main" id="{03754E3C-6356-46EA-A8FA-0BA9C3260052}"/>
               </a:ext>
             </a:extLst>
           </p:cNvPr>
@@ -38677,7 +38666,7 @@
           <p:cNvPr id="70" name="">
             <a:extLst xmlns:a="http://schemas.openxmlformats.org/drawingml/2006/main">
               <a:ext uri="{FF2B5EF4-FFF2-40B4-BE49-F238E27FC236}">
-                <a16:creationId xmlns:a16="http://schemas.microsoft.com/office/drawing/2014/main" id="{1D83B506-25BB-4854-A96C-FD7013BE91C4}"/>
+                <a16:creationId xmlns:a16="http://schemas.microsoft.com/office/drawing/2014/main" id="{7565C230-D43F-4BBC-ADE3-34EB601CD3DC}"/>
               </a:ext>
             </a:extLst>
           </p:cNvPr>
@@ -38710,7 +38699,7 @@
           <p:cNvPr id="71" name="">
             <a:extLst xmlns:a="http://schemas.openxmlformats.org/drawingml/2006/main">
               <a:ext uri="{FF2B5EF4-FFF2-40B4-BE49-F238E27FC236}">
-                <a16:creationId xmlns:a16="http://schemas.microsoft.com/office/drawing/2014/main" id="{4F098BEB-8F1B-4486-A94D-8403F500B62D}"/>
+                <a16:creationId xmlns:a16="http://schemas.microsoft.com/office/drawing/2014/main" id="{E9679722-A34D-4556-9A73-3E7AD557D85A}"/>
               </a:ext>
             </a:extLst>
           </p:cNvPr>
@@ -38768,7 +38757,7 @@
           <p:cNvPr id="72" name="">
             <a:extLst xmlns:a="http://schemas.openxmlformats.org/drawingml/2006/main">
               <a:ext uri="{FF2B5EF4-FFF2-40B4-BE49-F238E27FC236}">
-                <a16:creationId xmlns:a16="http://schemas.microsoft.com/office/drawing/2014/main" id="{8AC70542-BFD0-47C6-B233-9BEC9C156D30}"/>
+                <a16:creationId xmlns:a16="http://schemas.microsoft.com/office/drawing/2014/main" id="{94A88370-13EF-48AB-84BC-CEEE910CD710}"/>
               </a:ext>
             </a:extLst>
           </p:cNvPr>
@@ -38801,7 +38790,7 @@
           <p:cNvPr id="73" name="">
             <a:extLst xmlns:a="http://schemas.openxmlformats.org/drawingml/2006/main">
               <a:ext uri="{FF2B5EF4-FFF2-40B4-BE49-F238E27FC236}">
-                <a16:creationId xmlns:a16="http://schemas.microsoft.com/office/drawing/2014/main" id="{4F7D12A7-3866-4937-A18B-269188220CC6}"/>
+                <a16:creationId xmlns:a16="http://schemas.microsoft.com/office/drawing/2014/main" id="{851598EB-0ADF-452E-8D14-48CCB0F63887}"/>
               </a:ext>
             </a:extLst>
           </p:cNvPr>
@@ -38859,7 +38848,7 @@
           <p:cNvPr id="74" name="">
             <a:extLst xmlns:a="http://schemas.openxmlformats.org/drawingml/2006/main">
               <a:ext uri="{FF2B5EF4-FFF2-40B4-BE49-F238E27FC236}">
-                <a16:creationId xmlns:a16="http://schemas.microsoft.com/office/drawing/2014/main" id="{386AC3B4-8635-41A0-B37A-18824AFD2CA0}"/>
+                <a16:creationId xmlns:a16="http://schemas.microsoft.com/office/drawing/2014/main" id="{D14B4E52-6A65-4C17-8B61-82972DCC000A}"/>
               </a:ext>
             </a:extLst>
           </p:cNvPr>
@@ -38892,7 +38881,7 @@
           <p:cNvPr id="75" name="">
             <a:extLst xmlns:a="http://schemas.openxmlformats.org/drawingml/2006/main">
               <a:ext uri="{FF2B5EF4-FFF2-40B4-BE49-F238E27FC236}">
-                <a16:creationId xmlns:a16="http://schemas.microsoft.com/office/drawing/2014/main" id="{39F13EC4-2585-4736-9C35-8FCF2F42D974}"/>
+                <a16:creationId xmlns:a16="http://schemas.microsoft.com/office/drawing/2014/main" id="{A7A15CCB-E953-4B1F-8BF6-76F04A08CEC9}"/>
               </a:ext>
             </a:extLst>
           </p:cNvPr>
@@ -38950,7 +38939,7 @@
           <p:cNvPr id="76" name="">
             <a:extLst xmlns:a="http://schemas.openxmlformats.org/drawingml/2006/main">
               <a:ext uri="{FF2B5EF4-FFF2-40B4-BE49-F238E27FC236}">
-                <a16:creationId xmlns:a16="http://schemas.microsoft.com/office/drawing/2014/main" id="{06A7ACAD-CF3D-4757-9212-428C4A39BF59}"/>
+                <a16:creationId xmlns:a16="http://schemas.microsoft.com/office/drawing/2014/main" id="{2A629FB7-602C-4863-9744-6FE0FB4BDE42}"/>
               </a:ext>
             </a:extLst>
           </p:cNvPr>
@@ -38983,7 +38972,7 @@
           <p:cNvPr id="77" name="">
             <a:extLst xmlns:a="http://schemas.openxmlformats.org/drawingml/2006/main">
               <a:ext uri="{FF2B5EF4-FFF2-40B4-BE49-F238E27FC236}">
-                <a16:creationId xmlns:a16="http://schemas.microsoft.com/office/drawing/2014/main" id="{B8E1BAE4-39F6-490E-AB21-34A33F423309}"/>
+                <a16:creationId xmlns:a16="http://schemas.microsoft.com/office/drawing/2014/main" id="{5579E316-FD12-4834-A82A-78FF4A8E02DC}"/>
               </a:ext>
             </a:extLst>
           </p:cNvPr>
@@ -39041,7 +39030,7 @@
           <p:cNvPr id="78" name="">
             <a:extLst xmlns:a="http://schemas.openxmlformats.org/drawingml/2006/main">
               <a:ext uri="{FF2B5EF4-FFF2-40B4-BE49-F238E27FC236}">
-                <a16:creationId xmlns:a16="http://schemas.microsoft.com/office/drawing/2014/main" id="{4B22BB80-053E-485E-895F-23A904AB4053}"/>
+                <a16:creationId xmlns:a16="http://schemas.microsoft.com/office/drawing/2014/main" id="{2C5733F0-588C-407B-BD5D-D06E244D7DD2}"/>
               </a:ext>
             </a:extLst>
           </p:cNvPr>
@@ -39099,7 +39088,7 @@
           <p:cNvPr id="79" name="">
             <a:extLst xmlns:a="http://schemas.openxmlformats.org/drawingml/2006/main">
               <a:ext uri="{FF2B5EF4-FFF2-40B4-BE49-F238E27FC236}">
-                <a16:creationId xmlns:a16="http://schemas.microsoft.com/office/drawing/2014/main" id="{251E854E-D1F3-441A-9368-EE7D890994C1}"/>
+                <a16:creationId xmlns:a16="http://schemas.microsoft.com/office/drawing/2014/main" id="{87BCBBCB-E792-4FB7-A262-EFB0723B44B9}"/>
               </a:ext>
             </a:extLst>
           </p:cNvPr>
@@ -39132,7 +39121,7 @@
           <p:cNvPr id="80" name="">
             <a:extLst xmlns:a="http://schemas.openxmlformats.org/drawingml/2006/main">
               <a:ext uri="{FF2B5EF4-FFF2-40B4-BE49-F238E27FC236}">
-                <a16:creationId xmlns:a16="http://schemas.microsoft.com/office/drawing/2014/main" id="{C30AF0AD-AED8-4E9D-8BC1-8986C6C123DA}"/>
+                <a16:creationId xmlns:a16="http://schemas.microsoft.com/office/drawing/2014/main" id="{ECC4CE89-A451-46A5-883C-ED687581DC2C}"/>
               </a:ext>
             </a:extLst>
           </p:cNvPr>
@@ -39190,7 +39179,7 @@
                 <a:latin typeface="Microsoft YaHei"/>
                 <a:ea typeface="Microsoft YaHei"/>
                 <a:cs typeface="Microsoft YaHei"/>
-                <a:hlinkClick xmlns:r="http://schemas.openxmlformats.org/officeDocument/2006/relationships" r:id="R3afc837bf5624e18"/>
+                <a:hlinkClick xmlns:r="http://schemas.openxmlformats.org/officeDocument/2006/relationships" r:id="Rc3daa0d0e4d64a2c"/>
               </a:rPr>
               <a:t>码道 Codebase</a:t>
             </a:r>
@@ -39202,7 +39191,7 @@
                 <a:latin typeface="Microsoft YaHei"/>
                 <a:ea typeface="Microsoft YaHei"/>
                 <a:cs typeface="Microsoft YaHei"/>
-                <a:hlinkClick xmlns:r="http://schemas.openxmlformats.org/officeDocument/2006/relationships" r:id="Re68437bc697a4343"/>
+                <a:hlinkClick xmlns:r="http://schemas.openxmlformats.org/officeDocument/2006/relationships" r:id="Rd9aa86f3f85b4b0f"/>
               </a:rPr>
               <a:t> · Qoder Indexing</a:t>
             </a:r>
@@ -39214,7 +39203,7 @@
                 <a:latin typeface="Microsoft YaHei"/>
                 <a:ea typeface="Microsoft YaHei"/>
                 <a:cs typeface="Microsoft YaHei"/>
-                <a:hlinkClick xmlns:r="http://schemas.openxmlformats.org/officeDocument/2006/relationships" r:id="R7afe1e3cde274ff8"/>
+                <a:hlinkClick xmlns:r="http://schemas.openxmlformats.org/officeDocument/2006/relationships" r:id="Rf31a1b6d6f0449c1"/>
               </a:rPr>
               <a:t> · Qoder Repo Wiki</a:t>
             </a:r>
@@ -39226,7 +39215,7 @@
                 <a:latin typeface="Microsoft YaHei"/>
                 <a:ea typeface="Microsoft YaHei"/>
                 <a:cs typeface="Microsoft YaHei"/>
-                <a:hlinkClick xmlns:r="http://schemas.openxmlformats.org/officeDocument/2006/relationships" r:id="Rd8557f3646f84c86"/>
+                <a:hlinkClick xmlns:r="http://schemas.openxmlformats.org/officeDocument/2006/relationships" r:id="R85f4de720ae64793"/>
               </a:rPr>
               <a:t> · QMind</a:t>
             </a:r>
@@ -39238,7 +39227,7 @@
           <p:cNvPr id="81" name="">
             <a:extLst xmlns:a="http://schemas.openxmlformats.org/drawingml/2006/main">
               <a:ext uri="{FF2B5EF4-FFF2-40B4-BE49-F238E27FC236}">
-                <a16:creationId xmlns:a16="http://schemas.microsoft.com/office/drawing/2014/main" id="{5745D25F-D29A-4F2F-8891-D287913AA8C2}"/>
+                <a16:creationId xmlns:a16="http://schemas.microsoft.com/office/drawing/2014/main" id="{65C2A7EB-1D1A-4689-9683-6B54FF9E67EE}"/>
               </a:ext>
             </a:extLst>
           </p:cNvPr>
@@ -39294,7 +39283,7 @@
     </p:spTree>
     <p:extLst>
       <p:ext uri="{BB962C8B-B14F-4D97-AF65-F5344CB8AC3E}">
-        <p14:creationId xmlns:p14="http://schemas.microsoft.com/office/powerpoint/2010/main" val="1420619089"/>
+        <p14:creationId xmlns:p14="http://schemas.microsoft.com/office/powerpoint/2010/main" val="2068984963"/>
       </p:ext>
     </p:extLst>
   </p:cSld>
@@ -39325,7 +39314,7 @@
           <p:cNvPr id="95" name="">
             <a:extLst xmlns:a="http://schemas.openxmlformats.org/drawingml/2006/main">
               <a:ext uri="{FF2B5EF4-FFF2-40B4-BE49-F238E27FC236}">
-                <a16:creationId xmlns:a16="http://schemas.microsoft.com/office/drawing/2014/main" id="{40669B82-43C8-4202-8A7A-A698C5EB65EC}"/>
+                <a16:creationId xmlns:a16="http://schemas.microsoft.com/office/drawing/2014/main" id="{A871CB89-3D6D-417A-9940-657E8BA8C310}"/>
               </a:ext>
             </a:extLst>
           </p:cNvPr>
@@ -39358,7 +39347,7 @@
           <p:cNvPr id="2" name="">
             <a:extLst xmlns:a="http://schemas.openxmlformats.org/drawingml/2006/main">
               <a:ext uri="{FF2B5EF4-FFF2-40B4-BE49-F238E27FC236}">
-                <a16:creationId xmlns:a16="http://schemas.microsoft.com/office/drawing/2014/main" id="{21063BF5-C63E-4DB5-825D-34ADEFBB1149}"/>
+                <a16:creationId xmlns:a16="http://schemas.microsoft.com/office/drawing/2014/main" id="{76B99C1B-428D-47A4-927E-A910CDCC13D4}"/>
               </a:ext>
             </a:extLst>
           </p:cNvPr>
@@ -39416,7 +39405,7 @@
           <p:cNvPr id="3" name="">
             <a:extLst xmlns:a="http://schemas.openxmlformats.org/drawingml/2006/main">
               <a:ext uri="{FF2B5EF4-FFF2-40B4-BE49-F238E27FC236}">
-                <a16:creationId xmlns:a16="http://schemas.microsoft.com/office/drawing/2014/main" id="{6DBAF81F-DE26-449C-B89A-07CF5C27BF01}"/>
+                <a16:creationId xmlns:a16="http://schemas.microsoft.com/office/drawing/2014/main" id="{00C2EE45-AC44-4C75-B9A9-2AC5647B4736}"/>
               </a:ext>
             </a:extLst>
           </p:cNvPr>
@@ -39474,7 +39463,7 @@
           <p:cNvPr id="4" name="">
             <a:extLst xmlns:a="http://schemas.openxmlformats.org/drawingml/2006/main">
               <a:ext uri="{FF2B5EF4-FFF2-40B4-BE49-F238E27FC236}">
-                <a16:creationId xmlns:a16="http://schemas.microsoft.com/office/drawing/2014/main" id="{7B9DD239-E4A5-4424-964A-8ACDFDC22930}"/>
+                <a16:creationId xmlns:a16="http://schemas.microsoft.com/office/drawing/2014/main" id="{FED8CBC2-F32F-4C56-B243-81E8B29B558B}"/>
               </a:ext>
             </a:extLst>
           </p:cNvPr>
@@ -39507,7 +39496,7 @@
           <p:cNvPr id="5" name="">
             <a:extLst xmlns:a="http://schemas.openxmlformats.org/drawingml/2006/main">
               <a:ext uri="{FF2B5EF4-FFF2-40B4-BE49-F238E27FC236}">
-                <a16:creationId xmlns:a16="http://schemas.microsoft.com/office/drawing/2014/main" id="{7341AD8E-F385-4CA3-885E-D3759B07B07B}"/>
+                <a16:creationId xmlns:a16="http://schemas.microsoft.com/office/drawing/2014/main" id="{EBF57E6E-F7D3-4192-A462-A605F1ED5A7E}"/>
               </a:ext>
             </a:extLst>
           </p:cNvPr>
@@ -39565,7 +39554,7 @@
           <p:cNvPr id="6" name="">
             <a:extLst xmlns:a="http://schemas.openxmlformats.org/drawingml/2006/main">
               <a:ext uri="{FF2B5EF4-FFF2-40B4-BE49-F238E27FC236}">
-                <a16:creationId xmlns:a16="http://schemas.microsoft.com/office/drawing/2014/main" id="{519CF131-2E0D-4809-8655-5643AE94190F}"/>
+                <a16:creationId xmlns:a16="http://schemas.microsoft.com/office/drawing/2014/main" id="{77492120-DB91-4B4C-88AA-EBF768DF1F1B}"/>
               </a:ext>
             </a:extLst>
           </p:cNvPr>
@@ -39598,7 +39587,7 @@
           <p:cNvPr id="7" name="">
             <a:extLst xmlns:a="http://schemas.openxmlformats.org/drawingml/2006/main">
               <a:ext uri="{FF2B5EF4-FFF2-40B4-BE49-F238E27FC236}">
-                <a16:creationId xmlns:a16="http://schemas.microsoft.com/office/drawing/2014/main" id="{0F19D693-07E3-4781-A7A3-4D4F398DAE35}"/>
+                <a16:creationId xmlns:a16="http://schemas.microsoft.com/office/drawing/2014/main" id="{B3D89206-97A2-401C-8775-EC8CE9645F4F}"/>
               </a:ext>
             </a:extLst>
           </p:cNvPr>
@@ -39656,7 +39645,7 @@
           <p:cNvPr id="8" name="">
             <a:extLst xmlns:a="http://schemas.openxmlformats.org/drawingml/2006/main">
               <a:ext uri="{FF2B5EF4-FFF2-40B4-BE49-F238E27FC236}">
-                <a16:creationId xmlns:a16="http://schemas.microsoft.com/office/drawing/2014/main" id="{3B79C90B-0DB4-404B-9EA6-BAC4A74ABE5B}"/>
+                <a16:creationId xmlns:a16="http://schemas.microsoft.com/office/drawing/2014/main" id="{6E452B14-B55C-46B4-8442-3DC06B8196D5}"/>
               </a:ext>
             </a:extLst>
           </p:cNvPr>
@@ -39689,7 +39678,7 @@
           <p:cNvPr id="9" name="">
             <a:extLst xmlns:a="http://schemas.openxmlformats.org/drawingml/2006/main">
               <a:ext uri="{FF2B5EF4-FFF2-40B4-BE49-F238E27FC236}">
-                <a16:creationId xmlns:a16="http://schemas.microsoft.com/office/drawing/2014/main" id="{FABC5673-72E7-4DA6-BA06-7414102F1690}"/>
+                <a16:creationId xmlns:a16="http://schemas.microsoft.com/office/drawing/2014/main" id="{2CFE6713-C5BA-4305-B136-4B291AD10D07}"/>
               </a:ext>
             </a:extLst>
           </p:cNvPr>
@@ -39747,7 +39736,7 @@
           <p:cNvPr id="10" name="">
             <a:extLst xmlns:a="http://schemas.openxmlformats.org/drawingml/2006/main">
               <a:ext uri="{FF2B5EF4-FFF2-40B4-BE49-F238E27FC236}">
-                <a16:creationId xmlns:a16="http://schemas.microsoft.com/office/drawing/2014/main" id="{8A2B94A5-BC29-4D7C-A99A-8D2880164F0C}"/>
+                <a16:creationId xmlns:a16="http://schemas.microsoft.com/office/drawing/2014/main" id="{C6B88821-6F77-469C-A759-F747CFF0E029}"/>
               </a:ext>
             </a:extLst>
           </p:cNvPr>
@@ -39780,7 +39769,7 @@
           <p:cNvPr id="11" name="">
             <a:extLst xmlns:a="http://schemas.openxmlformats.org/drawingml/2006/main">
               <a:ext uri="{FF2B5EF4-FFF2-40B4-BE49-F238E27FC236}">
-                <a16:creationId xmlns:a16="http://schemas.microsoft.com/office/drawing/2014/main" id="{3D563FAC-24F8-4DAB-A441-42611D0C4206}"/>
+                <a16:creationId xmlns:a16="http://schemas.microsoft.com/office/drawing/2014/main" id="{A7998FAC-1995-4218-ACD8-14B625346A8A}"/>
               </a:ext>
             </a:extLst>
           </p:cNvPr>
@@ -39838,7 +39827,7 @@
           <p:cNvPr id="12" name="">
             <a:extLst xmlns:a="http://schemas.openxmlformats.org/drawingml/2006/main">
               <a:ext uri="{FF2B5EF4-FFF2-40B4-BE49-F238E27FC236}">
-                <a16:creationId xmlns:a16="http://schemas.microsoft.com/office/drawing/2014/main" id="{9E7ACDB9-3804-4111-88A9-93EC265153F4}"/>
+                <a16:creationId xmlns:a16="http://schemas.microsoft.com/office/drawing/2014/main" id="{75B0C5C0-8908-4BCA-9F5B-E5A574385882}"/>
               </a:ext>
             </a:extLst>
           </p:cNvPr>
@@ -39871,7 +39860,7 @@
           <p:cNvPr id="13" name="">
             <a:extLst xmlns:a="http://schemas.openxmlformats.org/drawingml/2006/main">
               <a:ext uri="{FF2B5EF4-FFF2-40B4-BE49-F238E27FC236}">
-                <a16:creationId xmlns:a16="http://schemas.microsoft.com/office/drawing/2014/main" id="{2DAF9685-D0FB-4D6D-AEAC-EF754FDBC731}"/>
+                <a16:creationId xmlns:a16="http://schemas.microsoft.com/office/drawing/2014/main" id="{FC953986-70C7-4B34-8AA1-FA9CD8AFA317}"/>
               </a:ext>
             </a:extLst>
           </p:cNvPr>
@@ -39929,7 +39918,7 @@
           <p:cNvPr id="14" name="">
             <a:extLst xmlns:a="http://schemas.openxmlformats.org/drawingml/2006/main">
               <a:ext uri="{FF2B5EF4-FFF2-40B4-BE49-F238E27FC236}">
-                <a16:creationId xmlns:a16="http://schemas.microsoft.com/office/drawing/2014/main" id="{768E32BD-84D3-4781-AB32-D73BD66B25ED}"/>
+                <a16:creationId xmlns:a16="http://schemas.microsoft.com/office/drawing/2014/main" id="{BF704F20-97DF-4752-8DE7-997EE6E02657}"/>
               </a:ext>
             </a:extLst>
           </p:cNvPr>
@@ -39962,7 +39951,7 @@
           <p:cNvPr id="15" name="">
             <a:extLst xmlns:a="http://schemas.openxmlformats.org/drawingml/2006/main">
               <a:ext uri="{FF2B5EF4-FFF2-40B4-BE49-F238E27FC236}">
-                <a16:creationId xmlns:a16="http://schemas.microsoft.com/office/drawing/2014/main" id="{9C04A961-D1EF-4BC1-89BF-9D8973BB1B2C}"/>
+                <a16:creationId xmlns:a16="http://schemas.microsoft.com/office/drawing/2014/main" id="{33D49F98-9DA9-4C18-8B91-65FB754D01A0}"/>
               </a:ext>
             </a:extLst>
           </p:cNvPr>
@@ -40020,7 +40009,7 @@
           <p:cNvPr id="16" name="">
             <a:extLst xmlns:a="http://schemas.openxmlformats.org/drawingml/2006/main">
               <a:ext uri="{FF2B5EF4-FFF2-40B4-BE49-F238E27FC236}">
-                <a16:creationId xmlns:a16="http://schemas.microsoft.com/office/drawing/2014/main" id="{A92A6BE6-C108-464A-9547-E929F94ADDD0}"/>
+                <a16:creationId xmlns:a16="http://schemas.microsoft.com/office/drawing/2014/main" id="{F9BC6E6B-73FB-47CE-82A0-888A35406042}"/>
               </a:ext>
             </a:extLst>
           </p:cNvPr>
@@ -40053,7 +40042,7 @@
           <p:cNvPr id="17" name="">
             <a:extLst xmlns:a="http://schemas.openxmlformats.org/drawingml/2006/main">
               <a:ext uri="{FF2B5EF4-FFF2-40B4-BE49-F238E27FC236}">
-                <a16:creationId xmlns:a16="http://schemas.microsoft.com/office/drawing/2014/main" id="{D442E48D-3FD5-4C67-AABE-93364ABB3E46}"/>
+                <a16:creationId xmlns:a16="http://schemas.microsoft.com/office/drawing/2014/main" id="{AD05AB17-30C4-4BBA-8A11-0896D727558B}"/>
               </a:ext>
             </a:extLst>
           </p:cNvPr>
@@ -40111,7 +40100,7 @@
           <p:cNvPr id="18" name="">
             <a:extLst xmlns:a="http://schemas.openxmlformats.org/drawingml/2006/main">
               <a:ext uri="{FF2B5EF4-FFF2-40B4-BE49-F238E27FC236}">
-                <a16:creationId xmlns:a16="http://schemas.microsoft.com/office/drawing/2014/main" id="{896D2598-1E41-4657-921F-05A81114FD2F}"/>
+                <a16:creationId xmlns:a16="http://schemas.microsoft.com/office/drawing/2014/main" id="{97FAD842-CC52-4CB8-86BF-ABD7F3B0B0C1}"/>
               </a:ext>
             </a:extLst>
           </p:cNvPr>
@@ -40144,7 +40133,7 @@
           <p:cNvPr id="19" name="">
             <a:extLst xmlns:a="http://schemas.openxmlformats.org/drawingml/2006/main">
               <a:ext uri="{FF2B5EF4-FFF2-40B4-BE49-F238E27FC236}">
-                <a16:creationId xmlns:a16="http://schemas.microsoft.com/office/drawing/2014/main" id="{1923206F-1837-4DF0-A4AB-093537ED4A47}"/>
+                <a16:creationId xmlns:a16="http://schemas.microsoft.com/office/drawing/2014/main" id="{2648C560-9926-4A62-8970-8D57751E6D7C}"/>
               </a:ext>
             </a:extLst>
           </p:cNvPr>
@@ -40202,7 +40191,7 @@
           <p:cNvPr id="20" name="">
             <a:extLst xmlns:a="http://schemas.openxmlformats.org/drawingml/2006/main">
               <a:ext uri="{FF2B5EF4-FFF2-40B4-BE49-F238E27FC236}">
-                <a16:creationId xmlns:a16="http://schemas.microsoft.com/office/drawing/2014/main" id="{A68DF750-7A1C-4078-9A60-E74636964C79}"/>
+                <a16:creationId xmlns:a16="http://schemas.microsoft.com/office/drawing/2014/main" id="{4EED6C86-F7ED-4C9D-A0F8-9532CB56DE2A}"/>
               </a:ext>
             </a:extLst>
           </p:cNvPr>
@@ -40235,7 +40224,7 @@
           <p:cNvPr id="21" name="">
             <a:extLst xmlns:a="http://schemas.openxmlformats.org/drawingml/2006/main">
               <a:ext uri="{FF2B5EF4-FFF2-40B4-BE49-F238E27FC236}">
-                <a16:creationId xmlns:a16="http://schemas.microsoft.com/office/drawing/2014/main" id="{D19A4E0A-BAD2-476A-BBE0-538E1C74DC48}"/>
+                <a16:creationId xmlns:a16="http://schemas.microsoft.com/office/drawing/2014/main" id="{5E076EF5-EEA2-4771-A38D-A1D619009551}"/>
               </a:ext>
             </a:extLst>
           </p:cNvPr>
@@ -40293,7 +40282,7 @@
           <p:cNvPr id="22" name="">
             <a:extLst xmlns:a="http://schemas.openxmlformats.org/drawingml/2006/main">
               <a:ext uri="{FF2B5EF4-FFF2-40B4-BE49-F238E27FC236}">
-                <a16:creationId xmlns:a16="http://schemas.microsoft.com/office/drawing/2014/main" id="{A97CEA38-A86A-4BBD-A8C6-31EC01831E03}"/>
+                <a16:creationId xmlns:a16="http://schemas.microsoft.com/office/drawing/2014/main" id="{4C74EC97-D38D-4595-B4E9-9C643BAEC2AE}"/>
               </a:ext>
             </a:extLst>
           </p:cNvPr>
@@ -40326,7 +40315,7 @@
           <p:cNvPr id="23" name="">
             <a:extLst xmlns:a="http://schemas.openxmlformats.org/drawingml/2006/main">
               <a:ext uri="{FF2B5EF4-FFF2-40B4-BE49-F238E27FC236}">
-                <a16:creationId xmlns:a16="http://schemas.microsoft.com/office/drawing/2014/main" id="{D4B8726C-AF10-41C7-B985-BF49A0324916}"/>
+                <a16:creationId xmlns:a16="http://schemas.microsoft.com/office/drawing/2014/main" id="{D4F48135-1957-4300-B8F6-2EC3E918C7AA}"/>
               </a:ext>
             </a:extLst>
           </p:cNvPr>
@@ -40384,7 +40373,7 @@
           <p:cNvPr id="24" name="">
             <a:extLst xmlns:a="http://schemas.openxmlformats.org/drawingml/2006/main">
               <a:ext uri="{FF2B5EF4-FFF2-40B4-BE49-F238E27FC236}">
-                <a16:creationId xmlns:a16="http://schemas.microsoft.com/office/drawing/2014/main" id="{5C252B46-1E8A-42AB-8EF3-CA6846847C6D}"/>
+                <a16:creationId xmlns:a16="http://schemas.microsoft.com/office/drawing/2014/main" id="{1E79AF00-0EEA-4C0A-9CE9-E527FBC51C1C}"/>
               </a:ext>
             </a:extLst>
           </p:cNvPr>
@@ -40417,7 +40406,7 @@
           <p:cNvPr id="25" name="">
             <a:extLst xmlns:a="http://schemas.openxmlformats.org/drawingml/2006/main">
               <a:ext uri="{FF2B5EF4-FFF2-40B4-BE49-F238E27FC236}">
-                <a16:creationId xmlns:a16="http://schemas.microsoft.com/office/drawing/2014/main" id="{223F8A84-D2B0-4E68-9720-31AA05EF3925}"/>
+                <a16:creationId xmlns:a16="http://schemas.microsoft.com/office/drawing/2014/main" id="{4A683045-5B1A-4513-BE0D-A501A4F75E5C}"/>
               </a:ext>
             </a:extLst>
           </p:cNvPr>
@@ -40475,7 +40464,7 @@
           <p:cNvPr id="26" name="">
             <a:extLst xmlns:a="http://schemas.openxmlformats.org/drawingml/2006/main">
               <a:ext uri="{FF2B5EF4-FFF2-40B4-BE49-F238E27FC236}">
-                <a16:creationId xmlns:a16="http://schemas.microsoft.com/office/drawing/2014/main" id="{EF822323-9761-410E-B464-ABBC28D460C0}"/>
+                <a16:creationId xmlns:a16="http://schemas.microsoft.com/office/drawing/2014/main" id="{D8DC3930-E726-4E87-93A8-788D27B52FBE}"/>
               </a:ext>
             </a:extLst>
           </p:cNvPr>
@@ -40508,7 +40497,7 @@
           <p:cNvPr id="27" name="">
             <a:extLst xmlns:a="http://schemas.openxmlformats.org/drawingml/2006/main">
               <a:ext uri="{FF2B5EF4-FFF2-40B4-BE49-F238E27FC236}">
-                <a16:creationId xmlns:a16="http://schemas.microsoft.com/office/drawing/2014/main" id="{46475C25-27FB-4C19-8851-24168915F751}"/>
+                <a16:creationId xmlns:a16="http://schemas.microsoft.com/office/drawing/2014/main" id="{4E2E0FC9-97DC-46D1-AB5F-97ED1B329BD1}"/>
               </a:ext>
             </a:extLst>
           </p:cNvPr>
@@ -40566,7 +40555,7 @@
           <p:cNvPr id="28" name="">
             <a:extLst xmlns:a="http://schemas.openxmlformats.org/drawingml/2006/main">
               <a:ext uri="{FF2B5EF4-FFF2-40B4-BE49-F238E27FC236}">
-                <a16:creationId xmlns:a16="http://schemas.microsoft.com/office/drawing/2014/main" id="{6C9FFF96-09A0-4402-9E64-26E5E930DF3D}"/>
+                <a16:creationId xmlns:a16="http://schemas.microsoft.com/office/drawing/2014/main" id="{891B83E1-1640-4250-A00F-855B865DB0AB}"/>
               </a:ext>
             </a:extLst>
           </p:cNvPr>
@@ -40599,7 +40588,7 @@
           <p:cNvPr id="29" name="">
             <a:extLst xmlns:a="http://schemas.openxmlformats.org/drawingml/2006/main">
               <a:ext uri="{FF2B5EF4-FFF2-40B4-BE49-F238E27FC236}">
-                <a16:creationId xmlns:a16="http://schemas.microsoft.com/office/drawing/2014/main" id="{F5D51EAF-480B-475C-928B-134809F19A98}"/>
+                <a16:creationId xmlns:a16="http://schemas.microsoft.com/office/drawing/2014/main" id="{DC836415-8AE2-4F3F-99C9-A62DFEDF3D99}"/>
               </a:ext>
             </a:extLst>
           </p:cNvPr>
@@ -40657,7 +40646,7 @@
           <p:cNvPr id="30" name="">
             <a:extLst xmlns:a="http://schemas.openxmlformats.org/drawingml/2006/main">
               <a:ext uri="{FF2B5EF4-FFF2-40B4-BE49-F238E27FC236}">
-                <a16:creationId xmlns:a16="http://schemas.microsoft.com/office/drawing/2014/main" id="{D1EB0662-8636-43BE-9536-CCA8E0200940}"/>
+                <a16:creationId xmlns:a16="http://schemas.microsoft.com/office/drawing/2014/main" id="{82AFF9D7-D0C8-4F05-84E8-9BD7B98B1710}"/>
               </a:ext>
             </a:extLst>
           </p:cNvPr>
@@ -40690,7 +40679,7 @@
           <p:cNvPr id="31" name="">
             <a:extLst xmlns:a="http://schemas.openxmlformats.org/drawingml/2006/main">
               <a:ext uri="{FF2B5EF4-FFF2-40B4-BE49-F238E27FC236}">
-                <a16:creationId xmlns:a16="http://schemas.microsoft.com/office/drawing/2014/main" id="{0DF17C66-D36A-4F77-B428-11EA3470906C}"/>
+                <a16:creationId xmlns:a16="http://schemas.microsoft.com/office/drawing/2014/main" id="{7CFCE61C-D0EC-4736-A107-D73B51BF6A66}"/>
               </a:ext>
             </a:extLst>
           </p:cNvPr>
@@ -40748,7 +40737,7 @@
           <p:cNvPr id="32" name="">
             <a:extLst xmlns:a="http://schemas.openxmlformats.org/drawingml/2006/main">
               <a:ext uri="{FF2B5EF4-FFF2-40B4-BE49-F238E27FC236}">
-                <a16:creationId xmlns:a16="http://schemas.microsoft.com/office/drawing/2014/main" id="{12AF39F8-70AD-41BB-97BD-61F2D115BB62}"/>
+                <a16:creationId xmlns:a16="http://schemas.microsoft.com/office/drawing/2014/main" id="{15CAA559-7E4C-4526-BEB8-C1BC78A667CD}"/>
               </a:ext>
             </a:extLst>
           </p:cNvPr>
@@ -40781,7 +40770,7 @@
           <p:cNvPr id="33" name="">
             <a:extLst xmlns:a="http://schemas.openxmlformats.org/drawingml/2006/main">
               <a:ext uri="{FF2B5EF4-FFF2-40B4-BE49-F238E27FC236}">
-                <a16:creationId xmlns:a16="http://schemas.microsoft.com/office/drawing/2014/main" id="{72D03269-26A7-4912-B41A-14DD0F9DEC3A}"/>
+                <a16:creationId xmlns:a16="http://schemas.microsoft.com/office/drawing/2014/main" id="{3BADB896-7BA1-4696-AB8A-BD97721CABF5}"/>
               </a:ext>
             </a:extLst>
           </p:cNvPr>
@@ -40839,7 +40828,7 @@
           <p:cNvPr id="34" name="">
             <a:extLst xmlns:a="http://schemas.openxmlformats.org/drawingml/2006/main">
               <a:ext uri="{FF2B5EF4-FFF2-40B4-BE49-F238E27FC236}">
-                <a16:creationId xmlns:a16="http://schemas.microsoft.com/office/drawing/2014/main" id="{313266E8-B68A-484A-B30F-EF205DA334C5}"/>
+                <a16:creationId xmlns:a16="http://schemas.microsoft.com/office/drawing/2014/main" id="{6A62199B-E06D-4DE9-A823-EA47FADB1CDF}"/>
               </a:ext>
             </a:extLst>
           </p:cNvPr>
@@ -40872,7 +40861,7 @@
           <p:cNvPr id="35" name="">
             <a:extLst xmlns:a="http://schemas.openxmlformats.org/drawingml/2006/main">
               <a:ext uri="{FF2B5EF4-FFF2-40B4-BE49-F238E27FC236}">
-                <a16:creationId xmlns:a16="http://schemas.microsoft.com/office/drawing/2014/main" id="{05F5BEA9-E841-4A19-9AE9-97144D996E4A}"/>
+                <a16:creationId xmlns:a16="http://schemas.microsoft.com/office/drawing/2014/main" id="{7F09E434-C2C5-4BD1-8F7A-672C9702C143}"/>
               </a:ext>
             </a:extLst>
           </p:cNvPr>
@@ -40930,7 +40919,7 @@
           <p:cNvPr id="36" name="">
             <a:extLst xmlns:a="http://schemas.openxmlformats.org/drawingml/2006/main">
               <a:ext uri="{FF2B5EF4-FFF2-40B4-BE49-F238E27FC236}">
-                <a16:creationId xmlns:a16="http://schemas.microsoft.com/office/drawing/2014/main" id="{6A05EAE7-D121-41CC-ACC5-64269664E040}"/>
+                <a16:creationId xmlns:a16="http://schemas.microsoft.com/office/drawing/2014/main" id="{AD47E1BC-3B33-4954-BBAC-438C57BFCD1F}"/>
               </a:ext>
             </a:extLst>
           </p:cNvPr>
@@ -40963,7 +40952,7 @@
           <p:cNvPr id="37" name="">
             <a:extLst xmlns:a="http://schemas.openxmlformats.org/drawingml/2006/main">
               <a:ext uri="{FF2B5EF4-FFF2-40B4-BE49-F238E27FC236}">
-                <a16:creationId xmlns:a16="http://schemas.microsoft.com/office/drawing/2014/main" id="{DD92AD58-76DC-4BF9-ACF4-E474E29BC141}"/>
+                <a16:creationId xmlns:a16="http://schemas.microsoft.com/office/drawing/2014/main" id="{E8170DDF-4FC7-4EF1-8E5F-3F97F31507FD}"/>
               </a:ext>
             </a:extLst>
           </p:cNvPr>
@@ -41021,7 +41010,7 @@
           <p:cNvPr id="38" name="">
             <a:extLst xmlns:a="http://schemas.openxmlformats.org/drawingml/2006/main">
               <a:ext uri="{FF2B5EF4-FFF2-40B4-BE49-F238E27FC236}">
-                <a16:creationId xmlns:a16="http://schemas.microsoft.com/office/drawing/2014/main" id="{9513C6B0-0655-4C84-B7AB-DFF14D6E57D9}"/>
+                <a16:creationId xmlns:a16="http://schemas.microsoft.com/office/drawing/2014/main" id="{2083F4BB-F496-4F2A-A337-BBEF7553501A}"/>
               </a:ext>
             </a:extLst>
           </p:cNvPr>
@@ -41054,7 +41043,7 @@
           <p:cNvPr id="39" name="">
             <a:extLst xmlns:a="http://schemas.openxmlformats.org/drawingml/2006/main">
               <a:ext uri="{FF2B5EF4-FFF2-40B4-BE49-F238E27FC236}">
-                <a16:creationId xmlns:a16="http://schemas.microsoft.com/office/drawing/2014/main" id="{14DF6806-9C8E-42E0-A986-98396F8BA15C}"/>
+                <a16:creationId xmlns:a16="http://schemas.microsoft.com/office/drawing/2014/main" id="{5E3E04E7-E2E6-4DAD-B561-215A456D2CD8}"/>
               </a:ext>
             </a:extLst>
           </p:cNvPr>
@@ -41112,7 +41101,7 @@
           <p:cNvPr id="40" name="">
             <a:extLst xmlns:a="http://schemas.openxmlformats.org/drawingml/2006/main">
               <a:ext uri="{FF2B5EF4-FFF2-40B4-BE49-F238E27FC236}">
-                <a16:creationId xmlns:a16="http://schemas.microsoft.com/office/drawing/2014/main" id="{71135B84-F7FF-43BF-AABD-06CDD93CA113}"/>
+                <a16:creationId xmlns:a16="http://schemas.microsoft.com/office/drawing/2014/main" id="{A23474AE-4A85-4109-A2D1-08BAB50A28FE}"/>
               </a:ext>
             </a:extLst>
           </p:cNvPr>
@@ -41145,7 +41134,7 @@
           <p:cNvPr id="41" name="">
             <a:extLst xmlns:a="http://schemas.openxmlformats.org/drawingml/2006/main">
               <a:ext uri="{FF2B5EF4-FFF2-40B4-BE49-F238E27FC236}">
-                <a16:creationId xmlns:a16="http://schemas.microsoft.com/office/drawing/2014/main" id="{16A05C0A-687D-478C-BCCE-12FFA9A59A69}"/>
+                <a16:creationId xmlns:a16="http://schemas.microsoft.com/office/drawing/2014/main" id="{A8F05611-C130-4210-BB1F-D5541F0481D8}"/>
               </a:ext>
             </a:extLst>
           </p:cNvPr>
@@ -41203,7 +41192,7 @@
           <p:cNvPr id="42" name="">
             <a:extLst xmlns:a="http://schemas.openxmlformats.org/drawingml/2006/main">
               <a:ext uri="{FF2B5EF4-FFF2-40B4-BE49-F238E27FC236}">
-                <a16:creationId xmlns:a16="http://schemas.microsoft.com/office/drawing/2014/main" id="{AC8B564D-F075-4726-93FD-D68C5F37EF67}"/>
+                <a16:creationId xmlns:a16="http://schemas.microsoft.com/office/drawing/2014/main" id="{62670B74-BD0D-4B3C-99EA-D1AD65B3ADC5}"/>
               </a:ext>
             </a:extLst>
           </p:cNvPr>
@@ -41236,7 +41225,7 @@
           <p:cNvPr id="43" name="">
             <a:extLst xmlns:a="http://schemas.openxmlformats.org/drawingml/2006/main">
               <a:ext uri="{FF2B5EF4-FFF2-40B4-BE49-F238E27FC236}">
-                <a16:creationId xmlns:a16="http://schemas.microsoft.com/office/drawing/2014/main" id="{8BF4677B-57DC-429E-BEEE-3CB692565127}"/>
+                <a16:creationId xmlns:a16="http://schemas.microsoft.com/office/drawing/2014/main" id="{204F2072-CB18-44BF-842B-C56125621A07}"/>
               </a:ext>
             </a:extLst>
           </p:cNvPr>
@@ -41294,7 +41283,7 @@
           <p:cNvPr id="44" name="">
             <a:extLst xmlns:a="http://schemas.openxmlformats.org/drawingml/2006/main">
               <a:ext uri="{FF2B5EF4-FFF2-40B4-BE49-F238E27FC236}">
-                <a16:creationId xmlns:a16="http://schemas.microsoft.com/office/drawing/2014/main" id="{8AD40288-143C-42FD-9537-9BF99E251E0E}"/>
+                <a16:creationId xmlns:a16="http://schemas.microsoft.com/office/drawing/2014/main" id="{DDDD843F-504F-4011-85EC-74E7BAFA9EFE}"/>
               </a:ext>
             </a:extLst>
           </p:cNvPr>
@@ -41327,7 +41316,7 @@
           <p:cNvPr id="45" name="">
             <a:extLst xmlns:a="http://schemas.openxmlformats.org/drawingml/2006/main">
               <a:ext uri="{FF2B5EF4-FFF2-40B4-BE49-F238E27FC236}">
-                <a16:creationId xmlns:a16="http://schemas.microsoft.com/office/drawing/2014/main" id="{B99A2B3E-B15C-42ED-A720-728B8DD01F2F}"/>
+                <a16:creationId xmlns:a16="http://schemas.microsoft.com/office/drawing/2014/main" id="{80AA3866-9AE5-41C1-A49B-AF9F3BA19209}"/>
               </a:ext>
             </a:extLst>
           </p:cNvPr>
@@ -41385,7 +41374,7 @@
           <p:cNvPr id="46" name="">
             <a:extLst xmlns:a="http://schemas.openxmlformats.org/drawingml/2006/main">
               <a:ext uri="{FF2B5EF4-FFF2-40B4-BE49-F238E27FC236}">
-                <a16:creationId xmlns:a16="http://schemas.microsoft.com/office/drawing/2014/main" id="{C206614D-EB06-4767-9F40-2D3399DA17A2}"/>
+                <a16:creationId xmlns:a16="http://schemas.microsoft.com/office/drawing/2014/main" id="{677362AC-E325-4598-B68B-5B13C65EE915}"/>
               </a:ext>
             </a:extLst>
           </p:cNvPr>
@@ -41418,7 +41407,7 @@
           <p:cNvPr id="47" name="">
             <a:extLst xmlns:a="http://schemas.openxmlformats.org/drawingml/2006/main">
               <a:ext uri="{FF2B5EF4-FFF2-40B4-BE49-F238E27FC236}">
-                <a16:creationId xmlns:a16="http://schemas.microsoft.com/office/drawing/2014/main" id="{2F737F7F-C721-4A2D-A683-092DD914651B}"/>
+                <a16:creationId xmlns:a16="http://schemas.microsoft.com/office/drawing/2014/main" id="{8C32DF48-86AF-4A95-9878-1C56A1D811F9}"/>
               </a:ext>
             </a:extLst>
           </p:cNvPr>
@@ -41476,7 +41465,7 @@
           <p:cNvPr id="48" name="">
             <a:extLst xmlns:a="http://schemas.openxmlformats.org/drawingml/2006/main">
               <a:ext uri="{FF2B5EF4-FFF2-40B4-BE49-F238E27FC236}">
-                <a16:creationId xmlns:a16="http://schemas.microsoft.com/office/drawing/2014/main" id="{0B2797AA-C22C-4833-B6B1-C8039321791C}"/>
+                <a16:creationId xmlns:a16="http://schemas.microsoft.com/office/drawing/2014/main" id="{5021475E-588A-457A-8594-900973D03D11}"/>
               </a:ext>
             </a:extLst>
           </p:cNvPr>
@@ -41509,7 +41498,7 @@
           <p:cNvPr id="49" name="">
             <a:extLst xmlns:a="http://schemas.openxmlformats.org/drawingml/2006/main">
               <a:ext uri="{FF2B5EF4-FFF2-40B4-BE49-F238E27FC236}">
-                <a16:creationId xmlns:a16="http://schemas.microsoft.com/office/drawing/2014/main" id="{ABEE6589-961A-4F3A-96A6-8843680F555C}"/>
+                <a16:creationId xmlns:a16="http://schemas.microsoft.com/office/drawing/2014/main" id="{106F3EBD-3D5F-48E1-B576-FA50348088DF}"/>
               </a:ext>
             </a:extLst>
           </p:cNvPr>
@@ -41567,7 +41556,7 @@
           <p:cNvPr id="50" name="">
             <a:extLst xmlns:a="http://schemas.openxmlformats.org/drawingml/2006/main">
               <a:ext uri="{FF2B5EF4-FFF2-40B4-BE49-F238E27FC236}">
-                <a16:creationId xmlns:a16="http://schemas.microsoft.com/office/drawing/2014/main" id="{DC0E7E6F-0BD0-4BBD-A0BE-55B35D1F91F1}"/>
+                <a16:creationId xmlns:a16="http://schemas.microsoft.com/office/drawing/2014/main" id="{7D4B6C37-DC5C-468A-B1EB-F2F46FFB3DEE}"/>
               </a:ext>
             </a:extLst>
           </p:cNvPr>
@@ -41600,7 +41589,7 @@
           <p:cNvPr id="51" name="">
             <a:extLst xmlns:a="http://schemas.openxmlformats.org/drawingml/2006/main">
               <a:ext uri="{FF2B5EF4-FFF2-40B4-BE49-F238E27FC236}">
-                <a16:creationId xmlns:a16="http://schemas.microsoft.com/office/drawing/2014/main" id="{DFF63215-2575-4260-8EF3-BA06F9E538D2}"/>
+                <a16:creationId xmlns:a16="http://schemas.microsoft.com/office/drawing/2014/main" id="{2176D55D-48A7-4AD9-86C2-79EB683DE0F4}"/>
               </a:ext>
             </a:extLst>
           </p:cNvPr>
@@ -41658,7 +41647,7 @@
           <p:cNvPr id="52" name="">
             <a:extLst xmlns:a="http://schemas.openxmlformats.org/drawingml/2006/main">
               <a:ext uri="{FF2B5EF4-FFF2-40B4-BE49-F238E27FC236}">
-                <a16:creationId xmlns:a16="http://schemas.microsoft.com/office/drawing/2014/main" id="{D37F4C04-C7CC-4262-B948-021D2FB5C900}"/>
+                <a16:creationId xmlns:a16="http://schemas.microsoft.com/office/drawing/2014/main" id="{77BA43E8-715D-4538-BF4C-5997601A59C0}"/>
               </a:ext>
             </a:extLst>
           </p:cNvPr>
@@ -41691,7 +41680,7 @@
           <p:cNvPr id="53" name="">
             <a:extLst xmlns:a="http://schemas.openxmlformats.org/drawingml/2006/main">
               <a:ext uri="{FF2B5EF4-FFF2-40B4-BE49-F238E27FC236}">
-                <a16:creationId xmlns:a16="http://schemas.microsoft.com/office/drawing/2014/main" id="{A9594AFE-E01A-464F-A5AF-CE68001AD651}"/>
+                <a16:creationId xmlns:a16="http://schemas.microsoft.com/office/drawing/2014/main" id="{F585C66D-58BA-40FB-8430-8E4FCF1241E6}"/>
               </a:ext>
             </a:extLst>
           </p:cNvPr>
@@ -41749,7 +41738,7 @@
           <p:cNvPr id="54" name="">
             <a:extLst xmlns:a="http://schemas.openxmlformats.org/drawingml/2006/main">
               <a:ext uri="{FF2B5EF4-FFF2-40B4-BE49-F238E27FC236}">
-                <a16:creationId xmlns:a16="http://schemas.microsoft.com/office/drawing/2014/main" id="{6988B3AD-35FE-481F-A9F1-BC4FF57B76EE}"/>
+                <a16:creationId xmlns:a16="http://schemas.microsoft.com/office/drawing/2014/main" id="{95003FC7-7FA7-4A94-84F5-4FD04B774EE9}"/>
               </a:ext>
             </a:extLst>
           </p:cNvPr>
@@ -41782,7 +41771,7 @@
           <p:cNvPr id="55" name="">
             <a:extLst xmlns:a="http://schemas.openxmlformats.org/drawingml/2006/main">
               <a:ext uri="{FF2B5EF4-FFF2-40B4-BE49-F238E27FC236}">
-                <a16:creationId xmlns:a16="http://schemas.microsoft.com/office/drawing/2014/main" id="{2EE4254B-DF6D-46DE-88C7-D26EB72DB376}"/>
+                <a16:creationId xmlns:a16="http://schemas.microsoft.com/office/drawing/2014/main" id="{5D9C64D3-DF8D-4888-9FEB-65A5377CC81A}"/>
               </a:ext>
             </a:extLst>
           </p:cNvPr>
@@ -41840,7 +41829,7 @@
           <p:cNvPr id="56" name="">
             <a:extLst xmlns:a="http://schemas.openxmlformats.org/drawingml/2006/main">
               <a:ext uri="{FF2B5EF4-FFF2-40B4-BE49-F238E27FC236}">
-                <a16:creationId xmlns:a16="http://schemas.microsoft.com/office/drawing/2014/main" id="{5FDD0B15-FAE2-4025-A123-E558F38F2CC6}"/>
+                <a16:creationId xmlns:a16="http://schemas.microsoft.com/office/drawing/2014/main" id="{13F11F02-6FB6-42B7-87B5-B8ECAECAB570}"/>
               </a:ext>
             </a:extLst>
           </p:cNvPr>
@@ -41873,7 +41862,7 @@
           <p:cNvPr id="57" name="">
             <a:extLst xmlns:a="http://schemas.openxmlformats.org/drawingml/2006/main">
               <a:ext uri="{FF2B5EF4-FFF2-40B4-BE49-F238E27FC236}">
-                <a16:creationId xmlns:a16="http://schemas.microsoft.com/office/drawing/2014/main" id="{DA1F1255-3B6B-421A-86AB-2C83FF8A46C1}"/>
+                <a16:creationId xmlns:a16="http://schemas.microsoft.com/office/drawing/2014/main" id="{EB65076C-6DEE-4002-8C3B-F81A748951DF}"/>
               </a:ext>
             </a:extLst>
           </p:cNvPr>
@@ -41931,7 +41920,7 @@
           <p:cNvPr id="58" name="">
             <a:extLst xmlns:a="http://schemas.openxmlformats.org/drawingml/2006/main">
               <a:ext uri="{FF2B5EF4-FFF2-40B4-BE49-F238E27FC236}">
-                <a16:creationId xmlns:a16="http://schemas.microsoft.com/office/drawing/2014/main" id="{B248CA85-78D2-42FD-9CC1-8D52A9ACF93E}"/>
+                <a16:creationId xmlns:a16="http://schemas.microsoft.com/office/drawing/2014/main" id="{1D3E2DDE-262F-413B-A379-6143B00D9035}"/>
               </a:ext>
             </a:extLst>
           </p:cNvPr>
@@ -41964,7 +41953,7 @@
           <p:cNvPr id="59" name="">
             <a:extLst xmlns:a="http://schemas.openxmlformats.org/drawingml/2006/main">
               <a:ext uri="{FF2B5EF4-FFF2-40B4-BE49-F238E27FC236}">
-                <a16:creationId xmlns:a16="http://schemas.microsoft.com/office/drawing/2014/main" id="{4A153B88-C4B3-4E18-A975-C607053CA078}"/>
+                <a16:creationId xmlns:a16="http://schemas.microsoft.com/office/drawing/2014/main" id="{6DF7D7D4-DCBB-4DF0-AFB6-979A38AB2DF4}"/>
               </a:ext>
             </a:extLst>
           </p:cNvPr>
@@ -42022,7 +42011,7 @@
           <p:cNvPr id="60" name="">
             <a:extLst xmlns:a="http://schemas.openxmlformats.org/drawingml/2006/main">
               <a:ext uri="{FF2B5EF4-FFF2-40B4-BE49-F238E27FC236}">
-                <a16:creationId xmlns:a16="http://schemas.microsoft.com/office/drawing/2014/main" id="{DA5D1C4C-0DE5-4348-943F-DF60E12373B1}"/>
+                <a16:creationId xmlns:a16="http://schemas.microsoft.com/office/drawing/2014/main" id="{971F565D-B1C1-4F42-B656-4E6078C49C37}"/>
               </a:ext>
             </a:extLst>
           </p:cNvPr>
@@ -42055,7 +42044,7 @@
           <p:cNvPr id="61" name="">
             <a:extLst xmlns:a="http://schemas.openxmlformats.org/drawingml/2006/main">
               <a:ext uri="{FF2B5EF4-FFF2-40B4-BE49-F238E27FC236}">
-                <a16:creationId xmlns:a16="http://schemas.microsoft.com/office/drawing/2014/main" id="{65D4C5F8-F9D2-4B09-B51E-FB5D2FF49528}"/>
+                <a16:creationId xmlns:a16="http://schemas.microsoft.com/office/drawing/2014/main" id="{44244403-F9BB-42F1-9473-C88269F88107}"/>
               </a:ext>
             </a:extLst>
           </p:cNvPr>
@@ -42113,7 +42102,7 @@
           <p:cNvPr id="62" name="">
             <a:extLst xmlns:a="http://schemas.openxmlformats.org/drawingml/2006/main">
               <a:ext uri="{FF2B5EF4-FFF2-40B4-BE49-F238E27FC236}">
-                <a16:creationId xmlns:a16="http://schemas.microsoft.com/office/drawing/2014/main" id="{4D0356A5-010E-4BB7-A25A-78F041990F52}"/>
+                <a16:creationId xmlns:a16="http://schemas.microsoft.com/office/drawing/2014/main" id="{0003E831-D9A1-4AC2-8284-565D0F6EBE4C}"/>
               </a:ext>
             </a:extLst>
           </p:cNvPr>
@@ -42146,7 +42135,7 @@
           <p:cNvPr id="63" name="">
             <a:extLst xmlns:a="http://schemas.openxmlformats.org/drawingml/2006/main">
               <a:ext uri="{FF2B5EF4-FFF2-40B4-BE49-F238E27FC236}">
-                <a16:creationId xmlns:a16="http://schemas.microsoft.com/office/drawing/2014/main" id="{FA1E862E-9A9A-4ADE-90D5-023E6B7741F2}"/>
+                <a16:creationId xmlns:a16="http://schemas.microsoft.com/office/drawing/2014/main" id="{DC41F7E3-1690-496F-9460-4643C31C4826}"/>
               </a:ext>
             </a:extLst>
           </p:cNvPr>
@@ -42204,7 +42193,7 @@
           <p:cNvPr id="64" name="">
             <a:extLst xmlns:a="http://schemas.openxmlformats.org/drawingml/2006/main">
               <a:ext uri="{FF2B5EF4-FFF2-40B4-BE49-F238E27FC236}">
-                <a16:creationId xmlns:a16="http://schemas.microsoft.com/office/drawing/2014/main" id="{2EBF7EFD-410B-42BD-A19A-76A0332CC855}"/>
+                <a16:creationId xmlns:a16="http://schemas.microsoft.com/office/drawing/2014/main" id="{9A807C33-78A9-4758-84B5-04E9B0B65524}"/>
               </a:ext>
             </a:extLst>
           </p:cNvPr>
@@ -42237,7 +42226,7 @@
           <p:cNvPr id="65" name="">
             <a:extLst xmlns:a="http://schemas.openxmlformats.org/drawingml/2006/main">
               <a:ext uri="{FF2B5EF4-FFF2-40B4-BE49-F238E27FC236}">
-                <a16:creationId xmlns:a16="http://schemas.microsoft.com/office/drawing/2014/main" id="{B4ABAA2C-A0B1-4E82-A453-25C85D02D4FA}"/>
+                <a16:creationId xmlns:a16="http://schemas.microsoft.com/office/drawing/2014/main" id="{AE22F36D-8547-4856-A53E-D2166C95DC51}"/>
               </a:ext>
             </a:extLst>
           </p:cNvPr>
@@ -42295,7 +42284,7 @@
           <p:cNvPr id="66" name="">
             <a:extLst xmlns:a="http://schemas.openxmlformats.org/drawingml/2006/main">
               <a:ext uri="{FF2B5EF4-FFF2-40B4-BE49-F238E27FC236}">
-                <a16:creationId xmlns:a16="http://schemas.microsoft.com/office/drawing/2014/main" id="{32D94EE7-E11E-4A25-BD56-2ABE45206368}"/>
+                <a16:creationId xmlns:a16="http://schemas.microsoft.com/office/drawing/2014/main" id="{1C897F5A-DE8E-486F-BD4E-97DB3D76CD42}"/>
               </a:ext>
             </a:extLst>
           </p:cNvPr>
@@ -42328,7 +42317,7 @@
           <p:cNvPr id="67" name="">
             <a:extLst xmlns:a="http://schemas.openxmlformats.org/drawingml/2006/main">
               <a:ext uri="{FF2B5EF4-FFF2-40B4-BE49-F238E27FC236}">
-                <a16:creationId xmlns:a16="http://schemas.microsoft.com/office/drawing/2014/main" id="{7638D7DE-DC8D-49F8-AFCF-D2CC000FA9C3}"/>
+                <a16:creationId xmlns:a16="http://schemas.microsoft.com/office/drawing/2014/main" id="{87148C88-3184-4F40-8019-11FBCB28ABA3}"/>
               </a:ext>
             </a:extLst>
           </p:cNvPr>
@@ -42386,7 +42375,7 @@
           <p:cNvPr id="68" name="">
             <a:extLst xmlns:a="http://schemas.openxmlformats.org/drawingml/2006/main">
               <a:ext uri="{FF2B5EF4-FFF2-40B4-BE49-F238E27FC236}">
-                <a16:creationId xmlns:a16="http://schemas.microsoft.com/office/drawing/2014/main" id="{D5C2C7CE-ADDE-4E2A-B258-72D338EB484F}"/>
+                <a16:creationId xmlns:a16="http://schemas.microsoft.com/office/drawing/2014/main" id="{A16716FD-ADAF-47D1-9CE2-738657480057}"/>
               </a:ext>
             </a:extLst>
           </p:cNvPr>
@@ -42419,7 +42408,7 @@
           <p:cNvPr id="69" name="">
             <a:extLst xmlns:a="http://schemas.openxmlformats.org/drawingml/2006/main">
               <a:ext uri="{FF2B5EF4-FFF2-40B4-BE49-F238E27FC236}">
-                <a16:creationId xmlns:a16="http://schemas.microsoft.com/office/drawing/2014/main" id="{72C4587D-9144-4E16-962B-6DD16EB3F84F}"/>
+                <a16:creationId xmlns:a16="http://schemas.microsoft.com/office/drawing/2014/main" id="{478A157B-C6EE-4A0B-8E57-EE80C28AD673}"/>
               </a:ext>
             </a:extLst>
           </p:cNvPr>
@@ -42477,7 +42466,7 @@
           <p:cNvPr id="70" name="">
             <a:extLst xmlns:a="http://schemas.openxmlformats.org/drawingml/2006/main">
               <a:ext uri="{FF2B5EF4-FFF2-40B4-BE49-F238E27FC236}">
-                <a16:creationId xmlns:a16="http://schemas.microsoft.com/office/drawing/2014/main" id="{3653803E-A55B-4936-AA21-F8F616F98618}"/>
+                <a16:creationId xmlns:a16="http://schemas.microsoft.com/office/drawing/2014/main" id="{843B420F-857A-443A-A32D-E4CE4A388DFC}"/>
               </a:ext>
             </a:extLst>
           </p:cNvPr>
@@ -42510,7 +42499,7 @@
           <p:cNvPr id="71" name="">
             <a:extLst xmlns:a="http://schemas.openxmlformats.org/drawingml/2006/main">
               <a:ext uri="{FF2B5EF4-FFF2-40B4-BE49-F238E27FC236}">
-                <a16:creationId xmlns:a16="http://schemas.microsoft.com/office/drawing/2014/main" id="{3D91A431-6230-49F9-B762-FD2491ECC7A5}"/>
+                <a16:creationId xmlns:a16="http://schemas.microsoft.com/office/drawing/2014/main" id="{2F99E6A3-7E8D-4D2F-BEF7-15F95BA0DE97}"/>
               </a:ext>
             </a:extLst>
           </p:cNvPr>
@@ -42568,7 +42557,7 @@
           <p:cNvPr id="72" name="">
             <a:extLst xmlns:a="http://schemas.openxmlformats.org/drawingml/2006/main">
               <a:ext uri="{FF2B5EF4-FFF2-40B4-BE49-F238E27FC236}">
-                <a16:creationId xmlns:a16="http://schemas.microsoft.com/office/drawing/2014/main" id="{369F02CA-F53B-4A24-95C4-0D9299980C07}"/>
+                <a16:creationId xmlns:a16="http://schemas.microsoft.com/office/drawing/2014/main" id="{C4844C4A-3A65-494D-A62E-18527F672E20}"/>
               </a:ext>
             </a:extLst>
           </p:cNvPr>
@@ -42601,7 +42590,7 @@
           <p:cNvPr id="73" name="">
             <a:extLst xmlns:a="http://schemas.openxmlformats.org/drawingml/2006/main">
               <a:ext uri="{FF2B5EF4-FFF2-40B4-BE49-F238E27FC236}">
-                <a16:creationId xmlns:a16="http://schemas.microsoft.com/office/drawing/2014/main" id="{3F429EF2-EEB4-4043-8F2B-94BA98625AC7}"/>
+                <a16:creationId xmlns:a16="http://schemas.microsoft.com/office/drawing/2014/main" id="{00E10BC3-E20C-4BF5-9623-102F9F7DDA60}"/>
               </a:ext>
             </a:extLst>
           </p:cNvPr>
@@ -42659,7 +42648,7 @@
           <p:cNvPr id="74" name="">
             <a:extLst xmlns:a="http://schemas.openxmlformats.org/drawingml/2006/main">
               <a:ext uri="{FF2B5EF4-FFF2-40B4-BE49-F238E27FC236}">
-                <a16:creationId xmlns:a16="http://schemas.microsoft.com/office/drawing/2014/main" id="{281BF797-4728-4864-A61E-C43F1B07439A}"/>
+                <a16:creationId xmlns:a16="http://schemas.microsoft.com/office/drawing/2014/main" id="{2F381B31-72A7-4AF1-8FD0-BE99008C016C}"/>
               </a:ext>
             </a:extLst>
           </p:cNvPr>
@@ -42692,7 +42681,7 @@
           <p:cNvPr id="75" name="">
             <a:extLst xmlns:a="http://schemas.openxmlformats.org/drawingml/2006/main">
               <a:ext uri="{FF2B5EF4-FFF2-40B4-BE49-F238E27FC236}">
-                <a16:creationId xmlns:a16="http://schemas.microsoft.com/office/drawing/2014/main" id="{CBB76327-00EB-49FD-BB29-92A4E34F3C13}"/>
+                <a16:creationId xmlns:a16="http://schemas.microsoft.com/office/drawing/2014/main" id="{9218C341-453C-45B9-9E30-C94003D96053}"/>
               </a:ext>
             </a:extLst>
           </p:cNvPr>
@@ -42750,7 +42739,7 @@
           <p:cNvPr id="76" name="">
             <a:extLst xmlns:a="http://schemas.openxmlformats.org/drawingml/2006/main">
               <a:ext uri="{FF2B5EF4-FFF2-40B4-BE49-F238E27FC236}">
-                <a16:creationId xmlns:a16="http://schemas.microsoft.com/office/drawing/2014/main" id="{7254D22A-CDE6-49D7-BDB4-F90609ED6430}"/>
+                <a16:creationId xmlns:a16="http://schemas.microsoft.com/office/drawing/2014/main" id="{CC6BCC20-DC94-4D1A-A838-A99BDBD1CBBB}"/>
               </a:ext>
             </a:extLst>
           </p:cNvPr>
@@ -42783,7 +42772,7 @@
           <p:cNvPr id="77" name="">
             <a:extLst xmlns:a="http://schemas.openxmlformats.org/drawingml/2006/main">
               <a:ext uri="{FF2B5EF4-FFF2-40B4-BE49-F238E27FC236}">
-                <a16:creationId xmlns:a16="http://schemas.microsoft.com/office/drawing/2014/main" id="{C1B40F80-FAEB-4B6A-A0C2-24D1DBA1E9FB}"/>
+                <a16:creationId xmlns:a16="http://schemas.microsoft.com/office/drawing/2014/main" id="{607D4B2A-13FD-459F-9B5F-A1C83CCD245C}"/>
               </a:ext>
             </a:extLst>
           </p:cNvPr>
@@ -42841,7 +42830,7 @@
           <p:cNvPr id="78" name="">
             <a:extLst xmlns:a="http://schemas.openxmlformats.org/drawingml/2006/main">
               <a:ext uri="{FF2B5EF4-FFF2-40B4-BE49-F238E27FC236}">
-                <a16:creationId xmlns:a16="http://schemas.microsoft.com/office/drawing/2014/main" id="{0A70B1A1-01E9-4005-8116-F72B481DDCF2}"/>
+                <a16:creationId xmlns:a16="http://schemas.microsoft.com/office/drawing/2014/main" id="{7F4FF338-27C7-467F-9D61-2B26713246B7}"/>
               </a:ext>
             </a:extLst>
           </p:cNvPr>
@@ -42899,7 +42888,7 @@
           <p:cNvPr id="79" name="">
             <a:extLst xmlns:a="http://schemas.openxmlformats.org/drawingml/2006/main">
               <a:ext uri="{FF2B5EF4-FFF2-40B4-BE49-F238E27FC236}">
-                <a16:creationId xmlns:a16="http://schemas.microsoft.com/office/drawing/2014/main" id="{3B865168-BA49-4BC4-9FBF-875BFC90531B}"/>
+                <a16:creationId xmlns:a16="http://schemas.microsoft.com/office/drawing/2014/main" id="{089FD506-02D2-4A19-8E23-C86F1CF86B97}"/>
               </a:ext>
             </a:extLst>
           </p:cNvPr>
@@ -42957,7 +42946,7 @@
           <p:cNvPr id="80" name="">
             <a:extLst xmlns:a="http://schemas.openxmlformats.org/drawingml/2006/main">
               <a:ext uri="{FF2B5EF4-FFF2-40B4-BE49-F238E27FC236}">
-                <a16:creationId xmlns:a16="http://schemas.microsoft.com/office/drawing/2014/main" id="{035504AE-008A-4C96-922C-388972BA4F79}"/>
+                <a16:creationId xmlns:a16="http://schemas.microsoft.com/office/drawing/2014/main" id="{C151045D-0CBD-48C7-843C-0A2D4A6A4977}"/>
               </a:ext>
             </a:extLst>
           </p:cNvPr>
@@ -42990,7 +42979,7 @@
           <p:cNvPr id="81" name="">
             <a:extLst xmlns:a="http://schemas.openxmlformats.org/drawingml/2006/main">
               <a:ext uri="{FF2B5EF4-FFF2-40B4-BE49-F238E27FC236}">
-                <a16:creationId xmlns:a16="http://schemas.microsoft.com/office/drawing/2014/main" id="{E1DACE91-8A7C-4962-B5F6-2CC50257A813}"/>
+                <a16:creationId xmlns:a16="http://schemas.microsoft.com/office/drawing/2014/main" id="{7386C535-1AA6-4F94-AA0E-39D1474E5A47}"/>
               </a:ext>
             </a:extLst>
           </p:cNvPr>
@@ -43048,7 +43037,7 @@
           <p:cNvPr id="82" name="">
             <a:extLst xmlns:a="http://schemas.openxmlformats.org/drawingml/2006/main">
               <a:ext uri="{FF2B5EF4-FFF2-40B4-BE49-F238E27FC236}">
-                <a16:creationId xmlns:a16="http://schemas.microsoft.com/office/drawing/2014/main" id="{CAE79980-1319-49B4-9438-609AACF9A36E}"/>
+                <a16:creationId xmlns:a16="http://schemas.microsoft.com/office/drawing/2014/main" id="{BDB8525A-EB54-42DE-B280-6698D828190F}"/>
               </a:ext>
             </a:extLst>
           </p:cNvPr>
@@ -43106,7 +43095,7 @@
           <p:cNvPr id="83" name="">
             <a:extLst xmlns:a="http://schemas.openxmlformats.org/drawingml/2006/main">
               <a:ext uri="{FF2B5EF4-FFF2-40B4-BE49-F238E27FC236}">
-                <a16:creationId xmlns:a16="http://schemas.microsoft.com/office/drawing/2014/main" id="{BC50C62E-61DC-4F3E-B154-BA67D163DE81}"/>
+                <a16:creationId xmlns:a16="http://schemas.microsoft.com/office/drawing/2014/main" id="{37724473-74C8-48FD-9EC2-0063DEB11E49}"/>
               </a:ext>
             </a:extLst>
           </p:cNvPr>
@@ -43164,7 +43153,7 @@
           <p:cNvPr id="84" name="">
             <a:extLst xmlns:a="http://schemas.openxmlformats.org/drawingml/2006/main">
               <a:ext uri="{FF2B5EF4-FFF2-40B4-BE49-F238E27FC236}">
-                <a16:creationId xmlns:a16="http://schemas.microsoft.com/office/drawing/2014/main" id="{E888C79A-9D5C-483B-839C-4D17E6202C69}"/>
+                <a16:creationId xmlns:a16="http://schemas.microsoft.com/office/drawing/2014/main" id="{843DB838-D4FF-4055-B933-7941C54B93BD}"/>
               </a:ext>
             </a:extLst>
           </p:cNvPr>
@@ -43197,7 +43186,7 @@
           <p:cNvPr id="85" name="">
             <a:extLst xmlns:a="http://schemas.openxmlformats.org/drawingml/2006/main">
               <a:ext uri="{FF2B5EF4-FFF2-40B4-BE49-F238E27FC236}">
-                <a16:creationId xmlns:a16="http://schemas.microsoft.com/office/drawing/2014/main" id="{501C3F2D-31FD-4DD2-BDC9-8E70EA2F4BBA}"/>
+                <a16:creationId xmlns:a16="http://schemas.microsoft.com/office/drawing/2014/main" id="{D0655B7A-F0E9-4F6E-9582-940368D99658}"/>
               </a:ext>
             </a:extLst>
           </p:cNvPr>
@@ -43255,7 +43244,7 @@
           <p:cNvPr id="86" name="">
             <a:extLst xmlns:a="http://schemas.openxmlformats.org/drawingml/2006/main">
               <a:ext uri="{FF2B5EF4-FFF2-40B4-BE49-F238E27FC236}">
-                <a16:creationId xmlns:a16="http://schemas.microsoft.com/office/drawing/2014/main" id="{9CB5E48F-E83E-49AE-8E54-8BC5EDEC64C3}"/>
+                <a16:creationId xmlns:a16="http://schemas.microsoft.com/office/drawing/2014/main" id="{78A088ED-8206-43FE-97DB-538BB122E844}"/>
               </a:ext>
             </a:extLst>
           </p:cNvPr>
@@ -43313,7 +43302,7 @@
           <p:cNvPr id="87" name="">
             <a:extLst xmlns:a="http://schemas.openxmlformats.org/drawingml/2006/main">
               <a:ext uri="{FF2B5EF4-FFF2-40B4-BE49-F238E27FC236}">
-                <a16:creationId xmlns:a16="http://schemas.microsoft.com/office/drawing/2014/main" id="{BF2BCF9C-0C1A-4934-9426-F8A889AA6BF7}"/>
+                <a16:creationId xmlns:a16="http://schemas.microsoft.com/office/drawing/2014/main" id="{9AA11A02-34EA-4A42-9BB9-2FE0FC51FA15}"/>
               </a:ext>
             </a:extLst>
           </p:cNvPr>
@@ -43371,7 +43360,7 @@
           <p:cNvPr id="88" name="">
             <a:extLst xmlns:a="http://schemas.openxmlformats.org/drawingml/2006/main">
               <a:ext uri="{FF2B5EF4-FFF2-40B4-BE49-F238E27FC236}">
-                <a16:creationId xmlns:a16="http://schemas.microsoft.com/office/drawing/2014/main" id="{0DED3FFF-29B5-4BAD-A04F-9399C5E60CE3}"/>
+                <a16:creationId xmlns:a16="http://schemas.microsoft.com/office/drawing/2014/main" id="{7F05339D-E896-427A-8C49-27D2A86AA0D0}"/>
               </a:ext>
             </a:extLst>
           </p:cNvPr>
@@ -43404,7 +43393,7 @@
           <p:cNvPr id="89" name="">
             <a:extLst xmlns:a="http://schemas.openxmlformats.org/drawingml/2006/main">
               <a:ext uri="{FF2B5EF4-FFF2-40B4-BE49-F238E27FC236}">
-                <a16:creationId xmlns:a16="http://schemas.microsoft.com/office/drawing/2014/main" id="{7529925E-0758-492A-A50D-C1D1C32B3629}"/>
+                <a16:creationId xmlns:a16="http://schemas.microsoft.com/office/drawing/2014/main" id="{CD9A742B-A834-4F7B-8505-3665D8637017}"/>
               </a:ext>
             </a:extLst>
           </p:cNvPr>
@@ -43462,7 +43451,7 @@
           <p:cNvPr id="90" name="">
             <a:extLst xmlns:a="http://schemas.openxmlformats.org/drawingml/2006/main">
               <a:ext uri="{FF2B5EF4-FFF2-40B4-BE49-F238E27FC236}">
-                <a16:creationId xmlns:a16="http://schemas.microsoft.com/office/drawing/2014/main" id="{8ABE6F3D-0C75-4E41-81CA-3B7BD849EB01}"/>
+                <a16:creationId xmlns:a16="http://schemas.microsoft.com/office/drawing/2014/main" id="{FC63A5A6-1523-4B11-987B-8586071B9098}"/>
               </a:ext>
             </a:extLst>
           </p:cNvPr>
@@ -43520,7 +43509,7 @@
           <p:cNvPr id="91" name="">
             <a:extLst xmlns:a="http://schemas.openxmlformats.org/drawingml/2006/main">
               <a:ext uri="{FF2B5EF4-FFF2-40B4-BE49-F238E27FC236}">
-                <a16:creationId xmlns:a16="http://schemas.microsoft.com/office/drawing/2014/main" id="{68B31F90-66FE-464D-99EC-89C437E674C7}"/>
+                <a16:creationId xmlns:a16="http://schemas.microsoft.com/office/drawing/2014/main" id="{BFF0AAEA-C838-4911-9391-1D7B3D1077AE}"/>
               </a:ext>
             </a:extLst>
           </p:cNvPr>
@@ -43578,7 +43567,7 @@
           <p:cNvPr id="92" name="">
             <a:extLst xmlns:a="http://schemas.openxmlformats.org/drawingml/2006/main">
               <a:ext uri="{FF2B5EF4-FFF2-40B4-BE49-F238E27FC236}">
-                <a16:creationId xmlns:a16="http://schemas.microsoft.com/office/drawing/2014/main" id="{A84FEDC7-2E25-4DB6-AA13-33058297D5CC}"/>
+                <a16:creationId xmlns:a16="http://schemas.microsoft.com/office/drawing/2014/main" id="{426BB219-C6F0-4CCE-8034-41ADDA618AE4}"/>
               </a:ext>
             </a:extLst>
           </p:cNvPr>
@@ -43611,7 +43600,7 @@
           <p:cNvPr id="93" name="">
             <a:extLst xmlns:a="http://schemas.openxmlformats.org/drawingml/2006/main">
               <a:ext uri="{FF2B5EF4-FFF2-40B4-BE49-F238E27FC236}">
-                <a16:creationId xmlns:a16="http://schemas.microsoft.com/office/drawing/2014/main" id="{E8EB20FA-ED02-4DFE-85FF-B650287B47CA}"/>
+                <a16:creationId xmlns:a16="http://schemas.microsoft.com/office/drawing/2014/main" id="{563E8E41-8BBA-44EE-8196-BC4B1614F1F8}"/>
               </a:ext>
             </a:extLst>
           </p:cNvPr>
@@ -43669,7 +43658,7 @@
                 <a:latin typeface="Microsoft YaHei"/>
                 <a:ea typeface="Microsoft YaHei"/>
                 <a:cs typeface="Microsoft YaHei"/>
-                <a:hlinkClick xmlns:r="http://schemas.openxmlformats.org/officeDocument/2006/relationships" r:id="Rb6905b629eb84146"/>
+                <a:hlinkClick xmlns:r="http://schemas.openxmlformats.org/officeDocument/2006/relationships" r:id="Rc8f47a39a1f349a8"/>
               </a:rPr>
               <a:t>Claude Workflow</a:t>
             </a:r>
@@ -43681,7 +43670,7 @@
                 <a:latin typeface="Microsoft YaHei"/>
                 <a:ea typeface="Microsoft YaHei"/>
                 <a:cs typeface="Microsoft YaHei"/>
-                <a:hlinkClick xmlns:r="http://schemas.openxmlformats.org/officeDocument/2006/relationships" r:id="Rfaa96fc7b57d482e"/>
+                <a:hlinkClick xmlns:r="http://schemas.openxmlformats.org/officeDocument/2006/relationships" r:id="Re4b0d695f856405f"/>
               </a:rPr>
               <a:t> · Claude Goal</a:t>
             </a:r>
@@ -43693,7 +43682,7 @@
                 <a:latin typeface="Microsoft YaHei"/>
                 <a:ea typeface="Microsoft YaHei"/>
                 <a:cs typeface="Microsoft YaHei"/>
-                <a:hlinkClick xmlns:r="http://schemas.openxmlformats.org/officeDocument/2006/relationships" r:id="R43b36665b683490b"/>
+                <a:hlinkClick xmlns:r="http://schemas.openxmlformats.org/officeDocument/2006/relationships" r:id="R7f64efe720c04860"/>
               </a:rPr>
               <a:t> · Qoder SDD</a:t>
             </a:r>
@@ -43705,7 +43694,7 @@
                 <a:latin typeface="Microsoft YaHei"/>
                 <a:ea typeface="Microsoft YaHei"/>
                 <a:cs typeface="Microsoft YaHei"/>
-                <a:hlinkClick xmlns:r="http://schemas.openxmlformats.org/officeDocument/2006/relationships" r:id="R7c70b319069e4ecf"/>
+                <a:hlinkClick xmlns:r="http://schemas.openxmlformats.org/officeDocument/2006/relationships" r:id="Re8efdc8b7b454a42"/>
               </a:rPr>
               <a:t> · Trae SOLO</a:t>
             </a:r>
@@ -43717,7 +43706,7 @@
           <p:cNvPr id="94" name="">
             <a:extLst xmlns:a="http://schemas.openxmlformats.org/drawingml/2006/main">
               <a:ext uri="{FF2B5EF4-FFF2-40B4-BE49-F238E27FC236}">
-                <a16:creationId xmlns:a16="http://schemas.microsoft.com/office/drawing/2014/main" id="{4C428C16-9889-4D13-AB72-DC821D931BD7}"/>
+                <a16:creationId xmlns:a16="http://schemas.microsoft.com/office/drawing/2014/main" id="{FE0BC3DA-08EC-48CA-A451-8261ED59B533}"/>
               </a:ext>
             </a:extLst>
           </p:cNvPr>
@@ -43773,7 +43762,7 @@
     </p:spTree>
     <p:extLst>
       <p:ext uri="{BB962C8B-B14F-4D97-AF65-F5344CB8AC3E}">
-        <p14:creationId xmlns:p14="http://schemas.microsoft.com/office/powerpoint/2010/main" val="896234820"/>
+        <p14:creationId xmlns:p14="http://schemas.microsoft.com/office/powerpoint/2010/main" val="207526747"/>
       </p:ext>
     </p:extLst>
   </p:cSld>
@@ -43804,7 +43793,7 @@
           <p:cNvPr id="42" name="">
             <a:extLst xmlns:a="http://schemas.openxmlformats.org/drawingml/2006/main">
               <a:ext uri="{FF2B5EF4-FFF2-40B4-BE49-F238E27FC236}">
-                <a16:creationId xmlns:a16="http://schemas.microsoft.com/office/drawing/2014/main" id="{CB7CE2C8-8125-486F-B0EC-A1FA18B385C9}"/>
+                <a16:creationId xmlns:a16="http://schemas.microsoft.com/office/drawing/2014/main" id="{D53F708F-5055-4C37-93C9-2DB4F758696D}"/>
               </a:ext>
             </a:extLst>
           </p:cNvPr>
@@ -43837,7 +43826,7 @@
           <p:cNvPr id="2" name="">
             <a:extLst xmlns:a="http://schemas.openxmlformats.org/drawingml/2006/main">
               <a:ext uri="{FF2B5EF4-FFF2-40B4-BE49-F238E27FC236}">
-                <a16:creationId xmlns:a16="http://schemas.microsoft.com/office/drawing/2014/main" id="{F005BBD0-609E-4B70-BD05-BE149343AF44}"/>
+                <a16:creationId xmlns:a16="http://schemas.microsoft.com/office/drawing/2014/main" id="{3137DA19-BBCF-478C-BFF5-7696DB1C98C9}"/>
               </a:ext>
             </a:extLst>
           </p:cNvPr>
@@ -43895,7 +43884,7 @@
           <p:cNvPr id="3" name="">
             <a:extLst xmlns:a="http://schemas.openxmlformats.org/drawingml/2006/main">
               <a:ext uri="{FF2B5EF4-FFF2-40B4-BE49-F238E27FC236}">
-                <a16:creationId xmlns:a16="http://schemas.microsoft.com/office/drawing/2014/main" id="{09A6AA4D-E77E-44FC-89A1-4562912A5A19}"/>
+                <a16:creationId xmlns:a16="http://schemas.microsoft.com/office/drawing/2014/main" id="{1D2135B7-2526-46C1-B7D3-49AA021F2D68}"/>
               </a:ext>
             </a:extLst>
           </p:cNvPr>
@@ -43953,7 +43942,7 @@
           <p:cNvPr id="4" name="">
             <a:extLst xmlns:a="http://schemas.openxmlformats.org/drawingml/2006/main">
               <a:ext uri="{FF2B5EF4-FFF2-40B4-BE49-F238E27FC236}">
-                <a16:creationId xmlns:a16="http://schemas.microsoft.com/office/drawing/2014/main" id="{6D841B50-0FE5-4D38-A72F-6BD616D941D5}"/>
+                <a16:creationId xmlns:a16="http://schemas.microsoft.com/office/drawing/2014/main" id="{975FFA38-AB38-4601-A0A1-1543EDD36F7A}"/>
               </a:ext>
             </a:extLst>
           </p:cNvPr>
@@ -43986,7 +43975,7 @@
           <p:cNvPr id="5" name="">
             <a:extLst xmlns:a="http://schemas.openxmlformats.org/drawingml/2006/main">
               <a:ext uri="{FF2B5EF4-FFF2-40B4-BE49-F238E27FC236}">
-                <a16:creationId xmlns:a16="http://schemas.microsoft.com/office/drawing/2014/main" id="{DA1397EA-0AED-42E0-A7AE-F0A59D383303}"/>
+                <a16:creationId xmlns:a16="http://schemas.microsoft.com/office/drawing/2014/main" id="{693B5913-D11D-4648-8EC3-8A5156E61D74}"/>
               </a:ext>
             </a:extLst>
           </p:cNvPr>
@@ -44044,7 +44033,7 @@
           <p:cNvPr id="6" name="">
             <a:extLst xmlns:a="http://schemas.openxmlformats.org/drawingml/2006/main">
               <a:ext uri="{FF2B5EF4-FFF2-40B4-BE49-F238E27FC236}">
-                <a16:creationId xmlns:a16="http://schemas.microsoft.com/office/drawing/2014/main" id="{12BB4122-7E49-4559-81A1-1E8F56D27CCC}"/>
+                <a16:creationId xmlns:a16="http://schemas.microsoft.com/office/drawing/2014/main" id="{8ED2FF54-4AF9-49CF-B935-7FE9653DD960}"/>
               </a:ext>
             </a:extLst>
           </p:cNvPr>
@@ -44102,7 +44091,7 @@
           <p:cNvPr id="7" name="">
             <a:extLst xmlns:a="http://schemas.openxmlformats.org/drawingml/2006/main">
               <a:ext uri="{FF2B5EF4-FFF2-40B4-BE49-F238E27FC236}">
-                <a16:creationId xmlns:a16="http://schemas.microsoft.com/office/drawing/2014/main" id="{D4495016-4935-4CF9-8FCC-9A17AB5D4457}"/>
+                <a16:creationId xmlns:a16="http://schemas.microsoft.com/office/drawing/2014/main" id="{38051CAA-B849-4926-9B84-33E257BFCFA4}"/>
               </a:ext>
             </a:extLst>
           </p:cNvPr>
@@ -44135,7 +44124,7 @@
           <p:cNvPr id="8" name="">
             <a:extLst xmlns:a="http://schemas.openxmlformats.org/drawingml/2006/main">
               <a:ext uri="{FF2B5EF4-FFF2-40B4-BE49-F238E27FC236}">
-                <a16:creationId xmlns:a16="http://schemas.microsoft.com/office/drawing/2014/main" id="{C636A77F-19B8-40B4-80B1-9098CE8DE650}"/>
+                <a16:creationId xmlns:a16="http://schemas.microsoft.com/office/drawing/2014/main" id="{809A29CB-EC5F-4088-AFB4-F79DD0E51CBD}"/>
               </a:ext>
             </a:extLst>
           </p:cNvPr>
@@ -44168,7 +44157,7 @@
           <p:cNvPr id="9" name="">
             <a:extLst xmlns:a="http://schemas.openxmlformats.org/drawingml/2006/main">
               <a:ext uri="{FF2B5EF4-FFF2-40B4-BE49-F238E27FC236}">
-                <a16:creationId xmlns:a16="http://schemas.microsoft.com/office/drawing/2014/main" id="{14BC3FE8-145F-4C5E-9DC7-B86FF805EABA}"/>
+                <a16:creationId xmlns:a16="http://schemas.microsoft.com/office/drawing/2014/main" id="{B8558661-00C5-4FBC-9FD6-51687316ECAB}"/>
               </a:ext>
             </a:extLst>
           </p:cNvPr>
@@ -44226,7 +44215,7 @@
           <p:cNvPr id="10" name="">
             <a:extLst xmlns:a="http://schemas.openxmlformats.org/drawingml/2006/main">
               <a:ext uri="{FF2B5EF4-FFF2-40B4-BE49-F238E27FC236}">
-                <a16:creationId xmlns:a16="http://schemas.microsoft.com/office/drawing/2014/main" id="{11B703B8-EF5B-4F72-A341-33BA8C2B01C6}"/>
+                <a16:creationId xmlns:a16="http://schemas.microsoft.com/office/drawing/2014/main" id="{31115F42-C9F8-4FAB-A0AB-75280C202534}"/>
               </a:ext>
             </a:extLst>
           </p:cNvPr>
@@ -44284,7 +44273,7 @@
           <p:cNvPr id="11" name="">
             <a:extLst xmlns:a="http://schemas.openxmlformats.org/drawingml/2006/main">
               <a:ext uri="{FF2B5EF4-FFF2-40B4-BE49-F238E27FC236}">
-                <a16:creationId xmlns:a16="http://schemas.microsoft.com/office/drawing/2014/main" id="{F40926E7-D9FB-4F2C-8B32-12C2C267EADB}"/>
+                <a16:creationId xmlns:a16="http://schemas.microsoft.com/office/drawing/2014/main" id="{E9B3A245-8DB3-4441-A4BC-E307FC7569EF}"/>
               </a:ext>
             </a:extLst>
           </p:cNvPr>
@@ -44317,7 +44306,7 @@
           <p:cNvPr id="12" name="">
             <a:extLst xmlns:a="http://schemas.openxmlformats.org/drawingml/2006/main">
               <a:ext uri="{FF2B5EF4-FFF2-40B4-BE49-F238E27FC236}">
-                <a16:creationId xmlns:a16="http://schemas.microsoft.com/office/drawing/2014/main" id="{2F9A8C19-3501-467E-B7DF-F7FA1A11DBFA}"/>
+                <a16:creationId xmlns:a16="http://schemas.microsoft.com/office/drawing/2014/main" id="{07D5F2B4-2C7A-4A18-BFE0-1F8BBDAD6C35}"/>
               </a:ext>
             </a:extLst>
           </p:cNvPr>
@@ -44375,7 +44364,7 @@
           <p:cNvPr id="13" name="">
             <a:extLst xmlns:a="http://schemas.openxmlformats.org/drawingml/2006/main">
               <a:ext uri="{FF2B5EF4-FFF2-40B4-BE49-F238E27FC236}">
-                <a16:creationId xmlns:a16="http://schemas.microsoft.com/office/drawing/2014/main" id="{1CE64A37-1382-41EF-9935-47DA35333F96}"/>
+                <a16:creationId xmlns:a16="http://schemas.microsoft.com/office/drawing/2014/main" id="{54B44EDC-2DA6-45B9-8D50-0FDBFBF4B4FE}"/>
               </a:ext>
             </a:extLst>
           </p:cNvPr>
@@ -44433,7 +44422,7 @@
           <p:cNvPr id="14" name="">
             <a:extLst xmlns:a="http://schemas.openxmlformats.org/drawingml/2006/main">
               <a:ext uri="{FF2B5EF4-FFF2-40B4-BE49-F238E27FC236}">
-                <a16:creationId xmlns:a16="http://schemas.microsoft.com/office/drawing/2014/main" id="{3BB72086-EA43-4956-8A86-A7987C3846F9}"/>
+                <a16:creationId xmlns:a16="http://schemas.microsoft.com/office/drawing/2014/main" id="{87875BFD-E2E2-4FC6-906C-C102E39D6CCA}"/>
               </a:ext>
             </a:extLst>
           </p:cNvPr>
@@ -44466,7 +44455,7 @@
           <p:cNvPr id="15" name="">
             <a:extLst xmlns:a="http://schemas.openxmlformats.org/drawingml/2006/main">
               <a:ext uri="{FF2B5EF4-FFF2-40B4-BE49-F238E27FC236}">
-                <a16:creationId xmlns:a16="http://schemas.microsoft.com/office/drawing/2014/main" id="{B8267482-F17A-4065-9625-4E41F1E4FE54}"/>
+                <a16:creationId xmlns:a16="http://schemas.microsoft.com/office/drawing/2014/main" id="{08886EF2-144C-43E6-AD99-080DE50381D4}"/>
               </a:ext>
             </a:extLst>
           </p:cNvPr>
@@ -44524,7 +44513,7 @@
           <p:cNvPr id="16" name="">
             <a:extLst xmlns:a="http://schemas.openxmlformats.org/drawingml/2006/main">
               <a:ext uri="{FF2B5EF4-FFF2-40B4-BE49-F238E27FC236}">
-                <a16:creationId xmlns:a16="http://schemas.microsoft.com/office/drawing/2014/main" id="{686ECC5C-45BF-4366-825D-857C7EF87B88}"/>
+                <a16:creationId xmlns:a16="http://schemas.microsoft.com/office/drawing/2014/main" id="{AA91111C-2B36-4F4D-A7DD-2E75799A9920}"/>
               </a:ext>
             </a:extLst>
           </p:cNvPr>
@@ -44582,7 +44571,7 @@
           <p:cNvPr id="17" name="">
             <a:extLst xmlns:a="http://schemas.openxmlformats.org/drawingml/2006/main">
               <a:ext uri="{FF2B5EF4-FFF2-40B4-BE49-F238E27FC236}">
-                <a16:creationId xmlns:a16="http://schemas.microsoft.com/office/drawing/2014/main" id="{B2C73495-A73B-4B2A-9DF9-192547AB10DA}"/>
+                <a16:creationId xmlns:a16="http://schemas.microsoft.com/office/drawing/2014/main" id="{1EEC2A57-9065-419C-98B3-DBF569F5BD12}"/>
               </a:ext>
             </a:extLst>
           </p:cNvPr>
@@ -44615,7 +44604,7 @@
           <p:cNvPr id="18" name="">
             <a:extLst xmlns:a="http://schemas.openxmlformats.org/drawingml/2006/main">
               <a:ext uri="{FF2B5EF4-FFF2-40B4-BE49-F238E27FC236}">
-                <a16:creationId xmlns:a16="http://schemas.microsoft.com/office/drawing/2014/main" id="{E320ADB0-9ACA-4B81-B8BC-933F9E75444E}"/>
+                <a16:creationId xmlns:a16="http://schemas.microsoft.com/office/drawing/2014/main" id="{60162374-1775-484F-8F17-2C930736AD2C}"/>
               </a:ext>
             </a:extLst>
           </p:cNvPr>
@@ -44673,7 +44662,7 @@
           <p:cNvPr id="19" name="">
             <a:extLst xmlns:a="http://schemas.openxmlformats.org/drawingml/2006/main">
               <a:ext uri="{FF2B5EF4-FFF2-40B4-BE49-F238E27FC236}">
-                <a16:creationId xmlns:a16="http://schemas.microsoft.com/office/drawing/2014/main" id="{2DF7F8C5-F4F6-42F4-A430-7217DAD26E06}"/>
+                <a16:creationId xmlns:a16="http://schemas.microsoft.com/office/drawing/2014/main" id="{E74E8D55-3DAF-4984-9BDC-5BFB0BD87DB0}"/>
               </a:ext>
             </a:extLst>
           </p:cNvPr>
@@ -44731,7 +44720,7 @@
           <p:cNvPr id="20" name="">
             <a:extLst xmlns:a="http://schemas.openxmlformats.org/drawingml/2006/main">
               <a:ext uri="{FF2B5EF4-FFF2-40B4-BE49-F238E27FC236}">
-                <a16:creationId xmlns:a16="http://schemas.microsoft.com/office/drawing/2014/main" id="{54E3F04C-8456-4448-8C87-B70DCEB1F8B8}"/>
+                <a16:creationId xmlns:a16="http://schemas.microsoft.com/office/drawing/2014/main" id="{FB0A2A5D-BF0B-492C-BA72-7E5B62AAE51D}"/>
               </a:ext>
             </a:extLst>
           </p:cNvPr>
@@ -44789,7 +44778,7 @@
           <p:cNvPr id="21" name="">
             <a:extLst xmlns:a="http://schemas.openxmlformats.org/drawingml/2006/main">
               <a:ext uri="{FF2B5EF4-FFF2-40B4-BE49-F238E27FC236}">
-                <a16:creationId xmlns:a16="http://schemas.microsoft.com/office/drawing/2014/main" id="{984AB3A0-C45C-4A41-B750-5FC270DC509B}"/>
+                <a16:creationId xmlns:a16="http://schemas.microsoft.com/office/drawing/2014/main" id="{9026A409-030B-4831-93F3-213CD0F90548}"/>
               </a:ext>
             </a:extLst>
           </p:cNvPr>
@@ -44822,7 +44811,7 @@
           <p:cNvPr id="22" name="">
             <a:extLst xmlns:a="http://schemas.openxmlformats.org/drawingml/2006/main">
               <a:ext uri="{FF2B5EF4-FFF2-40B4-BE49-F238E27FC236}">
-                <a16:creationId xmlns:a16="http://schemas.microsoft.com/office/drawing/2014/main" id="{20C873F7-2A78-4ED3-9051-05EF0287A154}"/>
+                <a16:creationId xmlns:a16="http://schemas.microsoft.com/office/drawing/2014/main" id="{6E494BCF-56BE-47B6-B15A-10AEE419F5AB}"/>
               </a:ext>
             </a:extLst>
           </p:cNvPr>
@@ -44880,7 +44869,7 @@
           <p:cNvPr id="23" name="">
             <a:extLst xmlns:a="http://schemas.openxmlformats.org/drawingml/2006/main">
               <a:ext uri="{FF2B5EF4-FFF2-40B4-BE49-F238E27FC236}">
-                <a16:creationId xmlns:a16="http://schemas.microsoft.com/office/drawing/2014/main" id="{F84997A4-9A70-4438-BDC3-4008FFE82E69}"/>
+                <a16:creationId xmlns:a16="http://schemas.microsoft.com/office/drawing/2014/main" id="{EB8016BB-77B4-4AE2-8177-737CDD3BA9B7}"/>
               </a:ext>
             </a:extLst>
           </p:cNvPr>
@@ -44938,7 +44927,7 @@
           <p:cNvPr id="24" name="">
             <a:extLst xmlns:a="http://schemas.openxmlformats.org/drawingml/2006/main">
               <a:ext uri="{FF2B5EF4-FFF2-40B4-BE49-F238E27FC236}">
-                <a16:creationId xmlns:a16="http://schemas.microsoft.com/office/drawing/2014/main" id="{137D5B2E-A36A-4AFE-8B9C-BF48609032F3}"/>
+                <a16:creationId xmlns:a16="http://schemas.microsoft.com/office/drawing/2014/main" id="{47BE62D4-923E-4922-80DC-B74E1AE92A4E}"/>
               </a:ext>
             </a:extLst>
           </p:cNvPr>
@@ -44996,7 +44985,7 @@
           <p:cNvPr id="25" name="">
             <a:extLst xmlns:a="http://schemas.openxmlformats.org/drawingml/2006/main">
               <a:ext uri="{FF2B5EF4-FFF2-40B4-BE49-F238E27FC236}">
-                <a16:creationId xmlns:a16="http://schemas.microsoft.com/office/drawing/2014/main" id="{6E2E58FF-C359-4D25-89E3-802E273BB459}"/>
+                <a16:creationId xmlns:a16="http://schemas.microsoft.com/office/drawing/2014/main" id="{59F3823A-0744-43C6-9609-9D1869EB608B}"/>
               </a:ext>
             </a:extLst>
           </p:cNvPr>
@@ -45029,7 +45018,7 @@
           <p:cNvPr id="26" name="">
             <a:extLst xmlns:a="http://schemas.openxmlformats.org/drawingml/2006/main">
               <a:ext uri="{FF2B5EF4-FFF2-40B4-BE49-F238E27FC236}">
-                <a16:creationId xmlns:a16="http://schemas.microsoft.com/office/drawing/2014/main" id="{8AF6A4E7-B803-4678-9A5A-7E6469A0644A}"/>
+                <a16:creationId xmlns:a16="http://schemas.microsoft.com/office/drawing/2014/main" id="{21B327AE-799F-45D9-B2B9-D49CE3EA3270}"/>
               </a:ext>
             </a:extLst>
           </p:cNvPr>
@@ -45087,7 +45076,7 @@
           <p:cNvPr id="27" name="">
             <a:extLst xmlns:a="http://schemas.openxmlformats.org/drawingml/2006/main">
               <a:ext uri="{FF2B5EF4-FFF2-40B4-BE49-F238E27FC236}">
-                <a16:creationId xmlns:a16="http://schemas.microsoft.com/office/drawing/2014/main" id="{1B0E68CA-1FEB-4548-9FB5-17110485F67E}"/>
+                <a16:creationId xmlns:a16="http://schemas.microsoft.com/office/drawing/2014/main" id="{E57A8A3B-63A2-499F-B928-44F076F1BB51}"/>
               </a:ext>
             </a:extLst>
           </p:cNvPr>
@@ -45145,7 +45134,7 @@
           <p:cNvPr id="28" name="">
             <a:extLst xmlns:a="http://schemas.openxmlformats.org/drawingml/2006/main">
               <a:ext uri="{FF2B5EF4-FFF2-40B4-BE49-F238E27FC236}">
-                <a16:creationId xmlns:a16="http://schemas.microsoft.com/office/drawing/2014/main" id="{589CFAF0-17D7-4B1B-8D58-9A15EF303C5F}"/>
+                <a16:creationId xmlns:a16="http://schemas.microsoft.com/office/drawing/2014/main" id="{534BE22C-9F78-49EF-8D49-4D31B9B6626D}"/>
               </a:ext>
             </a:extLst>
           </p:cNvPr>
@@ -45203,7 +45192,7 @@
           <p:cNvPr id="29" name="">
             <a:extLst xmlns:a="http://schemas.openxmlformats.org/drawingml/2006/main">
               <a:ext uri="{FF2B5EF4-FFF2-40B4-BE49-F238E27FC236}">
-                <a16:creationId xmlns:a16="http://schemas.microsoft.com/office/drawing/2014/main" id="{FB3E6E78-CB70-432A-80A2-C77C1051E634}"/>
+                <a16:creationId xmlns:a16="http://schemas.microsoft.com/office/drawing/2014/main" id="{796AAEF1-4F66-4A1B-B8C5-E3BE39914DDC}"/>
               </a:ext>
             </a:extLst>
           </p:cNvPr>
@@ -45236,7 +45225,7 @@
           <p:cNvPr id="30" name="">
             <a:extLst xmlns:a="http://schemas.openxmlformats.org/drawingml/2006/main">
               <a:ext uri="{FF2B5EF4-FFF2-40B4-BE49-F238E27FC236}">
-                <a16:creationId xmlns:a16="http://schemas.microsoft.com/office/drawing/2014/main" id="{2AAB3327-6EBB-4288-8C73-D26700994F2D}"/>
+                <a16:creationId xmlns:a16="http://schemas.microsoft.com/office/drawing/2014/main" id="{E271F3E4-8799-4343-B79D-50D93E1B0CA6}"/>
               </a:ext>
             </a:extLst>
           </p:cNvPr>
@@ -45294,7 +45283,7 @@
           <p:cNvPr id="31" name="">
             <a:extLst xmlns:a="http://schemas.openxmlformats.org/drawingml/2006/main">
               <a:ext uri="{FF2B5EF4-FFF2-40B4-BE49-F238E27FC236}">
-                <a16:creationId xmlns:a16="http://schemas.microsoft.com/office/drawing/2014/main" id="{FC5FC2AC-E15C-49AA-9799-E0F134821DD5}"/>
+                <a16:creationId xmlns:a16="http://schemas.microsoft.com/office/drawing/2014/main" id="{6C6D5D74-2F32-4D8C-BD25-3BF975334ACF}"/>
               </a:ext>
             </a:extLst>
           </p:cNvPr>
@@ -45352,7 +45341,7 @@
           <p:cNvPr id="32" name="">
             <a:extLst xmlns:a="http://schemas.openxmlformats.org/drawingml/2006/main">
               <a:ext uri="{FF2B5EF4-FFF2-40B4-BE49-F238E27FC236}">
-                <a16:creationId xmlns:a16="http://schemas.microsoft.com/office/drawing/2014/main" id="{5B3012FF-2190-4EC0-BE06-5A16892EC597}"/>
+                <a16:creationId xmlns:a16="http://schemas.microsoft.com/office/drawing/2014/main" id="{C69232AA-D771-4EB6-B6F3-E70CE0DE0AB0}"/>
               </a:ext>
             </a:extLst>
           </p:cNvPr>
@@ -45410,7 +45399,7 @@
           <p:cNvPr id="33" name="">
             <a:extLst xmlns:a="http://schemas.openxmlformats.org/drawingml/2006/main">
               <a:ext uri="{FF2B5EF4-FFF2-40B4-BE49-F238E27FC236}">
-                <a16:creationId xmlns:a16="http://schemas.microsoft.com/office/drawing/2014/main" id="{92032158-719F-4174-BB17-56CC72345281}"/>
+                <a16:creationId xmlns:a16="http://schemas.microsoft.com/office/drawing/2014/main" id="{8DEB7C88-7916-414E-8E5E-CCF3074580F9}"/>
               </a:ext>
             </a:extLst>
           </p:cNvPr>
@@ -45443,7 +45432,7 @@
           <p:cNvPr id="34" name="">
             <a:extLst xmlns:a="http://schemas.openxmlformats.org/drawingml/2006/main">
               <a:ext uri="{FF2B5EF4-FFF2-40B4-BE49-F238E27FC236}">
-                <a16:creationId xmlns:a16="http://schemas.microsoft.com/office/drawing/2014/main" id="{2C8091BB-F92C-497F-9944-079C9D58B791}"/>
+                <a16:creationId xmlns:a16="http://schemas.microsoft.com/office/drawing/2014/main" id="{FC3E693E-BC0F-4223-9269-9D743876D28B}"/>
               </a:ext>
             </a:extLst>
           </p:cNvPr>
@@ -45501,7 +45490,7 @@
           <p:cNvPr id="35" name="">
             <a:extLst xmlns:a="http://schemas.openxmlformats.org/drawingml/2006/main">
               <a:ext uri="{FF2B5EF4-FFF2-40B4-BE49-F238E27FC236}">
-                <a16:creationId xmlns:a16="http://schemas.microsoft.com/office/drawing/2014/main" id="{261C3285-3B14-43C6-82E7-B45834CF03D6}"/>
+                <a16:creationId xmlns:a16="http://schemas.microsoft.com/office/drawing/2014/main" id="{39DB44E4-83BD-492F-9361-C8FFA73BCA57}"/>
               </a:ext>
             </a:extLst>
           </p:cNvPr>
@@ -45559,7 +45548,7 @@
           <p:cNvPr id="36" name="">
             <a:extLst xmlns:a="http://schemas.openxmlformats.org/drawingml/2006/main">
               <a:ext uri="{FF2B5EF4-FFF2-40B4-BE49-F238E27FC236}">
-                <a16:creationId xmlns:a16="http://schemas.microsoft.com/office/drawing/2014/main" id="{EB6D0C84-8AC6-4F1E-B104-8E90AEE3D000}"/>
+                <a16:creationId xmlns:a16="http://schemas.microsoft.com/office/drawing/2014/main" id="{BCC33900-DE04-44B7-8305-915D54936119}"/>
               </a:ext>
             </a:extLst>
           </p:cNvPr>
@@ -45617,7 +45606,7 @@
           <p:cNvPr id="37" name="">
             <a:extLst xmlns:a="http://schemas.openxmlformats.org/drawingml/2006/main">
               <a:ext uri="{FF2B5EF4-FFF2-40B4-BE49-F238E27FC236}">
-                <a16:creationId xmlns:a16="http://schemas.microsoft.com/office/drawing/2014/main" id="{80B86972-D531-4B53-8F56-80320FB0438B}"/>
+                <a16:creationId xmlns:a16="http://schemas.microsoft.com/office/drawing/2014/main" id="{40B90326-DC24-4054-8B9C-DD9F6EAC0B2D}"/>
               </a:ext>
             </a:extLst>
           </p:cNvPr>
@@ -45650,7 +45639,7 @@
           <p:cNvPr id="38" name="">
             <a:extLst xmlns:a="http://schemas.openxmlformats.org/drawingml/2006/main">
               <a:ext uri="{FF2B5EF4-FFF2-40B4-BE49-F238E27FC236}">
-                <a16:creationId xmlns:a16="http://schemas.microsoft.com/office/drawing/2014/main" id="{D82D881F-74ED-4B83-AD70-4B0359672FED}"/>
+                <a16:creationId xmlns:a16="http://schemas.microsoft.com/office/drawing/2014/main" id="{D3DC25E0-4469-45DD-A6BB-1D7160FA735C}"/>
               </a:ext>
             </a:extLst>
           </p:cNvPr>
@@ -45708,7 +45697,7 @@
           <p:cNvPr id="39" name="">
             <a:extLst xmlns:a="http://schemas.openxmlformats.org/drawingml/2006/main">
               <a:ext uri="{FF2B5EF4-FFF2-40B4-BE49-F238E27FC236}">
-                <a16:creationId xmlns:a16="http://schemas.microsoft.com/office/drawing/2014/main" id="{DE34182D-644E-485E-8835-DCDCC5E378A9}"/>
+                <a16:creationId xmlns:a16="http://schemas.microsoft.com/office/drawing/2014/main" id="{58A54389-067B-4F25-9560-D9C3A113D522}"/>
               </a:ext>
             </a:extLst>
           </p:cNvPr>
@@ -45741,7 +45730,7 @@
           <p:cNvPr id="40" name="">
             <a:extLst xmlns:a="http://schemas.openxmlformats.org/drawingml/2006/main">
               <a:ext uri="{FF2B5EF4-FFF2-40B4-BE49-F238E27FC236}">
-                <a16:creationId xmlns:a16="http://schemas.microsoft.com/office/drawing/2014/main" id="{BA95E1EB-25BE-4486-96DF-DE146BFFDE5C}"/>
+                <a16:creationId xmlns:a16="http://schemas.microsoft.com/office/drawing/2014/main" id="{384BECB1-F9F1-4089-A107-3883BA963E5B}"/>
               </a:ext>
             </a:extLst>
           </p:cNvPr>
@@ -45799,7 +45788,7 @@
                 <a:latin typeface="Microsoft YaHei"/>
                 <a:ea typeface="Microsoft YaHei"/>
                 <a:cs typeface="Microsoft YaHei"/>
-                <a:hlinkClick xmlns:r="http://schemas.openxmlformats.org/officeDocument/2006/relationships" r:id="R90d5d8a7b3b3445c"/>
+                <a:hlinkClick xmlns:r="http://schemas.openxmlformats.org/officeDocument/2006/relationships" r:id="R3156715a59084938"/>
               </a:rPr>
               <a:t>Claude Agent Teams</a:t>
             </a:r>
@@ -45811,7 +45800,7 @@
                 <a:latin typeface="Microsoft YaHei"/>
                 <a:ea typeface="Microsoft YaHei"/>
                 <a:cs typeface="Microsoft YaHei"/>
-                <a:hlinkClick xmlns:r="http://schemas.openxmlformats.org/officeDocument/2006/relationships" r:id="R676d801890f74aee"/>
+                <a:hlinkClick xmlns:r="http://schemas.openxmlformats.org/officeDocument/2006/relationships" r:id="R60591435b7094e69"/>
               </a:rPr>
               <a:t> · Claude Workflows</a:t>
             </a:r>
@@ -45823,7 +45812,7 @@
                 <a:latin typeface="Microsoft YaHei"/>
                 <a:ea typeface="Microsoft YaHei"/>
                 <a:cs typeface="Microsoft YaHei"/>
-                <a:hlinkClick xmlns:r="http://schemas.openxmlformats.org/officeDocument/2006/relationships" r:id="R38558c43ab944f98"/>
+                <a:hlinkClick xmlns:r="http://schemas.openxmlformats.org/officeDocument/2006/relationships" r:id="Ra8759939cafb42ee"/>
               </a:rPr>
               <a:t> · Qoder Quest</a:t>
             </a:r>
@@ -45835,7 +45824,7 @@
                 <a:latin typeface="Microsoft YaHei"/>
                 <a:ea typeface="Microsoft YaHei"/>
                 <a:cs typeface="Microsoft YaHei"/>
-                <a:hlinkClick xmlns:r="http://schemas.openxmlformats.org/officeDocument/2006/relationships" r:id="Rb6118ae647ec4cb7"/>
+                <a:hlinkClick xmlns:r="http://schemas.openxmlformats.org/officeDocument/2006/relationships" r:id="R86ff933b08b54e0d"/>
               </a:rPr>
               <a:t> · 码道 AgentTeam</a:t>
             </a:r>
@@ -45847,7 +45836,7 @@
           <p:cNvPr id="41" name="">
             <a:extLst xmlns:a="http://schemas.openxmlformats.org/drawingml/2006/main">
               <a:ext uri="{FF2B5EF4-FFF2-40B4-BE49-F238E27FC236}">
-                <a16:creationId xmlns:a16="http://schemas.microsoft.com/office/drawing/2014/main" id="{667B9651-8033-4DB5-9E5C-77DB1AF55D2B}"/>
+                <a16:creationId xmlns:a16="http://schemas.microsoft.com/office/drawing/2014/main" id="{199B7C04-1D4B-4392-B0D0-690F614C9AF0}"/>
               </a:ext>
             </a:extLst>
           </p:cNvPr>
@@ -45903,7 +45892,7 @@
     </p:spTree>
     <p:extLst>
       <p:ext uri="{BB962C8B-B14F-4D97-AF65-F5344CB8AC3E}">
-        <p14:creationId xmlns:p14="http://schemas.microsoft.com/office/powerpoint/2010/main" val="1987275310"/>
+        <p14:creationId xmlns:p14="http://schemas.microsoft.com/office/powerpoint/2010/main" val="787812019"/>
       </p:ext>
     </p:extLst>
   </p:cSld>

--- a/AI-Coding-工具能力赋能-16页华为企业方案风格版.pptx
+++ b/AI-Coding-工具能力赋能-16页华为企业方案风格版.pptx
@@ -2,28 +2,28 @@
 <file path=ppt/presentation.xml><?xml version="1.0" encoding="utf-8"?>
 <p:presentation xmlns:p="http://schemas.openxmlformats.org/presentationml/2006/main">
   <p:sldMasterIdLst>
-    <p:sldMasterId xmlns:r="http://schemas.openxmlformats.org/officeDocument/2006/relationships" id="2147483648" r:id="R6fd5a25148a34a4a"/>
+    <p:sldMasterId xmlns:r="http://schemas.openxmlformats.org/officeDocument/2006/relationships" id="2147483648" r:id="Re100f22f901c44a9"/>
   </p:sldMasterIdLst>
   <p:notesMasterIdLst>
-    <p:notesMasterId xmlns:r="http://schemas.openxmlformats.org/officeDocument/2006/relationships" r:id="R8c87efb8f7aa4fcf"/>
+    <p:notesMasterId xmlns:r="http://schemas.openxmlformats.org/officeDocument/2006/relationships" r:id="R6617ea610dde4081"/>
   </p:notesMasterIdLst>
   <p:sldIdLst>
-    <p:sldId xmlns:r="http://schemas.openxmlformats.org/officeDocument/2006/relationships" id="256" r:id="R59cb555cdf3840a4"/>
-    <p:sldId xmlns:r="http://schemas.openxmlformats.org/officeDocument/2006/relationships" id="257" r:id="R4d188e043c1a4688"/>
-    <p:sldId xmlns:r="http://schemas.openxmlformats.org/officeDocument/2006/relationships" id="258" r:id="Re703d830519c4ca1"/>
-    <p:sldId xmlns:r="http://schemas.openxmlformats.org/officeDocument/2006/relationships" id="259" r:id="Rf2bad275575d4a6f"/>
-    <p:sldId xmlns:r="http://schemas.openxmlformats.org/officeDocument/2006/relationships" id="260" r:id="R1a7313ccec4846b2"/>
-    <p:sldId xmlns:r="http://schemas.openxmlformats.org/officeDocument/2006/relationships" id="261" r:id="R899930a77f744973"/>
-    <p:sldId xmlns:r="http://schemas.openxmlformats.org/officeDocument/2006/relationships" id="262" r:id="R83724a8dceab4b27"/>
-    <p:sldId xmlns:r="http://schemas.openxmlformats.org/officeDocument/2006/relationships" id="263" r:id="R6f36517587264eb3"/>
-    <p:sldId xmlns:r="http://schemas.openxmlformats.org/officeDocument/2006/relationships" id="264" r:id="Rd370cdc709064194"/>
-    <p:sldId xmlns:r="http://schemas.openxmlformats.org/officeDocument/2006/relationships" id="265" r:id="R4303492d773a4647"/>
-    <p:sldId xmlns:r="http://schemas.openxmlformats.org/officeDocument/2006/relationships" id="266" r:id="R71a0fe650a9c4c3e"/>
-    <p:sldId xmlns:r="http://schemas.openxmlformats.org/officeDocument/2006/relationships" id="267" r:id="Rf23d41c3c0624462"/>
-    <p:sldId xmlns:r="http://schemas.openxmlformats.org/officeDocument/2006/relationships" id="268" r:id="Rd949b9d4a3b64ebf"/>
-    <p:sldId xmlns:r="http://schemas.openxmlformats.org/officeDocument/2006/relationships" id="269" r:id="R50ee40f4c8204b01"/>
-    <p:sldId xmlns:r="http://schemas.openxmlformats.org/officeDocument/2006/relationships" id="270" r:id="R73b87a44c8b74113"/>
-    <p:sldId xmlns:r="http://schemas.openxmlformats.org/officeDocument/2006/relationships" id="271" r:id="R2a8faf7186864b6c"/>
+    <p:sldId xmlns:r="http://schemas.openxmlformats.org/officeDocument/2006/relationships" id="256" r:id="Re5a3c6ad9f404b12"/>
+    <p:sldId xmlns:r="http://schemas.openxmlformats.org/officeDocument/2006/relationships" id="257" r:id="Re43a79f2c6964f12"/>
+    <p:sldId xmlns:r="http://schemas.openxmlformats.org/officeDocument/2006/relationships" id="258" r:id="R2040e5812f9d4b56"/>
+    <p:sldId xmlns:r="http://schemas.openxmlformats.org/officeDocument/2006/relationships" id="259" r:id="R015491cc8dc94f04"/>
+    <p:sldId xmlns:r="http://schemas.openxmlformats.org/officeDocument/2006/relationships" id="260" r:id="R21ac225ecd0c4714"/>
+    <p:sldId xmlns:r="http://schemas.openxmlformats.org/officeDocument/2006/relationships" id="261" r:id="R5eebc27fe28840f9"/>
+    <p:sldId xmlns:r="http://schemas.openxmlformats.org/officeDocument/2006/relationships" id="262" r:id="R48f8d99a29bb4982"/>
+    <p:sldId xmlns:r="http://schemas.openxmlformats.org/officeDocument/2006/relationships" id="263" r:id="R774b1dabce2c47d0"/>
+    <p:sldId xmlns:r="http://schemas.openxmlformats.org/officeDocument/2006/relationships" id="264" r:id="Re48a8acb2b834833"/>
+    <p:sldId xmlns:r="http://schemas.openxmlformats.org/officeDocument/2006/relationships" id="265" r:id="R888fefb3b5394fdc"/>
+    <p:sldId xmlns:r="http://schemas.openxmlformats.org/officeDocument/2006/relationships" id="266" r:id="Rb981abd1d462477f"/>
+    <p:sldId xmlns:r="http://schemas.openxmlformats.org/officeDocument/2006/relationships" id="267" r:id="R72c6da77f35045a9"/>
+    <p:sldId xmlns:r="http://schemas.openxmlformats.org/officeDocument/2006/relationships" id="268" r:id="R37aac7446cb6487c"/>
+    <p:sldId xmlns:r="http://schemas.openxmlformats.org/officeDocument/2006/relationships" id="269" r:id="Rda257229f7104966"/>
+    <p:sldId xmlns:r="http://schemas.openxmlformats.org/officeDocument/2006/relationships" id="270" r:id="R6d7bf04831d14177"/>
+    <p:sldId xmlns:r="http://schemas.openxmlformats.org/officeDocument/2006/relationships" id="271" r:id="Ra3e6bde6ba0e4da1"/>
   </p:sldIdLst>
   <p:sldSz cx="12192000" cy="6858000"/>
   <p:notesSz cx="6858000" cy="9144000"/>
@@ -1606,7 +1606,7 @@
   </p:cSld>
   <p:clrMap bg1="lt1" tx1="dk1" bg2="lt2" tx2="dk2" accent1="accent1" accent2="accent2" accent3="accent3" accent4="accent4" accent5="accent5" accent6="accent6" hlink="hlink" folHlink="folHlink"/>
   <p:sldLayoutIdLst>
-    <p:sldLayoutId xmlns:r="http://schemas.openxmlformats.org/officeDocument/2006/relationships" id="2147483649" r:id="Rf2f8cca344bf495d"/>
+    <p:sldLayoutId xmlns:r="http://schemas.openxmlformats.org/officeDocument/2006/relationships" id="2147483649" r:id="Rb7d10f423dce4af2"/>
   </p:sldLayoutIdLst>
   <p:txStyles>
     <p:titleStyle>
@@ -2161,7 +2161,7 @@
           <p:nvPr/>
         </p:nvPicPr>
         <p:blipFill>
-          <a:blip xmlns:r="http://schemas.openxmlformats.org/officeDocument/2006/relationships" xmlns:a="http://schemas.openxmlformats.org/drawingml/2006/main" r:embed="R979cc25e27034aae"/>
+          <a:blip xmlns:r="http://schemas.openxmlformats.org/officeDocument/2006/relationships" xmlns:a="http://schemas.openxmlformats.org/drawingml/2006/main" r:embed="R62fcb83d139d4b19"/>
           <a:srcRect xmlns:a="http://schemas.openxmlformats.org/drawingml/2006/main" l="0" t="27" r="0" b="27"/>
           <a:stretch xmlns:a="http://schemas.openxmlformats.org/drawingml/2006/main">
             <a:fillRect l="0" t="0" r="0" b="0"/>
@@ -2182,7 +2182,7 @@
           <p:cNvPr id="2" name="">
             <a:extLst xmlns:a="http://schemas.openxmlformats.org/drawingml/2006/main">
               <a:ext uri="{FF2B5EF4-FFF2-40B4-BE49-F238E27FC236}">
-                <a16:creationId xmlns:a16="http://schemas.microsoft.com/office/drawing/2014/main" id="{047E696C-84E7-4E2E-B6FA-04A939C858F5}"/>
+                <a16:creationId xmlns:a16="http://schemas.microsoft.com/office/drawing/2014/main" id="{2BDF44C9-4BFE-4F7E-85F6-63B49E462A78}"/>
               </a:ext>
             </a:extLst>
           </p:cNvPr>
@@ -2215,7 +2215,7 @@
           <p:cNvPr id="3" name="">
             <a:extLst xmlns:a="http://schemas.openxmlformats.org/drawingml/2006/main">
               <a:ext uri="{FF2B5EF4-FFF2-40B4-BE49-F238E27FC236}">
-                <a16:creationId xmlns:a16="http://schemas.microsoft.com/office/drawing/2014/main" id="{B6E9D745-EA03-4749-A7D5-A197E1ACCA62}"/>
+                <a16:creationId xmlns:a16="http://schemas.microsoft.com/office/drawing/2014/main" id="{F857668F-92BE-4EFA-976C-55BC982C2979}"/>
               </a:ext>
             </a:extLst>
           </p:cNvPr>
@@ -2273,7 +2273,7 @@
           <p:cNvPr id="4" name="">
             <a:extLst xmlns:a="http://schemas.openxmlformats.org/drawingml/2006/main">
               <a:ext uri="{FF2B5EF4-FFF2-40B4-BE49-F238E27FC236}">
-                <a16:creationId xmlns:a16="http://schemas.microsoft.com/office/drawing/2014/main" id="{70D0407F-DC57-4D5D-95B6-C92576EE04ED}"/>
+                <a16:creationId xmlns:a16="http://schemas.microsoft.com/office/drawing/2014/main" id="{4917C70B-0F57-4808-B983-31B034E7580C}"/>
               </a:ext>
             </a:extLst>
           </p:cNvPr>
@@ -2331,7 +2331,7 @@
           <p:cNvPr id="5" name="">
             <a:extLst xmlns:a="http://schemas.openxmlformats.org/drawingml/2006/main">
               <a:ext uri="{FF2B5EF4-FFF2-40B4-BE49-F238E27FC236}">
-                <a16:creationId xmlns:a16="http://schemas.microsoft.com/office/drawing/2014/main" id="{E92175A9-FD61-4985-89C0-C4A72B8FF8AF}"/>
+                <a16:creationId xmlns:a16="http://schemas.microsoft.com/office/drawing/2014/main" id="{75443D97-6106-4337-A808-8BC38CB972D4}"/>
               </a:ext>
             </a:extLst>
           </p:cNvPr>
@@ -2364,7 +2364,7 @@
           <p:cNvPr id="6" name="">
             <a:extLst xmlns:a="http://schemas.openxmlformats.org/drawingml/2006/main">
               <a:ext uri="{FF2B5EF4-FFF2-40B4-BE49-F238E27FC236}">
-                <a16:creationId xmlns:a16="http://schemas.microsoft.com/office/drawing/2014/main" id="{58B23479-E358-4D55-B599-B9EB1D8FD598}"/>
+                <a16:creationId xmlns:a16="http://schemas.microsoft.com/office/drawing/2014/main" id="{8A4EFDFA-882C-486C-9BEF-DB786BD55A33}"/>
               </a:ext>
             </a:extLst>
           </p:cNvPr>
@@ -2422,7 +2422,7 @@
           <p:cNvPr id="7" name="">
             <a:extLst xmlns:a="http://schemas.openxmlformats.org/drawingml/2006/main">
               <a:ext uri="{FF2B5EF4-FFF2-40B4-BE49-F238E27FC236}">
-                <a16:creationId xmlns:a16="http://schemas.microsoft.com/office/drawing/2014/main" id="{862B570D-14C0-4B52-B309-14EDA98F3400}"/>
+                <a16:creationId xmlns:a16="http://schemas.microsoft.com/office/drawing/2014/main" id="{8182D85A-C14F-4B74-9A04-2231FF39A309}"/>
               </a:ext>
             </a:extLst>
           </p:cNvPr>
@@ -2480,7 +2480,7 @@
           <p:cNvPr id="8" name="">
             <a:extLst xmlns:a="http://schemas.openxmlformats.org/drawingml/2006/main">
               <a:ext uri="{FF2B5EF4-FFF2-40B4-BE49-F238E27FC236}">
-                <a16:creationId xmlns:a16="http://schemas.microsoft.com/office/drawing/2014/main" id="{BB8CDFE4-6E07-4523-A34B-D20F3661C3EB}"/>
+                <a16:creationId xmlns:a16="http://schemas.microsoft.com/office/drawing/2014/main" id="{AAAA36DE-2E69-486E-8D7C-95E8C5A44B02}"/>
               </a:ext>
             </a:extLst>
           </p:cNvPr>
@@ -2538,7 +2538,7 @@
           <p:cNvPr id="9" name="">
             <a:extLst xmlns:a="http://schemas.openxmlformats.org/drawingml/2006/main">
               <a:ext uri="{FF2B5EF4-FFF2-40B4-BE49-F238E27FC236}">
-                <a16:creationId xmlns:a16="http://schemas.microsoft.com/office/drawing/2014/main" id="{8F166A58-615D-4BDE-99E3-2A1EAB546862}"/>
+                <a16:creationId xmlns:a16="http://schemas.microsoft.com/office/drawing/2014/main" id="{CAFA50FA-3C7C-4C70-BC4A-421B39759444}"/>
               </a:ext>
             </a:extLst>
           </p:cNvPr>
@@ -2596,7 +2596,7 @@
           <p:cNvPr id="10" name="">
             <a:extLst xmlns:a="http://schemas.openxmlformats.org/drawingml/2006/main">
               <a:ext uri="{FF2B5EF4-FFF2-40B4-BE49-F238E27FC236}">
-                <a16:creationId xmlns:a16="http://schemas.microsoft.com/office/drawing/2014/main" id="{F5089CEF-3F35-48D6-8B15-0F061C77C515}"/>
+                <a16:creationId xmlns:a16="http://schemas.microsoft.com/office/drawing/2014/main" id="{2D088970-7541-426F-AEBE-C358A2544203}"/>
               </a:ext>
             </a:extLst>
           </p:cNvPr>
@@ -2629,7 +2629,7 @@
           <p:cNvPr id="11" name="">
             <a:extLst xmlns:a="http://schemas.openxmlformats.org/drawingml/2006/main">
               <a:ext uri="{FF2B5EF4-FFF2-40B4-BE49-F238E27FC236}">
-                <a16:creationId xmlns:a16="http://schemas.microsoft.com/office/drawing/2014/main" id="{E0294B0F-7E16-43F8-9637-A2C432FF1DD8}"/>
+                <a16:creationId xmlns:a16="http://schemas.microsoft.com/office/drawing/2014/main" id="{88B3A772-7144-45AE-84EE-1C5A87F4517F}"/>
               </a:ext>
             </a:extLst>
           </p:cNvPr>
@@ -2687,7 +2687,7 @@
           <p:cNvPr id="12" name="">
             <a:extLst xmlns:a="http://schemas.openxmlformats.org/drawingml/2006/main">
               <a:ext uri="{FF2B5EF4-FFF2-40B4-BE49-F238E27FC236}">
-                <a16:creationId xmlns:a16="http://schemas.microsoft.com/office/drawing/2014/main" id="{AE77E2FE-8D6A-4EFF-B047-0F9A4F4BF7AA}"/>
+                <a16:creationId xmlns:a16="http://schemas.microsoft.com/office/drawing/2014/main" id="{B8E10E0F-5EA5-490A-B925-55A549C3C892}"/>
               </a:ext>
             </a:extLst>
           </p:cNvPr>
@@ -2745,7 +2745,7 @@
           <p:cNvPr id="13" name="">
             <a:extLst xmlns:a="http://schemas.openxmlformats.org/drawingml/2006/main">
               <a:ext uri="{FF2B5EF4-FFF2-40B4-BE49-F238E27FC236}">
-                <a16:creationId xmlns:a16="http://schemas.microsoft.com/office/drawing/2014/main" id="{A7897B11-89ED-4111-BBD2-923C78E822D5}"/>
+                <a16:creationId xmlns:a16="http://schemas.microsoft.com/office/drawing/2014/main" id="{8351BCBD-7C30-40B4-81DD-2E84DECC8E02}"/>
               </a:ext>
             </a:extLst>
           </p:cNvPr>
@@ -2778,7 +2778,7 @@
           <p:cNvPr id="14" name="">
             <a:extLst xmlns:a="http://schemas.openxmlformats.org/drawingml/2006/main">
               <a:ext uri="{FF2B5EF4-FFF2-40B4-BE49-F238E27FC236}">
-                <a16:creationId xmlns:a16="http://schemas.microsoft.com/office/drawing/2014/main" id="{251CFC71-9595-4903-8746-E9AC69403088}"/>
+                <a16:creationId xmlns:a16="http://schemas.microsoft.com/office/drawing/2014/main" id="{50E54901-86CC-4DED-9690-33747E2812DC}"/>
               </a:ext>
             </a:extLst>
           </p:cNvPr>
@@ -2836,7 +2836,7 @@
           <p:cNvPr id="15" name="">
             <a:extLst xmlns:a="http://schemas.openxmlformats.org/drawingml/2006/main">
               <a:ext uri="{FF2B5EF4-FFF2-40B4-BE49-F238E27FC236}">
-                <a16:creationId xmlns:a16="http://schemas.microsoft.com/office/drawing/2014/main" id="{DE5FEB77-E183-4BEB-8841-6D93F95CE703}"/>
+                <a16:creationId xmlns:a16="http://schemas.microsoft.com/office/drawing/2014/main" id="{C1FD2CC7-0A77-46B9-A81C-3AC474E75456}"/>
               </a:ext>
             </a:extLst>
           </p:cNvPr>
@@ -2894,7 +2894,7 @@
           <p:cNvPr id="16" name="">
             <a:extLst xmlns:a="http://schemas.openxmlformats.org/drawingml/2006/main">
               <a:ext uri="{FF2B5EF4-FFF2-40B4-BE49-F238E27FC236}">
-                <a16:creationId xmlns:a16="http://schemas.microsoft.com/office/drawing/2014/main" id="{6289F198-9A1E-43BA-BB56-B01000F92EBE}"/>
+                <a16:creationId xmlns:a16="http://schemas.microsoft.com/office/drawing/2014/main" id="{9DEC08D4-D427-46F2-B001-272B286E92AA}"/>
               </a:ext>
             </a:extLst>
           </p:cNvPr>
@@ -2927,7 +2927,7 @@
           <p:cNvPr id="17" name="">
             <a:extLst xmlns:a="http://schemas.openxmlformats.org/drawingml/2006/main">
               <a:ext uri="{FF2B5EF4-FFF2-40B4-BE49-F238E27FC236}">
-                <a16:creationId xmlns:a16="http://schemas.microsoft.com/office/drawing/2014/main" id="{4C9DCB34-5174-461E-91C6-EA6DD378FA64}"/>
+                <a16:creationId xmlns:a16="http://schemas.microsoft.com/office/drawing/2014/main" id="{DAF24683-B6FE-486D-9D00-23345673B64C}"/>
               </a:ext>
             </a:extLst>
           </p:cNvPr>
@@ -2985,7 +2985,7 @@
           <p:cNvPr id="18" name="">
             <a:extLst xmlns:a="http://schemas.openxmlformats.org/drawingml/2006/main">
               <a:ext uri="{FF2B5EF4-FFF2-40B4-BE49-F238E27FC236}">
-                <a16:creationId xmlns:a16="http://schemas.microsoft.com/office/drawing/2014/main" id="{8DC8B116-CEF8-4F25-A5EE-B21EE7500CE7}"/>
+                <a16:creationId xmlns:a16="http://schemas.microsoft.com/office/drawing/2014/main" id="{E9A89A5D-8786-4B65-96A7-E191412939E7}"/>
               </a:ext>
             </a:extLst>
           </p:cNvPr>
@@ -3043,7 +3043,7 @@
           <p:cNvPr id="19" name="">
             <a:extLst xmlns:a="http://schemas.openxmlformats.org/drawingml/2006/main">
               <a:ext uri="{FF2B5EF4-FFF2-40B4-BE49-F238E27FC236}">
-                <a16:creationId xmlns:a16="http://schemas.microsoft.com/office/drawing/2014/main" id="{148659A7-6A4F-4BD8-B181-580E32608444}"/>
+                <a16:creationId xmlns:a16="http://schemas.microsoft.com/office/drawing/2014/main" id="{99D0334A-8487-4886-99C1-A44793ECECD0}"/>
               </a:ext>
             </a:extLst>
           </p:cNvPr>
@@ -3080,7 +3080,7 @@
           <p:nvPr/>
         </p:nvPicPr>
         <p:blipFill>
-          <a:blip xmlns:r="http://schemas.openxmlformats.org/officeDocument/2006/relationships" xmlns:a="http://schemas.openxmlformats.org/drawingml/2006/main" r:embed="R4e143c37b7554f04"/>
+          <a:blip xmlns:r="http://schemas.openxmlformats.org/officeDocument/2006/relationships" xmlns:a="http://schemas.openxmlformats.org/drawingml/2006/main" r:embed="Rec583292f7104d33"/>
           <a:stretch xmlns:a="http://schemas.openxmlformats.org/drawingml/2006/main"/>
         </p:blipFill>
         <p:spPr>
@@ -3098,7 +3098,7 @@
           <p:cNvPr id="21" name="">
             <a:extLst xmlns:a="http://schemas.openxmlformats.org/drawingml/2006/main">
               <a:ext uri="{FF2B5EF4-FFF2-40B4-BE49-F238E27FC236}">
-                <a16:creationId xmlns:a16="http://schemas.microsoft.com/office/drawing/2014/main" id="{7BF45D08-2D24-441F-B343-E061BAAAD8DD}"/>
+                <a16:creationId xmlns:a16="http://schemas.microsoft.com/office/drawing/2014/main" id="{980BFEA7-46D0-4E51-9586-EEEAF879BFCC}"/>
               </a:ext>
             </a:extLst>
           </p:cNvPr>
@@ -3156,7 +3156,7 @@
           <p:cNvPr id="22" name="">
             <a:extLst xmlns:a="http://schemas.openxmlformats.org/drawingml/2006/main">
               <a:ext uri="{FF2B5EF4-FFF2-40B4-BE49-F238E27FC236}">
-                <a16:creationId xmlns:a16="http://schemas.microsoft.com/office/drawing/2014/main" id="{F4EC5A75-524C-415E-8937-0260944CDC8E}"/>
+                <a16:creationId xmlns:a16="http://schemas.microsoft.com/office/drawing/2014/main" id="{587D16B0-55F2-4209-8617-8D0A5DAF7A67}"/>
               </a:ext>
             </a:extLst>
           </p:cNvPr>
@@ -3212,7 +3212,7 @@
     </p:spTree>
     <p:extLst>
       <p:ext uri="{BB962C8B-B14F-4D97-AF65-F5344CB8AC3E}">
-        <p14:creationId xmlns:p14="http://schemas.microsoft.com/office/powerpoint/2010/main" val="1806421579"/>
+        <p14:creationId xmlns:p14="http://schemas.microsoft.com/office/powerpoint/2010/main" val="577317459"/>
       </p:ext>
     </p:extLst>
   </p:cSld>
@@ -3243,7 +3243,7 @@
           <p:cNvPr id="47" name="">
             <a:extLst xmlns:a="http://schemas.openxmlformats.org/drawingml/2006/main">
               <a:ext uri="{FF2B5EF4-FFF2-40B4-BE49-F238E27FC236}">
-                <a16:creationId xmlns:a16="http://schemas.microsoft.com/office/drawing/2014/main" id="{C26BB472-6EBB-4750-86A8-0274F1C033CA}"/>
+                <a16:creationId xmlns:a16="http://schemas.microsoft.com/office/drawing/2014/main" id="{45AFFEFF-D0EB-4868-A49D-FEB88C423986}"/>
               </a:ext>
             </a:extLst>
           </p:cNvPr>
@@ -3276,7 +3276,7 @@
           <p:cNvPr id="2" name="">
             <a:extLst xmlns:a="http://schemas.openxmlformats.org/drawingml/2006/main">
               <a:ext uri="{FF2B5EF4-FFF2-40B4-BE49-F238E27FC236}">
-                <a16:creationId xmlns:a16="http://schemas.microsoft.com/office/drawing/2014/main" id="{B617F477-BDE7-4BE9-BCDB-631499EE0636}"/>
+                <a16:creationId xmlns:a16="http://schemas.microsoft.com/office/drawing/2014/main" id="{03DBA11F-80EB-4B8C-B5C1-FC31FCCDF3A9}"/>
               </a:ext>
             </a:extLst>
           </p:cNvPr>
@@ -3334,7 +3334,7 @@
           <p:cNvPr id="3" name="">
             <a:extLst xmlns:a="http://schemas.openxmlformats.org/drawingml/2006/main">
               <a:ext uri="{FF2B5EF4-FFF2-40B4-BE49-F238E27FC236}">
-                <a16:creationId xmlns:a16="http://schemas.microsoft.com/office/drawing/2014/main" id="{05826101-7E73-431A-AB52-8C25B1770455}"/>
+                <a16:creationId xmlns:a16="http://schemas.microsoft.com/office/drawing/2014/main" id="{04D08561-F80C-47AF-B4EF-D3C629C253E0}"/>
               </a:ext>
             </a:extLst>
           </p:cNvPr>
@@ -3392,7 +3392,7 @@
           <p:cNvPr id="4" name="">
             <a:extLst xmlns:a="http://schemas.openxmlformats.org/drawingml/2006/main">
               <a:ext uri="{FF2B5EF4-FFF2-40B4-BE49-F238E27FC236}">
-                <a16:creationId xmlns:a16="http://schemas.microsoft.com/office/drawing/2014/main" id="{06E8131C-6CD7-4A4B-A8A9-6A1179EE153B}"/>
+                <a16:creationId xmlns:a16="http://schemas.microsoft.com/office/drawing/2014/main" id="{1A34E59E-7E0A-4550-A7D7-90C2AE0E39BA}"/>
               </a:ext>
             </a:extLst>
           </p:cNvPr>
@@ -3429,7 +3429,7 @@
           <p:nvPr/>
         </p:nvPicPr>
         <p:blipFill>
-          <a:blip xmlns:r="http://schemas.openxmlformats.org/officeDocument/2006/relationships" xmlns:a="http://schemas.openxmlformats.org/drawingml/2006/main" r:embed="R741fd76f9f83462c"/>
+          <a:blip xmlns:r="http://schemas.openxmlformats.org/officeDocument/2006/relationships" xmlns:a="http://schemas.openxmlformats.org/drawingml/2006/main" r:embed="R9e61588fca564b8d"/>
           <a:stretch xmlns:a="http://schemas.openxmlformats.org/drawingml/2006/main"/>
         </p:blipFill>
         <p:spPr>
@@ -3447,7 +3447,7 @@
           <p:cNvPr id="6" name="">
             <a:extLst xmlns:a="http://schemas.openxmlformats.org/drawingml/2006/main">
               <a:ext uri="{FF2B5EF4-FFF2-40B4-BE49-F238E27FC236}">
-                <a16:creationId xmlns:a16="http://schemas.microsoft.com/office/drawing/2014/main" id="{E67876E1-52BB-4455-94D2-F70168879FF1}"/>
+                <a16:creationId xmlns:a16="http://schemas.microsoft.com/office/drawing/2014/main" id="{A9E81C28-BA9F-4BAD-AB7A-A337241B0990}"/>
               </a:ext>
             </a:extLst>
           </p:cNvPr>
@@ -3480,7 +3480,7 @@
           <p:cNvPr id="7" name="">
             <a:extLst xmlns:a="http://schemas.openxmlformats.org/drawingml/2006/main">
               <a:ext uri="{FF2B5EF4-FFF2-40B4-BE49-F238E27FC236}">
-                <a16:creationId xmlns:a16="http://schemas.microsoft.com/office/drawing/2014/main" id="{343B78C6-1F1A-48FE-B19E-452698E8D7AC}"/>
+                <a16:creationId xmlns:a16="http://schemas.microsoft.com/office/drawing/2014/main" id="{C143331E-D398-4607-8FDF-EC721D789167}"/>
               </a:ext>
             </a:extLst>
           </p:cNvPr>
@@ -3538,7 +3538,7 @@
           <p:cNvPr id="8" name="">
             <a:extLst xmlns:a="http://schemas.openxmlformats.org/drawingml/2006/main">
               <a:ext uri="{FF2B5EF4-FFF2-40B4-BE49-F238E27FC236}">
-                <a16:creationId xmlns:a16="http://schemas.microsoft.com/office/drawing/2014/main" id="{9E4EF747-AC7F-459D-9EA9-27CA9C22C145}"/>
+                <a16:creationId xmlns:a16="http://schemas.microsoft.com/office/drawing/2014/main" id="{B12DD2AF-1F24-4111-BEF6-0F4846B06F19}"/>
               </a:ext>
             </a:extLst>
           </p:cNvPr>
@@ -3596,7 +3596,7 @@
           <p:cNvPr id="9" name="">
             <a:extLst xmlns:a="http://schemas.openxmlformats.org/drawingml/2006/main">
               <a:ext uri="{FF2B5EF4-FFF2-40B4-BE49-F238E27FC236}">
-                <a16:creationId xmlns:a16="http://schemas.microsoft.com/office/drawing/2014/main" id="{7D9F08CC-2808-4B47-9DB5-000C81E2656E}"/>
+                <a16:creationId xmlns:a16="http://schemas.microsoft.com/office/drawing/2014/main" id="{2D032A58-AF44-4076-94B7-6F8478FD6B7E}"/>
               </a:ext>
             </a:extLst>
           </p:cNvPr>
@@ -3654,7 +3654,7 @@
           <p:cNvPr id="10" name="">
             <a:extLst xmlns:a="http://schemas.openxmlformats.org/drawingml/2006/main">
               <a:ext uri="{FF2B5EF4-FFF2-40B4-BE49-F238E27FC236}">
-                <a16:creationId xmlns:a16="http://schemas.microsoft.com/office/drawing/2014/main" id="{16D61BAF-7B9C-451F-BE9F-D5CDE52B7593}"/>
+                <a16:creationId xmlns:a16="http://schemas.microsoft.com/office/drawing/2014/main" id="{F7E1CCBD-3DA5-46D7-B425-F82A689663BE}"/>
               </a:ext>
             </a:extLst>
           </p:cNvPr>
@@ -3687,7 +3687,7 @@
           <p:cNvPr id="11" name="">
             <a:extLst xmlns:a="http://schemas.openxmlformats.org/drawingml/2006/main">
               <a:ext uri="{FF2B5EF4-FFF2-40B4-BE49-F238E27FC236}">
-                <a16:creationId xmlns:a16="http://schemas.microsoft.com/office/drawing/2014/main" id="{195C7A3B-1488-4653-A5BF-9E52041AFB04}"/>
+                <a16:creationId xmlns:a16="http://schemas.microsoft.com/office/drawing/2014/main" id="{339DCF41-BDE1-4054-A03A-80BA82069D9D}"/>
               </a:ext>
             </a:extLst>
           </p:cNvPr>
@@ -3745,7 +3745,7 @@
           <p:cNvPr id="12" name="">
             <a:extLst xmlns:a="http://schemas.openxmlformats.org/drawingml/2006/main">
               <a:ext uri="{FF2B5EF4-FFF2-40B4-BE49-F238E27FC236}">
-                <a16:creationId xmlns:a16="http://schemas.microsoft.com/office/drawing/2014/main" id="{611A3FB0-AE34-4126-A450-8AA1494349BE}"/>
+                <a16:creationId xmlns:a16="http://schemas.microsoft.com/office/drawing/2014/main" id="{88FE5D4D-2489-403B-86DF-4162FDA7DDD7}"/>
               </a:ext>
             </a:extLst>
           </p:cNvPr>
@@ -3803,7 +3803,7 @@
           <p:cNvPr id="13" name="">
             <a:extLst xmlns:a="http://schemas.openxmlformats.org/drawingml/2006/main">
               <a:ext uri="{FF2B5EF4-FFF2-40B4-BE49-F238E27FC236}">
-                <a16:creationId xmlns:a16="http://schemas.microsoft.com/office/drawing/2014/main" id="{9D6E9308-B760-4EED-9434-993B26373EE6}"/>
+                <a16:creationId xmlns:a16="http://schemas.microsoft.com/office/drawing/2014/main" id="{41F44691-083F-4137-8F14-ACF9F772A051}"/>
               </a:ext>
             </a:extLst>
           </p:cNvPr>
@@ -3861,7 +3861,7 @@
           <p:cNvPr id="14" name="">
             <a:extLst xmlns:a="http://schemas.openxmlformats.org/drawingml/2006/main">
               <a:ext uri="{FF2B5EF4-FFF2-40B4-BE49-F238E27FC236}">
-                <a16:creationId xmlns:a16="http://schemas.microsoft.com/office/drawing/2014/main" id="{1B4B765E-EEEB-4BD2-AC5F-A282BE871567}"/>
+                <a16:creationId xmlns:a16="http://schemas.microsoft.com/office/drawing/2014/main" id="{B9F46874-8330-48C6-89E4-FAB42EA87981}"/>
               </a:ext>
             </a:extLst>
           </p:cNvPr>
@@ -3879,7 +3879,7 @@
             <a:avLst/>
           </a:prstGeom>
           <a:solidFill xmlns:a="http://schemas.openxmlformats.org/drawingml/2006/main">
-            <a:srgbClr val="FFF4F4"/>
+            <a:srgbClr val="F7F7F7"/>
           </a:solidFill>
           <a:ln xmlns:a="http://schemas.openxmlformats.org/drawingml/2006/main" w="9525">
             <a:solidFill>
@@ -3894,7 +3894,7 @@
           <p:cNvPr id="15" name="">
             <a:extLst xmlns:a="http://schemas.openxmlformats.org/drawingml/2006/main">
               <a:ext uri="{FF2B5EF4-FFF2-40B4-BE49-F238E27FC236}">
-                <a16:creationId xmlns:a16="http://schemas.microsoft.com/office/drawing/2014/main" id="{569CAD8C-F603-49B0-8696-4BBC63ECEDA7}"/>
+                <a16:creationId xmlns:a16="http://schemas.microsoft.com/office/drawing/2014/main" id="{54E59B55-73CF-4CD0-ACB4-726987B75A6A}"/>
               </a:ext>
             </a:extLst>
           </p:cNvPr>
@@ -3952,7 +3952,7 @@
           <p:cNvPr id="16" name="">
             <a:extLst xmlns:a="http://schemas.openxmlformats.org/drawingml/2006/main">
               <a:ext uri="{FF2B5EF4-FFF2-40B4-BE49-F238E27FC236}">
-                <a16:creationId xmlns:a16="http://schemas.microsoft.com/office/drawing/2014/main" id="{4B1A840F-4909-43C2-AE1F-E8A7C5AB2D63}"/>
+                <a16:creationId xmlns:a16="http://schemas.microsoft.com/office/drawing/2014/main" id="{D2FE0ADC-E5C6-44AC-B41E-2C9F8DAC3283}"/>
               </a:ext>
             </a:extLst>
           </p:cNvPr>
@@ -4010,7 +4010,7 @@
           <p:cNvPr id="17" name="">
             <a:extLst xmlns:a="http://schemas.openxmlformats.org/drawingml/2006/main">
               <a:ext uri="{FF2B5EF4-FFF2-40B4-BE49-F238E27FC236}">
-                <a16:creationId xmlns:a16="http://schemas.microsoft.com/office/drawing/2014/main" id="{3FC005AE-04AC-4B12-8836-C68371B3E7C7}"/>
+                <a16:creationId xmlns:a16="http://schemas.microsoft.com/office/drawing/2014/main" id="{339EB633-ECB3-43D0-9EF0-A02C01FED510}"/>
               </a:ext>
             </a:extLst>
           </p:cNvPr>
@@ -4068,7 +4068,7 @@
           <p:cNvPr id="18" name="">
             <a:extLst xmlns:a="http://schemas.openxmlformats.org/drawingml/2006/main">
               <a:ext uri="{FF2B5EF4-FFF2-40B4-BE49-F238E27FC236}">
-                <a16:creationId xmlns:a16="http://schemas.microsoft.com/office/drawing/2014/main" id="{89B8ED01-D984-4203-97CD-9F238BDEF78D}"/>
+                <a16:creationId xmlns:a16="http://schemas.microsoft.com/office/drawing/2014/main" id="{CE222F5F-4150-4217-9D44-6115E89066C8}"/>
               </a:ext>
             </a:extLst>
           </p:cNvPr>
@@ -4101,7 +4101,7 @@
           <p:cNvPr id="19" name="">
             <a:extLst xmlns:a="http://schemas.openxmlformats.org/drawingml/2006/main">
               <a:ext uri="{FF2B5EF4-FFF2-40B4-BE49-F238E27FC236}">
-                <a16:creationId xmlns:a16="http://schemas.microsoft.com/office/drawing/2014/main" id="{0DFE69D3-2746-4DC6-AB74-6388AA4426DB}"/>
+                <a16:creationId xmlns:a16="http://schemas.microsoft.com/office/drawing/2014/main" id="{CDEF75E8-30CF-4780-B03D-EBAC390B057F}"/>
               </a:ext>
             </a:extLst>
           </p:cNvPr>
@@ -4159,7 +4159,7 @@
           <p:cNvPr id="20" name="">
             <a:extLst xmlns:a="http://schemas.openxmlformats.org/drawingml/2006/main">
               <a:ext uri="{FF2B5EF4-FFF2-40B4-BE49-F238E27FC236}">
-                <a16:creationId xmlns:a16="http://schemas.microsoft.com/office/drawing/2014/main" id="{E221A097-12A1-4DDF-9C63-F4E1D8359E0A}"/>
+                <a16:creationId xmlns:a16="http://schemas.microsoft.com/office/drawing/2014/main" id="{38B9613F-5648-4495-AF26-55F9EFA4B516}"/>
               </a:ext>
             </a:extLst>
           </p:cNvPr>
@@ -4217,7 +4217,7 @@
           <p:cNvPr id="21" name="">
             <a:extLst xmlns:a="http://schemas.openxmlformats.org/drawingml/2006/main">
               <a:ext uri="{FF2B5EF4-FFF2-40B4-BE49-F238E27FC236}">
-                <a16:creationId xmlns:a16="http://schemas.microsoft.com/office/drawing/2014/main" id="{5DA3D0B2-BF80-4890-AEAB-217326E4D2D8}"/>
+                <a16:creationId xmlns:a16="http://schemas.microsoft.com/office/drawing/2014/main" id="{8DAC3289-B6CC-4799-9462-044C820186FB}"/>
               </a:ext>
             </a:extLst>
           </p:cNvPr>
@@ -4275,7 +4275,7 @@
           <p:cNvPr id="22" name="">
             <a:extLst xmlns:a="http://schemas.openxmlformats.org/drawingml/2006/main">
               <a:ext uri="{FF2B5EF4-FFF2-40B4-BE49-F238E27FC236}">
-                <a16:creationId xmlns:a16="http://schemas.microsoft.com/office/drawing/2014/main" id="{95A57BD7-4744-400B-A2A5-9532D2217A90}"/>
+                <a16:creationId xmlns:a16="http://schemas.microsoft.com/office/drawing/2014/main" id="{C6BB60BA-1FD0-4A50-8AEC-8E907DC8BB1F}"/>
               </a:ext>
             </a:extLst>
           </p:cNvPr>
@@ -4308,7 +4308,7 @@
           <p:cNvPr id="23" name="">
             <a:extLst xmlns:a="http://schemas.openxmlformats.org/drawingml/2006/main">
               <a:ext uri="{FF2B5EF4-FFF2-40B4-BE49-F238E27FC236}">
-                <a16:creationId xmlns:a16="http://schemas.microsoft.com/office/drawing/2014/main" id="{A4FA802C-3B62-4912-BE21-B96E766268CE}"/>
+                <a16:creationId xmlns:a16="http://schemas.microsoft.com/office/drawing/2014/main" id="{12CFF996-8001-4774-A571-1BAE2B3E4855}"/>
               </a:ext>
             </a:extLst>
           </p:cNvPr>
@@ -4366,7 +4366,7 @@
           <p:cNvPr id="24" name="">
             <a:extLst xmlns:a="http://schemas.openxmlformats.org/drawingml/2006/main">
               <a:ext uri="{FF2B5EF4-FFF2-40B4-BE49-F238E27FC236}">
-                <a16:creationId xmlns:a16="http://schemas.microsoft.com/office/drawing/2014/main" id="{D1AA1826-F2C1-45C6-BD81-8A954759818E}"/>
+                <a16:creationId xmlns:a16="http://schemas.microsoft.com/office/drawing/2014/main" id="{CB253C80-E1E4-4AF5-9527-FC8E4A550489}"/>
               </a:ext>
             </a:extLst>
           </p:cNvPr>
@@ -4424,7 +4424,7 @@
           <p:cNvPr id="25" name="">
             <a:extLst xmlns:a="http://schemas.openxmlformats.org/drawingml/2006/main">
               <a:ext uri="{FF2B5EF4-FFF2-40B4-BE49-F238E27FC236}">
-                <a16:creationId xmlns:a16="http://schemas.microsoft.com/office/drawing/2014/main" id="{9583B26D-FF7B-4044-A2B8-24E867AD53C6}"/>
+                <a16:creationId xmlns:a16="http://schemas.microsoft.com/office/drawing/2014/main" id="{5EAD9D8C-D4C3-4B7B-B2BE-CF245B0A22FB}"/>
               </a:ext>
             </a:extLst>
           </p:cNvPr>
@@ -4482,7 +4482,7 @@
           <p:cNvPr id="26" name="">
             <a:extLst xmlns:a="http://schemas.openxmlformats.org/drawingml/2006/main">
               <a:ext uri="{FF2B5EF4-FFF2-40B4-BE49-F238E27FC236}">
-                <a16:creationId xmlns:a16="http://schemas.microsoft.com/office/drawing/2014/main" id="{757835D1-45A9-4B6F-B508-236F3F208F8C}"/>
+                <a16:creationId xmlns:a16="http://schemas.microsoft.com/office/drawing/2014/main" id="{75E8CC67-C3CF-4D7F-B5DE-89A854E20B95}"/>
               </a:ext>
             </a:extLst>
           </p:cNvPr>
@@ -4515,7 +4515,7 @@
           <p:cNvPr id="27" name="">
             <a:extLst xmlns:a="http://schemas.openxmlformats.org/drawingml/2006/main">
               <a:ext uri="{FF2B5EF4-FFF2-40B4-BE49-F238E27FC236}">
-                <a16:creationId xmlns:a16="http://schemas.microsoft.com/office/drawing/2014/main" id="{1930C4B2-E3F7-4679-87E0-926EDC157D70}"/>
+                <a16:creationId xmlns:a16="http://schemas.microsoft.com/office/drawing/2014/main" id="{1BBA8306-CEE4-4CE9-8936-58C7B1B52E73}"/>
               </a:ext>
             </a:extLst>
           </p:cNvPr>
@@ -4573,7 +4573,7 @@
           <p:cNvPr id="28" name="">
             <a:extLst xmlns:a="http://schemas.openxmlformats.org/drawingml/2006/main">
               <a:ext uri="{FF2B5EF4-FFF2-40B4-BE49-F238E27FC236}">
-                <a16:creationId xmlns:a16="http://schemas.microsoft.com/office/drawing/2014/main" id="{A2F016CE-89AE-4AE3-B1EC-C409F8A93A37}"/>
+                <a16:creationId xmlns:a16="http://schemas.microsoft.com/office/drawing/2014/main" id="{E28095EC-CB39-40D3-B464-2AB1C0BDCAA2}"/>
               </a:ext>
             </a:extLst>
           </p:cNvPr>
@@ -4631,7 +4631,7 @@
           <p:cNvPr id="29" name="">
             <a:extLst xmlns:a="http://schemas.openxmlformats.org/drawingml/2006/main">
               <a:ext uri="{FF2B5EF4-FFF2-40B4-BE49-F238E27FC236}">
-                <a16:creationId xmlns:a16="http://schemas.microsoft.com/office/drawing/2014/main" id="{5ADD19E3-85CD-4515-9520-99F5CFBB23FD}"/>
+                <a16:creationId xmlns:a16="http://schemas.microsoft.com/office/drawing/2014/main" id="{6232F711-918B-4222-A67D-5611BAAC91A6}"/>
               </a:ext>
             </a:extLst>
           </p:cNvPr>
@@ -4689,7 +4689,7 @@
           <p:cNvPr id="30" name="">
             <a:extLst xmlns:a="http://schemas.openxmlformats.org/drawingml/2006/main">
               <a:ext uri="{FF2B5EF4-FFF2-40B4-BE49-F238E27FC236}">
-                <a16:creationId xmlns:a16="http://schemas.microsoft.com/office/drawing/2014/main" id="{CAFFDDA5-CBFB-46B2-8972-88987663B480}"/>
+                <a16:creationId xmlns:a16="http://schemas.microsoft.com/office/drawing/2014/main" id="{1CC772FD-94B8-4719-9AA8-B2EE99F08C41}"/>
               </a:ext>
             </a:extLst>
           </p:cNvPr>
@@ -4722,7 +4722,7 @@
           <p:cNvPr id="31" name="">
             <a:extLst xmlns:a="http://schemas.openxmlformats.org/drawingml/2006/main">
               <a:ext uri="{FF2B5EF4-FFF2-40B4-BE49-F238E27FC236}">
-                <a16:creationId xmlns:a16="http://schemas.microsoft.com/office/drawing/2014/main" id="{908DAC15-4EB6-4E90-B2A7-F24182C91483}"/>
+                <a16:creationId xmlns:a16="http://schemas.microsoft.com/office/drawing/2014/main" id="{46E758D2-78A1-4854-AC1E-DFEA3160B60E}"/>
               </a:ext>
             </a:extLst>
           </p:cNvPr>
@@ -4780,7 +4780,7 @@
           <p:cNvPr id="32" name="">
             <a:extLst xmlns:a="http://schemas.openxmlformats.org/drawingml/2006/main">
               <a:ext uri="{FF2B5EF4-FFF2-40B4-BE49-F238E27FC236}">
-                <a16:creationId xmlns:a16="http://schemas.microsoft.com/office/drawing/2014/main" id="{2D991818-4225-4668-A811-C43C20153137}"/>
+                <a16:creationId xmlns:a16="http://schemas.microsoft.com/office/drawing/2014/main" id="{116E953F-711B-4213-95A9-5787BAB55942}"/>
               </a:ext>
             </a:extLst>
           </p:cNvPr>
@@ -4813,7 +4813,7 @@
           <p:cNvPr id="33" name="">
             <a:extLst xmlns:a="http://schemas.openxmlformats.org/drawingml/2006/main">
               <a:ext uri="{FF2B5EF4-FFF2-40B4-BE49-F238E27FC236}">
-                <a16:creationId xmlns:a16="http://schemas.microsoft.com/office/drawing/2014/main" id="{808FD72E-3F57-4A29-9F57-3D9CA7C69C01}"/>
+                <a16:creationId xmlns:a16="http://schemas.microsoft.com/office/drawing/2014/main" id="{F2A6FAC0-F260-4A2E-984A-BE79400263D6}"/>
               </a:ext>
             </a:extLst>
           </p:cNvPr>
@@ -4871,7 +4871,7 @@
           <p:cNvPr id="34" name="">
             <a:extLst xmlns:a="http://schemas.openxmlformats.org/drawingml/2006/main">
               <a:ext uri="{FF2B5EF4-FFF2-40B4-BE49-F238E27FC236}">
-                <a16:creationId xmlns:a16="http://schemas.microsoft.com/office/drawing/2014/main" id="{5D35A020-B701-4CFA-9047-8FAC4E640AE2}"/>
+                <a16:creationId xmlns:a16="http://schemas.microsoft.com/office/drawing/2014/main" id="{1E140CCA-7BD8-4A11-BB0C-586A0488FF28}"/>
               </a:ext>
             </a:extLst>
           </p:cNvPr>
@@ -4904,7 +4904,7 @@
           <p:cNvPr id="35" name="">
             <a:extLst xmlns:a="http://schemas.openxmlformats.org/drawingml/2006/main">
               <a:ext uri="{FF2B5EF4-FFF2-40B4-BE49-F238E27FC236}">
-                <a16:creationId xmlns:a16="http://schemas.microsoft.com/office/drawing/2014/main" id="{F77DAD00-DF8D-4616-80AD-43F475569B22}"/>
+                <a16:creationId xmlns:a16="http://schemas.microsoft.com/office/drawing/2014/main" id="{18BF58F8-9C5F-48AE-BC35-71D31DAE71A1}"/>
               </a:ext>
             </a:extLst>
           </p:cNvPr>
@@ -4962,7 +4962,7 @@
           <p:cNvPr id="36" name="">
             <a:extLst xmlns:a="http://schemas.openxmlformats.org/drawingml/2006/main">
               <a:ext uri="{FF2B5EF4-FFF2-40B4-BE49-F238E27FC236}">
-                <a16:creationId xmlns:a16="http://schemas.microsoft.com/office/drawing/2014/main" id="{FC81B066-00C7-4810-87D2-3FB3DCD89A23}"/>
+                <a16:creationId xmlns:a16="http://schemas.microsoft.com/office/drawing/2014/main" id="{A8239B89-E804-4833-856C-CD1E3660600E}"/>
               </a:ext>
             </a:extLst>
           </p:cNvPr>
@@ -4995,7 +4995,7 @@
           <p:cNvPr id="37" name="">
             <a:extLst xmlns:a="http://schemas.openxmlformats.org/drawingml/2006/main">
               <a:ext uri="{FF2B5EF4-FFF2-40B4-BE49-F238E27FC236}">
-                <a16:creationId xmlns:a16="http://schemas.microsoft.com/office/drawing/2014/main" id="{2EEAAD22-DDA7-4111-97F9-2F78E5184951}"/>
+                <a16:creationId xmlns:a16="http://schemas.microsoft.com/office/drawing/2014/main" id="{94358C8D-BD3D-428D-A86D-4C49BA17A499}"/>
               </a:ext>
             </a:extLst>
           </p:cNvPr>
@@ -5053,7 +5053,7 @@
           <p:cNvPr id="38" name="">
             <a:extLst xmlns:a="http://schemas.openxmlformats.org/drawingml/2006/main">
               <a:ext uri="{FF2B5EF4-FFF2-40B4-BE49-F238E27FC236}">
-                <a16:creationId xmlns:a16="http://schemas.microsoft.com/office/drawing/2014/main" id="{00B83571-718F-4287-A239-D6D427F33B31}"/>
+                <a16:creationId xmlns:a16="http://schemas.microsoft.com/office/drawing/2014/main" id="{24E280E7-2216-4857-88B5-8E8125168FB3}"/>
               </a:ext>
             </a:extLst>
           </p:cNvPr>
@@ -5086,7 +5086,7 @@
           <p:cNvPr id="39" name="">
             <a:extLst xmlns:a="http://schemas.openxmlformats.org/drawingml/2006/main">
               <a:ext uri="{FF2B5EF4-FFF2-40B4-BE49-F238E27FC236}">
-                <a16:creationId xmlns:a16="http://schemas.microsoft.com/office/drawing/2014/main" id="{C29A3924-6FD8-4BD6-945C-D3AB8C562218}"/>
+                <a16:creationId xmlns:a16="http://schemas.microsoft.com/office/drawing/2014/main" id="{6D9BBD3D-21E5-4076-AD04-96B24A517871}"/>
               </a:ext>
             </a:extLst>
           </p:cNvPr>
@@ -5144,7 +5144,7 @@
           <p:cNvPr id="40" name="">
             <a:extLst xmlns:a="http://schemas.openxmlformats.org/drawingml/2006/main">
               <a:ext uri="{FF2B5EF4-FFF2-40B4-BE49-F238E27FC236}">
-                <a16:creationId xmlns:a16="http://schemas.microsoft.com/office/drawing/2014/main" id="{5663F66B-31B4-4092-A1A1-FFE69FB718EF}"/>
+                <a16:creationId xmlns:a16="http://schemas.microsoft.com/office/drawing/2014/main" id="{9650944F-A950-46CA-8A21-A6AE548D4481}"/>
               </a:ext>
             </a:extLst>
           </p:cNvPr>
@@ -5177,7 +5177,7 @@
           <p:cNvPr id="41" name="">
             <a:extLst xmlns:a="http://schemas.openxmlformats.org/drawingml/2006/main">
               <a:ext uri="{FF2B5EF4-FFF2-40B4-BE49-F238E27FC236}">
-                <a16:creationId xmlns:a16="http://schemas.microsoft.com/office/drawing/2014/main" id="{A00D6E66-1826-41E3-A99E-F1B180AF1212}"/>
+                <a16:creationId xmlns:a16="http://schemas.microsoft.com/office/drawing/2014/main" id="{C5B54E98-F233-48D1-9F4A-7D50A9274860}"/>
               </a:ext>
             </a:extLst>
           </p:cNvPr>
@@ -5235,7 +5235,7 @@
           <p:cNvPr id="42" name="">
             <a:extLst xmlns:a="http://schemas.openxmlformats.org/drawingml/2006/main">
               <a:ext uri="{FF2B5EF4-FFF2-40B4-BE49-F238E27FC236}">
-                <a16:creationId xmlns:a16="http://schemas.microsoft.com/office/drawing/2014/main" id="{BE890397-45EC-4EB7-A73D-F9287722879E}"/>
+                <a16:creationId xmlns:a16="http://schemas.microsoft.com/office/drawing/2014/main" id="{9964FD1F-C00D-4196-901D-0F391E219831}"/>
               </a:ext>
             </a:extLst>
           </p:cNvPr>
@@ -5268,7 +5268,7 @@
           <p:cNvPr id="43" name="">
             <a:extLst xmlns:a="http://schemas.openxmlformats.org/drawingml/2006/main">
               <a:ext uri="{FF2B5EF4-FFF2-40B4-BE49-F238E27FC236}">
-                <a16:creationId xmlns:a16="http://schemas.microsoft.com/office/drawing/2014/main" id="{826B19D4-4F0A-44B8-8C28-08F03E502477}"/>
+                <a16:creationId xmlns:a16="http://schemas.microsoft.com/office/drawing/2014/main" id="{62B3E022-19E7-4A8F-92A0-01CEF90DFB4D}"/>
               </a:ext>
             </a:extLst>
           </p:cNvPr>
@@ -5326,7 +5326,7 @@
           <p:cNvPr id="44" name="">
             <a:extLst xmlns:a="http://schemas.openxmlformats.org/drawingml/2006/main">
               <a:ext uri="{FF2B5EF4-FFF2-40B4-BE49-F238E27FC236}">
-                <a16:creationId xmlns:a16="http://schemas.microsoft.com/office/drawing/2014/main" id="{7EDBEE4A-4746-4214-B03A-29E898A093D9}"/>
+                <a16:creationId xmlns:a16="http://schemas.microsoft.com/office/drawing/2014/main" id="{3C5FEAA6-A8E8-4C85-B5C7-DFCF739B4012}"/>
               </a:ext>
             </a:extLst>
           </p:cNvPr>
@@ -5359,7 +5359,7 @@
           <p:cNvPr id="45" name="">
             <a:extLst xmlns:a="http://schemas.openxmlformats.org/drawingml/2006/main">
               <a:ext uri="{FF2B5EF4-FFF2-40B4-BE49-F238E27FC236}">
-                <a16:creationId xmlns:a16="http://schemas.microsoft.com/office/drawing/2014/main" id="{9F013F9A-A82C-42FC-9EFB-8722F8C4A953}"/>
+                <a16:creationId xmlns:a16="http://schemas.microsoft.com/office/drawing/2014/main" id="{52323457-A2A1-46D2-A026-B9E5FBE5D3B7}"/>
               </a:ext>
             </a:extLst>
           </p:cNvPr>
@@ -5417,7 +5417,7 @@
                 <a:latin typeface="Microsoft YaHei"/>
                 <a:ea typeface="Microsoft YaHei"/>
                 <a:cs typeface="Microsoft YaHei"/>
-                <a:hlinkClick xmlns:r="http://schemas.openxmlformats.org/officeDocument/2006/relationships" r:id="Ra091f5c3a5e045bf"/>
+                <a:hlinkClick xmlns:r="http://schemas.openxmlformats.org/officeDocument/2006/relationships" r:id="Rafa5434c558242b6"/>
               </a:rPr>
               <a:t>Trae Figma to Code</a:t>
             </a:r>
@@ -5429,7 +5429,7 @@
                 <a:latin typeface="Microsoft YaHei"/>
                 <a:ea typeface="Microsoft YaHei"/>
                 <a:cs typeface="Microsoft YaHei"/>
-                <a:hlinkClick xmlns:r="http://schemas.openxmlformats.org/officeDocument/2006/relationships" r:id="Rf74cb294912f47ae"/>
+                <a:hlinkClick xmlns:r="http://schemas.openxmlformats.org/officeDocument/2006/relationships" r:id="Re69c2202e3344b80"/>
               </a:rPr>
               <a:t> · Figma Dev Mode</a:t>
             </a:r>
@@ -5441,7 +5441,7 @@
           <p:cNvPr id="46" name="">
             <a:extLst xmlns:a="http://schemas.openxmlformats.org/drawingml/2006/main">
               <a:ext uri="{FF2B5EF4-FFF2-40B4-BE49-F238E27FC236}">
-                <a16:creationId xmlns:a16="http://schemas.microsoft.com/office/drawing/2014/main" id="{9AE05C26-11F7-49D0-B7BF-903CAC4B21D7}"/>
+                <a16:creationId xmlns:a16="http://schemas.microsoft.com/office/drawing/2014/main" id="{EF24B102-64EB-4014-8A1A-1DA7AD8C1DB0}"/>
               </a:ext>
             </a:extLst>
           </p:cNvPr>
@@ -5497,7 +5497,7 @@
     </p:spTree>
     <p:extLst>
       <p:ext uri="{BB962C8B-B14F-4D97-AF65-F5344CB8AC3E}">
-        <p14:creationId xmlns:p14="http://schemas.microsoft.com/office/powerpoint/2010/main" val="2076714417"/>
+        <p14:creationId xmlns:p14="http://schemas.microsoft.com/office/powerpoint/2010/main" val="1710669602"/>
       </p:ext>
     </p:extLst>
   </p:cSld>
@@ -5528,7 +5528,7 @@
           <p:cNvPr id="64" name="">
             <a:extLst xmlns:a="http://schemas.openxmlformats.org/drawingml/2006/main">
               <a:ext uri="{FF2B5EF4-FFF2-40B4-BE49-F238E27FC236}">
-                <a16:creationId xmlns:a16="http://schemas.microsoft.com/office/drawing/2014/main" id="{3F390605-C185-4207-B3A8-4BE8C37AB254}"/>
+                <a16:creationId xmlns:a16="http://schemas.microsoft.com/office/drawing/2014/main" id="{DEA8D3F7-1994-4EB7-A371-0A16122182C2}"/>
               </a:ext>
             </a:extLst>
           </p:cNvPr>
@@ -5561,7 +5561,7 @@
           <p:cNvPr id="2" name="">
             <a:extLst xmlns:a="http://schemas.openxmlformats.org/drawingml/2006/main">
               <a:ext uri="{FF2B5EF4-FFF2-40B4-BE49-F238E27FC236}">
-                <a16:creationId xmlns:a16="http://schemas.microsoft.com/office/drawing/2014/main" id="{D339E117-A1FE-410A-A594-8C555296056C}"/>
+                <a16:creationId xmlns:a16="http://schemas.microsoft.com/office/drawing/2014/main" id="{DE8FC575-20A6-4A21-8B26-D5E68BA3DA94}"/>
               </a:ext>
             </a:extLst>
           </p:cNvPr>
@@ -5619,7 +5619,7 @@
           <p:cNvPr id="3" name="">
             <a:extLst xmlns:a="http://schemas.openxmlformats.org/drawingml/2006/main">
               <a:ext uri="{FF2B5EF4-FFF2-40B4-BE49-F238E27FC236}">
-                <a16:creationId xmlns:a16="http://schemas.microsoft.com/office/drawing/2014/main" id="{5EEF05A4-9A6C-4696-9C4C-1C03F45330FB}"/>
+                <a16:creationId xmlns:a16="http://schemas.microsoft.com/office/drawing/2014/main" id="{5A2ADF23-7974-4351-85D6-74A91E0CEA5A}"/>
               </a:ext>
             </a:extLst>
           </p:cNvPr>
@@ -5677,7 +5677,7 @@
           <p:cNvPr id="4" name="">
             <a:extLst xmlns:a="http://schemas.openxmlformats.org/drawingml/2006/main">
               <a:ext uri="{FF2B5EF4-FFF2-40B4-BE49-F238E27FC236}">
-                <a16:creationId xmlns:a16="http://schemas.microsoft.com/office/drawing/2014/main" id="{344A8C29-7D1E-45AC-9EA7-ECAFF4010ACF}"/>
+                <a16:creationId xmlns:a16="http://schemas.microsoft.com/office/drawing/2014/main" id="{C2FF0C6D-F9CA-4FDD-B7AC-FA31059C6561}"/>
               </a:ext>
             </a:extLst>
           </p:cNvPr>
@@ -5710,7 +5710,7 @@
           <p:cNvPr id="5" name="">
             <a:extLst xmlns:a="http://schemas.openxmlformats.org/drawingml/2006/main">
               <a:ext uri="{FF2B5EF4-FFF2-40B4-BE49-F238E27FC236}">
-                <a16:creationId xmlns:a16="http://schemas.microsoft.com/office/drawing/2014/main" id="{F688EBAC-1D46-462B-A482-8AD6881F9499}"/>
+                <a16:creationId xmlns:a16="http://schemas.microsoft.com/office/drawing/2014/main" id="{926A6E03-49A7-4A05-8F91-6FAA4EA500B9}"/>
               </a:ext>
             </a:extLst>
           </p:cNvPr>
@@ -5768,7 +5768,7 @@
           <p:cNvPr id="6" name="">
             <a:extLst xmlns:a="http://schemas.openxmlformats.org/drawingml/2006/main">
               <a:ext uri="{FF2B5EF4-FFF2-40B4-BE49-F238E27FC236}">
-                <a16:creationId xmlns:a16="http://schemas.microsoft.com/office/drawing/2014/main" id="{8CC8B4E1-1016-4A14-B156-F6215866A5FA}"/>
+                <a16:creationId xmlns:a16="http://schemas.microsoft.com/office/drawing/2014/main" id="{55294D42-F161-413E-A021-1A9EAA621E8B}"/>
               </a:ext>
             </a:extLst>
           </p:cNvPr>
@@ -5826,7 +5826,7 @@
           <p:cNvPr id="7" name="">
             <a:extLst xmlns:a="http://schemas.openxmlformats.org/drawingml/2006/main">
               <a:ext uri="{FF2B5EF4-FFF2-40B4-BE49-F238E27FC236}">
-                <a16:creationId xmlns:a16="http://schemas.microsoft.com/office/drawing/2014/main" id="{3956CB29-1A8E-436A-8339-0A716B2EE952}"/>
+                <a16:creationId xmlns:a16="http://schemas.microsoft.com/office/drawing/2014/main" id="{36F50C2B-5F4A-4EDB-8D80-D8EE758C7739}"/>
               </a:ext>
             </a:extLst>
           </p:cNvPr>
@@ -5884,7 +5884,7 @@
           <p:cNvPr id="8" name="">
             <a:extLst xmlns:a="http://schemas.openxmlformats.org/drawingml/2006/main">
               <a:ext uri="{FF2B5EF4-FFF2-40B4-BE49-F238E27FC236}">
-                <a16:creationId xmlns:a16="http://schemas.microsoft.com/office/drawing/2014/main" id="{B3C0F131-AC57-4706-AB69-072922C3BC52}"/>
+                <a16:creationId xmlns:a16="http://schemas.microsoft.com/office/drawing/2014/main" id="{60690008-C27D-4586-BA3F-29DD992CE35D}"/>
               </a:ext>
             </a:extLst>
           </p:cNvPr>
@@ -5917,7 +5917,7 @@
           <p:cNvPr id="9" name="">
             <a:extLst xmlns:a="http://schemas.openxmlformats.org/drawingml/2006/main">
               <a:ext uri="{FF2B5EF4-FFF2-40B4-BE49-F238E27FC236}">
-                <a16:creationId xmlns:a16="http://schemas.microsoft.com/office/drawing/2014/main" id="{490848BF-9BEC-408D-9474-F51FE5237659}"/>
+                <a16:creationId xmlns:a16="http://schemas.microsoft.com/office/drawing/2014/main" id="{5DA4EF47-9E47-4E18-AFE1-42C2641276FE}"/>
               </a:ext>
             </a:extLst>
           </p:cNvPr>
@@ -5950,7 +5950,7 @@
           <p:cNvPr id="10" name="">
             <a:extLst xmlns:a="http://schemas.openxmlformats.org/drawingml/2006/main">
               <a:ext uri="{FF2B5EF4-FFF2-40B4-BE49-F238E27FC236}">
-                <a16:creationId xmlns:a16="http://schemas.microsoft.com/office/drawing/2014/main" id="{A20ED5B7-AE48-436E-9E4D-D4C424B51D8B}"/>
+                <a16:creationId xmlns:a16="http://schemas.microsoft.com/office/drawing/2014/main" id="{15BA1403-C28E-4C92-835B-C247688CE550}"/>
               </a:ext>
             </a:extLst>
           </p:cNvPr>
@@ -5983,7 +5983,7 @@
           <p:cNvPr id="11" name="">
             <a:extLst xmlns:a="http://schemas.openxmlformats.org/drawingml/2006/main">
               <a:ext uri="{FF2B5EF4-FFF2-40B4-BE49-F238E27FC236}">
-                <a16:creationId xmlns:a16="http://schemas.microsoft.com/office/drawing/2014/main" id="{E0BC550D-5467-4BFC-B670-D1C7490E064E}"/>
+                <a16:creationId xmlns:a16="http://schemas.microsoft.com/office/drawing/2014/main" id="{54F03A03-8428-4160-A593-27D9A4E69C05}"/>
               </a:ext>
             </a:extLst>
           </p:cNvPr>
@@ -6041,7 +6041,7 @@
           <p:cNvPr id="12" name="">
             <a:extLst xmlns:a="http://schemas.openxmlformats.org/drawingml/2006/main">
               <a:ext uri="{FF2B5EF4-FFF2-40B4-BE49-F238E27FC236}">
-                <a16:creationId xmlns:a16="http://schemas.microsoft.com/office/drawing/2014/main" id="{195F5B8E-1DA1-488D-B2A7-E08B3E579AF3}"/>
+                <a16:creationId xmlns:a16="http://schemas.microsoft.com/office/drawing/2014/main" id="{E97AA8DC-B471-4718-B269-085429780C78}"/>
               </a:ext>
             </a:extLst>
           </p:cNvPr>
@@ -6099,7 +6099,7 @@
           <p:cNvPr id="13" name="">
             <a:extLst xmlns:a="http://schemas.openxmlformats.org/drawingml/2006/main">
               <a:ext uri="{FF2B5EF4-FFF2-40B4-BE49-F238E27FC236}">
-                <a16:creationId xmlns:a16="http://schemas.microsoft.com/office/drawing/2014/main" id="{20117C97-08CF-4EE8-9F31-B2BAC2540181}"/>
+                <a16:creationId xmlns:a16="http://schemas.microsoft.com/office/drawing/2014/main" id="{D25C264E-AF58-4EDA-AD63-91143862730F}"/>
               </a:ext>
             </a:extLst>
           </p:cNvPr>
@@ -6157,7 +6157,7 @@
           <p:cNvPr id="14" name="">
             <a:extLst xmlns:a="http://schemas.openxmlformats.org/drawingml/2006/main">
               <a:ext uri="{FF2B5EF4-FFF2-40B4-BE49-F238E27FC236}">
-                <a16:creationId xmlns:a16="http://schemas.microsoft.com/office/drawing/2014/main" id="{F85874FD-757F-425C-B4A9-D3E432A03387}"/>
+                <a16:creationId xmlns:a16="http://schemas.microsoft.com/office/drawing/2014/main" id="{860EDFBE-D0E4-49EB-A102-50FE08C106A7}"/>
               </a:ext>
             </a:extLst>
           </p:cNvPr>
@@ -6190,7 +6190,7 @@
           <p:cNvPr id="15" name="">
             <a:extLst xmlns:a="http://schemas.openxmlformats.org/drawingml/2006/main">
               <a:ext uri="{FF2B5EF4-FFF2-40B4-BE49-F238E27FC236}">
-                <a16:creationId xmlns:a16="http://schemas.microsoft.com/office/drawing/2014/main" id="{5C692C77-AA23-445E-A049-C2EE355A5151}"/>
+                <a16:creationId xmlns:a16="http://schemas.microsoft.com/office/drawing/2014/main" id="{49C48EBF-16AD-41CF-863C-D7D3E00EDE92}"/>
               </a:ext>
             </a:extLst>
           </p:cNvPr>
@@ -6223,7 +6223,7 @@
           <p:cNvPr id="16" name="">
             <a:extLst xmlns:a="http://schemas.openxmlformats.org/drawingml/2006/main">
               <a:ext uri="{FF2B5EF4-FFF2-40B4-BE49-F238E27FC236}">
-                <a16:creationId xmlns:a16="http://schemas.microsoft.com/office/drawing/2014/main" id="{B424D416-3C8F-4B04-845C-4D74BDF5F3B1}"/>
+                <a16:creationId xmlns:a16="http://schemas.microsoft.com/office/drawing/2014/main" id="{BF45232E-FCF7-4549-A11C-7A36E03FE184}"/>
               </a:ext>
             </a:extLst>
           </p:cNvPr>
@@ -6256,7 +6256,7 @@
           <p:cNvPr id="17" name="">
             <a:extLst xmlns:a="http://schemas.openxmlformats.org/drawingml/2006/main">
               <a:ext uri="{FF2B5EF4-FFF2-40B4-BE49-F238E27FC236}">
-                <a16:creationId xmlns:a16="http://schemas.microsoft.com/office/drawing/2014/main" id="{FF9BF274-7FE6-4848-9BA9-98D6C362DDB8}"/>
+                <a16:creationId xmlns:a16="http://schemas.microsoft.com/office/drawing/2014/main" id="{DCF6D4CB-F6BD-42DB-938E-AAB0658155FF}"/>
               </a:ext>
             </a:extLst>
           </p:cNvPr>
@@ -6314,7 +6314,7 @@
           <p:cNvPr id="18" name="">
             <a:extLst xmlns:a="http://schemas.openxmlformats.org/drawingml/2006/main">
               <a:ext uri="{FF2B5EF4-FFF2-40B4-BE49-F238E27FC236}">
-                <a16:creationId xmlns:a16="http://schemas.microsoft.com/office/drawing/2014/main" id="{5354A0AD-6B3E-4537-ABB5-FD9C919A274B}"/>
+                <a16:creationId xmlns:a16="http://schemas.microsoft.com/office/drawing/2014/main" id="{26704419-37B2-4C44-BAE5-E7C4E01E1A78}"/>
               </a:ext>
             </a:extLst>
           </p:cNvPr>
@@ -6372,7 +6372,7 @@
           <p:cNvPr id="19" name="">
             <a:extLst xmlns:a="http://schemas.openxmlformats.org/drawingml/2006/main">
               <a:ext uri="{FF2B5EF4-FFF2-40B4-BE49-F238E27FC236}">
-                <a16:creationId xmlns:a16="http://schemas.microsoft.com/office/drawing/2014/main" id="{E477D6E3-4C79-4688-8D01-7514F7005C93}"/>
+                <a16:creationId xmlns:a16="http://schemas.microsoft.com/office/drawing/2014/main" id="{1D4D7255-8D56-4FEC-99E0-CFA8FED6832F}"/>
               </a:ext>
             </a:extLst>
           </p:cNvPr>
@@ -6430,7 +6430,7 @@
           <p:cNvPr id="20" name="">
             <a:extLst xmlns:a="http://schemas.openxmlformats.org/drawingml/2006/main">
               <a:ext uri="{FF2B5EF4-FFF2-40B4-BE49-F238E27FC236}">
-                <a16:creationId xmlns:a16="http://schemas.microsoft.com/office/drawing/2014/main" id="{75A48060-BF77-4F85-834A-78D7EBFDF4BC}"/>
+                <a16:creationId xmlns:a16="http://schemas.microsoft.com/office/drawing/2014/main" id="{7B8C6467-9AA1-4372-B25A-ADFAE050AE55}"/>
               </a:ext>
             </a:extLst>
           </p:cNvPr>
@@ -6463,7 +6463,7 @@
           <p:cNvPr id="21" name="">
             <a:extLst xmlns:a="http://schemas.openxmlformats.org/drawingml/2006/main">
               <a:ext uri="{FF2B5EF4-FFF2-40B4-BE49-F238E27FC236}">
-                <a16:creationId xmlns:a16="http://schemas.microsoft.com/office/drawing/2014/main" id="{509D77E5-E097-4426-9E1E-1233B8756C99}"/>
+                <a16:creationId xmlns:a16="http://schemas.microsoft.com/office/drawing/2014/main" id="{31F3C18C-485E-477F-8C44-ACA9B70CF623}"/>
               </a:ext>
             </a:extLst>
           </p:cNvPr>
@@ -6496,7 +6496,7 @@
           <p:cNvPr id="22" name="">
             <a:extLst xmlns:a="http://schemas.openxmlformats.org/drawingml/2006/main">
               <a:ext uri="{FF2B5EF4-FFF2-40B4-BE49-F238E27FC236}">
-                <a16:creationId xmlns:a16="http://schemas.microsoft.com/office/drawing/2014/main" id="{4B61E055-04B1-4139-9966-646A22342B2F}"/>
+                <a16:creationId xmlns:a16="http://schemas.microsoft.com/office/drawing/2014/main" id="{D1351564-CF85-4566-8B99-7DFAF177B85A}"/>
               </a:ext>
             </a:extLst>
           </p:cNvPr>
@@ -6514,7 +6514,7 @@
             <a:avLst/>
           </a:prstGeom>
           <a:solidFill xmlns:a="http://schemas.openxmlformats.org/drawingml/2006/main">
-            <a:srgbClr val="FFF4F4"/>
+            <a:srgbClr val="F7F7F7"/>
           </a:solidFill>
           <a:ln xmlns:a="http://schemas.openxmlformats.org/drawingml/2006/main" w="9525">
             <a:solidFill>
@@ -6529,7 +6529,7 @@
           <p:cNvPr id="23" name="">
             <a:extLst xmlns:a="http://schemas.openxmlformats.org/drawingml/2006/main">
               <a:ext uri="{FF2B5EF4-FFF2-40B4-BE49-F238E27FC236}">
-                <a16:creationId xmlns:a16="http://schemas.microsoft.com/office/drawing/2014/main" id="{1DD71D39-BA1D-4C16-83EA-A60B67FB5D5E}"/>
+                <a16:creationId xmlns:a16="http://schemas.microsoft.com/office/drawing/2014/main" id="{6EC577F8-D238-44A2-9BED-5577AFA4E156}"/>
               </a:ext>
             </a:extLst>
           </p:cNvPr>
@@ -6587,7 +6587,7 @@
           <p:cNvPr id="24" name="">
             <a:extLst xmlns:a="http://schemas.openxmlformats.org/drawingml/2006/main">
               <a:ext uri="{FF2B5EF4-FFF2-40B4-BE49-F238E27FC236}">
-                <a16:creationId xmlns:a16="http://schemas.microsoft.com/office/drawing/2014/main" id="{2055F0A3-EB0A-4455-9990-129A6FBF669B}"/>
+                <a16:creationId xmlns:a16="http://schemas.microsoft.com/office/drawing/2014/main" id="{7B7AA955-4AC1-4FC2-93CE-9A6D71F35909}"/>
               </a:ext>
             </a:extLst>
           </p:cNvPr>
@@ -6645,7 +6645,7 @@
           <p:cNvPr id="25" name="">
             <a:extLst xmlns:a="http://schemas.openxmlformats.org/drawingml/2006/main">
               <a:ext uri="{FF2B5EF4-FFF2-40B4-BE49-F238E27FC236}">
-                <a16:creationId xmlns:a16="http://schemas.microsoft.com/office/drawing/2014/main" id="{05EB2224-6971-4190-A1AA-254ABC915A35}"/>
+                <a16:creationId xmlns:a16="http://schemas.microsoft.com/office/drawing/2014/main" id="{14A1C65E-AFB1-4DC0-BF3D-832CDD904DF2}"/>
               </a:ext>
             </a:extLst>
           </p:cNvPr>
@@ -6703,7 +6703,7 @@
           <p:cNvPr id="26" name="">
             <a:extLst xmlns:a="http://schemas.openxmlformats.org/drawingml/2006/main">
               <a:ext uri="{FF2B5EF4-FFF2-40B4-BE49-F238E27FC236}">
-                <a16:creationId xmlns:a16="http://schemas.microsoft.com/office/drawing/2014/main" id="{A8D9DA6D-4578-44D3-A6DD-B2C909633A54}"/>
+                <a16:creationId xmlns:a16="http://schemas.microsoft.com/office/drawing/2014/main" id="{539A3631-84CC-4E60-87CC-CC0F3C926FA0}"/>
               </a:ext>
             </a:extLst>
           </p:cNvPr>
@@ -6736,7 +6736,7 @@
           <p:cNvPr id="27" name="">
             <a:extLst xmlns:a="http://schemas.openxmlformats.org/drawingml/2006/main">
               <a:ext uri="{FF2B5EF4-FFF2-40B4-BE49-F238E27FC236}">
-                <a16:creationId xmlns:a16="http://schemas.microsoft.com/office/drawing/2014/main" id="{FEE63273-90E9-404C-A80A-FC90459AF675}"/>
+                <a16:creationId xmlns:a16="http://schemas.microsoft.com/office/drawing/2014/main" id="{29A2D176-3687-4CB5-B07B-8359803E6006}"/>
               </a:ext>
             </a:extLst>
           </p:cNvPr>
@@ -6769,7 +6769,7 @@
           <p:cNvPr id="28" name="">
             <a:extLst xmlns:a="http://schemas.openxmlformats.org/drawingml/2006/main">
               <a:ext uri="{FF2B5EF4-FFF2-40B4-BE49-F238E27FC236}">
-                <a16:creationId xmlns:a16="http://schemas.microsoft.com/office/drawing/2014/main" id="{D1880A11-31B8-4DA5-8649-C5FEE488917F}"/>
+                <a16:creationId xmlns:a16="http://schemas.microsoft.com/office/drawing/2014/main" id="{37AE11EA-F490-4C9A-8BFD-5B059D585F60}"/>
               </a:ext>
             </a:extLst>
           </p:cNvPr>
@@ -6802,7 +6802,7 @@
           <p:cNvPr id="29" name="">
             <a:extLst xmlns:a="http://schemas.openxmlformats.org/drawingml/2006/main">
               <a:ext uri="{FF2B5EF4-FFF2-40B4-BE49-F238E27FC236}">
-                <a16:creationId xmlns:a16="http://schemas.microsoft.com/office/drawing/2014/main" id="{77F6D57B-FAFE-468D-AAD9-22058FDCE5F9}"/>
+                <a16:creationId xmlns:a16="http://schemas.microsoft.com/office/drawing/2014/main" id="{07FF73D5-917A-4E2C-9638-5D4EF6BBB367}"/>
               </a:ext>
             </a:extLst>
           </p:cNvPr>
@@ -6860,7 +6860,7 @@
           <p:cNvPr id="30" name="">
             <a:extLst xmlns:a="http://schemas.openxmlformats.org/drawingml/2006/main">
               <a:ext uri="{FF2B5EF4-FFF2-40B4-BE49-F238E27FC236}">
-                <a16:creationId xmlns:a16="http://schemas.microsoft.com/office/drawing/2014/main" id="{F65ACECC-D0A9-43A3-82FE-6709553F6B32}"/>
+                <a16:creationId xmlns:a16="http://schemas.microsoft.com/office/drawing/2014/main" id="{C0446117-4D62-4CA3-B91D-FE27968B579A}"/>
               </a:ext>
             </a:extLst>
           </p:cNvPr>
@@ -6918,7 +6918,7 @@
           <p:cNvPr id="31" name="">
             <a:extLst xmlns:a="http://schemas.openxmlformats.org/drawingml/2006/main">
               <a:ext uri="{FF2B5EF4-FFF2-40B4-BE49-F238E27FC236}">
-                <a16:creationId xmlns:a16="http://schemas.microsoft.com/office/drawing/2014/main" id="{04B38B19-C400-445F-8859-5405BCD848A5}"/>
+                <a16:creationId xmlns:a16="http://schemas.microsoft.com/office/drawing/2014/main" id="{E8ACF262-356F-46B8-AE07-75B85E892CB4}"/>
               </a:ext>
             </a:extLst>
           </p:cNvPr>
@@ -6976,7 +6976,7 @@
           <p:cNvPr id="32" name="">
             <a:extLst xmlns:a="http://schemas.openxmlformats.org/drawingml/2006/main">
               <a:ext uri="{FF2B5EF4-FFF2-40B4-BE49-F238E27FC236}">
-                <a16:creationId xmlns:a16="http://schemas.microsoft.com/office/drawing/2014/main" id="{0357C216-B65D-4CDC-A645-C49C7804193E}"/>
+                <a16:creationId xmlns:a16="http://schemas.microsoft.com/office/drawing/2014/main" id="{1CCC8C87-891F-4546-8730-19B2FE379E25}"/>
               </a:ext>
             </a:extLst>
           </p:cNvPr>
@@ -7009,7 +7009,7 @@
           <p:cNvPr id="33" name="">
             <a:extLst xmlns:a="http://schemas.openxmlformats.org/drawingml/2006/main">
               <a:ext uri="{FF2B5EF4-FFF2-40B4-BE49-F238E27FC236}">
-                <a16:creationId xmlns:a16="http://schemas.microsoft.com/office/drawing/2014/main" id="{5EC2D133-F88E-4A0E-9504-CC709B5406B4}"/>
+                <a16:creationId xmlns:a16="http://schemas.microsoft.com/office/drawing/2014/main" id="{43A288B8-2D38-4C8E-80B1-6246F9BEA11C}"/>
               </a:ext>
             </a:extLst>
           </p:cNvPr>
@@ -7042,7 +7042,7 @@
           <p:cNvPr id="34" name="">
             <a:extLst xmlns:a="http://schemas.openxmlformats.org/drawingml/2006/main">
               <a:ext uri="{FF2B5EF4-FFF2-40B4-BE49-F238E27FC236}">
-                <a16:creationId xmlns:a16="http://schemas.microsoft.com/office/drawing/2014/main" id="{33BF4A57-684A-4A58-B5F5-3CEF16FA27D8}"/>
+                <a16:creationId xmlns:a16="http://schemas.microsoft.com/office/drawing/2014/main" id="{B85C8E55-192C-42AC-93FD-9F3166D81D31}"/>
               </a:ext>
             </a:extLst>
           </p:cNvPr>
@@ -7075,7 +7075,7 @@
           <p:cNvPr id="35" name="">
             <a:extLst xmlns:a="http://schemas.openxmlformats.org/drawingml/2006/main">
               <a:ext uri="{FF2B5EF4-FFF2-40B4-BE49-F238E27FC236}">
-                <a16:creationId xmlns:a16="http://schemas.microsoft.com/office/drawing/2014/main" id="{F2E7513B-E416-4C33-8BA1-4CCDDF8873BE}"/>
+                <a16:creationId xmlns:a16="http://schemas.microsoft.com/office/drawing/2014/main" id="{8BC7BC9F-3086-4035-80B7-D6665679BDDD}"/>
               </a:ext>
             </a:extLst>
           </p:cNvPr>
@@ -7133,7 +7133,7 @@
           <p:cNvPr id="36" name="">
             <a:extLst xmlns:a="http://schemas.openxmlformats.org/drawingml/2006/main">
               <a:ext uri="{FF2B5EF4-FFF2-40B4-BE49-F238E27FC236}">
-                <a16:creationId xmlns:a16="http://schemas.microsoft.com/office/drawing/2014/main" id="{705A6E4D-4D0F-4D3C-A1F8-10F365929A16}"/>
+                <a16:creationId xmlns:a16="http://schemas.microsoft.com/office/drawing/2014/main" id="{09004E97-EEB7-48A2-AA2B-0399FBBD2572}"/>
               </a:ext>
             </a:extLst>
           </p:cNvPr>
@@ -7191,7 +7191,7 @@
           <p:cNvPr id="37" name="">
             <a:extLst xmlns:a="http://schemas.openxmlformats.org/drawingml/2006/main">
               <a:ext uri="{FF2B5EF4-FFF2-40B4-BE49-F238E27FC236}">
-                <a16:creationId xmlns:a16="http://schemas.microsoft.com/office/drawing/2014/main" id="{A19C5B7E-AD1C-44E9-86C1-FBAE6485D3BA}"/>
+                <a16:creationId xmlns:a16="http://schemas.microsoft.com/office/drawing/2014/main" id="{376EDE3E-79FF-4CBC-9453-D027CC5BB6A8}"/>
               </a:ext>
             </a:extLst>
           </p:cNvPr>
@@ -7249,7 +7249,7 @@
           <p:cNvPr id="38" name="">
             <a:extLst xmlns:a="http://schemas.openxmlformats.org/drawingml/2006/main">
               <a:ext uri="{FF2B5EF4-FFF2-40B4-BE49-F238E27FC236}">
-                <a16:creationId xmlns:a16="http://schemas.microsoft.com/office/drawing/2014/main" id="{F3B0B2DA-8BFE-4060-A308-0816AE896BC2}"/>
+                <a16:creationId xmlns:a16="http://schemas.microsoft.com/office/drawing/2014/main" id="{24817BB2-66D5-448D-82A6-564F1EDB3C6A}"/>
               </a:ext>
             </a:extLst>
           </p:cNvPr>
@@ -7307,7 +7307,7 @@
           <p:cNvPr id="39" name="">
             <a:extLst xmlns:a="http://schemas.openxmlformats.org/drawingml/2006/main">
               <a:ext uri="{FF2B5EF4-FFF2-40B4-BE49-F238E27FC236}">
-                <a16:creationId xmlns:a16="http://schemas.microsoft.com/office/drawing/2014/main" id="{9FE0FB0B-7A1C-4609-9273-A98CDBF45079}"/>
+                <a16:creationId xmlns:a16="http://schemas.microsoft.com/office/drawing/2014/main" id="{399C25C2-9659-4148-B7AB-7594FBF4332D}"/>
               </a:ext>
             </a:extLst>
           </p:cNvPr>
@@ -7325,7 +7325,7 @@
             <a:avLst/>
           </a:prstGeom>
           <a:solidFill xmlns:a="http://schemas.openxmlformats.org/drawingml/2006/main">
-            <a:srgbClr val="FFF4F4"/>
+            <a:srgbClr val="F7F7F7"/>
           </a:solidFill>
           <a:ln xmlns:a="http://schemas.openxmlformats.org/drawingml/2006/main" w="9525">
             <a:solidFill>
@@ -7340,7 +7340,7 @@
           <p:cNvPr id="40" name="">
             <a:extLst xmlns:a="http://schemas.openxmlformats.org/drawingml/2006/main">
               <a:ext uri="{FF2B5EF4-FFF2-40B4-BE49-F238E27FC236}">
-                <a16:creationId xmlns:a16="http://schemas.microsoft.com/office/drawing/2014/main" id="{633123E3-F218-49BD-B444-2D66B5E308B4}"/>
+                <a16:creationId xmlns:a16="http://schemas.microsoft.com/office/drawing/2014/main" id="{A4EF9B83-1D75-462A-B5B1-9C66E9DBEE6F}"/>
               </a:ext>
             </a:extLst>
           </p:cNvPr>
@@ -7398,7 +7398,7 @@
           <p:cNvPr id="41" name="">
             <a:extLst xmlns:a="http://schemas.openxmlformats.org/drawingml/2006/main">
               <a:ext uri="{FF2B5EF4-FFF2-40B4-BE49-F238E27FC236}">
-                <a16:creationId xmlns:a16="http://schemas.microsoft.com/office/drawing/2014/main" id="{F86CB7B2-2BCC-44DC-ADA5-4DB7E2603B32}"/>
+                <a16:creationId xmlns:a16="http://schemas.microsoft.com/office/drawing/2014/main" id="{E763BBC2-3B36-43F6-BC12-4D26B8489B95}"/>
               </a:ext>
             </a:extLst>
           </p:cNvPr>
@@ -7456,7 +7456,7 @@
           <p:cNvPr id="42" name="">
             <a:extLst xmlns:a="http://schemas.openxmlformats.org/drawingml/2006/main">
               <a:ext uri="{FF2B5EF4-FFF2-40B4-BE49-F238E27FC236}">
-                <a16:creationId xmlns:a16="http://schemas.microsoft.com/office/drawing/2014/main" id="{567B1D3F-7E7A-4328-B380-9F2EB8562176}"/>
+                <a16:creationId xmlns:a16="http://schemas.microsoft.com/office/drawing/2014/main" id="{AC58BCF1-D25E-4956-B8D2-1BFB3CA84C9D}"/>
               </a:ext>
             </a:extLst>
           </p:cNvPr>
@@ -7489,7 +7489,7 @@
           <p:cNvPr id="43" name="">
             <a:extLst xmlns:a="http://schemas.openxmlformats.org/drawingml/2006/main">
               <a:ext uri="{FF2B5EF4-FFF2-40B4-BE49-F238E27FC236}">
-                <a16:creationId xmlns:a16="http://schemas.microsoft.com/office/drawing/2014/main" id="{2922ECB3-4F8E-4A40-A9A6-9B12828B89EF}"/>
+                <a16:creationId xmlns:a16="http://schemas.microsoft.com/office/drawing/2014/main" id="{F0A27710-77AD-4DE8-A20D-27B0328CD2D2}"/>
               </a:ext>
             </a:extLst>
           </p:cNvPr>
@@ -7547,7 +7547,7 @@
           <p:cNvPr id="44" name="">
             <a:extLst xmlns:a="http://schemas.openxmlformats.org/drawingml/2006/main">
               <a:ext uri="{FF2B5EF4-FFF2-40B4-BE49-F238E27FC236}">
-                <a16:creationId xmlns:a16="http://schemas.microsoft.com/office/drawing/2014/main" id="{0DAD7ECC-538E-49D3-BA5F-ED1642800C24}"/>
+                <a16:creationId xmlns:a16="http://schemas.microsoft.com/office/drawing/2014/main" id="{20BF15F0-E773-43A7-B55C-737C37F569AA}"/>
               </a:ext>
             </a:extLst>
           </p:cNvPr>
@@ -7605,7 +7605,7 @@
           <p:cNvPr id="45" name="">
             <a:extLst xmlns:a="http://schemas.openxmlformats.org/drawingml/2006/main">
               <a:ext uri="{FF2B5EF4-FFF2-40B4-BE49-F238E27FC236}">
-                <a16:creationId xmlns:a16="http://schemas.microsoft.com/office/drawing/2014/main" id="{4BD8D089-555B-405B-93DE-C006D3C80FA1}"/>
+                <a16:creationId xmlns:a16="http://schemas.microsoft.com/office/drawing/2014/main" id="{1F22C7AC-72F7-4B75-9736-1813402828AD}"/>
               </a:ext>
             </a:extLst>
           </p:cNvPr>
@@ -7638,7 +7638,7 @@
           <p:cNvPr id="46" name="">
             <a:extLst xmlns:a="http://schemas.openxmlformats.org/drawingml/2006/main">
               <a:ext uri="{FF2B5EF4-FFF2-40B4-BE49-F238E27FC236}">
-                <a16:creationId xmlns:a16="http://schemas.microsoft.com/office/drawing/2014/main" id="{33DFEB4D-D14C-4EE4-88D5-A30C7AB3F018}"/>
+                <a16:creationId xmlns:a16="http://schemas.microsoft.com/office/drawing/2014/main" id="{0D95A0A1-B92F-449C-9A42-9580B860FA42}"/>
               </a:ext>
             </a:extLst>
           </p:cNvPr>
@@ -7696,7 +7696,7 @@
           <p:cNvPr id="47" name="">
             <a:extLst xmlns:a="http://schemas.openxmlformats.org/drawingml/2006/main">
               <a:ext uri="{FF2B5EF4-FFF2-40B4-BE49-F238E27FC236}">
-                <a16:creationId xmlns:a16="http://schemas.microsoft.com/office/drawing/2014/main" id="{B8E65EB0-6C1E-4BE9-AFD0-EF2E2599CEFE}"/>
+                <a16:creationId xmlns:a16="http://schemas.microsoft.com/office/drawing/2014/main" id="{C3CA16EA-7DB8-46CC-9F54-6B47452DA767}"/>
               </a:ext>
             </a:extLst>
           </p:cNvPr>
@@ -7754,7 +7754,7 @@
           <p:cNvPr id="48" name="">
             <a:extLst xmlns:a="http://schemas.openxmlformats.org/drawingml/2006/main">
               <a:ext uri="{FF2B5EF4-FFF2-40B4-BE49-F238E27FC236}">
-                <a16:creationId xmlns:a16="http://schemas.microsoft.com/office/drawing/2014/main" id="{CC6EC40E-67CF-4CB6-B388-63C99A90787B}"/>
+                <a16:creationId xmlns:a16="http://schemas.microsoft.com/office/drawing/2014/main" id="{3031BA63-664F-4CE0-A69F-D8FDDE5FE7D1}"/>
               </a:ext>
             </a:extLst>
           </p:cNvPr>
@@ -7787,7 +7787,7 @@
           <p:cNvPr id="49" name="">
             <a:extLst xmlns:a="http://schemas.openxmlformats.org/drawingml/2006/main">
               <a:ext uri="{FF2B5EF4-FFF2-40B4-BE49-F238E27FC236}">
-                <a16:creationId xmlns:a16="http://schemas.microsoft.com/office/drawing/2014/main" id="{0332C394-8BF9-495F-BDAB-542C70E9A84D}"/>
+                <a16:creationId xmlns:a16="http://schemas.microsoft.com/office/drawing/2014/main" id="{CFE88E73-C4BC-4D49-93DB-5401622B2680}"/>
               </a:ext>
             </a:extLst>
           </p:cNvPr>
@@ -7845,7 +7845,7 @@
           <p:cNvPr id="50" name="">
             <a:extLst xmlns:a="http://schemas.openxmlformats.org/drawingml/2006/main">
               <a:ext uri="{FF2B5EF4-FFF2-40B4-BE49-F238E27FC236}">
-                <a16:creationId xmlns:a16="http://schemas.microsoft.com/office/drawing/2014/main" id="{0EA63678-B74B-413D-903B-237DCA205CB1}"/>
+                <a16:creationId xmlns:a16="http://schemas.microsoft.com/office/drawing/2014/main" id="{4E7495A6-4D45-4DFE-912A-E0D265A0CA0A}"/>
               </a:ext>
             </a:extLst>
           </p:cNvPr>
@@ -7878,7 +7878,7 @@
           <p:cNvPr id="51" name="">
             <a:extLst xmlns:a="http://schemas.openxmlformats.org/drawingml/2006/main">
               <a:ext uri="{FF2B5EF4-FFF2-40B4-BE49-F238E27FC236}">
-                <a16:creationId xmlns:a16="http://schemas.microsoft.com/office/drawing/2014/main" id="{690742BE-2422-40F6-9F82-C1655F306C2D}"/>
+                <a16:creationId xmlns:a16="http://schemas.microsoft.com/office/drawing/2014/main" id="{3B26F884-47A7-4354-972F-7F3EBA10E666}"/>
               </a:ext>
             </a:extLst>
           </p:cNvPr>
@@ -7936,7 +7936,7 @@
           <p:cNvPr id="52" name="">
             <a:extLst xmlns:a="http://schemas.openxmlformats.org/drawingml/2006/main">
               <a:ext uri="{FF2B5EF4-FFF2-40B4-BE49-F238E27FC236}">
-                <a16:creationId xmlns:a16="http://schemas.microsoft.com/office/drawing/2014/main" id="{25E8E3BA-3D98-452A-A63C-6458A1D802CB}"/>
+                <a16:creationId xmlns:a16="http://schemas.microsoft.com/office/drawing/2014/main" id="{05B2F8E1-2F52-4DAB-92BB-31838AA221A9}"/>
               </a:ext>
             </a:extLst>
           </p:cNvPr>
@@ -7969,7 +7969,7 @@
           <p:cNvPr id="53" name="">
             <a:extLst xmlns:a="http://schemas.openxmlformats.org/drawingml/2006/main">
               <a:ext uri="{FF2B5EF4-FFF2-40B4-BE49-F238E27FC236}">
-                <a16:creationId xmlns:a16="http://schemas.microsoft.com/office/drawing/2014/main" id="{E6B0CFBF-7178-42FD-A02A-D4C6EA2B29B5}"/>
+                <a16:creationId xmlns:a16="http://schemas.microsoft.com/office/drawing/2014/main" id="{D406422A-97B7-474F-B737-609E57E8BC6B}"/>
               </a:ext>
             </a:extLst>
           </p:cNvPr>
@@ -8027,7 +8027,7 @@
           <p:cNvPr id="54" name="">
             <a:extLst xmlns:a="http://schemas.openxmlformats.org/drawingml/2006/main">
               <a:ext uri="{FF2B5EF4-FFF2-40B4-BE49-F238E27FC236}">
-                <a16:creationId xmlns:a16="http://schemas.microsoft.com/office/drawing/2014/main" id="{BC504E0A-E723-4F08-9A1B-0C82CFE93C7B}"/>
+                <a16:creationId xmlns:a16="http://schemas.microsoft.com/office/drawing/2014/main" id="{22C302B9-ECE1-4845-8FA8-CEB2E2CCCD6F}"/>
               </a:ext>
             </a:extLst>
           </p:cNvPr>
@@ -8060,7 +8060,7 @@
           <p:cNvPr id="55" name="">
             <a:extLst xmlns:a="http://schemas.openxmlformats.org/drawingml/2006/main">
               <a:ext uri="{FF2B5EF4-FFF2-40B4-BE49-F238E27FC236}">
-                <a16:creationId xmlns:a16="http://schemas.microsoft.com/office/drawing/2014/main" id="{223FFB7D-E9DB-476B-87CE-42777499E412}"/>
+                <a16:creationId xmlns:a16="http://schemas.microsoft.com/office/drawing/2014/main" id="{BFEE95D0-8B92-430E-A161-60B8923D7D62}"/>
               </a:ext>
             </a:extLst>
           </p:cNvPr>
@@ -8118,7 +8118,7 @@
           <p:cNvPr id="56" name="">
             <a:extLst xmlns:a="http://schemas.openxmlformats.org/drawingml/2006/main">
               <a:ext uri="{FF2B5EF4-FFF2-40B4-BE49-F238E27FC236}">
-                <a16:creationId xmlns:a16="http://schemas.microsoft.com/office/drawing/2014/main" id="{CBBCB79E-2096-46DC-AF64-9C6209D3ACEF}"/>
+                <a16:creationId xmlns:a16="http://schemas.microsoft.com/office/drawing/2014/main" id="{976DE799-BACF-4077-A80C-FD999F5A3839}"/>
               </a:ext>
             </a:extLst>
           </p:cNvPr>
@@ -8151,7 +8151,7 @@
           <p:cNvPr id="57" name="">
             <a:extLst xmlns:a="http://schemas.openxmlformats.org/drawingml/2006/main">
               <a:ext uri="{FF2B5EF4-FFF2-40B4-BE49-F238E27FC236}">
-                <a16:creationId xmlns:a16="http://schemas.microsoft.com/office/drawing/2014/main" id="{BC719714-3849-40AD-9C3B-DE034D3EA211}"/>
+                <a16:creationId xmlns:a16="http://schemas.microsoft.com/office/drawing/2014/main" id="{EA73CD79-C929-4B08-9CC6-DAD49BF2E1E5}"/>
               </a:ext>
             </a:extLst>
           </p:cNvPr>
@@ -8209,7 +8209,7 @@
           <p:cNvPr id="58" name="">
             <a:extLst xmlns:a="http://schemas.openxmlformats.org/drawingml/2006/main">
               <a:ext uri="{FF2B5EF4-FFF2-40B4-BE49-F238E27FC236}">
-                <a16:creationId xmlns:a16="http://schemas.microsoft.com/office/drawing/2014/main" id="{F4162905-B375-4DDF-80CC-EA096EC7EBDA}"/>
+                <a16:creationId xmlns:a16="http://schemas.microsoft.com/office/drawing/2014/main" id="{78314D5E-F12B-4D49-8840-8CA80D5200F4}"/>
               </a:ext>
             </a:extLst>
           </p:cNvPr>
@@ -8242,7 +8242,7 @@
           <p:cNvPr id="59" name="">
             <a:extLst xmlns:a="http://schemas.openxmlformats.org/drawingml/2006/main">
               <a:ext uri="{FF2B5EF4-FFF2-40B4-BE49-F238E27FC236}">
-                <a16:creationId xmlns:a16="http://schemas.microsoft.com/office/drawing/2014/main" id="{ACDBED65-FA9B-415B-A01D-BC3FD1CA0817}"/>
+                <a16:creationId xmlns:a16="http://schemas.microsoft.com/office/drawing/2014/main" id="{C4DA79A1-612F-4752-AFAE-AAAAD1AC9A2C}"/>
               </a:ext>
             </a:extLst>
           </p:cNvPr>
@@ -8300,7 +8300,7 @@
           <p:cNvPr id="60" name="">
             <a:extLst xmlns:a="http://schemas.openxmlformats.org/drawingml/2006/main">
               <a:ext uri="{FF2B5EF4-FFF2-40B4-BE49-F238E27FC236}">
-                <a16:creationId xmlns:a16="http://schemas.microsoft.com/office/drawing/2014/main" id="{D8271FAA-E6B6-46EF-A636-FF7A6BAB3541}"/>
+                <a16:creationId xmlns:a16="http://schemas.microsoft.com/office/drawing/2014/main" id="{00CC4320-3420-4261-A00C-22AF3103ADD1}"/>
               </a:ext>
             </a:extLst>
           </p:cNvPr>
@@ -8358,7 +8358,7 @@
           <p:cNvPr id="61" name="">
             <a:extLst xmlns:a="http://schemas.openxmlformats.org/drawingml/2006/main">
               <a:ext uri="{FF2B5EF4-FFF2-40B4-BE49-F238E27FC236}">
-                <a16:creationId xmlns:a16="http://schemas.microsoft.com/office/drawing/2014/main" id="{F848604A-E712-461B-A2B4-98841E2BF909}"/>
+                <a16:creationId xmlns:a16="http://schemas.microsoft.com/office/drawing/2014/main" id="{E910361C-B4A1-4103-B0AC-F14E686D088A}"/>
               </a:ext>
             </a:extLst>
           </p:cNvPr>
@@ -8391,7 +8391,7 @@
           <p:cNvPr id="62" name="">
             <a:extLst xmlns:a="http://schemas.openxmlformats.org/drawingml/2006/main">
               <a:ext uri="{FF2B5EF4-FFF2-40B4-BE49-F238E27FC236}">
-                <a16:creationId xmlns:a16="http://schemas.microsoft.com/office/drawing/2014/main" id="{12856E48-B1B8-47F5-ABD6-8364D9E5CF15}"/>
+                <a16:creationId xmlns:a16="http://schemas.microsoft.com/office/drawing/2014/main" id="{5A93421B-3038-4E69-AFB5-3DF2D0B38572}"/>
               </a:ext>
             </a:extLst>
           </p:cNvPr>
@@ -8449,7 +8449,7 @@
                 <a:latin typeface="Microsoft YaHei"/>
                 <a:ea typeface="Microsoft YaHei"/>
                 <a:cs typeface="Microsoft YaHei"/>
-                <a:hlinkClick xmlns:r="http://schemas.openxmlformats.org/officeDocument/2006/relationships" r:id="Ra8fed153cde94ef8"/>
+                <a:hlinkClick xmlns:r="http://schemas.openxmlformats.org/officeDocument/2006/relationships" r:id="R05a7fb16611d4c26"/>
               </a:rPr>
               <a:t>Codex Browser</a:t>
             </a:r>
@@ -8461,7 +8461,7 @@
                 <a:latin typeface="Microsoft YaHei"/>
                 <a:ea typeface="Microsoft YaHei"/>
                 <a:cs typeface="Microsoft YaHei"/>
-                <a:hlinkClick xmlns:r="http://schemas.openxmlformats.org/officeDocument/2006/relationships" r:id="Rb3db07298d5b4995"/>
+                <a:hlinkClick xmlns:r="http://schemas.openxmlformats.org/officeDocument/2006/relationships" r:id="Rb569ad91819944cd"/>
               </a:rPr>
               <a:t> · Trae Browser &amp; Preview</a:t>
             </a:r>
@@ -8473,7 +8473,7 @@
                 <a:latin typeface="Microsoft YaHei"/>
                 <a:ea typeface="Microsoft YaHei"/>
                 <a:cs typeface="Microsoft YaHei"/>
-                <a:hlinkClick xmlns:r="http://schemas.openxmlformats.org/officeDocument/2006/relationships" r:id="Rce1a77f2f1904481"/>
+                <a:hlinkClick xmlns:r="http://schemas.openxmlformats.org/officeDocument/2006/relationships" r:id="Rdd6981cf2a034a11"/>
               </a:rPr>
               <a:t> · Playwright Best Practices</a:t>
             </a:r>
@@ -8485,7 +8485,7 @@
           <p:cNvPr id="63" name="">
             <a:extLst xmlns:a="http://schemas.openxmlformats.org/drawingml/2006/main">
               <a:ext uri="{FF2B5EF4-FFF2-40B4-BE49-F238E27FC236}">
-                <a16:creationId xmlns:a16="http://schemas.microsoft.com/office/drawing/2014/main" id="{21CC33A0-2905-4CA5-AA13-0108ADEFA48C}"/>
+                <a16:creationId xmlns:a16="http://schemas.microsoft.com/office/drawing/2014/main" id="{ACC0DCEE-49D6-4D92-BEB6-2EAD1100B4A9}"/>
               </a:ext>
             </a:extLst>
           </p:cNvPr>
@@ -8541,7 +8541,7 @@
     </p:spTree>
     <p:extLst>
       <p:ext uri="{BB962C8B-B14F-4D97-AF65-F5344CB8AC3E}">
-        <p14:creationId xmlns:p14="http://schemas.microsoft.com/office/powerpoint/2010/main" val="281296523"/>
+        <p14:creationId xmlns:p14="http://schemas.microsoft.com/office/powerpoint/2010/main" val="1964434046"/>
       </p:ext>
     </p:extLst>
   </p:cSld>
@@ -8572,7 +8572,7 @@
           <p:cNvPr id="72" name="">
             <a:extLst xmlns:a="http://schemas.openxmlformats.org/drawingml/2006/main">
               <a:ext uri="{FF2B5EF4-FFF2-40B4-BE49-F238E27FC236}">
-                <a16:creationId xmlns:a16="http://schemas.microsoft.com/office/drawing/2014/main" id="{20926F5C-1477-4AC4-BDA8-9EE3F53710E7}"/>
+                <a16:creationId xmlns:a16="http://schemas.microsoft.com/office/drawing/2014/main" id="{49032747-4E4C-404E-95BC-DC487DDD2FA9}"/>
               </a:ext>
             </a:extLst>
           </p:cNvPr>
@@ -8605,7 +8605,7 @@
           <p:cNvPr id="2" name="">
             <a:extLst xmlns:a="http://schemas.openxmlformats.org/drawingml/2006/main">
               <a:ext uri="{FF2B5EF4-FFF2-40B4-BE49-F238E27FC236}">
-                <a16:creationId xmlns:a16="http://schemas.microsoft.com/office/drawing/2014/main" id="{9C4C878A-554B-4AC6-BB0F-A8C0D904BCB0}"/>
+                <a16:creationId xmlns:a16="http://schemas.microsoft.com/office/drawing/2014/main" id="{A2562B3B-B2A9-4C1F-9DA2-982CF5116E73}"/>
               </a:ext>
             </a:extLst>
           </p:cNvPr>
@@ -8663,7 +8663,7 @@
           <p:cNvPr id="3" name="">
             <a:extLst xmlns:a="http://schemas.openxmlformats.org/drawingml/2006/main">
               <a:ext uri="{FF2B5EF4-FFF2-40B4-BE49-F238E27FC236}">
-                <a16:creationId xmlns:a16="http://schemas.microsoft.com/office/drawing/2014/main" id="{6CCE3313-6DC6-4731-A7F8-D694E084F7C4}"/>
+                <a16:creationId xmlns:a16="http://schemas.microsoft.com/office/drawing/2014/main" id="{89B55FE0-9B76-450B-9211-33FC8BEB6851}"/>
               </a:ext>
             </a:extLst>
           </p:cNvPr>
@@ -8721,7 +8721,7 @@
           <p:cNvPr id="4" name="">
             <a:extLst xmlns:a="http://schemas.openxmlformats.org/drawingml/2006/main">
               <a:ext uri="{FF2B5EF4-FFF2-40B4-BE49-F238E27FC236}">
-                <a16:creationId xmlns:a16="http://schemas.microsoft.com/office/drawing/2014/main" id="{6CD4823C-3B75-43C8-A602-71316F360EE2}"/>
+                <a16:creationId xmlns:a16="http://schemas.microsoft.com/office/drawing/2014/main" id="{9ADCE538-F7C2-446C-9578-8469575670F5}"/>
               </a:ext>
             </a:extLst>
           </p:cNvPr>
@@ -8754,7 +8754,7 @@
           <p:cNvPr id="5" name="">
             <a:extLst xmlns:a="http://schemas.openxmlformats.org/drawingml/2006/main">
               <a:ext uri="{FF2B5EF4-FFF2-40B4-BE49-F238E27FC236}">
-                <a16:creationId xmlns:a16="http://schemas.microsoft.com/office/drawing/2014/main" id="{2A4F91D2-C3D9-40FB-A3EB-5501F043CF0D}"/>
+                <a16:creationId xmlns:a16="http://schemas.microsoft.com/office/drawing/2014/main" id="{5C9A0ECB-4445-43FF-823A-D1870BFBF99B}"/>
               </a:ext>
             </a:extLst>
           </p:cNvPr>
@@ -8812,7 +8812,7 @@
           <p:cNvPr id="6" name="">
             <a:extLst xmlns:a="http://schemas.openxmlformats.org/drawingml/2006/main">
               <a:ext uri="{FF2B5EF4-FFF2-40B4-BE49-F238E27FC236}">
-                <a16:creationId xmlns:a16="http://schemas.microsoft.com/office/drawing/2014/main" id="{64603AEC-D28E-4342-992D-42439FADB999}"/>
+                <a16:creationId xmlns:a16="http://schemas.microsoft.com/office/drawing/2014/main" id="{0D026337-3A03-4004-8CB4-902E37B9BCA6}"/>
               </a:ext>
             </a:extLst>
           </p:cNvPr>
@@ -8870,7 +8870,7 @@
           <p:cNvPr id="7" name="">
             <a:extLst xmlns:a="http://schemas.openxmlformats.org/drawingml/2006/main">
               <a:ext uri="{FF2B5EF4-FFF2-40B4-BE49-F238E27FC236}">
-                <a16:creationId xmlns:a16="http://schemas.microsoft.com/office/drawing/2014/main" id="{F92D6857-316E-4ED5-BDBF-26391A079ED2}"/>
+                <a16:creationId xmlns:a16="http://schemas.microsoft.com/office/drawing/2014/main" id="{0F04179B-104F-460D-8DC0-6EF0C84417E5}"/>
               </a:ext>
             </a:extLst>
           </p:cNvPr>
@@ -8928,7 +8928,7 @@
           <p:cNvPr id="8" name="">
             <a:extLst xmlns:a="http://schemas.openxmlformats.org/drawingml/2006/main">
               <a:ext uri="{FF2B5EF4-FFF2-40B4-BE49-F238E27FC236}">
-                <a16:creationId xmlns:a16="http://schemas.microsoft.com/office/drawing/2014/main" id="{6DA3F3F9-1C6E-4537-A19B-DC92FBEBEAD9}"/>
+                <a16:creationId xmlns:a16="http://schemas.microsoft.com/office/drawing/2014/main" id="{C1650A89-C559-4BF7-BA59-00ADCC2FA764}"/>
               </a:ext>
             </a:extLst>
           </p:cNvPr>
@@ -8961,7 +8961,7 @@
           <p:cNvPr id="9" name="">
             <a:extLst xmlns:a="http://schemas.openxmlformats.org/drawingml/2006/main">
               <a:ext uri="{FF2B5EF4-FFF2-40B4-BE49-F238E27FC236}">
-                <a16:creationId xmlns:a16="http://schemas.microsoft.com/office/drawing/2014/main" id="{E47203C9-D9C2-4085-96A5-D5354F695344}"/>
+                <a16:creationId xmlns:a16="http://schemas.microsoft.com/office/drawing/2014/main" id="{46CEAACF-DA2D-4889-AA96-8500D0A8BDAA}"/>
               </a:ext>
             </a:extLst>
           </p:cNvPr>
@@ -8994,7 +8994,7 @@
           <p:cNvPr id="10" name="">
             <a:extLst xmlns:a="http://schemas.openxmlformats.org/drawingml/2006/main">
               <a:ext uri="{FF2B5EF4-FFF2-40B4-BE49-F238E27FC236}">
-                <a16:creationId xmlns:a16="http://schemas.microsoft.com/office/drawing/2014/main" id="{C2D950B2-ECEB-4D48-AD80-8035CDF55B22}"/>
+                <a16:creationId xmlns:a16="http://schemas.microsoft.com/office/drawing/2014/main" id="{630E490E-B0EC-416C-94E4-14D3BDE0EAD5}"/>
               </a:ext>
             </a:extLst>
           </p:cNvPr>
@@ -9027,7 +9027,7 @@
           <p:cNvPr id="11" name="">
             <a:extLst xmlns:a="http://schemas.openxmlformats.org/drawingml/2006/main">
               <a:ext uri="{FF2B5EF4-FFF2-40B4-BE49-F238E27FC236}">
-                <a16:creationId xmlns:a16="http://schemas.microsoft.com/office/drawing/2014/main" id="{25EC38DF-7B4A-49D3-BF6F-FDFFA6DD85F0}"/>
+                <a16:creationId xmlns:a16="http://schemas.microsoft.com/office/drawing/2014/main" id="{4A3C0A0F-C9AD-46AB-9AA0-2E168F53EE09}"/>
               </a:ext>
             </a:extLst>
           </p:cNvPr>
@@ -9085,7 +9085,7 @@
           <p:cNvPr id="12" name="">
             <a:extLst xmlns:a="http://schemas.openxmlformats.org/drawingml/2006/main">
               <a:ext uri="{FF2B5EF4-FFF2-40B4-BE49-F238E27FC236}">
-                <a16:creationId xmlns:a16="http://schemas.microsoft.com/office/drawing/2014/main" id="{920AE4A1-E7DC-47E0-8824-6D4D0BE3346D}"/>
+                <a16:creationId xmlns:a16="http://schemas.microsoft.com/office/drawing/2014/main" id="{02DEE7D8-CFD3-445A-846D-D73149146290}"/>
               </a:ext>
             </a:extLst>
           </p:cNvPr>
@@ -9143,7 +9143,7 @@
           <p:cNvPr id="13" name="">
             <a:extLst xmlns:a="http://schemas.openxmlformats.org/drawingml/2006/main">
               <a:ext uri="{FF2B5EF4-FFF2-40B4-BE49-F238E27FC236}">
-                <a16:creationId xmlns:a16="http://schemas.microsoft.com/office/drawing/2014/main" id="{AFCD48B7-7A06-40B9-BB99-30C2E86AE036}"/>
+                <a16:creationId xmlns:a16="http://schemas.microsoft.com/office/drawing/2014/main" id="{ADC2BFE2-098D-437E-B17A-C8AF8E462EDB}"/>
               </a:ext>
             </a:extLst>
           </p:cNvPr>
@@ -9201,7 +9201,7 @@
           <p:cNvPr id="14" name="">
             <a:extLst xmlns:a="http://schemas.openxmlformats.org/drawingml/2006/main">
               <a:ext uri="{FF2B5EF4-FFF2-40B4-BE49-F238E27FC236}">
-                <a16:creationId xmlns:a16="http://schemas.microsoft.com/office/drawing/2014/main" id="{089C7E0C-DE6F-4922-9E0E-FD93D99F7216}"/>
+                <a16:creationId xmlns:a16="http://schemas.microsoft.com/office/drawing/2014/main" id="{DAD64681-4C64-42C6-B8A7-A902DFA3CDB2}"/>
               </a:ext>
             </a:extLst>
           </p:cNvPr>
@@ -9234,7 +9234,7 @@
           <p:cNvPr id="15" name="">
             <a:extLst xmlns:a="http://schemas.openxmlformats.org/drawingml/2006/main">
               <a:ext uri="{FF2B5EF4-FFF2-40B4-BE49-F238E27FC236}">
-                <a16:creationId xmlns:a16="http://schemas.microsoft.com/office/drawing/2014/main" id="{6D72B0D8-0A29-44D9-8AC9-AFF57C465FEB}"/>
+                <a16:creationId xmlns:a16="http://schemas.microsoft.com/office/drawing/2014/main" id="{F88558F6-6329-4AC6-A6B0-994C468EAA84}"/>
               </a:ext>
             </a:extLst>
           </p:cNvPr>
@@ -9267,7 +9267,7 @@
           <p:cNvPr id="16" name="">
             <a:extLst xmlns:a="http://schemas.openxmlformats.org/drawingml/2006/main">
               <a:ext uri="{FF2B5EF4-FFF2-40B4-BE49-F238E27FC236}">
-                <a16:creationId xmlns:a16="http://schemas.microsoft.com/office/drawing/2014/main" id="{FF27B636-9AE2-4439-9ACB-90A45490A6D4}"/>
+                <a16:creationId xmlns:a16="http://schemas.microsoft.com/office/drawing/2014/main" id="{479C0AE4-97FC-4A66-B2C5-049518277337}"/>
               </a:ext>
             </a:extLst>
           </p:cNvPr>
@@ -9300,7 +9300,7 @@
           <p:cNvPr id="17" name="">
             <a:extLst xmlns:a="http://schemas.openxmlformats.org/drawingml/2006/main">
               <a:ext uri="{FF2B5EF4-FFF2-40B4-BE49-F238E27FC236}">
-                <a16:creationId xmlns:a16="http://schemas.microsoft.com/office/drawing/2014/main" id="{B524D544-A61A-41F9-BA36-AC02D868B9E4}"/>
+                <a16:creationId xmlns:a16="http://schemas.microsoft.com/office/drawing/2014/main" id="{49E9AF69-AC8C-4296-AF78-8A3AF6D55A22}"/>
               </a:ext>
             </a:extLst>
           </p:cNvPr>
@@ -9358,7 +9358,7 @@
           <p:cNvPr id="18" name="">
             <a:extLst xmlns:a="http://schemas.openxmlformats.org/drawingml/2006/main">
               <a:ext uri="{FF2B5EF4-FFF2-40B4-BE49-F238E27FC236}">
-                <a16:creationId xmlns:a16="http://schemas.microsoft.com/office/drawing/2014/main" id="{979447A7-BCD7-4E98-9132-F46F33A4FAC9}"/>
+                <a16:creationId xmlns:a16="http://schemas.microsoft.com/office/drawing/2014/main" id="{6141D00C-9678-4B68-9113-E6E4220433C7}"/>
               </a:ext>
             </a:extLst>
           </p:cNvPr>
@@ -9416,7 +9416,7 @@
           <p:cNvPr id="19" name="">
             <a:extLst xmlns:a="http://schemas.openxmlformats.org/drawingml/2006/main">
               <a:ext uri="{FF2B5EF4-FFF2-40B4-BE49-F238E27FC236}">
-                <a16:creationId xmlns:a16="http://schemas.microsoft.com/office/drawing/2014/main" id="{62DDF7A2-CE62-43AA-87CB-E538496B4003}"/>
+                <a16:creationId xmlns:a16="http://schemas.microsoft.com/office/drawing/2014/main" id="{6767D48D-4077-4043-B195-5DACE887116F}"/>
               </a:ext>
             </a:extLst>
           </p:cNvPr>
@@ -9474,7 +9474,7 @@
           <p:cNvPr id="20" name="">
             <a:extLst xmlns:a="http://schemas.openxmlformats.org/drawingml/2006/main">
               <a:ext uri="{FF2B5EF4-FFF2-40B4-BE49-F238E27FC236}">
-                <a16:creationId xmlns:a16="http://schemas.microsoft.com/office/drawing/2014/main" id="{F74675FA-5A1F-4B26-B8B4-007DB6A79FDD}"/>
+                <a16:creationId xmlns:a16="http://schemas.microsoft.com/office/drawing/2014/main" id="{FBA33A96-C4D0-478B-8B5D-8EBE0F851FAB}"/>
               </a:ext>
             </a:extLst>
           </p:cNvPr>
@@ -9507,7 +9507,7 @@
           <p:cNvPr id="21" name="">
             <a:extLst xmlns:a="http://schemas.openxmlformats.org/drawingml/2006/main">
               <a:ext uri="{FF2B5EF4-FFF2-40B4-BE49-F238E27FC236}">
-                <a16:creationId xmlns:a16="http://schemas.microsoft.com/office/drawing/2014/main" id="{8F3AB5DB-3F18-40EB-82C6-FA18C7B8D01B}"/>
+                <a16:creationId xmlns:a16="http://schemas.microsoft.com/office/drawing/2014/main" id="{4125995B-2611-45E2-AB18-647A5840460C}"/>
               </a:ext>
             </a:extLst>
           </p:cNvPr>
@@ -9540,7 +9540,7 @@
           <p:cNvPr id="22" name="">
             <a:extLst xmlns:a="http://schemas.openxmlformats.org/drawingml/2006/main">
               <a:ext uri="{FF2B5EF4-FFF2-40B4-BE49-F238E27FC236}">
-                <a16:creationId xmlns:a16="http://schemas.microsoft.com/office/drawing/2014/main" id="{6DC95DCA-024C-4DC1-A566-D3EE29ABD78D}"/>
+                <a16:creationId xmlns:a16="http://schemas.microsoft.com/office/drawing/2014/main" id="{0BC495FB-B343-49C0-BA20-DEBA2623455A}"/>
               </a:ext>
             </a:extLst>
           </p:cNvPr>
@@ -9573,7 +9573,7 @@
           <p:cNvPr id="23" name="">
             <a:extLst xmlns:a="http://schemas.openxmlformats.org/drawingml/2006/main">
               <a:ext uri="{FF2B5EF4-FFF2-40B4-BE49-F238E27FC236}">
-                <a16:creationId xmlns:a16="http://schemas.microsoft.com/office/drawing/2014/main" id="{AAE9C0AC-3AC4-47BF-AC17-484682F59F8F}"/>
+                <a16:creationId xmlns:a16="http://schemas.microsoft.com/office/drawing/2014/main" id="{C97E51C2-DCF8-4A16-B4B0-FC56DE65AA37}"/>
               </a:ext>
             </a:extLst>
           </p:cNvPr>
@@ -9631,7 +9631,7 @@
           <p:cNvPr id="24" name="">
             <a:extLst xmlns:a="http://schemas.openxmlformats.org/drawingml/2006/main">
               <a:ext uri="{FF2B5EF4-FFF2-40B4-BE49-F238E27FC236}">
-                <a16:creationId xmlns:a16="http://schemas.microsoft.com/office/drawing/2014/main" id="{1E103AB4-92B3-46A5-8380-E9B3F3A4C303}"/>
+                <a16:creationId xmlns:a16="http://schemas.microsoft.com/office/drawing/2014/main" id="{CBF7C18E-3E87-4CC3-929E-C1B03E01B0C9}"/>
               </a:ext>
             </a:extLst>
           </p:cNvPr>
@@ -9689,7 +9689,7 @@
           <p:cNvPr id="25" name="">
             <a:extLst xmlns:a="http://schemas.openxmlformats.org/drawingml/2006/main">
               <a:ext uri="{FF2B5EF4-FFF2-40B4-BE49-F238E27FC236}">
-                <a16:creationId xmlns:a16="http://schemas.microsoft.com/office/drawing/2014/main" id="{0FD8676C-C1E7-45CD-9560-3693E63D3598}"/>
+                <a16:creationId xmlns:a16="http://schemas.microsoft.com/office/drawing/2014/main" id="{B3271A26-BF9C-4C9E-A4AF-21ECC83E9295}"/>
               </a:ext>
             </a:extLst>
           </p:cNvPr>
@@ -9747,7 +9747,7 @@
           <p:cNvPr id="26" name="">
             <a:extLst xmlns:a="http://schemas.openxmlformats.org/drawingml/2006/main">
               <a:ext uri="{FF2B5EF4-FFF2-40B4-BE49-F238E27FC236}">
-                <a16:creationId xmlns:a16="http://schemas.microsoft.com/office/drawing/2014/main" id="{6E538226-FC45-4D0C-AEBC-6D0026FC3BBA}"/>
+                <a16:creationId xmlns:a16="http://schemas.microsoft.com/office/drawing/2014/main" id="{B9D51A8C-5FA7-4D11-A607-85F9BEEFCEF3}"/>
               </a:ext>
             </a:extLst>
           </p:cNvPr>
@@ -9780,7 +9780,7 @@
           <p:cNvPr id="27" name="">
             <a:extLst xmlns:a="http://schemas.openxmlformats.org/drawingml/2006/main">
               <a:ext uri="{FF2B5EF4-FFF2-40B4-BE49-F238E27FC236}">
-                <a16:creationId xmlns:a16="http://schemas.microsoft.com/office/drawing/2014/main" id="{54E52690-3558-442C-BDA8-5CFBCFAAF764}"/>
+                <a16:creationId xmlns:a16="http://schemas.microsoft.com/office/drawing/2014/main" id="{F7E67C4A-A534-45D7-8B38-F8B58305066C}"/>
               </a:ext>
             </a:extLst>
           </p:cNvPr>
@@ -9813,7 +9813,7 @@
           <p:cNvPr id="28" name="">
             <a:extLst xmlns:a="http://schemas.openxmlformats.org/drawingml/2006/main">
               <a:ext uri="{FF2B5EF4-FFF2-40B4-BE49-F238E27FC236}">
-                <a16:creationId xmlns:a16="http://schemas.microsoft.com/office/drawing/2014/main" id="{5F9A619A-39E8-4E3D-BF74-F0CD3A49D57B}"/>
+                <a16:creationId xmlns:a16="http://schemas.microsoft.com/office/drawing/2014/main" id="{9AB80692-4D91-4246-BBD5-BE70F3864590}"/>
               </a:ext>
             </a:extLst>
           </p:cNvPr>
@@ -9831,7 +9831,7 @@
             <a:avLst/>
           </a:prstGeom>
           <a:solidFill xmlns:a="http://schemas.openxmlformats.org/drawingml/2006/main">
-            <a:srgbClr val="FFF4F4"/>
+            <a:srgbClr val="F7F7F7"/>
           </a:solidFill>
           <a:ln xmlns:a="http://schemas.openxmlformats.org/drawingml/2006/main" w="9525">
             <a:solidFill>
@@ -9846,7 +9846,7 @@
           <p:cNvPr id="29" name="">
             <a:extLst xmlns:a="http://schemas.openxmlformats.org/drawingml/2006/main">
               <a:ext uri="{FF2B5EF4-FFF2-40B4-BE49-F238E27FC236}">
-                <a16:creationId xmlns:a16="http://schemas.microsoft.com/office/drawing/2014/main" id="{3680053C-04A7-4FA3-AB95-192DD9C8869C}"/>
+                <a16:creationId xmlns:a16="http://schemas.microsoft.com/office/drawing/2014/main" id="{D5ECA8EF-5DE0-44B9-93CC-C433332F2981}"/>
               </a:ext>
             </a:extLst>
           </p:cNvPr>
@@ -9904,7 +9904,7 @@
           <p:cNvPr id="30" name="">
             <a:extLst xmlns:a="http://schemas.openxmlformats.org/drawingml/2006/main">
               <a:ext uri="{FF2B5EF4-FFF2-40B4-BE49-F238E27FC236}">
-                <a16:creationId xmlns:a16="http://schemas.microsoft.com/office/drawing/2014/main" id="{EDB0F447-CF46-4053-A643-00F8E8E1A984}"/>
+                <a16:creationId xmlns:a16="http://schemas.microsoft.com/office/drawing/2014/main" id="{2AC79344-2FF8-4E56-998D-415B9BAE4943}"/>
               </a:ext>
             </a:extLst>
           </p:cNvPr>
@@ -9962,7 +9962,7 @@
           <p:cNvPr id="31" name="">
             <a:extLst xmlns:a="http://schemas.openxmlformats.org/drawingml/2006/main">
               <a:ext uri="{FF2B5EF4-FFF2-40B4-BE49-F238E27FC236}">
-                <a16:creationId xmlns:a16="http://schemas.microsoft.com/office/drawing/2014/main" id="{F63F0106-4092-48E5-82B2-C687A5FBEFD9}"/>
+                <a16:creationId xmlns:a16="http://schemas.microsoft.com/office/drawing/2014/main" id="{BB46A89A-32E4-4366-8D40-A3DCDBF2F506}"/>
               </a:ext>
             </a:extLst>
           </p:cNvPr>
@@ -10020,7 +10020,7 @@
           <p:cNvPr id="32" name="">
             <a:extLst xmlns:a="http://schemas.openxmlformats.org/drawingml/2006/main">
               <a:ext uri="{FF2B5EF4-FFF2-40B4-BE49-F238E27FC236}">
-                <a16:creationId xmlns:a16="http://schemas.microsoft.com/office/drawing/2014/main" id="{C559CE0C-7E66-4F71-AC5E-8BBBE5AC3FE1}"/>
+                <a16:creationId xmlns:a16="http://schemas.microsoft.com/office/drawing/2014/main" id="{F1C8F857-2DA9-4F1A-87E6-54F51AE9DEC0}"/>
               </a:ext>
             </a:extLst>
           </p:cNvPr>
@@ -10053,7 +10053,7 @@
           <p:cNvPr id="33" name="">
             <a:extLst xmlns:a="http://schemas.openxmlformats.org/drawingml/2006/main">
               <a:ext uri="{FF2B5EF4-FFF2-40B4-BE49-F238E27FC236}">
-                <a16:creationId xmlns:a16="http://schemas.microsoft.com/office/drawing/2014/main" id="{74771EC1-F720-4264-976F-50E10AFD720E}"/>
+                <a16:creationId xmlns:a16="http://schemas.microsoft.com/office/drawing/2014/main" id="{6BECF3F3-B9FA-4629-9B74-823365BF96D1}"/>
               </a:ext>
             </a:extLst>
           </p:cNvPr>
@@ -10086,7 +10086,7 @@
           <p:cNvPr id="34" name="">
             <a:extLst xmlns:a="http://schemas.openxmlformats.org/drawingml/2006/main">
               <a:ext uri="{FF2B5EF4-FFF2-40B4-BE49-F238E27FC236}">
-                <a16:creationId xmlns:a16="http://schemas.microsoft.com/office/drawing/2014/main" id="{186E8824-2672-4BE9-8874-34B047377563}"/>
+                <a16:creationId xmlns:a16="http://schemas.microsoft.com/office/drawing/2014/main" id="{E5359B41-E48D-4FC0-8CC4-15723DA9EF41}"/>
               </a:ext>
             </a:extLst>
           </p:cNvPr>
@@ -10119,7 +10119,7 @@
           <p:cNvPr id="35" name="">
             <a:extLst xmlns:a="http://schemas.openxmlformats.org/drawingml/2006/main">
               <a:ext uri="{FF2B5EF4-FFF2-40B4-BE49-F238E27FC236}">
-                <a16:creationId xmlns:a16="http://schemas.microsoft.com/office/drawing/2014/main" id="{8E9A05AD-844B-4DEB-A86E-A9DE1C0E291D}"/>
+                <a16:creationId xmlns:a16="http://schemas.microsoft.com/office/drawing/2014/main" id="{D850E9FF-74CE-4696-A8A6-68F00A7A6A78}"/>
               </a:ext>
             </a:extLst>
           </p:cNvPr>
@@ -10177,7 +10177,7 @@
           <p:cNvPr id="36" name="">
             <a:extLst xmlns:a="http://schemas.openxmlformats.org/drawingml/2006/main">
               <a:ext uri="{FF2B5EF4-FFF2-40B4-BE49-F238E27FC236}">
-                <a16:creationId xmlns:a16="http://schemas.microsoft.com/office/drawing/2014/main" id="{0A908CE1-0FC5-4F67-A7BF-92CD0BA7A5A2}"/>
+                <a16:creationId xmlns:a16="http://schemas.microsoft.com/office/drawing/2014/main" id="{C572CBC3-30BB-45EA-98D5-466EB7D79F85}"/>
               </a:ext>
             </a:extLst>
           </p:cNvPr>
@@ -10235,7 +10235,7 @@
           <p:cNvPr id="37" name="">
             <a:extLst xmlns:a="http://schemas.openxmlformats.org/drawingml/2006/main">
               <a:ext uri="{FF2B5EF4-FFF2-40B4-BE49-F238E27FC236}">
-                <a16:creationId xmlns:a16="http://schemas.microsoft.com/office/drawing/2014/main" id="{A395AD85-9BA3-4CDE-BDD7-3EA6F95EE7DF}"/>
+                <a16:creationId xmlns:a16="http://schemas.microsoft.com/office/drawing/2014/main" id="{3A983BA0-3D8C-4CC5-87D1-1FDC8C372D3B}"/>
               </a:ext>
             </a:extLst>
           </p:cNvPr>
@@ -10293,7 +10293,7 @@
           <p:cNvPr id="38" name="">
             <a:extLst xmlns:a="http://schemas.openxmlformats.org/drawingml/2006/main">
               <a:ext uri="{FF2B5EF4-FFF2-40B4-BE49-F238E27FC236}">
-                <a16:creationId xmlns:a16="http://schemas.microsoft.com/office/drawing/2014/main" id="{6AEFFCE9-BB12-4D6A-AA97-3413C2B883D6}"/>
+                <a16:creationId xmlns:a16="http://schemas.microsoft.com/office/drawing/2014/main" id="{61CC5D08-6DA0-4216-991C-401B88EF390F}"/>
               </a:ext>
             </a:extLst>
           </p:cNvPr>
@@ -10326,7 +10326,7 @@
           <p:cNvPr id="39" name="">
             <a:extLst xmlns:a="http://schemas.openxmlformats.org/drawingml/2006/main">
               <a:ext uri="{FF2B5EF4-FFF2-40B4-BE49-F238E27FC236}">
-                <a16:creationId xmlns:a16="http://schemas.microsoft.com/office/drawing/2014/main" id="{197EAB0F-B7FF-4040-AAD1-98A16278D6C2}"/>
+                <a16:creationId xmlns:a16="http://schemas.microsoft.com/office/drawing/2014/main" id="{6AB67A3A-0A21-466C-8E0B-E0D2D55516C2}"/>
               </a:ext>
             </a:extLst>
           </p:cNvPr>
@@ -10359,7 +10359,7 @@
           <p:cNvPr id="40" name="">
             <a:extLst xmlns:a="http://schemas.openxmlformats.org/drawingml/2006/main">
               <a:ext uri="{FF2B5EF4-FFF2-40B4-BE49-F238E27FC236}">
-                <a16:creationId xmlns:a16="http://schemas.microsoft.com/office/drawing/2014/main" id="{73EF0842-6C5F-4049-B6C3-8ADBC0B83972}"/>
+                <a16:creationId xmlns:a16="http://schemas.microsoft.com/office/drawing/2014/main" id="{3D5CA23C-388C-4812-8995-CEF1F8179503}"/>
               </a:ext>
             </a:extLst>
           </p:cNvPr>
@@ -10392,7 +10392,7 @@
           <p:cNvPr id="41" name="">
             <a:extLst xmlns:a="http://schemas.openxmlformats.org/drawingml/2006/main">
               <a:ext uri="{FF2B5EF4-FFF2-40B4-BE49-F238E27FC236}">
-                <a16:creationId xmlns:a16="http://schemas.microsoft.com/office/drawing/2014/main" id="{037B15F4-3864-4A82-9BA4-2CE4AE8A7AC6}"/>
+                <a16:creationId xmlns:a16="http://schemas.microsoft.com/office/drawing/2014/main" id="{8A2341E7-2FF0-4D82-A28D-E74F4DB71666}"/>
               </a:ext>
             </a:extLst>
           </p:cNvPr>
@@ -10450,7 +10450,7 @@
           <p:cNvPr id="42" name="">
             <a:extLst xmlns:a="http://schemas.openxmlformats.org/drawingml/2006/main">
               <a:ext uri="{FF2B5EF4-FFF2-40B4-BE49-F238E27FC236}">
-                <a16:creationId xmlns:a16="http://schemas.microsoft.com/office/drawing/2014/main" id="{FAB43845-C002-4CB6-B70C-F4F8B8BD51B3}"/>
+                <a16:creationId xmlns:a16="http://schemas.microsoft.com/office/drawing/2014/main" id="{1520B7A3-54CD-4079-ACDC-3684C12E0165}"/>
               </a:ext>
             </a:extLst>
           </p:cNvPr>
@@ -10508,7 +10508,7 @@
           <p:cNvPr id="43" name="">
             <a:extLst xmlns:a="http://schemas.openxmlformats.org/drawingml/2006/main">
               <a:ext uri="{FF2B5EF4-FFF2-40B4-BE49-F238E27FC236}">
-                <a16:creationId xmlns:a16="http://schemas.microsoft.com/office/drawing/2014/main" id="{E18F12C4-A3DA-4FDC-9121-2D7CC4CF4656}"/>
+                <a16:creationId xmlns:a16="http://schemas.microsoft.com/office/drawing/2014/main" id="{72AA1092-057D-4BD8-9CA2-4293375EF462}"/>
               </a:ext>
             </a:extLst>
           </p:cNvPr>
@@ -10566,7 +10566,7 @@
           <p:cNvPr id="44" name="">
             <a:extLst xmlns:a="http://schemas.openxmlformats.org/drawingml/2006/main">
               <a:ext uri="{FF2B5EF4-FFF2-40B4-BE49-F238E27FC236}">
-                <a16:creationId xmlns:a16="http://schemas.microsoft.com/office/drawing/2014/main" id="{63AF96FD-2327-4027-94FD-57F309F3761E}"/>
+                <a16:creationId xmlns:a16="http://schemas.microsoft.com/office/drawing/2014/main" id="{E594C5C9-371D-4454-84DB-67D533DDE766}"/>
               </a:ext>
             </a:extLst>
           </p:cNvPr>
@@ -10584,7 +10584,7 @@
             <a:avLst/>
           </a:prstGeom>
           <a:solidFill xmlns:a="http://schemas.openxmlformats.org/drawingml/2006/main">
-            <a:srgbClr val="FFF4F4"/>
+            <a:srgbClr val="F7F7F7"/>
           </a:solidFill>
           <a:ln xmlns:a="http://schemas.openxmlformats.org/drawingml/2006/main" w="9525">
             <a:solidFill>
@@ -10599,7 +10599,7 @@
           <p:cNvPr id="45" name="">
             <a:extLst xmlns:a="http://schemas.openxmlformats.org/drawingml/2006/main">
               <a:ext uri="{FF2B5EF4-FFF2-40B4-BE49-F238E27FC236}">
-                <a16:creationId xmlns:a16="http://schemas.microsoft.com/office/drawing/2014/main" id="{268D220B-E1A1-4878-96D5-21EE66ED3C0A}"/>
+                <a16:creationId xmlns:a16="http://schemas.microsoft.com/office/drawing/2014/main" id="{2D79ECED-F36A-40BC-AEF2-7B0736A319B6}"/>
               </a:ext>
             </a:extLst>
           </p:cNvPr>
@@ -10657,7 +10657,7 @@
           <p:cNvPr id="46" name="">
             <a:extLst xmlns:a="http://schemas.openxmlformats.org/drawingml/2006/main">
               <a:ext uri="{FF2B5EF4-FFF2-40B4-BE49-F238E27FC236}">
-                <a16:creationId xmlns:a16="http://schemas.microsoft.com/office/drawing/2014/main" id="{F9AF1E82-68BA-49EF-81A4-32225679675D}"/>
+                <a16:creationId xmlns:a16="http://schemas.microsoft.com/office/drawing/2014/main" id="{193DCD50-3CD4-4087-BEB8-58DEDDB6067E}"/>
               </a:ext>
             </a:extLst>
           </p:cNvPr>
@@ -10690,7 +10690,7 @@
           <p:cNvPr id="47" name="">
             <a:extLst xmlns:a="http://schemas.openxmlformats.org/drawingml/2006/main">
               <a:ext uri="{FF2B5EF4-FFF2-40B4-BE49-F238E27FC236}">
-                <a16:creationId xmlns:a16="http://schemas.microsoft.com/office/drawing/2014/main" id="{036C64BF-19C6-419F-9F67-B303CB2DEFC7}"/>
+                <a16:creationId xmlns:a16="http://schemas.microsoft.com/office/drawing/2014/main" id="{72BAF677-DBD7-4936-B8BE-F18F98C165BD}"/>
               </a:ext>
             </a:extLst>
           </p:cNvPr>
@@ -10748,7 +10748,7 @@
           <p:cNvPr id="48" name="">
             <a:extLst xmlns:a="http://schemas.openxmlformats.org/drawingml/2006/main">
               <a:ext uri="{FF2B5EF4-FFF2-40B4-BE49-F238E27FC236}">
-                <a16:creationId xmlns:a16="http://schemas.microsoft.com/office/drawing/2014/main" id="{E4AED339-8CE4-4BD9-8E65-68A423332588}"/>
+                <a16:creationId xmlns:a16="http://schemas.microsoft.com/office/drawing/2014/main" id="{A1C5B16C-F49E-43AB-99DA-B4CE067FBD8E}"/>
               </a:ext>
             </a:extLst>
           </p:cNvPr>
@@ -10781,7 +10781,7 @@
           <p:cNvPr id="49" name="">
             <a:extLst xmlns:a="http://schemas.openxmlformats.org/drawingml/2006/main">
               <a:ext uri="{FF2B5EF4-FFF2-40B4-BE49-F238E27FC236}">
-                <a16:creationId xmlns:a16="http://schemas.microsoft.com/office/drawing/2014/main" id="{9E62651D-ABE6-4FE5-8281-65A569B31C96}"/>
+                <a16:creationId xmlns:a16="http://schemas.microsoft.com/office/drawing/2014/main" id="{19623ECC-725A-4A74-A592-8525154ECCC8}"/>
               </a:ext>
             </a:extLst>
           </p:cNvPr>
@@ -10839,7 +10839,7 @@
           <p:cNvPr id="50" name="">
             <a:extLst xmlns:a="http://schemas.openxmlformats.org/drawingml/2006/main">
               <a:ext uri="{FF2B5EF4-FFF2-40B4-BE49-F238E27FC236}">
-                <a16:creationId xmlns:a16="http://schemas.microsoft.com/office/drawing/2014/main" id="{57092823-100C-408E-8664-233BAD7321EB}"/>
+                <a16:creationId xmlns:a16="http://schemas.microsoft.com/office/drawing/2014/main" id="{AFA6D87C-EE07-4877-AAB8-6F3BA1C2E005}"/>
               </a:ext>
             </a:extLst>
           </p:cNvPr>
@@ -10872,7 +10872,7 @@
           <p:cNvPr id="51" name="">
             <a:extLst xmlns:a="http://schemas.openxmlformats.org/drawingml/2006/main">
               <a:ext uri="{FF2B5EF4-FFF2-40B4-BE49-F238E27FC236}">
-                <a16:creationId xmlns:a16="http://schemas.microsoft.com/office/drawing/2014/main" id="{C05BF2E3-31F8-4AF0-BB6F-2467842DB3CC}"/>
+                <a16:creationId xmlns:a16="http://schemas.microsoft.com/office/drawing/2014/main" id="{FD4E44F8-13E3-4329-8873-06C7EBFEE72A}"/>
               </a:ext>
             </a:extLst>
           </p:cNvPr>
@@ -10930,7 +10930,7 @@
           <p:cNvPr id="52" name="">
             <a:extLst xmlns:a="http://schemas.openxmlformats.org/drawingml/2006/main">
               <a:ext uri="{FF2B5EF4-FFF2-40B4-BE49-F238E27FC236}">
-                <a16:creationId xmlns:a16="http://schemas.microsoft.com/office/drawing/2014/main" id="{6C2AD3A8-791F-48C7-9E6C-C56567344E1B}"/>
+                <a16:creationId xmlns:a16="http://schemas.microsoft.com/office/drawing/2014/main" id="{21A79D7B-38DA-4694-A523-BEF6F3D23C9A}"/>
               </a:ext>
             </a:extLst>
           </p:cNvPr>
@@ -10963,7 +10963,7 @@
           <p:cNvPr id="53" name="">
             <a:extLst xmlns:a="http://schemas.openxmlformats.org/drawingml/2006/main">
               <a:ext uri="{FF2B5EF4-FFF2-40B4-BE49-F238E27FC236}">
-                <a16:creationId xmlns:a16="http://schemas.microsoft.com/office/drawing/2014/main" id="{6DD360A8-9873-4772-864E-D9FBD645D0F5}"/>
+                <a16:creationId xmlns:a16="http://schemas.microsoft.com/office/drawing/2014/main" id="{5A783AF1-7807-4BDC-8E37-F380086A53AC}"/>
               </a:ext>
             </a:extLst>
           </p:cNvPr>
@@ -11021,7 +11021,7 @@
           <p:cNvPr id="54" name="">
             <a:extLst xmlns:a="http://schemas.openxmlformats.org/drawingml/2006/main">
               <a:ext uri="{FF2B5EF4-FFF2-40B4-BE49-F238E27FC236}">
-                <a16:creationId xmlns:a16="http://schemas.microsoft.com/office/drawing/2014/main" id="{90DE1BAE-9ED4-48A9-A5E8-A1227F86ADC4}"/>
+                <a16:creationId xmlns:a16="http://schemas.microsoft.com/office/drawing/2014/main" id="{7AE8CF5E-0A0D-4185-9D1B-7FB4A6ADB4F4}"/>
               </a:ext>
             </a:extLst>
           </p:cNvPr>
@@ -11054,7 +11054,7 @@
           <p:cNvPr id="55" name="">
             <a:extLst xmlns:a="http://schemas.openxmlformats.org/drawingml/2006/main">
               <a:ext uri="{FF2B5EF4-FFF2-40B4-BE49-F238E27FC236}">
-                <a16:creationId xmlns:a16="http://schemas.microsoft.com/office/drawing/2014/main" id="{7C91F424-B12B-4C58-B486-3AC14C4A6D33}"/>
+                <a16:creationId xmlns:a16="http://schemas.microsoft.com/office/drawing/2014/main" id="{6DECF1EF-1ABB-4548-8325-0CC6CD425767}"/>
               </a:ext>
             </a:extLst>
           </p:cNvPr>
@@ -11112,7 +11112,7 @@
           <p:cNvPr id="56" name="">
             <a:extLst xmlns:a="http://schemas.openxmlformats.org/drawingml/2006/main">
               <a:ext uri="{FF2B5EF4-FFF2-40B4-BE49-F238E27FC236}">
-                <a16:creationId xmlns:a16="http://schemas.microsoft.com/office/drawing/2014/main" id="{080CFACF-FDF1-4B60-96F1-A03AC971380A}"/>
+                <a16:creationId xmlns:a16="http://schemas.microsoft.com/office/drawing/2014/main" id="{F84B0166-D5D2-4069-8DB0-1EF1AE1638AC}"/>
               </a:ext>
             </a:extLst>
           </p:cNvPr>
@@ -11145,7 +11145,7 @@
           <p:cNvPr id="57" name="">
             <a:extLst xmlns:a="http://schemas.openxmlformats.org/drawingml/2006/main">
               <a:ext uri="{FF2B5EF4-FFF2-40B4-BE49-F238E27FC236}">
-                <a16:creationId xmlns:a16="http://schemas.microsoft.com/office/drawing/2014/main" id="{A5F2092E-DB1B-479D-8A9F-B3160628F1C7}"/>
+                <a16:creationId xmlns:a16="http://schemas.microsoft.com/office/drawing/2014/main" id="{C9CF2D0D-E4E6-43B1-8391-C0ACBCC8296B}"/>
               </a:ext>
             </a:extLst>
           </p:cNvPr>
@@ -11203,7 +11203,7 @@
           <p:cNvPr id="58" name="">
             <a:extLst xmlns:a="http://schemas.openxmlformats.org/drawingml/2006/main">
               <a:ext uri="{FF2B5EF4-FFF2-40B4-BE49-F238E27FC236}">
-                <a16:creationId xmlns:a16="http://schemas.microsoft.com/office/drawing/2014/main" id="{B10C283E-5605-4B70-8B40-14916343A371}"/>
+                <a16:creationId xmlns:a16="http://schemas.microsoft.com/office/drawing/2014/main" id="{E375C432-0968-43E6-99FB-33BDC37DC472}"/>
               </a:ext>
             </a:extLst>
           </p:cNvPr>
@@ -11236,7 +11236,7 @@
           <p:cNvPr id="59" name="">
             <a:extLst xmlns:a="http://schemas.openxmlformats.org/drawingml/2006/main">
               <a:ext uri="{FF2B5EF4-FFF2-40B4-BE49-F238E27FC236}">
-                <a16:creationId xmlns:a16="http://schemas.microsoft.com/office/drawing/2014/main" id="{ACCEBF0F-673E-4569-9D8C-7FE759A87AB5}"/>
+                <a16:creationId xmlns:a16="http://schemas.microsoft.com/office/drawing/2014/main" id="{AE8EBE55-C58B-4B87-AC69-872DE3F4BD2F}"/>
               </a:ext>
             </a:extLst>
           </p:cNvPr>
@@ -11294,7 +11294,7 @@
           <p:cNvPr id="60" name="">
             <a:extLst xmlns:a="http://schemas.openxmlformats.org/drawingml/2006/main">
               <a:ext uri="{FF2B5EF4-FFF2-40B4-BE49-F238E27FC236}">
-                <a16:creationId xmlns:a16="http://schemas.microsoft.com/office/drawing/2014/main" id="{FE73D130-F1C1-49FD-B574-35862ACB5B40}"/>
+                <a16:creationId xmlns:a16="http://schemas.microsoft.com/office/drawing/2014/main" id="{7B85F994-4A5D-4DA9-93F6-A6DEC3D64CF4}"/>
               </a:ext>
             </a:extLst>
           </p:cNvPr>
@@ -11327,7 +11327,7 @@
           <p:cNvPr id="61" name="">
             <a:extLst xmlns:a="http://schemas.openxmlformats.org/drawingml/2006/main">
               <a:ext uri="{FF2B5EF4-FFF2-40B4-BE49-F238E27FC236}">
-                <a16:creationId xmlns:a16="http://schemas.microsoft.com/office/drawing/2014/main" id="{44FFA802-01B3-4BEE-840A-441A696A9F24}"/>
+                <a16:creationId xmlns:a16="http://schemas.microsoft.com/office/drawing/2014/main" id="{790CB1DA-6B28-4863-9ACA-E9D7CDA861B4}"/>
               </a:ext>
             </a:extLst>
           </p:cNvPr>
@@ -11385,7 +11385,7 @@
           <p:cNvPr id="62" name="">
             <a:extLst xmlns:a="http://schemas.openxmlformats.org/drawingml/2006/main">
               <a:ext uri="{FF2B5EF4-FFF2-40B4-BE49-F238E27FC236}">
-                <a16:creationId xmlns:a16="http://schemas.microsoft.com/office/drawing/2014/main" id="{56B2542F-4572-46FC-A140-C27419B9BC4E}"/>
+                <a16:creationId xmlns:a16="http://schemas.microsoft.com/office/drawing/2014/main" id="{315E3AA5-DF41-4E8B-9B1B-B0896F335560}"/>
               </a:ext>
             </a:extLst>
           </p:cNvPr>
@@ -11418,7 +11418,7 @@
           <p:cNvPr id="63" name="">
             <a:extLst xmlns:a="http://schemas.openxmlformats.org/drawingml/2006/main">
               <a:ext uri="{FF2B5EF4-FFF2-40B4-BE49-F238E27FC236}">
-                <a16:creationId xmlns:a16="http://schemas.microsoft.com/office/drawing/2014/main" id="{B0982E86-69CF-4880-AD07-0F64575AD48C}"/>
+                <a16:creationId xmlns:a16="http://schemas.microsoft.com/office/drawing/2014/main" id="{80858608-1C9F-438B-BC81-20744448A324}"/>
               </a:ext>
             </a:extLst>
           </p:cNvPr>
@@ -11476,7 +11476,7 @@
           <p:cNvPr id="64" name="">
             <a:extLst xmlns:a="http://schemas.openxmlformats.org/drawingml/2006/main">
               <a:ext uri="{FF2B5EF4-FFF2-40B4-BE49-F238E27FC236}">
-                <a16:creationId xmlns:a16="http://schemas.microsoft.com/office/drawing/2014/main" id="{CEC47E22-5E42-4B98-8091-89DD4B7FD120}"/>
+                <a16:creationId xmlns:a16="http://schemas.microsoft.com/office/drawing/2014/main" id="{F7EEC99E-197F-4844-AC06-51F170F482CC}"/>
               </a:ext>
             </a:extLst>
           </p:cNvPr>
@@ -11509,7 +11509,7 @@
           <p:cNvPr id="65" name="">
             <a:extLst xmlns:a="http://schemas.openxmlformats.org/drawingml/2006/main">
               <a:ext uri="{FF2B5EF4-FFF2-40B4-BE49-F238E27FC236}">
-                <a16:creationId xmlns:a16="http://schemas.microsoft.com/office/drawing/2014/main" id="{174F3AD9-C39C-4179-822C-EC7F38431F0D}"/>
+                <a16:creationId xmlns:a16="http://schemas.microsoft.com/office/drawing/2014/main" id="{7BB4EAEF-FC6D-4080-92A3-31C86303F1AF}"/>
               </a:ext>
             </a:extLst>
           </p:cNvPr>
@@ -11567,7 +11567,7 @@
           <p:cNvPr id="66" name="">
             <a:extLst xmlns:a="http://schemas.openxmlformats.org/drawingml/2006/main">
               <a:ext uri="{FF2B5EF4-FFF2-40B4-BE49-F238E27FC236}">
-                <a16:creationId xmlns:a16="http://schemas.microsoft.com/office/drawing/2014/main" id="{BF39F119-CFAB-46AD-82CE-D016402F87C1}"/>
+                <a16:creationId xmlns:a16="http://schemas.microsoft.com/office/drawing/2014/main" id="{BC228470-FF79-4496-B254-6CBAA804974D}"/>
               </a:ext>
             </a:extLst>
           </p:cNvPr>
@@ -11600,7 +11600,7 @@
           <p:cNvPr id="67" name="">
             <a:extLst xmlns:a="http://schemas.openxmlformats.org/drawingml/2006/main">
               <a:ext uri="{FF2B5EF4-FFF2-40B4-BE49-F238E27FC236}">
-                <a16:creationId xmlns:a16="http://schemas.microsoft.com/office/drawing/2014/main" id="{8AD05915-B584-4385-A7EB-F32EDC471483}"/>
+                <a16:creationId xmlns:a16="http://schemas.microsoft.com/office/drawing/2014/main" id="{1B2CBB4C-105E-4E71-828E-FD81FAFE6901}"/>
               </a:ext>
             </a:extLst>
           </p:cNvPr>
@@ -11658,7 +11658,7 @@
           <p:cNvPr id="68" name="">
             <a:extLst xmlns:a="http://schemas.openxmlformats.org/drawingml/2006/main">
               <a:ext uri="{FF2B5EF4-FFF2-40B4-BE49-F238E27FC236}">
-                <a16:creationId xmlns:a16="http://schemas.microsoft.com/office/drawing/2014/main" id="{AFCDD1E8-2D19-4FB4-A814-B137A425354C}"/>
+                <a16:creationId xmlns:a16="http://schemas.microsoft.com/office/drawing/2014/main" id="{6A3BD160-8AA3-4234-9C50-ADDA5F5E4CB9}"/>
               </a:ext>
             </a:extLst>
           </p:cNvPr>
@@ -11716,7 +11716,7 @@
           <p:cNvPr id="69" name="">
             <a:extLst xmlns:a="http://schemas.openxmlformats.org/drawingml/2006/main">
               <a:ext uri="{FF2B5EF4-FFF2-40B4-BE49-F238E27FC236}">
-                <a16:creationId xmlns:a16="http://schemas.microsoft.com/office/drawing/2014/main" id="{CE33FD73-1B44-463D-B5CB-C013270113FF}"/>
+                <a16:creationId xmlns:a16="http://schemas.microsoft.com/office/drawing/2014/main" id="{803D1169-0727-411B-9983-0DF8D5BBC6BF}"/>
               </a:ext>
             </a:extLst>
           </p:cNvPr>
@@ -11749,7 +11749,7 @@
           <p:cNvPr id="70" name="">
             <a:extLst xmlns:a="http://schemas.openxmlformats.org/drawingml/2006/main">
               <a:ext uri="{FF2B5EF4-FFF2-40B4-BE49-F238E27FC236}">
-                <a16:creationId xmlns:a16="http://schemas.microsoft.com/office/drawing/2014/main" id="{86D43AC3-C047-448D-81B0-76CC09B9F9B1}"/>
+                <a16:creationId xmlns:a16="http://schemas.microsoft.com/office/drawing/2014/main" id="{0826DF91-B6F4-4330-B5AA-7F50B9DBAC46}"/>
               </a:ext>
             </a:extLst>
           </p:cNvPr>
@@ -11807,7 +11807,7 @@
                 <a:latin typeface="Microsoft YaHei"/>
                 <a:ea typeface="Microsoft YaHei"/>
                 <a:cs typeface="Microsoft YaHei"/>
-                <a:hlinkClick xmlns:r="http://schemas.openxmlformats.org/officeDocument/2006/relationships" r:id="Ra69b40c964f544e6"/>
+                <a:hlinkClick xmlns:r="http://schemas.openxmlformats.org/officeDocument/2006/relationships" r:id="R6c238ce27551411d"/>
               </a:rPr>
               <a:t>Superpowers GitHub</a:t>
             </a:r>
@@ -11819,7 +11819,7 @@
           <p:cNvPr id="71" name="">
             <a:extLst xmlns:a="http://schemas.openxmlformats.org/drawingml/2006/main">
               <a:ext uri="{FF2B5EF4-FFF2-40B4-BE49-F238E27FC236}">
-                <a16:creationId xmlns:a16="http://schemas.microsoft.com/office/drawing/2014/main" id="{0D1ECB72-8221-48EA-BC0B-550F4233568D}"/>
+                <a16:creationId xmlns:a16="http://schemas.microsoft.com/office/drawing/2014/main" id="{4B964579-4ECE-4B1D-B24E-97E0C66D3C03}"/>
               </a:ext>
             </a:extLst>
           </p:cNvPr>
@@ -11875,7 +11875,7 @@
     </p:spTree>
     <p:extLst>
       <p:ext uri="{BB962C8B-B14F-4D97-AF65-F5344CB8AC3E}">
-        <p14:creationId xmlns:p14="http://schemas.microsoft.com/office/powerpoint/2010/main" val="993532319"/>
+        <p14:creationId xmlns:p14="http://schemas.microsoft.com/office/powerpoint/2010/main" val="1410961545"/>
       </p:ext>
     </p:extLst>
   </p:cSld>
@@ -11906,7 +11906,7 @@
           <p:cNvPr id="38" name="">
             <a:extLst xmlns:a="http://schemas.openxmlformats.org/drawingml/2006/main">
               <a:ext uri="{FF2B5EF4-FFF2-40B4-BE49-F238E27FC236}">
-                <a16:creationId xmlns:a16="http://schemas.microsoft.com/office/drawing/2014/main" id="{484EE9A0-D4B5-419B-B76C-2AE156F0B3BF}"/>
+                <a16:creationId xmlns:a16="http://schemas.microsoft.com/office/drawing/2014/main" id="{CDC38F81-50C1-4411-94BE-B433FD705582}"/>
               </a:ext>
             </a:extLst>
           </p:cNvPr>
@@ -11939,7 +11939,7 @@
           <p:cNvPr id="2" name="">
             <a:extLst xmlns:a="http://schemas.openxmlformats.org/drawingml/2006/main">
               <a:ext uri="{FF2B5EF4-FFF2-40B4-BE49-F238E27FC236}">
-                <a16:creationId xmlns:a16="http://schemas.microsoft.com/office/drawing/2014/main" id="{05BE4C46-2E2E-418F-81B3-960720CB91A2}"/>
+                <a16:creationId xmlns:a16="http://schemas.microsoft.com/office/drawing/2014/main" id="{A3F46D7D-9A85-47D8-9E9A-B0B4975C77BE}"/>
               </a:ext>
             </a:extLst>
           </p:cNvPr>
@@ -11997,7 +11997,7 @@
           <p:cNvPr id="3" name="">
             <a:extLst xmlns:a="http://schemas.openxmlformats.org/drawingml/2006/main">
               <a:ext uri="{FF2B5EF4-FFF2-40B4-BE49-F238E27FC236}">
-                <a16:creationId xmlns:a16="http://schemas.microsoft.com/office/drawing/2014/main" id="{0D402D61-BCCC-441F-8921-238E31169ACA}"/>
+                <a16:creationId xmlns:a16="http://schemas.microsoft.com/office/drawing/2014/main" id="{4D8539CD-1F94-44BC-994F-C4C4DDCC339F}"/>
               </a:ext>
             </a:extLst>
           </p:cNvPr>
@@ -12055,7 +12055,7 @@
           <p:cNvPr id="4" name="">
             <a:extLst xmlns:a="http://schemas.openxmlformats.org/drawingml/2006/main">
               <a:ext uri="{FF2B5EF4-FFF2-40B4-BE49-F238E27FC236}">
-                <a16:creationId xmlns:a16="http://schemas.microsoft.com/office/drawing/2014/main" id="{C7C8B37E-3B00-4294-A6D8-1003F9850C35}"/>
+                <a16:creationId xmlns:a16="http://schemas.microsoft.com/office/drawing/2014/main" id="{3B0B559D-34A0-4254-9404-FAB00D0A2D76}"/>
               </a:ext>
             </a:extLst>
           </p:cNvPr>
@@ -12088,7 +12088,7 @@
           <p:cNvPr id="5" name="">
             <a:extLst xmlns:a="http://schemas.openxmlformats.org/drawingml/2006/main">
               <a:ext uri="{FF2B5EF4-FFF2-40B4-BE49-F238E27FC236}">
-                <a16:creationId xmlns:a16="http://schemas.microsoft.com/office/drawing/2014/main" id="{F99CD3ED-8EC8-47E8-BA56-255E855775C2}"/>
+                <a16:creationId xmlns:a16="http://schemas.microsoft.com/office/drawing/2014/main" id="{23387DFA-5C03-4957-87E8-42A886FEDBB5}"/>
               </a:ext>
             </a:extLst>
           </p:cNvPr>
@@ -12146,7 +12146,7 @@
           <p:cNvPr id="6" name="">
             <a:extLst xmlns:a="http://schemas.openxmlformats.org/drawingml/2006/main">
               <a:ext uri="{FF2B5EF4-FFF2-40B4-BE49-F238E27FC236}">
-                <a16:creationId xmlns:a16="http://schemas.microsoft.com/office/drawing/2014/main" id="{F6DA468E-4C8A-4ED0-8404-CFA6EE7EAD15}"/>
+                <a16:creationId xmlns:a16="http://schemas.microsoft.com/office/drawing/2014/main" id="{628CFCDE-30DE-4A68-9FDA-1E8D7DCCCEF6}"/>
               </a:ext>
             </a:extLst>
           </p:cNvPr>
@@ -12250,7 +12250,7 @@
           <p:cNvPr id="7" name="">
             <a:extLst xmlns:a="http://schemas.openxmlformats.org/drawingml/2006/main">
               <a:ext uri="{FF2B5EF4-FFF2-40B4-BE49-F238E27FC236}">
-                <a16:creationId xmlns:a16="http://schemas.microsoft.com/office/drawing/2014/main" id="{3E7CD6F2-0787-43FF-B460-FB0818231CD5}"/>
+                <a16:creationId xmlns:a16="http://schemas.microsoft.com/office/drawing/2014/main" id="{4FA938D9-EE3A-4E3C-BC77-070C91FD6EF7}"/>
               </a:ext>
             </a:extLst>
           </p:cNvPr>
@@ -12283,7 +12283,7 @@
           <p:cNvPr id="8" name="">
             <a:extLst xmlns:a="http://schemas.openxmlformats.org/drawingml/2006/main">
               <a:ext uri="{FF2B5EF4-FFF2-40B4-BE49-F238E27FC236}">
-                <a16:creationId xmlns:a16="http://schemas.microsoft.com/office/drawing/2014/main" id="{B4F10D9E-28F6-4C56-958F-DC669B447E7C}"/>
+                <a16:creationId xmlns:a16="http://schemas.microsoft.com/office/drawing/2014/main" id="{CE04551C-BB15-4EC7-AD23-CD081FA96C2A}"/>
               </a:ext>
             </a:extLst>
           </p:cNvPr>
@@ -12316,7 +12316,7 @@
           <p:cNvPr id="9" name="">
             <a:extLst xmlns:a="http://schemas.openxmlformats.org/drawingml/2006/main">
               <a:ext uri="{FF2B5EF4-FFF2-40B4-BE49-F238E27FC236}">
-                <a16:creationId xmlns:a16="http://schemas.microsoft.com/office/drawing/2014/main" id="{95D2163E-6780-479A-9B5F-889A5545B18F}"/>
+                <a16:creationId xmlns:a16="http://schemas.microsoft.com/office/drawing/2014/main" id="{1713B7F6-0BBA-4D35-9F4F-8E900A5AE405}"/>
               </a:ext>
             </a:extLst>
           </p:cNvPr>
@@ -12334,7 +12334,7 @@
             <a:avLst/>
           </a:prstGeom>
           <a:solidFill xmlns:a="http://schemas.openxmlformats.org/drawingml/2006/main">
-            <a:srgbClr val="FFF4F4"/>
+            <a:srgbClr val="F7F7F7"/>
           </a:solidFill>
           <a:ln xmlns:a="http://schemas.openxmlformats.org/drawingml/2006/main" w="9525">
             <a:solidFill>
@@ -12349,7 +12349,7 @@
           <p:cNvPr id="10" name="">
             <a:extLst xmlns:a="http://schemas.openxmlformats.org/drawingml/2006/main">
               <a:ext uri="{FF2B5EF4-FFF2-40B4-BE49-F238E27FC236}">
-                <a16:creationId xmlns:a16="http://schemas.microsoft.com/office/drawing/2014/main" id="{130516C1-39DE-44C7-8EC3-BF28600A36A1}"/>
+                <a16:creationId xmlns:a16="http://schemas.microsoft.com/office/drawing/2014/main" id="{94BBDAE2-4E81-46D0-AA4E-21C3282BB5C2}"/>
               </a:ext>
             </a:extLst>
           </p:cNvPr>
@@ -12407,7 +12407,7 @@
           <p:cNvPr id="11" name="">
             <a:extLst xmlns:a="http://schemas.openxmlformats.org/drawingml/2006/main">
               <a:ext uri="{FF2B5EF4-FFF2-40B4-BE49-F238E27FC236}">
-                <a16:creationId xmlns:a16="http://schemas.microsoft.com/office/drawing/2014/main" id="{E00E77C9-A757-4198-82B6-C166BC943B5B}"/>
+                <a16:creationId xmlns:a16="http://schemas.microsoft.com/office/drawing/2014/main" id="{69878AD4-CD3D-43FA-A62A-CBB449A07E79}"/>
               </a:ext>
             </a:extLst>
           </p:cNvPr>
@@ -12534,7 +12534,7 @@
           <p:cNvPr id="12" name="">
             <a:extLst xmlns:a="http://schemas.openxmlformats.org/drawingml/2006/main">
               <a:ext uri="{FF2B5EF4-FFF2-40B4-BE49-F238E27FC236}">
-                <a16:creationId xmlns:a16="http://schemas.microsoft.com/office/drawing/2014/main" id="{39474182-8168-4A16-B3CA-36D2E1C27F54}"/>
+                <a16:creationId xmlns:a16="http://schemas.microsoft.com/office/drawing/2014/main" id="{3E57E2A9-B25A-449C-A555-AFB98B9F98AC}"/>
               </a:ext>
             </a:extLst>
           </p:cNvPr>
@@ -12567,7 +12567,7 @@
           <p:cNvPr id="13" name="">
             <a:extLst xmlns:a="http://schemas.openxmlformats.org/drawingml/2006/main">
               <a:ext uri="{FF2B5EF4-FFF2-40B4-BE49-F238E27FC236}">
-                <a16:creationId xmlns:a16="http://schemas.microsoft.com/office/drawing/2014/main" id="{23FEC7CE-0F7C-4F37-86A0-7D0360558943}"/>
+                <a16:creationId xmlns:a16="http://schemas.microsoft.com/office/drawing/2014/main" id="{609B546F-000C-4D2E-BA4E-1ABB9E04D3C8}"/>
               </a:ext>
             </a:extLst>
           </p:cNvPr>
@@ -12600,7 +12600,7 @@
           <p:cNvPr id="14" name="">
             <a:extLst xmlns:a="http://schemas.openxmlformats.org/drawingml/2006/main">
               <a:ext uri="{FF2B5EF4-FFF2-40B4-BE49-F238E27FC236}">
-                <a16:creationId xmlns:a16="http://schemas.microsoft.com/office/drawing/2014/main" id="{D3A8559C-2C4E-43B8-ABD9-3C2877DB46C3}"/>
+                <a16:creationId xmlns:a16="http://schemas.microsoft.com/office/drawing/2014/main" id="{98078BE7-7686-4A8D-A2F8-DE5A634B7875}"/>
               </a:ext>
             </a:extLst>
           </p:cNvPr>
@@ -12633,7 +12633,7 @@
           <p:cNvPr id="15" name="">
             <a:extLst xmlns:a="http://schemas.openxmlformats.org/drawingml/2006/main">
               <a:ext uri="{FF2B5EF4-FFF2-40B4-BE49-F238E27FC236}">
-                <a16:creationId xmlns:a16="http://schemas.microsoft.com/office/drawing/2014/main" id="{9A608CD1-0396-4F1B-9EDC-4C8530767454}"/>
+                <a16:creationId xmlns:a16="http://schemas.microsoft.com/office/drawing/2014/main" id="{538D05D8-A552-4815-9C41-9CF4A129E458}"/>
               </a:ext>
             </a:extLst>
           </p:cNvPr>
@@ -12691,7 +12691,7 @@
           <p:cNvPr id="16" name="">
             <a:extLst xmlns:a="http://schemas.openxmlformats.org/drawingml/2006/main">
               <a:ext uri="{FF2B5EF4-FFF2-40B4-BE49-F238E27FC236}">
-                <a16:creationId xmlns:a16="http://schemas.microsoft.com/office/drawing/2014/main" id="{E6A32B3B-142A-42D1-B7D8-BC99280FE121}"/>
+                <a16:creationId xmlns:a16="http://schemas.microsoft.com/office/drawing/2014/main" id="{9E603D11-0AAB-45F8-8DAA-465CD4E2869A}"/>
               </a:ext>
             </a:extLst>
           </p:cNvPr>
@@ -12795,7 +12795,7 @@
           <p:cNvPr id="17" name="">
             <a:extLst xmlns:a="http://schemas.openxmlformats.org/drawingml/2006/main">
               <a:ext uri="{FF2B5EF4-FFF2-40B4-BE49-F238E27FC236}">
-                <a16:creationId xmlns:a16="http://schemas.microsoft.com/office/drawing/2014/main" id="{CA1482C0-2BE3-494C-B032-BD35190B988E}"/>
+                <a16:creationId xmlns:a16="http://schemas.microsoft.com/office/drawing/2014/main" id="{D287B330-6932-4776-B85A-E599E2EFD42F}"/>
               </a:ext>
             </a:extLst>
           </p:cNvPr>
@@ -12828,7 +12828,7 @@
           <p:cNvPr id="18" name="">
             <a:extLst xmlns:a="http://schemas.openxmlformats.org/drawingml/2006/main">
               <a:ext uri="{FF2B5EF4-FFF2-40B4-BE49-F238E27FC236}">
-                <a16:creationId xmlns:a16="http://schemas.microsoft.com/office/drawing/2014/main" id="{584B8EDE-3F30-4CE1-BDF5-012628BB5E64}"/>
+                <a16:creationId xmlns:a16="http://schemas.microsoft.com/office/drawing/2014/main" id="{C81A3FAC-CE2A-49FC-9332-D343750353F7}"/>
               </a:ext>
             </a:extLst>
           </p:cNvPr>
@@ -12886,7 +12886,7 @@
           <p:cNvPr id="19" name="">
             <a:extLst xmlns:a="http://schemas.openxmlformats.org/drawingml/2006/main">
               <a:ext uri="{FF2B5EF4-FFF2-40B4-BE49-F238E27FC236}">
-                <a16:creationId xmlns:a16="http://schemas.microsoft.com/office/drawing/2014/main" id="{A7D347E7-4AF3-4ACF-89F4-70391CB0F0F7}"/>
+                <a16:creationId xmlns:a16="http://schemas.microsoft.com/office/drawing/2014/main" id="{FC3BED75-1C21-437B-813E-47BBF21A5B70}"/>
               </a:ext>
             </a:extLst>
           </p:cNvPr>
@@ -12944,7 +12944,7 @@
           <p:cNvPr id="20" name="">
             <a:extLst xmlns:a="http://schemas.openxmlformats.org/drawingml/2006/main">
               <a:ext uri="{FF2B5EF4-FFF2-40B4-BE49-F238E27FC236}">
-                <a16:creationId xmlns:a16="http://schemas.microsoft.com/office/drawing/2014/main" id="{4C5112ED-B697-439E-B691-A9C2304A6031}"/>
+                <a16:creationId xmlns:a16="http://schemas.microsoft.com/office/drawing/2014/main" id="{14653DE2-65A7-466A-A5D7-6E60B485E4A6}"/>
               </a:ext>
             </a:extLst>
           </p:cNvPr>
@@ -12977,7 +12977,7 @@
           <p:cNvPr id="21" name="">
             <a:extLst xmlns:a="http://schemas.openxmlformats.org/drawingml/2006/main">
               <a:ext uri="{FF2B5EF4-FFF2-40B4-BE49-F238E27FC236}">
-                <a16:creationId xmlns:a16="http://schemas.microsoft.com/office/drawing/2014/main" id="{F9F741D8-BD96-418C-8995-DD16D8A2B9F5}"/>
+                <a16:creationId xmlns:a16="http://schemas.microsoft.com/office/drawing/2014/main" id="{2EC9AE4F-7507-413A-85DE-D16D8579AFC4}"/>
               </a:ext>
             </a:extLst>
           </p:cNvPr>
@@ -13035,7 +13035,7 @@
           <p:cNvPr id="22" name="">
             <a:extLst xmlns:a="http://schemas.openxmlformats.org/drawingml/2006/main">
               <a:ext uri="{FF2B5EF4-FFF2-40B4-BE49-F238E27FC236}">
-                <a16:creationId xmlns:a16="http://schemas.microsoft.com/office/drawing/2014/main" id="{E6BA8343-42F3-49E8-8ACB-8542AA25775B}"/>
+                <a16:creationId xmlns:a16="http://schemas.microsoft.com/office/drawing/2014/main" id="{88AFC186-0F25-4E49-8610-8E243965132E}"/>
               </a:ext>
             </a:extLst>
           </p:cNvPr>
@@ -13093,7 +13093,7 @@
           <p:cNvPr id="23" name="">
             <a:extLst xmlns:a="http://schemas.openxmlformats.org/drawingml/2006/main">
               <a:ext uri="{FF2B5EF4-FFF2-40B4-BE49-F238E27FC236}">
-                <a16:creationId xmlns:a16="http://schemas.microsoft.com/office/drawing/2014/main" id="{70E6456C-9D9D-4753-A5D0-95933AC33609}"/>
+                <a16:creationId xmlns:a16="http://schemas.microsoft.com/office/drawing/2014/main" id="{4D87534F-D837-41CA-8979-1A24A6FA2211}"/>
               </a:ext>
             </a:extLst>
           </p:cNvPr>
@@ -13126,7 +13126,7 @@
           <p:cNvPr id="24" name="">
             <a:extLst xmlns:a="http://schemas.openxmlformats.org/drawingml/2006/main">
               <a:ext uri="{FF2B5EF4-FFF2-40B4-BE49-F238E27FC236}">
-                <a16:creationId xmlns:a16="http://schemas.microsoft.com/office/drawing/2014/main" id="{B4FA27E5-0073-4F79-AA57-79D9B7F36AF2}"/>
+                <a16:creationId xmlns:a16="http://schemas.microsoft.com/office/drawing/2014/main" id="{356E83CC-3FC1-4D46-99E2-B1ABEA7AC9A1}"/>
               </a:ext>
             </a:extLst>
           </p:cNvPr>
@@ -13184,7 +13184,7 @@
           <p:cNvPr id="25" name="">
             <a:extLst xmlns:a="http://schemas.openxmlformats.org/drawingml/2006/main">
               <a:ext uri="{FF2B5EF4-FFF2-40B4-BE49-F238E27FC236}">
-                <a16:creationId xmlns:a16="http://schemas.microsoft.com/office/drawing/2014/main" id="{D811CDBA-4947-42C2-86DD-13B71C86AB59}"/>
+                <a16:creationId xmlns:a16="http://schemas.microsoft.com/office/drawing/2014/main" id="{6F48BE66-BDBC-4968-B3C8-71B26C435492}"/>
               </a:ext>
             </a:extLst>
           </p:cNvPr>
@@ -13242,7 +13242,7 @@
           <p:cNvPr id="26" name="">
             <a:extLst xmlns:a="http://schemas.openxmlformats.org/drawingml/2006/main">
               <a:ext uri="{FF2B5EF4-FFF2-40B4-BE49-F238E27FC236}">
-                <a16:creationId xmlns:a16="http://schemas.microsoft.com/office/drawing/2014/main" id="{65D68B80-B326-437F-BAB8-551CB2E1930B}"/>
+                <a16:creationId xmlns:a16="http://schemas.microsoft.com/office/drawing/2014/main" id="{D033E669-A637-4C07-9596-D8467AB53A1A}"/>
               </a:ext>
             </a:extLst>
           </p:cNvPr>
@@ -13275,7 +13275,7 @@
           <p:cNvPr id="27" name="">
             <a:extLst xmlns:a="http://schemas.openxmlformats.org/drawingml/2006/main">
               <a:ext uri="{FF2B5EF4-FFF2-40B4-BE49-F238E27FC236}">
-                <a16:creationId xmlns:a16="http://schemas.microsoft.com/office/drawing/2014/main" id="{6FA1C5D0-7905-460F-9921-DD5EACB22B63}"/>
+                <a16:creationId xmlns:a16="http://schemas.microsoft.com/office/drawing/2014/main" id="{4EE933E9-E19C-4364-82CE-1F000889549B}"/>
               </a:ext>
             </a:extLst>
           </p:cNvPr>
@@ -13333,7 +13333,7 @@
           <p:cNvPr id="28" name="">
             <a:extLst xmlns:a="http://schemas.openxmlformats.org/drawingml/2006/main">
               <a:ext uri="{FF2B5EF4-FFF2-40B4-BE49-F238E27FC236}">
-                <a16:creationId xmlns:a16="http://schemas.microsoft.com/office/drawing/2014/main" id="{242932EF-978B-439F-B303-A8C53633B69F}"/>
+                <a16:creationId xmlns:a16="http://schemas.microsoft.com/office/drawing/2014/main" id="{AE436478-6263-47E8-BF3A-C6033CBEFABB}"/>
               </a:ext>
             </a:extLst>
           </p:cNvPr>
@@ -13391,7 +13391,7 @@
           <p:cNvPr id="29" name="">
             <a:extLst xmlns:a="http://schemas.openxmlformats.org/drawingml/2006/main">
               <a:ext uri="{FF2B5EF4-FFF2-40B4-BE49-F238E27FC236}">
-                <a16:creationId xmlns:a16="http://schemas.microsoft.com/office/drawing/2014/main" id="{6162685C-6C83-48AC-93D5-99507F3C001E}"/>
+                <a16:creationId xmlns:a16="http://schemas.microsoft.com/office/drawing/2014/main" id="{81A365F4-C6ED-4B27-8A39-A9D06C8DDD3F}"/>
               </a:ext>
             </a:extLst>
           </p:cNvPr>
@@ -13424,7 +13424,7 @@
           <p:cNvPr id="30" name="">
             <a:extLst xmlns:a="http://schemas.openxmlformats.org/drawingml/2006/main">
               <a:ext uri="{FF2B5EF4-FFF2-40B4-BE49-F238E27FC236}">
-                <a16:creationId xmlns:a16="http://schemas.microsoft.com/office/drawing/2014/main" id="{08E924C6-4519-49AA-BA01-A8BEBA40C30B}"/>
+                <a16:creationId xmlns:a16="http://schemas.microsoft.com/office/drawing/2014/main" id="{3B8EC365-2DA8-4CA9-AEE3-75F08312C00D}"/>
               </a:ext>
             </a:extLst>
           </p:cNvPr>
@@ -13482,7 +13482,7 @@
           <p:cNvPr id="31" name="">
             <a:extLst xmlns:a="http://schemas.openxmlformats.org/drawingml/2006/main">
               <a:ext uri="{FF2B5EF4-FFF2-40B4-BE49-F238E27FC236}">
-                <a16:creationId xmlns:a16="http://schemas.microsoft.com/office/drawing/2014/main" id="{7657B70E-1A9B-446B-B01F-1AACEC9EFFAE}"/>
+                <a16:creationId xmlns:a16="http://schemas.microsoft.com/office/drawing/2014/main" id="{8024D5F7-CF5E-4EC7-B805-182A8C5BBCCF}"/>
               </a:ext>
             </a:extLst>
           </p:cNvPr>
@@ -13540,7 +13540,7 @@
           <p:cNvPr id="32" name="">
             <a:extLst xmlns:a="http://schemas.openxmlformats.org/drawingml/2006/main">
               <a:ext uri="{FF2B5EF4-FFF2-40B4-BE49-F238E27FC236}">
-                <a16:creationId xmlns:a16="http://schemas.microsoft.com/office/drawing/2014/main" id="{CAFBAD0E-C8F4-47ED-9705-65837F20E80D}"/>
+                <a16:creationId xmlns:a16="http://schemas.microsoft.com/office/drawing/2014/main" id="{4DA6F098-AF21-42EE-A5DF-D9AC3E5C70EB}"/>
               </a:ext>
             </a:extLst>
           </p:cNvPr>
@@ -13573,7 +13573,7 @@
           <p:cNvPr id="33" name="">
             <a:extLst xmlns:a="http://schemas.openxmlformats.org/drawingml/2006/main">
               <a:ext uri="{FF2B5EF4-FFF2-40B4-BE49-F238E27FC236}">
-                <a16:creationId xmlns:a16="http://schemas.microsoft.com/office/drawing/2014/main" id="{AFDCE8EA-C259-49E5-85CF-C9809C599AF8}"/>
+                <a16:creationId xmlns:a16="http://schemas.microsoft.com/office/drawing/2014/main" id="{1EFF11ED-E58B-4DF8-962F-B0D9A082F7F2}"/>
               </a:ext>
             </a:extLst>
           </p:cNvPr>
@@ -13631,7 +13631,7 @@
           <p:cNvPr id="34" name="">
             <a:extLst xmlns:a="http://schemas.openxmlformats.org/drawingml/2006/main">
               <a:ext uri="{FF2B5EF4-FFF2-40B4-BE49-F238E27FC236}">
-                <a16:creationId xmlns:a16="http://schemas.microsoft.com/office/drawing/2014/main" id="{1C6B0F67-F09A-4B4B-A207-FD9DF3971A16}"/>
+                <a16:creationId xmlns:a16="http://schemas.microsoft.com/office/drawing/2014/main" id="{72A5D59F-0AB8-4245-9415-C1107DBB8E49}"/>
               </a:ext>
             </a:extLst>
           </p:cNvPr>
@@ -13689,7 +13689,7 @@
           <p:cNvPr id="35" name="">
             <a:extLst xmlns:a="http://schemas.openxmlformats.org/drawingml/2006/main">
               <a:ext uri="{FF2B5EF4-FFF2-40B4-BE49-F238E27FC236}">
-                <a16:creationId xmlns:a16="http://schemas.microsoft.com/office/drawing/2014/main" id="{FB0E61EF-2214-4949-9B57-1FEF3F6D6499}"/>
+                <a16:creationId xmlns:a16="http://schemas.microsoft.com/office/drawing/2014/main" id="{DC99DCB6-1ACD-4F88-8135-76C6E83A942B}"/>
               </a:ext>
             </a:extLst>
           </p:cNvPr>
@@ -13722,7 +13722,7 @@
           <p:cNvPr id="36" name="">
             <a:extLst xmlns:a="http://schemas.openxmlformats.org/drawingml/2006/main">
               <a:ext uri="{FF2B5EF4-FFF2-40B4-BE49-F238E27FC236}">
-                <a16:creationId xmlns:a16="http://schemas.microsoft.com/office/drawing/2014/main" id="{448DDEFA-7C10-47A8-AFCD-71905D71B290}"/>
+                <a16:creationId xmlns:a16="http://schemas.microsoft.com/office/drawing/2014/main" id="{B36321B1-A2C7-4FFC-98CE-DF5C06B14163}"/>
               </a:ext>
             </a:extLst>
           </p:cNvPr>
@@ -13780,7 +13780,7 @@
                 <a:latin typeface="Microsoft YaHei"/>
                 <a:ea typeface="Microsoft YaHei"/>
                 <a:cs typeface="Microsoft YaHei"/>
-                <a:hlinkClick xmlns:r="http://schemas.openxmlformats.org/officeDocument/2006/relationships" r:id="R2ea35dba60b9464f"/>
+                <a:hlinkClick xmlns:r="http://schemas.openxmlformats.org/officeDocument/2006/relationships" r:id="R621a7db3548e4564"/>
               </a:rPr>
               <a:t>OpenSpec GitHub</a:t>
             </a:r>
@@ -13792,7 +13792,7 @@
           <p:cNvPr id="37" name="">
             <a:extLst xmlns:a="http://schemas.openxmlformats.org/drawingml/2006/main">
               <a:ext uri="{FF2B5EF4-FFF2-40B4-BE49-F238E27FC236}">
-                <a16:creationId xmlns:a16="http://schemas.microsoft.com/office/drawing/2014/main" id="{BDDE8020-800D-4CFB-A606-17E91CD48E5E}"/>
+                <a16:creationId xmlns:a16="http://schemas.microsoft.com/office/drawing/2014/main" id="{B059F6B4-93A9-453F-9C8F-018F55162F0C}"/>
               </a:ext>
             </a:extLst>
           </p:cNvPr>
@@ -13848,7 +13848,7 @@
     </p:spTree>
     <p:extLst>
       <p:ext uri="{BB962C8B-B14F-4D97-AF65-F5344CB8AC3E}">
-        <p14:creationId xmlns:p14="http://schemas.microsoft.com/office/powerpoint/2010/main" val="1024757549"/>
+        <p14:creationId xmlns:p14="http://schemas.microsoft.com/office/powerpoint/2010/main" val="1088495811"/>
       </p:ext>
     </p:extLst>
   </p:cSld>
@@ -13879,7 +13879,7 @@
           <p:cNvPr id="59" name="">
             <a:extLst xmlns:a="http://schemas.openxmlformats.org/drawingml/2006/main">
               <a:ext uri="{FF2B5EF4-FFF2-40B4-BE49-F238E27FC236}">
-                <a16:creationId xmlns:a16="http://schemas.microsoft.com/office/drawing/2014/main" id="{015B827A-B3CD-4642-86FC-E60D363CF575}"/>
+                <a16:creationId xmlns:a16="http://schemas.microsoft.com/office/drawing/2014/main" id="{80C65FB7-93FB-4BAC-B80A-27915BD62326}"/>
               </a:ext>
             </a:extLst>
           </p:cNvPr>
@@ -13912,7 +13912,7 @@
           <p:cNvPr id="2" name="">
             <a:extLst xmlns:a="http://schemas.openxmlformats.org/drawingml/2006/main">
               <a:ext uri="{FF2B5EF4-FFF2-40B4-BE49-F238E27FC236}">
-                <a16:creationId xmlns:a16="http://schemas.microsoft.com/office/drawing/2014/main" id="{880570BC-19BE-4B12-A5F5-E7A1384DC308}"/>
+                <a16:creationId xmlns:a16="http://schemas.microsoft.com/office/drawing/2014/main" id="{F1E963C0-00E3-4DAC-92EB-CF268139721D}"/>
               </a:ext>
             </a:extLst>
           </p:cNvPr>
@@ -13970,7 +13970,7 @@
           <p:cNvPr id="3" name="">
             <a:extLst xmlns:a="http://schemas.openxmlformats.org/drawingml/2006/main">
               <a:ext uri="{FF2B5EF4-FFF2-40B4-BE49-F238E27FC236}">
-                <a16:creationId xmlns:a16="http://schemas.microsoft.com/office/drawing/2014/main" id="{6D30355E-225C-4F0A-AE8C-C61D45362196}"/>
+                <a16:creationId xmlns:a16="http://schemas.microsoft.com/office/drawing/2014/main" id="{DB0E81FF-49B5-41E0-A135-C80D100AFE1C}"/>
               </a:ext>
             </a:extLst>
           </p:cNvPr>
@@ -14028,7 +14028,7 @@
           <p:cNvPr id="4" name="">
             <a:extLst xmlns:a="http://schemas.openxmlformats.org/drawingml/2006/main">
               <a:ext uri="{FF2B5EF4-FFF2-40B4-BE49-F238E27FC236}">
-                <a16:creationId xmlns:a16="http://schemas.microsoft.com/office/drawing/2014/main" id="{2CD48820-C807-4E7F-AF37-5FC4F3D97E4D}"/>
+                <a16:creationId xmlns:a16="http://schemas.microsoft.com/office/drawing/2014/main" id="{47144AC3-8074-47B0-80E2-5C86AB156E87}"/>
               </a:ext>
             </a:extLst>
           </p:cNvPr>
@@ -14046,7 +14046,7 @@
             <a:avLst/>
           </a:prstGeom>
           <a:solidFill xmlns:a="http://schemas.openxmlformats.org/drawingml/2006/main">
-            <a:srgbClr val="FFF4F4"/>
+            <a:srgbClr val="F7F7F7"/>
           </a:solidFill>
           <a:ln xmlns:a="http://schemas.openxmlformats.org/drawingml/2006/main" w="9525">
             <a:solidFill>
@@ -14061,7 +14061,7 @@
           <p:cNvPr id="5" name="">
             <a:extLst xmlns:a="http://schemas.openxmlformats.org/drawingml/2006/main">
               <a:ext uri="{FF2B5EF4-FFF2-40B4-BE49-F238E27FC236}">
-                <a16:creationId xmlns:a16="http://schemas.microsoft.com/office/drawing/2014/main" id="{E2A1F0B0-DD60-4390-80DA-9BA86AF10180}"/>
+                <a16:creationId xmlns:a16="http://schemas.microsoft.com/office/drawing/2014/main" id="{6978F4A6-9EE3-48E8-8FD3-B78B4F4FB602}"/>
               </a:ext>
             </a:extLst>
           </p:cNvPr>
@@ -14119,7 +14119,7 @@
           <p:cNvPr id="6" name="">
             <a:extLst xmlns:a="http://schemas.openxmlformats.org/drawingml/2006/main">
               <a:ext uri="{FF2B5EF4-FFF2-40B4-BE49-F238E27FC236}">
-                <a16:creationId xmlns:a16="http://schemas.microsoft.com/office/drawing/2014/main" id="{AFAA14C4-DFFA-4E8D-B9CF-AF75137D34F6}"/>
+                <a16:creationId xmlns:a16="http://schemas.microsoft.com/office/drawing/2014/main" id="{158C6333-D238-49F9-BEBC-63A93F6E39DC}"/>
               </a:ext>
             </a:extLst>
           </p:cNvPr>
@@ -14152,7 +14152,7 @@
           <p:cNvPr id="7" name="">
             <a:extLst xmlns:a="http://schemas.openxmlformats.org/drawingml/2006/main">
               <a:ext uri="{FF2B5EF4-FFF2-40B4-BE49-F238E27FC236}">
-                <a16:creationId xmlns:a16="http://schemas.microsoft.com/office/drawing/2014/main" id="{2C3C9689-FB08-4262-928A-42E71614E704}"/>
+                <a16:creationId xmlns:a16="http://schemas.microsoft.com/office/drawing/2014/main" id="{0B547227-2102-4F59-B42C-75C3023FB217}"/>
               </a:ext>
             </a:extLst>
           </p:cNvPr>
@@ -14210,7 +14210,7 @@
           <p:cNvPr id="8" name="">
             <a:extLst xmlns:a="http://schemas.openxmlformats.org/drawingml/2006/main">
               <a:ext uri="{FF2B5EF4-FFF2-40B4-BE49-F238E27FC236}">
-                <a16:creationId xmlns:a16="http://schemas.microsoft.com/office/drawing/2014/main" id="{7CC2840D-8CA7-4B5A-8E7A-7CD5561A7063}"/>
+                <a16:creationId xmlns:a16="http://schemas.microsoft.com/office/drawing/2014/main" id="{219956E6-40F5-48B6-96BB-718F9597F90B}"/>
               </a:ext>
             </a:extLst>
           </p:cNvPr>
@@ -14243,7 +14243,7 @@
           <p:cNvPr id="9" name="">
             <a:extLst xmlns:a="http://schemas.openxmlformats.org/drawingml/2006/main">
               <a:ext uri="{FF2B5EF4-FFF2-40B4-BE49-F238E27FC236}">
-                <a16:creationId xmlns:a16="http://schemas.microsoft.com/office/drawing/2014/main" id="{A8086234-4065-4BB8-A9CF-EE53A86CFFD8}"/>
+                <a16:creationId xmlns:a16="http://schemas.microsoft.com/office/drawing/2014/main" id="{11B4ACCD-C36F-4449-BB5E-8CCCE4FFC5EC}"/>
               </a:ext>
             </a:extLst>
           </p:cNvPr>
@@ -14301,7 +14301,7 @@
           <p:cNvPr id="10" name="">
             <a:extLst xmlns:a="http://schemas.openxmlformats.org/drawingml/2006/main">
               <a:ext uri="{FF2B5EF4-FFF2-40B4-BE49-F238E27FC236}">
-                <a16:creationId xmlns:a16="http://schemas.microsoft.com/office/drawing/2014/main" id="{8908D5F5-9677-4DAE-BDAB-949D7790C225}"/>
+                <a16:creationId xmlns:a16="http://schemas.microsoft.com/office/drawing/2014/main" id="{14A317A2-1631-4711-AE03-B1DC634CC48A}"/>
               </a:ext>
             </a:extLst>
           </p:cNvPr>
@@ -14334,7 +14334,7 @@
           <p:cNvPr id="11" name="">
             <a:extLst xmlns:a="http://schemas.openxmlformats.org/drawingml/2006/main">
               <a:ext uri="{FF2B5EF4-FFF2-40B4-BE49-F238E27FC236}">
-                <a16:creationId xmlns:a16="http://schemas.microsoft.com/office/drawing/2014/main" id="{0A3A9474-1FC9-41D1-B541-AFD419A17340}"/>
+                <a16:creationId xmlns:a16="http://schemas.microsoft.com/office/drawing/2014/main" id="{C343571D-A18D-4EE1-914D-4AAFA627CD79}"/>
               </a:ext>
             </a:extLst>
           </p:cNvPr>
@@ -14392,7 +14392,7 @@
           <p:cNvPr id="12" name="">
             <a:extLst xmlns:a="http://schemas.openxmlformats.org/drawingml/2006/main">
               <a:ext uri="{FF2B5EF4-FFF2-40B4-BE49-F238E27FC236}">
-                <a16:creationId xmlns:a16="http://schemas.microsoft.com/office/drawing/2014/main" id="{3BA7575A-27F3-43B3-83EC-A7A77B1C00B5}"/>
+                <a16:creationId xmlns:a16="http://schemas.microsoft.com/office/drawing/2014/main" id="{E1349F5D-0A5D-492F-99AA-AB12ABD28610}"/>
               </a:ext>
             </a:extLst>
           </p:cNvPr>
@@ -14425,7 +14425,7 @@
           <p:cNvPr id="13" name="">
             <a:extLst xmlns:a="http://schemas.openxmlformats.org/drawingml/2006/main">
               <a:ext uri="{FF2B5EF4-FFF2-40B4-BE49-F238E27FC236}">
-                <a16:creationId xmlns:a16="http://schemas.microsoft.com/office/drawing/2014/main" id="{E2E56F7F-5EEA-484D-ADE5-1CAF47D10587}"/>
+                <a16:creationId xmlns:a16="http://schemas.microsoft.com/office/drawing/2014/main" id="{ABE70F90-7765-45D1-87B0-E30CEF3EB008}"/>
               </a:ext>
             </a:extLst>
           </p:cNvPr>
@@ -14483,7 +14483,7 @@
           <p:cNvPr id="14" name="">
             <a:extLst xmlns:a="http://schemas.openxmlformats.org/drawingml/2006/main">
               <a:ext uri="{FF2B5EF4-FFF2-40B4-BE49-F238E27FC236}">
-                <a16:creationId xmlns:a16="http://schemas.microsoft.com/office/drawing/2014/main" id="{BA4462D3-CA17-4286-A3EE-7ADFB46AF2E7}"/>
+                <a16:creationId xmlns:a16="http://schemas.microsoft.com/office/drawing/2014/main" id="{04A1EC1B-2408-4E1D-A9D4-5372B9F5F15B}"/>
               </a:ext>
             </a:extLst>
           </p:cNvPr>
@@ -14516,7 +14516,7 @@
           <p:cNvPr id="15" name="">
             <a:extLst xmlns:a="http://schemas.openxmlformats.org/drawingml/2006/main">
               <a:ext uri="{FF2B5EF4-FFF2-40B4-BE49-F238E27FC236}">
-                <a16:creationId xmlns:a16="http://schemas.microsoft.com/office/drawing/2014/main" id="{52AD2D41-4F7B-4065-892F-D58048F29F67}"/>
+                <a16:creationId xmlns:a16="http://schemas.microsoft.com/office/drawing/2014/main" id="{55E400DE-D1A5-40E4-85E4-826DF3BB3DCF}"/>
               </a:ext>
             </a:extLst>
           </p:cNvPr>
@@ -14574,7 +14574,7 @@
           <p:cNvPr id="16" name="">
             <a:extLst xmlns:a="http://schemas.openxmlformats.org/drawingml/2006/main">
               <a:ext uri="{FF2B5EF4-FFF2-40B4-BE49-F238E27FC236}">
-                <a16:creationId xmlns:a16="http://schemas.microsoft.com/office/drawing/2014/main" id="{3DB91B1C-7361-42BE-8B63-88330375C173}"/>
+                <a16:creationId xmlns:a16="http://schemas.microsoft.com/office/drawing/2014/main" id="{2245AB57-5910-4C57-AA48-A917F0ED40FB}"/>
               </a:ext>
             </a:extLst>
           </p:cNvPr>
@@ -14607,7 +14607,7 @@
           <p:cNvPr id="17" name="">
             <a:extLst xmlns:a="http://schemas.openxmlformats.org/drawingml/2006/main">
               <a:ext uri="{FF2B5EF4-FFF2-40B4-BE49-F238E27FC236}">
-                <a16:creationId xmlns:a16="http://schemas.microsoft.com/office/drawing/2014/main" id="{D5FE77DB-F4ED-4B81-8683-C302FB6858AB}"/>
+                <a16:creationId xmlns:a16="http://schemas.microsoft.com/office/drawing/2014/main" id="{680A7371-FF85-4351-AE05-D98D169AC0D7}"/>
               </a:ext>
             </a:extLst>
           </p:cNvPr>
@@ -14665,7 +14665,7 @@
           <p:cNvPr id="18" name="">
             <a:extLst xmlns:a="http://schemas.openxmlformats.org/drawingml/2006/main">
               <a:ext uri="{FF2B5EF4-FFF2-40B4-BE49-F238E27FC236}">
-                <a16:creationId xmlns:a16="http://schemas.microsoft.com/office/drawing/2014/main" id="{3A335B9C-B1B7-4CC0-A91A-B67F9895F112}"/>
+                <a16:creationId xmlns:a16="http://schemas.microsoft.com/office/drawing/2014/main" id="{5CA84A5B-B977-4F4F-99ED-76FBBBB5DD56}"/>
               </a:ext>
             </a:extLst>
           </p:cNvPr>
@@ -14698,7 +14698,7 @@
           <p:cNvPr id="19" name="">
             <a:extLst xmlns:a="http://schemas.openxmlformats.org/drawingml/2006/main">
               <a:ext uri="{FF2B5EF4-FFF2-40B4-BE49-F238E27FC236}">
-                <a16:creationId xmlns:a16="http://schemas.microsoft.com/office/drawing/2014/main" id="{E6DC0159-158F-4FD9-B753-6F45D29584C2}"/>
+                <a16:creationId xmlns:a16="http://schemas.microsoft.com/office/drawing/2014/main" id="{D055D0FB-68E5-474B-BC06-7FE7379E11C1}"/>
               </a:ext>
             </a:extLst>
           </p:cNvPr>
@@ -14756,7 +14756,7 @@
           <p:cNvPr id="20" name="">
             <a:extLst xmlns:a="http://schemas.openxmlformats.org/drawingml/2006/main">
               <a:ext uri="{FF2B5EF4-FFF2-40B4-BE49-F238E27FC236}">
-                <a16:creationId xmlns:a16="http://schemas.microsoft.com/office/drawing/2014/main" id="{A16DF3B5-D89A-4677-895F-CC29B029991B}"/>
+                <a16:creationId xmlns:a16="http://schemas.microsoft.com/office/drawing/2014/main" id="{B7A3B340-7E47-49E3-B740-E653AE0CFFEA}"/>
               </a:ext>
             </a:extLst>
           </p:cNvPr>
@@ -14789,7 +14789,7 @@
           <p:cNvPr id="21" name="">
             <a:extLst xmlns:a="http://schemas.openxmlformats.org/drawingml/2006/main">
               <a:ext uri="{FF2B5EF4-FFF2-40B4-BE49-F238E27FC236}">
-                <a16:creationId xmlns:a16="http://schemas.microsoft.com/office/drawing/2014/main" id="{F77CD307-7ECB-4061-8068-8C48775B00F1}"/>
+                <a16:creationId xmlns:a16="http://schemas.microsoft.com/office/drawing/2014/main" id="{27B33055-C65B-4F55-98FA-313A7CA1407E}"/>
               </a:ext>
             </a:extLst>
           </p:cNvPr>
@@ -14847,7 +14847,7 @@
           <p:cNvPr id="22" name="">
             <a:extLst xmlns:a="http://schemas.openxmlformats.org/drawingml/2006/main">
               <a:ext uri="{FF2B5EF4-FFF2-40B4-BE49-F238E27FC236}">
-                <a16:creationId xmlns:a16="http://schemas.microsoft.com/office/drawing/2014/main" id="{F5733665-1D92-4E2C-BD32-7A08F3EC1369}"/>
+                <a16:creationId xmlns:a16="http://schemas.microsoft.com/office/drawing/2014/main" id="{30E40949-C082-4F5F-B8CF-8F6AA470F948}"/>
               </a:ext>
             </a:extLst>
           </p:cNvPr>
@@ -14880,7 +14880,7 @@
           <p:cNvPr id="23" name="">
             <a:extLst xmlns:a="http://schemas.openxmlformats.org/drawingml/2006/main">
               <a:ext uri="{FF2B5EF4-FFF2-40B4-BE49-F238E27FC236}">
-                <a16:creationId xmlns:a16="http://schemas.microsoft.com/office/drawing/2014/main" id="{AFBB50EA-AF10-4522-B1AC-08D098770053}"/>
+                <a16:creationId xmlns:a16="http://schemas.microsoft.com/office/drawing/2014/main" id="{0344D4C9-D180-454A-A892-F6B078FD5570}"/>
               </a:ext>
             </a:extLst>
           </p:cNvPr>
@@ -14938,7 +14938,7 @@
           <p:cNvPr id="24" name="">
             <a:extLst xmlns:a="http://schemas.openxmlformats.org/drawingml/2006/main">
               <a:ext uri="{FF2B5EF4-FFF2-40B4-BE49-F238E27FC236}">
-                <a16:creationId xmlns:a16="http://schemas.microsoft.com/office/drawing/2014/main" id="{BBF497F6-9D47-48C0-A7B9-F375CA10366A}"/>
+                <a16:creationId xmlns:a16="http://schemas.microsoft.com/office/drawing/2014/main" id="{F475A644-0506-4781-8D01-A9918EB2C08B}"/>
               </a:ext>
             </a:extLst>
           </p:cNvPr>
@@ -14971,7 +14971,7 @@
           <p:cNvPr id="25" name="">
             <a:extLst xmlns:a="http://schemas.openxmlformats.org/drawingml/2006/main">
               <a:ext uri="{FF2B5EF4-FFF2-40B4-BE49-F238E27FC236}">
-                <a16:creationId xmlns:a16="http://schemas.microsoft.com/office/drawing/2014/main" id="{668459FE-5FA2-4268-BF9C-0F0EBF421E1A}"/>
+                <a16:creationId xmlns:a16="http://schemas.microsoft.com/office/drawing/2014/main" id="{805322AF-5D46-480B-BE98-6F817C5FDC23}"/>
               </a:ext>
             </a:extLst>
           </p:cNvPr>
@@ -15029,7 +15029,7 @@
           <p:cNvPr id="26" name="">
             <a:extLst xmlns:a="http://schemas.openxmlformats.org/drawingml/2006/main">
               <a:ext uri="{FF2B5EF4-FFF2-40B4-BE49-F238E27FC236}">
-                <a16:creationId xmlns:a16="http://schemas.microsoft.com/office/drawing/2014/main" id="{E42C0E35-DF19-43CC-8991-35C39885C5BB}"/>
+                <a16:creationId xmlns:a16="http://schemas.microsoft.com/office/drawing/2014/main" id="{37C4FD96-9B9B-4870-80F1-D836407D8131}"/>
               </a:ext>
             </a:extLst>
           </p:cNvPr>
@@ -15062,7 +15062,7 @@
           <p:cNvPr id="27" name="">
             <a:extLst xmlns:a="http://schemas.openxmlformats.org/drawingml/2006/main">
               <a:ext uri="{FF2B5EF4-FFF2-40B4-BE49-F238E27FC236}">
-                <a16:creationId xmlns:a16="http://schemas.microsoft.com/office/drawing/2014/main" id="{4AAF1357-42C0-4B38-BD48-553AE0A5E1BA}"/>
+                <a16:creationId xmlns:a16="http://schemas.microsoft.com/office/drawing/2014/main" id="{4877EE49-98FA-44E8-8E23-22D63DCA0840}"/>
               </a:ext>
             </a:extLst>
           </p:cNvPr>
@@ -15120,7 +15120,7 @@
           <p:cNvPr id="28" name="">
             <a:extLst xmlns:a="http://schemas.openxmlformats.org/drawingml/2006/main">
               <a:ext uri="{FF2B5EF4-FFF2-40B4-BE49-F238E27FC236}">
-                <a16:creationId xmlns:a16="http://schemas.microsoft.com/office/drawing/2014/main" id="{16577099-2EAB-4F36-A90E-CF849FE56090}"/>
+                <a16:creationId xmlns:a16="http://schemas.microsoft.com/office/drawing/2014/main" id="{CAA61C34-E15A-4444-A1E0-1E1DFE03245B}"/>
               </a:ext>
             </a:extLst>
           </p:cNvPr>
@@ -15153,7 +15153,7 @@
           <p:cNvPr id="29" name="">
             <a:extLst xmlns:a="http://schemas.openxmlformats.org/drawingml/2006/main">
               <a:ext uri="{FF2B5EF4-FFF2-40B4-BE49-F238E27FC236}">
-                <a16:creationId xmlns:a16="http://schemas.microsoft.com/office/drawing/2014/main" id="{54749223-0AA4-49AF-844A-2487F310B396}"/>
+                <a16:creationId xmlns:a16="http://schemas.microsoft.com/office/drawing/2014/main" id="{9020F6C4-17F9-45AA-B895-20B0428DC902}"/>
               </a:ext>
             </a:extLst>
           </p:cNvPr>
@@ -15211,7 +15211,7 @@
           <p:cNvPr id="30" name="">
             <a:extLst xmlns:a="http://schemas.openxmlformats.org/drawingml/2006/main">
               <a:ext uri="{FF2B5EF4-FFF2-40B4-BE49-F238E27FC236}">
-                <a16:creationId xmlns:a16="http://schemas.microsoft.com/office/drawing/2014/main" id="{389632FB-4AAF-4BFD-AE0B-6E0BB1C1AE1A}"/>
+                <a16:creationId xmlns:a16="http://schemas.microsoft.com/office/drawing/2014/main" id="{8F09272D-2C3F-4CD0-9C11-74ABBD41F9F9}"/>
               </a:ext>
             </a:extLst>
           </p:cNvPr>
@@ -15244,7 +15244,7 @@
           <p:cNvPr id="31" name="">
             <a:extLst xmlns:a="http://schemas.openxmlformats.org/drawingml/2006/main">
               <a:ext uri="{FF2B5EF4-FFF2-40B4-BE49-F238E27FC236}">
-                <a16:creationId xmlns:a16="http://schemas.microsoft.com/office/drawing/2014/main" id="{E50D65CC-1C4E-4973-B2AE-1ADD730EC018}"/>
+                <a16:creationId xmlns:a16="http://schemas.microsoft.com/office/drawing/2014/main" id="{50916AD9-A419-488D-8878-0DE50F8FBA08}"/>
               </a:ext>
             </a:extLst>
           </p:cNvPr>
@@ -15302,7 +15302,7 @@
           <p:cNvPr id="32" name="">
             <a:extLst xmlns:a="http://schemas.openxmlformats.org/drawingml/2006/main">
               <a:ext uri="{FF2B5EF4-FFF2-40B4-BE49-F238E27FC236}">
-                <a16:creationId xmlns:a16="http://schemas.microsoft.com/office/drawing/2014/main" id="{CAC34C11-DF00-46FD-A8D9-21E852821516}"/>
+                <a16:creationId xmlns:a16="http://schemas.microsoft.com/office/drawing/2014/main" id="{1A7F9B72-FE7C-4884-BCFA-44D18831AB7F}"/>
               </a:ext>
             </a:extLst>
           </p:cNvPr>
@@ -15335,7 +15335,7 @@
           <p:cNvPr id="33" name="">
             <a:extLst xmlns:a="http://schemas.openxmlformats.org/drawingml/2006/main">
               <a:ext uri="{FF2B5EF4-FFF2-40B4-BE49-F238E27FC236}">
-                <a16:creationId xmlns:a16="http://schemas.microsoft.com/office/drawing/2014/main" id="{E7CCA47C-681C-4460-B810-45DF9341D46A}"/>
+                <a16:creationId xmlns:a16="http://schemas.microsoft.com/office/drawing/2014/main" id="{6BD9E4B6-D219-481C-A8F1-F6ADC3007B21}"/>
               </a:ext>
             </a:extLst>
           </p:cNvPr>
@@ -15393,7 +15393,7 @@
           <p:cNvPr id="34" name="">
             <a:extLst xmlns:a="http://schemas.openxmlformats.org/drawingml/2006/main">
               <a:ext uri="{FF2B5EF4-FFF2-40B4-BE49-F238E27FC236}">
-                <a16:creationId xmlns:a16="http://schemas.microsoft.com/office/drawing/2014/main" id="{E6A6478E-0AE7-4F74-80A2-6749396ACDD1}"/>
+                <a16:creationId xmlns:a16="http://schemas.microsoft.com/office/drawing/2014/main" id="{DC1B79B2-623C-41CF-ABC5-363370B694E9}"/>
               </a:ext>
             </a:extLst>
           </p:cNvPr>
@@ -15426,7 +15426,7 @@
           <p:cNvPr id="35" name="">
             <a:extLst xmlns:a="http://schemas.openxmlformats.org/drawingml/2006/main">
               <a:ext uri="{FF2B5EF4-FFF2-40B4-BE49-F238E27FC236}">
-                <a16:creationId xmlns:a16="http://schemas.microsoft.com/office/drawing/2014/main" id="{EDD9B90B-9445-4BC2-8E3D-DD23FA65DA53}"/>
+                <a16:creationId xmlns:a16="http://schemas.microsoft.com/office/drawing/2014/main" id="{5FC5B97C-251C-494E-8DC9-9F058B6273B1}"/>
               </a:ext>
             </a:extLst>
           </p:cNvPr>
@@ -15484,7 +15484,7 @@
           <p:cNvPr id="36" name="">
             <a:extLst xmlns:a="http://schemas.openxmlformats.org/drawingml/2006/main">
               <a:ext uri="{FF2B5EF4-FFF2-40B4-BE49-F238E27FC236}">
-                <a16:creationId xmlns:a16="http://schemas.microsoft.com/office/drawing/2014/main" id="{B38F288C-82C1-4D06-BEFB-67439BC5C6FE}"/>
+                <a16:creationId xmlns:a16="http://schemas.microsoft.com/office/drawing/2014/main" id="{F0CE4E72-5181-4DF4-9410-5B5C9DC0AD0F}"/>
               </a:ext>
             </a:extLst>
           </p:cNvPr>
@@ -15517,7 +15517,7 @@
           <p:cNvPr id="37" name="">
             <a:extLst xmlns:a="http://schemas.openxmlformats.org/drawingml/2006/main">
               <a:ext uri="{FF2B5EF4-FFF2-40B4-BE49-F238E27FC236}">
-                <a16:creationId xmlns:a16="http://schemas.microsoft.com/office/drawing/2014/main" id="{E0142D89-FC93-418C-A740-EEFA25003756}"/>
+                <a16:creationId xmlns:a16="http://schemas.microsoft.com/office/drawing/2014/main" id="{571A5A03-42E4-4685-A97A-C6EE3105B214}"/>
               </a:ext>
             </a:extLst>
           </p:cNvPr>
@@ -15575,7 +15575,7 @@
           <p:cNvPr id="38" name="">
             <a:extLst xmlns:a="http://schemas.openxmlformats.org/drawingml/2006/main">
               <a:ext uri="{FF2B5EF4-FFF2-40B4-BE49-F238E27FC236}">
-                <a16:creationId xmlns:a16="http://schemas.microsoft.com/office/drawing/2014/main" id="{5B00954D-828D-4A2E-8B70-D1B87C83EB2A}"/>
+                <a16:creationId xmlns:a16="http://schemas.microsoft.com/office/drawing/2014/main" id="{EA28F583-5048-4802-8CB6-A8B35DA1BC4F}"/>
               </a:ext>
             </a:extLst>
           </p:cNvPr>
@@ -15608,7 +15608,7 @@
           <p:cNvPr id="39" name="">
             <a:extLst xmlns:a="http://schemas.openxmlformats.org/drawingml/2006/main">
               <a:ext uri="{FF2B5EF4-FFF2-40B4-BE49-F238E27FC236}">
-                <a16:creationId xmlns:a16="http://schemas.microsoft.com/office/drawing/2014/main" id="{E2BA1320-F1F3-481E-BE15-8FD16544A320}"/>
+                <a16:creationId xmlns:a16="http://schemas.microsoft.com/office/drawing/2014/main" id="{62A0C865-C12A-48B7-8B81-CE87D1623C9C}"/>
               </a:ext>
             </a:extLst>
           </p:cNvPr>
@@ -15666,7 +15666,7 @@
           <p:cNvPr id="40" name="">
             <a:extLst xmlns:a="http://schemas.openxmlformats.org/drawingml/2006/main">
               <a:ext uri="{FF2B5EF4-FFF2-40B4-BE49-F238E27FC236}">
-                <a16:creationId xmlns:a16="http://schemas.microsoft.com/office/drawing/2014/main" id="{D08E161E-C8C5-4E87-B718-56DF88EEE576}"/>
+                <a16:creationId xmlns:a16="http://schemas.microsoft.com/office/drawing/2014/main" id="{203FEC16-29A8-4DAB-951E-D288B102D072}"/>
               </a:ext>
             </a:extLst>
           </p:cNvPr>
@@ -15699,7 +15699,7 @@
           <p:cNvPr id="41" name="">
             <a:extLst xmlns:a="http://schemas.openxmlformats.org/drawingml/2006/main">
               <a:ext uri="{FF2B5EF4-FFF2-40B4-BE49-F238E27FC236}">
-                <a16:creationId xmlns:a16="http://schemas.microsoft.com/office/drawing/2014/main" id="{24962752-77F4-4B44-8CA4-AA545413012E}"/>
+                <a16:creationId xmlns:a16="http://schemas.microsoft.com/office/drawing/2014/main" id="{E52FFE78-B16B-418F-99C3-6B289C34F463}"/>
               </a:ext>
             </a:extLst>
           </p:cNvPr>
@@ -15757,7 +15757,7 @@
           <p:cNvPr id="42" name="">
             <a:extLst xmlns:a="http://schemas.openxmlformats.org/drawingml/2006/main">
               <a:ext uri="{FF2B5EF4-FFF2-40B4-BE49-F238E27FC236}">
-                <a16:creationId xmlns:a16="http://schemas.microsoft.com/office/drawing/2014/main" id="{9781EA37-87CC-4A98-BC09-8FFB58624CA7}"/>
+                <a16:creationId xmlns:a16="http://schemas.microsoft.com/office/drawing/2014/main" id="{041599AE-4D5F-418D-B0C4-EEEF69C3F39D}"/>
               </a:ext>
             </a:extLst>
           </p:cNvPr>
@@ -15790,7 +15790,7 @@
           <p:cNvPr id="43" name="">
             <a:extLst xmlns:a="http://schemas.openxmlformats.org/drawingml/2006/main">
               <a:ext uri="{FF2B5EF4-FFF2-40B4-BE49-F238E27FC236}">
-                <a16:creationId xmlns:a16="http://schemas.microsoft.com/office/drawing/2014/main" id="{C948A0F1-7B9D-4102-8169-A6FDEEA6E8E4}"/>
+                <a16:creationId xmlns:a16="http://schemas.microsoft.com/office/drawing/2014/main" id="{D6235ABB-2AED-4AFE-90D8-D409DB114EA8}"/>
               </a:ext>
             </a:extLst>
           </p:cNvPr>
@@ -15848,7 +15848,7 @@
           <p:cNvPr id="44" name="">
             <a:extLst xmlns:a="http://schemas.openxmlformats.org/drawingml/2006/main">
               <a:ext uri="{FF2B5EF4-FFF2-40B4-BE49-F238E27FC236}">
-                <a16:creationId xmlns:a16="http://schemas.microsoft.com/office/drawing/2014/main" id="{6D1AB276-99B0-47F4-A051-8C2148FFE889}"/>
+                <a16:creationId xmlns:a16="http://schemas.microsoft.com/office/drawing/2014/main" id="{69B0C3CE-22DD-47B2-BE20-138A7D1794C1}"/>
               </a:ext>
             </a:extLst>
           </p:cNvPr>
@@ -15881,7 +15881,7 @@
           <p:cNvPr id="45" name="">
             <a:extLst xmlns:a="http://schemas.openxmlformats.org/drawingml/2006/main">
               <a:ext uri="{FF2B5EF4-FFF2-40B4-BE49-F238E27FC236}">
-                <a16:creationId xmlns:a16="http://schemas.microsoft.com/office/drawing/2014/main" id="{BD503AC3-BDB5-4AFB-8952-2B32DDF32E8E}"/>
+                <a16:creationId xmlns:a16="http://schemas.microsoft.com/office/drawing/2014/main" id="{3264B8B2-41C1-4AB9-A0C6-3F3E688513D1}"/>
               </a:ext>
             </a:extLst>
           </p:cNvPr>
@@ -15939,7 +15939,7 @@
           <p:cNvPr id="46" name="">
             <a:extLst xmlns:a="http://schemas.openxmlformats.org/drawingml/2006/main">
               <a:ext uri="{FF2B5EF4-FFF2-40B4-BE49-F238E27FC236}">
-                <a16:creationId xmlns:a16="http://schemas.microsoft.com/office/drawing/2014/main" id="{087DDB02-8FE9-404D-80C0-ED2D55DCE025}"/>
+                <a16:creationId xmlns:a16="http://schemas.microsoft.com/office/drawing/2014/main" id="{17BA83EF-6278-40C7-900D-9718BCB0747A}"/>
               </a:ext>
             </a:extLst>
           </p:cNvPr>
@@ -15972,7 +15972,7 @@
           <p:cNvPr id="47" name="">
             <a:extLst xmlns:a="http://schemas.openxmlformats.org/drawingml/2006/main">
               <a:ext uri="{FF2B5EF4-FFF2-40B4-BE49-F238E27FC236}">
-                <a16:creationId xmlns:a16="http://schemas.microsoft.com/office/drawing/2014/main" id="{8EAFAC79-3755-4CC0-835F-FBA05CAE220D}"/>
+                <a16:creationId xmlns:a16="http://schemas.microsoft.com/office/drawing/2014/main" id="{24FC356C-3666-497F-BA0E-612B43DE6ECA}"/>
               </a:ext>
             </a:extLst>
           </p:cNvPr>
@@ -16030,7 +16030,7 @@
           <p:cNvPr id="48" name="">
             <a:extLst xmlns:a="http://schemas.openxmlformats.org/drawingml/2006/main">
               <a:ext uri="{FF2B5EF4-FFF2-40B4-BE49-F238E27FC236}">
-                <a16:creationId xmlns:a16="http://schemas.microsoft.com/office/drawing/2014/main" id="{DB4C24A3-5247-4F9C-B866-E907864378A5}"/>
+                <a16:creationId xmlns:a16="http://schemas.microsoft.com/office/drawing/2014/main" id="{30DB98A9-8A05-4B81-9ED8-41F6C83BAD03}"/>
               </a:ext>
             </a:extLst>
           </p:cNvPr>
@@ -16063,7 +16063,7 @@
           <p:cNvPr id="49" name="">
             <a:extLst xmlns:a="http://schemas.openxmlformats.org/drawingml/2006/main">
               <a:ext uri="{FF2B5EF4-FFF2-40B4-BE49-F238E27FC236}">
-                <a16:creationId xmlns:a16="http://schemas.microsoft.com/office/drawing/2014/main" id="{AE1155D8-DD93-47C4-A372-464D3EE1F887}"/>
+                <a16:creationId xmlns:a16="http://schemas.microsoft.com/office/drawing/2014/main" id="{9DF02CDF-0F53-4CF9-90B2-C2840D6D4B06}"/>
               </a:ext>
             </a:extLst>
           </p:cNvPr>
@@ -16121,7 +16121,7 @@
           <p:cNvPr id="50" name="">
             <a:extLst xmlns:a="http://schemas.openxmlformats.org/drawingml/2006/main">
               <a:ext uri="{FF2B5EF4-FFF2-40B4-BE49-F238E27FC236}">
-                <a16:creationId xmlns:a16="http://schemas.microsoft.com/office/drawing/2014/main" id="{E015BA6C-EA27-4A7F-AE03-B6CF0B2CBF1F}"/>
+                <a16:creationId xmlns:a16="http://schemas.microsoft.com/office/drawing/2014/main" id="{F83D6C95-3A4D-4635-A205-40189344DF3F}"/>
               </a:ext>
             </a:extLst>
           </p:cNvPr>
@@ -16154,7 +16154,7 @@
           <p:cNvPr id="51" name="">
             <a:extLst xmlns:a="http://schemas.openxmlformats.org/drawingml/2006/main">
               <a:ext uri="{FF2B5EF4-FFF2-40B4-BE49-F238E27FC236}">
-                <a16:creationId xmlns:a16="http://schemas.microsoft.com/office/drawing/2014/main" id="{12D39099-331C-4E70-8616-334B091E2F0C}"/>
+                <a16:creationId xmlns:a16="http://schemas.microsoft.com/office/drawing/2014/main" id="{DC5B5BAC-D306-4ABB-9262-3444FC892232}"/>
               </a:ext>
             </a:extLst>
           </p:cNvPr>
@@ -16212,7 +16212,7 @@
           <p:cNvPr id="52" name="">
             <a:extLst xmlns:a="http://schemas.openxmlformats.org/drawingml/2006/main">
               <a:ext uri="{FF2B5EF4-FFF2-40B4-BE49-F238E27FC236}">
-                <a16:creationId xmlns:a16="http://schemas.microsoft.com/office/drawing/2014/main" id="{D35E5898-9C02-4DB9-A031-7BCB0E9D1BB9}"/>
+                <a16:creationId xmlns:a16="http://schemas.microsoft.com/office/drawing/2014/main" id="{68D98A28-E3C0-4708-B287-44B35B8D0DD2}"/>
               </a:ext>
             </a:extLst>
           </p:cNvPr>
@@ -16245,7 +16245,7 @@
           <p:cNvPr id="53" name="">
             <a:extLst xmlns:a="http://schemas.openxmlformats.org/drawingml/2006/main">
               <a:ext uri="{FF2B5EF4-FFF2-40B4-BE49-F238E27FC236}">
-                <a16:creationId xmlns:a16="http://schemas.microsoft.com/office/drawing/2014/main" id="{3C1B8774-798E-4379-AC63-4B7C696371CF}"/>
+                <a16:creationId xmlns:a16="http://schemas.microsoft.com/office/drawing/2014/main" id="{C0B21A57-11CF-4261-841C-507E8A31FE98}"/>
               </a:ext>
             </a:extLst>
           </p:cNvPr>
@@ -16303,7 +16303,7 @@
           <p:cNvPr id="54" name="">
             <a:extLst xmlns:a="http://schemas.openxmlformats.org/drawingml/2006/main">
               <a:ext uri="{FF2B5EF4-FFF2-40B4-BE49-F238E27FC236}">
-                <a16:creationId xmlns:a16="http://schemas.microsoft.com/office/drawing/2014/main" id="{AB09CEBA-94A2-478C-B470-5F65642E43D3}"/>
+                <a16:creationId xmlns:a16="http://schemas.microsoft.com/office/drawing/2014/main" id="{1EFF0C82-ADC2-4133-AE3D-B48C05094331}"/>
               </a:ext>
             </a:extLst>
           </p:cNvPr>
@@ -16336,7 +16336,7 @@
           <p:cNvPr id="55" name="">
             <a:extLst xmlns:a="http://schemas.openxmlformats.org/drawingml/2006/main">
               <a:ext uri="{FF2B5EF4-FFF2-40B4-BE49-F238E27FC236}">
-                <a16:creationId xmlns:a16="http://schemas.microsoft.com/office/drawing/2014/main" id="{32756E08-A23B-47B8-8D98-C7A57D9648BF}"/>
+                <a16:creationId xmlns:a16="http://schemas.microsoft.com/office/drawing/2014/main" id="{06A14043-D032-4D76-ABB9-E641E7F92202}"/>
               </a:ext>
             </a:extLst>
           </p:cNvPr>
@@ -16394,7 +16394,7 @@
           <p:cNvPr id="56" name="">
             <a:extLst xmlns:a="http://schemas.openxmlformats.org/drawingml/2006/main">
               <a:ext uri="{FF2B5EF4-FFF2-40B4-BE49-F238E27FC236}">
-                <a16:creationId xmlns:a16="http://schemas.microsoft.com/office/drawing/2014/main" id="{8837ADD2-3017-4569-9DB6-32F0758CFCDC}"/>
+                <a16:creationId xmlns:a16="http://schemas.microsoft.com/office/drawing/2014/main" id="{E6A8836E-BFBE-41FB-B41F-FDF1A12C362C}"/>
               </a:ext>
             </a:extLst>
           </p:cNvPr>
@@ -16427,7 +16427,7 @@
           <p:cNvPr id="57" name="">
             <a:extLst xmlns:a="http://schemas.openxmlformats.org/drawingml/2006/main">
               <a:ext uri="{FF2B5EF4-FFF2-40B4-BE49-F238E27FC236}">
-                <a16:creationId xmlns:a16="http://schemas.microsoft.com/office/drawing/2014/main" id="{94670E71-B461-412F-881A-152CC4A965CD}"/>
+                <a16:creationId xmlns:a16="http://schemas.microsoft.com/office/drawing/2014/main" id="{DAB4DF33-63A5-4EF0-B37D-6552CC943BE1}"/>
               </a:ext>
             </a:extLst>
           </p:cNvPr>
@@ -16485,7 +16485,7 @@
                 <a:latin typeface="Microsoft YaHei"/>
                 <a:ea typeface="Microsoft YaHei"/>
                 <a:cs typeface="Microsoft YaHei"/>
-                <a:hlinkClick xmlns:r="http://schemas.openxmlformats.org/officeDocument/2006/relationships" r:id="R313fb6c9698045c2"/>
+                <a:hlinkClick xmlns:r="http://schemas.openxmlformats.org/officeDocument/2006/relationships" r:id="R5297161d8f864e56"/>
               </a:rPr>
               <a:t>Codex节省用量建议</a:t>
             </a:r>
@@ -16497,7 +16497,7 @@
                 <a:latin typeface="Microsoft YaHei"/>
                 <a:ea typeface="Microsoft YaHei"/>
                 <a:cs typeface="Microsoft YaHei"/>
-                <a:hlinkClick xmlns:r="http://schemas.openxmlformats.org/officeDocument/2006/relationships" r:id="R035ea52829c4488b"/>
+                <a:hlinkClick xmlns:r="http://schemas.openxmlformats.org/officeDocument/2006/relationships" r:id="Rdccb46b9a5bd420d"/>
               </a:rPr>
               <a:t> · OpenAI Prompt Caching</a:t>
             </a:r>
@@ -16509,7 +16509,7 @@
                 <a:latin typeface="Microsoft YaHei"/>
                 <a:ea typeface="Microsoft YaHei"/>
                 <a:cs typeface="Microsoft YaHei"/>
-                <a:hlinkClick xmlns:r="http://schemas.openxmlformats.org/officeDocument/2006/relationships" r:id="R66a3042ddd8541ec"/>
+                <a:hlinkClick xmlns:r="http://schemas.openxmlformats.org/officeDocument/2006/relationships" r:id="R799882312e26429e"/>
               </a:rPr>
               <a:t> · Qoder Context Compression</a:t>
             </a:r>
@@ -16521,7 +16521,7 @@
                 <a:latin typeface="Microsoft YaHei"/>
                 <a:ea typeface="Microsoft YaHei"/>
                 <a:cs typeface="Microsoft YaHei"/>
-                <a:hlinkClick xmlns:r="http://schemas.openxmlformats.org/officeDocument/2006/relationships" r:id="R08c8ae0716de4a16"/>
+                <a:hlinkClick xmlns:r="http://schemas.openxmlformats.org/officeDocument/2006/relationships" r:id="R0053cb1bec7e4d46"/>
               </a:rPr>
               <a:t> · Anthropic Prompt Caching</a:t>
             </a:r>
@@ -16533,7 +16533,7 @@
           <p:cNvPr id="58" name="">
             <a:extLst xmlns:a="http://schemas.openxmlformats.org/drawingml/2006/main">
               <a:ext uri="{FF2B5EF4-FFF2-40B4-BE49-F238E27FC236}">
-                <a16:creationId xmlns:a16="http://schemas.microsoft.com/office/drawing/2014/main" id="{ED229A0A-599F-4D6B-B151-9658347257A7}"/>
+                <a16:creationId xmlns:a16="http://schemas.microsoft.com/office/drawing/2014/main" id="{EEFC7EB2-17DA-49DA-8408-6E8A466B22A1}"/>
               </a:ext>
             </a:extLst>
           </p:cNvPr>
@@ -16589,7 +16589,7 @@
     </p:spTree>
     <p:extLst>
       <p:ext uri="{BB962C8B-B14F-4D97-AF65-F5344CB8AC3E}">
-        <p14:creationId xmlns:p14="http://schemas.microsoft.com/office/powerpoint/2010/main" val="1585900464"/>
+        <p14:creationId xmlns:p14="http://schemas.microsoft.com/office/powerpoint/2010/main" val="1306103985"/>
       </p:ext>
     </p:extLst>
   </p:cSld>
@@ -16620,7 +16620,7 @@
           <p:cNvPr id="62" name="">
             <a:extLst xmlns:a="http://schemas.openxmlformats.org/drawingml/2006/main">
               <a:ext uri="{FF2B5EF4-FFF2-40B4-BE49-F238E27FC236}">
-                <a16:creationId xmlns:a16="http://schemas.microsoft.com/office/drawing/2014/main" id="{59A06BA3-37AB-4251-A8F4-99B50AF9EEF4}"/>
+                <a16:creationId xmlns:a16="http://schemas.microsoft.com/office/drawing/2014/main" id="{D58AE035-F0F9-49E1-963F-80D4698DC082}"/>
               </a:ext>
             </a:extLst>
           </p:cNvPr>
@@ -16653,7 +16653,7 @@
           <p:cNvPr id="2" name="">
             <a:extLst xmlns:a="http://schemas.openxmlformats.org/drawingml/2006/main">
               <a:ext uri="{FF2B5EF4-FFF2-40B4-BE49-F238E27FC236}">
-                <a16:creationId xmlns:a16="http://schemas.microsoft.com/office/drawing/2014/main" id="{A413DD96-FB7E-4C8F-A756-3ECE2E05440C}"/>
+                <a16:creationId xmlns:a16="http://schemas.microsoft.com/office/drawing/2014/main" id="{D2A64112-BBF5-49F5-B38A-B976D977ACF1}"/>
               </a:ext>
             </a:extLst>
           </p:cNvPr>
@@ -16711,7 +16711,7 @@
           <p:cNvPr id="3" name="">
             <a:extLst xmlns:a="http://schemas.openxmlformats.org/drawingml/2006/main">
               <a:ext uri="{FF2B5EF4-FFF2-40B4-BE49-F238E27FC236}">
-                <a16:creationId xmlns:a16="http://schemas.microsoft.com/office/drawing/2014/main" id="{ABA0DFE8-9C56-4945-AE1D-996C66F9071B}"/>
+                <a16:creationId xmlns:a16="http://schemas.microsoft.com/office/drawing/2014/main" id="{D985ABA6-1306-4223-9D0E-BF31EB048059}"/>
               </a:ext>
             </a:extLst>
           </p:cNvPr>
@@ -16769,7 +16769,7 @@
           <p:cNvPr id="4" name="">
             <a:extLst xmlns:a="http://schemas.openxmlformats.org/drawingml/2006/main">
               <a:ext uri="{FF2B5EF4-FFF2-40B4-BE49-F238E27FC236}">
-                <a16:creationId xmlns:a16="http://schemas.microsoft.com/office/drawing/2014/main" id="{EF12C987-FAED-43BA-9C8F-D99D9BA7E3D9}"/>
+                <a16:creationId xmlns:a16="http://schemas.microsoft.com/office/drawing/2014/main" id="{44FE2EFB-5D84-4FA0-A74A-7C0C9218E804}"/>
               </a:ext>
             </a:extLst>
           </p:cNvPr>
@@ -16806,7 +16806,7 @@
           <p:nvPr/>
         </p:nvPicPr>
         <p:blipFill>
-          <a:blip xmlns:r="http://schemas.openxmlformats.org/officeDocument/2006/relationships" xmlns:a="http://schemas.openxmlformats.org/drawingml/2006/main" r:embed="Rc4815fda2fe04e0c"/>
+          <a:blip xmlns:r="http://schemas.openxmlformats.org/officeDocument/2006/relationships" xmlns:a="http://schemas.openxmlformats.org/drawingml/2006/main" r:embed="R3eae075e5ffc4255"/>
           <a:stretch xmlns:a="http://schemas.openxmlformats.org/drawingml/2006/main"/>
         </p:blipFill>
         <p:spPr>
@@ -16824,7 +16824,7 @@
           <p:cNvPr id="6" name="">
             <a:extLst xmlns:a="http://schemas.openxmlformats.org/drawingml/2006/main">
               <a:ext uri="{FF2B5EF4-FFF2-40B4-BE49-F238E27FC236}">
-                <a16:creationId xmlns:a16="http://schemas.microsoft.com/office/drawing/2014/main" id="{0EC4C690-FBB5-4E80-9D58-FD78D980364F}"/>
+                <a16:creationId xmlns:a16="http://schemas.microsoft.com/office/drawing/2014/main" id="{31FBB06E-0DD9-4EE2-B54A-847C9B5B697E}"/>
               </a:ext>
             </a:extLst>
           </p:cNvPr>
@@ -16857,7 +16857,7 @@
           <p:cNvPr id="7" name="">
             <a:extLst xmlns:a="http://schemas.openxmlformats.org/drawingml/2006/main">
               <a:ext uri="{FF2B5EF4-FFF2-40B4-BE49-F238E27FC236}">
-                <a16:creationId xmlns:a16="http://schemas.microsoft.com/office/drawing/2014/main" id="{488FB66C-E371-43E7-9CDA-EC33600A7219}"/>
+                <a16:creationId xmlns:a16="http://schemas.microsoft.com/office/drawing/2014/main" id="{73163A59-A090-46D0-BE5F-AF721CA3B81D}"/>
               </a:ext>
             </a:extLst>
           </p:cNvPr>
@@ -16915,7 +16915,7 @@
           <p:cNvPr id="8" name="">
             <a:extLst xmlns:a="http://schemas.openxmlformats.org/drawingml/2006/main">
               <a:ext uri="{FF2B5EF4-FFF2-40B4-BE49-F238E27FC236}">
-                <a16:creationId xmlns:a16="http://schemas.microsoft.com/office/drawing/2014/main" id="{AAFA62DF-3116-48DF-AAF8-F9C2C3D26D94}"/>
+                <a16:creationId xmlns:a16="http://schemas.microsoft.com/office/drawing/2014/main" id="{A5FDDCE2-FB61-483B-A41A-E63ECE2FF6C4}"/>
               </a:ext>
             </a:extLst>
           </p:cNvPr>
@@ -16973,7 +16973,7 @@
           <p:cNvPr id="9" name="">
             <a:extLst xmlns:a="http://schemas.openxmlformats.org/drawingml/2006/main">
               <a:ext uri="{FF2B5EF4-FFF2-40B4-BE49-F238E27FC236}">
-                <a16:creationId xmlns:a16="http://schemas.microsoft.com/office/drawing/2014/main" id="{610A60F3-FB60-4A1D-BE6D-B9B282751FF9}"/>
+                <a16:creationId xmlns:a16="http://schemas.microsoft.com/office/drawing/2014/main" id="{A29FEC42-CD4C-433A-B57C-F7A5797F8EF9}"/>
               </a:ext>
             </a:extLst>
           </p:cNvPr>
@@ -17031,7 +17031,7 @@
           <p:cNvPr id="10" name="">
             <a:extLst xmlns:a="http://schemas.openxmlformats.org/drawingml/2006/main">
               <a:ext uri="{FF2B5EF4-FFF2-40B4-BE49-F238E27FC236}">
-                <a16:creationId xmlns:a16="http://schemas.microsoft.com/office/drawing/2014/main" id="{0F700DF1-9454-4BC4-BFB8-08321E86AAB5}"/>
+                <a16:creationId xmlns:a16="http://schemas.microsoft.com/office/drawing/2014/main" id="{6478C779-0722-4070-8A2C-D2C36DA9B176}"/>
               </a:ext>
             </a:extLst>
           </p:cNvPr>
@@ -17064,7 +17064,7 @@
           <p:cNvPr id="11" name="">
             <a:extLst xmlns:a="http://schemas.openxmlformats.org/drawingml/2006/main">
               <a:ext uri="{FF2B5EF4-FFF2-40B4-BE49-F238E27FC236}">
-                <a16:creationId xmlns:a16="http://schemas.microsoft.com/office/drawing/2014/main" id="{67FBEACF-53FB-4D1F-9EA4-1CCA732BDC1A}"/>
+                <a16:creationId xmlns:a16="http://schemas.microsoft.com/office/drawing/2014/main" id="{337EBEB6-B419-42D1-A4A8-3628D8499B51}"/>
               </a:ext>
             </a:extLst>
           </p:cNvPr>
@@ -17122,7 +17122,7 @@
           <p:cNvPr id="12" name="">
             <a:extLst xmlns:a="http://schemas.openxmlformats.org/drawingml/2006/main">
               <a:ext uri="{FF2B5EF4-FFF2-40B4-BE49-F238E27FC236}">
-                <a16:creationId xmlns:a16="http://schemas.microsoft.com/office/drawing/2014/main" id="{4BDF2DC0-369B-4684-89FF-F627178D5026}"/>
+                <a16:creationId xmlns:a16="http://schemas.microsoft.com/office/drawing/2014/main" id="{4783B654-977C-4BAA-BEE4-F9A071F72DD4}"/>
               </a:ext>
             </a:extLst>
           </p:cNvPr>
@@ -17180,7 +17180,7 @@
           <p:cNvPr id="13" name="">
             <a:extLst xmlns:a="http://schemas.openxmlformats.org/drawingml/2006/main">
               <a:ext uri="{FF2B5EF4-FFF2-40B4-BE49-F238E27FC236}">
-                <a16:creationId xmlns:a16="http://schemas.microsoft.com/office/drawing/2014/main" id="{F8297C55-97E3-4BF6-8D52-49FDF34C60FB}"/>
+                <a16:creationId xmlns:a16="http://schemas.microsoft.com/office/drawing/2014/main" id="{1C189E10-2BAA-4215-8EF0-BE7CAA108A5A}"/>
               </a:ext>
             </a:extLst>
           </p:cNvPr>
@@ -17238,7 +17238,7 @@
           <p:cNvPr id="14" name="">
             <a:extLst xmlns:a="http://schemas.openxmlformats.org/drawingml/2006/main">
               <a:ext uri="{FF2B5EF4-FFF2-40B4-BE49-F238E27FC236}">
-                <a16:creationId xmlns:a16="http://schemas.microsoft.com/office/drawing/2014/main" id="{370AC3BB-812D-4828-93DF-5E4CC7D7BD8B}"/>
+                <a16:creationId xmlns:a16="http://schemas.microsoft.com/office/drawing/2014/main" id="{53582A3D-2DFD-472B-AE5E-ADEF1A1667B8}"/>
               </a:ext>
             </a:extLst>
           </p:cNvPr>
@@ -17256,7 +17256,7 @@
             <a:avLst/>
           </a:prstGeom>
           <a:solidFill xmlns:a="http://schemas.openxmlformats.org/drawingml/2006/main">
-            <a:srgbClr val="FFF4F4"/>
+            <a:srgbClr val="F7F7F7"/>
           </a:solidFill>
           <a:ln xmlns:a="http://schemas.openxmlformats.org/drawingml/2006/main" w="9525">
             <a:solidFill>
@@ -17271,7 +17271,7 @@
           <p:cNvPr id="15" name="">
             <a:extLst xmlns:a="http://schemas.openxmlformats.org/drawingml/2006/main">
               <a:ext uri="{FF2B5EF4-FFF2-40B4-BE49-F238E27FC236}">
-                <a16:creationId xmlns:a16="http://schemas.microsoft.com/office/drawing/2014/main" id="{D7F82D7C-D135-4F8F-B4B4-905525D79706}"/>
+                <a16:creationId xmlns:a16="http://schemas.microsoft.com/office/drawing/2014/main" id="{F18A2B03-C7A1-4116-948E-F98E2E802F60}"/>
               </a:ext>
             </a:extLst>
           </p:cNvPr>
@@ -17329,7 +17329,7 @@
           <p:cNvPr id="16" name="">
             <a:extLst xmlns:a="http://schemas.openxmlformats.org/drawingml/2006/main">
               <a:ext uri="{FF2B5EF4-FFF2-40B4-BE49-F238E27FC236}">
-                <a16:creationId xmlns:a16="http://schemas.microsoft.com/office/drawing/2014/main" id="{BDEB5AD1-6913-49DB-9890-424AB5F6B249}"/>
+                <a16:creationId xmlns:a16="http://schemas.microsoft.com/office/drawing/2014/main" id="{F7F0AD2F-6DC0-49FB-A565-AEBE4B9B4D81}"/>
               </a:ext>
             </a:extLst>
           </p:cNvPr>
@@ -17387,7 +17387,7 @@
           <p:cNvPr id="17" name="">
             <a:extLst xmlns:a="http://schemas.openxmlformats.org/drawingml/2006/main">
               <a:ext uri="{FF2B5EF4-FFF2-40B4-BE49-F238E27FC236}">
-                <a16:creationId xmlns:a16="http://schemas.microsoft.com/office/drawing/2014/main" id="{B8AE68A8-FD6C-49B3-8EFE-DD97544C07D6}"/>
+                <a16:creationId xmlns:a16="http://schemas.microsoft.com/office/drawing/2014/main" id="{D367A4F5-8DC6-4150-9F15-6D5BCD282E72}"/>
               </a:ext>
             </a:extLst>
           </p:cNvPr>
@@ -17445,7 +17445,7 @@
           <p:cNvPr id="18" name="">
             <a:extLst xmlns:a="http://schemas.openxmlformats.org/drawingml/2006/main">
               <a:ext uri="{FF2B5EF4-FFF2-40B4-BE49-F238E27FC236}">
-                <a16:creationId xmlns:a16="http://schemas.microsoft.com/office/drawing/2014/main" id="{0007682E-8385-4467-BD6F-889B88225BA7}"/>
+                <a16:creationId xmlns:a16="http://schemas.microsoft.com/office/drawing/2014/main" id="{8E4F24A9-FBDC-4B5D-81FD-0ADA69A0B329}"/>
               </a:ext>
             </a:extLst>
           </p:cNvPr>
@@ -17478,7 +17478,7 @@
           <p:cNvPr id="19" name="">
             <a:extLst xmlns:a="http://schemas.openxmlformats.org/drawingml/2006/main">
               <a:ext uri="{FF2B5EF4-FFF2-40B4-BE49-F238E27FC236}">
-                <a16:creationId xmlns:a16="http://schemas.microsoft.com/office/drawing/2014/main" id="{9AA47130-A1E7-46FC-8EF1-919F734DFECD}"/>
+                <a16:creationId xmlns:a16="http://schemas.microsoft.com/office/drawing/2014/main" id="{D21464A8-9D98-40A3-8A86-4B75C207BCA7}"/>
               </a:ext>
             </a:extLst>
           </p:cNvPr>
@@ -17536,7 +17536,7 @@
           <p:cNvPr id="20" name="">
             <a:extLst xmlns:a="http://schemas.openxmlformats.org/drawingml/2006/main">
               <a:ext uri="{FF2B5EF4-FFF2-40B4-BE49-F238E27FC236}">
-                <a16:creationId xmlns:a16="http://schemas.microsoft.com/office/drawing/2014/main" id="{9A47D13B-51FD-4329-831C-65E256B95041}"/>
+                <a16:creationId xmlns:a16="http://schemas.microsoft.com/office/drawing/2014/main" id="{E32C1F67-F13B-4A8C-B114-2D305A6DAD16}"/>
               </a:ext>
             </a:extLst>
           </p:cNvPr>
@@ -17569,7 +17569,7 @@
           <p:cNvPr id="21" name="">
             <a:extLst xmlns:a="http://schemas.openxmlformats.org/drawingml/2006/main">
               <a:ext uri="{FF2B5EF4-FFF2-40B4-BE49-F238E27FC236}">
-                <a16:creationId xmlns:a16="http://schemas.microsoft.com/office/drawing/2014/main" id="{154CC050-F859-4A24-9068-B4FA53504C79}"/>
+                <a16:creationId xmlns:a16="http://schemas.microsoft.com/office/drawing/2014/main" id="{739991F7-34E0-4D64-9E00-304468FEA700}"/>
               </a:ext>
             </a:extLst>
           </p:cNvPr>
@@ -17627,7 +17627,7 @@
           <p:cNvPr id="22" name="">
             <a:extLst xmlns:a="http://schemas.openxmlformats.org/drawingml/2006/main">
               <a:ext uri="{FF2B5EF4-FFF2-40B4-BE49-F238E27FC236}">
-                <a16:creationId xmlns:a16="http://schemas.microsoft.com/office/drawing/2014/main" id="{18D14445-BFC8-43BA-BADD-69933A26939B}"/>
+                <a16:creationId xmlns:a16="http://schemas.microsoft.com/office/drawing/2014/main" id="{C2AA0ECE-B433-4877-8BFB-1A4B98183815}"/>
               </a:ext>
             </a:extLst>
           </p:cNvPr>
@@ -17660,7 +17660,7 @@
           <p:cNvPr id="23" name="">
             <a:extLst xmlns:a="http://schemas.openxmlformats.org/drawingml/2006/main">
               <a:ext uri="{FF2B5EF4-FFF2-40B4-BE49-F238E27FC236}">
-                <a16:creationId xmlns:a16="http://schemas.microsoft.com/office/drawing/2014/main" id="{027B01EA-DB75-49B6-9125-B18EA2B19CAA}"/>
+                <a16:creationId xmlns:a16="http://schemas.microsoft.com/office/drawing/2014/main" id="{D11580B9-438B-499D-A112-62EDD9B95CFC}"/>
               </a:ext>
             </a:extLst>
           </p:cNvPr>
@@ -17693,7 +17693,7 @@
           <p:cNvPr id="24" name="">
             <a:extLst xmlns:a="http://schemas.openxmlformats.org/drawingml/2006/main">
               <a:ext uri="{FF2B5EF4-FFF2-40B4-BE49-F238E27FC236}">
-                <a16:creationId xmlns:a16="http://schemas.microsoft.com/office/drawing/2014/main" id="{F49DC0E7-7B45-4B0C-B7F2-B45385C2B718}"/>
+                <a16:creationId xmlns:a16="http://schemas.microsoft.com/office/drawing/2014/main" id="{D380F5DB-E949-424D-BF59-FD96AAF5C0B2}"/>
               </a:ext>
             </a:extLst>
           </p:cNvPr>
@@ -17726,7 +17726,7 @@
           <p:cNvPr id="25" name="">
             <a:extLst xmlns:a="http://schemas.openxmlformats.org/drawingml/2006/main">
               <a:ext uri="{FF2B5EF4-FFF2-40B4-BE49-F238E27FC236}">
-                <a16:creationId xmlns:a16="http://schemas.microsoft.com/office/drawing/2014/main" id="{043304CB-D5F4-4369-B802-5F59848618B3}"/>
+                <a16:creationId xmlns:a16="http://schemas.microsoft.com/office/drawing/2014/main" id="{BE961470-9F2A-4158-A0EC-FBC98A896CF5}"/>
               </a:ext>
             </a:extLst>
           </p:cNvPr>
@@ -17784,7 +17784,7 @@
           <p:cNvPr id="26" name="">
             <a:extLst xmlns:a="http://schemas.openxmlformats.org/drawingml/2006/main">
               <a:ext uri="{FF2B5EF4-FFF2-40B4-BE49-F238E27FC236}">
-                <a16:creationId xmlns:a16="http://schemas.microsoft.com/office/drawing/2014/main" id="{7C52768C-7866-424D-8138-D9EC234BCE2A}"/>
+                <a16:creationId xmlns:a16="http://schemas.microsoft.com/office/drawing/2014/main" id="{14A7B95F-CFD7-4D26-8AC7-2376CD7B1FE1}"/>
               </a:ext>
             </a:extLst>
           </p:cNvPr>
@@ -17817,7 +17817,7 @@
           <p:cNvPr id="27" name="">
             <a:extLst xmlns:a="http://schemas.openxmlformats.org/drawingml/2006/main">
               <a:ext uri="{FF2B5EF4-FFF2-40B4-BE49-F238E27FC236}">
-                <a16:creationId xmlns:a16="http://schemas.microsoft.com/office/drawing/2014/main" id="{4658297C-D8EE-4381-A7C1-D6E80540BA7C}"/>
+                <a16:creationId xmlns:a16="http://schemas.microsoft.com/office/drawing/2014/main" id="{D47F6D86-7E54-4FC4-90FD-D84A5FEE053C}"/>
               </a:ext>
             </a:extLst>
           </p:cNvPr>
@@ -17850,7 +17850,7 @@
           <p:cNvPr id="28" name="">
             <a:extLst xmlns:a="http://schemas.openxmlformats.org/drawingml/2006/main">
               <a:ext uri="{FF2B5EF4-FFF2-40B4-BE49-F238E27FC236}">
-                <a16:creationId xmlns:a16="http://schemas.microsoft.com/office/drawing/2014/main" id="{EE8714ED-A5E5-493F-A44A-DA194820E21A}"/>
+                <a16:creationId xmlns:a16="http://schemas.microsoft.com/office/drawing/2014/main" id="{65237004-F215-4EEB-8E56-ABD7ED70EA9B}"/>
               </a:ext>
             </a:extLst>
           </p:cNvPr>
@@ -17883,7 +17883,7 @@
           <p:cNvPr id="29" name="">
             <a:extLst xmlns:a="http://schemas.openxmlformats.org/drawingml/2006/main">
               <a:ext uri="{FF2B5EF4-FFF2-40B4-BE49-F238E27FC236}">
-                <a16:creationId xmlns:a16="http://schemas.microsoft.com/office/drawing/2014/main" id="{C79998B2-CDAA-4977-B50F-F73BF3BD4B19}"/>
+                <a16:creationId xmlns:a16="http://schemas.microsoft.com/office/drawing/2014/main" id="{AE735A7D-1A93-4132-BAB7-617C93C8A96A}"/>
               </a:ext>
             </a:extLst>
           </p:cNvPr>
@@ -17941,7 +17941,7 @@
           <p:cNvPr id="30" name="">
             <a:extLst xmlns:a="http://schemas.openxmlformats.org/drawingml/2006/main">
               <a:ext uri="{FF2B5EF4-FFF2-40B4-BE49-F238E27FC236}">
-                <a16:creationId xmlns:a16="http://schemas.microsoft.com/office/drawing/2014/main" id="{9F626DC4-E96B-44AD-8FFC-37284D028593}"/>
+                <a16:creationId xmlns:a16="http://schemas.microsoft.com/office/drawing/2014/main" id="{F3E812B5-6707-4852-BD89-607BD372BBF5}"/>
               </a:ext>
             </a:extLst>
           </p:cNvPr>
@@ -17974,7 +17974,7 @@
           <p:cNvPr id="31" name="">
             <a:extLst xmlns:a="http://schemas.openxmlformats.org/drawingml/2006/main">
               <a:ext uri="{FF2B5EF4-FFF2-40B4-BE49-F238E27FC236}">
-                <a16:creationId xmlns:a16="http://schemas.microsoft.com/office/drawing/2014/main" id="{BF659BEE-5147-4EAA-9069-D36DD47ADE5D}"/>
+                <a16:creationId xmlns:a16="http://schemas.microsoft.com/office/drawing/2014/main" id="{5FBE9EF4-A0B9-4FE6-90F9-CEC7B80AEB56}"/>
               </a:ext>
             </a:extLst>
           </p:cNvPr>
@@ -18007,7 +18007,7 @@
           <p:cNvPr id="32" name="">
             <a:extLst xmlns:a="http://schemas.openxmlformats.org/drawingml/2006/main">
               <a:ext uri="{FF2B5EF4-FFF2-40B4-BE49-F238E27FC236}">
-                <a16:creationId xmlns:a16="http://schemas.microsoft.com/office/drawing/2014/main" id="{65CACB3D-EFE7-4B46-BF9E-DA835400AE92}"/>
+                <a16:creationId xmlns:a16="http://schemas.microsoft.com/office/drawing/2014/main" id="{0DCA1FF8-28B4-4661-B420-492727FD34A9}"/>
               </a:ext>
             </a:extLst>
           </p:cNvPr>
@@ -18040,7 +18040,7 @@
           <p:cNvPr id="33" name="">
             <a:extLst xmlns:a="http://schemas.openxmlformats.org/drawingml/2006/main">
               <a:ext uri="{FF2B5EF4-FFF2-40B4-BE49-F238E27FC236}">
-                <a16:creationId xmlns:a16="http://schemas.microsoft.com/office/drawing/2014/main" id="{88A68C78-B49E-4891-A8D0-B53168535F32}"/>
+                <a16:creationId xmlns:a16="http://schemas.microsoft.com/office/drawing/2014/main" id="{81877874-5C90-4EA4-88CA-41D4B78A8E84}"/>
               </a:ext>
             </a:extLst>
           </p:cNvPr>
@@ -18098,7 +18098,7 @@
           <p:cNvPr id="34" name="">
             <a:extLst xmlns:a="http://schemas.openxmlformats.org/drawingml/2006/main">
               <a:ext uri="{FF2B5EF4-FFF2-40B4-BE49-F238E27FC236}">
-                <a16:creationId xmlns:a16="http://schemas.microsoft.com/office/drawing/2014/main" id="{4A298711-8D5C-4408-A959-DF3F36C1EB91}"/>
+                <a16:creationId xmlns:a16="http://schemas.microsoft.com/office/drawing/2014/main" id="{0AD8271E-F71C-45FC-B929-4AAC32B27367}"/>
               </a:ext>
             </a:extLst>
           </p:cNvPr>
@@ -18131,7 +18131,7 @@
           <p:cNvPr id="35" name="">
             <a:extLst xmlns:a="http://schemas.openxmlformats.org/drawingml/2006/main">
               <a:ext uri="{FF2B5EF4-FFF2-40B4-BE49-F238E27FC236}">
-                <a16:creationId xmlns:a16="http://schemas.microsoft.com/office/drawing/2014/main" id="{A93858AB-61E8-4AF8-B822-2C861CEB8242}"/>
+                <a16:creationId xmlns:a16="http://schemas.microsoft.com/office/drawing/2014/main" id="{1A6EF732-9972-4579-A0EE-3354BE684252}"/>
               </a:ext>
             </a:extLst>
           </p:cNvPr>
@@ -18164,7 +18164,7 @@
           <p:cNvPr id="36" name="">
             <a:extLst xmlns:a="http://schemas.openxmlformats.org/drawingml/2006/main">
               <a:ext uri="{FF2B5EF4-FFF2-40B4-BE49-F238E27FC236}">
-                <a16:creationId xmlns:a16="http://schemas.microsoft.com/office/drawing/2014/main" id="{B4D04808-D3E1-4863-8944-D3A1F5B7DE55}"/>
+                <a16:creationId xmlns:a16="http://schemas.microsoft.com/office/drawing/2014/main" id="{3D461AB0-71BF-4E30-B737-3E704F20466B}"/>
               </a:ext>
             </a:extLst>
           </p:cNvPr>
@@ -18197,7 +18197,7 @@
           <p:cNvPr id="37" name="">
             <a:extLst xmlns:a="http://schemas.openxmlformats.org/drawingml/2006/main">
               <a:ext uri="{FF2B5EF4-FFF2-40B4-BE49-F238E27FC236}">
-                <a16:creationId xmlns:a16="http://schemas.microsoft.com/office/drawing/2014/main" id="{41E56375-AEEA-4FF5-83EA-9FD9A7AE39EA}"/>
+                <a16:creationId xmlns:a16="http://schemas.microsoft.com/office/drawing/2014/main" id="{63A89F66-AF8C-4F2C-85C4-FC9E75C5F59F}"/>
               </a:ext>
             </a:extLst>
           </p:cNvPr>
@@ -18255,7 +18255,7 @@
           <p:cNvPr id="38" name="">
             <a:extLst xmlns:a="http://schemas.openxmlformats.org/drawingml/2006/main">
               <a:ext uri="{FF2B5EF4-FFF2-40B4-BE49-F238E27FC236}">
-                <a16:creationId xmlns:a16="http://schemas.microsoft.com/office/drawing/2014/main" id="{295FA7D9-8792-4F07-BDEC-2C39AF909A29}"/>
+                <a16:creationId xmlns:a16="http://schemas.microsoft.com/office/drawing/2014/main" id="{E100FD97-87A1-450F-8188-642FF5AA7955}"/>
               </a:ext>
             </a:extLst>
           </p:cNvPr>
@@ -18288,7 +18288,7 @@
           <p:cNvPr id="39" name="">
             <a:extLst xmlns:a="http://schemas.openxmlformats.org/drawingml/2006/main">
               <a:ext uri="{FF2B5EF4-FFF2-40B4-BE49-F238E27FC236}">
-                <a16:creationId xmlns:a16="http://schemas.microsoft.com/office/drawing/2014/main" id="{20AF4331-CEBA-4B03-B5E0-E81E4F4C3945}"/>
+                <a16:creationId xmlns:a16="http://schemas.microsoft.com/office/drawing/2014/main" id="{AD1FB4EC-FDD1-4466-80EC-484AAC0E17F1}"/>
               </a:ext>
             </a:extLst>
           </p:cNvPr>
@@ -18321,7 +18321,7 @@
           <p:cNvPr id="40" name="">
             <a:extLst xmlns:a="http://schemas.openxmlformats.org/drawingml/2006/main">
               <a:ext uri="{FF2B5EF4-FFF2-40B4-BE49-F238E27FC236}">
-                <a16:creationId xmlns:a16="http://schemas.microsoft.com/office/drawing/2014/main" id="{FEDF82CF-9BD7-49B1-99B9-D6953E9B73C2}"/>
+                <a16:creationId xmlns:a16="http://schemas.microsoft.com/office/drawing/2014/main" id="{BD7A064E-D286-4378-A765-20732F6BC4F7}"/>
               </a:ext>
             </a:extLst>
           </p:cNvPr>
@@ -18354,7 +18354,7 @@
           <p:cNvPr id="41" name="">
             <a:extLst xmlns:a="http://schemas.openxmlformats.org/drawingml/2006/main">
               <a:ext uri="{FF2B5EF4-FFF2-40B4-BE49-F238E27FC236}">
-                <a16:creationId xmlns:a16="http://schemas.microsoft.com/office/drawing/2014/main" id="{33D1BED7-6835-4533-9BA5-C0102DD0F107}"/>
+                <a16:creationId xmlns:a16="http://schemas.microsoft.com/office/drawing/2014/main" id="{E857E4C3-6713-499D-97D2-6F7919C8D295}"/>
               </a:ext>
             </a:extLst>
           </p:cNvPr>
@@ -18412,7 +18412,7 @@
           <p:cNvPr id="42" name="">
             <a:extLst xmlns:a="http://schemas.openxmlformats.org/drawingml/2006/main">
               <a:ext uri="{FF2B5EF4-FFF2-40B4-BE49-F238E27FC236}">
-                <a16:creationId xmlns:a16="http://schemas.microsoft.com/office/drawing/2014/main" id="{AF47181D-59AC-43B5-A56C-C1892C15AEE9}"/>
+                <a16:creationId xmlns:a16="http://schemas.microsoft.com/office/drawing/2014/main" id="{3A71DA29-5BFE-4DA1-8812-A7EDDD3655DF}"/>
               </a:ext>
             </a:extLst>
           </p:cNvPr>
@@ -18445,7 +18445,7 @@
           <p:cNvPr id="43" name="">
             <a:extLst xmlns:a="http://schemas.openxmlformats.org/drawingml/2006/main">
               <a:ext uri="{FF2B5EF4-FFF2-40B4-BE49-F238E27FC236}">
-                <a16:creationId xmlns:a16="http://schemas.microsoft.com/office/drawing/2014/main" id="{5B3D2B89-5943-416E-8B95-58FE69164B12}"/>
+                <a16:creationId xmlns:a16="http://schemas.microsoft.com/office/drawing/2014/main" id="{5B1E0D0D-CC43-438E-A995-267575B4619F}"/>
               </a:ext>
             </a:extLst>
           </p:cNvPr>
@@ -18478,7 +18478,7 @@
           <p:cNvPr id="44" name="">
             <a:extLst xmlns:a="http://schemas.openxmlformats.org/drawingml/2006/main">
               <a:ext uri="{FF2B5EF4-FFF2-40B4-BE49-F238E27FC236}">
-                <a16:creationId xmlns:a16="http://schemas.microsoft.com/office/drawing/2014/main" id="{DE37D173-E04C-4CFF-BA0A-DE4894320F4C}"/>
+                <a16:creationId xmlns:a16="http://schemas.microsoft.com/office/drawing/2014/main" id="{ECDBC0A8-0DDE-48D0-B1F1-8DB201292473}"/>
               </a:ext>
             </a:extLst>
           </p:cNvPr>
@@ -18496,7 +18496,7 @@
             <a:avLst/>
           </a:prstGeom>
           <a:solidFill xmlns:a="http://schemas.openxmlformats.org/drawingml/2006/main">
-            <a:srgbClr val="FFF4F4"/>
+            <a:srgbClr val="F7F7F7"/>
           </a:solidFill>
           <a:ln xmlns:a="http://schemas.openxmlformats.org/drawingml/2006/main" w="9525">
             <a:solidFill>
@@ -18511,7 +18511,7 @@
           <p:cNvPr id="45" name="">
             <a:extLst xmlns:a="http://schemas.openxmlformats.org/drawingml/2006/main">
               <a:ext uri="{FF2B5EF4-FFF2-40B4-BE49-F238E27FC236}">
-                <a16:creationId xmlns:a16="http://schemas.microsoft.com/office/drawing/2014/main" id="{C372FC89-C20B-494E-9486-43290F611A13}"/>
+                <a16:creationId xmlns:a16="http://schemas.microsoft.com/office/drawing/2014/main" id="{21A4E37E-0DE7-4A09-8FA8-D386B305F57A}"/>
               </a:ext>
             </a:extLst>
           </p:cNvPr>
@@ -18569,7 +18569,7 @@
           <p:cNvPr id="46" name="">
             <a:extLst xmlns:a="http://schemas.openxmlformats.org/drawingml/2006/main">
               <a:ext uri="{FF2B5EF4-FFF2-40B4-BE49-F238E27FC236}">
-                <a16:creationId xmlns:a16="http://schemas.microsoft.com/office/drawing/2014/main" id="{2ED57BE7-671F-4FDC-8E4F-49EAEA58DAEB}"/>
+                <a16:creationId xmlns:a16="http://schemas.microsoft.com/office/drawing/2014/main" id="{A048CF93-C715-4682-B88F-EE415652A3FA}"/>
               </a:ext>
             </a:extLst>
           </p:cNvPr>
@@ -18627,7 +18627,7 @@
           <p:cNvPr id="47" name="">
             <a:extLst xmlns:a="http://schemas.openxmlformats.org/drawingml/2006/main">
               <a:ext uri="{FF2B5EF4-FFF2-40B4-BE49-F238E27FC236}">
-                <a16:creationId xmlns:a16="http://schemas.microsoft.com/office/drawing/2014/main" id="{74FE9FAB-6B6F-4E22-B8C0-A49C0410A7B3}"/>
+                <a16:creationId xmlns:a16="http://schemas.microsoft.com/office/drawing/2014/main" id="{239244B3-ABD0-4A29-9197-1536878AFF78}"/>
               </a:ext>
             </a:extLst>
           </p:cNvPr>
@@ -18685,7 +18685,7 @@
           <p:cNvPr id="48" name="">
             <a:extLst xmlns:a="http://schemas.openxmlformats.org/drawingml/2006/main">
               <a:ext uri="{FF2B5EF4-FFF2-40B4-BE49-F238E27FC236}">
-                <a16:creationId xmlns:a16="http://schemas.microsoft.com/office/drawing/2014/main" id="{DD7ADB76-8F06-43DB-B5C7-37D3E792A166}"/>
+                <a16:creationId xmlns:a16="http://schemas.microsoft.com/office/drawing/2014/main" id="{2B9D4E82-D017-4FE9-BC29-C4B50B88394B}"/>
               </a:ext>
             </a:extLst>
           </p:cNvPr>
@@ -18743,7 +18743,7 @@
           <p:cNvPr id="49" name="">
             <a:extLst xmlns:a="http://schemas.openxmlformats.org/drawingml/2006/main">
               <a:ext uri="{FF2B5EF4-FFF2-40B4-BE49-F238E27FC236}">
-                <a16:creationId xmlns:a16="http://schemas.microsoft.com/office/drawing/2014/main" id="{562DF5AD-072C-4F5D-BC13-4F3C00F8B4DB}"/>
+                <a16:creationId xmlns:a16="http://schemas.microsoft.com/office/drawing/2014/main" id="{09F3E690-8AA7-44B7-8019-519694E24503}"/>
               </a:ext>
             </a:extLst>
           </p:cNvPr>
@@ -18801,7 +18801,7 @@
           <p:cNvPr id="50" name="">
             <a:extLst xmlns:a="http://schemas.openxmlformats.org/drawingml/2006/main">
               <a:ext uri="{FF2B5EF4-FFF2-40B4-BE49-F238E27FC236}">
-                <a16:creationId xmlns:a16="http://schemas.microsoft.com/office/drawing/2014/main" id="{F6BF3345-5717-44F8-8E4C-4386073769FC}"/>
+                <a16:creationId xmlns:a16="http://schemas.microsoft.com/office/drawing/2014/main" id="{9FBB54B1-850B-4C5C-AB8C-B620672E39BE}"/>
               </a:ext>
             </a:extLst>
           </p:cNvPr>
@@ -18859,7 +18859,7 @@
           <p:cNvPr id="51" name="">
             <a:extLst xmlns:a="http://schemas.openxmlformats.org/drawingml/2006/main">
               <a:ext uri="{FF2B5EF4-FFF2-40B4-BE49-F238E27FC236}">
-                <a16:creationId xmlns:a16="http://schemas.microsoft.com/office/drawing/2014/main" id="{030C3C63-0B11-4B78-A5B3-5B19D5EE9CC0}"/>
+                <a16:creationId xmlns:a16="http://schemas.microsoft.com/office/drawing/2014/main" id="{5ED01F6A-408C-4C91-99CD-A3F5A7EB655E}"/>
               </a:ext>
             </a:extLst>
           </p:cNvPr>
@@ -18917,7 +18917,7 @@
           <p:cNvPr id="52" name="">
             <a:extLst xmlns:a="http://schemas.openxmlformats.org/drawingml/2006/main">
               <a:ext uri="{FF2B5EF4-FFF2-40B4-BE49-F238E27FC236}">
-                <a16:creationId xmlns:a16="http://schemas.microsoft.com/office/drawing/2014/main" id="{9ECA6EAD-3722-4667-B39C-0AAACD567FAE}"/>
+                <a16:creationId xmlns:a16="http://schemas.microsoft.com/office/drawing/2014/main" id="{E0D45F00-06B6-4CF7-B0C4-9200E361855E}"/>
               </a:ext>
             </a:extLst>
           </p:cNvPr>
@@ -18975,7 +18975,7 @@
           <p:cNvPr id="53" name="">
             <a:extLst xmlns:a="http://schemas.openxmlformats.org/drawingml/2006/main">
               <a:ext uri="{FF2B5EF4-FFF2-40B4-BE49-F238E27FC236}">
-                <a16:creationId xmlns:a16="http://schemas.microsoft.com/office/drawing/2014/main" id="{50E7A5FB-388C-4806-AF9A-E9E966CB632C}"/>
+                <a16:creationId xmlns:a16="http://schemas.microsoft.com/office/drawing/2014/main" id="{14E671D4-11FC-4AAD-9337-61E9BD0436F9}"/>
               </a:ext>
             </a:extLst>
           </p:cNvPr>
@@ -19033,7 +19033,7 @@
           <p:cNvPr id="54" name="">
             <a:extLst xmlns:a="http://schemas.openxmlformats.org/drawingml/2006/main">
               <a:ext uri="{FF2B5EF4-FFF2-40B4-BE49-F238E27FC236}">
-                <a16:creationId xmlns:a16="http://schemas.microsoft.com/office/drawing/2014/main" id="{574E89D5-3E05-46F0-BA7B-8F60F9341E22}"/>
+                <a16:creationId xmlns:a16="http://schemas.microsoft.com/office/drawing/2014/main" id="{575C1630-3D87-401C-9FEB-150E69E3646D}"/>
               </a:ext>
             </a:extLst>
           </p:cNvPr>
@@ -19091,7 +19091,7 @@
           <p:cNvPr id="55" name="">
             <a:extLst xmlns:a="http://schemas.openxmlformats.org/drawingml/2006/main">
               <a:ext uri="{FF2B5EF4-FFF2-40B4-BE49-F238E27FC236}">
-                <a16:creationId xmlns:a16="http://schemas.microsoft.com/office/drawing/2014/main" id="{ADA07120-F032-441F-A3DA-224C1C466E2E}"/>
+                <a16:creationId xmlns:a16="http://schemas.microsoft.com/office/drawing/2014/main" id="{3A43DA19-0B3B-4FBB-A812-ECFDAA23A801}"/>
               </a:ext>
             </a:extLst>
           </p:cNvPr>
@@ -19149,7 +19149,7 @@
           <p:cNvPr id="56" name="">
             <a:extLst xmlns:a="http://schemas.openxmlformats.org/drawingml/2006/main">
               <a:ext uri="{FF2B5EF4-FFF2-40B4-BE49-F238E27FC236}">
-                <a16:creationId xmlns:a16="http://schemas.microsoft.com/office/drawing/2014/main" id="{8A7F0CE3-6FAF-4CCA-AFA9-C86C89F0801E}"/>
+                <a16:creationId xmlns:a16="http://schemas.microsoft.com/office/drawing/2014/main" id="{D9CB7328-50B2-4FFE-AE30-0131AD117A87}"/>
               </a:ext>
             </a:extLst>
           </p:cNvPr>
@@ -19207,7 +19207,7 @@
           <p:cNvPr id="57" name="">
             <a:extLst xmlns:a="http://schemas.openxmlformats.org/drawingml/2006/main">
               <a:ext uri="{FF2B5EF4-FFF2-40B4-BE49-F238E27FC236}">
-                <a16:creationId xmlns:a16="http://schemas.microsoft.com/office/drawing/2014/main" id="{5ABEA31B-35C2-4736-B335-F9935F80B5C3}"/>
+                <a16:creationId xmlns:a16="http://schemas.microsoft.com/office/drawing/2014/main" id="{78B55ECA-25CF-4D49-86CB-F62665566283}"/>
               </a:ext>
             </a:extLst>
           </p:cNvPr>
@@ -19265,7 +19265,7 @@
           <p:cNvPr id="58" name="">
             <a:extLst xmlns:a="http://schemas.openxmlformats.org/drawingml/2006/main">
               <a:ext uri="{FF2B5EF4-FFF2-40B4-BE49-F238E27FC236}">
-                <a16:creationId xmlns:a16="http://schemas.microsoft.com/office/drawing/2014/main" id="{D648898F-4DA9-4691-B602-0F803381F97B}"/>
+                <a16:creationId xmlns:a16="http://schemas.microsoft.com/office/drawing/2014/main" id="{BAB18C47-30BF-4BCC-B3BC-78C4D78D9AEF}"/>
               </a:ext>
             </a:extLst>
           </p:cNvPr>
@@ -19323,7 +19323,7 @@
           <p:cNvPr id="59" name="">
             <a:extLst xmlns:a="http://schemas.openxmlformats.org/drawingml/2006/main">
               <a:ext uri="{FF2B5EF4-FFF2-40B4-BE49-F238E27FC236}">
-                <a16:creationId xmlns:a16="http://schemas.microsoft.com/office/drawing/2014/main" id="{572AD07D-5F4B-43AC-8902-A4CEE5084136}"/>
+                <a16:creationId xmlns:a16="http://schemas.microsoft.com/office/drawing/2014/main" id="{ACD31FE8-3B0E-4762-911C-DD832D34C79E}"/>
               </a:ext>
             </a:extLst>
           </p:cNvPr>
@@ -19356,7 +19356,7 @@
           <p:cNvPr id="60" name="">
             <a:extLst xmlns:a="http://schemas.openxmlformats.org/drawingml/2006/main">
               <a:ext uri="{FF2B5EF4-FFF2-40B4-BE49-F238E27FC236}">
-                <a16:creationId xmlns:a16="http://schemas.microsoft.com/office/drawing/2014/main" id="{8D1AD88F-C2A1-4D2A-A4A0-D39EEE334266}"/>
+                <a16:creationId xmlns:a16="http://schemas.microsoft.com/office/drawing/2014/main" id="{4B90AE96-D5B2-4226-912F-EFD580E7602D}"/>
               </a:ext>
             </a:extLst>
           </p:cNvPr>
@@ -19414,7 +19414,7 @@
                 <a:latin typeface="Microsoft YaHei"/>
                 <a:ea typeface="Microsoft YaHei"/>
                 <a:cs typeface="Microsoft YaHei"/>
-                <a:hlinkClick xmlns:r="http://schemas.openxmlformats.org/officeDocument/2006/relationships" r:id="Redffe81a55474e33"/>
+                <a:hlinkClick xmlns:r="http://schemas.openxmlformats.org/officeDocument/2006/relationships" r:id="R4b0e9411873b42e4"/>
               </a:rPr>
               <a:t>智谱：Coding Agent工作原理</a:t>
             </a:r>
@@ -19426,7 +19426,7 @@
           <p:cNvPr id="61" name="">
             <a:extLst xmlns:a="http://schemas.openxmlformats.org/drawingml/2006/main">
               <a:ext uri="{FF2B5EF4-FFF2-40B4-BE49-F238E27FC236}">
-                <a16:creationId xmlns:a16="http://schemas.microsoft.com/office/drawing/2014/main" id="{030A3A71-A8FF-4CED-9BC7-7170B79869C7}"/>
+                <a16:creationId xmlns:a16="http://schemas.microsoft.com/office/drawing/2014/main" id="{523AA4CC-B367-4AA3-90C0-18BF33E19C87}"/>
               </a:ext>
             </a:extLst>
           </p:cNvPr>
@@ -19482,7 +19482,7 @@
     </p:spTree>
     <p:extLst>
       <p:ext uri="{BB962C8B-B14F-4D97-AF65-F5344CB8AC3E}">
-        <p14:creationId xmlns:p14="http://schemas.microsoft.com/office/powerpoint/2010/main" val="1374477156"/>
+        <p14:creationId xmlns:p14="http://schemas.microsoft.com/office/powerpoint/2010/main" val="906228598"/>
       </p:ext>
     </p:extLst>
   </p:cSld>
@@ -19513,7 +19513,7 @@
           <p:cNvPr id="68" name="">
             <a:extLst xmlns:a="http://schemas.openxmlformats.org/drawingml/2006/main">
               <a:ext uri="{FF2B5EF4-FFF2-40B4-BE49-F238E27FC236}">
-                <a16:creationId xmlns:a16="http://schemas.microsoft.com/office/drawing/2014/main" id="{12923210-F4E1-4FA5-AC0E-B7E503D33105}"/>
+                <a16:creationId xmlns:a16="http://schemas.microsoft.com/office/drawing/2014/main" id="{E9EF4720-D3C0-4134-87EC-514925627A68}"/>
               </a:ext>
             </a:extLst>
           </p:cNvPr>
@@ -19546,7 +19546,7 @@
           <p:cNvPr id="2" name="">
             <a:extLst xmlns:a="http://schemas.openxmlformats.org/drawingml/2006/main">
               <a:ext uri="{FF2B5EF4-FFF2-40B4-BE49-F238E27FC236}">
-                <a16:creationId xmlns:a16="http://schemas.microsoft.com/office/drawing/2014/main" id="{D4A7B960-4496-4B63-9BA1-72C9156CD562}"/>
+                <a16:creationId xmlns:a16="http://schemas.microsoft.com/office/drawing/2014/main" id="{4BBEA648-5C47-45AD-A159-EA1DDDB63995}"/>
               </a:ext>
             </a:extLst>
           </p:cNvPr>
@@ -19604,7 +19604,7 @@
           <p:cNvPr id="3" name="">
             <a:extLst xmlns:a="http://schemas.openxmlformats.org/drawingml/2006/main">
               <a:ext uri="{FF2B5EF4-FFF2-40B4-BE49-F238E27FC236}">
-                <a16:creationId xmlns:a16="http://schemas.microsoft.com/office/drawing/2014/main" id="{885D0A63-BAE7-4F55-81CA-5C8A7152A6CF}"/>
+                <a16:creationId xmlns:a16="http://schemas.microsoft.com/office/drawing/2014/main" id="{20DF95C3-086E-4B4F-89A5-077AC3FB641E}"/>
               </a:ext>
             </a:extLst>
           </p:cNvPr>
@@ -19662,7 +19662,7 @@
           <p:cNvPr id="4" name="">
             <a:extLst xmlns:a="http://schemas.openxmlformats.org/drawingml/2006/main">
               <a:ext uri="{FF2B5EF4-FFF2-40B4-BE49-F238E27FC236}">
-                <a16:creationId xmlns:a16="http://schemas.microsoft.com/office/drawing/2014/main" id="{A3219766-430B-43CD-99B8-038F83192436}"/>
+                <a16:creationId xmlns:a16="http://schemas.microsoft.com/office/drawing/2014/main" id="{B19A89EB-7F41-4A5C-94C7-629E8FA8D910}"/>
               </a:ext>
             </a:extLst>
           </p:cNvPr>
@@ -19695,7 +19695,7 @@
           <p:cNvPr id="5" name="">
             <a:extLst xmlns:a="http://schemas.openxmlformats.org/drawingml/2006/main">
               <a:ext uri="{FF2B5EF4-FFF2-40B4-BE49-F238E27FC236}">
-                <a16:creationId xmlns:a16="http://schemas.microsoft.com/office/drawing/2014/main" id="{39800DED-5CA1-43B1-A147-9EF160EC7DB3}"/>
+                <a16:creationId xmlns:a16="http://schemas.microsoft.com/office/drawing/2014/main" id="{A1A8ABC0-2364-4697-BF0A-5A46AF4FD0B4}"/>
               </a:ext>
             </a:extLst>
           </p:cNvPr>
@@ -19753,7 +19753,7 @@
           <p:cNvPr id="6" name="">
             <a:extLst xmlns:a="http://schemas.openxmlformats.org/drawingml/2006/main">
               <a:ext uri="{FF2B5EF4-FFF2-40B4-BE49-F238E27FC236}">
-                <a16:creationId xmlns:a16="http://schemas.microsoft.com/office/drawing/2014/main" id="{6B80EC04-E865-407A-90D5-20519603335F}"/>
+                <a16:creationId xmlns:a16="http://schemas.microsoft.com/office/drawing/2014/main" id="{B42C568E-F05E-4971-9399-D2F625E69287}"/>
               </a:ext>
             </a:extLst>
           </p:cNvPr>
@@ -19811,7 +19811,7 @@
           <p:cNvPr id="7" name="">
             <a:extLst xmlns:a="http://schemas.openxmlformats.org/drawingml/2006/main">
               <a:ext uri="{FF2B5EF4-FFF2-40B4-BE49-F238E27FC236}">
-                <a16:creationId xmlns:a16="http://schemas.microsoft.com/office/drawing/2014/main" id="{1FBC3727-B4D2-428F-AC2D-6C3E61861263}"/>
+                <a16:creationId xmlns:a16="http://schemas.microsoft.com/office/drawing/2014/main" id="{18472CAA-D7D8-499B-BDEF-E1EC60C11244}"/>
               </a:ext>
             </a:extLst>
           </p:cNvPr>
@@ -19869,7 +19869,7 @@
           <p:cNvPr id="8" name="">
             <a:extLst xmlns:a="http://schemas.openxmlformats.org/drawingml/2006/main">
               <a:ext uri="{FF2B5EF4-FFF2-40B4-BE49-F238E27FC236}">
-                <a16:creationId xmlns:a16="http://schemas.microsoft.com/office/drawing/2014/main" id="{5D20774E-63F4-4C63-8203-A003FDD4B3F7}"/>
+                <a16:creationId xmlns:a16="http://schemas.microsoft.com/office/drawing/2014/main" id="{57FF995D-44A4-4C0C-B47C-8C3853718677}"/>
               </a:ext>
             </a:extLst>
           </p:cNvPr>
@@ -19902,7 +19902,7 @@
           <p:cNvPr id="9" name="">
             <a:extLst xmlns:a="http://schemas.openxmlformats.org/drawingml/2006/main">
               <a:ext uri="{FF2B5EF4-FFF2-40B4-BE49-F238E27FC236}">
-                <a16:creationId xmlns:a16="http://schemas.microsoft.com/office/drawing/2014/main" id="{A77E76CD-EA26-417A-A0B0-596CFBA00284}"/>
+                <a16:creationId xmlns:a16="http://schemas.microsoft.com/office/drawing/2014/main" id="{32797E93-8F37-49EB-962D-F0B1D4F8F1E4}"/>
               </a:ext>
             </a:extLst>
           </p:cNvPr>
@@ -19935,7 +19935,7 @@
           <p:cNvPr id="10" name="">
             <a:extLst xmlns:a="http://schemas.openxmlformats.org/drawingml/2006/main">
               <a:ext uri="{FF2B5EF4-FFF2-40B4-BE49-F238E27FC236}">
-                <a16:creationId xmlns:a16="http://schemas.microsoft.com/office/drawing/2014/main" id="{E767AE48-5B2A-4BC9-A0D6-712BDEEF2A67}"/>
+                <a16:creationId xmlns:a16="http://schemas.microsoft.com/office/drawing/2014/main" id="{E42910B4-F537-4A44-A9F3-6EC658F018D1}"/>
               </a:ext>
             </a:extLst>
           </p:cNvPr>
@@ -19953,7 +19953,7 @@
             <a:avLst/>
           </a:prstGeom>
           <a:solidFill xmlns:a="http://schemas.openxmlformats.org/drawingml/2006/main">
-            <a:srgbClr val="FFF4F4"/>
+            <a:srgbClr val="F7F7F7"/>
           </a:solidFill>
           <a:ln xmlns:a="http://schemas.openxmlformats.org/drawingml/2006/main" w="9525">
             <a:solidFill>
@@ -19968,7 +19968,7 @@
           <p:cNvPr id="11" name="">
             <a:extLst xmlns:a="http://schemas.openxmlformats.org/drawingml/2006/main">
               <a:ext uri="{FF2B5EF4-FFF2-40B4-BE49-F238E27FC236}">
-                <a16:creationId xmlns:a16="http://schemas.microsoft.com/office/drawing/2014/main" id="{05455888-3E0B-4239-96D2-CACB37E51F61}"/>
+                <a16:creationId xmlns:a16="http://schemas.microsoft.com/office/drawing/2014/main" id="{71263FB2-6874-4F0B-8C2D-48EE0682511B}"/>
               </a:ext>
             </a:extLst>
           </p:cNvPr>
@@ -20026,7 +20026,7 @@
           <p:cNvPr id="12" name="">
             <a:extLst xmlns:a="http://schemas.openxmlformats.org/drawingml/2006/main">
               <a:ext uri="{FF2B5EF4-FFF2-40B4-BE49-F238E27FC236}">
-                <a16:creationId xmlns:a16="http://schemas.microsoft.com/office/drawing/2014/main" id="{633CB64C-EA3A-4414-A20B-4299A2B7FA6E}"/>
+                <a16:creationId xmlns:a16="http://schemas.microsoft.com/office/drawing/2014/main" id="{06F8E3B2-CA5A-4923-BC83-A13A3FD9076E}"/>
               </a:ext>
             </a:extLst>
           </p:cNvPr>
@@ -20084,7 +20084,7 @@
           <p:cNvPr id="13" name="">
             <a:extLst xmlns:a="http://schemas.openxmlformats.org/drawingml/2006/main">
               <a:ext uri="{FF2B5EF4-FFF2-40B4-BE49-F238E27FC236}">
-                <a16:creationId xmlns:a16="http://schemas.microsoft.com/office/drawing/2014/main" id="{25B9B101-53E4-4281-8D31-92020A2D2EB3}"/>
+                <a16:creationId xmlns:a16="http://schemas.microsoft.com/office/drawing/2014/main" id="{FEBDFAA7-C15B-437E-B837-376A12AAF41B}"/>
               </a:ext>
             </a:extLst>
           </p:cNvPr>
@@ -20142,7 +20142,7 @@
           <p:cNvPr id="14" name="">
             <a:extLst xmlns:a="http://schemas.openxmlformats.org/drawingml/2006/main">
               <a:ext uri="{FF2B5EF4-FFF2-40B4-BE49-F238E27FC236}">
-                <a16:creationId xmlns:a16="http://schemas.microsoft.com/office/drawing/2014/main" id="{897A1F29-4FBA-4ACC-8819-3FF7C56655BE}"/>
+                <a16:creationId xmlns:a16="http://schemas.microsoft.com/office/drawing/2014/main" id="{DFD60263-9A48-4B8B-B932-84A524E784C2}"/>
               </a:ext>
             </a:extLst>
           </p:cNvPr>
@@ -20175,7 +20175,7 @@
           <p:cNvPr id="15" name="">
             <a:extLst xmlns:a="http://schemas.openxmlformats.org/drawingml/2006/main">
               <a:ext uri="{FF2B5EF4-FFF2-40B4-BE49-F238E27FC236}">
-                <a16:creationId xmlns:a16="http://schemas.microsoft.com/office/drawing/2014/main" id="{51E21E67-9DFD-411A-8D7E-78F909EC06EC}"/>
+                <a16:creationId xmlns:a16="http://schemas.microsoft.com/office/drawing/2014/main" id="{52D358BF-FBA7-417E-9DFE-8C2E4F961C85}"/>
               </a:ext>
             </a:extLst>
           </p:cNvPr>
@@ -20208,7 +20208,7 @@
           <p:cNvPr id="16" name="">
             <a:extLst xmlns:a="http://schemas.openxmlformats.org/drawingml/2006/main">
               <a:ext uri="{FF2B5EF4-FFF2-40B4-BE49-F238E27FC236}">
-                <a16:creationId xmlns:a16="http://schemas.microsoft.com/office/drawing/2014/main" id="{73B46E5E-D1F7-4A66-AE7A-988DDC3B51F8}"/>
+                <a16:creationId xmlns:a16="http://schemas.microsoft.com/office/drawing/2014/main" id="{6074BAC0-D039-4481-B43A-999FBE70E162}"/>
               </a:ext>
             </a:extLst>
           </p:cNvPr>
@@ -20241,7 +20241,7 @@
           <p:cNvPr id="17" name="">
             <a:extLst xmlns:a="http://schemas.openxmlformats.org/drawingml/2006/main">
               <a:ext uri="{FF2B5EF4-FFF2-40B4-BE49-F238E27FC236}">
-                <a16:creationId xmlns:a16="http://schemas.microsoft.com/office/drawing/2014/main" id="{FF0FFEDD-77FF-4404-B247-0FEF9F7AD4B1}"/>
+                <a16:creationId xmlns:a16="http://schemas.microsoft.com/office/drawing/2014/main" id="{8B7C0F81-3D51-4CEC-B6AF-07C9828E7DFD}"/>
               </a:ext>
             </a:extLst>
           </p:cNvPr>
@@ -20299,7 +20299,7 @@
           <p:cNvPr id="18" name="">
             <a:extLst xmlns:a="http://schemas.openxmlformats.org/drawingml/2006/main">
               <a:ext uri="{FF2B5EF4-FFF2-40B4-BE49-F238E27FC236}">
-                <a16:creationId xmlns:a16="http://schemas.microsoft.com/office/drawing/2014/main" id="{E9AE1866-6054-4A7E-B61C-D59E25F7AA91}"/>
+                <a16:creationId xmlns:a16="http://schemas.microsoft.com/office/drawing/2014/main" id="{BF98D05E-13B2-4E21-88FA-1835F5AB9A52}"/>
               </a:ext>
             </a:extLst>
           </p:cNvPr>
@@ -20357,7 +20357,7 @@
           <p:cNvPr id="19" name="">
             <a:extLst xmlns:a="http://schemas.openxmlformats.org/drawingml/2006/main">
               <a:ext uri="{FF2B5EF4-FFF2-40B4-BE49-F238E27FC236}">
-                <a16:creationId xmlns:a16="http://schemas.microsoft.com/office/drawing/2014/main" id="{809BA597-610A-4339-92AB-B9D7ADED0436}"/>
+                <a16:creationId xmlns:a16="http://schemas.microsoft.com/office/drawing/2014/main" id="{57DB8120-5885-4F6A-98C7-D0B9292238E0}"/>
               </a:ext>
             </a:extLst>
           </p:cNvPr>
@@ -20415,7 +20415,7 @@
           <p:cNvPr id="20" name="">
             <a:extLst xmlns:a="http://schemas.openxmlformats.org/drawingml/2006/main">
               <a:ext uri="{FF2B5EF4-FFF2-40B4-BE49-F238E27FC236}">
-                <a16:creationId xmlns:a16="http://schemas.microsoft.com/office/drawing/2014/main" id="{79484AA0-33D3-43F1-BF57-C762D8256699}"/>
+                <a16:creationId xmlns:a16="http://schemas.microsoft.com/office/drawing/2014/main" id="{A5DDD7B7-C5B8-40EE-8AB9-8D702FFC5646}"/>
               </a:ext>
             </a:extLst>
           </p:cNvPr>
@@ -20448,7 +20448,7 @@
           <p:cNvPr id="21" name="">
             <a:extLst xmlns:a="http://schemas.openxmlformats.org/drawingml/2006/main">
               <a:ext uri="{FF2B5EF4-FFF2-40B4-BE49-F238E27FC236}">
-                <a16:creationId xmlns:a16="http://schemas.microsoft.com/office/drawing/2014/main" id="{5968B484-96D5-4300-9FB0-FF695BD075EF}"/>
+                <a16:creationId xmlns:a16="http://schemas.microsoft.com/office/drawing/2014/main" id="{4BC2FD8B-4D02-4E43-93B2-21CA03BC57F5}"/>
               </a:ext>
             </a:extLst>
           </p:cNvPr>
@@ -20481,7 +20481,7 @@
           <p:cNvPr id="22" name="">
             <a:extLst xmlns:a="http://schemas.openxmlformats.org/drawingml/2006/main">
               <a:ext uri="{FF2B5EF4-FFF2-40B4-BE49-F238E27FC236}">
-                <a16:creationId xmlns:a16="http://schemas.microsoft.com/office/drawing/2014/main" id="{7765B1B1-8B63-4F88-9D4E-DF651D697FF7}"/>
+                <a16:creationId xmlns:a16="http://schemas.microsoft.com/office/drawing/2014/main" id="{94AA0419-9DBB-4366-ABE0-805DCA609E19}"/>
               </a:ext>
             </a:extLst>
           </p:cNvPr>
@@ -20514,7 +20514,7 @@
           <p:cNvPr id="23" name="">
             <a:extLst xmlns:a="http://schemas.openxmlformats.org/drawingml/2006/main">
               <a:ext uri="{FF2B5EF4-FFF2-40B4-BE49-F238E27FC236}">
-                <a16:creationId xmlns:a16="http://schemas.microsoft.com/office/drawing/2014/main" id="{93257A05-B56B-461C-878F-DB0CD12C5CA1}"/>
+                <a16:creationId xmlns:a16="http://schemas.microsoft.com/office/drawing/2014/main" id="{F9B59A40-290E-415A-92A4-0E2BC6D752AD}"/>
               </a:ext>
             </a:extLst>
           </p:cNvPr>
@@ -20572,7 +20572,7 @@
           <p:cNvPr id="24" name="">
             <a:extLst xmlns:a="http://schemas.openxmlformats.org/drawingml/2006/main">
               <a:ext uri="{FF2B5EF4-FFF2-40B4-BE49-F238E27FC236}">
-                <a16:creationId xmlns:a16="http://schemas.microsoft.com/office/drawing/2014/main" id="{6491FD72-B5F9-4E62-8910-559E34434603}"/>
+                <a16:creationId xmlns:a16="http://schemas.microsoft.com/office/drawing/2014/main" id="{40165F2C-873A-4C83-9658-40DD8C43B897}"/>
               </a:ext>
             </a:extLst>
           </p:cNvPr>
@@ -20630,7 +20630,7 @@
           <p:cNvPr id="25" name="">
             <a:extLst xmlns:a="http://schemas.openxmlformats.org/drawingml/2006/main">
               <a:ext uri="{FF2B5EF4-FFF2-40B4-BE49-F238E27FC236}">
-                <a16:creationId xmlns:a16="http://schemas.microsoft.com/office/drawing/2014/main" id="{14685B17-9699-4B41-8391-6929870162EF}"/>
+                <a16:creationId xmlns:a16="http://schemas.microsoft.com/office/drawing/2014/main" id="{2CACF963-E4C1-4455-88FA-5C7AD7551599}"/>
               </a:ext>
             </a:extLst>
           </p:cNvPr>
@@ -20688,7 +20688,7 @@
           <p:cNvPr id="26" name="">
             <a:extLst xmlns:a="http://schemas.openxmlformats.org/drawingml/2006/main">
               <a:ext uri="{FF2B5EF4-FFF2-40B4-BE49-F238E27FC236}">
-                <a16:creationId xmlns:a16="http://schemas.microsoft.com/office/drawing/2014/main" id="{54291240-88AF-4E20-B79E-620C15A31245}"/>
+                <a16:creationId xmlns:a16="http://schemas.microsoft.com/office/drawing/2014/main" id="{E775A646-7673-4846-B21B-C191E4BC196C}"/>
               </a:ext>
             </a:extLst>
           </p:cNvPr>
@@ -20721,7 +20721,7 @@
           <p:cNvPr id="27" name="">
             <a:extLst xmlns:a="http://schemas.openxmlformats.org/drawingml/2006/main">
               <a:ext uri="{FF2B5EF4-FFF2-40B4-BE49-F238E27FC236}">
-                <a16:creationId xmlns:a16="http://schemas.microsoft.com/office/drawing/2014/main" id="{A6B7CFBE-BEF5-4770-8F65-00912E9D9D91}"/>
+                <a16:creationId xmlns:a16="http://schemas.microsoft.com/office/drawing/2014/main" id="{522B3FD2-2451-46E2-B5AE-4E150698976F}"/>
               </a:ext>
             </a:extLst>
           </p:cNvPr>
@@ -20754,7 +20754,7 @@
           <p:cNvPr id="28" name="">
             <a:extLst xmlns:a="http://schemas.openxmlformats.org/drawingml/2006/main">
               <a:ext uri="{FF2B5EF4-FFF2-40B4-BE49-F238E27FC236}">
-                <a16:creationId xmlns:a16="http://schemas.microsoft.com/office/drawing/2014/main" id="{28C8224E-CA9E-4239-BBE5-4646A7AA8257}"/>
+                <a16:creationId xmlns:a16="http://schemas.microsoft.com/office/drawing/2014/main" id="{9442293E-0710-4589-B400-208D1DC1BE71}"/>
               </a:ext>
             </a:extLst>
           </p:cNvPr>
@@ -20787,7 +20787,7 @@
           <p:cNvPr id="29" name="">
             <a:extLst xmlns:a="http://schemas.openxmlformats.org/drawingml/2006/main">
               <a:ext uri="{FF2B5EF4-FFF2-40B4-BE49-F238E27FC236}">
-                <a16:creationId xmlns:a16="http://schemas.microsoft.com/office/drawing/2014/main" id="{DE0114A3-617A-42C8-9617-88AF2E37FCA8}"/>
+                <a16:creationId xmlns:a16="http://schemas.microsoft.com/office/drawing/2014/main" id="{4788ECD3-D51D-4155-A4A1-0A2527C61443}"/>
               </a:ext>
             </a:extLst>
           </p:cNvPr>
@@ -20845,7 +20845,7 @@
           <p:cNvPr id="30" name="">
             <a:extLst xmlns:a="http://schemas.openxmlformats.org/drawingml/2006/main">
               <a:ext uri="{FF2B5EF4-FFF2-40B4-BE49-F238E27FC236}">
-                <a16:creationId xmlns:a16="http://schemas.microsoft.com/office/drawing/2014/main" id="{432CB832-3741-4A2F-8F22-EBE3D2F9DEDB}"/>
+                <a16:creationId xmlns:a16="http://schemas.microsoft.com/office/drawing/2014/main" id="{18C06DF2-EFDD-4E48-BDFE-938378321358}"/>
               </a:ext>
             </a:extLst>
           </p:cNvPr>
@@ -20903,7 +20903,7 @@
           <p:cNvPr id="31" name="">
             <a:extLst xmlns:a="http://schemas.openxmlformats.org/drawingml/2006/main">
               <a:ext uri="{FF2B5EF4-FFF2-40B4-BE49-F238E27FC236}">
-                <a16:creationId xmlns:a16="http://schemas.microsoft.com/office/drawing/2014/main" id="{A24347E7-3D94-4CBA-81E9-799FE523C0F3}"/>
+                <a16:creationId xmlns:a16="http://schemas.microsoft.com/office/drawing/2014/main" id="{6C25B0D8-2AA7-4213-9AEF-0E1907F6A408}"/>
               </a:ext>
             </a:extLst>
           </p:cNvPr>
@@ -20961,7 +20961,7 @@
           <p:cNvPr id="32" name="">
             <a:extLst xmlns:a="http://schemas.openxmlformats.org/drawingml/2006/main">
               <a:ext uri="{FF2B5EF4-FFF2-40B4-BE49-F238E27FC236}">
-                <a16:creationId xmlns:a16="http://schemas.microsoft.com/office/drawing/2014/main" id="{E8C74123-1479-434E-9863-053CBEC1A53B}"/>
+                <a16:creationId xmlns:a16="http://schemas.microsoft.com/office/drawing/2014/main" id="{8B8824FA-068A-440A-BBE7-3EB8D2305823}"/>
               </a:ext>
             </a:extLst>
           </p:cNvPr>
@@ -20979,7 +20979,7 @@
             <a:avLst/>
           </a:prstGeom>
           <a:solidFill xmlns:a="http://schemas.openxmlformats.org/drawingml/2006/main">
-            <a:srgbClr val="FFF4F4"/>
+            <a:srgbClr val="F7F7F7"/>
           </a:solidFill>
           <a:ln xmlns:a="http://schemas.openxmlformats.org/drawingml/2006/main" w="9525">
             <a:solidFill>
@@ -20994,7 +20994,7 @@
           <p:cNvPr id="33" name="">
             <a:extLst xmlns:a="http://schemas.openxmlformats.org/drawingml/2006/main">
               <a:ext uri="{FF2B5EF4-FFF2-40B4-BE49-F238E27FC236}">
-                <a16:creationId xmlns:a16="http://schemas.microsoft.com/office/drawing/2014/main" id="{D4C16845-C462-4CB0-9AF9-9C010BCD0E31}"/>
+                <a16:creationId xmlns:a16="http://schemas.microsoft.com/office/drawing/2014/main" id="{6D25D97B-86E7-41CC-A6BC-020C292B89C4}"/>
               </a:ext>
             </a:extLst>
           </p:cNvPr>
@@ -21052,7 +21052,7 @@
           <p:cNvPr id="34" name="">
             <a:extLst xmlns:a="http://schemas.openxmlformats.org/drawingml/2006/main">
               <a:ext uri="{FF2B5EF4-FFF2-40B4-BE49-F238E27FC236}">
-                <a16:creationId xmlns:a16="http://schemas.microsoft.com/office/drawing/2014/main" id="{4E5C4301-4955-48E5-912B-BE800853F5BE}"/>
+                <a16:creationId xmlns:a16="http://schemas.microsoft.com/office/drawing/2014/main" id="{9F581AF1-81DB-4717-8573-1AE8ABE1D750}"/>
               </a:ext>
             </a:extLst>
           </p:cNvPr>
@@ -21110,7 +21110,7 @@
           <p:cNvPr id="35" name="">
             <a:extLst xmlns:a="http://schemas.openxmlformats.org/drawingml/2006/main">
               <a:ext uri="{FF2B5EF4-FFF2-40B4-BE49-F238E27FC236}">
-                <a16:creationId xmlns:a16="http://schemas.microsoft.com/office/drawing/2014/main" id="{945F4F4C-7823-4557-A632-D5C59BFD1DDB}"/>
+                <a16:creationId xmlns:a16="http://schemas.microsoft.com/office/drawing/2014/main" id="{62BA36F3-844E-4FB5-8D4D-63AA405496D4}"/>
               </a:ext>
             </a:extLst>
           </p:cNvPr>
@@ -21143,7 +21143,7 @@
           <p:cNvPr id="36" name="">
             <a:extLst xmlns:a="http://schemas.openxmlformats.org/drawingml/2006/main">
               <a:ext uri="{FF2B5EF4-FFF2-40B4-BE49-F238E27FC236}">
-                <a16:creationId xmlns:a16="http://schemas.microsoft.com/office/drawing/2014/main" id="{8A419EB1-D75E-475E-9538-F1C7CA847EF3}"/>
+                <a16:creationId xmlns:a16="http://schemas.microsoft.com/office/drawing/2014/main" id="{35BCB617-69FA-4249-AA43-3E10A208B8CF}"/>
               </a:ext>
             </a:extLst>
           </p:cNvPr>
@@ -21201,7 +21201,7 @@
           <p:cNvPr id="37" name="">
             <a:extLst xmlns:a="http://schemas.openxmlformats.org/drawingml/2006/main">
               <a:ext uri="{FF2B5EF4-FFF2-40B4-BE49-F238E27FC236}">
-                <a16:creationId xmlns:a16="http://schemas.microsoft.com/office/drawing/2014/main" id="{E2CB3465-8C7A-4409-8B89-29EB4A409FBC}"/>
+                <a16:creationId xmlns:a16="http://schemas.microsoft.com/office/drawing/2014/main" id="{CF085CC2-C310-46A0-B299-9CBF01F4546A}"/>
               </a:ext>
             </a:extLst>
           </p:cNvPr>
@@ -21234,7 +21234,7 @@
           <p:cNvPr id="38" name="">
             <a:extLst xmlns:a="http://schemas.openxmlformats.org/drawingml/2006/main">
               <a:ext uri="{FF2B5EF4-FFF2-40B4-BE49-F238E27FC236}">
-                <a16:creationId xmlns:a16="http://schemas.microsoft.com/office/drawing/2014/main" id="{9308BF8E-A866-4306-B6F2-7A14CF5C0382}"/>
+                <a16:creationId xmlns:a16="http://schemas.microsoft.com/office/drawing/2014/main" id="{2FD8CB5B-F5BA-4365-8A63-43E9A03999F8}"/>
               </a:ext>
             </a:extLst>
           </p:cNvPr>
@@ -21292,7 +21292,7 @@
           <p:cNvPr id="39" name="">
             <a:extLst xmlns:a="http://schemas.openxmlformats.org/drawingml/2006/main">
               <a:ext uri="{FF2B5EF4-FFF2-40B4-BE49-F238E27FC236}">
-                <a16:creationId xmlns:a16="http://schemas.microsoft.com/office/drawing/2014/main" id="{83145987-6C06-4F28-9B86-06B9B29BEE8E}"/>
+                <a16:creationId xmlns:a16="http://schemas.microsoft.com/office/drawing/2014/main" id="{6E1240C5-415E-4503-BABA-40DB71F4D245}"/>
               </a:ext>
             </a:extLst>
           </p:cNvPr>
@@ -21350,7 +21350,7 @@
           <p:cNvPr id="40" name="">
             <a:extLst xmlns:a="http://schemas.openxmlformats.org/drawingml/2006/main">
               <a:ext uri="{FF2B5EF4-FFF2-40B4-BE49-F238E27FC236}">
-                <a16:creationId xmlns:a16="http://schemas.microsoft.com/office/drawing/2014/main" id="{4A9283D3-97F0-4059-AC58-4D920D84334E}"/>
+                <a16:creationId xmlns:a16="http://schemas.microsoft.com/office/drawing/2014/main" id="{A7C21319-4890-406D-A877-531ABC0E0D30}"/>
               </a:ext>
             </a:extLst>
           </p:cNvPr>
@@ -21383,7 +21383,7 @@
           <p:cNvPr id="41" name="">
             <a:extLst xmlns:a="http://schemas.openxmlformats.org/drawingml/2006/main">
               <a:ext uri="{FF2B5EF4-FFF2-40B4-BE49-F238E27FC236}">
-                <a16:creationId xmlns:a16="http://schemas.microsoft.com/office/drawing/2014/main" id="{5F1747A4-BF9B-4204-88AE-AC416BA2D838}"/>
+                <a16:creationId xmlns:a16="http://schemas.microsoft.com/office/drawing/2014/main" id="{A5C4818E-AA1C-4FC3-A351-C1E74140E58E}"/>
               </a:ext>
             </a:extLst>
           </p:cNvPr>
@@ -21441,7 +21441,7 @@
           <p:cNvPr id="42" name="">
             <a:extLst xmlns:a="http://schemas.openxmlformats.org/drawingml/2006/main">
               <a:ext uri="{FF2B5EF4-FFF2-40B4-BE49-F238E27FC236}">
-                <a16:creationId xmlns:a16="http://schemas.microsoft.com/office/drawing/2014/main" id="{D2E050B8-E56C-43FE-B0E6-A71BBE404FD8}"/>
+                <a16:creationId xmlns:a16="http://schemas.microsoft.com/office/drawing/2014/main" id="{B39C6742-B5C4-4E6D-A880-82BECE04C271}"/>
               </a:ext>
             </a:extLst>
           </p:cNvPr>
@@ -21474,7 +21474,7 @@
           <p:cNvPr id="43" name="">
             <a:extLst xmlns:a="http://schemas.openxmlformats.org/drawingml/2006/main">
               <a:ext uri="{FF2B5EF4-FFF2-40B4-BE49-F238E27FC236}">
-                <a16:creationId xmlns:a16="http://schemas.microsoft.com/office/drawing/2014/main" id="{F8289D31-6537-41A5-BE53-CA81DB50FA84}"/>
+                <a16:creationId xmlns:a16="http://schemas.microsoft.com/office/drawing/2014/main" id="{D1FD3CDA-21A5-41E2-91A9-5CCD7B448CDC}"/>
               </a:ext>
             </a:extLst>
           </p:cNvPr>
@@ -21532,7 +21532,7 @@
           <p:cNvPr id="44" name="">
             <a:extLst xmlns:a="http://schemas.openxmlformats.org/drawingml/2006/main">
               <a:ext uri="{FF2B5EF4-FFF2-40B4-BE49-F238E27FC236}">
-                <a16:creationId xmlns:a16="http://schemas.microsoft.com/office/drawing/2014/main" id="{A4934142-639B-4156-A447-2CCBA5C63315}"/>
+                <a16:creationId xmlns:a16="http://schemas.microsoft.com/office/drawing/2014/main" id="{9DF3C837-DEB1-4123-BAFF-CE66486ED48C}"/>
               </a:ext>
             </a:extLst>
           </p:cNvPr>
@@ -21590,7 +21590,7 @@
           <p:cNvPr id="45" name="">
             <a:extLst xmlns:a="http://schemas.openxmlformats.org/drawingml/2006/main">
               <a:ext uri="{FF2B5EF4-FFF2-40B4-BE49-F238E27FC236}">
-                <a16:creationId xmlns:a16="http://schemas.microsoft.com/office/drawing/2014/main" id="{CD67768C-6708-48AE-A8C8-664AA1305607}"/>
+                <a16:creationId xmlns:a16="http://schemas.microsoft.com/office/drawing/2014/main" id="{BDB59C62-ECF4-484D-8484-CFBD18CAC281}"/>
               </a:ext>
             </a:extLst>
           </p:cNvPr>
@@ -21623,7 +21623,7 @@
           <p:cNvPr id="46" name="">
             <a:extLst xmlns:a="http://schemas.openxmlformats.org/drawingml/2006/main">
               <a:ext uri="{FF2B5EF4-FFF2-40B4-BE49-F238E27FC236}">
-                <a16:creationId xmlns:a16="http://schemas.microsoft.com/office/drawing/2014/main" id="{9BF6F69D-3B33-41EE-B01E-A544F1A007B5}"/>
+                <a16:creationId xmlns:a16="http://schemas.microsoft.com/office/drawing/2014/main" id="{A9FC1970-0EE6-49EE-AF20-CDF09E3FD213}"/>
               </a:ext>
             </a:extLst>
           </p:cNvPr>
@@ -21681,7 +21681,7 @@
           <p:cNvPr id="47" name="">
             <a:extLst xmlns:a="http://schemas.openxmlformats.org/drawingml/2006/main">
               <a:ext uri="{FF2B5EF4-FFF2-40B4-BE49-F238E27FC236}">
-                <a16:creationId xmlns:a16="http://schemas.microsoft.com/office/drawing/2014/main" id="{49D85874-29FE-414F-BD5E-53829B22E99D}"/>
+                <a16:creationId xmlns:a16="http://schemas.microsoft.com/office/drawing/2014/main" id="{6227C005-F32E-497D-814B-F8494E3C4F4D}"/>
               </a:ext>
             </a:extLst>
           </p:cNvPr>
@@ -21714,7 +21714,7 @@
           <p:cNvPr id="48" name="">
             <a:extLst xmlns:a="http://schemas.openxmlformats.org/drawingml/2006/main">
               <a:ext uri="{FF2B5EF4-FFF2-40B4-BE49-F238E27FC236}">
-                <a16:creationId xmlns:a16="http://schemas.microsoft.com/office/drawing/2014/main" id="{01C5AB7B-53BE-42B3-A95A-E3A5879499DD}"/>
+                <a16:creationId xmlns:a16="http://schemas.microsoft.com/office/drawing/2014/main" id="{3E6776CE-0F1F-466B-98D3-094ED59784B5}"/>
               </a:ext>
             </a:extLst>
           </p:cNvPr>
@@ -21772,7 +21772,7 @@
           <p:cNvPr id="49" name="">
             <a:extLst xmlns:a="http://schemas.openxmlformats.org/drawingml/2006/main">
               <a:ext uri="{FF2B5EF4-FFF2-40B4-BE49-F238E27FC236}">
-                <a16:creationId xmlns:a16="http://schemas.microsoft.com/office/drawing/2014/main" id="{C4584F8B-6401-4FBD-97BA-290FBC7BE1DC}"/>
+                <a16:creationId xmlns:a16="http://schemas.microsoft.com/office/drawing/2014/main" id="{5A0206EF-BDA5-43A9-A810-DDC37509A153}"/>
               </a:ext>
             </a:extLst>
           </p:cNvPr>
@@ -21830,7 +21830,7 @@
           <p:cNvPr id="50" name="">
             <a:extLst xmlns:a="http://schemas.openxmlformats.org/drawingml/2006/main">
               <a:ext uri="{FF2B5EF4-FFF2-40B4-BE49-F238E27FC236}">
-                <a16:creationId xmlns:a16="http://schemas.microsoft.com/office/drawing/2014/main" id="{8F90974D-42D9-47DD-849A-7A92148CF9CE}"/>
+                <a16:creationId xmlns:a16="http://schemas.microsoft.com/office/drawing/2014/main" id="{A838B311-7C40-47CE-8D4F-04F66A170EB7}"/>
               </a:ext>
             </a:extLst>
           </p:cNvPr>
@@ -21863,7 +21863,7 @@
           <p:cNvPr id="51" name="">
             <a:extLst xmlns:a="http://schemas.openxmlformats.org/drawingml/2006/main">
               <a:ext uri="{FF2B5EF4-FFF2-40B4-BE49-F238E27FC236}">
-                <a16:creationId xmlns:a16="http://schemas.microsoft.com/office/drawing/2014/main" id="{650C911B-AD5E-49A5-95F7-403BAC0E7F87}"/>
+                <a16:creationId xmlns:a16="http://schemas.microsoft.com/office/drawing/2014/main" id="{237CCE0B-9E93-49A1-8C20-7A8CAF11B220}"/>
               </a:ext>
             </a:extLst>
           </p:cNvPr>
@@ -21921,7 +21921,7 @@
           <p:cNvPr id="52" name="">
             <a:extLst xmlns:a="http://schemas.openxmlformats.org/drawingml/2006/main">
               <a:ext uri="{FF2B5EF4-FFF2-40B4-BE49-F238E27FC236}">
-                <a16:creationId xmlns:a16="http://schemas.microsoft.com/office/drawing/2014/main" id="{DE3D9CBE-1F6F-46D0-8159-CDB8C7BA4769}"/>
+                <a16:creationId xmlns:a16="http://schemas.microsoft.com/office/drawing/2014/main" id="{15DE2F47-4A9E-4529-B680-F28422DA20CE}"/>
               </a:ext>
             </a:extLst>
           </p:cNvPr>
@@ -21954,7 +21954,7 @@
           <p:cNvPr id="53" name="">
             <a:extLst xmlns:a="http://schemas.openxmlformats.org/drawingml/2006/main">
               <a:ext uri="{FF2B5EF4-FFF2-40B4-BE49-F238E27FC236}">
-                <a16:creationId xmlns:a16="http://schemas.microsoft.com/office/drawing/2014/main" id="{CA807BE2-9399-4BCD-A09A-269E1E9C16EA}"/>
+                <a16:creationId xmlns:a16="http://schemas.microsoft.com/office/drawing/2014/main" id="{B6D0E3A8-4955-4667-B795-2426542663CE}"/>
               </a:ext>
             </a:extLst>
           </p:cNvPr>
@@ -22012,7 +22012,7 @@
           <p:cNvPr id="54" name="">
             <a:extLst xmlns:a="http://schemas.openxmlformats.org/drawingml/2006/main">
               <a:ext uri="{FF2B5EF4-FFF2-40B4-BE49-F238E27FC236}">
-                <a16:creationId xmlns:a16="http://schemas.microsoft.com/office/drawing/2014/main" id="{DDB4A4A5-5D6E-4CCD-883F-73DFD83BE349}"/>
+                <a16:creationId xmlns:a16="http://schemas.microsoft.com/office/drawing/2014/main" id="{CB1B1B8C-5D61-4301-838F-8B4A561B2EF4}"/>
               </a:ext>
             </a:extLst>
           </p:cNvPr>
@@ -22070,7 +22070,7 @@
           <p:cNvPr id="55" name="">
             <a:extLst xmlns:a="http://schemas.openxmlformats.org/drawingml/2006/main">
               <a:ext uri="{FF2B5EF4-FFF2-40B4-BE49-F238E27FC236}">
-                <a16:creationId xmlns:a16="http://schemas.microsoft.com/office/drawing/2014/main" id="{BD383B93-121F-4FE4-A95E-301803094416}"/>
+                <a16:creationId xmlns:a16="http://schemas.microsoft.com/office/drawing/2014/main" id="{D379E6DB-6826-4694-83A3-FEC011E91ABD}"/>
               </a:ext>
             </a:extLst>
           </p:cNvPr>
@@ -22103,7 +22103,7 @@
           <p:cNvPr id="56" name="">
             <a:extLst xmlns:a="http://schemas.openxmlformats.org/drawingml/2006/main">
               <a:ext uri="{FF2B5EF4-FFF2-40B4-BE49-F238E27FC236}">
-                <a16:creationId xmlns:a16="http://schemas.microsoft.com/office/drawing/2014/main" id="{DCF065ED-CC3D-4A95-A03B-C4A3FA86B280}"/>
+                <a16:creationId xmlns:a16="http://schemas.microsoft.com/office/drawing/2014/main" id="{F1692D36-9FD2-4DE3-A3D3-547B7ADC2BC5}"/>
               </a:ext>
             </a:extLst>
           </p:cNvPr>
@@ -22161,7 +22161,7 @@
           <p:cNvPr id="57" name="">
             <a:extLst xmlns:a="http://schemas.openxmlformats.org/drawingml/2006/main">
               <a:ext uri="{FF2B5EF4-FFF2-40B4-BE49-F238E27FC236}">
-                <a16:creationId xmlns:a16="http://schemas.microsoft.com/office/drawing/2014/main" id="{4C10CEDA-9741-42E4-A7A1-C1D1F48D747C}"/>
+                <a16:creationId xmlns:a16="http://schemas.microsoft.com/office/drawing/2014/main" id="{004F582D-DEDE-4DDD-8EF3-37835FA84BA7}"/>
               </a:ext>
             </a:extLst>
           </p:cNvPr>
@@ -22194,7 +22194,7 @@
           <p:cNvPr id="58" name="">
             <a:extLst xmlns:a="http://schemas.openxmlformats.org/drawingml/2006/main">
               <a:ext uri="{FF2B5EF4-FFF2-40B4-BE49-F238E27FC236}">
-                <a16:creationId xmlns:a16="http://schemas.microsoft.com/office/drawing/2014/main" id="{749986FF-9CA5-43D5-96FB-DC42F9A34204}"/>
+                <a16:creationId xmlns:a16="http://schemas.microsoft.com/office/drawing/2014/main" id="{9239AAD9-BDC6-4A36-AC98-0B8392A6037C}"/>
               </a:ext>
             </a:extLst>
           </p:cNvPr>
@@ -22252,7 +22252,7 @@
           <p:cNvPr id="59" name="">
             <a:extLst xmlns:a="http://schemas.openxmlformats.org/drawingml/2006/main">
               <a:ext uri="{FF2B5EF4-FFF2-40B4-BE49-F238E27FC236}">
-                <a16:creationId xmlns:a16="http://schemas.microsoft.com/office/drawing/2014/main" id="{DBE4B098-58AE-4550-8CEC-AD32BCC390E7}"/>
+                <a16:creationId xmlns:a16="http://schemas.microsoft.com/office/drawing/2014/main" id="{66604ABF-FB26-4268-BC8F-ED21650D8BBA}"/>
               </a:ext>
             </a:extLst>
           </p:cNvPr>
@@ -22310,7 +22310,7 @@
           <p:cNvPr id="60" name="">
             <a:extLst xmlns:a="http://schemas.openxmlformats.org/drawingml/2006/main">
               <a:ext uri="{FF2B5EF4-FFF2-40B4-BE49-F238E27FC236}">
-                <a16:creationId xmlns:a16="http://schemas.microsoft.com/office/drawing/2014/main" id="{17F697CF-C789-4457-AA29-92BADC112783}"/>
+                <a16:creationId xmlns:a16="http://schemas.microsoft.com/office/drawing/2014/main" id="{38F98C22-DEDB-4F14-BA81-E9B199C3392C}"/>
               </a:ext>
             </a:extLst>
           </p:cNvPr>
@@ -22343,7 +22343,7 @@
           <p:cNvPr id="61" name="">
             <a:extLst xmlns:a="http://schemas.openxmlformats.org/drawingml/2006/main">
               <a:ext uri="{FF2B5EF4-FFF2-40B4-BE49-F238E27FC236}">
-                <a16:creationId xmlns:a16="http://schemas.microsoft.com/office/drawing/2014/main" id="{2B0E521B-FB68-4D66-996D-1ED07F8E8AD1}"/>
+                <a16:creationId xmlns:a16="http://schemas.microsoft.com/office/drawing/2014/main" id="{67E2A80B-B1D6-4494-9A77-38FBF1BBACB1}"/>
               </a:ext>
             </a:extLst>
           </p:cNvPr>
@@ -22401,7 +22401,7 @@
           <p:cNvPr id="62" name="">
             <a:extLst xmlns:a="http://schemas.openxmlformats.org/drawingml/2006/main">
               <a:ext uri="{FF2B5EF4-FFF2-40B4-BE49-F238E27FC236}">
-                <a16:creationId xmlns:a16="http://schemas.microsoft.com/office/drawing/2014/main" id="{948BB914-4CC6-4B1C-BD80-B2EF90310030}"/>
+                <a16:creationId xmlns:a16="http://schemas.microsoft.com/office/drawing/2014/main" id="{FBC70FB7-9814-41C6-BC31-2839D433363C}"/>
               </a:ext>
             </a:extLst>
           </p:cNvPr>
@@ -22434,7 +22434,7 @@
           <p:cNvPr id="63" name="">
             <a:extLst xmlns:a="http://schemas.openxmlformats.org/drawingml/2006/main">
               <a:ext uri="{FF2B5EF4-FFF2-40B4-BE49-F238E27FC236}">
-                <a16:creationId xmlns:a16="http://schemas.microsoft.com/office/drawing/2014/main" id="{398F465E-3772-4227-824E-B0A08B16F709}"/>
+                <a16:creationId xmlns:a16="http://schemas.microsoft.com/office/drawing/2014/main" id="{790F4907-C340-4037-9AB3-32976F842D13}"/>
               </a:ext>
             </a:extLst>
           </p:cNvPr>
@@ -22492,7 +22492,7 @@
           <p:cNvPr id="64" name="">
             <a:extLst xmlns:a="http://schemas.openxmlformats.org/drawingml/2006/main">
               <a:ext uri="{FF2B5EF4-FFF2-40B4-BE49-F238E27FC236}">
-                <a16:creationId xmlns:a16="http://schemas.microsoft.com/office/drawing/2014/main" id="{35BE6409-CE1D-4D5E-80D0-53BE41F6E268}"/>
+                <a16:creationId xmlns:a16="http://schemas.microsoft.com/office/drawing/2014/main" id="{9CB70CBB-D708-4144-93DE-F949F79E9A5C}"/>
               </a:ext>
             </a:extLst>
           </p:cNvPr>
@@ -22550,7 +22550,7 @@
           <p:cNvPr id="65" name="">
             <a:extLst xmlns:a="http://schemas.openxmlformats.org/drawingml/2006/main">
               <a:ext uri="{FF2B5EF4-FFF2-40B4-BE49-F238E27FC236}">
-                <a16:creationId xmlns:a16="http://schemas.microsoft.com/office/drawing/2014/main" id="{CF8DA774-43FF-4648-A506-278150B117AE}"/>
+                <a16:creationId xmlns:a16="http://schemas.microsoft.com/office/drawing/2014/main" id="{3DE90067-FCF4-4E99-9E68-9449388539A8}"/>
               </a:ext>
             </a:extLst>
           </p:cNvPr>
@@ -22583,7 +22583,7 @@
           <p:cNvPr id="66" name="">
             <a:extLst xmlns:a="http://schemas.openxmlformats.org/drawingml/2006/main">
               <a:ext uri="{FF2B5EF4-FFF2-40B4-BE49-F238E27FC236}">
-                <a16:creationId xmlns:a16="http://schemas.microsoft.com/office/drawing/2014/main" id="{A1DDC35D-2B1D-4A15-953E-0529F38F3F38}"/>
+                <a16:creationId xmlns:a16="http://schemas.microsoft.com/office/drawing/2014/main" id="{F226E28E-9DD3-49BF-82CF-8DA8DCA718E4}"/>
               </a:ext>
             </a:extLst>
           </p:cNvPr>
@@ -22641,7 +22641,7 @@
                 <a:latin typeface="Microsoft YaHei"/>
                 <a:ea typeface="Microsoft YaHei"/>
                 <a:cs typeface="Microsoft YaHei"/>
-                <a:hlinkClick xmlns:r="http://schemas.openxmlformats.org/officeDocument/2006/relationships" r:id="Rd23464334c394ec9"/>
+                <a:hlinkClick xmlns:r="http://schemas.openxmlformats.org/officeDocument/2006/relationships" r:id="R3ebbb8507d1945d5"/>
               </a:rPr>
               <a:t>智谱：常用工作流</a:t>
             </a:r>
@@ -22653,7 +22653,7 @@
           <p:cNvPr id="67" name="">
             <a:extLst xmlns:a="http://schemas.openxmlformats.org/drawingml/2006/main">
               <a:ext uri="{FF2B5EF4-FFF2-40B4-BE49-F238E27FC236}">
-                <a16:creationId xmlns:a16="http://schemas.microsoft.com/office/drawing/2014/main" id="{F87F9015-71EE-4359-AADB-6D045DC74E7A}"/>
+                <a16:creationId xmlns:a16="http://schemas.microsoft.com/office/drawing/2014/main" id="{DDF6B4B2-88A9-4684-953D-12170AA15D9F}"/>
               </a:ext>
             </a:extLst>
           </p:cNvPr>
@@ -22709,7 +22709,7 @@
     </p:spTree>
     <p:extLst>
       <p:ext uri="{BB962C8B-B14F-4D97-AF65-F5344CB8AC3E}">
-        <p14:creationId xmlns:p14="http://schemas.microsoft.com/office/powerpoint/2010/main" val="65513144"/>
+        <p14:creationId xmlns:p14="http://schemas.microsoft.com/office/powerpoint/2010/main" val="739004540"/>
       </p:ext>
     </p:extLst>
   </p:cSld>
@@ -22740,7 +22740,7 @@
           <p:cNvPr id="38" name="">
             <a:extLst xmlns:a="http://schemas.openxmlformats.org/drawingml/2006/main">
               <a:ext uri="{FF2B5EF4-FFF2-40B4-BE49-F238E27FC236}">
-                <a16:creationId xmlns:a16="http://schemas.microsoft.com/office/drawing/2014/main" id="{79056E9E-AA17-4CF0-97C6-54B94AAF98A0}"/>
+                <a16:creationId xmlns:a16="http://schemas.microsoft.com/office/drawing/2014/main" id="{84210CF7-E3B2-4F03-9291-04C7D1DA9DED}"/>
               </a:ext>
             </a:extLst>
           </p:cNvPr>
@@ -22773,7 +22773,7 @@
           <p:cNvPr id="2" name="">
             <a:extLst xmlns:a="http://schemas.openxmlformats.org/drawingml/2006/main">
               <a:ext uri="{FF2B5EF4-FFF2-40B4-BE49-F238E27FC236}">
-                <a16:creationId xmlns:a16="http://schemas.microsoft.com/office/drawing/2014/main" id="{AF539356-5699-420E-8BC6-67488FE96695}"/>
+                <a16:creationId xmlns:a16="http://schemas.microsoft.com/office/drawing/2014/main" id="{7C3F5F38-964C-443E-8AB1-9CD32557C491}"/>
               </a:ext>
             </a:extLst>
           </p:cNvPr>
@@ -22831,7 +22831,7 @@
           <p:cNvPr id="3" name="">
             <a:extLst xmlns:a="http://schemas.openxmlformats.org/drawingml/2006/main">
               <a:ext uri="{FF2B5EF4-FFF2-40B4-BE49-F238E27FC236}">
-                <a16:creationId xmlns:a16="http://schemas.microsoft.com/office/drawing/2014/main" id="{14F27BEE-CE8A-4DC8-AC88-7A2594EF6FDE}"/>
+                <a16:creationId xmlns:a16="http://schemas.microsoft.com/office/drawing/2014/main" id="{1004F2AF-6501-4488-9E8C-840008F513AC}"/>
               </a:ext>
             </a:extLst>
           </p:cNvPr>
@@ -22889,7 +22889,7 @@
           <p:cNvPr id="4" name="">
             <a:extLst xmlns:a="http://schemas.openxmlformats.org/drawingml/2006/main">
               <a:ext uri="{FF2B5EF4-FFF2-40B4-BE49-F238E27FC236}">
-                <a16:creationId xmlns:a16="http://schemas.microsoft.com/office/drawing/2014/main" id="{752F32CC-278E-4FAC-8DC3-FF073795B0DF}"/>
+                <a16:creationId xmlns:a16="http://schemas.microsoft.com/office/drawing/2014/main" id="{C0710090-3DC2-4772-B179-1A77CF9D87C3}"/>
               </a:ext>
             </a:extLst>
           </p:cNvPr>
@@ -22907,7 +22907,7 @@
             <a:avLst/>
           </a:prstGeom>
           <a:solidFill xmlns:a="http://schemas.openxmlformats.org/drawingml/2006/main">
-            <a:srgbClr val="FFF4F4"/>
+            <a:srgbClr val="F7F7F7"/>
           </a:solidFill>
           <a:ln xmlns:a="http://schemas.openxmlformats.org/drawingml/2006/main" w="9525">
             <a:solidFill>
@@ -22922,7 +22922,7 @@
           <p:cNvPr id="5" name="">
             <a:extLst xmlns:a="http://schemas.openxmlformats.org/drawingml/2006/main">
               <a:ext uri="{FF2B5EF4-FFF2-40B4-BE49-F238E27FC236}">
-                <a16:creationId xmlns:a16="http://schemas.microsoft.com/office/drawing/2014/main" id="{777123FA-3C53-4D79-954C-3ADCD2BE0840}"/>
+                <a16:creationId xmlns:a16="http://schemas.microsoft.com/office/drawing/2014/main" id="{E4E527D9-FDC0-4F4A-A6DB-1EF82B160768}"/>
               </a:ext>
             </a:extLst>
           </p:cNvPr>
@@ -22980,7 +22980,7 @@
           <p:cNvPr id="6" name="">
             <a:extLst xmlns:a="http://schemas.openxmlformats.org/drawingml/2006/main">
               <a:ext uri="{FF2B5EF4-FFF2-40B4-BE49-F238E27FC236}">
-                <a16:creationId xmlns:a16="http://schemas.microsoft.com/office/drawing/2014/main" id="{268FF9EB-95D0-4B99-9B07-71797192FDB9}"/>
+                <a16:creationId xmlns:a16="http://schemas.microsoft.com/office/drawing/2014/main" id="{F077752A-F149-4EB2-AB03-83296C1977A7}"/>
               </a:ext>
             </a:extLst>
           </p:cNvPr>
@@ -23038,7 +23038,7 @@
           <p:cNvPr id="7" name="">
             <a:extLst xmlns:a="http://schemas.openxmlformats.org/drawingml/2006/main">
               <a:ext uri="{FF2B5EF4-FFF2-40B4-BE49-F238E27FC236}">
-                <a16:creationId xmlns:a16="http://schemas.microsoft.com/office/drawing/2014/main" id="{97BE5E8D-3A76-48A7-B76A-42E51701393D}"/>
+                <a16:creationId xmlns:a16="http://schemas.microsoft.com/office/drawing/2014/main" id="{4878D3BE-9F4E-4160-BCF0-59DF36F0FECD}"/>
               </a:ext>
             </a:extLst>
           </p:cNvPr>
@@ -23096,7 +23096,7 @@
           <p:cNvPr id="8" name="">
             <a:extLst xmlns:a="http://schemas.openxmlformats.org/drawingml/2006/main">
               <a:ext uri="{FF2B5EF4-FFF2-40B4-BE49-F238E27FC236}">
-                <a16:creationId xmlns:a16="http://schemas.microsoft.com/office/drawing/2014/main" id="{4F6099A8-A77C-4116-93EE-1B7A365294E6}"/>
+                <a16:creationId xmlns:a16="http://schemas.microsoft.com/office/drawing/2014/main" id="{035EC89D-2C11-4253-9724-C4615F0E46AA}"/>
               </a:ext>
             </a:extLst>
           </p:cNvPr>
@@ -23154,7 +23154,7 @@
           <p:cNvPr id="9" name="">
             <a:extLst xmlns:a="http://schemas.openxmlformats.org/drawingml/2006/main">
               <a:ext uri="{FF2B5EF4-FFF2-40B4-BE49-F238E27FC236}">
-                <a16:creationId xmlns:a16="http://schemas.microsoft.com/office/drawing/2014/main" id="{7EDA3F07-7A0F-4D27-893B-D472E41773FB}"/>
+                <a16:creationId xmlns:a16="http://schemas.microsoft.com/office/drawing/2014/main" id="{F5366A15-689A-4EFA-9860-96FF963AA023}"/>
               </a:ext>
             </a:extLst>
           </p:cNvPr>
@@ -23187,7 +23187,7 @@
           <p:cNvPr id="10" name="">
             <a:extLst xmlns:a="http://schemas.openxmlformats.org/drawingml/2006/main">
               <a:ext uri="{FF2B5EF4-FFF2-40B4-BE49-F238E27FC236}">
-                <a16:creationId xmlns:a16="http://schemas.microsoft.com/office/drawing/2014/main" id="{422B7D6F-31BC-4326-80F3-ACCA266DDE4B}"/>
+                <a16:creationId xmlns:a16="http://schemas.microsoft.com/office/drawing/2014/main" id="{F52612CC-EDC8-4987-A9BB-77E3F7B03E6D}"/>
               </a:ext>
             </a:extLst>
           </p:cNvPr>
@@ -23245,7 +23245,7 @@
           <p:cNvPr id="11" name="">
             <a:extLst xmlns:a="http://schemas.openxmlformats.org/drawingml/2006/main">
               <a:ext uri="{FF2B5EF4-FFF2-40B4-BE49-F238E27FC236}">
-                <a16:creationId xmlns:a16="http://schemas.microsoft.com/office/drawing/2014/main" id="{BC00C98D-4044-4F6A-90BA-7256B867C998}"/>
+                <a16:creationId xmlns:a16="http://schemas.microsoft.com/office/drawing/2014/main" id="{77641442-56F7-4C7D-9BCE-843254B41580}"/>
               </a:ext>
             </a:extLst>
           </p:cNvPr>
@@ -23303,7 +23303,7 @@
           <p:cNvPr id="12" name="">
             <a:extLst xmlns:a="http://schemas.openxmlformats.org/drawingml/2006/main">
               <a:ext uri="{FF2B5EF4-FFF2-40B4-BE49-F238E27FC236}">
-                <a16:creationId xmlns:a16="http://schemas.microsoft.com/office/drawing/2014/main" id="{FCC700A6-85D6-40DB-9FE6-163A895BFB86}"/>
+                <a16:creationId xmlns:a16="http://schemas.microsoft.com/office/drawing/2014/main" id="{8F473FD5-BD54-4D58-83A0-40E01821402D}"/>
               </a:ext>
             </a:extLst>
           </p:cNvPr>
@@ -23361,7 +23361,7 @@
           <p:cNvPr id="13" name="">
             <a:extLst xmlns:a="http://schemas.openxmlformats.org/drawingml/2006/main">
               <a:ext uri="{FF2B5EF4-FFF2-40B4-BE49-F238E27FC236}">
-                <a16:creationId xmlns:a16="http://schemas.microsoft.com/office/drawing/2014/main" id="{B5E4C000-6030-43AA-9E54-34310BD7336B}"/>
+                <a16:creationId xmlns:a16="http://schemas.microsoft.com/office/drawing/2014/main" id="{990B482B-35E3-45E5-BEC3-0916A33F2DF5}"/>
               </a:ext>
             </a:extLst>
           </p:cNvPr>
@@ -23419,7 +23419,7 @@
           <p:cNvPr id="14" name="">
             <a:extLst xmlns:a="http://schemas.openxmlformats.org/drawingml/2006/main">
               <a:ext uri="{FF2B5EF4-FFF2-40B4-BE49-F238E27FC236}">
-                <a16:creationId xmlns:a16="http://schemas.microsoft.com/office/drawing/2014/main" id="{E995CAB1-6E8F-4871-90DE-8BC9DE765669}"/>
+                <a16:creationId xmlns:a16="http://schemas.microsoft.com/office/drawing/2014/main" id="{5135FDF9-17C3-4896-8B5D-0861B0C4BDA1}"/>
               </a:ext>
             </a:extLst>
           </p:cNvPr>
@@ -23452,7 +23452,7 @@
           <p:cNvPr id="15" name="">
             <a:extLst xmlns:a="http://schemas.openxmlformats.org/drawingml/2006/main">
               <a:ext uri="{FF2B5EF4-FFF2-40B4-BE49-F238E27FC236}">
-                <a16:creationId xmlns:a16="http://schemas.microsoft.com/office/drawing/2014/main" id="{894BE2D7-C194-4DE2-B080-C03F3E69C433}"/>
+                <a16:creationId xmlns:a16="http://schemas.microsoft.com/office/drawing/2014/main" id="{67665A98-D4E5-40EA-BF82-26D3C8071AAB}"/>
               </a:ext>
             </a:extLst>
           </p:cNvPr>
@@ -23510,7 +23510,7 @@
           <p:cNvPr id="16" name="">
             <a:extLst xmlns:a="http://schemas.openxmlformats.org/drawingml/2006/main">
               <a:ext uri="{FF2B5EF4-FFF2-40B4-BE49-F238E27FC236}">
-                <a16:creationId xmlns:a16="http://schemas.microsoft.com/office/drawing/2014/main" id="{2365DC24-87BD-4F8C-A228-B85D7ED11F86}"/>
+                <a16:creationId xmlns:a16="http://schemas.microsoft.com/office/drawing/2014/main" id="{080F3E1B-0D5D-4D10-91E2-A0EF42FCF0E4}"/>
               </a:ext>
             </a:extLst>
           </p:cNvPr>
@@ -23568,7 +23568,7 @@
           <p:cNvPr id="17" name="">
             <a:extLst xmlns:a="http://schemas.openxmlformats.org/drawingml/2006/main">
               <a:ext uri="{FF2B5EF4-FFF2-40B4-BE49-F238E27FC236}">
-                <a16:creationId xmlns:a16="http://schemas.microsoft.com/office/drawing/2014/main" id="{DC25437C-1151-4FE2-A6DD-9D1E66E0D72A}"/>
+                <a16:creationId xmlns:a16="http://schemas.microsoft.com/office/drawing/2014/main" id="{73991087-DD5A-4594-A3B4-2815D5B995DA}"/>
               </a:ext>
             </a:extLst>
           </p:cNvPr>
@@ -23626,7 +23626,7 @@
           <p:cNvPr id="18" name="">
             <a:extLst xmlns:a="http://schemas.openxmlformats.org/drawingml/2006/main">
               <a:ext uri="{FF2B5EF4-FFF2-40B4-BE49-F238E27FC236}">
-                <a16:creationId xmlns:a16="http://schemas.microsoft.com/office/drawing/2014/main" id="{C1DABC0D-5038-4B33-A93F-D5FFF5D5E890}"/>
+                <a16:creationId xmlns:a16="http://schemas.microsoft.com/office/drawing/2014/main" id="{DC7FC0A0-76A1-412C-B895-22A91A41E248}"/>
               </a:ext>
             </a:extLst>
           </p:cNvPr>
@@ -23684,7 +23684,7 @@
           <p:cNvPr id="19" name="">
             <a:extLst xmlns:a="http://schemas.openxmlformats.org/drawingml/2006/main">
               <a:ext uri="{FF2B5EF4-FFF2-40B4-BE49-F238E27FC236}">
-                <a16:creationId xmlns:a16="http://schemas.microsoft.com/office/drawing/2014/main" id="{380DD541-A926-46D7-B7F2-77D052D43839}"/>
+                <a16:creationId xmlns:a16="http://schemas.microsoft.com/office/drawing/2014/main" id="{174A0DB0-9524-416F-95EB-E9C4A5C14664}"/>
               </a:ext>
             </a:extLst>
           </p:cNvPr>
@@ -23717,7 +23717,7 @@
           <p:cNvPr id="20" name="">
             <a:extLst xmlns:a="http://schemas.openxmlformats.org/drawingml/2006/main">
               <a:ext uri="{FF2B5EF4-FFF2-40B4-BE49-F238E27FC236}">
-                <a16:creationId xmlns:a16="http://schemas.microsoft.com/office/drawing/2014/main" id="{1F7FD113-242E-48F2-8B98-DDD6E75E2F44}"/>
+                <a16:creationId xmlns:a16="http://schemas.microsoft.com/office/drawing/2014/main" id="{C8BD2887-EC7E-43CB-8C76-774BFF376415}"/>
               </a:ext>
             </a:extLst>
           </p:cNvPr>
@@ -23775,7 +23775,7 @@
           <p:cNvPr id="21" name="">
             <a:extLst xmlns:a="http://schemas.openxmlformats.org/drawingml/2006/main">
               <a:ext uri="{FF2B5EF4-FFF2-40B4-BE49-F238E27FC236}">
-                <a16:creationId xmlns:a16="http://schemas.microsoft.com/office/drawing/2014/main" id="{555F0C9C-4717-4CC2-996D-7A31CDA7DCD9}"/>
+                <a16:creationId xmlns:a16="http://schemas.microsoft.com/office/drawing/2014/main" id="{B9432461-0071-4AE7-B86D-E4E99F47B825}"/>
               </a:ext>
             </a:extLst>
           </p:cNvPr>
@@ -23833,7 +23833,7 @@
           <p:cNvPr id="22" name="">
             <a:extLst xmlns:a="http://schemas.openxmlformats.org/drawingml/2006/main">
               <a:ext uri="{FF2B5EF4-FFF2-40B4-BE49-F238E27FC236}">
-                <a16:creationId xmlns:a16="http://schemas.microsoft.com/office/drawing/2014/main" id="{FBCB7AB8-62B3-45C0-A625-371F975ED08F}"/>
+                <a16:creationId xmlns:a16="http://schemas.microsoft.com/office/drawing/2014/main" id="{D73CEBE6-6F18-49E5-AE44-E03BE13E68C1}"/>
               </a:ext>
             </a:extLst>
           </p:cNvPr>
@@ -23891,7 +23891,7 @@
           <p:cNvPr id="23" name="">
             <a:extLst xmlns:a="http://schemas.openxmlformats.org/drawingml/2006/main">
               <a:ext uri="{FF2B5EF4-FFF2-40B4-BE49-F238E27FC236}">
-                <a16:creationId xmlns:a16="http://schemas.microsoft.com/office/drawing/2014/main" id="{76C58492-B7A9-48ED-8427-D1F7869DD109}"/>
+                <a16:creationId xmlns:a16="http://schemas.microsoft.com/office/drawing/2014/main" id="{0D7078B9-3526-48B1-B962-515EDA0A8CA5}"/>
               </a:ext>
             </a:extLst>
           </p:cNvPr>
@@ -23949,7 +23949,7 @@
           <p:cNvPr id="24" name="">
             <a:extLst xmlns:a="http://schemas.openxmlformats.org/drawingml/2006/main">
               <a:ext uri="{FF2B5EF4-FFF2-40B4-BE49-F238E27FC236}">
-                <a16:creationId xmlns:a16="http://schemas.microsoft.com/office/drawing/2014/main" id="{195BE641-D910-40B2-91A9-185BF8B25499}"/>
+                <a16:creationId xmlns:a16="http://schemas.microsoft.com/office/drawing/2014/main" id="{DCE0F0D3-C9F7-4ECE-A07F-E95BAE7A7D2A}"/>
               </a:ext>
             </a:extLst>
           </p:cNvPr>
@@ -23982,7 +23982,7 @@
           <p:cNvPr id="25" name="">
             <a:extLst xmlns:a="http://schemas.openxmlformats.org/drawingml/2006/main">
               <a:ext uri="{FF2B5EF4-FFF2-40B4-BE49-F238E27FC236}">
-                <a16:creationId xmlns:a16="http://schemas.microsoft.com/office/drawing/2014/main" id="{6B501F10-6741-4A5B-8556-CC12F118BE66}"/>
+                <a16:creationId xmlns:a16="http://schemas.microsoft.com/office/drawing/2014/main" id="{D9F5D6E1-D213-4472-9CF7-33FD01B1C457}"/>
               </a:ext>
             </a:extLst>
           </p:cNvPr>
@@ -24040,7 +24040,7 @@
           <p:cNvPr id="26" name="">
             <a:extLst xmlns:a="http://schemas.openxmlformats.org/drawingml/2006/main">
               <a:ext uri="{FF2B5EF4-FFF2-40B4-BE49-F238E27FC236}">
-                <a16:creationId xmlns:a16="http://schemas.microsoft.com/office/drawing/2014/main" id="{5C41C3E8-2B98-4A7A-A048-7A3458D7D95F}"/>
+                <a16:creationId xmlns:a16="http://schemas.microsoft.com/office/drawing/2014/main" id="{C9B1D50C-3688-41CC-890A-346DFB82F71C}"/>
               </a:ext>
             </a:extLst>
           </p:cNvPr>
@@ -24098,7 +24098,7 @@
           <p:cNvPr id="27" name="">
             <a:extLst xmlns:a="http://schemas.openxmlformats.org/drawingml/2006/main">
               <a:ext uri="{FF2B5EF4-FFF2-40B4-BE49-F238E27FC236}">
-                <a16:creationId xmlns:a16="http://schemas.microsoft.com/office/drawing/2014/main" id="{ACCD7E27-0D96-45FA-9996-526C1A1B6C3E}"/>
+                <a16:creationId xmlns:a16="http://schemas.microsoft.com/office/drawing/2014/main" id="{B6139FB9-88DB-484B-AE5C-EB409DC6AA3A}"/>
               </a:ext>
             </a:extLst>
           </p:cNvPr>
@@ -24156,7 +24156,7 @@
           <p:cNvPr id="28" name="">
             <a:extLst xmlns:a="http://schemas.openxmlformats.org/drawingml/2006/main">
               <a:ext uri="{FF2B5EF4-FFF2-40B4-BE49-F238E27FC236}">
-                <a16:creationId xmlns:a16="http://schemas.microsoft.com/office/drawing/2014/main" id="{69899BF5-EA86-4132-8112-5F7C13C14EA2}"/>
+                <a16:creationId xmlns:a16="http://schemas.microsoft.com/office/drawing/2014/main" id="{D19B176D-C241-46CD-8D93-85749A72A9AA}"/>
               </a:ext>
             </a:extLst>
           </p:cNvPr>
@@ -24214,7 +24214,7 @@
           <p:cNvPr id="29" name="">
             <a:extLst xmlns:a="http://schemas.openxmlformats.org/drawingml/2006/main">
               <a:ext uri="{FF2B5EF4-FFF2-40B4-BE49-F238E27FC236}">
-                <a16:creationId xmlns:a16="http://schemas.microsoft.com/office/drawing/2014/main" id="{F6D3DC72-90DD-414C-BD30-59F133C1684F}"/>
+                <a16:creationId xmlns:a16="http://schemas.microsoft.com/office/drawing/2014/main" id="{E89B21D5-8DBC-4F56-9C3D-89749A0CC5B7}"/>
               </a:ext>
             </a:extLst>
           </p:cNvPr>
@@ -24247,7 +24247,7 @@
           <p:cNvPr id="30" name="">
             <a:extLst xmlns:a="http://schemas.openxmlformats.org/drawingml/2006/main">
               <a:ext uri="{FF2B5EF4-FFF2-40B4-BE49-F238E27FC236}">
-                <a16:creationId xmlns:a16="http://schemas.microsoft.com/office/drawing/2014/main" id="{C88668B8-6B90-4BC3-B680-A37D511060A6}"/>
+                <a16:creationId xmlns:a16="http://schemas.microsoft.com/office/drawing/2014/main" id="{AEA23CAD-9AC6-4007-B2CB-B0A86104CFF3}"/>
               </a:ext>
             </a:extLst>
           </p:cNvPr>
@@ -24305,7 +24305,7 @@
           <p:cNvPr id="31" name="">
             <a:extLst xmlns:a="http://schemas.openxmlformats.org/drawingml/2006/main">
               <a:ext uri="{FF2B5EF4-FFF2-40B4-BE49-F238E27FC236}">
-                <a16:creationId xmlns:a16="http://schemas.microsoft.com/office/drawing/2014/main" id="{178C88DB-4725-47AE-8116-3442209E944E}"/>
+                <a16:creationId xmlns:a16="http://schemas.microsoft.com/office/drawing/2014/main" id="{064A9736-95A0-4882-8D5C-034941B0B2D3}"/>
               </a:ext>
             </a:extLst>
           </p:cNvPr>
@@ -24363,7 +24363,7 @@
           <p:cNvPr id="32" name="">
             <a:extLst xmlns:a="http://schemas.openxmlformats.org/drawingml/2006/main">
               <a:ext uri="{FF2B5EF4-FFF2-40B4-BE49-F238E27FC236}">
-                <a16:creationId xmlns:a16="http://schemas.microsoft.com/office/drawing/2014/main" id="{2FCD075A-2AF4-4CB2-8306-A8AE73A6A5A3}"/>
+                <a16:creationId xmlns:a16="http://schemas.microsoft.com/office/drawing/2014/main" id="{B32A7DB9-F9FC-4319-9336-5548FA9A810B}"/>
               </a:ext>
             </a:extLst>
           </p:cNvPr>
@@ -24421,7 +24421,7 @@
           <p:cNvPr id="33" name="">
             <a:extLst xmlns:a="http://schemas.openxmlformats.org/drawingml/2006/main">
               <a:ext uri="{FF2B5EF4-FFF2-40B4-BE49-F238E27FC236}">
-                <a16:creationId xmlns:a16="http://schemas.microsoft.com/office/drawing/2014/main" id="{4DE1712B-06FB-4A95-9AC0-75506DA24803}"/>
+                <a16:creationId xmlns:a16="http://schemas.microsoft.com/office/drawing/2014/main" id="{618DB9F4-0CFE-454C-9EC4-D069AC0C7F7D}"/>
               </a:ext>
             </a:extLst>
           </p:cNvPr>
@@ -24479,7 +24479,7 @@
           <p:cNvPr id="34" name="">
             <a:extLst xmlns:a="http://schemas.openxmlformats.org/drawingml/2006/main">
               <a:ext uri="{FF2B5EF4-FFF2-40B4-BE49-F238E27FC236}">
-                <a16:creationId xmlns:a16="http://schemas.microsoft.com/office/drawing/2014/main" id="{C4E21BEA-A035-404B-9D3D-61E90FC331E3}"/>
+                <a16:creationId xmlns:a16="http://schemas.microsoft.com/office/drawing/2014/main" id="{DADDD6FC-8DEF-4978-9697-388AB91FC3D1}"/>
               </a:ext>
             </a:extLst>
           </p:cNvPr>
@@ -24537,7 +24537,7 @@
           <p:cNvPr id="35" name="">
             <a:extLst xmlns:a="http://schemas.openxmlformats.org/drawingml/2006/main">
               <a:ext uri="{FF2B5EF4-FFF2-40B4-BE49-F238E27FC236}">
-                <a16:creationId xmlns:a16="http://schemas.microsoft.com/office/drawing/2014/main" id="{800D02A0-7EF0-4A25-B8E2-B67E5DE7BA3A}"/>
+                <a16:creationId xmlns:a16="http://schemas.microsoft.com/office/drawing/2014/main" id="{3078206D-BB08-4E7F-B3C6-0D450DFE640F}"/>
               </a:ext>
             </a:extLst>
           </p:cNvPr>
@@ -24570,7 +24570,7 @@
           <p:cNvPr id="36" name="">
             <a:extLst xmlns:a="http://schemas.openxmlformats.org/drawingml/2006/main">
               <a:ext uri="{FF2B5EF4-FFF2-40B4-BE49-F238E27FC236}">
-                <a16:creationId xmlns:a16="http://schemas.microsoft.com/office/drawing/2014/main" id="{6248FFA5-6F12-43C2-8D1D-09C061B9F18C}"/>
+                <a16:creationId xmlns:a16="http://schemas.microsoft.com/office/drawing/2014/main" id="{7E0781B7-E53F-41CE-8DA9-4752FDFABDA2}"/>
               </a:ext>
             </a:extLst>
           </p:cNvPr>
@@ -24628,7 +24628,7 @@
                 <a:latin typeface="Microsoft YaHei"/>
                 <a:ea typeface="Microsoft YaHei"/>
                 <a:cs typeface="Microsoft YaHei"/>
-                <a:hlinkClick xmlns:r="http://schemas.openxmlformats.org/officeDocument/2006/relationships" r:id="R99bcaafaa4264729"/>
+                <a:hlinkClick xmlns:r="http://schemas.openxmlformats.org/officeDocument/2006/relationships" r:id="R1a10a81752ef4f08"/>
               </a:rPr>
               <a:t>码道</a:t>
             </a:r>
@@ -24640,7 +24640,7 @@
                 <a:latin typeface="Microsoft YaHei"/>
                 <a:ea typeface="Microsoft YaHei"/>
                 <a:cs typeface="Microsoft YaHei"/>
-                <a:hlinkClick xmlns:r="http://schemas.openxmlformats.org/officeDocument/2006/relationships" r:id="R8efdd0f22d16496a"/>
+                <a:hlinkClick xmlns:r="http://schemas.openxmlformats.org/officeDocument/2006/relationships" r:id="Reaa95e34203e4788"/>
               </a:rPr>
               <a:t> · Claude Code</a:t>
             </a:r>
@@ -24652,7 +24652,7 @@
                 <a:latin typeface="Microsoft YaHei"/>
                 <a:ea typeface="Microsoft YaHei"/>
                 <a:cs typeface="Microsoft YaHei"/>
-                <a:hlinkClick xmlns:r="http://schemas.openxmlformats.org/officeDocument/2006/relationships" r:id="Rc61fbc65f2f24643"/>
+                <a:hlinkClick xmlns:r="http://schemas.openxmlformats.org/officeDocument/2006/relationships" r:id="Rfde6aaf2141645e9"/>
               </a:rPr>
               <a:t> · Qoder</a:t>
             </a:r>
@@ -24664,7 +24664,7 @@
                 <a:latin typeface="Microsoft YaHei"/>
                 <a:ea typeface="Microsoft YaHei"/>
                 <a:cs typeface="Microsoft YaHei"/>
-                <a:hlinkClick xmlns:r="http://schemas.openxmlformats.org/officeDocument/2006/relationships" r:id="R25ed9f7dcd6245b4"/>
+                <a:hlinkClick xmlns:r="http://schemas.openxmlformats.org/officeDocument/2006/relationships" r:id="R94b3d5867ec44556"/>
               </a:rPr>
               <a:t> · Codex</a:t>
             </a:r>
@@ -24676,7 +24676,7 @@
           <p:cNvPr id="37" name="">
             <a:extLst xmlns:a="http://schemas.openxmlformats.org/drawingml/2006/main">
               <a:ext uri="{FF2B5EF4-FFF2-40B4-BE49-F238E27FC236}">
-                <a16:creationId xmlns:a16="http://schemas.microsoft.com/office/drawing/2014/main" id="{A493675A-DFFE-417B-85B6-8EFEEF5E4B7E}"/>
+                <a16:creationId xmlns:a16="http://schemas.microsoft.com/office/drawing/2014/main" id="{AC44E93A-D407-4BED-9FFE-5E904AC7E7B9}"/>
               </a:ext>
             </a:extLst>
           </p:cNvPr>
@@ -24732,7 +24732,7 @@
     </p:spTree>
     <p:extLst>
       <p:ext uri="{BB962C8B-B14F-4D97-AF65-F5344CB8AC3E}">
-        <p14:creationId xmlns:p14="http://schemas.microsoft.com/office/powerpoint/2010/main" val="1834349977"/>
+        <p14:creationId xmlns:p14="http://schemas.microsoft.com/office/powerpoint/2010/main" val="825834428"/>
       </p:ext>
     </p:extLst>
   </p:cSld>
@@ -24763,7 +24763,7 @@
           <p:cNvPr id="66" name="">
             <a:extLst xmlns:a="http://schemas.openxmlformats.org/drawingml/2006/main">
               <a:ext uri="{FF2B5EF4-FFF2-40B4-BE49-F238E27FC236}">
-                <a16:creationId xmlns:a16="http://schemas.microsoft.com/office/drawing/2014/main" id="{C2C25684-D1BF-4175-A2EC-F7E72311EC83}"/>
+                <a16:creationId xmlns:a16="http://schemas.microsoft.com/office/drawing/2014/main" id="{FBE09A96-4FC6-4AF5-B765-985A7DBEF59C}"/>
               </a:ext>
             </a:extLst>
           </p:cNvPr>
@@ -24796,7 +24796,7 @@
           <p:cNvPr id="2" name="">
             <a:extLst xmlns:a="http://schemas.openxmlformats.org/drawingml/2006/main">
               <a:ext uri="{FF2B5EF4-FFF2-40B4-BE49-F238E27FC236}">
-                <a16:creationId xmlns:a16="http://schemas.microsoft.com/office/drawing/2014/main" id="{0A52C343-FA19-4A81-95C3-69B759A7012D}"/>
+                <a16:creationId xmlns:a16="http://schemas.microsoft.com/office/drawing/2014/main" id="{747867CD-4112-453C-823F-6F4B785343BE}"/>
               </a:ext>
             </a:extLst>
           </p:cNvPr>
@@ -24854,7 +24854,7 @@
           <p:cNvPr id="3" name="">
             <a:extLst xmlns:a="http://schemas.openxmlformats.org/drawingml/2006/main">
               <a:ext uri="{FF2B5EF4-FFF2-40B4-BE49-F238E27FC236}">
-                <a16:creationId xmlns:a16="http://schemas.microsoft.com/office/drawing/2014/main" id="{027313D8-DAC1-4674-AEC8-A9C479A647D4}"/>
+                <a16:creationId xmlns:a16="http://schemas.microsoft.com/office/drawing/2014/main" id="{878BF5E1-9138-4BAC-8422-EB709966ED1C}"/>
               </a:ext>
             </a:extLst>
           </p:cNvPr>
@@ -24912,7 +24912,7 @@
           <p:cNvPr id="4" name="">
             <a:extLst xmlns:a="http://schemas.openxmlformats.org/drawingml/2006/main">
               <a:ext uri="{FF2B5EF4-FFF2-40B4-BE49-F238E27FC236}">
-                <a16:creationId xmlns:a16="http://schemas.microsoft.com/office/drawing/2014/main" id="{E67BA1A1-2D0B-4B64-8781-6D23BCAB8D22}"/>
+                <a16:creationId xmlns:a16="http://schemas.microsoft.com/office/drawing/2014/main" id="{B7F929D0-ED4C-40D0-94A6-F18938E05353}"/>
               </a:ext>
             </a:extLst>
           </p:cNvPr>
@@ -24945,7 +24945,7 @@
           <p:cNvPr id="5" name="">
             <a:extLst xmlns:a="http://schemas.openxmlformats.org/drawingml/2006/main">
               <a:ext uri="{FF2B5EF4-FFF2-40B4-BE49-F238E27FC236}">
-                <a16:creationId xmlns:a16="http://schemas.microsoft.com/office/drawing/2014/main" id="{74BB8A94-E626-4F41-8BDC-9148FF494E7A}"/>
+                <a16:creationId xmlns:a16="http://schemas.microsoft.com/office/drawing/2014/main" id="{B6B3B34B-55CC-4C54-AD0F-055E7517BE35}"/>
               </a:ext>
             </a:extLst>
           </p:cNvPr>
@@ -25003,7 +25003,7 @@
           <p:cNvPr id="6" name="">
             <a:extLst xmlns:a="http://schemas.openxmlformats.org/drawingml/2006/main">
               <a:ext uri="{FF2B5EF4-FFF2-40B4-BE49-F238E27FC236}">
-                <a16:creationId xmlns:a16="http://schemas.microsoft.com/office/drawing/2014/main" id="{9E498DE9-6653-496F-AC26-4137ACCC3A2E}"/>
+                <a16:creationId xmlns:a16="http://schemas.microsoft.com/office/drawing/2014/main" id="{6312B8C5-EE29-4AB4-A886-4A34F4895F10}"/>
               </a:ext>
             </a:extLst>
           </p:cNvPr>
@@ -25036,7 +25036,7 @@
           <p:cNvPr id="7" name="">
             <a:extLst xmlns:a="http://schemas.openxmlformats.org/drawingml/2006/main">
               <a:ext uri="{FF2B5EF4-FFF2-40B4-BE49-F238E27FC236}">
-                <a16:creationId xmlns:a16="http://schemas.microsoft.com/office/drawing/2014/main" id="{E5C6075E-6C2A-4F19-B1AF-046882CD8BB4}"/>
+                <a16:creationId xmlns:a16="http://schemas.microsoft.com/office/drawing/2014/main" id="{0F47F25B-9C60-4574-B651-FBB016D235F9}"/>
               </a:ext>
             </a:extLst>
           </p:cNvPr>
@@ -25094,7 +25094,7 @@
           <p:cNvPr id="8" name="">
             <a:extLst xmlns:a="http://schemas.openxmlformats.org/drawingml/2006/main">
               <a:ext uri="{FF2B5EF4-FFF2-40B4-BE49-F238E27FC236}">
-                <a16:creationId xmlns:a16="http://schemas.microsoft.com/office/drawing/2014/main" id="{7D3C3EEC-523B-45F5-BAE3-F7E523DF859E}"/>
+                <a16:creationId xmlns:a16="http://schemas.microsoft.com/office/drawing/2014/main" id="{F023823A-256F-4203-AD27-0C7B1F0F2D2F}"/>
               </a:ext>
             </a:extLst>
           </p:cNvPr>
@@ -25127,7 +25127,7 @@
           <p:cNvPr id="9" name="">
             <a:extLst xmlns:a="http://schemas.openxmlformats.org/drawingml/2006/main">
               <a:ext uri="{FF2B5EF4-FFF2-40B4-BE49-F238E27FC236}">
-                <a16:creationId xmlns:a16="http://schemas.microsoft.com/office/drawing/2014/main" id="{5198FD8A-0E7C-4F9A-B42D-E7F39610151A}"/>
+                <a16:creationId xmlns:a16="http://schemas.microsoft.com/office/drawing/2014/main" id="{5917F727-70FF-43EC-8833-85105981AC09}"/>
               </a:ext>
             </a:extLst>
           </p:cNvPr>
@@ -25185,7 +25185,7 @@
           <p:cNvPr id="10" name="">
             <a:extLst xmlns:a="http://schemas.openxmlformats.org/drawingml/2006/main">
               <a:ext uri="{FF2B5EF4-FFF2-40B4-BE49-F238E27FC236}">
-                <a16:creationId xmlns:a16="http://schemas.microsoft.com/office/drawing/2014/main" id="{C2A5B564-99FC-4F44-9CB6-0D6228D83EC7}"/>
+                <a16:creationId xmlns:a16="http://schemas.microsoft.com/office/drawing/2014/main" id="{31320168-ED5D-444D-8771-7831971778EB}"/>
               </a:ext>
             </a:extLst>
           </p:cNvPr>
@@ -25218,7 +25218,7 @@
           <p:cNvPr id="11" name="">
             <a:extLst xmlns:a="http://schemas.openxmlformats.org/drawingml/2006/main">
               <a:ext uri="{FF2B5EF4-FFF2-40B4-BE49-F238E27FC236}">
-                <a16:creationId xmlns:a16="http://schemas.microsoft.com/office/drawing/2014/main" id="{BD4A8DD5-FD11-49D2-AC11-2D187349108F}"/>
+                <a16:creationId xmlns:a16="http://schemas.microsoft.com/office/drawing/2014/main" id="{FD9DFEB2-5EC2-4130-A695-1516753A9BFD}"/>
               </a:ext>
             </a:extLst>
           </p:cNvPr>
@@ -25276,7 +25276,7 @@
           <p:cNvPr id="12" name="">
             <a:extLst xmlns:a="http://schemas.openxmlformats.org/drawingml/2006/main">
               <a:ext uri="{FF2B5EF4-FFF2-40B4-BE49-F238E27FC236}">
-                <a16:creationId xmlns:a16="http://schemas.microsoft.com/office/drawing/2014/main" id="{FDF1C8CB-FC3C-426A-8430-56A5A11CA803}"/>
+                <a16:creationId xmlns:a16="http://schemas.microsoft.com/office/drawing/2014/main" id="{3801A222-90DE-4472-8591-BFF413818C99}"/>
               </a:ext>
             </a:extLst>
           </p:cNvPr>
@@ -25309,7 +25309,7 @@
           <p:cNvPr id="13" name="">
             <a:extLst xmlns:a="http://schemas.openxmlformats.org/drawingml/2006/main">
               <a:ext uri="{FF2B5EF4-FFF2-40B4-BE49-F238E27FC236}">
-                <a16:creationId xmlns:a16="http://schemas.microsoft.com/office/drawing/2014/main" id="{B9BF9DDE-A53C-42A4-97AB-8436DA29B49F}"/>
+                <a16:creationId xmlns:a16="http://schemas.microsoft.com/office/drawing/2014/main" id="{53A52691-A30C-4666-8A3E-806C06286400}"/>
               </a:ext>
             </a:extLst>
           </p:cNvPr>
@@ -25367,7 +25367,7 @@
           <p:cNvPr id="14" name="">
             <a:extLst xmlns:a="http://schemas.openxmlformats.org/drawingml/2006/main">
               <a:ext uri="{FF2B5EF4-FFF2-40B4-BE49-F238E27FC236}">
-                <a16:creationId xmlns:a16="http://schemas.microsoft.com/office/drawing/2014/main" id="{52408A84-5230-4551-A3CD-012AB6AFEB34}"/>
+                <a16:creationId xmlns:a16="http://schemas.microsoft.com/office/drawing/2014/main" id="{2D87159F-2B57-4964-9A83-5169CFDF4556}"/>
               </a:ext>
             </a:extLst>
           </p:cNvPr>
@@ -25400,7 +25400,7 @@
           <p:cNvPr id="15" name="">
             <a:extLst xmlns:a="http://schemas.openxmlformats.org/drawingml/2006/main">
               <a:ext uri="{FF2B5EF4-FFF2-40B4-BE49-F238E27FC236}">
-                <a16:creationId xmlns:a16="http://schemas.microsoft.com/office/drawing/2014/main" id="{E2058829-9A96-4289-B026-3340BAF34E76}"/>
+                <a16:creationId xmlns:a16="http://schemas.microsoft.com/office/drawing/2014/main" id="{89138DC1-1BA7-405F-8A22-50E180A3229C}"/>
               </a:ext>
             </a:extLst>
           </p:cNvPr>
@@ -25458,7 +25458,7 @@
           <p:cNvPr id="16" name="">
             <a:extLst xmlns:a="http://schemas.openxmlformats.org/drawingml/2006/main">
               <a:ext uri="{FF2B5EF4-FFF2-40B4-BE49-F238E27FC236}">
-                <a16:creationId xmlns:a16="http://schemas.microsoft.com/office/drawing/2014/main" id="{8F6F833A-2BF6-4FCE-B2E4-2128C45CC235}"/>
+                <a16:creationId xmlns:a16="http://schemas.microsoft.com/office/drawing/2014/main" id="{15D883C0-C064-4B76-9C77-98862969C5B4}"/>
               </a:ext>
             </a:extLst>
           </p:cNvPr>
@@ -25491,7 +25491,7 @@
           <p:cNvPr id="17" name="">
             <a:extLst xmlns:a="http://schemas.openxmlformats.org/drawingml/2006/main">
               <a:ext uri="{FF2B5EF4-FFF2-40B4-BE49-F238E27FC236}">
-                <a16:creationId xmlns:a16="http://schemas.microsoft.com/office/drawing/2014/main" id="{6304ACC0-8629-4DAC-9B3E-DD5A83DCE8EA}"/>
+                <a16:creationId xmlns:a16="http://schemas.microsoft.com/office/drawing/2014/main" id="{05189CA8-58D9-4C35-869B-1E179BBCE296}"/>
               </a:ext>
             </a:extLst>
           </p:cNvPr>
@@ -25549,7 +25549,7 @@
           <p:cNvPr id="18" name="">
             <a:extLst xmlns:a="http://schemas.openxmlformats.org/drawingml/2006/main">
               <a:ext uri="{FF2B5EF4-FFF2-40B4-BE49-F238E27FC236}">
-                <a16:creationId xmlns:a16="http://schemas.microsoft.com/office/drawing/2014/main" id="{343D0805-674D-4C7C-9EBD-8EACFA7B651C}"/>
+                <a16:creationId xmlns:a16="http://schemas.microsoft.com/office/drawing/2014/main" id="{4E770C0B-AA03-42FD-90CC-8FB81DAF6488}"/>
               </a:ext>
             </a:extLst>
           </p:cNvPr>
@@ -25582,7 +25582,7 @@
           <p:cNvPr id="19" name="">
             <a:extLst xmlns:a="http://schemas.openxmlformats.org/drawingml/2006/main">
               <a:ext uri="{FF2B5EF4-FFF2-40B4-BE49-F238E27FC236}">
-                <a16:creationId xmlns:a16="http://schemas.microsoft.com/office/drawing/2014/main" id="{0E943F8D-08AE-46DE-802C-BE048D3C6488}"/>
+                <a16:creationId xmlns:a16="http://schemas.microsoft.com/office/drawing/2014/main" id="{A6B9B746-0435-4D56-84D6-FB3AD524190A}"/>
               </a:ext>
             </a:extLst>
           </p:cNvPr>
@@ -25640,7 +25640,7 @@
           <p:cNvPr id="20" name="">
             <a:extLst xmlns:a="http://schemas.openxmlformats.org/drawingml/2006/main">
               <a:ext uri="{FF2B5EF4-FFF2-40B4-BE49-F238E27FC236}">
-                <a16:creationId xmlns:a16="http://schemas.microsoft.com/office/drawing/2014/main" id="{2D666122-12BE-436B-8895-4F063DF6F307}"/>
+                <a16:creationId xmlns:a16="http://schemas.microsoft.com/office/drawing/2014/main" id="{A0B6171F-7025-4777-91B0-F8B490BB56CC}"/>
               </a:ext>
             </a:extLst>
           </p:cNvPr>
@@ -25673,7 +25673,7 @@
           <p:cNvPr id="21" name="">
             <a:extLst xmlns:a="http://schemas.openxmlformats.org/drawingml/2006/main">
               <a:ext uri="{FF2B5EF4-FFF2-40B4-BE49-F238E27FC236}">
-                <a16:creationId xmlns:a16="http://schemas.microsoft.com/office/drawing/2014/main" id="{8977CE3B-2E92-4C1F-B92F-75828EE539FB}"/>
+                <a16:creationId xmlns:a16="http://schemas.microsoft.com/office/drawing/2014/main" id="{674EBF47-B0CC-4791-819D-F98F01CDCC65}"/>
               </a:ext>
             </a:extLst>
           </p:cNvPr>
@@ -25731,7 +25731,7 @@
           <p:cNvPr id="22" name="">
             <a:extLst xmlns:a="http://schemas.openxmlformats.org/drawingml/2006/main">
               <a:ext uri="{FF2B5EF4-FFF2-40B4-BE49-F238E27FC236}">
-                <a16:creationId xmlns:a16="http://schemas.microsoft.com/office/drawing/2014/main" id="{A8889E53-9509-4B70-8404-2CF45EB3968A}"/>
+                <a16:creationId xmlns:a16="http://schemas.microsoft.com/office/drawing/2014/main" id="{9D6132F0-867A-40F6-BC69-E140356D82D5}"/>
               </a:ext>
             </a:extLst>
           </p:cNvPr>
@@ -25764,7 +25764,7 @@
           <p:cNvPr id="23" name="">
             <a:extLst xmlns:a="http://schemas.openxmlformats.org/drawingml/2006/main">
               <a:ext uri="{FF2B5EF4-FFF2-40B4-BE49-F238E27FC236}">
-                <a16:creationId xmlns:a16="http://schemas.microsoft.com/office/drawing/2014/main" id="{68104E0A-1D2A-4230-AFB7-6CC09BDC608D}"/>
+                <a16:creationId xmlns:a16="http://schemas.microsoft.com/office/drawing/2014/main" id="{53D1E101-AEE6-4866-95AB-26188C8B9CFC}"/>
               </a:ext>
             </a:extLst>
           </p:cNvPr>
@@ -25822,7 +25822,7 @@
           <p:cNvPr id="24" name="">
             <a:extLst xmlns:a="http://schemas.openxmlformats.org/drawingml/2006/main">
               <a:ext uri="{FF2B5EF4-FFF2-40B4-BE49-F238E27FC236}">
-                <a16:creationId xmlns:a16="http://schemas.microsoft.com/office/drawing/2014/main" id="{7C60DE0C-83C0-41D3-87C9-421A201F4864}"/>
+                <a16:creationId xmlns:a16="http://schemas.microsoft.com/office/drawing/2014/main" id="{BD025993-3592-4E42-A24A-14C78F19595C}"/>
               </a:ext>
             </a:extLst>
           </p:cNvPr>
@@ -25855,7 +25855,7 @@
           <p:cNvPr id="25" name="">
             <a:extLst xmlns:a="http://schemas.openxmlformats.org/drawingml/2006/main">
               <a:ext uri="{FF2B5EF4-FFF2-40B4-BE49-F238E27FC236}">
-                <a16:creationId xmlns:a16="http://schemas.microsoft.com/office/drawing/2014/main" id="{1801D1B1-F7CC-446B-84EA-80F4AB454B81}"/>
+                <a16:creationId xmlns:a16="http://schemas.microsoft.com/office/drawing/2014/main" id="{61670C8A-2094-4C79-B7F0-90A327512904}"/>
               </a:ext>
             </a:extLst>
           </p:cNvPr>
@@ -25913,7 +25913,7 @@
           <p:cNvPr id="26" name="">
             <a:extLst xmlns:a="http://schemas.openxmlformats.org/drawingml/2006/main">
               <a:ext uri="{FF2B5EF4-FFF2-40B4-BE49-F238E27FC236}">
-                <a16:creationId xmlns:a16="http://schemas.microsoft.com/office/drawing/2014/main" id="{D8B358A3-8C18-4649-919C-7EECCE2BE6EA}"/>
+                <a16:creationId xmlns:a16="http://schemas.microsoft.com/office/drawing/2014/main" id="{79BFCB4A-465E-426C-8667-087ECB5556D6}"/>
               </a:ext>
             </a:extLst>
           </p:cNvPr>
@@ -25946,7 +25946,7 @@
           <p:cNvPr id="27" name="">
             <a:extLst xmlns:a="http://schemas.openxmlformats.org/drawingml/2006/main">
               <a:ext uri="{FF2B5EF4-FFF2-40B4-BE49-F238E27FC236}">
-                <a16:creationId xmlns:a16="http://schemas.microsoft.com/office/drawing/2014/main" id="{4CC8CC7F-C462-478C-BEA2-7307A7000E9F}"/>
+                <a16:creationId xmlns:a16="http://schemas.microsoft.com/office/drawing/2014/main" id="{73257A56-DCC2-43E4-A3B1-F0BC2F259098}"/>
               </a:ext>
             </a:extLst>
           </p:cNvPr>
@@ -26004,7 +26004,7 @@
           <p:cNvPr id="28" name="">
             <a:extLst xmlns:a="http://schemas.openxmlformats.org/drawingml/2006/main">
               <a:ext uri="{FF2B5EF4-FFF2-40B4-BE49-F238E27FC236}">
-                <a16:creationId xmlns:a16="http://schemas.microsoft.com/office/drawing/2014/main" id="{5C1948E0-D894-472C-844C-2644CAF4F937}"/>
+                <a16:creationId xmlns:a16="http://schemas.microsoft.com/office/drawing/2014/main" id="{5844F051-3074-4E75-8E61-29AA2AA2ABD2}"/>
               </a:ext>
             </a:extLst>
           </p:cNvPr>
@@ -26037,7 +26037,7 @@
           <p:cNvPr id="29" name="">
             <a:extLst xmlns:a="http://schemas.openxmlformats.org/drawingml/2006/main">
               <a:ext uri="{FF2B5EF4-FFF2-40B4-BE49-F238E27FC236}">
-                <a16:creationId xmlns:a16="http://schemas.microsoft.com/office/drawing/2014/main" id="{5DFB68A5-3D55-426C-982F-6FAB6341074E}"/>
+                <a16:creationId xmlns:a16="http://schemas.microsoft.com/office/drawing/2014/main" id="{AA618C66-641B-4F1E-991F-A7769518692B}"/>
               </a:ext>
             </a:extLst>
           </p:cNvPr>
@@ -26095,7 +26095,7 @@
           <p:cNvPr id="30" name="">
             <a:extLst xmlns:a="http://schemas.openxmlformats.org/drawingml/2006/main">
               <a:ext uri="{FF2B5EF4-FFF2-40B4-BE49-F238E27FC236}">
-                <a16:creationId xmlns:a16="http://schemas.microsoft.com/office/drawing/2014/main" id="{FCC1E4DD-0F71-49CC-B27B-35E4446B61C0}"/>
+                <a16:creationId xmlns:a16="http://schemas.microsoft.com/office/drawing/2014/main" id="{4964B500-2357-410A-8304-5E290F74C3DE}"/>
               </a:ext>
             </a:extLst>
           </p:cNvPr>
@@ -26128,7 +26128,7 @@
           <p:cNvPr id="31" name="">
             <a:extLst xmlns:a="http://schemas.openxmlformats.org/drawingml/2006/main">
               <a:ext uri="{FF2B5EF4-FFF2-40B4-BE49-F238E27FC236}">
-                <a16:creationId xmlns:a16="http://schemas.microsoft.com/office/drawing/2014/main" id="{DCB82538-6389-46FE-BE61-63FF2964590D}"/>
+                <a16:creationId xmlns:a16="http://schemas.microsoft.com/office/drawing/2014/main" id="{393D9F66-4F26-4AD3-94EF-2F8FAD8F2FB6}"/>
               </a:ext>
             </a:extLst>
           </p:cNvPr>
@@ -26186,7 +26186,7 @@
           <p:cNvPr id="32" name="">
             <a:extLst xmlns:a="http://schemas.openxmlformats.org/drawingml/2006/main">
               <a:ext uri="{FF2B5EF4-FFF2-40B4-BE49-F238E27FC236}">
-                <a16:creationId xmlns:a16="http://schemas.microsoft.com/office/drawing/2014/main" id="{60DBFD7B-19ED-4D43-9547-0151C0325ADF}"/>
+                <a16:creationId xmlns:a16="http://schemas.microsoft.com/office/drawing/2014/main" id="{EF86D073-0125-4DF2-95B7-47800EBA5C51}"/>
               </a:ext>
             </a:extLst>
           </p:cNvPr>
@@ -26219,7 +26219,7 @@
           <p:cNvPr id="33" name="">
             <a:extLst xmlns:a="http://schemas.openxmlformats.org/drawingml/2006/main">
               <a:ext uri="{FF2B5EF4-FFF2-40B4-BE49-F238E27FC236}">
-                <a16:creationId xmlns:a16="http://schemas.microsoft.com/office/drawing/2014/main" id="{3F13B504-30BD-4001-8263-5C677109F0EE}"/>
+                <a16:creationId xmlns:a16="http://schemas.microsoft.com/office/drawing/2014/main" id="{A5CFFD1B-8545-405F-9A85-89D26FB65531}"/>
               </a:ext>
             </a:extLst>
           </p:cNvPr>
@@ -26277,7 +26277,7 @@
           <p:cNvPr id="34" name="">
             <a:extLst xmlns:a="http://schemas.openxmlformats.org/drawingml/2006/main">
               <a:ext uri="{FF2B5EF4-FFF2-40B4-BE49-F238E27FC236}">
-                <a16:creationId xmlns:a16="http://schemas.microsoft.com/office/drawing/2014/main" id="{CC79E8CC-36D7-41A7-8E9B-33483CEE47A6}"/>
+                <a16:creationId xmlns:a16="http://schemas.microsoft.com/office/drawing/2014/main" id="{688420EC-7131-47FF-81F0-2759F37AF9FB}"/>
               </a:ext>
             </a:extLst>
           </p:cNvPr>
@@ -26310,7 +26310,7 @@
           <p:cNvPr id="35" name="">
             <a:extLst xmlns:a="http://schemas.openxmlformats.org/drawingml/2006/main">
               <a:ext uri="{FF2B5EF4-FFF2-40B4-BE49-F238E27FC236}">
-                <a16:creationId xmlns:a16="http://schemas.microsoft.com/office/drawing/2014/main" id="{0E048D66-6179-4FEE-9884-B30CC527BD6A}"/>
+                <a16:creationId xmlns:a16="http://schemas.microsoft.com/office/drawing/2014/main" id="{9F13F5D6-B83E-4CDA-B2E3-C7D57892B86D}"/>
               </a:ext>
             </a:extLst>
           </p:cNvPr>
@@ -26368,7 +26368,7 @@
           <p:cNvPr id="36" name="">
             <a:extLst xmlns:a="http://schemas.openxmlformats.org/drawingml/2006/main">
               <a:ext uri="{FF2B5EF4-FFF2-40B4-BE49-F238E27FC236}">
-                <a16:creationId xmlns:a16="http://schemas.microsoft.com/office/drawing/2014/main" id="{04B89A48-334B-4719-A067-28029EB288FC}"/>
+                <a16:creationId xmlns:a16="http://schemas.microsoft.com/office/drawing/2014/main" id="{4AA61103-93D1-4262-ACEB-0A889E15F56F}"/>
               </a:ext>
             </a:extLst>
           </p:cNvPr>
@@ -26401,7 +26401,7 @@
           <p:cNvPr id="37" name="">
             <a:extLst xmlns:a="http://schemas.openxmlformats.org/drawingml/2006/main">
               <a:ext uri="{FF2B5EF4-FFF2-40B4-BE49-F238E27FC236}">
-                <a16:creationId xmlns:a16="http://schemas.microsoft.com/office/drawing/2014/main" id="{DE2361E8-935D-4D38-BC45-E4DD07C93AD8}"/>
+                <a16:creationId xmlns:a16="http://schemas.microsoft.com/office/drawing/2014/main" id="{EE322E65-026B-4179-92B8-8D9D44570056}"/>
               </a:ext>
             </a:extLst>
           </p:cNvPr>
@@ -26459,7 +26459,7 @@
           <p:cNvPr id="38" name="">
             <a:extLst xmlns:a="http://schemas.openxmlformats.org/drawingml/2006/main">
               <a:ext uri="{FF2B5EF4-FFF2-40B4-BE49-F238E27FC236}">
-                <a16:creationId xmlns:a16="http://schemas.microsoft.com/office/drawing/2014/main" id="{F61868A9-D4B3-4028-B199-AA621243B4AD}"/>
+                <a16:creationId xmlns:a16="http://schemas.microsoft.com/office/drawing/2014/main" id="{681C3DD8-70A9-4A9E-B8FF-D346974CCBBC}"/>
               </a:ext>
             </a:extLst>
           </p:cNvPr>
@@ -26492,7 +26492,7 @@
           <p:cNvPr id="39" name="">
             <a:extLst xmlns:a="http://schemas.openxmlformats.org/drawingml/2006/main">
               <a:ext uri="{FF2B5EF4-FFF2-40B4-BE49-F238E27FC236}">
-                <a16:creationId xmlns:a16="http://schemas.microsoft.com/office/drawing/2014/main" id="{A2255C0B-4916-4FF6-8D48-7F3A25EB2663}"/>
+                <a16:creationId xmlns:a16="http://schemas.microsoft.com/office/drawing/2014/main" id="{DF77AB0A-2BEA-4C88-9BB9-70EEA02289F8}"/>
               </a:ext>
             </a:extLst>
           </p:cNvPr>
@@ -26550,7 +26550,7 @@
           <p:cNvPr id="40" name="">
             <a:extLst xmlns:a="http://schemas.openxmlformats.org/drawingml/2006/main">
               <a:ext uri="{FF2B5EF4-FFF2-40B4-BE49-F238E27FC236}">
-                <a16:creationId xmlns:a16="http://schemas.microsoft.com/office/drawing/2014/main" id="{6BF884A9-6F69-4145-9902-D5469655228C}"/>
+                <a16:creationId xmlns:a16="http://schemas.microsoft.com/office/drawing/2014/main" id="{8D1FC429-C09F-441E-9310-3EE605AF3583}"/>
               </a:ext>
             </a:extLst>
           </p:cNvPr>
@@ -26583,7 +26583,7 @@
           <p:cNvPr id="41" name="">
             <a:extLst xmlns:a="http://schemas.openxmlformats.org/drawingml/2006/main">
               <a:ext uri="{FF2B5EF4-FFF2-40B4-BE49-F238E27FC236}">
-                <a16:creationId xmlns:a16="http://schemas.microsoft.com/office/drawing/2014/main" id="{F9365C6C-DB51-4B76-B615-8A8CF87FA1B1}"/>
+                <a16:creationId xmlns:a16="http://schemas.microsoft.com/office/drawing/2014/main" id="{2CD1F941-2FE1-4453-995D-6A1E67B84810}"/>
               </a:ext>
             </a:extLst>
           </p:cNvPr>
@@ -26641,7 +26641,7 @@
           <p:cNvPr id="42" name="">
             <a:extLst xmlns:a="http://schemas.openxmlformats.org/drawingml/2006/main">
               <a:ext uri="{FF2B5EF4-FFF2-40B4-BE49-F238E27FC236}">
-                <a16:creationId xmlns:a16="http://schemas.microsoft.com/office/drawing/2014/main" id="{7FAAFF37-09BE-492C-8BC9-3269E7E1CF91}"/>
+                <a16:creationId xmlns:a16="http://schemas.microsoft.com/office/drawing/2014/main" id="{89372F2B-DF58-473E-8E70-50A1C773D97B}"/>
               </a:ext>
             </a:extLst>
           </p:cNvPr>
@@ -26674,7 +26674,7 @@
           <p:cNvPr id="43" name="">
             <a:extLst xmlns:a="http://schemas.openxmlformats.org/drawingml/2006/main">
               <a:ext uri="{FF2B5EF4-FFF2-40B4-BE49-F238E27FC236}">
-                <a16:creationId xmlns:a16="http://schemas.microsoft.com/office/drawing/2014/main" id="{94B8818A-F22E-423E-934E-5AB1B187E839}"/>
+                <a16:creationId xmlns:a16="http://schemas.microsoft.com/office/drawing/2014/main" id="{35A546BC-B9F7-40C2-ADEE-25D4D26E23D4}"/>
               </a:ext>
             </a:extLst>
           </p:cNvPr>
@@ -26732,7 +26732,7 @@
           <p:cNvPr id="44" name="">
             <a:extLst xmlns:a="http://schemas.openxmlformats.org/drawingml/2006/main">
               <a:ext uri="{FF2B5EF4-FFF2-40B4-BE49-F238E27FC236}">
-                <a16:creationId xmlns:a16="http://schemas.microsoft.com/office/drawing/2014/main" id="{18C2542A-01A2-439E-9427-8C8018398E53}"/>
+                <a16:creationId xmlns:a16="http://schemas.microsoft.com/office/drawing/2014/main" id="{D8B6B28C-15A4-442D-AD9A-170273D2CE9C}"/>
               </a:ext>
             </a:extLst>
           </p:cNvPr>
@@ -26765,7 +26765,7 @@
           <p:cNvPr id="45" name="">
             <a:extLst xmlns:a="http://schemas.openxmlformats.org/drawingml/2006/main">
               <a:ext uri="{FF2B5EF4-FFF2-40B4-BE49-F238E27FC236}">
-                <a16:creationId xmlns:a16="http://schemas.microsoft.com/office/drawing/2014/main" id="{611B7B60-457B-41C2-A4C9-F7A2541CEE59}"/>
+                <a16:creationId xmlns:a16="http://schemas.microsoft.com/office/drawing/2014/main" id="{2368D49F-35F9-4BB4-A281-A52667926CF7}"/>
               </a:ext>
             </a:extLst>
           </p:cNvPr>
@@ -26823,7 +26823,7 @@
           <p:cNvPr id="46" name="">
             <a:extLst xmlns:a="http://schemas.openxmlformats.org/drawingml/2006/main">
               <a:ext uri="{FF2B5EF4-FFF2-40B4-BE49-F238E27FC236}">
-                <a16:creationId xmlns:a16="http://schemas.microsoft.com/office/drawing/2014/main" id="{A6612F41-80EE-4017-9703-6D9512E7C51B}"/>
+                <a16:creationId xmlns:a16="http://schemas.microsoft.com/office/drawing/2014/main" id="{95DFDFDF-5EFA-49F5-9572-67CCE3B21647}"/>
               </a:ext>
             </a:extLst>
           </p:cNvPr>
@@ -26856,7 +26856,7 @@
           <p:cNvPr id="47" name="">
             <a:extLst xmlns:a="http://schemas.openxmlformats.org/drawingml/2006/main">
               <a:ext uri="{FF2B5EF4-FFF2-40B4-BE49-F238E27FC236}">
-                <a16:creationId xmlns:a16="http://schemas.microsoft.com/office/drawing/2014/main" id="{4FE857F4-DE26-44FC-9A8A-C24B316F060A}"/>
+                <a16:creationId xmlns:a16="http://schemas.microsoft.com/office/drawing/2014/main" id="{6C2BAFC0-99CF-437D-9F6A-501CC090CBD2}"/>
               </a:ext>
             </a:extLst>
           </p:cNvPr>
@@ -26914,7 +26914,7 @@
           <p:cNvPr id="48" name="">
             <a:extLst xmlns:a="http://schemas.openxmlformats.org/drawingml/2006/main">
               <a:ext uri="{FF2B5EF4-FFF2-40B4-BE49-F238E27FC236}">
-                <a16:creationId xmlns:a16="http://schemas.microsoft.com/office/drawing/2014/main" id="{B0773227-51C1-4C8F-B615-CE5D983558FA}"/>
+                <a16:creationId xmlns:a16="http://schemas.microsoft.com/office/drawing/2014/main" id="{1917BA27-EB50-44FA-BD68-A49F5D4BAF0A}"/>
               </a:ext>
             </a:extLst>
           </p:cNvPr>
@@ -26947,7 +26947,7 @@
           <p:cNvPr id="49" name="">
             <a:extLst xmlns:a="http://schemas.openxmlformats.org/drawingml/2006/main">
               <a:ext uri="{FF2B5EF4-FFF2-40B4-BE49-F238E27FC236}">
-                <a16:creationId xmlns:a16="http://schemas.microsoft.com/office/drawing/2014/main" id="{08B8DF8F-4374-42D5-8DEF-A37AC5538690}"/>
+                <a16:creationId xmlns:a16="http://schemas.microsoft.com/office/drawing/2014/main" id="{C23E55C3-503D-49C5-8B89-942814CFF4F6}"/>
               </a:ext>
             </a:extLst>
           </p:cNvPr>
@@ -27005,7 +27005,7 @@
           <p:cNvPr id="50" name="">
             <a:extLst xmlns:a="http://schemas.openxmlformats.org/drawingml/2006/main">
               <a:ext uri="{FF2B5EF4-FFF2-40B4-BE49-F238E27FC236}">
-                <a16:creationId xmlns:a16="http://schemas.microsoft.com/office/drawing/2014/main" id="{E2ACF050-5228-4379-AFC0-2D4EBA0746DA}"/>
+                <a16:creationId xmlns:a16="http://schemas.microsoft.com/office/drawing/2014/main" id="{8B73F176-2D66-4CC5-A67D-296C8BA98F62}"/>
               </a:ext>
             </a:extLst>
           </p:cNvPr>
@@ -27038,7 +27038,7 @@
           <p:cNvPr id="51" name="">
             <a:extLst xmlns:a="http://schemas.openxmlformats.org/drawingml/2006/main">
               <a:ext uri="{FF2B5EF4-FFF2-40B4-BE49-F238E27FC236}">
-                <a16:creationId xmlns:a16="http://schemas.microsoft.com/office/drawing/2014/main" id="{43D429F7-D58E-40F9-A96D-09130E51882E}"/>
+                <a16:creationId xmlns:a16="http://schemas.microsoft.com/office/drawing/2014/main" id="{AF4F718E-C46B-4C02-BFD5-A866864B6CD0}"/>
               </a:ext>
             </a:extLst>
           </p:cNvPr>
@@ -27096,7 +27096,7 @@
           <p:cNvPr id="52" name="">
             <a:extLst xmlns:a="http://schemas.openxmlformats.org/drawingml/2006/main">
               <a:ext uri="{FF2B5EF4-FFF2-40B4-BE49-F238E27FC236}">
-                <a16:creationId xmlns:a16="http://schemas.microsoft.com/office/drawing/2014/main" id="{98C03287-6DAB-41D3-B707-9A0AEB8856A5}"/>
+                <a16:creationId xmlns:a16="http://schemas.microsoft.com/office/drawing/2014/main" id="{F39F6A2B-091E-4851-B97F-372B96872033}"/>
               </a:ext>
             </a:extLst>
           </p:cNvPr>
@@ -27129,7 +27129,7 @@
           <p:cNvPr id="53" name="">
             <a:extLst xmlns:a="http://schemas.openxmlformats.org/drawingml/2006/main">
               <a:ext uri="{FF2B5EF4-FFF2-40B4-BE49-F238E27FC236}">
-                <a16:creationId xmlns:a16="http://schemas.microsoft.com/office/drawing/2014/main" id="{19893E52-8F0B-4E8D-B3B7-6A9EF39DB64F}"/>
+                <a16:creationId xmlns:a16="http://schemas.microsoft.com/office/drawing/2014/main" id="{03055BCB-79CB-428B-85D1-AFE46C592121}"/>
               </a:ext>
             </a:extLst>
           </p:cNvPr>
@@ -27187,7 +27187,7 @@
           <p:cNvPr id="54" name="">
             <a:extLst xmlns:a="http://schemas.openxmlformats.org/drawingml/2006/main">
               <a:ext uri="{FF2B5EF4-FFF2-40B4-BE49-F238E27FC236}">
-                <a16:creationId xmlns:a16="http://schemas.microsoft.com/office/drawing/2014/main" id="{A8058C4F-A206-4DA3-8FAA-01BBBF18357C}"/>
+                <a16:creationId xmlns:a16="http://schemas.microsoft.com/office/drawing/2014/main" id="{EEDDEFE0-4294-450E-80B5-D286291FE02A}"/>
               </a:ext>
             </a:extLst>
           </p:cNvPr>
@@ -27220,7 +27220,7 @@
           <p:cNvPr id="55" name="">
             <a:extLst xmlns:a="http://schemas.openxmlformats.org/drawingml/2006/main">
               <a:ext uri="{FF2B5EF4-FFF2-40B4-BE49-F238E27FC236}">
-                <a16:creationId xmlns:a16="http://schemas.microsoft.com/office/drawing/2014/main" id="{1FEE445D-FB0D-4E43-9FB0-37194FD5C9DD}"/>
+                <a16:creationId xmlns:a16="http://schemas.microsoft.com/office/drawing/2014/main" id="{C26ECB9C-96D0-4B31-A2CC-025C69EC4139}"/>
               </a:ext>
             </a:extLst>
           </p:cNvPr>
@@ -27278,7 +27278,7 @@
           <p:cNvPr id="56" name="">
             <a:extLst xmlns:a="http://schemas.openxmlformats.org/drawingml/2006/main">
               <a:ext uri="{FF2B5EF4-FFF2-40B4-BE49-F238E27FC236}">
-                <a16:creationId xmlns:a16="http://schemas.microsoft.com/office/drawing/2014/main" id="{38F600A5-C1A5-4106-9651-AB4C3424163A}"/>
+                <a16:creationId xmlns:a16="http://schemas.microsoft.com/office/drawing/2014/main" id="{EA849303-92A6-4D10-BE6D-18BECD53F632}"/>
               </a:ext>
             </a:extLst>
           </p:cNvPr>
@@ -27311,7 +27311,7 @@
           <p:cNvPr id="57" name="">
             <a:extLst xmlns:a="http://schemas.openxmlformats.org/drawingml/2006/main">
               <a:ext uri="{FF2B5EF4-FFF2-40B4-BE49-F238E27FC236}">
-                <a16:creationId xmlns:a16="http://schemas.microsoft.com/office/drawing/2014/main" id="{39B1DCA3-0F4D-4BE2-8102-08442F6DDC5B}"/>
+                <a16:creationId xmlns:a16="http://schemas.microsoft.com/office/drawing/2014/main" id="{4ECC47F3-44C0-4C33-9A32-EC254E2B23FA}"/>
               </a:ext>
             </a:extLst>
           </p:cNvPr>
@@ -27369,7 +27369,7 @@
           <p:cNvPr id="58" name="">
             <a:extLst xmlns:a="http://schemas.openxmlformats.org/drawingml/2006/main">
               <a:ext uri="{FF2B5EF4-FFF2-40B4-BE49-F238E27FC236}">
-                <a16:creationId xmlns:a16="http://schemas.microsoft.com/office/drawing/2014/main" id="{E4BA26D2-CE4A-41E5-8C6D-7442CB75398B}"/>
+                <a16:creationId xmlns:a16="http://schemas.microsoft.com/office/drawing/2014/main" id="{3F74E772-FEB5-4D14-98AC-B841CD2BA31F}"/>
               </a:ext>
             </a:extLst>
           </p:cNvPr>
@@ -27402,7 +27402,7 @@
           <p:cNvPr id="59" name="">
             <a:extLst xmlns:a="http://schemas.openxmlformats.org/drawingml/2006/main">
               <a:ext uri="{FF2B5EF4-FFF2-40B4-BE49-F238E27FC236}">
-                <a16:creationId xmlns:a16="http://schemas.microsoft.com/office/drawing/2014/main" id="{201E3F61-FCC4-477B-9180-2C9A6A10596D}"/>
+                <a16:creationId xmlns:a16="http://schemas.microsoft.com/office/drawing/2014/main" id="{0597F873-DBF4-453C-9F40-43587F707A85}"/>
               </a:ext>
             </a:extLst>
           </p:cNvPr>
@@ -27460,7 +27460,7 @@
           <p:cNvPr id="60" name="">
             <a:extLst xmlns:a="http://schemas.openxmlformats.org/drawingml/2006/main">
               <a:ext uri="{FF2B5EF4-FFF2-40B4-BE49-F238E27FC236}">
-                <a16:creationId xmlns:a16="http://schemas.microsoft.com/office/drawing/2014/main" id="{40B33490-D67D-4DDB-AE74-B6AEFF4D3805}"/>
+                <a16:creationId xmlns:a16="http://schemas.microsoft.com/office/drawing/2014/main" id="{715198D7-69D3-4EBC-BB54-87E4CF1D0709}"/>
               </a:ext>
             </a:extLst>
           </p:cNvPr>
@@ -27478,7 +27478,7 @@
             <a:avLst/>
           </a:prstGeom>
           <a:solidFill xmlns:a="http://schemas.openxmlformats.org/drawingml/2006/main">
-            <a:srgbClr val="FFF4F4"/>
+            <a:srgbClr val="F7F7F7"/>
           </a:solidFill>
           <a:ln xmlns:a="http://schemas.openxmlformats.org/drawingml/2006/main" w="9525">
             <a:solidFill>
@@ -27493,7 +27493,7 @@
           <p:cNvPr id="61" name="">
             <a:extLst xmlns:a="http://schemas.openxmlformats.org/drawingml/2006/main">
               <a:ext uri="{FF2B5EF4-FFF2-40B4-BE49-F238E27FC236}">
-                <a16:creationId xmlns:a16="http://schemas.microsoft.com/office/drawing/2014/main" id="{C32F6CD2-1FD2-4694-965B-52B8B78D4120}"/>
+                <a16:creationId xmlns:a16="http://schemas.microsoft.com/office/drawing/2014/main" id="{85E9CBA1-6F8F-40EE-B5A3-B4EB3E35D357}"/>
               </a:ext>
             </a:extLst>
           </p:cNvPr>
@@ -27551,7 +27551,7 @@
           <p:cNvPr id="62" name="">
             <a:extLst xmlns:a="http://schemas.openxmlformats.org/drawingml/2006/main">
               <a:ext uri="{FF2B5EF4-FFF2-40B4-BE49-F238E27FC236}">
-                <a16:creationId xmlns:a16="http://schemas.microsoft.com/office/drawing/2014/main" id="{896D6ABB-C07F-434B-B157-81A045A8151C}"/>
+                <a16:creationId xmlns:a16="http://schemas.microsoft.com/office/drawing/2014/main" id="{8D2334E6-26E8-44D4-85FC-4878BF86F738}"/>
               </a:ext>
             </a:extLst>
           </p:cNvPr>
@@ -27609,7 +27609,7 @@
           <p:cNvPr id="63" name="">
             <a:extLst xmlns:a="http://schemas.openxmlformats.org/drawingml/2006/main">
               <a:ext uri="{FF2B5EF4-FFF2-40B4-BE49-F238E27FC236}">
-                <a16:creationId xmlns:a16="http://schemas.microsoft.com/office/drawing/2014/main" id="{32E8628E-8D2E-4C93-9466-F9529A8CB188}"/>
+                <a16:creationId xmlns:a16="http://schemas.microsoft.com/office/drawing/2014/main" id="{141E80D0-DBB7-457F-8031-4FEED9ECE058}"/>
               </a:ext>
             </a:extLst>
           </p:cNvPr>
@@ -27642,7 +27642,7 @@
           <p:cNvPr id="64" name="">
             <a:extLst xmlns:a="http://schemas.openxmlformats.org/drawingml/2006/main">
               <a:ext uri="{FF2B5EF4-FFF2-40B4-BE49-F238E27FC236}">
-                <a16:creationId xmlns:a16="http://schemas.microsoft.com/office/drawing/2014/main" id="{509132B1-3ADA-48FF-AD4F-464889314893}"/>
+                <a16:creationId xmlns:a16="http://schemas.microsoft.com/office/drawing/2014/main" id="{8BE6A51D-6F84-4A59-9EB2-F65E3A8A785F}"/>
               </a:ext>
             </a:extLst>
           </p:cNvPr>
@@ -27700,7 +27700,7 @@
                 <a:latin typeface="Microsoft YaHei"/>
                 <a:ea typeface="Microsoft YaHei"/>
                 <a:cs typeface="Microsoft YaHei"/>
-                <a:hlinkClick xmlns:r="http://schemas.openxmlformats.org/officeDocument/2006/relationships" r:id="Rc7c9e31283c84e88"/>
+                <a:hlinkClick xmlns:r="http://schemas.openxmlformats.org/officeDocument/2006/relationships" r:id="Rdf68db6099c24909"/>
               </a:rPr>
               <a:t>码道定价</a:t>
             </a:r>
@@ -27712,7 +27712,7 @@
                 <a:latin typeface="Microsoft YaHei"/>
                 <a:ea typeface="Microsoft YaHei"/>
                 <a:cs typeface="Microsoft YaHei"/>
-                <a:hlinkClick xmlns:r="http://schemas.openxmlformats.org/officeDocument/2006/relationships" r:id="Rfbe5ec8c638c4ff6"/>
+                <a:hlinkClick xmlns:r="http://schemas.openxmlformats.org/officeDocument/2006/relationships" r:id="R7024022c9f2f4509"/>
               </a:rPr>
               <a:t> · Claude Plans</a:t>
             </a:r>
@@ -27724,7 +27724,7 @@
                 <a:latin typeface="Microsoft YaHei"/>
                 <a:ea typeface="Microsoft YaHei"/>
                 <a:cs typeface="Microsoft YaHei"/>
-                <a:hlinkClick xmlns:r="http://schemas.openxmlformats.org/officeDocument/2006/relationships" r:id="R1bdfecfbb1b04fb4"/>
+                <a:hlinkClick xmlns:r="http://schemas.openxmlformats.org/officeDocument/2006/relationships" r:id="Re2c6becfb71447f2"/>
               </a:rPr>
               <a:t> · Qoder Pricing</a:t>
             </a:r>
@@ -27736,7 +27736,7 @@
                 <a:latin typeface="Microsoft YaHei"/>
                 <a:ea typeface="Microsoft YaHei"/>
                 <a:cs typeface="Microsoft YaHei"/>
-                <a:hlinkClick xmlns:r="http://schemas.openxmlformats.org/officeDocument/2006/relationships" r:id="R8dee6572bcc94f34"/>
+                <a:hlinkClick xmlns:r="http://schemas.openxmlformats.org/officeDocument/2006/relationships" r:id="R5d3bd9f62e114fc8"/>
               </a:rPr>
               <a:t> · Codex Pricing</a:t>
             </a:r>
@@ -27748,7 +27748,7 @@
           <p:cNvPr id="65" name="">
             <a:extLst xmlns:a="http://schemas.openxmlformats.org/drawingml/2006/main">
               <a:ext uri="{FF2B5EF4-FFF2-40B4-BE49-F238E27FC236}">
-                <a16:creationId xmlns:a16="http://schemas.microsoft.com/office/drawing/2014/main" id="{E9B430A1-F8F4-4D15-A460-27E51C9A2DFF}"/>
+                <a16:creationId xmlns:a16="http://schemas.microsoft.com/office/drawing/2014/main" id="{9C4D9D6D-5AA3-4CD0-8283-5DCC891B964B}"/>
               </a:ext>
             </a:extLst>
           </p:cNvPr>
@@ -27804,7 +27804,7 @@
     </p:spTree>
     <p:extLst>
       <p:ext uri="{BB962C8B-B14F-4D97-AF65-F5344CB8AC3E}">
-        <p14:creationId xmlns:p14="http://schemas.microsoft.com/office/powerpoint/2010/main" val="27088910"/>
+        <p14:creationId xmlns:p14="http://schemas.microsoft.com/office/powerpoint/2010/main" val="1474902152"/>
       </p:ext>
     </p:extLst>
   </p:cSld>
@@ -27835,7 +27835,7 @@
           <p:cNvPr id="48" name="">
             <a:extLst xmlns:a="http://schemas.openxmlformats.org/drawingml/2006/main">
               <a:ext uri="{FF2B5EF4-FFF2-40B4-BE49-F238E27FC236}">
-                <a16:creationId xmlns:a16="http://schemas.microsoft.com/office/drawing/2014/main" id="{AB339907-EA48-4ED8-970F-CB697102D55A}"/>
+                <a16:creationId xmlns:a16="http://schemas.microsoft.com/office/drawing/2014/main" id="{2F5A7120-C7C7-4AD6-BA5F-7BE0756CC83B}"/>
               </a:ext>
             </a:extLst>
           </p:cNvPr>
@@ -27868,7 +27868,7 @@
           <p:cNvPr id="2" name="">
             <a:extLst xmlns:a="http://schemas.openxmlformats.org/drawingml/2006/main">
               <a:ext uri="{FF2B5EF4-FFF2-40B4-BE49-F238E27FC236}">
-                <a16:creationId xmlns:a16="http://schemas.microsoft.com/office/drawing/2014/main" id="{D44940D6-98F7-455B-917E-36FE30A31B29}"/>
+                <a16:creationId xmlns:a16="http://schemas.microsoft.com/office/drawing/2014/main" id="{449DA134-6B23-4610-9E6F-273A21E6DFB0}"/>
               </a:ext>
             </a:extLst>
           </p:cNvPr>
@@ -27926,7 +27926,7 @@
           <p:cNvPr id="3" name="">
             <a:extLst xmlns:a="http://schemas.openxmlformats.org/drawingml/2006/main">
               <a:ext uri="{FF2B5EF4-FFF2-40B4-BE49-F238E27FC236}">
-                <a16:creationId xmlns:a16="http://schemas.microsoft.com/office/drawing/2014/main" id="{7A05EA81-7FAE-40DB-A29B-938197A333FA}"/>
+                <a16:creationId xmlns:a16="http://schemas.microsoft.com/office/drawing/2014/main" id="{983470A7-ABE1-44C9-862B-AAFEB5CF3A2C}"/>
               </a:ext>
             </a:extLst>
           </p:cNvPr>
@@ -27984,7 +27984,7 @@
           <p:cNvPr id="4" name="">
             <a:extLst xmlns:a="http://schemas.openxmlformats.org/drawingml/2006/main">
               <a:ext uri="{FF2B5EF4-FFF2-40B4-BE49-F238E27FC236}">
-                <a16:creationId xmlns:a16="http://schemas.microsoft.com/office/drawing/2014/main" id="{9BA57A08-2D1B-4D4C-8C47-0D7D787CFBDF}"/>
+                <a16:creationId xmlns:a16="http://schemas.microsoft.com/office/drawing/2014/main" id="{64F6082F-8766-4DB3-846C-8B450D3DC350}"/>
               </a:ext>
             </a:extLst>
           </p:cNvPr>
@@ -28002,7 +28002,7 @@
             <a:avLst/>
           </a:prstGeom>
           <a:solidFill xmlns:a="http://schemas.openxmlformats.org/drawingml/2006/main">
-            <a:srgbClr val="FFF4F4"/>
+            <a:srgbClr val="F7F7F7"/>
           </a:solidFill>
           <a:ln xmlns:a="http://schemas.openxmlformats.org/drawingml/2006/main" w="9525">
             <a:solidFill>
@@ -28017,7 +28017,7 @@
           <p:cNvPr id="5" name="">
             <a:extLst xmlns:a="http://schemas.openxmlformats.org/drawingml/2006/main">
               <a:ext uri="{FF2B5EF4-FFF2-40B4-BE49-F238E27FC236}">
-                <a16:creationId xmlns:a16="http://schemas.microsoft.com/office/drawing/2014/main" id="{D3B8F815-68EC-4245-92B8-37D1E6E037DC}"/>
+                <a16:creationId xmlns:a16="http://schemas.microsoft.com/office/drawing/2014/main" id="{59F535E5-E15B-4CC1-A97A-96EAEA13A642}"/>
               </a:ext>
             </a:extLst>
           </p:cNvPr>
@@ -28075,7 +28075,7 @@
           <p:cNvPr id="6" name="">
             <a:extLst xmlns:a="http://schemas.openxmlformats.org/drawingml/2006/main">
               <a:ext uri="{FF2B5EF4-FFF2-40B4-BE49-F238E27FC236}">
-                <a16:creationId xmlns:a16="http://schemas.microsoft.com/office/drawing/2014/main" id="{DD1D95A5-A5EC-40C3-8DF1-E7449F68E314}"/>
+                <a16:creationId xmlns:a16="http://schemas.microsoft.com/office/drawing/2014/main" id="{0954FAD0-27EB-4F42-86FA-B634A46199A1}"/>
               </a:ext>
             </a:extLst>
           </p:cNvPr>
@@ -28108,7 +28108,7 @@
           <p:cNvPr id="7" name="">
             <a:extLst xmlns:a="http://schemas.openxmlformats.org/drawingml/2006/main">
               <a:ext uri="{FF2B5EF4-FFF2-40B4-BE49-F238E27FC236}">
-                <a16:creationId xmlns:a16="http://schemas.microsoft.com/office/drawing/2014/main" id="{902A1CB2-A3B9-4583-A20B-A68A4F065BF5}"/>
+                <a16:creationId xmlns:a16="http://schemas.microsoft.com/office/drawing/2014/main" id="{30E73581-8376-49AE-9296-4483E2B954BB}"/>
               </a:ext>
             </a:extLst>
           </p:cNvPr>
@@ -28166,7 +28166,7 @@
           <p:cNvPr id="8" name="">
             <a:extLst xmlns:a="http://schemas.openxmlformats.org/drawingml/2006/main">
               <a:ext uri="{FF2B5EF4-FFF2-40B4-BE49-F238E27FC236}">
-                <a16:creationId xmlns:a16="http://schemas.microsoft.com/office/drawing/2014/main" id="{4BCCA215-5242-4520-980A-AA77234867F2}"/>
+                <a16:creationId xmlns:a16="http://schemas.microsoft.com/office/drawing/2014/main" id="{C7F7C455-D0EF-433E-91C9-F3DB763F7DE3}"/>
               </a:ext>
             </a:extLst>
           </p:cNvPr>
@@ -28224,7 +28224,7 @@
           <p:cNvPr id="9" name="">
             <a:extLst xmlns:a="http://schemas.openxmlformats.org/drawingml/2006/main">
               <a:ext uri="{FF2B5EF4-FFF2-40B4-BE49-F238E27FC236}">
-                <a16:creationId xmlns:a16="http://schemas.microsoft.com/office/drawing/2014/main" id="{A1ED7A59-6663-44E5-815B-D703A9AC54B7}"/>
+                <a16:creationId xmlns:a16="http://schemas.microsoft.com/office/drawing/2014/main" id="{6007DAF9-32C2-4088-86CE-BEB3502F991E}"/>
               </a:ext>
             </a:extLst>
           </p:cNvPr>
@@ -28282,7 +28282,7 @@
           <p:cNvPr id="10" name="">
             <a:extLst xmlns:a="http://schemas.openxmlformats.org/drawingml/2006/main">
               <a:ext uri="{FF2B5EF4-FFF2-40B4-BE49-F238E27FC236}">
-                <a16:creationId xmlns:a16="http://schemas.microsoft.com/office/drawing/2014/main" id="{918C602C-3DAF-4B57-B06B-AA44A8B54AFB}"/>
+                <a16:creationId xmlns:a16="http://schemas.microsoft.com/office/drawing/2014/main" id="{C10176D0-690B-4439-B367-3913C11DE1CD}"/>
               </a:ext>
             </a:extLst>
           </p:cNvPr>
@@ -28315,7 +28315,7 @@
           <p:cNvPr id="11" name="">
             <a:extLst xmlns:a="http://schemas.openxmlformats.org/drawingml/2006/main">
               <a:ext uri="{FF2B5EF4-FFF2-40B4-BE49-F238E27FC236}">
-                <a16:creationId xmlns:a16="http://schemas.microsoft.com/office/drawing/2014/main" id="{F333C3BB-4138-4068-BD01-9A0BE70D056C}"/>
+                <a16:creationId xmlns:a16="http://schemas.microsoft.com/office/drawing/2014/main" id="{708ECD6C-BC7F-4AC1-A85D-23623D84EE23}"/>
               </a:ext>
             </a:extLst>
           </p:cNvPr>
@@ -28373,7 +28373,7 @@
           <p:cNvPr id="12" name="">
             <a:extLst xmlns:a="http://schemas.openxmlformats.org/drawingml/2006/main">
               <a:ext uri="{FF2B5EF4-FFF2-40B4-BE49-F238E27FC236}">
-                <a16:creationId xmlns:a16="http://schemas.microsoft.com/office/drawing/2014/main" id="{F8A63A5C-9A3C-4E8B-A7ED-EF4C47AE1886}"/>
+                <a16:creationId xmlns:a16="http://schemas.microsoft.com/office/drawing/2014/main" id="{CDA1387D-9BD4-45A2-A9C0-DDE6F80A7FED}"/>
               </a:ext>
             </a:extLst>
           </p:cNvPr>
@@ -28406,7 +28406,7 @@
           <p:cNvPr id="13" name="">
             <a:extLst xmlns:a="http://schemas.openxmlformats.org/drawingml/2006/main">
               <a:ext uri="{FF2B5EF4-FFF2-40B4-BE49-F238E27FC236}">
-                <a16:creationId xmlns:a16="http://schemas.microsoft.com/office/drawing/2014/main" id="{7FA63396-0E9F-4E88-B418-844E27E67E54}"/>
+                <a16:creationId xmlns:a16="http://schemas.microsoft.com/office/drawing/2014/main" id="{7378CC4E-8F96-448E-9DB8-2C136676A36F}"/>
               </a:ext>
             </a:extLst>
           </p:cNvPr>
@@ -28464,7 +28464,7 @@
           <p:cNvPr id="14" name="">
             <a:extLst xmlns:a="http://schemas.openxmlformats.org/drawingml/2006/main">
               <a:ext uri="{FF2B5EF4-FFF2-40B4-BE49-F238E27FC236}">
-                <a16:creationId xmlns:a16="http://schemas.microsoft.com/office/drawing/2014/main" id="{EBA5988A-9FFA-41B3-94E9-3CA07205AAA5}"/>
+                <a16:creationId xmlns:a16="http://schemas.microsoft.com/office/drawing/2014/main" id="{FAA6725C-3B8B-4720-A4E5-8BEB37D0C6DD}"/>
               </a:ext>
             </a:extLst>
           </p:cNvPr>
@@ -28522,7 +28522,7 @@
           <p:cNvPr id="15" name="">
             <a:extLst xmlns:a="http://schemas.openxmlformats.org/drawingml/2006/main">
               <a:ext uri="{FF2B5EF4-FFF2-40B4-BE49-F238E27FC236}">
-                <a16:creationId xmlns:a16="http://schemas.microsoft.com/office/drawing/2014/main" id="{FB3B6B0D-917D-433B-991A-B7FE3289B8CF}"/>
+                <a16:creationId xmlns:a16="http://schemas.microsoft.com/office/drawing/2014/main" id="{79577DEF-70AF-46D8-8989-FA65A39CF79C}"/>
               </a:ext>
             </a:extLst>
           </p:cNvPr>
@@ -28580,7 +28580,7 @@
           <p:cNvPr id="16" name="">
             <a:extLst xmlns:a="http://schemas.openxmlformats.org/drawingml/2006/main">
               <a:ext uri="{FF2B5EF4-FFF2-40B4-BE49-F238E27FC236}">
-                <a16:creationId xmlns:a16="http://schemas.microsoft.com/office/drawing/2014/main" id="{533F27AC-87B8-4A99-8651-697FAD714434}"/>
+                <a16:creationId xmlns:a16="http://schemas.microsoft.com/office/drawing/2014/main" id="{39F9C61C-93E2-46DB-81BB-08A606DFC2D1}"/>
               </a:ext>
             </a:extLst>
           </p:cNvPr>
@@ -28613,7 +28613,7 @@
           <p:cNvPr id="17" name="">
             <a:extLst xmlns:a="http://schemas.openxmlformats.org/drawingml/2006/main">
               <a:ext uri="{FF2B5EF4-FFF2-40B4-BE49-F238E27FC236}">
-                <a16:creationId xmlns:a16="http://schemas.microsoft.com/office/drawing/2014/main" id="{F5920F07-D69F-4D79-B00A-294163F46EA9}"/>
+                <a16:creationId xmlns:a16="http://schemas.microsoft.com/office/drawing/2014/main" id="{B4D91DC5-CD96-44FD-A1F5-B6E8821B37E6}"/>
               </a:ext>
             </a:extLst>
           </p:cNvPr>
@@ -28671,7 +28671,7 @@
           <p:cNvPr id="18" name="">
             <a:extLst xmlns:a="http://schemas.openxmlformats.org/drawingml/2006/main">
               <a:ext uri="{FF2B5EF4-FFF2-40B4-BE49-F238E27FC236}">
-                <a16:creationId xmlns:a16="http://schemas.microsoft.com/office/drawing/2014/main" id="{B3EB3A5F-9A25-4307-8657-8B4838C53B8E}"/>
+                <a16:creationId xmlns:a16="http://schemas.microsoft.com/office/drawing/2014/main" id="{9EE93B58-E047-4F31-8228-C564C607B204}"/>
               </a:ext>
             </a:extLst>
           </p:cNvPr>
@@ -28704,7 +28704,7 @@
           <p:cNvPr id="19" name="">
             <a:extLst xmlns:a="http://schemas.openxmlformats.org/drawingml/2006/main">
               <a:ext uri="{FF2B5EF4-FFF2-40B4-BE49-F238E27FC236}">
-                <a16:creationId xmlns:a16="http://schemas.microsoft.com/office/drawing/2014/main" id="{45ACE549-4EAF-48A4-B37D-8AE01B23D5EA}"/>
+                <a16:creationId xmlns:a16="http://schemas.microsoft.com/office/drawing/2014/main" id="{9F200157-4B56-4F45-B1F5-C9DAEB992672}"/>
               </a:ext>
             </a:extLst>
           </p:cNvPr>
@@ -28762,7 +28762,7 @@
           <p:cNvPr id="20" name="">
             <a:extLst xmlns:a="http://schemas.openxmlformats.org/drawingml/2006/main">
               <a:ext uri="{FF2B5EF4-FFF2-40B4-BE49-F238E27FC236}">
-                <a16:creationId xmlns:a16="http://schemas.microsoft.com/office/drawing/2014/main" id="{702E962B-3092-4F4C-A6CE-60154A88CC42}"/>
+                <a16:creationId xmlns:a16="http://schemas.microsoft.com/office/drawing/2014/main" id="{69CB29B9-DE3C-411D-925A-CC53B9BFAFBB}"/>
               </a:ext>
             </a:extLst>
           </p:cNvPr>
@@ -28820,7 +28820,7 @@
           <p:cNvPr id="21" name="">
             <a:extLst xmlns:a="http://schemas.openxmlformats.org/drawingml/2006/main">
               <a:ext uri="{FF2B5EF4-FFF2-40B4-BE49-F238E27FC236}">
-                <a16:creationId xmlns:a16="http://schemas.microsoft.com/office/drawing/2014/main" id="{ED89772A-83B2-4E40-8A4C-7C6BD7BD70C9}"/>
+                <a16:creationId xmlns:a16="http://schemas.microsoft.com/office/drawing/2014/main" id="{CDF1453D-7A45-4548-B3A5-7AF2C81E1111}"/>
               </a:ext>
             </a:extLst>
           </p:cNvPr>
@@ -28878,7 +28878,7 @@
           <p:cNvPr id="22" name="">
             <a:extLst xmlns:a="http://schemas.openxmlformats.org/drawingml/2006/main">
               <a:ext uri="{FF2B5EF4-FFF2-40B4-BE49-F238E27FC236}">
-                <a16:creationId xmlns:a16="http://schemas.microsoft.com/office/drawing/2014/main" id="{37ABF617-D75B-4C91-AAD6-3858F87B4F66}"/>
+                <a16:creationId xmlns:a16="http://schemas.microsoft.com/office/drawing/2014/main" id="{5DB05DE9-2638-47ED-8C26-8D4118B0F967}"/>
               </a:ext>
             </a:extLst>
           </p:cNvPr>
@@ -28911,7 +28911,7 @@
           <p:cNvPr id="23" name="">
             <a:extLst xmlns:a="http://schemas.openxmlformats.org/drawingml/2006/main">
               <a:ext uri="{FF2B5EF4-FFF2-40B4-BE49-F238E27FC236}">
-                <a16:creationId xmlns:a16="http://schemas.microsoft.com/office/drawing/2014/main" id="{973CA9A7-D630-434D-9C2E-379EAD56FB72}"/>
+                <a16:creationId xmlns:a16="http://schemas.microsoft.com/office/drawing/2014/main" id="{B7E549DE-538A-4E0E-A6A1-65A475BEE4FC}"/>
               </a:ext>
             </a:extLst>
           </p:cNvPr>
@@ -28969,7 +28969,7 @@
           <p:cNvPr id="24" name="">
             <a:extLst xmlns:a="http://schemas.openxmlformats.org/drawingml/2006/main">
               <a:ext uri="{FF2B5EF4-FFF2-40B4-BE49-F238E27FC236}">
-                <a16:creationId xmlns:a16="http://schemas.microsoft.com/office/drawing/2014/main" id="{F756ECA3-2F9F-4287-982B-D7A7AB772448}"/>
+                <a16:creationId xmlns:a16="http://schemas.microsoft.com/office/drawing/2014/main" id="{D513EC2D-59A2-45B0-BA85-A541D9B92017}"/>
               </a:ext>
             </a:extLst>
           </p:cNvPr>
@@ -29002,7 +29002,7 @@
           <p:cNvPr id="25" name="">
             <a:extLst xmlns:a="http://schemas.openxmlformats.org/drawingml/2006/main">
               <a:ext uri="{FF2B5EF4-FFF2-40B4-BE49-F238E27FC236}">
-                <a16:creationId xmlns:a16="http://schemas.microsoft.com/office/drawing/2014/main" id="{D0ED200B-8EBB-4040-8AFF-EB32C4BBB794}"/>
+                <a16:creationId xmlns:a16="http://schemas.microsoft.com/office/drawing/2014/main" id="{76BE6726-4A43-4244-BCC6-734B68D744F7}"/>
               </a:ext>
             </a:extLst>
           </p:cNvPr>
@@ -29060,7 +29060,7 @@
           <p:cNvPr id="26" name="">
             <a:extLst xmlns:a="http://schemas.openxmlformats.org/drawingml/2006/main">
               <a:ext uri="{FF2B5EF4-FFF2-40B4-BE49-F238E27FC236}">
-                <a16:creationId xmlns:a16="http://schemas.microsoft.com/office/drawing/2014/main" id="{12A1FFB8-7140-481D-995C-0EA6EC7D7521}"/>
+                <a16:creationId xmlns:a16="http://schemas.microsoft.com/office/drawing/2014/main" id="{4F337CD2-6B17-4F31-900A-ADD6FE55662E}"/>
               </a:ext>
             </a:extLst>
           </p:cNvPr>
@@ -29118,7 +29118,7 @@
           <p:cNvPr id="27" name="">
             <a:extLst xmlns:a="http://schemas.openxmlformats.org/drawingml/2006/main">
               <a:ext uri="{FF2B5EF4-FFF2-40B4-BE49-F238E27FC236}">
-                <a16:creationId xmlns:a16="http://schemas.microsoft.com/office/drawing/2014/main" id="{FE39EA40-AB60-4E7C-8AE4-FE0EA4D5795C}"/>
+                <a16:creationId xmlns:a16="http://schemas.microsoft.com/office/drawing/2014/main" id="{4C6A7B01-4F33-4716-B83E-4C2AAE51BD17}"/>
               </a:ext>
             </a:extLst>
           </p:cNvPr>
@@ -29176,7 +29176,7 @@
           <p:cNvPr id="28" name="">
             <a:extLst xmlns:a="http://schemas.openxmlformats.org/drawingml/2006/main">
               <a:ext uri="{FF2B5EF4-FFF2-40B4-BE49-F238E27FC236}">
-                <a16:creationId xmlns:a16="http://schemas.microsoft.com/office/drawing/2014/main" id="{2F339138-59CB-46E4-A657-1EAE48798B34}"/>
+                <a16:creationId xmlns:a16="http://schemas.microsoft.com/office/drawing/2014/main" id="{E285A0AB-1020-4CC4-9FA7-70FB95DB5A8B}"/>
               </a:ext>
             </a:extLst>
           </p:cNvPr>
@@ -29209,7 +29209,7 @@
           <p:cNvPr id="29" name="">
             <a:extLst xmlns:a="http://schemas.openxmlformats.org/drawingml/2006/main">
               <a:ext uri="{FF2B5EF4-FFF2-40B4-BE49-F238E27FC236}">
-                <a16:creationId xmlns:a16="http://schemas.microsoft.com/office/drawing/2014/main" id="{4D5AA8E2-BC48-45EB-8D7B-BA0C7CF7C4CE}"/>
+                <a16:creationId xmlns:a16="http://schemas.microsoft.com/office/drawing/2014/main" id="{108D4CC0-FB4A-4B38-BBA1-5AB2706D3FA3}"/>
               </a:ext>
             </a:extLst>
           </p:cNvPr>
@@ -29267,7 +29267,7 @@
           <p:cNvPr id="30" name="">
             <a:extLst xmlns:a="http://schemas.openxmlformats.org/drawingml/2006/main">
               <a:ext uri="{FF2B5EF4-FFF2-40B4-BE49-F238E27FC236}">
-                <a16:creationId xmlns:a16="http://schemas.microsoft.com/office/drawing/2014/main" id="{EC0146B7-FD0C-47F6-BA03-157B645B72B1}"/>
+                <a16:creationId xmlns:a16="http://schemas.microsoft.com/office/drawing/2014/main" id="{F747A126-5BDF-4220-AA08-4C61CC1EAEB1}"/>
               </a:ext>
             </a:extLst>
           </p:cNvPr>
@@ -29300,7 +29300,7 @@
           <p:cNvPr id="31" name="">
             <a:extLst xmlns:a="http://schemas.openxmlformats.org/drawingml/2006/main">
               <a:ext uri="{FF2B5EF4-FFF2-40B4-BE49-F238E27FC236}">
-                <a16:creationId xmlns:a16="http://schemas.microsoft.com/office/drawing/2014/main" id="{3F605B1D-8A1A-4F15-90FC-994C3D06B1C9}"/>
+                <a16:creationId xmlns:a16="http://schemas.microsoft.com/office/drawing/2014/main" id="{3864F52C-91C8-4AD1-B068-86E9776D9202}"/>
               </a:ext>
             </a:extLst>
           </p:cNvPr>
@@ -29358,7 +29358,7 @@
           <p:cNvPr id="32" name="">
             <a:extLst xmlns:a="http://schemas.openxmlformats.org/drawingml/2006/main">
               <a:ext uri="{FF2B5EF4-FFF2-40B4-BE49-F238E27FC236}">
-                <a16:creationId xmlns:a16="http://schemas.microsoft.com/office/drawing/2014/main" id="{9130A3A3-2A20-4D0A-BAB0-2C4D59F6DA68}"/>
+                <a16:creationId xmlns:a16="http://schemas.microsoft.com/office/drawing/2014/main" id="{D7E8E8DA-0D64-4DC8-991C-5A48F99D12CE}"/>
               </a:ext>
             </a:extLst>
           </p:cNvPr>
@@ -29416,7 +29416,7 @@
           <p:cNvPr id="33" name="">
             <a:extLst xmlns:a="http://schemas.openxmlformats.org/drawingml/2006/main">
               <a:ext uri="{FF2B5EF4-FFF2-40B4-BE49-F238E27FC236}">
-                <a16:creationId xmlns:a16="http://schemas.microsoft.com/office/drawing/2014/main" id="{F17EE206-31EB-4ED7-8C46-FD5A7ED72D5B}"/>
+                <a16:creationId xmlns:a16="http://schemas.microsoft.com/office/drawing/2014/main" id="{157B8867-D15D-4E78-9298-8FFF2EBCAABB}"/>
               </a:ext>
             </a:extLst>
           </p:cNvPr>
@@ -29474,7 +29474,7 @@
           <p:cNvPr id="34" name="">
             <a:extLst xmlns:a="http://schemas.openxmlformats.org/drawingml/2006/main">
               <a:ext uri="{FF2B5EF4-FFF2-40B4-BE49-F238E27FC236}">
-                <a16:creationId xmlns:a16="http://schemas.microsoft.com/office/drawing/2014/main" id="{2CD8A895-8BBD-4971-BC15-0648E953C213}"/>
+                <a16:creationId xmlns:a16="http://schemas.microsoft.com/office/drawing/2014/main" id="{17D2E76E-8BED-44E9-8616-E78C4F0D7E87}"/>
               </a:ext>
             </a:extLst>
           </p:cNvPr>
@@ -29507,7 +29507,7 @@
           <p:cNvPr id="35" name="">
             <a:extLst xmlns:a="http://schemas.openxmlformats.org/drawingml/2006/main">
               <a:ext uri="{FF2B5EF4-FFF2-40B4-BE49-F238E27FC236}">
-                <a16:creationId xmlns:a16="http://schemas.microsoft.com/office/drawing/2014/main" id="{00B7572F-AEE5-4E5F-9FF5-02E5FCF7BFE3}"/>
+                <a16:creationId xmlns:a16="http://schemas.microsoft.com/office/drawing/2014/main" id="{90DCD500-1442-48B2-9B4F-988B8D6FD16B}"/>
               </a:ext>
             </a:extLst>
           </p:cNvPr>
@@ -29565,7 +29565,7 @@
           <p:cNvPr id="36" name="">
             <a:extLst xmlns:a="http://schemas.openxmlformats.org/drawingml/2006/main">
               <a:ext uri="{FF2B5EF4-FFF2-40B4-BE49-F238E27FC236}">
-                <a16:creationId xmlns:a16="http://schemas.microsoft.com/office/drawing/2014/main" id="{FEB6CA07-03E8-40F6-AC2B-65180B2A34E7}"/>
+                <a16:creationId xmlns:a16="http://schemas.microsoft.com/office/drawing/2014/main" id="{1936C2B4-B500-4EDD-B3CE-4B0D10106F64}"/>
               </a:ext>
             </a:extLst>
           </p:cNvPr>
@@ -29598,7 +29598,7 @@
           <p:cNvPr id="37" name="">
             <a:extLst xmlns:a="http://schemas.openxmlformats.org/drawingml/2006/main">
               <a:ext uri="{FF2B5EF4-FFF2-40B4-BE49-F238E27FC236}">
-                <a16:creationId xmlns:a16="http://schemas.microsoft.com/office/drawing/2014/main" id="{DD9FC380-DD6A-4A80-816C-6487530270D4}"/>
+                <a16:creationId xmlns:a16="http://schemas.microsoft.com/office/drawing/2014/main" id="{D9BD057D-15AD-4806-B29F-AFC0D113C11F}"/>
               </a:ext>
             </a:extLst>
           </p:cNvPr>
@@ -29656,7 +29656,7 @@
           <p:cNvPr id="38" name="">
             <a:extLst xmlns:a="http://schemas.openxmlformats.org/drawingml/2006/main">
               <a:ext uri="{FF2B5EF4-FFF2-40B4-BE49-F238E27FC236}">
-                <a16:creationId xmlns:a16="http://schemas.microsoft.com/office/drawing/2014/main" id="{ACB44245-7AEB-46B9-A5B6-21E1620FC144}"/>
+                <a16:creationId xmlns:a16="http://schemas.microsoft.com/office/drawing/2014/main" id="{CD6B0ACC-E536-48A7-8CA3-35BAD3A1387B}"/>
               </a:ext>
             </a:extLst>
           </p:cNvPr>
@@ -29714,7 +29714,7 @@
           <p:cNvPr id="39" name="">
             <a:extLst xmlns:a="http://schemas.openxmlformats.org/drawingml/2006/main">
               <a:ext uri="{FF2B5EF4-FFF2-40B4-BE49-F238E27FC236}">
-                <a16:creationId xmlns:a16="http://schemas.microsoft.com/office/drawing/2014/main" id="{5DEE0C8B-D758-412D-81B4-4B78CFB25241}"/>
+                <a16:creationId xmlns:a16="http://schemas.microsoft.com/office/drawing/2014/main" id="{7E4298A6-84CC-46AE-B81F-07BDE1BF0F12}"/>
               </a:ext>
             </a:extLst>
           </p:cNvPr>
@@ -29772,7 +29772,7 @@
           <p:cNvPr id="40" name="">
             <a:extLst xmlns:a="http://schemas.openxmlformats.org/drawingml/2006/main">
               <a:ext uri="{FF2B5EF4-FFF2-40B4-BE49-F238E27FC236}">
-                <a16:creationId xmlns:a16="http://schemas.microsoft.com/office/drawing/2014/main" id="{23BAE97A-B2BF-4FF3-BBB0-5A4CB225BFCD}"/>
+                <a16:creationId xmlns:a16="http://schemas.microsoft.com/office/drawing/2014/main" id="{9F15A326-FB26-42B6-94C7-DF435BDE4C02}"/>
               </a:ext>
             </a:extLst>
           </p:cNvPr>
@@ -29805,7 +29805,7 @@
           <p:cNvPr id="41" name="">
             <a:extLst xmlns:a="http://schemas.openxmlformats.org/drawingml/2006/main">
               <a:ext uri="{FF2B5EF4-FFF2-40B4-BE49-F238E27FC236}">
-                <a16:creationId xmlns:a16="http://schemas.microsoft.com/office/drawing/2014/main" id="{9B143612-D24F-4CDC-947B-D15223C915D3}"/>
+                <a16:creationId xmlns:a16="http://schemas.microsoft.com/office/drawing/2014/main" id="{6F8A203C-9E5B-457A-AA8C-09E913D2A6EB}"/>
               </a:ext>
             </a:extLst>
           </p:cNvPr>
@@ -29863,7 +29863,7 @@
           <p:cNvPr id="42" name="">
             <a:extLst xmlns:a="http://schemas.openxmlformats.org/drawingml/2006/main">
               <a:ext uri="{FF2B5EF4-FFF2-40B4-BE49-F238E27FC236}">
-                <a16:creationId xmlns:a16="http://schemas.microsoft.com/office/drawing/2014/main" id="{41EE910A-A1AA-4F08-8FEA-7AA4B3CA5641}"/>
+                <a16:creationId xmlns:a16="http://schemas.microsoft.com/office/drawing/2014/main" id="{778BD569-5438-4531-AF1A-9C9569444393}"/>
               </a:ext>
             </a:extLst>
           </p:cNvPr>
@@ -29921,7 +29921,7 @@
           <p:cNvPr id="43" name="">
             <a:extLst xmlns:a="http://schemas.openxmlformats.org/drawingml/2006/main">
               <a:ext uri="{FF2B5EF4-FFF2-40B4-BE49-F238E27FC236}">
-                <a16:creationId xmlns:a16="http://schemas.microsoft.com/office/drawing/2014/main" id="{72E59C1A-9B71-4D93-B553-BF92001FCE02}"/>
+                <a16:creationId xmlns:a16="http://schemas.microsoft.com/office/drawing/2014/main" id="{106DBBC9-06FD-4DE2-8E82-A80C01CF6ADB}"/>
               </a:ext>
             </a:extLst>
           </p:cNvPr>
@@ -29979,7 +29979,7 @@
           <p:cNvPr id="44" name="">
             <a:extLst xmlns:a="http://schemas.openxmlformats.org/drawingml/2006/main">
               <a:ext uri="{FF2B5EF4-FFF2-40B4-BE49-F238E27FC236}">
-                <a16:creationId xmlns:a16="http://schemas.microsoft.com/office/drawing/2014/main" id="{0D598D75-D26A-4BF5-BAAC-5AC95AACCBAF}"/>
+                <a16:creationId xmlns:a16="http://schemas.microsoft.com/office/drawing/2014/main" id="{F125676A-AD2F-458B-BDA7-7909124B802E}"/>
               </a:ext>
             </a:extLst>
           </p:cNvPr>
@@ -30037,7 +30037,7 @@
           <p:cNvPr id="45" name="">
             <a:extLst xmlns:a="http://schemas.openxmlformats.org/drawingml/2006/main">
               <a:ext uri="{FF2B5EF4-FFF2-40B4-BE49-F238E27FC236}">
-                <a16:creationId xmlns:a16="http://schemas.microsoft.com/office/drawing/2014/main" id="{CBA90CC1-F06F-4097-B346-C736A8F218AE}"/>
+                <a16:creationId xmlns:a16="http://schemas.microsoft.com/office/drawing/2014/main" id="{EC896B4D-5929-454E-8C5A-EC3182F732AE}"/>
               </a:ext>
             </a:extLst>
           </p:cNvPr>
@@ -30070,7 +30070,7 @@
           <p:cNvPr id="46" name="">
             <a:extLst xmlns:a="http://schemas.openxmlformats.org/drawingml/2006/main">
               <a:ext uri="{FF2B5EF4-FFF2-40B4-BE49-F238E27FC236}">
-                <a16:creationId xmlns:a16="http://schemas.microsoft.com/office/drawing/2014/main" id="{8031B2C3-4133-4ECE-9ECE-BCD5B29FD0D0}"/>
+                <a16:creationId xmlns:a16="http://schemas.microsoft.com/office/drawing/2014/main" id="{21B47739-F2C1-4A7B-A1F5-F502BF6040B3}"/>
               </a:ext>
             </a:extLst>
           </p:cNvPr>
@@ -30128,7 +30128,7 @@
                 <a:latin typeface="Microsoft YaHei"/>
                 <a:ea typeface="Microsoft YaHei"/>
                 <a:cs typeface="Microsoft YaHei"/>
-                <a:hlinkClick xmlns:r="http://schemas.openxmlformats.org/officeDocument/2006/relationships" r:id="R688a32556ece4f57"/>
+                <a:hlinkClick xmlns:r="http://schemas.openxmlformats.org/officeDocument/2006/relationships" r:id="R58406bf0464b476a"/>
               </a:rPr>
               <a:t>码道定价</a:t>
             </a:r>
@@ -30140,7 +30140,7 @@
                 <a:latin typeface="Microsoft YaHei"/>
                 <a:ea typeface="Microsoft YaHei"/>
                 <a:cs typeface="Microsoft YaHei"/>
-                <a:hlinkClick xmlns:r="http://schemas.openxmlformats.org/officeDocument/2006/relationships" r:id="R1e73ce69de9e4973"/>
+                <a:hlinkClick xmlns:r="http://schemas.openxmlformats.org/officeDocument/2006/relationships" r:id="R03619520f2924bc0"/>
               </a:rPr>
               <a:t> · Qoder Pricing</a:t>
             </a:r>
@@ -30152,7 +30152,7 @@
                 <a:latin typeface="Microsoft YaHei"/>
                 <a:ea typeface="Microsoft YaHei"/>
                 <a:cs typeface="Microsoft YaHei"/>
-                <a:hlinkClick xmlns:r="http://schemas.openxmlformats.org/officeDocument/2006/relationships" r:id="R715a8cfb847f4b81"/>
+                <a:hlinkClick xmlns:r="http://schemas.openxmlformats.org/officeDocument/2006/relationships" r:id="R48cda86532da4481"/>
               </a:rPr>
               <a:t> · Cursor Pricing</a:t>
             </a:r>
@@ -30164,7 +30164,7 @@
                 <a:latin typeface="Microsoft YaHei"/>
                 <a:ea typeface="Microsoft YaHei"/>
                 <a:cs typeface="Microsoft YaHei"/>
-                <a:hlinkClick xmlns:r="http://schemas.openxmlformats.org/officeDocument/2006/relationships" r:id="R7b76840ad8204178"/>
+                <a:hlinkClick xmlns:r="http://schemas.openxmlformats.org/officeDocument/2006/relationships" r:id="R7b7e74a78da040ef"/>
               </a:rPr>
               <a:t> · Trae Pricing</a:t>
             </a:r>
@@ -30176,7 +30176,7 @@
           <p:cNvPr id="47" name="">
             <a:extLst xmlns:a="http://schemas.openxmlformats.org/drawingml/2006/main">
               <a:ext uri="{FF2B5EF4-FFF2-40B4-BE49-F238E27FC236}">
-                <a16:creationId xmlns:a16="http://schemas.microsoft.com/office/drawing/2014/main" id="{6C6C628D-5B89-4D29-B76E-7401339A1180}"/>
+                <a16:creationId xmlns:a16="http://schemas.microsoft.com/office/drawing/2014/main" id="{DB137D4A-A862-4E7C-9B49-7DAE6911F14F}"/>
               </a:ext>
             </a:extLst>
           </p:cNvPr>
@@ -30232,7 +30232,7 @@
     </p:spTree>
     <p:extLst>
       <p:ext uri="{BB962C8B-B14F-4D97-AF65-F5344CB8AC3E}">
-        <p14:creationId xmlns:p14="http://schemas.microsoft.com/office/powerpoint/2010/main" val="1645562652"/>
+        <p14:creationId xmlns:p14="http://schemas.microsoft.com/office/powerpoint/2010/main" val="158273247"/>
       </p:ext>
     </p:extLst>
   </p:cSld>
@@ -30263,7 +30263,7 @@
           <p:cNvPr id="36" name="">
             <a:extLst xmlns:a="http://schemas.openxmlformats.org/drawingml/2006/main">
               <a:ext uri="{FF2B5EF4-FFF2-40B4-BE49-F238E27FC236}">
-                <a16:creationId xmlns:a16="http://schemas.microsoft.com/office/drawing/2014/main" id="{17CB86BE-2DB5-41C7-9115-E6B805EA7B17}"/>
+                <a16:creationId xmlns:a16="http://schemas.microsoft.com/office/drawing/2014/main" id="{F9B1CE80-2385-4BC9-B480-B02458CA6AAF}"/>
               </a:ext>
             </a:extLst>
           </p:cNvPr>
@@ -30296,7 +30296,7 @@
           <p:cNvPr id="2" name="">
             <a:extLst xmlns:a="http://schemas.openxmlformats.org/drawingml/2006/main">
               <a:ext uri="{FF2B5EF4-FFF2-40B4-BE49-F238E27FC236}">
-                <a16:creationId xmlns:a16="http://schemas.microsoft.com/office/drawing/2014/main" id="{C90C3760-BEDC-4CFE-8E4C-B27BDAC91456}"/>
+                <a16:creationId xmlns:a16="http://schemas.microsoft.com/office/drawing/2014/main" id="{DAA96AE5-3A38-4B29-AE86-43518FEB4137}"/>
               </a:ext>
             </a:extLst>
           </p:cNvPr>
@@ -30354,7 +30354,7 @@
           <p:cNvPr id="3" name="">
             <a:extLst xmlns:a="http://schemas.openxmlformats.org/drawingml/2006/main">
               <a:ext uri="{FF2B5EF4-FFF2-40B4-BE49-F238E27FC236}">
-                <a16:creationId xmlns:a16="http://schemas.microsoft.com/office/drawing/2014/main" id="{254E4B15-2106-4CCE-A463-A36B8D28DDAA}"/>
+                <a16:creationId xmlns:a16="http://schemas.microsoft.com/office/drawing/2014/main" id="{494C4A11-648A-472C-99FC-28598E154B84}"/>
               </a:ext>
             </a:extLst>
           </p:cNvPr>
@@ -30412,7 +30412,7 @@
           <p:cNvPr id="4" name="">
             <a:extLst xmlns:a="http://schemas.openxmlformats.org/drawingml/2006/main">
               <a:ext uri="{FF2B5EF4-FFF2-40B4-BE49-F238E27FC236}">
-                <a16:creationId xmlns:a16="http://schemas.microsoft.com/office/drawing/2014/main" id="{A13801D8-1739-472E-BC8D-E17B611607C3}"/>
+                <a16:creationId xmlns:a16="http://schemas.microsoft.com/office/drawing/2014/main" id="{1AF38EE1-825D-4C50-8901-DBAAA52D2C93}"/>
               </a:ext>
             </a:extLst>
           </p:cNvPr>
@@ -30449,7 +30449,7 @@
           <p:nvPr/>
         </p:nvPicPr>
         <p:blipFill>
-          <a:blip xmlns:r="http://schemas.openxmlformats.org/officeDocument/2006/relationships" xmlns:a="http://schemas.openxmlformats.org/drawingml/2006/main" r:embed="Rd76c3cafba074716"/>
+          <a:blip xmlns:r="http://schemas.openxmlformats.org/officeDocument/2006/relationships" xmlns:a="http://schemas.openxmlformats.org/drawingml/2006/main" r:embed="Rcc6eacf530a54b66"/>
           <a:stretch xmlns:a="http://schemas.openxmlformats.org/drawingml/2006/main"/>
         </p:blipFill>
         <p:spPr>
@@ -30467,7 +30467,7 @@
           <p:cNvPr id="6" name="">
             <a:extLst xmlns:a="http://schemas.openxmlformats.org/drawingml/2006/main">
               <a:ext uri="{FF2B5EF4-FFF2-40B4-BE49-F238E27FC236}">
-                <a16:creationId xmlns:a16="http://schemas.microsoft.com/office/drawing/2014/main" id="{A44D1899-1E0E-4492-8274-B4DEEF55619D}"/>
+                <a16:creationId xmlns:a16="http://schemas.microsoft.com/office/drawing/2014/main" id="{67E8ED8B-8CD8-431E-AA3F-0F4A3D732217}"/>
               </a:ext>
             </a:extLst>
           </p:cNvPr>
@@ -30525,7 +30525,7 @@
           <p:cNvPr id="7" name="">
             <a:extLst xmlns:a="http://schemas.openxmlformats.org/drawingml/2006/main">
               <a:ext uri="{FF2B5EF4-FFF2-40B4-BE49-F238E27FC236}">
-                <a16:creationId xmlns:a16="http://schemas.microsoft.com/office/drawing/2014/main" id="{1032BF65-31C3-49EE-9A1E-5BAB4477E574}"/>
+                <a16:creationId xmlns:a16="http://schemas.microsoft.com/office/drawing/2014/main" id="{312DEA42-6401-4E3B-AD2B-9E0CD4710314}"/>
               </a:ext>
             </a:extLst>
           </p:cNvPr>
@@ -30583,7 +30583,7 @@
           <p:cNvPr id="8" name="">
             <a:extLst xmlns:a="http://schemas.openxmlformats.org/drawingml/2006/main">
               <a:ext uri="{FF2B5EF4-FFF2-40B4-BE49-F238E27FC236}">
-                <a16:creationId xmlns:a16="http://schemas.microsoft.com/office/drawing/2014/main" id="{6E939CB8-58DB-4EDA-B4BB-4DC09349ACA5}"/>
+                <a16:creationId xmlns:a16="http://schemas.microsoft.com/office/drawing/2014/main" id="{5E9C09EE-222B-4ADA-B39C-8C847FD23C73}"/>
               </a:ext>
             </a:extLst>
           </p:cNvPr>
@@ -30641,7 +30641,7 @@
           <p:cNvPr id="9" name="">
             <a:extLst xmlns:a="http://schemas.openxmlformats.org/drawingml/2006/main">
               <a:ext uri="{FF2B5EF4-FFF2-40B4-BE49-F238E27FC236}">
-                <a16:creationId xmlns:a16="http://schemas.microsoft.com/office/drawing/2014/main" id="{D96FEF50-5241-4475-A652-686047D06002}"/>
+                <a16:creationId xmlns:a16="http://schemas.microsoft.com/office/drawing/2014/main" id="{81BD17BC-0AA0-4971-A4DA-714C3DB644BC}"/>
               </a:ext>
             </a:extLst>
           </p:cNvPr>
@@ -30674,7 +30674,7 @@
           <p:cNvPr id="10" name="">
             <a:extLst xmlns:a="http://schemas.openxmlformats.org/drawingml/2006/main">
               <a:ext uri="{FF2B5EF4-FFF2-40B4-BE49-F238E27FC236}">
-                <a16:creationId xmlns:a16="http://schemas.microsoft.com/office/drawing/2014/main" id="{539A887B-23F4-4B77-A395-A02F610D1474}"/>
+                <a16:creationId xmlns:a16="http://schemas.microsoft.com/office/drawing/2014/main" id="{7AF9E0AA-C085-4DDA-B985-6297A9222B93}"/>
               </a:ext>
             </a:extLst>
           </p:cNvPr>
@@ -30732,7 +30732,7 @@
           <p:cNvPr id="11" name="">
             <a:extLst xmlns:a="http://schemas.openxmlformats.org/drawingml/2006/main">
               <a:ext uri="{FF2B5EF4-FFF2-40B4-BE49-F238E27FC236}">
-                <a16:creationId xmlns:a16="http://schemas.microsoft.com/office/drawing/2014/main" id="{6A7C4F19-E66F-4F15-B8AF-DAA5360DEC2C}"/>
+                <a16:creationId xmlns:a16="http://schemas.microsoft.com/office/drawing/2014/main" id="{166C7FA9-A430-4F00-92F5-B3730B654D5F}"/>
               </a:ext>
             </a:extLst>
           </p:cNvPr>
@@ -30790,7 +30790,7 @@
           <p:cNvPr id="12" name="">
             <a:extLst xmlns:a="http://schemas.openxmlformats.org/drawingml/2006/main">
               <a:ext uri="{FF2B5EF4-FFF2-40B4-BE49-F238E27FC236}">
-                <a16:creationId xmlns:a16="http://schemas.microsoft.com/office/drawing/2014/main" id="{EE8ABCFB-7DC5-41EC-B328-83FB818ADE28}"/>
+                <a16:creationId xmlns:a16="http://schemas.microsoft.com/office/drawing/2014/main" id="{3A25C5C0-465C-41A4-A84E-9690120F9F9E}"/>
               </a:ext>
             </a:extLst>
           </p:cNvPr>
@@ -30848,7 +30848,7 @@
           <p:cNvPr id="13" name="">
             <a:extLst xmlns:a="http://schemas.openxmlformats.org/drawingml/2006/main">
               <a:ext uri="{FF2B5EF4-FFF2-40B4-BE49-F238E27FC236}">
-                <a16:creationId xmlns:a16="http://schemas.microsoft.com/office/drawing/2014/main" id="{EF867D93-0A99-4443-A634-75C82B84FDFA}"/>
+                <a16:creationId xmlns:a16="http://schemas.microsoft.com/office/drawing/2014/main" id="{81CE8D5B-3581-493D-981C-8D8B64A01909}"/>
               </a:ext>
             </a:extLst>
           </p:cNvPr>
@@ -30881,7 +30881,7 @@
           <p:cNvPr id="14" name="">
             <a:extLst xmlns:a="http://schemas.openxmlformats.org/drawingml/2006/main">
               <a:ext uri="{FF2B5EF4-FFF2-40B4-BE49-F238E27FC236}">
-                <a16:creationId xmlns:a16="http://schemas.microsoft.com/office/drawing/2014/main" id="{D7D8D2B4-E95E-4B60-A540-D21EAC978B02}"/>
+                <a16:creationId xmlns:a16="http://schemas.microsoft.com/office/drawing/2014/main" id="{7B30C832-7657-4759-8BCB-E2A6E142A9DA}"/>
               </a:ext>
             </a:extLst>
           </p:cNvPr>
@@ -30939,7 +30939,7 @@
           <p:cNvPr id="15" name="">
             <a:extLst xmlns:a="http://schemas.openxmlformats.org/drawingml/2006/main">
               <a:ext uri="{FF2B5EF4-FFF2-40B4-BE49-F238E27FC236}">
-                <a16:creationId xmlns:a16="http://schemas.microsoft.com/office/drawing/2014/main" id="{D994C622-9A25-4A0E-8F81-C088D5E20F3D}"/>
+                <a16:creationId xmlns:a16="http://schemas.microsoft.com/office/drawing/2014/main" id="{ACB4CAE0-2351-4ED2-9CB1-8B9F35A2AD94}"/>
               </a:ext>
             </a:extLst>
           </p:cNvPr>
@@ -30997,7 +30997,7 @@
           <p:cNvPr id="16" name="">
             <a:extLst xmlns:a="http://schemas.openxmlformats.org/drawingml/2006/main">
               <a:ext uri="{FF2B5EF4-FFF2-40B4-BE49-F238E27FC236}">
-                <a16:creationId xmlns:a16="http://schemas.microsoft.com/office/drawing/2014/main" id="{DFCD273C-B00B-45D1-836D-FFE44DB9E6D3}"/>
+                <a16:creationId xmlns:a16="http://schemas.microsoft.com/office/drawing/2014/main" id="{222E7848-49EC-4730-8AA7-97B5B1459D20}"/>
               </a:ext>
             </a:extLst>
           </p:cNvPr>
@@ -31055,7 +31055,7 @@
           <p:cNvPr id="17" name="">
             <a:extLst xmlns:a="http://schemas.openxmlformats.org/drawingml/2006/main">
               <a:ext uri="{FF2B5EF4-FFF2-40B4-BE49-F238E27FC236}">
-                <a16:creationId xmlns:a16="http://schemas.microsoft.com/office/drawing/2014/main" id="{B72BABF8-E2FB-4188-B03A-C2B80612AA20}"/>
+                <a16:creationId xmlns:a16="http://schemas.microsoft.com/office/drawing/2014/main" id="{2F149F68-3A53-4C3D-8495-34FF3CF9CECB}"/>
               </a:ext>
             </a:extLst>
           </p:cNvPr>
@@ -31088,7 +31088,7 @@
           <p:cNvPr id="18" name="">
             <a:extLst xmlns:a="http://schemas.openxmlformats.org/drawingml/2006/main">
               <a:ext uri="{FF2B5EF4-FFF2-40B4-BE49-F238E27FC236}">
-                <a16:creationId xmlns:a16="http://schemas.microsoft.com/office/drawing/2014/main" id="{E14985A9-961F-48D3-BC0F-EB96BDB5E2C1}"/>
+                <a16:creationId xmlns:a16="http://schemas.microsoft.com/office/drawing/2014/main" id="{374E551B-39DD-4CE3-ABAF-CEF22ED7857E}"/>
               </a:ext>
             </a:extLst>
           </p:cNvPr>
@@ -31146,7 +31146,7 @@
           <p:cNvPr id="19" name="">
             <a:extLst xmlns:a="http://schemas.openxmlformats.org/drawingml/2006/main">
               <a:ext uri="{FF2B5EF4-FFF2-40B4-BE49-F238E27FC236}">
-                <a16:creationId xmlns:a16="http://schemas.microsoft.com/office/drawing/2014/main" id="{9B0213F4-276C-47A7-8C73-B5F0B780ABAF}"/>
+                <a16:creationId xmlns:a16="http://schemas.microsoft.com/office/drawing/2014/main" id="{B44458FF-2458-4CCD-934C-5BEB5A275C46}"/>
               </a:ext>
             </a:extLst>
           </p:cNvPr>
@@ -31204,7 +31204,7 @@
           <p:cNvPr id="20" name="">
             <a:extLst xmlns:a="http://schemas.openxmlformats.org/drawingml/2006/main">
               <a:ext uri="{FF2B5EF4-FFF2-40B4-BE49-F238E27FC236}">
-                <a16:creationId xmlns:a16="http://schemas.microsoft.com/office/drawing/2014/main" id="{561868D0-6E14-4279-9E63-8A47C4882735}"/>
+                <a16:creationId xmlns:a16="http://schemas.microsoft.com/office/drawing/2014/main" id="{48F39DC5-8CC1-412B-ADA9-A2B557FA4A1A}"/>
               </a:ext>
             </a:extLst>
           </p:cNvPr>
@@ -31262,7 +31262,7 @@
           <p:cNvPr id="21" name="">
             <a:extLst xmlns:a="http://schemas.openxmlformats.org/drawingml/2006/main">
               <a:ext uri="{FF2B5EF4-FFF2-40B4-BE49-F238E27FC236}">
-                <a16:creationId xmlns:a16="http://schemas.microsoft.com/office/drawing/2014/main" id="{457B50DD-3C3D-4113-8B90-71F6E07FCAC0}"/>
+                <a16:creationId xmlns:a16="http://schemas.microsoft.com/office/drawing/2014/main" id="{5F0E0CF1-6229-4346-8A87-3493B95CB363}"/>
               </a:ext>
             </a:extLst>
           </p:cNvPr>
@@ -31295,7 +31295,7 @@
           <p:cNvPr id="22" name="">
             <a:extLst xmlns:a="http://schemas.openxmlformats.org/drawingml/2006/main">
               <a:ext uri="{FF2B5EF4-FFF2-40B4-BE49-F238E27FC236}">
-                <a16:creationId xmlns:a16="http://schemas.microsoft.com/office/drawing/2014/main" id="{052A6DE9-1452-44E1-8603-594762727874}"/>
+                <a16:creationId xmlns:a16="http://schemas.microsoft.com/office/drawing/2014/main" id="{3F5DB93F-7B78-4874-855A-10C3C1A39D9B}"/>
               </a:ext>
             </a:extLst>
           </p:cNvPr>
@@ -31353,7 +31353,7 @@
           <p:cNvPr id="23" name="">
             <a:extLst xmlns:a="http://schemas.openxmlformats.org/drawingml/2006/main">
               <a:ext uri="{FF2B5EF4-FFF2-40B4-BE49-F238E27FC236}">
-                <a16:creationId xmlns:a16="http://schemas.microsoft.com/office/drawing/2014/main" id="{9461DE9F-BA73-4685-AB90-8B707537D5EB}"/>
+                <a16:creationId xmlns:a16="http://schemas.microsoft.com/office/drawing/2014/main" id="{4828DCD1-A24C-4154-BD1F-042BEFA98521}"/>
               </a:ext>
             </a:extLst>
           </p:cNvPr>
@@ -31411,7 +31411,7 @@
           <p:cNvPr id="24" name="">
             <a:extLst xmlns:a="http://schemas.openxmlformats.org/drawingml/2006/main">
               <a:ext uri="{FF2B5EF4-FFF2-40B4-BE49-F238E27FC236}">
-                <a16:creationId xmlns:a16="http://schemas.microsoft.com/office/drawing/2014/main" id="{04D642C4-76A8-41DA-A823-69B79360404B}"/>
+                <a16:creationId xmlns:a16="http://schemas.microsoft.com/office/drawing/2014/main" id="{79C58561-F4D7-47AB-8C60-AD683085E33A}"/>
               </a:ext>
             </a:extLst>
           </p:cNvPr>
@@ -31469,7 +31469,7 @@
           <p:cNvPr id="25" name="">
             <a:extLst xmlns:a="http://schemas.openxmlformats.org/drawingml/2006/main">
               <a:ext uri="{FF2B5EF4-FFF2-40B4-BE49-F238E27FC236}">
-                <a16:creationId xmlns:a16="http://schemas.microsoft.com/office/drawing/2014/main" id="{A517A464-E5FE-4BCE-94E7-E82F735F7FFE}"/>
+                <a16:creationId xmlns:a16="http://schemas.microsoft.com/office/drawing/2014/main" id="{7BDB2169-81BB-4AC1-9CCA-841407B4555B}"/>
               </a:ext>
             </a:extLst>
           </p:cNvPr>
@@ -31487,7 +31487,7 @@
             <a:avLst/>
           </a:prstGeom>
           <a:solidFill xmlns:a="http://schemas.openxmlformats.org/drawingml/2006/main">
-            <a:srgbClr val="FFF4F4"/>
+            <a:srgbClr val="F7F7F7"/>
           </a:solidFill>
           <a:ln xmlns:a="http://schemas.openxmlformats.org/drawingml/2006/main" w="9525">
             <a:solidFill>
@@ -31502,7 +31502,7 @@
           <p:cNvPr id="26" name="">
             <a:extLst xmlns:a="http://schemas.openxmlformats.org/drawingml/2006/main">
               <a:ext uri="{FF2B5EF4-FFF2-40B4-BE49-F238E27FC236}">
-                <a16:creationId xmlns:a16="http://schemas.microsoft.com/office/drawing/2014/main" id="{40DB945F-07E7-490E-B974-20D0C1F4D717}"/>
+                <a16:creationId xmlns:a16="http://schemas.microsoft.com/office/drawing/2014/main" id="{C2B85A0A-C2D4-4B42-98D9-185A1E84904D}"/>
               </a:ext>
             </a:extLst>
           </p:cNvPr>
@@ -31560,7 +31560,7 @@
           <p:cNvPr id="27" name="">
             <a:extLst xmlns:a="http://schemas.openxmlformats.org/drawingml/2006/main">
               <a:ext uri="{FF2B5EF4-FFF2-40B4-BE49-F238E27FC236}">
-                <a16:creationId xmlns:a16="http://schemas.microsoft.com/office/drawing/2014/main" id="{C6173646-57C5-4A18-B179-4409649CC774}"/>
+                <a16:creationId xmlns:a16="http://schemas.microsoft.com/office/drawing/2014/main" id="{3BA11C44-2ABF-41B4-A167-2B84B5F9FAC6}"/>
               </a:ext>
             </a:extLst>
           </p:cNvPr>
@@ -31593,7 +31593,7 @@
           <p:cNvPr id="28" name="">
             <a:extLst xmlns:a="http://schemas.openxmlformats.org/drawingml/2006/main">
               <a:ext uri="{FF2B5EF4-FFF2-40B4-BE49-F238E27FC236}">
-                <a16:creationId xmlns:a16="http://schemas.microsoft.com/office/drawing/2014/main" id="{F56CEE02-EA8F-4926-ADA2-238B6CBA2092}"/>
+                <a16:creationId xmlns:a16="http://schemas.microsoft.com/office/drawing/2014/main" id="{BC558EDE-8630-4306-8357-BEC3ED5F0A80}"/>
               </a:ext>
             </a:extLst>
           </p:cNvPr>
@@ -31651,7 +31651,7 @@
           <p:cNvPr id="29" name="">
             <a:extLst xmlns:a="http://schemas.openxmlformats.org/drawingml/2006/main">
               <a:ext uri="{FF2B5EF4-FFF2-40B4-BE49-F238E27FC236}">
-                <a16:creationId xmlns:a16="http://schemas.microsoft.com/office/drawing/2014/main" id="{974BD163-0B4A-401A-A972-5E52DD0E0B42}"/>
+                <a16:creationId xmlns:a16="http://schemas.microsoft.com/office/drawing/2014/main" id="{ACADEF43-2F91-444B-8022-A621D1566348}"/>
               </a:ext>
             </a:extLst>
           </p:cNvPr>
@@ -31684,7 +31684,7 @@
           <p:cNvPr id="30" name="">
             <a:extLst xmlns:a="http://schemas.openxmlformats.org/drawingml/2006/main">
               <a:ext uri="{FF2B5EF4-FFF2-40B4-BE49-F238E27FC236}">
-                <a16:creationId xmlns:a16="http://schemas.microsoft.com/office/drawing/2014/main" id="{D84704E0-E007-454C-9289-571F4BC265B3}"/>
+                <a16:creationId xmlns:a16="http://schemas.microsoft.com/office/drawing/2014/main" id="{854D85BB-99D5-4982-8F46-05114745C603}"/>
               </a:ext>
             </a:extLst>
           </p:cNvPr>
@@ -31742,7 +31742,7 @@
           <p:cNvPr id="31" name="">
             <a:extLst xmlns:a="http://schemas.openxmlformats.org/drawingml/2006/main">
               <a:ext uri="{FF2B5EF4-FFF2-40B4-BE49-F238E27FC236}">
-                <a16:creationId xmlns:a16="http://schemas.microsoft.com/office/drawing/2014/main" id="{A501D509-DF9F-4FB4-ACE1-1D10FB47761D}"/>
+                <a16:creationId xmlns:a16="http://schemas.microsoft.com/office/drawing/2014/main" id="{71353FE5-6170-4C05-852B-D96A8293DA33}"/>
               </a:ext>
             </a:extLst>
           </p:cNvPr>
@@ -31775,7 +31775,7 @@
           <p:cNvPr id="32" name="">
             <a:extLst xmlns:a="http://schemas.openxmlformats.org/drawingml/2006/main">
               <a:ext uri="{FF2B5EF4-FFF2-40B4-BE49-F238E27FC236}">
-                <a16:creationId xmlns:a16="http://schemas.microsoft.com/office/drawing/2014/main" id="{9FB2F051-214C-4A61-A550-43EE5D5325C6}"/>
+                <a16:creationId xmlns:a16="http://schemas.microsoft.com/office/drawing/2014/main" id="{3811A713-D12E-4DEC-A75E-4DEAA228C2E2}"/>
               </a:ext>
             </a:extLst>
           </p:cNvPr>
@@ -31833,7 +31833,7 @@
           <p:cNvPr id="33" name="">
             <a:extLst xmlns:a="http://schemas.openxmlformats.org/drawingml/2006/main">
               <a:ext uri="{FF2B5EF4-FFF2-40B4-BE49-F238E27FC236}">
-                <a16:creationId xmlns:a16="http://schemas.microsoft.com/office/drawing/2014/main" id="{800B1418-5630-4886-9EE8-69097E0CC81C}"/>
+                <a16:creationId xmlns:a16="http://schemas.microsoft.com/office/drawing/2014/main" id="{31B2BEFD-540C-472E-A142-E205F48A4BCF}"/>
               </a:ext>
             </a:extLst>
           </p:cNvPr>
@@ -31866,7 +31866,7 @@
           <p:cNvPr id="34" name="">
             <a:extLst xmlns:a="http://schemas.openxmlformats.org/drawingml/2006/main">
               <a:ext uri="{FF2B5EF4-FFF2-40B4-BE49-F238E27FC236}">
-                <a16:creationId xmlns:a16="http://schemas.microsoft.com/office/drawing/2014/main" id="{45AA596F-FDBB-4ED3-A44D-69CCAB0EF2FF}"/>
+                <a16:creationId xmlns:a16="http://schemas.microsoft.com/office/drawing/2014/main" id="{E3F71F36-AFEE-45F4-BD9C-1FC7B5202C65}"/>
               </a:ext>
             </a:extLst>
           </p:cNvPr>
@@ -31924,7 +31924,7 @@
                 <a:latin typeface="Microsoft YaHei"/>
                 <a:ea typeface="Microsoft YaHei"/>
                 <a:cs typeface="Microsoft YaHei"/>
-                <a:hlinkClick xmlns:r="http://schemas.openxmlformats.org/officeDocument/2006/relationships" r:id="R2572e0e819654167"/>
+                <a:hlinkClick xmlns:r="http://schemas.openxmlformats.org/officeDocument/2006/relationships" r:id="R81691a465f954f43"/>
               </a:rPr>
               <a:t>Qoder Knowledge Engine</a:t>
             </a:r>
@@ -31936,7 +31936,7 @@
                 <a:latin typeface="Microsoft YaHei"/>
                 <a:ea typeface="Microsoft YaHei"/>
                 <a:cs typeface="Microsoft YaHei"/>
-                <a:hlinkClick xmlns:r="http://schemas.openxmlformats.org/officeDocument/2006/relationships" r:id="R23d87277e33c4678"/>
+                <a:hlinkClick xmlns:r="http://schemas.openxmlformats.org/officeDocument/2006/relationships" r:id="R9a242dafe85f42be"/>
               </a:rPr>
               <a:t> · Qoder 技术博客</a:t>
             </a:r>
@@ -31948,7 +31948,7 @@
                 <a:latin typeface="Microsoft YaHei"/>
                 <a:ea typeface="Microsoft YaHei"/>
                 <a:cs typeface="Microsoft YaHei"/>
-                <a:hlinkClick xmlns:r="http://schemas.openxmlformats.org/officeDocument/2006/relationships" r:id="R9fd1ce294a214ed0"/>
+                <a:hlinkClick xmlns:r="http://schemas.openxmlformats.org/officeDocument/2006/relationships" r:id="R670316a38d934fc5"/>
               </a:rPr>
               <a:t> · 码道 Codebase</a:t>
             </a:r>
@@ -31960,7 +31960,7 @@
           <p:cNvPr id="35" name="">
             <a:extLst xmlns:a="http://schemas.openxmlformats.org/drawingml/2006/main">
               <a:ext uri="{FF2B5EF4-FFF2-40B4-BE49-F238E27FC236}">
-                <a16:creationId xmlns:a16="http://schemas.microsoft.com/office/drawing/2014/main" id="{1C448146-C7C4-48B4-96EC-9243E6A3DCB4}"/>
+                <a16:creationId xmlns:a16="http://schemas.microsoft.com/office/drawing/2014/main" id="{AC2B4C70-3EDF-406C-9570-EF79B0F38323}"/>
               </a:ext>
             </a:extLst>
           </p:cNvPr>
@@ -32016,7 +32016,7 @@
     </p:spTree>
     <p:extLst>
       <p:ext uri="{BB962C8B-B14F-4D97-AF65-F5344CB8AC3E}">
-        <p14:creationId xmlns:p14="http://schemas.microsoft.com/office/powerpoint/2010/main" val="1671235583"/>
+        <p14:creationId xmlns:p14="http://schemas.microsoft.com/office/powerpoint/2010/main" val="2032354126"/>
       </p:ext>
     </p:extLst>
   </p:cSld>
@@ -32047,7 +32047,7 @@
           <p:cNvPr id="76" name="">
             <a:extLst xmlns:a="http://schemas.openxmlformats.org/drawingml/2006/main">
               <a:ext uri="{FF2B5EF4-FFF2-40B4-BE49-F238E27FC236}">
-                <a16:creationId xmlns:a16="http://schemas.microsoft.com/office/drawing/2014/main" id="{2578E023-906E-4160-A539-4776B7E6D326}"/>
+                <a16:creationId xmlns:a16="http://schemas.microsoft.com/office/drawing/2014/main" id="{E7905206-7DBB-4C3E-A94B-8B8BA0A8CFF8}"/>
               </a:ext>
             </a:extLst>
           </p:cNvPr>
@@ -32080,7 +32080,7 @@
           <p:cNvPr id="2" name="">
             <a:extLst xmlns:a="http://schemas.openxmlformats.org/drawingml/2006/main">
               <a:ext uri="{FF2B5EF4-FFF2-40B4-BE49-F238E27FC236}">
-                <a16:creationId xmlns:a16="http://schemas.microsoft.com/office/drawing/2014/main" id="{A6B5125F-FCF3-4680-9B1D-3F23804D2787}"/>
+                <a16:creationId xmlns:a16="http://schemas.microsoft.com/office/drawing/2014/main" id="{3886EDEE-9490-45F6-9ED4-CFDAE0BE4015}"/>
               </a:ext>
             </a:extLst>
           </p:cNvPr>
@@ -32138,7 +32138,7 @@
           <p:cNvPr id="3" name="">
             <a:extLst xmlns:a="http://schemas.openxmlformats.org/drawingml/2006/main">
               <a:ext uri="{FF2B5EF4-FFF2-40B4-BE49-F238E27FC236}">
-                <a16:creationId xmlns:a16="http://schemas.microsoft.com/office/drawing/2014/main" id="{89491CB8-1F37-4D73-9DA6-8F4F2D9EC890}"/>
+                <a16:creationId xmlns:a16="http://schemas.microsoft.com/office/drawing/2014/main" id="{F98BBC58-0BD9-43F2-ABBA-4075B2BA361C}"/>
               </a:ext>
             </a:extLst>
           </p:cNvPr>
@@ -32196,7 +32196,7 @@
           <p:cNvPr id="4" name="">
             <a:extLst xmlns:a="http://schemas.openxmlformats.org/drawingml/2006/main">
               <a:ext uri="{FF2B5EF4-FFF2-40B4-BE49-F238E27FC236}">
-                <a16:creationId xmlns:a16="http://schemas.microsoft.com/office/drawing/2014/main" id="{70B626B2-6E18-46A7-8970-CAAE9A5D7031}"/>
+                <a16:creationId xmlns:a16="http://schemas.microsoft.com/office/drawing/2014/main" id="{73637E17-9AB9-4A8C-B0A2-2E24C991BF16}"/>
               </a:ext>
             </a:extLst>
           </p:cNvPr>
@@ -32233,7 +32233,7 @@
           <p:nvPr/>
         </p:nvPicPr>
         <p:blipFill>
-          <a:blip xmlns:r="http://schemas.openxmlformats.org/officeDocument/2006/relationships" xmlns:a="http://schemas.openxmlformats.org/drawingml/2006/main" r:embed="Re87750c36dd44213"/>
+          <a:blip xmlns:r="http://schemas.openxmlformats.org/officeDocument/2006/relationships" xmlns:a="http://schemas.openxmlformats.org/drawingml/2006/main" r:embed="Re0d2058f21704b3f"/>
           <a:stretch xmlns:a="http://schemas.openxmlformats.org/drawingml/2006/main"/>
         </p:blipFill>
         <p:spPr>
@@ -32251,7 +32251,7 @@
           <p:cNvPr id="6" name="">
             <a:extLst xmlns:a="http://schemas.openxmlformats.org/drawingml/2006/main">
               <a:ext uri="{FF2B5EF4-FFF2-40B4-BE49-F238E27FC236}">
-                <a16:creationId xmlns:a16="http://schemas.microsoft.com/office/drawing/2014/main" id="{738F6747-E522-41F0-9881-EF811FA187C5}"/>
+                <a16:creationId xmlns:a16="http://schemas.microsoft.com/office/drawing/2014/main" id="{2967C351-7801-44E9-809F-613ACE6515DA}"/>
               </a:ext>
             </a:extLst>
           </p:cNvPr>
@@ -32269,7 +32269,7 @@
             <a:avLst/>
           </a:prstGeom>
           <a:solidFill xmlns:a="http://schemas.openxmlformats.org/drawingml/2006/main">
-            <a:srgbClr val="FFF4F4"/>
+            <a:srgbClr val="F7F7F7"/>
           </a:solidFill>
           <a:ln xmlns:a="http://schemas.openxmlformats.org/drawingml/2006/main" w="9525">
             <a:solidFill>
@@ -32284,7 +32284,7 @@
           <p:cNvPr id="7" name="">
             <a:extLst xmlns:a="http://schemas.openxmlformats.org/drawingml/2006/main">
               <a:ext uri="{FF2B5EF4-FFF2-40B4-BE49-F238E27FC236}">
-                <a16:creationId xmlns:a16="http://schemas.microsoft.com/office/drawing/2014/main" id="{6C1AC6BD-6341-496B-A148-D2DD77B9AAE3}"/>
+                <a16:creationId xmlns:a16="http://schemas.microsoft.com/office/drawing/2014/main" id="{5BDB8B28-1BF5-4B56-873D-9C8780ADD7B6}"/>
               </a:ext>
             </a:extLst>
           </p:cNvPr>
@@ -32342,7 +32342,7 @@
           <p:cNvPr id="8" name="">
             <a:extLst xmlns:a="http://schemas.openxmlformats.org/drawingml/2006/main">
               <a:ext uri="{FF2B5EF4-FFF2-40B4-BE49-F238E27FC236}">
-                <a16:creationId xmlns:a16="http://schemas.microsoft.com/office/drawing/2014/main" id="{62341FD9-4AC5-4EC9-9136-B2844DE89D97}"/>
+                <a16:creationId xmlns:a16="http://schemas.microsoft.com/office/drawing/2014/main" id="{9CC2D0EC-AD17-4FD5-815D-C7F0634C8FE2}"/>
               </a:ext>
             </a:extLst>
           </p:cNvPr>
@@ -32400,7 +32400,7 @@
           <p:cNvPr id="9" name="">
             <a:extLst xmlns:a="http://schemas.openxmlformats.org/drawingml/2006/main">
               <a:ext uri="{FF2B5EF4-FFF2-40B4-BE49-F238E27FC236}">
-                <a16:creationId xmlns:a16="http://schemas.microsoft.com/office/drawing/2014/main" id="{64357F31-F6C9-4600-B776-8CE93C7D585C}"/>
+                <a16:creationId xmlns:a16="http://schemas.microsoft.com/office/drawing/2014/main" id="{80358AE9-259D-46AB-A8D6-313366D5087B}"/>
               </a:ext>
             </a:extLst>
           </p:cNvPr>
@@ -32458,7 +32458,7 @@
           <p:cNvPr id="10" name="">
             <a:extLst xmlns:a="http://schemas.openxmlformats.org/drawingml/2006/main">
               <a:ext uri="{FF2B5EF4-FFF2-40B4-BE49-F238E27FC236}">
-                <a16:creationId xmlns:a16="http://schemas.microsoft.com/office/drawing/2014/main" id="{5E244E77-DA62-4784-8329-3103ECD08C8C}"/>
+                <a16:creationId xmlns:a16="http://schemas.microsoft.com/office/drawing/2014/main" id="{7C4C53E0-E315-4D8A-97B9-F58F6559AEC8}"/>
               </a:ext>
             </a:extLst>
           </p:cNvPr>
@@ -32491,7 +32491,7 @@
           <p:cNvPr id="11" name="">
             <a:extLst xmlns:a="http://schemas.openxmlformats.org/drawingml/2006/main">
               <a:ext uri="{FF2B5EF4-FFF2-40B4-BE49-F238E27FC236}">
-                <a16:creationId xmlns:a16="http://schemas.microsoft.com/office/drawing/2014/main" id="{AE1D8E49-93E0-4D42-9158-5C4415E72304}"/>
+                <a16:creationId xmlns:a16="http://schemas.microsoft.com/office/drawing/2014/main" id="{373B9189-5B7D-4695-82C1-6FA31A8A947A}"/>
               </a:ext>
             </a:extLst>
           </p:cNvPr>
@@ -32524,7 +32524,7 @@
           <p:cNvPr id="12" name="">
             <a:extLst xmlns:a="http://schemas.openxmlformats.org/drawingml/2006/main">
               <a:ext uri="{FF2B5EF4-FFF2-40B4-BE49-F238E27FC236}">
-                <a16:creationId xmlns:a16="http://schemas.microsoft.com/office/drawing/2014/main" id="{D1E4BBE9-0FB4-4B92-989A-F15BA3F406AB}"/>
+                <a16:creationId xmlns:a16="http://schemas.microsoft.com/office/drawing/2014/main" id="{8C6F5F98-A9F6-4CC9-8CF2-20E86116625E}"/>
               </a:ext>
             </a:extLst>
           </p:cNvPr>
@@ -32542,7 +32542,7 @@
             <a:avLst/>
           </a:prstGeom>
           <a:solidFill xmlns:a="http://schemas.openxmlformats.org/drawingml/2006/main">
-            <a:srgbClr val="FFF4F4"/>
+            <a:srgbClr val="F7F7F7"/>
           </a:solidFill>
           <a:ln xmlns:a="http://schemas.openxmlformats.org/drawingml/2006/main" w="9525">
             <a:solidFill>
@@ -32557,7 +32557,7 @@
           <p:cNvPr id="13" name="">
             <a:extLst xmlns:a="http://schemas.openxmlformats.org/drawingml/2006/main">
               <a:ext uri="{FF2B5EF4-FFF2-40B4-BE49-F238E27FC236}">
-                <a16:creationId xmlns:a16="http://schemas.microsoft.com/office/drawing/2014/main" id="{0C2BB5A5-0165-4F57-A36F-BCB8177E09D6}"/>
+                <a16:creationId xmlns:a16="http://schemas.microsoft.com/office/drawing/2014/main" id="{A6015E4B-33D0-41EE-8100-9DDF4196CC9C}"/>
               </a:ext>
             </a:extLst>
           </p:cNvPr>
@@ -32615,7 +32615,7 @@
           <p:cNvPr id="14" name="">
             <a:extLst xmlns:a="http://schemas.openxmlformats.org/drawingml/2006/main">
               <a:ext uri="{FF2B5EF4-FFF2-40B4-BE49-F238E27FC236}">
-                <a16:creationId xmlns:a16="http://schemas.microsoft.com/office/drawing/2014/main" id="{0840F6BF-CC6F-40A5-B76B-30C45A62E469}"/>
+                <a16:creationId xmlns:a16="http://schemas.microsoft.com/office/drawing/2014/main" id="{0AB1E226-CABD-42AE-AA6B-AC20D78406E7}"/>
               </a:ext>
             </a:extLst>
           </p:cNvPr>
@@ -32673,7 +32673,7 @@
           <p:cNvPr id="15" name="">
             <a:extLst xmlns:a="http://schemas.openxmlformats.org/drawingml/2006/main">
               <a:ext uri="{FF2B5EF4-FFF2-40B4-BE49-F238E27FC236}">
-                <a16:creationId xmlns:a16="http://schemas.microsoft.com/office/drawing/2014/main" id="{8FB7CCB9-991F-473A-BA3B-D529C711002B}"/>
+                <a16:creationId xmlns:a16="http://schemas.microsoft.com/office/drawing/2014/main" id="{3C30D246-CC97-44CE-A821-10A0EAB770DB}"/>
               </a:ext>
             </a:extLst>
           </p:cNvPr>
@@ -32731,7 +32731,7 @@
           <p:cNvPr id="16" name="">
             <a:extLst xmlns:a="http://schemas.openxmlformats.org/drawingml/2006/main">
               <a:ext uri="{FF2B5EF4-FFF2-40B4-BE49-F238E27FC236}">
-                <a16:creationId xmlns:a16="http://schemas.microsoft.com/office/drawing/2014/main" id="{F35FD05D-8FDC-4153-9351-494731F742A1}"/>
+                <a16:creationId xmlns:a16="http://schemas.microsoft.com/office/drawing/2014/main" id="{9D0B6C38-A01C-4497-A75D-887AB3A62C24}"/>
               </a:ext>
             </a:extLst>
           </p:cNvPr>
@@ -32764,7 +32764,7 @@
           <p:cNvPr id="17" name="">
             <a:extLst xmlns:a="http://schemas.openxmlformats.org/drawingml/2006/main">
               <a:ext uri="{FF2B5EF4-FFF2-40B4-BE49-F238E27FC236}">
-                <a16:creationId xmlns:a16="http://schemas.microsoft.com/office/drawing/2014/main" id="{772282D2-6BE0-41EE-9855-5F4EC0DDA1E7}"/>
+                <a16:creationId xmlns:a16="http://schemas.microsoft.com/office/drawing/2014/main" id="{D62AD3E7-CE28-4BFB-AF7E-BEA771A91069}"/>
               </a:ext>
             </a:extLst>
           </p:cNvPr>
@@ -32797,7 +32797,7 @@
           <p:cNvPr id="18" name="">
             <a:extLst xmlns:a="http://schemas.openxmlformats.org/drawingml/2006/main">
               <a:ext uri="{FF2B5EF4-FFF2-40B4-BE49-F238E27FC236}">
-                <a16:creationId xmlns:a16="http://schemas.microsoft.com/office/drawing/2014/main" id="{B30800E5-D110-4B94-AF89-451EBD9D1471}"/>
+                <a16:creationId xmlns:a16="http://schemas.microsoft.com/office/drawing/2014/main" id="{AFED870D-8D95-431E-8627-2611B5221278}"/>
               </a:ext>
             </a:extLst>
           </p:cNvPr>
@@ -32830,7 +32830,7 @@
           <p:cNvPr id="19" name="">
             <a:extLst xmlns:a="http://schemas.openxmlformats.org/drawingml/2006/main">
               <a:ext uri="{FF2B5EF4-FFF2-40B4-BE49-F238E27FC236}">
-                <a16:creationId xmlns:a16="http://schemas.microsoft.com/office/drawing/2014/main" id="{1A3F5C62-E23F-43DC-A06B-FEB6B01CA488}"/>
+                <a16:creationId xmlns:a16="http://schemas.microsoft.com/office/drawing/2014/main" id="{7D3246C2-72DF-49B7-A9FE-2D19F4FB3A83}"/>
               </a:ext>
             </a:extLst>
           </p:cNvPr>
@@ -32888,7 +32888,7 @@
           <p:cNvPr id="20" name="">
             <a:extLst xmlns:a="http://schemas.openxmlformats.org/drawingml/2006/main">
               <a:ext uri="{FF2B5EF4-FFF2-40B4-BE49-F238E27FC236}">
-                <a16:creationId xmlns:a16="http://schemas.microsoft.com/office/drawing/2014/main" id="{F37DFD74-5EA1-4BBA-B306-CFF8C52B383E}"/>
+                <a16:creationId xmlns:a16="http://schemas.microsoft.com/office/drawing/2014/main" id="{7DFF77E3-1A0E-446D-9212-AA235F2777A0}"/>
               </a:ext>
             </a:extLst>
           </p:cNvPr>
@@ -32946,7 +32946,7 @@
           <p:cNvPr id="21" name="">
             <a:extLst xmlns:a="http://schemas.openxmlformats.org/drawingml/2006/main">
               <a:ext uri="{FF2B5EF4-FFF2-40B4-BE49-F238E27FC236}">
-                <a16:creationId xmlns:a16="http://schemas.microsoft.com/office/drawing/2014/main" id="{49E9F3A8-BBDB-4513-9F00-15953683924F}"/>
+                <a16:creationId xmlns:a16="http://schemas.microsoft.com/office/drawing/2014/main" id="{AB5C6755-6A42-467E-A5B2-441ACDB4D3D2}"/>
               </a:ext>
             </a:extLst>
           </p:cNvPr>
@@ -33004,7 +33004,7 @@
           <p:cNvPr id="22" name="">
             <a:extLst xmlns:a="http://schemas.openxmlformats.org/drawingml/2006/main">
               <a:ext uri="{FF2B5EF4-FFF2-40B4-BE49-F238E27FC236}">
-                <a16:creationId xmlns:a16="http://schemas.microsoft.com/office/drawing/2014/main" id="{31761326-7026-4108-B512-B78DE95F1A23}"/>
+                <a16:creationId xmlns:a16="http://schemas.microsoft.com/office/drawing/2014/main" id="{20E6C982-97CD-429A-BE9B-BBB86D36AAE8}"/>
               </a:ext>
             </a:extLst>
           </p:cNvPr>
@@ -33037,7 +33037,7 @@
           <p:cNvPr id="23" name="">
             <a:extLst xmlns:a="http://schemas.openxmlformats.org/drawingml/2006/main">
               <a:ext uri="{FF2B5EF4-FFF2-40B4-BE49-F238E27FC236}">
-                <a16:creationId xmlns:a16="http://schemas.microsoft.com/office/drawing/2014/main" id="{1365F0A0-CAB5-422B-85FC-26F019C9ED87}"/>
+                <a16:creationId xmlns:a16="http://schemas.microsoft.com/office/drawing/2014/main" id="{FAD9A81D-6B41-4A57-92B9-0A74C385FEA3}"/>
               </a:ext>
             </a:extLst>
           </p:cNvPr>
@@ -33070,7 +33070,7 @@
           <p:cNvPr id="24" name="">
             <a:extLst xmlns:a="http://schemas.openxmlformats.org/drawingml/2006/main">
               <a:ext uri="{FF2B5EF4-FFF2-40B4-BE49-F238E27FC236}">
-                <a16:creationId xmlns:a16="http://schemas.microsoft.com/office/drawing/2014/main" id="{4EB870BE-F32C-48EB-AE72-A7FBEEEC7553}"/>
+                <a16:creationId xmlns:a16="http://schemas.microsoft.com/office/drawing/2014/main" id="{1DDE582C-5D6F-4F1E-AFED-32808C326117}"/>
               </a:ext>
             </a:extLst>
           </p:cNvPr>
@@ -33103,7 +33103,7 @@
           <p:cNvPr id="25" name="">
             <a:extLst xmlns:a="http://schemas.openxmlformats.org/drawingml/2006/main">
               <a:ext uri="{FF2B5EF4-FFF2-40B4-BE49-F238E27FC236}">
-                <a16:creationId xmlns:a16="http://schemas.microsoft.com/office/drawing/2014/main" id="{C54D1CBD-7A7A-461E-9F49-0413AD65C8D5}"/>
+                <a16:creationId xmlns:a16="http://schemas.microsoft.com/office/drawing/2014/main" id="{1D19BF24-AABE-40D5-A615-A91AA07A9545}"/>
               </a:ext>
             </a:extLst>
           </p:cNvPr>
@@ -33161,7 +33161,7 @@
           <p:cNvPr id="26" name="">
             <a:extLst xmlns:a="http://schemas.openxmlformats.org/drawingml/2006/main">
               <a:ext uri="{FF2B5EF4-FFF2-40B4-BE49-F238E27FC236}">
-                <a16:creationId xmlns:a16="http://schemas.microsoft.com/office/drawing/2014/main" id="{021335B5-6722-4C07-B9B5-FC719FCA5CBC}"/>
+                <a16:creationId xmlns:a16="http://schemas.microsoft.com/office/drawing/2014/main" id="{509EC02F-38E0-4947-BE2F-B88EFB0FDA3B}"/>
               </a:ext>
             </a:extLst>
           </p:cNvPr>
@@ -33219,7 +33219,7 @@
           <p:cNvPr id="27" name="">
             <a:extLst xmlns:a="http://schemas.openxmlformats.org/drawingml/2006/main">
               <a:ext uri="{FF2B5EF4-FFF2-40B4-BE49-F238E27FC236}">
-                <a16:creationId xmlns:a16="http://schemas.microsoft.com/office/drawing/2014/main" id="{989AB40B-5525-489E-9AAF-4CEC11C830F9}"/>
+                <a16:creationId xmlns:a16="http://schemas.microsoft.com/office/drawing/2014/main" id="{61594BE1-FF5E-41AA-A3BA-03936C020D5A}"/>
               </a:ext>
             </a:extLst>
           </p:cNvPr>
@@ -33277,7 +33277,7 @@
           <p:cNvPr id="28" name="">
             <a:extLst xmlns:a="http://schemas.openxmlformats.org/drawingml/2006/main">
               <a:ext uri="{FF2B5EF4-FFF2-40B4-BE49-F238E27FC236}">
-                <a16:creationId xmlns:a16="http://schemas.microsoft.com/office/drawing/2014/main" id="{AC236D91-03B2-4504-9A25-240200B958F2}"/>
+                <a16:creationId xmlns:a16="http://schemas.microsoft.com/office/drawing/2014/main" id="{E5804519-7D5A-40E1-9C36-ED31161DEB91}"/>
               </a:ext>
             </a:extLst>
           </p:cNvPr>
@@ -33310,7 +33310,7 @@
           <p:cNvPr id="29" name="">
             <a:extLst xmlns:a="http://schemas.openxmlformats.org/drawingml/2006/main">
               <a:ext uri="{FF2B5EF4-FFF2-40B4-BE49-F238E27FC236}">
-                <a16:creationId xmlns:a16="http://schemas.microsoft.com/office/drawing/2014/main" id="{DE370A69-377C-44EA-899C-CDE826F07F4A}"/>
+                <a16:creationId xmlns:a16="http://schemas.microsoft.com/office/drawing/2014/main" id="{3A991860-22B6-4D77-BAE4-141A5C12B084}"/>
               </a:ext>
             </a:extLst>
           </p:cNvPr>
@@ -33343,7 +33343,7 @@
           <p:cNvPr id="30" name="">
             <a:extLst xmlns:a="http://schemas.openxmlformats.org/drawingml/2006/main">
               <a:ext uri="{FF2B5EF4-FFF2-40B4-BE49-F238E27FC236}">
-                <a16:creationId xmlns:a16="http://schemas.microsoft.com/office/drawing/2014/main" id="{82F9A94E-C5F3-43A3-A29C-7FFE1F6859F8}"/>
+                <a16:creationId xmlns:a16="http://schemas.microsoft.com/office/drawing/2014/main" id="{125FEC6C-15D4-4058-A929-6FDA510B7A3C}"/>
               </a:ext>
             </a:extLst>
           </p:cNvPr>
@@ -33376,7 +33376,7 @@
           <p:cNvPr id="31" name="">
             <a:extLst xmlns:a="http://schemas.openxmlformats.org/drawingml/2006/main">
               <a:ext uri="{FF2B5EF4-FFF2-40B4-BE49-F238E27FC236}">
-                <a16:creationId xmlns:a16="http://schemas.microsoft.com/office/drawing/2014/main" id="{F6B9C863-4E82-4BAA-897D-2436591D6149}"/>
+                <a16:creationId xmlns:a16="http://schemas.microsoft.com/office/drawing/2014/main" id="{D6BB1EE3-5FD7-48F0-AB64-A33130BD1553}"/>
               </a:ext>
             </a:extLst>
           </p:cNvPr>
@@ -33434,7 +33434,7 @@
           <p:cNvPr id="32" name="">
             <a:extLst xmlns:a="http://schemas.openxmlformats.org/drawingml/2006/main">
               <a:ext uri="{FF2B5EF4-FFF2-40B4-BE49-F238E27FC236}">
-                <a16:creationId xmlns:a16="http://schemas.microsoft.com/office/drawing/2014/main" id="{7FE001DB-5F28-4EDC-ADAD-3E1C3DA6D26A}"/>
+                <a16:creationId xmlns:a16="http://schemas.microsoft.com/office/drawing/2014/main" id="{10BC2F2B-FB1E-4C51-A6A7-E0BBF25E9EA3}"/>
               </a:ext>
             </a:extLst>
           </p:cNvPr>
@@ -33492,7 +33492,7 @@
           <p:cNvPr id="33" name="">
             <a:extLst xmlns:a="http://schemas.openxmlformats.org/drawingml/2006/main">
               <a:ext uri="{FF2B5EF4-FFF2-40B4-BE49-F238E27FC236}">
-                <a16:creationId xmlns:a16="http://schemas.microsoft.com/office/drawing/2014/main" id="{7EEF542C-BAD5-4F39-9EC2-31218E8985E7}"/>
+                <a16:creationId xmlns:a16="http://schemas.microsoft.com/office/drawing/2014/main" id="{5F5D55DE-194F-4190-B901-BBC4C18705F5}"/>
               </a:ext>
             </a:extLst>
           </p:cNvPr>
@@ -33550,7 +33550,7 @@
           <p:cNvPr id="34" name="">
             <a:extLst xmlns:a="http://schemas.openxmlformats.org/drawingml/2006/main">
               <a:ext uri="{FF2B5EF4-FFF2-40B4-BE49-F238E27FC236}">
-                <a16:creationId xmlns:a16="http://schemas.microsoft.com/office/drawing/2014/main" id="{820A075E-4278-40A7-AD0C-51A102F5F3B0}"/>
+                <a16:creationId xmlns:a16="http://schemas.microsoft.com/office/drawing/2014/main" id="{7A91B887-2D05-4992-A527-E25C13A5F2D1}"/>
               </a:ext>
             </a:extLst>
           </p:cNvPr>
@@ -33583,7 +33583,7 @@
           <p:cNvPr id="35" name="">
             <a:extLst xmlns:a="http://schemas.openxmlformats.org/drawingml/2006/main">
               <a:ext uri="{FF2B5EF4-FFF2-40B4-BE49-F238E27FC236}">
-                <a16:creationId xmlns:a16="http://schemas.microsoft.com/office/drawing/2014/main" id="{9ABC3529-6471-4BDA-949D-C8EEBF8D5269}"/>
+                <a16:creationId xmlns:a16="http://schemas.microsoft.com/office/drawing/2014/main" id="{3C531C22-99B5-4B43-9373-0B4907A27999}"/>
               </a:ext>
             </a:extLst>
           </p:cNvPr>
@@ -33616,7 +33616,7 @@
           <p:cNvPr id="36" name="">
             <a:extLst xmlns:a="http://schemas.openxmlformats.org/drawingml/2006/main">
               <a:ext uri="{FF2B5EF4-FFF2-40B4-BE49-F238E27FC236}">
-                <a16:creationId xmlns:a16="http://schemas.microsoft.com/office/drawing/2014/main" id="{B44C196E-C1F3-46CD-9471-D8111244A2FC}"/>
+                <a16:creationId xmlns:a16="http://schemas.microsoft.com/office/drawing/2014/main" id="{1A558FD2-7714-4796-A4B1-33A4369A78A5}"/>
               </a:ext>
             </a:extLst>
           </p:cNvPr>
@@ -33649,7 +33649,7 @@
           <p:cNvPr id="37" name="">
             <a:extLst xmlns:a="http://schemas.openxmlformats.org/drawingml/2006/main">
               <a:ext uri="{FF2B5EF4-FFF2-40B4-BE49-F238E27FC236}">
-                <a16:creationId xmlns:a16="http://schemas.microsoft.com/office/drawing/2014/main" id="{BF0ED140-14EF-4752-8042-5463252145EB}"/>
+                <a16:creationId xmlns:a16="http://schemas.microsoft.com/office/drawing/2014/main" id="{33B54CB2-E662-4696-B02A-0A1D6D90115E}"/>
               </a:ext>
             </a:extLst>
           </p:cNvPr>
@@ -33707,7 +33707,7 @@
           <p:cNvPr id="38" name="">
             <a:extLst xmlns:a="http://schemas.openxmlformats.org/drawingml/2006/main">
               <a:ext uri="{FF2B5EF4-FFF2-40B4-BE49-F238E27FC236}">
-                <a16:creationId xmlns:a16="http://schemas.microsoft.com/office/drawing/2014/main" id="{D7F48A2D-7D3F-4514-8011-6969EA7E404D}"/>
+                <a16:creationId xmlns:a16="http://schemas.microsoft.com/office/drawing/2014/main" id="{28EB4DDD-F983-43FB-8FF4-B2D42244C794}"/>
               </a:ext>
             </a:extLst>
           </p:cNvPr>
@@ -33765,7 +33765,7 @@
           <p:cNvPr id="39" name="">
             <a:extLst xmlns:a="http://schemas.openxmlformats.org/drawingml/2006/main">
               <a:ext uri="{FF2B5EF4-FFF2-40B4-BE49-F238E27FC236}">
-                <a16:creationId xmlns:a16="http://schemas.microsoft.com/office/drawing/2014/main" id="{B1A02E33-9383-4FBA-A0F2-3FB6DAF85F2B}"/>
+                <a16:creationId xmlns:a16="http://schemas.microsoft.com/office/drawing/2014/main" id="{49C46658-344A-430E-BECF-BF33780F242E}"/>
               </a:ext>
             </a:extLst>
           </p:cNvPr>
@@ -33823,7 +33823,7 @@
           <p:cNvPr id="40" name="">
             <a:extLst xmlns:a="http://schemas.openxmlformats.org/drawingml/2006/main">
               <a:ext uri="{FF2B5EF4-FFF2-40B4-BE49-F238E27FC236}">
-                <a16:creationId xmlns:a16="http://schemas.microsoft.com/office/drawing/2014/main" id="{6451157D-CC2F-423C-A569-88923B6E03BF}"/>
+                <a16:creationId xmlns:a16="http://schemas.microsoft.com/office/drawing/2014/main" id="{6F1C2E1D-7373-4476-A5FD-BA0BF46ADB54}"/>
               </a:ext>
             </a:extLst>
           </p:cNvPr>
@@ -33856,7 +33856,7 @@
           <p:cNvPr id="41" name="">
             <a:extLst xmlns:a="http://schemas.openxmlformats.org/drawingml/2006/main">
               <a:ext uri="{FF2B5EF4-FFF2-40B4-BE49-F238E27FC236}">
-                <a16:creationId xmlns:a16="http://schemas.microsoft.com/office/drawing/2014/main" id="{E158DE19-51B3-4DAB-8F50-0FF213F63D9A}"/>
+                <a16:creationId xmlns:a16="http://schemas.microsoft.com/office/drawing/2014/main" id="{C16163C2-C63A-4B6E-A562-4F979E7441A2}"/>
               </a:ext>
             </a:extLst>
           </p:cNvPr>
@@ -33914,7 +33914,7 @@
           <p:cNvPr id="42" name="">
             <a:extLst xmlns:a="http://schemas.openxmlformats.org/drawingml/2006/main">
               <a:ext uri="{FF2B5EF4-FFF2-40B4-BE49-F238E27FC236}">
-                <a16:creationId xmlns:a16="http://schemas.microsoft.com/office/drawing/2014/main" id="{003F23E3-05CC-433F-B5A1-A0EFE944E67C}"/>
+                <a16:creationId xmlns:a16="http://schemas.microsoft.com/office/drawing/2014/main" id="{AFA40726-1DB4-4D31-B6DA-309EBC3C5C04}"/>
               </a:ext>
             </a:extLst>
           </p:cNvPr>
@@ -33947,7 +33947,7 @@
           <p:cNvPr id="43" name="">
             <a:extLst xmlns:a="http://schemas.openxmlformats.org/drawingml/2006/main">
               <a:ext uri="{FF2B5EF4-FFF2-40B4-BE49-F238E27FC236}">
-                <a16:creationId xmlns:a16="http://schemas.microsoft.com/office/drawing/2014/main" id="{29B8D281-275D-4ACB-BA59-3581E42E4EC2}"/>
+                <a16:creationId xmlns:a16="http://schemas.microsoft.com/office/drawing/2014/main" id="{2BD4301C-55A8-4F73-A9E8-0247EA4D64CD}"/>
               </a:ext>
             </a:extLst>
           </p:cNvPr>
@@ -34005,7 +34005,7 @@
           <p:cNvPr id="44" name="">
             <a:extLst xmlns:a="http://schemas.openxmlformats.org/drawingml/2006/main">
               <a:ext uri="{FF2B5EF4-FFF2-40B4-BE49-F238E27FC236}">
-                <a16:creationId xmlns:a16="http://schemas.microsoft.com/office/drawing/2014/main" id="{8ED306B6-D37B-4EA5-A47F-D37A99A47DE9}"/>
+                <a16:creationId xmlns:a16="http://schemas.microsoft.com/office/drawing/2014/main" id="{154C7E14-D6BA-4E29-B748-921BA518638E}"/>
               </a:ext>
             </a:extLst>
           </p:cNvPr>
@@ -34038,7 +34038,7 @@
           <p:cNvPr id="45" name="">
             <a:extLst xmlns:a="http://schemas.openxmlformats.org/drawingml/2006/main">
               <a:ext uri="{FF2B5EF4-FFF2-40B4-BE49-F238E27FC236}">
-                <a16:creationId xmlns:a16="http://schemas.microsoft.com/office/drawing/2014/main" id="{B9260BB5-CE78-4BEB-8E4D-AB58E3CD0634}"/>
+                <a16:creationId xmlns:a16="http://schemas.microsoft.com/office/drawing/2014/main" id="{3682B670-9A01-42D8-B448-BE738BBEBB8A}"/>
               </a:ext>
             </a:extLst>
           </p:cNvPr>
@@ -34096,7 +34096,7 @@
           <p:cNvPr id="46" name="">
             <a:extLst xmlns:a="http://schemas.openxmlformats.org/drawingml/2006/main">
               <a:ext uri="{FF2B5EF4-FFF2-40B4-BE49-F238E27FC236}">
-                <a16:creationId xmlns:a16="http://schemas.microsoft.com/office/drawing/2014/main" id="{CCEB6D51-A08B-4860-8F96-C670D6AE9C96}"/>
+                <a16:creationId xmlns:a16="http://schemas.microsoft.com/office/drawing/2014/main" id="{069B2193-B6A9-4CD7-9381-AC8408DD1896}"/>
               </a:ext>
             </a:extLst>
           </p:cNvPr>
@@ -34129,7 +34129,7 @@
           <p:cNvPr id="47" name="">
             <a:extLst xmlns:a="http://schemas.openxmlformats.org/drawingml/2006/main">
               <a:ext uri="{FF2B5EF4-FFF2-40B4-BE49-F238E27FC236}">
-                <a16:creationId xmlns:a16="http://schemas.microsoft.com/office/drawing/2014/main" id="{17879169-441F-4DCC-BA7B-BC7843176F98}"/>
+                <a16:creationId xmlns:a16="http://schemas.microsoft.com/office/drawing/2014/main" id="{AABDEE7F-7142-4B07-AF1C-478781512061}"/>
               </a:ext>
             </a:extLst>
           </p:cNvPr>
@@ -34187,7 +34187,7 @@
           <p:cNvPr id="48" name="">
             <a:extLst xmlns:a="http://schemas.openxmlformats.org/drawingml/2006/main">
               <a:ext uri="{FF2B5EF4-FFF2-40B4-BE49-F238E27FC236}">
-                <a16:creationId xmlns:a16="http://schemas.microsoft.com/office/drawing/2014/main" id="{D7073438-4AF4-4A43-B130-3DF228112284}"/>
+                <a16:creationId xmlns:a16="http://schemas.microsoft.com/office/drawing/2014/main" id="{03D680EA-BB36-4B7A-B49F-D74AF4C8FA51}"/>
               </a:ext>
             </a:extLst>
           </p:cNvPr>
@@ -34220,7 +34220,7 @@
           <p:cNvPr id="49" name="">
             <a:extLst xmlns:a="http://schemas.openxmlformats.org/drawingml/2006/main">
               <a:ext uri="{FF2B5EF4-FFF2-40B4-BE49-F238E27FC236}">
-                <a16:creationId xmlns:a16="http://schemas.microsoft.com/office/drawing/2014/main" id="{8E17424D-6A22-44C9-A93E-F17B73E0DB8C}"/>
+                <a16:creationId xmlns:a16="http://schemas.microsoft.com/office/drawing/2014/main" id="{8FDACE77-19A4-4085-B0AB-092414F0A76C}"/>
               </a:ext>
             </a:extLst>
           </p:cNvPr>
@@ -34278,7 +34278,7 @@
           <p:cNvPr id="50" name="">
             <a:extLst xmlns:a="http://schemas.openxmlformats.org/drawingml/2006/main">
               <a:ext uri="{FF2B5EF4-FFF2-40B4-BE49-F238E27FC236}">
-                <a16:creationId xmlns:a16="http://schemas.microsoft.com/office/drawing/2014/main" id="{560349D6-A842-4EE4-8326-81C24D6A97A4}"/>
+                <a16:creationId xmlns:a16="http://schemas.microsoft.com/office/drawing/2014/main" id="{C78EA6A6-A8AA-4C61-B586-015433A55C26}"/>
               </a:ext>
             </a:extLst>
           </p:cNvPr>
@@ -34311,7 +34311,7 @@
           <p:cNvPr id="51" name="">
             <a:extLst xmlns:a="http://schemas.openxmlformats.org/drawingml/2006/main">
               <a:ext uri="{FF2B5EF4-FFF2-40B4-BE49-F238E27FC236}">
-                <a16:creationId xmlns:a16="http://schemas.microsoft.com/office/drawing/2014/main" id="{1479161F-EC7C-457A-B810-D4DCA9EBC886}"/>
+                <a16:creationId xmlns:a16="http://schemas.microsoft.com/office/drawing/2014/main" id="{1F8DA5CA-E83F-4874-978C-15B0C8DE836B}"/>
               </a:ext>
             </a:extLst>
           </p:cNvPr>
@@ -34369,7 +34369,7 @@
           <p:cNvPr id="52" name="">
             <a:extLst xmlns:a="http://schemas.openxmlformats.org/drawingml/2006/main">
               <a:ext uri="{FF2B5EF4-FFF2-40B4-BE49-F238E27FC236}">
-                <a16:creationId xmlns:a16="http://schemas.microsoft.com/office/drawing/2014/main" id="{01543C93-BA5F-4BCB-B4FC-8DC93C7E20A9}"/>
+                <a16:creationId xmlns:a16="http://schemas.microsoft.com/office/drawing/2014/main" id="{DEE13644-9F22-4EBB-95A9-165A5A0B0C9D}"/>
               </a:ext>
             </a:extLst>
           </p:cNvPr>
@@ -34402,7 +34402,7 @@
           <p:cNvPr id="53" name="">
             <a:extLst xmlns:a="http://schemas.openxmlformats.org/drawingml/2006/main">
               <a:ext uri="{FF2B5EF4-FFF2-40B4-BE49-F238E27FC236}">
-                <a16:creationId xmlns:a16="http://schemas.microsoft.com/office/drawing/2014/main" id="{C93A8593-708F-4EB9-9E06-D1022F13AEC1}"/>
+                <a16:creationId xmlns:a16="http://schemas.microsoft.com/office/drawing/2014/main" id="{0FF89BB1-B7C3-489F-855E-C6D0FDCAD2BC}"/>
               </a:ext>
             </a:extLst>
           </p:cNvPr>
@@ -34460,7 +34460,7 @@
           <p:cNvPr id="54" name="">
             <a:extLst xmlns:a="http://schemas.openxmlformats.org/drawingml/2006/main">
               <a:ext uri="{FF2B5EF4-FFF2-40B4-BE49-F238E27FC236}">
-                <a16:creationId xmlns:a16="http://schemas.microsoft.com/office/drawing/2014/main" id="{30DB45BE-08FD-4037-A29D-7FDF1B19C7EF}"/>
+                <a16:creationId xmlns:a16="http://schemas.microsoft.com/office/drawing/2014/main" id="{17AC3C79-1541-4BB6-B433-D6B5914245C7}"/>
               </a:ext>
             </a:extLst>
           </p:cNvPr>
@@ -34493,7 +34493,7 @@
           <p:cNvPr id="55" name="">
             <a:extLst xmlns:a="http://schemas.openxmlformats.org/drawingml/2006/main">
               <a:ext uri="{FF2B5EF4-FFF2-40B4-BE49-F238E27FC236}">
-                <a16:creationId xmlns:a16="http://schemas.microsoft.com/office/drawing/2014/main" id="{D2F2730E-0095-4337-BB8B-6F0F9E737394}"/>
+                <a16:creationId xmlns:a16="http://schemas.microsoft.com/office/drawing/2014/main" id="{48C22B46-8487-4081-8490-2257B14E4652}"/>
               </a:ext>
             </a:extLst>
           </p:cNvPr>
@@ -34551,7 +34551,7 @@
           <p:cNvPr id="56" name="">
             <a:extLst xmlns:a="http://schemas.openxmlformats.org/drawingml/2006/main">
               <a:ext uri="{FF2B5EF4-FFF2-40B4-BE49-F238E27FC236}">
-                <a16:creationId xmlns:a16="http://schemas.microsoft.com/office/drawing/2014/main" id="{EF4D6691-60FA-46A5-8712-08AF2796D467}"/>
+                <a16:creationId xmlns:a16="http://schemas.microsoft.com/office/drawing/2014/main" id="{1E4061F2-F317-4C9E-8071-7FE6316FE429}"/>
               </a:ext>
             </a:extLst>
           </p:cNvPr>
@@ -34584,7 +34584,7 @@
           <p:cNvPr id="57" name="">
             <a:extLst xmlns:a="http://schemas.openxmlformats.org/drawingml/2006/main">
               <a:ext uri="{FF2B5EF4-FFF2-40B4-BE49-F238E27FC236}">
-                <a16:creationId xmlns:a16="http://schemas.microsoft.com/office/drawing/2014/main" id="{9ABD1C83-88D3-4270-A8CF-BBB5E0628812}"/>
+                <a16:creationId xmlns:a16="http://schemas.microsoft.com/office/drawing/2014/main" id="{1DF44773-3AE9-4C60-AF43-F64E4695D3DC}"/>
               </a:ext>
             </a:extLst>
           </p:cNvPr>
@@ -34642,7 +34642,7 @@
           <p:cNvPr id="58" name="">
             <a:extLst xmlns:a="http://schemas.openxmlformats.org/drawingml/2006/main">
               <a:ext uri="{FF2B5EF4-FFF2-40B4-BE49-F238E27FC236}">
-                <a16:creationId xmlns:a16="http://schemas.microsoft.com/office/drawing/2014/main" id="{EA5E8094-6D4A-4C9D-B160-36491AF7A5A2}"/>
+                <a16:creationId xmlns:a16="http://schemas.microsoft.com/office/drawing/2014/main" id="{EFBC6124-636A-4CB0-9E7B-5992A58C81EE}"/>
               </a:ext>
             </a:extLst>
           </p:cNvPr>
@@ -34675,7 +34675,7 @@
           <p:cNvPr id="59" name="">
             <a:extLst xmlns:a="http://schemas.openxmlformats.org/drawingml/2006/main">
               <a:ext uri="{FF2B5EF4-FFF2-40B4-BE49-F238E27FC236}">
-                <a16:creationId xmlns:a16="http://schemas.microsoft.com/office/drawing/2014/main" id="{8ECFF872-36D4-47C2-87BF-EEF689F0197D}"/>
+                <a16:creationId xmlns:a16="http://schemas.microsoft.com/office/drawing/2014/main" id="{DDF59240-58BF-44E4-AD30-976ABD93ED24}"/>
               </a:ext>
             </a:extLst>
           </p:cNvPr>
@@ -34733,7 +34733,7 @@
           <p:cNvPr id="60" name="">
             <a:extLst xmlns:a="http://schemas.openxmlformats.org/drawingml/2006/main">
               <a:ext uri="{FF2B5EF4-FFF2-40B4-BE49-F238E27FC236}">
-                <a16:creationId xmlns:a16="http://schemas.microsoft.com/office/drawing/2014/main" id="{49821675-8CEE-48BB-9F8A-A1CB0B3B4C49}"/>
+                <a16:creationId xmlns:a16="http://schemas.microsoft.com/office/drawing/2014/main" id="{1C01FFE1-5079-430F-8A4C-28C75C55EF25}"/>
               </a:ext>
             </a:extLst>
           </p:cNvPr>
@@ -34766,7 +34766,7 @@
           <p:cNvPr id="61" name="">
             <a:extLst xmlns:a="http://schemas.openxmlformats.org/drawingml/2006/main">
               <a:ext uri="{FF2B5EF4-FFF2-40B4-BE49-F238E27FC236}">
-                <a16:creationId xmlns:a16="http://schemas.microsoft.com/office/drawing/2014/main" id="{10DDEFE1-2CCB-403B-8F48-DEDA8A6EDDC1}"/>
+                <a16:creationId xmlns:a16="http://schemas.microsoft.com/office/drawing/2014/main" id="{E76B2686-93B4-422D-AFB8-540FF7BD1389}"/>
               </a:ext>
             </a:extLst>
           </p:cNvPr>
@@ -34824,7 +34824,7 @@
           <p:cNvPr id="62" name="">
             <a:extLst xmlns:a="http://schemas.openxmlformats.org/drawingml/2006/main">
               <a:ext uri="{FF2B5EF4-FFF2-40B4-BE49-F238E27FC236}">
-                <a16:creationId xmlns:a16="http://schemas.microsoft.com/office/drawing/2014/main" id="{360286FA-7A59-4297-81D6-F7928903D410}"/>
+                <a16:creationId xmlns:a16="http://schemas.microsoft.com/office/drawing/2014/main" id="{6263FCF2-E393-463A-9E7D-F76092DDF01F}"/>
               </a:ext>
             </a:extLst>
           </p:cNvPr>
@@ -34857,7 +34857,7 @@
           <p:cNvPr id="63" name="">
             <a:extLst xmlns:a="http://schemas.openxmlformats.org/drawingml/2006/main">
               <a:ext uri="{FF2B5EF4-FFF2-40B4-BE49-F238E27FC236}">
-                <a16:creationId xmlns:a16="http://schemas.microsoft.com/office/drawing/2014/main" id="{0E9BB9C5-6EE5-4036-989F-E0162D2C1B7F}"/>
+                <a16:creationId xmlns:a16="http://schemas.microsoft.com/office/drawing/2014/main" id="{D1B35638-2D2C-4B3C-ADBA-FA9FCAB34356}"/>
               </a:ext>
             </a:extLst>
           </p:cNvPr>
@@ -34915,7 +34915,7 @@
           <p:cNvPr id="64" name="">
             <a:extLst xmlns:a="http://schemas.openxmlformats.org/drawingml/2006/main">
               <a:ext uri="{FF2B5EF4-FFF2-40B4-BE49-F238E27FC236}">
-                <a16:creationId xmlns:a16="http://schemas.microsoft.com/office/drawing/2014/main" id="{3AEA0D89-3A89-4112-A00F-907CC6E318C3}"/>
+                <a16:creationId xmlns:a16="http://schemas.microsoft.com/office/drawing/2014/main" id="{E8980326-7FA5-49CA-AB67-CE762A8D26AC}"/>
               </a:ext>
             </a:extLst>
           </p:cNvPr>
@@ -34948,7 +34948,7 @@
           <p:cNvPr id="65" name="">
             <a:extLst xmlns:a="http://schemas.openxmlformats.org/drawingml/2006/main">
               <a:ext uri="{FF2B5EF4-FFF2-40B4-BE49-F238E27FC236}">
-                <a16:creationId xmlns:a16="http://schemas.microsoft.com/office/drawing/2014/main" id="{091156BA-686F-49A7-AAFB-DBAF8A3820B9}"/>
+                <a16:creationId xmlns:a16="http://schemas.microsoft.com/office/drawing/2014/main" id="{25F96A08-0B2A-40AA-9F98-0CB7310F95CF}"/>
               </a:ext>
             </a:extLst>
           </p:cNvPr>
@@ -35006,7 +35006,7 @@
           <p:cNvPr id="66" name="">
             <a:extLst xmlns:a="http://schemas.openxmlformats.org/drawingml/2006/main">
               <a:ext uri="{FF2B5EF4-FFF2-40B4-BE49-F238E27FC236}">
-                <a16:creationId xmlns:a16="http://schemas.microsoft.com/office/drawing/2014/main" id="{6A9458BA-9C5B-4262-A1C7-9FB5B8CAC17C}"/>
+                <a16:creationId xmlns:a16="http://schemas.microsoft.com/office/drawing/2014/main" id="{EA0CF59B-557E-4CD5-B9DF-158B137740D6}"/>
               </a:ext>
             </a:extLst>
           </p:cNvPr>
@@ -35039,7 +35039,7 @@
           <p:cNvPr id="67" name="">
             <a:extLst xmlns:a="http://schemas.openxmlformats.org/drawingml/2006/main">
               <a:ext uri="{FF2B5EF4-FFF2-40B4-BE49-F238E27FC236}">
-                <a16:creationId xmlns:a16="http://schemas.microsoft.com/office/drawing/2014/main" id="{0086C493-C343-4E21-9DDB-D7C960CF5043}"/>
+                <a16:creationId xmlns:a16="http://schemas.microsoft.com/office/drawing/2014/main" id="{016C4C33-C9A3-4960-8ACE-A832E723D4C9}"/>
               </a:ext>
             </a:extLst>
           </p:cNvPr>
@@ -35097,7 +35097,7 @@
           <p:cNvPr id="68" name="">
             <a:extLst xmlns:a="http://schemas.openxmlformats.org/drawingml/2006/main">
               <a:ext uri="{FF2B5EF4-FFF2-40B4-BE49-F238E27FC236}">
-                <a16:creationId xmlns:a16="http://schemas.microsoft.com/office/drawing/2014/main" id="{FA4BC926-8E1B-4D02-BA82-F6C88AAB2828}"/>
+                <a16:creationId xmlns:a16="http://schemas.microsoft.com/office/drawing/2014/main" id="{9AE07535-6758-4D00-AFD8-E08A56FEEED0}"/>
               </a:ext>
             </a:extLst>
           </p:cNvPr>
@@ -35130,7 +35130,7 @@
           <p:cNvPr id="69" name="">
             <a:extLst xmlns:a="http://schemas.openxmlformats.org/drawingml/2006/main">
               <a:ext uri="{FF2B5EF4-FFF2-40B4-BE49-F238E27FC236}">
-                <a16:creationId xmlns:a16="http://schemas.microsoft.com/office/drawing/2014/main" id="{5404AE9F-ECA2-4B64-93C2-51A81A898895}"/>
+                <a16:creationId xmlns:a16="http://schemas.microsoft.com/office/drawing/2014/main" id="{0D362F51-12ED-4795-AAA3-CC3706A34AF7}"/>
               </a:ext>
             </a:extLst>
           </p:cNvPr>
@@ -35188,7 +35188,7 @@
           <p:cNvPr id="70" name="">
             <a:extLst xmlns:a="http://schemas.openxmlformats.org/drawingml/2006/main">
               <a:ext uri="{FF2B5EF4-FFF2-40B4-BE49-F238E27FC236}">
-                <a16:creationId xmlns:a16="http://schemas.microsoft.com/office/drawing/2014/main" id="{0B6DCA00-F5D8-4D45-AA91-CD589062572C}"/>
+                <a16:creationId xmlns:a16="http://schemas.microsoft.com/office/drawing/2014/main" id="{0655E810-A9A9-45C3-8572-5D4A90AF1349}"/>
               </a:ext>
             </a:extLst>
           </p:cNvPr>
@@ -35221,7 +35221,7 @@
           <p:cNvPr id="71" name="">
             <a:extLst xmlns:a="http://schemas.openxmlformats.org/drawingml/2006/main">
               <a:ext uri="{FF2B5EF4-FFF2-40B4-BE49-F238E27FC236}">
-                <a16:creationId xmlns:a16="http://schemas.microsoft.com/office/drawing/2014/main" id="{89F8D725-A55D-4498-9A90-C1E9315423C3}"/>
+                <a16:creationId xmlns:a16="http://schemas.microsoft.com/office/drawing/2014/main" id="{59F170C9-A6A7-45D3-959B-BCA9397BD1FA}"/>
               </a:ext>
             </a:extLst>
           </p:cNvPr>
@@ -35279,7 +35279,7 @@
           <p:cNvPr id="72" name="">
             <a:extLst xmlns:a="http://schemas.openxmlformats.org/drawingml/2006/main">
               <a:ext uri="{FF2B5EF4-FFF2-40B4-BE49-F238E27FC236}">
-                <a16:creationId xmlns:a16="http://schemas.microsoft.com/office/drawing/2014/main" id="{7F9B5812-95AD-41A4-8FAF-C7E45EA74E3B}"/>
+                <a16:creationId xmlns:a16="http://schemas.microsoft.com/office/drawing/2014/main" id="{FBE3C792-5DBB-4FD5-9029-5D5C6F684932}"/>
               </a:ext>
             </a:extLst>
           </p:cNvPr>
@@ -35337,7 +35337,7 @@
           <p:cNvPr id="73" name="">
             <a:extLst xmlns:a="http://schemas.openxmlformats.org/drawingml/2006/main">
               <a:ext uri="{FF2B5EF4-FFF2-40B4-BE49-F238E27FC236}">
-                <a16:creationId xmlns:a16="http://schemas.microsoft.com/office/drawing/2014/main" id="{37ABBE2D-3C67-4558-83AE-F9935DCEA72D}"/>
+                <a16:creationId xmlns:a16="http://schemas.microsoft.com/office/drawing/2014/main" id="{6E9D188E-A43E-4984-8E8E-88BFF7765C02}"/>
               </a:ext>
             </a:extLst>
           </p:cNvPr>
@@ -35370,7 +35370,7 @@
           <p:cNvPr id="74" name="">
             <a:extLst xmlns:a="http://schemas.openxmlformats.org/drawingml/2006/main">
               <a:ext uri="{FF2B5EF4-FFF2-40B4-BE49-F238E27FC236}">
-                <a16:creationId xmlns:a16="http://schemas.microsoft.com/office/drawing/2014/main" id="{1436A383-2FC4-458B-9426-F36625403DAD}"/>
+                <a16:creationId xmlns:a16="http://schemas.microsoft.com/office/drawing/2014/main" id="{6F5C917A-F254-46DC-B7D6-3FD8AC54A26A}"/>
               </a:ext>
             </a:extLst>
           </p:cNvPr>
@@ -35428,7 +35428,7 @@
                 <a:latin typeface="Microsoft YaHei"/>
                 <a:ea typeface="Microsoft YaHei"/>
                 <a:cs typeface="Microsoft YaHei"/>
-                <a:hlinkClick xmlns:r="http://schemas.openxmlformats.org/officeDocument/2006/relationships" r:id="R37927974316a4e05"/>
+                <a:hlinkClick xmlns:r="http://schemas.openxmlformats.org/officeDocument/2006/relationships" r:id="Reaaa1f06901e4018"/>
               </a:rPr>
               <a:t>Qoder 存量重写案例</a:t>
             </a:r>
@@ -35440,7 +35440,7 @@
                 <a:latin typeface="Microsoft YaHei"/>
                 <a:ea typeface="Microsoft YaHei"/>
                 <a:cs typeface="Microsoft YaHei"/>
-                <a:hlinkClick xmlns:r="http://schemas.openxmlformats.org/officeDocument/2006/relationships" r:id="R5f463cd46d8e4ac4"/>
+                <a:hlinkClick xmlns:r="http://schemas.openxmlformats.org/officeDocument/2006/relationships" r:id="Rc694977b4580495d"/>
               </a:rPr>
               <a:t> · Quest Worktree</a:t>
             </a:r>
@@ -35452,7 +35452,7 @@
           <p:cNvPr id="75" name="">
             <a:extLst xmlns:a="http://schemas.openxmlformats.org/drawingml/2006/main">
               <a:ext uri="{FF2B5EF4-FFF2-40B4-BE49-F238E27FC236}">
-                <a16:creationId xmlns:a16="http://schemas.microsoft.com/office/drawing/2014/main" id="{6A81822F-F6EC-493A-B071-D7E3FB330C1E}"/>
+                <a16:creationId xmlns:a16="http://schemas.microsoft.com/office/drawing/2014/main" id="{991C2B91-E3E4-4C2F-A141-323BAE3EC1F1}"/>
               </a:ext>
             </a:extLst>
           </p:cNvPr>
@@ -35508,7 +35508,7 @@
     </p:spTree>
     <p:extLst>
       <p:ext uri="{BB962C8B-B14F-4D97-AF65-F5344CB8AC3E}">
-        <p14:creationId xmlns:p14="http://schemas.microsoft.com/office/powerpoint/2010/main" val="1520175285"/>
+        <p14:creationId xmlns:p14="http://schemas.microsoft.com/office/powerpoint/2010/main" val="2140017438"/>
       </p:ext>
     </p:extLst>
   </p:cSld>
@@ -35539,7 +35539,7 @@
           <p:cNvPr id="82" name="">
             <a:extLst xmlns:a="http://schemas.openxmlformats.org/drawingml/2006/main">
               <a:ext uri="{FF2B5EF4-FFF2-40B4-BE49-F238E27FC236}">
-                <a16:creationId xmlns:a16="http://schemas.microsoft.com/office/drawing/2014/main" id="{8EA1A7B4-6030-4193-AEED-45D9CFEEE750}"/>
+                <a16:creationId xmlns:a16="http://schemas.microsoft.com/office/drawing/2014/main" id="{4217BD4C-7DBC-420F-859D-CF5B372C8C39}"/>
               </a:ext>
             </a:extLst>
           </p:cNvPr>
@@ -35572,7 +35572,7 @@
           <p:cNvPr id="2" name="">
             <a:extLst xmlns:a="http://schemas.openxmlformats.org/drawingml/2006/main">
               <a:ext uri="{FF2B5EF4-FFF2-40B4-BE49-F238E27FC236}">
-                <a16:creationId xmlns:a16="http://schemas.microsoft.com/office/drawing/2014/main" id="{197176F6-3D34-4C4A-861F-1D5E759DFCB2}"/>
+                <a16:creationId xmlns:a16="http://schemas.microsoft.com/office/drawing/2014/main" id="{AF47FCB0-DD2F-46F5-BD91-EBE191F03EBA}"/>
               </a:ext>
             </a:extLst>
           </p:cNvPr>
@@ -35630,7 +35630,7 @@
           <p:cNvPr id="3" name="">
             <a:extLst xmlns:a="http://schemas.openxmlformats.org/drawingml/2006/main">
               <a:ext uri="{FF2B5EF4-FFF2-40B4-BE49-F238E27FC236}">
-                <a16:creationId xmlns:a16="http://schemas.microsoft.com/office/drawing/2014/main" id="{A9EAB300-F26C-4C48-84F3-86DA99D5CFA9}"/>
+                <a16:creationId xmlns:a16="http://schemas.microsoft.com/office/drawing/2014/main" id="{E5C8B1A4-35F4-44A4-911E-2FE72082CAEC}"/>
               </a:ext>
             </a:extLst>
           </p:cNvPr>
@@ -35688,7 +35688,7 @@
           <p:cNvPr id="4" name="">
             <a:extLst xmlns:a="http://schemas.openxmlformats.org/drawingml/2006/main">
               <a:ext uri="{FF2B5EF4-FFF2-40B4-BE49-F238E27FC236}">
-                <a16:creationId xmlns:a16="http://schemas.microsoft.com/office/drawing/2014/main" id="{64EBEFD6-2E05-4CC7-829B-CDE0DF15801A}"/>
+                <a16:creationId xmlns:a16="http://schemas.microsoft.com/office/drawing/2014/main" id="{9F22791C-6ED8-487F-B592-8410DB98E7A5}"/>
               </a:ext>
             </a:extLst>
           </p:cNvPr>
@@ -35721,7 +35721,7 @@
           <p:cNvPr id="5" name="">
             <a:extLst xmlns:a="http://schemas.openxmlformats.org/drawingml/2006/main">
               <a:ext uri="{FF2B5EF4-FFF2-40B4-BE49-F238E27FC236}">
-                <a16:creationId xmlns:a16="http://schemas.microsoft.com/office/drawing/2014/main" id="{F00C9C59-AFBC-4830-87F0-BBC9B4149AD4}"/>
+                <a16:creationId xmlns:a16="http://schemas.microsoft.com/office/drawing/2014/main" id="{3034675E-C11B-4F2A-9FE5-2CB31961874F}"/>
               </a:ext>
             </a:extLst>
           </p:cNvPr>
@@ -35779,7 +35779,7 @@
           <p:cNvPr id="6" name="">
             <a:extLst xmlns:a="http://schemas.openxmlformats.org/drawingml/2006/main">
               <a:ext uri="{FF2B5EF4-FFF2-40B4-BE49-F238E27FC236}">
-                <a16:creationId xmlns:a16="http://schemas.microsoft.com/office/drawing/2014/main" id="{84EDC7DF-80F0-4E4F-B5BE-8C847C854A4F}"/>
+                <a16:creationId xmlns:a16="http://schemas.microsoft.com/office/drawing/2014/main" id="{71DDFEBD-8106-43C1-B879-1ADDDA9F6245}"/>
               </a:ext>
             </a:extLst>
           </p:cNvPr>
@@ -35837,7 +35837,7 @@
           <p:cNvPr id="7" name="">
             <a:extLst xmlns:a="http://schemas.openxmlformats.org/drawingml/2006/main">
               <a:ext uri="{FF2B5EF4-FFF2-40B4-BE49-F238E27FC236}">
-                <a16:creationId xmlns:a16="http://schemas.microsoft.com/office/drawing/2014/main" id="{16A56164-0EB6-423D-BF05-E04DB9444C87}"/>
+                <a16:creationId xmlns:a16="http://schemas.microsoft.com/office/drawing/2014/main" id="{D3B9373A-EA9C-494F-B569-E517BDD21FD7}"/>
               </a:ext>
             </a:extLst>
           </p:cNvPr>
@@ -35870,7 +35870,7 @@
           <p:cNvPr id="8" name="">
             <a:extLst xmlns:a="http://schemas.openxmlformats.org/drawingml/2006/main">
               <a:ext uri="{FF2B5EF4-FFF2-40B4-BE49-F238E27FC236}">
-                <a16:creationId xmlns:a16="http://schemas.microsoft.com/office/drawing/2014/main" id="{B9348817-1692-454A-B35D-B79EABC20549}"/>
+                <a16:creationId xmlns:a16="http://schemas.microsoft.com/office/drawing/2014/main" id="{6931CEBB-7BBC-440B-9A3E-F0632966AFDE}"/>
               </a:ext>
             </a:extLst>
           </p:cNvPr>
@@ -35903,7 +35903,7 @@
           <p:cNvPr id="9" name="">
             <a:extLst xmlns:a="http://schemas.openxmlformats.org/drawingml/2006/main">
               <a:ext uri="{FF2B5EF4-FFF2-40B4-BE49-F238E27FC236}">
-                <a16:creationId xmlns:a16="http://schemas.microsoft.com/office/drawing/2014/main" id="{8A6773F2-5BC5-49DE-88F8-4D51D0B70E78}"/>
+                <a16:creationId xmlns:a16="http://schemas.microsoft.com/office/drawing/2014/main" id="{09C02BC7-661E-4E14-88E1-389A2687E4F7}"/>
               </a:ext>
             </a:extLst>
           </p:cNvPr>
@@ -35936,7 +35936,7 @@
           <p:cNvPr id="10" name="">
             <a:extLst xmlns:a="http://schemas.openxmlformats.org/drawingml/2006/main">
               <a:ext uri="{FF2B5EF4-FFF2-40B4-BE49-F238E27FC236}">
-                <a16:creationId xmlns:a16="http://schemas.microsoft.com/office/drawing/2014/main" id="{3835BD19-4DA5-4B00-A315-5F8B8D001BD9}"/>
+                <a16:creationId xmlns:a16="http://schemas.microsoft.com/office/drawing/2014/main" id="{2C392560-E407-446E-AD73-5D64E2D0F2A6}"/>
               </a:ext>
             </a:extLst>
           </p:cNvPr>
@@ -35994,7 +35994,7 @@
           <p:cNvPr id="11" name="">
             <a:extLst xmlns:a="http://schemas.openxmlformats.org/drawingml/2006/main">
               <a:ext uri="{FF2B5EF4-FFF2-40B4-BE49-F238E27FC236}">
-                <a16:creationId xmlns:a16="http://schemas.microsoft.com/office/drawing/2014/main" id="{91511B6B-1B39-4F8C-801A-55572A0401AE}"/>
+                <a16:creationId xmlns:a16="http://schemas.microsoft.com/office/drawing/2014/main" id="{7430CF4F-1E05-4282-9F89-8DF4A0E9BBE3}"/>
               </a:ext>
             </a:extLst>
           </p:cNvPr>
@@ -36052,7 +36052,7 @@
           <p:cNvPr id="12" name="">
             <a:extLst xmlns:a="http://schemas.openxmlformats.org/drawingml/2006/main">
               <a:ext uri="{FF2B5EF4-FFF2-40B4-BE49-F238E27FC236}">
-                <a16:creationId xmlns:a16="http://schemas.microsoft.com/office/drawing/2014/main" id="{1AF595CD-DE31-46FC-95DC-9421ED6BB594}"/>
+                <a16:creationId xmlns:a16="http://schemas.microsoft.com/office/drawing/2014/main" id="{138FF7A4-A542-4A71-9B39-6B847C230D52}"/>
               </a:ext>
             </a:extLst>
           </p:cNvPr>
@@ -36085,7 +36085,7 @@
           <p:cNvPr id="13" name="">
             <a:extLst xmlns:a="http://schemas.openxmlformats.org/drawingml/2006/main">
               <a:ext uri="{FF2B5EF4-FFF2-40B4-BE49-F238E27FC236}">
-                <a16:creationId xmlns:a16="http://schemas.microsoft.com/office/drawing/2014/main" id="{C85FECC7-6DA3-4793-B9B1-32666497F6C7}"/>
+                <a16:creationId xmlns:a16="http://schemas.microsoft.com/office/drawing/2014/main" id="{E8479B76-E6C5-4F60-A508-D0A6B742864D}"/>
               </a:ext>
             </a:extLst>
           </p:cNvPr>
@@ -36118,7 +36118,7 @@
           <p:cNvPr id="14" name="">
             <a:extLst xmlns:a="http://schemas.openxmlformats.org/drawingml/2006/main">
               <a:ext uri="{FF2B5EF4-FFF2-40B4-BE49-F238E27FC236}">
-                <a16:creationId xmlns:a16="http://schemas.microsoft.com/office/drawing/2014/main" id="{3FAFB221-27B1-4232-9BD9-B01675679EC6}"/>
+                <a16:creationId xmlns:a16="http://schemas.microsoft.com/office/drawing/2014/main" id="{AD63426D-A9D1-4300-AC4E-9869DD221D92}"/>
               </a:ext>
             </a:extLst>
           </p:cNvPr>
@@ -36136,7 +36136,7 @@
             <a:avLst/>
           </a:prstGeom>
           <a:solidFill xmlns:a="http://schemas.openxmlformats.org/drawingml/2006/main">
-            <a:srgbClr val="FFF4F4"/>
+            <a:srgbClr val="F7F7F7"/>
           </a:solidFill>
           <a:ln xmlns:a="http://schemas.openxmlformats.org/drawingml/2006/main" w="9525">
             <a:solidFill>
@@ -36151,7 +36151,7 @@
           <p:cNvPr id="15" name="">
             <a:extLst xmlns:a="http://schemas.openxmlformats.org/drawingml/2006/main">
               <a:ext uri="{FF2B5EF4-FFF2-40B4-BE49-F238E27FC236}">
-                <a16:creationId xmlns:a16="http://schemas.microsoft.com/office/drawing/2014/main" id="{FFFA83FB-FB0B-4AA0-AD6D-D78AF5B7643A}"/>
+                <a16:creationId xmlns:a16="http://schemas.microsoft.com/office/drawing/2014/main" id="{09DB0AD8-A698-4A46-B2F9-EAB690E209EA}"/>
               </a:ext>
             </a:extLst>
           </p:cNvPr>
@@ -36209,7 +36209,7 @@
           <p:cNvPr id="16" name="">
             <a:extLst xmlns:a="http://schemas.openxmlformats.org/drawingml/2006/main">
               <a:ext uri="{FF2B5EF4-FFF2-40B4-BE49-F238E27FC236}">
-                <a16:creationId xmlns:a16="http://schemas.microsoft.com/office/drawing/2014/main" id="{8CF832E4-7C30-4795-A46A-DB62D8E9CB26}"/>
+                <a16:creationId xmlns:a16="http://schemas.microsoft.com/office/drawing/2014/main" id="{A897E3AB-6B96-427A-80C9-D748EABDDD7B}"/>
               </a:ext>
             </a:extLst>
           </p:cNvPr>
@@ -36267,7 +36267,7 @@
           <p:cNvPr id="17" name="">
             <a:extLst xmlns:a="http://schemas.openxmlformats.org/drawingml/2006/main">
               <a:ext uri="{FF2B5EF4-FFF2-40B4-BE49-F238E27FC236}">
-                <a16:creationId xmlns:a16="http://schemas.microsoft.com/office/drawing/2014/main" id="{16DE2FAE-37AE-4C99-9668-7C7435D353F6}"/>
+                <a16:creationId xmlns:a16="http://schemas.microsoft.com/office/drawing/2014/main" id="{CA823506-9B10-4CF8-B286-22D3967D91DF}"/>
               </a:ext>
             </a:extLst>
           </p:cNvPr>
@@ -36300,7 +36300,7 @@
           <p:cNvPr id="18" name="">
             <a:extLst xmlns:a="http://schemas.openxmlformats.org/drawingml/2006/main">
               <a:ext uri="{FF2B5EF4-FFF2-40B4-BE49-F238E27FC236}">
-                <a16:creationId xmlns:a16="http://schemas.microsoft.com/office/drawing/2014/main" id="{63EAD96C-27D6-4F98-9B3E-280AE3A295E0}"/>
+                <a16:creationId xmlns:a16="http://schemas.microsoft.com/office/drawing/2014/main" id="{DE64BCD4-9799-4310-8B93-D50A65FC67DB}"/>
               </a:ext>
             </a:extLst>
           </p:cNvPr>
@@ -36333,7 +36333,7 @@
           <p:cNvPr id="19" name="">
             <a:extLst xmlns:a="http://schemas.openxmlformats.org/drawingml/2006/main">
               <a:ext uri="{FF2B5EF4-FFF2-40B4-BE49-F238E27FC236}">
-                <a16:creationId xmlns:a16="http://schemas.microsoft.com/office/drawing/2014/main" id="{1ACBD27A-1008-4512-9E71-6AD58E235309}"/>
+                <a16:creationId xmlns:a16="http://schemas.microsoft.com/office/drawing/2014/main" id="{61CE9D7F-4E24-4BEC-9286-037360DDA066}"/>
               </a:ext>
             </a:extLst>
           </p:cNvPr>
@@ -36366,7 +36366,7 @@
           <p:cNvPr id="20" name="">
             <a:extLst xmlns:a="http://schemas.openxmlformats.org/drawingml/2006/main">
               <a:ext uri="{FF2B5EF4-FFF2-40B4-BE49-F238E27FC236}">
-                <a16:creationId xmlns:a16="http://schemas.microsoft.com/office/drawing/2014/main" id="{36110346-B08F-40A2-A99F-A1F55D5AB853}"/>
+                <a16:creationId xmlns:a16="http://schemas.microsoft.com/office/drawing/2014/main" id="{C7A91D1D-D837-4F73-ABF4-65179A31CCC9}"/>
               </a:ext>
             </a:extLst>
           </p:cNvPr>
@@ -36424,7 +36424,7 @@
           <p:cNvPr id="21" name="">
             <a:extLst xmlns:a="http://schemas.openxmlformats.org/drawingml/2006/main">
               <a:ext uri="{FF2B5EF4-FFF2-40B4-BE49-F238E27FC236}">
-                <a16:creationId xmlns:a16="http://schemas.microsoft.com/office/drawing/2014/main" id="{2FFFA09B-7489-4E85-BC64-1DFE62E9E61B}"/>
+                <a16:creationId xmlns:a16="http://schemas.microsoft.com/office/drawing/2014/main" id="{2E165ABE-3C6E-4EA0-8992-36267DBCA7DE}"/>
               </a:ext>
             </a:extLst>
           </p:cNvPr>
@@ -36482,7 +36482,7 @@
           <p:cNvPr id="22" name="">
             <a:extLst xmlns:a="http://schemas.openxmlformats.org/drawingml/2006/main">
               <a:ext uri="{FF2B5EF4-FFF2-40B4-BE49-F238E27FC236}">
-                <a16:creationId xmlns:a16="http://schemas.microsoft.com/office/drawing/2014/main" id="{4A3F9ABC-5C43-4B92-A92B-748AEC994A2E}"/>
+                <a16:creationId xmlns:a16="http://schemas.microsoft.com/office/drawing/2014/main" id="{E6715D05-7E56-4636-A366-69449314FF04}"/>
               </a:ext>
             </a:extLst>
           </p:cNvPr>
@@ -36515,7 +36515,7 @@
           <p:cNvPr id="23" name="">
             <a:extLst xmlns:a="http://schemas.openxmlformats.org/drawingml/2006/main">
               <a:ext uri="{FF2B5EF4-FFF2-40B4-BE49-F238E27FC236}">
-                <a16:creationId xmlns:a16="http://schemas.microsoft.com/office/drawing/2014/main" id="{D7B1671D-94F9-48B4-B44A-23E6D9BDFAFF}"/>
+                <a16:creationId xmlns:a16="http://schemas.microsoft.com/office/drawing/2014/main" id="{6C1E8D6D-B796-4EE2-BF04-A8195FBC59C4}"/>
               </a:ext>
             </a:extLst>
           </p:cNvPr>
@@ -36548,7 +36548,7 @@
           <p:cNvPr id="24" name="">
             <a:extLst xmlns:a="http://schemas.openxmlformats.org/drawingml/2006/main">
               <a:ext uri="{FF2B5EF4-FFF2-40B4-BE49-F238E27FC236}">
-                <a16:creationId xmlns:a16="http://schemas.microsoft.com/office/drawing/2014/main" id="{2B2AE607-9745-4202-A6F1-08F3C44C118B}"/>
+                <a16:creationId xmlns:a16="http://schemas.microsoft.com/office/drawing/2014/main" id="{47C6EC4D-928C-4EDD-8E8E-194753125011}"/>
               </a:ext>
             </a:extLst>
           </p:cNvPr>
@@ -36581,7 +36581,7 @@
           <p:cNvPr id="25" name="">
             <a:extLst xmlns:a="http://schemas.openxmlformats.org/drawingml/2006/main">
               <a:ext uri="{FF2B5EF4-FFF2-40B4-BE49-F238E27FC236}">
-                <a16:creationId xmlns:a16="http://schemas.microsoft.com/office/drawing/2014/main" id="{A38AAC7A-5D1A-4B93-9490-36B4C610A8A9}"/>
+                <a16:creationId xmlns:a16="http://schemas.microsoft.com/office/drawing/2014/main" id="{6E0716EB-05EB-4390-A50B-6C2B5973BC9F}"/>
               </a:ext>
             </a:extLst>
           </p:cNvPr>
@@ -36639,7 +36639,7 @@
           <p:cNvPr id="26" name="">
             <a:extLst xmlns:a="http://schemas.openxmlformats.org/drawingml/2006/main">
               <a:ext uri="{FF2B5EF4-FFF2-40B4-BE49-F238E27FC236}">
-                <a16:creationId xmlns:a16="http://schemas.microsoft.com/office/drawing/2014/main" id="{765C09C1-6258-42BE-B284-BC9A3869F78F}"/>
+                <a16:creationId xmlns:a16="http://schemas.microsoft.com/office/drawing/2014/main" id="{CAA78DF9-3AD6-46E5-B44A-D3DD0C2AEEE5}"/>
               </a:ext>
             </a:extLst>
           </p:cNvPr>
@@ -36697,7 +36697,7 @@
           <p:cNvPr id="27" name="">
             <a:extLst xmlns:a="http://schemas.openxmlformats.org/drawingml/2006/main">
               <a:ext uri="{FF2B5EF4-FFF2-40B4-BE49-F238E27FC236}">
-                <a16:creationId xmlns:a16="http://schemas.microsoft.com/office/drawing/2014/main" id="{207B24DD-B8DB-4D00-92A3-04A831FECCBC}"/>
+                <a16:creationId xmlns:a16="http://schemas.microsoft.com/office/drawing/2014/main" id="{8F829F6B-4472-4888-910D-4539BC993E78}"/>
               </a:ext>
             </a:extLst>
           </p:cNvPr>
@@ -36755,7 +36755,7 @@
           <p:cNvPr id="28" name="">
             <a:extLst xmlns:a="http://schemas.openxmlformats.org/drawingml/2006/main">
               <a:ext uri="{FF2B5EF4-FFF2-40B4-BE49-F238E27FC236}">
-                <a16:creationId xmlns:a16="http://schemas.microsoft.com/office/drawing/2014/main" id="{8D8A9AB8-8791-4224-8BB6-6CE44910789B}"/>
+                <a16:creationId xmlns:a16="http://schemas.microsoft.com/office/drawing/2014/main" id="{D18A1F51-B849-4B02-81B5-2BB6C5CF9B68}"/>
               </a:ext>
             </a:extLst>
           </p:cNvPr>
@@ -36788,7 +36788,7 @@
           <p:cNvPr id="29" name="">
             <a:extLst xmlns:a="http://schemas.openxmlformats.org/drawingml/2006/main">
               <a:ext uri="{FF2B5EF4-FFF2-40B4-BE49-F238E27FC236}">
-                <a16:creationId xmlns:a16="http://schemas.microsoft.com/office/drawing/2014/main" id="{DDA2ABAD-7629-44EB-BBAC-22C7143E2B62}"/>
+                <a16:creationId xmlns:a16="http://schemas.microsoft.com/office/drawing/2014/main" id="{06D243A4-7728-473A-996E-2D39D681C964}"/>
               </a:ext>
             </a:extLst>
           </p:cNvPr>
@@ -36846,7 +36846,7 @@
           <p:cNvPr id="30" name="">
             <a:extLst xmlns:a="http://schemas.openxmlformats.org/drawingml/2006/main">
               <a:ext uri="{FF2B5EF4-FFF2-40B4-BE49-F238E27FC236}">
-                <a16:creationId xmlns:a16="http://schemas.microsoft.com/office/drawing/2014/main" id="{82D7D1DE-3650-4CBA-A3F6-533D3342012C}"/>
+                <a16:creationId xmlns:a16="http://schemas.microsoft.com/office/drawing/2014/main" id="{48DDB88A-DEA4-4BA9-B17F-7088B5DC9733}"/>
               </a:ext>
             </a:extLst>
           </p:cNvPr>
@@ -36879,7 +36879,7 @@
           <p:cNvPr id="31" name="">
             <a:extLst xmlns:a="http://schemas.openxmlformats.org/drawingml/2006/main">
               <a:ext uri="{FF2B5EF4-FFF2-40B4-BE49-F238E27FC236}">
-                <a16:creationId xmlns:a16="http://schemas.microsoft.com/office/drawing/2014/main" id="{C1F2D1BB-0AA3-4CD0-99C0-78D4C537EBEE}"/>
+                <a16:creationId xmlns:a16="http://schemas.microsoft.com/office/drawing/2014/main" id="{F8BD569A-B6C9-4836-AFAB-E8AD66064643}"/>
               </a:ext>
             </a:extLst>
           </p:cNvPr>
@@ -36937,7 +36937,7 @@
           <p:cNvPr id="32" name="">
             <a:extLst xmlns:a="http://schemas.openxmlformats.org/drawingml/2006/main">
               <a:ext uri="{FF2B5EF4-FFF2-40B4-BE49-F238E27FC236}">
-                <a16:creationId xmlns:a16="http://schemas.microsoft.com/office/drawing/2014/main" id="{946EC6B6-301D-4895-A27A-AC3D69C0496C}"/>
+                <a16:creationId xmlns:a16="http://schemas.microsoft.com/office/drawing/2014/main" id="{96F67C3B-EF70-47AB-B045-02BB72F4D872}"/>
               </a:ext>
             </a:extLst>
           </p:cNvPr>
@@ -36970,7 +36970,7 @@
           <p:cNvPr id="33" name="">
             <a:extLst xmlns:a="http://schemas.openxmlformats.org/drawingml/2006/main">
               <a:ext uri="{FF2B5EF4-FFF2-40B4-BE49-F238E27FC236}">
-                <a16:creationId xmlns:a16="http://schemas.microsoft.com/office/drawing/2014/main" id="{F64EBCCF-0810-4333-81BC-7E5869EA7EF1}"/>
+                <a16:creationId xmlns:a16="http://schemas.microsoft.com/office/drawing/2014/main" id="{01276E17-52B2-44CA-90B7-C674EC75AF93}"/>
               </a:ext>
             </a:extLst>
           </p:cNvPr>
@@ -37028,7 +37028,7 @@
           <p:cNvPr id="34" name="">
             <a:extLst xmlns:a="http://schemas.openxmlformats.org/drawingml/2006/main">
               <a:ext uri="{FF2B5EF4-FFF2-40B4-BE49-F238E27FC236}">
-                <a16:creationId xmlns:a16="http://schemas.microsoft.com/office/drawing/2014/main" id="{6F446CE4-7F6E-4C6C-A19D-88AAD5F02EA2}"/>
+                <a16:creationId xmlns:a16="http://schemas.microsoft.com/office/drawing/2014/main" id="{39A63373-5369-42B1-B0FE-5E9301BA18E5}"/>
               </a:ext>
             </a:extLst>
           </p:cNvPr>
@@ -37061,7 +37061,7 @@
           <p:cNvPr id="35" name="">
             <a:extLst xmlns:a="http://schemas.openxmlformats.org/drawingml/2006/main">
               <a:ext uri="{FF2B5EF4-FFF2-40B4-BE49-F238E27FC236}">
-                <a16:creationId xmlns:a16="http://schemas.microsoft.com/office/drawing/2014/main" id="{68CEC3E7-2C1D-4097-8E2A-87B939A392EC}"/>
+                <a16:creationId xmlns:a16="http://schemas.microsoft.com/office/drawing/2014/main" id="{5D0B6452-E7E3-41BE-8BA9-37BF6F89B4E9}"/>
               </a:ext>
             </a:extLst>
           </p:cNvPr>
@@ -37119,7 +37119,7 @@
           <p:cNvPr id="36" name="">
             <a:extLst xmlns:a="http://schemas.openxmlformats.org/drawingml/2006/main">
               <a:ext uri="{FF2B5EF4-FFF2-40B4-BE49-F238E27FC236}">
-                <a16:creationId xmlns:a16="http://schemas.microsoft.com/office/drawing/2014/main" id="{BE9A5EE3-F685-4C52-8AB4-86DE63931A25}"/>
+                <a16:creationId xmlns:a16="http://schemas.microsoft.com/office/drawing/2014/main" id="{5B03687B-68E5-4FC2-A872-069CE612EC5A}"/>
               </a:ext>
             </a:extLst>
           </p:cNvPr>
@@ -37152,7 +37152,7 @@
           <p:cNvPr id="37" name="">
             <a:extLst xmlns:a="http://schemas.openxmlformats.org/drawingml/2006/main">
               <a:ext uri="{FF2B5EF4-FFF2-40B4-BE49-F238E27FC236}">
-                <a16:creationId xmlns:a16="http://schemas.microsoft.com/office/drawing/2014/main" id="{F6A6A246-4DB1-4BC7-8F94-8AF2779D237C}"/>
+                <a16:creationId xmlns:a16="http://schemas.microsoft.com/office/drawing/2014/main" id="{D45832CB-E0FC-4823-B869-277F09F254E0}"/>
               </a:ext>
             </a:extLst>
           </p:cNvPr>
@@ -37210,7 +37210,7 @@
           <p:cNvPr id="38" name="">
             <a:extLst xmlns:a="http://schemas.openxmlformats.org/drawingml/2006/main">
               <a:ext uri="{FF2B5EF4-FFF2-40B4-BE49-F238E27FC236}">
-                <a16:creationId xmlns:a16="http://schemas.microsoft.com/office/drawing/2014/main" id="{7D1731AC-A15E-475A-A6A9-05D2440D8FE0}"/>
+                <a16:creationId xmlns:a16="http://schemas.microsoft.com/office/drawing/2014/main" id="{64090705-4E26-49DD-9653-DF9CD222221E}"/>
               </a:ext>
             </a:extLst>
           </p:cNvPr>
@@ -37243,7 +37243,7 @@
           <p:cNvPr id="39" name="">
             <a:extLst xmlns:a="http://schemas.openxmlformats.org/drawingml/2006/main">
               <a:ext uri="{FF2B5EF4-FFF2-40B4-BE49-F238E27FC236}">
-                <a16:creationId xmlns:a16="http://schemas.microsoft.com/office/drawing/2014/main" id="{85524F04-F7EB-45E5-815B-D77A3816D861}"/>
+                <a16:creationId xmlns:a16="http://schemas.microsoft.com/office/drawing/2014/main" id="{EFF73933-F46A-4DD5-945E-34BB5B304606}"/>
               </a:ext>
             </a:extLst>
           </p:cNvPr>
@@ -37301,7 +37301,7 @@
           <p:cNvPr id="40" name="">
             <a:extLst xmlns:a="http://schemas.openxmlformats.org/drawingml/2006/main">
               <a:ext uri="{FF2B5EF4-FFF2-40B4-BE49-F238E27FC236}">
-                <a16:creationId xmlns:a16="http://schemas.microsoft.com/office/drawing/2014/main" id="{93ABCC6A-89CE-46D0-933C-0FDE714ECC31}"/>
+                <a16:creationId xmlns:a16="http://schemas.microsoft.com/office/drawing/2014/main" id="{EC6DAB07-B3D6-4852-AE94-CACFEB59F935}"/>
               </a:ext>
             </a:extLst>
           </p:cNvPr>
@@ -37334,7 +37334,7 @@
           <p:cNvPr id="41" name="">
             <a:extLst xmlns:a="http://schemas.openxmlformats.org/drawingml/2006/main">
               <a:ext uri="{FF2B5EF4-FFF2-40B4-BE49-F238E27FC236}">
-                <a16:creationId xmlns:a16="http://schemas.microsoft.com/office/drawing/2014/main" id="{544CC4E2-F937-43A4-B40D-0B524E26FEF2}"/>
+                <a16:creationId xmlns:a16="http://schemas.microsoft.com/office/drawing/2014/main" id="{B06AAC6C-8F36-4D35-A622-884C390A69BB}"/>
               </a:ext>
             </a:extLst>
           </p:cNvPr>
@@ -37392,7 +37392,7 @@
           <p:cNvPr id="42" name="">
             <a:extLst xmlns:a="http://schemas.openxmlformats.org/drawingml/2006/main">
               <a:ext uri="{FF2B5EF4-FFF2-40B4-BE49-F238E27FC236}">
-                <a16:creationId xmlns:a16="http://schemas.microsoft.com/office/drawing/2014/main" id="{A3DF39BE-22AF-4AC6-AF6F-73EF0E690930}"/>
+                <a16:creationId xmlns:a16="http://schemas.microsoft.com/office/drawing/2014/main" id="{62AAD904-9C18-4BEC-A257-966A57475F63}"/>
               </a:ext>
             </a:extLst>
           </p:cNvPr>
@@ -37425,7 +37425,7 @@
           <p:cNvPr id="43" name="">
             <a:extLst xmlns:a="http://schemas.openxmlformats.org/drawingml/2006/main">
               <a:ext uri="{FF2B5EF4-FFF2-40B4-BE49-F238E27FC236}">
-                <a16:creationId xmlns:a16="http://schemas.microsoft.com/office/drawing/2014/main" id="{3706C9EB-DAA2-4C48-9A38-4199875E6854}"/>
+                <a16:creationId xmlns:a16="http://schemas.microsoft.com/office/drawing/2014/main" id="{D47AA6B7-46B7-4956-BE78-69023417C132}"/>
               </a:ext>
             </a:extLst>
           </p:cNvPr>
@@ -37483,7 +37483,7 @@
           <p:cNvPr id="44" name="">
             <a:extLst xmlns:a="http://schemas.openxmlformats.org/drawingml/2006/main">
               <a:ext uri="{FF2B5EF4-FFF2-40B4-BE49-F238E27FC236}">
-                <a16:creationId xmlns:a16="http://schemas.microsoft.com/office/drawing/2014/main" id="{5397AC68-9430-4D02-8833-B2DC65404F24}"/>
+                <a16:creationId xmlns:a16="http://schemas.microsoft.com/office/drawing/2014/main" id="{C85980C5-73BA-453E-B8E0-C7852ABD7743}"/>
               </a:ext>
             </a:extLst>
           </p:cNvPr>
@@ -37516,7 +37516,7 @@
           <p:cNvPr id="45" name="">
             <a:extLst xmlns:a="http://schemas.openxmlformats.org/drawingml/2006/main">
               <a:ext uri="{FF2B5EF4-FFF2-40B4-BE49-F238E27FC236}">
-                <a16:creationId xmlns:a16="http://schemas.microsoft.com/office/drawing/2014/main" id="{1ED3A6DD-E0E5-46F3-B8D1-B37CA82C5BF6}"/>
+                <a16:creationId xmlns:a16="http://schemas.microsoft.com/office/drawing/2014/main" id="{F891B29C-9B2A-4F9F-BE2B-60B92A6B659A}"/>
               </a:ext>
             </a:extLst>
           </p:cNvPr>
@@ -37574,7 +37574,7 @@
           <p:cNvPr id="46" name="">
             <a:extLst xmlns:a="http://schemas.openxmlformats.org/drawingml/2006/main">
               <a:ext uri="{FF2B5EF4-FFF2-40B4-BE49-F238E27FC236}">
-                <a16:creationId xmlns:a16="http://schemas.microsoft.com/office/drawing/2014/main" id="{200A54CD-FA79-461E-9BD2-BFDE550597BE}"/>
+                <a16:creationId xmlns:a16="http://schemas.microsoft.com/office/drawing/2014/main" id="{E54AC30E-FAB4-44BE-8F8A-C9529E7923AF}"/>
               </a:ext>
             </a:extLst>
           </p:cNvPr>
@@ -37607,7 +37607,7 @@
           <p:cNvPr id="47" name="">
             <a:extLst xmlns:a="http://schemas.openxmlformats.org/drawingml/2006/main">
               <a:ext uri="{FF2B5EF4-FFF2-40B4-BE49-F238E27FC236}">
-                <a16:creationId xmlns:a16="http://schemas.microsoft.com/office/drawing/2014/main" id="{D55F630B-9A76-4C25-95FB-D359507716D7}"/>
+                <a16:creationId xmlns:a16="http://schemas.microsoft.com/office/drawing/2014/main" id="{4DC0EEF7-06EF-41D1-8159-89EB0A139A91}"/>
               </a:ext>
             </a:extLst>
           </p:cNvPr>
@@ -37665,7 +37665,7 @@
           <p:cNvPr id="48" name="">
             <a:extLst xmlns:a="http://schemas.openxmlformats.org/drawingml/2006/main">
               <a:ext uri="{FF2B5EF4-FFF2-40B4-BE49-F238E27FC236}">
-                <a16:creationId xmlns:a16="http://schemas.microsoft.com/office/drawing/2014/main" id="{522BC901-BC46-4E6C-9B0B-459351646A82}"/>
+                <a16:creationId xmlns:a16="http://schemas.microsoft.com/office/drawing/2014/main" id="{F46F9667-97D7-49FD-B426-6138BBC514EC}"/>
               </a:ext>
             </a:extLst>
           </p:cNvPr>
@@ -37698,7 +37698,7 @@
           <p:cNvPr id="49" name="">
             <a:extLst xmlns:a="http://schemas.openxmlformats.org/drawingml/2006/main">
               <a:ext uri="{FF2B5EF4-FFF2-40B4-BE49-F238E27FC236}">
-                <a16:creationId xmlns:a16="http://schemas.microsoft.com/office/drawing/2014/main" id="{0AC702FD-F88B-481F-8719-864B085A0CB7}"/>
+                <a16:creationId xmlns:a16="http://schemas.microsoft.com/office/drawing/2014/main" id="{3ABE60B4-8DFC-430F-8EA9-A3D8A1EF65A6}"/>
               </a:ext>
             </a:extLst>
           </p:cNvPr>
@@ -37756,7 +37756,7 @@
           <p:cNvPr id="50" name="">
             <a:extLst xmlns:a="http://schemas.openxmlformats.org/drawingml/2006/main">
               <a:ext uri="{FF2B5EF4-FFF2-40B4-BE49-F238E27FC236}">
-                <a16:creationId xmlns:a16="http://schemas.microsoft.com/office/drawing/2014/main" id="{806573E5-7678-4AA5-8522-96BAD4F7B518}"/>
+                <a16:creationId xmlns:a16="http://schemas.microsoft.com/office/drawing/2014/main" id="{2E0FAF35-9001-4526-B615-971DFE901AB7}"/>
               </a:ext>
             </a:extLst>
           </p:cNvPr>
@@ -37789,7 +37789,7 @@
           <p:cNvPr id="51" name="">
             <a:extLst xmlns:a="http://schemas.openxmlformats.org/drawingml/2006/main">
               <a:ext uri="{FF2B5EF4-FFF2-40B4-BE49-F238E27FC236}">
-                <a16:creationId xmlns:a16="http://schemas.microsoft.com/office/drawing/2014/main" id="{F66A39C0-277C-48D5-BC99-C2FD0D874A20}"/>
+                <a16:creationId xmlns:a16="http://schemas.microsoft.com/office/drawing/2014/main" id="{6CB103E3-313E-47A7-976A-DEC37D748427}"/>
               </a:ext>
             </a:extLst>
           </p:cNvPr>
@@ -37847,7 +37847,7 @@
           <p:cNvPr id="52" name="">
             <a:extLst xmlns:a="http://schemas.openxmlformats.org/drawingml/2006/main">
               <a:ext uri="{FF2B5EF4-FFF2-40B4-BE49-F238E27FC236}">
-                <a16:creationId xmlns:a16="http://schemas.microsoft.com/office/drawing/2014/main" id="{110EEF6D-9CFF-41D9-8663-CB23087F2668}"/>
+                <a16:creationId xmlns:a16="http://schemas.microsoft.com/office/drawing/2014/main" id="{78B2A10F-3880-450B-A5F5-558D826559DA}"/>
               </a:ext>
             </a:extLst>
           </p:cNvPr>
@@ -37880,7 +37880,7 @@
           <p:cNvPr id="53" name="">
             <a:extLst xmlns:a="http://schemas.openxmlformats.org/drawingml/2006/main">
               <a:ext uri="{FF2B5EF4-FFF2-40B4-BE49-F238E27FC236}">
-                <a16:creationId xmlns:a16="http://schemas.microsoft.com/office/drawing/2014/main" id="{1EC058BE-61F6-46A8-88F0-C284821E5363}"/>
+                <a16:creationId xmlns:a16="http://schemas.microsoft.com/office/drawing/2014/main" id="{63C88485-C58B-4238-BB84-33EA97AEED6F}"/>
               </a:ext>
             </a:extLst>
           </p:cNvPr>
@@ -37938,7 +37938,7 @@
           <p:cNvPr id="54" name="">
             <a:extLst xmlns:a="http://schemas.openxmlformats.org/drawingml/2006/main">
               <a:ext uri="{FF2B5EF4-FFF2-40B4-BE49-F238E27FC236}">
-                <a16:creationId xmlns:a16="http://schemas.microsoft.com/office/drawing/2014/main" id="{26F1D5B1-4CA8-4713-BDFD-B93658BBE41B}"/>
+                <a16:creationId xmlns:a16="http://schemas.microsoft.com/office/drawing/2014/main" id="{22248C52-7644-4E5B-A04B-9A1C06A8A9FF}"/>
               </a:ext>
             </a:extLst>
           </p:cNvPr>
@@ -37971,7 +37971,7 @@
           <p:cNvPr id="55" name="">
             <a:extLst xmlns:a="http://schemas.openxmlformats.org/drawingml/2006/main">
               <a:ext uri="{FF2B5EF4-FFF2-40B4-BE49-F238E27FC236}">
-                <a16:creationId xmlns:a16="http://schemas.microsoft.com/office/drawing/2014/main" id="{43DB6A3E-5738-4BE5-B139-F58DBC4D1327}"/>
+                <a16:creationId xmlns:a16="http://schemas.microsoft.com/office/drawing/2014/main" id="{754A6220-7FF2-447B-98CB-039F348A5BED}"/>
               </a:ext>
             </a:extLst>
           </p:cNvPr>
@@ -38029,7 +38029,7 @@
           <p:cNvPr id="56" name="">
             <a:extLst xmlns:a="http://schemas.openxmlformats.org/drawingml/2006/main">
               <a:ext uri="{FF2B5EF4-FFF2-40B4-BE49-F238E27FC236}">
-                <a16:creationId xmlns:a16="http://schemas.microsoft.com/office/drawing/2014/main" id="{60882692-CA6B-425F-B42B-D678D8AE1237}"/>
+                <a16:creationId xmlns:a16="http://schemas.microsoft.com/office/drawing/2014/main" id="{865C93F9-A2B1-427B-A254-B9EDC3CB16ED}"/>
               </a:ext>
             </a:extLst>
           </p:cNvPr>
@@ -38062,7 +38062,7 @@
           <p:cNvPr id="57" name="">
             <a:extLst xmlns:a="http://schemas.openxmlformats.org/drawingml/2006/main">
               <a:ext uri="{FF2B5EF4-FFF2-40B4-BE49-F238E27FC236}">
-                <a16:creationId xmlns:a16="http://schemas.microsoft.com/office/drawing/2014/main" id="{0596D4A0-3D4A-4486-9FBF-C5EA7622BD83}"/>
+                <a16:creationId xmlns:a16="http://schemas.microsoft.com/office/drawing/2014/main" id="{D8DBCBB8-BCFE-4370-A330-18B92636B630}"/>
               </a:ext>
             </a:extLst>
           </p:cNvPr>
@@ -38120,7 +38120,7 @@
           <p:cNvPr id="58" name="">
             <a:extLst xmlns:a="http://schemas.openxmlformats.org/drawingml/2006/main">
               <a:ext uri="{FF2B5EF4-FFF2-40B4-BE49-F238E27FC236}">
-                <a16:creationId xmlns:a16="http://schemas.microsoft.com/office/drawing/2014/main" id="{B6A91014-F67E-4C72-A59D-61FECE79A913}"/>
+                <a16:creationId xmlns:a16="http://schemas.microsoft.com/office/drawing/2014/main" id="{5278E527-885E-4DCB-BAF6-1ECDB2B84647}"/>
               </a:ext>
             </a:extLst>
           </p:cNvPr>
@@ -38153,7 +38153,7 @@
           <p:cNvPr id="59" name="">
             <a:extLst xmlns:a="http://schemas.openxmlformats.org/drawingml/2006/main">
               <a:ext uri="{FF2B5EF4-FFF2-40B4-BE49-F238E27FC236}">
-                <a16:creationId xmlns:a16="http://schemas.microsoft.com/office/drawing/2014/main" id="{E17C62BA-A6C5-4E45-9D9D-710CD208E277}"/>
+                <a16:creationId xmlns:a16="http://schemas.microsoft.com/office/drawing/2014/main" id="{7FF71153-F850-4EEE-8E1A-CDC3BA91008A}"/>
               </a:ext>
             </a:extLst>
           </p:cNvPr>
@@ -38211,7 +38211,7 @@
           <p:cNvPr id="60" name="">
             <a:extLst xmlns:a="http://schemas.openxmlformats.org/drawingml/2006/main">
               <a:ext uri="{FF2B5EF4-FFF2-40B4-BE49-F238E27FC236}">
-                <a16:creationId xmlns:a16="http://schemas.microsoft.com/office/drawing/2014/main" id="{1C094ABD-6877-417C-A8D4-9D5714B9133B}"/>
+                <a16:creationId xmlns:a16="http://schemas.microsoft.com/office/drawing/2014/main" id="{43B0859A-4971-4C55-B625-39D1A486A48A}"/>
               </a:ext>
             </a:extLst>
           </p:cNvPr>
@@ -38244,7 +38244,7 @@
           <p:cNvPr id="61" name="">
             <a:extLst xmlns:a="http://schemas.openxmlformats.org/drawingml/2006/main">
               <a:ext uri="{FF2B5EF4-FFF2-40B4-BE49-F238E27FC236}">
-                <a16:creationId xmlns:a16="http://schemas.microsoft.com/office/drawing/2014/main" id="{63D4AB3B-560B-4B08-91B0-B47598467400}"/>
+                <a16:creationId xmlns:a16="http://schemas.microsoft.com/office/drawing/2014/main" id="{72339366-E114-4A4B-97BF-9C1E07B98A9F}"/>
               </a:ext>
             </a:extLst>
           </p:cNvPr>
@@ -38302,7 +38302,7 @@
           <p:cNvPr id="62" name="">
             <a:extLst xmlns:a="http://schemas.openxmlformats.org/drawingml/2006/main">
               <a:ext uri="{FF2B5EF4-FFF2-40B4-BE49-F238E27FC236}">
-                <a16:creationId xmlns:a16="http://schemas.microsoft.com/office/drawing/2014/main" id="{D2F9B103-3D4B-4F91-AE6C-0D95AFFF51D2}"/>
+                <a16:creationId xmlns:a16="http://schemas.microsoft.com/office/drawing/2014/main" id="{745D5F95-8923-4F4B-A812-9978109B39A4}"/>
               </a:ext>
             </a:extLst>
           </p:cNvPr>
@@ -38335,7 +38335,7 @@
           <p:cNvPr id="63" name="">
             <a:extLst xmlns:a="http://schemas.openxmlformats.org/drawingml/2006/main">
               <a:ext uri="{FF2B5EF4-FFF2-40B4-BE49-F238E27FC236}">
-                <a16:creationId xmlns:a16="http://schemas.microsoft.com/office/drawing/2014/main" id="{3BA57D2D-C07E-4921-A846-FF61DDABD263}"/>
+                <a16:creationId xmlns:a16="http://schemas.microsoft.com/office/drawing/2014/main" id="{2CB489FE-D1E8-4749-BF3A-0C8C1128E2D6}"/>
               </a:ext>
             </a:extLst>
           </p:cNvPr>
@@ -38393,7 +38393,7 @@
           <p:cNvPr id="64" name="">
             <a:extLst xmlns:a="http://schemas.openxmlformats.org/drawingml/2006/main">
               <a:ext uri="{FF2B5EF4-FFF2-40B4-BE49-F238E27FC236}">
-                <a16:creationId xmlns:a16="http://schemas.microsoft.com/office/drawing/2014/main" id="{240F3686-09AE-4D79-BBC6-5086791879D1}"/>
+                <a16:creationId xmlns:a16="http://schemas.microsoft.com/office/drawing/2014/main" id="{CC7E73EE-76EC-439D-9DE2-0851F39B7096}"/>
               </a:ext>
             </a:extLst>
           </p:cNvPr>
@@ -38426,7 +38426,7 @@
           <p:cNvPr id="65" name="">
             <a:extLst xmlns:a="http://schemas.openxmlformats.org/drawingml/2006/main">
               <a:ext uri="{FF2B5EF4-FFF2-40B4-BE49-F238E27FC236}">
-                <a16:creationId xmlns:a16="http://schemas.microsoft.com/office/drawing/2014/main" id="{007AC0FE-ED0F-450B-B802-D3FB368BAB5A}"/>
+                <a16:creationId xmlns:a16="http://schemas.microsoft.com/office/drawing/2014/main" id="{B8A33CFE-935E-47B6-BDF2-9597ADB0482C}"/>
               </a:ext>
             </a:extLst>
           </p:cNvPr>
@@ -38484,7 +38484,7 @@
           <p:cNvPr id="66" name="">
             <a:extLst xmlns:a="http://schemas.openxmlformats.org/drawingml/2006/main">
               <a:ext uri="{FF2B5EF4-FFF2-40B4-BE49-F238E27FC236}">
-                <a16:creationId xmlns:a16="http://schemas.microsoft.com/office/drawing/2014/main" id="{EFAE84DC-AF32-4AFC-AE71-951D3161DC28}"/>
+                <a16:creationId xmlns:a16="http://schemas.microsoft.com/office/drawing/2014/main" id="{EB8C346A-0215-4002-813F-3696C97019B1}"/>
               </a:ext>
             </a:extLst>
           </p:cNvPr>
@@ -38517,7 +38517,7 @@
           <p:cNvPr id="67" name="">
             <a:extLst xmlns:a="http://schemas.openxmlformats.org/drawingml/2006/main">
               <a:ext uri="{FF2B5EF4-FFF2-40B4-BE49-F238E27FC236}">
-                <a16:creationId xmlns:a16="http://schemas.microsoft.com/office/drawing/2014/main" id="{55F9706F-7374-4773-BE3E-EBAEDB0A9C3B}"/>
+                <a16:creationId xmlns:a16="http://schemas.microsoft.com/office/drawing/2014/main" id="{813236D5-A81A-4E7F-B2B8-0E1B4357CDFE}"/>
               </a:ext>
             </a:extLst>
           </p:cNvPr>
@@ -38575,7 +38575,7 @@
           <p:cNvPr id="68" name="">
             <a:extLst xmlns:a="http://schemas.openxmlformats.org/drawingml/2006/main">
               <a:ext uri="{FF2B5EF4-FFF2-40B4-BE49-F238E27FC236}">
-                <a16:creationId xmlns:a16="http://schemas.microsoft.com/office/drawing/2014/main" id="{4A00A89E-B049-487F-A237-C7DF89383A8A}"/>
+                <a16:creationId xmlns:a16="http://schemas.microsoft.com/office/drawing/2014/main" id="{B8968867-1131-4D4B-8E5D-E0463339BF0D}"/>
               </a:ext>
             </a:extLst>
           </p:cNvPr>
@@ -38608,7 +38608,7 @@
           <p:cNvPr id="69" name="">
             <a:extLst xmlns:a="http://schemas.openxmlformats.org/drawingml/2006/main">
               <a:ext uri="{FF2B5EF4-FFF2-40B4-BE49-F238E27FC236}">
-                <a16:creationId xmlns:a16="http://schemas.microsoft.com/office/drawing/2014/main" id="{03754E3C-6356-46EA-A8FA-0BA9C3260052}"/>
+                <a16:creationId xmlns:a16="http://schemas.microsoft.com/office/drawing/2014/main" id="{FBC5A050-FAC1-41DB-B47E-2C9D59295046}"/>
               </a:ext>
             </a:extLst>
           </p:cNvPr>
@@ -38666,7 +38666,7 @@
           <p:cNvPr id="70" name="">
             <a:extLst xmlns:a="http://schemas.openxmlformats.org/drawingml/2006/main">
               <a:ext uri="{FF2B5EF4-FFF2-40B4-BE49-F238E27FC236}">
-                <a16:creationId xmlns:a16="http://schemas.microsoft.com/office/drawing/2014/main" id="{7565C230-D43F-4BBC-ADE3-34EB601CD3DC}"/>
+                <a16:creationId xmlns:a16="http://schemas.microsoft.com/office/drawing/2014/main" id="{D1B35E2D-FC74-4CD2-98D5-95B08B85B365}"/>
               </a:ext>
             </a:extLst>
           </p:cNvPr>
@@ -38699,7 +38699,7 @@
           <p:cNvPr id="71" name="">
             <a:extLst xmlns:a="http://schemas.openxmlformats.org/drawingml/2006/main">
               <a:ext uri="{FF2B5EF4-FFF2-40B4-BE49-F238E27FC236}">
-                <a16:creationId xmlns:a16="http://schemas.microsoft.com/office/drawing/2014/main" id="{E9679722-A34D-4556-9A73-3E7AD557D85A}"/>
+                <a16:creationId xmlns:a16="http://schemas.microsoft.com/office/drawing/2014/main" id="{E1A86858-35CE-4357-9848-C9AFEAAC2AA0}"/>
               </a:ext>
             </a:extLst>
           </p:cNvPr>
@@ -38757,7 +38757,7 @@
           <p:cNvPr id="72" name="">
             <a:extLst xmlns:a="http://schemas.openxmlformats.org/drawingml/2006/main">
               <a:ext uri="{FF2B5EF4-FFF2-40B4-BE49-F238E27FC236}">
-                <a16:creationId xmlns:a16="http://schemas.microsoft.com/office/drawing/2014/main" id="{94A88370-13EF-48AB-84BC-CEEE910CD710}"/>
+                <a16:creationId xmlns:a16="http://schemas.microsoft.com/office/drawing/2014/main" id="{B21170C8-8695-47B7-A2DF-659C69AD1A32}"/>
               </a:ext>
             </a:extLst>
           </p:cNvPr>
@@ -38790,7 +38790,7 @@
           <p:cNvPr id="73" name="">
             <a:extLst xmlns:a="http://schemas.openxmlformats.org/drawingml/2006/main">
               <a:ext uri="{FF2B5EF4-FFF2-40B4-BE49-F238E27FC236}">
-                <a16:creationId xmlns:a16="http://schemas.microsoft.com/office/drawing/2014/main" id="{851598EB-0ADF-452E-8D14-48CCB0F63887}"/>
+                <a16:creationId xmlns:a16="http://schemas.microsoft.com/office/drawing/2014/main" id="{0950686D-729C-4B82-87AF-AA38CE053743}"/>
               </a:ext>
             </a:extLst>
           </p:cNvPr>
@@ -38848,7 +38848,7 @@
           <p:cNvPr id="74" name="">
             <a:extLst xmlns:a="http://schemas.openxmlformats.org/drawingml/2006/main">
               <a:ext uri="{FF2B5EF4-FFF2-40B4-BE49-F238E27FC236}">
-                <a16:creationId xmlns:a16="http://schemas.microsoft.com/office/drawing/2014/main" id="{D14B4E52-6A65-4C17-8B61-82972DCC000A}"/>
+                <a16:creationId xmlns:a16="http://schemas.microsoft.com/office/drawing/2014/main" id="{8A7D7A9F-8CD1-4D3F-8F6F-FFA40C7CD01F}"/>
               </a:ext>
             </a:extLst>
           </p:cNvPr>
@@ -38881,7 +38881,7 @@
           <p:cNvPr id="75" name="">
             <a:extLst xmlns:a="http://schemas.openxmlformats.org/drawingml/2006/main">
               <a:ext uri="{FF2B5EF4-FFF2-40B4-BE49-F238E27FC236}">
-                <a16:creationId xmlns:a16="http://schemas.microsoft.com/office/drawing/2014/main" id="{A7A15CCB-E953-4B1F-8BF6-76F04A08CEC9}"/>
+                <a16:creationId xmlns:a16="http://schemas.microsoft.com/office/drawing/2014/main" id="{A8D9013B-F4CD-428A-B5D3-41CC7E515B25}"/>
               </a:ext>
             </a:extLst>
           </p:cNvPr>
@@ -38939,7 +38939,7 @@
           <p:cNvPr id="76" name="">
             <a:extLst xmlns:a="http://schemas.openxmlformats.org/drawingml/2006/main">
               <a:ext uri="{FF2B5EF4-FFF2-40B4-BE49-F238E27FC236}">
-                <a16:creationId xmlns:a16="http://schemas.microsoft.com/office/drawing/2014/main" id="{2A629FB7-602C-4863-9744-6FE0FB4BDE42}"/>
+                <a16:creationId xmlns:a16="http://schemas.microsoft.com/office/drawing/2014/main" id="{D6A5F67D-1220-42BA-B2EE-C510D52CCA19}"/>
               </a:ext>
             </a:extLst>
           </p:cNvPr>
@@ -38972,7 +38972,7 @@
           <p:cNvPr id="77" name="">
             <a:extLst xmlns:a="http://schemas.openxmlformats.org/drawingml/2006/main">
               <a:ext uri="{FF2B5EF4-FFF2-40B4-BE49-F238E27FC236}">
-                <a16:creationId xmlns:a16="http://schemas.microsoft.com/office/drawing/2014/main" id="{5579E316-FD12-4834-A82A-78FF4A8E02DC}"/>
+                <a16:creationId xmlns:a16="http://schemas.microsoft.com/office/drawing/2014/main" id="{3CFB32F6-A0A3-44E9-ADB9-5A03A72F7FCF}"/>
               </a:ext>
             </a:extLst>
           </p:cNvPr>
@@ -39030,7 +39030,7 @@
           <p:cNvPr id="78" name="">
             <a:extLst xmlns:a="http://schemas.openxmlformats.org/drawingml/2006/main">
               <a:ext uri="{FF2B5EF4-FFF2-40B4-BE49-F238E27FC236}">
-                <a16:creationId xmlns:a16="http://schemas.microsoft.com/office/drawing/2014/main" id="{2C5733F0-588C-407B-BD5D-D06E244D7DD2}"/>
+                <a16:creationId xmlns:a16="http://schemas.microsoft.com/office/drawing/2014/main" id="{9A7BEEF8-6954-4099-A388-63E0D057BA2A}"/>
               </a:ext>
             </a:extLst>
           </p:cNvPr>
@@ -39088,7 +39088,7 @@
           <p:cNvPr id="79" name="">
             <a:extLst xmlns:a="http://schemas.openxmlformats.org/drawingml/2006/main">
               <a:ext uri="{FF2B5EF4-FFF2-40B4-BE49-F238E27FC236}">
-                <a16:creationId xmlns:a16="http://schemas.microsoft.com/office/drawing/2014/main" id="{87BCBBCB-E792-4FB7-A262-EFB0723B44B9}"/>
+                <a16:creationId xmlns:a16="http://schemas.microsoft.com/office/drawing/2014/main" id="{CB39CDA7-77C4-4C97-9D89-438ED67A5636}"/>
               </a:ext>
             </a:extLst>
           </p:cNvPr>
@@ -39121,7 +39121,7 @@
           <p:cNvPr id="80" name="">
             <a:extLst xmlns:a="http://schemas.openxmlformats.org/drawingml/2006/main">
               <a:ext uri="{FF2B5EF4-FFF2-40B4-BE49-F238E27FC236}">
-                <a16:creationId xmlns:a16="http://schemas.microsoft.com/office/drawing/2014/main" id="{ECC4CE89-A451-46A5-883C-ED687581DC2C}"/>
+                <a16:creationId xmlns:a16="http://schemas.microsoft.com/office/drawing/2014/main" id="{3199B771-2FEB-4F2D-9DD8-D87450104793}"/>
               </a:ext>
             </a:extLst>
           </p:cNvPr>
@@ -39179,7 +39179,7 @@
                 <a:latin typeface="Microsoft YaHei"/>
                 <a:ea typeface="Microsoft YaHei"/>
                 <a:cs typeface="Microsoft YaHei"/>
-                <a:hlinkClick xmlns:r="http://schemas.openxmlformats.org/officeDocument/2006/relationships" r:id="Rc3daa0d0e4d64a2c"/>
+                <a:hlinkClick xmlns:r="http://schemas.openxmlformats.org/officeDocument/2006/relationships" r:id="R8b5e49cebc284460"/>
               </a:rPr>
               <a:t>码道 Codebase</a:t>
             </a:r>
@@ -39191,7 +39191,7 @@
                 <a:latin typeface="Microsoft YaHei"/>
                 <a:ea typeface="Microsoft YaHei"/>
                 <a:cs typeface="Microsoft YaHei"/>
-                <a:hlinkClick xmlns:r="http://schemas.openxmlformats.org/officeDocument/2006/relationships" r:id="Rd9aa86f3f85b4b0f"/>
+                <a:hlinkClick xmlns:r="http://schemas.openxmlformats.org/officeDocument/2006/relationships" r:id="Ra916ff45e4774766"/>
               </a:rPr>
               <a:t> · Qoder Indexing</a:t>
             </a:r>
@@ -39203,7 +39203,7 @@
                 <a:latin typeface="Microsoft YaHei"/>
                 <a:ea typeface="Microsoft YaHei"/>
                 <a:cs typeface="Microsoft YaHei"/>
-                <a:hlinkClick xmlns:r="http://schemas.openxmlformats.org/officeDocument/2006/relationships" r:id="Rf31a1b6d6f0449c1"/>
+                <a:hlinkClick xmlns:r="http://schemas.openxmlformats.org/officeDocument/2006/relationships" r:id="R66ae6a7fddc74a8f"/>
               </a:rPr>
               <a:t> · Qoder Repo Wiki</a:t>
             </a:r>
@@ -39215,7 +39215,7 @@
                 <a:latin typeface="Microsoft YaHei"/>
                 <a:ea typeface="Microsoft YaHei"/>
                 <a:cs typeface="Microsoft YaHei"/>
-                <a:hlinkClick xmlns:r="http://schemas.openxmlformats.org/officeDocument/2006/relationships" r:id="R85f4de720ae64793"/>
+                <a:hlinkClick xmlns:r="http://schemas.openxmlformats.org/officeDocument/2006/relationships" r:id="R099a504828f548e1"/>
               </a:rPr>
               <a:t> · QMind</a:t>
             </a:r>
@@ -39227,7 +39227,7 @@
           <p:cNvPr id="81" name="">
             <a:extLst xmlns:a="http://schemas.openxmlformats.org/drawingml/2006/main">
               <a:ext uri="{FF2B5EF4-FFF2-40B4-BE49-F238E27FC236}">
-                <a16:creationId xmlns:a16="http://schemas.microsoft.com/office/drawing/2014/main" id="{65C2A7EB-1D1A-4689-9683-6B54FF9E67EE}"/>
+                <a16:creationId xmlns:a16="http://schemas.microsoft.com/office/drawing/2014/main" id="{33A9B82F-94C9-4508-96B2-A9B2D1F23374}"/>
               </a:ext>
             </a:extLst>
           </p:cNvPr>
@@ -39283,7 +39283,7 @@
     </p:spTree>
     <p:extLst>
       <p:ext uri="{BB962C8B-B14F-4D97-AF65-F5344CB8AC3E}">
-        <p14:creationId xmlns:p14="http://schemas.microsoft.com/office/powerpoint/2010/main" val="2068984963"/>
+        <p14:creationId xmlns:p14="http://schemas.microsoft.com/office/powerpoint/2010/main" val="2096163827"/>
       </p:ext>
     </p:extLst>
   </p:cSld>
@@ -39314,7 +39314,7 @@
           <p:cNvPr id="95" name="">
             <a:extLst xmlns:a="http://schemas.openxmlformats.org/drawingml/2006/main">
               <a:ext uri="{FF2B5EF4-FFF2-40B4-BE49-F238E27FC236}">
-                <a16:creationId xmlns:a16="http://schemas.microsoft.com/office/drawing/2014/main" id="{A871CB89-3D6D-417A-9940-657E8BA8C310}"/>
+                <a16:creationId xmlns:a16="http://schemas.microsoft.com/office/drawing/2014/main" id="{64626C69-2DBF-4812-BD7A-3C939A2A7EA1}"/>
               </a:ext>
             </a:extLst>
           </p:cNvPr>
@@ -39347,7 +39347,7 @@
           <p:cNvPr id="2" name="">
             <a:extLst xmlns:a="http://schemas.openxmlformats.org/drawingml/2006/main">
               <a:ext uri="{FF2B5EF4-FFF2-40B4-BE49-F238E27FC236}">
-                <a16:creationId xmlns:a16="http://schemas.microsoft.com/office/drawing/2014/main" id="{76B99C1B-428D-47A4-927E-A910CDCC13D4}"/>
+                <a16:creationId xmlns:a16="http://schemas.microsoft.com/office/drawing/2014/main" id="{A7E861DB-E26D-4EA4-96D4-0D7137E25F25}"/>
               </a:ext>
             </a:extLst>
           </p:cNvPr>
@@ -39405,7 +39405,7 @@
           <p:cNvPr id="3" name="">
             <a:extLst xmlns:a="http://schemas.openxmlformats.org/drawingml/2006/main">
               <a:ext uri="{FF2B5EF4-FFF2-40B4-BE49-F238E27FC236}">
-                <a16:creationId xmlns:a16="http://schemas.microsoft.com/office/drawing/2014/main" id="{00C2EE45-AC44-4C75-B9A9-2AC5647B4736}"/>
+                <a16:creationId xmlns:a16="http://schemas.microsoft.com/office/drawing/2014/main" id="{9782B0E1-E7A3-4E2A-994D-15C2A26DD4BF}"/>
               </a:ext>
             </a:extLst>
           </p:cNvPr>
@@ -39463,7 +39463,7 @@
           <p:cNvPr id="4" name="">
             <a:extLst xmlns:a="http://schemas.openxmlformats.org/drawingml/2006/main">
               <a:ext uri="{FF2B5EF4-FFF2-40B4-BE49-F238E27FC236}">
-                <a16:creationId xmlns:a16="http://schemas.microsoft.com/office/drawing/2014/main" id="{FED8CBC2-F32F-4C56-B243-81E8B29B558B}"/>
+                <a16:creationId xmlns:a16="http://schemas.microsoft.com/office/drawing/2014/main" id="{F68F4A5A-CCF7-48B0-A607-9F6EFD0A8772}"/>
               </a:ext>
             </a:extLst>
           </p:cNvPr>
@@ -39496,7 +39496,7 @@
           <p:cNvPr id="5" name="">
             <a:extLst xmlns:a="http://schemas.openxmlformats.org/drawingml/2006/main">
               <a:ext uri="{FF2B5EF4-FFF2-40B4-BE49-F238E27FC236}">
-                <a16:creationId xmlns:a16="http://schemas.microsoft.com/office/drawing/2014/main" id="{EBF57E6E-F7D3-4192-A462-A605F1ED5A7E}"/>
+                <a16:creationId xmlns:a16="http://schemas.microsoft.com/office/drawing/2014/main" id="{FB6C43D8-6968-4400-8D78-C706AE3A76D9}"/>
               </a:ext>
             </a:extLst>
           </p:cNvPr>
@@ -39554,7 +39554,7 @@
           <p:cNvPr id="6" name="">
             <a:extLst xmlns:a="http://schemas.openxmlformats.org/drawingml/2006/main">
               <a:ext uri="{FF2B5EF4-FFF2-40B4-BE49-F238E27FC236}">
-                <a16:creationId xmlns:a16="http://schemas.microsoft.com/office/drawing/2014/main" id="{77492120-DB91-4B4C-88AA-EBF768DF1F1B}"/>
+                <a16:creationId xmlns:a16="http://schemas.microsoft.com/office/drawing/2014/main" id="{538CA7B1-FF9A-4747-A773-95D5364ECE72}"/>
               </a:ext>
             </a:extLst>
           </p:cNvPr>
@@ -39587,7 +39587,7 @@
           <p:cNvPr id="7" name="">
             <a:extLst xmlns:a="http://schemas.openxmlformats.org/drawingml/2006/main">
               <a:ext uri="{FF2B5EF4-FFF2-40B4-BE49-F238E27FC236}">
-                <a16:creationId xmlns:a16="http://schemas.microsoft.com/office/drawing/2014/main" id="{B3D89206-97A2-401C-8775-EC8CE9645F4F}"/>
+                <a16:creationId xmlns:a16="http://schemas.microsoft.com/office/drawing/2014/main" id="{3BADB799-1398-44EB-85FA-6AFE0D0870FC}"/>
               </a:ext>
             </a:extLst>
           </p:cNvPr>
@@ -39645,7 +39645,7 @@
           <p:cNvPr id="8" name="">
             <a:extLst xmlns:a="http://schemas.openxmlformats.org/drawingml/2006/main">
               <a:ext uri="{FF2B5EF4-FFF2-40B4-BE49-F238E27FC236}">
-                <a16:creationId xmlns:a16="http://schemas.microsoft.com/office/drawing/2014/main" id="{6E452B14-B55C-46B4-8442-3DC06B8196D5}"/>
+                <a16:creationId xmlns:a16="http://schemas.microsoft.com/office/drawing/2014/main" id="{D856867A-5B7E-41D2-8329-309C23CD9ADD}"/>
               </a:ext>
             </a:extLst>
           </p:cNvPr>
@@ -39678,7 +39678,7 @@
           <p:cNvPr id="9" name="">
             <a:extLst xmlns:a="http://schemas.openxmlformats.org/drawingml/2006/main">
               <a:ext uri="{FF2B5EF4-FFF2-40B4-BE49-F238E27FC236}">
-                <a16:creationId xmlns:a16="http://schemas.microsoft.com/office/drawing/2014/main" id="{2CFE6713-C5BA-4305-B136-4B291AD10D07}"/>
+                <a16:creationId xmlns:a16="http://schemas.microsoft.com/office/drawing/2014/main" id="{F4C00448-1D07-49A5-ADCC-BD3423FC888D}"/>
               </a:ext>
             </a:extLst>
           </p:cNvPr>
@@ -39736,7 +39736,7 @@
           <p:cNvPr id="10" name="">
             <a:extLst xmlns:a="http://schemas.openxmlformats.org/drawingml/2006/main">
               <a:ext uri="{FF2B5EF4-FFF2-40B4-BE49-F238E27FC236}">
-                <a16:creationId xmlns:a16="http://schemas.microsoft.com/office/drawing/2014/main" id="{C6B88821-6F77-469C-A759-F747CFF0E029}"/>
+                <a16:creationId xmlns:a16="http://schemas.microsoft.com/office/drawing/2014/main" id="{E7D3CE0A-20A8-4692-A972-69F54988B7EC}"/>
               </a:ext>
             </a:extLst>
           </p:cNvPr>
@@ -39769,7 +39769,7 @@
           <p:cNvPr id="11" name="">
             <a:extLst xmlns:a="http://schemas.openxmlformats.org/drawingml/2006/main">
               <a:ext uri="{FF2B5EF4-FFF2-40B4-BE49-F238E27FC236}">
-                <a16:creationId xmlns:a16="http://schemas.microsoft.com/office/drawing/2014/main" id="{A7998FAC-1995-4218-ACD8-14B625346A8A}"/>
+                <a16:creationId xmlns:a16="http://schemas.microsoft.com/office/drawing/2014/main" id="{5C6CE58C-297D-41A1-936D-1113A6254E4A}"/>
               </a:ext>
             </a:extLst>
           </p:cNvPr>
@@ -39827,7 +39827,7 @@
           <p:cNvPr id="12" name="">
             <a:extLst xmlns:a="http://schemas.openxmlformats.org/drawingml/2006/main">
               <a:ext uri="{FF2B5EF4-FFF2-40B4-BE49-F238E27FC236}">
-                <a16:creationId xmlns:a16="http://schemas.microsoft.com/office/drawing/2014/main" id="{75B0C5C0-8908-4BCA-9F5B-E5A574385882}"/>
+                <a16:creationId xmlns:a16="http://schemas.microsoft.com/office/drawing/2014/main" id="{52AF9984-B06B-43B5-B047-63729EC32669}"/>
               </a:ext>
             </a:extLst>
           </p:cNvPr>
@@ -39860,7 +39860,7 @@
           <p:cNvPr id="13" name="">
             <a:extLst xmlns:a="http://schemas.openxmlformats.org/drawingml/2006/main">
               <a:ext uri="{FF2B5EF4-FFF2-40B4-BE49-F238E27FC236}">
-                <a16:creationId xmlns:a16="http://schemas.microsoft.com/office/drawing/2014/main" id="{FC953986-70C7-4B34-8AA1-FA9CD8AFA317}"/>
+                <a16:creationId xmlns:a16="http://schemas.microsoft.com/office/drawing/2014/main" id="{1447D6FB-1EE5-40F8-A1D3-B900BCECCEC9}"/>
               </a:ext>
             </a:extLst>
           </p:cNvPr>
@@ -39918,7 +39918,7 @@
           <p:cNvPr id="14" name="">
             <a:extLst xmlns:a="http://schemas.openxmlformats.org/drawingml/2006/main">
               <a:ext uri="{FF2B5EF4-FFF2-40B4-BE49-F238E27FC236}">
-                <a16:creationId xmlns:a16="http://schemas.microsoft.com/office/drawing/2014/main" id="{BF704F20-97DF-4752-8DE7-997EE6E02657}"/>
+                <a16:creationId xmlns:a16="http://schemas.microsoft.com/office/drawing/2014/main" id="{2B68F14D-FD2D-4496-9BA6-E936B2CA0384}"/>
               </a:ext>
             </a:extLst>
           </p:cNvPr>
@@ -39951,7 +39951,7 @@
           <p:cNvPr id="15" name="">
             <a:extLst xmlns:a="http://schemas.openxmlformats.org/drawingml/2006/main">
               <a:ext uri="{FF2B5EF4-FFF2-40B4-BE49-F238E27FC236}">
-                <a16:creationId xmlns:a16="http://schemas.microsoft.com/office/drawing/2014/main" id="{33D49F98-9DA9-4C18-8B91-65FB754D01A0}"/>
+                <a16:creationId xmlns:a16="http://schemas.microsoft.com/office/drawing/2014/main" id="{C8D7CC88-C333-40CF-8A4F-D9D7CDFA2E36}"/>
               </a:ext>
             </a:extLst>
           </p:cNvPr>
@@ -40009,7 +40009,7 @@
           <p:cNvPr id="16" name="">
             <a:extLst xmlns:a="http://schemas.openxmlformats.org/drawingml/2006/main">
               <a:ext uri="{FF2B5EF4-FFF2-40B4-BE49-F238E27FC236}">
-                <a16:creationId xmlns:a16="http://schemas.microsoft.com/office/drawing/2014/main" id="{F9BC6E6B-73FB-47CE-82A0-888A35406042}"/>
+                <a16:creationId xmlns:a16="http://schemas.microsoft.com/office/drawing/2014/main" id="{82B29B79-5878-4149-8BA6-C02EB1DA1894}"/>
               </a:ext>
             </a:extLst>
           </p:cNvPr>
@@ -40042,7 +40042,7 @@
           <p:cNvPr id="17" name="">
             <a:extLst xmlns:a="http://schemas.openxmlformats.org/drawingml/2006/main">
               <a:ext uri="{FF2B5EF4-FFF2-40B4-BE49-F238E27FC236}">
-                <a16:creationId xmlns:a16="http://schemas.microsoft.com/office/drawing/2014/main" id="{AD05AB17-30C4-4BBA-8A11-0896D727558B}"/>
+                <a16:creationId xmlns:a16="http://schemas.microsoft.com/office/drawing/2014/main" id="{74AB224F-7143-4C14-8057-E4EC78E4CBC5}"/>
               </a:ext>
             </a:extLst>
           </p:cNvPr>
@@ -40100,7 +40100,7 @@
           <p:cNvPr id="18" name="">
             <a:extLst xmlns:a="http://schemas.openxmlformats.org/drawingml/2006/main">
               <a:ext uri="{FF2B5EF4-FFF2-40B4-BE49-F238E27FC236}">
-                <a16:creationId xmlns:a16="http://schemas.microsoft.com/office/drawing/2014/main" id="{97FAD842-CC52-4CB8-86BF-ABD7F3B0B0C1}"/>
+                <a16:creationId xmlns:a16="http://schemas.microsoft.com/office/drawing/2014/main" id="{D79F33D7-5B5C-4B4D-974B-D42C1E086A18}"/>
               </a:ext>
             </a:extLst>
           </p:cNvPr>
@@ -40133,7 +40133,7 @@
           <p:cNvPr id="19" name="">
             <a:extLst xmlns:a="http://schemas.openxmlformats.org/drawingml/2006/main">
               <a:ext uri="{FF2B5EF4-FFF2-40B4-BE49-F238E27FC236}">
-                <a16:creationId xmlns:a16="http://schemas.microsoft.com/office/drawing/2014/main" id="{2648C560-9926-4A62-8970-8D57751E6D7C}"/>
+                <a16:creationId xmlns:a16="http://schemas.microsoft.com/office/drawing/2014/main" id="{FD3B6B00-F13C-43AE-9C57-EDF70DF8E5C9}"/>
               </a:ext>
             </a:extLst>
           </p:cNvPr>
@@ -40191,7 +40191,7 @@
           <p:cNvPr id="20" name="">
             <a:extLst xmlns:a="http://schemas.openxmlformats.org/drawingml/2006/main">
               <a:ext uri="{FF2B5EF4-FFF2-40B4-BE49-F238E27FC236}">
-                <a16:creationId xmlns:a16="http://schemas.microsoft.com/office/drawing/2014/main" id="{4EED6C86-F7ED-4C9D-A0F8-9532CB56DE2A}"/>
+                <a16:creationId xmlns:a16="http://schemas.microsoft.com/office/drawing/2014/main" id="{C9F6425B-8B93-4C8F-B0C3-6DC04F9BD145}"/>
               </a:ext>
             </a:extLst>
           </p:cNvPr>
@@ -40224,7 +40224,7 @@
           <p:cNvPr id="21" name="">
             <a:extLst xmlns:a="http://schemas.openxmlformats.org/drawingml/2006/main">
               <a:ext uri="{FF2B5EF4-FFF2-40B4-BE49-F238E27FC236}">
-                <a16:creationId xmlns:a16="http://schemas.microsoft.com/office/drawing/2014/main" id="{5E076EF5-EEA2-4771-A38D-A1D619009551}"/>
+                <a16:creationId xmlns:a16="http://schemas.microsoft.com/office/drawing/2014/main" id="{C9FCC8F3-1B1A-4CAE-A164-2013161D1C7A}"/>
               </a:ext>
             </a:extLst>
           </p:cNvPr>
@@ -40282,7 +40282,7 @@
           <p:cNvPr id="22" name="">
             <a:extLst xmlns:a="http://schemas.openxmlformats.org/drawingml/2006/main">
               <a:ext uri="{FF2B5EF4-FFF2-40B4-BE49-F238E27FC236}">
-                <a16:creationId xmlns:a16="http://schemas.microsoft.com/office/drawing/2014/main" id="{4C74EC97-D38D-4595-B4E9-9C643BAEC2AE}"/>
+                <a16:creationId xmlns:a16="http://schemas.microsoft.com/office/drawing/2014/main" id="{C5CD8618-F84A-458D-BDD9-596A73498EC0}"/>
               </a:ext>
             </a:extLst>
           </p:cNvPr>
@@ -40315,7 +40315,7 @@
           <p:cNvPr id="23" name="">
             <a:extLst xmlns:a="http://schemas.openxmlformats.org/drawingml/2006/main">
               <a:ext uri="{FF2B5EF4-FFF2-40B4-BE49-F238E27FC236}">
-                <a16:creationId xmlns:a16="http://schemas.microsoft.com/office/drawing/2014/main" id="{D4F48135-1957-4300-B8F6-2EC3E918C7AA}"/>
+                <a16:creationId xmlns:a16="http://schemas.microsoft.com/office/drawing/2014/main" id="{4D0956DD-5EDD-4C17-86BB-FF75EC5E39D6}"/>
               </a:ext>
             </a:extLst>
           </p:cNvPr>
@@ -40373,7 +40373,7 @@
           <p:cNvPr id="24" name="">
             <a:extLst xmlns:a="http://schemas.openxmlformats.org/drawingml/2006/main">
               <a:ext uri="{FF2B5EF4-FFF2-40B4-BE49-F238E27FC236}">
-                <a16:creationId xmlns:a16="http://schemas.microsoft.com/office/drawing/2014/main" id="{1E79AF00-0EEA-4C0A-9CE9-E527FBC51C1C}"/>
+                <a16:creationId xmlns:a16="http://schemas.microsoft.com/office/drawing/2014/main" id="{56E36298-4E36-4970-BA00-2E12079191B4}"/>
               </a:ext>
             </a:extLst>
           </p:cNvPr>
@@ -40406,7 +40406,7 @@
           <p:cNvPr id="25" name="">
             <a:extLst xmlns:a="http://schemas.openxmlformats.org/drawingml/2006/main">
               <a:ext uri="{FF2B5EF4-FFF2-40B4-BE49-F238E27FC236}">
-                <a16:creationId xmlns:a16="http://schemas.microsoft.com/office/drawing/2014/main" id="{4A683045-5B1A-4513-BE0D-A501A4F75E5C}"/>
+                <a16:creationId xmlns:a16="http://schemas.microsoft.com/office/drawing/2014/main" id="{566B4269-7D10-4373-AE12-41AB64C97861}"/>
               </a:ext>
             </a:extLst>
           </p:cNvPr>
@@ -40464,7 +40464,7 @@
           <p:cNvPr id="26" name="">
             <a:extLst xmlns:a="http://schemas.openxmlformats.org/drawingml/2006/main">
               <a:ext uri="{FF2B5EF4-FFF2-40B4-BE49-F238E27FC236}">
-                <a16:creationId xmlns:a16="http://schemas.microsoft.com/office/drawing/2014/main" id="{D8DC3930-E726-4E87-93A8-788D27B52FBE}"/>
+                <a16:creationId xmlns:a16="http://schemas.microsoft.com/office/drawing/2014/main" id="{BCEE13F6-12DB-4096-AD02-46A0E9FD4654}"/>
               </a:ext>
             </a:extLst>
           </p:cNvPr>
@@ -40497,7 +40497,7 @@
           <p:cNvPr id="27" name="">
             <a:extLst xmlns:a="http://schemas.openxmlformats.org/drawingml/2006/main">
               <a:ext uri="{FF2B5EF4-FFF2-40B4-BE49-F238E27FC236}">
-                <a16:creationId xmlns:a16="http://schemas.microsoft.com/office/drawing/2014/main" id="{4E2E0FC9-97DC-46D1-AB5F-97ED1B329BD1}"/>
+                <a16:creationId xmlns:a16="http://schemas.microsoft.com/office/drawing/2014/main" id="{B76FD8BF-68E9-4B69-880D-BFFB0D2AE6BC}"/>
               </a:ext>
             </a:extLst>
           </p:cNvPr>
@@ -40555,7 +40555,7 @@
           <p:cNvPr id="28" name="">
             <a:extLst xmlns:a="http://schemas.openxmlformats.org/drawingml/2006/main">
               <a:ext uri="{FF2B5EF4-FFF2-40B4-BE49-F238E27FC236}">
-                <a16:creationId xmlns:a16="http://schemas.microsoft.com/office/drawing/2014/main" id="{891B83E1-1640-4250-A00F-855B865DB0AB}"/>
+                <a16:creationId xmlns:a16="http://schemas.microsoft.com/office/drawing/2014/main" id="{98BC255C-8757-42BA-824E-27D45ED48E7A}"/>
               </a:ext>
             </a:extLst>
           </p:cNvPr>
@@ -40588,7 +40588,7 @@
           <p:cNvPr id="29" name="">
             <a:extLst xmlns:a="http://schemas.openxmlformats.org/drawingml/2006/main">
               <a:ext uri="{FF2B5EF4-FFF2-40B4-BE49-F238E27FC236}">
-                <a16:creationId xmlns:a16="http://schemas.microsoft.com/office/drawing/2014/main" id="{DC836415-8AE2-4F3F-99C9-A62DFEDF3D99}"/>
+                <a16:creationId xmlns:a16="http://schemas.microsoft.com/office/drawing/2014/main" id="{2FA8D5CE-D44A-448C-8D22-E4B6AF9F4731}"/>
               </a:ext>
             </a:extLst>
           </p:cNvPr>
@@ -40646,7 +40646,7 @@
           <p:cNvPr id="30" name="">
             <a:extLst xmlns:a="http://schemas.openxmlformats.org/drawingml/2006/main">
               <a:ext uri="{FF2B5EF4-FFF2-40B4-BE49-F238E27FC236}">
-                <a16:creationId xmlns:a16="http://schemas.microsoft.com/office/drawing/2014/main" id="{82AFF9D7-D0C8-4F05-84E8-9BD7B98B1710}"/>
+                <a16:creationId xmlns:a16="http://schemas.microsoft.com/office/drawing/2014/main" id="{A1A027CE-D28A-4CAE-AE2B-3D4FE4527313}"/>
               </a:ext>
             </a:extLst>
           </p:cNvPr>
@@ -40679,7 +40679,7 @@
           <p:cNvPr id="31" name="">
             <a:extLst xmlns:a="http://schemas.openxmlformats.org/drawingml/2006/main">
               <a:ext uri="{FF2B5EF4-FFF2-40B4-BE49-F238E27FC236}">
-                <a16:creationId xmlns:a16="http://schemas.microsoft.com/office/drawing/2014/main" id="{7CFCE61C-D0EC-4736-A107-D73B51BF6A66}"/>
+                <a16:creationId xmlns:a16="http://schemas.microsoft.com/office/drawing/2014/main" id="{91EC9D83-89BE-4C66-A72A-A5EDC5CECDA3}"/>
               </a:ext>
             </a:extLst>
           </p:cNvPr>
@@ -40737,7 +40737,7 @@
           <p:cNvPr id="32" name="">
             <a:extLst xmlns:a="http://schemas.openxmlformats.org/drawingml/2006/main">
               <a:ext uri="{FF2B5EF4-FFF2-40B4-BE49-F238E27FC236}">
-                <a16:creationId xmlns:a16="http://schemas.microsoft.com/office/drawing/2014/main" id="{15CAA559-7E4C-4526-BEB8-C1BC78A667CD}"/>
+                <a16:creationId xmlns:a16="http://schemas.microsoft.com/office/drawing/2014/main" id="{29837E7D-E9D1-4F88-B71D-0410E1848BD7}"/>
               </a:ext>
             </a:extLst>
           </p:cNvPr>
@@ -40770,7 +40770,7 @@
           <p:cNvPr id="33" name="">
             <a:extLst xmlns:a="http://schemas.openxmlformats.org/drawingml/2006/main">
               <a:ext uri="{FF2B5EF4-FFF2-40B4-BE49-F238E27FC236}">
-                <a16:creationId xmlns:a16="http://schemas.microsoft.com/office/drawing/2014/main" id="{3BADB896-7BA1-4696-AB8A-BD97721CABF5}"/>
+                <a16:creationId xmlns:a16="http://schemas.microsoft.com/office/drawing/2014/main" id="{E0E5A8C6-FB23-46C9-8E28-E881F055D173}"/>
               </a:ext>
             </a:extLst>
           </p:cNvPr>
@@ -40828,7 +40828,7 @@
           <p:cNvPr id="34" name="">
             <a:extLst xmlns:a="http://schemas.openxmlformats.org/drawingml/2006/main">
               <a:ext uri="{FF2B5EF4-FFF2-40B4-BE49-F238E27FC236}">
-                <a16:creationId xmlns:a16="http://schemas.microsoft.com/office/drawing/2014/main" id="{6A62199B-E06D-4DE9-A823-EA47FADB1CDF}"/>
+                <a16:creationId xmlns:a16="http://schemas.microsoft.com/office/drawing/2014/main" id="{BAE39A4E-D684-4DDA-AB31-2B70E30DCD88}"/>
               </a:ext>
             </a:extLst>
           </p:cNvPr>
@@ -40861,7 +40861,7 @@
           <p:cNvPr id="35" name="">
             <a:extLst xmlns:a="http://schemas.openxmlformats.org/drawingml/2006/main">
               <a:ext uri="{FF2B5EF4-FFF2-40B4-BE49-F238E27FC236}">
-                <a16:creationId xmlns:a16="http://schemas.microsoft.com/office/drawing/2014/main" id="{7F09E434-C2C5-4BD1-8F7A-672C9702C143}"/>
+                <a16:creationId xmlns:a16="http://schemas.microsoft.com/office/drawing/2014/main" id="{CFFAF462-6240-49C1-820C-445EAD67BBCE}"/>
               </a:ext>
             </a:extLst>
           </p:cNvPr>
@@ -40919,7 +40919,7 @@
           <p:cNvPr id="36" name="">
             <a:extLst xmlns:a="http://schemas.openxmlformats.org/drawingml/2006/main">
               <a:ext uri="{FF2B5EF4-FFF2-40B4-BE49-F238E27FC236}">
-                <a16:creationId xmlns:a16="http://schemas.microsoft.com/office/drawing/2014/main" id="{AD47E1BC-3B33-4954-BBAC-438C57BFCD1F}"/>
+                <a16:creationId xmlns:a16="http://schemas.microsoft.com/office/drawing/2014/main" id="{212F1AFE-284E-4C5C-BD41-9CAC12275771}"/>
               </a:ext>
             </a:extLst>
           </p:cNvPr>
@@ -40952,7 +40952,7 @@
           <p:cNvPr id="37" name="">
             <a:extLst xmlns:a="http://schemas.openxmlformats.org/drawingml/2006/main">
               <a:ext uri="{FF2B5EF4-FFF2-40B4-BE49-F238E27FC236}">
-                <a16:creationId xmlns:a16="http://schemas.microsoft.com/office/drawing/2014/main" id="{E8170DDF-4FC7-4EF1-8E5F-3F97F31507FD}"/>
+                <a16:creationId xmlns:a16="http://schemas.microsoft.com/office/drawing/2014/main" id="{8DC2B65C-0999-4B7D-9C30-B0C13A14C4F3}"/>
               </a:ext>
             </a:extLst>
           </p:cNvPr>
@@ -41010,7 +41010,7 @@
           <p:cNvPr id="38" name="">
             <a:extLst xmlns:a="http://schemas.openxmlformats.org/drawingml/2006/main">
               <a:ext uri="{FF2B5EF4-FFF2-40B4-BE49-F238E27FC236}">
-                <a16:creationId xmlns:a16="http://schemas.microsoft.com/office/drawing/2014/main" id="{2083F4BB-F496-4F2A-A337-BBEF7553501A}"/>
+                <a16:creationId xmlns:a16="http://schemas.microsoft.com/office/drawing/2014/main" id="{22E2D1DB-8872-4AB2-A75E-DF3879B86F5C}"/>
               </a:ext>
             </a:extLst>
           </p:cNvPr>
@@ -41043,7 +41043,7 @@
           <p:cNvPr id="39" name="">
             <a:extLst xmlns:a="http://schemas.openxmlformats.org/drawingml/2006/main">
               <a:ext uri="{FF2B5EF4-FFF2-40B4-BE49-F238E27FC236}">
-                <a16:creationId xmlns:a16="http://schemas.microsoft.com/office/drawing/2014/main" id="{5E3E04E7-E2E6-4DAD-B561-215A456D2CD8}"/>
+                <a16:creationId xmlns:a16="http://schemas.microsoft.com/office/drawing/2014/main" id="{AB2B3D15-94CA-443A-8E89-41D65D23F831}"/>
               </a:ext>
             </a:extLst>
           </p:cNvPr>
@@ -41101,7 +41101,7 @@
           <p:cNvPr id="40" name="">
             <a:extLst xmlns:a="http://schemas.openxmlformats.org/drawingml/2006/main">
               <a:ext uri="{FF2B5EF4-FFF2-40B4-BE49-F238E27FC236}">
-                <a16:creationId xmlns:a16="http://schemas.microsoft.com/office/drawing/2014/main" id="{A23474AE-4A85-4109-A2D1-08BAB50A28FE}"/>
+                <a16:creationId xmlns:a16="http://schemas.microsoft.com/office/drawing/2014/main" id="{00F30043-08E0-4E7E-97DD-E5C2FC89CA91}"/>
               </a:ext>
             </a:extLst>
           </p:cNvPr>
@@ -41134,7 +41134,7 @@
           <p:cNvPr id="41" name="">
             <a:extLst xmlns:a="http://schemas.openxmlformats.org/drawingml/2006/main">
               <a:ext uri="{FF2B5EF4-FFF2-40B4-BE49-F238E27FC236}">
-                <a16:creationId xmlns:a16="http://schemas.microsoft.com/office/drawing/2014/main" id="{A8F05611-C130-4210-BB1F-D5541F0481D8}"/>
+                <a16:creationId xmlns:a16="http://schemas.microsoft.com/office/drawing/2014/main" id="{1FBC2E82-7530-4538-BDB4-A917E67F1B56}"/>
               </a:ext>
             </a:extLst>
           </p:cNvPr>
@@ -41192,7 +41192,7 @@
           <p:cNvPr id="42" name="">
             <a:extLst xmlns:a="http://schemas.openxmlformats.org/drawingml/2006/main">
               <a:ext uri="{FF2B5EF4-FFF2-40B4-BE49-F238E27FC236}">
-                <a16:creationId xmlns:a16="http://schemas.microsoft.com/office/drawing/2014/main" id="{62670B74-BD0D-4B3C-99EA-D1AD65B3ADC5}"/>
+                <a16:creationId xmlns:a16="http://schemas.microsoft.com/office/drawing/2014/main" id="{C81E480B-5391-497A-B3A2-F85314F30067}"/>
               </a:ext>
             </a:extLst>
           </p:cNvPr>
@@ -41225,7 +41225,7 @@
           <p:cNvPr id="43" name="">
             <a:extLst xmlns:a="http://schemas.openxmlformats.org/drawingml/2006/main">
               <a:ext uri="{FF2B5EF4-FFF2-40B4-BE49-F238E27FC236}">
-                <a16:creationId xmlns:a16="http://schemas.microsoft.com/office/drawing/2014/main" id="{204F2072-CB18-44BF-842B-C56125621A07}"/>
+                <a16:creationId xmlns:a16="http://schemas.microsoft.com/office/drawing/2014/main" id="{A338D683-3037-40DB-8642-B7E008CD2AAF}"/>
               </a:ext>
             </a:extLst>
           </p:cNvPr>
@@ -41283,7 +41283,7 @@
           <p:cNvPr id="44" name="">
             <a:extLst xmlns:a="http://schemas.openxmlformats.org/drawingml/2006/main">
               <a:ext uri="{FF2B5EF4-FFF2-40B4-BE49-F238E27FC236}">
-                <a16:creationId xmlns:a16="http://schemas.microsoft.com/office/drawing/2014/main" id="{DDDD843F-504F-4011-85EC-74E7BAFA9EFE}"/>
+                <a16:creationId xmlns:a16="http://schemas.microsoft.com/office/drawing/2014/main" id="{A9BDFE6A-54D1-4C4A-B5B1-C631CCE22B67}"/>
               </a:ext>
             </a:extLst>
           </p:cNvPr>
@@ -41316,7 +41316,7 @@
           <p:cNvPr id="45" name="">
             <a:extLst xmlns:a="http://schemas.openxmlformats.org/drawingml/2006/main">
               <a:ext uri="{FF2B5EF4-FFF2-40B4-BE49-F238E27FC236}">
-                <a16:creationId xmlns:a16="http://schemas.microsoft.com/office/drawing/2014/main" id="{80AA3866-9AE5-41C1-A49B-AF9F3BA19209}"/>
+                <a16:creationId xmlns:a16="http://schemas.microsoft.com/office/drawing/2014/main" id="{97128894-F462-446C-A862-B5DBDA60E919}"/>
               </a:ext>
             </a:extLst>
           </p:cNvPr>
@@ -41374,7 +41374,7 @@
           <p:cNvPr id="46" name="">
             <a:extLst xmlns:a="http://schemas.openxmlformats.org/drawingml/2006/main">
               <a:ext uri="{FF2B5EF4-FFF2-40B4-BE49-F238E27FC236}">
-                <a16:creationId xmlns:a16="http://schemas.microsoft.com/office/drawing/2014/main" id="{677362AC-E325-4598-B68B-5B13C65EE915}"/>
+                <a16:creationId xmlns:a16="http://schemas.microsoft.com/office/drawing/2014/main" id="{49C33540-8F96-4B40-BEDF-4A0AD6AD6972}"/>
               </a:ext>
             </a:extLst>
           </p:cNvPr>
@@ -41407,7 +41407,7 @@
           <p:cNvPr id="47" name="">
             <a:extLst xmlns:a="http://schemas.openxmlformats.org/drawingml/2006/main">
               <a:ext uri="{FF2B5EF4-FFF2-40B4-BE49-F238E27FC236}">
-                <a16:creationId xmlns:a16="http://schemas.microsoft.com/office/drawing/2014/main" id="{8C32DF48-86AF-4A95-9878-1C56A1D811F9}"/>
+                <a16:creationId xmlns:a16="http://schemas.microsoft.com/office/drawing/2014/main" id="{FFB7099E-5337-4DE4-879C-A26878BA151A}"/>
               </a:ext>
             </a:extLst>
           </p:cNvPr>
@@ -41465,7 +41465,7 @@
           <p:cNvPr id="48" name="">
             <a:extLst xmlns:a="http://schemas.openxmlformats.org/drawingml/2006/main">
               <a:ext uri="{FF2B5EF4-FFF2-40B4-BE49-F238E27FC236}">
-                <a16:creationId xmlns:a16="http://schemas.microsoft.com/office/drawing/2014/main" id="{5021475E-588A-457A-8594-900973D03D11}"/>
+                <a16:creationId xmlns:a16="http://schemas.microsoft.com/office/drawing/2014/main" id="{F580CD34-8306-4123-85C3-E21AFCC88F14}"/>
               </a:ext>
             </a:extLst>
           </p:cNvPr>
@@ -41498,7 +41498,7 @@
           <p:cNvPr id="49" name="">
             <a:extLst xmlns:a="http://schemas.openxmlformats.org/drawingml/2006/main">
               <a:ext uri="{FF2B5EF4-FFF2-40B4-BE49-F238E27FC236}">
-                <a16:creationId xmlns:a16="http://schemas.microsoft.com/office/drawing/2014/main" id="{106F3EBD-3D5F-48E1-B576-FA50348088DF}"/>
+                <a16:creationId xmlns:a16="http://schemas.microsoft.com/office/drawing/2014/main" id="{D7EADF7E-E049-4245-A12B-85FB923E459C}"/>
               </a:ext>
             </a:extLst>
           </p:cNvPr>
@@ -41556,7 +41556,7 @@
           <p:cNvPr id="50" name="">
             <a:extLst xmlns:a="http://schemas.openxmlformats.org/drawingml/2006/main">
               <a:ext uri="{FF2B5EF4-FFF2-40B4-BE49-F238E27FC236}">
-                <a16:creationId xmlns:a16="http://schemas.microsoft.com/office/drawing/2014/main" id="{7D4B6C37-DC5C-468A-B1EB-F2F46FFB3DEE}"/>
+                <a16:creationId xmlns:a16="http://schemas.microsoft.com/office/drawing/2014/main" id="{5360F97E-7F3C-4F33-9A06-8DC84792758C}"/>
               </a:ext>
             </a:extLst>
           </p:cNvPr>
@@ -41589,7 +41589,7 @@
           <p:cNvPr id="51" name="">
             <a:extLst xmlns:a="http://schemas.openxmlformats.org/drawingml/2006/main">
               <a:ext uri="{FF2B5EF4-FFF2-40B4-BE49-F238E27FC236}">
-                <a16:creationId xmlns:a16="http://schemas.microsoft.com/office/drawing/2014/main" id="{2176D55D-48A7-4AD9-86C2-79EB683DE0F4}"/>
+                <a16:creationId xmlns:a16="http://schemas.microsoft.com/office/drawing/2014/main" id="{A72F3E24-DE0B-4FD0-84F7-D6D4E894B9CA}"/>
               </a:ext>
             </a:extLst>
           </p:cNvPr>
@@ -41647,7 +41647,7 @@
           <p:cNvPr id="52" name="">
             <a:extLst xmlns:a="http://schemas.openxmlformats.org/drawingml/2006/main">
               <a:ext uri="{FF2B5EF4-FFF2-40B4-BE49-F238E27FC236}">
-                <a16:creationId xmlns:a16="http://schemas.microsoft.com/office/drawing/2014/main" id="{77BA43E8-715D-4538-BF4C-5997601A59C0}"/>
+                <a16:creationId xmlns:a16="http://schemas.microsoft.com/office/drawing/2014/main" id="{9F84F730-292A-434B-8140-DD289743ABD8}"/>
               </a:ext>
             </a:extLst>
           </p:cNvPr>
@@ -41680,7 +41680,7 @@
           <p:cNvPr id="53" name="">
             <a:extLst xmlns:a="http://schemas.openxmlformats.org/drawingml/2006/main">
               <a:ext uri="{FF2B5EF4-FFF2-40B4-BE49-F238E27FC236}">
-                <a16:creationId xmlns:a16="http://schemas.microsoft.com/office/drawing/2014/main" id="{F585C66D-58BA-40FB-8430-8E4FCF1241E6}"/>
+                <a16:creationId xmlns:a16="http://schemas.microsoft.com/office/drawing/2014/main" id="{7D34247E-CE4A-433B-B4BB-A77C89EF7155}"/>
               </a:ext>
             </a:extLst>
           </p:cNvPr>
@@ -41738,7 +41738,7 @@
           <p:cNvPr id="54" name="">
             <a:extLst xmlns:a="http://schemas.openxmlformats.org/drawingml/2006/main">
               <a:ext uri="{FF2B5EF4-FFF2-40B4-BE49-F238E27FC236}">
-                <a16:creationId xmlns:a16="http://schemas.microsoft.com/office/drawing/2014/main" id="{95003FC7-7FA7-4A94-84F5-4FD04B774EE9}"/>
+                <a16:creationId xmlns:a16="http://schemas.microsoft.com/office/drawing/2014/main" id="{C8E5DEF3-87AF-4386-9180-D8AC75DB4116}"/>
               </a:ext>
             </a:extLst>
           </p:cNvPr>
@@ -41771,7 +41771,7 @@
           <p:cNvPr id="55" name="">
             <a:extLst xmlns:a="http://schemas.openxmlformats.org/drawingml/2006/main">
               <a:ext uri="{FF2B5EF4-FFF2-40B4-BE49-F238E27FC236}">
-                <a16:creationId xmlns:a16="http://schemas.microsoft.com/office/drawing/2014/main" id="{5D9C64D3-DF8D-4888-9FEB-65A5377CC81A}"/>
+                <a16:creationId xmlns:a16="http://schemas.microsoft.com/office/drawing/2014/main" id="{A7CC1D58-F52B-40E3-A468-DD51A0E12B31}"/>
               </a:ext>
             </a:extLst>
           </p:cNvPr>
@@ -41829,7 +41829,7 @@
           <p:cNvPr id="56" name="">
             <a:extLst xmlns:a="http://schemas.openxmlformats.org/drawingml/2006/main">
               <a:ext uri="{FF2B5EF4-FFF2-40B4-BE49-F238E27FC236}">
-                <a16:creationId xmlns:a16="http://schemas.microsoft.com/office/drawing/2014/main" id="{13F11F02-6FB6-42B7-87B5-B8ECAECAB570}"/>
+                <a16:creationId xmlns:a16="http://schemas.microsoft.com/office/drawing/2014/main" id="{D31A8E24-66D0-44B7-9C40-510D8618C42A}"/>
               </a:ext>
             </a:extLst>
           </p:cNvPr>
@@ -41862,7 +41862,7 @@
           <p:cNvPr id="57" name="">
             <a:extLst xmlns:a="http://schemas.openxmlformats.org/drawingml/2006/main">
               <a:ext uri="{FF2B5EF4-FFF2-40B4-BE49-F238E27FC236}">
-                <a16:creationId xmlns:a16="http://schemas.microsoft.com/office/drawing/2014/main" id="{EB65076C-6DEE-4002-8C3B-F81A748951DF}"/>
+                <a16:creationId xmlns:a16="http://schemas.microsoft.com/office/drawing/2014/main" id="{7D1A1CD7-C623-4D29-B9BB-FD69D069F70F}"/>
               </a:ext>
             </a:extLst>
           </p:cNvPr>
@@ -41920,7 +41920,7 @@
           <p:cNvPr id="58" name="">
             <a:extLst xmlns:a="http://schemas.openxmlformats.org/drawingml/2006/main">
               <a:ext uri="{FF2B5EF4-FFF2-40B4-BE49-F238E27FC236}">
-                <a16:creationId xmlns:a16="http://schemas.microsoft.com/office/drawing/2014/main" id="{1D3E2DDE-262F-413B-A379-6143B00D9035}"/>
+                <a16:creationId xmlns:a16="http://schemas.microsoft.com/office/drawing/2014/main" id="{A91EFBFC-9AAC-44A7-A034-CA35D80D8618}"/>
               </a:ext>
             </a:extLst>
           </p:cNvPr>
@@ -41953,7 +41953,7 @@
           <p:cNvPr id="59" name="">
             <a:extLst xmlns:a="http://schemas.openxmlformats.org/drawingml/2006/main">
               <a:ext uri="{FF2B5EF4-FFF2-40B4-BE49-F238E27FC236}">
-                <a16:creationId xmlns:a16="http://schemas.microsoft.com/office/drawing/2014/main" id="{6DF7D7D4-DCBB-4DF0-AFB6-979A38AB2DF4}"/>
+                <a16:creationId xmlns:a16="http://schemas.microsoft.com/office/drawing/2014/main" id="{A55C0B49-3D08-491E-893D-D0E5709DA8D7}"/>
               </a:ext>
             </a:extLst>
           </p:cNvPr>
@@ -42011,7 +42011,7 @@
           <p:cNvPr id="60" name="">
             <a:extLst xmlns:a="http://schemas.openxmlformats.org/drawingml/2006/main">
               <a:ext uri="{FF2B5EF4-FFF2-40B4-BE49-F238E27FC236}">
-                <a16:creationId xmlns:a16="http://schemas.microsoft.com/office/drawing/2014/main" id="{971F565D-B1C1-4F42-B656-4E6078C49C37}"/>
+                <a16:creationId xmlns:a16="http://schemas.microsoft.com/office/drawing/2014/main" id="{F32874B0-4005-4A79-B530-CF06524326D7}"/>
               </a:ext>
             </a:extLst>
           </p:cNvPr>
@@ -42044,7 +42044,7 @@
           <p:cNvPr id="61" name="">
             <a:extLst xmlns:a="http://schemas.openxmlformats.org/drawingml/2006/main">
               <a:ext uri="{FF2B5EF4-FFF2-40B4-BE49-F238E27FC236}">
-                <a16:creationId xmlns:a16="http://schemas.microsoft.com/office/drawing/2014/main" id="{44244403-F9BB-42F1-9473-C88269F88107}"/>
+                <a16:creationId xmlns:a16="http://schemas.microsoft.com/office/drawing/2014/main" id="{7AEB97A8-1238-47CA-9B95-2ED1DB1DFE4E}"/>
               </a:ext>
             </a:extLst>
           </p:cNvPr>
@@ -42102,7 +42102,7 @@
           <p:cNvPr id="62" name="">
             <a:extLst xmlns:a="http://schemas.openxmlformats.org/drawingml/2006/main">
               <a:ext uri="{FF2B5EF4-FFF2-40B4-BE49-F238E27FC236}">
-                <a16:creationId xmlns:a16="http://schemas.microsoft.com/office/drawing/2014/main" id="{0003E831-D9A1-4AC2-8284-565D0F6EBE4C}"/>
+                <a16:creationId xmlns:a16="http://schemas.microsoft.com/office/drawing/2014/main" id="{45934CEA-E33E-4A84-AB9A-801E60305318}"/>
               </a:ext>
             </a:extLst>
           </p:cNvPr>
@@ -42135,7 +42135,7 @@
           <p:cNvPr id="63" name="">
             <a:extLst xmlns:a="http://schemas.openxmlformats.org/drawingml/2006/main">
               <a:ext uri="{FF2B5EF4-FFF2-40B4-BE49-F238E27FC236}">
-                <a16:creationId xmlns:a16="http://schemas.microsoft.com/office/drawing/2014/main" id="{DC41F7E3-1690-496F-9460-4643C31C4826}"/>
+                <a16:creationId xmlns:a16="http://schemas.microsoft.com/office/drawing/2014/main" id="{748748B9-ECD3-435C-ADE9-7CE59C041A1F}"/>
               </a:ext>
             </a:extLst>
           </p:cNvPr>
@@ -42193,7 +42193,7 @@
           <p:cNvPr id="64" name="">
             <a:extLst xmlns:a="http://schemas.openxmlformats.org/drawingml/2006/main">
               <a:ext uri="{FF2B5EF4-FFF2-40B4-BE49-F238E27FC236}">
-                <a16:creationId xmlns:a16="http://schemas.microsoft.com/office/drawing/2014/main" id="{9A807C33-78A9-4758-84B5-04E9B0B65524}"/>
+                <a16:creationId xmlns:a16="http://schemas.microsoft.com/office/drawing/2014/main" id="{5D817CF9-2F3A-41B5-8CB6-76724402D847}"/>
               </a:ext>
             </a:extLst>
           </p:cNvPr>
@@ -42226,7 +42226,7 @@
           <p:cNvPr id="65" name="">
             <a:extLst xmlns:a="http://schemas.openxmlformats.org/drawingml/2006/main">
               <a:ext uri="{FF2B5EF4-FFF2-40B4-BE49-F238E27FC236}">
-                <a16:creationId xmlns:a16="http://schemas.microsoft.com/office/drawing/2014/main" id="{AE22F36D-8547-4856-A53E-D2166C95DC51}"/>
+                <a16:creationId xmlns:a16="http://schemas.microsoft.com/office/drawing/2014/main" id="{DAE079BC-1E24-49F0-8A6C-10D8FF60FBF5}"/>
               </a:ext>
             </a:extLst>
           </p:cNvPr>
@@ -42284,7 +42284,7 @@
           <p:cNvPr id="66" name="">
             <a:extLst xmlns:a="http://schemas.openxmlformats.org/drawingml/2006/main">
               <a:ext uri="{FF2B5EF4-FFF2-40B4-BE49-F238E27FC236}">
-                <a16:creationId xmlns:a16="http://schemas.microsoft.com/office/drawing/2014/main" id="{1C897F5A-DE8E-486F-BD4E-97DB3D76CD42}"/>
+                <a16:creationId xmlns:a16="http://schemas.microsoft.com/office/drawing/2014/main" id="{0D4EBC9B-2318-4031-BCF5-53D5EBDF4715}"/>
               </a:ext>
             </a:extLst>
           </p:cNvPr>
@@ -42317,7 +42317,7 @@
           <p:cNvPr id="67" name="">
             <a:extLst xmlns:a="http://schemas.openxmlformats.org/drawingml/2006/main">
               <a:ext uri="{FF2B5EF4-FFF2-40B4-BE49-F238E27FC236}">
-                <a16:creationId xmlns:a16="http://schemas.microsoft.com/office/drawing/2014/main" id="{87148C88-3184-4F40-8019-11FBCB28ABA3}"/>
+                <a16:creationId xmlns:a16="http://schemas.microsoft.com/office/drawing/2014/main" id="{F0F238EF-CC8B-4AE4-81A0-50EB5D297941}"/>
               </a:ext>
             </a:extLst>
           </p:cNvPr>
@@ -42375,7 +42375,7 @@
           <p:cNvPr id="68" name="">
             <a:extLst xmlns:a="http://schemas.openxmlformats.org/drawingml/2006/main">
               <a:ext uri="{FF2B5EF4-FFF2-40B4-BE49-F238E27FC236}">
-                <a16:creationId xmlns:a16="http://schemas.microsoft.com/office/drawing/2014/main" id="{A16716FD-ADAF-47D1-9CE2-738657480057}"/>
+                <a16:creationId xmlns:a16="http://schemas.microsoft.com/office/drawing/2014/main" id="{E42B6C04-4DD5-4117-9E3F-8F16067AF365}"/>
               </a:ext>
             </a:extLst>
           </p:cNvPr>
@@ -42408,7 +42408,7 @@
           <p:cNvPr id="69" name="">
             <a:extLst xmlns:a="http://schemas.openxmlformats.org/drawingml/2006/main">
               <a:ext uri="{FF2B5EF4-FFF2-40B4-BE49-F238E27FC236}">
-                <a16:creationId xmlns:a16="http://schemas.microsoft.com/office/drawing/2014/main" id="{478A157B-C6EE-4A0B-8E57-EE80C28AD673}"/>
+                <a16:creationId xmlns:a16="http://schemas.microsoft.com/office/drawing/2014/main" id="{3FE5F49B-0700-4D5B-B7B4-1400A06FEFB8}"/>
               </a:ext>
             </a:extLst>
           </p:cNvPr>
@@ -42466,7 +42466,7 @@
           <p:cNvPr id="70" name="">
             <a:extLst xmlns:a="http://schemas.openxmlformats.org/drawingml/2006/main">
               <a:ext uri="{FF2B5EF4-FFF2-40B4-BE49-F238E27FC236}">
-                <a16:creationId xmlns:a16="http://schemas.microsoft.com/office/drawing/2014/main" id="{843B420F-857A-443A-A32D-E4CE4A388DFC}"/>
+                <a16:creationId xmlns:a16="http://schemas.microsoft.com/office/drawing/2014/main" id="{1684F090-16E5-4ADF-B9CE-0793A0333A75}"/>
               </a:ext>
             </a:extLst>
           </p:cNvPr>
@@ -42499,7 +42499,7 @@
           <p:cNvPr id="71" name="">
             <a:extLst xmlns:a="http://schemas.openxmlformats.org/drawingml/2006/main">
               <a:ext uri="{FF2B5EF4-FFF2-40B4-BE49-F238E27FC236}">
-                <a16:creationId xmlns:a16="http://schemas.microsoft.com/office/drawing/2014/main" id="{2F99E6A3-7E8D-4D2F-BEF7-15F95BA0DE97}"/>
+                <a16:creationId xmlns:a16="http://schemas.microsoft.com/office/drawing/2014/main" id="{A56D10F4-DC8B-4E61-A35A-B8B27138D474}"/>
               </a:ext>
             </a:extLst>
           </p:cNvPr>
@@ -42557,7 +42557,7 @@
           <p:cNvPr id="72" name="">
             <a:extLst xmlns:a="http://schemas.openxmlformats.org/drawingml/2006/main">
               <a:ext uri="{FF2B5EF4-FFF2-40B4-BE49-F238E27FC236}">
-                <a16:creationId xmlns:a16="http://schemas.microsoft.com/office/drawing/2014/main" id="{C4844C4A-3A65-494D-A62E-18527F672E20}"/>
+                <a16:creationId xmlns:a16="http://schemas.microsoft.com/office/drawing/2014/main" id="{01DE36DF-432B-48D0-BB43-0956E5C9DBF3}"/>
               </a:ext>
             </a:extLst>
           </p:cNvPr>
@@ -42590,7 +42590,7 @@
           <p:cNvPr id="73" name="">
             <a:extLst xmlns:a="http://schemas.openxmlformats.org/drawingml/2006/main">
               <a:ext uri="{FF2B5EF4-FFF2-40B4-BE49-F238E27FC236}">
-                <a16:creationId xmlns:a16="http://schemas.microsoft.com/office/drawing/2014/main" id="{00E10BC3-E20C-4BF5-9623-102F9F7DDA60}"/>
+                <a16:creationId xmlns:a16="http://schemas.microsoft.com/office/drawing/2014/main" id="{CA180D1F-99E5-4807-A0DD-C8492DD9C349}"/>
               </a:ext>
             </a:extLst>
           </p:cNvPr>
@@ -42648,7 +42648,7 @@
           <p:cNvPr id="74" name="">
             <a:extLst xmlns:a="http://schemas.openxmlformats.org/drawingml/2006/main">
               <a:ext uri="{FF2B5EF4-FFF2-40B4-BE49-F238E27FC236}">
-                <a16:creationId xmlns:a16="http://schemas.microsoft.com/office/drawing/2014/main" id="{2F381B31-72A7-4AF1-8FD0-BE99008C016C}"/>
+                <a16:creationId xmlns:a16="http://schemas.microsoft.com/office/drawing/2014/main" id="{4B3EB2D5-D137-4E8A-80E6-5D38EE8A3F0D}"/>
               </a:ext>
             </a:extLst>
           </p:cNvPr>
@@ -42681,7 +42681,7 @@
           <p:cNvPr id="75" name="">
             <a:extLst xmlns:a="http://schemas.openxmlformats.org/drawingml/2006/main">
               <a:ext uri="{FF2B5EF4-FFF2-40B4-BE49-F238E27FC236}">
-                <a16:creationId xmlns:a16="http://schemas.microsoft.com/office/drawing/2014/main" id="{9218C341-453C-45B9-9E30-C94003D96053}"/>
+                <a16:creationId xmlns:a16="http://schemas.microsoft.com/office/drawing/2014/main" id="{A017C262-D489-4D37-97B3-D7DD95A2DF66}"/>
               </a:ext>
             </a:extLst>
           </p:cNvPr>
@@ -42739,7 +42739,7 @@
           <p:cNvPr id="76" name="">
             <a:extLst xmlns:a="http://schemas.openxmlformats.org/drawingml/2006/main">
               <a:ext uri="{FF2B5EF4-FFF2-40B4-BE49-F238E27FC236}">
-                <a16:creationId xmlns:a16="http://schemas.microsoft.com/office/drawing/2014/main" id="{CC6BCC20-DC94-4D1A-A838-A99BDBD1CBBB}"/>
+                <a16:creationId xmlns:a16="http://schemas.microsoft.com/office/drawing/2014/main" id="{556D7A20-E6D5-472A-963E-727D84717E40}"/>
               </a:ext>
             </a:extLst>
           </p:cNvPr>
@@ -42772,7 +42772,7 @@
           <p:cNvPr id="77" name="">
             <a:extLst xmlns:a="http://schemas.openxmlformats.org/drawingml/2006/main">
               <a:ext uri="{FF2B5EF4-FFF2-40B4-BE49-F238E27FC236}">
-                <a16:creationId xmlns:a16="http://schemas.microsoft.com/office/drawing/2014/main" id="{607D4B2A-13FD-459F-9B5F-A1C83CCD245C}"/>
+                <a16:creationId xmlns:a16="http://schemas.microsoft.com/office/drawing/2014/main" id="{34D2E922-8957-42AC-9951-6B6B1338CFD1}"/>
               </a:ext>
             </a:extLst>
           </p:cNvPr>
@@ -42830,7 +42830,7 @@
           <p:cNvPr id="78" name="">
             <a:extLst xmlns:a="http://schemas.openxmlformats.org/drawingml/2006/main">
               <a:ext uri="{FF2B5EF4-FFF2-40B4-BE49-F238E27FC236}">
-                <a16:creationId xmlns:a16="http://schemas.microsoft.com/office/drawing/2014/main" id="{7F4FF338-27C7-467F-9D61-2B26713246B7}"/>
+                <a16:creationId xmlns:a16="http://schemas.microsoft.com/office/drawing/2014/main" id="{176ADFA7-29E6-4C00-A6C9-336762518F70}"/>
               </a:ext>
             </a:extLst>
           </p:cNvPr>
@@ -42888,7 +42888,7 @@
           <p:cNvPr id="79" name="">
             <a:extLst xmlns:a="http://schemas.openxmlformats.org/drawingml/2006/main">
               <a:ext uri="{FF2B5EF4-FFF2-40B4-BE49-F238E27FC236}">
-                <a16:creationId xmlns:a16="http://schemas.microsoft.com/office/drawing/2014/main" id="{089FD506-02D2-4A19-8E23-C86F1CF86B97}"/>
+                <a16:creationId xmlns:a16="http://schemas.microsoft.com/office/drawing/2014/main" id="{BBBCCC1C-823C-46D7-8964-CD0A8E50DD69}"/>
               </a:ext>
             </a:extLst>
           </p:cNvPr>
@@ -42946,7 +42946,7 @@
           <p:cNvPr id="80" name="">
             <a:extLst xmlns:a="http://schemas.openxmlformats.org/drawingml/2006/main">
               <a:ext uri="{FF2B5EF4-FFF2-40B4-BE49-F238E27FC236}">
-                <a16:creationId xmlns:a16="http://schemas.microsoft.com/office/drawing/2014/main" id="{C151045D-0CBD-48C7-843C-0A2D4A6A4977}"/>
+                <a16:creationId xmlns:a16="http://schemas.microsoft.com/office/drawing/2014/main" id="{A04BC9E2-A52B-4239-8B14-497AF1F0C326}"/>
               </a:ext>
             </a:extLst>
           </p:cNvPr>
@@ -42979,7 +42979,7 @@
           <p:cNvPr id="81" name="">
             <a:extLst xmlns:a="http://schemas.openxmlformats.org/drawingml/2006/main">
               <a:ext uri="{FF2B5EF4-FFF2-40B4-BE49-F238E27FC236}">
-                <a16:creationId xmlns:a16="http://schemas.microsoft.com/office/drawing/2014/main" id="{7386C535-1AA6-4F94-AA0E-39D1474E5A47}"/>
+                <a16:creationId xmlns:a16="http://schemas.microsoft.com/office/drawing/2014/main" id="{D18F7584-9308-468D-B0CB-E75BDAB35F2C}"/>
               </a:ext>
             </a:extLst>
           </p:cNvPr>
@@ -43037,7 +43037,7 @@
           <p:cNvPr id="82" name="">
             <a:extLst xmlns:a="http://schemas.openxmlformats.org/drawingml/2006/main">
               <a:ext uri="{FF2B5EF4-FFF2-40B4-BE49-F238E27FC236}">
-                <a16:creationId xmlns:a16="http://schemas.microsoft.com/office/drawing/2014/main" id="{BDB8525A-EB54-42DE-B280-6698D828190F}"/>
+                <a16:creationId xmlns:a16="http://schemas.microsoft.com/office/drawing/2014/main" id="{AD97CAC5-9AA0-4D49-BE16-41958FE7B859}"/>
               </a:ext>
             </a:extLst>
           </p:cNvPr>
@@ -43095,7 +43095,7 @@
           <p:cNvPr id="83" name="">
             <a:extLst xmlns:a="http://schemas.openxmlformats.org/drawingml/2006/main">
               <a:ext uri="{FF2B5EF4-FFF2-40B4-BE49-F238E27FC236}">
-                <a16:creationId xmlns:a16="http://schemas.microsoft.com/office/drawing/2014/main" id="{37724473-74C8-48FD-9EC2-0063DEB11E49}"/>
+                <a16:creationId xmlns:a16="http://schemas.microsoft.com/office/drawing/2014/main" id="{46231B0F-9F5B-457A-8FBE-BD12303C9F2B}"/>
               </a:ext>
             </a:extLst>
           </p:cNvPr>
@@ -43153,7 +43153,7 @@
           <p:cNvPr id="84" name="">
             <a:extLst xmlns:a="http://schemas.openxmlformats.org/drawingml/2006/main">
               <a:ext uri="{FF2B5EF4-FFF2-40B4-BE49-F238E27FC236}">
-                <a16:creationId xmlns:a16="http://schemas.microsoft.com/office/drawing/2014/main" id="{843DB838-D4FF-4055-B933-7941C54B93BD}"/>
+                <a16:creationId xmlns:a16="http://schemas.microsoft.com/office/drawing/2014/main" id="{2078D2E4-9DBC-4480-A89A-77AC612AC325}"/>
               </a:ext>
             </a:extLst>
           </p:cNvPr>
@@ -43171,7 +43171,7 @@
             <a:avLst/>
           </a:prstGeom>
           <a:solidFill xmlns:a="http://schemas.openxmlformats.org/drawingml/2006/main">
-            <a:srgbClr val="FFF4F4"/>
+            <a:srgbClr val="F7F7F7"/>
           </a:solidFill>
           <a:ln xmlns:a="http://schemas.openxmlformats.org/drawingml/2006/main" w="9525">
             <a:solidFill>
@@ -43186,7 +43186,7 @@
           <p:cNvPr id="85" name="">
             <a:extLst xmlns:a="http://schemas.openxmlformats.org/drawingml/2006/main">
               <a:ext uri="{FF2B5EF4-FFF2-40B4-BE49-F238E27FC236}">
-                <a16:creationId xmlns:a16="http://schemas.microsoft.com/office/drawing/2014/main" id="{D0655B7A-F0E9-4F6E-9582-940368D99658}"/>
+                <a16:creationId xmlns:a16="http://schemas.microsoft.com/office/drawing/2014/main" id="{5133CBB7-365A-4609-83CA-D0F49208F152}"/>
               </a:ext>
             </a:extLst>
           </p:cNvPr>
@@ -43244,7 +43244,7 @@
           <p:cNvPr id="86" name="">
             <a:extLst xmlns:a="http://schemas.openxmlformats.org/drawingml/2006/main">
               <a:ext uri="{FF2B5EF4-FFF2-40B4-BE49-F238E27FC236}">
-                <a16:creationId xmlns:a16="http://schemas.microsoft.com/office/drawing/2014/main" id="{78A088ED-8206-43FE-97DB-538BB122E844}"/>
+                <a16:creationId xmlns:a16="http://schemas.microsoft.com/office/drawing/2014/main" id="{443A3570-08BE-49AF-9030-DF5D7010897F}"/>
               </a:ext>
             </a:extLst>
           </p:cNvPr>
@@ -43302,7 +43302,7 @@
           <p:cNvPr id="87" name="">
             <a:extLst xmlns:a="http://schemas.openxmlformats.org/drawingml/2006/main">
               <a:ext uri="{FF2B5EF4-FFF2-40B4-BE49-F238E27FC236}">
-                <a16:creationId xmlns:a16="http://schemas.microsoft.com/office/drawing/2014/main" id="{9AA11A02-34EA-4A42-9BB9-2FE0FC51FA15}"/>
+                <a16:creationId xmlns:a16="http://schemas.microsoft.com/office/drawing/2014/main" id="{94AB90DB-9039-46D8-9626-8673808461E3}"/>
               </a:ext>
             </a:extLst>
           </p:cNvPr>
@@ -43360,7 +43360,7 @@
           <p:cNvPr id="88" name="">
             <a:extLst xmlns:a="http://schemas.openxmlformats.org/drawingml/2006/main">
               <a:ext uri="{FF2B5EF4-FFF2-40B4-BE49-F238E27FC236}">
-                <a16:creationId xmlns:a16="http://schemas.microsoft.com/office/drawing/2014/main" id="{7F05339D-E896-427A-8C49-27D2A86AA0D0}"/>
+                <a16:creationId xmlns:a16="http://schemas.microsoft.com/office/drawing/2014/main" id="{F0DDC1B2-B9D6-4F23-883F-703615D23D43}"/>
               </a:ext>
             </a:extLst>
           </p:cNvPr>
@@ -43393,7 +43393,7 @@
           <p:cNvPr id="89" name="">
             <a:extLst xmlns:a="http://schemas.openxmlformats.org/drawingml/2006/main">
               <a:ext uri="{FF2B5EF4-FFF2-40B4-BE49-F238E27FC236}">
-                <a16:creationId xmlns:a16="http://schemas.microsoft.com/office/drawing/2014/main" id="{CD9A742B-A834-4F7B-8505-3665D8637017}"/>
+                <a16:creationId xmlns:a16="http://schemas.microsoft.com/office/drawing/2014/main" id="{6515EC68-F1D5-4853-A08A-E4B46F9C0574}"/>
               </a:ext>
             </a:extLst>
           </p:cNvPr>
@@ -43451,7 +43451,7 @@
           <p:cNvPr id="90" name="">
             <a:extLst xmlns:a="http://schemas.openxmlformats.org/drawingml/2006/main">
               <a:ext uri="{FF2B5EF4-FFF2-40B4-BE49-F238E27FC236}">
-                <a16:creationId xmlns:a16="http://schemas.microsoft.com/office/drawing/2014/main" id="{FC63A5A6-1523-4B11-987B-8586071B9098}"/>
+                <a16:creationId xmlns:a16="http://schemas.microsoft.com/office/drawing/2014/main" id="{21B01C32-2384-4AAD-8858-6D2D9A74EA1A}"/>
               </a:ext>
             </a:extLst>
           </p:cNvPr>
@@ -43509,7 +43509,7 @@
           <p:cNvPr id="91" name="">
             <a:extLst xmlns:a="http://schemas.openxmlformats.org/drawingml/2006/main">
               <a:ext uri="{FF2B5EF4-FFF2-40B4-BE49-F238E27FC236}">
-                <a16:creationId xmlns:a16="http://schemas.microsoft.com/office/drawing/2014/main" id="{BFF0AAEA-C838-4911-9391-1D7B3D1077AE}"/>
+                <a16:creationId xmlns:a16="http://schemas.microsoft.com/office/drawing/2014/main" id="{6B5D82AC-8A83-410C-8671-6DB7FB3D671D}"/>
               </a:ext>
             </a:extLst>
           </p:cNvPr>
@@ -43567,7 +43567,7 @@
           <p:cNvPr id="92" name="">
             <a:extLst xmlns:a="http://schemas.openxmlformats.org/drawingml/2006/main">
               <a:ext uri="{FF2B5EF4-FFF2-40B4-BE49-F238E27FC236}">
-                <a16:creationId xmlns:a16="http://schemas.microsoft.com/office/drawing/2014/main" id="{426BB219-C6F0-4CCE-8034-41ADDA618AE4}"/>
+                <a16:creationId xmlns:a16="http://schemas.microsoft.com/office/drawing/2014/main" id="{27ECD054-3BED-49F0-B7DB-FCB71E2336CA}"/>
               </a:ext>
             </a:extLst>
           </p:cNvPr>
@@ -43600,7 +43600,7 @@
           <p:cNvPr id="93" name="">
             <a:extLst xmlns:a="http://schemas.openxmlformats.org/drawingml/2006/main">
               <a:ext uri="{FF2B5EF4-FFF2-40B4-BE49-F238E27FC236}">
-                <a16:creationId xmlns:a16="http://schemas.microsoft.com/office/drawing/2014/main" id="{563E8E41-8BBA-44EE-8196-BC4B1614F1F8}"/>
+                <a16:creationId xmlns:a16="http://schemas.microsoft.com/office/drawing/2014/main" id="{AC41F55C-F54C-4555-AC1F-0784B7048E23}"/>
               </a:ext>
             </a:extLst>
           </p:cNvPr>
@@ -43658,7 +43658,7 @@
                 <a:latin typeface="Microsoft YaHei"/>
                 <a:ea typeface="Microsoft YaHei"/>
                 <a:cs typeface="Microsoft YaHei"/>
-                <a:hlinkClick xmlns:r="http://schemas.openxmlformats.org/officeDocument/2006/relationships" r:id="Rc8f47a39a1f349a8"/>
+                <a:hlinkClick xmlns:r="http://schemas.openxmlformats.org/officeDocument/2006/relationships" r:id="Rf549340181d84a0d"/>
               </a:rPr>
               <a:t>Claude Workflow</a:t>
             </a:r>
@@ -43670,7 +43670,7 @@
                 <a:latin typeface="Microsoft YaHei"/>
                 <a:ea typeface="Microsoft YaHei"/>
                 <a:cs typeface="Microsoft YaHei"/>
-                <a:hlinkClick xmlns:r="http://schemas.openxmlformats.org/officeDocument/2006/relationships" r:id="Re4b0d695f856405f"/>
+                <a:hlinkClick xmlns:r="http://schemas.openxmlformats.org/officeDocument/2006/relationships" r:id="R3fb1a9ef3a234751"/>
               </a:rPr>
               <a:t> · Claude Goal</a:t>
             </a:r>
@@ -43682,7 +43682,7 @@
                 <a:latin typeface="Microsoft YaHei"/>
                 <a:ea typeface="Microsoft YaHei"/>
                 <a:cs typeface="Microsoft YaHei"/>
-                <a:hlinkClick xmlns:r="http://schemas.openxmlformats.org/officeDocument/2006/relationships" r:id="R7f64efe720c04860"/>
+                <a:hlinkClick xmlns:r="http://schemas.openxmlformats.org/officeDocument/2006/relationships" r:id="Rd0fc933a36e3419f"/>
               </a:rPr>
               <a:t> · Qoder SDD</a:t>
             </a:r>
@@ -43694,7 +43694,7 @@
                 <a:latin typeface="Microsoft YaHei"/>
                 <a:ea typeface="Microsoft YaHei"/>
                 <a:cs typeface="Microsoft YaHei"/>
-                <a:hlinkClick xmlns:r="http://schemas.openxmlformats.org/officeDocument/2006/relationships" r:id="Re8efdc8b7b454a42"/>
+                <a:hlinkClick xmlns:r="http://schemas.openxmlformats.org/officeDocument/2006/relationships" r:id="R47c7b45955cb4001"/>
               </a:rPr>
               <a:t> · Trae SOLO</a:t>
             </a:r>
@@ -43706,7 +43706,7 @@
           <p:cNvPr id="94" name="">
             <a:extLst xmlns:a="http://schemas.openxmlformats.org/drawingml/2006/main">
               <a:ext uri="{FF2B5EF4-FFF2-40B4-BE49-F238E27FC236}">
-                <a16:creationId xmlns:a16="http://schemas.microsoft.com/office/drawing/2014/main" id="{FE0BC3DA-08EC-48CA-A451-8261ED59B533}"/>
+                <a16:creationId xmlns:a16="http://schemas.microsoft.com/office/drawing/2014/main" id="{7422F571-AA98-4B59-B202-D4BECB8A033C}"/>
               </a:ext>
             </a:extLst>
           </p:cNvPr>
@@ -43762,7 +43762,7 @@
     </p:spTree>
     <p:extLst>
       <p:ext uri="{BB962C8B-B14F-4D97-AF65-F5344CB8AC3E}">
-        <p14:creationId xmlns:p14="http://schemas.microsoft.com/office/powerpoint/2010/main" val="207526747"/>
+        <p14:creationId xmlns:p14="http://schemas.microsoft.com/office/powerpoint/2010/main" val="1527785648"/>
       </p:ext>
     </p:extLst>
   </p:cSld>
@@ -43793,7 +43793,7 @@
           <p:cNvPr id="42" name="">
             <a:extLst xmlns:a="http://schemas.openxmlformats.org/drawingml/2006/main">
               <a:ext uri="{FF2B5EF4-FFF2-40B4-BE49-F238E27FC236}">
-                <a16:creationId xmlns:a16="http://schemas.microsoft.com/office/drawing/2014/main" id="{D53F708F-5055-4C37-93C9-2DB4F758696D}"/>
+                <a16:creationId xmlns:a16="http://schemas.microsoft.com/office/drawing/2014/main" id="{4013650C-B360-4440-A305-48CE6D032793}"/>
               </a:ext>
             </a:extLst>
           </p:cNvPr>
@@ -43826,7 +43826,7 @@
           <p:cNvPr id="2" name="">
             <a:extLst xmlns:a="http://schemas.openxmlformats.org/drawingml/2006/main">
               <a:ext uri="{FF2B5EF4-FFF2-40B4-BE49-F238E27FC236}">
-                <a16:creationId xmlns:a16="http://schemas.microsoft.com/office/drawing/2014/main" id="{3137DA19-BBCF-478C-BFF5-7696DB1C98C9}"/>
+                <a16:creationId xmlns:a16="http://schemas.microsoft.com/office/drawing/2014/main" id="{1901B8BA-E998-48F5-98A4-202BF0BE78A6}"/>
               </a:ext>
             </a:extLst>
           </p:cNvPr>
@@ -43884,7 +43884,7 @@
           <p:cNvPr id="3" name="">
             <a:extLst xmlns:a="http://schemas.openxmlformats.org/drawingml/2006/main">
               <a:ext uri="{FF2B5EF4-FFF2-40B4-BE49-F238E27FC236}">
-                <a16:creationId xmlns:a16="http://schemas.microsoft.com/office/drawing/2014/main" id="{1D2135B7-2526-46C1-B7D3-49AA021F2D68}"/>
+                <a16:creationId xmlns:a16="http://schemas.microsoft.com/office/drawing/2014/main" id="{8A16017A-F703-4876-B3CE-5005973649E2}"/>
               </a:ext>
             </a:extLst>
           </p:cNvPr>
@@ -43942,7 +43942,7 @@
           <p:cNvPr id="4" name="">
             <a:extLst xmlns:a="http://schemas.openxmlformats.org/drawingml/2006/main">
               <a:ext uri="{FF2B5EF4-FFF2-40B4-BE49-F238E27FC236}">
-                <a16:creationId xmlns:a16="http://schemas.microsoft.com/office/drawing/2014/main" id="{975FFA38-AB38-4601-A0A1-1543EDD36F7A}"/>
+                <a16:creationId xmlns:a16="http://schemas.microsoft.com/office/drawing/2014/main" id="{B1186722-90D0-44FD-A140-B8DB40C38EF3}"/>
               </a:ext>
             </a:extLst>
           </p:cNvPr>
@@ -43960,7 +43960,7 @@
             <a:avLst/>
           </a:prstGeom>
           <a:solidFill xmlns:a="http://schemas.openxmlformats.org/drawingml/2006/main">
-            <a:srgbClr val="FFF4F4"/>
+            <a:srgbClr val="F7F7F7"/>
           </a:solidFill>
           <a:ln xmlns:a="http://schemas.openxmlformats.org/drawingml/2006/main" w="9525">
             <a:solidFill>
@@ -43975,7 +43975,7 @@
           <p:cNvPr id="5" name="">
             <a:extLst xmlns:a="http://schemas.openxmlformats.org/drawingml/2006/main">
               <a:ext uri="{FF2B5EF4-FFF2-40B4-BE49-F238E27FC236}">
-                <a16:creationId xmlns:a16="http://schemas.microsoft.com/office/drawing/2014/main" id="{693B5913-D11D-4648-8EC3-8A5156E61D74}"/>
+                <a16:creationId xmlns:a16="http://schemas.microsoft.com/office/drawing/2014/main" id="{7010A234-BFD5-4D2F-A4BA-16A711925C1D}"/>
               </a:ext>
             </a:extLst>
           </p:cNvPr>
@@ -44033,7 +44033,7 @@
           <p:cNvPr id="6" name="">
             <a:extLst xmlns:a="http://schemas.openxmlformats.org/drawingml/2006/main">
               <a:ext uri="{FF2B5EF4-FFF2-40B4-BE49-F238E27FC236}">
-                <a16:creationId xmlns:a16="http://schemas.microsoft.com/office/drawing/2014/main" id="{8ED2FF54-4AF9-49CF-B935-7FE9653DD960}"/>
+                <a16:creationId xmlns:a16="http://schemas.microsoft.com/office/drawing/2014/main" id="{D3DB53FF-6A0A-4FFF-9F68-BAE383C95417}"/>
               </a:ext>
             </a:extLst>
           </p:cNvPr>
@@ -44091,7 +44091,7 @@
           <p:cNvPr id="7" name="">
             <a:extLst xmlns:a="http://schemas.openxmlformats.org/drawingml/2006/main">
               <a:ext uri="{FF2B5EF4-FFF2-40B4-BE49-F238E27FC236}">
-                <a16:creationId xmlns:a16="http://schemas.microsoft.com/office/drawing/2014/main" id="{38051CAA-B849-4926-9B84-33E257BFCFA4}"/>
+                <a16:creationId xmlns:a16="http://schemas.microsoft.com/office/drawing/2014/main" id="{DD2FD795-F856-4595-89E4-8F4FC4303DBE}"/>
               </a:ext>
             </a:extLst>
           </p:cNvPr>
@@ -44124,7 +44124,7 @@
           <p:cNvPr id="8" name="">
             <a:extLst xmlns:a="http://schemas.openxmlformats.org/drawingml/2006/main">
               <a:ext uri="{FF2B5EF4-FFF2-40B4-BE49-F238E27FC236}">
-                <a16:creationId xmlns:a16="http://schemas.microsoft.com/office/drawing/2014/main" id="{809A29CB-EC5F-4088-AFB4-F79DD0E51CBD}"/>
+                <a16:creationId xmlns:a16="http://schemas.microsoft.com/office/drawing/2014/main" id="{4AFABD46-4A02-4B10-B14B-19856B9E738C}"/>
               </a:ext>
             </a:extLst>
           </p:cNvPr>
@@ -44157,7 +44157,7 @@
           <p:cNvPr id="9" name="">
             <a:extLst xmlns:a="http://schemas.openxmlformats.org/drawingml/2006/main">
               <a:ext uri="{FF2B5EF4-FFF2-40B4-BE49-F238E27FC236}">
-                <a16:creationId xmlns:a16="http://schemas.microsoft.com/office/drawing/2014/main" id="{B8558661-00C5-4FBC-9FD6-51687316ECAB}"/>
+                <a16:creationId xmlns:a16="http://schemas.microsoft.com/office/drawing/2014/main" id="{16DB2867-3BEF-48DF-98F5-BBCE45734FA1}"/>
               </a:ext>
             </a:extLst>
           </p:cNvPr>
@@ -44215,7 +44215,7 @@
           <p:cNvPr id="10" name="">
             <a:extLst xmlns:a="http://schemas.openxmlformats.org/drawingml/2006/main">
               <a:ext uri="{FF2B5EF4-FFF2-40B4-BE49-F238E27FC236}">
-                <a16:creationId xmlns:a16="http://schemas.microsoft.com/office/drawing/2014/main" id="{31115F42-C9F8-4FAB-A0AB-75280C202534}"/>
+                <a16:creationId xmlns:a16="http://schemas.microsoft.com/office/drawing/2014/main" id="{B37BAAAE-3640-4F4E-A32A-ACC9072C7FC3}"/>
               </a:ext>
             </a:extLst>
           </p:cNvPr>
@@ -44273,7 +44273,7 @@
           <p:cNvPr id="11" name="">
             <a:extLst xmlns:a="http://schemas.openxmlformats.org/drawingml/2006/main">
               <a:ext uri="{FF2B5EF4-FFF2-40B4-BE49-F238E27FC236}">
-                <a16:creationId xmlns:a16="http://schemas.microsoft.com/office/drawing/2014/main" id="{E9B3A245-8DB3-4441-A4BC-E307FC7569EF}"/>
+                <a16:creationId xmlns:a16="http://schemas.microsoft.com/office/drawing/2014/main" id="{CEEA3E7F-D20B-4490-8C68-DD0D79544D13}"/>
               </a:ext>
             </a:extLst>
           </p:cNvPr>
@@ -44306,7 +44306,7 @@
           <p:cNvPr id="12" name="">
             <a:extLst xmlns:a="http://schemas.openxmlformats.org/drawingml/2006/main">
               <a:ext uri="{FF2B5EF4-FFF2-40B4-BE49-F238E27FC236}">
-                <a16:creationId xmlns:a16="http://schemas.microsoft.com/office/drawing/2014/main" id="{07D5F2B4-2C7A-4A18-BFE0-1F8BBDAD6C35}"/>
+                <a16:creationId xmlns:a16="http://schemas.microsoft.com/office/drawing/2014/main" id="{692F8899-2CB0-44A4-8C22-5F548B3DD303}"/>
               </a:ext>
             </a:extLst>
           </p:cNvPr>
@@ -44364,7 +44364,7 @@
           <p:cNvPr id="13" name="">
             <a:extLst xmlns:a="http://schemas.openxmlformats.org/drawingml/2006/main">
               <a:ext uri="{FF2B5EF4-FFF2-40B4-BE49-F238E27FC236}">
-                <a16:creationId xmlns:a16="http://schemas.microsoft.com/office/drawing/2014/main" id="{54B44EDC-2DA6-45B9-8D50-0FDBFBF4B4FE}"/>
+                <a16:creationId xmlns:a16="http://schemas.microsoft.com/office/drawing/2014/main" id="{161FE1B9-5C66-4C6B-B297-F7F9A23EEBD6}"/>
               </a:ext>
             </a:extLst>
           </p:cNvPr>
@@ -44422,7 +44422,7 @@
           <p:cNvPr id="14" name="">
             <a:extLst xmlns:a="http://schemas.openxmlformats.org/drawingml/2006/main">
               <a:ext uri="{FF2B5EF4-FFF2-40B4-BE49-F238E27FC236}">
-                <a16:creationId xmlns:a16="http://schemas.microsoft.com/office/drawing/2014/main" id="{87875BFD-E2E2-4FC6-906C-C102E39D6CCA}"/>
+                <a16:creationId xmlns:a16="http://schemas.microsoft.com/office/drawing/2014/main" id="{27313619-D9A2-4F26-9F83-4A4B677AF376}"/>
               </a:ext>
             </a:extLst>
           </p:cNvPr>
@@ -44455,7 +44455,7 @@
           <p:cNvPr id="15" name="">
             <a:extLst xmlns:a="http://schemas.openxmlformats.org/drawingml/2006/main">
               <a:ext uri="{FF2B5EF4-FFF2-40B4-BE49-F238E27FC236}">
-                <a16:creationId xmlns:a16="http://schemas.microsoft.com/office/drawing/2014/main" id="{08886EF2-144C-43E6-AD99-080DE50381D4}"/>
+                <a16:creationId xmlns:a16="http://schemas.microsoft.com/office/drawing/2014/main" id="{077BD32D-67ED-4F4A-B515-1BDAAC4A2196}"/>
               </a:ext>
             </a:extLst>
           </p:cNvPr>
@@ -44513,7 +44513,7 @@
           <p:cNvPr id="16" name="">
             <a:extLst xmlns:a="http://schemas.openxmlformats.org/drawingml/2006/main">
               <a:ext uri="{FF2B5EF4-FFF2-40B4-BE49-F238E27FC236}">
-                <a16:creationId xmlns:a16="http://schemas.microsoft.com/office/drawing/2014/main" id="{AA91111C-2B36-4F4D-A7DD-2E75799A9920}"/>
+                <a16:creationId xmlns:a16="http://schemas.microsoft.com/office/drawing/2014/main" id="{2FC07FF4-70D7-4B3B-A39E-39419A6A7E84}"/>
               </a:ext>
             </a:extLst>
           </p:cNvPr>
@@ -44571,7 +44571,7 @@
           <p:cNvPr id="17" name="">
             <a:extLst xmlns:a="http://schemas.openxmlformats.org/drawingml/2006/main">
               <a:ext uri="{FF2B5EF4-FFF2-40B4-BE49-F238E27FC236}">
-                <a16:creationId xmlns:a16="http://schemas.microsoft.com/office/drawing/2014/main" id="{1EEC2A57-9065-419C-98B3-DBF569F5BD12}"/>
+                <a16:creationId xmlns:a16="http://schemas.microsoft.com/office/drawing/2014/main" id="{28984D60-5D72-4DAF-8D8C-FB3AE575F90E}"/>
               </a:ext>
             </a:extLst>
           </p:cNvPr>
@@ -44604,7 +44604,7 @@
           <p:cNvPr id="18" name="">
             <a:extLst xmlns:a="http://schemas.openxmlformats.org/drawingml/2006/main">
               <a:ext uri="{FF2B5EF4-FFF2-40B4-BE49-F238E27FC236}">
-                <a16:creationId xmlns:a16="http://schemas.microsoft.com/office/drawing/2014/main" id="{60162374-1775-484F-8F17-2C930736AD2C}"/>
+                <a16:creationId xmlns:a16="http://schemas.microsoft.com/office/drawing/2014/main" id="{FD0FD5BB-9DA8-45DE-991E-0FD8C4E6E0A0}"/>
               </a:ext>
             </a:extLst>
           </p:cNvPr>
@@ -44662,7 +44662,7 @@
           <p:cNvPr id="19" name="">
             <a:extLst xmlns:a="http://schemas.openxmlformats.org/drawingml/2006/main">
               <a:ext uri="{FF2B5EF4-FFF2-40B4-BE49-F238E27FC236}">
-                <a16:creationId xmlns:a16="http://schemas.microsoft.com/office/drawing/2014/main" id="{E74E8D55-3DAF-4984-9BDC-5BFB0BD87DB0}"/>
+                <a16:creationId xmlns:a16="http://schemas.microsoft.com/office/drawing/2014/main" id="{8B8FEAB0-9B4B-46D2-95E0-7A6CDDE14886}"/>
               </a:ext>
             </a:extLst>
           </p:cNvPr>
@@ -44720,7 +44720,7 @@
           <p:cNvPr id="20" name="">
             <a:extLst xmlns:a="http://schemas.openxmlformats.org/drawingml/2006/main">
               <a:ext uri="{FF2B5EF4-FFF2-40B4-BE49-F238E27FC236}">
-                <a16:creationId xmlns:a16="http://schemas.microsoft.com/office/drawing/2014/main" id="{FB0A2A5D-BF0B-492C-BA72-7E5B62AAE51D}"/>
+                <a16:creationId xmlns:a16="http://schemas.microsoft.com/office/drawing/2014/main" id="{9E67709B-FABD-4C1D-9AC9-4A3A2ECC5657}"/>
               </a:ext>
             </a:extLst>
           </p:cNvPr>
@@ -44778,7 +44778,7 @@
           <p:cNvPr id="21" name="">
             <a:extLst xmlns:a="http://schemas.openxmlformats.org/drawingml/2006/main">
               <a:ext uri="{FF2B5EF4-FFF2-40B4-BE49-F238E27FC236}">
-                <a16:creationId xmlns:a16="http://schemas.microsoft.com/office/drawing/2014/main" id="{9026A409-030B-4831-93F3-213CD0F90548}"/>
+                <a16:creationId xmlns:a16="http://schemas.microsoft.com/office/drawing/2014/main" id="{7D5110BC-1EF8-432D-84E1-A299EBEF01FE}"/>
               </a:ext>
             </a:extLst>
           </p:cNvPr>
@@ -44811,7 +44811,7 @@
           <p:cNvPr id="22" name="">
             <a:extLst xmlns:a="http://schemas.openxmlformats.org/drawingml/2006/main">
               <a:ext uri="{FF2B5EF4-FFF2-40B4-BE49-F238E27FC236}">
-                <a16:creationId xmlns:a16="http://schemas.microsoft.com/office/drawing/2014/main" id="{6E494BCF-56BE-47B6-B15A-10AEE419F5AB}"/>
+                <a16:creationId xmlns:a16="http://schemas.microsoft.com/office/drawing/2014/main" id="{1F5EAED0-7E29-4BDB-A4CD-9892AB607F60}"/>
               </a:ext>
             </a:extLst>
           </p:cNvPr>
@@ -44869,7 +44869,7 @@
           <p:cNvPr id="23" name="">
             <a:extLst xmlns:a="http://schemas.openxmlformats.org/drawingml/2006/main">
               <a:ext uri="{FF2B5EF4-FFF2-40B4-BE49-F238E27FC236}">
-                <a16:creationId xmlns:a16="http://schemas.microsoft.com/office/drawing/2014/main" id="{EB8016BB-77B4-4AE2-8177-737CDD3BA9B7}"/>
+                <a16:creationId xmlns:a16="http://schemas.microsoft.com/office/drawing/2014/main" id="{050824FC-05F8-4990-ADC9-E475FAA8AB7D}"/>
               </a:ext>
             </a:extLst>
           </p:cNvPr>
@@ -44927,7 +44927,7 @@
           <p:cNvPr id="24" name="">
             <a:extLst xmlns:a="http://schemas.openxmlformats.org/drawingml/2006/main">
               <a:ext uri="{FF2B5EF4-FFF2-40B4-BE49-F238E27FC236}">
-                <a16:creationId xmlns:a16="http://schemas.microsoft.com/office/drawing/2014/main" id="{47BE62D4-923E-4922-80DC-B74E1AE92A4E}"/>
+                <a16:creationId xmlns:a16="http://schemas.microsoft.com/office/drawing/2014/main" id="{AB67AA5C-DFC8-47DA-B2ED-CD6FFB0EF2AD}"/>
               </a:ext>
             </a:extLst>
           </p:cNvPr>
@@ -44985,7 +44985,7 @@
           <p:cNvPr id="25" name="">
             <a:extLst xmlns:a="http://schemas.openxmlformats.org/drawingml/2006/main">
               <a:ext uri="{FF2B5EF4-FFF2-40B4-BE49-F238E27FC236}">
-                <a16:creationId xmlns:a16="http://schemas.microsoft.com/office/drawing/2014/main" id="{59F3823A-0744-43C6-9609-9D1869EB608B}"/>
+                <a16:creationId xmlns:a16="http://schemas.microsoft.com/office/drawing/2014/main" id="{985E6451-15E5-42EA-B3ED-5BAF6C518EE0}"/>
               </a:ext>
             </a:extLst>
           </p:cNvPr>
@@ -45018,7 +45018,7 @@
           <p:cNvPr id="26" name="">
             <a:extLst xmlns:a="http://schemas.openxmlformats.org/drawingml/2006/main">
               <a:ext uri="{FF2B5EF4-FFF2-40B4-BE49-F238E27FC236}">
-                <a16:creationId xmlns:a16="http://schemas.microsoft.com/office/drawing/2014/main" id="{21B327AE-799F-45D9-B2B9-D49CE3EA3270}"/>
+                <a16:creationId xmlns:a16="http://schemas.microsoft.com/office/drawing/2014/main" id="{A944CCE9-B9DC-4EDD-8560-335B9154EEE9}"/>
               </a:ext>
             </a:extLst>
           </p:cNvPr>
@@ -45076,7 +45076,7 @@
           <p:cNvPr id="27" name="">
             <a:extLst xmlns:a="http://schemas.openxmlformats.org/drawingml/2006/main">
               <a:ext uri="{FF2B5EF4-FFF2-40B4-BE49-F238E27FC236}">
-                <a16:creationId xmlns:a16="http://schemas.microsoft.com/office/drawing/2014/main" id="{E57A8A3B-63A2-499F-B928-44F076F1BB51}"/>
+                <a16:creationId xmlns:a16="http://schemas.microsoft.com/office/drawing/2014/main" id="{2A46C445-40AD-40FF-99AD-0B12F167FB66}"/>
               </a:ext>
             </a:extLst>
           </p:cNvPr>
@@ -45134,7 +45134,7 @@
           <p:cNvPr id="28" name="">
             <a:extLst xmlns:a="http://schemas.openxmlformats.org/drawingml/2006/main">
               <a:ext uri="{FF2B5EF4-FFF2-40B4-BE49-F238E27FC236}">
-                <a16:creationId xmlns:a16="http://schemas.microsoft.com/office/drawing/2014/main" id="{534BE22C-9F78-49EF-8D49-4D31B9B6626D}"/>
+                <a16:creationId xmlns:a16="http://schemas.microsoft.com/office/drawing/2014/main" id="{29BC79A8-A401-4277-8758-0F6AD7C7E174}"/>
               </a:ext>
             </a:extLst>
           </p:cNvPr>
@@ -45192,7 +45192,7 @@
           <p:cNvPr id="29" name="">
             <a:extLst xmlns:a="http://schemas.openxmlformats.org/drawingml/2006/main">
               <a:ext uri="{FF2B5EF4-FFF2-40B4-BE49-F238E27FC236}">
-                <a16:creationId xmlns:a16="http://schemas.microsoft.com/office/drawing/2014/main" id="{796AAEF1-4F66-4A1B-B8C5-E3BE39914DDC}"/>
+                <a16:creationId xmlns:a16="http://schemas.microsoft.com/office/drawing/2014/main" id="{DEA777A5-A023-4458-BF6B-EEE7329123DC}"/>
               </a:ext>
             </a:extLst>
           </p:cNvPr>
@@ -45225,7 +45225,7 @@
           <p:cNvPr id="30" name="">
             <a:extLst xmlns:a="http://schemas.openxmlformats.org/drawingml/2006/main">
               <a:ext uri="{FF2B5EF4-FFF2-40B4-BE49-F238E27FC236}">
-                <a16:creationId xmlns:a16="http://schemas.microsoft.com/office/drawing/2014/main" id="{E271F3E4-8799-4343-B79D-50D93E1B0CA6}"/>
+                <a16:creationId xmlns:a16="http://schemas.microsoft.com/office/drawing/2014/main" id="{89D7F54F-6666-4F7C-A09C-C52D5F1FCBC2}"/>
               </a:ext>
             </a:extLst>
           </p:cNvPr>
@@ -45283,7 +45283,7 @@
           <p:cNvPr id="31" name="">
             <a:extLst xmlns:a="http://schemas.openxmlformats.org/drawingml/2006/main">
               <a:ext uri="{FF2B5EF4-FFF2-40B4-BE49-F238E27FC236}">
-                <a16:creationId xmlns:a16="http://schemas.microsoft.com/office/drawing/2014/main" id="{6C6D5D74-2F32-4D8C-BD25-3BF975334ACF}"/>
+                <a16:creationId xmlns:a16="http://schemas.microsoft.com/office/drawing/2014/main" id="{04B73B29-9955-4EC2-8C61-ADC85360EC3F}"/>
               </a:ext>
             </a:extLst>
           </p:cNvPr>
@@ -45341,7 +45341,7 @@
           <p:cNvPr id="32" name="">
             <a:extLst xmlns:a="http://schemas.openxmlformats.org/drawingml/2006/main">
               <a:ext uri="{FF2B5EF4-FFF2-40B4-BE49-F238E27FC236}">
-                <a16:creationId xmlns:a16="http://schemas.microsoft.com/office/drawing/2014/main" id="{C69232AA-D771-4EB6-B6F3-E70CE0DE0AB0}"/>
+                <a16:creationId xmlns:a16="http://schemas.microsoft.com/office/drawing/2014/main" id="{98D06117-3A81-4A87-84A1-A68C50B5A8DE}"/>
               </a:ext>
             </a:extLst>
           </p:cNvPr>
@@ -45399,7 +45399,7 @@
           <p:cNvPr id="33" name="">
             <a:extLst xmlns:a="http://schemas.openxmlformats.org/drawingml/2006/main">
               <a:ext uri="{FF2B5EF4-FFF2-40B4-BE49-F238E27FC236}">
-                <a16:creationId xmlns:a16="http://schemas.microsoft.com/office/drawing/2014/main" id="{8DEB7C88-7916-414E-8E5E-CCF3074580F9}"/>
+                <a16:creationId xmlns:a16="http://schemas.microsoft.com/office/drawing/2014/main" id="{DC21E91B-94A8-44CD-A121-22B2B765F4DE}"/>
               </a:ext>
             </a:extLst>
           </p:cNvPr>
@@ -45432,7 +45432,7 @@
           <p:cNvPr id="34" name="">
             <a:extLst xmlns:a="http://schemas.openxmlformats.org/drawingml/2006/main">
               <a:ext uri="{FF2B5EF4-FFF2-40B4-BE49-F238E27FC236}">
-                <a16:creationId xmlns:a16="http://schemas.microsoft.com/office/drawing/2014/main" id="{FC3E693E-BC0F-4223-9269-9D743876D28B}"/>
+                <a16:creationId xmlns:a16="http://schemas.microsoft.com/office/drawing/2014/main" id="{AC0D6E40-83FE-46E2-8B64-B7A99400ADC9}"/>
               </a:ext>
             </a:extLst>
           </p:cNvPr>
@@ -45490,7 +45490,7 @@
           <p:cNvPr id="35" name="">
             <a:extLst xmlns:a="http://schemas.openxmlformats.org/drawingml/2006/main">
               <a:ext uri="{FF2B5EF4-FFF2-40B4-BE49-F238E27FC236}">
-                <a16:creationId xmlns:a16="http://schemas.microsoft.com/office/drawing/2014/main" id="{39DB44E4-83BD-492F-9361-C8FFA73BCA57}"/>
+                <a16:creationId xmlns:a16="http://schemas.microsoft.com/office/drawing/2014/main" id="{0ADC4C7E-284A-4163-8245-5FB25020DAD9}"/>
               </a:ext>
             </a:extLst>
           </p:cNvPr>
@@ -45548,7 +45548,7 @@
           <p:cNvPr id="36" name="">
             <a:extLst xmlns:a="http://schemas.openxmlformats.org/drawingml/2006/main">
               <a:ext uri="{FF2B5EF4-FFF2-40B4-BE49-F238E27FC236}">
-                <a16:creationId xmlns:a16="http://schemas.microsoft.com/office/drawing/2014/main" id="{BCC33900-DE04-44B7-8305-915D54936119}"/>
+                <a16:creationId xmlns:a16="http://schemas.microsoft.com/office/drawing/2014/main" id="{5883E9CC-6F58-4204-98DF-0FA295553198}"/>
               </a:ext>
             </a:extLst>
           </p:cNvPr>
@@ -45606,7 +45606,7 @@
           <p:cNvPr id="37" name="">
             <a:extLst xmlns:a="http://schemas.openxmlformats.org/drawingml/2006/main">
               <a:ext uri="{FF2B5EF4-FFF2-40B4-BE49-F238E27FC236}">
-                <a16:creationId xmlns:a16="http://schemas.microsoft.com/office/drawing/2014/main" id="{40B90326-DC24-4054-8B9C-DD9F6EAC0B2D}"/>
+                <a16:creationId xmlns:a16="http://schemas.microsoft.com/office/drawing/2014/main" id="{31F33DAB-57FA-42E8-8B1E-62B685722059}"/>
               </a:ext>
             </a:extLst>
           </p:cNvPr>
@@ -45639,7 +45639,7 @@
           <p:cNvPr id="38" name="">
             <a:extLst xmlns:a="http://schemas.openxmlformats.org/drawingml/2006/main">
               <a:ext uri="{FF2B5EF4-FFF2-40B4-BE49-F238E27FC236}">
-                <a16:creationId xmlns:a16="http://schemas.microsoft.com/office/drawing/2014/main" id="{D3DC25E0-4469-45DD-A6BB-1D7160FA735C}"/>
+                <a16:creationId xmlns:a16="http://schemas.microsoft.com/office/drawing/2014/main" id="{EA955DBB-BBFE-40F0-AC7A-5243529E8C98}"/>
               </a:ext>
             </a:extLst>
           </p:cNvPr>
@@ -45697,7 +45697,7 @@
           <p:cNvPr id="39" name="">
             <a:extLst xmlns:a="http://schemas.openxmlformats.org/drawingml/2006/main">
               <a:ext uri="{FF2B5EF4-FFF2-40B4-BE49-F238E27FC236}">
-                <a16:creationId xmlns:a16="http://schemas.microsoft.com/office/drawing/2014/main" id="{58A54389-067B-4F25-9560-D9C3A113D522}"/>
+                <a16:creationId xmlns:a16="http://schemas.microsoft.com/office/drawing/2014/main" id="{995CA939-EB19-4471-AF2C-228685251CFB}"/>
               </a:ext>
             </a:extLst>
           </p:cNvPr>
@@ -45730,7 +45730,7 @@
           <p:cNvPr id="40" name="">
             <a:extLst xmlns:a="http://schemas.openxmlformats.org/drawingml/2006/main">
               <a:ext uri="{FF2B5EF4-FFF2-40B4-BE49-F238E27FC236}">
-                <a16:creationId xmlns:a16="http://schemas.microsoft.com/office/drawing/2014/main" id="{384BECB1-F9F1-4089-A107-3883BA963E5B}"/>
+                <a16:creationId xmlns:a16="http://schemas.microsoft.com/office/drawing/2014/main" id="{67476A27-D3E7-4BF4-973D-41B2C6F7A0FE}"/>
               </a:ext>
             </a:extLst>
           </p:cNvPr>
@@ -45788,7 +45788,7 @@
                 <a:latin typeface="Microsoft YaHei"/>
                 <a:ea typeface="Microsoft YaHei"/>
                 <a:cs typeface="Microsoft YaHei"/>
-                <a:hlinkClick xmlns:r="http://schemas.openxmlformats.org/officeDocument/2006/relationships" r:id="R3156715a59084938"/>
+                <a:hlinkClick xmlns:r="http://schemas.openxmlformats.org/officeDocument/2006/relationships" r:id="R59d4b9f383604280"/>
               </a:rPr>
               <a:t>Claude Agent Teams</a:t>
             </a:r>
@@ -45800,7 +45800,7 @@
                 <a:latin typeface="Microsoft YaHei"/>
                 <a:ea typeface="Microsoft YaHei"/>
                 <a:cs typeface="Microsoft YaHei"/>
-                <a:hlinkClick xmlns:r="http://schemas.openxmlformats.org/officeDocument/2006/relationships" r:id="R60591435b7094e69"/>
+                <a:hlinkClick xmlns:r="http://schemas.openxmlformats.org/officeDocument/2006/relationships" r:id="R50f473d2c5b544d5"/>
               </a:rPr>
               <a:t> · Claude Workflows</a:t>
             </a:r>
@@ -45812,7 +45812,7 @@
                 <a:latin typeface="Microsoft YaHei"/>
                 <a:ea typeface="Microsoft YaHei"/>
                 <a:cs typeface="Microsoft YaHei"/>
-                <a:hlinkClick xmlns:r="http://schemas.openxmlformats.org/officeDocument/2006/relationships" r:id="Ra8759939cafb42ee"/>
+                <a:hlinkClick xmlns:r="http://schemas.openxmlformats.org/officeDocument/2006/relationships" r:id="R03e452b7f4fb4b59"/>
               </a:rPr>
               <a:t> · Qoder Quest</a:t>
             </a:r>
@@ -45824,7 +45824,7 @@
                 <a:latin typeface="Microsoft YaHei"/>
                 <a:ea typeface="Microsoft YaHei"/>
                 <a:cs typeface="Microsoft YaHei"/>
-                <a:hlinkClick xmlns:r="http://schemas.openxmlformats.org/officeDocument/2006/relationships" r:id="R86ff933b08b54e0d"/>
+                <a:hlinkClick xmlns:r="http://schemas.openxmlformats.org/officeDocument/2006/relationships" r:id="R9b87c82629384930"/>
               </a:rPr>
               <a:t> · 码道 AgentTeam</a:t>
             </a:r>
@@ -45836,7 +45836,7 @@
           <p:cNvPr id="41" name="">
             <a:extLst xmlns:a="http://schemas.openxmlformats.org/drawingml/2006/main">
               <a:ext uri="{FF2B5EF4-FFF2-40B4-BE49-F238E27FC236}">
-                <a16:creationId xmlns:a16="http://schemas.microsoft.com/office/drawing/2014/main" id="{199B7C04-1D4B-4392-B0D0-690F614C9AF0}"/>
+                <a16:creationId xmlns:a16="http://schemas.microsoft.com/office/drawing/2014/main" id="{AD9A9597-FD2B-48BB-81ED-A47F09C47652}"/>
               </a:ext>
             </a:extLst>
           </p:cNvPr>
@@ -45892,7 +45892,7 @@
     </p:spTree>
     <p:extLst>
       <p:ext uri="{BB962C8B-B14F-4D97-AF65-F5344CB8AC3E}">
-        <p14:creationId xmlns:p14="http://schemas.microsoft.com/office/powerpoint/2010/main" val="787812019"/>
+        <p14:creationId xmlns:p14="http://schemas.microsoft.com/office/powerpoint/2010/main" val="798471184"/>
       </p:ext>
     </p:extLst>
   </p:cSld>

--- a/AI-Coding-工具能力赋能-16页华为企业方案风格版.pptx
+++ b/AI-Coding-工具能力赋能-16页华为企业方案风格版.pptx
@@ -2,28 +2,28 @@
 <file path=ppt/presentation.xml><?xml version="1.0" encoding="utf-8"?>
 <p:presentation xmlns:p="http://schemas.openxmlformats.org/presentationml/2006/main">
   <p:sldMasterIdLst>
-    <p:sldMasterId xmlns:r="http://schemas.openxmlformats.org/officeDocument/2006/relationships" id="2147483648" r:id="Re100f22f901c44a9"/>
+    <p:sldMasterId xmlns:r="http://schemas.openxmlformats.org/officeDocument/2006/relationships" id="2147483648" r:id="Rf76f7d4d1a4043f5"/>
   </p:sldMasterIdLst>
   <p:notesMasterIdLst>
-    <p:notesMasterId xmlns:r="http://schemas.openxmlformats.org/officeDocument/2006/relationships" r:id="R6617ea610dde4081"/>
+    <p:notesMasterId xmlns:r="http://schemas.openxmlformats.org/officeDocument/2006/relationships" r:id="Rddd0933af382401c"/>
   </p:notesMasterIdLst>
   <p:sldIdLst>
-    <p:sldId xmlns:r="http://schemas.openxmlformats.org/officeDocument/2006/relationships" id="256" r:id="Re5a3c6ad9f404b12"/>
-    <p:sldId xmlns:r="http://schemas.openxmlformats.org/officeDocument/2006/relationships" id="257" r:id="Re43a79f2c6964f12"/>
-    <p:sldId xmlns:r="http://schemas.openxmlformats.org/officeDocument/2006/relationships" id="258" r:id="R2040e5812f9d4b56"/>
-    <p:sldId xmlns:r="http://schemas.openxmlformats.org/officeDocument/2006/relationships" id="259" r:id="R015491cc8dc94f04"/>
-    <p:sldId xmlns:r="http://schemas.openxmlformats.org/officeDocument/2006/relationships" id="260" r:id="R21ac225ecd0c4714"/>
-    <p:sldId xmlns:r="http://schemas.openxmlformats.org/officeDocument/2006/relationships" id="261" r:id="R5eebc27fe28840f9"/>
-    <p:sldId xmlns:r="http://schemas.openxmlformats.org/officeDocument/2006/relationships" id="262" r:id="R48f8d99a29bb4982"/>
-    <p:sldId xmlns:r="http://schemas.openxmlformats.org/officeDocument/2006/relationships" id="263" r:id="R774b1dabce2c47d0"/>
-    <p:sldId xmlns:r="http://schemas.openxmlformats.org/officeDocument/2006/relationships" id="264" r:id="Re48a8acb2b834833"/>
-    <p:sldId xmlns:r="http://schemas.openxmlformats.org/officeDocument/2006/relationships" id="265" r:id="R888fefb3b5394fdc"/>
-    <p:sldId xmlns:r="http://schemas.openxmlformats.org/officeDocument/2006/relationships" id="266" r:id="Rb981abd1d462477f"/>
-    <p:sldId xmlns:r="http://schemas.openxmlformats.org/officeDocument/2006/relationships" id="267" r:id="R72c6da77f35045a9"/>
-    <p:sldId xmlns:r="http://schemas.openxmlformats.org/officeDocument/2006/relationships" id="268" r:id="R37aac7446cb6487c"/>
-    <p:sldId xmlns:r="http://schemas.openxmlformats.org/officeDocument/2006/relationships" id="269" r:id="Rda257229f7104966"/>
-    <p:sldId xmlns:r="http://schemas.openxmlformats.org/officeDocument/2006/relationships" id="270" r:id="R6d7bf04831d14177"/>
-    <p:sldId xmlns:r="http://schemas.openxmlformats.org/officeDocument/2006/relationships" id="271" r:id="Ra3e6bde6ba0e4da1"/>
+    <p:sldId xmlns:r="http://schemas.openxmlformats.org/officeDocument/2006/relationships" id="256" r:id="Rfc31924b43a5425a"/>
+    <p:sldId xmlns:r="http://schemas.openxmlformats.org/officeDocument/2006/relationships" id="257" r:id="R65c5aa965ae644ef"/>
+    <p:sldId xmlns:r="http://schemas.openxmlformats.org/officeDocument/2006/relationships" id="258" r:id="R61236fc5bec94e78"/>
+    <p:sldId xmlns:r="http://schemas.openxmlformats.org/officeDocument/2006/relationships" id="259" r:id="R463e172bfb9d49f1"/>
+    <p:sldId xmlns:r="http://schemas.openxmlformats.org/officeDocument/2006/relationships" id="260" r:id="R2ed639fb0b3e4900"/>
+    <p:sldId xmlns:r="http://schemas.openxmlformats.org/officeDocument/2006/relationships" id="261" r:id="R4f418e0e301f41cb"/>
+    <p:sldId xmlns:r="http://schemas.openxmlformats.org/officeDocument/2006/relationships" id="262" r:id="Rcaaaf196242d4443"/>
+    <p:sldId xmlns:r="http://schemas.openxmlformats.org/officeDocument/2006/relationships" id="263" r:id="R9d7aae8b0c43462e"/>
+    <p:sldId xmlns:r="http://schemas.openxmlformats.org/officeDocument/2006/relationships" id="264" r:id="Re5b19c7de7eb434d"/>
+    <p:sldId xmlns:r="http://schemas.openxmlformats.org/officeDocument/2006/relationships" id="265" r:id="Rd98bf7da1b3c4e76"/>
+    <p:sldId xmlns:r="http://schemas.openxmlformats.org/officeDocument/2006/relationships" id="266" r:id="R3905d650151344c1"/>
+    <p:sldId xmlns:r="http://schemas.openxmlformats.org/officeDocument/2006/relationships" id="267" r:id="R81d88b5de3104f3c"/>
+    <p:sldId xmlns:r="http://schemas.openxmlformats.org/officeDocument/2006/relationships" id="268" r:id="Rda2246d35e9a4bb5"/>
+    <p:sldId xmlns:r="http://schemas.openxmlformats.org/officeDocument/2006/relationships" id="269" r:id="Rf2bf50485b044c79"/>
+    <p:sldId xmlns:r="http://schemas.openxmlformats.org/officeDocument/2006/relationships" id="270" r:id="R5dbd9af504ab4532"/>
+    <p:sldId xmlns:r="http://schemas.openxmlformats.org/officeDocument/2006/relationships" id="271" r:id="Rb87a26f051f14f54"/>
   </p:sldIdLst>
   <p:sldSz cx="12192000" cy="6858000"/>
   <p:notesSz cx="6858000" cy="9144000"/>
@@ -1606,7 +1606,7 @@
   </p:cSld>
   <p:clrMap bg1="lt1" tx1="dk1" bg2="lt2" tx2="dk2" accent1="accent1" accent2="accent2" accent3="accent3" accent4="accent4" accent5="accent5" accent6="accent6" hlink="hlink" folHlink="folHlink"/>
   <p:sldLayoutIdLst>
-    <p:sldLayoutId xmlns:r="http://schemas.openxmlformats.org/officeDocument/2006/relationships" id="2147483649" r:id="Rb7d10f423dce4af2"/>
+    <p:sldLayoutId xmlns:r="http://schemas.openxmlformats.org/officeDocument/2006/relationships" id="2147483649" r:id="R4458f1c85d494726"/>
   </p:sldLayoutIdLst>
   <p:txStyles>
     <p:titleStyle>
@@ -2161,7 +2161,7 @@
           <p:nvPr/>
         </p:nvPicPr>
         <p:blipFill>
-          <a:blip xmlns:r="http://schemas.openxmlformats.org/officeDocument/2006/relationships" xmlns:a="http://schemas.openxmlformats.org/drawingml/2006/main" r:embed="R62fcb83d139d4b19"/>
+          <a:blip xmlns:r="http://schemas.openxmlformats.org/officeDocument/2006/relationships" xmlns:a="http://schemas.openxmlformats.org/drawingml/2006/main" r:embed="R7e4bd292592b4705"/>
           <a:srcRect xmlns:a="http://schemas.openxmlformats.org/drawingml/2006/main" l="0" t="27" r="0" b="27"/>
           <a:stretch xmlns:a="http://schemas.openxmlformats.org/drawingml/2006/main">
             <a:fillRect l="0" t="0" r="0" b="0"/>
@@ -2182,7 +2182,7 @@
           <p:cNvPr id="2" name="">
             <a:extLst xmlns:a="http://schemas.openxmlformats.org/drawingml/2006/main">
               <a:ext uri="{FF2B5EF4-FFF2-40B4-BE49-F238E27FC236}">
-                <a16:creationId xmlns:a16="http://schemas.microsoft.com/office/drawing/2014/main" id="{2BDF44C9-4BFE-4F7E-85F6-63B49E462A78}"/>
+                <a16:creationId xmlns:a16="http://schemas.microsoft.com/office/drawing/2014/main" id="{5C1D6B0C-9BF3-4D35-9DE5-8E462CD643A4}"/>
               </a:ext>
             </a:extLst>
           </p:cNvPr>
@@ -2215,7 +2215,7 @@
           <p:cNvPr id="3" name="">
             <a:extLst xmlns:a="http://schemas.openxmlformats.org/drawingml/2006/main">
               <a:ext uri="{FF2B5EF4-FFF2-40B4-BE49-F238E27FC236}">
-                <a16:creationId xmlns:a16="http://schemas.microsoft.com/office/drawing/2014/main" id="{F857668F-92BE-4EFA-976C-55BC982C2979}"/>
+                <a16:creationId xmlns:a16="http://schemas.microsoft.com/office/drawing/2014/main" id="{1AED6B8B-32E1-4033-8700-191F2AAD4C82}"/>
               </a:ext>
             </a:extLst>
           </p:cNvPr>
@@ -2247,7 +2247,7 @@
             <a:pPr algn="l">
               <a:defRPr sz="3900" b="1">
                 <a:solidFill>
-                  <a:srgbClr val="1D1D1A"/>
+                  <a:srgbClr val="8A0F17"/>
                 </a:solidFill>
                 <a:latin typeface="Microsoft YaHei"/>
                 <a:ea typeface="Microsoft YaHei"/>
@@ -2257,7 +2257,7 @@
             <a:r>
               <a:rPr sz="3900" b="1">
                 <a:solidFill>
-                  <a:srgbClr val="1D1D1A"/>
+                  <a:srgbClr val="8A0F17"/>
                 </a:solidFill>
                 <a:latin typeface="Microsoft YaHei"/>
                 <a:ea typeface="Microsoft YaHei"/>
@@ -2273,7 +2273,7 @@
           <p:cNvPr id="4" name="">
             <a:extLst xmlns:a="http://schemas.openxmlformats.org/drawingml/2006/main">
               <a:ext uri="{FF2B5EF4-FFF2-40B4-BE49-F238E27FC236}">
-                <a16:creationId xmlns:a16="http://schemas.microsoft.com/office/drawing/2014/main" id="{4917C70B-0F57-4808-B983-31B034E7580C}"/>
+                <a16:creationId xmlns:a16="http://schemas.microsoft.com/office/drawing/2014/main" id="{736935CA-2DDE-4116-9E11-3D19554F0A23}"/>
               </a:ext>
             </a:extLst>
           </p:cNvPr>
@@ -2305,7 +2305,7 @@
             <a:pPr algn="l">
               <a:defRPr sz="3600" b="1">
                 <a:solidFill>
-                  <a:srgbClr val="1D1D1A"/>
+                  <a:srgbClr val="8A0F17"/>
                 </a:solidFill>
                 <a:latin typeface="Microsoft YaHei"/>
                 <a:ea typeface="Microsoft YaHei"/>
@@ -2315,7 +2315,7 @@
             <a:r>
               <a:rPr sz="3600" b="1">
                 <a:solidFill>
-                  <a:srgbClr val="1D1D1A"/>
+                  <a:srgbClr val="8A0F17"/>
                 </a:solidFill>
                 <a:latin typeface="Microsoft YaHei"/>
                 <a:ea typeface="Microsoft YaHei"/>
@@ -2331,7 +2331,7 @@
           <p:cNvPr id="5" name="">
             <a:extLst xmlns:a="http://schemas.openxmlformats.org/drawingml/2006/main">
               <a:ext uri="{FF2B5EF4-FFF2-40B4-BE49-F238E27FC236}">
-                <a16:creationId xmlns:a16="http://schemas.microsoft.com/office/drawing/2014/main" id="{75443D97-6106-4337-A808-8BC38CB972D4}"/>
+                <a16:creationId xmlns:a16="http://schemas.microsoft.com/office/drawing/2014/main" id="{CCE5905F-EC2D-463A-B4C5-07104AAD9131}"/>
               </a:ext>
             </a:extLst>
           </p:cNvPr>
@@ -2364,7 +2364,7 @@
           <p:cNvPr id="6" name="">
             <a:extLst xmlns:a="http://schemas.openxmlformats.org/drawingml/2006/main">
               <a:ext uri="{FF2B5EF4-FFF2-40B4-BE49-F238E27FC236}">
-                <a16:creationId xmlns:a16="http://schemas.microsoft.com/office/drawing/2014/main" id="{8A4EFDFA-882C-486C-9BEF-DB786BD55A33}"/>
+                <a16:creationId xmlns:a16="http://schemas.microsoft.com/office/drawing/2014/main" id="{DDC86BDD-14F7-40A1-81E9-37DBBCF2636C}"/>
               </a:ext>
             </a:extLst>
           </p:cNvPr>
@@ -2422,7 +2422,7 @@
           <p:cNvPr id="7" name="">
             <a:extLst xmlns:a="http://schemas.openxmlformats.org/drawingml/2006/main">
               <a:ext uri="{FF2B5EF4-FFF2-40B4-BE49-F238E27FC236}">
-                <a16:creationId xmlns:a16="http://schemas.microsoft.com/office/drawing/2014/main" id="{8182D85A-C14F-4B74-9A04-2231FF39A309}"/>
+                <a16:creationId xmlns:a16="http://schemas.microsoft.com/office/drawing/2014/main" id="{7E92511A-91B3-4713-BCE7-09DE04099F4F}"/>
               </a:ext>
             </a:extLst>
           </p:cNvPr>
@@ -2480,7 +2480,7 @@
           <p:cNvPr id="8" name="">
             <a:extLst xmlns:a="http://schemas.openxmlformats.org/drawingml/2006/main">
               <a:ext uri="{FF2B5EF4-FFF2-40B4-BE49-F238E27FC236}">
-                <a16:creationId xmlns:a16="http://schemas.microsoft.com/office/drawing/2014/main" id="{AAAA36DE-2E69-486E-8D7C-95E8C5A44B02}"/>
+                <a16:creationId xmlns:a16="http://schemas.microsoft.com/office/drawing/2014/main" id="{F06DCECE-760C-4132-83A8-3FFB63EEB5D7}"/>
               </a:ext>
             </a:extLst>
           </p:cNvPr>
@@ -2538,7 +2538,7 @@
           <p:cNvPr id="9" name="">
             <a:extLst xmlns:a="http://schemas.openxmlformats.org/drawingml/2006/main">
               <a:ext uri="{FF2B5EF4-FFF2-40B4-BE49-F238E27FC236}">
-                <a16:creationId xmlns:a16="http://schemas.microsoft.com/office/drawing/2014/main" id="{CAFA50FA-3C7C-4C70-BC4A-421B39759444}"/>
+                <a16:creationId xmlns:a16="http://schemas.microsoft.com/office/drawing/2014/main" id="{5F77DA9B-1474-44D1-808F-56935687B4E0}"/>
               </a:ext>
             </a:extLst>
           </p:cNvPr>
@@ -2596,7 +2596,7 @@
           <p:cNvPr id="10" name="">
             <a:extLst xmlns:a="http://schemas.openxmlformats.org/drawingml/2006/main">
               <a:ext uri="{FF2B5EF4-FFF2-40B4-BE49-F238E27FC236}">
-                <a16:creationId xmlns:a16="http://schemas.microsoft.com/office/drawing/2014/main" id="{2D088970-7541-426F-AEBE-C358A2544203}"/>
+                <a16:creationId xmlns:a16="http://schemas.microsoft.com/office/drawing/2014/main" id="{AA888479-96F1-40B6-9EB9-C0EE0D26E4AC}"/>
               </a:ext>
             </a:extLst>
           </p:cNvPr>
@@ -2629,7 +2629,7 @@
           <p:cNvPr id="11" name="">
             <a:extLst xmlns:a="http://schemas.openxmlformats.org/drawingml/2006/main">
               <a:ext uri="{FF2B5EF4-FFF2-40B4-BE49-F238E27FC236}">
-                <a16:creationId xmlns:a16="http://schemas.microsoft.com/office/drawing/2014/main" id="{88B3A772-7144-45AE-84EE-1C5A87F4517F}"/>
+                <a16:creationId xmlns:a16="http://schemas.microsoft.com/office/drawing/2014/main" id="{5630BF95-D741-4E35-BA26-9B76B388D9D8}"/>
               </a:ext>
             </a:extLst>
           </p:cNvPr>
@@ -2687,7 +2687,7 @@
           <p:cNvPr id="12" name="">
             <a:extLst xmlns:a="http://schemas.openxmlformats.org/drawingml/2006/main">
               <a:ext uri="{FF2B5EF4-FFF2-40B4-BE49-F238E27FC236}">
-                <a16:creationId xmlns:a16="http://schemas.microsoft.com/office/drawing/2014/main" id="{B8E10E0F-5EA5-490A-B925-55A549C3C892}"/>
+                <a16:creationId xmlns:a16="http://schemas.microsoft.com/office/drawing/2014/main" id="{98A60946-FF38-4279-9742-FA26AABF126B}"/>
               </a:ext>
             </a:extLst>
           </p:cNvPr>
@@ -2745,7 +2745,7 @@
           <p:cNvPr id="13" name="">
             <a:extLst xmlns:a="http://schemas.openxmlformats.org/drawingml/2006/main">
               <a:ext uri="{FF2B5EF4-FFF2-40B4-BE49-F238E27FC236}">
-                <a16:creationId xmlns:a16="http://schemas.microsoft.com/office/drawing/2014/main" id="{8351BCBD-7C30-40B4-81DD-2E84DECC8E02}"/>
+                <a16:creationId xmlns:a16="http://schemas.microsoft.com/office/drawing/2014/main" id="{11FC020D-1824-4971-95A6-58ED4D630921}"/>
               </a:ext>
             </a:extLst>
           </p:cNvPr>
@@ -2778,7 +2778,7 @@
           <p:cNvPr id="14" name="">
             <a:extLst xmlns:a="http://schemas.openxmlformats.org/drawingml/2006/main">
               <a:ext uri="{FF2B5EF4-FFF2-40B4-BE49-F238E27FC236}">
-                <a16:creationId xmlns:a16="http://schemas.microsoft.com/office/drawing/2014/main" id="{50E54901-86CC-4DED-9690-33747E2812DC}"/>
+                <a16:creationId xmlns:a16="http://schemas.microsoft.com/office/drawing/2014/main" id="{50C492E3-B719-4BAD-8030-A383778E134D}"/>
               </a:ext>
             </a:extLst>
           </p:cNvPr>
@@ -2836,7 +2836,7 @@
           <p:cNvPr id="15" name="">
             <a:extLst xmlns:a="http://schemas.openxmlformats.org/drawingml/2006/main">
               <a:ext uri="{FF2B5EF4-FFF2-40B4-BE49-F238E27FC236}">
-                <a16:creationId xmlns:a16="http://schemas.microsoft.com/office/drawing/2014/main" id="{C1FD2CC7-0A77-46B9-A81C-3AC474E75456}"/>
+                <a16:creationId xmlns:a16="http://schemas.microsoft.com/office/drawing/2014/main" id="{0AB33275-5FF0-4763-B598-D8D6B9F9C7EB}"/>
               </a:ext>
             </a:extLst>
           </p:cNvPr>
@@ -2894,7 +2894,7 @@
           <p:cNvPr id="16" name="">
             <a:extLst xmlns:a="http://schemas.openxmlformats.org/drawingml/2006/main">
               <a:ext uri="{FF2B5EF4-FFF2-40B4-BE49-F238E27FC236}">
-                <a16:creationId xmlns:a16="http://schemas.microsoft.com/office/drawing/2014/main" id="{9DEC08D4-D427-46F2-B001-272B286E92AA}"/>
+                <a16:creationId xmlns:a16="http://schemas.microsoft.com/office/drawing/2014/main" id="{8E0776FC-7336-4B07-A080-A5765A60CE2B}"/>
               </a:ext>
             </a:extLst>
           </p:cNvPr>
@@ -2927,7 +2927,7 @@
           <p:cNvPr id="17" name="">
             <a:extLst xmlns:a="http://schemas.openxmlformats.org/drawingml/2006/main">
               <a:ext uri="{FF2B5EF4-FFF2-40B4-BE49-F238E27FC236}">
-                <a16:creationId xmlns:a16="http://schemas.microsoft.com/office/drawing/2014/main" id="{DAF24683-B6FE-486D-9D00-23345673B64C}"/>
+                <a16:creationId xmlns:a16="http://schemas.microsoft.com/office/drawing/2014/main" id="{9193F601-BB9B-432B-A6CE-99B77A791F55}"/>
               </a:ext>
             </a:extLst>
           </p:cNvPr>
@@ -2985,7 +2985,7 @@
           <p:cNvPr id="18" name="">
             <a:extLst xmlns:a="http://schemas.openxmlformats.org/drawingml/2006/main">
               <a:ext uri="{FF2B5EF4-FFF2-40B4-BE49-F238E27FC236}">
-                <a16:creationId xmlns:a16="http://schemas.microsoft.com/office/drawing/2014/main" id="{E9A89A5D-8786-4B65-96A7-E191412939E7}"/>
+                <a16:creationId xmlns:a16="http://schemas.microsoft.com/office/drawing/2014/main" id="{CF553631-7271-4860-9C80-C7ED2D113471}"/>
               </a:ext>
             </a:extLst>
           </p:cNvPr>
@@ -3043,7 +3043,7 @@
           <p:cNvPr id="19" name="">
             <a:extLst xmlns:a="http://schemas.openxmlformats.org/drawingml/2006/main">
               <a:ext uri="{FF2B5EF4-FFF2-40B4-BE49-F238E27FC236}">
-                <a16:creationId xmlns:a16="http://schemas.microsoft.com/office/drawing/2014/main" id="{99D0334A-8487-4886-99C1-A44793ECECD0}"/>
+                <a16:creationId xmlns:a16="http://schemas.microsoft.com/office/drawing/2014/main" id="{0639E4FE-319F-4F7B-A5A7-E23540460073}"/>
               </a:ext>
             </a:extLst>
           </p:cNvPr>
@@ -3080,7 +3080,7 @@
           <p:nvPr/>
         </p:nvPicPr>
         <p:blipFill>
-          <a:blip xmlns:r="http://schemas.openxmlformats.org/officeDocument/2006/relationships" xmlns:a="http://schemas.openxmlformats.org/drawingml/2006/main" r:embed="Rec583292f7104d33"/>
+          <a:blip xmlns:r="http://schemas.openxmlformats.org/officeDocument/2006/relationships" xmlns:a="http://schemas.openxmlformats.org/drawingml/2006/main" r:embed="R6173430f837948bc"/>
           <a:stretch xmlns:a="http://schemas.openxmlformats.org/drawingml/2006/main"/>
         </p:blipFill>
         <p:spPr>
@@ -3098,7 +3098,7 @@
           <p:cNvPr id="21" name="">
             <a:extLst xmlns:a="http://schemas.openxmlformats.org/drawingml/2006/main">
               <a:ext uri="{FF2B5EF4-FFF2-40B4-BE49-F238E27FC236}">
-                <a16:creationId xmlns:a16="http://schemas.microsoft.com/office/drawing/2014/main" id="{980BFEA7-46D0-4E51-9586-EEEAF879BFCC}"/>
+                <a16:creationId xmlns:a16="http://schemas.microsoft.com/office/drawing/2014/main" id="{F35D8C92-8183-4815-BFA8-0047BB9D1DFE}"/>
               </a:ext>
             </a:extLst>
           </p:cNvPr>
@@ -3156,7 +3156,7 @@
           <p:cNvPr id="22" name="">
             <a:extLst xmlns:a="http://schemas.openxmlformats.org/drawingml/2006/main">
               <a:ext uri="{FF2B5EF4-FFF2-40B4-BE49-F238E27FC236}">
-                <a16:creationId xmlns:a16="http://schemas.microsoft.com/office/drawing/2014/main" id="{587D16B0-55F2-4209-8617-8D0A5DAF7A67}"/>
+                <a16:creationId xmlns:a16="http://schemas.microsoft.com/office/drawing/2014/main" id="{0544ECC4-4ECC-4932-A44C-5FDD5F58EC6F}"/>
               </a:ext>
             </a:extLst>
           </p:cNvPr>
@@ -3212,7 +3212,7 @@
     </p:spTree>
     <p:extLst>
       <p:ext uri="{BB962C8B-B14F-4D97-AF65-F5344CB8AC3E}">
-        <p14:creationId xmlns:p14="http://schemas.microsoft.com/office/powerpoint/2010/main" val="577317459"/>
+        <p14:creationId xmlns:p14="http://schemas.microsoft.com/office/powerpoint/2010/main" val="2047489260"/>
       </p:ext>
     </p:extLst>
   </p:cSld>
@@ -3243,7 +3243,7 @@
           <p:cNvPr id="47" name="">
             <a:extLst xmlns:a="http://schemas.openxmlformats.org/drawingml/2006/main">
               <a:ext uri="{FF2B5EF4-FFF2-40B4-BE49-F238E27FC236}">
-                <a16:creationId xmlns:a16="http://schemas.microsoft.com/office/drawing/2014/main" id="{45AFFEFF-D0EB-4868-A49D-FEB88C423986}"/>
+                <a16:creationId xmlns:a16="http://schemas.microsoft.com/office/drawing/2014/main" id="{447BCE46-8C17-4409-B433-588ABC51D24A}"/>
               </a:ext>
             </a:extLst>
           </p:cNvPr>
@@ -3276,7 +3276,7 @@
           <p:cNvPr id="2" name="">
             <a:extLst xmlns:a="http://schemas.openxmlformats.org/drawingml/2006/main">
               <a:ext uri="{FF2B5EF4-FFF2-40B4-BE49-F238E27FC236}">
-                <a16:creationId xmlns:a16="http://schemas.microsoft.com/office/drawing/2014/main" id="{03DBA11F-80EB-4B8C-B5C1-FC31FCCDF3A9}"/>
+                <a16:creationId xmlns:a16="http://schemas.microsoft.com/office/drawing/2014/main" id="{35722C39-53DA-4CB6-AE59-3F1D158727B1}"/>
               </a:ext>
             </a:extLst>
           </p:cNvPr>
@@ -3334,7 +3334,7 @@
           <p:cNvPr id="3" name="">
             <a:extLst xmlns:a="http://schemas.openxmlformats.org/drawingml/2006/main">
               <a:ext uri="{FF2B5EF4-FFF2-40B4-BE49-F238E27FC236}">
-                <a16:creationId xmlns:a16="http://schemas.microsoft.com/office/drawing/2014/main" id="{04D08561-F80C-47AF-B4EF-D3C629C253E0}"/>
+                <a16:creationId xmlns:a16="http://schemas.microsoft.com/office/drawing/2014/main" id="{315CA35A-FE6C-4060-8CBD-E61D6A270073}"/>
               </a:ext>
             </a:extLst>
           </p:cNvPr>
@@ -3366,7 +3366,7 @@
             <a:pPr algn="l">
               <a:defRPr sz="2325" b="1">
                 <a:solidFill>
-                  <a:srgbClr val="1D1D1A"/>
+                  <a:srgbClr val="8A0F17"/>
                 </a:solidFill>
                 <a:latin typeface="Microsoft YaHei"/>
                 <a:ea typeface="Microsoft YaHei"/>
@@ -3376,7 +3376,7 @@
             <a:r>
               <a:rPr sz="2325" b="1">
                 <a:solidFill>
-                  <a:srgbClr val="1D1D1A"/>
+                  <a:srgbClr val="8A0F17"/>
                 </a:solidFill>
                 <a:latin typeface="Microsoft YaHei"/>
                 <a:ea typeface="Microsoft YaHei"/>
@@ -3392,7 +3392,7 @@
           <p:cNvPr id="4" name="">
             <a:extLst xmlns:a="http://schemas.openxmlformats.org/drawingml/2006/main">
               <a:ext uri="{FF2B5EF4-FFF2-40B4-BE49-F238E27FC236}">
-                <a16:creationId xmlns:a16="http://schemas.microsoft.com/office/drawing/2014/main" id="{1A34E59E-7E0A-4550-A7D7-90C2AE0E39BA}"/>
+                <a16:creationId xmlns:a16="http://schemas.microsoft.com/office/drawing/2014/main" id="{BE8D0C25-98C1-4DE4-AA97-66AEDD25A7B5}"/>
               </a:ext>
             </a:extLst>
           </p:cNvPr>
@@ -3429,7 +3429,7 @@
           <p:nvPr/>
         </p:nvPicPr>
         <p:blipFill>
-          <a:blip xmlns:r="http://schemas.openxmlformats.org/officeDocument/2006/relationships" xmlns:a="http://schemas.openxmlformats.org/drawingml/2006/main" r:embed="R9e61588fca564b8d"/>
+          <a:blip xmlns:r="http://schemas.openxmlformats.org/officeDocument/2006/relationships" xmlns:a="http://schemas.openxmlformats.org/drawingml/2006/main" r:embed="Rdb5719297f7249f7"/>
           <a:stretch xmlns:a="http://schemas.openxmlformats.org/drawingml/2006/main"/>
         </p:blipFill>
         <p:spPr>
@@ -3447,7 +3447,7 @@
           <p:cNvPr id="6" name="">
             <a:extLst xmlns:a="http://schemas.openxmlformats.org/drawingml/2006/main">
               <a:ext uri="{FF2B5EF4-FFF2-40B4-BE49-F238E27FC236}">
-                <a16:creationId xmlns:a16="http://schemas.microsoft.com/office/drawing/2014/main" id="{A9E81C28-BA9F-4BAD-AB7A-A337241B0990}"/>
+                <a16:creationId xmlns:a16="http://schemas.microsoft.com/office/drawing/2014/main" id="{E9439BA9-288E-4A8A-9B68-2DFA285B59F6}"/>
               </a:ext>
             </a:extLst>
           </p:cNvPr>
@@ -3480,7 +3480,7 @@
           <p:cNvPr id="7" name="">
             <a:extLst xmlns:a="http://schemas.openxmlformats.org/drawingml/2006/main">
               <a:ext uri="{FF2B5EF4-FFF2-40B4-BE49-F238E27FC236}">
-                <a16:creationId xmlns:a16="http://schemas.microsoft.com/office/drawing/2014/main" id="{C143331E-D398-4607-8FDF-EC721D789167}"/>
+                <a16:creationId xmlns:a16="http://schemas.microsoft.com/office/drawing/2014/main" id="{C5A3042A-4B58-4152-8BE0-4C74236D14A2}"/>
               </a:ext>
             </a:extLst>
           </p:cNvPr>
@@ -3538,7 +3538,7 @@
           <p:cNvPr id="8" name="">
             <a:extLst xmlns:a="http://schemas.openxmlformats.org/drawingml/2006/main">
               <a:ext uri="{FF2B5EF4-FFF2-40B4-BE49-F238E27FC236}">
-                <a16:creationId xmlns:a16="http://schemas.microsoft.com/office/drawing/2014/main" id="{B12DD2AF-1F24-4111-BEF6-0F4846B06F19}"/>
+                <a16:creationId xmlns:a16="http://schemas.microsoft.com/office/drawing/2014/main" id="{08EE93F3-9D70-4501-A084-4F0392AB9782}"/>
               </a:ext>
             </a:extLst>
           </p:cNvPr>
@@ -3596,7 +3596,7 @@
           <p:cNvPr id="9" name="">
             <a:extLst xmlns:a="http://schemas.openxmlformats.org/drawingml/2006/main">
               <a:ext uri="{FF2B5EF4-FFF2-40B4-BE49-F238E27FC236}">
-                <a16:creationId xmlns:a16="http://schemas.microsoft.com/office/drawing/2014/main" id="{2D032A58-AF44-4076-94B7-6F8478FD6B7E}"/>
+                <a16:creationId xmlns:a16="http://schemas.microsoft.com/office/drawing/2014/main" id="{DC24202A-F48C-4B6F-9607-F7D4E83F6750}"/>
               </a:ext>
             </a:extLst>
           </p:cNvPr>
@@ -3654,7 +3654,7 @@
           <p:cNvPr id="10" name="">
             <a:extLst xmlns:a="http://schemas.openxmlformats.org/drawingml/2006/main">
               <a:ext uri="{FF2B5EF4-FFF2-40B4-BE49-F238E27FC236}">
-                <a16:creationId xmlns:a16="http://schemas.microsoft.com/office/drawing/2014/main" id="{F7E1CCBD-3DA5-46D7-B425-F82A689663BE}"/>
+                <a16:creationId xmlns:a16="http://schemas.microsoft.com/office/drawing/2014/main" id="{4E1507FB-2426-46BC-A493-095164963255}"/>
               </a:ext>
             </a:extLst>
           </p:cNvPr>
@@ -3687,7 +3687,7 @@
           <p:cNvPr id="11" name="">
             <a:extLst xmlns:a="http://schemas.openxmlformats.org/drawingml/2006/main">
               <a:ext uri="{FF2B5EF4-FFF2-40B4-BE49-F238E27FC236}">
-                <a16:creationId xmlns:a16="http://schemas.microsoft.com/office/drawing/2014/main" id="{339DCF41-BDE1-4054-A03A-80BA82069D9D}"/>
+                <a16:creationId xmlns:a16="http://schemas.microsoft.com/office/drawing/2014/main" id="{430F1EC1-E5CA-4D87-9CF8-D9C9771476BC}"/>
               </a:ext>
             </a:extLst>
           </p:cNvPr>
@@ -3745,7 +3745,7 @@
           <p:cNvPr id="12" name="">
             <a:extLst xmlns:a="http://schemas.openxmlformats.org/drawingml/2006/main">
               <a:ext uri="{FF2B5EF4-FFF2-40B4-BE49-F238E27FC236}">
-                <a16:creationId xmlns:a16="http://schemas.microsoft.com/office/drawing/2014/main" id="{88FE5D4D-2489-403B-86DF-4162FDA7DDD7}"/>
+                <a16:creationId xmlns:a16="http://schemas.microsoft.com/office/drawing/2014/main" id="{3C1C994D-73B4-4026-9C38-DBE3D6B39E43}"/>
               </a:ext>
             </a:extLst>
           </p:cNvPr>
@@ -3803,7 +3803,7 @@
           <p:cNvPr id="13" name="">
             <a:extLst xmlns:a="http://schemas.openxmlformats.org/drawingml/2006/main">
               <a:ext uri="{FF2B5EF4-FFF2-40B4-BE49-F238E27FC236}">
-                <a16:creationId xmlns:a16="http://schemas.microsoft.com/office/drawing/2014/main" id="{41F44691-083F-4137-8F14-ACF9F772A051}"/>
+                <a16:creationId xmlns:a16="http://schemas.microsoft.com/office/drawing/2014/main" id="{97B2A4DB-39A8-4ECB-B7EC-F9B3E535E37E}"/>
               </a:ext>
             </a:extLst>
           </p:cNvPr>
@@ -3861,7 +3861,7 @@
           <p:cNvPr id="14" name="">
             <a:extLst xmlns:a="http://schemas.openxmlformats.org/drawingml/2006/main">
               <a:ext uri="{FF2B5EF4-FFF2-40B4-BE49-F238E27FC236}">
-                <a16:creationId xmlns:a16="http://schemas.microsoft.com/office/drawing/2014/main" id="{B9F46874-8330-48C6-89E4-FAB42EA87981}"/>
+                <a16:creationId xmlns:a16="http://schemas.microsoft.com/office/drawing/2014/main" id="{AC085B09-A205-4FF5-8870-AD9E114905DA}"/>
               </a:ext>
             </a:extLst>
           </p:cNvPr>
@@ -3894,7 +3894,7 @@
           <p:cNvPr id="15" name="">
             <a:extLst xmlns:a="http://schemas.openxmlformats.org/drawingml/2006/main">
               <a:ext uri="{FF2B5EF4-FFF2-40B4-BE49-F238E27FC236}">
-                <a16:creationId xmlns:a16="http://schemas.microsoft.com/office/drawing/2014/main" id="{54E59B55-73CF-4CD0-ACB4-726987B75A6A}"/>
+                <a16:creationId xmlns:a16="http://schemas.microsoft.com/office/drawing/2014/main" id="{8108AF83-DF50-41AB-862B-07477E5EF273}"/>
               </a:ext>
             </a:extLst>
           </p:cNvPr>
@@ -3952,7 +3952,7 @@
           <p:cNvPr id="16" name="">
             <a:extLst xmlns:a="http://schemas.openxmlformats.org/drawingml/2006/main">
               <a:ext uri="{FF2B5EF4-FFF2-40B4-BE49-F238E27FC236}">
-                <a16:creationId xmlns:a16="http://schemas.microsoft.com/office/drawing/2014/main" id="{D2FE0ADC-E5C6-44AC-B41E-2C9F8DAC3283}"/>
+                <a16:creationId xmlns:a16="http://schemas.microsoft.com/office/drawing/2014/main" id="{D8692ED4-226F-4B93-8EFF-ACFDA0AAD53D}"/>
               </a:ext>
             </a:extLst>
           </p:cNvPr>
@@ -4010,7 +4010,7 @@
           <p:cNvPr id="17" name="">
             <a:extLst xmlns:a="http://schemas.openxmlformats.org/drawingml/2006/main">
               <a:ext uri="{FF2B5EF4-FFF2-40B4-BE49-F238E27FC236}">
-                <a16:creationId xmlns:a16="http://schemas.microsoft.com/office/drawing/2014/main" id="{339EB633-ECB3-43D0-9EF0-A02C01FED510}"/>
+                <a16:creationId xmlns:a16="http://schemas.microsoft.com/office/drawing/2014/main" id="{B0BCB23B-2195-4389-88AA-19B48039AA81}"/>
               </a:ext>
             </a:extLst>
           </p:cNvPr>
@@ -4068,7 +4068,7 @@
           <p:cNvPr id="18" name="">
             <a:extLst xmlns:a="http://schemas.openxmlformats.org/drawingml/2006/main">
               <a:ext uri="{FF2B5EF4-FFF2-40B4-BE49-F238E27FC236}">
-                <a16:creationId xmlns:a16="http://schemas.microsoft.com/office/drawing/2014/main" id="{CE222F5F-4150-4217-9D44-6115E89066C8}"/>
+                <a16:creationId xmlns:a16="http://schemas.microsoft.com/office/drawing/2014/main" id="{29173C93-C48A-4C66-8AAD-AB9D07B60A89}"/>
               </a:ext>
             </a:extLst>
           </p:cNvPr>
@@ -4101,7 +4101,7 @@
           <p:cNvPr id="19" name="">
             <a:extLst xmlns:a="http://schemas.openxmlformats.org/drawingml/2006/main">
               <a:ext uri="{FF2B5EF4-FFF2-40B4-BE49-F238E27FC236}">
-                <a16:creationId xmlns:a16="http://schemas.microsoft.com/office/drawing/2014/main" id="{CDEF75E8-30CF-4780-B03D-EBAC390B057F}"/>
+                <a16:creationId xmlns:a16="http://schemas.microsoft.com/office/drawing/2014/main" id="{68AFD2BD-C83F-4534-BACD-918136CB535B}"/>
               </a:ext>
             </a:extLst>
           </p:cNvPr>
@@ -4159,7 +4159,7 @@
           <p:cNvPr id="20" name="">
             <a:extLst xmlns:a="http://schemas.openxmlformats.org/drawingml/2006/main">
               <a:ext uri="{FF2B5EF4-FFF2-40B4-BE49-F238E27FC236}">
-                <a16:creationId xmlns:a16="http://schemas.microsoft.com/office/drawing/2014/main" id="{38B9613F-5648-4495-AF26-55F9EFA4B516}"/>
+                <a16:creationId xmlns:a16="http://schemas.microsoft.com/office/drawing/2014/main" id="{7B0F6FF4-370C-4100-BF02-72415ACB5094}"/>
               </a:ext>
             </a:extLst>
           </p:cNvPr>
@@ -4217,7 +4217,7 @@
           <p:cNvPr id="21" name="">
             <a:extLst xmlns:a="http://schemas.openxmlformats.org/drawingml/2006/main">
               <a:ext uri="{FF2B5EF4-FFF2-40B4-BE49-F238E27FC236}">
-                <a16:creationId xmlns:a16="http://schemas.microsoft.com/office/drawing/2014/main" id="{8DAC3289-B6CC-4799-9462-044C820186FB}"/>
+                <a16:creationId xmlns:a16="http://schemas.microsoft.com/office/drawing/2014/main" id="{CA8A36CD-E83A-47B7-8D03-2BA79CAF7A20}"/>
               </a:ext>
             </a:extLst>
           </p:cNvPr>
@@ -4275,7 +4275,7 @@
           <p:cNvPr id="22" name="">
             <a:extLst xmlns:a="http://schemas.openxmlformats.org/drawingml/2006/main">
               <a:ext uri="{FF2B5EF4-FFF2-40B4-BE49-F238E27FC236}">
-                <a16:creationId xmlns:a16="http://schemas.microsoft.com/office/drawing/2014/main" id="{C6BB60BA-1FD0-4A50-8AEC-8E907DC8BB1F}"/>
+                <a16:creationId xmlns:a16="http://schemas.microsoft.com/office/drawing/2014/main" id="{98330272-8018-4D7E-9E23-F2E2D89EFB13}"/>
               </a:ext>
             </a:extLst>
           </p:cNvPr>
@@ -4308,7 +4308,7 @@
           <p:cNvPr id="23" name="">
             <a:extLst xmlns:a="http://schemas.openxmlformats.org/drawingml/2006/main">
               <a:ext uri="{FF2B5EF4-FFF2-40B4-BE49-F238E27FC236}">
-                <a16:creationId xmlns:a16="http://schemas.microsoft.com/office/drawing/2014/main" id="{12CFF996-8001-4774-A571-1BAE2B3E4855}"/>
+                <a16:creationId xmlns:a16="http://schemas.microsoft.com/office/drawing/2014/main" id="{BB795F53-6619-4269-89E4-EBE7EFC12ADB}"/>
               </a:ext>
             </a:extLst>
           </p:cNvPr>
@@ -4366,7 +4366,7 @@
           <p:cNvPr id="24" name="">
             <a:extLst xmlns:a="http://schemas.openxmlformats.org/drawingml/2006/main">
               <a:ext uri="{FF2B5EF4-FFF2-40B4-BE49-F238E27FC236}">
-                <a16:creationId xmlns:a16="http://schemas.microsoft.com/office/drawing/2014/main" id="{CB253C80-E1E4-4AF5-9527-FC8E4A550489}"/>
+                <a16:creationId xmlns:a16="http://schemas.microsoft.com/office/drawing/2014/main" id="{F9A0007E-BF57-4F49-9D72-447033789CE5}"/>
               </a:ext>
             </a:extLst>
           </p:cNvPr>
@@ -4424,7 +4424,7 @@
           <p:cNvPr id="25" name="">
             <a:extLst xmlns:a="http://schemas.openxmlformats.org/drawingml/2006/main">
               <a:ext uri="{FF2B5EF4-FFF2-40B4-BE49-F238E27FC236}">
-                <a16:creationId xmlns:a16="http://schemas.microsoft.com/office/drawing/2014/main" id="{5EAD9D8C-D4C3-4B7B-B2BE-CF245B0A22FB}"/>
+                <a16:creationId xmlns:a16="http://schemas.microsoft.com/office/drawing/2014/main" id="{B9EA768C-DE61-4DAD-9208-1BAEE887AFDB}"/>
               </a:ext>
             </a:extLst>
           </p:cNvPr>
@@ -4482,7 +4482,7 @@
           <p:cNvPr id="26" name="">
             <a:extLst xmlns:a="http://schemas.openxmlformats.org/drawingml/2006/main">
               <a:ext uri="{FF2B5EF4-FFF2-40B4-BE49-F238E27FC236}">
-                <a16:creationId xmlns:a16="http://schemas.microsoft.com/office/drawing/2014/main" id="{75E8CC67-C3CF-4D7F-B5DE-89A854E20B95}"/>
+                <a16:creationId xmlns:a16="http://schemas.microsoft.com/office/drawing/2014/main" id="{2E355FF3-9CC1-48DF-8BDB-D7A875A62CA9}"/>
               </a:ext>
             </a:extLst>
           </p:cNvPr>
@@ -4515,7 +4515,7 @@
           <p:cNvPr id="27" name="">
             <a:extLst xmlns:a="http://schemas.openxmlformats.org/drawingml/2006/main">
               <a:ext uri="{FF2B5EF4-FFF2-40B4-BE49-F238E27FC236}">
-                <a16:creationId xmlns:a16="http://schemas.microsoft.com/office/drawing/2014/main" id="{1BBA8306-CEE4-4CE9-8936-58C7B1B52E73}"/>
+                <a16:creationId xmlns:a16="http://schemas.microsoft.com/office/drawing/2014/main" id="{2F1922B7-D61F-489F-BF8F-1DE79EDD50F6}"/>
               </a:ext>
             </a:extLst>
           </p:cNvPr>
@@ -4573,7 +4573,7 @@
           <p:cNvPr id="28" name="">
             <a:extLst xmlns:a="http://schemas.openxmlformats.org/drawingml/2006/main">
               <a:ext uri="{FF2B5EF4-FFF2-40B4-BE49-F238E27FC236}">
-                <a16:creationId xmlns:a16="http://schemas.microsoft.com/office/drawing/2014/main" id="{E28095EC-CB39-40D3-B464-2AB1C0BDCAA2}"/>
+                <a16:creationId xmlns:a16="http://schemas.microsoft.com/office/drawing/2014/main" id="{46CE7F48-1563-40EB-A8D3-322C64C88BE8}"/>
               </a:ext>
             </a:extLst>
           </p:cNvPr>
@@ -4631,7 +4631,7 @@
           <p:cNvPr id="29" name="">
             <a:extLst xmlns:a="http://schemas.openxmlformats.org/drawingml/2006/main">
               <a:ext uri="{FF2B5EF4-FFF2-40B4-BE49-F238E27FC236}">
-                <a16:creationId xmlns:a16="http://schemas.microsoft.com/office/drawing/2014/main" id="{6232F711-918B-4222-A67D-5611BAAC91A6}"/>
+                <a16:creationId xmlns:a16="http://schemas.microsoft.com/office/drawing/2014/main" id="{C561636E-68FA-423D-8AA0-5B568102BBAF}"/>
               </a:ext>
             </a:extLst>
           </p:cNvPr>
@@ -4689,7 +4689,7 @@
           <p:cNvPr id="30" name="">
             <a:extLst xmlns:a="http://schemas.openxmlformats.org/drawingml/2006/main">
               <a:ext uri="{FF2B5EF4-FFF2-40B4-BE49-F238E27FC236}">
-                <a16:creationId xmlns:a16="http://schemas.microsoft.com/office/drawing/2014/main" id="{1CC772FD-94B8-4719-9AA8-B2EE99F08C41}"/>
+                <a16:creationId xmlns:a16="http://schemas.microsoft.com/office/drawing/2014/main" id="{F3154401-7BB7-4C93-8926-62A600CEFC67}"/>
               </a:ext>
             </a:extLst>
           </p:cNvPr>
@@ -4722,7 +4722,7 @@
           <p:cNvPr id="31" name="">
             <a:extLst xmlns:a="http://schemas.openxmlformats.org/drawingml/2006/main">
               <a:ext uri="{FF2B5EF4-FFF2-40B4-BE49-F238E27FC236}">
-                <a16:creationId xmlns:a16="http://schemas.microsoft.com/office/drawing/2014/main" id="{46E758D2-78A1-4854-AC1E-DFEA3160B60E}"/>
+                <a16:creationId xmlns:a16="http://schemas.microsoft.com/office/drawing/2014/main" id="{EC3A9AEA-AD1E-4389-90BA-9A143A91FF37}"/>
               </a:ext>
             </a:extLst>
           </p:cNvPr>
@@ -4780,7 +4780,7 @@
           <p:cNvPr id="32" name="">
             <a:extLst xmlns:a="http://schemas.openxmlformats.org/drawingml/2006/main">
               <a:ext uri="{FF2B5EF4-FFF2-40B4-BE49-F238E27FC236}">
-                <a16:creationId xmlns:a16="http://schemas.microsoft.com/office/drawing/2014/main" id="{116E953F-711B-4213-95A9-5787BAB55942}"/>
+                <a16:creationId xmlns:a16="http://schemas.microsoft.com/office/drawing/2014/main" id="{543A3DF1-17F1-41A7-B8A7-62A6B8318BF1}"/>
               </a:ext>
             </a:extLst>
           </p:cNvPr>
@@ -4813,7 +4813,7 @@
           <p:cNvPr id="33" name="">
             <a:extLst xmlns:a="http://schemas.openxmlformats.org/drawingml/2006/main">
               <a:ext uri="{FF2B5EF4-FFF2-40B4-BE49-F238E27FC236}">
-                <a16:creationId xmlns:a16="http://schemas.microsoft.com/office/drawing/2014/main" id="{F2A6FAC0-F260-4A2E-984A-BE79400263D6}"/>
+                <a16:creationId xmlns:a16="http://schemas.microsoft.com/office/drawing/2014/main" id="{70B3E710-9DDD-4AF2-9FE0-03F7BC554E64}"/>
               </a:ext>
             </a:extLst>
           </p:cNvPr>
@@ -4871,7 +4871,7 @@
           <p:cNvPr id="34" name="">
             <a:extLst xmlns:a="http://schemas.openxmlformats.org/drawingml/2006/main">
               <a:ext uri="{FF2B5EF4-FFF2-40B4-BE49-F238E27FC236}">
-                <a16:creationId xmlns:a16="http://schemas.microsoft.com/office/drawing/2014/main" id="{1E140CCA-7BD8-4A11-BB0C-586A0488FF28}"/>
+                <a16:creationId xmlns:a16="http://schemas.microsoft.com/office/drawing/2014/main" id="{64553BD1-25E1-441A-BC04-2E3D67203B6B}"/>
               </a:ext>
             </a:extLst>
           </p:cNvPr>
@@ -4904,7 +4904,7 @@
           <p:cNvPr id="35" name="">
             <a:extLst xmlns:a="http://schemas.openxmlformats.org/drawingml/2006/main">
               <a:ext uri="{FF2B5EF4-FFF2-40B4-BE49-F238E27FC236}">
-                <a16:creationId xmlns:a16="http://schemas.microsoft.com/office/drawing/2014/main" id="{18BF58F8-9C5F-48AE-BC35-71D31DAE71A1}"/>
+                <a16:creationId xmlns:a16="http://schemas.microsoft.com/office/drawing/2014/main" id="{B5369B4D-48C3-4C9C-A8A4-A879773CD6FF}"/>
               </a:ext>
             </a:extLst>
           </p:cNvPr>
@@ -4962,7 +4962,7 @@
           <p:cNvPr id="36" name="">
             <a:extLst xmlns:a="http://schemas.openxmlformats.org/drawingml/2006/main">
               <a:ext uri="{FF2B5EF4-FFF2-40B4-BE49-F238E27FC236}">
-                <a16:creationId xmlns:a16="http://schemas.microsoft.com/office/drawing/2014/main" id="{A8239B89-E804-4833-856C-CD1E3660600E}"/>
+                <a16:creationId xmlns:a16="http://schemas.microsoft.com/office/drawing/2014/main" id="{2CCFCEFC-1FFA-49CA-97B4-16DEBE639424}"/>
               </a:ext>
             </a:extLst>
           </p:cNvPr>
@@ -4995,7 +4995,7 @@
           <p:cNvPr id="37" name="">
             <a:extLst xmlns:a="http://schemas.openxmlformats.org/drawingml/2006/main">
               <a:ext uri="{FF2B5EF4-FFF2-40B4-BE49-F238E27FC236}">
-                <a16:creationId xmlns:a16="http://schemas.microsoft.com/office/drawing/2014/main" id="{94358C8D-BD3D-428D-A86D-4C49BA17A499}"/>
+                <a16:creationId xmlns:a16="http://schemas.microsoft.com/office/drawing/2014/main" id="{55B1DEF6-87BC-4EEA-B91E-14894A256E37}"/>
               </a:ext>
             </a:extLst>
           </p:cNvPr>
@@ -5053,7 +5053,7 @@
           <p:cNvPr id="38" name="">
             <a:extLst xmlns:a="http://schemas.openxmlformats.org/drawingml/2006/main">
               <a:ext uri="{FF2B5EF4-FFF2-40B4-BE49-F238E27FC236}">
-                <a16:creationId xmlns:a16="http://schemas.microsoft.com/office/drawing/2014/main" id="{24E280E7-2216-4857-88B5-8E8125168FB3}"/>
+                <a16:creationId xmlns:a16="http://schemas.microsoft.com/office/drawing/2014/main" id="{666411A2-ACF8-4533-97EE-7AAC99375EBD}"/>
               </a:ext>
             </a:extLst>
           </p:cNvPr>
@@ -5086,7 +5086,7 @@
           <p:cNvPr id="39" name="">
             <a:extLst xmlns:a="http://schemas.openxmlformats.org/drawingml/2006/main">
               <a:ext uri="{FF2B5EF4-FFF2-40B4-BE49-F238E27FC236}">
-                <a16:creationId xmlns:a16="http://schemas.microsoft.com/office/drawing/2014/main" id="{6D9BBD3D-21E5-4076-AD04-96B24A517871}"/>
+                <a16:creationId xmlns:a16="http://schemas.microsoft.com/office/drawing/2014/main" id="{6FC5FCDE-D11C-4D85-96B4-FD6451D3AEE8}"/>
               </a:ext>
             </a:extLst>
           </p:cNvPr>
@@ -5144,7 +5144,7 @@
           <p:cNvPr id="40" name="">
             <a:extLst xmlns:a="http://schemas.openxmlformats.org/drawingml/2006/main">
               <a:ext uri="{FF2B5EF4-FFF2-40B4-BE49-F238E27FC236}">
-                <a16:creationId xmlns:a16="http://schemas.microsoft.com/office/drawing/2014/main" id="{9650944F-A950-46CA-8A21-A6AE548D4481}"/>
+                <a16:creationId xmlns:a16="http://schemas.microsoft.com/office/drawing/2014/main" id="{2D4038DC-61D8-4E52-8B7C-01C719C5C594}"/>
               </a:ext>
             </a:extLst>
           </p:cNvPr>
@@ -5177,7 +5177,7 @@
           <p:cNvPr id="41" name="">
             <a:extLst xmlns:a="http://schemas.openxmlformats.org/drawingml/2006/main">
               <a:ext uri="{FF2B5EF4-FFF2-40B4-BE49-F238E27FC236}">
-                <a16:creationId xmlns:a16="http://schemas.microsoft.com/office/drawing/2014/main" id="{C5B54E98-F233-48D1-9F4A-7D50A9274860}"/>
+                <a16:creationId xmlns:a16="http://schemas.microsoft.com/office/drawing/2014/main" id="{96F6C078-D5C7-4FE0-9C9E-3B2C59216042}"/>
               </a:ext>
             </a:extLst>
           </p:cNvPr>
@@ -5235,7 +5235,7 @@
           <p:cNvPr id="42" name="">
             <a:extLst xmlns:a="http://schemas.openxmlformats.org/drawingml/2006/main">
               <a:ext uri="{FF2B5EF4-FFF2-40B4-BE49-F238E27FC236}">
-                <a16:creationId xmlns:a16="http://schemas.microsoft.com/office/drawing/2014/main" id="{9964FD1F-C00D-4196-901D-0F391E219831}"/>
+                <a16:creationId xmlns:a16="http://schemas.microsoft.com/office/drawing/2014/main" id="{126FF3EC-92A1-4A0B-AB51-772D27982E2F}"/>
               </a:ext>
             </a:extLst>
           </p:cNvPr>
@@ -5268,7 +5268,7 @@
           <p:cNvPr id="43" name="">
             <a:extLst xmlns:a="http://schemas.openxmlformats.org/drawingml/2006/main">
               <a:ext uri="{FF2B5EF4-FFF2-40B4-BE49-F238E27FC236}">
-                <a16:creationId xmlns:a16="http://schemas.microsoft.com/office/drawing/2014/main" id="{62B3E022-19E7-4A8F-92A0-01CEF90DFB4D}"/>
+                <a16:creationId xmlns:a16="http://schemas.microsoft.com/office/drawing/2014/main" id="{A06F04BF-88EF-442A-BF0D-D30D5C8E742C}"/>
               </a:ext>
             </a:extLst>
           </p:cNvPr>
@@ -5326,7 +5326,7 @@
           <p:cNvPr id="44" name="">
             <a:extLst xmlns:a="http://schemas.openxmlformats.org/drawingml/2006/main">
               <a:ext uri="{FF2B5EF4-FFF2-40B4-BE49-F238E27FC236}">
-                <a16:creationId xmlns:a16="http://schemas.microsoft.com/office/drawing/2014/main" id="{3C5FEAA6-A8E8-4C85-B5C7-DFCF739B4012}"/>
+                <a16:creationId xmlns:a16="http://schemas.microsoft.com/office/drawing/2014/main" id="{3915F1A1-230C-45FC-B850-45D769FB5BF3}"/>
               </a:ext>
             </a:extLst>
           </p:cNvPr>
@@ -5359,7 +5359,7 @@
           <p:cNvPr id="45" name="">
             <a:extLst xmlns:a="http://schemas.openxmlformats.org/drawingml/2006/main">
               <a:ext uri="{FF2B5EF4-FFF2-40B4-BE49-F238E27FC236}">
-                <a16:creationId xmlns:a16="http://schemas.microsoft.com/office/drawing/2014/main" id="{52323457-A2A1-46D2-A026-B9E5FBE5D3B7}"/>
+                <a16:creationId xmlns:a16="http://schemas.microsoft.com/office/drawing/2014/main" id="{4890D897-38FC-401E-A78B-132AFF413337}"/>
               </a:ext>
             </a:extLst>
           </p:cNvPr>
@@ -5417,7 +5417,7 @@
                 <a:latin typeface="Microsoft YaHei"/>
                 <a:ea typeface="Microsoft YaHei"/>
                 <a:cs typeface="Microsoft YaHei"/>
-                <a:hlinkClick xmlns:r="http://schemas.openxmlformats.org/officeDocument/2006/relationships" r:id="Rafa5434c558242b6"/>
+                <a:hlinkClick xmlns:r="http://schemas.openxmlformats.org/officeDocument/2006/relationships" r:id="Rafd3c566a06e474f"/>
               </a:rPr>
               <a:t>Trae Figma to Code</a:t>
             </a:r>
@@ -5429,7 +5429,7 @@
                 <a:latin typeface="Microsoft YaHei"/>
                 <a:ea typeface="Microsoft YaHei"/>
                 <a:cs typeface="Microsoft YaHei"/>
-                <a:hlinkClick xmlns:r="http://schemas.openxmlformats.org/officeDocument/2006/relationships" r:id="Re69c2202e3344b80"/>
+                <a:hlinkClick xmlns:r="http://schemas.openxmlformats.org/officeDocument/2006/relationships" r:id="R9cee39942ba74a26"/>
               </a:rPr>
               <a:t> · Figma Dev Mode</a:t>
             </a:r>
@@ -5441,7 +5441,7 @@
           <p:cNvPr id="46" name="">
             <a:extLst xmlns:a="http://schemas.openxmlformats.org/drawingml/2006/main">
               <a:ext uri="{FF2B5EF4-FFF2-40B4-BE49-F238E27FC236}">
-                <a16:creationId xmlns:a16="http://schemas.microsoft.com/office/drawing/2014/main" id="{EF24B102-64EB-4014-8A1A-1DA7AD8C1DB0}"/>
+                <a16:creationId xmlns:a16="http://schemas.microsoft.com/office/drawing/2014/main" id="{9896A597-35CD-438E-A0C2-2597AC0AE5E8}"/>
               </a:ext>
             </a:extLst>
           </p:cNvPr>
@@ -5497,7 +5497,7 @@
     </p:spTree>
     <p:extLst>
       <p:ext uri="{BB962C8B-B14F-4D97-AF65-F5344CB8AC3E}">
-        <p14:creationId xmlns:p14="http://schemas.microsoft.com/office/powerpoint/2010/main" val="1710669602"/>
+        <p14:creationId xmlns:p14="http://schemas.microsoft.com/office/powerpoint/2010/main" val="1012666006"/>
       </p:ext>
     </p:extLst>
   </p:cSld>
@@ -5528,7 +5528,7 @@
           <p:cNvPr id="64" name="">
             <a:extLst xmlns:a="http://schemas.openxmlformats.org/drawingml/2006/main">
               <a:ext uri="{FF2B5EF4-FFF2-40B4-BE49-F238E27FC236}">
-                <a16:creationId xmlns:a16="http://schemas.microsoft.com/office/drawing/2014/main" id="{DEA8D3F7-1994-4EB7-A371-0A16122182C2}"/>
+                <a16:creationId xmlns:a16="http://schemas.microsoft.com/office/drawing/2014/main" id="{3381991A-69D3-4F88-8A10-0DBC55B03AF1}"/>
               </a:ext>
             </a:extLst>
           </p:cNvPr>
@@ -5561,7 +5561,7 @@
           <p:cNvPr id="2" name="">
             <a:extLst xmlns:a="http://schemas.openxmlformats.org/drawingml/2006/main">
               <a:ext uri="{FF2B5EF4-FFF2-40B4-BE49-F238E27FC236}">
-                <a16:creationId xmlns:a16="http://schemas.microsoft.com/office/drawing/2014/main" id="{DE8FC575-20A6-4A21-8B26-D5E68BA3DA94}"/>
+                <a16:creationId xmlns:a16="http://schemas.microsoft.com/office/drawing/2014/main" id="{F6FC7C13-6CF1-4D30-B849-F58AD8B1BEE3}"/>
               </a:ext>
             </a:extLst>
           </p:cNvPr>
@@ -5619,7 +5619,7 @@
           <p:cNvPr id="3" name="">
             <a:extLst xmlns:a="http://schemas.openxmlformats.org/drawingml/2006/main">
               <a:ext uri="{FF2B5EF4-FFF2-40B4-BE49-F238E27FC236}">
-                <a16:creationId xmlns:a16="http://schemas.microsoft.com/office/drawing/2014/main" id="{5A2ADF23-7974-4351-85D6-74A91E0CEA5A}"/>
+                <a16:creationId xmlns:a16="http://schemas.microsoft.com/office/drawing/2014/main" id="{29D6CB7F-0257-497F-95FA-325C0D642402}"/>
               </a:ext>
             </a:extLst>
           </p:cNvPr>
@@ -5651,7 +5651,7 @@
             <a:pPr algn="l">
               <a:defRPr sz="2325" b="1">
                 <a:solidFill>
-                  <a:srgbClr val="1D1D1A"/>
+                  <a:srgbClr val="8A0F17"/>
                 </a:solidFill>
                 <a:latin typeface="Microsoft YaHei"/>
                 <a:ea typeface="Microsoft YaHei"/>
@@ -5661,7 +5661,7 @@
             <a:r>
               <a:rPr sz="2325" b="1">
                 <a:solidFill>
-                  <a:srgbClr val="1D1D1A"/>
+                  <a:srgbClr val="8A0F17"/>
                 </a:solidFill>
                 <a:latin typeface="Microsoft YaHei"/>
                 <a:ea typeface="Microsoft YaHei"/>
@@ -5677,7 +5677,7 @@
           <p:cNvPr id="4" name="">
             <a:extLst xmlns:a="http://schemas.openxmlformats.org/drawingml/2006/main">
               <a:ext uri="{FF2B5EF4-FFF2-40B4-BE49-F238E27FC236}">
-                <a16:creationId xmlns:a16="http://schemas.microsoft.com/office/drawing/2014/main" id="{C2FF0C6D-F9CA-4FDD-B7AC-FA31059C6561}"/>
+                <a16:creationId xmlns:a16="http://schemas.microsoft.com/office/drawing/2014/main" id="{C6AD5CA2-A11A-439D-9B1B-55BF81941451}"/>
               </a:ext>
             </a:extLst>
           </p:cNvPr>
@@ -5710,7 +5710,7 @@
           <p:cNvPr id="5" name="">
             <a:extLst xmlns:a="http://schemas.openxmlformats.org/drawingml/2006/main">
               <a:ext uri="{FF2B5EF4-FFF2-40B4-BE49-F238E27FC236}">
-                <a16:creationId xmlns:a16="http://schemas.microsoft.com/office/drawing/2014/main" id="{926A6E03-49A7-4A05-8F91-6FAA4EA500B9}"/>
+                <a16:creationId xmlns:a16="http://schemas.microsoft.com/office/drawing/2014/main" id="{EB37E123-7340-4C73-AC74-EA932EB73D3A}"/>
               </a:ext>
             </a:extLst>
           </p:cNvPr>
@@ -5768,7 +5768,7 @@
           <p:cNvPr id="6" name="">
             <a:extLst xmlns:a="http://schemas.openxmlformats.org/drawingml/2006/main">
               <a:ext uri="{FF2B5EF4-FFF2-40B4-BE49-F238E27FC236}">
-                <a16:creationId xmlns:a16="http://schemas.microsoft.com/office/drawing/2014/main" id="{55294D42-F161-413E-A021-1A9EAA621E8B}"/>
+                <a16:creationId xmlns:a16="http://schemas.microsoft.com/office/drawing/2014/main" id="{A2B7E4ED-2151-4FB1-9598-6E69CC10FECD}"/>
               </a:ext>
             </a:extLst>
           </p:cNvPr>
@@ -5826,7 +5826,7 @@
           <p:cNvPr id="7" name="">
             <a:extLst xmlns:a="http://schemas.openxmlformats.org/drawingml/2006/main">
               <a:ext uri="{FF2B5EF4-FFF2-40B4-BE49-F238E27FC236}">
-                <a16:creationId xmlns:a16="http://schemas.microsoft.com/office/drawing/2014/main" id="{36F50C2B-5F4A-4EDB-8D80-D8EE758C7739}"/>
+                <a16:creationId xmlns:a16="http://schemas.microsoft.com/office/drawing/2014/main" id="{44FE3583-1738-4600-B655-BEE7D0A0A353}"/>
               </a:ext>
             </a:extLst>
           </p:cNvPr>
@@ -5884,7 +5884,7 @@
           <p:cNvPr id="8" name="">
             <a:extLst xmlns:a="http://schemas.openxmlformats.org/drawingml/2006/main">
               <a:ext uri="{FF2B5EF4-FFF2-40B4-BE49-F238E27FC236}">
-                <a16:creationId xmlns:a16="http://schemas.microsoft.com/office/drawing/2014/main" id="{60690008-C27D-4586-BA3F-29DD992CE35D}"/>
+                <a16:creationId xmlns:a16="http://schemas.microsoft.com/office/drawing/2014/main" id="{F2C2A7F2-0A57-4FA0-B7BB-7BE36755E8D4}"/>
               </a:ext>
             </a:extLst>
           </p:cNvPr>
@@ -5917,7 +5917,7 @@
           <p:cNvPr id="9" name="">
             <a:extLst xmlns:a="http://schemas.openxmlformats.org/drawingml/2006/main">
               <a:ext uri="{FF2B5EF4-FFF2-40B4-BE49-F238E27FC236}">
-                <a16:creationId xmlns:a16="http://schemas.microsoft.com/office/drawing/2014/main" id="{5DA4EF47-9E47-4E18-AFE1-42C2641276FE}"/>
+                <a16:creationId xmlns:a16="http://schemas.microsoft.com/office/drawing/2014/main" id="{BE257C26-17EB-4584-AF55-DEDEE9E6ED29}"/>
               </a:ext>
             </a:extLst>
           </p:cNvPr>
@@ -5950,7 +5950,7 @@
           <p:cNvPr id="10" name="">
             <a:extLst xmlns:a="http://schemas.openxmlformats.org/drawingml/2006/main">
               <a:ext uri="{FF2B5EF4-FFF2-40B4-BE49-F238E27FC236}">
-                <a16:creationId xmlns:a16="http://schemas.microsoft.com/office/drawing/2014/main" id="{15BA1403-C28E-4C92-835B-C247688CE550}"/>
+                <a16:creationId xmlns:a16="http://schemas.microsoft.com/office/drawing/2014/main" id="{567CA9F0-7889-4D4C-9503-D728FD2F5459}"/>
               </a:ext>
             </a:extLst>
           </p:cNvPr>
@@ -5983,7 +5983,7 @@
           <p:cNvPr id="11" name="">
             <a:extLst xmlns:a="http://schemas.openxmlformats.org/drawingml/2006/main">
               <a:ext uri="{FF2B5EF4-FFF2-40B4-BE49-F238E27FC236}">
-                <a16:creationId xmlns:a16="http://schemas.microsoft.com/office/drawing/2014/main" id="{54F03A03-8428-4160-A593-27D9A4E69C05}"/>
+                <a16:creationId xmlns:a16="http://schemas.microsoft.com/office/drawing/2014/main" id="{0BECDDAB-1F37-40E1-855E-4925C1429DCA}"/>
               </a:ext>
             </a:extLst>
           </p:cNvPr>
@@ -6041,7 +6041,7 @@
           <p:cNvPr id="12" name="">
             <a:extLst xmlns:a="http://schemas.openxmlformats.org/drawingml/2006/main">
               <a:ext uri="{FF2B5EF4-FFF2-40B4-BE49-F238E27FC236}">
-                <a16:creationId xmlns:a16="http://schemas.microsoft.com/office/drawing/2014/main" id="{E97AA8DC-B471-4718-B269-085429780C78}"/>
+                <a16:creationId xmlns:a16="http://schemas.microsoft.com/office/drawing/2014/main" id="{6BC40BC3-93FA-414C-A734-588EBEC5C4F4}"/>
               </a:ext>
             </a:extLst>
           </p:cNvPr>
@@ -6099,7 +6099,7 @@
           <p:cNvPr id="13" name="">
             <a:extLst xmlns:a="http://schemas.openxmlformats.org/drawingml/2006/main">
               <a:ext uri="{FF2B5EF4-FFF2-40B4-BE49-F238E27FC236}">
-                <a16:creationId xmlns:a16="http://schemas.microsoft.com/office/drawing/2014/main" id="{D25C264E-AF58-4EDA-AD63-91143862730F}"/>
+                <a16:creationId xmlns:a16="http://schemas.microsoft.com/office/drawing/2014/main" id="{D3B830C9-C4C3-4800-8106-25036A23A557}"/>
               </a:ext>
             </a:extLst>
           </p:cNvPr>
@@ -6157,7 +6157,7 @@
           <p:cNvPr id="14" name="">
             <a:extLst xmlns:a="http://schemas.openxmlformats.org/drawingml/2006/main">
               <a:ext uri="{FF2B5EF4-FFF2-40B4-BE49-F238E27FC236}">
-                <a16:creationId xmlns:a16="http://schemas.microsoft.com/office/drawing/2014/main" id="{860EDFBE-D0E4-49EB-A102-50FE08C106A7}"/>
+                <a16:creationId xmlns:a16="http://schemas.microsoft.com/office/drawing/2014/main" id="{4E363480-352F-4EE4-9B5C-8ACB9ABC5EE1}"/>
               </a:ext>
             </a:extLst>
           </p:cNvPr>
@@ -6190,7 +6190,7 @@
           <p:cNvPr id="15" name="">
             <a:extLst xmlns:a="http://schemas.openxmlformats.org/drawingml/2006/main">
               <a:ext uri="{FF2B5EF4-FFF2-40B4-BE49-F238E27FC236}">
-                <a16:creationId xmlns:a16="http://schemas.microsoft.com/office/drawing/2014/main" id="{49C48EBF-16AD-41CF-863C-D7D3E00EDE92}"/>
+                <a16:creationId xmlns:a16="http://schemas.microsoft.com/office/drawing/2014/main" id="{B1661E58-560B-437E-8073-7145BBC1BCD7}"/>
               </a:ext>
             </a:extLst>
           </p:cNvPr>
@@ -6223,7 +6223,7 @@
           <p:cNvPr id="16" name="">
             <a:extLst xmlns:a="http://schemas.openxmlformats.org/drawingml/2006/main">
               <a:ext uri="{FF2B5EF4-FFF2-40B4-BE49-F238E27FC236}">
-                <a16:creationId xmlns:a16="http://schemas.microsoft.com/office/drawing/2014/main" id="{BF45232E-FCF7-4549-A11C-7A36E03FE184}"/>
+                <a16:creationId xmlns:a16="http://schemas.microsoft.com/office/drawing/2014/main" id="{091E6E59-338E-4676-BC96-1DBD55BAD8B5}"/>
               </a:ext>
             </a:extLst>
           </p:cNvPr>
@@ -6256,7 +6256,7 @@
           <p:cNvPr id="17" name="">
             <a:extLst xmlns:a="http://schemas.openxmlformats.org/drawingml/2006/main">
               <a:ext uri="{FF2B5EF4-FFF2-40B4-BE49-F238E27FC236}">
-                <a16:creationId xmlns:a16="http://schemas.microsoft.com/office/drawing/2014/main" id="{DCF6D4CB-F6BD-42DB-938E-AAB0658155FF}"/>
+                <a16:creationId xmlns:a16="http://schemas.microsoft.com/office/drawing/2014/main" id="{3022171D-DDCA-4382-8A86-A7A3F661610C}"/>
               </a:ext>
             </a:extLst>
           </p:cNvPr>
@@ -6314,7 +6314,7 @@
           <p:cNvPr id="18" name="">
             <a:extLst xmlns:a="http://schemas.openxmlformats.org/drawingml/2006/main">
               <a:ext uri="{FF2B5EF4-FFF2-40B4-BE49-F238E27FC236}">
-                <a16:creationId xmlns:a16="http://schemas.microsoft.com/office/drawing/2014/main" id="{26704419-37B2-4C44-BAE5-E7C4E01E1A78}"/>
+                <a16:creationId xmlns:a16="http://schemas.microsoft.com/office/drawing/2014/main" id="{0E29B29F-81BB-49B9-AEFA-6C8EB0561CE8}"/>
               </a:ext>
             </a:extLst>
           </p:cNvPr>
@@ -6372,7 +6372,7 @@
           <p:cNvPr id="19" name="">
             <a:extLst xmlns:a="http://schemas.openxmlformats.org/drawingml/2006/main">
               <a:ext uri="{FF2B5EF4-FFF2-40B4-BE49-F238E27FC236}">
-                <a16:creationId xmlns:a16="http://schemas.microsoft.com/office/drawing/2014/main" id="{1D4D7255-8D56-4FEC-99E0-CFA8FED6832F}"/>
+                <a16:creationId xmlns:a16="http://schemas.microsoft.com/office/drawing/2014/main" id="{A7341AD9-D226-4F6A-942E-2491A510F953}"/>
               </a:ext>
             </a:extLst>
           </p:cNvPr>
@@ -6430,7 +6430,7 @@
           <p:cNvPr id="20" name="">
             <a:extLst xmlns:a="http://schemas.openxmlformats.org/drawingml/2006/main">
               <a:ext uri="{FF2B5EF4-FFF2-40B4-BE49-F238E27FC236}">
-                <a16:creationId xmlns:a16="http://schemas.microsoft.com/office/drawing/2014/main" id="{7B8C6467-9AA1-4372-B25A-ADFAE050AE55}"/>
+                <a16:creationId xmlns:a16="http://schemas.microsoft.com/office/drawing/2014/main" id="{5A4F76D1-CCAB-4D38-A443-2EED3D571159}"/>
               </a:ext>
             </a:extLst>
           </p:cNvPr>
@@ -6463,7 +6463,7 @@
           <p:cNvPr id="21" name="">
             <a:extLst xmlns:a="http://schemas.openxmlformats.org/drawingml/2006/main">
               <a:ext uri="{FF2B5EF4-FFF2-40B4-BE49-F238E27FC236}">
-                <a16:creationId xmlns:a16="http://schemas.microsoft.com/office/drawing/2014/main" id="{31F3C18C-485E-477F-8C44-ACA9B70CF623}"/>
+                <a16:creationId xmlns:a16="http://schemas.microsoft.com/office/drawing/2014/main" id="{7C2B6C44-2E2C-4281-BC49-E1CAB52EDD3A}"/>
               </a:ext>
             </a:extLst>
           </p:cNvPr>
@@ -6496,7 +6496,7 @@
           <p:cNvPr id="22" name="">
             <a:extLst xmlns:a="http://schemas.openxmlformats.org/drawingml/2006/main">
               <a:ext uri="{FF2B5EF4-FFF2-40B4-BE49-F238E27FC236}">
-                <a16:creationId xmlns:a16="http://schemas.microsoft.com/office/drawing/2014/main" id="{D1351564-CF85-4566-8B99-7DFAF177B85A}"/>
+                <a16:creationId xmlns:a16="http://schemas.microsoft.com/office/drawing/2014/main" id="{5C2F81A9-67FB-44B0-B1D2-9DE74F45E4C6}"/>
               </a:ext>
             </a:extLst>
           </p:cNvPr>
@@ -6529,7 +6529,7 @@
           <p:cNvPr id="23" name="">
             <a:extLst xmlns:a="http://schemas.openxmlformats.org/drawingml/2006/main">
               <a:ext uri="{FF2B5EF4-FFF2-40B4-BE49-F238E27FC236}">
-                <a16:creationId xmlns:a16="http://schemas.microsoft.com/office/drawing/2014/main" id="{6EC577F8-D238-44A2-9BED-5577AFA4E156}"/>
+                <a16:creationId xmlns:a16="http://schemas.microsoft.com/office/drawing/2014/main" id="{FF5662F0-2014-43F0-A72F-AEA6AAD9FD72}"/>
               </a:ext>
             </a:extLst>
           </p:cNvPr>
@@ -6587,7 +6587,7 @@
           <p:cNvPr id="24" name="">
             <a:extLst xmlns:a="http://schemas.openxmlformats.org/drawingml/2006/main">
               <a:ext uri="{FF2B5EF4-FFF2-40B4-BE49-F238E27FC236}">
-                <a16:creationId xmlns:a16="http://schemas.microsoft.com/office/drawing/2014/main" id="{7B7AA955-4AC1-4FC2-93CE-9A6D71F35909}"/>
+                <a16:creationId xmlns:a16="http://schemas.microsoft.com/office/drawing/2014/main" id="{60A9701F-0907-4A0B-920E-B686A90BC2A3}"/>
               </a:ext>
             </a:extLst>
           </p:cNvPr>
@@ -6645,7 +6645,7 @@
           <p:cNvPr id="25" name="">
             <a:extLst xmlns:a="http://schemas.openxmlformats.org/drawingml/2006/main">
               <a:ext uri="{FF2B5EF4-FFF2-40B4-BE49-F238E27FC236}">
-                <a16:creationId xmlns:a16="http://schemas.microsoft.com/office/drawing/2014/main" id="{14A1C65E-AFB1-4DC0-BF3D-832CDD904DF2}"/>
+                <a16:creationId xmlns:a16="http://schemas.microsoft.com/office/drawing/2014/main" id="{1B108128-8D6D-4F40-911B-1A4D3E6D83F6}"/>
               </a:ext>
             </a:extLst>
           </p:cNvPr>
@@ -6703,7 +6703,7 @@
           <p:cNvPr id="26" name="">
             <a:extLst xmlns:a="http://schemas.openxmlformats.org/drawingml/2006/main">
               <a:ext uri="{FF2B5EF4-FFF2-40B4-BE49-F238E27FC236}">
-                <a16:creationId xmlns:a16="http://schemas.microsoft.com/office/drawing/2014/main" id="{539A3631-84CC-4E60-87CC-CC0F3C926FA0}"/>
+                <a16:creationId xmlns:a16="http://schemas.microsoft.com/office/drawing/2014/main" id="{5FD6B96C-369E-43B1-A8FF-90F74A6FA4F5}"/>
               </a:ext>
             </a:extLst>
           </p:cNvPr>
@@ -6736,7 +6736,7 @@
           <p:cNvPr id="27" name="">
             <a:extLst xmlns:a="http://schemas.openxmlformats.org/drawingml/2006/main">
               <a:ext uri="{FF2B5EF4-FFF2-40B4-BE49-F238E27FC236}">
-                <a16:creationId xmlns:a16="http://schemas.microsoft.com/office/drawing/2014/main" id="{29A2D176-3687-4CB5-B07B-8359803E6006}"/>
+                <a16:creationId xmlns:a16="http://schemas.microsoft.com/office/drawing/2014/main" id="{C38AAF52-E2E9-403B-86D9-8922E25E45CA}"/>
               </a:ext>
             </a:extLst>
           </p:cNvPr>
@@ -6769,7 +6769,7 @@
           <p:cNvPr id="28" name="">
             <a:extLst xmlns:a="http://schemas.openxmlformats.org/drawingml/2006/main">
               <a:ext uri="{FF2B5EF4-FFF2-40B4-BE49-F238E27FC236}">
-                <a16:creationId xmlns:a16="http://schemas.microsoft.com/office/drawing/2014/main" id="{37AE11EA-F490-4C9A-8BFD-5B059D585F60}"/>
+                <a16:creationId xmlns:a16="http://schemas.microsoft.com/office/drawing/2014/main" id="{7CBB19DB-8219-45FB-BFA6-FBDC628AD259}"/>
               </a:ext>
             </a:extLst>
           </p:cNvPr>
@@ -6802,7 +6802,7 @@
           <p:cNvPr id="29" name="">
             <a:extLst xmlns:a="http://schemas.openxmlformats.org/drawingml/2006/main">
               <a:ext uri="{FF2B5EF4-FFF2-40B4-BE49-F238E27FC236}">
-                <a16:creationId xmlns:a16="http://schemas.microsoft.com/office/drawing/2014/main" id="{07FF73D5-917A-4E2C-9638-5D4EF6BBB367}"/>
+                <a16:creationId xmlns:a16="http://schemas.microsoft.com/office/drawing/2014/main" id="{22A8DD73-3D13-42F3-8F8C-5939F5C73BFC}"/>
               </a:ext>
             </a:extLst>
           </p:cNvPr>
@@ -6860,7 +6860,7 @@
           <p:cNvPr id="30" name="">
             <a:extLst xmlns:a="http://schemas.openxmlformats.org/drawingml/2006/main">
               <a:ext uri="{FF2B5EF4-FFF2-40B4-BE49-F238E27FC236}">
-                <a16:creationId xmlns:a16="http://schemas.microsoft.com/office/drawing/2014/main" id="{C0446117-4D62-4CA3-B91D-FE27968B579A}"/>
+                <a16:creationId xmlns:a16="http://schemas.microsoft.com/office/drawing/2014/main" id="{A1B4A845-77E5-40EB-B416-5E8FCFB99DD9}"/>
               </a:ext>
             </a:extLst>
           </p:cNvPr>
@@ -6918,7 +6918,7 @@
           <p:cNvPr id="31" name="">
             <a:extLst xmlns:a="http://schemas.openxmlformats.org/drawingml/2006/main">
               <a:ext uri="{FF2B5EF4-FFF2-40B4-BE49-F238E27FC236}">
-                <a16:creationId xmlns:a16="http://schemas.microsoft.com/office/drawing/2014/main" id="{E8ACF262-356F-46B8-AE07-75B85E892CB4}"/>
+                <a16:creationId xmlns:a16="http://schemas.microsoft.com/office/drawing/2014/main" id="{419E5250-4134-4E2F-A8B0-CC9ED06EB763}"/>
               </a:ext>
             </a:extLst>
           </p:cNvPr>
@@ -6976,7 +6976,7 @@
           <p:cNvPr id="32" name="">
             <a:extLst xmlns:a="http://schemas.openxmlformats.org/drawingml/2006/main">
               <a:ext uri="{FF2B5EF4-FFF2-40B4-BE49-F238E27FC236}">
-                <a16:creationId xmlns:a16="http://schemas.microsoft.com/office/drawing/2014/main" id="{1CCC8C87-891F-4546-8730-19B2FE379E25}"/>
+                <a16:creationId xmlns:a16="http://schemas.microsoft.com/office/drawing/2014/main" id="{8378A045-8F69-4325-B748-CE56AD45DE92}"/>
               </a:ext>
             </a:extLst>
           </p:cNvPr>
@@ -7009,7 +7009,7 @@
           <p:cNvPr id="33" name="">
             <a:extLst xmlns:a="http://schemas.openxmlformats.org/drawingml/2006/main">
               <a:ext uri="{FF2B5EF4-FFF2-40B4-BE49-F238E27FC236}">
-                <a16:creationId xmlns:a16="http://schemas.microsoft.com/office/drawing/2014/main" id="{43A288B8-2D38-4C8E-80B1-6246F9BEA11C}"/>
+                <a16:creationId xmlns:a16="http://schemas.microsoft.com/office/drawing/2014/main" id="{8E310BC3-B638-4024-907A-4DE848E96D3F}"/>
               </a:ext>
             </a:extLst>
           </p:cNvPr>
@@ -7042,7 +7042,7 @@
           <p:cNvPr id="34" name="">
             <a:extLst xmlns:a="http://schemas.openxmlformats.org/drawingml/2006/main">
               <a:ext uri="{FF2B5EF4-FFF2-40B4-BE49-F238E27FC236}">
-                <a16:creationId xmlns:a16="http://schemas.microsoft.com/office/drawing/2014/main" id="{B85C8E55-192C-42AC-93FD-9F3166D81D31}"/>
+                <a16:creationId xmlns:a16="http://schemas.microsoft.com/office/drawing/2014/main" id="{CC2A7DFA-18D9-4A1B-B969-C1E75358504E}"/>
               </a:ext>
             </a:extLst>
           </p:cNvPr>
@@ -7075,7 +7075,7 @@
           <p:cNvPr id="35" name="">
             <a:extLst xmlns:a="http://schemas.openxmlformats.org/drawingml/2006/main">
               <a:ext uri="{FF2B5EF4-FFF2-40B4-BE49-F238E27FC236}">
-                <a16:creationId xmlns:a16="http://schemas.microsoft.com/office/drawing/2014/main" id="{8BC7BC9F-3086-4035-80B7-D6665679BDDD}"/>
+                <a16:creationId xmlns:a16="http://schemas.microsoft.com/office/drawing/2014/main" id="{11905667-83E3-402D-928C-50F06C1955F1}"/>
               </a:ext>
             </a:extLst>
           </p:cNvPr>
@@ -7133,7 +7133,7 @@
           <p:cNvPr id="36" name="">
             <a:extLst xmlns:a="http://schemas.openxmlformats.org/drawingml/2006/main">
               <a:ext uri="{FF2B5EF4-FFF2-40B4-BE49-F238E27FC236}">
-                <a16:creationId xmlns:a16="http://schemas.microsoft.com/office/drawing/2014/main" id="{09004E97-EEB7-48A2-AA2B-0399FBBD2572}"/>
+                <a16:creationId xmlns:a16="http://schemas.microsoft.com/office/drawing/2014/main" id="{33421242-9F6C-4FBA-A3B1-F0481032728A}"/>
               </a:ext>
             </a:extLst>
           </p:cNvPr>
@@ -7191,7 +7191,7 @@
           <p:cNvPr id="37" name="">
             <a:extLst xmlns:a="http://schemas.openxmlformats.org/drawingml/2006/main">
               <a:ext uri="{FF2B5EF4-FFF2-40B4-BE49-F238E27FC236}">
-                <a16:creationId xmlns:a16="http://schemas.microsoft.com/office/drawing/2014/main" id="{376EDE3E-79FF-4CBC-9453-D027CC5BB6A8}"/>
+                <a16:creationId xmlns:a16="http://schemas.microsoft.com/office/drawing/2014/main" id="{1BED855B-C2C5-4D5E-97A5-4A0907AAA36B}"/>
               </a:ext>
             </a:extLst>
           </p:cNvPr>
@@ -7249,7 +7249,7 @@
           <p:cNvPr id="38" name="">
             <a:extLst xmlns:a="http://schemas.openxmlformats.org/drawingml/2006/main">
               <a:ext uri="{FF2B5EF4-FFF2-40B4-BE49-F238E27FC236}">
-                <a16:creationId xmlns:a16="http://schemas.microsoft.com/office/drawing/2014/main" id="{24817BB2-66D5-448D-82A6-564F1EDB3C6A}"/>
+                <a16:creationId xmlns:a16="http://schemas.microsoft.com/office/drawing/2014/main" id="{51B7D799-43A8-47FE-A199-675F4F3859FC}"/>
               </a:ext>
             </a:extLst>
           </p:cNvPr>
@@ -7307,7 +7307,7 @@
           <p:cNvPr id="39" name="">
             <a:extLst xmlns:a="http://schemas.openxmlformats.org/drawingml/2006/main">
               <a:ext uri="{FF2B5EF4-FFF2-40B4-BE49-F238E27FC236}">
-                <a16:creationId xmlns:a16="http://schemas.microsoft.com/office/drawing/2014/main" id="{399C25C2-9659-4148-B7AB-7594FBF4332D}"/>
+                <a16:creationId xmlns:a16="http://schemas.microsoft.com/office/drawing/2014/main" id="{7C4CAAD8-357C-45E3-9170-5C1A2725211C}"/>
               </a:ext>
             </a:extLst>
           </p:cNvPr>
@@ -7340,7 +7340,7 @@
           <p:cNvPr id="40" name="">
             <a:extLst xmlns:a="http://schemas.openxmlformats.org/drawingml/2006/main">
               <a:ext uri="{FF2B5EF4-FFF2-40B4-BE49-F238E27FC236}">
-                <a16:creationId xmlns:a16="http://schemas.microsoft.com/office/drawing/2014/main" id="{A4EF9B83-1D75-462A-B5B1-9C66E9DBEE6F}"/>
+                <a16:creationId xmlns:a16="http://schemas.microsoft.com/office/drawing/2014/main" id="{2020D545-9183-4A93-8B0C-DAE8C8B4B2BE}"/>
               </a:ext>
             </a:extLst>
           </p:cNvPr>
@@ -7398,7 +7398,7 @@
           <p:cNvPr id="41" name="">
             <a:extLst xmlns:a="http://schemas.openxmlformats.org/drawingml/2006/main">
               <a:ext uri="{FF2B5EF4-FFF2-40B4-BE49-F238E27FC236}">
-                <a16:creationId xmlns:a16="http://schemas.microsoft.com/office/drawing/2014/main" id="{E763BBC2-3B36-43F6-BC12-4D26B8489B95}"/>
+                <a16:creationId xmlns:a16="http://schemas.microsoft.com/office/drawing/2014/main" id="{47705185-EE85-4049-AD38-32778636C2E8}"/>
               </a:ext>
             </a:extLst>
           </p:cNvPr>
@@ -7456,7 +7456,7 @@
           <p:cNvPr id="42" name="">
             <a:extLst xmlns:a="http://schemas.openxmlformats.org/drawingml/2006/main">
               <a:ext uri="{FF2B5EF4-FFF2-40B4-BE49-F238E27FC236}">
-                <a16:creationId xmlns:a16="http://schemas.microsoft.com/office/drawing/2014/main" id="{AC58BCF1-D25E-4956-B8D2-1BFB3CA84C9D}"/>
+                <a16:creationId xmlns:a16="http://schemas.microsoft.com/office/drawing/2014/main" id="{A6874934-AA34-4425-BCC7-2C2C95304EC4}"/>
               </a:ext>
             </a:extLst>
           </p:cNvPr>
@@ -7489,7 +7489,7 @@
           <p:cNvPr id="43" name="">
             <a:extLst xmlns:a="http://schemas.openxmlformats.org/drawingml/2006/main">
               <a:ext uri="{FF2B5EF4-FFF2-40B4-BE49-F238E27FC236}">
-                <a16:creationId xmlns:a16="http://schemas.microsoft.com/office/drawing/2014/main" id="{F0A27710-77AD-4DE8-A20D-27B0328CD2D2}"/>
+                <a16:creationId xmlns:a16="http://schemas.microsoft.com/office/drawing/2014/main" id="{6F70DCA8-7D33-42D7-9122-B2C292701C13}"/>
               </a:ext>
             </a:extLst>
           </p:cNvPr>
@@ -7547,7 +7547,7 @@
           <p:cNvPr id="44" name="">
             <a:extLst xmlns:a="http://schemas.openxmlformats.org/drawingml/2006/main">
               <a:ext uri="{FF2B5EF4-FFF2-40B4-BE49-F238E27FC236}">
-                <a16:creationId xmlns:a16="http://schemas.microsoft.com/office/drawing/2014/main" id="{20BF15F0-E773-43A7-B55C-737C37F569AA}"/>
+                <a16:creationId xmlns:a16="http://schemas.microsoft.com/office/drawing/2014/main" id="{C25396E2-7A36-4BCB-96DD-B52F4D93FA8C}"/>
               </a:ext>
             </a:extLst>
           </p:cNvPr>
@@ -7605,7 +7605,7 @@
           <p:cNvPr id="45" name="">
             <a:extLst xmlns:a="http://schemas.openxmlformats.org/drawingml/2006/main">
               <a:ext uri="{FF2B5EF4-FFF2-40B4-BE49-F238E27FC236}">
-                <a16:creationId xmlns:a16="http://schemas.microsoft.com/office/drawing/2014/main" id="{1F22C7AC-72F7-4B75-9736-1813402828AD}"/>
+                <a16:creationId xmlns:a16="http://schemas.microsoft.com/office/drawing/2014/main" id="{8965F222-EC7B-4EA1-A202-1957136395B2}"/>
               </a:ext>
             </a:extLst>
           </p:cNvPr>
@@ -7638,7 +7638,7 @@
           <p:cNvPr id="46" name="">
             <a:extLst xmlns:a="http://schemas.openxmlformats.org/drawingml/2006/main">
               <a:ext uri="{FF2B5EF4-FFF2-40B4-BE49-F238E27FC236}">
-                <a16:creationId xmlns:a16="http://schemas.microsoft.com/office/drawing/2014/main" id="{0D95A0A1-B92F-449C-9A42-9580B860FA42}"/>
+                <a16:creationId xmlns:a16="http://schemas.microsoft.com/office/drawing/2014/main" id="{72FC6657-706A-42E8-A4AD-0FC6FA97347A}"/>
               </a:ext>
             </a:extLst>
           </p:cNvPr>
@@ -7696,7 +7696,7 @@
           <p:cNvPr id="47" name="">
             <a:extLst xmlns:a="http://schemas.openxmlformats.org/drawingml/2006/main">
               <a:ext uri="{FF2B5EF4-FFF2-40B4-BE49-F238E27FC236}">
-                <a16:creationId xmlns:a16="http://schemas.microsoft.com/office/drawing/2014/main" id="{C3CA16EA-7DB8-46CC-9F54-6B47452DA767}"/>
+                <a16:creationId xmlns:a16="http://schemas.microsoft.com/office/drawing/2014/main" id="{0667B5B5-1BD7-4052-9A83-4C3156870EE1}"/>
               </a:ext>
             </a:extLst>
           </p:cNvPr>
@@ -7754,7 +7754,7 @@
           <p:cNvPr id="48" name="">
             <a:extLst xmlns:a="http://schemas.openxmlformats.org/drawingml/2006/main">
               <a:ext uri="{FF2B5EF4-FFF2-40B4-BE49-F238E27FC236}">
-                <a16:creationId xmlns:a16="http://schemas.microsoft.com/office/drawing/2014/main" id="{3031BA63-664F-4CE0-A69F-D8FDDE5FE7D1}"/>
+                <a16:creationId xmlns:a16="http://schemas.microsoft.com/office/drawing/2014/main" id="{9BF26C09-BD93-4394-98DF-8539B7610190}"/>
               </a:ext>
             </a:extLst>
           </p:cNvPr>
@@ -7787,7 +7787,7 @@
           <p:cNvPr id="49" name="">
             <a:extLst xmlns:a="http://schemas.openxmlformats.org/drawingml/2006/main">
               <a:ext uri="{FF2B5EF4-FFF2-40B4-BE49-F238E27FC236}">
-                <a16:creationId xmlns:a16="http://schemas.microsoft.com/office/drawing/2014/main" id="{CFE88E73-C4BC-4D49-93DB-5401622B2680}"/>
+                <a16:creationId xmlns:a16="http://schemas.microsoft.com/office/drawing/2014/main" id="{839D08F3-2180-4B18-A39D-A82686BA3977}"/>
               </a:ext>
             </a:extLst>
           </p:cNvPr>
@@ -7845,7 +7845,7 @@
           <p:cNvPr id="50" name="">
             <a:extLst xmlns:a="http://schemas.openxmlformats.org/drawingml/2006/main">
               <a:ext uri="{FF2B5EF4-FFF2-40B4-BE49-F238E27FC236}">
-                <a16:creationId xmlns:a16="http://schemas.microsoft.com/office/drawing/2014/main" id="{4E7495A6-4D45-4DFE-912A-E0D265A0CA0A}"/>
+                <a16:creationId xmlns:a16="http://schemas.microsoft.com/office/drawing/2014/main" id="{FF81258B-CA63-4523-877C-37E192BE3587}"/>
               </a:ext>
             </a:extLst>
           </p:cNvPr>
@@ -7878,7 +7878,7 @@
           <p:cNvPr id="51" name="">
             <a:extLst xmlns:a="http://schemas.openxmlformats.org/drawingml/2006/main">
               <a:ext uri="{FF2B5EF4-FFF2-40B4-BE49-F238E27FC236}">
-                <a16:creationId xmlns:a16="http://schemas.microsoft.com/office/drawing/2014/main" id="{3B26F884-47A7-4354-972F-7F3EBA10E666}"/>
+                <a16:creationId xmlns:a16="http://schemas.microsoft.com/office/drawing/2014/main" id="{92657353-29D8-45B6-930E-F28C06E0E49C}"/>
               </a:ext>
             </a:extLst>
           </p:cNvPr>
@@ -7936,7 +7936,7 @@
           <p:cNvPr id="52" name="">
             <a:extLst xmlns:a="http://schemas.openxmlformats.org/drawingml/2006/main">
               <a:ext uri="{FF2B5EF4-FFF2-40B4-BE49-F238E27FC236}">
-                <a16:creationId xmlns:a16="http://schemas.microsoft.com/office/drawing/2014/main" id="{05B2F8E1-2F52-4DAB-92BB-31838AA221A9}"/>
+                <a16:creationId xmlns:a16="http://schemas.microsoft.com/office/drawing/2014/main" id="{47559665-90AE-48BA-AD83-547FCDC7E03E}"/>
               </a:ext>
             </a:extLst>
           </p:cNvPr>
@@ -7969,7 +7969,7 @@
           <p:cNvPr id="53" name="">
             <a:extLst xmlns:a="http://schemas.openxmlformats.org/drawingml/2006/main">
               <a:ext uri="{FF2B5EF4-FFF2-40B4-BE49-F238E27FC236}">
-                <a16:creationId xmlns:a16="http://schemas.microsoft.com/office/drawing/2014/main" id="{D406422A-97B7-474F-B737-609E57E8BC6B}"/>
+                <a16:creationId xmlns:a16="http://schemas.microsoft.com/office/drawing/2014/main" id="{ECB23CE3-A1DD-4A46-B698-FDD83B944C9E}"/>
               </a:ext>
             </a:extLst>
           </p:cNvPr>
@@ -8027,7 +8027,7 @@
           <p:cNvPr id="54" name="">
             <a:extLst xmlns:a="http://schemas.openxmlformats.org/drawingml/2006/main">
               <a:ext uri="{FF2B5EF4-FFF2-40B4-BE49-F238E27FC236}">
-                <a16:creationId xmlns:a16="http://schemas.microsoft.com/office/drawing/2014/main" id="{22C302B9-ECE1-4845-8FA8-CEB2E2CCCD6F}"/>
+                <a16:creationId xmlns:a16="http://schemas.microsoft.com/office/drawing/2014/main" id="{7884C81D-835D-4051-9E50-87BF5294CBE7}"/>
               </a:ext>
             </a:extLst>
           </p:cNvPr>
@@ -8060,7 +8060,7 @@
           <p:cNvPr id="55" name="">
             <a:extLst xmlns:a="http://schemas.openxmlformats.org/drawingml/2006/main">
               <a:ext uri="{FF2B5EF4-FFF2-40B4-BE49-F238E27FC236}">
-                <a16:creationId xmlns:a16="http://schemas.microsoft.com/office/drawing/2014/main" id="{BFEE95D0-8B92-430E-A161-60B8923D7D62}"/>
+                <a16:creationId xmlns:a16="http://schemas.microsoft.com/office/drawing/2014/main" id="{66D368F6-589A-4F7D-AA38-D5B84118483E}"/>
               </a:ext>
             </a:extLst>
           </p:cNvPr>
@@ -8118,7 +8118,7 @@
           <p:cNvPr id="56" name="">
             <a:extLst xmlns:a="http://schemas.openxmlformats.org/drawingml/2006/main">
               <a:ext uri="{FF2B5EF4-FFF2-40B4-BE49-F238E27FC236}">
-                <a16:creationId xmlns:a16="http://schemas.microsoft.com/office/drawing/2014/main" id="{976DE799-BACF-4077-A80C-FD999F5A3839}"/>
+                <a16:creationId xmlns:a16="http://schemas.microsoft.com/office/drawing/2014/main" id="{C032F930-98B9-4C16-B2B7-008277D71554}"/>
               </a:ext>
             </a:extLst>
           </p:cNvPr>
@@ -8151,7 +8151,7 @@
           <p:cNvPr id="57" name="">
             <a:extLst xmlns:a="http://schemas.openxmlformats.org/drawingml/2006/main">
               <a:ext uri="{FF2B5EF4-FFF2-40B4-BE49-F238E27FC236}">
-                <a16:creationId xmlns:a16="http://schemas.microsoft.com/office/drawing/2014/main" id="{EA73CD79-C929-4B08-9CC6-DAD49BF2E1E5}"/>
+                <a16:creationId xmlns:a16="http://schemas.microsoft.com/office/drawing/2014/main" id="{57308A08-C2BA-449D-A591-90EF36A073A3}"/>
               </a:ext>
             </a:extLst>
           </p:cNvPr>
@@ -8209,7 +8209,7 @@
           <p:cNvPr id="58" name="">
             <a:extLst xmlns:a="http://schemas.openxmlformats.org/drawingml/2006/main">
               <a:ext uri="{FF2B5EF4-FFF2-40B4-BE49-F238E27FC236}">
-                <a16:creationId xmlns:a16="http://schemas.microsoft.com/office/drawing/2014/main" id="{78314D5E-F12B-4D49-8840-8CA80D5200F4}"/>
+                <a16:creationId xmlns:a16="http://schemas.microsoft.com/office/drawing/2014/main" id="{7137E002-EB5C-40BB-A2A8-315B6E6CD2D8}"/>
               </a:ext>
             </a:extLst>
           </p:cNvPr>
@@ -8242,7 +8242,7 @@
           <p:cNvPr id="59" name="">
             <a:extLst xmlns:a="http://schemas.openxmlformats.org/drawingml/2006/main">
               <a:ext uri="{FF2B5EF4-FFF2-40B4-BE49-F238E27FC236}">
-                <a16:creationId xmlns:a16="http://schemas.microsoft.com/office/drawing/2014/main" id="{C4DA79A1-612F-4752-AFAE-AAAAD1AC9A2C}"/>
+                <a16:creationId xmlns:a16="http://schemas.microsoft.com/office/drawing/2014/main" id="{E5176947-F84A-42D2-8176-601D431A9AE8}"/>
               </a:ext>
             </a:extLst>
           </p:cNvPr>
@@ -8300,7 +8300,7 @@
           <p:cNvPr id="60" name="">
             <a:extLst xmlns:a="http://schemas.openxmlformats.org/drawingml/2006/main">
               <a:ext uri="{FF2B5EF4-FFF2-40B4-BE49-F238E27FC236}">
-                <a16:creationId xmlns:a16="http://schemas.microsoft.com/office/drawing/2014/main" id="{00CC4320-3420-4261-A00C-22AF3103ADD1}"/>
+                <a16:creationId xmlns:a16="http://schemas.microsoft.com/office/drawing/2014/main" id="{02078577-5311-4164-84C3-E4DEAFB76DB7}"/>
               </a:ext>
             </a:extLst>
           </p:cNvPr>
@@ -8358,7 +8358,7 @@
           <p:cNvPr id="61" name="">
             <a:extLst xmlns:a="http://schemas.openxmlformats.org/drawingml/2006/main">
               <a:ext uri="{FF2B5EF4-FFF2-40B4-BE49-F238E27FC236}">
-                <a16:creationId xmlns:a16="http://schemas.microsoft.com/office/drawing/2014/main" id="{E910361C-B4A1-4103-B0AC-F14E686D088A}"/>
+                <a16:creationId xmlns:a16="http://schemas.microsoft.com/office/drawing/2014/main" id="{556E6A5F-8EFC-4201-BFCD-7451065C7D1F}"/>
               </a:ext>
             </a:extLst>
           </p:cNvPr>
@@ -8391,7 +8391,7 @@
           <p:cNvPr id="62" name="">
             <a:extLst xmlns:a="http://schemas.openxmlformats.org/drawingml/2006/main">
               <a:ext uri="{FF2B5EF4-FFF2-40B4-BE49-F238E27FC236}">
-                <a16:creationId xmlns:a16="http://schemas.microsoft.com/office/drawing/2014/main" id="{5A93421B-3038-4E69-AFB5-3DF2D0B38572}"/>
+                <a16:creationId xmlns:a16="http://schemas.microsoft.com/office/drawing/2014/main" id="{EDFF89DD-A41C-499C-940D-BF52EF01CAD8}"/>
               </a:ext>
             </a:extLst>
           </p:cNvPr>
@@ -8449,7 +8449,7 @@
                 <a:latin typeface="Microsoft YaHei"/>
                 <a:ea typeface="Microsoft YaHei"/>
                 <a:cs typeface="Microsoft YaHei"/>
-                <a:hlinkClick xmlns:r="http://schemas.openxmlformats.org/officeDocument/2006/relationships" r:id="R05a7fb16611d4c26"/>
+                <a:hlinkClick xmlns:r="http://schemas.openxmlformats.org/officeDocument/2006/relationships" r:id="Re9cde22f3182476b"/>
               </a:rPr>
               <a:t>Codex Browser</a:t>
             </a:r>
@@ -8461,7 +8461,7 @@
                 <a:latin typeface="Microsoft YaHei"/>
                 <a:ea typeface="Microsoft YaHei"/>
                 <a:cs typeface="Microsoft YaHei"/>
-                <a:hlinkClick xmlns:r="http://schemas.openxmlformats.org/officeDocument/2006/relationships" r:id="Rb569ad91819944cd"/>
+                <a:hlinkClick xmlns:r="http://schemas.openxmlformats.org/officeDocument/2006/relationships" r:id="Reae3c1a6508041d3"/>
               </a:rPr>
               <a:t> · Trae Browser &amp; Preview</a:t>
             </a:r>
@@ -8473,7 +8473,7 @@
                 <a:latin typeface="Microsoft YaHei"/>
                 <a:ea typeface="Microsoft YaHei"/>
                 <a:cs typeface="Microsoft YaHei"/>
-                <a:hlinkClick xmlns:r="http://schemas.openxmlformats.org/officeDocument/2006/relationships" r:id="Rdd6981cf2a034a11"/>
+                <a:hlinkClick xmlns:r="http://schemas.openxmlformats.org/officeDocument/2006/relationships" r:id="R4af801235c5548ca"/>
               </a:rPr>
               <a:t> · Playwright Best Practices</a:t>
             </a:r>
@@ -8485,7 +8485,7 @@
           <p:cNvPr id="63" name="">
             <a:extLst xmlns:a="http://schemas.openxmlformats.org/drawingml/2006/main">
               <a:ext uri="{FF2B5EF4-FFF2-40B4-BE49-F238E27FC236}">
-                <a16:creationId xmlns:a16="http://schemas.microsoft.com/office/drawing/2014/main" id="{ACC0DCEE-49D6-4D92-BEB6-2EAD1100B4A9}"/>
+                <a16:creationId xmlns:a16="http://schemas.microsoft.com/office/drawing/2014/main" id="{36C98ACC-09DB-4825-82E5-CFAE7A3CC2E3}"/>
               </a:ext>
             </a:extLst>
           </p:cNvPr>
@@ -8541,7 +8541,7 @@
     </p:spTree>
     <p:extLst>
       <p:ext uri="{BB962C8B-B14F-4D97-AF65-F5344CB8AC3E}">
-        <p14:creationId xmlns:p14="http://schemas.microsoft.com/office/powerpoint/2010/main" val="1964434046"/>
+        <p14:creationId xmlns:p14="http://schemas.microsoft.com/office/powerpoint/2010/main" val="316227664"/>
       </p:ext>
     </p:extLst>
   </p:cSld>
@@ -8572,7 +8572,7 @@
           <p:cNvPr id="72" name="">
             <a:extLst xmlns:a="http://schemas.openxmlformats.org/drawingml/2006/main">
               <a:ext uri="{FF2B5EF4-FFF2-40B4-BE49-F238E27FC236}">
-                <a16:creationId xmlns:a16="http://schemas.microsoft.com/office/drawing/2014/main" id="{49032747-4E4C-404E-95BC-DC487DDD2FA9}"/>
+                <a16:creationId xmlns:a16="http://schemas.microsoft.com/office/drawing/2014/main" id="{4DCDEF3C-F720-4082-AC8D-7EE1EE072F86}"/>
               </a:ext>
             </a:extLst>
           </p:cNvPr>
@@ -8605,7 +8605,7 @@
           <p:cNvPr id="2" name="">
             <a:extLst xmlns:a="http://schemas.openxmlformats.org/drawingml/2006/main">
               <a:ext uri="{FF2B5EF4-FFF2-40B4-BE49-F238E27FC236}">
-                <a16:creationId xmlns:a16="http://schemas.microsoft.com/office/drawing/2014/main" id="{A2562B3B-B2A9-4C1F-9DA2-982CF5116E73}"/>
+                <a16:creationId xmlns:a16="http://schemas.microsoft.com/office/drawing/2014/main" id="{3DBF7F46-C241-483D-B2DA-57B5A0DA904F}"/>
               </a:ext>
             </a:extLst>
           </p:cNvPr>
@@ -8663,7 +8663,7 @@
           <p:cNvPr id="3" name="">
             <a:extLst xmlns:a="http://schemas.openxmlformats.org/drawingml/2006/main">
               <a:ext uri="{FF2B5EF4-FFF2-40B4-BE49-F238E27FC236}">
-                <a16:creationId xmlns:a16="http://schemas.microsoft.com/office/drawing/2014/main" id="{89B55FE0-9B76-450B-9211-33FC8BEB6851}"/>
+                <a16:creationId xmlns:a16="http://schemas.microsoft.com/office/drawing/2014/main" id="{CAA11C8C-8361-426F-82A9-EDFBD9277864}"/>
               </a:ext>
             </a:extLst>
           </p:cNvPr>
@@ -8695,7 +8695,7 @@
             <a:pPr algn="l">
               <a:defRPr sz="2325" b="1">
                 <a:solidFill>
-                  <a:srgbClr val="1D1D1A"/>
+                  <a:srgbClr val="8A0F17"/>
                 </a:solidFill>
                 <a:latin typeface="Microsoft YaHei"/>
                 <a:ea typeface="Microsoft YaHei"/>
@@ -8705,7 +8705,7 @@
             <a:r>
               <a:rPr sz="2325" b="1">
                 <a:solidFill>
-                  <a:srgbClr val="1D1D1A"/>
+                  <a:srgbClr val="8A0F17"/>
                 </a:solidFill>
                 <a:latin typeface="Microsoft YaHei"/>
                 <a:ea typeface="Microsoft YaHei"/>
@@ -8721,7 +8721,7 @@
           <p:cNvPr id="4" name="">
             <a:extLst xmlns:a="http://schemas.openxmlformats.org/drawingml/2006/main">
               <a:ext uri="{FF2B5EF4-FFF2-40B4-BE49-F238E27FC236}">
-                <a16:creationId xmlns:a16="http://schemas.microsoft.com/office/drawing/2014/main" id="{9ADCE538-F7C2-446C-9578-8469575670F5}"/>
+                <a16:creationId xmlns:a16="http://schemas.microsoft.com/office/drawing/2014/main" id="{5DA22C35-C3B7-465C-A690-0E326639926E}"/>
               </a:ext>
             </a:extLst>
           </p:cNvPr>
@@ -8754,7 +8754,7 @@
           <p:cNvPr id="5" name="">
             <a:extLst xmlns:a="http://schemas.openxmlformats.org/drawingml/2006/main">
               <a:ext uri="{FF2B5EF4-FFF2-40B4-BE49-F238E27FC236}">
-                <a16:creationId xmlns:a16="http://schemas.microsoft.com/office/drawing/2014/main" id="{5C9A0ECB-4445-43FF-823A-D1870BFBF99B}"/>
+                <a16:creationId xmlns:a16="http://schemas.microsoft.com/office/drawing/2014/main" id="{98847BDD-2258-44CC-8BDE-B94C64ACAFF5}"/>
               </a:ext>
             </a:extLst>
           </p:cNvPr>
@@ -8812,7 +8812,7 @@
           <p:cNvPr id="6" name="">
             <a:extLst xmlns:a="http://schemas.openxmlformats.org/drawingml/2006/main">
               <a:ext uri="{FF2B5EF4-FFF2-40B4-BE49-F238E27FC236}">
-                <a16:creationId xmlns:a16="http://schemas.microsoft.com/office/drawing/2014/main" id="{0D026337-3A03-4004-8CB4-902E37B9BCA6}"/>
+                <a16:creationId xmlns:a16="http://schemas.microsoft.com/office/drawing/2014/main" id="{6FC9F3D3-6456-40E2-893D-7B07CB309BDC}"/>
               </a:ext>
             </a:extLst>
           </p:cNvPr>
@@ -8870,7 +8870,7 @@
           <p:cNvPr id="7" name="">
             <a:extLst xmlns:a="http://schemas.openxmlformats.org/drawingml/2006/main">
               <a:ext uri="{FF2B5EF4-FFF2-40B4-BE49-F238E27FC236}">
-                <a16:creationId xmlns:a16="http://schemas.microsoft.com/office/drawing/2014/main" id="{0F04179B-104F-460D-8DC0-6EF0C84417E5}"/>
+                <a16:creationId xmlns:a16="http://schemas.microsoft.com/office/drawing/2014/main" id="{A4A2022C-BF10-45EC-BFCB-8C646D46A90D}"/>
               </a:ext>
             </a:extLst>
           </p:cNvPr>
@@ -8928,7 +8928,7 @@
           <p:cNvPr id="8" name="">
             <a:extLst xmlns:a="http://schemas.openxmlformats.org/drawingml/2006/main">
               <a:ext uri="{FF2B5EF4-FFF2-40B4-BE49-F238E27FC236}">
-                <a16:creationId xmlns:a16="http://schemas.microsoft.com/office/drawing/2014/main" id="{C1650A89-C559-4BF7-BA59-00ADCC2FA764}"/>
+                <a16:creationId xmlns:a16="http://schemas.microsoft.com/office/drawing/2014/main" id="{2219DA2A-081E-45DE-AF11-C214FC74A59E}"/>
               </a:ext>
             </a:extLst>
           </p:cNvPr>
@@ -8961,7 +8961,7 @@
           <p:cNvPr id="9" name="">
             <a:extLst xmlns:a="http://schemas.openxmlformats.org/drawingml/2006/main">
               <a:ext uri="{FF2B5EF4-FFF2-40B4-BE49-F238E27FC236}">
-                <a16:creationId xmlns:a16="http://schemas.microsoft.com/office/drawing/2014/main" id="{46CEAACF-DA2D-4889-AA96-8500D0A8BDAA}"/>
+                <a16:creationId xmlns:a16="http://schemas.microsoft.com/office/drawing/2014/main" id="{0A62A84B-198E-46DA-8F6E-AC79B183442F}"/>
               </a:ext>
             </a:extLst>
           </p:cNvPr>
@@ -8994,7 +8994,7 @@
           <p:cNvPr id="10" name="">
             <a:extLst xmlns:a="http://schemas.openxmlformats.org/drawingml/2006/main">
               <a:ext uri="{FF2B5EF4-FFF2-40B4-BE49-F238E27FC236}">
-                <a16:creationId xmlns:a16="http://schemas.microsoft.com/office/drawing/2014/main" id="{630E490E-B0EC-416C-94E4-14D3BDE0EAD5}"/>
+                <a16:creationId xmlns:a16="http://schemas.microsoft.com/office/drawing/2014/main" id="{8E8F9B4C-5A91-4575-9F03-23BF08CF78B1}"/>
               </a:ext>
             </a:extLst>
           </p:cNvPr>
@@ -9027,7 +9027,7 @@
           <p:cNvPr id="11" name="">
             <a:extLst xmlns:a="http://schemas.openxmlformats.org/drawingml/2006/main">
               <a:ext uri="{FF2B5EF4-FFF2-40B4-BE49-F238E27FC236}">
-                <a16:creationId xmlns:a16="http://schemas.microsoft.com/office/drawing/2014/main" id="{4A3C0A0F-C9AD-46AB-9AA0-2E168F53EE09}"/>
+                <a16:creationId xmlns:a16="http://schemas.microsoft.com/office/drawing/2014/main" id="{E70C8262-F550-4F96-A497-10CEBD45A550}"/>
               </a:ext>
             </a:extLst>
           </p:cNvPr>
@@ -9085,7 +9085,7 @@
           <p:cNvPr id="12" name="">
             <a:extLst xmlns:a="http://schemas.openxmlformats.org/drawingml/2006/main">
               <a:ext uri="{FF2B5EF4-FFF2-40B4-BE49-F238E27FC236}">
-                <a16:creationId xmlns:a16="http://schemas.microsoft.com/office/drawing/2014/main" id="{02DEE7D8-CFD3-445A-846D-D73149146290}"/>
+                <a16:creationId xmlns:a16="http://schemas.microsoft.com/office/drawing/2014/main" id="{1DEA57FD-C900-4710-B7CE-AAC8DCA4FBDA}"/>
               </a:ext>
             </a:extLst>
           </p:cNvPr>
@@ -9143,7 +9143,7 @@
           <p:cNvPr id="13" name="">
             <a:extLst xmlns:a="http://schemas.openxmlformats.org/drawingml/2006/main">
               <a:ext uri="{FF2B5EF4-FFF2-40B4-BE49-F238E27FC236}">
-                <a16:creationId xmlns:a16="http://schemas.microsoft.com/office/drawing/2014/main" id="{ADC2BFE2-098D-437E-B17A-C8AF8E462EDB}"/>
+                <a16:creationId xmlns:a16="http://schemas.microsoft.com/office/drawing/2014/main" id="{63F85894-A8B9-4BBB-8134-CB9C39938FAE}"/>
               </a:ext>
             </a:extLst>
           </p:cNvPr>
@@ -9201,7 +9201,7 @@
           <p:cNvPr id="14" name="">
             <a:extLst xmlns:a="http://schemas.openxmlformats.org/drawingml/2006/main">
               <a:ext uri="{FF2B5EF4-FFF2-40B4-BE49-F238E27FC236}">
-                <a16:creationId xmlns:a16="http://schemas.microsoft.com/office/drawing/2014/main" id="{DAD64681-4C64-42C6-B8A7-A902DFA3CDB2}"/>
+                <a16:creationId xmlns:a16="http://schemas.microsoft.com/office/drawing/2014/main" id="{43EA87DC-F8AC-43A4-B598-C0D05B9746AA}"/>
               </a:ext>
             </a:extLst>
           </p:cNvPr>
@@ -9234,7 +9234,7 @@
           <p:cNvPr id="15" name="">
             <a:extLst xmlns:a="http://schemas.openxmlformats.org/drawingml/2006/main">
               <a:ext uri="{FF2B5EF4-FFF2-40B4-BE49-F238E27FC236}">
-                <a16:creationId xmlns:a16="http://schemas.microsoft.com/office/drawing/2014/main" id="{F88558F6-6329-4AC6-A6B0-994C468EAA84}"/>
+                <a16:creationId xmlns:a16="http://schemas.microsoft.com/office/drawing/2014/main" id="{BD38635E-C96E-4D6A-B2C6-FF44B6D6A0FE}"/>
               </a:ext>
             </a:extLst>
           </p:cNvPr>
@@ -9267,7 +9267,7 @@
           <p:cNvPr id="16" name="">
             <a:extLst xmlns:a="http://schemas.openxmlformats.org/drawingml/2006/main">
               <a:ext uri="{FF2B5EF4-FFF2-40B4-BE49-F238E27FC236}">
-                <a16:creationId xmlns:a16="http://schemas.microsoft.com/office/drawing/2014/main" id="{479C0AE4-97FC-4A66-B2C5-049518277337}"/>
+                <a16:creationId xmlns:a16="http://schemas.microsoft.com/office/drawing/2014/main" id="{7643E010-46CD-4ECD-B9B8-396B02FAE994}"/>
               </a:ext>
             </a:extLst>
           </p:cNvPr>
@@ -9300,7 +9300,7 @@
           <p:cNvPr id="17" name="">
             <a:extLst xmlns:a="http://schemas.openxmlformats.org/drawingml/2006/main">
               <a:ext uri="{FF2B5EF4-FFF2-40B4-BE49-F238E27FC236}">
-                <a16:creationId xmlns:a16="http://schemas.microsoft.com/office/drawing/2014/main" id="{49E9AF69-AC8C-4296-AF78-8A3AF6D55A22}"/>
+                <a16:creationId xmlns:a16="http://schemas.microsoft.com/office/drawing/2014/main" id="{0B8242AD-67AA-47C9-BAFE-94F97CAF9B03}"/>
               </a:ext>
             </a:extLst>
           </p:cNvPr>
@@ -9358,7 +9358,7 @@
           <p:cNvPr id="18" name="">
             <a:extLst xmlns:a="http://schemas.openxmlformats.org/drawingml/2006/main">
               <a:ext uri="{FF2B5EF4-FFF2-40B4-BE49-F238E27FC236}">
-                <a16:creationId xmlns:a16="http://schemas.microsoft.com/office/drawing/2014/main" id="{6141D00C-9678-4B68-9113-E6E4220433C7}"/>
+                <a16:creationId xmlns:a16="http://schemas.microsoft.com/office/drawing/2014/main" id="{81CC26B7-9658-4D0F-B8EC-A702FD4BF135}"/>
               </a:ext>
             </a:extLst>
           </p:cNvPr>
@@ -9416,7 +9416,7 @@
           <p:cNvPr id="19" name="">
             <a:extLst xmlns:a="http://schemas.openxmlformats.org/drawingml/2006/main">
               <a:ext uri="{FF2B5EF4-FFF2-40B4-BE49-F238E27FC236}">
-                <a16:creationId xmlns:a16="http://schemas.microsoft.com/office/drawing/2014/main" id="{6767D48D-4077-4043-B195-5DACE887116F}"/>
+                <a16:creationId xmlns:a16="http://schemas.microsoft.com/office/drawing/2014/main" id="{F0F90983-AEF2-4851-AD20-DB77B14EBC0D}"/>
               </a:ext>
             </a:extLst>
           </p:cNvPr>
@@ -9474,7 +9474,7 @@
           <p:cNvPr id="20" name="">
             <a:extLst xmlns:a="http://schemas.openxmlformats.org/drawingml/2006/main">
               <a:ext uri="{FF2B5EF4-FFF2-40B4-BE49-F238E27FC236}">
-                <a16:creationId xmlns:a16="http://schemas.microsoft.com/office/drawing/2014/main" id="{FBA33A96-C4D0-478B-8B5D-8EBE0F851FAB}"/>
+                <a16:creationId xmlns:a16="http://schemas.microsoft.com/office/drawing/2014/main" id="{F1A4D9B9-7405-4CFD-AC78-D012E9485E85}"/>
               </a:ext>
             </a:extLst>
           </p:cNvPr>
@@ -9507,7 +9507,7 @@
           <p:cNvPr id="21" name="">
             <a:extLst xmlns:a="http://schemas.openxmlformats.org/drawingml/2006/main">
               <a:ext uri="{FF2B5EF4-FFF2-40B4-BE49-F238E27FC236}">
-                <a16:creationId xmlns:a16="http://schemas.microsoft.com/office/drawing/2014/main" id="{4125995B-2611-45E2-AB18-647A5840460C}"/>
+                <a16:creationId xmlns:a16="http://schemas.microsoft.com/office/drawing/2014/main" id="{A939B74E-22EA-4171-A64D-F7A828D3E9BF}"/>
               </a:ext>
             </a:extLst>
           </p:cNvPr>
@@ -9540,7 +9540,7 @@
           <p:cNvPr id="22" name="">
             <a:extLst xmlns:a="http://schemas.openxmlformats.org/drawingml/2006/main">
               <a:ext uri="{FF2B5EF4-FFF2-40B4-BE49-F238E27FC236}">
-                <a16:creationId xmlns:a16="http://schemas.microsoft.com/office/drawing/2014/main" id="{0BC495FB-B343-49C0-BA20-DEBA2623455A}"/>
+                <a16:creationId xmlns:a16="http://schemas.microsoft.com/office/drawing/2014/main" id="{28CDF5FE-76E1-4653-B682-07EF9C3D18A6}"/>
               </a:ext>
             </a:extLst>
           </p:cNvPr>
@@ -9573,7 +9573,7 @@
           <p:cNvPr id="23" name="">
             <a:extLst xmlns:a="http://schemas.openxmlformats.org/drawingml/2006/main">
               <a:ext uri="{FF2B5EF4-FFF2-40B4-BE49-F238E27FC236}">
-                <a16:creationId xmlns:a16="http://schemas.microsoft.com/office/drawing/2014/main" id="{C97E51C2-DCF8-4A16-B4B0-FC56DE65AA37}"/>
+                <a16:creationId xmlns:a16="http://schemas.microsoft.com/office/drawing/2014/main" id="{7F6AF549-FB65-48BA-B417-69E554071630}"/>
               </a:ext>
             </a:extLst>
           </p:cNvPr>
@@ -9631,7 +9631,7 @@
           <p:cNvPr id="24" name="">
             <a:extLst xmlns:a="http://schemas.openxmlformats.org/drawingml/2006/main">
               <a:ext uri="{FF2B5EF4-FFF2-40B4-BE49-F238E27FC236}">
-                <a16:creationId xmlns:a16="http://schemas.microsoft.com/office/drawing/2014/main" id="{CBF7C18E-3E87-4CC3-929E-C1B03E01B0C9}"/>
+                <a16:creationId xmlns:a16="http://schemas.microsoft.com/office/drawing/2014/main" id="{EBEBA5A7-BAD9-462B-AA5C-6AF27A86771E}"/>
               </a:ext>
             </a:extLst>
           </p:cNvPr>
@@ -9689,7 +9689,7 @@
           <p:cNvPr id="25" name="">
             <a:extLst xmlns:a="http://schemas.openxmlformats.org/drawingml/2006/main">
               <a:ext uri="{FF2B5EF4-FFF2-40B4-BE49-F238E27FC236}">
-                <a16:creationId xmlns:a16="http://schemas.microsoft.com/office/drawing/2014/main" id="{B3271A26-BF9C-4C9E-A4AF-21ECC83E9295}"/>
+                <a16:creationId xmlns:a16="http://schemas.microsoft.com/office/drawing/2014/main" id="{9F974D93-2B56-4050-88AF-2D75ACCECC4B}"/>
               </a:ext>
             </a:extLst>
           </p:cNvPr>
@@ -9747,7 +9747,7 @@
           <p:cNvPr id="26" name="">
             <a:extLst xmlns:a="http://schemas.openxmlformats.org/drawingml/2006/main">
               <a:ext uri="{FF2B5EF4-FFF2-40B4-BE49-F238E27FC236}">
-                <a16:creationId xmlns:a16="http://schemas.microsoft.com/office/drawing/2014/main" id="{B9D51A8C-5FA7-4D11-A607-85F9BEEFCEF3}"/>
+                <a16:creationId xmlns:a16="http://schemas.microsoft.com/office/drawing/2014/main" id="{6CD7548A-A55D-49F4-9DD1-6A18619F33B4}"/>
               </a:ext>
             </a:extLst>
           </p:cNvPr>
@@ -9780,7 +9780,7 @@
           <p:cNvPr id="27" name="">
             <a:extLst xmlns:a="http://schemas.openxmlformats.org/drawingml/2006/main">
               <a:ext uri="{FF2B5EF4-FFF2-40B4-BE49-F238E27FC236}">
-                <a16:creationId xmlns:a16="http://schemas.microsoft.com/office/drawing/2014/main" id="{F7E67C4A-A534-45D7-8B38-F8B58305066C}"/>
+                <a16:creationId xmlns:a16="http://schemas.microsoft.com/office/drawing/2014/main" id="{1D65E070-DC02-40B4-8EFF-BA1E783B4B49}"/>
               </a:ext>
             </a:extLst>
           </p:cNvPr>
@@ -9813,7 +9813,7 @@
           <p:cNvPr id="28" name="">
             <a:extLst xmlns:a="http://schemas.openxmlformats.org/drawingml/2006/main">
               <a:ext uri="{FF2B5EF4-FFF2-40B4-BE49-F238E27FC236}">
-                <a16:creationId xmlns:a16="http://schemas.microsoft.com/office/drawing/2014/main" id="{9AB80692-4D91-4246-BBD5-BE70F3864590}"/>
+                <a16:creationId xmlns:a16="http://schemas.microsoft.com/office/drawing/2014/main" id="{1A6B0C69-52B1-463C-97FB-7BB1237EE8EE}"/>
               </a:ext>
             </a:extLst>
           </p:cNvPr>
@@ -9846,7 +9846,7 @@
           <p:cNvPr id="29" name="">
             <a:extLst xmlns:a="http://schemas.openxmlformats.org/drawingml/2006/main">
               <a:ext uri="{FF2B5EF4-FFF2-40B4-BE49-F238E27FC236}">
-                <a16:creationId xmlns:a16="http://schemas.microsoft.com/office/drawing/2014/main" id="{D5ECA8EF-5DE0-44B9-93CC-C433332F2981}"/>
+                <a16:creationId xmlns:a16="http://schemas.microsoft.com/office/drawing/2014/main" id="{D0FECFA8-BC06-4F45-B6E2-E66423B6B14C}"/>
               </a:ext>
             </a:extLst>
           </p:cNvPr>
@@ -9904,7 +9904,7 @@
           <p:cNvPr id="30" name="">
             <a:extLst xmlns:a="http://schemas.openxmlformats.org/drawingml/2006/main">
               <a:ext uri="{FF2B5EF4-FFF2-40B4-BE49-F238E27FC236}">
-                <a16:creationId xmlns:a16="http://schemas.microsoft.com/office/drawing/2014/main" id="{2AC79344-2FF8-4E56-998D-415B9BAE4943}"/>
+                <a16:creationId xmlns:a16="http://schemas.microsoft.com/office/drawing/2014/main" id="{F9BF12A8-A12B-4C17-9467-CC46A166236E}"/>
               </a:ext>
             </a:extLst>
           </p:cNvPr>
@@ -9962,7 +9962,7 @@
           <p:cNvPr id="31" name="">
             <a:extLst xmlns:a="http://schemas.openxmlformats.org/drawingml/2006/main">
               <a:ext uri="{FF2B5EF4-FFF2-40B4-BE49-F238E27FC236}">
-                <a16:creationId xmlns:a16="http://schemas.microsoft.com/office/drawing/2014/main" id="{BB46A89A-32E4-4366-8D40-A3DCDBF2F506}"/>
+                <a16:creationId xmlns:a16="http://schemas.microsoft.com/office/drawing/2014/main" id="{E643C131-3C70-4474-B788-4D71575BE03F}"/>
               </a:ext>
             </a:extLst>
           </p:cNvPr>
@@ -10020,7 +10020,7 @@
           <p:cNvPr id="32" name="">
             <a:extLst xmlns:a="http://schemas.openxmlformats.org/drawingml/2006/main">
               <a:ext uri="{FF2B5EF4-FFF2-40B4-BE49-F238E27FC236}">
-                <a16:creationId xmlns:a16="http://schemas.microsoft.com/office/drawing/2014/main" id="{F1C8F857-2DA9-4F1A-87E6-54F51AE9DEC0}"/>
+                <a16:creationId xmlns:a16="http://schemas.microsoft.com/office/drawing/2014/main" id="{27FB2141-A193-4FF8-B546-328475F7F5F3}"/>
               </a:ext>
             </a:extLst>
           </p:cNvPr>
@@ -10053,7 +10053,7 @@
           <p:cNvPr id="33" name="">
             <a:extLst xmlns:a="http://schemas.openxmlformats.org/drawingml/2006/main">
               <a:ext uri="{FF2B5EF4-FFF2-40B4-BE49-F238E27FC236}">
-                <a16:creationId xmlns:a16="http://schemas.microsoft.com/office/drawing/2014/main" id="{6BECF3F3-B9FA-4629-9B74-823365BF96D1}"/>
+                <a16:creationId xmlns:a16="http://schemas.microsoft.com/office/drawing/2014/main" id="{8D9E30AC-8980-45E3-BE3B-774797DBD44E}"/>
               </a:ext>
             </a:extLst>
           </p:cNvPr>
@@ -10086,7 +10086,7 @@
           <p:cNvPr id="34" name="">
             <a:extLst xmlns:a="http://schemas.openxmlformats.org/drawingml/2006/main">
               <a:ext uri="{FF2B5EF4-FFF2-40B4-BE49-F238E27FC236}">
-                <a16:creationId xmlns:a16="http://schemas.microsoft.com/office/drawing/2014/main" id="{E5359B41-E48D-4FC0-8CC4-15723DA9EF41}"/>
+                <a16:creationId xmlns:a16="http://schemas.microsoft.com/office/drawing/2014/main" id="{06A9A49D-648E-426E-81DE-82DC415D0FA9}"/>
               </a:ext>
             </a:extLst>
           </p:cNvPr>
@@ -10119,7 +10119,7 @@
           <p:cNvPr id="35" name="">
             <a:extLst xmlns:a="http://schemas.openxmlformats.org/drawingml/2006/main">
               <a:ext uri="{FF2B5EF4-FFF2-40B4-BE49-F238E27FC236}">
-                <a16:creationId xmlns:a16="http://schemas.microsoft.com/office/drawing/2014/main" id="{D850E9FF-74CE-4696-A8A6-68F00A7A6A78}"/>
+                <a16:creationId xmlns:a16="http://schemas.microsoft.com/office/drawing/2014/main" id="{15DFBF26-A0CA-4C58-8848-74400245E35F}"/>
               </a:ext>
             </a:extLst>
           </p:cNvPr>
@@ -10177,7 +10177,7 @@
           <p:cNvPr id="36" name="">
             <a:extLst xmlns:a="http://schemas.openxmlformats.org/drawingml/2006/main">
               <a:ext uri="{FF2B5EF4-FFF2-40B4-BE49-F238E27FC236}">
-                <a16:creationId xmlns:a16="http://schemas.microsoft.com/office/drawing/2014/main" id="{C572CBC3-30BB-45EA-98D5-466EB7D79F85}"/>
+                <a16:creationId xmlns:a16="http://schemas.microsoft.com/office/drawing/2014/main" id="{0188E077-877B-43C8-B0A1-5D86FA67FF46}"/>
               </a:ext>
             </a:extLst>
           </p:cNvPr>
@@ -10235,7 +10235,7 @@
           <p:cNvPr id="37" name="">
             <a:extLst xmlns:a="http://schemas.openxmlformats.org/drawingml/2006/main">
               <a:ext uri="{FF2B5EF4-FFF2-40B4-BE49-F238E27FC236}">
-                <a16:creationId xmlns:a16="http://schemas.microsoft.com/office/drawing/2014/main" id="{3A983BA0-3D8C-4CC5-87D1-1FDC8C372D3B}"/>
+                <a16:creationId xmlns:a16="http://schemas.microsoft.com/office/drawing/2014/main" id="{B80645D2-2894-4BC5-9C43-0E8996324CAC}"/>
               </a:ext>
             </a:extLst>
           </p:cNvPr>
@@ -10293,7 +10293,7 @@
           <p:cNvPr id="38" name="">
             <a:extLst xmlns:a="http://schemas.openxmlformats.org/drawingml/2006/main">
               <a:ext uri="{FF2B5EF4-FFF2-40B4-BE49-F238E27FC236}">
-                <a16:creationId xmlns:a16="http://schemas.microsoft.com/office/drawing/2014/main" id="{61CC5D08-6DA0-4216-991C-401B88EF390F}"/>
+                <a16:creationId xmlns:a16="http://schemas.microsoft.com/office/drawing/2014/main" id="{EBF72FF2-C865-4CF7-8729-6486CBA114BC}"/>
               </a:ext>
             </a:extLst>
           </p:cNvPr>
@@ -10326,7 +10326,7 @@
           <p:cNvPr id="39" name="">
             <a:extLst xmlns:a="http://schemas.openxmlformats.org/drawingml/2006/main">
               <a:ext uri="{FF2B5EF4-FFF2-40B4-BE49-F238E27FC236}">
-                <a16:creationId xmlns:a16="http://schemas.microsoft.com/office/drawing/2014/main" id="{6AB67A3A-0A21-466C-8E0B-E0D2D55516C2}"/>
+                <a16:creationId xmlns:a16="http://schemas.microsoft.com/office/drawing/2014/main" id="{2FEB3201-A0AD-47EC-8BD4-B5AB67BE9D80}"/>
               </a:ext>
             </a:extLst>
           </p:cNvPr>
@@ -10359,7 +10359,7 @@
           <p:cNvPr id="40" name="">
             <a:extLst xmlns:a="http://schemas.openxmlformats.org/drawingml/2006/main">
               <a:ext uri="{FF2B5EF4-FFF2-40B4-BE49-F238E27FC236}">
-                <a16:creationId xmlns:a16="http://schemas.microsoft.com/office/drawing/2014/main" id="{3D5CA23C-388C-4812-8995-CEF1F8179503}"/>
+                <a16:creationId xmlns:a16="http://schemas.microsoft.com/office/drawing/2014/main" id="{3A0635B6-437D-44AD-8F5A-C475E4A54DB2}"/>
               </a:ext>
             </a:extLst>
           </p:cNvPr>
@@ -10392,7 +10392,7 @@
           <p:cNvPr id="41" name="">
             <a:extLst xmlns:a="http://schemas.openxmlformats.org/drawingml/2006/main">
               <a:ext uri="{FF2B5EF4-FFF2-40B4-BE49-F238E27FC236}">
-                <a16:creationId xmlns:a16="http://schemas.microsoft.com/office/drawing/2014/main" id="{8A2341E7-2FF0-4D82-A28D-E74F4DB71666}"/>
+                <a16:creationId xmlns:a16="http://schemas.microsoft.com/office/drawing/2014/main" id="{E4E4AF87-7F97-4CBA-80FD-030703AF5295}"/>
               </a:ext>
             </a:extLst>
           </p:cNvPr>
@@ -10450,7 +10450,7 @@
           <p:cNvPr id="42" name="">
             <a:extLst xmlns:a="http://schemas.openxmlformats.org/drawingml/2006/main">
               <a:ext uri="{FF2B5EF4-FFF2-40B4-BE49-F238E27FC236}">
-                <a16:creationId xmlns:a16="http://schemas.microsoft.com/office/drawing/2014/main" id="{1520B7A3-54CD-4079-ACDC-3684C12E0165}"/>
+                <a16:creationId xmlns:a16="http://schemas.microsoft.com/office/drawing/2014/main" id="{CD7D5A90-74E2-4188-A6AA-5AE8D4DCB2BA}"/>
               </a:ext>
             </a:extLst>
           </p:cNvPr>
@@ -10508,7 +10508,7 @@
           <p:cNvPr id="43" name="">
             <a:extLst xmlns:a="http://schemas.openxmlformats.org/drawingml/2006/main">
               <a:ext uri="{FF2B5EF4-FFF2-40B4-BE49-F238E27FC236}">
-                <a16:creationId xmlns:a16="http://schemas.microsoft.com/office/drawing/2014/main" id="{72AA1092-057D-4BD8-9CA2-4293375EF462}"/>
+                <a16:creationId xmlns:a16="http://schemas.microsoft.com/office/drawing/2014/main" id="{A741CBDB-AA73-4144-A034-6A6B5D38EF33}"/>
               </a:ext>
             </a:extLst>
           </p:cNvPr>
@@ -10566,7 +10566,7 @@
           <p:cNvPr id="44" name="">
             <a:extLst xmlns:a="http://schemas.openxmlformats.org/drawingml/2006/main">
               <a:ext uri="{FF2B5EF4-FFF2-40B4-BE49-F238E27FC236}">
-                <a16:creationId xmlns:a16="http://schemas.microsoft.com/office/drawing/2014/main" id="{E594C5C9-371D-4454-84DB-67D533DDE766}"/>
+                <a16:creationId xmlns:a16="http://schemas.microsoft.com/office/drawing/2014/main" id="{986D0C84-1E15-412F-B928-C1E0AC66015F}"/>
               </a:ext>
             </a:extLst>
           </p:cNvPr>
@@ -10599,7 +10599,7 @@
           <p:cNvPr id="45" name="">
             <a:extLst xmlns:a="http://schemas.openxmlformats.org/drawingml/2006/main">
               <a:ext uri="{FF2B5EF4-FFF2-40B4-BE49-F238E27FC236}">
-                <a16:creationId xmlns:a16="http://schemas.microsoft.com/office/drawing/2014/main" id="{2D79ECED-F36A-40BC-AEF2-7B0736A319B6}"/>
+                <a16:creationId xmlns:a16="http://schemas.microsoft.com/office/drawing/2014/main" id="{7A1492D6-9CFA-4EDC-8C75-9A3B5CB464BC}"/>
               </a:ext>
             </a:extLst>
           </p:cNvPr>
@@ -10657,7 +10657,7 @@
           <p:cNvPr id="46" name="">
             <a:extLst xmlns:a="http://schemas.openxmlformats.org/drawingml/2006/main">
               <a:ext uri="{FF2B5EF4-FFF2-40B4-BE49-F238E27FC236}">
-                <a16:creationId xmlns:a16="http://schemas.microsoft.com/office/drawing/2014/main" id="{193DCD50-3CD4-4087-BEB8-58DEDDB6067E}"/>
+                <a16:creationId xmlns:a16="http://schemas.microsoft.com/office/drawing/2014/main" id="{1893FD23-43D2-4823-8DDB-0518781E951C}"/>
               </a:ext>
             </a:extLst>
           </p:cNvPr>
@@ -10690,7 +10690,7 @@
           <p:cNvPr id="47" name="">
             <a:extLst xmlns:a="http://schemas.openxmlformats.org/drawingml/2006/main">
               <a:ext uri="{FF2B5EF4-FFF2-40B4-BE49-F238E27FC236}">
-                <a16:creationId xmlns:a16="http://schemas.microsoft.com/office/drawing/2014/main" id="{72BAF677-DBD7-4936-B8BE-F18F98C165BD}"/>
+                <a16:creationId xmlns:a16="http://schemas.microsoft.com/office/drawing/2014/main" id="{7DAAA4F1-D624-4136-986F-4D16792AD7D7}"/>
               </a:ext>
             </a:extLst>
           </p:cNvPr>
@@ -10748,7 +10748,7 @@
           <p:cNvPr id="48" name="">
             <a:extLst xmlns:a="http://schemas.openxmlformats.org/drawingml/2006/main">
               <a:ext uri="{FF2B5EF4-FFF2-40B4-BE49-F238E27FC236}">
-                <a16:creationId xmlns:a16="http://schemas.microsoft.com/office/drawing/2014/main" id="{A1C5B16C-F49E-43AB-99DA-B4CE067FBD8E}"/>
+                <a16:creationId xmlns:a16="http://schemas.microsoft.com/office/drawing/2014/main" id="{942872D5-50AB-491D-BAA1-3B665A90E7DC}"/>
               </a:ext>
             </a:extLst>
           </p:cNvPr>
@@ -10781,7 +10781,7 @@
           <p:cNvPr id="49" name="">
             <a:extLst xmlns:a="http://schemas.openxmlformats.org/drawingml/2006/main">
               <a:ext uri="{FF2B5EF4-FFF2-40B4-BE49-F238E27FC236}">
-                <a16:creationId xmlns:a16="http://schemas.microsoft.com/office/drawing/2014/main" id="{19623ECC-725A-4A74-A592-8525154ECCC8}"/>
+                <a16:creationId xmlns:a16="http://schemas.microsoft.com/office/drawing/2014/main" id="{86DDC04D-69C1-420A-8A0A-764D63F18D8C}"/>
               </a:ext>
             </a:extLst>
           </p:cNvPr>
@@ -10839,7 +10839,7 @@
           <p:cNvPr id="50" name="">
             <a:extLst xmlns:a="http://schemas.openxmlformats.org/drawingml/2006/main">
               <a:ext uri="{FF2B5EF4-FFF2-40B4-BE49-F238E27FC236}">
-                <a16:creationId xmlns:a16="http://schemas.microsoft.com/office/drawing/2014/main" id="{AFA6D87C-EE07-4877-AAB8-6F3BA1C2E005}"/>
+                <a16:creationId xmlns:a16="http://schemas.microsoft.com/office/drawing/2014/main" id="{EFBBA6B2-CDC4-439B-BAF6-6FF9ACBD467A}"/>
               </a:ext>
             </a:extLst>
           </p:cNvPr>
@@ -10872,7 +10872,7 @@
           <p:cNvPr id="51" name="">
             <a:extLst xmlns:a="http://schemas.openxmlformats.org/drawingml/2006/main">
               <a:ext uri="{FF2B5EF4-FFF2-40B4-BE49-F238E27FC236}">
-                <a16:creationId xmlns:a16="http://schemas.microsoft.com/office/drawing/2014/main" id="{FD4E44F8-13E3-4329-8873-06C7EBFEE72A}"/>
+                <a16:creationId xmlns:a16="http://schemas.microsoft.com/office/drawing/2014/main" id="{B441F02A-F8DE-4559-B903-29920228B0E9}"/>
               </a:ext>
             </a:extLst>
           </p:cNvPr>
@@ -10930,7 +10930,7 @@
           <p:cNvPr id="52" name="">
             <a:extLst xmlns:a="http://schemas.openxmlformats.org/drawingml/2006/main">
               <a:ext uri="{FF2B5EF4-FFF2-40B4-BE49-F238E27FC236}">
-                <a16:creationId xmlns:a16="http://schemas.microsoft.com/office/drawing/2014/main" id="{21A79D7B-38DA-4694-A523-BEF6F3D23C9A}"/>
+                <a16:creationId xmlns:a16="http://schemas.microsoft.com/office/drawing/2014/main" id="{A6A876D3-AF4C-4597-BC8C-51E966503842}"/>
               </a:ext>
             </a:extLst>
           </p:cNvPr>
@@ -10963,7 +10963,7 @@
           <p:cNvPr id="53" name="">
             <a:extLst xmlns:a="http://schemas.openxmlformats.org/drawingml/2006/main">
               <a:ext uri="{FF2B5EF4-FFF2-40B4-BE49-F238E27FC236}">
-                <a16:creationId xmlns:a16="http://schemas.microsoft.com/office/drawing/2014/main" id="{5A783AF1-7807-4BDC-8E37-F380086A53AC}"/>
+                <a16:creationId xmlns:a16="http://schemas.microsoft.com/office/drawing/2014/main" id="{47E0FC07-7599-4075-BEA7-EF3EEAFDA100}"/>
               </a:ext>
             </a:extLst>
           </p:cNvPr>
@@ -11021,7 +11021,7 @@
           <p:cNvPr id="54" name="">
             <a:extLst xmlns:a="http://schemas.openxmlformats.org/drawingml/2006/main">
               <a:ext uri="{FF2B5EF4-FFF2-40B4-BE49-F238E27FC236}">
-                <a16:creationId xmlns:a16="http://schemas.microsoft.com/office/drawing/2014/main" id="{7AE8CF5E-0A0D-4185-9D1B-7FB4A6ADB4F4}"/>
+                <a16:creationId xmlns:a16="http://schemas.microsoft.com/office/drawing/2014/main" id="{829C0362-94B9-49E7-968D-2BEB130DD2FD}"/>
               </a:ext>
             </a:extLst>
           </p:cNvPr>
@@ -11054,7 +11054,7 @@
           <p:cNvPr id="55" name="">
             <a:extLst xmlns:a="http://schemas.openxmlformats.org/drawingml/2006/main">
               <a:ext uri="{FF2B5EF4-FFF2-40B4-BE49-F238E27FC236}">
-                <a16:creationId xmlns:a16="http://schemas.microsoft.com/office/drawing/2014/main" id="{6DECF1EF-1ABB-4548-8325-0CC6CD425767}"/>
+                <a16:creationId xmlns:a16="http://schemas.microsoft.com/office/drawing/2014/main" id="{D4847EEC-88BE-49C7-9859-F5C4DA3175F8}"/>
               </a:ext>
             </a:extLst>
           </p:cNvPr>
@@ -11112,7 +11112,7 @@
           <p:cNvPr id="56" name="">
             <a:extLst xmlns:a="http://schemas.openxmlformats.org/drawingml/2006/main">
               <a:ext uri="{FF2B5EF4-FFF2-40B4-BE49-F238E27FC236}">
-                <a16:creationId xmlns:a16="http://schemas.microsoft.com/office/drawing/2014/main" id="{F84B0166-D5D2-4069-8DB0-1EF1AE1638AC}"/>
+                <a16:creationId xmlns:a16="http://schemas.microsoft.com/office/drawing/2014/main" id="{68D2B483-F8D0-4530-9555-140405E63EE7}"/>
               </a:ext>
             </a:extLst>
           </p:cNvPr>
@@ -11145,7 +11145,7 @@
           <p:cNvPr id="57" name="">
             <a:extLst xmlns:a="http://schemas.openxmlformats.org/drawingml/2006/main">
               <a:ext uri="{FF2B5EF4-FFF2-40B4-BE49-F238E27FC236}">
-                <a16:creationId xmlns:a16="http://schemas.microsoft.com/office/drawing/2014/main" id="{C9CF2D0D-E4E6-43B1-8391-C0ACBCC8296B}"/>
+                <a16:creationId xmlns:a16="http://schemas.microsoft.com/office/drawing/2014/main" id="{A784E953-49ED-4EE8-8110-E5A60B63528B}"/>
               </a:ext>
             </a:extLst>
           </p:cNvPr>
@@ -11203,7 +11203,7 @@
           <p:cNvPr id="58" name="">
             <a:extLst xmlns:a="http://schemas.openxmlformats.org/drawingml/2006/main">
               <a:ext uri="{FF2B5EF4-FFF2-40B4-BE49-F238E27FC236}">
-                <a16:creationId xmlns:a16="http://schemas.microsoft.com/office/drawing/2014/main" id="{E375C432-0968-43E6-99FB-33BDC37DC472}"/>
+                <a16:creationId xmlns:a16="http://schemas.microsoft.com/office/drawing/2014/main" id="{06CC62AB-8A05-41DB-B0A2-B8FCA3C7BE70}"/>
               </a:ext>
             </a:extLst>
           </p:cNvPr>
@@ -11236,7 +11236,7 @@
           <p:cNvPr id="59" name="">
             <a:extLst xmlns:a="http://schemas.openxmlformats.org/drawingml/2006/main">
               <a:ext uri="{FF2B5EF4-FFF2-40B4-BE49-F238E27FC236}">
-                <a16:creationId xmlns:a16="http://schemas.microsoft.com/office/drawing/2014/main" id="{AE8EBE55-C58B-4B87-AC69-872DE3F4BD2F}"/>
+                <a16:creationId xmlns:a16="http://schemas.microsoft.com/office/drawing/2014/main" id="{4A1E4C45-C656-4E5E-B514-472459C44006}"/>
               </a:ext>
             </a:extLst>
           </p:cNvPr>
@@ -11294,7 +11294,7 @@
           <p:cNvPr id="60" name="">
             <a:extLst xmlns:a="http://schemas.openxmlformats.org/drawingml/2006/main">
               <a:ext uri="{FF2B5EF4-FFF2-40B4-BE49-F238E27FC236}">
-                <a16:creationId xmlns:a16="http://schemas.microsoft.com/office/drawing/2014/main" id="{7B85F994-4A5D-4DA9-93F6-A6DEC3D64CF4}"/>
+                <a16:creationId xmlns:a16="http://schemas.microsoft.com/office/drawing/2014/main" id="{7C25CCAF-B9CC-4BFD-93BC-877589132E5A}"/>
               </a:ext>
             </a:extLst>
           </p:cNvPr>
@@ -11327,7 +11327,7 @@
           <p:cNvPr id="61" name="">
             <a:extLst xmlns:a="http://schemas.openxmlformats.org/drawingml/2006/main">
               <a:ext uri="{FF2B5EF4-FFF2-40B4-BE49-F238E27FC236}">
-                <a16:creationId xmlns:a16="http://schemas.microsoft.com/office/drawing/2014/main" id="{790CB1DA-6B28-4863-9ACA-E9D7CDA861B4}"/>
+                <a16:creationId xmlns:a16="http://schemas.microsoft.com/office/drawing/2014/main" id="{880CCBE9-A2EE-427A-95C4-6CCCAEB297BE}"/>
               </a:ext>
             </a:extLst>
           </p:cNvPr>
@@ -11385,7 +11385,7 @@
           <p:cNvPr id="62" name="">
             <a:extLst xmlns:a="http://schemas.openxmlformats.org/drawingml/2006/main">
               <a:ext uri="{FF2B5EF4-FFF2-40B4-BE49-F238E27FC236}">
-                <a16:creationId xmlns:a16="http://schemas.microsoft.com/office/drawing/2014/main" id="{315E3AA5-DF41-4E8B-9B1B-B0896F335560}"/>
+                <a16:creationId xmlns:a16="http://schemas.microsoft.com/office/drawing/2014/main" id="{5EE2EB0C-75E0-4A11-A0FF-1D86F379EA79}"/>
               </a:ext>
             </a:extLst>
           </p:cNvPr>
@@ -11418,7 +11418,7 @@
           <p:cNvPr id="63" name="">
             <a:extLst xmlns:a="http://schemas.openxmlformats.org/drawingml/2006/main">
               <a:ext uri="{FF2B5EF4-FFF2-40B4-BE49-F238E27FC236}">
-                <a16:creationId xmlns:a16="http://schemas.microsoft.com/office/drawing/2014/main" id="{80858608-1C9F-438B-BC81-20744448A324}"/>
+                <a16:creationId xmlns:a16="http://schemas.microsoft.com/office/drawing/2014/main" id="{8C933048-1F75-4F35-85C1-81DFD8B6B0AB}"/>
               </a:ext>
             </a:extLst>
           </p:cNvPr>
@@ -11476,7 +11476,7 @@
           <p:cNvPr id="64" name="">
             <a:extLst xmlns:a="http://schemas.openxmlformats.org/drawingml/2006/main">
               <a:ext uri="{FF2B5EF4-FFF2-40B4-BE49-F238E27FC236}">
-                <a16:creationId xmlns:a16="http://schemas.microsoft.com/office/drawing/2014/main" id="{F7EEC99E-197F-4844-AC06-51F170F482CC}"/>
+                <a16:creationId xmlns:a16="http://schemas.microsoft.com/office/drawing/2014/main" id="{F204BE5F-C7DF-4AE2-BD4C-D0AECF0C97A0}"/>
               </a:ext>
             </a:extLst>
           </p:cNvPr>
@@ -11509,7 +11509,7 @@
           <p:cNvPr id="65" name="">
             <a:extLst xmlns:a="http://schemas.openxmlformats.org/drawingml/2006/main">
               <a:ext uri="{FF2B5EF4-FFF2-40B4-BE49-F238E27FC236}">
-                <a16:creationId xmlns:a16="http://schemas.microsoft.com/office/drawing/2014/main" id="{7BB4EAEF-FC6D-4080-92A3-31C86303F1AF}"/>
+                <a16:creationId xmlns:a16="http://schemas.microsoft.com/office/drawing/2014/main" id="{00CCED03-6C82-43B4-B7E0-7278795243DA}"/>
               </a:ext>
             </a:extLst>
           </p:cNvPr>
@@ -11567,7 +11567,7 @@
           <p:cNvPr id="66" name="">
             <a:extLst xmlns:a="http://schemas.openxmlformats.org/drawingml/2006/main">
               <a:ext uri="{FF2B5EF4-FFF2-40B4-BE49-F238E27FC236}">
-                <a16:creationId xmlns:a16="http://schemas.microsoft.com/office/drawing/2014/main" id="{BC228470-FF79-4496-B254-6CBAA804974D}"/>
+                <a16:creationId xmlns:a16="http://schemas.microsoft.com/office/drawing/2014/main" id="{586FEF5E-6B17-41FE-8BE7-B2B6AAE8F97D}"/>
               </a:ext>
             </a:extLst>
           </p:cNvPr>
@@ -11600,7 +11600,7 @@
           <p:cNvPr id="67" name="">
             <a:extLst xmlns:a="http://schemas.openxmlformats.org/drawingml/2006/main">
               <a:ext uri="{FF2B5EF4-FFF2-40B4-BE49-F238E27FC236}">
-                <a16:creationId xmlns:a16="http://schemas.microsoft.com/office/drawing/2014/main" id="{1B2CBB4C-105E-4E71-828E-FD81FAFE6901}"/>
+                <a16:creationId xmlns:a16="http://schemas.microsoft.com/office/drawing/2014/main" id="{A9ABB94B-7142-4114-8FDD-1A4E84AD4C00}"/>
               </a:ext>
             </a:extLst>
           </p:cNvPr>
@@ -11658,7 +11658,7 @@
           <p:cNvPr id="68" name="">
             <a:extLst xmlns:a="http://schemas.openxmlformats.org/drawingml/2006/main">
               <a:ext uri="{FF2B5EF4-FFF2-40B4-BE49-F238E27FC236}">
-                <a16:creationId xmlns:a16="http://schemas.microsoft.com/office/drawing/2014/main" id="{6A3BD160-8AA3-4234-9C50-ADDA5F5E4CB9}"/>
+                <a16:creationId xmlns:a16="http://schemas.microsoft.com/office/drawing/2014/main" id="{C9168FF6-F8A6-48FD-A0DA-E1E0CE582296}"/>
               </a:ext>
             </a:extLst>
           </p:cNvPr>
@@ -11716,7 +11716,7 @@
           <p:cNvPr id="69" name="">
             <a:extLst xmlns:a="http://schemas.openxmlformats.org/drawingml/2006/main">
               <a:ext uri="{FF2B5EF4-FFF2-40B4-BE49-F238E27FC236}">
-                <a16:creationId xmlns:a16="http://schemas.microsoft.com/office/drawing/2014/main" id="{803D1169-0727-411B-9983-0DF8D5BBC6BF}"/>
+                <a16:creationId xmlns:a16="http://schemas.microsoft.com/office/drawing/2014/main" id="{2A4FB58C-4B3C-4F9A-8478-1030A7861571}"/>
               </a:ext>
             </a:extLst>
           </p:cNvPr>
@@ -11749,7 +11749,7 @@
           <p:cNvPr id="70" name="">
             <a:extLst xmlns:a="http://schemas.openxmlformats.org/drawingml/2006/main">
               <a:ext uri="{FF2B5EF4-FFF2-40B4-BE49-F238E27FC236}">
-                <a16:creationId xmlns:a16="http://schemas.microsoft.com/office/drawing/2014/main" id="{0826DF91-B6F4-4330-B5AA-7F50B9DBAC46}"/>
+                <a16:creationId xmlns:a16="http://schemas.microsoft.com/office/drawing/2014/main" id="{92E7D627-5E80-4ED6-B76F-0C5F4E97A946}"/>
               </a:ext>
             </a:extLst>
           </p:cNvPr>
@@ -11807,7 +11807,7 @@
                 <a:latin typeface="Microsoft YaHei"/>
                 <a:ea typeface="Microsoft YaHei"/>
                 <a:cs typeface="Microsoft YaHei"/>
-                <a:hlinkClick xmlns:r="http://schemas.openxmlformats.org/officeDocument/2006/relationships" r:id="R6c238ce27551411d"/>
+                <a:hlinkClick xmlns:r="http://schemas.openxmlformats.org/officeDocument/2006/relationships" r:id="R119469b8d99049c6"/>
               </a:rPr>
               <a:t>Superpowers GitHub</a:t>
             </a:r>
@@ -11819,7 +11819,7 @@
           <p:cNvPr id="71" name="">
             <a:extLst xmlns:a="http://schemas.openxmlformats.org/drawingml/2006/main">
               <a:ext uri="{FF2B5EF4-FFF2-40B4-BE49-F238E27FC236}">
-                <a16:creationId xmlns:a16="http://schemas.microsoft.com/office/drawing/2014/main" id="{4B964579-4ECE-4B1D-B24E-97E0C66D3C03}"/>
+                <a16:creationId xmlns:a16="http://schemas.microsoft.com/office/drawing/2014/main" id="{DD8C9805-DDAA-4DE3-832E-33DC38893622}"/>
               </a:ext>
             </a:extLst>
           </p:cNvPr>
@@ -11875,7 +11875,7 @@
     </p:spTree>
     <p:extLst>
       <p:ext uri="{BB962C8B-B14F-4D97-AF65-F5344CB8AC3E}">
-        <p14:creationId xmlns:p14="http://schemas.microsoft.com/office/powerpoint/2010/main" val="1410961545"/>
+        <p14:creationId xmlns:p14="http://schemas.microsoft.com/office/powerpoint/2010/main" val="1139013850"/>
       </p:ext>
     </p:extLst>
   </p:cSld>
@@ -11906,7 +11906,7 @@
           <p:cNvPr id="38" name="">
             <a:extLst xmlns:a="http://schemas.openxmlformats.org/drawingml/2006/main">
               <a:ext uri="{FF2B5EF4-FFF2-40B4-BE49-F238E27FC236}">
-                <a16:creationId xmlns:a16="http://schemas.microsoft.com/office/drawing/2014/main" id="{CDC38F81-50C1-4411-94BE-B433FD705582}"/>
+                <a16:creationId xmlns:a16="http://schemas.microsoft.com/office/drawing/2014/main" id="{F06456A9-E5D1-432C-878F-61D87CEA31B7}"/>
               </a:ext>
             </a:extLst>
           </p:cNvPr>
@@ -11939,7 +11939,7 @@
           <p:cNvPr id="2" name="">
             <a:extLst xmlns:a="http://schemas.openxmlformats.org/drawingml/2006/main">
               <a:ext uri="{FF2B5EF4-FFF2-40B4-BE49-F238E27FC236}">
-                <a16:creationId xmlns:a16="http://schemas.microsoft.com/office/drawing/2014/main" id="{A3F46D7D-9A85-47D8-9E9A-B0B4975C77BE}"/>
+                <a16:creationId xmlns:a16="http://schemas.microsoft.com/office/drawing/2014/main" id="{590C0EE8-DE6E-4DB3-86B3-C7629B4C6A98}"/>
               </a:ext>
             </a:extLst>
           </p:cNvPr>
@@ -11997,7 +11997,7 @@
           <p:cNvPr id="3" name="">
             <a:extLst xmlns:a="http://schemas.openxmlformats.org/drawingml/2006/main">
               <a:ext uri="{FF2B5EF4-FFF2-40B4-BE49-F238E27FC236}">
-                <a16:creationId xmlns:a16="http://schemas.microsoft.com/office/drawing/2014/main" id="{4D8539CD-1F94-44BC-994F-C4C4DDCC339F}"/>
+                <a16:creationId xmlns:a16="http://schemas.microsoft.com/office/drawing/2014/main" id="{4F7BFC66-4E37-4BE2-8523-974A1F032EE5}"/>
               </a:ext>
             </a:extLst>
           </p:cNvPr>
@@ -12029,7 +12029,7 @@
             <a:pPr algn="l">
               <a:defRPr sz="2325" b="1">
                 <a:solidFill>
-                  <a:srgbClr val="1D1D1A"/>
+                  <a:srgbClr val="8A0F17"/>
                 </a:solidFill>
                 <a:latin typeface="Microsoft YaHei"/>
                 <a:ea typeface="Microsoft YaHei"/>
@@ -12039,7 +12039,7 @@
             <a:r>
               <a:rPr sz="2325" b="1">
                 <a:solidFill>
-                  <a:srgbClr val="1D1D1A"/>
+                  <a:srgbClr val="8A0F17"/>
                 </a:solidFill>
                 <a:latin typeface="Microsoft YaHei"/>
                 <a:ea typeface="Microsoft YaHei"/>
@@ -12055,7 +12055,7 @@
           <p:cNvPr id="4" name="">
             <a:extLst xmlns:a="http://schemas.openxmlformats.org/drawingml/2006/main">
               <a:ext uri="{FF2B5EF4-FFF2-40B4-BE49-F238E27FC236}">
-                <a16:creationId xmlns:a16="http://schemas.microsoft.com/office/drawing/2014/main" id="{3B0B559D-34A0-4254-9404-FAB00D0A2D76}"/>
+                <a16:creationId xmlns:a16="http://schemas.microsoft.com/office/drawing/2014/main" id="{2BB66747-ED45-438F-8610-AEFC164BA6E7}"/>
               </a:ext>
             </a:extLst>
           </p:cNvPr>
@@ -12088,7 +12088,7 @@
           <p:cNvPr id="5" name="">
             <a:extLst xmlns:a="http://schemas.openxmlformats.org/drawingml/2006/main">
               <a:ext uri="{FF2B5EF4-FFF2-40B4-BE49-F238E27FC236}">
-                <a16:creationId xmlns:a16="http://schemas.microsoft.com/office/drawing/2014/main" id="{23387DFA-5C03-4957-87E8-42A886FEDBB5}"/>
+                <a16:creationId xmlns:a16="http://schemas.microsoft.com/office/drawing/2014/main" id="{B8FB7896-DE06-4DF2-9CA7-861978A4ECDB}"/>
               </a:ext>
             </a:extLst>
           </p:cNvPr>
@@ -12146,7 +12146,7 @@
           <p:cNvPr id="6" name="">
             <a:extLst xmlns:a="http://schemas.openxmlformats.org/drawingml/2006/main">
               <a:ext uri="{FF2B5EF4-FFF2-40B4-BE49-F238E27FC236}">
-                <a16:creationId xmlns:a16="http://schemas.microsoft.com/office/drawing/2014/main" id="{628CFCDE-30DE-4A68-9FDA-1E8D7DCCCEF6}"/>
+                <a16:creationId xmlns:a16="http://schemas.microsoft.com/office/drawing/2014/main" id="{19E39AD3-9F4F-4FB3-A1C4-FF618D4953CB}"/>
               </a:ext>
             </a:extLst>
           </p:cNvPr>
@@ -12250,7 +12250,7 @@
           <p:cNvPr id="7" name="">
             <a:extLst xmlns:a="http://schemas.openxmlformats.org/drawingml/2006/main">
               <a:ext uri="{FF2B5EF4-FFF2-40B4-BE49-F238E27FC236}">
-                <a16:creationId xmlns:a16="http://schemas.microsoft.com/office/drawing/2014/main" id="{4FA938D9-EE3A-4E3C-BC77-070C91FD6EF7}"/>
+                <a16:creationId xmlns:a16="http://schemas.microsoft.com/office/drawing/2014/main" id="{55FA736F-9F9C-4805-A87A-01340F107917}"/>
               </a:ext>
             </a:extLst>
           </p:cNvPr>
@@ -12283,7 +12283,7 @@
           <p:cNvPr id="8" name="">
             <a:extLst xmlns:a="http://schemas.openxmlformats.org/drawingml/2006/main">
               <a:ext uri="{FF2B5EF4-FFF2-40B4-BE49-F238E27FC236}">
-                <a16:creationId xmlns:a16="http://schemas.microsoft.com/office/drawing/2014/main" id="{CE04551C-BB15-4EC7-AD23-CD081FA96C2A}"/>
+                <a16:creationId xmlns:a16="http://schemas.microsoft.com/office/drawing/2014/main" id="{F0B965BC-FEC0-4CC3-89D2-D7F9C9323B92}"/>
               </a:ext>
             </a:extLst>
           </p:cNvPr>
@@ -12316,7 +12316,7 @@
           <p:cNvPr id="9" name="">
             <a:extLst xmlns:a="http://schemas.openxmlformats.org/drawingml/2006/main">
               <a:ext uri="{FF2B5EF4-FFF2-40B4-BE49-F238E27FC236}">
-                <a16:creationId xmlns:a16="http://schemas.microsoft.com/office/drawing/2014/main" id="{1713B7F6-0BBA-4D35-9F4F-8E900A5AE405}"/>
+                <a16:creationId xmlns:a16="http://schemas.microsoft.com/office/drawing/2014/main" id="{3C5CCE55-BC68-4581-AED2-94A4350747C2}"/>
               </a:ext>
             </a:extLst>
           </p:cNvPr>
@@ -12349,7 +12349,7 @@
           <p:cNvPr id="10" name="">
             <a:extLst xmlns:a="http://schemas.openxmlformats.org/drawingml/2006/main">
               <a:ext uri="{FF2B5EF4-FFF2-40B4-BE49-F238E27FC236}">
-                <a16:creationId xmlns:a16="http://schemas.microsoft.com/office/drawing/2014/main" id="{94BBDAE2-4E81-46D0-AA4E-21C3282BB5C2}"/>
+                <a16:creationId xmlns:a16="http://schemas.microsoft.com/office/drawing/2014/main" id="{E96FCD6B-9087-44EE-B6DD-5548014C6994}"/>
               </a:ext>
             </a:extLst>
           </p:cNvPr>
@@ -12407,7 +12407,7 @@
           <p:cNvPr id="11" name="">
             <a:extLst xmlns:a="http://schemas.openxmlformats.org/drawingml/2006/main">
               <a:ext uri="{FF2B5EF4-FFF2-40B4-BE49-F238E27FC236}">
-                <a16:creationId xmlns:a16="http://schemas.microsoft.com/office/drawing/2014/main" id="{69878AD4-CD3D-43FA-A62A-CBB449A07E79}"/>
+                <a16:creationId xmlns:a16="http://schemas.microsoft.com/office/drawing/2014/main" id="{15DE72FD-5E20-4A50-9B60-86C50CE55E63}"/>
               </a:ext>
             </a:extLst>
           </p:cNvPr>
@@ -12534,7 +12534,7 @@
           <p:cNvPr id="12" name="">
             <a:extLst xmlns:a="http://schemas.openxmlformats.org/drawingml/2006/main">
               <a:ext uri="{FF2B5EF4-FFF2-40B4-BE49-F238E27FC236}">
-                <a16:creationId xmlns:a16="http://schemas.microsoft.com/office/drawing/2014/main" id="{3E57E2A9-B25A-449C-A555-AFB98B9F98AC}"/>
+                <a16:creationId xmlns:a16="http://schemas.microsoft.com/office/drawing/2014/main" id="{F854D1F3-A66E-4CA4-B148-451A1399896E}"/>
               </a:ext>
             </a:extLst>
           </p:cNvPr>
@@ -12567,7 +12567,7 @@
           <p:cNvPr id="13" name="">
             <a:extLst xmlns:a="http://schemas.openxmlformats.org/drawingml/2006/main">
               <a:ext uri="{FF2B5EF4-FFF2-40B4-BE49-F238E27FC236}">
-                <a16:creationId xmlns:a16="http://schemas.microsoft.com/office/drawing/2014/main" id="{609B546F-000C-4D2E-BA4E-1ABB9E04D3C8}"/>
+                <a16:creationId xmlns:a16="http://schemas.microsoft.com/office/drawing/2014/main" id="{B1612B90-7A9F-45A4-8A97-B4CF040A3EB5}"/>
               </a:ext>
             </a:extLst>
           </p:cNvPr>
@@ -12600,7 +12600,7 @@
           <p:cNvPr id="14" name="">
             <a:extLst xmlns:a="http://schemas.openxmlformats.org/drawingml/2006/main">
               <a:ext uri="{FF2B5EF4-FFF2-40B4-BE49-F238E27FC236}">
-                <a16:creationId xmlns:a16="http://schemas.microsoft.com/office/drawing/2014/main" id="{98078BE7-7686-4A8D-A2F8-DE5A634B7875}"/>
+                <a16:creationId xmlns:a16="http://schemas.microsoft.com/office/drawing/2014/main" id="{F7CF3ADC-4341-4799-AC75-C1796E34F886}"/>
               </a:ext>
             </a:extLst>
           </p:cNvPr>
@@ -12633,7 +12633,7 @@
           <p:cNvPr id="15" name="">
             <a:extLst xmlns:a="http://schemas.openxmlformats.org/drawingml/2006/main">
               <a:ext uri="{FF2B5EF4-FFF2-40B4-BE49-F238E27FC236}">
-                <a16:creationId xmlns:a16="http://schemas.microsoft.com/office/drawing/2014/main" id="{538D05D8-A552-4815-9C41-9CF4A129E458}"/>
+                <a16:creationId xmlns:a16="http://schemas.microsoft.com/office/drawing/2014/main" id="{544BBD0D-42F2-4CD9-8659-51E2C11A60DD}"/>
               </a:ext>
             </a:extLst>
           </p:cNvPr>
@@ -12691,7 +12691,7 @@
           <p:cNvPr id="16" name="">
             <a:extLst xmlns:a="http://schemas.openxmlformats.org/drawingml/2006/main">
               <a:ext uri="{FF2B5EF4-FFF2-40B4-BE49-F238E27FC236}">
-                <a16:creationId xmlns:a16="http://schemas.microsoft.com/office/drawing/2014/main" id="{9E603D11-0AAB-45F8-8DAA-465CD4E2869A}"/>
+                <a16:creationId xmlns:a16="http://schemas.microsoft.com/office/drawing/2014/main" id="{C38BCA16-0F69-4873-8000-824439F38C9E}"/>
               </a:ext>
             </a:extLst>
           </p:cNvPr>
@@ -12795,7 +12795,7 @@
           <p:cNvPr id="17" name="">
             <a:extLst xmlns:a="http://schemas.openxmlformats.org/drawingml/2006/main">
               <a:ext uri="{FF2B5EF4-FFF2-40B4-BE49-F238E27FC236}">
-                <a16:creationId xmlns:a16="http://schemas.microsoft.com/office/drawing/2014/main" id="{D287B330-6932-4776-B85A-E599E2EFD42F}"/>
+                <a16:creationId xmlns:a16="http://schemas.microsoft.com/office/drawing/2014/main" id="{A29ADF8E-B7E7-41BD-884C-BA8C3F624241}"/>
               </a:ext>
             </a:extLst>
           </p:cNvPr>
@@ -12828,7 +12828,7 @@
           <p:cNvPr id="18" name="">
             <a:extLst xmlns:a="http://schemas.openxmlformats.org/drawingml/2006/main">
               <a:ext uri="{FF2B5EF4-FFF2-40B4-BE49-F238E27FC236}">
-                <a16:creationId xmlns:a16="http://schemas.microsoft.com/office/drawing/2014/main" id="{C81A3FAC-CE2A-49FC-9332-D343750353F7}"/>
+                <a16:creationId xmlns:a16="http://schemas.microsoft.com/office/drawing/2014/main" id="{BF5D7D13-6D20-4AEE-8D1F-6F00FA9312F4}"/>
               </a:ext>
             </a:extLst>
           </p:cNvPr>
@@ -12886,7 +12886,7 @@
           <p:cNvPr id="19" name="">
             <a:extLst xmlns:a="http://schemas.openxmlformats.org/drawingml/2006/main">
               <a:ext uri="{FF2B5EF4-FFF2-40B4-BE49-F238E27FC236}">
-                <a16:creationId xmlns:a16="http://schemas.microsoft.com/office/drawing/2014/main" id="{FC3BED75-1C21-437B-813E-47BBF21A5B70}"/>
+                <a16:creationId xmlns:a16="http://schemas.microsoft.com/office/drawing/2014/main" id="{341B5589-F060-45AB-932C-5033DCEFB29E}"/>
               </a:ext>
             </a:extLst>
           </p:cNvPr>
@@ -12944,7 +12944,7 @@
           <p:cNvPr id="20" name="">
             <a:extLst xmlns:a="http://schemas.openxmlformats.org/drawingml/2006/main">
               <a:ext uri="{FF2B5EF4-FFF2-40B4-BE49-F238E27FC236}">
-                <a16:creationId xmlns:a16="http://schemas.microsoft.com/office/drawing/2014/main" id="{14653DE2-65A7-466A-A5D7-6E60B485E4A6}"/>
+                <a16:creationId xmlns:a16="http://schemas.microsoft.com/office/drawing/2014/main" id="{C12D2AA9-1851-47EE-B629-60745F2B1018}"/>
               </a:ext>
             </a:extLst>
           </p:cNvPr>
@@ -12977,7 +12977,7 @@
           <p:cNvPr id="21" name="">
             <a:extLst xmlns:a="http://schemas.openxmlformats.org/drawingml/2006/main">
               <a:ext uri="{FF2B5EF4-FFF2-40B4-BE49-F238E27FC236}">
-                <a16:creationId xmlns:a16="http://schemas.microsoft.com/office/drawing/2014/main" id="{2EC9AE4F-7507-413A-85DE-D16D8579AFC4}"/>
+                <a16:creationId xmlns:a16="http://schemas.microsoft.com/office/drawing/2014/main" id="{A51BDF34-3732-4721-83CB-076374E1FED3}"/>
               </a:ext>
             </a:extLst>
           </p:cNvPr>
@@ -13035,7 +13035,7 @@
           <p:cNvPr id="22" name="">
             <a:extLst xmlns:a="http://schemas.openxmlformats.org/drawingml/2006/main">
               <a:ext uri="{FF2B5EF4-FFF2-40B4-BE49-F238E27FC236}">
-                <a16:creationId xmlns:a16="http://schemas.microsoft.com/office/drawing/2014/main" id="{88AFC186-0F25-4E49-8610-8E243965132E}"/>
+                <a16:creationId xmlns:a16="http://schemas.microsoft.com/office/drawing/2014/main" id="{7D0F74B1-2A70-4192-894D-24576C379EB5}"/>
               </a:ext>
             </a:extLst>
           </p:cNvPr>
@@ -13093,7 +13093,7 @@
           <p:cNvPr id="23" name="">
             <a:extLst xmlns:a="http://schemas.openxmlformats.org/drawingml/2006/main">
               <a:ext uri="{FF2B5EF4-FFF2-40B4-BE49-F238E27FC236}">
-                <a16:creationId xmlns:a16="http://schemas.microsoft.com/office/drawing/2014/main" id="{4D87534F-D837-41CA-8979-1A24A6FA2211}"/>
+                <a16:creationId xmlns:a16="http://schemas.microsoft.com/office/drawing/2014/main" id="{719355F4-690D-4E90-A2E2-F995B46E8806}"/>
               </a:ext>
             </a:extLst>
           </p:cNvPr>
@@ -13126,7 +13126,7 @@
           <p:cNvPr id="24" name="">
             <a:extLst xmlns:a="http://schemas.openxmlformats.org/drawingml/2006/main">
               <a:ext uri="{FF2B5EF4-FFF2-40B4-BE49-F238E27FC236}">
-                <a16:creationId xmlns:a16="http://schemas.microsoft.com/office/drawing/2014/main" id="{356E83CC-3FC1-4D46-99E2-B1ABEA7AC9A1}"/>
+                <a16:creationId xmlns:a16="http://schemas.microsoft.com/office/drawing/2014/main" id="{33C17446-DD40-47EB-A408-99B7D316D178}"/>
               </a:ext>
             </a:extLst>
           </p:cNvPr>
@@ -13184,7 +13184,7 @@
           <p:cNvPr id="25" name="">
             <a:extLst xmlns:a="http://schemas.openxmlformats.org/drawingml/2006/main">
               <a:ext uri="{FF2B5EF4-FFF2-40B4-BE49-F238E27FC236}">
-                <a16:creationId xmlns:a16="http://schemas.microsoft.com/office/drawing/2014/main" id="{6F48BE66-BDBC-4968-B3C8-71B26C435492}"/>
+                <a16:creationId xmlns:a16="http://schemas.microsoft.com/office/drawing/2014/main" id="{70807859-219C-43FF-8B95-433FB251687E}"/>
               </a:ext>
             </a:extLst>
           </p:cNvPr>
@@ -13242,7 +13242,7 @@
           <p:cNvPr id="26" name="">
             <a:extLst xmlns:a="http://schemas.openxmlformats.org/drawingml/2006/main">
               <a:ext uri="{FF2B5EF4-FFF2-40B4-BE49-F238E27FC236}">
-                <a16:creationId xmlns:a16="http://schemas.microsoft.com/office/drawing/2014/main" id="{D033E669-A637-4C07-9596-D8467AB53A1A}"/>
+                <a16:creationId xmlns:a16="http://schemas.microsoft.com/office/drawing/2014/main" id="{0B1E7ABB-23C1-4480-94A9-755F881BF647}"/>
               </a:ext>
             </a:extLst>
           </p:cNvPr>
@@ -13275,7 +13275,7 @@
           <p:cNvPr id="27" name="">
             <a:extLst xmlns:a="http://schemas.openxmlformats.org/drawingml/2006/main">
               <a:ext uri="{FF2B5EF4-FFF2-40B4-BE49-F238E27FC236}">
-                <a16:creationId xmlns:a16="http://schemas.microsoft.com/office/drawing/2014/main" id="{4EE933E9-E19C-4364-82CE-1F000889549B}"/>
+                <a16:creationId xmlns:a16="http://schemas.microsoft.com/office/drawing/2014/main" id="{F9F42795-E444-4AEB-AE64-62E6CE30E98F}"/>
               </a:ext>
             </a:extLst>
           </p:cNvPr>
@@ -13333,7 +13333,7 @@
           <p:cNvPr id="28" name="">
             <a:extLst xmlns:a="http://schemas.openxmlformats.org/drawingml/2006/main">
               <a:ext uri="{FF2B5EF4-FFF2-40B4-BE49-F238E27FC236}">
-                <a16:creationId xmlns:a16="http://schemas.microsoft.com/office/drawing/2014/main" id="{AE436478-6263-47E8-BF3A-C6033CBEFABB}"/>
+                <a16:creationId xmlns:a16="http://schemas.microsoft.com/office/drawing/2014/main" id="{71B893AE-B4E9-48EC-A472-674E0537343D}"/>
               </a:ext>
             </a:extLst>
           </p:cNvPr>
@@ -13391,7 +13391,7 @@
           <p:cNvPr id="29" name="">
             <a:extLst xmlns:a="http://schemas.openxmlformats.org/drawingml/2006/main">
               <a:ext uri="{FF2B5EF4-FFF2-40B4-BE49-F238E27FC236}">
-                <a16:creationId xmlns:a16="http://schemas.microsoft.com/office/drawing/2014/main" id="{81A365F4-C6ED-4B27-8A39-A9D06C8DDD3F}"/>
+                <a16:creationId xmlns:a16="http://schemas.microsoft.com/office/drawing/2014/main" id="{902EF37C-1B29-49CB-9350-31A0056EA0C1}"/>
               </a:ext>
             </a:extLst>
           </p:cNvPr>
@@ -13424,7 +13424,7 @@
           <p:cNvPr id="30" name="">
             <a:extLst xmlns:a="http://schemas.openxmlformats.org/drawingml/2006/main">
               <a:ext uri="{FF2B5EF4-FFF2-40B4-BE49-F238E27FC236}">
-                <a16:creationId xmlns:a16="http://schemas.microsoft.com/office/drawing/2014/main" id="{3B8EC365-2DA8-4CA9-AEE3-75F08312C00D}"/>
+                <a16:creationId xmlns:a16="http://schemas.microsoft.com/office/drawing/2014/main" id="{99915B12-AB1C-43B1-87B5-BB4B2E97BD07}"/>
               </a:ext>
             </a:extLst>
           </p:cNvPr>
@@ -13482,7 +13482,7 @@
           <p:cNvPr id="31" name="">
             <a:extLst xmlns:a="http://schemas.openxmlformats.org/drawingml/2006/main">
               <a:ext uri="{FF2B5EF4-FFF2-40B4-BE49-F238E27FC236}">
-                <a16:creationId xmlns:a16="http://schemas.microsoft.com/office/drawing/2014/main" id="{8024D5F7-CF5E-4EC7-B805-182A8C5BBCCF}"/>
+                <a16:creationId xmlns:a16="http://schemas.microsoft.com/office/drawing/2014/main" id="{1C8D929E-7851-42FB-A451-03E2D81C9258}"/>
               </a:ext>
             </a:extLst>
           </p:cNvPr>
@@ -13540,7 +13540,7 @@
           <p:cNvPr id="32" name="">
             <a:extLst xmlns:a="http://schemas.openxmlformats.org/drawingml/2006/main">
               <a:ext uri="{FF2B5EF4-FFF2-40B4-BE49-F238E27FC236}">
-                <a16:creationId xmlns:a16="http://schemas.microsoft.com/office/drawing/2014/main" id="{4DA6F098-AF21-42EE-A5DF-D9AC3E5C70EB}"/>
+                <a16:creationId xmlns:a16="http://schemas.microsoft.com/office/drawing/2014/main" id="{1BDD8824-1CFB-4864-899F-56334FB8458D}"/>
               </a:ext>
             </a:extLst>
           </p:cNvPr>
@@ -13573,7 +13573,7 @@
           <p:cNvPr id="33" name="">
             <a:extLst xmlns:a="http://schemas.openxmlformats.org/drawingml/2006/main">
               <a:ext uri="{FF2B5EF4-FFF2-40B4-BE49-F238E27FC236}">
-                <a16:creationId xmlns:a16="http://schemas.microsoft.com/office/drawing/2014/main" id="{1EFF11ED-E58B-4DF8-962F-B0D9A082F7F2}"/>
+                <a16:creationId xmlns:a16="http://schemas.microsoft.com/office/drawing/2014/main" id="{475039D5-C241-430E-B416-5B05EDC2B779}"/>
               </a:ext>
             </a:extLst>
           </p:cNvPr>
@@ -13631,7 +13631,7 @@
           <p:cNvPr id="34" name="">
             <a:extLst xmlns:a="http://schemas.openxmlformats.org/drawingml/2006/main">
               <a:ext uri="{FF2B5EF4-FFF2-40B4-BE49-F238E27FC236}">
-                <a16:creationId xmlns:a16="http://schemas.microsoft.com/office/drawing/2014/main" id="{72A5D59F-0AB8-4245-9415-C1107DBB8E49}"/>
+                <a16:creationId xmlns:a16="http://schemas.microsoft.com/office/drawing/2014/main" id="{BFB70372-C415-4254-8742-79421FF16207}"/>
               </a:ext>
             </a:extLst>
           </p:cNvPr>
@@ -13689,7 +13689,7 @@
           <p:cNvPr id="35" name="">
             <a:extLst xmlns:a="http://schemas.openxmlformats.org/drawingml/2006/main">
               <a:ext uri="{FF2B5EF4-FFF2-40B4-BE49-F238E27FC236}">
-                <a16:creationId xmlns:a16="http://schemas.microsoft.com/office/drawing/2014/main" id="{DC99DCB6-1ACD-4F88-8135-76C6E83A942B}"/>
+                <a16:creationId xmlns:a16="http://schemas.microsoft.com/office/drawing/2014/main" id="{7FC5EB32-8AD8-4877-B5BC-B193748779BF}"/>
               </a:ext>
             </a:extLst>
           </p:cNvPr>
@@ -13722,7 +13722,7 @@
           <p:cNvPr id="36" name="">
             <a:extLst xmlns:a="http://schemas.openxmlformats.org/drawingml/2006/main">
               <a:ext uri="{FF2B5EF4-FFF2-40B4-BE49-F238E27FC236}">
-                <a16:creationId xmlns:a16="http://schemas.microsoft.com/office/drawing/2014/main" id="{B36321B1-A2C7-4FFC-98CE-DF5C06B14163}"/>
+                <a16:creationId xmlns:a16="http://schemas.microsoft.com/office/drawing/2014/main" id="{A2D66B4C-9F3B-47FC-A73A-E3F0AA781CE9}"/>
               </a:ext>
             </a:extLst>
           </p:cNvPr>
@@ -13780,7 +13780,7 @@
                 <a:latin typeface="Microsoft YaHei"/>
                 <a:ea typeface="Microsoft YaHei"/>
                 <a:cs typeface="Microsoft YaHei"/>
-                <a:hlinkClick xmlns:r="http://schemas.openxmlformats.org/officeDocument/2006/relationships" r:id="R621a7db3548e4564"/>
+                <a:hlinkClick xmlns:r="http://schemas.openxmlformats.org/officeDocument/2006/relationships" r:id="R1007960a2ea547be"/>
               </a:rPr>
               <a:t>OpenSpec GitHub</a:t>
             </a:r>
@@ -13792,7 +13792,7 @@
           <p:cNvPr id="37" name="">
             <a:extLst xmlns:a="http://schemas.openxmlformats.org/drawingml/2006/main">
               <a:ext uri="{FF2B5EF4-FFF2-40B4-BE49-F238E27FC236}">
-                <a16:creationId xmlns:a16="http://schemas.microsoft.com/office/drawing/2014/main" id="{B059F6B4-93A9-453F-9C8F-018F55162F0C}"/>
+                <a16:creationId xmlns:a16="http://schemas.microsoft.com/office/drawing/2014/main" id="{57D32CF3-5D46-4F2B-89AC-7988ADF3DBD8}"/>
               </a:ext>
             </a:extLst>
           </p:cNvPr>
@@ -13848,7 +13848,7 @@
     </p:spTree>
     <p:extLst>
       <p:ext uri="{BB962C8B-B14F-4D97-AF65-F5344CB8AC3E}">
-        <p14:creationId xmlns:p14="http://schemas.microsoft.com/office/powerpoint/2010/main" val="1088495811"/>
+        <p14:creationId xmlns:p14="http://schemas.microsoft.com/office/powerpoint/2010/main" val="567429345"/>
       </p:ext>
     </p:extLst>
   </p:cSld>
@@ -13879,7 +13879,7 @@
           <p:cNvPr id="59" name="">
             <a:extLst xmlns:a="http://schemas.openxmlformats.org/drawingml/2006/main">
               <a:ext uri="{FF2B5EF4-FFF2-40B4-BE49-F238E27FC236}">
-                <a16:creationId xmlns:a16="http://schemas.microsoft.com/office/drawing/2014/main" id="{80C65FB7-93FB-4BAC-B80A-27915BD62326}"/>
+                <a16:creationId xmlns:a16="http://schemas.microsoft.com/office/drawing/2014/main" id="{54F32D83-1801-4BFF-80B8-22B1CA73629E}"/>
               </a:ext>
             </a:extLst>
           </p:cNvPr>
@@ -13912,7 +13912,7 @@
           <p:cNvPr id="2" name="">
             <a:extLst xmlns:a="http://schemas.openxmlformats.org/drawingml/2006/main">
               <a:ext uri="{FF2B5EF4-FFF2-40B4-BE49-F238E27FC236}">
-                <a16:creationId xmlns:a16="http://schemas.microsoft.com/office/drawing/2014/main" id="{F1E963C0-00E3-4DAC-92EB-CF268139721D}"/>
+                <a16:creationId xmlns:a16="http://schemas.microsoft.com/office/drawing/2014/main" id="{95142FCF-80E4-4A2A-B50C-C9D7F4C8961D}"/>
               </a:ext>
             </a:extLst>
           </p:cNvPr>
@@ -13970,7 +13970,7 @@
           <p:cNvPr id="3" name="">
             <a:extLst xmlns:a="http://schemas.openxmlformats.org/drawingml/2006/main">
               <a:ext uri="{FF2B5EF4-FFF2-40B4-BE49-F238E27FC236}">
-                <a16:creationId xmlns:a16="http://schemas.microsoft.com/office/drawing/2014/main" id="{DB0E81FF-49B5-41E0-A135-C80D100AFE1C}"/>
+                <a16:creationId xmlns:a16="http://schemas.microsoft.com/office/drawing/2014/main" id="{20093E71-0DFE-45E1-9127-93EC830CC14C}"/>
               </a:ext>
             </a:extLst>
           </p:cNvPr>
@@ -14002,7 +14002,7 @@
             <a:pPr algn="l">
               <a:defRPr sz="2325" b="1">
                 <a:solidFill>
-                  <a:srgbClr val="1D1D1A"/>
+                  <a:srgbClr val="8A0F17"/>
                 </a:solidFill>
                 <a:latin typeface="Microsoft YaHei"/>
                 <a:ea typeface="Microsoft YaHei"/>
@@ -14012,7 +14012,7 @@
             <a:r>
               <a:rPr sz="2325" b="1">
                 <a:solidFill>
-                  <a:srgbClr val="1D1D1A"/>
+                  <a:srgbClr val="8A0F17"/>
                 </a:solidFill>
                 <a:latin typeface="Microsoft YaHei"/>
                 <a:ea typeface="Microsoft YaHei"/>
@@ -14028,7 +14028,7 @@
           <p:cNvPr id="4" name="">
             <a:extLst xmlns:a="http://schemas.openxmlformats.org/drawingml/2006/main">
               <a:ext uri="{FF2B5EF4-FFF2-40B4-BE49-F238E27FC236}">
-                <a16:creationId xmlns:a16="http://schemas.microsoft.com/office/drawing/2014/main" id="{47144AC3-8074-47B0-80E2-5C86AB156E87}"/>
+                <a16:creationId xmlns:a16="http://schemas.microsoft.com/office/drawing/2014/main" id="{C79458F0-858A-41AB-86E5-BFB37B94B7E9}"/>
               </a:ext>
             </a:extLst>
           </p:cNvPr>
@@ -14061,7 +14061,7 @@
           <p:cNvPr id="5" name="">
             <a:extLst xmlns:a="http://schemas.openxmlformats.org/drawingml/2006/main">
               <a:ext uri="{FF2B5EF4-FFF2-40B4-BE49-F238E27FC236}">
-                <a16:creationId xmlns:a16="http://schemas.microsoft.com/office/drawing/2014/main" id="{6978F4A6-9EE3-48E8-8FD3-B78B4F4FB602}"/>
+                <a16:creationId xmlns:a16="http://schemas.microsoft.com/office/drawing/2014/main" id="{172C8BD5-E1E4-4F2B-9D96-4CE8AEB2D986}"/>
               </a:ext>
             </a:extLst>
           </p:cNvPr>
@@ -14119,7 +14119,7 @@
           <p:cNvPr id="6" name="">
             <a:extLst xmlns:a="http://schemas.openxmlformats.org/drawingml/2006/main">
               <a:ext uri="{FF2B5EF4-FFF2-40B4-BE49-F238E27FC236}">
-                <a16:creationId xmlns:a16="http://schemas.microsoft.com/office/drawing/2014/main" id="{158C6333-D238-49F9-BEBC-63A93F6E39DC}"/>
+                <a16:creationId xmlns:a16="http://schemas.microsoft.com/office/drawing/2014/main" id="{E09A2A2C-30B6-4CEE-A5C8-3DB7D2198E73}"/>
               </a:ext>
             </a:extLst>
           </p:cNvPr>
@@ -14152,7 +14152,7 @@
           <p:cNvPr id="7" name="">
             <a:extLst xmlns:a="http://schemas.openxmlformats.org/drawingml/2006/main">
               <a:ext uri="{FF2B5EF4-FFF2-40B4-BE49-F238E27FC236}">
-                <a16:creationId xmlns:a16="http://schemas.microsoft.com/office/drawing/2014/main" id="{0B547227-2102-4F59-B42C-75C3023FB217}"/>
+                <a16:creationId xmlns:a16="http://schemas.microsoft.com/office/drawing/2014/main" id="{BF03EA83-6051-4B73-925B-B461A4FD374F}"/>
               </a:ext>
             </a:extLst>
           </p:cNvPr>
@@ -14210,7 +14210,7 @@
           <p:cNvPr id="8" name="">
             <a:extLst xmlns:a="http://schemas.openxmlformats.org/drawingml/2006/main">
               <a:ext uri="{FF2B5EF4-FFF2-40B4-BE49-F238E27FC236}">
-                <a16:creationId xmlns:a16="http://schemas.microsoft.com/office/drawing/2014/main" id="{219956E6-40F5-48B6-96BB-718F9597F90B}"/>
+                <a16:creationId xmlns:a16="http://schemas.microsoft.com/office/drawing/2014/main" id="{B0CBAD70-6770-438C-AA59-E9820A486B7B}"/>
               </a:ext>
             </a:extLst>
           </p:cNvPr>
@@ -14243,7 +14243,7 @@
           <p:cNvPr id="9" name="">
             <a:extLst xmlns:a="http://schemas.openxmlformats.org/drawingml/2006/main">
               <a:ext uri="{FF2B5EF4-FFF2-40B4-BE49-F238E27FC236}">
-                <a16:creationId xmlns:a16="http://schemas.microsoft.com/office/drawing/2014/main" id="{11B4ACCD-C36F-4449-BB5E-8CCCE4FFC5EC}"/>
+                <a16:creationId xmlns:a16="http://schemas.microsoft.com/office/drawing/2014/main" id="{98DD436D-4579-4FD8-874B-2B885AB6CF61}"/>
               </a:ext>
             </a:extLst>
           </p:cNvPr>
@@ -14301,7 +14301,7 @@
           <p:cNvPr id="10" name="">
             <a:extLst xmlns:a="http://schemas.openxmlformats.org/drawingml/2006/main">
               <a:ext uri="{FF2B5EF4-FFF2-40B4-BE49-F238E27FC236}">
-                <a16:creationId xmlns:a16="http://schemas.microsoft.com/office/drawing/2014/main" id="{14A317A2-1631-4711-AE03-B1DC634CC48A}"/>
+                <a16:creationId xmlns:a16="http://schemas.microsoft.com/office/drawing/2014/main" id="{4B2F7DEF-243B-49FC-A278-DBDDE798F6ED}"/>
               </a:ext>
             </a:extLst>
           </p:cNvPr>
@@ -14334,7 +14334,7 @@
           <p:cNvPr id="11" name="">
             <a:extLst xmlns:a="http://schemas.openxmlformats.org/drawingml/2006/main">
               <a:ext uri="{FF2B5EF4-FFF2-40B4-BE49-F238E27FC236}">
-                <a16:creationId xmlns:a16="http://schemas.microsoft.com/office/drawing/2014/main" id="{C343571D-A18D-4EE1-914D-4AAFA627CD79}"/>
+                <a16:creationId xmlns:a16="http://schemas.microsoft.com/office/drawing/2014/main" id="{34026838-5D6A-4236-9DA0-D34E556D77B8}"/>
               </a:ext>
             </a:extLst>
           </p:cNvPr>
@@ -14392,7 +14392,7 @@
           <p:cNvPr id="12" name="">
             <a:extLst xmlns:a="http://schemas.openxmlformats.org/drawingml/2006/main">
               <a:ext uri="{FF2B5EF4-FFF2-40B4-BE49-F238E27FC236}">
-                <a16:creationId xmlns:a16="http://schemas.microsoft.com/office/drawing/2014/main" id="{E1349F5D-0A5D-492F-99AA-AB12ABD28610}"/>
+                <a16:creationId xmlns:a16="http://schemas.microsoft.com/office/drawing/2014/main" id="{7D8A0DE6-D0CA-4683-BF29-FFD14C47C89D}"/>
               </a:ext>
             </a:extLst>
           </p:cNvPr>
@@ -14425,7 +14425,7 @@
           <p:cNvPr id="13" name="">
             <a:extLst xmlns:a="http://schemas.openxmlformats.org/drawingml/2006/main">
               <a:ext uri="{FF2B5EF4-FFF2-40B4-BE49-F238E27FC236}">
-                <a16:creationId xmlns:a16="http://schemas.microsoft.com/office/drawing/2014/main" id="{ABE70F90-7765-45D1-87B0-E30CEF3EB008}"/>
+                <a16:creationId xmlns:a16="http://schemas.microsoft.com/office/drawing/2014/main" id="{B4E38A2A-3F68-4B30-BFE3-5D8695982C95}"/>
               </a:ext>
             </a:extLst>
           </p:cNvPr>
@@ -14483,7 +14483,7 @@
           <p:cNvPr id="14" name="">
             <a:extLst xmlns:a="http://schemas.openxmlformats.org/drawingml/2006/main">
               <a:ext uri="{FF2B5EF4-FFF2-40B4-BE49-F238E27FC236}">
-                <a16:creationId xmlns:a16="http://schemas.microsoft.com/office/drawing/2014/main" id="{04A1EC1B-2408-4E1D-A9D4-5372B9F5F15B}"/>
+                <a16:creationId xmlns:a16="http://schemas.microsoft.com/office/drawing/2014/main" id="{6559C5CA-9E78-4E05-A7F4-D54C2A80F1E5}"/>
               </a:ext>
             </a:extLst>
           </p:cNvPr>
@@ -14516,7 +14516,7 @@
           <p:cNvPr id="15" name="">
             <a:extLst xmlns:a="http://schemas.openxmlformats.org/drawingml/2006/main">
               <a:ext uri="{FF2B5EF4-FFF2-40B4-BE49-F238E27FC236}">
-                <a16:creationId xmlns:a16="http://schemas.microsoft.com/office/drawing/2014/main" id="{55E400DE-D1A5-40E4-85E4-826DF3BB3DCF}"/>
+                <a16:creationId xmlns:a16="http://schemas.microsoft.com/office/drawing/2014/main" id="{03050D74-4D76-4958-A412-65E395D2E627}"/>
               </a:ext>
             </a:extLst>
           </p:cNvPr>
@@ -14574,7 +14574,7 @@
           <p:cNvPr id="16" name="">
             <a:extLst xmlns:a="http://schemas.openxmlformats.org/drawingml/2006/main">
               <a:ext uri="{FF2B5EF4-FFF2-40B4-BE49-F238E27FC236}">
-                <a16:creationId xmlns:a16="http://schemas.microsoft.com/office/drawing/2014/main" id="{2245AB57-5910-4C57-AA48-A917F0ED40FB}"/>
+                <a16:creationId xmlns:a16="http://schemas.microsoft.com/office/drawing/2014/main" id="{348577D0-AAAF-474C-8A30-5C7662201506}"/>
               </a:ext>
             </a:extLst>
           </p:cNvPr>
@@ -14607,7 +14607,7 @@
           <p:cNvPr id="17" name="">
             <a:extLst xmlns:a="http://schemas.openxmlformats.org/drawingml/2006/main">
               <a:ext uri="{FF2B5EF4-FFF2-40B4-BE49-F238E27FC236}">
-                <a16:creationId xmlns:a16="http://schemas.microsoft.com/office/drawing/2014/main" id="{680A7371-FF85-4351-AE05-D98D169AC0D7}"/>
+                <a16:creationId xmlns:a16="http://schemas.microsoft.com/office/drawing/2014/main" id="{C0069D23-B030-45A7-B0DD-A9F9B88C5E94}"/>
               </a:ext>
             </a:extLst>
           </p:cNvPr>
@@ -14665,7 +14665,7 @@
           <p:cNvPr id="18" name="">
             <a:extLst xmlns:a="http://schemas.openxmlformats.org/drawingml/2006/main">
               <a:ext uri="{FF2B5EF4-FFF2-40B4-BE49-F238E27FC236}">
-                <a16:creationId xmlns:a16="http://schemas.microsoft.com/office/drawing/2014/main" id="{5CA84A5B-B977-4F4F-99ED-76FBBBB5DD56}"/>
+                <a16:creationId xmlns:a16="http://schemas.microsoft.com/office/drawing/2014/main" id="{0BAC7000-BF64-49C7-A858-EEC6BD88822D}"/>
               </a:ext>
             </a:extLst>
           </p:cNvPr>
@@ -14698,7 +14698,7 @@
           <p:cNvPr id="19" name="">
             <a:extLst xmlns:a="http://schemas.openxmlformats.org/drawingml/2006/main">
               <a:ext uri="{FF2B5EF4-FFF2-40B4-BE49-F238E27FC236}">
-                <a16:creationId xmlns:a16="http://schemas.microsoft.com/office/drawing/2014/main" id="{D055D0FB-68E5-474B-BC06-7FE7379E11C1}"/>
+                <a16:creationId xmlns:a16="http://schemas.microsoft.com/office/drawing/2014/main" id="{717654AB-B252-4F4D-B208-650B978AEF15}"/>
               </a:ext>
             </a:extLst>
           </p:cNvPr>
@@ -14756,7 +14756,7 @@
           <p:cNvPr id="20" name="">
             <a:extLst xmlns:a="http://schemas.openxmlformats.org/drawingml/2006/main">
               <a:ext uri="{FF2B5EF4-FFF2-40B4-BE49-F238E27FC236}">
-                <a16:creationId xmlns:a16="http://schemas.microsoft.com/office/drawing/2014/main" id="{B7A3B340-7E47-49E3-B740-E653AE0CFFEA}"/>
+                <a16:creationId xmlns:a16="http://schemas.microsoft.com/office/drawing/2014/main" id="{06D6915E-E977-43EF-8CFA-E03F5EAEBC5D}"/>
               </a:ext>
             </a:extLst>
           </p:cNvPr>
@@ -14789,7 +14789,7 @@
           <p:cNvPr id="21" name="">
             <a:extLst xmlns:a="http://schemas.openxmlformats.org/drawingml/2006/main">
               <a:ext uri="{FF2B5EF4-FFF2-40B4-BE49-F238E27FC236}">
-                <a16:creationId xmlns:a16="http://schemas.microsoft.com/office/drawing/2014/main" id="{27B33055-C65B-4F55-98FA-313A7CA1407E}"/>
+                <a16:creationId xmlns:a16="http://schemas.microsoft.com/office/drawing/2014/main" id="{C654A4E6-6BD5-4E68-9FB7-F252D8945208}"/>
               </a:ext>
             </a:extLst>
           </p:cNvPr>
@@ -14847,7 +14847,7 @@
           <p:cNvPr id="22" name="">
             <a:extLst xmlns:a="http://schemas.openxmlformats.org/drawingml/2006/main">
               <a:ext uri="{FF2B5EF4-FFF2-40B4-BE49-F238E27FC236}">
-                <a16:creationId xmlns:a16="http://schemas.microsoft.com/office/drawing/2014/main" id="{30E40949-C082-4F5F-B8CF-8F6AA470F948}"/>
+                <a16:creationId xmlns:a16="http://schemas.microsoft.com/office/drawing/2014/main" id="{A3B86C99-DAC8-4E77-ABA9-DBF82D99C541}"/>
               </a:ext>
             </a:extLst>
           </p:cNvPr>
@@ -14880,7 +14880,7 @@
           <p:cNvPr id="23" name="">
             <a:extLst xmlns:a="http://schemas.openxmlformats.org/drawingml/2006/main">
               <a:ext uri="{FF2B5EF4-FFF2-40B4-BE49-F238E27FC236}">
-                <a16:creationId xmlns:a16="http://schemas.microsoft.com/office/drawing/2014/main" id="{0344D4C9-D180-454A-A892-F6B078FD5570}"/>
+                <a16:creationId xmlns:a16="http://schemas.microsoft.com/office/drawing/2014/main" id="{FFBB56AB-C187-47D5-8470-A16D2A0D97BF}"/>
               </a:ext>
             </a:extLst>
           </p:cNvPr>
@@ -14938,7 +14938,7 @@
           <p:cNvPr id="24" name="">
             <a:extLst xmlns:a="http://schemas.openxmlformats.org/drawingml/2006/main">
               <a:ext uri="{FF2B5EF4-FFF2-40B4-BE49-F238E27FC236}">
-                <a16:creationId xmlns:a16="http://schemas.microsoft.com/office/drawing/2014/main" id="{F475A644-0506-4781-8D01-A9918EB2C08B}"/>
+                <a16:creationId xmlns:a16="http://schemas.microsoft.com/office/drawing/2014/main" id="{7BE1EB88-FD9A-480D-9105-39EF50086909}"/>
               </a:ext>
             </a:extLst>
           </p:cNvPr>
@@ -14971,7 +14971,7 @@
           <p:cNvPr id="25" name="">
             <a:extLst xmlns:a="http://schemas.openxmlformats.org/drawingml/2006/main">
               <a:ext uri="{FF2B5EF4-FFF2-40B4-BE49-F238E27FC236}">
-                <a16:creationId xmlns:a16="http://schemas.microsoft.com/office/drawing/2014/main" id="{805322AF-5D46-480B-BE98-6F817C5FDC23}"/>
+                <a16:creationId xmlns:a16="http://schemas.microsoft.com/office/drawing/2014/main" id="{A986AFE9-229B-409B-9BCA-2F5297957B93}"/>
               </a:ext>
             </a:extLst>
           </p:cNvPr>
@@ -15029,7 +15029,7 @@
           <p:cNvPr id="26" name="">
             <a:extLst xmlns:a="http://schemas.openxmlformats.org/drawingml/2006/main">
               <a:ext uri="{FF2B5EF4-FFF2-40B4-BE49-F238E27FC236}">
-                <a16:creationId xmlns:a16="http://schemas.microsoft.com/office/drawing/2014/main" id="{37C4FD96-9B9B-4870-80F1-D836407D8131}"/>
+                <a16:creationId xmlns:a16="http://schemas.microsoft.com/office/drawing/2014/main" id="{5D1B769C-FBBF-4ABD-B6F2-DDC4E5E0715B}"/>
               </a:ext>
             </a:extLst>
           </p:cNvPr>
@@ -15062,7 +15062,7 @@
           <p:cNvPr id="27" name="">
             <a:extLst xmlns:a="http://schemas.openxmlformats.org/drawingml/2006/main">
               <a:ext uri="{FF2B5EF4-FFF2-40B4-BE49-F238E27FC236}">
-                <a16:creationId xmlns:a16="http://schemas.microsoft.com/office/drawing/2014/main" id="{4877EE49-98FA-44E8-8E23-22D63DCA0840}"/>
+                <a16:creationId xmlns:a16="http://schemas.microsoft.com/office/drawing/2014/main" id="{CEEE5701-EEDA-4E48-96A3-2D951231BD27}"/>
               </a:ext>
             </a:extLst>
           </p:cNvPr>
@@ -15120,7 +15120,7 @@
           <p:cNvPr id="28" name="">
             <a:extLst xmlns:a="http://schemas.openxmlformats.org/drawingml/2006/main">
               <a:ext uri="{FF2B5EF4-FFF2-40B4-BE49-F238E27FC236}">
-                <a16:creationId xmlns:a16="http://schemas.microsoft.com/office/drawing/2014/main" id="{CAA61C34-E15A-4444-A1E0-1E1DFE03245B}"/>
+                <a16:creationId xmlns:a16="http://schemas.microsoft.com/office/drawing/2014/main" id="{753D82DC-C08D-45CA-A523-F73801A00643}"/>
               </a:ext>
             </a:extLst>
           </p:cNvPr>
@@ -15153,7 +15153,7 @@
           <p:cNvPr id="29" name="">
             <a:extLst xmlns:a="http://schemas.openxmlformats.org/drawingml/2006/main">
               <a:ext uri="{FF2B5EF4-FFF2-40B4-BE49-F238E27FC236}">
-                <a16:creationId xmlns:a16="http://schemas.microsoft.com/office/drawing/2014/main" id="{9020F6C4-17F9-45AA-B895-20B0428DC902}"/>
+                <a16:creationId xmlns:a16="http://schemas.microsoft.com/office/drawing/2014/main" id="{78A12E19-9C1A-4841-8901-493FCD57EEF6}"/>
               </a:ext>
             </a:extLst>
           </p:cNvPr>
@@ -15211,7 +15211,7 @@
           <p:cNvPr id="30" name="">
             <a:extLst xmlns:a="http://schemas.openxmlformats.org/drawingml/2006/main">
               <a:ext uri="{FF2B5EF4-FFF2-40B4-BE49-F238E27FC236}">
-                <a16:creationId xmlns:a16="http://schemas.microsoft.com/office/drawing/2014/main" id="{8F09272D-2C3F-4CD0-9C11-74ABBD41F9F9}"/>
+                <a16:creationId xmlns:a16="http://schemas.microsoft.com/office/drawing/2014/main" id="{97AE1735-205A-4212-ADE3-A2367D3DA2D0}"/>
               </a:ext>
             </a:extLst>
           </p:cNvPr>
@@ -15244,7 +15244,7 @@
           <p:cNvPr id="31" name="">
             <a:extLst xmlns:a="http://schemas.openxmlformats.org/drawingml/2006/main">
               <a:ext uri="{FF2B5EF4-FFF2-40B4-BE49-F238E27FC236}">
-                <a16:creationId xmlns:a16="http://schemas.microsoft.com/office/drawing/2014/main" id="{50916AD9-A419-488D-8878-0DE50F8FBA08}"/>
+                <a16:creationId xmlns:a16="http://schemas.microsoft.com/office/drawing/2014/main" id="{A751FEA5-6D96-4558-B4CE-2607F7DC8D64}"/>
               </a:ext>
             </a:extLst>
           </p:cNvPr>
@@ -15302,7 +15302,7 @@
           <p:cNvPr id="32" name="">
             <a:extLst xmlns:a="http://schemas.openxmlformats.org/drawingml/2006/main">
               <a:ext uri="{FF2B5EF4-FFF2-40B4-BE49-F238E27FC236}">
-                <a16:creationId xmlns:a16="http://schemas.microsoft.com/office/drawing/2014/main" id="{1A7F9B72-FE7C-4884-BCFA-44D18831AB7F}"/>
+                <a16:creationId xmlns:a16="http://schemas.microsoft.com/office/drawing/2014/main" id="{AC0443A4-1C38-4697-8639-3706E463D843}"/>
               </a:ext>
             </a:extLst>
           </p:cNvPr>
@@ -15335,7 +15335,7 @@
           <p:cNvPr id="33" name="">
             <a:extLst xmlns:a="http://schemas.openxmlformats.org/drawingml/2006/main">
               <a:ext uri="{FF2B5EF4-FFF2-40B4-BE49-F238E27FC236}">
-                <a16:creationId xmlns:a16="http://schemas.microsoft.com/office/drawing/2014/main" id="{6BD9E4B6-D219-481C-A8F1-F6ADC3007B21}"/>
+                <a16:creationId xmlns:a16="http://schemas.microsoft.com/office/drawing/2014/main" id="{AF6490CB-404C-4BE3-B94A-3BDEBBB8D411}"/>
               </a:ext>
             </a:extLst>
           </p:cNvPr>
@@ -15393,7 +15393,7 @@
           <p:cNvPr id="34" name="">
             <a:extLst xmlns:a="http://schemas.openxmlformats.org/drawingml/2006/main">
               <a:ext uri="{FF2B5EF4-FFF2-40B4-BE49-F238E27FC236}">
-                <a16:creationId xmlns:a16="http://schemas.microsoft.com/office/drawing/2014/main" id="{DC1B79B2-623C-41CF-ABC5-363370B694E9}"/>
+                <a16:creationId xmlns:a16="http://schemas.microsoft.com/office/drawing/2014/main" id="{E9BB9B3C-47A7-420E-9624-E14FB2B90558}"/>
               </a:ext>
             </a:extLst>
           </p:cNvPr>
@@ -15426,7 +15426,7 @@
           <p:cNvPr id="35" name="">
             <a:extLst xmlns:a="http://schemas.openxmlformats.org/drawingml/2006/main">
               <a:ext uri="{FF2B5EF4-FFF2-40B4-BE49-F238E27FC236}">
-                <a16:creationId xmlns:a16="http://schemas.microsoft.com/office/drawing/2014/main" id="{5FC5B97C-251C-494E-8DC9-9F058B6273B1}"/>
+                <a16:creationId xmlns:a16="http://schemas.microsoft.com/office/drawing/2014/main" id="{3F07F960-C297-46C9-9460-54800065317A}"/>
               </a:ext>
             </a:extLst>
           </p:cNvPr>
@@ -15484,7 +15484,7 @@
           <p:cNvPr id="36" name="">
             <a:extLst xmlns:a="http://schemas.openxmlformats.org/drawingml/2006/main">
               <a:ext uri="{FF2B5EF4-FFF2-40B4-BE49-F238E27FC236}">
-                <a16:creationId xmlns:a16="http://schemas.microsoft.com/office/drawing/2014/main" id="{F0CE4E72-5181-4DF4-9410-5B5C9DC0AD0F}"/>
+                <a16:creationId xmlns:a16="http://schemas.microsoft.com/office/drawing/2014/main" id="{26255ED2-D928-44C2-9B87-05326889EBEE}"/>
               </a:ext>
             </a:extLst>
           </p:cNvPr>
@@ -15517,7 +15517,7 @@
           <p:cNvPr id="37" name="">
             <a:extLst xmlns:a="http://schemas.openxmlformats.org/drawingml/2006/main">
               <a:ext uri="{FF2B5EF4-FFF2-40B4-BE49-F238E27FC236}">
-                <a16:creationId xmlns:a16="http://schemas.microsoft.com/office/drawing/2014/main" id="{571A5A03-42E4-4685-A97A-C6EE3105B214}"/>
+                <a16:creationId xmlns:a16="http://schemas.microsoft.com/office/drawing/2014/main" id="{AAF95E02-AB68-428B-A7AD-DEDC13C25C97}"/>
               </a:ext>
             </a:extLst>
           </p:cNvPr>
@@ -15575,7 +15575,7 @@
           <p:cNvPr id="38" name="">
             <a:extLst xmlns:a="http://schemas.openxmlformats.org/drawingml/2006/main">
               <a:ext uri="{FF2B5EF4-FFF2-40B4-BE49-F238E27FC236}">
-                <a16:creationId xmlns:a16="http://schemas.microsoft.com/office/drawing/2014/main" id="{EA28F583-5048-4802-8CB6-A8B35DA1BC4F}"/>
+                <a16:creationId xmlns:a16="http://schemas.microsoft.com/office/drawing/2014/main" id="{38DB8BCA-3864-4176-8EDF-FB8074B8CBBA}"/>
               </a:ext>
             </a:extLst>
           </p:cNvPr>
@@ -15608,7 +15608,7 @@
           <p:cNvPr id="39" name="">
             <a:extLst xmlns:a="http://schemas.openxmlformats.org/drawingml/2006/main">
               <a:ext uri="{FF2B5EF4-FFF2-40B4-BE49-F238E27FC236}">
-                <a16:creationId xmlns:a16="http://schemas.microsoft.com/office/drawing/2014/main" id="{62A0C865-C12A-48B7-8B81-CE87D1623C9C}"/>
+                <a16:creationId xmlns:a16="http://schemas.microsoft.com/office/drawing/2014/main" id="{09FFE613-4382-4E1A-8724-7D9D43489A96}"/>
               </a:ext>
             </a:extLst>
           </p:cNvPr>
@@ -15666,7 +15666,7 @@
           <p:cNvPr id="40" name="">
             <a:extLst xmlns:a="http://schemas.openxmlformats.org/drawingml/2006/main">
               <a:ext uri="{FF2B5EF4-FFF2-40B4-BE49-F238E27FC236}">
-                <a16:creationId xmlns:a16="http://schemas.microsoft.com/office/drawing/2014/main" id="{203FEC16-29A8-4DAB-951E-D288B102D072}"/>
+                <a16:creationId xmlns:a16="http://schemas.microsoft.com/office/drawing/2014/main" id="{0D8B21B7-757F-4100-B4C6-155B965A87FC}"/>
               </a:ext>
             </a:extLst>
           </p:cNvPr>
@@ -15699,7 +15699,7 @@
           <p:cNvPr id="41" name="">
             <a:extLst xmlns:a="http://schemas.openxmlformats.org/drawingml/2006/main">
               <a:ext uri="{FF2B5EF4-FFF2-40B4-BE49-F238E27FC236}">
-                <a16:creationId xmlns:a16="http://schemas.microsoft.com/office/drawing/2014/main" id="{E52FFE78-B16B-418F-99C3-6B289C34F463}"/>
+                <a16:creationId xmlns:a16="http://schemas.microsoft.com/office/drawing/2014/main" id="{A0C382A6-71E5-4B13-8544-0505E54E7F18}"/>
               </a:ext>
             </a:extLst>
           </p:cNvPr>
@@ -15757,7 +15757,7 @@
           <p:cNvPr id="42" name="">
             <a:extLst xmlns:a="http://schemas.openxmlformats.org/drawingml/2006/main">
               <a:ext uri="{FF2B5EF4-FFF2-40B4-BE49-F238E27FC236}">
-                <a16:creationId xmlns:a16="http://schemas.microsoft.com/office/drawing/2014/main" id="{041599AE-4D5F-418D-B0C4-EEEF69C3F39D}"/>
+                <a16:creationId xmlns:a16="http://schemas.microsoft.com/office/drawing/2014/main" id="{6C653F52-C506-411B-83EF-7A4839613017}"/>
               </a:ext>
             </a:extLst>
           </p:cNvPr>
@@ -15790,7 +15790,7 @@
           <p:cNvPr id="43" name="">
             <a:extLst xmlns:a="http://schemas.openxmlformats.org/drawingml/2006/main">
               <a:ext uri="{FF2B5EF4-FFF2-40B4-BE49-F238E27FC236}">
-                <a16:creationId xmlns:a16="http://schemas.microsoft.com/office/drawing/2014/main" id="{D6235ABB-2AED-4AFE-90D8-D409DB114EA8}"/>
+                <a16:creationId xmlns:a16="http://schemas.microsoft.com/office/drawing/2014/main" id="{16066CF4-D21C-434F-BE07-8D1CDE4B697F}"/>
               </a:ext>
             </a:extLst>
           </p:cNvPr>
@@ -15848,7 +15848,7 @@
           <p:cNvPr id="44" name="">
             <a:extLst xmlns:a="http://schemas.openxmlformats.org/drawingml/2006/main">
               <a:ext uri="{FF2B5EF4-FFF2-40B4-BE49-F238E27FC236}">
-                <a16:creationId xmlns:a16="http://schemas.microsoft.com/office/drawing/2014/main" id="{69B0C3CE-22DD-47B2-BE20-138A7D1794C1}"/>
+                <a16:creationId xmlns:a16="http://schemas.microsoft.com/office/drawing/2014/main" id="{32F995B1-740C-42EE-8428-F170799B3ED2}"/>
               </a:ext>
             </a:extLst>
           </p:cNvPr>
@@ -15881,7 +15881,7 @@
           <p:cNvPr id="45" name="">
             <a:extLst xmlns:a="http://schemas.openxmlformats.org/drawingml/2006/main">
               <a:ext uri="{FF2B5EF4-FFF2-40B4-BE49-F238E27FC236}">
-                <a16:creationId xmlns:a16="http://schemas.microsoft.com/office/drawing/2014/main" id="{3264B8B2-41C1-4AB9-A0C6-3F3E688513D1}"/>
+                <a16:creationId xmlns:a16="http://schemas.microsoft.com/office/drawing/2014/main" id="{5C3C86F5-803E-4618-87CA-32938A00EA6A}"/>
               </a:ext>
             </a:extLst>
           </p:cNvPr>
@@ -15939,7 +15939,7 @@
           <p:cNvPr id="46" name="">
             <a:extLst xmlns:a="http://schemas.openxmlformats.org/drawingml/2006/main">
               <a:ext uri="{FF2B5EF4-FFF2-40B4-BE49-F238E27FC236}">
-                <a16:creationId xmlns:a16="http://schemas.microsoft.com/office/drawing/2014/main" id="{17BA83EF-6278-40C7-900D-9718BCB0747A}"/>
+                <a16:creationId xmlns:a16="http://schemas.microsoft.com/office/drawing/2014/main" id="{679A84B0-FAA1-483B-8D4C-C18211317F80}"/>
               </a:ext>
             </a:extLst>
           </p:cNvPr>
@@ -15972,7 +15972,7 @@
           <p:cNvPr id="47" name="">
             <a:extLst xmlns:a="http://schemas.openxmlformats.org/drawingml/2006/main">
               <a:ext uri="{FF2B5EF4-FFF2-40B4-BE49-F238E27FC236}">
-                <a16:creationId xmlns:a16="http://schemas.microsoft.com/office/drawing/2014/main" id="{24FC356C-3666-497F-BA0E-612B43DE6ECA}"/>
+                <a16:creationId xmlns:a16="http://schemas.microsoft.com/office/drawing/2014/main" id="{6AA449C2-B0B3-439B-ABC7-E7DA4C21B0E6}"/>
               </a:ext>
             </a:extLst>
           </p:cNvPr>
@@ -16030,7 +16030,7 @@
           <p:cNvPr id="48" name="">
             <a:extLst xmlns:a="http://schemas.openxmlformats.org/drawingml/2006/main">
               <a:ext uri="{FF2B5EF4-FFF2-40B4-BE49-F238E27FC236}">
-                <a16:creationId xmlns:a16="http://schemas.microsoft.com/office/drawing/2014/main" id="{30DB98A9-8A05-4B81-9ED8-41F6C83BAD03}"/>
+                <a16:creationId xmlns:a16="http://schemas.microsoft.com/office/drawing/2014/main" id="{F1589DBF-CB40-4A4E-A156-BD08999B7B76}"/>
               </a:ext>
             </a:extLst>
           </p:cNvPr>
@@ -16063,7 +16063,7 @@
           <p:cNvPr id="49" name="">
             <a:extLst xmlns:a="http://schemas.openxmlformats.org/drawingml/2006/main">
               <a:ext uri="{FF2B5EF4-FFF2-40B4-BE49-F238E27FC236}">
-                <a16:creationId xmlns:a16="http://schemas.microsoft.com/office/drawing/2014/main" id="{9DF02CDF-0F53-4CF9-90B2-C2840D6D4B06}"/>
+                <a16:creationId xmlns:a16="http://schemas.microsoft.com/office/drawing/2014/main" id="{CBA530C7-1E66-4414-9C20-7A0285DA89F5}"/>
               </a:ext>
             </a:extLst>
           </p:cNvPr>
@@ -16121,7 +16121,7 @@
           <p:cNvPr id="50" name="">
             <a:extLst xmlns:a="http://schemas.openxmlformats.org/drawingml/2006/main">
               <a:ext uri="{FF2B5EF4-FFF2-40B4-BE49-F238E27FC236}">
-                <a16:creationId xmlns:a16="http://schemas.microsoft.com/office/drawing/2014/main" id="{F83D6C95-3A4D-4635-A205-40189344DF3F}"/>
+                <a16:creationId xmlns:a16="http://schemas.microsoft.com/office/drawing/2014/main" id="{C4E9AF81-246A-41BC-B86C-74BB7DA6E231}"/>
               </a:ext>
             </a:extLst>
           </p:cNvPr>
@@ -16154,7 +16154,7 @@
           <p:cNvPr id="51" name="">
             <a:extLst xmlns:a="http://schemas.openxmlformats.org/drawingml/2006/main">
               <a:ext uri="{FF2B5EF4-FFF2-40B4-BE49-F238E27FC236}">
-                <a16:creationId xmlns:a16="http://schemas.microsoft.com/office/drawing/2014/main" id="{DC5B5BAC-D306-4ABB-9262-3444FC892232}"/>
+                <a16:creationId xmlns:a16="http://schemas.microsoft.com/office/drawing/2014/main" id="{3EF8C5AB-C541-4E5D-86B6-3EAB9920DCCC}"/>
               </a:ext>
             </a:extLst>
           </p:cNvPr>
@@ -16212,7 +16212,7 @@
           <p:cNvPr id="52" name="">
             <a:extLst xmlns:a="http://schemas.openxmlformats.org/drawingml/2006/main">
               <a:ext uri="{FF2B5EF4-FFF2-40B4-BE49-F238E27FC236}">
-                <a16:creationId xmlns:a16="http://schemas.microsoft.com/office/drawing/2014/main" id="{68D98A28-E3C0-4708-B287-44B35B8D0DD2}"/>
+                <a16:creationId xmlns:a16="http://schemas.microsoft.com/office/drawing/2014/main" id="{BC1B73C5-A311-45C3-80ED-34F72E940E59}"/>
               </a:ext>
             </a:extLst>
           </p:cNvPr>
@@ -16245,7 +16245,7 @@
           <p:cNvPr id="53" name="">
             <a:extLst xmlns:a="http://schemas.openxmlformats.org/drawingml/2006/main">
               <a:ext uri="{FF2B5EF4-FFF2-40B4-BE49-F238E27FC236}">
-                <a16:creationId xmlns:a16="http://schemas.microsoft.com/office/drawing/2014/main" id="{C0B21A57-11CF-4261-841C-507E8A31FE98}"/>
+                <a16:creationId xmlns:a16="http://schemas.microsoft.com/office/drawing/2014/main" id="{E7ACBF38-DC23-44B4-9768-27BEE97DC4E0}"/>
               </a:ext>
             </a:extLst>
           </p:cNvPr>
@@ -16303,7 +16303,7 @@
           <p:cNvPr id="54" name="">
             <a:extLst xmlns:a="http://schemas.openxmlformats.org/drawingml/2006/main">
               <a:ext uri="{FF2B5EF4-FFF2-40B4-BE49-F238E27FC236}">
-                <a16:creationId xmlns:a16="http://schemas.microsoft.com/office/drawing/2014/main" id="{1EFF0C82-ADC2-4133-AE3D-B48C05094331}"/>
+                <a16:creationId xmlns:a16="http://schemas.microsoft.com/office/drawing/2014/main" id="{7E473BCF-A510-49FC-9CBB-362204486B72}"/>
               </a:ext>
             </a:extLst>
           </p:cNvPr>
@@ -16336,7 +16336,7 @@
           <p:cNvPr id="55" name="">
             <a:extLst xmlns:a="http://schemas.openxmlformats.org/drawingml/2006/main">
               <a:ext uri="{FF2B5EF4-FFF2-40B4-BE49-F238E27FC236}">
-                <a16:creationId xmlns:a16="http://schemas.microsoft.com/office/drawing/2014/main" id="{06A14043-D032-4D76-ABB9-E641E7F92202}"/>
+                <a16:creationId xmlns:a16="http://schemas.microsoft.com/office/drawing/2014/main" id="{E856EFCB-CA0A-46B3-AA06-23F281F1C9EA}"/>
               </a:ext>
             </a:extLst>
           </p:cNvPr>
@@ -16394,7 +16394,7 @@
           <p:cNvPr id="56" name="">
             <a:extLst xmlns:a="http://schemas.openxmlformats.org/drawingml/2006/main">
               <a:ext uri="{FF2B5EF4-FFF2-40B4-BE49-F238E27FC236}">
-                <a16:creationId xmlns:a16="http://schemas.microsoft.com/office/drawing/2014/main" id="{E6A8836E-BFBE-41FB-B41F-FDF1A12C362C}"/>
+                <a16:creationId xmlns:a16="http://schemas.microsoft.com/office/drawing/2014/main" id="{0D4C7787-9FE8-4933-BC44-2253AF7E1DCC}"/>
               </a:ext>
             </a:extLst>
           </p:cNvPr>
@@ -16427,7 +16427,7 @@
           <p:cNvPr id="57" name="">
             <a:extLst xmlns:a="http://schemas.openxmlformats.org/drawingml/2006/main">
               <a:ext uri="{FF2B5EF4-FFF2-40B4-BE49-F238E27FC236}">
-                <a16:creationId xmlns:a16="http://schemas.microsoft.com/office/drawing/2014/main" id="{DAB4DF33-63A5-4EF0-B37D-6552CC943BE1}"/>
+                <a16:creationId xmlns:a16="http://schemas.microsoft.com/office/drawing/2014/main" id="{2ABA0F55-B7A8-49D8-99C9-AABE9BC40BA0}"/>
               </a:ext>
             </a:extLst>
           </p:cNvPr>
@@ -16485,7 +16485,7 @@
                 <a:latin typeface="Microsoft YaHei"/>
                 <a:ea typeface="Microsoft YaHei"/>
                 <a:cs typeface="Microsoft YaHei"/>
-                <a:hlinkClick xmlns:r="http://schemas.openxmlformats.org/officeDocument/2006/relationships" r:id="R5297161d8f864e56"/>
+                <a:hlinkClick xmlns:r="http://schemas.openxmlformats.org/officeDocument/2006/relationships" r:id="R231f288a7ffb4ae5"/>
               </a:rPr>
               <a:t>Codex节省用量建议</a:t>
             </a:r>
@@ -16497,7 +16497,7 @@
                 <a:latin typeface="Microsoft YaHei"/>
                 <a:ea typeface="Microsoft YaHei"/>
                 <a:cs typeface="Microsoft YaHei"/>
-                <a:hlinkClick xmlns:r="http://schemas.openxmlformats.org/officeDocument/2006/relationships" r:id="Rdccb46b9a5bd420d"/>
+                <a:hlinkClick xmlns:r="http://schemas.openxmlformats.org/officeDocument/2006/relationships" r:id="Rae5b0bab33c1413f"/>
               </a:rPr>
               <a:t> · OpenAI Prompt Caching</a:t>
             </a:r>
@@ -16509,7 +16509,7 @@
                 <a:latin typeface="Microsoft YaHei"/>
                 <a:ea typeface="Microsoft YaHei"/>
                 <a:cs typeface="Microsoft YaHei"/>
-                <a:hlinkClick xmlns:r="http://schemas.openxmlformats.org/officeDocument/2006/relationships" r:id="R799882312e26429e"/>
+                <a:hlinkClick xmlns:r="http://schemas.openxmlformats.org/officeDocument/2006/relationships" r:id="Radd2b73bba4d488a"/>
               </a:rPr>
               <a:t> · Qoder Context Compression</a:t>
             </a:r>
@@ -16521,7 +16521,7 @@
                 <a:latin typeface="Microsoft YaHei"/>
                 <a:ea typeface="Microsoft YaHei"/>
                 <a:cs typeface="Microsoft YaHei"/>
-                <a:hlinkClick xmlns:r="http://schemas.openxmlformats.org/officeDocument/2006/relationships" r:id="R0053cb1bec7e4d46"/>
+                <a:hlinkClick xmlns:r="http://schemas.openxmlformats.org/officeDocument/2006/relationships" r:id="R0ca2ef9360e543ab"/>
               </a:rPr>
               <a:t> · Anthropic Prompt Caching</a:t>
             </a:r>
@@ -16533,7 +16533,7 @@
           <p:cNvPr id="58" name="">
             <a:extLst xmlns:a="http://schemas.openxmlformats.org/drawingml/2006/main">
               <a:ext uri="{FF2B5EF4-FFF2-40B4-BE49-F238E27FC236}">
-                <a16:creationId xmlns:a16="http://schemas.microsoft.com/office/drawing/2014/main" id="{EEFC7EB2-17DA-49DA-8408-6E8A466B22A1}"/>
+                <a16:creationId xmlns:a16="http://schemas.microsoft.com/office/drawing/2014/main" id="{85E852CD-7365-491D-990D-C286743AA775}"/>
               </a:ext>
             </a:extLst>
           </p:cNvPr>
@@ -16589,7 +16589,7 @@
     </p:spTree>
     <p:extLst>
       <p:ext uri="{BB962C8B-B14F-4D97-AF65-F5344CB8AC3E}">
-        <p14:creationId xmlns:p14="http://schemas.microsoft.com/office/powerpoint/2010/main" val="1306103985"/>
+        <p14:creationId xmlns:p14="http://schemas.microsoft.com/office/powerpoint/2010/main" val="1387027296"/>
       </p:ext>
     </p:extLst>
   </p:cSld>
@@ -16620,7 +16620,7 @@
           <p:cNvPr id="62" name="">
             <a:extLst xmlns:a="http://schemas.openxmlformats.org/drawingml/2006/main">
               <a:ext uri="{FF2B5EF4-FFF2-40B4-BE49-F238E27FC236}">
-                <a16:creationId xmlns:a16="http://schemas.microsoft.com/office/drawing/2014/main" id="{D58AE035-F0F9-49E1-963F-80D4698DC082}"/>
+                <a16:creationId xmlns:a16="http://schemas.microsoft.com/office/drawing/2014/main" id="{96190DB5-FDE7-48CC-B986-B79F855346F4}"/>
               </a:ext>
             </a:extLst>
           </p:cNvPr>
@@ -16653,7 +16653,7 @@
           <p:cNvPr id="2" name="">
             <a:extLst xmlns:a="http://schemas.openxmlformats.org/drawingml/2006/main">
               <a:ext uri="{FF2B5EF4-FFF2-40B4-BE49-F238E27FC236}">
-                <a16:creationId xmlns:a16="http://schemas.microsoft.com/office/drawing/2014/main" id="{D2A64112-BBF5-49F5-B38A-B976D977ACF1}"/>
+                <a16:creationId xmlns:a16="http://schemas.microsoft.com/office/drawing/2014/main" id="{803045A1-C356-446E-8861-E041069920B3}"/>
               </a:ext>
             </a:extLst>
           </p:cNvPr>
@@ -16711,7 +16711,7 @@
           <p:cNvPr id="3" name="">
             <a:extLst xmlns:a="http://schemas.openxmlformats.org/drawingml/2006/main">
               <a:ext uri="{FF2B5EF4-FFF2-40B4-BE49-F238E27FC236}">
-                <a16:creationId xmlns:a16="http://schemas.microsoft.com/office/drawing/2014/main" id="{D985ABA6-1306-4223-9D0E-BF31EB048059}"/>
+                <a16:creationId xmlns:a16="http://schemas.microsoft.com/office/drawing/2014/main" id="{65A908B7-651A-41E1-A737-175CFF409FE7}"/>
               </a:ext>
             </a:extLst>
           </p:cNvPr>
@@ -16743,7 +16743,7 @@
             <a:pPr algn="l">
               <a:defRPr sz="2325" b="1">
                 <a:solidFill>
-                  <a:srgbClr val="1D1D1A"/>
+                  <a:srgbClr val="8A0F17"/>
                 </a:solidFill>
                 <a:latin typeface="Microsoft YaHei"/>
                 <a:ea typeface="Microsoft YaHei"/>
@@ -16753,7 +16753,7 @@
             <a:r>
               <a:rPr sz="2325" b="1">
                 <a:solidFill>
-                  <a:srgbClr val="1D1D1A"/>
+                  <a:srgbClr val="8A0F17"/>
                 </a:solidFill>
                 <a:latin typeface="Microsoft YaHei"/>
                 <a:ea typeface="Microsoft YaHei"/>
@@ -16769,7 +16769,7 @@
           <p:cNvPr id="4" name="">
             <a:extLst xmlns:a="http://schemas.openxmlformats.org/drawingml/2006/main">
               <a:ext uri="{FF2B5EF4-FFF2-40B4-BE49-F238E27FC236}">
-                <a16:creationId xmlns:a16="http://schemas.microsoft.com/office/drawing/2014/main" id="{44FE2EFB-5D84-4FA0-A74A-7C0C9218E804}"/>
+                <a16:creationId xmlns:a16="http://schemas.microsoft.com/office/drawing/2014/main" id="{F2A78E97-E079-4A3C-B6C6-01BFD3324683}"/>
               </a:ext>
             </a:extLst>
           </p:cNvPr>
@@ -16806,7 +16806,7 @@
           <p:nvPr/>
         </p:nvPicPr>
         <p:blipFill>
-          <a:blip xmlns:r="http://schemas.openxmlformats.org/officeDocument/2006/relationships" xmlns:a="http://schemas.openxmlformats.org/drawingml/2006/main" r:embed="R3eae075e5ffc4255"/>
+          <a:blip xmlns:r="http://schemas.openxmlformats.org/officeDocument/2006/relationships" xmlns:a="http://schemas.openxmlformats.org/drawingml/2006/main" r:embed="R8f29b10334e947cd"/>
           <a:stretch xmlns:a="http://schemas.openxmlformats.org/drawingml/2006/main"/>
         </p:blipFill>
         <p:spPr>
@@ -16824,7 +16824,7 @@
           <p:cNvPr id="6" name="">
             <a:extLst xmlns:a="http://schemas.openxmlformats.org/drawingml/2006/main">
               <a:ext uri="{FF2B5EF4-FFF2-40B4-BE49-F238E27FC236}">
-                <a16:creationId xmlns:a16="http://schemas.microsoft.com/office/drawing/2014/main" id="{31FBB06E-0DD9-4EE2-B54A-847C9B5B697E}"/>
+                <a16:creationId xmlns:a16="http://schemas.microsoft.com/office/drawing/2014/main" id="{A844076B-4633-4BFC-A901-2DD70A69417A}"/>
               </a:ext>
             </a:extLst>
           </p:cNvPr>
@@ -16857,7 +16857,7 @@
           <p:cNvPr id="7" name="">
             <a:extLst xmlns:a="http://schemas.openxmlformats.org/drawingml/2006/main">
               <a:ext uri="{FF2B5EF4-FFF2-40B4-BE49-F238E27FC236}">
-                <a16:creationId xmlns:a16="http://schemas.microsoft.com/office/drawing/2014/main" id="{73163A59-A090-46D0-BE5F-AF721CA3B81D}"/>
+                <a16:creationId xmlns:a16="http://schemas.microsoft.com/office/drawing/2014/main" id="{3C692797-FC15-44F9-A2AF-919C76FD347C}"/>
               </a:ext>
             </a:extLst>
           </p:cNvPr>
@@ -16915,7 +16915,7 @@
           <p:cNvPr id="8" name="">
             <a:extLst xmlns:a="http://schemas.openxmlformats.org/drawingml/2006/main">
               <a:ext uri="{FF2B5EF4-FFF2-40B4-BE49-F238E27FC236}">
-                <a16:creationId xmlns:a16="http://schemas.microsoft.com/office/drawing/2014/main" id="{A5FDDCE2-FB61-483B-A41A-E63ECE2FF6C4}"/>
+                <a16:creationId xmlns:a16="http://schemas.microsoft.com/office/drawing/2014/main" id="{9BEC9A86-552F-4372-9FE4-086A4E82A4B0}"/>
               </a:ext>
             </a:extLst>
           </p:cNvPr>
@@ -16973,7 +16973,7 @@
           <p:cNvPr id="9" name="">
             <a:extLst xmlns:a="http://schemas.openxmlformats.org/drawingml/2006/main">
               <a:ext uri="{FF2B5EF4-FFF2-40B4-BE49-F238E27FC236}">
-                <a16:creationId xmlns:a16="http://schemas.microsoft.com/office/drawing/2014/main" id="{A29FEC42-CD4C-433A-B57C-F7A5797F8EF9}"/>
+                <a16:creationId xmlns:a16="http://schemas.microsoft.com/office/drawing/2014/main" id="{3EB3B9D9-6120-40FD-9D5F-F7DD8828992C}"/>
               </a:ext>
             </a:extLst>
           </p:cNvPr>
@@ -17031,7 +17031,7 @@
           <p:cNvPr id="10" name="">
             <a:extLst xmlns:a="http://schemas.openxmlformats.org/drawingml/2006/main">
               <a:ext uri="{FF2B5EF4-FFF2-40B4-BE49-F238E27FC236}">
-                <a16:creationId xmlns:a16="http://schemas.microsoft.com/office/drawing/2014/main" id="{6478C779-0722-4070-8A2C-D2C36DA9B176}"/>
+                <a16:creationId xmlns:a16="http://schemas.microsoft.com/office/drawing/2014/main" id="{7BE09353-B8C7-4364-9427-BEF9070FDBAF}"/>
               </a:ext>
             </a:extLst>
           </p:cNvPr>
@@ -17064,7 +17064,7 @@
           <p:cNvPr id="11" name="">
             <a:extLst xmlns:a="http://schemas.openxmlformats.org/drawingml/2006/main">
               <a:ext uri="{FF2B5EF4-FFF2-40B4-BE49-F238E27FC236}">
-                <a16:creationId xmlns:a16="http://schemas.microsoft.com/office/drawing/2014/main" id="{337EBEB6-B419-42D1-A4A8-3628D8499B51}"/>
+                <a16:creationId xmlns:a16="http://schemas.microsoft.com/office/drawing/2014/main" id="{47C8517F-7165-4083-B708-81387077E9B1}"/>
               </a:ext>
             </a:extLst>
           </p:cNvPr>
@@ -17122,7 +17122,7 @@
           <p:cNvPr id="12" name="">
             <a:extLst xmlns:a="http://schemas.openxmlformats.org/drawingml/2006/main">
               <a:ext uri="{FF2B5EF4-FFF2-40B4-BE49-F238E27FC236}">
-                <a16:creationId xmlns:a16="http://schemas.microsoft.com/office/drawing/2014/main" id="{4783B654-977C-4BAA-BEE4-F9A071F72DD4}"/>
+                <a16:creationId xmlns:a16="http://schemas.microsoft.com/office/drawing/2014/main" id="{EAA9C3AA-EA95-428A-87FC-D7E9ED00410A}"/>
               </a:ext>
             </a:extLst>
           </p:cNvPr>
@@ -17180,7 +17180,7 @@
           <p:cNvPr id="13" name="">
             <a:extLst xmlns:a="http://schemas.openxmlformats.org/drawingml/2006/main">
               <a:ext uri="{FF2B5EF4-FFF2-40B4-BE49-F238E27FC236}">
-                <a16:creationId xmlns:a16="http://schemas.microsoft.com/office/drawing/2014/main" id="{1C189E10-2BAA-4215-8EF0-BE7CAA108A5A}"/>
+                <a16:creationId xmlns:a16="http://schemas.microsoft.com/office/drawing/2014/main" id="{F9594D9C-325F-4D5F-A36E-DB529AE1DFFD}"/>
               </a:ext>
             </a:extLst>
           </p:cNvPr>
@@ -17238,7 +17238,7 @@
           <p:cNvPr id="14" name="">
             <a:extLst xmlns:a="http://schemas.openxmlformats.org/drawingml/2006/main">
               <a:ext uri="{FF2B5EF4-FFF2-40B4-BE49-F238E27FC236}">
-                <a16:creationId xmlns:a16="http://schemas.microsoft.com/office/drawing/2014/main" id="{53582A3D-2DFD-472B-AE5E-ADEF1A1667B8}"/>
+                <a16:creationId xmlns:a16="http://schemas.microsoft.com/office/drawing/2014/main" id="{FEEA0AD3-9647-4127-8673-B709BECE0D6A}"/>
               </a:ext>
             </a:extLst>
           </p:cNvPr>
@@ -17271,7 +17271,7 @@
           <p:cNvPr id="15" name="">
             <a:extLst xmlns:a="http://schemas.openxmlformats.org/drawingml/2006/main">
               <a:ext uri="{FF2B5EF4-FFF2-40B4-BE49-F238E27FC236}">
-                <a16:creationId xmlns:a16="http://schemas.microsoft.com/office/drawing/2014/main" id="{F18A2B03-C7A1-4116-948E-F98E2E802F60}"/>
+                <a16:creationId xmlns:a16="http://schemas.microsoft.com/office/drawing/2014/main" id="{E550D096-EAEC-4CB9-B84B-BC2639BB0946}"/>
               </a:ext>
             </a:extLst>
           </p:cNvPr>
@@ -17329,7 +17329,7 @@
           <p:cNvPr id="16" name="">
             <a:extLst xmlns:a="http://schemas.openxmlformats.org/drawingml/2006/main">
               <a:ext uri="{FF2B5EF4-FFF2-40B4-BE49-F238E27FC236}">
-                <a16:creationId xmlns:a16="http://schemas.microsoft.com/office/drawing/2014/main" id="{F7F0AD2F-6DC0-49FB-A565-AEBE4B9B4D81}"/>
+                <a16:creationId xmlns:a16="http://schemas.microsoft.com/office/drawing/2014/main" id="{F7369FE6-3C49-45E9-8409-463432D187EC}"/>
               </a:ext>
             </a:extLst>
           </p:cNvPr>
@@ -17387,7 +17387,7 @@
           <p:cNvPr id="17" name="">
             <a:extLst xmlns:a="http://schemas.openxmlformats.org/drawingml/2006/main">
               <a:ext uri="{FF2B5EF4-FFF2-40B4-BE49-F238E27FC236}">
-                <a16:creationId xmlns:a16="http://schemas.microsoft.com/office/drawing/2014/main" id="{D367A4F5-8DC6-4150-9F15-6D5BCD282E72}"/>
+                <a16:creationId xmlns:a16="http://schemas.microsoft.com/office/drawing/2014/main" id="{CB54D146-EA0A-417F-B4D8-971728BB8D0A}"/>
               </a:ext>
             </a:extLst>
           </p:cNvPr>
@@ -17445,7 +17445,7 @@
           <p:cNvPr id="18" name="">
             <a:extLst xmlns:a="http://schemas.openxmlformats.org/drawingml/2006/main">
               <a:ext uri="{FF2B5EF4-FFF2-40B4-BE49-F238E27FC236}">
-                <a16:creationId xmlns:a16="http://schemas.microsoft.com/office/drawing/2014/main" id="{8E4F24A9-FBDC-4B5D-81FD-0ADA69A0B329}"/>
+                <a16:creationId xmlns:a16="http://schemas.microsoft.com/office/drawing/2014/main" id="{2609C5B0-27A5-4786-849B-9E71DB4927DD}"/>
               </a:ext>
             </a:extLst>
           </p:cNvPr>
@@ -17478,7 +17478,7 @@
           <p:cNvPr id="19" name="">
             <a:extLst xmlns:a="http://schemas.openxmlformats.org/drawingml/2006/main">
               <a:ext uri="{FF2B5EF4-FFF2-40B4-BE49-F238E27FC236}">
-                <a16:creationId xmlns:a16="http://schemas.microsoft.com/office/drawing/2014/main" id="{D21464A8-9D98-40A3-8A86-4B75C207BCA7}"/>
+                <a16:creationId xmlns:a16="http://schemas.microsoft.com/office/drawing/2014/main" id="{FD5B87D6-A6E4-484C-ACAF-C8AE18A69F7B}"/>
               </a:ext>
             </a:extLst>
           </p:cNvPr>
@@ -17536,7 +17536,7 @@
           <p:cNvPr id="20" name="">
             <a:extLst xmlns:a="http://schemas.openxmlformats.org/drawingml/2006/main">
               <a:ext uri="{FF2B5EF4-FFF2-40B4-BE49-F238E27FC236}">
-                <a16:creationId xmlns:a16="http://schemas.microsoft.com/office/drawing/2014/main" id="{E32C1F67-F13B-4A8C-B114-2D305A6DAD16}"/>
+                <a16:creationId xmlns:a16="http://schemas.microsoft.com/office/drawing/2014/main" id="{6A7C968C-57B8-4E46-8A2F-08C31A4442A9}"/>
               </a:ext>
             </a:extLst>
           </p:cNvPr>
@@ -17569,7 +17569,7 @@
           <p:cNvPr id="21" name="">
             <a:extLst xmlns:a="http://schemas.openxmlformats.org/drawingml/2006/main">
               <a:ext uri="{FF2B5EF4-FFF2-40B4-BE49-F238E27FC236}">
-                <a16:creationId xmlns:a16="http://schemas.microsoft.com/office/drawing/2014/main" id="{739991F7-34E0-4D64-9E00-304468FEA700}"/>
+                <a16:creationId xmlns:a16="http://schemas.microsoft.com/office/drawing/2014/main" id="{EBAB58B5-DAF1-4638-853D-D12A7B58A5A5}"/>
               </a:ext>
             </a:extLst>
           </p:cNvPr>
@@ -17627,7 +17627,7 @@
           <p:cNvPr id="22" name="">
             <a:extLst xmlns:a="http://schemas.openxmlformats.org/drawingml/2006/main">
               <a:ext uri="{FF2B5EF4-FFF2-40B4-BE49-F238E27FC236}">
-                <a16:creationId xmlns:a16="http://schemas.microsoft.com/office/drawing/2014/main" id="{C2AA0ECE-B433-4877-8BFB-1A4B98183815}"/>
+                <a16:creationId xmlns:a16="http://schemas.microsoft.com/office/drawing/2014/main" id="{31C475C9-1CFF-41AB-9586-3E09D30355A5}"/>
               </a:ext>
             </a:extLst>
           </p:cNvPr>
@@ -17660,7 +17660,7 @@
           <p:cNvPr id="23" name="">
             <a:extLst xmlns:a="http://schemas.openxmlformats.org/drawingml/2006/main">
               <a:ext uri="{FF2B5EF4-FFF2-40B4-BE49-F238E27FC236}">
-                <a16:creationId xmlns:a16="http://schemas.microsoft.com/office/drawing/2014/main" id="{D11580B9-438B-499D-A112-62EDD9B95CFC}"/>
+                <a16:creationId xmlns:a16="http://schemas.microsoft.com/office/drawing/2014/main" id="{6018AB3E-93A8-4624-A439-CDF5D7D79055}"/>
               </a:ext>
             </a:extLst>
           </p:cNvPr>
@@ -17693,7 +17693,7 @@
           <p:cNvPr id="24" name="">
             <a:extLst xmlns:a="http://schemas.openxmlformats.org/drawingml/2006/main">
               <a:ext uri="{FF2B5EF4-FFF2-40B4-BE49-F238E27FC236}">
-                <a16:creationId xmlns:a16="http://schemas.microsoft.com/office/drawing/2014/main" id="{D380F5DB-E949-424D-BF59-FD96AAF5C0B2}"/>
+                <a16:creationId xmlns:a16="http://schemas.microsoft.com/office/drawing/2014/main" id="{1EF7C851-B7F4-45D4-BAA6-64F6D4F01F16}"/>
               </a:ext>
             </a:extLst>
           </p:cNvPr>
@@ -17726,7 +17726,7 @@
           <p:cNvPr id="25" name="">
             <a:extLst xmlns:a="http://schemas.openxmlformats.org/drawingml/2006/main">
               <a:ext uri="{FF2B5EF4-FFF2-40B4-BE49-F238E27FC236}">
-                <a16:creationId xmlns:a16="http://schemas.microsoft.com/office/drawing/2014/main" id="{BE961470-9F2A-4158-A0EC-FBC98A896CF5}"/>
+                <a16:creationId xmlns:a16="http://schemas.microsoft.com/office/drawing/2014/main" id="{D9579C6D-C12B-4E01-B9C1-18FBA1FF497D}"/>
               </a:ext>
             </a:extLst>
           </p:cNvPr>
@@ -17784,7 +17784,7 @@
           <p:cNvPr id="26" name="">
             <a:extLst xmlns:a="http://schemas.openxmlformats.org/drawingml/2006/main">
               <a:ext uri="{FF2B5EF4-FFF2-40B4-BE49-F238E27FC236}">
-                <a16:creationId xmlns:a16="http://schemas.microsoft.com/office/drawing/2014/main" id="{14A7B95F-CFD7-4D26-8AC7-2376CD7B1FE1}"/>
+                <a16:creationId xmlns:a16="http://schemas.microsoft.com/office/drawing/2014/main" id="{E0F586DC-138E-478B-94B8-8D0D18A0D7A6}"/>
               </a:ext>
             </a:extLst>
           </p:cNvPr>
@@ -17817,7 +17817,7 @@
           <p:cNvPr id="27" name="">
             <a:extLst xmlns:a="http://schemas.openxmlformats.org/drawingml/2006/main">
               <a:ext uri="{FF2B5EF4-FFF2-40B4-BE49-F238E27FC236}">
-                <a16:creationId xmlns:a16="http://schemas.microsoft.com/office/drawing/2014/main" id="{D47F6D86-7E54-4FC4-90FD-D84A5FEE053C}"/>
+                <a16:creationId xmlns:a16="http://schemas.microsoft.com/office/drawing/2014/main" id="{B7FE92A3-44E2-41A2-A76E-031AD6731779}"/>
               </a:ext>
             </a:extLst>
           </p:cNvPr>
@@ -17850,7 +17850,7 @@
           <p:cNvPr id="28" name="">
             <a:extLst xmlns:a="http://schemas.openxmlformats.org/drawingml/2006/main">
               <a:ext uri="{FF2B5EF4-FFF2-40B4-BE49-F238E27FC236}">
-                <a16:creationId xmlns:a16="http://schemas.microsoft.com/office/drawing/2014/main" id="{65237004-F215-4EEB-8E56-ABD7ED70EA9B}"/>
+                <a16:creationId xmlns:a16="http://schemas.microsoft.com/office/drawing/2014/main" id="{BEDEBEF9-8D1E-4E17-A757-84E35DACC17F}"/>
               </a:ext>
             </a:extLst>
           </p:cNvPr>
@@ -17883,7 +17883,7 @@
           <p:cNvPr id="29" name="">
             <a:extLst xmlns:a="http://schemas.openxmlformats.org/drawingml/2006/main">
               <a:ext uri="{FF2B5EF4-FFF2-40B4-BE49-F238E27FC236}">
-                <a16:creationId xmlns:a16="http://schemas.microsoft.com/office/drawing/2014/main" id="{AE735A7D-1A93-4132-BAB7-617C93C8A96A}"/>
+                <a16:creationId xmlns:a16="http://schemas.microsoft.com/office/drawing/2014/main" id="{9138CEF2-EE8E-4EAF-96A0-F8B46DFFE6D8}"/>
               </a:ext>
             </a:extLst>
           </p:cNvPr>
@@ -17941,7 +17941,7 @@
           <p:cNvPr id="30" name="">
             <a:extLst xmlns:a="http://schemas.openxmlformats.org/drawingml/2006/main">
               <a:ext uri="{FF2B5EF4-FFF2-40B4-BE49-F238E27FC236}">
-                <a16:creationId xmlns:a16="http://schemas.microsoft.com/office/drawing/2014/main" id="{F3E812B5-6707-4852-BD89-607BD372BBF5}"/>
+                <a16:creationId xmlns:a16="http://schemas.microsoft.com/office/drawing/2014/main" id="{0FE6CD02-00C7-4B9F-A15B-3551AFD4908D}"/>
               </a:ext>
             </a:extLst>
           </p:cNvPr>
@@ -17974,7 +17974,7 @@
           <p:cNvPr id="31" name="">
             <a:extLst xmlns:a="http://schemas.openxmlformats.org/drawingml/2006/main">
               <a:ext uri="{FF2B5EF4-FFF2-40B4-BE49-F238E27FC236}">
-                <a16:creationId xmlns:a16="http://schemas.microsoft.com/office/drawing/2014/main" id="{5FBE9EF4-A0B9-4FE6-90F9-CEC7B80AEB56}"/>
+                <a16:creationId xmlns:a16="http://schemas.microsoft.com/office/drawing/2014/main" id="{602E6D84-145D-43F8-8B0A-E811AB598402}"/>
               </a:ext>
             </a:extLst>
           </p:cNvPr>
@@ -18007,7 +18007,7 @@
           <p:cNvPr id="32" name="">
             <a:extLst xmlns:a="http://schemas.openxmlformats.org/drawingml/2006/main">
               <a:ext uri="{FF2B5EF4-FFF2-40B4-BE49-F238E27FC236}">
-                <a16:creationId xmlns:a16="http://schemas.microsoft.com/office/drawing/2014/main" id="{0DCA1FF8-28B4-4661-B420-492727FD34A9}"/>
+                <a16:creationId xmlns:a16="http://schemas.microsoft.com/office/drawing/2014/main" id="{661D739C-0C60-4387-BE0A-6D1C7AF7D03A}"/>
               </a:ext>
             </a:extLst>
           </p:cNvPr>
@@ -18040,7 +18040,7 @@
           <p:cNvPr id="33" name="">
             <a:extLst xmlns:a="http://schemas.openxmlformats.org/drawingml/2006/main">
               <a:ext uri="{FF2B5EF4-FFF2-40B4-BE49-F238E27FC236}">
-                <a16:creationId xmlns:a16="http://schemas.microsoft.com/office/drawing/2014/main" id="{81877874-5C90-4EA4-88CA-41D4B78A8E84}"/>
+                <a16:creationId xmlns:a16="http://schemas.microsoft.com/office/drawing/2014/main" id="{BDC7FAAB-64B7-45B6-8D94-94D37B2C5429}"/>
               </a:ext>
             </a:extLst>
           </p:cNvPr>
@@ -18098,7 +18098,7 @@
           <p:cNvPr id="34" name="">
             <a:extLst xmlns:a="http://schemas.openxmlformats.org/drawingml/2006/main">
               <a:ext uri="{FF2B5EF4-FFF2-40B4-BE49-F238E27FC236}">
-                <a16:creationId xmlns:a16="http://schemas.microsoft.com/office/drawing/2014/main" id="{0AD8271E-F71C-45FC-B929-4AAC32B27367}"/>
+                <a16:creationId xmlns:a16="http://schemas.microsoft.com/office/drawing/2014/main" id="{B0309385-8421-49AB-9E03-7B8550EEDA82}"/>
               </a:ext>
             </a:extLst>
           </p:cNvPr>
@@ -18131,7 +18131,7 @@
           <p:cNvPr id="35" name="">
             <a:extLst xmlns:a="http://schemas.openxmlformats.org/drawingml/2006/main">
               <a:ext uri="{FF2B5EF4-FFF2-40B4-BE49-F238E27FC236}">
-                <a16:creationId xmlns:a16="http://schemas.microsoft.com/office/drawing/2014/main" id="{1A6EF732-9972-4579-A0EE-3354BE684252}"/>
+                <a16:creationId xmlns:a16="http://schemas.microsoft.com/office/drawing/2014/main" id="{0678EAEF-0DCA-4026-B4CB-20A44766FC17}"/>
               </a:ext>
             </a:extLst>
           </p:cNvPr>
@@ -18164,7 +18164,7 @@
           <p:cNvPr id="36" name="">
             <a:extLst xmlns:a="http://schemas.openxmlformats.org/drawingml/2006/main">
               <a:ext uri="{FF2B5EF4-FFF2-40B4-BE49-F238E27FC236}">
-                <a16:creationId xmlns:a16="http://schemas.microsoft.com/office/drawing/2014/main" id="{3D461AB0-71BF-4E30-B737-3E704F20466B}"/>
+                <a16:creationId xmlns:a16="http://schemas.microsoft.com/office/drawing/2014/main" id="{0FD3DDB2-FA00-43C6-B355-7621668FC756}"/>
               </a:ext>
             </a:extLst>
           </p:cNvPr>
@@ -18197,7 +18197,7 @@
           <p:cNvPr id="37" name="">
             <a:extLst xmlns:a="http://schemas.openxmlformats.org/drawingml/2006/main">
               <a:ext uri="{FF2B5EF4-FFF2-40B4-BE49-F238E27FC236}">
-                <a16:creationId xmlns:a16="http://schemas.microsoft.com/office/drawing/2014/main" id="{63A89F66-AF8C-4F2C-85C4-FC9E75C5F59F}"/>
+                <a16:creationId xmlns:a16="http://schemas.microsoft.com/office/drawing/2014/main" id="{7D10DB20-B859-46C9-A600-688988E03658}"/>
               </a:ext>
             </a:extLst>
           </p:cNvPr>
@@ -18255,7 +18255,7 @@
           <p:cNvPr id="38" name="">
             <a:extLst xmlns:a="http://schemas.openxmlformats.org/drawingml/2006/main">
               <a:ext uri="{FF2B5EF4-FFF2-40B4-BE49-F238E27FC236}">
-                <a16:creationId xmlns:a16="http://schemas.microsoft.com/office/drawing/2014/main" id="{E100FD97-87A1-450F-8188-642FF5AA7955}"/>
+                <a16:creationId xmlns:a16="http://schemas.microsoft.com/office/drawing/2014/main" id="{BBE03A53-7112-4FE7-B829-4C2197ED6ED1}"/>
               </a:ext>
             </a:extLst>
           </p:cNvPr>
@@ -18288,7 +18288,7 @@
           <p:cNvPr id="39" name="">
             <a:extLst xmlns:a="http://schemas.openxmlformats.org/drawingml/2006/main">
               <a:ext uri="{FF2B5EF4-FFF2-40B4-BE49-F238E27FC236}">
-                <a16:creationId xmlns:a16="http://schemas.microsoft.com/office/drawing/2014/main" id="{AD1FB4EC-FDD1-4466-80EC-484AAC0E17F1}"/>
+                <a16:creationId xmlns:a16="http://schemas.microsoft.com/office/drawing/2014/main" id="{955A0EAE-5065-4A9C-AA54-B20C5CCC46C1}"/>
               </a:ext>
             </a:extLst>
           </p:cNvPr>
@@ -18321,7 +18321,7 @@
           <p:cNvPr id="40" name="">
             <a:extLst xmlns:a="http://schemas.openxmlformats.org/drawingml/2006/main">
               <a:ext uri="{FF2B5EF4-FFF2-40B4-BE49-F238E27FC236}">
-                <a16:creationId xmlns:a16="http://schemas.microsoft.com/office/drawing/2014/main" id="{BD7A064E-D286-4378-A765-20732F6BC4F7}"/>
+                <a16:creationId xmlns:a16="http://schemas.microsoft.com/office/drawing/2014/main" id="{F59D9919-CC9C-4CA1-AE37-68CF5A3EC46B}"/>
               </a:ext>
             </a:extLst>
           </p:cNvPr>
@@ -18354,7 +18354,7 @@
           <p:cNvPr id="41" name="">
             <a:extLst xmlns:a="http://schemas.openxmlformats.org/drawingml/2006/main">
               <a:ext uri="{FF2B5EF4-FFF2-40B4-BE49-F238E27FC236}">
-                <a16:creationId xmlns:a16="http://schemas.microsoft.com/office/drawing/2014/main" id="{E857E4C3-6713-499D-97D2-6F7919C8D295}"/>
+                <a16:creationId xmlns:a16="http://schemas.microsoft.com/office/drawing/2014/main" id="{590FB10A-1090-4777-B684-847B7DAA3327}"/>
               </a:ext>
             </a:extLst>
           </p:cNvPr>
@@ -18412,7 +18412,7 @@
           <p:cNvPr id="42" name="">
             <a:extLst xmlns:a="http://schemas.openxmlformats.org/drawingml/2006/main">
               <a:ext uri="{FF2B5EF4-FFF2-40B4-BE49-F238E27FC236}">
-                <a16:creationId xmlns:a16="http://schemas.microsoft.com/office/drawing/2014/main" id="{3A71DA29-5BFE-4DA1-8812-A7EDDD3655DF}"/>
+                <a16:creationId xmlns:a16="http://schemas.microsoft.com/office/drawing/2014/main" id="{C2EAA5A3-C396-4A45-95BF-4570EA338E5E}"/>
               </a:ext>
             </a:extLst>
           </p:cNvPr>
@@ -18445,7 +18445,7 @@
           <p:cNvPr id="43" name="">
             <a:extLst xmlns:a="http://schemas.openxmlformats.org/drawingml/2006/main">
               <a:ext uri="{FF2B5EF4-FFF2-40B4-BE49-F238E27FC236}">
-                <a16:creationId xmlns:a16="http://schemas.microsoft.com/office/drawing/2014/main" id="{5B1E0D0D-CC43-438E-A995-267575B4619F}"/>
+                <a16:creationId xmlns:a16="http://schemas.microsoft.com/office/drawing/2014/main" id="{1C7F5631-ADDB-4B58-8DFB-7DD7166FDB47}"/>
               </a:ext>
             </a:extLst>
           </p:cNvPr>
@@ -18478,7 +18478,7 @@
           <p:cNvPr id="44" name="">
             <a:extLst xmlns:a="http://schemas.openxmlformats.org/drawingml/2006/main">
               <a:ext uri="{FF2B5EF4-FFF2-40B4-BE49-F238E27FC236}">
-                <a16:creationId xmlns:a16="http://schemas.microsoft.com/office/drawing/2014/main" id="{ECDBC0A8-0DDE-48D0-B1F1-8DB201292473}"/>
+                <a16:creationId xmlns:a16="http://schemas.microsoft.com/office/drawing/2014/main" id="{1F75BE37-B380-406D-936E-C99206822F3A}"/>
               </a:ext>
             </a:extLst>
           </p:cNvPr>
@@ -18511,7 +18511,7 @@
           <p:cNvPr id="45" name="">
             <a:extLst xmlns:a="http://schemas.openxmlformats.org/drawingml/2006/main">
               <a:ext uri="{FF2B5EF4-FFF2-40B4-BE49-F238E27FC236}">
-                <a16:creationId xmlns:a16="http://schemas.microsoft.com/office/drawing/2014/main" id="{21A4E37E-0DE7-4A09-8FA8-D386B305F57A}"/>
+                <a16:creationId xmlns:a16="http://schemas.microsoft.com/office/drawing/2014/main" id="{E055AFD8-2BC0-4F9A-A1DD-F3F850AC7B81}"/>
               </a:ext>
             </a:extLst>
           </p:cNvPr>
@@ -18569,7 +18569,7 @@
           <p:cNvPr id="46" name="">
             <a:extLst xmlns:a="http://schemas.openxmlformats.org/drawingml/2006/main">
               <a:ext uri="{FF2B5EF4-FFF2-40B4-BE49-F238E27FC236}">
-                <a16:creationId xmlns:a16="http://schemas.microsoft.com/office/drawing/2014/main" id="{A048CF93-C715-4682-B88F-EE415652A3FA}"/>
+                <a16:creationId xmlns:a16="http://schemas.microsoft.com/office/drawing/2014/main" id="{A29269B8-953E-4E30-A73B-048A4EAFC041}"/>
               </a:ext>
             </a:extLst>
           </p:cNvPr>
@@ -18627,7 +18627,7 @@
           <p:cNvPr id="47" name="">
             <a:extLst xmlns:a="http://schemas.openxmlformats.org/drawingml/2006/main">
               <a:ext uri="{FF2B5EF4-FFF2-40B4-BE49-F238E27FC236}">
-                <a16:creationId xmlns:a16="http://schemas.microsoft.com/office/drawing/2014/main" id="{239244B3-ABD0-4A29-9197-1536878AFF78}"/>
+                <a16:creationId xmlns:a16="http://schemas.microsoft.com/office/drawing/2014/main" id="{8AF2346D-495B-44F9-AD23-D705A2AD5542}"/>
               </a:ext>
             </a:extLst>
           </p:cNvPr>
@@ -18685,7 +18685,7 @@
           <p:cNvPr id="48" name="">
             <a:extLst xmlns:a="http://schemas.openxmlformats.org/drawingml/2006/main">
               <a:ext uri="{FF2B5EF4-FFF2-40B4-BE49-F238E27FC236}">
-                <a16:creationId xmlns:a16="http://schemas.microsoft.com/office/drawing/2014/main" id="{2B9D4E82-D017-4FE9-BC29-C4B50B88394B}"/>
+                <a16:creationId xmlns:a16="http://schemas.microsoft.com/office/drawing/2014/main" id="{589B35A6-2E1C-4162-8D46-B25ADD9DB025}"/>
               </a:ext>
             </a:extLst>
           </p:cNvPr>
@@ -18743,7 +18743,7 @@
           <p:cNvPr id="49" name="">
             <a:extLst xmlns:a="http://schemas.openxmlformats.org/drawingml/2006/main">
               <a:ext uri="{FF2B5EF4-FFF2-40B4-BE49-F238E27FC236}">
-                <a16:creationId xmlns:a16="http://schemas.microsoft.com/office/drawing/2014/main" id="{09F3E690-8AA7-44B7-8019-519694E24503}"/>
+                <a16:creationId xmlns:a16="http://schemas.microsoft.com/office/drawing/2014/main" id="{905C2239-C31C-4727-9DC7-8902626C71FF}"/>
               </a:ext>
             </a:extLst>
           </p:cNvPr>
@@ -18801,7 +18801,7 @@
           <p:cNvPr id="50" name="">
             <a:extLst xmlns:a="http://schemas.openxmlformats.org/drawingml/2006/main">
               <a:ext uri="{FF2B5EF4-FFF2-40B4-BE49-F238E27FC236}">
-                <a16:creationId xmlns:a16="http://schemas.microsoft.com/office/drawing/2014/main" id="{9FBB54B1-850B-4C5C-AB8C-B620672E39BE}"/>
+                <a16:creationId xmlns:a16="http://schemas.microsoft.com/office/drawing/2014/main" id="{38FB76A5-144F-4D36-B62C-0826A40D152D}"/>
               </a:ext>
             </a:extLst>
           </p:cNvPr>
@@ -18859,7 +18859,7 @@
           <p:cNvPr id="51" name="">
             <a:extLst xmlns:a="http://schemas.openxmlformats.org/drawingml/2006/main">
               <a:ext uri="{FF2B5EF4-FFF2-40B4-BE49-F238E27FC236}">
-                <a16:creationId xmlns:a16="http://schemas.microsoft.com/office/drawing/2014/main" id="{5ED01F6A-408C-4C91-99CD-A3F5A7EB655E}"/>
+                <a16:creationId xmlns:a16="http://schemas.microsoft.com/office/drawing/2014/main" id="{2FC27FE7-D6C7-4DE6-BD2F-DFC93428B610}"/>
               </a:ext>
             </a:extLst>
           </p:cNvPr>
@@ -18917,7 +18917,7 @@
           <p:cNvPr id="52" name="">
             <a:extLst xmlns:a="http://schemas.openxmlformats.org/drawingml/2006/main">
               <a:ext uri="{FF2B5EF4-FFF2-40B4-BE49-F238E27FC236}">
-                <a16:creationId xmlns:a16="http://schemas.microsoft.com/office/drawing/2014/main" id="{E0D45F00-06B6-4CF7-B0C4-9200E361855E}"/>
+                <a16:creationId xmlns:a16="http://schemas.microsoft.com/office/drawing/2014/main" id="{E76C7A0F-2FF2-4B3A-AD7A-D31A2F2B749C}"/>
               </a:ext>
             </a:extLst>
           </p:cNvPr>
@@ -18975,7 +18975,7 @@
           <p:cNvPr id="53" name="">
             <a:extLst xmlns:a="http://schemas.openxmlformats.org/drawingml/2006/main">
               <a:ext uri="{FF2B5EF4-FFF2-40B4-BE49-F238E27FC236}">
-                <a16:creationId xmlns:a16="http://schemas.microsoft.com/office/drawing/2014/main" id="{14E671D4-11FC-4AAD-9337-61E9BD0436F9}"/>
+                <a16:creationId xmlns:a16="http://schemas.microsoft.com/office/drawing/2014/main" id="{AA2AD832-9AC2-4E2E-AEFE-CD4134AD3423}"/>
               </a:ext>
             </a:extLst>
           </p:cNvPr>
@@ -19033,7 +19033,7 @@
           <p:cNvPr id="54" name="">
             <a:extLst xmlns:a="http://schemas.openxmlformats.org/drawingml/2006/main">
               <a:ext uri="{FF2B5EF4-FFF2-40B4-BE49-F238E27FC236}">
-                <a16:creationId xmlns:a16="http://schemas.microsoft.com/office/drawing/2014/main" id="{575C1630-3D87-401C-9FEB-150E69E3646D}"/>
+                <a16:creationId xmlns:a16="http://schemas.microsoft.com/office/drawing/2014/main" id="{5144CBBB-E15C-4059-A9CC-1FB1701896BF}"/>
               </a:ext>
             </a:extLst>
           </p:cNvPr>
@@ -19091,7 +19091,7 @@
           <p:cNvPr id="55" name="">
             <a:extLst xmlns:a="http://schemas.openxmlformats.org/drawingml/2006/main">
               <a:ext uri="{FF2B5EF4-FFF2-40B4-BE49-F238E27FC236}">
-                <a16:creationId xmlns:a16="http://schemas.microsoft.com/office/drawing/2014/main" id="{3A43DA19-0B3B-4FBB-A812-ECFDAA23A801}"/>
+                <a16:creationId xmlns:a16="http://schemas.microsoft.com/office/drawing/2014/main" id="{49A1C002-7916-4D7E-8E8D-B7650A30DBCC}"/>
               </a:ext>
             </a:extLst>
           </p:cNvPr>
@@ -19149,7 +19149,7 @@
           <p:cNvPr id="56" name="">
             <a:extLst xmlns:a="http://schemas.openxmlformats.org/drawingml/2006/main">
               <a:ext uri="{FF2B5EF4-FFF2-40B4-BE49-F238E27FC236}">
-                <a16:creationId xmlns:a16="http://schemas.microsoft.com/office/drawing/2014/main" id="{D9CB7328-50B2-4FFE-AE30-0131AD117A87}"/>
+                <a16:creationId xmlns:a16="http://schemas.microsoft.com/office/drawing/2014/main" id="{F88EFB27-47EB-4DD9-BCA9-B397356AC0AA}"/>
               </a:ext>
             </a:extLst>
           </p:cNvPr>
@@ -19207,7 +19207,7 @@
           <p:cNvPr id="57" name="">
             <a:extLst xmlns:a="http://schemas.openxmlformats.org/drawingml/2006/main">
               <a:ext uri="{FF2B5EF4-FFF2-40B4-BE49-F238E27FC236}">
-                <a16:creationId xmlns:a16="http://schemas.microsoft.com/office/drawing/2014/main" id="{78B55ECA-25CF-4D49-86CB-F62665566283}"/>
+                <a16:creationId xmlns:a16="http://schemas.microsoft.com/office/drawing/2014/main" id="{E587BEEA-8ECF-4BF0-AE4E-E57281C089C6}"/>
               </a:ext>
             </a:extLst>
           </p:cNvPr>
@@ -19265,7 +19265,7 @@
           <p:cNvPr id="58" name="">
             <a:extLst xmlns:a="http://schemas.openxmlformats.org/drawingml/2006/main">
               <a:ext uri="{FF2B5EF4-FFF2-40B4-BE49-F238E27FC236}">
-                <a16:creationId xmlns:a16="http://schemas.microsoft.com/office/drawing/2014/main" id="{BAB18C47-30BF-4BCC-B3BC-78C4D78D9AEF}"/>
+                <a16:creationId xmlns:a16="http://schemas.microsoft.com/office/drawing/2014/main" id="{DD4B27E0-9669-47EE-BA99-189EE4F690A7}"/>
               </a:ext>
             </a:extLst>
           </p:cNvPr>
@@ -19323,7 +19323,7 @@
           <p:cNvPr id="59" name="">
             <a:extLst xmlns:a="http://schemas.openxmlformats.org/drawingml/2006/main">
               <a:ext uri="{FF2B5EF4-FFF2-40B4-BE49-F238E27FC236}">
-                <a16:creationId xmlns:a16="http://schemas.microsoft.com/office/drawing/2014/main" id="{ACD31FE8-3B0E-4762-911C-DD832D34C79E}"/>
+                <a16:creationId xmlns:a16="http://schemas.microsoft.com/office/drawing/2014/main" id="{3F78F50D-E671-42FD-9A61-C050C46EDDC2}"/>
               </a:ext>
             </a:extLst>
           </p:cNvPr>
@@ -19356,7 +19356,7 @@
           <p:cNvPr id="60" name="">
             <a:extLst xmlns:a="http://schemas.openxmlformats.org/drawingml/2006/main">
               <a:ext uri="{FF2B5EF4-FFF2-40B4-BE49-F238E27FC236}">
-                <a16:creationId xmlns:a16="http://schemas.microsoft.com/office/drawing/2014/main" id="{4B90AE96-D5B2-4226-912F-EFD580E7602D}"/>
+                <a16:creationId xmlns:a16="http://schemas.microsoft.com/office/drawing/2014/main" id="{DE715A0E-C1D7-4E29-8D37-B3EFF239136E}"/>
               </a:ext>
             </a:extLst>
           </p:cNvPr>
@@ -19414,7 +19414,7 @@
                 <a:latin typeface="Microsoft YaHei"/>
                 <a:ea typeface="Microsoft YaHei"/>
                 <a:cs typeface="Microsoft YaHei"/>
-                <a:hlinkClick xmlns:r="http://schemas.openxmlformats.org/officeDocument/2006/relationships" r:id="R4b0e9411873b42e4"/>
+                <a:hlinkClick xmlns:r="http://schemas.openxmlformats.org/officeDocument/2006/relationships" r:id="Reb848af4c6404d0f"/>
               </a:rPr>
               <a:t>智谱：Coding Agent工作原理</a:t>
             </a:r>
@@ -19426,7 +19426,7 @@
           <p:cNvPr id="61" name="">
             <a:extLst xmlns:a="http://schemas.openxmlformats.org/drawingml/2006/main">
               <a:ext uri="{FF2B5EF4-FFF2-40B4-BE49-F238E27FC236}">
-                <a16:creationId xmlns:a16="http://schemas.microsoft.com/office/drawing/2014/main" id="{523AA4CC-B367-4AA3-90C0-18BF33E19C87}"/>
+                <a16:creationId xmlns:a16="http://schemas.microsoft.com/office/drawing/2014/main" id="{FDFEACAF-E973-4C8E-A3F5-EA4C689BEDF9}"/>
               </a:ext>
             </a:extLst>
           </p:cNvPr>
@@ -19482,7 +19482,7 @@
     </p:spTree>
     <p:extLst>
       <p:ext uri="{BB962C8B-B14F-4D97-AF65-F5344CB8AC3E}">
-        <p14:creationId xmlns:p14="http://schemas.microsoft.com/office/powerpoint/2010/main" val="906228598"/>
+        <p14:creationId xmlns:p14="http://schemas.microsoft.com/office/powerpoint/2010/main" val="1816414525"/>
       </p:ext>
     </p:extLst>
   </p:cSld>
@@ -19513,7 +19513,7 @@
           <p:cNvPr id="68" name="">
             <a:extLst xmlns:a="http://schemas.openxmlformats.org/drawingml/2006/main">
               <a:ext uri="{FF2B5EF4-FFF2-40B4-BE49-F238E27FC236}">
-                <a16:creationId xmlns:a16="http://schemas.microsoft.com/office/drawing/2014/main" id="{E9EF4720-D3C0-4134-87EC-514925627A68}"/>
+                <a16:creationId xmlns:a16="http://schemas.microsoft.com/office/drawing/2014/main" id="{9C63DB41-FFD3-40FF-A9AC-CECBABF55B3A}"/>
               </a:ext>
             </a:extLst>
           </p:cNvPr>
@@ -19546,7 +19546,7 @@
           <p:cNvPr id="2" name="">
             <a:extLst xmlns:a="http://schemas.openxmlformats.org/drawingml/2006/main">
               <a:ext uri="{FF2B5EF4-FFF2-40B4-BE49-F238E27FC236}">
-                <a16:creationId xmlns:a16="http://schemas.microsoft.com/office/drawing/2014/main" id="{4BBEA648-5C47-45AD-A159-EA1DDDB63995}"/>
+                <a16:creationId xmlns:a16="http://schemas.microsoft.com/office/drawing/2014/main" id="{DCD430EC-BA1C-410F-AA4E-2132086CF845}"/>
               </a:ext>
             </a:extLst>
           </p:cNvPr>
@@ -19604,7 +19604,7 @@
           <p:cNvPr id="3" name="">
             <a:extLst xmlns:a="http://schemas.openxmlformats.org/drawingml/2006/main">
               <a:ext uri="{FF2B5EF4-FFF2-40B4-BE49-F238E27FC236}">
-                <a16:creationId xmlns:a16="http://schemas.microsoft.com/office/drawing/2014/main" id="{20DF95C3-086E-4B4F-89A5-077AC3FB641E}"/>
+                <a16:creationId xmlns:a16="http://schemas.microsoft.com/office/drawing/2014/main" id="{CB117E84-E1EA-483D-AA18-958B8A494503}"/>
               </a:ext>
             </a:extLst>
           </p:cNvPr>
@@ -19636,7 +19636,7 @@
             <a:pPr algn="l">
               <a:defRPr sz="2325" b="1">
                 <a:solidFill>
-                  <a:srgbClr val="1D1D1A"/>
+                  <a:srgbClr val="8A0F17"/>
                 </a:solidFill>
                 <a:latin typeface="Microsoft YaHei"/>
                 <a:ea typeface="Microsoft YaHei"/>
@@ -19646,7 +19646,7 @@
             <a:r>
               <a:rPr sz="2325" b="1">
                 <a:solidFill>
-                  <a:srgbClr val="1D1D1A"/>
+                  <a:srgbClr val="8A0F17"/>
                 </a:solidFill>
                 <a:latin typeface="Microsoft YaHei"/>
                 <a:ea typeface="Microsoft YaHei"/>
@@ -19662,7 +19662,7 @@
           <p:cNvPr id="4" name="">
             <a:extLst xmlns:a="http://schemas.openxmlformats.org/drawingml/2006/main">
               <a:ext uri="{FF2B5EF4-FFF2-40B4-BE49-F238E27FC236}">
-                <a16:creationId xmlns:a16="http://schemas.microsoft.com/office/drawing/2014/main" id="{B19A89EB-7F41-4A5C-94C7-629E8FA8D910}"/>
+                <a16:creationId xmlns:a16="http://schemas.microsoft.com/office/drawing/2014/main" id="{8A08AB15-3484-404B-882C-D719D328574A}"/>
               </a:ext>
             </a:extLst>
           </p:cNvPr>
@@ -19695,7 +19695,7 @@
           <p:cNvPr id="5" name="">
             <a:extLst xmlns:a="http://schemas.openxmlformats.org/drawingml/2006/main">
               <a:ext uri="{FF2B5EF4-FFF2-40B4-BE49-F238E27FC236}">
-                <a16:creationId xmlns:a16="http://schemas.microsoft.com/office/drawing/2014/main" id="{A1A8ABC0-2364-4697-BF0A-5A46AF4FD0B4}"/>
+                <a16:creationId xmlns:a16="http://schemas.microsoft.com/office/drawing/2014/main" id="{BC9C53BD-EBE6-475B-9EC0-44CEED3C0B5A}"/>
               </a:ext>
             </a:extLst>
           </p:cNvPr>
@@ -19753,7 +19753,7 @@
           <p:cNvPr id="6" name="">
             <a:extLst xmlns:a="http://schemas.openxmlformats.org/drawingml/2006/main">
               <a:ext uri="{FF2B5EF4-FFF2-40B4-BE49-F238E27FC236}">
-                <a16:creationId xmlns:a16="http://schemas.microsoft.com/office/drawing/2014/main" id="{B42C568E-F05E-4971-9399-D2F625E69287}"/>
+                <a16:creationId xmlns:a16="http://schemas.microsoft.com/office/drawing/2014/main" id="{B5D919F5-0B32-4F1B-90FA-AF6953FC2DF1}"/>
               </a:ext>
             </a:extLst>
           </p:cNvPr>
@@ -19811,7 +19811,7 @@
           <p:cNvPr id="7" name="">
             <a:extLst xmlns:a="http://schemas.openxmlformats.org/drawingml/2006/main">
               <a:ext uri="{FF2B5EF4-FFF2-40B4-BE49-F238E27FC236}">
-                <a16:creationId xmlns:a16="http://schemas.microsoft.com/office/drawing/2014/main" id="{18472CAA-D7D8-499B-BDEF-E1EC60C11244}"/>
+                <a16:creationId xmlns:a16="http://schemas.microsoft.com/office/drawing/2014/main" id="{85F1F2BE-C55E-4C52-8DC9-8436EA0B9284}"/>
               </a:ext>
             </a:extLst>
           </p:cNvPr>
@@ -19869,7 +19869,7 @@
           <p:cNvPr id="8" name="">
             <a:extLst xmlns:a="http://schemas.openxmlformats.org/drawingml/2006/main">
               <a:ext uri="{FF2B5EF4-FFF2-40B4-BE49-F238E27FC236}">
-                <a16:creationId xmlns:a16="http://schemas.microsoft.com/office/drawing/2014/main" id="{57FF995D-44A4-4C0C-B47C-8C3853718677}"/>
+                <a16:creationId xmlns:a16="http://schemas.microsoft.com/office/drawing/2014/main" id="{44553DB2-80BD-4AF7-A6F4-EBE70CBC914F}"/>
               </a:ext>
             </a:extLst>
           </p:cNvPr>
@@ -19902,7 +19902,7 @@
           <p:cNvPr id="9" name="">
             <a:extLst xmlns:a="http://schemas.openxmlformats.org/drawingml/2006/main">
               <a:ext uri="{FF2B5EF4-FFF2-40B4-BE49-F238E27FC236}">
-                <a16:creationId xmlns:a16="http://schemas.microsoft.com/office/drawing/2014/main" id="{32797E93-8F37-49EB-962D-F0B1D4F8F1E4}"/>
+                <a16:creationId xmlns:a16="http://schemas.microsoft.com/office/drawing/2014/main" id="{F1C9BC4B-0411-476C-88DA-83C870AB9463}"/>
               </a:ext>
             </a:extLst>
           </p:cNvPr>
@@ -19935,7 +19935,7 @@
           <p:cNvPr id="10" name="">
             <a:extLst xmlns:a="http://schemas.openxmlformats.org/drawingml/2006/main">
               <a:ext uri="{FF2B5EF4-FFF2-40B4-BE49-F238E27FC236}">
-                <a16:creationId xmlns:a16="http://schemas.microsoft.com/office/drawing/2014/main" id="{E42910B4-F537-4A44-A9F3-6EC658F018D1}"/>
+                <a16:creationId xmlns:a16="http://schemas.microsoft.com/office/drawing/2014/main" id="{661D17D2-1866-44C2-B323-C675A695969E}"/>
               </a:ext>
             </a:extLst>
           </p:cNvPr>
@@ -19968,7 +19968,7 @@
           <p:cNvPr id="11" name="">
             <a:extLst xmlns:a="http://schemas.openxmlformats.org/drawingml/2006/main">
               <a:ext uri="{FF2B5EF4-FFF2-40B4-BE49-F238E27FC236}">
-                <a16:creationId xmlns:a16="http://schemas.microsoft.com/office/drawing/2014/main" id="{71263FB2-6874-4F0B-8C2D-48EE0682511B}"/>
+                <a16:creationId xmlns:a16="http://schemas.microsoft.com/office/drawing/2014/main" id="{E8586744-1D60-45CA-86F1-17A5C64D7253}"/>
               </a:ext>
             </a:extLst>
           </p:cNvPr>
@@ -20026,7 +20026,7 @@
           <p:cNvPr id="12" name="">
             <a:extLst xmlns:a="http://schemas.openxmlformats.org/drawingml/2006/main">
               <a:ext uri="{FF2B5EF4-FFF2-40B4-BE49-F238E27FC236}">
-                <a16:creationId xmlns:a16="http://schemas.microsoft.com/office/drawing/2014/main" id="{06F8E3B2-CA5A-4923-BC83-A13A3FD9076E}"/>
+                <a16:creationId xmlns:a16="http://schemas.microsoft.com/office/drawing/2014/main" id="{B2DE4B9B-8B8E-49B1-BBB0-A331FAB2161E}"/>
               </a:ext>
             </a:extLst>
           </p:cNvPr>
@@ -20084,7 +20084,7 @@
           <p:cNvPr id="13" name="">
             <a:extLst xmlns:a="http://schemas.openxmlformats.org/drawingml/2006/main">
               <a:ext uri="{FF2B5EF4-FFF2-40B4-BE49-F238E27FC236}">
-                <a16:creationId xmlns:a16="http://schemas.microsoft.com/office/drawing/2014/main" id="{FEBDFAA7-C15B-437E-B837-376A12AAF41B}"/>
+                <a16:creationId xmlns:a16="http://schemas.microsoft.com/office/drawing/2014/main" id="{39DC76CB-256C-4E7D-BC42-AE013044B67C}"/>
               </a:ext>
             </a:extLst>
           </p:cNvPr>
@@ -20142,7 +20142,7 @@
           <p:cNvPr id="14" name="">
             <a:extLst xmlns:a="http://schemas.openxmlformats.org/drawingml/2006/main">
               <a:ext uri="{FF2B5EF4-FFF2-40B4-BE49-F238E27FC236}">
-                <a16:creationId xmlns:a16="http://schemas.microsoft.com/office/drawing/2014/main" id="{DFD60263-9A48-4B8B-B932-84A524E784C2}"/>
+                <a16:creationId xmlns:a16="http://schemas.microsoft.com/office/drawing/2014/main" id="{381D4FAE-E3BF-488C-97B0-B2CC92FAD74D}"/>
               </a:ext>
             </a:extLst>
           </p:cNvPr>
@@ -20175,7 +20175,7 @@
           <p:cNvPr id="15" name="">
             <a:extLst xmlns:a="http://schemas.openxmlformats.org/drawingml/2006/main">
               <a:ext uri="{FF2B5EF4-FFF2-40B4-BE49-F238E27FC236}">
-                <a16:creationId xmlns:a16="http://schemas.microsoft.com/office/drawing/2014/main" id="{52D358BF-FBA7-417E-9DFE-8C2E4F961C85}"/>
+                <a16:creationId xmlns:a16="http://schemas.microsoft.com/office/drawing/2014/main" id="{32778AAC-FB12-48B3-8D55-D887B6D67317}"/>
               </a:ext>
             </a:extLst>
           </p:cNvPr>
@@ -20208,7 +20208,7 @@
           <p:cNvPr id="16" name="">
             <a:extLst xmlns:a="http://schemas.openxmlformats.org/drawingml/2006/main">
               <a:ext uri="{FF2B5EF4-FFF2-40B4-BE49-F238E27FC236}">
-                <a16:creationId xmlns:a16="http://schemas.microsoft.com/office/drawing/2014/main" id="{6074BAC0-D039-4481-B43A-999FBE70E162}"/>
+                <a16:creationId xmlns:a16="http://schemas.microsoft.com/office/drawing/2014/main" id="{8CD65ABC-1300-46E0-91D1-F1B57567E97F}"/>
               </a:ext>
             </a:extLst>
           </p:cNvPr>
@@ -20241,7 +20241,7 @@
           <p:cNvPr id="17" name="">
             <a:extLst xmlns:a="http://schemas.openxmlformats.org/drawingml/2006/main">
               <a:ext uri="{FF2B5EF4-FFF2-40B4-BE49-F238E27FC236}">
-                <a16:creationId xmlns:a16="http://schemas.microsoft.com/office/drawing/2014/main" id="{8B7C0F81-3D51-4CEC-B6AF-07C9828E7DFD}"/>
+                <a16:creationId xmlns:a16="http://schemas.microsoft.com/office/drawing/2014/main" id="{0768DAF2-B7F3-49C9-97FB-B9429F6B8C0C}"/>
               </a:ext>
             </a:extLst>
           </p:cNvPr>
@@ -20299,7 +20299,7 @@
           <p:cNvPr id="18" name="">
             <a:extLst xmlns:a="http://schemas.openxmlformats.org/drawingml/2006/main">
               <a:ext uri="{FF2B5EF4-FFF2-40B4-BE49-F238E27FC236}">
-                <a16:creationId xmlns:a16="http://schemas.microsoft.com/office/drawing/2014/main" id="{BF98D05E-13B2-4E21-88FA-1835F5AB9A52}"/>
+                <a16:creationId xmlns:a16="http://schemas.microsoft.com/office/drawing/2014/main" id="{9B4BC8F0-2E77-4072-97FB-C5435FD833D7}"/>
               </a:ext>
             </a:extLst>
           </p:cNvPr>
@@ -20357,7 +20357,7 @@
           <p:cNvPr id="19" name="">
             <a:extLst xmlns:a="http://schemas.openxmlformats.org/drawingml/2006/main">
               <a:ext uri="{FF2B5EF4-FFF2-40B4-BE49-F238E27FC236}">
-                <a16:creationId xmlns:a16="http://schemas.microsoft.com/office/drawing/2014/main" id="{57DB8120-5885-4F6A-98C7-D0B9292238E0}"/>
+                <a16:creationId xmlns:a16="http://schemas.microsoft.com/office/drawing/2014/main" id="{94E5FFC7-B879-4D7D-8873-76C80473090F}"/>
               </a:ext>
             </a:extLst>
           </p:cNvPr>
@@ -20415,7 +20415,7 @@
           <p:cNvPr id="20" name="">
             <a:extLst xmlns:a="http://schemas.openxmlformats.org/drawingml/2006/main">
               <a:ext uri="{FF2B5EF4-FFF2-40B4-BE49-F238E27FC236}">
-                <a16:creationId xmlns:a16="http://schemas.microsoft.com/office/drawing/2014/main" id="{A5DDD7B7-C5B8-40EE-8AB9-8D702FFC5646}"/>
+                <a16:creationId xmlns:a16="http://schemas.microsoft.com/office/drawing/2014/main" id="{96564719-94BC-4E2E-9D46-B95936C1204D}"/>
               </a:ext>
             </a:extLst>
           </p:cNvPr>
@@ -20448,7 +20448,7 @@
           <p:cNvPr id="21" name="">
             <a:extLst xmlns:a="http://schemas.openxmlformats.org/drawingml/2006/main">
               <a:ext uri="{FF2B5EF4-FFF2-40B4-BE49-F238E27FC236}">
-                <a16:creationId xmlns:a16="http://schemas.microsoft.com/office/drawing/2014/main" id="{4BC2FD8B-4D02-4E43-93B2-21CA03BC57F5}"/>
+                <a16:creationId xmlns:a16="http://schemas.microsoft.com/office/drawing/2014/main" id="{D5957BD9-ADE7-4C7F-A1FE-317146B43C7E}"/>
               </a:ext>
             </a:extLst>
           </p:cNvPr>
@@ -20481,7 +20481,7 @@
           <p:cNvPr id="22" name="">
             <a:extLst xmlns:a="http://schemas.openxmlformats.org/drawingml/2006/main">
               <a:ext uri="{FF2B5EF4-FFF2-40B4-BE49-F238E27FC236}">
-                <a16:creationId xmlns:a16="http://schemas.microsoft.com/office/drawing/2014/main" id="{94AA0419-9DBB-4366-ABE0-805DCA609E19}"/>
+                <a16:creationId xmlns:a16="http://schemas.microsoft.com/office/drawing/2014/main" id="{1E00986A-9EA4-46E6-A433-05AA69EB2C90}"/>
               </a:ext>
             </a:extLst>
           </p:cNvPr>
@@ -20514,7 +20514,7 @@
           <p:cNvPr id="23" name="">
             <a:extLst xmlns:a="http://schemas.openxmlformats.org/drawingml/2006/main">
               <a:ext uri="{FF2B5EF4-FFF2-40B4-BE49-F238E27FC236}">
-                <a16:creationId xmlns:a16="http://schemas.microsoft.com/office/drawing/2014/main" id="{F9B59A40-290E-415A-92A4-0E2BC6D752AD}"/>
+                <a16:creationId xmlns:a16="http://schemas.microsoft.com/office/drawing/2014/main" id="{5BE44607-AD57-4716-A8CF-2DEF5FC4C1D9}"/>
               </a:ext>
             </a:extLst>
           </p:cNvPr>
@@ -20572,7 +20572,7 @@
           <p:cNvPr id="24" name="">
             <a:extLst xmlns:a="http://schemas.openxmlformats.org/drawingml/2006/main">
               <a:ext uri="{FF2B5EF4-FFF2-40B4-BE49-F238E27FC236}">
-                <a16:creationId xmlns:a16="http://schemas.microsoft.com/office/drawing/2014/main" id="{40165F2C-873A-4C83-9658-40DD8C43B897}"/>
+                <a16:creationId xmlns:a16="http://schemas.microsoft.com/office/drawing/2014/main" id="{7EDE6153-4DD9-476C-B4F5-D170DBE566EF}"/>
               </a:ext>
             </a:extLst>
           </p:cNvPr>
@@ -20630,7 +20630,7 @@
           <p:cNvPr id="25" name="">
             <a:extLst xmlns:a="http://schemas.openxmlformats.org/drawingml/2006/main">
               <a:ext uri="{FF2B5EF4-FFF2-40B4-BE49-F238E27FC236}">
-                <a16:creationId xmlns:a16="http://schemas.microsoft.com/office/drawing/2014/main" id="{2CACF963-E4C1-4455-88FA-5C7AD7551599}"/>
+                <a16:creationId xmlns:a16="http://schemas.microsoft.com/office/drawing/2014/main" id="{342BC007-E2AA-4A85-B7BB-2398AE2F222C}"/>
               </a:ext>
             </a:extLst>
           </p:cNvPr>
@@ -20688,7 +20688,7 @@
           <p:cNvPr id="26" name="">
             <a:extLst xmlns:a="http://schemas.openxmlformats.org/drawingml/2006/main">
               <a:ext uri="{FF2B5EF4-FFF2-40B4-BE49-F238E27FC236}">
-                <a16:creationId xmlns:a16="http://schemas.microsoft.com/office/drawing/2014/main" id="{E775A646-7673-4846-B21B-C191E4BC196C}"/>
+                <a16:creationId xmlns:a16="http://schemas.microsoft.com/office/drawing/2014/main" id="{C2955B60-19FE-419B-A1FC-83BBBD32B5E0}"/>
               </a:ext>
             </a:extLst>
           </p:cNvPr>
@@ -20721,7 +20721,7 @@
           <p:cNvPr id="27" name="">
             <a:extLst xmlns:a="http://schemas.openxmlformats.org/drawingml/2006/main">
               <a:ext uri="{FF2B5EF4-FFF2-40B4-BE49-F238E27FC236}">
-                <a16:creationId xmlns:a16="http://schemas.microsoft.com/office/drawing/2014/main" id="{522B3FD2-2451-46E2-B5AE-4E150698976F}"/>
+                <a16:creationId xmlns:a16="http://schemas.microsoft.com/office/drawing/2014/main" id="{E6D0F587-B1C0-4840-961F-7596E8AE090A}"/>
               </a:ext>
             </a:extLst>
           </p:cNvPr>
@@ -20754,7 +20754,7 @@
           <p:cNvPr id="28" name="">
             <a:extLst xmlns:a="http://schemas.openxmlformats.org/drawingml/2006/main">
               <a:ext uri="{FF2B5EF4-FFF2-40B4-BE49-F238E27FC236}">
-                <a16:creationId xmlns:a16="http://schemas.microsoft.com/office/drawing/2014/main" id="{9442293E-0710-4589-B400-208D1DC1BE71}"/>
+                <a16:creationId xmlns:a16="http://schemas.microsoft.com/office/drawing/2014/main" id="{3A3214F0-A4A9-46D9-93A8-9BF0C9EBFC23}"/>
               </a:ext>
             </a:extLst>
           </p:cNvPr>
@@ -20787,7 +20787,7 @@
           <p:cNvPr id="29" name="">
             <a:extLst xmlns:a="http://schemas.openxmlformats.org/drawingml/2006/main">
               <a:ext uri="{FF2B5EF4-FFF2-40B4-BE49-F238E27FC236}">
-                <a16:creationId xmlns:a16="http://schemas.microsoft.com/office/drawing/2014/main" id="{4788ECD3-D51D-4155-A4A1-0A2527C61443}"/>
+                <a16:creationId xmlns:a16="http://schemas.microsoft.com/office/drawing/2014/main" id="{34831B7A-A383-4B0B-BD90-D30D6D5D24CB}"/>
               </a:ext>
             </a:extLst>
           </p:cNvPr>
@@ -20845,7 +20845,7 @@
           <p:cNvPr id="30" name="">
             <a:extLst xmlns:a="http://schemas.openxmlformats.org/drawingml/2006/main">
               <a:ext uri="{FF2B5EF4-FFF2-40B4-BE49-F238E27FC236}">
-                <a16:creationId xmlns:a16="http://schemas.microsoft.com/office/drawing/2014/main" id="{18C06DF2-EFDD-4E48-BDFE-938378321358}"/>
+                <a16:creationId xmlns:a16="http://schemas.microsoft.com/office/drawing/2014/main" id="{F92A545F-D943-4E61-9892-09F4FEDF5FD0}"/>
               </a:ext>
             </a:extLst>
           </p:cNvPr>
@@ -20903,7 +20903,7 @@
           <p:cNvPr id="31" name="">
             <a:extLst xmlns:a="http://schemas.openxmlformats.org/drawingml/2006/main">
               <a:ext uri="{FF2B5EF4-FFF2-40B4-BE49-F238E27FC236}">
-                <a16:creationId xmlns:a16="http://schemas.microsoft.com/office/drawing/2014/main" id="{6C25B0D8-2AA7-4213-9AEF-0E1907F6A408}"/>
+                <a16:creationId xmlns:a16="http://schemas.microsoft.com/office/drawing/2014/main" id="{54C4A42A-F3A6-4E91-8CF3-4961DC62DCFF}"/>
               </a:ext>
             </a:extLst>
           </p:cNvPr>
@@ -20961,7 +20961,7 @@
           <p:cNvPr id="32" name="">
             <a:extLst xmlns:a="http://schemas.openxmlformats.org/drawingml/2006/main">
               <a:ext uri="{FF2B5EF4-FFF2-40B4-BE49-F238E27FC236}">
-                <a16:creationId xmlns:a16="http://schemas.microsoft.com/office/drawing/2014/main" id="{8B8824FA-068A-440A-BBE7-3EB8D2305823}"/>
+                <a16:creationId xmlns:a16="http://schemas.microsoft.com/office/drawing/2014/main" id="{C1A98A61-E4C8-4708-9095-93CF0096672D}"/>
               </a:ext>
             </a:extLst>
           </p:cNvPr>
@@ -20994,7 +20994,7 @@
           <p:cNvPr id="33" name="">
             <a:extLst xmlns:a="http://schemas.openxmlformats.org/drawingml/2006/main">
               <a:ext uri="{FF2B5EF4-FFF2-40B4-BE49-F238E27FC236}">
-                <a16:creationId xmlns:a16="http://schemas.microsoft.com/office/drawing/2014/main" id="{6D25D97B-86E7-41CC-A6BC-020C292B89C4}"/>
+                <a16:creationId xmlns:a16="http://schemas.microsoft.com/office/drawing/2014/main" id="{C98C9756-EE51-4199-BE4E-FF445B05FCFF}"/>
               </a:ext>
             </a:extLst>
           </p:cNvPr>
@@ -21052,7 +21052,7 @@
           <p:cNvPr id="34" name="">
             <a:extLst xmlns:a="http://schemas.openxmlformats.org/drawingml/2006/main">
               <a:ext uri="{FF2B5EF4-FFF2-40B4-BE49-F238E27FC236}">
-                <a16:creationId xmlns:a16="http://schemas.microsoft.com/office/drawing/2014/main" id="{9F581AF1-81DB-4717-8573-1AE8ABE1D750}"/>
+                <a16:creationId xmlns:a16="http://schemas.microsoft.com/office/drawing/2014/main" id="{0CA31FA8-7C3C-4C05-B41E-68EA1A7B3CAC}"/>
               </a:ext>
             </a:extLst>
           </p:cNvPr>
@@ -21110,7 +21110,7 @@
           <p:cNvPr id="35" name="">
             <a:extLst xmlns:a="http://schemas.openxmlformats.org/drawingml/2006/main">
               <a:ext uri="{FF2B5EF4-FFF2-40B4-BE49-F238E27FC236}">
-                <a16:creationId xmlns:a16="http://schemas.microsoft.com/office/drawing/2014/main" id="{62BA36F3-844E-4FB5-8D4D-63AA405496D4}"/>
+                <a16:creationId xmlns:a16="http://schemas.microsoft.com/office/drawing/2014/main" id="{F293142E-6507-4F5B-98D7-1589B26B1573}"/>
               </a:ext>
             </a:extLst>
           </p:cNvPr>
@@ -21143,7 +21143,7 @@
           <p:cNvPr id="36" name="">
             <a:extLst xmlns:a="http://schemas.openxmlformats.org/drawingml/2006/main">
               <a:ext uri="{FF2B5EF4-FFF2-40B4-BE49-F238E27FC236}">
-                <a16:creationId xmlns:a16="http://schemas.microsoft.com/office/drawing/2014/main" id="{35BCB617-69FA-4249-AA43-3E10A208B8CF}"/>
+                <a16:creationId xmlns:a16="http://schemas.microsoft.com/office/drawing/2014/main" id="{81E4D14F-75CD-4999-A063-0DC0EED211A0}"/>
               </a:ext>
             </a:extLst>
           </p:cNvPr>
@@ -21201,7 +21201,7 @@
           <p:cNvPr id="37" name="">
             <a:extLst xmlns:a="http://schemas.openxmlformats.org/drawingml/2006/main">
               <a:ext uri="{FF2B5EF4-FFF2-40B4-BE49-F238E27FC236}">
-                <a16:creationId xmlns:a16="http://schemas.microsoft.com/office/drawing/2014/main" id="{CF085CC2-C310-46A0-B299-9CBF01F4546A}"/>
+                <a16:creationId xmlns:a16="http://schemas.microsoft.com/office/drawing/2014/main" id="{9F8F1913-95F6-4CC0-84FF-2C66A6A1C4F9}"/>
               </a:ext>
             </a:extLst>
           </p:cNvPr>
@@ -21234,7 +21234,7 @@
           <p:cNvPr id="38" name="">
             <a:extLst xmlns:a="http://schemas.openxmlformats.org/drawingml/2006/main">
               <a:ext uri="{FF2B5EF4-FFF2-40B4-BE49-F238E27FC236}">
-                <a16:creationId xmlns:a16="http://schemas.microsoft.com/office/drawing/2014/main" id="{2FD8CB5B-F5BA-4365-8A63-43E9A03999F8}"/>
+                <a16:creationId xmlns:a16="http://schemas.microsoft.com/office/drawing/2014/main" id="{CFBC1EE6-EF0B-498C-9E72-C71A91E83E6E}"/>
               </a:ext>
             </a:extLst>
           </p:cNvPr>
@@ -21292,7 +21292,7 @@
           <p:cNvPr id="39" name="">
             <a:extLst xmlns:a="http://schemas.openxmlformats.org/drawingml/2006/main">
               <a:ext uri="{FF2B5EF4-FFF2-40B4-BE49-F238E27FC236}">
-                <a16:creationId xmlns:a16="http://schemas.microsoft.com/office/drawing/2014/main" id="{6E1240C5-415E-4503-BABA-40DB71F4D245}"/>
+                <a16:creationId xmlns:a16="http://schemas.microsoft.com/office/drawing/2014/main" id="{EC3D593A-8F06-45FA-AED6-8FD73CD4BF9B}"/>
               </a:ext>
             </a:extLst>
           </p:cNvPr>
@@ -21350,7 +21350,7 @@
           <p:cNvPr id="40" name="">
             <a:extLst xmlns:a="http://schemas.openxmlformats.org/drawingml/2006/main">
               <a:ext uri="{FF2B5EF4-FFF2-40B4-BE49-F238E27FC236}">
-                <a16:creationId xmlns:a16="http://schemas.microsoft.com/office/drawing/2014/main" id="{A7C21319-4890-406D-A877-531ABC0E0D30}"/>
+                <a16:creationId xmlns:a16="http://schemas.microsoft.com/office/drawing/2014/main" id="{73F9C237-7A2A-4646-870A-214F66C22FF7}"/>
               </a:ext>
             </a:extLst>
           </p:cNvPr>
@@ -21383,7 +21383,7 @@
           <p:cNvPr id="41" name="">
             <a:extLst xmlns:a="http://schemas.openxmlformats.org/drawingml/2006/main">
               <a:ext uri="{FF2B5EF4-FFF2-40B4-BE49-F238E27FC236}">
-                <a16:creationId xmlns:a16="http://schemas.microsoft.com/office/drawing/2014/main" id="{A5C4818E-AA1C-4FC3-A351-C1E74140E58E}"/>
+                <a16:creationId xmlns:a16="http://schemas.microsoft.com/office/drawing/2014/main" id="{59679D82-DFB4-4DFB-9C0B-9BB1DB4FCB4B}"/>
               </a:ext>
             </a:extLst>
           </p:cNvPr>
@@ -21441,7 +21441,7 @@
           <p:cNvPr id="42" name="">
             <a:extLst xmlns:a="http://schemas.openxmlformats.org/drawingml/2006/main">
               <a:ext uri="{FF2B5EF4-FFF2-40B4-BE49-F238E27FC236}">
-                <a16:creationId xmlns:a16="http://schemas.microsoft.com/office/drawing/2014/main" id="{B39C6742-B5C4-4E6D-A880-82BECE04C271}"/>
+                <a16:creationId xmlns:a16="http://schemas.microsoft.com/office/drawing/2014/main" id="{A7A388A2-D68D-4960-8893-187D9BF7BA8E}"/>
               </a:ext>
             </a:extLst>
           </p:cNvPr>
@@ -21474,7 +21474,7 @@
           <p:cNvPr id="43" name="">
             <a:extLst xmlns:a="http://schemas.openxmlformats.org/drawingml/2006/main">
               <a:ext uri="{FF2B5EF4-FFF2-40B4-BE49-F238E27FC236}">
-                <a16:creationId xmlns:a16="http://schemas.microsoft.com/office/drawing/2014/main" id="{D1FD3CDA-21A5-41E2-91A9-5CCD7B448CDC}"/>
+                <a16:creationId xmlns:a16="http://schemas.microsoft.com/office/drawing/2014/main" id="{043A0491-8442-46C9-B411-189F2F03E9DF}"/>
               </a:ext>
             </a:extLst>
           </p:cNvPr>
@@ -21532,7 +21532,7 @@
           <p:cNvPr id="44" name="">
             <a:extLst xmlns:a="http://schemas.openxmlformats.org/drawingml/2006/main">
               <a:ext uri="{FF2B5EF4-FFF2-40B4-BE49-F238E27FC236}">
-                <a16:creationId xmlns:a16="http://schemas.microsoft.com/office/drawing/2014/main" id="{9DF3C837-DEB1-4123-BAFF-CE66486ED48C}"/>
+                <a16:creationId xmlns:a16="http://schemas.microsoft.com/office/drawing/2014/main" id="{BC3C59C2-7AEA-4B79-8359-2F7AA3A841AE}"/>
               </a:ext>
             </a:extLst>
           </p:cNvPr>
@@ -21590,7 +21590,7 @@
           <p:cNvPr id="45" name="">
             <a:extLst xmlns:a="http://schemas.openxmlformats.org/drawingml/2006/main">
               <a:ext uri="{FF2B5EF4-FFF2-40B4-BE49-F238E27FC236}">
-                <a16:creationId xmlns:a16="http://schemas.microsoft.com/office/drawing/2014/main" id="{BDB59C62-ECF4-484D-8484-CFBD18CAC281}"/>
+                <a16:creationId xmlns:a16="http://schemas.microsoft.com/office/drawing/2014/main" id="{7C95905A-B654-449F-B141-069010425482}"/>
               </a:ext>
             </a:extLst>
           </p:cNvPr>
@@ -21623,7 +21623,7 @@
           <p:cNvPr id="46" name="">
             <a:extLst xmlns:a="http://schemas.openxmlformats.org/drawingml/2006/main">
               <a:ext uri="{FF2B5EF4-FFF2-40B4-BE49-F238E27FC236}">
-                <a16:creationId xmlns:a16="http://schemas.microsoft.com/office/drawing/2014/main" id="{A9FC1970-0EE6-49EE-AF20-CDF09E3FD213}"/>
+                <a16:creationId xmlns:a16="http://schemas.microsoft.com/office/drawing/2014/main" id="{C40BEE4D-F8C8-4BA8-AAD3-67E4DF7DB557}"/>
               </a:ext>
             </a:extLst>
           </p:cNvPr>
@@ -21681,7 +21681,7 @@
           <p:cNvPr id="47" name="">
             <a:extLst xmlns:a="http://schemas.openxmlformats.org/drawingml/2006/main">
               <a:ext uri="{FF2B5EF4-FFF2-40B4-BE49-F238E27FC236}">
-                <a16:creationId xmlns:a16="http://schemas.microsoft.com/office/drawing/2014/main" id="{6227C005-F32E-497D-814B-F8494E3C4F4D}"/>
+                <a16:creationId xmlns:a16="http://schemas.microsoft.com/office/drawing/2014/main" id="{57060E3E-FF4D-418B-927C-94FF45D70619}"/>
               </a:ext>
             </a:extLst>
           </p:cNvPr>
@@ -21714,7 +21714,7 @@
           <p:cNvPr id="48" name="">
             <a:extLst xmlns:a="http://schemas.openxmlformats.org/drawingml/2006/main">
               <a:ext uri="{FF2B5EF4-FFF2-40B4-BE49-F238E27FC236}">
-                <a16:creationId xmlns:a16="http://schemas.microsoft.com/office/drawing/2014/main" id="{3E6776CE-0F1F-466B-98D3-094ED59784B5}"/>
+                <a16:creationId xmlns:a16="http://schemas.microsoft.com/office/drawing/2014/main" id="{88F71628-9932-4C53-A667-7E15912155EE}"/>
               </a:ext>
             </a:extLst>
           </p:cNvPr>
@@ -21772,7 +21772,7 @@
           <p:cNvPr id="49" name="">
             <a:extLst xmlns:a="http://schemas.openxmlformats.org/drawingml/2006/main">
               <a:ext uri="{FF2B5EF4-FFF2-40B4-BE49-F238E27FC236}">
-                <a16:creationId xmlns:a16="http://schemas.microsoft.com/office/drawing/2014/main" id="{5A0206EF-BDA5-43A9-A810-DDC37509A153}"/>
+                <a16:creationId xmlns:a16="http://schemas.microsoft.com/office/drawing/2014/main" id="{3AB13880-1308-4EFA-95E5-BB956CFAD70F}"/>
               </a:ext>
             </a:extLst>
           </p:cNvPr>
@@ -21830,7 +21830,7 @@
           <p:cNvPr id="50" name="">
             <a:extLst xmlns:a="http://schemas.openxmlformats.org/drawingml/2006/main">
               <a:ext uri="{FF2B5EF4-FFF2-40B4-BE49-F238E27FC236}">
-                <a16:creationId xmlns:a16="http://schemas.microsoft.com/office/drawing/2014/main" id="{A838B311-7C40-47CE-8D4F-04F66A170EB7}"/>
+                <a16:creationId xmlns:a16="http://schemas.microsoft.com/office/drawing/2014/main" id="{B8EBFD8F-5CC7-4EBA-90CF-9CCE12220629}"/>
               </a:ext>
             </a:extLst>
           </p:cNvPr>
@@ -21863,7 +21863,7 @@
           <p:cNvPr id="51" name="">
             <a:extLst xmlns:a="http://schemas.openxmlformats.org/drawingml/2006/main">
               <a:ext uri="{FF2B5EF4-FFF2-40B4-BE49-F238E27FC236}">
-                <a16:creationId xmlns:a16="http://schemas.microsoft.com/office/drawing/2014/main" id="{237CCE0B-9E93-49A1-8C20-7A8CAF11B220}"/>
+                <a16:creationId xmlns:a16="http://schemas.microsoft.com/office/drawing/2014/main" id="{A1A9A460-B780-4E3F-83EC-3ABBF9D5BF44}"/>
               </a:ext>
             </a:extLst>
           </p:cNvPr>
@@ -21921,7 +21921,7 @@
           <p:cNvPr id="52" name="">
             <a:extLst xmlns:a="http://schemas.openxmlformats.org/drawingml/2006/main">
               <a:ext uri="{FF2B5EF4-FFF2-40B4-BE49-F238E27FC236}">
-                <a16:creationId xmlns:a16="http://schemas.microsoft.com/office/drawing/2014/main" id="{15DE2F47-4A9E-4529-B680-F28422DA20CE}"/>
+                <a16:creationId xmlns:a16="http://schemas.microsoft.com/office/drawing/2014/main" id="{648E214E-9F93-4DC6-921D-993EDFE41974}"/>
               </a:ext>
             </a:extLst>
           </p:cNvPr>
@@ -21954,7 +21954,7 @@
           <p:cNvPr id="53" name="">
             <a:extLst xmlns:a="http://schemas.openxmlformats.org/drawingml/2006/main">
               <a:ext uri="{FF2B5EF4-FFF2-40B4-BE49-F238E27FC236}">
-                <a16:creationId xmlns:a16="http://schemas.microsoft.com/office/drawing/2014/main" id="{B6D0E3A8-4955-4667-B795-2426542663CE}"/>
+                <a16:creationId xmlns:a16="http://schemas.microsoft.com/office/drawing/2014/main" id="{DFAC4535-A2E0-4CAD-A906-97DFDF5CDFA0}"/>
               </a:ext>
             </a:extLst>
           </p:cNvPr>
@@ -22012,7 +22012,7 @@
           <p:cNvPr id="54" name="">
             <a:extLst xmlns:a="http://schemas.openxmlformats.org/drawingml/2006/main">
               <a:ext uri="{FF2B5EF4-FFF2-40B4-BE49-F238E27FC236}">
-                <a16:creationId xmlns:a16="http://schemas.microsoft.com/office/drawing/2014/main" id="{CB1B1B8C-5D61-4301-838F-8B4A561B2EF4}"/>
+                <a16:creationId xmlns:a16="http://schemas.microsoft.com/office/drawing/2014/main" id="{291AC5D1-B861-41A6-A564-A4CD2A7117D6}"/>
               </a:ext>
             </a:extLst>
           </p:cNvPr>
@@ -22070,7 +22070,7 @@
           <p:cNvPr id="55" name="">
             <a:extLst xmlns:a="http://schemas.openxmlformats.org/drawingml/2006/main">
               <a:ext uri="{FF2B5EF4-FFF2-40B4-BE49-F238E27FC236}">
-                <a16:creationId xmlns:a16="http://schemas.microsoft.com/office/drawing/2014/main" id="{D379E6DB-6826-4694-83A3-FEC011E91ABD}"/>
+                <a16:creationId xmlns:a16="http://schemas.microsoft.com/office/drawing/2014/main" id="{F273FCBE-A217-4E8F-96A5-C3673BAED75C}"/>
               </a:ext>
             </a:extLst>
           </p:cNvPr>
@@ -22103,7 +22103,7 @@
           <p:cNvPr id="56" name="">
             <a:extLst xmlns:a="http://schemas.openxmlformats.org/drawingml/2006/main">
               <a:ext uri="{FF2B5EF4-FFF2-40B4-BE49-F238E27FC236}">
-                <a16:creationId xmlns:a16="http://schemas.microsoft.com/office/drawing/2014/main" id="{F1692D36-9FD2-4DE3-A3D3-547B7ADC2BC5}"/>
+                <a16:creationId xmlns:a16="http://schemas.microsoft.com/office/drawing/2014/main" id="{6CBA5264-21AE-4009-8E20-E243E4D5AADF}"/>
               </a:ext>
             </a:extLst>
           </p:cNvPr>
@@ -22161,7 +22161,7 @@
           <p:cNvPr id="57" name="">
             <a:extLst xmlns:a="http://schemas.openxmlformats.org/drawingml/2006/main">
               <a:ext uri="{FF2B5EF4-FFF2-40B4-BE49-F238E27FC236}">
-                <a16:creationId xmlns:a16="http://schemas.microsoft.com/office/drawing/2014/main" id="{004F582D-DEDE-4DDD-8EF3-37835FA84BA7}"/>
+                <a16:creationId xmlns:a16="http://schemas.microsoft.com/office/drawing/2014/main" id="{E9EAEE6C-6864-40EE-87FA-186DBE015BBD}"/>
               </a:ext>
             </a:extLst>
           </p:cNvPr>
@@ -22194,7 +22194,7 @@
           <p:cNvPr id="58" name="">
             <a:extLst xmlns:a="http://schemas.openxmlformats.org/drawingml/2006/main">
               <a:ext uri="{FF2B5EF4-FFF2-40B4-BE49-F238E27FC236}">
-                <a16:creationId xmlns:a16="http://schemas.microsoft.com/office/drawing/2014/main" id="{9239AAD9-BDC6-4A36-AC98-0B8392A6037C}"/>
+                <a16:creationId xmlns:a16="http://schemas.microsoft.com/office/drawing/2014/main" id="{009B1722-54AA-43D5-BF84-596DD6AC3AD2}"/>
               </a:ext>
             </a:extLst>
           </p:cNvPr>
@@ -22252,7 +22252,7 @@
           <p:cNvPr id="59" name="">
             <a:extLst xmlns:a="http://schemas.openxmlformats.org/drawingml/2006/main">
               <a:ext uri="{FF2B5EF4-FFF2-40B4-BE49-F238E27FC236}">
-                <a16:creationId xmlns:a16="http://schemas.microsoft.com/office/drawing/2014/main" id="{66604ABF-FB26-4268-BC8F-ED21650D8BBA}"/>
+                <a16:creationId xmlns:a16="http://schemas.microsoft.com/office/drawing/2014/main" id="{22944257-9128-4743-9650-37680850289E}"/>
               </a:ext>
             </a:extLst>
           </p:cNvPr>
@@ -22310,7 +22310,7 @@
           <p:cNvPr id="60" name="">
             <a:extLst xmlns:a="http://schemas.openxmlformats.org/drawingml/2006/main">
               <a:ext uri="{FF2B5EF4-FFF2-40B4-BE49-F238E27FC236}">
-                <a16:creationId xmlns:a16="http://schemas.microsoft.com/office/drawing/2014/main" id="{38F98C22-DEDB-4F14-BA81-E9B199C3392C}"/>
+                <a16:creationId xmlns:a16="http://schemas.microsoft.com/office/drawing/2014/main" id="{078BC400-D381-4B25-B8C7-C34BFC732E7E}"/>
               </a:ext>
             </a:extLst>
           </p:cNvPr>
@@ -22343,7 +22343,7 @@
           <p:cNvPr id="61" name="">
             <a:extLst xmlns:a="http://schemas.openxmlformats.org/drawingml/2006/main">
               <a:ext uri="{FF2B5EF4-FFF2-40B4-BE49-F238E27FC236}">
-                <a16:creationId xmlns:a16="http://schemas.microsoft.com/office/drawing/2014/main" id="{67E2A80B-B1D6-4494-9A77-38FBF1BBACB1}"/>
+                <a16:creationId xmlns:a16="http://schemas.microsoft.com/office/drawing/2014/main" id="{2F1B7F6A-2393-4956-B526-13E314CCEF63}"/>
               </a:ext>
             </a:extLst>
           </p:cNvPr>
@@ -22401,7 +22401,7 @@
           <p:cNvPr id="62" name="">
             <a:extLst xmlns:a="http://schemas.openxmlformats.org/drawingml/2006/main">
               <a:ext uri="{FF2B5EF4-FFF2-40B4-BE49-F238E27FC236}">
-                <a16:creationId xmlns:a16="http://schemas.microsoft.com/office/drawing/2014/main" id="{FBC70FB7-9814-41C6-BC31-2839D433363C}"/>
+                <a16:creationId xmlns:a16="http://schemas.microsoft.com/office/drawing/2014/main" id="{6B0932AC-B77D-471C-AFE0-0BEE92678BC6}"/>
               </a:ext>
             </a:extLst>
           </p:cNvPr>
@@ -22434,7 +22434,7 @@
           <p:cNvPr id="63" name="">
             <a:extLst xmlns:a="http://schemas.openxmlformats.org/drawingml/2006/main">
               <a:ext uri="{FF2B5EF4-FFF2-40B4-BE49-F238E27FC236}">
-                <a16:creationId xmlns:a16="http://schemas.microsoft.com/office/drawing/2014/main" id="{790F4907-C340-4037-9AB3-32976F842D13}"/>
+                <a16:creationId xmlns:a16="http://schemas.microsoft.com/office/drawing/2014/main" id="{234560B5-4610-4926-B59B-A2C956EC37D4}"/>
               </a:ext>
             </a:extLst>
           </p:cNvPr>
@@ -22492,7 +22492,7 @@
           <p:cNvPr id="64" name="">
             <a:extLst xmlns:a="http://schemas.openxmlformats.org/drawingml/2006/main">
               <a:ext uri="{FF2B5EF4-FFF2-40B4-BE49-F238E27FC236}">
-                <a16:creationId xmlns:a16="http://schemas.microsoft.com/office/drawing/2014/main" id="{9CB70CBB-D708-4144-93DE-F949F79E9A5C}"/>
+                <a16:creationId xmlns:a16="http://schemas.microsoft.com/office/drawing/2014/main" id="{53E260A2-B340-43C6-9BA2-82059F206B4D}"/>
               </a:ext>
             </a:extLst>
           </p:cNvPr>
@@ -22550,7 +22550,7 @@
           <p:cNvPr id="65" name="">
             <a:extLst xmlns:a="http://schemas.openxmlformats.org/drawingml/2006/main">
               <a:ext uri="{FF2B5EF4-FFF2-40B4-BE49-F238E27FC236}">
-                <a16:creationId xmlns:a16="http://schemas.microsoft.com/office/drawing/2014/main" id="{3DE90067-FCF4-4E99-9E68-9449388539A8}"/>
+                <a16:creationId xmlns:a16="http://schemas.microsoft.com/office/drawing/2014/main" id="{E450B828-369F-4648-B6EB-2F469BBDDDBE}"/>
               </a:ext>
             </a:extLst>
           </p:cNvPr>
@@ -22583,7 +22583,7 @@
           <p:cNvPr id="66" name="">
             <a:extLst xmlns:a="http://schemas.openxmlformats.org/drawingml/2006/main">
               <a:ext uri="{FF2B5EF4-FFF2-40B4-BE49-F238E27FC236}">
-                <a16:creationId xmlns:a16="http://schemas.microsoft.com/office/drawing/2014/main" id="{F226E28E-9DD3-49BF-82CF-8DA8DCA718E4}"/>
+                <a16:creationId xmlns:a16="http://schemas.microsoft.com/office/drawing/2014/main" id="{F7B53FB0-BBF4-4DFD-B83A-798D5E005694}"/>
               </a:ext>
             </a:extLst>
           </p:cNvPr>
@@ -22641,7 +22641,7 @@
                 <a:latin typeface="Microsoft YaHei"/>
                 <a:ea typeface="Microsoft YaHei"/>
                 <a:cs typeface="Microsoft YaHei"/>
-                <a:hlinkClick xmlns:r="http://schemas.openxmlformats.org/officeDocument/2006/relationships" r:id="R3ebbb8507d1945d5"/>
+                <a:hlinkClick xmlns:r="http://schemas.openxmlformats.org/officeDocument/2006/relationships" r:id="R7954ea22a92b4f35"/>
               </a:rPr>
               <a:t>智谱：常用工作流</a:t>
             </a:r>
@@ -22653,7 +22653,7 @@
           <p:cNvPr id="67" name="">
             <a:extLst xmlns:a="http://schemas.openxmlformats.org/drawingml/2006/main">
               <a:ext uri="{FF2B5EF4-FFF2-40B4-BE49-F238E27FC236}">
-                <a16:creationId xmlns:a16="http://schemas.microsoft.com/office/drawing/2014/main" id="{DDF6B4B2-88A9-4684-953D-12170AA15D9F}"/>
+                <a16:creationId xmlns:a16="http://schemas.microsoft.com/office/drawing/2014/main" id="{ABAB43D3-B26C-4648-9611-239B9E95E16D}"/>
               </a:ext>
             </a:extLst>
           </p:cNvPr>
@@ -22709,7 +22709,7 @@
     </p:spTree>
     <p:extLst>
       <p:ext uri="{BB962C8B-B14F-4D97-AF65-F5344CB8AC3E}">
-        <p14:creationId xmlns:p14="http://schemas.microsoft.com/office/powerpoint/2010/main" val="739004540"/>
+        <p14:creationId xmlns:p14="http://schemas.microsoft.com/office/powerpoint/2010/main" val="1832295653"/>
       </p:ext>
     </p:extLst>
   </p:cSld>
@@ -22740,7 +22740,7 @@
           <p:cNvPr id="38" name="">
             <a:extLst xmlns:a="http://schemas.openxmlformats.org/drawingml/2006/main">
               <a:ext uri="{FF2B5EF4-FFF2-40B4-BE49-F238E27FC236}">
-                <a16:creationId xmlns:a16="http://schemas.microsoft.com/office/drawing/2014/main" id="{84210CF7-E3B2-4F03-9291-04C7D1DA9DED}"/>
+                <a16:creationId xmlns:a16="http://schemas.microsoft.com/office/drawing/2014/main" id="{81236845-D641-40D5-B2B0-1011CE7D1D9F}"/>
               </a:ext>
             </a:extLst>
           </p:cNvPr>
@@ -22773,7 +22773,7 @@
           <p:cNvPr id="2" name="">
             <a:extLst xmlns:a="http://schemas.openxmlformats.org/drawingml/2006/main">
               <a:ext uri="{FF2B5EF4-FFF2-40B4-BE49-F238E27FC236}">
-                <a16:creationId xmlns:a16="http://schemas.microsoft.com/office/drawing/2014/main" id="{7C3F5F38-964C-443E-8AB1-9CD32557C491}"/>
+                <a16:creationId xmlns:a16="http://schemas.microsoft.com/office/drawing/2014/main" id="{CC1CC63D-748B-42FA-8F69-549F75EB48CF}"/>
               </a:ext>
             </a:extLst>
           </p:cNvPr>
@@ -22831,7 +22831,7 @@
           <p:cNvPr id="3" name="">
             <a:extLst xmlns:a="http://schemas.openxmlformats.org/drawingml/2006/main">
               <a:ext uri="{FF2B5EF4-FFF2-40B4-BE49-F238E27FC236}">
-                <a16:creationId xmlns:a16="http://schemas.microsoft.com/office/drawing/2014/main" id="{1004F2AF-6501-4488-9E8C-840008F513AC}"/>
+                <a16:creationId xmlns:a16="http://schemas.microsoft.com/office/drawing/2014/main" id="{06C274AC-ABDC-4BA8-AB86-DB9D82E3C158}"/>
               </a:ext>
             </a:extLst>
           </p:cNvPr>
@@ -22863,7 +22863,7 @@
             <a:pPr algn="l">
               <a:defRPr sz="2325" b="1">
                 <a:solidFill>
-                  <a:srgbClr val="1D1D1A"/>
+                  <a:srgbClr val="8A0F17"/>
                 </a:solidFill>
                 <a:latin typeface="Microsoft YaHei"/>
                 <a:ea typeface="Microsoft YaHei"/>
@@ -22873,7 +22873,7 @@
             <a:r>
               <a:rPr sz="2325" b="1">
                 <a:solidFill>
-                  <a:srgbClr val="1D1D1A"/>
+                  <a:srgbClr val="8A0F17"/>
                 </a:solidFill>
                 <a:latin typeface="Microsoft YaHei"/>
                 <a:ea typeface="Microsoft YaHei"/>
@@ -22889,7 +22889,7 @@
           <p:cNvPr id="4" name="">
             <a:extLst xmlns:a="http://schemas.openxmlformats.org/drawingml/2006/main">
               <a:ext uri="{FF2B5EF4-FFF2-40B4-BE49-F238E27FC236}">
-                <a16:creationId xmlns:a16="http://schemas.microsoft.com/office/drawing/2014/main" id="{C0710090-3DC2-4772-B179-1A77CF9D87C3}"/>
+                <a16:creationId xmlns:a16="http://schemas.microsoft.com/office/drawing/2014/main" id="{D2C1D6CC-270B-4A6D-951A-5A0E9B2D5410}"/>
               </a:ext>
             </a:extLst>
           </p:cNvPr>
@@ -22922,7 +22922,7 @@
           <p:cNvPr id="5" name="">
             <a:extLst xmlns:a="http://schemas.openxmlformats.org/drawingml/2006/main">
               <a:ext uri="{FF2B5EF4-FFF2-40B4-BE49-F238E27FC236}">
-                <a16:creationId xmlns:a16="http://schemas.microsoft.com/office/drawing/2014/main" id="{E4E527D9-FDC0-4F4A-A6DB-1EF82B160768}"/>
+                <a16:creationId xmlns:a16="http://schemas.microsoft.com/office/drawing/2014/main" id="{027C14FC-B020-4510-80D2-6B03805DB2C8}"/>
               </a:ext>
             </a:extLst>
           </p:cNvPr>
@@ -22980,7 +22980,7 @@
           <p:cNvPr id="6" name="">
             <a:extLst xmlns:a="http://schemas.openxmlformats.org/drawingml/2006/main">
               <a:ext uri="{FF2B5EF4-FFF2-40B4-BE49-F238E27FC236}">
-                <a16:creationId xmlns:a16="http://schemas.microsoft.com/office/drawing/2014/main" id="{F077752A-F149-4EB2-AB03-83296C1977A7}"/>
+                <a16:creationId xmlns:a16="http://schemas.microsoft.com/office/drawing/2014/main" id="{0DC45E7B-6A84-48FC-9B14-57490072E290}"/>
               </a:ext>
             </a:extLst>
           </p:cNvPr>
@@ -23038,7 +23038,7 @@
           <p:cNvPr id="7" name="">
             <a:extLst xmlns:a="http://schemas.openxmlformats.org/drawingml/2006/main">
               <a:ext uri="{FF2B5EF4-FFF2-40B4-BE49-F238E27FC236}">
-                <a16:creationId xmlns:a16="http://schemas.microsoft.com/office/drawing/2014/main" id="{4878D3BE-9F4E-4160-BCF0-59DF36F0FECD}"/>
+                <a16:creationId xmlns:a16="http://schemas.microsoft.com/office/drawing/2014/main" id="{868B9533-EB3A-4BC4-85B7-A68FCBF27752}"/>
               </a:ext>
             </a:extLst>
           </p:cNvPr>
@@ -23096,7 +23096,7 @@
           <p:cNvPr id="8" name="">
             <a:extLst xmlns:a="http://schemas.openxmlformats.org/drawingml/2006/main">
               <a:ext uri="{FF2B5EF4-FFF2-40B4-BE49-F238E27FC236}">
-                <a16:creationId xmlns:a16="http://schemas.microsoft.com/office/drawing/2014/main" id="{035EC89D-2C11-4253-9724-C4615F0E46AA}"/>
+                <a16:creationId xmlns:a16="http://schemas.microsoft.com/office/drawing/2014/main" id="{9705D1FC-5987-4121-BED4-63343E844359}"/>
               </a:ext>
             </a:extLst>
           </p:cNvPr>
@@ -23154,7 +23154,7 @@
           <p:cNvPr id="9" name="">
             <a:extLst xmlns:a="http://schemas.openxmlformats.org/drawingml/2006/main">
               <a:ext uri="{FF2B5EF4-FFF2-40B4-BE49-F238E27FC236}">
-                <a16:creationId xmlns:a16="http://schemas.microsoft.com/office/drawing/2014/main" id="{F5366A15-689A-4EFA-9860-96FF963AA023}"/>
+                <a16:creationId xmlns:a16="http://schemas.microsoft.com/office/drawing/2014/main" id="{5B1F1BD5-DD3E-4CE9-B90D-0ECCFB445A5F}"/>
               </a:ext>
             </a:extLst>
           </p:cNvPr>
@@ -23187,7 +23187,7 @@
           <p:cNvPr id="10" name="">
             <a:extLst xmlns:a="http://schemas.openxmlformats.org/drawingml/2006/main">
               <a:ext uri="{FF2B5EF4-FFF2-40B4-BE49-F238E27FC236}">
-                <a16:creationId xmlns:a16="http://schemas.microsoft.com/office/drawing/2014/main" id="{F52612CC-EDC8-4987-A9BB-77E3F7B03E6D}"/>
+                <a16:creationId xmlns:a16="http://schemas.microsoft.com/office/drawing/2014/main" id="{01557481-F5F2-4875-98B3-07E75DCD8EDD}"/>
               </a:ext>
             </a:extLst>
           </p:cNvPr>
@@ -23245,7 +23245,7 @@
           <p:cNvPr id="11" name="">
             <a:extLst xmlns:a="http://schemas.openxmlformats.org/drawingml/2006/main">
               <a:ext uri="{FF2B5EF4-FFF2-40B4-BE49-F238E27FC236}">
-                <a16:creationId xmlns:a16="http://schemas.microsoft.com/office/drawing/2014/main" id="{77641442-56F7-4C7D-9BCE-843254B41580}"/>
+                <a16:creationId xmlns:a16="http://schemas.microsoft.com/office/drawing/2014/main" id="{B391B35B-8A5A-4E27-8086-3BD9B6D80AE4}"/>
               </a:ext>
             </a:extLst>
           </p:cNvPr>
@@ -23303,7 +23303,7 @@
           <p:cNvPr id="12" name="">
             <a:extLst xmlns:a="http://schemas.openxmlformats.org/drawingml/2006/main">
               <a:ext uri="{FF2B5EF4-FFF2-40B4-BE49-F238E27FC236}">
-                <a16:creationId xmlns:a16="http://schemas.microsoft.com/office/drawing/2014/main" id="{8F473FD5-BD54-4D58-83A0-40E01821402D}"/>
+                <a16:creationId xmlns:a16="http://schemas.microsoft.com/office/drawing/2014/main" id="{05ABF622-8692-46EF-92FC-4C25BCBF3916}"/>
               </a:ext>
             </a:extLst>
           </p:cNvPr>
@@ -23361,7 +23361,7 @@
           <p:cNvPr id="13" name="">
             <a:extLst xmlns:a="http://schemas.openxmlformats.org/drawingml/2006/main">
               <a:ext uri="{FF2B5EF4-FFF2-40B4-BE49-F238E27FC236}">
-                <a16:creationId xmlns:a16="http://schemas.microsoft.com/office/drawing/2014/main" id="{990B482B-35E3-45E5-BEC3-0916A33F2DF5}"/>
+                <a16:creationId xmlns:a16="http://schemas.microsoft.com/office/drawing/2014/main" id="{64173DDF-06B9-49DB-B2EA-CD5782F56A68}"/>
               </a:ext>
             </a:extLst>
           </p:cNvPr>
@@ -23419,7 +23419,7 @@
           <p:cNvPr id="14" name="">
             <a:extLst xmlns:a="http://schemas.openxmlformats.org/drawingml/2006/main">
               <a:ext uri="{FF2B5EF4-FFF2-40B4-BE49-F238E27FC236}">
-                <a16:creationId xmlns:a16="http://schemas.microsoft.com/office/drawing/2014/main" id="{5135FDF9-17C3-4896-8B5D-0861B0C4BDA1}"/>
+                <a16:creationId xmlns:a16="http://schemas.microsoft.com/office/drawing/2014/main" id="{2F7228A5-B326-4DD7-8533-9608DA1FB874}"/>
               </a:ext>
             </a:extLst>
           </p:cNvPr>
@@ -23452,7 +23452,7 @@
           <p:cNvPr id="15" name="">
             <a:extLst xmlns:a="http://schemas.openxmlformats.org/drawingml/2006/main">
               <a:ext uri="{FF2B5EF4-FFF2-40B4-BE49-F238E27FC236}">
-                <a16:creationId xmlns:a16="http://schemas.microsoft.com/office/drawing/2014/main" id="{67665A98-D4E5-40EA-BF82-26D3C8071AAB}"/>
+                <a16:creationId xmlns:a16="http://schemas.microsoft.com/office/drawing/2014/main" id="{3F8EB149-C224-414B-98B8-D525581CA15E}"/>
               </a:ext>
             </a:extLst>
           </p:cNvPr>
@@ -23510,7 +23510,7 @@
           <p:cNvPr id="16" name="">
             <a:extLst xmlns:a="http://schemas.openxmlformats.org/drawingml/2006/main">
               <a:ext uri="{FF2B5EF4-FFF2-40B4-BE49-F238E27FC236}">
-                <a16:creationId xmlns:a16="http://schemas.microsoft.com/office/drawing/2014/main" id="{080F3E1B-0D5D-4D10-91E2-A0EF42FCF0E4}"/>
+                <a16:creationId xmlns:a16="http://schemas.microsoft.com/office/drawing/2014/main" id="{F856BB67-802D-4765-ACDB-08164AF9305C}"/>
               </a:ext>
             </a:extLst>
           </p:cNvPr>
@@ -23568,7 +23568,7 @@
           <p:cNvPr id="17" name="">
             <a:extLst xmlns:a="http://schemas.openxmlformats.org/drawingml/2006/main">
               <a:ext uri="{FF2B5EF4-FFF2-40B4-BE49-F238E27FC236}">
-                <a16:creationId xmlns:a16="http://schemas.microsoft.com/office/drawing/2014/main" id="{73991087-DD5A-4594-A3B4-2815D5B995DA}"/>
+                <a16:creationId xmlns:a16="http://schemas.microsoft.com/office/drawing/2014/main" id="{9077DD57-8CCB-40AE-99E2-F2CAA4DF1265}"/>
               </a:ext>
             </a:extLst>
           </p:cNvPr>
@@ -23626,7 +23626,7 @@
           <p:cNvPr id="18" name="">
             <a:extLst xmlns:a="http://schemas.openxmlformats.org/drawingml/2006/main">
               <a:ext uri="{FF2B5EF4-FFF2-40B4-BE49-F238E27FC236}">
-                <a16:creationId xmlns:a16="http://schemas.microsoft.com/office/drawing/2014/main" id="{DC7FC0A0-76A1-412C-B895-22A91A41E248}"/>
+                <a16:creationId xmlns:a16="http://schemas.microsoft.com/office/drawing/2014/main" id="{F8BC66C1-0F1C-43A7-BE41-54866A987E47}"/>
               </a:ext>
             </a:extLst>
           </p:cNvPr>
@@ -23684,7 +23684,7 @@
           <p:cNvPr id="19" name="">
             <a:extLst xmlns:a="http://schemas.openxmlformats.org/drawingml/2006/main">
               <a:ext uri="{FF2B5EF4-FFF2-40B4-BE49-F238E27FC236}">
-                <a16:creationId xmlns:a16="http://schemas.microsoft.com/office/drawing/2014/main" id="{174A0DB0-9524-416F-95EB-E9C4A5C14664}"/>
+                <a16:creationId xmlns:a16="http://schemas.microsoft.com/office/drawing/2014/main" id="{4E920388-B1F6-40A1-8A4B-473DFC32A6AA}"/>
               </a:ext>
             </a:extLst>
           </p:cNvPr>
@@ -23717,7 +23717,7 @@
           <p:cNvPr id="20" name="">
             <a:extLst xmlns:a="http://schemas.openxmlformats.org/drawingml/2006/main">
               <a:ext uri="{FF2B5EF4-FFF2-40B4-BE49-F238E27FC236}">
-                <a16:creationId xmlns:a16="http://schemas.microsoft.com/office/drawing/2014/main" id="{C8BD2887-EC7E-43CB-8C76-774BFF376415}"/>
+                <a16:creationId xmlns:a16="http://schemas.microsoft.com/office/drawing/2014/main" id="{166B9E02-0B35-4BF1-BE55-35CCFF31664C}"/>
               </a:ext>
             </a:extLst>
           </p:cNvPr>
@@ -23775,7 +23775,7 @@
           <p:cNvPr id="21" name="">
             <a:extLst xmlns:a="http://schemas.openxmlformats.org/drawingml/2006/main">
               <a:ext uri="{FF2B5EF4-FFF2-40B4-BE49-F238E27FC236}">
-                <a16:creationId xmlns:a16="http://schemas.microsoft.com/office/drawing/2014/main" id="{B9432461-0071-4AE7-B86D-E4E99F47B825}"/>
+                <a16:creationId xmlns:a16="http://schemas.microsoft.com/office/drawing/2014/main" id="{ABC220BA-F59D-4C27-9B4D-57E4056E6B2E}"/>
               </a:ext>
             </a:extLst>
           </p:cNvPr>
@@ -23833,7 +23833,7 @@
           <p:cNvPr id="22" name="">
             <a:extLst xmlns:a="http://schemas.openxmlformats.org/drawingml/2006/main">
               <a:ext uri="{FF2B5EF4-FFF2-40B4-BE49-F238E27FC236}">
-                <a16:creationId xmlns:a16="http://schemas.microsoft.com/office/drawing/2014/main" id="{D73CEBE6-6F18-49E5-AE44-E03BE13E68C1}"/>
+                <a16:creationId xmlns:a16="http://schemas.microsoft.com/office/drawing/2014/main" id="{DF95A95B-BCC3-49B7-A3AE-663D7A9DEED7}"/>
               </a:ext>
             </a:extLst>
           </p:cNvPr>
@@ -23891,7 +23891,7 @@
           <p:cNvPr id="23" name="">
             <a:extLst xmlns:a="http://schemas.openxmlformats.org/drawingml/2006/main">
               <a:ext uri="{FF2B5EF4-FFF2-40B4-BE49-F238E27FC236}">
-                <a16:creationId xmlns:a16="http://schemas.microsoft.com/office/drawing/2014/main" id="{0D7078B9-3526-48B1-B962-515EDA0A8CA5}"/>
+                <a16:creationId xmlns:a16="http://schemas.microsoft.com/office/drawing/2014/main" id="{6EDE082A-851B-4C3D-AADD-F149896AB69B}"/>
               </a:ext>
             </a:extLst>
           </p:cNvPr>
@@ -23949,7 +23949,7 @@
           <p:cNvPr id="24" name="">
             <a:extLst xmlns:a="http://schemas.openxmlformats.org/drawingml/2006/main">
               <a:ext uri="{FF2B5EF4-FFF2-40B4-BE49-F238E27FC236}">
-                <a16:creationId xmlns:a16="http://schemas.microsoft.com/office/drawing/2014/main" id="{DCE0F0D3-C9F7-4ECE-A07F-E95BAE7A7D2A}"/>
+                <a16:creationId xmlns:a16="http://schemas.microsoft.com/office/drawing/2014/main" id="{B0129A2E-20A4-4DD8-A83D-F5144C0C58FF}"/>
               </a:ext>
             </a:extLst>
           </p:cNvPr>
@@ -23982,7 +23982,7 @@
           <p:cNvPr id="25" name="">
             <a:extLst xmlns:a="http://schemas.openxmlformats.org/drawingml/2006/main">
               <a:ext uri="{FF2B5EF4-FFF2-40B4-BE49-F238E27FC236}">
-                <a16:creationId xmlns:a16="http://schemas.microsoft.com/office/drawing/2014/main" id="{D9F5D6E1-D213-4472-9CF7-33FD01B1C457}"/>
+                <a16:creationId xmlns:a16="http://schemas.microsoft.com/office/drawing/2014/main" id="{F91CFA58-7680-4B23-9A98-CD40BCB64DF0}"/>
               </a:ext>
             </a:extLst>
           </p:cNvPr>
@@ -24040,7 +24040,7 @@
           <p:cNvPr id="26" name="">
             <a:extLst xmlns:a="http://schemas.openxmlformats.org/drawingml/2006/main">
               <a:ext uri="{FF2B5EF4-FFF2-40B4-BE49-F238E27FC236}">
-                <a16:creationId xmlns:a16="http://schemas.microsoft.com/office/drawing/2014/main" id="{C9B1D50C-3688-41CC-890A-346DFB82F71C}"/>
+                <a16:creationId xmlns:a16="http://schemas.microsoft.com/office/drawing/2014/main" id="{D37E2143-479F-4A09-9EF3-765DF22341AF}"/>
               </a:ext>
             </a:extLst>
           </p:cNvPr>
@@ -24098,7 +24098,7 @@
           <p:cNvPr id="27" name="">
             <a:extLst xmlns:a="http://schemas.openxmlformats.org/drawingml/2006/main">
               <a:ext uri="{FF2B5EF4-FFF2-40B4-BE49-F238E27FC236}">
-                <a16:creationId xmlns:a16="http://schemas.microsoft.com/office/drawing/2014/main" id="{B6139FB9-88DB-484B-AE5C-EB409DC6AA3A}"/>
+                <a16:creationId xmlns:a16="http://schemas.microsoft.com/office/drawing/2014/main" id="{71D98A90-693E-4094-AD22-A3C3154F9E2A}"/>
               </a:ext>
             </a:extLst>
           </p:cNvPr>
@@ -24156,7 +24156,7 @@
           <p:cNvPr id="28" name="">
             <a:extLst xmlns:a="http://schemas.openxmlformats.org/drawingml/2006/main">
               <a:ext uri="{FF2B5EF4-FFF2-40B4-BE49-F238E27FC236}">
-                <a16:creationId xmlns:a16="http://schemas.microsoft.com/office/drawing/2014/main" id="{D19B176D-C241-46CD-8D93-85749A72A9AA}"/>
+                <a16:creationId xmlns:a16="http://schemas.microsoft.com/office/drawing/2014/main" id="{64C5B2F6-12F1-4A43-8ACA-9B7EE24FBBC2}"/>
               </a:ext>
             </a:extLst>
           </p:cNvPr>
@@ -24214,7 +24214,7 @@
           <p:cNvPr id="29" name="">
             <a:extLst xmlns:a="http://schemas.openxmlformats.org/drawingml/2006/main">
               <a:ext uri="{FF2B5EF4-FFF2-40B4-BE49-F238E27FC236}">
-                <a16:creationId xmlns:a16="http://schemas.microsoft.com/office/drawing/2014/main" id="{E89B21D5-8DBC-4F56-9C3D-89749A0CC5B7}"/>
+                <a16:creationId xmlns:a16="http://schemas.microsoft.com/office/drawing/2014/main" id="{3E78C7C1-5FDD-46F2-96E1-02DBC3389AD3}"/>
               </a:ext>
             </a:extLst>
           </p:cNvPr>
@@ -24247,7 +24247,7 @@
           <p:cNvPr id="30" name="">
             <a:extLst xmlns:a="http://schemas.openxmlformats.org/drawingml/2006/main">
               <a:ext uri="{FF2B5EF4-FFF2-40B4-BE49-F238E27FC236}">
-                <a16:creationId xmlns:a16="http://schemas.microsoft.com/office/drawing/2014/main" id="{AEA23CAD-9AC6-4007-B2CB-B0A86104CFF3}"/>
+                <a16:creationId xmlns:a16="http://schemas.microsoft.com/office/drawing/2014/main" id="{F15EBB95-26F8-43D7-9588-941648EF8992}"/>
               </a:ext>
             </a:extLst>
           </p:cNvPr>
@@ -24305,7 +24305,7 @@
           <p:cNvPr id="31" name="">
             <a:extLst xmlns:a="http://schemas.openxmlformats.org/drawingml/2006/main">
               <a:ext uri="{FF2B5EF4-FFF2-40B4-BE49-F238E27FC236}">
-                <a16:creationId xmlns:a16="http://schemas.microsoft.com/office/drawing/2014/main" id="{064A9736-95A0-4882-8D5C-034941B0B2D3}"/>
+                <a16:creationId xmlns:a16="http://schemas.microsoft.com/office/drawing/2014/main" id="{51AA2EAF-CE80-4AFE-830B-1E0CA88A0D7F}"/>
               </a:ext>
             </a:extLst>
           </p:cNvPr>
@@ -24363,7 +24363,7 @@
           <p:cNvPr id="32" name="">
             <a:extLst xmlns:a="http://schemas.openxmlformats.org/drawingml/2006/main">
               <a:ext uri="{FF2B5EF4-FFF2-40B4-BE49-F238E27FC236}">
-                <a16:creationId xmlns:a16="http://schemas.microsoft.com/office/drawing/2014/main" id="{B32A7DB9-F9FC-4319-9336-5548FA9A810B}"/>
+                <a16:creationId xmlns:a16="http://schemas.microsoft.com/office/drawing/2014/main" id="{F6F9BD01-7BC3-4459-91F6-7873DA20687C}"/>
               </a:ext>
             </a:extLst>
           </p:cNvPr>
@@ -24421,7 +24421,7 @@
           <p:cNvPr id="33" name="">
             <a:extLst xmlns:a="http://schemas.openxmlformats.org/drawingml/2006/main">
               <a:ext uri="{FF2B5EF4-FFF2-40B4-BE49-F238E27FC236}">
-                <a16:creationId xmlns:a16="http://schemas.microsoft.com/office/drawing/2014/main" id="{618DB9F4-0CFE-454C-9EC4-D069AC0C7F7D}"/>
+                <a16:creationId xmlns:a16="http://schemas.microsoft.com/office/drawing/2014/main" id="{028C5BD7-5EDF-44B5-934C-2C167F991A0D}"/>
               </a:ext>
             </a:extLst>
           </p:cNvPr>
@@ -24479,7 +24479,7 @@
           <p:cNvPr id="34" name="">
             <a:extLst xmlns:a="http://schemas.openxmlformats.org/drawingml/2006/main">
               <a:ext uri="{FF2B5EF4-FFF2-40B4-BE49-F238E27FC236}">
-                <a16:creationId xmlns:a16="http://schemas.microsoft.com/office/drawing/2014/main" id="{DADDD6FC-8DEF-4978-9697-388AB91FC3D1}"/>
+                <a16:creationId xmlns:a16="http://schemas.microsoft.com/office/drawing/2014/main" id="{1FA7519F-94FA-4BB6-B03B-F29508AC1C5C}"/>
               </a:ext>
             </a:extLst>
           </p:cNvPr>
@@ -24537,7 +24537,7 @@
           <p:cNvPr id="35" name="">
             <a:extLst xmlns:a="http://schemas.openxmlformats.org/drawingml/2006/main">
               <a:ext uri="{FF2B5EF4-FFF2-40B4-BE49-F238E27FC236}">
-                <a16:creationId xmlns:a16="http://schemas.microsoft.com/office/drawing/2014/main" id="{3078206D-BB08-4E7F-B3C6-0D450DFE640F}"/>
+                <a16:creationId xmlns:a16="http://schemas.microsoft.com/office/drawing/2014/main" id="{4463D40F-F034-4EF1-9AF3-A241AE7EDF76}"/>
               </a:ext>
             </a:extLst>
           </p:cNvPr>
@@ -24570,7 +24570,7 @@
           <p:cNvPr id="36" name="">
             <a:extLst xmlns:a="http://schemas.openxmlformats.org/drawingml/2006/main">
               <a:ext uri="{FF2B5EF4-FFF2-40B4-BE49-F238E27FC236}">
-                <a16:creationId xmlns:a16="http://schemas.microsoft.com/office/drawing/2014/main" id="{7E0781B7-E53F-41CE-8DA9-4752FDFABDA2}"/>
+                <a16:creationId xmlns:a16="http://schemas.microsoft.com/office/drawing/2014/main" id="{4725A38A-C834-4268-96AA-9C2E0D6C98FC}"/>
               </a:ext>
             </a:extLst>
           </p:cNvPr>
@@ -24628,7 +24628,7 @@
                 <a:latin typeface="Microsoft YaHei"/>
                 <a:ea typeface="Microsoft YaHei"/>
                 <a:cs typeface="Microsoft YaHei"/>
-                <a:hlinkClick xmlns:r="http://schemas.openxmlformats.org/officeDocument/2006/relationships" r:id="R1a10a81752ef4f08"/>
+                <a:hlinkClick xmlns:r="http://schemas.openxmlformats.org/officeDocument/2006/relationships" r:id="R23ca2dd9e6ca4ea0"/>
               </a:rPr>
               <a:t>码道</a:t>
             </a:r>
@@ -24640,7 +24640,7 @@
                 <a:latin typeface="Microsoft YaHei"/>
                 <a:ea typeface="Microsoft YaHei"/>
                 <a:cs typeface="Microsoft YaHei"/>
-                <a:hlinkClick xmlns:r="http://schemas.openxmlformats.org/officeDocument/2006/relationships" r:id="Reaa95e34203e4788"/>
+                <a:hlinkClick xmlns:r="http://schemas.openxmlformats.org/officeDocument/2006/relationships" r:id="R54bc2a313dab4c3c"/>
               </a:rPr>
               <a:t> · Claude Code</a:t>
             </a:r>
@@ -24652,7 +24652,7 @@
                 <a:latin typeface="Microsoft YaHei"/>
                 <a:ea typeface="Microsoft YaHei"/>
                 <a:cs typeface="Microsoft YaHei"/>
-                <a:hlinkClick xmlns:r="http://schemas.openxmlformats.org/officeDocument/2006/relationships" r:id="Rfde6aaf2141645e9"/>
+                <a:hlinkClick xmlns:r="http://schemas.openxmlformats.org/officeDocument/2006/relationships" r:id="R18f53630605e4730"/>
               </a:rPr>
               <a:t> · Qoder</a:t>
             </a:r>
@@ -24664,7 +24664,7 @@
                 <a:latin typeface="Microsoft YaHei"/>
                 <a:ea typeface="Microsoft YaHei"/>
                 <a:cs typeface="Microsoft YaHei"/>
-                <a:hlinkClick xmlns:r="http://schemas.openxmlformats.org/officeDocument/2006/relationships" r:id="R94b3d5867ec44556"/>
+                <a:hlinkClick xmlns:r="http://schemas.openxmlformats.org/officeDocument/2006/relationships" r:id="R3f616f0dc76644ea"/>
               </a:rPr>
               <a:t> · Codex</a:t>
             </a:r>
@@ -24676,7 +24676,7 @@
           <p:cNvPr id="37" name="">
             <a:extLst xmlns:a="http://schemas.openxmlformats.org/drawingml/2006/main">
               <a:ext uri="{FF2B5EF4-FFF2-40B4-BE49-F238E27FC236}">
-                <a16:creationId xmlns:a16="http://schemas.microsoft.com/office/drawing/2014/main" id="{AC44E93A-D407-4BED-9FFE-5E904AC7E7B9}"/>
+                <a16:creationId xmlns:a16="http://schemas.microsoft.com/office/drawing/2014/main" id="{77A79FE5-0A4F-463A-94C3-FE3ACF23D19F}"/>
               </a:ext>
             </a:extLst>
           </p:cNvPr>
@@ -24732,7 +24732,7 @@
     </p:spTree>
     <p:extLst>
       <p:ext uri="{BB962C8B-B14F-4D97-AF65-F5344CB8AC3E}">
-        <p14:creationId xmlns:p14="http://schemas.microsoft.com/office/powerpoint/2010/main" val="825834428"/>
+        <p14:creationId xmlns:p14="http://schemas.microsoft.com/office/powerpoint/2010/main" val="1624300376"/>
       </p:ext>
     </p:extLst>
   </p:cSld>
@@ -24763,7 +24763,7 @@
           <p:cNvPr id="66" name="">
             <a:extLst xmlns:a="http://schemas.openxmlformats.org/drawingml/2006/main">
               <a:ext uri="{FF2B5EF4-FFF2-40B4-BE49-F238E27FC236}">
-                <a16:creationId xmlns:a16="http://schemas.microsoft.com/office/drawing/2014/main" id="{FBE09A96-4FC6-4AF5-B765-985A7DBEF59C}"/>
+                <a16:creationId xmlns:a16="http://schemas.microsoft.com/office/drawing/2014/main" id="{C8549AC9-4DD5-4CB2-B1D5-11A2D8B4B019}"/>
               </a:ext>
             </a:extLst>
           </p:cNvPr>
@@ -24796,7 +24796,7 @@
           <p:cNvPr id="2" name="">
             <a:extLst xmlns:a="http://schemas.openxmlformats.org/drawingml/2006/main">
               <a:ext uri="{FF2B5EF4-FFF2-40B4-BE49-F238E27FC236}">
-                <a16:creationId xmlns:a16="http://schemas.microsoft.com/office/drawing/2014/main" id="{747867CD-4112-453C-823F-6F4B785343BE}"/>
+                <a16:creationId xmlns:a16="http://schemas.microsoft.com/office/drawing/2014/main" id="{7D473ADA-A38F-4F56-A802-276D937534D1}"/>
               </a:ext>
             </a:extLst>
           </p:cNvPr>
@@ -24854,7 +24854,7 @@
           <p:cNvPr id="3" name="">
             <a:extLst xmlns:a="http://schemas.openxmlformats.org/drawingml/2006/main">
               <a:ext uri="{FF2B5EF4-FFF2-40B4-BE49-F238E27FC236}">
-                <a16:creationId xmlns:a16="http://schemas.microsoft.com/office/drawing/2014/main" id="{878BF5E1-9138-4BAC-8422-EB709966ED1C}"/>
+                <a16:creationId xmlns:a16="http://schemas.microsoft.com/office/drawing/2014/main" id="{14585214-1FA1-4C69-B9C7-4BE42D2F9AE1}"/>
               </a:ext>
             </a:extLst>
           </p:cNvPr>
@@ -24886,7 +24886,7 @@
             <a:pPr algn="l">
               <a:defRPr sz="2325" b="1">
                 <a:solidFill>
-                  <a:srgbClr val="1D1D1A"/>
+                  <a:srgbClr val="8A0F17"/>
                 </a:solidFill>
                 <a:latin typeface="Microsoft YaHei"/>
                 <a:ea typeface="Microsoft YaHei"/>
@@ -24896,7 +24896,7 @@
             <a:r>
               <a:rPr sz="2325" b="1">
                 <a:solidFill>
-                  <a:srgbClr val="1D1D1A"/>
+                  <a:srgbClr val="8A0F17"/>
                 </a:solidFill>
                 <a:latin typeface="Microsoft YaHei"/>
                 <a:ea typeface="Microsoft YaHei"/>
@@ -24912,7 +24912,7 @@
           <p:cNvPr id="4" name="">
             <a:extLst xmlns:a="http://schemas.openxmlformats.org/drawingml/2006/main">
               <a:ext uri="{FF2B5EF4-FFF2-40B4-BE49-F238E27FC236}">
-                <a16:creationId xmlns:a16="http://schemas.microsoft.com/office/drawing/2014/main" id="{B7F929D0-ED4C-40D0-94A6-F18938E05353}"/>
+                <a16:creationId xmlns:a16="http://schemas.microsoft.com/office/drawing/2014/main" id="{3B2C3C34-F199-4F85-98CC-BD514CB3F895}"/>
               </a:ext>
             </a:extLst>
           </p:cNvPr>
@@ -24945,7 +24945,7 @@
           <p:cNvPr id="5" name="">
             <a:extLst xmlns:a="http://schemas.openxmlformats.org/drawingml/2006/main">
               <a:ext uri="{FF2B5EF4-FFF2-40B4-BE49-F238E27FC236}">
-                <a16:creationId xmlns:a16="http://schemas.microsoft.com/office/drawing/2014/main" id="{B6B3B34B-55CC-4C54-AD0F-055E7517BE35}"/>
+                <a16:creationId xmlns:a16="http://schemas.microsoft.com/office/drawing/2014/main" id="{AD5441E4-74DA-4FD6-82BE-4CBA6DEAEE1A}"/>
               </a:ext>
             </a:extLst>
           </p:cNvPr>
@@ -25003,7 +25003,7 @@
           <p:cNvPr id="6" name="">
             <a:extLst xmlns:a="http://schemas.openxmlformats.org/drawingml/2006/main">
               <a:ext uri="{FF2B5EF4-FFF2-40B4-BE49-F238E27FC236}">
-                <a16:creationId xmlns:a16="http://schemas.microsoft.com/office/drawing/2014/main" id="{6312B8C5-EE29-4AB4-A886-4A34F4895F10}"/>
+                <a16:creationId xmlns:a16="http://schemas.microsoft.com/office/drawing/2014/main" id="{F907A7C1-BA97-4DC8-8F31-9180E9D378E8}"/>
               </a:ext>
             </a:extLst>
           </p:cNvPr>
@@ -25036,7 +25036,7 @@
           <p:cNvPr id="7" name="">
             <a:extLst xmlns:a="http://schemas.openxmlformats.org/drawingml/2006/main">
               <a:ext uri="{FF2B5EF4-FFF2-40B4-BE49-F238E27FC236}">
-                <a16:creationId xmlns:a16="http://schemas.microsoft.com/office/drawing/2014/main" id="{0F47F25B-9C60-4574-B651-FBB016D235F9}"/>
+                <a16:creationId xmlns:a16="http://schemas.microsoft.com/office/drawing/2014/main" id="{13860658-8C88-4172-AA43-2FC50CBC2EAF}"/>
               </a:ext>
             </a:extLst>
           </p:cNvPr>
@@ -25094,7 +25094,7 @@
           <p:cNvPr id="8" name="">
             <a:extLst xmlns:a="http://schemas.openxmlformats.org/drawingml/2006/main">
               <a:ext uri="{FF2B5EF4-FFF2-40B4-BE49-F238E27FC236}">
-                <a16:creationId xmlns:a16="http://schemas.microsoft.com/office/drawing/2014/main" id="{F023823A-256F-4203-AD27-0C7B1F0F2D2F}"/>
+                <a16:creationId xmlns:a16="http://schemas.microsoft.com/office/drawing/2014/main" id="{CD475F53-FAB9-4967-9F71-C6170EE55FA9}"/>
               </a:ext>
             </a:extLst>
           </p:cNvPr>
@@ -25127,7 +25127,7 @@
           <p:cNvPr id="9" name="">
             <a:extLst xmlns:a="http://schemas.openxmlformats.org/drawingml/2006/main">
               <a:ext uri="{FF2B5EF4-FFF2-40B4-BE49-F238E27FC236}">
-                <a16:creationId xmlns:a16="http://schemas.microsoft.com/office/drawing/2014/main" id="{5917F727-70FF-43EC-8833-85105981AC09}"/>
+                <a16:creationId xmlns:a16="http://schemas.microsoft.com/office/drawing/2014/main" id="{9A501F26-93C9-4208-9997-EB8B9ACBEDB9}"/>
               </a:ext>
             </a:extLst>
           </p:cNvPr>
@@ -25185,7 +25185,7 @@
           <p:cNvPr id="10" name="">
             <a:extLst xmlns:a="http://schemas.openxmlformats.org/drawingml/2006/main">
               <a:ext uri="{FF2B5EF4-FFF2-40B4-BE49-F238E27FC236}">
-                <a16:creationId xmlns:a16="http://schemas.microsoft.com/office/drawing/2014/main" id="{31320168-ED5D-444D-8771-7831971778EB}"/>
+                <a16:creationId xmlns:a16="http://schemas.microsoft.com/office/drawing/2014/main" id="{4253A226-CCE2-4A10-AC76-3744A985A472}"/>
               </a:ext>
             </a:extLst>
           </p:cNvPr>
@@ -25218,7 +25218,7 @@
           <p:cNvPr id="11" name="">
             <a:extLst xmlns:a="http://schemas.openxmlformats.org/drawingml/2006/main">
               <a:ext uri="{FF2B5EF4-FFF2-40B4-BE49-F238E27FC236}">
-                <a16:creationId xmlns:a16="http://schemas.microsoft.com/office/drawing/2014/main" id="{FD9DFEB2-5EC2-4130-A695-1516753A9BFD}"/>
+                <a16:creationId xmlns:a16="http://schemas.microsoft.com/office/drawing/2014/main" id="{B202A65D-2307-4FA3-8D0B-A080127CF0A7}"/>
               </a:ext>
             </a:extLst>
           </p:cNvPr>
@@ -25276,7 +25276,7 @@
           <p:cNvPr id="12" name="">
             <a:extLst xmlns:a="http://schemas.openxmlformats.org/drawingml/2006/main">
               <a:ext uri="{FF2B5EF4-FFF2-40B4-BE49-F238E27FC236}">
-                <a16:creationId xmlns:a16="http://schemas.microsoft.com/office/drawing/2014/main" id="{3801A222-90DE-4472-8591-BFF413818C99}"/>
+                <a16:creationId xmlns:a16="http://schemas.microsoft.com/office/drawing/2014/main" id="{33CAFA9D-C576-4752-9789-AD0A7AC7E8F1}"/>
               </a:ext>
             </a:extLst>
           </p:cNvPr>
@@ -25309,7 +25309,7 @@
           <p:cNvPr id="13" name="">
             <a:extLst xmlns:a="http://schemas.openxmlformats.org/drawingml/2006/main">
               <a:ext uri="{FF2B5EF4-FFF2-40B4-BE49-F238E27FC236}">
-                <a16:creationId xmlns:a16="http://schemas.microsoft.com/office/drawing/2014/main" id="{53A52691-A30C-4666-8A3E-806C06286400}"/>
+                <a16:creationId xmlns:a16="http://schemas.microsoft.com/office/drawing/2014/main" id="{DA7BA39A-BC43-4B94-95F3-CB3010795A83}"/>
               </a:ext>
             </a:extLst>
           </p:cNvPr>
@@ -25367,7 +25367,7 @@
           <p:cNvPr id="14" name="">
             <a:extLst xmlns:a="http://schemas.openxmlformats.org/drawingml/2006/main">
               <a:ext uri="{FF2B5EF4-FFF2-40B4-BE49-F238E27FC236}">
-                <a16:creationId xmlns:a16="http://schemas.microsoft.com/office/drawing/2014/main" id="{2D87159F-2B57-4964-9A83-5169CFDF4556}"/>
+                <a16:creationId xmlns:a16="http://schemas.microsoft.com/office/drawing/2014/main" id="{ECEDB20E-4F50-4D82-9E7E-FFABA2997917}"/>
               </a:ext>
             </a:extLst>
           </p:cNvPr>
@@ -25400,7 +25400,7 @@
           <p:cNvPr id="15" name="">
             <a:extLst xmlns:a="http://schemas.openxmlformats.org/drawingml/2006/main">
               <a:ext uri="{FF2B5EF4-FFF2-40B4-BE49-F238E27FC236}">
-                <a16:creationId xmlns:a16="http://schemas.microsoft.com/office/drawing/2014/main" id="{89138DC1-1BA7-405F-8A22-50E180A3229C}"/>
+                <a16:creationId xmlns:a16="http://schemas.microsoft.com/office/drawing/2014/main" id="{D48106B7-F5B0-466B-B6DE-76DC14BD5E4D}"/>
               </a:ext>
             </a:extLst>
           </p:cNvPr>
@@ -25458,7 +25458,7 @@
           <p:cNvPr id="16" name="">
             <a:extLst xmlns:a="http://schemas.openxmlformats.org/drawingml/2006/main">
               <a:ext uri="{FF2B5EF4-FFF2-40B4-BE49-F238E27FC236}">
-                <a16:creationId xmlns:a16="http://schemas.microsoft.com/office/drawing/2014/main" id="{15D883C0-C064-4B76-9C77-98862969C5B4}"/>
+                <a16:creationId xmlns:a16="http://schemas.microsoft.com/office/drawing/2014/main" id="{A7CB953E-B270-4FC3-A7CC-9B934DBFF895}"/>
               </a:ext>
             </a:extLst>
           </p:cNvPr>
@@ -25491,7 +25491,7 @@
           <p:cNvPr id="17" name="">
             <a:extLst xmlns:a="http://schemas.openxmlformats.org/drawingml/2006/main">
               <a:ext uri="{FF2B5EF4-FFF2-40B4-BE49-F238E27FC236}">
-                <a16:creationId xmlns:a16="http://schemas.microsoft.com/office/drawing/2014/main" id="{05189CA8-58D9-4C35-869B-1E179BBCE296}"/>
+                <a16:creationId xmlns:a16="http://schemas.microsoft.com/office/drawing/2014/main" id="{EE298867-216C-473E-B05B-12F5F493CC7F}"/>
               </a:ext>
             </a:extLst>
           </p:cNvPr>
@@ -25549,7 +25549,7 @@
           <p:cNvPr id="18" name="">
             <a:extLst xmlns:a="http://schemas.openxmlformats.org/drawingml/2006/main">
               <a:ext uri="{FF2B5EF4-FFF2-40B4-BE49-F238E27FC236}">
-                <a16:creationId xmlns:a16="http://schemas.microsoft.com/office/drawing/2014/main" id="{4E770C0B-AA03-42FD-90CC-8FB81DAF6488}"/>
+                <a16:creationId xmlns:a16="http://schemas.microsoft.com/office/drawing/2014/main" id="{C0E0EBD6-3BCE-4651-8B05-66BAD25D371B}"/>
               </a:ext>
             </a:extLst>
           </p:cNvPr>
@@ -25582,7 +25582,7 @@
           <p:cNvPr id="19" name="">
             <a:extLst xmlns:a="http://schemas.openxmlformats.org/drawingml/2006/main">
               <a:ext uri="{FF2B5EF4-FFF2-40B4-BE49-F238E27FC236}">
-                <a16:creationId xmlns:a16="http://schemas.microsoft.com/office/drawing/2014/main" id="{A6B9B746-0435-4D56-84D6-FB3AD524190A}"/>
+                <a16:creationId xmlns:a16="http://schemas.microsoft.com/office/drawing/2014/main" id="{C9C64C0C-4FFB-421B-B6FE-10405D37DC55}"/>
               </a:ext>
             </a:extLst>
           </p:cNvPr>
@@ -25640,7 +25640,7 @@
           <p:cNvPr id="20" name="">
             <a:extLst xmlns:a="http://schemas.openxmlformats.org/drawingml/2006/main">
               <a:ext uri="{FF2B5EF4-FFF2-40B4-BE49-F238E27FC236}">
-                <a16:creationId xmlns:a16="http://schemas.microsoft.com/office/drawing/2014/main" id="{A0B6171F-7025-4777-91B0-F8B490BB56CC}"/>
+                <a16:creationId xmlns:a16="http://schemas.microsoft.com/office/drawing/2014/main" id="{5FDDA6A2-9857-4F72-A92E-800BE7CBCAF3}"/>
               </a:ext>
             </a:extLst>
           </p:cNvPr>
@@ -25673,7 +25673,7 @@
           <p:cNvPr id="21" name="">
             <a:extLst xmlns:a="http://schemas.openxmlformats.org/drawingml/2006/main">
               <a:ext uri="{FF2B5EF4-FFF2-40B4-BE49-F238E27FC236}">
-                <a16:creationId xmlns:a16="http://schemas.microsoft.com/office/drawing/2014/main" id="{674EBF47-B0CC-4791-819D-F98F01CDCC65}"/>
+                <a16:creationId xmlns:a16="http://schemas.microsoft.com/office/drawing/2014/main" id="{52006457-192F-4BC8-A2E5-A621C37CFF9C}"/>
               </a:ext>
             </a:extLst>
           </p:cNvPr>
@@ -25731,7 +25731,7 @@
           <p:cNvPr id="22" name="">
             <a:extLst xmlns:a="http://schemas.openxmlformats.org/drawingml/2006/main">
               <a:ext uri="{FF2B5EF4-FFF2-40B4-BE49-F238E27FC236}">
-                <a16:creationId xmlns:a16="http://schemas.microsoft.com/office/drawing/2014/main" id="{9D6132F0-867A-40F6-BC69-E140356D82D5}"/>
+                <a16:creationId xmlns:a16="http://schemas.microsoft.com/office/drawing/2014/main" id="{4C3C6D51-04B9-49D7-B316-103BD06A232C}"/>
               </a:ext>
             </a:extLst>
           </p:cNvPr>
@@ -25764,7 +25764,7 @@
           <p:cNvPr id="23" name="">
             <a:extLst xmlns:a="http://schemas.openxmlformats.org/drawingml/2006/main">
               <a:ext uri="{FF2B5EF4-FFF2-40B4-BE49-F238E27FC236}">
-                <a16:creationId xmlns:a16="http://schemas.microsoft.com/office/drawing/2014/main" id="{53D1E101-AEE6-4866-95AB-26188C8B9CFC}"/>
+                <a16:creationId xmlns:a16="http://schemas.microsoft.com/office/drawing/2014/main" id="{6B137BED-95C1-423F-A08E-8DB1DB856409}"/>
               </a:ext>
             </a:extLst>
           </p:cNvPr>
@@ -25822,7 +25822,7 @@
           <p:cNvPr id="24" name="">
             <a:extLst xmlns:a="http://schemas.openxmlformats.org/drawingml/2006/main">
               <a:ext uri="{FF2B5EF4-FFF2-40B4-BE49-F238E27FC236}">
-                <a16:creationId xmlns:a16="http://schemas.microsoft.com/office/drawing/2014/main" id="{BD025993-3592-4E42-A24A-14C78F19595C}"/>
+                <a16:creationId xmlns:a16="http://schemas.microsoft.com/office/drawing/2014/main" id="{C51AFE4E-CACF-4FE3-8530-0B96DB5524A6}"/>
               </a:ext>
             </a:extLst>
           </p:cNvPr>
@@ -25855,7 +25855,7 @@
           <p:cNvPr id="25" name="">
             <a:extLst xmlns:a="http://schemas.openxmlformats.org/drawingml/2006/main">
               <a:ext uri="{FF2B5EF4-FFF2-40B4-BE49-F238E27FC236}">
-                <a16:creationId xmlns:a16="http://schemas.microsoft.com/office/drawing/2014/main" id="{61670C8A-2094-4C79-B7F0-90A327512904}"/>
+                <a16:creationId xmlns:a16="http://schemas.microsoft.com/office/drawing/2014/main" id="{D080DCF5-2F06-408C-B2F7-8A0B8FC0BDE6}"/>
               </a:ext>
             </a:extLst>
           </p:cNvPr>
@@ -25913,7 +25913,7 @@
           <p:cNvPr id="26" name="">
             <a:extLst xmlns:a="http://schemas.openxmlformats.org/drawingml/2006/main">
               <a:ext uri="{FF2B5EF4-FFF2-40B4-BE49-F238E27FC236}">
-                <a16:creationId xmlns:a16="http://schemas.microsoft.com/office/drawing/2014/main" id="{79BFCB4A-465E-426C-8667-087ECB5556D6}"/>
+                <a16:creationId xmlns:a16="http://schemas.microsoft.com/office/drawing/2014/main" id="{80530392-D870-478D-BEEC-127F0E81378A}"/>
               </a:ext>
             </a:extLst>
           </p:cNvPr>
@@ -25946,7 +25946,7 @@
           <p:cNvPr id="27" name="">
             <a:extLst xmlns:a="http://schemas.openxmlformats.org/drawingml/2006/main">
               <a:ext uri="{FF2B5EF4-FFF2-40B4-BE49-F238E27FC236}">
-                <a16:creationId xmlns:a16="http://schemas.microsoft.com/office/drawing/2014/main" id="{73257A56-DCC2-43E4-A3B1-F0BC2F259098}"/>
+                <a16:creationId xmlns:a16="http://schemas.microsoft.com/office/drawing/2014/main" id="{EEF12CF6-0C4D-4704-BD11-EA22293033F1}"/>
               </a:ext>
             </a:extLst>
           </p:cNvPr>
@@ -26004,7 +26004,7 @@
           <p:cNvPr id="28" name="">
             <a:extLst xmlns:a="http://schemas.openxmlformats.org/drawingml/2006/main">
               <a:ext uri="{FF2B5EF4-FFF2-40B4-BE49-F238E27FC236}">
-                <a16:creationId xmlns:a16="http://schemas.microsoft.com/office/drawing/2014/main" id="{5844F051-3074-4E75-8E61-29AA2AA2ABD2}"/>
+                <a16:creationId xmlns:a16="http://schemas.microsoft.com/office/drawing/2014/main" id="{F243CDD9-5EE7-4F55-8BEF-3E72E8244A95}"/>
               </a:ext>
             </a:extLst>
           </p:cNvPr>
@@ -26037,7 +26037,7 @@
           <p:cNvPr id="29" name="">
             <a:extLst xmlns:a="http://schemas.openxmlformats.org/drawingml/2006/main">
               <a:ext uri="{FF2B5EF4-FFF2-40B4-BE49-F238E27FC236}">
-                <a16:creationId xmlns:a16="http://schemas.microsoft.com/office/drawing/2014/main" id="{AA618C66-641B-4F1E-991F-A7769518692B}"/>
+                <a16:creationId xmlns:a16="http://schemas.microsoft.com/office/drawing/2014/main" id="{E3440B95-390F-4BE1-A1A5-80A03FDA61B7}"/>
               </a:ext>
             </a:extLst>
           </p:cNvPr>
@@ -26095,7 +26095,7 @@
           <p:cNvPr id="30" name="">
             <a:extLst xmlns:a="http://schemas.openxmlformats.org/drawingml/2006/main">
               <a:ext uri="{FF2B5EF4-FFF2-40B4-BE49-F238E27FC236}">
-                <a16:creationId xmlns:a16="http://schemas.microsoft.com/office/drawing/2014/main" id="{4964B500-2357-410A-8304-5E290F74C3DE}"/>
+                <a16:creationId xmlns:a16="http://schemas.microsoft.com/office/drawing/2014/main" id="{656C67D6-98C8-40ED-AC04-6D5CCA936EE4}"/>
               </a:ext>
             </a:extLst>
           </p:cNvPr>
@@ -26128,7 +26128,7 @@
           <p:cNvPr id="31" name="">
             <a:extLst xmlns:a="http://schemas.openxmlformats.org/drawingml/2006/main">
               <a:ext uri="{FF2B5EF4-FFF2-40B4-BE49-F238E27FC236}">
-                <a16:creationId xmlns:a16="http://schemas.microsoft.com/office/drawing/2014/main" id="{393D9F66-4F26-4AD3-94EF-2F8FAD8F2FB6}"/>
+                <a16:creationId xmlns:a16="http://schemas.microsoft.com/office/drawing/2014/main" id="{F1BDB671-A365-44CB-B6E7-9DBC42060052}"/>
               </a:ext>
             </a:extLst>
           </p:cNvPr>
@@ -26186,7 +26186,7 @@
           <p:cNvPr id="32" name="">
             <a:extLst xmlns:a="http://schemas.openxmlformats.org/drawingml/2006/main">
               <a:ext uri="{FF2B5EF4-FFF2-40B4-BE49-F238E27FC236}">
-                <a16:creationId xmlns:a16="http://schemas.microsoft.com/office/drawing/2014/main" id="{EF86D073-0125-4DF2-95B7-47800EBA5C51}"/>
+                <a16:creationId xmlns:a16="http://schemas.microsoft.com/office/drawing/2014/main" id="{4D1954CD-4BA7-4269-91C5-FA32982A55D3}"/>
               </a:ext>
             </a:extLst>
           </p:cNvPr>
@@ -26219,7 +26219,7 @@
           <p:cNvPr id="33" name="">
             <a:extLst xmlns:a="http://schemas.openxmlformats.org/drawingml/2006/main">
               <a:ext uri="{FF2B5EF4-FFF2-40B4-BE49-F238E27FC236}">
-                <a16:creationId xmlns:a16="http://schemas.microsoft.com/office/drawing/2014/main" id="{A5CFFD1B-8545-405F-9A85-89D26FB65531}"/>
+                <a16:creationId xmlns:a16="http://schemas.microsoft.com/office/drawing/2014/main" id="{3A64A903-6E2E-4C04-A92B-EAF07DED966E}"/>
               </a:ext>
             </a:extLst>
           </p:cNvPr>
@@ -26277,7 +26277,7 @@
           <p:cNvPr id="34" name="">
             <a:extLst xmlns:a="http://schemas.openxmlformats.org/drawingml/2006/main">
               <a:ext uri="{FF2B5EF4-FFF2-40B4-BE49-F238E27FC236}">
-                <a16:creationId xmlns:a16="http://schemas.microsoft.com/office/drawing/2014/main" id="{688420EC-7131-47FF-81F0-2759F37AF9FB}"/>
+                <a16:creationId xmlns:a16="http://schemas.microsoft.com/office/drawing/2014/main" id="{59F33EE9-BF18-40CC-9581-2F1266A6A64E}"/>
               </a:ext>
             </a:extLst>
           </p:cNvPr>
@@ -26310,7 +26310,7 @@
           <p:cNvPr id="35" name="">
             <a:extLst xmlns:a="http://schemas.openxmlformats.org/drawingml/2006/main">
               <a:ext uri="{FF2B5EF4-FFF2-40B4-BE49-F238E27FC236}">
-                <a16:creationId xmlns:a16="http://schemas.microsoft.com/office/drawing/2014/main" id="{9F13F5D6-B83E-4CDA-B2E3-C7D57892B86D}"/>
+                <a16:creationId xmlns:a16="http://schemas.microsoft.com/office/drawing/2014/main" id="{26D08C1F-0702-4C74-AD7C-532EBCEF93F7}"/>
               </a:ext>
             </a:extLst>
           </p:cNvPr>
@@ -26368,7 +26368,7 @@
           <p:cNvPr id="36" name="">
             <a:extLst xmlns:a="http://schemas.openxmlformats.org/drawingml/2006/main">
               <a:ext uri="{FF2B5EF4-FFF2-40B4-BE49-F238E27FC236}">
-                <a16:creationId xmlns:a16="http://schemas.microsoft.com/office/drawing/2014/main" id="{4AA61103-93D1-4262-ACEB-0A889E15F56F}"/>
+                <a16:creationId xmlns:a16="http://schemas.microsoft.com/office/drawing/2014/main" id="{97E1FD17-D800-4696-8B47-C73DAB720A66}"/>
               </a:ext>
             </a:extLst>
           </p:cNvPr>
@@ -26401,7 +26401,7 @@
           <p:cNvPr id="37" name="">
             <a:extLst xmlns:a="http://schemas.openxmlformats.org/drawingml/2006/main">
               <a:ext uri="{FF2B5EF4-FFF2-40B4-BE49-F238E27FC236}">
-                <a16:creationId xmlns:a16="http://schemas.microsoft.com/office/drawing/2014/main" id="{EE322E65-026B-4179-92B8-8D9D44570056}"/>
+                <a16:creationId xmlns:a16="http://schemas.microsoft.com/office/drawing/2014/main" id="{69C7BB7C-B00E-42D0-A59A-EACDA123A002}"/>
               </a:ext>
             </a:extLst>
           </p:cNvPr>
@@ -26459,7 +26459,7 @@
           <p:cNvPr id="38" name="">
             <a:extLst xmlns:a="http://schemas.openxmlformats.org/drawingml/2006/main">
               <a:ext uri="{FF2B5EF4-FFF2-40B4-BE49-F238E27FC236}">
-                <a16:creationId xmlns:a16="http://schemas.microsoft.com/office/drawing/2014/main" id="{681C3DD8-70A9-4A9E-B8FF-D346974CCBBC}"/>
+                <a16:creationId xmlns:a16="http://schemas.microsoft.com/office/drawing/2014/main" id="{666ACC7B-664D-4315-AD04-9FEBA09BD0A2}"/>
               </a:ext>
             </a:extLst>
           </p:cNvPr>
@@ -26492,7 +26492,7 @@
           <p:cNvPr id="39" name="">
             <a:extLst xmlns:a="http://schemas.openxmlformats.org/drawingml/2006/main">
               <a:ext uri="{FF2B5EF4-FFF2-40B4-BE49-F238E27FC236}">
-                <a16:creationId xmlns:a16="http://schemas.microsoft.com/office/drawing/2014/main" id="{DF77AB0A-2BEA-4C88-9BB9-70EEA02289F8}"/>
+                <a16:creationId xmlns:a16="http://schemas.microsoft.com/office/drawing/2014/main" id="{29D8766A-1262-4BF0-A3F0-F6A3AE251364}"/>
               </a:ext>
             </a:extLst>
           </p:cNvPr>
@@ -26550,7 +26550,7 @@
           <p:cNvPr id="40" name="">
             <a:extLst xmlns:a="http://schemas.openxmlformats.org/drawingml/2006/main">
               <a:ext uri="{FF2B5EF4-FFF2-40B4-BE49-F238E27FC236}">
-                <a16:creationId xmlns:a16="http://schemas.microsoft.com/office/drawing/2014/main" id="{8D1FC429-C09F-441E-9310-3EE605AF3583}"/>
+                <a16:creationId xmlns:a16="http://schemas.microsoft.com/office/drawing/2014/main" id="{CFC0AC02-3D7F-4005-B046-56BC33A6CB1F}"/>
               </a:ext>
             </a:extLst>
           </p:cNvPr>
@@ -26583,7 +26583,7 @@
           <p:cNvPr id="41" name="">
             <a:extLst xmlns:a="http://schemas.openxmlformats.org/drawingml/2006/main">
               <a:ext uri="{FF2B5EF4-FFF2-40B4-BE49-F238E27FC236}">
-                <a16:creationId xmlns:a16="http://schemas.microsoft.com/office/drawing/2014/main" id="{2CD1F941-2FE1-4453-995D-6A1E67B84810}"/>
+                <a16:creationId xmlns:a16="http://schemas.microsoft.com/office/drawing/2014/main" id="{2AF32360-F509-47D0-A2E8-A3DC95D5DC49}"/>
               </a:ext>
             </a:extLst>
           </p:cNvPr>
@@ -26641,7 +26641,7 @@
           <p:cNvPr id="42" name="">
             <a:extLst xmlns:a="http://schemas.openxmlformats.org/drawingml/2006/main">
               <a:ext uri="{FF2B5EF4-FFF2-40B4-BE49-F238E27FC236}">
-                <a16:creationId xmlns:a16="http://schemas.microsoft.com/office/drawing/2014/main" id="{89372F2B-DF58-473E-8E70-50A1C773D97B}"/>
+                <a16:creationId xmlns:a16="http://schemas.microsoft.com/office/drawing/2014/main" id="{F5982090-708E-4C1F-BD57-997BF3D4CB39}"/>
               </a:ext>
             </a:extLst>
           </p:cNvPr>
@@ -26674,7 +26674,7 @@
           <p:cNvPr id="43" name="">
             <a:extLst xmlns:a="http://schemas.openxmlformats.org/drawingml/2006/main">
               <a:ext uri="{FF2B5EF4-FFF2-40B4-BE49-F238E27FC236}">
-                <a16:creationId xmlns:a16="http://schemas.microsoft.com/office/drawing/2014/main" id="{35A546BC-B9F7-40C2-ADEE-25D4D26E23D4}"/>
+                <a16:creationId xmlns:a16="http://schemas.microsoft.com/office/drawing/2014/main" id="{D4A95261-C728-41A1-9F71-CE5C7C138A21}"/>
               </a:ext>
             </a:extLst>
           </p:cNvPr>
@@ -26732,7 +26732,7 @@
           <p:cNvPr id="44" name="">
             <a:extLst xmlns:a="http://schemas.openxmlformats.org/drawingml/2006/main">
               <a:ext uri="{FF2B5EF4-FFF2-40B4-BE49-F238E27FC236}">
-                <a16:creationId xmlns:a16="http://schemas.microsoft.com/office/drawing/2014/main" id="{D8B6B28C-15A4-442D-AD9A-170273D2CE9C}"/>
+                <a16:creationId xmlns:a16="http://schemas.microsoft.com/office/drawing/2014/main" id="{0E49744C-4A37-45F6-9155-8AE67871B197}"/>
               </a:ext>
             </a:extLst>
           </p:cNvPr>
@@ -26765,7 +26765,7 @@
           <p:cNvPr id="45" name="">
             <a:extLst xmlns:a="http://schemas.openxmlformats.org/drawingml/2006/main">
               <a:ext uri="{FF2B5EF4-FFF2-40B4-BE49-F238E27FC236}">
-                <a16:creationId xmlns:a16="http://schemas.microsoft.com/office/drawing/2014/main" id="{2368D49F-35F9-4BB4-A281-A52667926CF7}"/>
+                <a16:creationId xmlns:a16="http://schemas.microsoft.com/office/drawing/2014/main" id="{A4C0E184-D106-4C54-9DA2-CE049AD6C477}"/>
               </a:ext>
             </a:extLst>
           </p:cNvPr>
@@ -26823,7 +26823,7 @@
           <p:cNvPr id="46" name="">
             <a:extLst xmlns:a="http://schemas.openxmlformats.org/drawingml/2006/main">
               <a:ext uri="{FF2B5EF4-FFF2-40B4-BE49-F238E27FC236}">
-                <a16:creationId xmlns:a16="http://schemas.microsoft.com/office/drawing/2014/main" id="{95DFDFDF-5EFA-49F5-9572-67CCE3B21647}"/>
+                <a16:creationId xmlns:a16="http://schemas.microsoft.com/office/drawing/2014/main" id="{450C8441-6936-4A42-AE3E-F9989F38C16D}"/>
               </a:ext>
             </a:extLst>
           </p:cNvPr>
@@ -26856,7 +26856,7 @@
           <p:cNvPr id="47" name="">
             <a:extLst xmlns:a="http://schemas.openxmlformats.org/drawingml/2006/main">
               <a:ext uri="{FF2B5EF4-FFF2-40B4-BE49-F238E27FC236}">
-                <a16:creationId xmlns:a16="http://schemas.microsoft.com/office/drawing/2014/main" id="{6C2BAFC0-99CF-437D-9F6A-501CC090CBD2}"/>
+                <a16:creationId xmlns:a16="http://schemas.microsoft.com/office/drawing/2014/main" id="{48C99851-2CDE-487C-B5BE-2602FF9294DC}"/>
               </a:ext>
             </a:extLst>
           </p:cNvPr>
@@ -26914,7 +26914,7 @@
           <p:cNvPr id="48" name="">
             <a:extLst xmlns:a="http://schemas.openxmlformats.org/drawingml/2006/main">
               <a:ext uri="{FF2B5EF4-FFF2-40B4-BE49-F238E27FC236}">
-                <a16:creationId xmlns:a16="http://schemas.microsoft.com/office/drawing/2014/main" id="{1917BA27-EB50-44FA-BD68-A49F5D4BAF0A}"/>
+                <a16:creationId xmlns:a16="http://schemas.microsoft.com/office/drawing/2014/main" id="{CE187134-AF69-405B-A3E5-5496C09C7AF4}"/>
               </a:ext>
             </a:extLst>
           </p:cNvPr>
@@ -26947,7 +26947,7 @@
           <p:cNvPr id="49" name="">
             <a:extLst xmlns:a="http://schemas.openxmlformats.org/drawingml/2006/main">
               <a:ext uri="{FF2B5EF4-FFF2-40B4-BE49-F238E27FC236}">
-                <a16:creationId xmlns:a16="http://schemas.microsoft.com/office/drawing/2014/main" id="{C23E55C3-503D-49C5-8B89-942814CFF4F6}"/>
+                <a16:creationId xmlns:a16="http://schemas.microsoft.com/office/drawing/2014/main" id="{C3AFD251-B363-42CC-949A-3CA7E21C6340}"/>
               </a:ext>
             </a:extLst>
           </p:cNvPr>
@@ -27005,7 +27005,7 @@
           <p:cNvPr id="50" name="">
             <a:extLst xmlns:a="http://schemas.openxmlformats.org/drawingml/2006/main">
               <a:ext uri="{FF2B5EF4-FFF2-40B4-BE49-F238E27FC236}">
-                <a16:creationId xmlns:a16="http://schemas.microsoft.com/office/drawing/2014/main" id="{8B73F176-2D66-4CC5-A67D-296C8BA98F62}"/>
+                <a16:creationId xmlns:a16="http://schemas.microsoft.com/office/drawing/2014/main" id="{D5E56251-6394-417E-8DFF-223C107645C4}"/>
               </a:ext>
             </a:extLst>
           </p:cNvPr>
@@ -27038,7 +27038,7 @@
           <p:cNvPr id="51" name="">
             <a:extLst xmlns:a="http://schemas.openxmlformats.org/drawingml/2006/main">
               <a:ext uri="{FF2B5EF4-FFF2-40B4-BE49-F238E27FC236}">
-                <a16:creationId xmlns:a16="http://schemas.microsoft.com/office/drawing/2014/main" id="{AF4F718E-C46B-4C02-BFD5-A866864B6CD0}"/>
+                <a16:creationId xmlns:a16="http://schemas.microsoft.com/office/drawing/2014/main" id="{77A64D31-3A1E-4A1B-963B-932736074ED4}"/>
               </a:ext>
             </a:extLst>
           </p:cNvPr>
@@ -27096,7 +27096,7 @@
           <p:cNvPr id="52" name="">
             <a:extLst xmlns:a="http://schemas.openxmlformats.org/drawingml/2006/main">
               <a:ext uri="{FF2B5EF4-FFF2-40B4-BE49-F238E27FC236}">
-                <a16:creationId xmlns:a16="http://schemas.microsoft.com/office/drawing/2014/main" id="{F39F6A2B-091E-4851-B97F-372B96872033}"/>
+                <a16:creationId xmlns:a16="http://schemas.microsoft.com/office/drawing/2014/main" id="{DC6D9F09-266D-44F0-BDA6-35E9BE5ED05B}"/>
               </a:ext>
             </a:extLst>
           </p:cNvPr>
@@ -27129,7 +27129,7 @@
           <p:cNvPr id="53" name="">
             <a:extLst xmlns:a="http://schemas.openxmlformats.org/drawingml/2006/main">
               <a:ext uri="{FF2B5EF4-FFF2-40B4-BE49-F238E27FC236}">
-                <a16:creationId xmlns:a16="http://schemas.microsoft.com/office/drawing/2014/main" id="{03055BCB-79CB-428B-85D1-AFE46C592121}"/>
+                <a16:creationId xmlns:a16="http://schemas.microsoft.com/office/drawing/2014/main" id="{1C2F3CEA-6EE2-4A9D-8B03-C91E69CC6B73}"/>
               </a:ext>
             </a:extLst>
           </p:cNvPr>
@@ -27187,7 +27187,7 @@
           <p:cNvPr id="54" name="">
             <a:extLst xmlns:a="http://schemas.openxmlformats.org/drawingml/2006/main">
               <a:ext uri="{FF2B5EF4-FFF2-40B4-BE49-F238E27FC236}">
-                <a16:creationId xmlns:a16="http://schemas.microsoft.com/office/drawing/2014/main" id="{EEDDEFE0-4294-450E-80B5-D286291FE02A}"/>
+                <a16:creationId xmlns:a16="http://schemas.microsoft.com/office/drawing/2014/main" id="{B2CD36D4-9899-4156-A2C1-2A126B9E0B80}"/>
               </a:ext>
             </a:extLst>
           </p:cNvPr>
@@ -27220,7 +27220,7 @@
           <p:cNvPr id="55" name="">
             <a:extLst xmlns:a="http://schemas.openxmlformats.org/drawingml/2006/main">
               <a:ext uri="{FF2B5EF4-FFF2-40B4-BE49-F238E27FC236}">
-                <a16:creationId xmlns:a16="http://schemas.microsoft.com/office/drawing/2014/main" id="{C26ECB9C-96D0-4B31-A2CC-025C69EC4139}"/>
+                <a16:creationId xmlns:a16="http://schemas.microsoft.com/office/drawing/2014/main" id="{9D07934A-D70A-4FEC-BE54-AF1AEFD95618}"/>
               </a:ext>
             </a:extLst>
           </p:cNvPr>
@@ -27278,7 +27278,7 @@
           <p:cNvPr id="56" name="">
             <a:extLst xmlns:a="http://schemas.openxmlformats.org/drawingml/2006/main">
               <a:ext uri="{FF2B5EF4-FFF2-40B4-BE49-F238E27FC236}">
-                <a16:creationId xmlns:a16="http://schemas.microsoft.com/office/drawing/2014/main" id="{EA849303-92A6-4D10-BE6D-18BECD53F632}"/>
+                <a16:creationId xmlns:a16="http://schemas.microsoft.com/office/drawing/2014/main" id="{00E60791-94F9-4D0E-9D08-700667299A5B}"/>
               </a:ext>
             </a:extLst>
           </p:cNvPr>
@@ -27311,7 +27311,7 @@
           <p:cNvPr id="57" name="">
             <a:extLst xmlns:a="http://schemas.openxmlformats.org/drawingml/2006/main">
               <a:ext uri="{FF2B5EF4-FFF2-40B4-BE49-F238E27FC236}">
-                <a16:creationId xmlns:a16="http://schemas.microsoft.com/office/drawing/2014/main" id="{4ECC47F3-44C0-4C33-9A32-EC254E2B23FA}"/>
+                <a16:creationId xmlns:a16="http://schemas.microsoft.com/office/drawing/2014/main" id="{D3B29DE8-91CD-41D5-90C5-3F6769A52019}"/>
               </a:ext>
             </a:extLst>
           </p:cNvPr>
@@ -27369,7 +27369,7 @@
           <p:cNvPr id="58" name="">
             <a:extLst xmlns:a="http://schemas.openxmlformats.org/drawingml/2006/main">
               <a:ext uri="{FF2B5EF4-FFF2-40B4-BE49-F238E27FC236}">
-                <a16:creationId xmlns:a16="http://schemas.microsoft.com/office/drawing/2014/main" id="{3F74E772-FEB5-4D14-98AC-B841CD2BA31F}"/>
+                <a16:creationId xmlns:a16="http://schemas.microsoft.com/office/drawing/2014/main" id="{74601F48-646D-4FAB-9E6C-62C4D55E946E}"/>
               </a:ext>
             </a:extLst>
           </p:cNvPr>
@@ -27402,7 +27402,7 @@
           <p:cNvPr id="59" name="">
             <a:extLst xmlns:a="http://schemas.openxmlformats.org/drawingml/2006/main">
               <a:ext uri="{FF2B5EF4-FFF2-40B4-BE49-F238E27FC236}">
-                <a16:creationId xmlns:a16="http://schemas.microsoft.com/office/drawing/2014/main" id="{0597F873-DBF4-453C-9F40-43587F707A85}"/>
+                <a16:creationId xmlns:a16="http://schemas.microsoft.com/office/drawing/2014/main" id="{010C8E13-13D2-44FC-8F58-8337F450B2F4}"/>
               </a:ext>
             </a:extLst>
           </p:cNvPr>
@@ -27460,7 +27460,7 @@
           <p:cNvPr id="60" name="">
             <a:extLst xmlns:a="http://schemas.openxmlformats.org/drawingml/2006/main">
               <a:ext uri="{FF2B5EF4-FFF2-40B4-BE49-F238E27FC236}">
-                <a16:creationId xmlns:a16="http://schemas.microsoft.com/office/drawing/2014/main" id="{715198D7-69D3-4EBC-BB54-87E4CF1D0709}"/>
+                <a16:creationId xmlns:a16="http://schemas.microsoft.com/office/drawing/2014/main" id="{4BD0C223-CED7-4145-8BA7-56F891FB9023}"/>
               </a:ext>
             </a:extLst>
           </p:cNvPr>
@@ -27493,7 +27493,7 @@
           <p:cNvPr id="61" name="">
             <a:extLst xmlns:a="http://schemas.openxmlformats.org/drawingml/2006/main">
               <a:ext uri="{FF2B5EF4-FFF2-40B4-BE49-F238E27FC236}">
-                <a16:creationId xmlns:a16="http://schemas.microsoft.com/office/drawing/2014/main" id="{85E9CBA1-6F8F-40EE-B5A3-B4EB3E35D357}"/>
+                <a16:creationId xmlns:a16="http://schemas.microsoft.com/office/drawing/2014/main" id="{777EA24A-584E-4244-9F85-85A26A45762E}"/>
               </a:ext>
             </a:extLst>
           </p:cNvPr>
@@ -27551,7 +27551,7 @@
           <p:cNvPr id="62" name="">
             <a:extLst xmlns:a="http://schemas.openxmlformats.org/drawingml/2006/main">
               <a:ext uri="{FF2B5EF4-FFF2-40B4-BE49-F238E27FC236}">
-                <a16:creationId xmlns:a16="http://schemas.microsoft.com/office/drawing/2014/main" id="{8D2334E6-26E8-44D4-85FC-4878BF86F738}"/>
+                <a16:creationId xmlns:a16="http://schemas.microsoft.com/office/drawing/2014/main" id="{579C2485-28C2-4283-B677-18E48627D562}"/>
               </a:ext>
             </a:extLst>
           </p:cNvPr>
@@ -27609,7 +27609,7 @@
           <p:cNvPr id="63" name="">
             <a:extLst xmlns:a="http://schemas.openxmlformats.org/drawingml/2006/main">
               <a:ext uri="{FF2B5EF4-FFF2-40B4-BE49-F238E27FC236}">
-                <a16:creationId xmlns:a16="http://schemas.microsoft.com/office/drawing/2014/main" id="{141E80D0-DBB7-457F-8031-4FEED9ECE058}"/>
+                <a16:creationId xmlns:a16="http://schemas.microsoft.com/office/drawing/2014/main" id="{921215FA-FAE9-4790-AC98-52848CD3BB9E}"/>
               </a:ext>
             </a:extLst>
           </p:cNvPr>
@@ -27642,7 +27642,7 @@
           <p:cNvPr id="64" name="">
             <a:extLst xmlns:a="http://schemas.openxmlformats.org/drawingml/2006/main">
               <a:ext uri="{FF2B5EF4-FFF2-40B4-BE49-F238E27FC236}">
-                <a16:creationId xmlns:a16="http://schemas.microsoft.com/office/drawing/2014/main" id="{8BE6A51D-6F84-4A59-9EB2-F65E3A8A785F}"/>
+                <a16:creationId xmlns:a16="http://schemas.microsoft.com/office/drawing/2014/main" id="{782A0BEC-1D5E-41F3-A2B0-B1A497541C99}"/>
               </a:ext>
             </a:extLst>
           </p:cNvPr>
@@ -27700,7 +27700,7 @@
                 <a:latin typeface="Microsoft YaHei"/>
                 <a:ea typeface="Microsoft YaHei"/>
                 <a:cs typeface="Microsoft YaHei"/>
-                <a:hlinkClick xmlns:r="http://schemas.openxmlformats.org/officeDocument/2006/relationships" r:id="Rdf68db6099c24909"/>
+                <a:hlinkClick xmlns:r="http://schemas.openxmlformats.org/officeDocument/2006/relationships" r:id="Re1eff71ddf374d87"/>
               </a:rPr>
               <a:t>码道定价</a:t>
             </a:r>
@@ -27712,7 +27712,7 @@
                 <a:latin typeface="Microsoft YaHei"/>
                 <a:ea typeface="Microsoft YaHei"/>
                 <a:cs typeface="Microsoft YaHei"/>
-                <a:hlinkClick xmlns:r="http://schemas.openxmlformats.org/officeDocument/2006/relationships" r:id="R7024022c9f2f4509"/>
+                <a:hlinkClick xmlns:r="http://schemas.openxmlformats.org/officeDocument/2006/relationships" r:id="R6cbb8df38bf54c5c"/>
               </a:rPr>
               <a:t> · Claude Plans</a:t>
             </a:r>
@@ -27724,7 +27724,7 @@
                 <a:latin typeface="Microsoft YaHei"/>
                 <a:ea typeface="Microsoft YaHei"/>
                 <a:cs typeface="Microsoft YaHei"/>
-                <a:hlinkClick xmlns:r="http://schemas.openxmlformats.org/officeDocument/2006/relationships" r:id="Re2c6becfb71447f2"/>
+                <a:hlinkClick xmlns:r="http://schemas.openxmlformats.org/officeDocument/2006/relationships" r:id="R1825fc0f6e47434b"/>
               </a:rPr>
               <a:t> · Qoder Pricing</a:t>
             </a:r>
@@ -27736,7 +27736,7 @@
                 <a:latin typeface="Microsoft YaHei"/>
                 <a:ea typeface="Microsoft YaHei"/>
                 <a:cs typeface="Microsoft YaHei"/>
-                <a:hlinkClick xmlns:r="http://schemas.openxmlformats.org/officeDocument/2006/relationships" r:id="R5d3bd9f62e114fc8"/>
+                <a:hlinkClick xmlns:r="http://schemas.openxmlformats.org/officeDocument/2006/relationships" r:id="Rbf902a5073e7449b"/>
               </a:rPr>
               <a:t> · Codex Pricing</a:t>
             </a:r>
@@ -27748,7 +27748,7 @@
           <p:cNvPr id="65" name="">
             <a:extLst xmlns:a="http://schemas.openxmlformats.org/drawingml/2006/main">
               <a:ext uri="{FF2B5EF4-FFF2-40B4-BE49-F238E27FC236}">
-                <a16:creationId xmlns:a16="http://schemas.microsoft.com/office/drawing/2014/main" id="{9C4D9D6D-5AA3-4CD0-8283-5DCC891B964B}"/>
+                <a16:creationId xmlns:a16="http://schemas.microsoft.com/office/drawing/2014/main" id="{914EB660-400D-4F85-B7C7-9ECB056CF96F}"/>
               </a:ext>
             </a:extLst>
           </p:cNvPr>
@@ -27804,7 +27804,7 @@
     </p:spTree>
     <p:extLst>
       <p:ext uri="{BB962C8B-B14F-4D97-AF65-F5344CB8AC3E}">
-        <p14:creationId xmlns:p14="http://schemas.microsoft.com/office/powerpoint/2010/main" val="1474902152"/>
+        <p14:creationId xmlns:p14="http://schemas.microsoft.com/office/powerpoint/2010/main" val="1670372081"/>
       </p:ext>
     </p:extLst>
   </p:cSld>
@@ -27835,7 +27835,7 @@
           <p:cNvPr id="48" name="">
             <a:extLst xmlns:a="http://schemas.openxmlformats.org/drawingml/2006/main">
               <a:ext uri="{FF2B5EF4-FFF2-40B4-BE49-F238E27FC236}">
-                <a16:creationId xmlns:a16="http://schemas.microsoft.com/office/drawing/2014/main" id="{2F5A7120-C7C7-4AD6-BA5F-7BE0756CC83B}"/>
+                <a16:creationId xmlns:a16="http://schemas.microsoft.com/office/drawing/2014/main" id="{EBCC561F-BF6D-48EF-B834-614B579B49D4}"/>
               </a:ext>
             </a:extLst>
           </p:cNvPr>
@@ -27868,7 +27868,7 @@
           <p:cNvPr id="2" name="">
             <a:extLst xmlns:a="http://schemas.openxmlformats.org/drawingml/2006/main">
               <a:ext uri="{FF2B5EF4-FFF2-40B4-BE49-F238E27FC236}">
-                <a16:creationId xmlns:a16="http://schemas.microsoft.com/office/drawing/2014/main" id="{449DA134-6B23-4610-9E6F-273A21E6DFB0}"/>
+                <a16:creationId xmlns:a16="http://schemas.microsoft.com/office/drawing/2014/main" id="{2706C2E4-1C58-410F-B828-20FC7F41CC82}"/>
               </a:ext>
             </a:extLst>
           </p:cNvPr>
@@ -27926,7 +27926,7 @@
           <p:cNvPr id="3" name="">
             <a:extLst xmlns:a="http://schemas.openxmlformats.org/drawingml/2006/main">
               <a:ext uri="{FF2B5EF4-FFF2-40B4-BE49-F238E27FC236}">
-                <a16:creationId xmlns:a16="http://schemas.microsoft.com/office/drawing/2014/main" id="{983470A7-ABE1-44C9-862B-AAFEB5CF3A2C}"/>
+                <a16:creationId xmlns:a16="http://schemas.microsoft.com/office/drawing/2014/main" id="{8E6F2BC6-E672-4AEC-80D9-D3F09F20C308}"/>
               </a:ext>
             </a:extLst>
           </p:cNvPr>
@@ -27958,7 +27958,7 @@
             <a:pPr algn="l">
               <a:defRPr sz="2325" b="1">
                 <a:solidFill>
-                  <a:srgbClr val="1D1D1A"/>
+                  <a:srgbClr val="8A0F17"/>
                 </a:solidFill>
                 <a:latin typeface="Microsoft YaHei"/>
                 <a:ea typeface="Microsoft YaHei"/>
@@ -27968,7 +27968,7 @@
             <a:r>
               <a:rPr sz="2325" b="1">
                 <a:solidFill>
-                  <a:srgbClr val="1D1D1A"/>
+                  <a:srgbClr val="8A0F17"/>
                 </a:solidFill>
                 <a:latin typeface="Microsoft YaHei"/>
                 <a:ea typeface="Microsoft YaHei"/>
@@ -27984,7 +27984,7 @@
           <p:cNvPr id="4" name="">
             <a:extLst xmlns:a="http://schemas.openxmlformats.org/drawingml/2006/main">
               <a:ext uri="{FF2B5EF4-FFF2-40B4-BE49-F238E27FC236}">
-                <a16:creationId xmlns:a16="http://schemas.microsoft.com/office/drawing/2014/main" id="{64F6082F-8766-4DB3-846C-8B450D3DC350}"/>
+                <a16:creationId xmlns:a16="http://schemas.microsoft.com/office/drawing/2014/main" id="{02B40E0B-4C83-4BFF-A124-0F21EE85E026}"/>
               </a:ext>
             </a:extLst>
           </p:cNvPr>
@@ -28017,7 +28017,7 @@
           <p:cNvPr id="5" name="">
             <a:extLst xmlns:a="http://schemas.openxmlformats.org/drawingml/2006/main">
               <a:ext uri="{FF2B5EF4-FFF2-40B4-BE49-F238E27FC236}">
-                <a16:creationId xmlns:a16="http://schemas.microsoft.com/office/drawing/2014/main" id="{59F535E5-E15B-4CC1-A97A-96EAEA13A642}"/>
+                <a16:creationId xmlns:a16="http://schemas.microsoft.com/office/drawing/2014/main" id="{8E566759-105B-4570-8F84-52EB06755016}"/>
               </a:ext>
             </a:extLst>
           </p:cNvPr>
@@ -28075,7 +28075,7 @@
           <p:cNvPr id="6" name="">
             <a:extLst xmlns:a="http://schemas.openxmlformats.org/drawingml/2006/main">
               <a:ext uri="{FF2B5EF4-FFF2-40B4-BE49-F238E27FC236}">
-                <a16:creationId xmlns:a16="http://schemas.microsoft.com/office/drawing/2014/main" id="{0954FAD0-27EB-4F42-86FA-B634A46199A1}"/>
+                <a16:creationId xmlns:a16="http://schemas.microsoft.com/office/drawing/2014/main" id="{82D33351-2D65-4697-B396-E8159B31E9CF}"/>
               </a:ext>
             </a:extLst>
           </p:cNvPr>
@@ -28108,7 +28108,7 @@
           <p:cNvPr id="7" name="">
             <a:extLst xmlns:a="http://schemas.openxmlformats.org/drawingml/2006/main">
               <a:ext uri="{FF2B5EF4-FFF2-40B4-BE49-F238E27FC236}">
-                <a16:creationId xmlns:a16="http://schemas.microsoft.com/office/drawing/2014/main" id="{30E73581-8376-49AE-9296-4483E2B954BB}"/>
+                <a16:creationId xmlns:a16="http://schemas.microsoft.com/office/drawing/2014/main" id="{2611DB14-8707-45DD-AA4C-757D2D3528FC}"/>
               </a:ext>
             </a:extLst>
           </p:cNvPr>
@@ -28166,7 +28166,7 @@
           <p:cNvPr id="8" name="">
             <a:extLst xmlns:a="http://schemas.openxmlformats.org/drawingml/2006/main">
               <a:ext uri="{FF2B5EF4-FFF2-40B4-BE49-F238E27FC236}">
-                <a16:creationId xmlns:a16="http://schemas.microsoft.com/office/drawing/2014/main" id="{C7F7C455-D0EF-433E-91C9-F3DB763F7DE3}"/>
+                <a16:creationId xmlns:a16="http://schemas.microsoft.com/office/drawing/2014/main" id="{CB7B87C2-D708-4822-B1FD-7627E92F24D8}"/>
               </a:ext>
             </a:extLst>
           </p:cNvPr>
@@ -28224,7 +28224,7 @@
           <p:cNvPr id="9" name="">
             <a:extLst xmlns:a="http://schemas.openxmlformats.org/drawingml/2006/main">
               <a:ext uri="{FF2B5EF4-FFF2-40B4-BE49-F238E27FC236}">
-                <a16:creationId xmlns:a16="http://schemas.microsoft.com/office/drawing/2014/main" id="{6007DAF9-32C2-4088-86CE-BEB3502F991E}"/>
+                <a16:creationId xmlns:a16="http://schemas.microsoft.com/office/drawing/2014/main" id="{9EDC4550-C871-4A12-933B-429B1854EEDB}"/>
               </a:ext>
             </a:extLst>
           </p:cNvPr>
@@ -28282,7 +28282,7 @@
           <p:cNvPr id="10" name="">
             <a:extLst xmlns:a="http://schemas.openxmlformats.org/drawingml/2006/main">
               <a:ext uri="{FF2B5EF4-FFF2-40B4-BE49-F238E27FC236}">
-                <a16:creationId xmlns:a16="http://schemas.microsoft.com/office/drawing/2014/main" id="{C10176D0-690B-4439-B367-3913C11DE1CD}"/>
+                <a16:creationId xmlns:a16="http://schemas.microsoft.com/office/drawing/2014/main" id="{94199AC2-99B1-422D-95FF-9E9240DF1E51}"/>
               </a:ext>
             </a:extLst>
           </p:cNvPr>
@@ -28315,7 +28315,7 @@
           <p:cNvPr id="11" name="">
             <a:extLst xmlns:a="http://schemas.openxmlformats.org/drawingml/2006/main">
               <a:ext uri="{FF2B5EF4-FFF2-40B4-BE49-F238E27FC236}">
-                <a16:creationId xmlns:a16="http://schemas.microsoft.com/office/drawing/2014/main" id="{708ECD6C-BC7F-4AC1-A85D-23623D84EE23}"/>
+                <a16:creationId xmlns:a16="http://schemas.microsoft.com/office/drawing/2014/main" id="{BC86FC57-B96E-43C2-9608-BE7859B371E4}"/>
               </a:ext>
             </a:extLst>
           </p:cNvPr>
@@ -28373,7 +28373,7 @@
           <p:cNvPr id="12" name="">
             <a:extLst xmlns:a="http://schemas.openxmlformats.org/drawingml/2006/main">
               <a:ext uri="{FF2B5EF4-FFF2-40B4-BE49-F238E27FC236}">
-                <a16:creationId xmlns:a16="http://schemas.microsoft.com/office/drawing/2014/main" id="{CDA1387D-9BD4-45A2-A9C0-DDE6F80A7FED}"/>
+                <a16:creationId xmlns:a16="http://schemas.microsoft.com/office/drawing/2014/main" id="{F52E75A7-2B99-4860-9833-2B211F9AF52E}"/>
               </a:ext>
             </a:extLst>
           </p:cNvPr>
@@ -28406,7 +28406,7 @@
           <p:cNvPr id="13" name="">
             <a:extLst xmlns:a="http://schemas.openxmlformats.org/drawingml/2006/main">
               <a:ext uri="{FF2B5EF4-FFF2-40B4-BE49-F238E27FC236}">
-                <a16:creationId xmlns:a16="http://schemas.microsoft.com/office/drawing/2014/main" id="{7378CC4E-8F96-448E-9DB8-2C136676A36F}"/>
+                <a16:creationId xmlns:a16="http://schemas.microsoft.com/office/drawing/2014/main" id="{C4AF65C0-4DDC-4E07-9684-206D8CB7E3C5}"/>
               </a:ext>
             </a:extLst>
           </p:cNvPr>
@@ -28464,7 +28464,7 @@
           <p:cNvPr id="14" name="">
             <a:extLst xmlns:a="http://schemas.openxmlformats.org/drawingml/2006/main">
               <a:ext uri="{FF2B5EF4-FFF2-40B4-BE49-F238E27FC236}">
-                <a16:creationId xmlns:a16="http://schemas.microsoft.com/office/drawing/2014/main" id="{FAA6725C-3B8B-4720-A4E5-8BEB37D0C6DD}"/>
+                <a16:creationId xmlns:a16="http://schemas.microsoft.com/office/drawing/2014/main" id="{F9BCE531-F5CA-47DF-8C30-A4E9A60D8D1E}"/>
               </a:ext>
             </a:extLst>
           </p:cNvPr>
@@ -28522,7 +28522,7 @@
           <p:cNvPr id="15" name="">
             <a:extLst xmlns:a="http://schemas.openxmlformats.org/drawingml/2006/main">
               <a:ext uri="{FF2B5EF4-FFF2-40B4-BE49-F238E27FC236}">
-                <a16:creationId xmlns:a16="http://schemas.microsoft.com/office/drawing/2014/main" id="{79577DEF-70AF-46D8-8989-FA65A39CF79C}"/>
+                <a16:creationId xmlns:a16="http://schemas.microsoft.com/office/drawing/2014/main" id="{B0928935-CE37-4CB9-A7CD-C9733F2CCAFD}"/>
               </a:ext>
             </a:extLst>
           </p:cNvPr>
@@ -28580,7 +28580,7 @@
           <p:cNvPr id="16" name="">
             <a:extLst xmlns:a="http://schemas.openxmlformats.org/drawingml/2006/main">
               <a:ext uri="{FF2B5EF4-FFF2-40B4-BE49-F238E27FC236}">
-                <a16:creationId xmlns:a16="http://schemas.microsoft.com/office/drawing/2014/main" id="{39F9C61C-93E2-46DB-81BB-08A606DFC2D1}"/>
+                <a16:creationId xmlns:a16="http://schemas.microsoft.com/office/drawing/2014/main" id="{5F0A89DD-A4CA-408D-85D6-3DAEF0456190}"/>
               </a:ext>
             </a:extLst>
           </p:cNvPr>
@@ -28613,7 +28613,7 @@
           <p:cNvPr id="17" name="">
             <a:extLst xmlns:a="http://schemas.openxmlformats.org/drawingml/2006/main">
               <a:ext uri="{FF2B5EF4-FFF2-40B4-BE49-F238E27FC236}">
-                <a16:creationId xmlns:a16="http://schemas.microsoft.com/office/drawing/2014/main" id="{B4D91DC5-CD96-44FD-A1F5-B6E8821B37E6}"/>
+                <a16:creationId xmlns:a16="http://schemas.microsoft.com/office/drawing/2014/main" id="{12D0F541-6E4D-4A10-B58C-82A3359ACAD7}"/>
               </a:ext>
             </a:extLst>
           </p:cNvPr>
@@ -28671,7 +28671,7 @@
           <p:cNvPr id="18" name="">
             <a:extLst xmlns:a="http://schemas.openxmlformats.org/drawingml/2006/main">
               <a:ext uri="{FF2B5EF4-FFF2-40B4-BE49-F238E27FC236}">
-                <a16:creationId xmlns:a16="http://schemas.microsoft.com/office/drawing/2014/main" id="{9EE93B58-E047-4F31-8228-C564C607B204}"/>
+                <a16:creationId xmlns:a16="http://schemas.microsoft.com/office/drawing/2014/main" id="{964F6CCD-28F3-48C1-BA66-8C0CC5D21862}"/>
               </a:ext>
             </a:extLst>
           </p:cNvPr>
@@ -28704,7 +28704,7 @@
           <p:cNvPr id="19" name="">
             <a:extLst xmlns:a="http://schemas.openxmlformats.org/drawingml/2006/main">
               <a:ext uri="{FF2B5EF4-FFF2-40B4-BE49-F238E27FC236}">
-                <a16:creationId xmlns:a16="http://schemas.microsoft.com/office/drawing/2014/main" id="{9F200157-4B56-4F45-B1F5-C9DAEB992672}"/>
+                <a16:creationId xmlns:a16="http://schemas.microsoft.com/office/drawing/2014/main" id="{279D0EC2-63E1-46EC-8F37-61C10CEB5BEE}"/>
               </a:ext>
             </a:extLst>
           </p:cNvPr>
@@ -28762,7 +28762,7 @@
           <p:cNvPr id="20" name="">
             <a:extLst xmlns:a="http://schemas.openxmlformats.org/drawingml/2006/main">
               <a:ext uri="{FF2B5EF4-FFF2-40B4-BE49-F238E27FC236}">
-                <a16:creationId xmlns:a16="http://schemas.microsoft.com/office/drawing/2014/main" id="{69CB29B9-DE3C-411D-925A-CC53B9BFAFBB}"/>
+                <a16:creationId xmlns:a16="http://schemas.microsoft.com/office/drawing/2014/main" id="{01220FAB-8AF7-468D-8572-6EF234E0A12E}"/>
               </a:ext>
             </a:extLst>
           </p:cNvPr>
@@ -28820,7 +28820,7 @@
           <p:cNvPr id="21" name="">
             <a:extLst xmlns:a="http://schemas.openxmlformats.org/drawingml/2006/main">
               <a:ext uri="{FF2B5EF4-FFF2-40B4-BE49-F238E27FC236}">
-                <a16:creationId xmlns:a16="http://schemas.microsoft.com/office/drawing/2014/main" id="{CDF1453D-7A45-4548-B3A5-7AF2C81E1111}"/>
+                <a16:creationId xmlns:a16="http://schemas.microsoft.com/office/drawing/2014/main" id="{C2C92903-449F-437D-9D05-DEA3EE6D99F0}"/>
               </a:ext>
             </a:extLst>
           </p:cNvPr>
@@ -28878,7 +28878,7 @@
           <p:cNvPr id="22" name="">
             <a:extLst xmlns:a="http://schemas.openxmlformats.org/drawingml/2006/main">
               <a:ext uri="{FF2B5EF4-FFF2-40B4-BE49-F238E27FC236}">
-                <a16:creationId xmlns:a16="http://schemas.microsoft.com/office/drawing/2014/main" id="{5DB05DE9-2638-47ED-8C26-8D4118B0F967}"/>
+                <a16:creationId xmlns:a16="http://schemas.microsoft.com/office/drawing/2014/main" id="{8BEAC83A-7782-4D00-A471-DCC9F0C91BC6}"/>
               </a:ext>
             </a:extLst>
           </p:cNvPr>
@@ -28911,7 +28911,7 @@
           <p:cNvPr id="23" name="">
             <a:extLst xmlns:a="http://schemas.openxmlformats.org/drawingml/2006/main">
               <a:ext uri="{FF2B5EF4-FFF2-40B4-BE49-F238E27FC236}">
-                <a16:creationId xmlns:a16="http://schemas.microsoft.com/office/drawing/2014/main" id="{B7E549DE-538A-4E0E-A6A1-65A475BEE4FC}"/>
+                <a16:creationId xmlns:a16="http://schemas.microsoft.com/office/drawing/2014/main" id="{186276AA-06B9-4ECD-8454-4E0F89C0B80C}"/>
               </a:ext>
             </a:extLst>
           </p:cNvPr>
@@ -28969,7 +28969,7 @@
           <p:cNvPr id="24" name="">
             <a:extLst xmlns:a="http://schemas.openxmlformats.org/drawingml/2006/main">
               <a:ext uri="{FF2B5EF4-FFF2-40B4-BE49-F238E27FC236}">
-                <a16:creationId xmlns:a16="http://schemas.microsoft.com/office/drawing/2014/main" id="{D513EC2D-59A2-45B0-BA85-A541D9B92017}"/>
+                <a16:creationId xmlns:a16="http://schemas.microsoft.com/office/drawing/2014/main" id="{EE779886-66A0-4DCC-B09C-03CDB4B908AA}"/>
               </a:ext>
             </a:extLst>
           </p:cNvPr>
@@ -29002,7 +29002,7 @@
           <p:cNvPr id="25" name="">
             <a:extLst xmlns:a="http://schemas.openxmlformats.org/drawingml/2006/main">
               <a:ext uri="{FF2B5EF4-FFF2-40B4-BE49-F238E27FC236}">
-                <a16:creationId xmlns:a16="http://schemas.microsoft.com/office/drawing/2014/main" id="{76BE6726-4A43-4244-BCC6-734B68D744F7}"/>
+                <a16:creationId xmlns:a16="http://schemas.microsoft.com/office/drawing/2014/main" id="{13FE8501-157B-448F-9839-BDCBCDC0D00B}"/>
               </a:ext>
             </a:extLst>
           </p:cNvPr>
@@ -29060,7 +29060,7 @@
           <p:cNvPr id="26" name="">
             <a:extLst xmlns:a="http://schemas.openxmlformats.org/drawingml/2006/main">
               <a:ext uri="{FF2B5EF4-FFF2-40B4-BE49-F238E27FC236}">
-                <a16:creationId xmlns:a16="http://schemas.microsoft.com/office/drawing/2014/main" id="{4F337CD2-6B17-4F31-900A-ADD6FE55662E}"/>
+                <a16:creationId xmlns:a16="http://schemas.microsoft.com/office/drawing/2014/main" id="{F85D1025-7F10-4913-840D-C9B53B2B6FFD}"/>
               </a:ext>
             </a:extLst>
           </p:cNvPr>
@@ -29118,7 +29118,7 @@
           <p:cNvPr id="27" name="">
             <a:extLst xmlns:a="http://schemas.openxmlformats.org/drawingml/2006/main">
               <a:ext uri="{FF2B5EF4-FFF2-40B4-BE49-F238E27FC236}">
-                <a16:creationId xmlns:a16="http://schemas.microsoft.com/office/drawing/2014/main" id="{4C6A7B01-4F33-4716-B83E-4C2AAE51BD17}"/>
+                <a16:creationId xmlns:a16="http://schemas.microsoft.com/office/drawing/2014/main" id="{AD020EE8-2E54-4FD1-B266-3BB24CFECC85}"/>
               </a:ext>
             </a:extLst>
           </p:cNvPr>
@@ -29176,7 +29176,7 @@
           <p:cNvPr id="28" name="">
             <a:extLst xmlns:a="http://schemas.openxmlformats.org/drawingml/2006/main">
               <a:ext uri="{FF2B5EF4-FFF2-40B4-BE49-F238E27FC236}">
-                <a16:creationId xmlns:a16="http://schemas.microsoft.com/office/drawing/2014/main" id="{E285A0AB-1020-4CC4-9FA7-70FB95DB5A8B}"/>
+                <a16:creationId xmlns:a16="http://schemas.microsoft.com/office/drawing/2014/main" id="{09C99E35-435B-4EF6-ACF3-64125BBCA729}"/>
               </a:ext>
             </a:extLst>
           </p:cNvPr>
@@ -29209,7 +29209,7 @@
           <p:cNvPr id="29" name="">
             <a:extLst xmlns:a="http://schemas.openxmlformats.org/drawingml/2006/main">
               <a:ext uri="{FF2B5EF4-FFF2-40B4-BE49-F238E27FC236}">
-                <a16:creationId xmlns:a16="http://schemas.microsoft.com/office/drawing/2014/main" id="{108D4CC0-FB4A-4B38-BBA1-5AB2706D3FA3}"/>
+                <a16:creationId xmlns:a16="http://schemas.microsoft.com/office/drawing/2014/main" id="{17A8B75A-7438-440F-8ADE-EBE79344C9FE}"/>
               </a:ext>
             </a:extLst>
           </p:cNvPr>
@@ -29267,7 +29267,7 @@
           <p:cNvPr id="30" name="">
             <a:extLst xmlns:a="http://schemas.openxmlformats.org/drawingml/2006/main">
               <a:ext uri="{FF2B5EF4-FFF2-40B4-BE49-F238E27FC236}">
-                <a16:creationId xmlns:a16="http://schemas.microsoft.com/office/drawing/2014/main" id="{F747A126-5BDF-4220-AA08-4C61CC1EAEB1}"/>
+                <a16:creationId xmlns:a16="http://schemas.microsoft.com/office/drawing/2014/main" id="{1A94D2A9-B576-4F1B-884F-F729454629AA}"/>
               </a:ext>
             </a:extLst>
           </p:cNvPr>
@@ -29300,7 +29300,7 @@
           <p:cNvPr id="31" name="">
             <a:extLst xmlns:a="http://schemas.openxmlformats.org/drawingml/2006/main">
               <a:ext uri="{FF2B5EF4-FFF2-40B4-BE49-F238E27FC236}">
-                <a16:creationId xmlns:a16="http://schemas.microsoft.com/office/drawing/2014/main" id="{3864F52C-91C8-4AD1-B068-86E9776D9202}"/>
+                <a16:creationId xmlns:a16="http://schemas.microsoft.com/office/drawing/2014/main" id="{9FFCFC07-1413-42A2-80FB-64D878528005}"/>
               </a:ext>
             </a:extLst>
           </p:cNvPr>
@@ -29358,7 +29358,7 @@
           <p:cNvPr id="32" name="">
             <a:extLst xmlns:a="http://schemas.openxmlformats.org/drawingml/2006/main">
               <a:ext uri="{FF2B5EF4-FFF2-40B4-BE49-F238E27FC236}">
-                <a16:creationId xmlns:a16="http://schemas.microsoft.com/office/drawing/2014/main" id="{D7E8E8DA-0D64-4DC8-991C-5A48F99D12CE}"/>
+                <a16:creationId xmlns:a16="http://schemas.microsoft.com/office/drawing/2014/main" id="{7B10CE4D-FCD4-4DF4-ACB3-337860B937CC}"/>
               </a:ext>
             </a:extLst>
           </p:cNvPr>
@@ -29416,7 +29416,7 @@
           <p:cNvPr id="33" name="">
             <a:extLst xmlns:a="http://schemas.openxmlformats.org/drawingml/2006/main">
               <a:ext uri="{FF2B5EF4-FFF2-40B4-BE49-F238E27FC236}">
-                <a16:creationId xmlns:a16="http://schemas.microsoft.com/office/drawing/2014/main" id="{157B8867-D15D-4E78-9298-8FFF2EBCAABB}"/>
+                <a16:creationId xmlns:a16="http://schemas.microsoft.com/office/drawing/2014/main" id="{ED01D745-7FB4-4E91-B4EE-C2C8A015EDCD}"/>
               </a:ext>
             </a:extLst>
           </p:cNvPr>
@@ -29474,7 +29474,7 @@
           <p:cNvPr id="34" name="">
             <a:extLst xmlns:a="http://schemas.openxmlformats.org/drawingml/2006/main">
               <a:ext uri="{FF2B5EF4-FFF2-40B4-BE49-F238E27FC236}">
-                <a16:creationId xmlns:a16="http://schemas.microsoft.com/office/drawing/2014/main" id="{17D2E76E-8BED-44E9-8616-E78C4F0D7E87}"/>
+                <a16:creationId xmlns:a16="http://schemas.microsoft.com/office/drawing/2014/main" id="{97E3F808-2BD7-4F6D-8564-B22E799B44FF}"/>
               </a:ext>
             </a:extLst>
           </p:cNvPr>
@@ -29507,7 +29507,7 @@
           <p:cNvPr id="35" name="">
             <a:extLst xmlns:a="http://schemas.openxmlformats.org/drawingml/2006/main">
               <a:ext uri="{FF2B5EF4-FFF2-40B4-BE49-F238E27FC236}">
-                <a16:creationId xmlns:a16="http://schemas.microsoft.com/office/drawing/2014/main" id="{90DCD500-1442-48B2-9B4F-988B8D6FD16B}"/>
+                <a16:creationId xmlns:a16="http://schemas.microsoft.com/office/drawing/2014/main" id="{618F06B0-96F7-41E0-AEEB-C0016BFE39EF}"/>
               </a:ext>
             </a:extLst>
           </p:cNvPr>
@@ -29565,7 +29565,7 @@
           <p:cNvPr id="36" name="">
             <a:extLst xmlns:a="http://schemas.openxmlformats.org/drawingml/2006/main">
               <a:ext uri="{FF2B5EF4-FFF2-40B4-BE49-F238E27FC236}">
-                <a16:creationId xmlns:a16="http://schemas.microsoft.com/office/drawing/2014/main" id="{1936C2B4-B500-4EDD-B3CE-4B0D10106F64}"/>
+                <a16:creationId xmlns:a16="http://schemas.microsoft.com/office/drawing/2014/main" id="{65571EF4-42BE-4235-8C40-959E607E7455}"/>
               </a:ext>
             </a:extLst>
           </p:cNvPr>
@@ -29598,7 +29598,7 @@
           <p:cNvPr id="37" name="">
             <a:extLst xmlns:a="http://schemas.openxmlformats.org/drawingml/2006/main">
               <a:ext uri="{FF2B5EF4-FFF2-40B4-BE49-F238E27FC236}">
-                <a16:creationId xmlns:a16="http://schemas.microsoft.com/office/drawing/2014/main" id="{D9BD057D-15AD-4806-B29F-AFC0D113C11F}"/>
+                <a16:creationId xmlns:a16="http://schemas.microsoft.com/office/drawing/2014/main" id="{F4313DC6-D012-4828-8841-240869943C4A}"/>
               </a:ext>
             </a:extLst>
           </p:cNvPr>
@@ -29656,7 +29656,7 @@
           <p:cNvPr id="38" name="">
             <a:extLst xmlns:a="http://schemas.openxmlformats.org/drawingml/2006/main">
               <a:ext uri="{FF2B5EF4-FFF2-40B4-BE49-F238E27FC236}">
-                <a16:creationId xmlns:a16="http://schemas.microsoft.com/office/drawing/2014/main" id="{CD6B0ACC-E536-48A7-8CA3-35BAD3A1387B}"/>
+                <a16:creationId xmlns:a16="http://schemas.microsoft.com/office/drawing/2014/main" id="{99F5BF2E-39C7-43A4-86F4-C5FA7F4D60DA}"/>
               </a:ext>
             </a:extLst>
           </p:cNvPr>
@@ -29714,7 +29714,7 @@
           <p:cNvPr id="39" name="">
             <a:extLst xmlns:a="http://schemas.openxmlformats.org/drawingml/2006/main">
               <a:ext uri="{FF2B5EF4-FFF2-40B4-BE49-F238E27FC236}">
-                <a16:creationId xmlns:a16="http://schemas.microsoft.com/office/drawing/2014/main" id="{7E4298A6-84CC-46AE-B81F-07BDE1BF0F12}"/>
+                <a16:creationId xmlns:a16="http://schemas.microsoft.com/office/drawing/2014/main" id="{B4FD8E13-81F9-4249-9EE0-757248B7990E}"/>
               </a:ext>
             </a:extLst>
           </p:cNvPr>
@@ -29772,7 +29772,7 @@
           <p:cNvPr id="40" name="">
             <a:extLst xmlns:a="http://schemas.openxmlformats.org/drawingml/2006/main">
               <a:ext uri="{FF2B5EF4-FFF2-40B4-BE49-F238E27FC236}">
-                <a16:creationId xmlns:a16="http://schemas.microsoft.com/office/drawing/2014/main" id="{9F15A326-FB26-42B6-94C7-DF435BDE4C02}"/>
+                <a16:creationId xmlns:a16="http://schemas.microsoft.com/office/drawing/2014/main" id="{F34ADC09-B979-4B6B-920A-7C519FB77122}"/>
               </a:ext>
             </a:extLst>
           </p:cNvPr>
@@ -29805,7 +29805,7 @@
           <p:cNvPr id="41" name="">
             <a:extLst xmlns:a="http://schemas.openxmlformats.org/drawingml/2006/main">
               <a:ext uri="{FF2B5EF4-FFF2-40B4-BE49-F238E27FC236}">
-                <a16:creationId xmlns:a16="http://schemas.microsoft.com/office/drawing/2014/main" id="{6F8A203C-9E5B-457A-AA8C-09E913D2A6EB}"/>
+                <a16:creationId xmlns:a16="http://schemas.microsoft.com/office/drawing/2014/main" id="{AB2F8F91-AFD6-40BA-B3B7-B40E1094CE38}"/>
               </a:ext>
             </a:extLst>
           </p:cNvPr>
@@ -29863,7 +29863,7 @@
           <p:cNvPr id="42" name="">
             <a:extLst xmlns:a="http://schemas.openxmlformats.org/drawingml/2006/main">
               <a:ext uri="{FF2B5EF4-FFF2-40B4-BE49-F238E27FC236}">
-                <a16:creationId xmlns:a16="http://schemas.microsoft.com/office/drawing/2014/main" id="{778BD569-5438-4531-AF1A-9C9569444393}"/>
+                <a16:creationId xmlns:a16="http://schemas.microsoft.com/office/drawing/2014/main" id="{F2D7ADC8-BEEE-4B98-8A39-AEC900CF4E88}"/>
               </a:ext>
             </a:extLst>
           </p:cNvPr>
@@ -29921,7 +29921,7 @@
           <p:cNvPr id="43" name="">
             <a:extLst xmlns:a="http://schemas.openxmlformats.org/drawingml/2006/main">
               <a:ext uri="{FF2B5EF4-FFF2-40B4-BE49-F238E27FC236}">
-                <a16:creationId xmlns:a16="http://schemas.microsoft.com/office/drawing/2014/main" id="{106DBBC9-06FD-4DE2-8E82-A80C01CF6ADB}"/>
+                <a16:creationId xmlns:a16="http://schemas.microsoft.com/office/drawing/2014/main" id="{45E7FD81-EAD8-4B4D-ADA4-CB4BDFEBDC26}"/>
               </a:ext>
             </a:extLst>
           </p:cNvPr>
@@ -29979,7 +29979,7 @@
           <p:cNvPr id="44" name="">
             <a:extLst xmlns:a="http://schemas.openxmlformats.org/drawingml/2006/main">
               <a:ext uri="{FF2B5EF4-FFF2-40B4-BE49-F238E27FC236}">
-                <a16:creationId xmlns:a16="http://schemas.microsoft.com/office/drawing/2014/main" id="{F125676A-AD2F-458B-BDA7-7909124B802E}"/>
+                <a16:creationId xmlns:a16="http://schemas.microsoft.com/office/drawing/2014/main" id="{527DD2C6-1840-425B-AD48-C5EABE651A36}"/>
               </a:ext>
             </a:extLst>
           </p:cNvPr>
@@ -30037,7 +30037,7 @@
           <p:cNvPr id="45" name="">
             <a:extLst xmlns:a="http://schemas.openxmlformats.org/drawingml/2006/main">
               <a:ext uri="{FF2B5EF4-FFF2-40B4-BE49-F238E27FC236}">
-                <a16:creationId xmlns:a16="http://schemas.microsoft.com/office/drawing/2014/main" id="{EC896B4D-5929-454E-8C5A-EC3182F732AE}"/>
+                <a16:creationId xmlns:a16="http://schemas.microsoft.com/office/drawing/2014/main" id="{7000BB48-8628-4F03-B667-A73AA80361CF}"/>
               </a:ext>
             </a:extLst>
           </p:cNvPr>
@@ -30070,7 +30070,7 @@
           <p:cNvPr id="46" name="">
             <a:extLst xmlns:a="http://schemas.openxmlformats.org/drawingml/2006/main">
               <a:ext uri="{FF2B5EF4-FFF2-40B4-BE49-F238E27FC236}">
-                <a16:creationId xmlns:a16="http://schemas.microsoft.com/office/drawing/2014/main" id="{21B47739-F2C1-4A7B-A1F5-F502BF6040B3}"/>
+                <a16:creationId xmlns:a16="http://schemas.microsoft.com/office/drawing/2014/main" id="{06B52C6D-E82A-4ED6-8D6D-098B9E3CCF51}"/>
               </a:ext>
             </a:extLst>
           </p:cNvPr>
@@ -30128,7 +30128,7 @@
                 <a:latin typeface="Microsoft YaHei"/>
                 <a:ea typeface="Microsoft YaHei"/>
                 <a:cs typeface="Microsoft YaHei"/>
-                <a:hlinkClick xmlns:r="http://schemas.openxmlformats.org/officeDocument/2006/relationships" r:id="R58406bf0464b476a"/>
+                <a:hlinkClick xmlns:r="http://schemas.openxmlformats.org/officeDocument/2006/relationships" r:id="R686aebd77ee9467f"/>
               </a:rPr>
               <a:t>码道定价</a:t>
             </a:r>
@@ -30140,7 +30140,7 @@
                 <a:latin typeface="Microsoft YaHei"/>
                 <a:ea typeface="Microsoft YaHei"/>
                 <a:cs typeface="Microsoft YaHei"/>
-                <a:hlinkClick xmlns:r="http://schemas.openxmlformats.org/officeDocument/2006/relationships" r:id="R03619520f2924bc0"/>
+                <a:hlinkClick xmlns:r="http://schemas.openxmlformats.org/officeDocument/2006/relationships" r:id="R647aa8a3a3e34b48"/>
               </a:rPr>
               <a:t> · Qoder Pricing</a:t>
             </a:r>
@@ -30152,7 +30152,7 @@
                 <a:latin typeface="Microsoft YaHei"/>
                 <a:ea typeface="Microsoft YaHei"/>
                 <a:cs typeface="Microsoft YaHei"/>
-                <a:hlinkClick xmlns:r="http://schemas.openxmlformats.org/officeDocument/2006/relationships" r:id="R48cda86532da4481"/>
+                <a:hlinkClick xmlns:r="http://schemas.openxmlformats.org/officeDocument/2006/relationships" r:id="Rf6675573dcf3404e"/>
               </a:rPr>
               <a:t> · Cursor Pricing</a:t>
             </a:r>
@@ -30164,7 +30164,7 @@
                 <a:latin typeface="Microsoft YaHei"/>
                 <a:ea typeface="Microsoft YaHei"/>
                 <a:cs typeface="Microsoft YaHei"/>
-                <a:hlinkClick xmlns:r="http://schemas.openxmlformats.org/officeDocument/2006/relationships" r:id="R7b7e74a78da040ef"/>
+                <a:hlinkClick xmlns:r="http://schemas.openxmlformats.org/officeDocument/2006/relationships" r:id="R26db1a27792640dd"/>
               </a:rPr>
               <a:t> · Trae Pricing</a:t>
             </a:r>
@@ -30176,7 +30176,7 @@
           <p:cNvPr id="47" name="">
             <a:extLst xmlns:a="http://schemas.openxmlformats.org/drawingml/2006/main">
               <a:ext uri="{FF2B5EF4-FFF2-40B4-BE49-F238E27FC236}">
-                <a16:creationId xmlns:a16="http://schemas.microsoft.com/office/drawing/2014/main" id="{DB137D4A-A862-4E7C-9B49-7DAE6911F14F}"/>
+                <a16:creationId xmlns:a16="http://schemas.microsoft.com/office/drawing/2014/main" id="{26DFE859-EFA3-453B-A46F-1169CE0FDA09}"/>
               </a:ext>
             </a:extLst>
           </p:cNvPr>
@@ -30232,7 +30232,7 @@
     </p:spTree>
     <p:extLst>
       <p:ext uri="{BB962C8B-B14F-4D97-AF65-F5344CB8AC3E}">
-        <p14:creationId xmlns:p14="http://schemas.microsoft.com/office/powerpoint/2010/main" val="158273247"/>
+        <p14:creationId xmlns:p14="http://schemas.microsoft.com/office/powerpoint/2010/main" val="1700401099"/>
       </p:ext>
     </p:extLst>
   </p:cSld>
@@ -30263,7 +30263,7 @@
           <p:cNvPr id="36" name="">
             <a:extLst xmlns:a="http://schemas.openxmlformats.org/drawingml/2006/main">
               <a:ext uri="{FF2B5EF4-FFF2-40B4-BE49-F238E27FC236}">
-                <a16:creationId xmlns:a16="http://schemas.microsoft.com/office/drawing/2014/main" id="{F9B1CE80-2385-4BC9-B480-B02458CA6AAF}"/>
+                <a16:creationId xmlns:a16="http://schemas.microsoft.com/office/drawing/2014/main" id="{2BA92D29-9F60-4D4A-8794-3E288F1B36C4}"/>
               </a:ext>
             </a:extLst>
           </p:cNvPr>
@@ -30296,7 +30296,7 @@
           <p:cNvPr id="2" name="">
             <a:extLst xmlns:a="http://schemas.openxmlformats.org/drawingml/2006/main">
               <a:ext uri="{FF2B5EF4-FFF2-40B4-BE49-F238E27FC236}">
-                <a16:creationId xmlns:a16="http://schemas.microsoft.com/office/drawing/2014/main" id="{DAA96AE5-3A38-4B29-AE86-43518FEB4137}"/>
+                <a16:creationId xmlns:a16="http://schemas.microsoft.com/office/drawing/2014/main" id="{F58128F0-E567-4EA0-9CE8-5FE9E859076A}"/>
               </a:ext>
             </a:extLst>
           </p:cNvPr>
@@ -30354,7 +30354,7 @@
           <p:cNvPr id="3" name="">
             <a:extLst xmlns:a="http://schemas.openxmlformats.org/drawingml/2006/main">
               <a:ext uri="{FF2B5EF4-FFF2-40B4-BE49-F238E27FC236}">
-                <a16:creationId xmlns:a16="http://schemas.microsoft.com/office/drawing/2014/main" id="{494C4A11-648A-472C-99FC-28598E154B84}"/>
+                <a16:creationId xmlns:a16="http://schemas.microsoft.com/office/drawing/2014/main" id="{B0F0600B-DEEF-4B5C-9247-FF1E510728C0}"/>
               </a:ext>
             </a:extLst>
           </p:cNvPr>
@@ -30386,7 +30386,7 @@
             <a:pPr algn="l">
               <a:defRPr sz="2325" b="1">
                 <a:solidFill>
-                  <a:srgbClr val="1D1D1A"/>
+                  <a:srgbClr val="8A0F17"/>
                 </a:solidFill>
                 <a:latin typeface="Microsoft YaHei"/>
                 <a:ea typeface="Microsoft YaHei"/>
@@ -30396,7 +30396,7 @@
             <a:r>
               <a:rPr sz="2325" b="1">
                 <a:solidFill>
-                  <a:srgbClr val="1D1D1A"/>
+                  <a:srgbClr val="8A0F17"/>
                 </a:solidFill>
                 <a:latin typeface="Microsoft YaHei"/>
                 <a:ea typeface="Microsoft YaHei"/>
@@ -30412,7 +30412,7 @@
           <p:cNvPr id="4" name="">
             <a:extLst xmlns:a="http://schemas.openxmlformats.org/drawingml/2006/main">
               <a:ext uri="{FF2B5EF4-FFF2-40B4-BE49-F238E27FC236}">
-                <a16:creationId xmlns:a16="http://schemas.microsoft.com/office/drawing/2014/main" id="{1AF38EE1-825D-4C50-8901-DBAAA52D2C93}"/>
+                <a16:creationId xmlns:a16="http://schemas.microsoft.com/office/drawing/2014/main" id="{D97E74C5-77BF-4DE3-BFAA-989F07B1D6E1}"/>
               </a:ext>
             </a:extLst>
           </p:cNvPr>
@@ -30449,7 +30449,7 @@
           <p:nvPr/>
         </p:nvPicPr>
         <p:blipFill>
-          <a:blip xmlns:r="http://schemas.openxmlformats.org/officeDocument/2006/relationships" xmlns:a="http://schemas.openxmlformats.org/drawingml/2006/main" r:embed="Rcc6eacf530a54b66"/>
+          <a:blip xmlns:r="http://schemas.openxmlformats.org/officeDocument/2006/relationships" xmlns:a="http://schemas.openxmlformats.org/drawingml/2006/main" r:embed="Rc513f400c4084241"/>
           <a:stretch xmlns:a="http://schemas.openxmlformats.org/drawingml/2006/main"/>
         </p:blipFill>
         <p:spPr>
@@ -30467,7 +30467,7 @@
           <p:cNvPr id="6" name="">
             <a:extLst xmlns:a="http://schemas.openxmlformats.org/drawingml/2006/main">
               <a:ext uri="{FF2B5EF4-FFF2-40B4-BE49-F238E27FC236}">
-                <a16:creationId xmlns:a16="http://schemas.microsoft.com/office/drawing/2014/main" id="{67E8ED8B-8CD8-431E-AA3F-0F4A3D732217}"/>
+                <a16:creationId xmlns:a16="http://schemas.microsoft.com/office/drawing/2014/main" id="{BCF0B4FD-8E16-403A-B772-6429C85E1372}"/>
               </a:ext>
             </a:extLst>
           </p:cNvPr>
@@ -30525,7 +30525,7 @@
           <p:cNvPr id="7" name="">
             <a:extLst xmlns:a="http://schemas.openxmlformats.org/drawingml/2006/main">
               <a:ext uri="{FF2B5EF4-FFF2-40B4-BE49-F238E27FC236}">
-                <a16:creationId xmlns:a16="http://schemas.microsoft.com/office/drawing/2014/main" id="{312DEA42-6401-4E3B-AD2B-9E0CD4710314}"/>
+                <a16:creationId xmlns:a16="http://schemas.microsoft.com/office/drawing/2014/main" id="{CD0BAB7F-B6CB-4D4E-A6E1-9960852102EA}"/>
               </a:ext>
             </a:extLst>
           </p:cNvPr>
@@ -30583,7 +30583,7 @@
           <p:cNvPr id="8" name="">
             <a:extLst xmlns:a="http://schemas.openxmlformats.org/drawingml/2006/main">
               <a:ext uri="{FF2B5EF4-FFF2-40B4-BE49-F238E27FC236}">
-                <a16:creationId xmlns:a16="http://schemas.microsoft.com/office/drawing/2014/main" id="{5E9C09EE-222B-4ADA-B39C-8C847FD23C73}"/>
+                <a16:creationId xmlns:a16="http://schemas.microsoft.com/office/drawing/2014/main" id="{4213D126-7D5B-4E00-9113-37F5A20F992F}"/>
               </a:ext>
             </a:extLst>
           </p:cNvPr>
@@ -30641,7 +30641,7 @@
           <p:cNvPr id="9" name="">
             <a:extLst xmlns:a="http://schemas.openxmlformats.org/drawingml/2006/main">
               <a:ext uri="{FF2B5EF4-FFF2-40B4-BE49-F238E27FC236}">
-                <a16:creationId xmlns:a16="http://schemas.microsoft.com/office/drawing/2014/main" id="{81BD17BC-0AA0-4971-A4DA-714C3DB644BC}"/>
+                <a16:creationId xmlns:a16="http://schemas.microsoft.com/office/drawing/2014/main" id="{7FC28B63-6EB3-4A93-87B5-2F77191C4ADF}"/>
               </a:ext>
             </a:extLst>
           </p:cNvPr>
@@ -30674,7 +30674,7 @@
           <p:cNvPr id="10" name="">
             <a:extLst xmlns:a="http://schemas.openxmlformats.org/drawingml/2006/main">
               <a:ext uri="{FF2B5EF4-FFF2-40B4-BE49-F238E27FC236}">
-                <a16:creationId xmlns:a16="http://schemas.microsoft.com/office/drawing/2014/main" id="{7AF9E0AA-C085-4DDA-B985-6297A9222B93}"/>
+                <a16:creationId xmlns:a16="http://schemas.microsoft.com/office/drawing/2014/main" id="{B3EE2016-3AE7-458F-A5A1-F644809B339C}"/>
               </a:ext>
             </a:extLst>
           </p:cNvPr>
@@ -30732,7 +30732,7 @@
           <p:cNvPr id="11" name="">
             <a:extLst xmlns:a="http://schemas.openxmlformats.org/drawingml/2006/main">
               <a:ext uri="{FF2B5EF4-FFF2-40B4-BE49-F238E27FC236}">
-                <a16:creationId xmlns:a16="http://schemas.microsoft.com/office/drawing/2014/main" id="{166C7FA9-A430-4F00-92F5-B3730B654D5F}"/>
+                <a16:creationId xmlns:a16="http://schemas.microsoft.com/office/drawing/2014/main" id="{6CD83AC6-2A0C-4528-9DDD-04ADF2831CB8}"/>
               </a:ext>
             </a:extLst>
           </p:cNvPr>
@@ -30790,7 +30790,7 @@
           <p:cNvPr id="12" name="">
             <a:extLst xmlns:a="http://schemas.openxmlformats.org/drawingml/2006/main">
               <a:ext uri="{FF2B5EF4-FFF2-40B4-BE49-F238E27FC236}">
-                <a16:creationId xmlns:a16="http://schemas.microsoft.com/office/drawing/2014/main" id="{3A25C5C0-465C-41A4-A84E-9690120F9F9E}"/>
+                <a16:creationId xmlns:a16="http://schemas.microsoft.com/office/drawing/2014/main" id="{2EDE5B85-77DE-4FEF-B033-E510E5AAE1C6}"/>
               </a:ext>
             </a:extLst>
           </p:cNvPr>
@@ -30848,7 +30848,7 @@
           <p:cNvPr id="13" name="">
             <a:extLst xmlns:a="http://schemas.openxmlformats.org/drawingml/2006/main">
               <a:ext uri="{FF2B5EF4-FFF2-40B4-BE49-F238E27FC236}">
-                <a16:creationId xmlns:a16="http://schemas.microsoft.com/office/drawing/2014/main" id="{81CE8D5B-3581-493D-981C-8D8B64A01909}"/>
+                <a16:creationId xmlns:a16="http://schemas.microsoft.com/office/drawing/2014/main" id="{29EC4A9C-B445-48E6-A822-7F27D168E214}"/>
               </a:ext>
             </a:extLst>
           </p:cNvPr>
@@ -30881,7 +30881,7 @@
           <p:cNvPr id="14" name="">
             <a:extLst xmlns:a="http://schemas.openxmlformats.org/drawingml/2006/main">
               <a:ext uri="{FF2B5EF4-FFF2-40B4-BE49-F238E27FC236}">
-                <a16:creationId xmlns:a16="http://schemas.microsoft.com/office/drawing/2014/main" id="{7B30C832-7657-4759-8BCB-E2A6E142A9DA}"/>
+                <a16:creationId xmlns:a16="http://schemas.microsoft.com/office/drawing/2014/main" id="{E74A043D-40F9-4DA6-AF9F-EFE60A5C3C2F}"/>
               </a:ext>
             </a:extLst>
           </p:cNvPr>
@@ -30939,7 +30939,7 @@
           <p:cNvPr id="15" name="">
             <a:extLst xmlns:a="http://schemas.openxmlformats.org/drawingml/2006/main">
               <a:ext uri="{FF2B5EF4-FFF2-40B4-BE49-F238E27FC236}">
-                <a16:creationId xmlns:a16="http://schemas.microsoft.com/office/drawing/2014/main" id="{ACB4CAE0-2351-4ED2-9CB1-8B9F35A2AD94}"/>
+                <a16:creationId xmlns:a16="http://schemas.microsoft.com/office/drawing/2014/main" id="{3DB14095-CD28-437A-AF52-BD3CE924D56E}"/>
               </a:ext>
             </a:extLst>
           </p:cNvPr>
@@ -30997,7 +30997,7 @@
           <p:cNvPr id="16" name="">
             <a:extLst xmlns:a="http://schemas.openxmlformats.org/drawingml/2006/main">
               <a:ext uri="{FF2B5EF4-FFF2-40B4-BE49-F238E27FC236}">
-                <a16:creationId xmlns:a16="http://schemas.microsoft.com/office/drawing/2014/main" id="{222E7848-49EC-4730-8AA7-97B5B1459D20}"/>
+                <a16:creationId xmlns:a16="http://schemas.microsoft.com/office/drawing/2014/main" id="{E902321B-54B8-40D7-9EC1-2ECBFD0AF225}"/>
               </a:ext>
             </a:extLst>
           </p:cNvPr>
@@ -31055,7 +31055,7 @@
           <p:cNvPr id="17" name="">
             <a:extLst xmlns:a="http://schemas.openxmlformats.org/drawingml/2006/main">
               <a:ext uri="{FF2B5EF4-FFF2-40B4-BE49-F238E27FC236}">
-                <a16:creationId xmlns:a16="http://schemas.microsoft.com/office/drawing/2014/main" id="{2F149F68-3A53-4C3D-8495-34FF3CF9CECB}"/>
+                <a16:creationId xmlns:a16="http://schemas.microsoft.com/office/drawing/2014/main" id="{BDC342D8-B183-41FD-8D8B-A76C823984D9}"/>
               </a:ext>
             </a:extLst>
           </p:cNvPr>
@@ -31088,7 +31088,7 @@
           <p:cNvPr id="18" name="">
             <a:extLst xmlns:a="http://schemas.openxmlformats.org/drawingml/2006/main">
               <a:ext uri="{FF2B5EF4-FFF2-40B4-BE49-F238E27FC236}">
-                <a16:creationId xmlns:a16="http://schemas.microsoft.com/office/drawing/2014/main" id="{374E551B-39DD-4CE3-ABAF-CEF22ED7857E}"/>
+                <a16:creationId xmlns:a16="http://schemas.microsoft.com/office/drawing/2014/main" id="{9B313DD6-3257-4553-8C86-BDABF4E19080}"/>
               </a:ext>
             </a:extLst>
           </p:cNvPr>
@@ -31146,7 +31146,7 @@
           <p:cNvPr id="19" name="">
             <a:extLst xmlns:a="http://schemas.openxmlformats.org/drawingml/2006/main">
               <a:ext uri="{FF2B5EF4-FFF2-40B4-BE49-F238E27FC236}">
-                <a16:creationId xmlns:a16="http://schemas.microsoft.com/office/drawing/2014/main" id="{B44458FF-2458-4CCD-934C-5BEB5A275C46}"/>
+                <a16:creationId xmlns:a16="http://schemas.microsoft.com/office/drawing/2014/main" id="{53DB13BA-6C57-4804-AD67-45DDCA02A7E6}"/>
               </a:ext>
             </a:extLst>
           </p:cNvPr>
@@ -31204,7 +31204,7 @@
           <p:cNvPr id="20" name="">
             <a:extLst xmlns:a="http://schemas.openxmlformats.org/drawingml/2006/main">
               <a:ext uri="{FF2B5EF4-FFF2-40B4-BE49-F238E27FC236}">
-                <a16:creationId xmlns:a16="http://schemas.microsoft.com/office/drawing/2014/main" id="{48F39DC5-8CC1-412B-ADA9-A2B557FA4A1A}"/>
+                <a16:creationId xmlns:a16="http://schemas.microsoft.com/office/drawing/2014/main" id="{EB27C772-7CC7-4476-BEFF-79B306EBDB80}"/>
               </a:ext>
             </a:extLst>
           </p:cNvPr>
@@ -31262,7 +31262,7 @@
           <p:cNvPr id="21" name="">
             <a:extLst xmlns:a="http://schemas.openxmlformats.org/drawingml/2006/main">
               <a:ext uri="{FF2B5EF4-FFF2-40B4-BE49-F238E27FC236}">
-                <a16:creationId xmlns:a16="http://schemas.microsoft.com/office/drawing/2014/main" id="{5F0E0CF1-6229-4346-8A87-3493B95CB363}"/>
+                <a16:creationId xmlns:a16="http://schemas.microsoft.com/office/drawing/2014/main" id="{639B74E1-D363-4731-9607-3B0BC40E66BB}"/>
               </a:ext>
             </a:extLst>
           </p:cNvPr>
@@ -31295,7 +31295,7 @@
           <p:cNvPr id="22" name="">
             <a:extLst xmlns:a="http://schemas.openxmlformats.org/drawingml/2006/main">
               <a:ext uri="{FF2B5EF4-FFF2-40B4-BE49-F238E27FC236}">
-                <a16:creationId xmlns:a16="http://schemas.microsoft.com/office/drawing/2014/main" id="{3F5DB93F-7B78-4874-855A-10C3C1A39D9B}"/>
+                <a16:creationId xmlns:a16="http://schemas.microsoft.com/office/drawing/2014/main" id="{7D24706A-C677-42B8-829A-C81DC6EE8972}"/>
               </a:ext>
             </a:extLst>
           </p:cNvPr>
@@ -31353,7 +31353,7 @@
           <p:cNvPr id="23" name="">
             <a:extLst xmlns:a="http://schemas.openxmlformats.org/drawingml/2006/main">
               <a:ext uri="{FF2B5EF4-FFF2-40B4-BE49-F238E27FC236}">
-                <a16:creationId xmlns:a16="http://schemas.microsoft.com/office/drawing/2014/main" id="{4828DCD1-A24C-4154-BD1F-042BEFA98521}"/>
+                <a16:creationId xmlns:a16="http://schemas.microsoft.com/office/drawing/2014/main" id="{F0E7222B-A29F-4918-BEBC-DEFF3ED79F0C}"/>
               </a:ext>
             </a:extLst>
           </p:cNvPr>
@@ -31411,7 +31411,7 @@
           <p:cNvPr id="24" name="">
             <a:extLst xmlns:a="http://schemas.openxmlformats.org/drawingml/2006/main">
               <a:ext uri="{FF2B5EF4-FFF2-40B4-BE49-F238E27FC236}">
-                <a16:creationId xmlns:a16="http://schemas.microsoft.com/office/drawing/2014/main" id="{79C58561-F4D7-47AB-8C60-AD683085E33A}"/>
+                <a16:creationId xmlns:a16="http://schemas.microsoft.com/office/drawing/2014/main" id="{1D42E8CA-C128-46E0-B7CA-10A7DF7FB5EF}"/>
               </a:ext>
             </a:extLst>
           </p:cNvPr>
@@ -31469,7 +31469,7 @@
           <p:cNvPr id="25" name="">
             <a:extLst xmlns:a="http://schemas.openxmlformats.org/drawingml/2006/main">
               <a:ext uri="{FF2B5EF4-FFF2-40B4-BE49-F238E27FC236}">
-                <a16:creationId xmlns:a16="http://schemas.microsoft.com/office/drawing/2014/main" id="{7BDB2169-81BB-4AC1-9CCA-841407B4555B}"/>
+                <a16:creationId xmlns:a16="http://schemas.microsoft.com/office/drawing/2014/main" id="{B3944FE8-AFD8-4386-96BE-D45A2D1ACCAA}"/>
               </a:ext>
             </a:extLst>
           </p:cNvPr>
@@ -31502,7 +31502,7 @@
           <p:cNvPr id="26" name="">
             <a:extLst xmlns:a="http://schemas.openxmlformats.org/drawingml/2006/main">
               <a:ext uri="{FF2B5EF4-FFF2-40B4-BE49-F238E27FC236}">
-                <a16:creationId xmlns:a16="http://schemas.microsoft.com/office/drawing/2014/main" id="{C2B85A0A-C2D4-4B42-98D9-185A1E84904D}"/>
+                <a16:creationId xmlns:a16="http://schemas.microsoft.com/office/drawing/2014/main" id="{452CEB69-D6C1-4E4E-86D1-4D56220EC7EA}"/>
               </a:ext>
             </a:extLst>
           </p:cNvPr>
@@ -31560,7 +31560,7 @@
           <p:cNvPr id="27" name="">
             <a:extLst xmlns:a="http://schemas.openxmlformats.org/drawingml/2006/main">
               <a:ext uri="{FF2B5EF4-FFF2-40B4-BE49-F238E27FC236}">
-                <a16:creationId xmlns:a16="http://schemas.microsoft.com/office/drawing/2014/main" id="{3BA11C44-2ABF-41B4-A167-2B84B5F9FAC6}"/>
+                <a16:creationId xmlns:a16="http://schemas.microsoft.com/office/drawing/2014/main" id="{01F14DB3-2446-4FFB-AD85-B7A4BC82A356}"/>
               </a:ext>
             </a:extLst>
           </p:cNvPr>
@@ -31593,7 +31593,7 @@
           <p:cNvPr id="28" name="">
             <a:extLst xmlns:a="http://schemas.openxmlformats.org/drawingml/2006/main">
               <a:ext uri="{FF2B5EF4-FFF2-40B4-BE49-F238E27FC236}">
-                <a16:creationId xmlns:a16="http://schemas.microsoft.com/office/drawing/2014/main" id="{BC558EDE-8630-4306-8357-BEC3ED5F0A80}"/>
+                <a16:creationId xmlns:a16="http://schemas.microsoft.com/office/drawing/2014/main" id="{7160A860-6677-4567-A980-97FAF9FD8CB6}"/>
               </a:ext>
             </a:extLst>
           </p:cNvPr>
@@ -31651,7 +31651,7 @@
           <p:cNvPr id="29" name="">
             <a:extLst xmlns:a="http://schemas.openxmlformats.org/drawingml/2006/main">
               <a:ext uri="{FF2B5EF4-FFF2-40B4-BE49-F238E27FC236}">
-                <a16:creationId xmlns:a16="http://schemas.microsoft.com/office/drawing/2014/main" id="{ACADEF43-2F91-444B-8022-A621D1566348}"/>
+                <a16:creationId xmlns:a16="http://schemas.microsoft.com/office/drawing/2014/main" id="{6F526A06-4DD7-4D28-B3FB-415C59D38A36}"/>
               </a:ext>
             </a:extLst>
           </p:cNvPr>
@@ -31684,7 +31684,7 @@
           <p:cNvPr id="30" name="">
             <a:extLst xmlns:a="http://schemas.openxmlformats.org/drawingml/2006/main">
               <a:ext uri="{FF2B5EF4-FFF2-40B4-BE49-F238E27FC236}">
-                <a16:creationId xmlns:a16="http://schemas.microsoft.com/office/drawing/2014/main" id="{854D85BB-99D5-4982-8F46-05114745C603}"/>
+                <a16:creationId xmlns:a16="http://schemas.microsoft.com/office/drawing/2014/main" id="{C0801E12-2191-4A47-A228-3DA7D64D448D}"/>
               </a:ext>
             </a:extLst>
           </p:cNvPr>
@@ -31742,7 +31742,7 @@
           <p:cNvPr id="31" name="">
             <a:extLst xmlns:a="http://schemas.openxmlformats.org/drawingml/2006/main">
               <a:ext uri="{FF2B5EF4-FFF2-40B4-BE49-F238E27FC236}">
-                <a16:creationId xmlns:a16="http://schemas.microsoft.com/office/drawing/2014/main" id="{71353FE5-6170-4C05-852B-D96A8293DA33}"/>
+                <a16:creationId xmlns:a16="http://schemas.microsoft.com/office/drawing/2014/main" id="{F8709B42-5025-4ACC-92A9-8A04C9990A60}"/>
               </a:ext>
             </a:extLst>
           </p:cNvPr>
@@ -31775,7 +31775,7 @@
           <p:cNvPr id="32" name="">
             <a:extLst xmlns:a="http://schemas.openxmlformats.org/drawingml/2006/main">
               <a:ext uri="{FF2B5EF4-FFF2-40B4-BE49-F238E27FC236}">
-                <a16:creationId xmlns:a16="http://schemas.microsoft.com/office/drawing/2014/main" id="{3811A713-D12E-4DEC-A75E-4DEAA228C2E2}"/>
+                <a16:creationId xmlns:a16="http://schemas.microsoft.com/office/drawing/2014/main" id="{47720530-48D5-487F-BA9E-B5B24CD8FF4F}"/>
               </a:ext>
             </a:extLst>
           </p:cNvPr>
@@ -31833,7 +31833,7 @@
           <p:cNvPr id="33" name="">
             <a:extLst xmlns:a="http://schemas.openxmlformats.org/drawingml/2006/main">
               <a:ext uri="{FF2B5EF4-FFF2-40B4-BE49-F238E27FC236}">
-                <a16:creationId xmlns:a16="http://schemas.microsoft.com/office/drawing/2014/main" id="{31B2BEFD-540C-472E-A142-E205F48A4BCF}"/>
+                <a16:creationId xmlns:a16="http://schemas.microsoft.com/office/drawing/2014/main" id="{63D835C8-C63C-4243-BBF9-6F42E0AFFDFA}"/>
               </a:ext>
             </a:extLst>
           </p:cNvPr>
@@ -31866,7 +31866,7 @@
           <p:cNvPr id="34" name="">
             <a:extLst xmlns:a="http://schemas.openxmlformats.org/drawingml/2006/main">
               <a:ext uri="{FF2B5EF4-FFF2-40B4-BE49-F238E27FC236}">
-                <a16:creationId xmlns:a16="http://schemas.microsoft.com/office/drawing/2014/main" id="{E3F71F36-AFEE-45F4-BD9C-1FC7B5202C65}"/>
+                <a16:creationId xmlns:a16="http://schemas.microsoft.com/office/drawing/2014/main" id="{98743037-35D9-4499-BD64-30A90F9D9F37}"/>
               </a:ext>
             </a:extLst>
           </p:cNvPr>
@@ -31924,7 +31924,7 @@
                 <a:latin typeface="Microsoft YaHei"/>
                 <a:ea typeface="Microsoft YaHei"/>
                 <a:cs typeface="Microsoft YaHei"/>
-                <a:hlinkClick xmlns:r="http://schemas.openxmlformats.org/officeDocument/2006/relationships" r:id="R81691a465f954f43"/>
+                <a:hlinkClick xmlns:r="http://schemas.openxmlformats.org/officeDocument/2006/relationships" r:id="R2bf6b215211d4a86"/>
               </a:rPr>
               <a:t>Qoder Knowledge Engine</a:t>
             </a:r>
@@ -31936,7 +31936,7 @@
                 <a:latin typeface="Microsoft YaHei"/>
                 <a:ea typeface="Microsoft YaHei"/>
                 <a:cs typeface="Microsoft YaHei"/>
-                <a:hlinkClick xmlns:r="http://schemas.openxmlformats.org/officeDocument/2006/relationships" r:id="R9a242dafe85f42be"/>
+                <a:hlinkClick xmlns:r="http://schemas.openxmlformats.org/officeDocument/2006/relationships" r:id="R5b1bacae6ccd40df"/>
               </a:rPr>
               <a:t> · Qoder 技术博客</a:t>
             </a:r>
@@ -31948,7 +31948,7 @@
                 <a:latin typeface="Microsoft YaHei"/>
                 <a:ea typeface="Microsoft YaHei"/>
                 <a:cs typeface="Microsoft YaHei"/>
-                <a:hlinkClick xmlns:r="http://schemas.openxmlformats.org/officeDocument/2006/relationships" r:id="R670316a38d934fc5"/>
+                <a:hlinkClick xmlns:r="http://schemas.openxmlformats.org/officeDocument/2006/relationships" r:id="R65013f24e24b45c3"/>
               </a:rPr>
               <a:t> · 码道 Codebase</a:t>
             </a:r>
@@ -31960,7 +31960,7 @@
           <p:cNvPr id="35" name="">
             <a:extLst xmlns:a="http://schemas.openxmlformats.org/drawingml/2006/main">
               <a:ext uri="{FF2B5EF4-FFF2-40B4-BE49-F238E27FC236}">
-                <a16:creationId xmlns:a16="http://schemas.microsoft.com/office/drawing/2014/main" id="{AC2B4C70-3EDF-406C-9570-EF79B0F38323}"/>
+                <a16:creationId xmlns:a16="http://schemas.microsoft.com/office/drawing/2014/main" id="{2644F544-B518-408A-9B28-83C7F376F3E1}"/>
               </a:ext>
             </a:extLst>
           </p:cNvPr>
@@ -32016,7 +32016,7 @@
     </p:spTree>
     <p:extLst>
       <p:ext uri="{BB962C8B-B14F-4D97-AF65-F5344CB8AC3E}">
-        <p14:creationId xmlns:p14="http://schemas.microsoft.com/office/powerpoint/2010/main" val="2032354126"/>
+        <p14:creationId xmlns:p14="http://schemas.microsoft.com/office/powerpoint/2010/main" val="245150480"/>
       </p:ext>
     </p:extLst>
   </p:cSld>
@@ -32047,7 +32047,7 @@
           <p:cNvPr id="76" name="">
             <a:extLst xmlns:a="http://schemas.openxmlformats.org/drawingml/2006/main">
               <a:ext uri="{FF2B5EF4-FFF2-40B4-BE49-F238E27FC236}">
-                <a16:creationId xmlns:a16="http://schemas.microsoft.com/office/drawing/2014/main" id="{E7905206-7DBB-4C3E-A94B-8B8BA0A8CFF8}"/>
+                <a16:creationId xmlns:a16="http://schemas.microsoft.com/office/drawing/2014/main" id="{95C3A775-5F01-45D1-A155-566E74E239B8}"/>
               </a:ext>
             </a:extLst>
           </p:cNvPr>
@@ -32080,7 +32080,7 @@
           <p:cNvPr id="2" name="">
             <a:extLst xmlns:a="http://schemas.openxmlformats.org/drawingml/2006/main">
               <a:ext uri="{FF2B5EF4-FFF2-40B4-BE49-F238E27FC236}">
-                <a16:creationId xmlns:a16="http://schemas.microsoft.com/office/drawing/2014/main" id="{3886EDEE-9490-45F6-9ED4-CFDAE0BE4015}"/>
+                <a16:creationId xmlns:a16="http://schemas.microsoft.com/office/drawing/2014/main" id="{4C4F8297-E842-43F7-876F-1364B884355F}"/>
               </a:ext>
             </a:extLst>
           </p:cNvPr>
@@ -32138,7 +32138,7 @@
           <p:cNvPr id="3" name="">
             <a:extLst xmlns:a="http://schemas.openxmlformats.org/drawingml/2006/main">
               <a:ext uri="{FF2B5EF4-FFF2-40B4-BE49-F238E27FC236}">
-                <a16:creationId xmlns:a16="http://schemas.microsoft.com/office/drawing/2014/main" id="{F98BBC58-0BD9-43F2-ABBA-4075B2BA361C}"/>
+                <a16:creationId xmlns:a16="http://schemas.microsoft.com/office/drawing/2014/main" id="{3158E460-CB08-4D2C-ABE2-A4944C6572A1}"/>
               </a:ext>
             </a:extLst>
           </p:cNvPr>
@@ -32170,7 +32170,7 @@
             <a:pPr algn="l">
               <a:defRPr sz="2325" b="1">
                 <a:solidFill>
-                  <a:srgbClr val="1D1D1A"/>
+                  <a:srgbClr val="8A0F17"/>
                 </a:solidFill>
                 <a:latin typeface="Microsoft YaHei"/>
                 <a:ea typeface="Microsoft YaHei"/>
@@ -32180,7 +32180,7 @@
             <a:r>
               <a:rPr sz="2325" b="1">
                 <a:solidFill>
-                  <a:srgbClr val="1D1D1A"/>
+                  <a:srgbClr val="8A0F17"/>
                 </a:solidFill>
                 <a:latin typeface="Microsoft YaHei"/>
                 <a:ea typeface="Microsoft YaHei"/>
@@ -32196,7 +32196,7 @@
           <p:cNvPr id="4" name="">
             <a:extLst xmlns:a="http://schemas.openxmlformats.org/drawingml/2006/main">
               <a:ext uri="{FF2B5EF4-FFF2-40B4-BE49-F238E27FC236}">
-                <a16:creationId xmlns:a16="http://schemas.microsoft.com/office/drawing/2014/main" id="{73637E17-9AB9-4A8C-B0A2-2E24C991BF16}"/>
+                <a16:creationId xmlns:a16="http://schemas.microsoft.com/office/drawing/2014/main" id="{2F28A9D7-5DA4-4C04-8A9A-C6526864C4F0}"/>
               </a:ext>
             </a:extLst>
           </p:cNvPr>
@@ -32233,7 +32233,7 @@
           <p:nvPr/>
         </p:nvPicPr>
         <p:blipFill>
-          <a:blip xmlns:r="http://schemas.openxmlformats.org/officeDocument/2006/relationships" xmlns:a="http://schemas.openxmlformats.org/drawingml/2006/main" r:embed="Re0d2058f21704b3f"/>
+          <a:blip xmlns:r="http://schemas.openxmlformats.org/officeDocument/2006/relationships" xmlns:a="http://schemas.openxmlformats.org/drawingml/2006/main" r:embed="R97dfdcec12e04ff1"/>
           <a:stretch xmlns:a="http://schemas.openxmlformats.org/drawingml/2006/main"/>
         </p:blipFill>
         <p:spPr>
@@ -32251,7 +32251,7 @@
           <p:cNvPr id="6" name="">
             <a:extLst xmlns:a="http://schemas.openxmlformats.org/drawingml/2006/main">
               <a:ext uri="{FF2B5EF4-FFF2-40B4-BE49-F238E27FC236}">
-                <a16:creationId xmlns:a16="http://schemas.microsoft.com/office/drawing/2014/main" id="{2967C351-7801-44E9-809F-613ACE6515DA}"/>
+                <a16:creationId xmlns:a16="http://schemas.microsoft.com/office/drawing/2014/main" id="{A49FEC26-56DE-4CCE-AEA7-B2ED946A003E}"/>
               </a:ext>
             </a:extLst>
           </p:cNvPr>
@@ -32284,7 +32284,7 @@
           <p:cNvPr id="7" name="">
             <a:extLst xmlns:a="http://schemas.openxmlformats.org/drawingml/2006/main">
               <a:ext uri="{FF2B5EF4-FFF2-40B4-BE49-F238E27FC236}">
-                <a16:creationId xmlns:a16="http://schemas.microsoft.com/office/drawing/2014/main" id="{5BDB8B28-1BF5-4B56-873D-9C8780ADD7B6}"/>
+                <a16:creationId xmlns:a16="http://schemas.microsoft.com/office/drawing/2014/main" id="{9614AEF1-2CBD-4788-B25B-E8F9F3EB6907}"/>
               </a:ext>
             </a:extLst>
           </p:cNvPr>
@@ -32342,7 +32342,7 @@
           <p:cNvPr id="8" name="">
             <a:extLst xmlns:a="http://schemas.openxmlformats.org/drawingml/2006/main">
               <a:ext uri="{FF2B5EF4-FFF2-40B4-BE49-F238E27FC236}">
-                <a16:creationId xmlns:a16="http://schemas.microsoft.com/office/drawing/2014/main" id="{9CC2D0EC-AD17-4FD5-815D-C7F0634C8FE2}"/>
+                <a16:creationId xmlns:a16="http://schemas.microsoft.com/office/drawing/2014/main" id="{70865FB1-E8B7-45F9-BCFF-00BD72A9F1FA}"/>
               </a:ext>
             </a:extLst>
           </p:cNvPr>
@@ -32400,7 +32400,7 @@
           <p:cNvPr id="9" name="">
             <a:extLst xmlns:a="http://schemas.openxmlformats.org/drawingml/2006/main">
               <a:ext uri="{FF2B5EF4-FFF2-40B4-BE49-F238E27FC236}">
-                <a16:creationId xmlns:a16="http://schemas.microsoft.com/office/drawing/2014/main" id="{80358AE9-259D-46AB-A8D6-313366D5087B}"/>
+                <a16:creationId xmlns:a16="http://schemas.microsoft.com/office/drawing/2014/main" id="{1DC2EF46-0E3A-4857-9806-7A2616EF7921}"/>
               </a:ext>
             </a:extLst>
           </p:cNvPr>
@@ -32458,7 +32458,7 @@
           <p:cNvPr id="10" name="">
             <a:extLst xmlns:a="http://schemas.openxmlformats.org/drawingml/2006/main">
               <a:ext uri="{FF2B5EF4-FFF2-40B4-BE49-F238E27FC236}">
-                <a16:creationId xmlns:a16="http://schemas.microsoft.com/office/drawing/2014/main" id="{7C4C53E0-E315-4D8A-97B9-F58F6559AEC8}"/>
+                <a16:creationId xmlns:a16="http://schemas.microsoft.com/office/drawing/2014/main" id="{167F22AE-921E-40E8-90A1-362F479D4DFF}"/>
               </a:ext>
             </a:extLst>
           </p:cNvPr>
@@ -32491,7 +32491,7 @@
           <p:cNvPr id="11" name="">
             <a:extLst xmlns:a="http://schemas.openxmlformats.org/drawingml/2006/main">
               <a:ext uri="{FF2B5EF4-FFF2-40B4-BE49-F238E27FC236}">
-                <a16:creationId xmlns:a16="http://schemas.microsoft.com/office/drawing/2014/main" id="{373B9189-5B7D-4695-82C1-6FA31A8A947A}"/>
+                <a16:creationId xmlns:a16="http://schemas.microsoft.com/office/drawing/2014/main" id="{814D5B23-C798-47AC-90E0-79140755FD64}"/>
               </a:ext>
             </a:extLst>
           </p:cNvPr>
@@ -32524,7 +32524,7 @@
           <p:cNvPr id="12" name="">
             <a:extLst xmlns:a="http://schemas.openxmlformats.org/drawingml/2006/main">
               <a:ext uri="{FF2B5EF4-FFF2-40B4-BE49-F238E27FC236}">
-                <a16:creationId xmlns:a16="http://schemas.microsoft.com/office/drawing/2014/main" id="{8C6F5F98-A9F6-4CC9-8CF2-20E86116625E}"/>
+                <a16:creationId xmlns:a16="http://schemas.microsoft.com/office/drawing/2014/main" id="{B344ACD9-26F9-4EE5-896E-71D839B12EF0}"/>
               </a:ext>
             </a:extLst>
           </p:cNvPr>
@@ -32557,7 +32557,7 @@
           <p:cNvPr id="13" name="">
             <a:extLst xmlns:a="http://schemas.openxmlformats.org/drawingml/2006/main">
               <a:ext uri="{FF2B5EF4-FFF2-40B4-BE49-F238E27FC236}">
-                <a16:creationId xmlns:a16="http://schemas.microsoft.com/office/drawing/2014/main" id="{A6015E4B-33D0-41EE-8100-9DDF4196CC9C}"/>
+                <a16:creationId xmlns:a16="http://schemas.microsoft.com/office/drawing/2014/main" id="{0DD2397A-A9A5-43A9-8B24-92E9020DCD48}"/>
               </a:ext>
             </a:extLst>
           </p:cNvPr>
@@ -32615,7 +32615,7 @@
           <p:cNvPr id="14" name="">
             <a:extLst xmlns:a="http://schemas.openxmlformats.org/drawingml/2006/main">
               <a:ext uri="{FF2B5EF4-FFF2-40B4-BE49-F238E27FC236}">
-                <a16:creationId xmlns:a16="http://schemas.microsoft.com/office/drawing/2014/main" id="{0AB1E226-CABD-42AE-AA6B-AC20D78406E7}"/>
+                <a16:creationId xmlns:a16="http://schemas.microsoft.com/office/drawing/2014/main" id="{873B8E1A-5AED-4B6E-97E8-ED55D8ECF159}"/>
               </a:ext>
             </a:extLst>
           </p:cNvPr>
@@ -32673,7 +32673,7 @@
           <p:cNvPr id="15" name="">
             <a:extLst xmlns:a="http://schemas.openxmlformats.org/drawingml/2006/main">
               <a:ext uri="{FF2B5EF4-FFF2-40B4-BE49-F238E27FC236}">
-                <a16:creationId xmlns:a16="http://schemas.microsoft.com/office/drawing/2014/main" id="{3C30D246-CC97-44CE-A821-10A0EAB770DB}"/>
+                <a16:creationId xmlns:a16="http://schemas.microsoft.com/office/drawing/2014/main" id="{ACE75AE7-B37E-4EBE-8D4C-266F097DB519}"/>
               </a:ext>
             </a:extLst>
           </p:cNvPr>
@@ -32731,7 +32731,7 @@
           <p:cNvPr id="16" name="">
             <a:extLst xmlns:a="http://schemas.openxmlformats.org/drawingml/2006/main">
               <a:ext uri="{FF2B5EF4-FFF2-40B4-BE49-F238E27FC236}">
-                <a16:creationId xmlns:a16="http://schemas.microsoft.com/office/drawing/2014/main" id="{9D0B6C38-A01C-4497-A75D-887AB3A62C24}"/>
+                <a16:creationId xmlns:a16="http://schemas.microsoft.com/office/drawing/2014/main" id="{25900007-2110-45B8-AF19-6752629B0759}"/>
               </a:ext>
             </a:extLst>
           </p:cNvPr>
@@ -32764,7 +32764,7 @@
           <p:cNvPr id="17" name="">
             <a:extLst xmlns:a="http://schemas.openxmlformats.org/drawingml/2006/main">
               <a:ext uri="{FF2B5EF4-FFF2-40B4-BE49-F238E27FC236}">
-                <a16:creationId xmlns:a16="http://schemas.microsoft.com/office/drawing/2014/main" id="{D62AD3E7-CE28-4BFB-AF7E-BEA771A91069}"/>
+                <a16:creationId xmlns:a16="http://schemas.microsoft.com/office/drawing/2014/main" id="{FC985BD9-3C1C-4E9D-8812-D03DAC45B8D0}"/>
               </a:ext>
             </a:extLst>
           </p:cNvPr>
@@ -32797,7 +32797,7 @@
           <p:cNvPr id="18" name="">
             <a:extLst xmlns:a="http://schemas.openxmlformats.org/drawingml/2006/main">
               <a:ext uri="{FF2B5EF4-FFF2-40B4-BE49-F238E27FC236}">
-                <a16:creationId xmlns:a16="http://schemas.microsoft.com/office/drawing/2014/main" id="{AFED870D-8D95-431E-8627-2611B5221278}"/>
+                <a16:creationId xmlns:a16="http://schemas.microsoft.com/office/drawing/2014/main" id="{AC7D4D72-36F0-4F97-923F-CD1BB132E33B}"/>
               </a:ext>
             </a:extLst>
           </p:cNvPr>
@@ -32830,7 +32830,7 @@
           <p:cNvPr id="19" name="">
             <a:extLst xmlns:a="http://schemas.openxmlformats.org/drawingml/2006/main">
               <a:ext uri="{FF2B5EF4-FFF2-40B4-BE49-F238E27FC236}">
-                <a16:creationId xmlns:a16="http://schemas.microsoft.com/office/drawing/2014/main" id="{7D3246C2-72DF-49B7-A9FE-2D19F4FB3A83}"/>
+                <a16:creationId xmlns:a16="http://schemas.microsoft.com/office/drawing/2014/main" id="{93CB284E-BA13-4A7F-BA86-BE370043599B}"/>
               </a:ext>
             </a:extLst>
           </p:cNvPr>
@@ -32888,7 +32888,7 @@
           <p:cNvPr id="20" name="">
             <a:extLst xmlns:a="http://schemas.openxmlformats.org/drawingml/2006/main">
               <a:ext uri="{FF2B5EF4-FFF2-40B4-BE49-F238E27FC236}">
-                <a16:creationId xmlns:a16="http://schemas.microsoft.com/office/drawing/2014/main" id="{7DFF77E3-1A0E-446D-9212-AA235F2777A0}"/>
+                <a16:creationId xmlns:a16="http://schemas.microsoft.com/office/drawing/2014/main" id="{FF1640E8-7EB3-44EA-8C74-3FA9D938722C}"/>
               </a:ext>
             </a:extLst>
           </p:cNvPr>
@@ -32946,7 +32946,7 @@
           <p:cNvPr id="21" name="">
             <a:extLst xmlns:a="http://schemas.openxmlformats.org/drawingml/2006/main">
               <a:ext uri="{FF2B5EF4-FFF2-40B4-BE49-F238E27FC236}">
-                <a16:creationId xmlns:a16="http://schemas.microsoft.com/office/drawing/2014/main" id="{AB5C6755-6A42-467E-A5B2-441ACDB4D3D2}"/>
+                <a16:creationId xmlns:a16="http://schemas.microsoft.com/office/drawing/2014/main" id="{E2965169-8063-404B-A0CC-A5B8E1F32B8D}"/>
               </a:ext>
             </a:extLst>
           </p:cNvPr>
@@ -33004,7 +33004,7 @@
           <p:cNvPr id="22" name="">
             <a:extLst xmlns:a="http://schemas.openxmlformats.org/drawingml/2006/main">
               <a:ext uri="{FF2B5EF4-FFF2-40B4-BE49-F238E27FC236}">
-                <a16:creationId xmlns:a16="http://schemas.microsoft.com/office/drawing/2014/main" id="{20E6C982-97CD-429A-BE9B-BBB86D36AAE8}"/>
+                <a16:creationId xmlns:a16="http://schemas.microsoft.com/office/drawing/2014/main" id="{588D5EDF-B61A-4996-B805-7F52E0E58717}"/>
               </a:ext>
             </a:extLst>
           </p:cNvPr>
@@ -33037,7 +33037,7 @@
           <p:cNvPr id="23" name="">
             <a:extLst xmlns:a="http://schemas.openxmlformats.org/drawingml/2006/main">
               <a:ext uri="{FF2B5EF4-FFF2-40B4-BE49-F238E27FC236}">
-                <a16:creationId xmlns:a16="http://schemas.microsoft.com/office/drawing/2014/main" id="{FAD9A81D-6B41-4A57-92B9-0A74C385FEA3}"/>
+                <a16:creationId xmlns:a16="http://schemas.microsoft.com/office/drawing/2014/main" id="{08C30440-B9B9-4FA8-B9C7-312449C7008E}"/>
               </a:ext>
             </a:extLst>
           </p:cNvPr>
@@ -33070,7 +33070,7 @@
           <p:cNvPr id="24" name="">
             <a:extLst xmlns:a="http://schemas.openxmlformats.org/drawingml/2006/main">
               <a:ext uri="{FF2B5EF4-FFF2-40B4-BE49-F238E27FC236}">
-                <a16:creationId xmlns:a16="http://schemas.microsoft.com/office/drawing/2014/main" id="{1DDE582C-5D6F-4F1E-AFED-32808C326117}"/>
+                <a16:creationId xmlns:a16="http://schemas.microsoft.com/office/drawing/2014/main" id="{182E6A26-6EEE-4E53-9D06-7F04D24D960D}"/>
               </a:ext>
             </a:extLst>
           </p:cNvPr>
@@ -33103,7 +33103,7 @@
           <p:cNvPr id="25" name="">
             <a:extLst xmlns:a="http://schemas.openxmlformats.org/drawingml/2006/main">
               <a:ext uri="{FF2B5EF4-FFF2-40B4-BE49-F238E27FC236}">
-                <a16:creationId xmlns:a16="http://schemas.microsoft.com/office/drawing/2014/main" id="{1D19BF24-AABE-40D5-A615-A91AA07A9545}"/>
+                <a16:creationId xmlns:a16="http://schemas.microsoft.com/office/drawing/2014/main" id="{B2241506-EC11-4514-882C-7A9DD09A8307}"/>
               </a:ext>
             </a:extLst>
           </p:cNvPr>
@@ -33161,7 +33161,7 @@
           <p:cNvPr id="26" name="">
             <a:extLst xmlns:a="http://schemas.openxmlformats.org/drawingml/2006/main">
               <a:ext uri="{FF2B5EF4-FFF2-40B4-BE49-F238E27FC236}">
-                <a16:creationId xmlns:a16="http://schemas.microsoft.com/office/drawing/2014/main" id="{509EC02F-38E0-4947-BE2F-B88EFB0FDA3B}"/>
+                <a16:creationId xmlns:a16="http://schemas.microsoft.com/office/drawing/2014/main" id="{C1CD27BA-CA76-46CB-B225-97F73183B1DA}"/>
               </a:ext>
             </a:extLst>
           </p:cNvPr>
@@ -33219,7 +33219,7 @@
           <p:cNvPr id="27" name="">
             <a:extLst xmlns:a="http://schemas.openxmlformats.org/drawingml/2006/main">
               <a:ext uri="{FF2B5EF4-FFF2-40B4-BE49-F238E27FC236}">
-                <a16:creationId xmlns:a16="http://schemas.microsoft.com/office/drawing/2014/main" id="{61594BE1-FF5E-41AA-A3BA-03936C020D5A}"/>
+                <a16:creationId xmlns:a16="http://schemas.microsoft.com/office/drawing/2014/main" id="{714BC219-2902-4BEF-9F37-7C63FB917E6B}"/>
               </a:ext>
             </a:extLst>
           </p:cNvPr>
@@ -33277,7 +33277,7 @@
           <p:cNvPr id="28" name="">
             <a:extLst xmlns:a="http://schemas.openxmlformats.org/drawingml/2006/main">
               <a:ext uri="{FF2B5EF4-FFF2-40B4-BE49-F238E27FC236}">
-                <a16:creationId xmlns:a16="http://schemas.microsoft.com/office/drawing/2014/main" id="{E5804519-7D5A-40E1-9C36-ED31161DEB91}"/>
+                <a16:creationId xmlns:a16="http://schemas.microsoft.com/office/drawing/2014/main" id="{17E6211F-F8A7-4043-8C15-A5465F376D48}"/>
               </a:ext>
             </a:extLst>
           </p:cNvPr>
@@ -33310,7 +33310,7 @@
           <p:cNvPr id="29" name="">
             <a:extLst xmlns:a="http://schemas.openxmlformats.org/drawingml/2006/main">
               <a:ext uri="{FF2B5EF4-FFF2-40B4-BE49-F238E27FC236}">
-                <a16:creationId xmlns:a16="http://schemas.microsoft.com/office/drawing/2014/main" id="{3A991860-22B6-4D77-BAE4-141A5C12B084}"/>
+                <a16:creationId xmlns:a16="http://schemas.microsoft.com/office/drawing/2014/main" id="{9042982E-D425-456E-BC46-8493F07EAFB3}"/>
               </a:ext>
             </a:extLst>
           </p:cNvPr>
@@ -33343,7 +33343,7 @@
           <p:cNvPr id="30" name="">
             <a:extLst xmlns:a="http://schemas.openxmlformats.org/drawingml/2006/main">
               <a:ext uri="{FF2B5EF4-FFF2-40B4-BE49-F238E27FC236}">
-                <a16:creationId xmlns:a16="http://schemas.microsoft.com/office/drawing/2014/main" id="{125FEC6C-15D4-4058-A929-6FDA510B7A3C}"/>
+                <a16:creationId xmlns:a16="http://schemas.microsoft.com/office/drawing/2014/main" id="{17793911-5802-4547-9DA0-F284318D5879}"/>
               </a:ext>
             </a:extLst>
           </p:cNvPr>
@@ -33376,7 +33376,7 @@
           <p:cNvPr id="31" name="">
             <a:extLst xmlns:a="http://schemas.openxmlformats.org/drawingml/2006/main">
               <a:ext uri="{FF2B5EF4-FFF2-40B4-BE49-F238E27FC236}">
-                <a16:creationId xmlns:a16="http://schemas.microsoft.com/office/drawing/2014/main" id="{D6BB1EE3-5FD7-48F0-AB64-A33130BD1553}"/>
+                <a16:creationId xmlns:a16="http://schemas.microsoft.com/office/drawing/2014/main" id="{E6D907C0-ACD3-4E20-A899-B6E15F516694}"/>
               </a:ext>
             </a:extLst>
           </p:cNvPr>
@@ -33434,7 +33434,7 @@
           <p:cNvPr id="32" name="">
             <a:extLst xmlns:a="http://schemas.openxmlformats.org/drawingml/2006/main">
               <a:ext uri="{FF2B5EF4-FFF2-40B4-BE49-F238E27FC236}">
-                <a16:creationId xmlns:a16="http://schemas.microsoft.com/office/drawing/2014/main" id="{10BC2F2B-FB1E-4C51-A6A7-E0BBF25E9EA3}"/>
+                <a16:creationId xmlns:a16="http://schemas.microsoft.com/office/drawing/2014/main" id="{6EA8B871-A2D0-408E-9448-7D4BEAB162EB}"/>
               </a:ext>
             </a:extLst>
           </p:cNvPr>
@@ -33492,7 +33492,7 @@
           <p:cNvPr id="33" name="">
             <a:extLst xmlns:a="http://schemas.openxmlformats.org/drawingml/2006/main">
               <a:ext uri="{FF2B5EF4-FFF2-40B4-BE49-F238E27FC236}">
-                <a16:creationId xmlns:a16="http://schemas.microsoft.com/office/drawing/2014/main" id="{5F5D55DE-194F-4190-B901-BBC4C18705F5}"/>
+                <a16:creationId xmlns:a16="http://schemas.microsoft.com/office/drawing/2014/main" id="{1297B9B4-469F-4362-A4ED-9CA7338E6002}"/>
               </a:ext>
             </a:extLst>
           </p:cNvPr>
@@ -33550,7 +33550,7 @@
           <p:cNvPr id="34" name="">
             <a:extLst xmlns:a="http://schemas.openxmlformats.org/drawingml/2006/main">
               <a:ext uri="{FF2B5EF4-FFF2-40B4-BE49-F238E27FC236}">
-                <a16:creationId xmlns:a16="http://schemas.microsoft.com/office/drawing/2014/main" id="{7A91B887-2D05-4992-A527-E25C13A5F2D1}"/>
+                <a16:creationId xmlns:a16="http://schemas.microsoft.com/office/drawing/2014/main" id="{E6853AB3-E982-45F6-9C1B-8735AD428A9E}"/>
               </a:ext>
             </a:extLst>
           </p:cNvPr>
@@ -33583,7 +33583,7 @@
           <p:cNvPr id="35" name="">
             <a:extLst xmlns:a="http://schemas.openxmlformats.org/drawingml/2006/main">
               <a:ext uri="{FF2B5EF4-FFF2-40B4-BE49-F238E27FC236}">
-                <a16:creationId xmlns:a16="http://schemas.microsoft.com/office/drawing/2014/main" id="{3C531C22-99B5-4B43-9373-0B4907A27999}"/>
+                <a16:creationId xmlns:a16="http://schemas.microsoft.com/office/drawing/2014/main" id="{768471E9-E4F8-4F0A-A940-AD1A47DD9678}"/>
               </a:ext>
             </a:extLst>
           </p:cNvPr>
@@ -33616,7 +33616,7 @@
           <p:cNvPr id="36" name="">
             <a:extLst xmlns:a="http://schemas.openxmlformats.org/drawingml/2006/main">
               <a:ext uri="{FF2B5EF4-FFF2-40B4-BE49-F238E27FC236}">
-                <a16:creationId xmlns:a16="http://schemas.microsoft.com/office/drawing/2014/main" id="{1A558FD2-7714-4796-A4B1-33A4369A78A5}"/>
+                <a16:creationId xmlns:a16="http://schemas.microsoft.com/office/drawing/2014/main" id="{04C9469B-9DE7-43D4-84AF-855F0FFD7D61}"/>
               </a:ext>
             </a:extLst>
           </p:cNvPr>
@@ -33649,7 +33649,7 @@
           <p:cNvPr id="37" name="">
             <a:extLst xmlns:a="http://schemas.openxmlformats.org/drawingml/2006/main">
               <a:ext uri="{FF2B5EF4-FFF2-40B4-BE49-F238E27FC236}">
-                <a16:creationId xmlns:a16="http://schemas.microsoft.com/office/drawing/2014/main" id="{33B54CB2-E662-4696-B02A-0A1D6D90115E}"/>
+                <a16:creationId xmlns:a16="http://schemas.microsoft.com/office/drawing/2014/main" id="{972255E7-B993-4D7A-BD91-E003A4AF7CD0}"/>
               </a:ext>
             </a:extLst>
           </p:cNvPr>
@@ -33707,7 +33707,7 @@
           <p:cNvPr id="38" name="">
             <a:extLst xmlns:a="http://schemas.openxmlformats.org/drawingml/2006/main">
               <a:ext uri="{FF2B5EF4-FFF2-40B4-BE49-F238E27FC236}">
-                <a16:creationId xmlns:a16="http://schemas.microsoft.com/office/drawing/2014/main" id="{28EB4DDD-F983-43FB-8FF4-B2D42244C794}"/>
+                <a16:creationId xmlns:a16="http://schemas.microsoft.com/office/drawing/2014/main" id="{8F1301C0-1941-4D11-8695-9B408BE10E79}"/>
               </a:ext>
             </a:extLst>
           </p:cNvPr>
@@ -33765,7 +33765,7 @@
           <p:cNvPr id="39" name="">
             <a:extLst xmlns:a="http://schemas.openxmlformats.org/drawingml/2006/main">
               <a:ext uri="{FF2B5EF4-FFF2-40B4-BE49-F238E27FC236}">
-                <a16:creationId xmlns:a16="http://schemas.microsoft.com/office/drawing/2014/main" id="{49C46658-344A-430E-BECF-BF33780F242E}"/>
+                <a16:creationId xmlns:a16="http://schemas.microsoft.com/office/drawing/2014/main" id="{C259518D-728D-4FF2-B93C-1DA3F2FA099C}"/>
               </a:ext>
             </a:extLst>
           </p:cNvPr>
@@ -33823,7 +33823,7 @@
           <p:cNvPr id="40" name="">
             <a:extLst xmlns:a="http://schemas.openxmlformats.org/drawingml/2006/main">
               <a:ext uri="{FF2B5EF4-FFF2-40B4-BE49-F238E27FC236}">
-                <a16:creationId xmlns:a16="http://schemas.microsoft.com/office/drawing/2014/main" id="{6F1C2E1D-7373-4476-A5FD-BA0BF46ADB54}"/>
+                <a16:creationId xmlns:a16="http://schemas.microsoft.com/office/drawing/2014/main" id="{A8D74C63-AE18-45C3-A6FC-7A7D2635DD75}"/>
               </a:ext>
             </a:extLst>
           </p:cNvPr>
@@ -33856,7 +33856,7 @@
           <p:cNvPr id="41" name="">
             <a:extLst xmlns:a="http://schemas.openxmlformats.org/drawingml/2006/main">
               <a:ext uri="{FF2B5EF4-FFF2-40B4-BE49-F238E27FC236}">
-                <a16:creationId xmlns:a16="http://schemas.microsoft.com/office/drawing/2014/main" id="{C16163C2-C63A-4B6E-A562-4F979E7441A2}"/>
+                <a16:creationId xmlns:a16="http://schemas.microsoft.com/office/drawing/2014/main" id="{BF627D69-0479-4D68-8EAB-876DD449EDB5}"/>
               </a:ext>
             </a:extLst>
           </p:cNvPr>
@@ -33914,7 +33914,7 @@
           <p:cNvPr id="42" name="">
             <a:extLst xmlns:a="http://schemas.openxmlformats.org/drawingml/2006/main">
               <a:ext uri="{FF2B5EF4-FFF2-40B4-BE49-F238E27FC236}">
-                <a16:creationId xmlns:a16="http://schemas.microsoft.com/office/drawing/2014/main" id="{AFA40726-1DB4-4D31-B6DA-309EBC3C5C04}"/>
+                <a16:creationId xmlns:a16="http://schemas.microsoft.com/office/drawing/2014/main" id="{1E651EEF-2451-457E-AE24-DC7F6292C0A5}"/>
               </a:ext>
             </a:extLst>
           </p:cNvPr>
@@ -33947,7 +33947,7 @@
           <p:cNvPr id="43" name="">
             <a:extLst xmlns:a="http://schemas.openxmlformats.org/drawingml/2006/main">
               <a:ext uri="{FF2B5EF4-FFF2-40B4-BE49-F238E27FC236}">
-                <a16:creationId xmlns:a16="http://schemas.microsoft.com/office/drawing/2014/main" id="{2BD4301C-55A8-4F73-A9E8-0247EA4D64CD}"/>
+                <a16:creationId xmlns:a16="http://schemas.microsoft.com/office/drawing/2014/main" id="{6B554EEF-B2B3-46E9-93A3-985A5EAC74F3}"/>
               </a:ext>
             </a:extLst>
           </p:cNvPr>
@@ -34005,7 +34005,7 @@
           <p:cNvPr id="44" name="">
             <a:extLst xmlns:a="http://schemas.openxmlformats.org/drawingml/2006/main">
               <a:ext uri="{FF2B5EF4-FFF2-40B4-BE49-F238E27FC236}">
-                <a16:creationId xmlns:a16="http://schemas.microsoft.com/office/drawing/2014/main" id="{154C7E14-D6BA-4E29-B748-921BA518638E}"/>
+                <a16:creationId xmlns:a16="http://schemas.microsoft.com/office/drawing/2014/main" id="{45F6842A-9F7F-4279-A9EF-AE2B23D1C785}"/>
               </a:ext>
             </a:extLst>
           </p:cNvPr>
@@ -34038,7 +34038,7 @@
           <p:cNvPr id="45" name="">
             <a:extLst xmlns:a="http://schemas.openxmlformats.org/drawingml/2006/main">
               <a:ext uri="{FF2B5EF4-FFF2-40B4-BE49-F238E27FC236}">
-                <a16:creationId xmlns:a16="http://schemas.microsoft.com/office/drawing/2014/main" id="{3682B670-9A01-42D8-B448-BE738BBEBB8A}"/>
+                <a16:creationId xmlns:a16="http://schemas.microsoft.com/office/drawing/2014/main" id="{88E3B4A0-6507-4F27-9AA9-8BD7DF2B42E5}"/>
               </a:ext>
             </a:extLst>
           </p:cNvPr>
@@ -34096,7 +34096,7 @@
           <p:cNvPr id="46" name="">
             <a:extLst xmlns:a="http://schemas.openxmlformats.org/drawingml/2006/main">
               <a:ext uri="{FF2B5EF4-FFF2-40B4-BE49-F238E27FC236}">
-                <a16:creationId xmlns:a16="http://schemas.microsoft.com/office/drawing/2014/main" id="{069B2193-B6A9-4CD7-9381-AC8408DD1896}"/>
+                <a16:creationId xmlns:a16="http://schemas.microsoft.com/office/drawing/2014/main" id="{EA87B8D5-3C1A-4B7F-A28C-B4CA9A01E1F8}"/>
               </a:ext>
             </a:extLst>
           </p:cNvPr>
@@ -34129,7 +34129,7 @@
           <p:cNvPr id="47" name="">
             <a:extLst xmlns:a="http://schemas.openxmlformats.org/drawingml/2006/main">
               <a:ext uri="{FF2B5EF4-FFF2-40B4-BE49-F238E27FC236}">
-                <a16:creationId xmlns:a16="http://schemas.microsoft.com/office/drawing/2014/main" id="{AABDEE7F-7142-4B07-AF1C-478781512061}"/>
+                <a16:creationId xmlns:a16="http://schemas.microsoft.com/office/drawing/2014/main" id="{CCDDC267-AE00-4FB6-85E4-D5BBC14B8B8F}"/>
               </a:ext>
             </a:extLst>
           </p:cNvPr>
@@ -34187,7 +34187,7 @@
           <p:cNvPr id="48" name="">
             <a:extLst xmlns:a="http://schemas.openxmlformats.org/drawingml/2006/main">
               <a:ext uri="{FF2B5EF4-FFF2-40B4-BE49-F238E27FC236}">
-                <a16:creationId xmlns:a16="http://schemas.microsoft.com/office/drawing/2014/main" id="{03D680EA-BB36-4B7A-B49F-D74AF4C8FA51}"/>
+                <a16:creationId xmlns:a16="http://schemas.microsoft.com/office/drawing/2014/main" id="{D84B90D0-4B9D-458C-96FD-0A7D434F225C}"/>
               </a:ext>
             </a:extLst>
           </p:cNvPr>
@@ -34220,7 +34220,7 @@
           <p:cNvPr id="49" name="">
             <a:extLst xmlns:a="http://schemas.openxmlformats.org/drawingml/2006/main">
               <a:ext uri="{FF2B5EF4-FFF2-40B4-BE49-F238E27FC236}">
-                <a16:creationId xmlns:a16="http://schemas.microsoft.com/office/drawing/2014/main" id="{8FDACE77-19A4-4085-B0AB-092414F0A76C}"/>
+                <a16:creationId xmlns:a16="http://schemas.microsoft.com/office/drawing/2014/main" id="{31FB799E-6C10-4EBD-A9CB-EE19EA68447D}"/>
               </a:ext>
             </a:extLst>
           </p:cNvPr>
@@ -34278,7 +34278,7 @@
           <p:cNvPr id="50" name="">
             <a:extLst xmlns:a="http://schemas.openxmlformats.org/drawingml/2006/main">
               <a:ext uri="{FF2B5EF4-FFF2-40B4-BE49-F238E27FC236}">
-                <a16:creationId xmlns:a16="http://schemas.microsoft.com/office/drawing/2014/main" id="{C78EA6A6-A8AA-4C61-B586-015433A55C26}"/>
+                <a16:creationId xmlns:a16="http://schemas.microsoft.com/office/drawing/2014/main" id="{5F2B2B04-90D0-4808-9D0F-9E67659F2092}"/>
               </a:ext>
             </a:extLst>
           </p:cNvPr>
@@ -34311,7 +34311,7 @@
           <p:cNvPr id="51" name="">
             <a:extLst xmlns:a="http://schemas.openxmlformats.org/drawingml/2006/main">
               <a:ext uri="{FF2B5EF4-FFF2-40B4-BE49-F238E27FC236}">
-                <a16:creationId xmlns:a16="http://schemas.microsoft.com/office/drawing/2014/main" id="{1F8DA5CA-E83F-4874-978C-15B0C8DE836B}"/>
+                <a16:creationId xmlns:a16="http://schemas.microsoft.com/office/drawing/2014/main" id="{7209B72F-E2AE-4BEE-BF3F-2BC9717B245B}"/>
               </a:ext>
             </a:extLst>
           </p:cNvPr>
@@ -34369,7 +34369,7 @@
           <p:cNvPr id="52" name="">
             <a:extLst xmlns:a="http://schemas.openxmlformats.org/drawingml/2006/main">
               <a:ext uri="{FF2B5EF4-FFF2-40B4-BE49-F238E27FC236}">
-                <a16:creationId xmlns:a16="http://schemas.microsoft.com/office/drawing/2014/main" id="{DEE13644-9F22-4EBB-95A9-165A5A0B0C9D}"/>
+                <a16:creationId xmlns:a16="http://schemas.microsoft.com/office/drawing/2014/main" id="{3AEDADCA-23BE-49EC-A34C-91C44C9F95AD}"/>
               </a:ext>
             </a:extLst>
           </p:cNvPr>
@@ -34402,7 +34402,7 @@
           <p:cNvPr id="53" name="">
             <a:extLst xmlns:a="http://schemas.openxmlformats.org/drawingml/2006/main">
               <a:ext uri="{FF2B5EF4-FFF2-40B4-BE49-F238E27FC236}">
-                <a16:creationId xmlns:a16="http://schemas.microsoft.com/office/drawing/2014/main" id="{0FF89BB1-B7C3-489F-855E-C6D0FDCAD2BC}"/>
+                <a16:creationId xmlns:a16="http://schemas.microsoft.com/office/drawing/2014/main" id="{F8CD6E2A-C958-439A-B5C7-E93130F7259B}"/>
               </a:ext>
             </a:extLst>
           </p:cNvPr>
@@ -34460,7 +34460,7 @@
           <p:cNvPr id="54" name="">
             <a:extLst xmlns:a="http://schemas.openxmlformats.org/drawingml/2006/main">
               <a:ext uri="{FF2B5EF4-FFF2-40B4-BE49-F238E27FC236}">
-                <a16:creationId xmlns:a16="http://schemas.microsoft.com/office/drawing/2014/main" id="{17AC3C79-1541-4BB6-B433-D6B5914245C7}"/>
+                <a16:creationId xmlns:a16="http://schemas.microsoft.com/office/drawing/2014/main" id="{59953F3C-5DD1-49A7-AA86-D2652454B13D}"/>
               </a:ext>
             </a:extLst>
           </p:cNvPr>
@@ -34493,7 +34493,7 @@
           <p:cNvPr id="55" name="">
             <a:extLst xmlns:a="http://schemas.openxmlformats.org/drawingml/2006/main">
               <a:ext uri="{FF2B5EF4-FFF2-40B4-BE49-F238E27FC236}">
-                <a16:creationId xmlns:a16="http://schemas.microsoft.com/office/drawing/2014/main" id="{48C22B46-8487-4081-8490-2257B14E4652}"/>
+                <a16:creationId xmlns:a16="http://schemas.microsoft.com/office/drawing/2014/main" id="{AEF7A402-CF62-427D-AC2A-20A1CF85AF40}"/>
               </a:ext>
             </a:extLst>
           </p:cNvPr>
@@ -34551,7 +34551,7 @@
           <p:cNvPr id="56" name="">
             <a:extLst xmlns:a="http://schemas.openxmlformats.org/drawingml/2006/main">
               <a:ext uri="{FF2B5EF4-FFF2-40B4-BE49-F238E27FC236}">
-                <a16:creationId xmlns:a16="http://schemas.microsoft.com/office/drawing/2014/main" id="{1E4061F2-F317-4C9E-8071-7FE6316FE429}"/>
+                <a16:creationId xmlns:a16="http://schemas.microsoft.com/office/drawing/2014/main" id="{65EA3417-29D2-43D5-B2F5-ECD3ACCFD1F1}"/>
               </a:ext>
             </a:extLst>
           </p:cNvPr>
@@ -34584,7 +34584,7 @@
           <p:cNvPr id="57" name="">
             <a:extLst xmlns:a="http://schemas.openxmlformats.org/drawingml/2006/main">
               <a:ext uri="{FF2B5EF4-FFF2-40B4-BE49-F238E27FC236}">
-                <a16:creationId xmlns:a16="http://schemas.microsoft.com/office/drawing/2014/main" id="{1DF44773-3AE9-4C60-AF43-F64E4695D3DC}"/>
+                <a16:creationId xmlns:a16="http://schemas.microsoft.com/office/drawing/2014/main" id="{51BFA9BA-F0D9-4F57-9569-38BD11631203}"/>
               </a:ext>
             </a:extLst>
           </p:cNvPr>
@@ -34642,7 +34642,7 @@
           <p:cNvPr id="58" name="">
             <a:extLst xmlns:a="http://schemas.openxmlformats.org/drawingml/2006/main">
               <a:ext uri="{FF2B5EF4-FFF2-40B4-BE49-F238E27FC236}">
-                <a16:creationId xmlns:a16="http://schemas.microsoft.com/office/drawing/2014/main" id="{EFBC6124-636A-4CB0-9E7B-5992A58C81EE}"/>
+                <a16:creationId xmlns:a16="http://schemas.microsoft.com/office/drawing/2014/main" id="{51528CD5-5A83-4DDB-AE9A-F1ADC4853428}"/>
               </a:ext>
             </a:extLst>
           </p:cNvPr>
@@ -34675,7 +34675,7 @@
           <p:cNvPr id="59" name="">
             <a:extLst xmlns:a="http://schemas.openxmlformats.org/drawingml/2006/main">
               <a:ext uri="{FF2B5EF4-FFF2-40B4-BE49-F238E27FC236}">
-                <a16:creationId xmlns:a16="http://schemas.microsoft.com/office/drawing/2014/main" id="{DDF59240-58BF-44E4-AD30-976ABD93ED24}"/>
+                <a16:creationId xmlns:a16="http://schemas.microsoft.com/office/drawing/2014/main" id="{1D70F8BE-981B-4C50-938B-3C3057838353}"/>
               </a:ext>
             </a:extLst>
           </p:cNvPr>
@@ -34733,7 +34733,7 @@
           <p:cNvPr id="60" name="">
             <a:extLst xmlns:a="http://schemas.openxmlformats.org/drawingml/2006/main">
               <a:ext uri="{FF2B5EF4-FFF2-40B4-BE49-F238E27FC236}">
-                <a16:creationId xmlns:a16="http://schemas.microsoft.com/office/drawing/2014/main" id="{1C01FFE1-5079-430F-8A4C-28C75C55EF25}"/>
+                <a16:creationId xmlns:a16="http://schemas.microsoft.com/office/drawing/2014/main" id="{F8DF2FBE-71D2-4968-A233-FA0F9448D43B}"/>
               </a:ext>
             </a:extLst>
           </p:cNvPr>
@@ -34766,7 +34766,7 @@
           <p:cNvPr id="61" name="">
             <a:extLst xmlns:a="http://schemas.openxmlformats.org/drawingml/2006/main">
               <a:ext uri="{FF2B5EF4-FFF2-40B4-BE49-F238E27FC236}">
-                <a16:creationId xmlns:a16="http://schemas.microsoft.com/office/drawing/2014/main" id="{E76B2686-93B4-422D-AFB8-540FF7BD1389}"/>
+                <a16:creationId xmlns:a16="http://schemas.microsoft.com/office/drawing/2014/main" id="{CC74FB86-9FCA-43DF-BD66-67E030AC5E65}"/>
               </a:ext>
             </a:extLst>
           </p:cNvPr>
@@ -34824,7 +34824,7 @@
           <p:cNvPr id="62" name="">
             <a:extLst xmlns:a="http://schemas.openxmlformats.org/drawingml/2006/main">
               <a:ext uri="{FF2B5EF4-FFF2-40B4-BE49-F238E27FC236}">
-                <a16:creationId xmlns:a16="http://schemas.microsoft.com/office/drawing/2014/main" id="{6263FCF2-E393-463A-9E7D-F76092DDF01F}"/>
+                <a16:creationId xmlns:a16="http://schemas.microsoft.com/office/drawing/2014/main" id="{58ED3C63-4421-48B2-932A-EF77BC623103}"/>
               </a:ext>
             </a:extLst>
           </p:cNvPr>
@@ -34857,7 +34857,7 @@
           <p:cNvPr id="63" name="">
             <a:extLst xmlns:a="http://schemas.openxmlformats.org/drawingml/2006/main">
               <a:ext uri="{FF2B5EF4-FFF2-40B4-BE49-F238E27FC236}">
-                <a16:creationId xmlns:a16="http://schemas.microsoft.com/office/drawing/2014/main" id="{D1B35638-2D2C-4B3C-ADBA-FA9FCAB34356}"/>
+                <a16:creationId xmlns:a16="http://schemas.microsoft.com/office/drawing/2014/main" id="{D7EF0584-CDB2-4C5D-9E8C-7CE71B5F3572}"/>
               </a:ext>
             </a:extLst>
           </p:cNvPr>
@@ -34915,7 +34915,7 @@
           <p:cNvPr id="64" name="">
             <a:extLst xmlns:a="http://schemas.openxmlformats.org/drawingml/2006/main">
               <a:ext uri="{FF2B5EF4-FFF2-40B4-BE49-F238E27FC236}">
-                <a16:creationId xmlns:a16="http://schemas.microsoft.com/office/drawing/2014/main" id="{E8980326-7FA5-49CA-AB67-CE762A8D26AC}"/>
+                <a16:creationId xmlns:a16="http://schemas.microsoft.com/office/drawing/2014/main" id="{88AF5834-A9B2-40CD-9324-1A875CF44E6E}"/>
               </a:ext>
             </a:extLst>
           </p:cNvPr>
@@ -34948,7 +34948,7 @@
           <p:cNvPr id="65" name="">
             <a:extLst xmlns:a="http://schemas.openxmlformats.org/drawingml/2006/main">
               <a:ext uri="{FF2B5EF4-FFF2-40B4-BE49-F238E27FC236}">
-                <a16:creationId xmlns:a16="http://schemas.microsoft.com/office/drawing/2014/main" id="{25F96A08-0B2A-40AA-9F98-0CB7310F95CF}"/>
+                <a16:creationId xmlns:a16="http://schemas.microsoft.com/office/drawing/2014/main" id="{7D0505C1-C256-4398-A9AD-54F40A652B78}"/>
               </a:ext>
             </a:extLst>
           </p:cNvPr>
@@ -35006,7 +35006,7 @@
           <p:cNvPr id="66" name="">
             <a:extLst xmlns:a="http://schemas.openxmlformats.org/drawingml/2006/main">
               <a:ext uri="{FF2B5EF4-FFF2-40B4-BE49-F238E27FC236}">
-                <a16:creationId xmlns:a16="http://schemas.microsoft.com/office/drawing/2014/main" id="{EA0CF59B-557E-4CD5-B9DF-158B137740D6}"/>
+                <a16:creationId xmlns:a16="http://schemas.microsoft.com/office/drawing/2014/main" id="{B05121C1-3C97-40E8-8B36-C0F1C9D778DC}"/>
               </a:ext>
             </a:extLst>
           </p:cNvPr>
@@ -35039,7 +35039,7 @@
           <p:cNvPr id="67" name="">
             <a:extLst xmlns:a="http://schemas.openxmlformats.org/drawingml/2006/main">
               <a:ext uri="{FF2B5EF4-FFF2-40B4-BE49-F238E27FC236}">
-                <a16:creationId xmlns:a16="http://schemas.microsoft.com/office/drawing/2014/main" id="{016C4C33-C9A3-4960-8ACE-A832E723D4C9}"/>
+                <a16:creationId xmlns:a16="http://schemas.microsoft.com/office/drawing/2014/main" id="{7602F858-BAB8-46A0-A208-E1EF28590742}"/>
               </a:ext>
             </a:extLst>
           </p:cNvPr>
@@ -35097,7 +35097,7 @@
           <p:cNvPr id="68" name="">
             <a:extLst xmlns:a="http://schemas.openxmlformats.org/drawingml/2006/main">
               <a:ext uri="{FF2B5EF4-FFF2-40B4-BE49-F238E27FC236}">
-                <a16:creationId xmlns:a16="http://schemas.microsoft.com/office/drawing/2014/main" id="{9AE07535-6758-4D00-AFD8-E08A56FEEED0}"/>
+                <a16:creationId xmlns:a16="http://schemas.microsoft.com/office/drawing/2014/main" id="{C97AA3D9-C581-4273-AD24-9D2229402171}"/>
               </a:ext>
             </a:extLst>
           </p:cNvPr>
@@ -35130,7 +35130,7 @@
           <p:cNvPr id="69" name="">
             <a:extLst xmlns:a="http://schemas.openxmlformats.org/drawingml/2006/main">
               <a:ext uri="{FF2B5EF4-FFF2-40B4-BE49-F238E27FC236}">
-                <a16:creationId xmlns:a16="http://schemas.microsoft.com/office/drawing/2014/main" id="{0D362F51-12ED-4795-AAA3-CC3706A34AF7}"/>
+                <a16:creationId xmlns:a16="http://schemas.microsoft.com/office/drawing/2014/main" id="{CAEBA965-B981-4388-94FE-5F30410DAED0}"/>
               </a:ext>
             </a:extLst>
           </p:cNvPr>
@@ -35188,7 +35188,7 @@
           <p:cNvPr id="70" name="">
             <a:extLst xmlns:a="http://schemas.openxmlformats.org/drawingml/2006/main">
               <a:ext uri="{FF2B5EF4-FFF2-40B4-BE49-F238E27FC236}">
-                <a16:creationId xmlns:a16="http://schemas.microsoft.com/office/drawing/2014/main" id="{0655E810-A9A9-45C3-8572-5D4A90AF1349}"/>
+                <a16:creationId xmlns:a16="http://schemas.microsoft.com/office/drawing/2014/main" id="{665FE1C0-2B02-4007-8162-A022B81A95D3}"/>
               </a:ext>
             </a:extLst>
           </p:cNvPr>
@@ -35221,7 +35221,7 @@
           <p:cNvPr id="71" name="">
             <a:extLst xmlns:a="http://schemas.openxmlformats.org/drawingml/2006/main">
               <a:ext uri="{FF2B5EF4-FFF2-40B4-BE49-F238E27FC236}">
-                <a16:creationId xmlns:a16="http://schemas.microsoft.com/office/drawing/2014/main" id="{59F170C9-A6A7-45D3-959B-BCA9397BD1FA}"/>
+                <a16:creationId xmlns:a16="http://schemas.microsoft.com/office/drawing/2014/main" id="{4923F00D-1FD8-45BF-A530-F5CF3A9D9303}"/>
               </a:ext>
             </a:extLst>
           </p:cNvPr>
@@ -35279,7 +35279,7 @@
           <p:cNvPr id="72" name="">
             <a:extLst xmlns:a="http://schemas.openxmlformats.org/drawingml/2006/main">
               <a:ext uri="{FF2B5EF4-FFF2-40B4-BE49-F238E27FC236}">
-                <a16:creationId xmlns:a16="http://schemas.microsoft.com/office/drawing/2014/main" id="{FBE3C792-5DBB-4FD5-9029-5D5C6F684932}"/>
+                <a16:creationId xmlns:a16="http://schemas.microsoft.com/office/drawing/2014/main" id="{3B6834A9-53A9-4B9F-BCF2-E5866891B8FC}"/>
               </a:ext>
             </a:extLst>
           </p:cNvPr>
@@ -35337,7 +35337,7 @@
           <p:cNvPr id="73" name="">
             <a:extLst xmlns:a="http://schemas.openxmlformats.org/drawingml/2006/main">
               <a:ext uri="{FF2B5EF4-FFF2-40B4-BE49-F238E27FC236}">
-                <a16:creationId xmlns:a16="http://schemas.microsoft.com/office/drawing/2014/main" id="{6E9D188E-A43E-4984-8E8E-88BFF7765C02}"/>
+                <a16:creationId xmlns:a16="http://schemas.microsoft.com/office/drawing/2014/main" id="{E82A768A-4428-4E5D-9F8B-D3829320321E}"/>
               </a:ext>
             </a:extLst>
           </p:cNvPr>
@@ -35370,7 +35370,7 @@
           <p:cNvPr id="74" name="">
             <a:extLst xmlns:a="http://schemas.openxmlformats.org/drawingml/2006/main">
               <a:ext uri="{FF2B5EF4-FFF2-40B4-BE49-F238E27FC236}">
-                <a16:creationId xmlns:a16="http://schemas.microsoft.com/office/drawing/2014/main" id="{6F5C917A-F254-46DC-B7D6-3FD8AC54A26A}"/>
+                <a16:creationId xmlns:a16="http://schemas.microsoft.com/office/drawing/2014/main" id="{FE08D140-AC73-4D20-8E65-CB62FCC712E6}"/>
               </a:ext>
             </a:extLst>
           </p:cNvPr>
@@ -35428,7 +35428,7 @@
                 <a:latin typeface="Microsoft YaHei"/>
                 <a:ea typeface="Microsoft YaHei"/>
                 <a:cs typeface="Microsoft YaHei"/>
-                <a:hlinkClick xmlns:r="http://schemas.openxmlformats.org/officeDocument/2006/relationships" r:id="Reaaa1f06901e4018"/>
+                <a:hlinkClick xmlns:r="http://schemas.openxmlformats.org/officeDocument/2006/relationships" r:id="Rbdf9d79f47b747c8"/>
               </a:rPr>
               <a:t>Qoder 存量重写案例</a:t>
             </a:r>
@@ -35440,7 +35440,7 @@
                 <a:latin typeface="Microsoft YaHei"/>
                 <a:ea typeface="Microsoft YaHei"/>
                 <a:cs typeface="Microsoft YaHei"/>
-                <a:hlinkClick xmlns:r="http://schemas.openxmlformats.org/officeDocument/2006/relationships" r:id="Rc694977b4580495d"/>
+                <a:hlinkClick xmlns:r="http://schemas.openxmlformats.org/officeDocument/2006/relationships" r:id="R33f45579c1f54a5b"/>
               </a:rPr>
               <a:t> · Quest Worktree</a:t>
             </a:r>
@@ -35452,7 +35452,7 @@
           <p:cNvPr id="75" name="">
             <a:extLst xmlns:a="http://schemas.openxmlformats.org/drawingml/2006/main">
               <a:ext uri="{FF2B5EF4-FFF2-40B4-BE49-F238E27FC236}">
-                <a16:creationId xmlns:a16="http://schemas.microsoft.com/office/drawing/2014/main" id="{991C2B91-E3E4-4C2F-A141-323BAE3EC1F1}"/>
+                <a16:creationId xmlns:a16="http://schemas.microsoft.com/office/drawing/2014/main" id="{59E60BCA-0A06-4D4B-BCF1-3743B3122ABE}"/>
               </a:ext>
             </a:extLst>
           </p:cNvPr>
@@ -35508,7 +35508,7 @@
     </p:spTree>
     <p:extLst>
       <p:ext uri="{BB962C8B-B14F-4D97-AF65-F5344CB8AC3E}">
-        <p14:creationId xmlns:p14="http://schemas.microsoft.com/office/powerpoint/2010/main" val="2140017438"/>
+        <p14:creationId xmlns:p14="http://schemas.microsoft.com/office/powerpoint/2010/main" val="222206669"/>
       </p:ext>
     </p:extLst>
   </p:cSld>
@@ -35539,7 +35539,7 @@
           <p:cNvPr id="82" name="">
             <a:extLst xmlns:a="http://schemas.openxmlformats.org/drawingml/2006/main">
               <a:ext uri="{FF2B5EF4-FFF2-40B4-BE49-F238E27FC236}">
-                <a16:creationId xmlns:a16="http://schemas.microsoft.com/office/drawing/2014/main" id="{4217BD4C-7DBC-420F-859D-CF5B372C8C39}"/>
+                <a16:creationId xmlns:a16="http://schemas.microsoft.com/office/drawing/2014/main" id="{C083DE38-230C-4047-AFB6-A25A621C7A52}"/>
               </a:ext>
             </a:extLst>
           </p:cNvPr>
@@ -35572,7 +35572,7 @@
           <p:cNvPr id="2" name="">
             <a:extLst xmlns:a="http://schemas.openxmlformats.org/drawingml/2006/main">
               <a:ext uri="{FF2B5EF4-FFF2-40B4-BE49-F238E27FC236}">
-                <a16:creationId xmlns:a16="http://schemas.microsoft.com/office/drawing/2014/main" id="{AF47FCB0-DD2F-46F5-BD91-EBE191F03EBA}"/>
+                <a16:creationId xmlns:a16="http://schemas.microsoft.com/office/drawing/2014/main" id="{43B65FCD-4D78-4772-987A-E307A9113E65}"/>
               </a:ext>
             </a:extLst>
           </p:cNvPr>
@@ -35630,7 +35630,7 @@
           <p:cNvPr id="3" name="">
             <a:extLst xmlns:a="http://schemas.openxmlformats.org/drawingml/2006/main">
               <a:ext uri="{FF2B5EF4-FFF2-40B4-BE49-F238E27FC236}">
-                <a16:creationId xmlns:a16="http://schemas.microsoft.com/office/drawing/2014/main" id="{E5C8B1A4-35F4-44A4-911E-2FE72082CAEC}"/>
+                <a16:creationId xmlns:a16="http://schemas.microsoft.com/office/drawing/2014/main" id="{3C886C54-6858-487D-8398-5AF0BDEC02B6}"/>
               </a:ext>
             </a:extLst>
           </p:cNvPr>
@@ -35662,7 +35662,7 @@
             <a:pPr algn="l">
               <a:defRPr sz="2325" b="1">
                 <a:solidFill>
-                  <a:srgbClr val="1D1D1A"/>
+                  <a:srgbClr val="8A0F17"/>
                 </a:solidFill>
                 <a:latin typeface="Microsoft YaHei"/>
                 <a:ea typeface="Microsoft YaHei"/>
@@ -35672,7 +35672,7 @@
             <a:r>
               <a:rPr sz="2325" b="1">
                 <a:solidFill>
-                  <a:srgbClr val="1D1D1A"/>
+                  <a:srgbClr val="8A0F17"/>
                 </a:solidFill>
                 <a:latin typeface="Microsoft YaHei"/>
                 <a:ea typeface="Microsoft YaHei"/>
@@ -35688,7 +35688,7 @@
           <p:cNvPr id="4" name="">
             <a:extLst xmlns:a="http://schemas.openxmlformats.org/drawingml/2006/main">
               <a:ext uri="{FF2B5EF4-FFF2-40B4-BE49-F238E27FC236}">
-                <a16:creationId xmlns:a16="http://schemas.microsoft.com/office/drawing/2014/main" id="{9F22791C-6ED8-487F-B592-8410DB98E7A5}"/>
+                <a16:creationId xmlns:a16="http://schemas.microsoft.com/office/drawing/2014/main" id="{AC9AB088-12B5-44F7-943D-2A9F91D19A0C}"/>
               </a:ext>
             </a:extLst>
           </p:cNvPr>
@@ -35721,7 +35721,7 @@
           <p:cNvPr id="5" name="">
             <a:extLst xmlns:a="http://schemas.openxmlformats.org/drawingml/2006/main">
               <a:ext uri="{FF2B5EF4-FFF2-40B4-BE49-F238E27FC236}">
-                <a16:creationId xmlns:a16="http://schemas.microsoft.com/office/drawing/2014/main" id="{3034675E-C11B-4F2A-9FE5-2CB31961874F}"/>
+                <a16:creationId xmlns:a16="http://schemas.microsoft.com/office/drawing/2014/main" id="{5BAA7E0E-FA2D-4908-BCAD-ACA167CB0310}"/>
               </a:ext>
             </a:extLst>
           </p:cNvPr>
@@ -35779,7 +35779,7 @@
           <p:cNvPr id="6" name="">
             <a:extLst xmlns:a="http://schemas.openxmlformats.org/drawingml/2006/main">
               <a:ext uri="{FF2B5EF4-FFF2-40B4-BE49-F238E27FC236}">
-                <a16:creationId xmlns:a16="http://schemas.microsoft.com/office/drawing/2014/main" id="{71DDFEBD-8106-43C1-B879-1ADDDA9F6245}"/>
+                <a16:creationId xmlns:a16="http://schemas.microsoft.com/office/drawing/2014/main" id="{FE98C481-AEA4-4C43-AEE4-231A37CD6FED}"/>
               </a:ext>
             </a:extLst>
           </p:cNvPr>
@@ -35837,7 +35837,7 @@
           <p:cNvPr id="7" name="">
             <a:extLst xmlns:a="http://schemas.openxmlformats.org/drawingml/2006/main">
               <a:ext uri="{FF2B5EF4-FFF2-40B4-BE49-F238E27FC236}">
-                <a16:creationId xmlns:a16="http://schemas.microsoft.com/office/drawing/2014/main" id="{D3B9373A-EA9C-494F-B569-E517BDD21FD7}"/>
+                <a16:creationId xmlns:a16="http://schemas.microsoft.com/office/drawing/2014/main" id="{8DEB9453-51D2-4E64-9220-86FA4167E4FB}"/>
               </a:ext>
             </a:extLst>
           </p:cNvPr>
@@ -35870,7 +35870,7 @@
           <p:cNvPr id="8" name="">
             <a:extLst xmlns:a="http://schemas.openxmlformats.org/drawingml/2006/main">
               <a:ext uri="{FF2B5EF4-FFF2-40B4-BE49-F238E27FC236}">
-                <a16:creationId xmlns:a16="http://schemas.microsoft.com/office/drawing/2014/main" id="{6931CEBB-7BBC-440B-9A3E-F0632966AFDE}"/>
+                <a16:creationId xmlns:a16="http://schemas.microsoft.com/office/drawing/2014/main" id="{994EF0F3-6E4E-4387-A5FB-716FF9C39AB5}"/>
               </a:ext>
             </a:extLst>
           </p:cNvPr>
@@ -35903,7 +35903,7 @@
           <p:cNvPr id="9" name="">
             <a:extLst xmlns:a="http://schemas.openxmlformats.org/drawingml/2006/main">
               <a:ext uri="{FF2B5EF4-FFF2-40B4-BE49-F238E27FC236}">
-                <a16:creationId xmlns:a16="http://schemas.microsoft.com/office/drawing/2014/main" id="{09C02BC7-661E-4E14-88E1-389A2687E4F7}"/>
+                <a16:creationId xmlns:a16="http://schemas.microsoft.com/office/drawing/2014/main" id="{B478451F-A28E-4A06-930D-0576C32A5C5E}"/>
               </a:ext>
             </a:extLst>
           </p:cNvPr>
@@ -35936,7 +35936,7 @@
           <p:cNvPr id="10" name="">
             <a:extLst xmlns:a="http://schemas.openxmlformats.org/drawingml/2006/main">
               <a:ext uri="{FF2B5EF4-FFF2-40B4-BE49-F238E27FC236}">
-                <a16:creationId xmlns:a16="http://schemas.microsoft.com/office/drawing/2014/main" id="{2C392560-E407-446E-AD73-5D64E2D0F2A6}"/>
+                <a16:creationId xmlns:a16="http://schemas.microsoft.com/office/drawing/2014/main" id="{F6BA0637-A1D0-4C14-B9D1-1FCE60EC445C}"/>
               </a:ext>
             </a:extLst>
           </p:cNvPr>
@@ -35994,7 +35994,7 @@
           <p:cNvPr id="11" name="">
             <a:extLst xmlns:a="http://schemas.openxmlformats.org/drawingml/2006/main">
               <a:ext uri="{FF2B5EF4-FFF2-40B4-BE49-F238E27FC236}">
-                <a16:creationId xmlns:a16="http://schemas.microsoft.com/office/drawing/2014/main" id="{7430CF4F-1E05-4282-9F89-8DF4A0E9BBE3}"/>
+                <a16:creationId xmlns:a16="http://schemas.microsoft.com/office/drawing/2014/main" id="{D1B641FB-FC70-4231-9C15-3C04AE63A526}"/>
               </a:ext>
             </a:extLst>
           </p:cNvPr>
@@ -36052,7 +36052,7 @@
           <p:cNvPr id="12" name="">
             <a:extLst xmlns:a="http://schemas.openxmlformats.org/drawingml/2006/main">
               <a:ext uri="{FF2B5EF4-FFF2-40B4-BE49-F238E27FC236}">
-                <a16:creationId xmlns:a16="http://schemas.microsoft.com/office/drawing/2014/main" id="{138FF7A4-A542-4A71-9B39-6B847C230D52}"/>
+                <a16:creationId xmlns:a16="http://schemas.microsoft.com/office/drawing/2014/main" id="{103A5FE6-F40E-465A-8C72-466B7F443D0F}"/>
               </a:ext>
             </a:extLst>
           </p:cNvPr>
@@ -36085,7 +36085,7 @@
           <p:cNvPr id="13" name="">
             <a:extLst xmlns:a="http://schemas.openxmlformats.org/drawingml/2006/main">
               <a:ext uri="{FF2B5EF4-FFF2-40B4-BE49-F238E27FC236}">
-                <a16:creationId xmlns:a16="http://schemas.microsoft.com/office/drawing/2014/main" id="{E8479B76-E6C5-4F60-A508-D0A6B742864D}"/>
+                <a16:creationId xmlns:a16="http://schemas.microsoft.com/office/drawing/2014/main" id="{B926757A-874B-477E-B7E6-3552BB184836}"/>
               </a:ext>
             </a:extLst>
           </p:cNvPr>
@@ -36118,7 +36118,7 @@
           <p:cNvPr id="14" name="">
             <a:extLst xmlns:a="http://schemas.openxmlformats.org/drawingml/2006/main">
               <a:ext uri="{FF2B5EF4-FFF2-40B4-BE49-F238E27FC236}">
-                <a16:creationId xmlns:a16="http://schemas.microsoft.com/office/drawing/2014/main" id="{AD63426D-A9D1-4300-AC4E-9869DD221D92}"/>
+                <a16:creationId xmlns:a16="http://schemas.microsoft.com/office/drawing/2014/main" id="{2B44A909-A367-4753-8DD9-D70CEFA615F7}"/>
               </a:ext>
             </a:extLst>
           </p:cNvPr>
@@ -36151,7 +36151,7 @@
           <p:cNvPr id="15" name="">
             <a:extLst xmlns:a="http://schemas.openxmlformats.org/drawingml/2006/main">
               <a:ext uri="{FF2B5EF4-FFF2-40B4-BE49-F238E27FC236}">
-                <a16:creationId xmlns:a16="http://schemas.microsoft.com/office/drawing/2014/main" id="{09DB0AD8-A698-4A46-B2F9-EAB690E209EA}"/>
+                <a16:creationId xmlns:a16="http://schemas.microsoft.com/office/drawing/2014/main" id="{FB160C09-B0E7-4E43-8397-D6A362D6CE6C}"/>
               </a:ext>
             </a:extLst>
           </p:cNvPr>
@@ -36209,7 +36209,7 @@
           <p:cNvPr id="16" name="">
             <a:extLst xmlns:a="http://schemas.openxmlformats.org/drawingml/2006/main">
               <a:ext uri="{FF2B5EF4-FFF2-40B4-BE49-F238E27FC236}">
-                <a16:creationId xmlns:a16="http://schemas.microsoft.com/office/drawing/2014/main" id="{A897E3AB-6B96-427A-80C9-D748EABDDD7B}"/>
+                <a16:creationId xmlns:a16="http://schemas.microsoft.com/office/drawing/2014/main" id="{67347DEF-7B57-4649-BDA1-F056F1425748}"/>
               </a:ext>
             </a:extLst>
           </p:cNvPr>
@@ -36267,7 +36267,7 @@
           <p:cNvPr id="17" name="">
             <a:extLst xmlns:a="http://schemas.openxmlformats.org/drawingml/2006/main">
               <a:ext uri="{FF2B5EF4-FFF2-40B4-BE49-F238E27FC236}">
-                <a16:creationId xmlns:a16="http://schemas.microsoft.com/office/drawing/2014/main" id="{CA823506-9B10-4CF8-B286-22D3967D91DF}"/>
+                <a16:creationId xmlns:a16="http://schemas.microsoft.com/office/drawing/2014/main" id="{3AFF3676-1E5F-4271-9553-B21CE7BDC584}"/>
               </a:ext>
             </a:extLst>
           </p:cNvPr>
@@ -36300,7 +36300,7 @@
           <p:cNvPr id="18" name="">
             <a:extLst xmlns:a="http://schemas.openxmlformats.org/drawingml/2006/main">
               <a:ext uri="{FF2B5EF4-FFF2-40B4-BE49-F238E27FC236}">
-                <a16:creationId xmlns:a16="http://schemas.microsoft.com/office/drawing/2014/main" id="{DE64BCD4-9799-4310-8B93-D50A65FC67DB}"/>
+                <a16:creationId xmlns:a16="http://schemas.microsoft.com/office/drawing/2014/main" id="{49FA58F6-D107-490A-BC41-D27475A62616}"/>
               </a:ext>
             </a:extLst>
           </p:cNvPr>
@@ -36333,7 +36333,7 @@
           <p:cNvPr id="19" name="">
             <a:extLst xmlns:a="http://schemas.openxmlformats.org/drawingml/2006/main">
               <a:ext uri="{FF2B5EF4-FFF2-40B4-BE49-F238E27FC236}">
-                <a16:creationId xmlns:a16="http://schemas.microsoft.com/office/drawing/2014/main" id="{61CE9D7F-4E24-4BEC-9286-037360DDA066}"/>
+                <a16:creationId xmlns:a16="http://schemas.microsoft.com/office/drawing/2014/main" id="{289C4B24-85EA-4624-B245-EDFD83CBC8FE}"/>
               </a:ext>
             </a:extLst>
           </p:cNvPr>
@@ -36366,7 +36366,7 @@
           <p:cNvPr id="20" name="">
             <a:extLst xmlns:a="http://schemas.openxmlformats.org/drawingml/2006/main">
               <a:ext uri="{FF2B5EF4-FFF2-40B4-BE49-F238E27FC236}">
-                <a16:creationId xmlns:a16="http://schemas.microsoft.com/office/drawing/2014/main" id="{C7A91D1D-D837-4F73-ABF4-65179A31CCC9}"/>
+                <a16:creationId xmlns:a16="http://schemas.microsoft.com/office/drawing/2014/main" id="{85E54D86-526B-49DA-A574-9484714555AE}"/>
               </a:ext>
             </a:extLst>
           </p:cNvPr>
@@ -36424,7 +36424,7 @@
           <p:cNvPr id="21" name="">
             <a:extLst xmlns:a="http://schemas.openxmlformats.org/drawingml/2006/main">
               <a:ext uri="{FF2B5EF4-FFF2-40B4-BE49-F238E27FC236}">
-                <a16:creationId xmlns:a16="http://schemas.microsoft.com/office/drawing/2014/main" id="{2E165ABE-3C6E-4EA0-8992-36267DBCA7DE}"/>
+                <a16:creationId xmlns:a16="http://schemas.microsoft.com/office/drawing/2014/main" id="{73C2A4D7-B7AD-475F-A332-276278234546}"/>
               </a:ext>
             </a:extLst>
           </p:cNvPr>
@@ -36482,7 +36482,7 @@
           <p:cNvPr id="22" name="">
             <a:extLst xmlns:a="http://schemas.openxmlformats.org/drawingml/2006/main">
               <a:ext uri="{FF2B5EF4-FFF2-40B4-BE49-F238E27FC236}">
-                <a16:creationId xmlns:a16="http://schemas.microsoft.com/office/drawing/2014/main" id="{E6715D05-7E56-4636-A366-69449314FF04}"/>
+                <a16:creationId xmlns:a16="http://schemas.microsoft.com/office/drawing/2014/main" id="{BD41B691-40E4-492C-A74C-A3A65DBAA784}"/>
               </a:ext>
             </a:extLst>
           </p:cNvPr>
@@ -36515,7 +36515,7 @@
           <p:cNvPr id="23" name="">
             <a:extLst xmlns:a="http://schemas.openxmlformats.org/drawingml/2006/main">
               <a:ext uri="{FF2B5EF4-FFF2-40B4-BE49-F238E27FC236}">
-                <a16:creationId xmlns:a16="http://schemas.microsoft.com/office/drawing/2014/main" id="{6C1E8D6D-B796-4EE2-BF04-A8195FBC59C4}"/>
+                <a16:creationId xmlns:a16="http://schemas.microsoft.com/office/drawing/2014/main" id="{A6535828-098D-4782-A2E1-2007A68DD31D}"/>
               </a:ext>
             </a:extLst>
           </p:cNvPr>
@@ -36548,7 +36548,7 @@
           <p:cNvPr id="24" name="">
             <a:extLst xmlns:a="http://schemas.openxmlformats.org/drawingml/2006/main">
               <a:ext uri="{FF2B5EF4-FFF2-40B4-BE49-F238E27FC236}">
-                <a16:creationId xmlns:a16="http://schemas.microsoft.com/office/drawing/2014/main" id="{47C6EC4D-928C-4EDD-8E8E-194753125011}"/>
+                <a16:creationId xmlns:a16="http://schemas.microsoft.com/office/drawing/2014/main" id="{DF22A6EE-24E4-44AC-BADC-CE57B791C717}"/>
               </a:ext>
             </a:extLst>
           </p:cNvPr>
@@ -36581,7 +36581,7 @@
           <p:cNvPr id="25" name="">
             <a:extLst xmlns:a="http://schemas.openxmlformats.org/drawingml/2006/main">
               <a:ext uri="{FF2B5EF4-FFF2-40B4-BE49-F238E27FC236}">
-                <a16:creationId xmlns:a16="http://schemas.microsoft.com/office/drawing/2014/main" id="{6E0716EB-05EB-4390-A50B-6C2B5973BC9F}"/>
+                <a16:creationId xmlns:a16="http://schemas.microsoft.com/office/drawing/2014/main" id="{6E6E8FCC-C644-4C48-A508-C05FC637C57E}"/>
               </a:ext>
             </a:extLst>
           </p:cNvPr>
@@ -36639,7 +36639,7 @@
           <p:cNvPr id="26" name="">
             <a:extLst xmlns:a="http://schemas.openxmlformats.org/drawingml/2006/main">
               <a:ext uri="{FF2B5EF4-FFF2-40B4-BE49-F238E27FC236}">
-                <a16:creationId xmlns:a16="http://schemas.microsoft.com/office/drawing/2014/main" id="{CAA78DF9-3AD6-46E5-B44A-D3DD0C2AEEE5}"/>
+                <a16:creationId xmlns:a16="http://schemas.microsoft.com/office/drawing/2014/main" id="{F730F225-801B-4B70-BBAF-8DCA42B32D0D}"/>
               </a:ext>
             </a:extLst>
           </p:cNvPr>
@@ -36697,7 +36697,7 @@
           <p:cNvPr id="27" name="">
             <a:extLst xmlns:a="http://schemas.openxmlformats.org/drawingml/2006/main">
               <a:ext uri="{FF2B5EF4-FFF2-40B4-BE49-F238E27FC236}">
-                <a16:creationId xmlns:a16="http://schemas.microsoft.com/office/drawing/2014/main" id="{8F829F6B-4472-4888-910D-4539BC993E78}"/>
+                <a16:creationId xmlns:a16="http://schemas.microsoft.com/office/drawing/2014/main" id="{039FB7A8-AECF-45E1-B76C-01953082985B}"/>
               </a:ext>
             </a:extLst>
           </p:cNvPr>
@@ -36755,7 +36755,7 @@
           <p:cNvPr id="28" name="">
             <a:extLst xmlns:a="http://schemas.openxmlformats.org/drawingml/2006/main">
               <a:ext uri="{FF2B5EF4-FFF2-40B4-BE49-F238E27FC236}">
-                <a16:creationId xmlns:a16="http://schemas.microsoft.com/office/drawing/2014/main" id="{D18A1F51-B849-4B02-81B5-2BB6C5CF9B68}"/>
+                <a16:creationId xmlns:a16="http://schemas.microsoft.com/office/drawing/2014/main" id="{BD44AC81-EF1F-4974-8C85-843F4E27BD64}"/>
               </a:ext>
             </a:extLst>
           </p:cNvPr>
@@ -36788,7 +36788,7 @@
           <p:cNvPr id="29" name="">
             <a:extLst xmlns:a="http://schemas.openxmlformats.org/drawingml/2006/main">
               <a:ext uri="{FF2B5EF4-FFF2-40B4-BE49-F238E27FC236}">
-                <a16:creationId xmlns:a16="http://schemas.microsoft.com/office/drawing/2014/main" id="{06D243A4-7728-473A-996E-2D39D681C964}"/>
+                <a16:creationId xmlns:a16="http://schemas.microsoft.com/office/drawing/2014/main" id="{0BBDDCDE-8E50-4F20-A6AF-C20BB628B077}"/>
               </a:ext>
             </a:extLst>
           </p:cNvPr>
@@ -36846,7 +36846,7 @@
           <p:cNvPr id="30" name="">
             <a:extLst xmlns:a="http://schemas.openxmlformats.org/drawingml/2006/main">
               <a:ext uri="{FF2B5EF4-FFF2-40B4-BE49-F238E27FC236}">
-                <a16:creationId xmlns:a16="http://schemas.microsoft.com/office/drawing/2014/main" id="{48DDB88A-DEA4-4BA9-B17F-7088B5DC9733}"/>
+                <a16:creationId xmlns:a16="http://schemas.microsoft.com/office/drawing/2014/main" id="{95D1164A-FE7B-4D17-B154-CE3D5BE7D195}"/>
               </a:ext>
             </a:extLst>
           </p:cNvPr>
@@ -36879,7 +36879,7 @@
           <p:cNvPr id="31" name="">
             <a:extLst xmlns:a="http://schemas.openxmlformats.org/drawingml/2006/main">
               <a:ext uri="{FF2B5EF4-FFF2-40B4-BE49-F238E27FC236}">
-                <a16:creationId xmlns:a16="http://schemas.microsoft.com/office/drawing/2014/main" id="{F8BD569A-B6C9-4836-AFAB-E8AD66064643}"/>
+                <a16:creationId xmlns:a16="http://schemas.microsoft.com/office/drawing/2014/main" id="{47871233-4D57-4075-A028-B583F4241D2A}"/>
               </a:ext>
             </a:extLst>
           </p:cNvPr>
@@ -36937,7 +36937,7 @@
           <p:cNvPr id="32" name="">
             <a:extLst xmlns:a="http://schemas.openxmlformats.org/drawingml/2006/main">
               <a:ext uri="{FF2B5EF4-FFF2-40B4-BE49-F238E27FC236}">
-                <a16:creationId xmlns:a16="http://schemas.microsoft.com/office/drawing/2014/main" id="{96F67C3B-EF70-47AB-B045-02BB72F4D872}"/>
+                <a16:creationId xmlns:a16="http://schemas.microsoft.com/office/drawing/2014/main" id="{D7A80458-929E-4F23-89BA-6DA14C9685E1}"/>
               </a:ext>
             </a:extLst>
           </p:cNvPr>
@@ -36970,7 +36970,7 @@
           <p:cNvPr id="33" name="">
             <a:extLst xmlns:a="http://schemas.openxmlformats.org/drawingml/2006/main">
               <a:ext uri="{FF2B5EF4-FFF2-40B4-BE49-F238E27FC236}">
-                <a16:creationId xmlns:a16="http://schemas.microsoft.com/office/drawing/2014/main" id="{01276E17-52B2-44CA-90B7-C674EC75AF93}"/>
+                <a16:creationId xmlns:a16="http://schemas.microsoft.com/office/drawing/2014/main" id="{56CAD9F8-182F-4082-A8F6-794E9153016C}"/>
               </a:ext>
             </a:extLst>
           </p:cNvPr>
@@ -37028,7 +37028,7 @@
           <p:cNvPr id="34" name="">
             <a:extLst xmlns:a="http://schemas.openxmlformats.org/drawingml/2006/main">
               <a:ext uri="{FF2B5EF4-FFF2-40B4-BE49-F238E27FC236}">
-                <a16:creationId xmlns:a16="http://schemas.microsoft.com/office/drawing/2014/main" id="{39A63373-5369-42B1-B0FE-5E9301BA18E5}"/>
+                <a16:creationId xmlns:a16="http://schemas.microsoft.com/office/drawing/2014/main" id="{A212C7AD-8134-4760-BC7D-25FECF2B9EBD}"/>
               </a:ext>
             </a:extLst>
           </p:cNvPr>
@@ -37061,7 +37061,7 @@
           <p:cNvPr id="35" name="">
             <a:extLst xmlns:a="http://schemas.openxmlformats.org/drawingml/2006/main">
               <a:ext uri="{FF2B5EF4-FFF2-40B4-BE49-F238E27FC236}">
-                <a16:creationId xmlns:a16="http://schemas.microsoft.com/office/drawing/2014/main" id="{5D0B6452-E7E3-41BE-8BA9-37BF6F89B4E9}"/>
+                <a16:creationId xmlns:a16="http://schemas.microsoft.com/office/drawing/2014/main" id="{F5039AAB-564F-41F8-A61A-CEBC44C39DA5}"/>
               </a:ext>
             </a:extLst>
           </p:cNvPr>
@@ -37119,7 +37119,7 @@
           <p:cNvPr id="36" name="">
             <a:extLst xmlns:a="http://schemas.openxmlformats.org/drawingml/2006/main">
               <a:ext uri="{FF2B5EF4-FFF2-40B4-BE49-F238E27FC236}">
-                <a16:creationId xmlns:a16="http://schemas.microsoft.com/office/drawing/2014/main" id="{5B03687B-68E5-4FC2-A872-069CE612EC5A}"/>
+                <a16:creationId xmlns:a16="http://schemas.microsoft.com/office/drawing/2014/main" id="{06996CE0-95D0-4E1A-83BE-DBD9D6554F9A}"/>
               </a:ext>
             </a:extLst>
           </p:cNvPr>
@@ -37152,7 +37152,7 @@
           <p:cNvPr id="37" name="">
             <a:extLst xmlns:a="http://schemas.openxmlformats.org/drawingml/2006/main">
               <a:ext uri="{FF2B5EF4-FFF2-40B4-BE49-F238E27FC236}">
-                <a16:creationId xmlns:a16="http://schemas.microsoft.com/office/drawing/2014/main" id="{D45832CB-E0FC-4823-B869-277F09F254E0}"/>
+                <a16:creationId xmlns:a16="http://schemas.microsoft.com/office/drawing/2014/main" id="{A2D091D3-80DC-4602-8FD3-C16B74C46A73}"/>
               </a:ext>
             </a:extLst>
           </p:cNvPr>
@@ -37210,7 +37210,7 @@
           <p:cNvPr id="38" name="">
             <a:extLst xmlns:a="http://schemas.openxmlformats.org/drawingml/2006/main">
               <a:ext uri="{FF2B5EF4-FFF2-40B4-BE49-F238E27FC236}">
-                <a16:creationId xmlns:a16="http://schemas.microsoft.com/office/drawing/2014/main" id="{64090705-4E26-49DD-9653-DF9CD222221E}"/>
+                <a16:creationId xmlns:a16="http://schemas.microsoft.com/office/drawing/2014/main" id="{B0A88728-693E-4E06-AEDA-B9AE0160ADB5}"/>
               </a:ext>
             </a:extLst>
           </p:cNvPr>
@@ -37243,7 +37243,7 @@
           <p:cNvPr id="39" name="">
             <a:extLst xmlns:a="http://schemas.openxmlformats.org/drawingml/2006/main">
               <a:ext uri="{FF2B5EF4-FFF2-40B4-BE49-F238E27FC236}">
-                <a16:creationId xmlns:a16="http://schemas.microsoft.com/office/drawing/2014/main" id="{EFF73933-F46A-4DD5-945E-34BB5B304606}"/>
+                <a16:creationId xmlns:a16="http://schemas.microsoft.com/office/drawing/2014/main" id="{2B03F246-38CA-40E2-BC10-7D777607246D}"/>
               </a:ext>
             </a:extLst>
           </p:cNvPr>
@@ -37301,7 +37301,7 @@
           <p:cNvPr id="40" name="">
             <a:extLst xmlns:a="http://schemas.openxmlformats.org/drawingml/2006/main">
               <a:ext uri="{FF2B5EF4-FFF2-40B4-BE49-F238E27FC236}">
-                <a16:creationId xmlns:a16="http://schemas.microsoft.com/office/drawing/2014/main" id="{EC6DAB07-B3D6-4852-AE94-CACFEB59F935}"/>
+                <a16:creationId xmlns:a16="http://schemas.microsoft.com/office/drawing/2014/main" id="{171E93FC-1B62-4ECF-9D98-8A5094F39860}"/>
               </a:ext>
             </a:extLst>
           </p:cNvPr>
@@ -37334,7 +37334,7 @@
           <p:cNvPr id="41" name="">
             <a:extLst xmlns:a="http://schemas.openxmlformats.org/drawingml/2006/main">
               <a:ext uri="{FF2B5EF4-FFF2-40B4-BE49-F238E27FC236}">
-                <a16:creationId xmlns:a16="http://schemas.microsoft.com/office/drawing/2014/main" id="{B06AAC6C-8F36-4D35-A622-884C390A69BB}"/>
+                <a16:creationId xmlns:a16="http://schemas.microsoft.com/office/drawing/2014/main" id="{10125B04-0AA2-40B8-A52A-A8FC63A99729}"/>
               </a:ext>
             </a:extLst>
           </p:cNvPr>
@@ -37392,7 +37392,7 @@
           <p:cNvPr id="42" name="">
             <a:extLst xmlns:a="http://schemas.openxmlformats.org/drawingml/2006/main">
               <a:ext uri="{FF2B5EF4-FFF2-40B4-BE49-F238E27FC236}">
-                <a16:creationId xmlns:a16="http://schemas.microsoft.com/office/drawing/2014/main" id="{62AAD904-9C18-4BEC-A257-966A57475F63}"/>
+                <a16:creationId xmlns:a16="http://schemas.microsoft.com/office/drawing/2014/main" id="{4ADF29C3-A4E3-4880-A5CF-561E556EA4F5}"/>
               </a:ext>
             </a:extLst>
           </p:cNvPr>
@@ -37425,7 +37425,7 @@
           <p:cNvPr id="43" name="">
             <a:extLst xmlns:a="http://schemas.openxmlformats.org/drawingml/2006/main">
               <a:ext uri="{FF2B5EF4-FFF2-40B4-BE49-F238E27FC236}">
-                <a16:creationId xmlns:a16="http://schemas.microsoft.com/office/drawing/2014/main" id="{D47AA6B7-46B7-4956-BE78-69023417C132}"/>
+                <a16:creationId xmlns:a16="http://schemas.microsoft.com/office/drawing/2014/main" id="{65252968-A2B8-4375-B3D2-E53099BEB55A}"/>
               </a:ext>
             </a:extLst>
           </p:cNvPr>
@@ -37483,7 +37483,7 @@
           <p:cNvPr id="44" name="">
             <a:extLst xmlns:a="http://schemas.openxmlformats.org/drawingml/2006/main">
               <a:ext uri="{FF2B5EF4-FFF2-40B4-BE49-F238E27FC236}">
-                <a16:creationId xmlns:a16="http://schemas.microsoft.com/office/drawing/2014/main" id="{C85980C5-73BA-453E-B8E0-C7852ABD7743}"/>
+                <a16:creationId xmlns:a16="http://schemas.microsoft.com/office/drawing/2014/main" id="{16862AD5-FBB3-43BF-B3F5-EDA6523686EB}"/>
               </a:ext>
             </a:extLst>
           </p:cNvPr>
@@ -37516,7 +37516,7 @@
           <p:cNvPr id="45" name="">
             <a:extLst xmlns:a="http://schemas.openxmlformats.org/drawingml/2006/main">
               <a:ext uri="{FF2B5EF4-FFF2-40B4-BE49-F238E27FC236}">
-                <a16:creationId xmlns:a16="http://schemas.microsoft.com/office/drawing/2014/main" id="{F891B29C-9B2A-4F9F-BE2B-60B92A6B659A}"/>
+                <a16:creationId xmlns:a16="http://schemas.microsoft.com/office/drawing/2014/main" id="{735DECF6-59B1-40DE-87F6-B44191D36661}"/>
               </a:ext>
             </a:extLst>
           </p:cNvPr>
@@ -37574,7 +37574,7 @@
           <p:cNvPr id="46" name="">
             <a:extLst xmlns:a="http://schemas.openxmlformats.org/drawingml/2006/main">
               <a:ext uri="{FF2B5EF4-FFF2-40B4-BE49-F238E27FC236}">
-                <a16:creationId xmlns:a16="http://schemas.microsoft.com/office/drawing/2014/main" id="{E54AC30E-FAB4-44BE-8F8A-C9529E7923AF}"/>
+                <a16:creationId xmlns:a16="http://schemas.microsoft.com/office/drawing/2014/main" id="{5E203FD8-18BF-4173-ABCB-0963E32BBB48}"/>
               </a:ext>
             </a:extLst>
           </p:cNvPr>
@@ -37607,7 +37607,7 @@
           <p:cNvPr id="47" name="">
             <a:extLst xmlns:a="http://schemas.openxmlformats.org/drawingml/2006/main">
               <a:ext uri="{FF2B5EF4-FFF2-40B4-BE49-F238E27FC236}">
-                <a16:creationId xmlns:a16="http://schemas.microsoft.com/office/drawing/2014/main" id="{4DC0EEF7-06EF-41D1-8159-89EB0A139A91}"/>
+                <a16:creationId xmlns:a16="http://schemas.microsoft.com/office/drawing/2014/main" id="{DFDFE1AF-68D5-4D02-9E38-0C23DB360497}"/>
               </a:ext>
             </a:extLst>
           </p:cNvPr>
@@ -37665,7 +37665,7 @@
           <p:cNvPr id="48" name="">
             <a:extLst xmlns:a="http://schemas.openxmlformats.org/drawingml/2006/main">
               <a:ext uri="{FF2B5EF4-FFF2-40B4-BE49-F238E27FC236}">
-                <a16:creationId xmlns:a16="http://schemas.microsoft.com/office/drawing/2014/main" id="{F46F9667-97D7-49FD-B426-6138BBC514EC}"/>
+                <a16:creationId xmlns:a16="http://schemas.microsoft.com/office/drawing/2014/main" id="{CF776C01-3207-424F-8F73-27699F98E11B}"/>
               </a:ext>
             </a:extLst>
           </p:cNvPr>
@@ -37698,7 +37698,7 @@
           <p:cNvPr id="49" name="">
             <a:extLst xmlns:a="http://schemas.openxmlformats.org/drawingml/2006/main">
               <a:ext uri="{FF2B5EF4-FFF2-40B4-BE49-F238E27FC236}">
-                <a16:creationId xmlns:a16="http://schemas.microsoft.com/office/drawing/2014/main" id="{3ABE60B4-8DFC-430F-8EA9-A3D8A1EF65A6}"/>
+                <a16:creationId xmlns:a16="http://schemas.microsoft.com/office/drawing/2014/main" id="{8BEA8889-5B30-419F-91BE-247486DA802A}"/>
               </a:ext>
             </a:extLst>
           </p:cNvPr>
@@ -37756,7 +37756,7 @@
           <p:cNvPr id="50" name="">
             <a:extLst xmlns:a="http://schemas.openxmlformats.org/drawingml/2006/main">
               <a:ext uri="{FF2B5EF4-FFF2-40B4-BE49-F238E27FC236}">
-                <a16:creationId xmlns:a16="http://schemas.microsoft.com/office/drawing/2014/main" id="{2E0FAF35-9001-4526-B615-971DFE901AB7}"/>
+                <a16:creationId xmlns:a16="http://schemas.microsoft.com/office/drawing/2014/main" id="{BDC3748A-46DB-4481-BBE6-690C2706BE8A}"/>
               </a:ext>
             </a:extLst>
           </p:cNvPr>
@@ -37789,7 +37789,7 @@
           <p:cNvPr id="51" name="">
             <a:extLst xmlns:a="http://schemas.openxmlformats.org/drawingml/2006/main">
               <a:ext uri="{FF2B5EF4-FFF2-40B4-BE49-F238E27FC236}">
-                <a16:creationId xmlns:a16="http://schemas.microsoft.com/office/drawing/2014/main" id="{6CB103E3-313E-47A7-976A-DEC37D748427}"/>
+                <a16:creationId xmlns:a16="http://schemas.microsoft.com/office/drawing/2014/main" id="{ED33BCCB-F599-4808-AB90-E1AFC2FB3CAA}"/>
               </a:ext>
             </a:extLst>
           </p:cNvPr>
@@ -37847,7 +37847,7 @@
           <p:cNvPr id="52" name="">
             <a:extLst xmlns:a="http://schemas.openxmlformats.org/drawingml/2006/main">
               <a:ext uri="{FF2B5EF4-FFF2-40B4-BE49-F238E27FC236}">
-                <a16:creationId xmlns:a16="http://schemas.microsoft.com/office/drawing/2014/main" id="{78B2A10F-3880-450B-A5F5-558D826559DA}"/>
+                <a16:creationId xmlns:a16="http://schemas.microsoft.com/office/drawing/2014/main" id="{4E188D8C-2A2A-4089-B727-B020267C7FB0}"/>
               </a:ext>
             </a:extLst>
           </p:cNvPr>
@@ -37880,7 +37880,7 @@
           <p:cNvPr id="53" name="">
             <a:extLst xmlns:a="http://schemas.openxmlformats.org/drawingml/2006/main">
               <a:ext uri="{FF2B5EF4-FFF2-40B4-BE49-F238E27FC236}">
-                <a16:creationId xmlns:a16="http://schemas.microsoft.com/office/drawing/2014/main" id="{63C88485-C58B-4238-BB84-33EA97AEED6F}"/>
+                <a16:creationId xmlns:a16="http://schemas.microsoft.com/office/drawing/2014/main" id="{1A69BC71-0764-4E45-949E-4870ED6282E9}"/>
               </a:ext>
             </a:extLst>
           </p:cNvPr>
@@ -37938,7 +37938,7 @@
           <p:cNvPr id="54" name="">
             <a:extLst xmlns:a="http://schemas.openxmlformats.org/drawingml/2006/main">
               <a:ext uri="{FF2B5EF4-FFF2-40B4-BE49-F238E27FC236}">
-                <a16:creationId xmlns:a16="http://schemas.microsoft.com/office/drawing/2014/main" id="{22248C52-7644-4E5B-A04B-9A1C06A8A9FF}"/>
+                <a16:creationId xmlns:a16="http://schemas.microsoft.com/office/drawing/2014/main" id="{23597CBF-B5DE-4E64-9862-F4488516A879}"/>
               </a:ext>
             </a:extLst>
           </p:cNvPr>
@@ -37971,7 +37971,7 @@
           <p:cNvPr id="55" name="">
             <a:extLst xmlns:a="http://schemas.openxmlformats.org/drawingml/2006/main">
               <a:ext uri="{FF2B5EF4-FFF2-40B4-BE49-F238E27FC236}">
-                <a16:creationId xmlns:a16="http://schemas.microsoft.com/office/drawing/2014/main" id="{754A6220-7FF2-447B-98CB-039F348A5BED}"/>
+                <a16:creationId xmlns:a16="http://schemas.microsoft.com/office/drawing/2014/main" id="{4319D73A-FCF8-41F1-AEA7-69EE60FE76A4}"/>
               </a:ext>
             </a:extLst>
           </p:cNvPr>
@@ -38029,7 +38029,7 @@
           <p:cNvPr id="56" name="">
             <a:extLst xmlns:a="http://schemas.openxmlformats.org/drawingml/2006/main">
               <a:ext uri="{FF2B5EF4-FFF2-40B4-BE49-F238E27FC236}">
-                <a16:creationId xmlns:a16="http://schemas.microsoft.com/office/drawing/2014/main" id="{865C93F9-A2B1-427B-A254-B9EDC3CB16ED}"/>
+                <a16:creationId xmlns:a16="http://schemas.microsoft.com/office/drawing/2014/main" id="{3AA13260-B820-4B83-A175-104C903006D8}"/>
               </a:ext>
             </a:extLst>
           </p:cNvPr>
@@ -38062,7 +38062,7 @@
           <p:cNvPr id="57" name="">
             <a:extLst xmlns:a="http://schemas.openxmlformats.org/drawingml/2006/main">
               <a:ext uri="{FF2B5EF4-FFF2-40B4-BE49-F238E27FC236}">
-                <a16:creationId xmlns:a16="http://schemas.microsoft.com/office/drawing/2014/main" id="{D8DBCBB8-BCFE-4370-A330-18B92636B630}"/>
+                <a16:creationId xmlns:a16="http://schemas.microsoft.com/office/drawing/2014/main" id="{7062F157-9CDC-4AE4-9281-9F93713A5CC4}"/>
               </a:ext>
             </a:extLst>
           </p:cNvPr>
@@ -38120,7 +38120,7 @@
           <p:cNvPr id="58" name="">
             <a:extLst xmlns:a="http://schemas.openxmlformats.org/drawingml/2006/main">
               <a:ext uri="{FF2B5EF4-FFF2-40B4-BE49-F238E27FC236}">
-                <a16:creationId xmlns:a16="http://schemas.microsoft.com/office/drawing/2014/main" id="{5278E527-885E-4DCB-BAF6-1ECDB2B84647}"/>
+                <a16:creationId xmlns:a16="http://schemas.microsoft.com/office/drawing/2014/main" id="{365E62C1-9AE3-4FE2-8D26-EA7780FE152B}"/>
               </a:ext>
             </a:extLst>
           </p:cNvPr>
@@ -38153,7 +38153,7 @@
           <p:cNvPr id="59" name="">
             <a:extLst xmlns:a="http://schemas.openxmlformats.org/drawingml/2006/main">
               <a:ext uri="{FF2B5EF4-FFF2-40B4-BE49-F238E27FC236}">
-                <a16:creationId xmlns:a16="http://schemas.microsoft.com/office/drawing/2014/main" id="{7FF71153-F850-4EEE-8E1A-CDC3BA91008A}"/>
+                <a16:creationId xmlns:a16="http://schemas.microsoft.com/office/drawing/2014/main" id="{71660D9B-A364-4252-BE16-19C849727889}"/>
               </a:ext>
             </a:extLst>
           </p:cNvPr>
@@ -38211,7 +38211,7 @@
           <p:cNvPr id="60" name="">
             <a:extLst xmlns:a="http://schemas.openxmlformats.org/drawingml/2006/main">
               <a:ext uri="{FF2B5EF4-FFF2-40B4-BE49-F238E27FC236}">
-                <a16:creationId xmlns:a16="http://schemas.microsoft.com/office/drawing/2014/main" id="{43B0859A-4971-4C55-B625-39D1A486A48A}"/>
+                <a16:creationId xmlns:a16="http://schemas.microsoft.com/office/drawing/2014/main" id="{B49E51DC-078D-4DC3-AB04-007B37248FF7}"/>
               </a:ext>
             </a:extLst>
           </p:cNvPr>
@@ -38244,7 +38244,7 @@
           <p:cNvPr id="61" name="">
             <a:extLst xmlns:a="http://schemas.openxmlformats.org/drawingml/2006/main">
               <a:ext uri="{FF2B5EF4-FFF2-40B4-BE49-F238E27FC236}">
-                <a16:creationId xmlns:a16="http://schemas.microsoft.com/office/drawing/2014/main" id="{72339366-E114-4A4B-97BF-9C1E07B98A9F}"/>
+                <a16:creationId xmlns:a16="http://schemas.microsoft.com/office/drawing/2014/main" id="{8AC5BC51-D10C-440E-A139-E49A5A03D209}"/>
               </a:ext>
             </a:extLst>
           </p:cNvPr>
@@ -38302,7 +38302,7 @@
           <p:cNvPr id="62" name="">
             <a:extLst xmlns:a="http://schemas.openxmlformats.org/drawingml/2006/main">
               <a:ext uri="{FF2B5EF4-FFF2-40B4-BE49-F238E27FC236}">
-                <a16:creationId xmlns:a16="http://schemas.microsoft.com/office/drawing/2014/main" id="{745D5F95-8923-4F4B-A812-9978109B39A4}"/>
+                <a16:creationId xmlns:a16="http://schemas.microsoft.com/office/drawing/2014/main" id="{1BD208D2-C296-4F9E-BD9E-46ADBF96C862}"/>
               </a:ext>
             </a:extLst>
           </p:cNvPr>
@@ -38335,7 +38335,7 @@
           <p:cNvPr id="63" name="">
             <a:extLst xmlns:a="http://schemas.openxmlformats.org/drawingml/2006/main">
               <a:ext uri="{FF2B5EF4-FFF2-40B4-BE49-F238E27FC236}">
-                <a16:creationId xmlns:a16="http://schemas.microsoft.com/office/drawing/2014/main" id="{2CB489FE-D1E8-4749-BF3A-0C8C1128E2D6}"/>
+                <a16:creationId xmlns:a16="http://schemas.microsoft.com/office/drawing/2014/main" id="{D8DC4150-A412-4BF3-BB1C-87246B1359C3}"/>
               </a:ext>
             </a:extLst>
           </p:cNvPr>
@@ -38393,7 +38393,7 @@
           <p:cNvPr id="64" name="">
             <a:extLst xmlns:a="http://schemas.openxmlformats.org/drawingml/2006/main">
               <a:ext uri="{FF2B5EF4-FFF2-40B4-BE49-F238E27FC236}">
-                <a16:creationId xmlns:a16="http://schemas.microsoft.com/office/drawing/2014/main" id="{CC7E73EE-76EC-439D-9DE2-0851F39B7096}"/>
+                <a16:creationId xmlns:a16="http://schemas.microsoft.com/office/drawing/2014/main" id="{520780EF-E7AB-4A00-B20F-AD7C2DE0549D}"/>
               </a:ext>
             </a:extLst>
           </p:cNvPr>
@@ -38426,7 +38426,7 @@
           <p:cNvPr id="65" name="">
             <a:extLst xmlns:a="http://schemas.openxmlformats.org/drawingml/2006/main">
               <a:ext uri="{FF2B5EF4-FFF2-40B4-BE49-F238E27FC236}">
-                <a16:creationId xmlns:a16="http://schemas.microsoft.com/office/drawing/2014/main" id="{B8A33CFE-935E-47B6-BDF2-9597ADB0482C}"/>
+                <a16:creationId xmlns:a16="http://schemas.microsoft.com/office/drawing/2014/main" id="{AC60BB8F-A668-480B-AB6C-09DB909CB211}"/>
               </a:ext>
             </a:extLst>
           </p:cNvPr>
@@ -38484,7 +38484,7 @@
           <p:cNvPr id="66" name="">
             <a:extLst xmlns:a="http://schemas.openxmlformats.org/drawingml/2006/main">
               <a:ext uri="{FF2B5EF4-FFF2-40B4-BE49-F238E27FC236}">
-                <a16:creationId xmlns:a16="http://schemas.microsoft.com/office/drawing/2014/main" id="{EB8C346A-0215-4002-813F-3696C97019B1}"/>
+                <a16:creationId xmlns:a16="http://schemas.microsoft.com/office/drawing/2014/main" id="{F2E97036-EAE3-4ACB-8B92-DEF57126C09D}"/>
               </a:ext>
             </a:extLst>
           </p:cNvPr>
@@ -38517,7 +38517,7 @@
           <p:cNvPr id="67" name="">
             <a:extLst xmlns:a="http://schemas.openxmlformats.org/drawingml/2006/main">
               <a:ext uri="{FF2B5EF4-FFF2-40B4-BE49-F238E27FC236}">
-                <a16:creationId xmlns:a16="http://schemas.microsoft.com/office/drawing/2014/main" id="{813236D5-A81A-4E7F-B2B8-0E1B4357CDFE}"/>
+                <a16:creationId xmlns:a16="http://schemas.microsoft.com/office/drawing/2014/main" id="{A098EFC6-B6A1-4F41-B1C1-F1BC2B435A07}"/>
               </a:ext>
             </a:extLst>
           </p:cNvPr>
@@ -38575,7 +38575,7 @@
           <p:cNvPr id="68" name="">
             <a:extLst xmlns:a="http://schemas.openxmlformats.org/drawingml/2006/main">
               <a:ext uri="{FF2B5EF4-FFF2-40B4-BE49-F238E27FC236}">
-                <a16:creationId xmlns:a16="http://schemas.microsoft.com/office/drawing/2014/main" id="{B8968867-1131-4D4B-8E5D-E0463339BF0D}"/>
+                <a16:creationId xmlns:a16="http://schemas.microsoft.com/office/drawing/2014/main" id="{B5D306BA-7FBF-4470-844D-035F341E5990}"/>
               </a:ext>
             </a:extLst>
           </p:cNvPr>
@@ -38608,7 +38608,7 @@
           <p:cNvPr id="69" name="">
             <a:extLst xmlns:a="http://schemas.openxmlformats.org/drawingml/2006/main">
               <a:ext uri="{FF2B5EF4-FFF2-40B4-BE49-F238E27FC236}">
-                <a16:creationId xmlns:a16="http://schemas.microsoft.com/office/drawing/2014/main" id="{FBC5A050-FAC1-41DB-B47E-2C9D59295046}"/>
+                <a16:creationId xmlns:a16="http://schemas.microsoft.com/office/drawing/2014/main" id="{B2D7AECF-4CDA-47AB-9C2C-571E900FA407}"/>
               </a:ext>
             </a:extLst>
           </p:cNvPr>
@@ -38666,7 +38666,7 @@
           <p:cNvPr id="70" name="">
             <a:extLst xmlns:a="http://schemas.openxmlformats.org/drawingml/2006/main">
               <a:ext uri="{FF2B5EF4-FFF2-40B4-BE49-F238E27FC236}">
-                <a16:creationId xmlns:a16="http://schemas.microsoft.com/office/drawing/2014/main" id="{D1B35E2D-FC74-4CD2-98D5-95B08B85B365}"/>
+                <a16:creationId xmlns:a16="http://schemas.microsoft.com/office/drawing/2014/main" id="{2E8C74FA-8B5D-4025-B939-1527EE0622D9}"/>
               </a:ext>
             </a:extLst>
           </p:cNvPr>
@@ -38699,7 +38699,7 @@
           <p:cNvPr id="71" name="">
             <a:extLst xmlns:a="http://schemas.openxmlformats.org/drawingml/2006/main">
               <a:ext uri="{FF2B5EF4-FFF2-40B4-BE49-F238E27FC236}">
-                <a16:creationId xmlns:a16="http://schemas.microsoft.com/office/drawing/2014/main" id="{E1A86858-35CE-4357-9848-C9AFEAAC2AA0}"/>
+                <a16:creationId xmlns:a16="http://schemas.microsoft.com/office/drawing/2014/main" id="{520B646D-B701-4092-8EE2-6C00C38F52B7}"/>
               </a:ext>
             </a:extLst>
           </p:cNvPr>
@@ -38757,7 +38757,7 @@
           <p:cNvPr id="72" name="">
             <a:extLst xmlns:a="http://schemas.openxmlformats.org/drawingml/2006/main">
               <a:ext uri="{FF2B5EF4-FFF2-40B4-BE49-F238E27FC236}">
-                <a16:creationId xmlns:a16="http://schemas.microsoft.com/office/drawing/2014/main" id="{B21170C8-8695-47B7-A2DF-659C69AD1A32}"/>
+                <a16:creationId xmlns:a16="http://schemas.microsoft.com/office/drawing/2014/main" id="{4328FEB4-E1A1-48F6-9BA0-06BD948F2670}"/>
               </a:ext>
             </a:extLst>
           </p:cNvPr>
@@ -38790,7 +38790,7 @@
           <p:cNvPr id="73" name="">
             <a:extLst xmlns:a="http://schemas.openxmlformats.org/drawingml/2006/main">
               <a:ext uri="{FF2B5EF4-FFF2-40B4-BE49-F238E27FC236}">
-                <a16:creationId xmlns:a16="http://schemas.microsoft.com/office/drawing/2014/main" id="{0950686D-729C-4B82-87AF-AA38CE053743}"/>
+                <a16:creationId xmlns:a16="http://schemas.microsoft.com/office/drawing/2014/main" id="{E259C45D-FE8A-4D12-B6B2-4A87837F8D73}"/>
               </a:ext>
             </a:extLst>
           </p:cNvPr>
@@ -38848,7 +38848,7 @@
           <p:cNvPr id="74" name="">
             <a:extLst xmlns:a="http://schemas.openxmlformats.org/drawingml/2006/main">
               <a:ext uri="{FF2B5EF4-FFF2-40B4-BE49-F238E27FC236}">
-                <a16:creationId xmlns:a16="http://schemas.microsoft.com/office/drawing/2014/main" id="{8A7D7A9F-8CD1-4D3F-8F6F-FFA40C7CD01F}"/>
+                <a16:creationId xmlns:a16="http://schemas.microsoft.com/office/drawing/2014/main" id="{23D72232-FD39-4BE1-849B-86BB8860FBB9}"/>
               </a:ext>
             </a:extLst>
           </p:cNvPr>
@@ -38881,7 +38881,7 @@
           <p:cNvPr id="75" name="">
             <a:extLst xmlns:a="http://schemas.openxmlformats.org/drawingml/2006/main">
               <a:ext uri="{FF2B5EF4-FFF2-40B4-BE49-F238E27FC236}">
-                <a16:creationId xmlns:a16="http://schemas.microsoft.com/office/drawing/2014/main" id="{A8D9013B-F4CD-428A-B5D3-41CC7E515B25}"/>
+                <a16:creationId xmlns:a16="http://schemas.microsoft.com/office/drawing/2014/main" id="{0EE81EDE-A86F-4F8C-A612-16C519D84781}"/>
               </a:ext>
             </a:extLst>
           </p:cNvPr>
@@ -38939,7 +38939,7 @@
           <p:cNvPr id="76" name="">
             <a:extLst xmlns:a="http://schemas.openxmlformats.org/drawingml/2006/main">
               <a:ext uri="{FF2B5EF4-FFF2-40B4-BE49-F238E27FC236}">
-                <a16:creationId xmlns:a16="http://schemas.microsoft.com/office/drawing/2014/main" id="{D6A5F67D-1220-42BA-B2EE-C510D52CCA19}"/>
+                <a16:creationId xmlns:a16="http://schemas.microsoft.com/office/drawing/2014/main" id="{6BA94285-77DB-4EBB-AC58-E485FA8AE1D9}"/>
               </a:ext>
             </a:extLst>
           </p:cNvPr>
@@ -38972,7 +38972,7 @@
           <p:cNvPr id="77" name="">
             <a:extLst xmlns:a="http://schemas.openxmlformats.org/drawingml/2006/main">
               <a:ext uri="{FF2B5EF4-FFF2-40B4-BE49-F238E27FC236}">
-                <a16:creationId xmlns:a16="http://schemas.microsoft.com/office/drawing/2014/main" id="{3CFB32F6-A0A3-44E9-ADB9-5A03A72F7FCF}"/>
+                <a16:creationId xmlns:a16="http://schemas.microsoft.com/office/drawing/2014/main" id="{B8007F6F-C475-4BF5-AEB7-86CCD9F02B62}"/>
               </a:ext>
             </a:extLst>
           </p:cNvPr>
@@ -39030,7 +39030,7 @@
           <p:cNvPr id="78" name="">
             <a:extLst xmlns:a="http://schemas.openxmlformats.org/drawingml/2006/main">
               <a:ext uri="{FF2B5EF4-FFF2-40B4-BE49-F238E27FC236}">
-                <a16:creationId xmlns:a16="http://schemas.microsoft.com/office/drawing/2014/main" id="{9A7BEEF8-6954-4099-A388-63E0D057BA2A}"/>
+                <a16:creationId xmlns:a16="http://schemas.microsoft.com/office/drawing/2014/main" id="{89648A6A-2F05-41A5-A845-5F02281921B4}"/>
               </a:ext>
             </a:extLst>
           </p:cNvPr>
@@ -39088,7 +39088,7 @@
           <p:cNvPr id="79" name="">
             <a:extLst xmlns:a="http://schemas.openxmlformats.org/drawingml/2006/main">
               <a:ext uri="{FF2B5EF4-FFF2-40B4-BE49-F238E27FC236}">
-                <a16:creationId xmlns:a16="http://schemas.microsoft.com/office/drawing/2014/main" id="{CB39CDA7-77C4-4C97-9D89-438ED67A5636}"/>
+                <a16:creationId xmlns:a16="http://schemas.microsoft.com/office/drawing/2014/main" id="{8316D6EE-9E7D-489F-989C-9FC47AE7C4CB}"/>
               </a:ext>
             </a:extLst>
           </p:cNvPr>
@@ -39121,7 +39121,7 @@
           <p:cNvPr id="80" name="">
             <a:extLst xmlns:a="http://schemas.openxmlformats.org/drawingml/2006/main">
               <a:ext uri="{FF2B5EF4-FFF2-40B4-BE49-F238E27FC236}">
-                <a16:creationId xmlns:a16="http://schemas.microsoft.com/office/drawing/2014/main" id="{3199B771-2FEB-4F2D-9DD8-D87450104793}"/>
+                <a16:creationId xmlns:a16="http://schemas.microsoft.com/office/drawing/2014/main" id="{66C88819-6C4E-4B88-A665-4408B15DA86E}"/>
               </a:ext>
             </a:extLst>
           </p:cNvPr>
@@ -39179,7 +39179,7 @@
                 <a:latin typeface="Microsoft YaHei"/>
                 <a:ea typeface="Microsoft YaHei"/>
                 <a:cs typeface="Microsoft YaHei"/>
-                <a:hlinkClick xmlns:r="http://schemas.openxmlformats.org/officeDocument/2006/relationships" r:id="R8b5e49cebc284460"/>
+                <a:hlinkClick xmlns:r="http://schemas.openxmlformats.org/officeDocument/2006/relationships" r:id="R9fff3a59966e4bae"/>
               </a:rPr>
               <a:t>码道 Codebase</a:t>
             </a:r>
@@ -39191,7 +39191,7 @@
                 <a:latin typeface="Microsoft YaHei"/>
                 <a:ea typeface="Microsoft YaHei"/>
                 <a:cs typeface="Microsoft YaHei"/>
-                <a:hlinkClick xmlns:r="http://schemas.openxmlformats.org/officeDocument/2006/relationships" r:id="Ra916ff45e4774766"/>
+                <a:hlinkClick xmlns:r="http://schemas.openxmlformats.org/officeDocument/2006/relationships" r:id="R64c3a094c4074a7c"/>
               </a:rPr>
               <a:t> · Qoder Indexing</a:t>
             </a:r>
@@ -39203,7 +39203,7 @@
                 <a:latin typeface="Microsoft YaHei"/>
                 <a:ea typeface="Microsoft YaHei"/>
                 <a:cs typeface="Microsoft YaHei"/>
-                <a:hlinkClick xmlns:r="http://schemas.openxmlformats.org/officeDocument/2006/relationships" r:id="R66ae6a7fddc74a8f"/>
+                <a:hlinkClick xmlns:r="http://schemas.openxmlformats.org/officeDocument/2006/relationships" r:id="Rfabdbcf33b9e496f"/>
               </a:rPr>
               <a:t> · Qoder Repo Wiki</a:t>
             </a:r>
@@ -39215,7 +39215,7 @@
                 <a:latin typeface="Microsoft YaHei"/>
                 <a:ea typeface="Microsoft YaHei"/>
                 <a:cs typeface="Microsoft YaHei"/>
-                <a:hlinkClick xmlns:r="http://schemas.openxmlformats.org/officeDocument/2006/relationships" r:id="R099a504828f548e1"/>
+                <a:hlinkClick xmlns:r="http://schemas.openxmlformats.org/officeDocument/2006/relationships" r:id="R921ee67c49e04c9b"/>
               </a:rPr>
               <a:t> · QMind</a:t>
             </a:r>
@@ -39227,7 +39227,7 @@
           <p:cNvPr id="81" name="">
             <a:extLst xmlns:a="http://schemas.openxmlformats.org/drawingml/2006/main">
               <a:ext uri="{FF2B5EF4-FFF2-40B4-BE49-F238E27FC236}">
-                <a16:creationId xmlns:a16="http://schemas.microsoft.com/office/drawing/2014/main" id="{33A9B82F-94C9-4508-96B2-A9B2D1F23374}"/>
+                <a16:creationId xmlns:a16="http://schemas.microsoft.com/office/drawing/2014/main" id="{B1F6F581-4758-4A73-B79A-822A070D1FB8}"/>
               </a:ext>
             </a:extLst>
           </p:cNvPr>
@@ -39283,7 +39283,7 @@
     </p:spTree>
     <p:extLst>
       <p:ext uri="{BB962C8B-B14F-4D97-AF65-F5344CB8AC3E}">
-        <p14:creationId xmlns:p14="http://schemas.microsoft.com/office/powerpoint/2010/main" val="2096163827"/>
+        <p14:creationId xmlns:p14="http://schemas.microsoft.com/office/powerpoint/2010/main" val="432680500"/>
       </p:ext>
     </p:extLst>
   </p:cSld>
@@ -39314,7 +39314,7 @@
           <p:cNvPr id="95" name="">
             <a:extLst xmlns:a="http://schemas.openxmlformats.org/drawingml/2006/main">
               <a:ext uri="{FF2B5EF4-FFF2-40B4-BE49-F238E27FC236}">
-                <a16:creationId xmlns:a16="http://schemas.microsoft.com/office/drawing/2014/main" id="{64626C69-2DBF-4812-BD7A-3C939A2A7EA1}"/>
+                <a16:creationId xmlns:a16="http://schemas.microsoft.com/office/drawing/2014/main" id="{F46B542C-4E25-48B0-9D95-5A0D5EA4E7D2}"/>
               </a:ext>
             </a:extLst>
           </p:cNvPr>
@@ -39347,7 +39347,7 @@
           <p:cNvPr id="2" name="">
             <a:extLst xmlns:a="http://schemas.openxmlformats.org/drawingml/2006/main">
               <a:ext uri="{FF2B5EF4-FFF2-40B4-BE49-F238E27FC236}">
-                <a16:creationId xmlns:a16="http://schemas.microsoft.com/office/drawing/2014/main" id="{A7E861DB-E26D-4EA4-96D4-0D7137E25F25}"/>
+                <a16:creationId xmlns:a16="http://schemas.microsoft.com/office/drawing/2014/main" id="{7771C38A-BA8E-479C-B1F2-D7B026303B94}"/>
               </a:ext>
             </a:extLst>
           </p:cNvPr>
@@ -39405,7 +39405,7 @@
           <p:cNvPr id="3" name="">
             <a:extLst xmlns:a="http://schemas.openxmlformats.org/drawingml/2006/main">
               <a:ext uri="{FF2B5EF4-FFF2-40B4-BE49-F238E27FC236}">
-                <a16:creationId xmlns:a16="http://schemas.microsoft.com/office/drawing/2014/main" id="{9782B0E1-E7A3-4E2A-994D-15C2A26DD4BF}"/>
+                <a16:creationId xmlns:a16="http://schemas.microsoft.com/office/drawing/2014/main" id="{082519E6-AC6D-4E4E-886F-FC3A869609A9}"/>
               </a:ext>
             </a:extLst>
           </p:cNvPr>
@@ -39437,7 +39437,7 @@
             <a:pPr algn="l">
               <a:defRPr sz="2325" b="1">
                 <a:solidFill>
-                  <a:srgbClr val="1D1D1A"/>
+                  <a:srgbClr val="8A0F17"/>
                 </a:solidFill>
                 <a:latin typeface="Microsoft YaHei"/>
                 <a:ea typeface="Microsoft YaHei"/>
@@ -39447,7 +39447,7 @@
             <a:r>
               <a:rPr sz="2325" b="1">
                 <a:solidFill>
-                  <a:srgbClr val="1D1D1A"/>
+                  <a:srgbClr val="8A0F17"/>
                 </a:solidFill>
                 <a:latin typeface="Microsoft YaHei"/>
                 <a:ea typeface="Microsoft YaHei"/>
@@ -39463,7 +39463,7 @@
           <p:cNvPr id="4" name="">
             <a:extLst xmlns:a="http://schemas.openxmlformats.org/drawingml/2006/main">
               <a:ext uri="{FF2B5EF4-FFF2-40B4-BE49-F238E27FC236}">
-                <a16:creationId xmlns:a16="http://schemas.microsoft.com/office/drawing/2014/main" id="{F68F4A5A-CCF7-48B0-A607-9F6EFD0A8772}"/>
+                <a16:creationId xmlns:a16="http://schemas.microsoft.com/office/drawing/2014/main" id="{F7FCCA8B-327C-4B72-8693-A088925B33A4}"/>
               </a:ext>
             </a:extLst>
           </p:cNvPr>
@@ -39496,7 +39496,7 @@
           <p:cNvPr id="5" name="">
             <a:extLst xmlns:a="http://schemas.openxmlformats.org/drawingml/2006/main">
               <a:ext uri="{FF2B5EF4-FFF2-40B4-BE49-F238E27FC236}">
-                <a16:creationId xmlns:a16="http://schemas.microsoft.com/office/drawing/2014/main" id="{FB6C43D8-6968-4400-8D78-C706AE3A76D9}"/>
+                <a16:creationId xmlns:a16="http://schemas.microsoft.com/office/drawing/2014/main" id="{E5CFCDB4-3B46-40FD-8788-60636B2A4F0B}"/>
               </a:ext>
             </a:extLst>
           </p:cNvPr>
@@ -39554,7 +39554,7 @@
           <p:cNvPr id="6" name="">
             <a:extLst xmlns:a="http://schemas.openxmlformats.org/drawingml/2006/main">
               <a:ext uri="{FF2B5EF4-FFF2-40B4-BE49-F238E27FC236}">
-                <a16:creationId xmlns:a16="http://schemas.microsoft.com/office/drawing/2014/main" id="{538CA7B1-FF9A-4747-A773-95D5364ECE72}"/>
+                <a16:creationId xmlns:a16="http://schemas.microsoft.com/office/drawing/2014/main" id="{1A1DCF21-6269-4318-89F9-631A4FF4228B}"/>
               </a:ext>
             </a:extLst>
           </p:cNvPr>
@@ -39587,7 +39587,7 @@
           <p:cNvPr id="7" name="">
             <a:extLst xmlns:a="http://schemas.openxmlformats.org/drawingml/2006/main">
               <a:ext uri="{FF2B5EF4-FFF2-40B4-BE49-F238E27FC236}">
-                <a16:creationId xmlns:a16="http://schemas.microsoft.com/office/drawing/2014/main" id="{3BADB799-1398-44EB-85FA-6AFE0D0870FC}"/>
+                <a16:creationId xmlns:a16="http://schemas.microsoft.com/office/drawing/2014/main" id="{7EC27367-E4E8-47F3-9EB1-D2F1CBC02DD8}"/>
               </a:ext>
             </a:extLst>
           </p:cNvPr>
@@ -39645,7 +39645,7 @@
           <p:cNvPr id="8" name="">
             <a:extLst xmlns:a="http://schemas.openxmlformats.org/drawingml/2006/main">
               <a:ext uri="{FF2B5EF4-FFF2-40B4-BE49-F238E27FC236}">
-                <a16:creationId xmlns:a16="http://schemas.microsoft.com/office/drawing/2014/main" id="{D856867A-5B7E-41D2-8329-309C23CD9ADD}"/>
+                <a16:creationId xmlns:a16="http://schemas.microsoft.com/office/drawing/2014/main" id="{BDAC212C-3028-4DBD-868D-D51805B2A142}"/>
               </a:ext>
             </a:extLst>
           </p:cNvPr>
@@ -39678,7 +39678,7 @@
           <p:cNvPr id="9" name="">
             <a:extLst xmlns:a="http://schemas.openxmlformats.org/drawingml/2006/main">
               <a:ext uri="{FF2B5EF4-FFF2-40B4-BE49-F238E27FC236}">
-                <a16:creationId xmlns:a16="http://schemas.microsoft.com/office/drawing/2014/main" id="{F4C00448-1D07-49A5-ADCC-BD3423FC888D}"/>
+                <a16:creationId xmlns:a16="http://schemas.microsoft.com/office/drawing/2014/main" id="{C04734C3-BEF2-4A1E-9314-451917C508F4}"/>
               </a:ext>
             </a:extLst>
           </p:cNvPr>
@@ -39736,7 +39736,7 @@
           <p:cNvPr id="10" name="">
             <a:extLst xmlns:a="http://schemas.openxmlformats.org/drawingml/2006/main">
               <a:ext uri="{FF2B5EF4-FFF2-40B4-BE49-F238E27FC236}">
-                <a16:creationId xmlns:a16="http://schemas.microsoft.com/office/drawing/2014/main" id="{E7D3CE0A-20A8-4692-A972-69F54988B7EC}"/>
+                <a16:creationId xmlns:a16="http://schemas.microsoft.com/office/drawing/2014/main" id="{1FED56BA-A72D-4E52-9EC7-DFF6F417ED25}"/>
               </a:ext>
             </a:extLst>
           </p:cNvPr>
@@ -39769,7 +39769,7 @@
           <p:cNvPr id="11" name="">
             <a:extLst xmlns:a="http://schemas.openxmlformats.org/drawingml/2006/main">
               <a:ext uri="{FF2B5EF4-FFF2-40B4-BE49-F238E27FC236}">
-                <a16:creationId xmlns:a16="http://schemas.microsoft.com/office/drawing/2014/main" id="{5C6CE58C-297D-41A1-936D-1113A6254E4A}"/>
+                <a16:creationId xmlns:a16="http://schemas.microsoft.com/office/drawing/2014/main" id="{69C5AB68-2D99-4140-8EEF-847E41CF817E}"/>
               </a:ext>
             </a:extLst>
           </p:cNvPr>
@@ -39827,7 +39827,7 @@
           <p:cNvPr id="12" name="">
             <a:extLst xmlns:a="http://schemas.openxmlformats.org/drawingml/2006/main">
               <a:ext uri="{FF2B5EF4-FFF2-40B4-BE49-F238E27FC236}">
-                <a16:creationId xmlns:a16="http://schemas.microsoft.com/office/drawing/2014/main" id="{52AF9984-B06B-43B5-B047-63729EC32669}"/>
+                <a16:creationId xmlns:a16="http://schemas.microsoft.com/office/drawing/2014/main" id="{E5A92FEE-1824-4DB7-9D9F-C05CADAD1220}"/>
               </a:ext>
             </a:extLst>
           </p:cNvPr>
@@ -39860,7 +39860,7 @@
           <p:cNvPr id="13" name="">
             <a:extLst xmlns:a="http://schemas.openxmlformats.org/drawingml/2006/main">
               <a:ext uri="{FF2B5EF4-FFF2-40B4-BE49-F238E27FC236}">
-                <a16:creationId xmlns:a16="http://schemas.microsoft.com/office/drawing/2014/main" id="{1447D6FB-1EE5-40F8-A1D3-B900BCECCEC9}"/>
+                <a16:creationId xmlns:a16="http://schemas.microsoft.com/office/drawing/2014/main" id="{5E818AEF-049B-4072-9DFD-1E5ACC43E028}"/>
               </a:ext>
             </a:extLst>
           </p:cNvPr>
@@ -39918,7 +39918,7 @@
           <p:cNvPr id="14" name="">
             <a:extLst xmlns:a="http://schemas.openxmlformats.org/drawingml/2006/main">
               <a:ext uri="{FF2B5EF4-FFF2-40B4-BE49-F238E27FC236}">
-                <a16:creationId xmlns:a16="http://schemas.microsoft.com/office/drawing/2014/main" id="{2B68F14D-FD2D-4496-9BA6-E936B2CA0384}"/>
+                <a16:creationId xmlns:a16="http://schemas.microsoft.com/office/drawing/2014/main" id="{1762B753-52D3-4E31-B3A4-01B8601EF2D1}"/>
               </a:ext>
             </a:extLst>
           </p:cNvPr>
@@ -39951,7 +39951,7 @@
           <p:cNvPr id="15" name="">
             <a:extLst xmlns:a="http://schemas.openxmlformats.org/drawingml/2006/main">
               <a:ext uri="{FF2B5EF4-FFF2-40B4-BE49-F238E27FC236}">
-                <a16:creationId xmlns:a16="http://schemas.microsoft.com/office/drawing/2014/main" id="{C8D7CC88-C333-40CF-8A4F-D9D7CDFA2E36}"/>
+                <a16:creationId xmlns:a16="http://schemas.microsoft.com/office/drawing/2014/main" id="{D48D2927-8802-4827-AC03-BB42A450455B}"/>
               </a:ext>
             </a:extLst>
           </p:cNvPr>
@@ -40009,7 +40009,7 @@
           <p:cNvPr id="16" name="">
             <a:extLst xmlns:a="http://schemas.openxmlformats.org/drawingml/2006/main">
               <a:ext uri="{FF2B5EF4-FFF2-40B4-BE49-F238E27FC236}">
-                <a16:creationId xmlns:a16="http://schemas.microsoft.com/office/drawing/2014/main" id="{82B29B79-5878-4149-8BA6-C02EB1DA1894}"/>
+                <a16:creationId xmlns:a16="http://schemas.microsoft.com/office/drawing/2014/main" id="{D2995408-7E81-4685-9450-C64321934CD5}"/>
               </a:ext>
             </a:extLst>
           </p:cNvPr>
@@ -40042,7 +40042,7 @@
           <p:cNvPr id="17" name="">
             <a:extLst xmlns:a="http://schemas.openxmlformats.org/drawingml/2006/main">
               <a:ext uri="{FF2B5EF4-FFF2-40B4-BE49-F238E27FC236}">
-                <a16:creationId xmlns:a16="http://schemas.microsoft.com/office/drawing/2014/main" id="{74AB224F-7143-4C14-8057-E4EC78E4CBC5}"/>
+                <a16:creationId xmlns:a16="http://schemas.microsoft.com/office/drawing/2014/main" id="{2C5ECEFE-6F24-4D85-B962-C7AC91ACE40C}"/>
               </a:ext>
             </a:extLst>
           </p:cNvPr>
@@ -40100,7 +40100,7 @@
           <p:cNvPr id="18" name="">
             <a:extLst xmlns:a="http://schemas.openxmlformats.org/drawingml/2006/main">
               <a:ext uri="{FF2B5EF4-FFF2-40B4-BE49-F238E27FC236}">
-                <a16:creationId xmlns:a16="http://schemas.microsoft.com/office/drawing/2014/main" id="{D79F33D7-5B5C-4B4D-974B-D42C1E086A18}"/>
+                <a16:creationId xmlns:a16="http://schemas.microsoft.com/office/drawing/2014/main" id="{D42174AB-A152-4C8D-A535-DB40DD131C1F}"/>
               </a:ext>
             </a:extLst>
           </p:cNvPr>
@@ -40133,7 +40133,7 @@
           <p:cNvPr id="19" name="">
             <a:extLst xmlns:a="http://schemas.openxmlformats.org/drawingml/2006/main">
               <a:ext uri="{FF2B5EF4-FFF2-40B4-BE49-F238E27FC236}">
-                <a16:creationId xmlns:a16="http://schemas.microsoft.com/office/drawing/2014/main" id="{FD3B6B00-F13C-43AE-9C57-EDF70DF8E5C9}"/>
+                <a16:creationId xmlns:a16="http://schemas.microsoft.com/office/drawing/2014/main" id="{6B396E3A-590A-48BC-AE4E-9C662487C1B4}"/>
               </a:ext>
             </a:extLst>
           </p:cNvPr>
@@ -40191,7 +40191,7 @@
           <p:cNvPr id="20" name="">
             <a:extLst xmlns:a="http://schemas.openxmlformats.org/drawingml/2006/main">
               <a:ext uri="{FF2B5EF4-FFF2-40B4-BE49-F238E27FC236}">
-                <a16:creationId xmlns:a16="http://schemas.microsoft.com/office/drawing/2014/main" id="{C9F6425B-8B93-4C8F-B0C3-6DC04F9BD145}"/>
+                <a16:creationId xmlns:a16="http://schemas.microsoft.com/office/drawing/2014/main" id="{77D017E5-2EB2-4B5F-A278-954BC19F2FCD}"/>
               </a:ext>
             </a:extLst>
           </p:cNvPr>
@@ -40224,7 +40224,7 @@
           <p:cNvPr id="21" name="">
             <a:extLst xmlns:a="http://schemas.openxmlformats.org/drawingml/2006/main">
               <a:ext uri="{FF2B5EF4-FFF2-40B4-BE49-F238E27FC236}">
-                <a16:creationId xmlns:a16="http://schemas.microsoft.com/office/drawing/2014/main" id="{C9FCC8F3-1B1A-4CAE-A164-2013161D1C7A}"/>
+                <a16:creationId xmlns:a16="http://schemas.microsoft.com/office/drawing/2014/main" id="{DD25CA65-6A02-4A83-B607-DCEEBCB68063}"/>
               </a:ext>
             </a:extLst>
           </p:cNvPr>
@@ -40282,7 +40282,7 @@
           <p:cNvPr id="22" name="">
             <a:extLst xmlns:a="http://schemas.openxmlformats.org/drawingml/2006/main">
               <a:ext uri="{FF2B5EF4-FFF2-40B4-BE49-F238E27FC236}">
-                <a16:creationId xmlns:a16="http://schemas.microsoft.com/office/drawing/2014/main" id="{C5CD8618-F84A-458D-BDD9-596A73498EC0}"/>
+                <a16:creationId xmlns:a16="http://schemas.microsoft.com/office/drawing/2014/main" id="{6003AC35-2D82-4D30-BC07-80A33CCFE382}"/>
               </a:ext>
             </a:extLst>
           </p:cNvPr>
@@ -40315,7 +40315,7 @@
           <p:cNvPr id="23" name="">
             <a:extLst xmlns:a="http://schemas.openxmlformats.org/drawingml/2006/main">
               <a:ext uri="{FF2B5EF4-FFF2-40B4-BE49-F238E27FC236}">
-                <a16:creationId xmlns:a16="http://schemas.microsoft.com/office/drawing/2014/main" id="{4D0956DD-5EDD-4C17-86BB-FF75EC5E39D6}"/>
+                <a16:creationId xmlns:a16="http://schemas.microsoft.com/office/drawing/2014/main" id="{072071E5-C189-4A0F-A17B-01B64E42C73B}"/>
               </a:ext>
             </a:extLst>
           </p:cNvPr>
@@ -40373,7 +40373,7 @@
           <p:cNvPr id="24" name="">
             <a:extLst xmlns:a="http://schemas.openxmlformats.org/drawingml/2006/main">
               <a:ext uri="{FF2B5EF4-FFF2-40B4-BE49-F238E27FC236}">
-                <a16:creationId xmlns:a16="http://schemas.microsoft.com/office/drawing/2014/main" id="{56E36298-4E36-4970-BA00-2E12079191B4}"/>
+                <a16:creationId xmlns:a16="http://schemas.microsoft.com/office/drawing/2014/main" id="{FACA6B1E-D823-45C2-B608-3B7078937C31}"/>
               </a:ext>
             </a:extLst>
           </p:cNvPr>
@@ -40406,7 +40406,7 @@
           <p:cNvPr id="25" name="">
             <a:extLst xmlns:a="http://schemas.openxmlformats.org/drawingml/2006/main">
               <a:ext uri="{FF2B5EF4-FFF2-40B4-BE49-F238E27FC236}">
-                <a16:creationId xmlns:a16="http://schemas.microsoft.com/office/drawing/2014/main" id="{566B4269-7D10-4373-AE12-41AB64C97861}"/>
+                <a16:creationId xmlns:a16="http://schemas.microsoft.com/office/drawing/2014/main" id="{1EED17B4-B824-45D6-91F5-401DAB05B592}"/>
               </a:ext>
             </a:extLst>
           </p:cNvPr>
@@ -40464,7 +40464,7 @@
           <p:cNvPr id="26" name="">
             <a:extLst xmlns:a="http://schemas.openxmlformats.org/drawingml/2006/main">
               <a:ext uri="{FF2B5EF4-FFF2-40B4-BE49-F238E27FC236}">
-                <a16:creationId xmlns:a16="http://schemas.microsoft.com/office/drawing/2014/main" id="{BCEE13F6-12DB-4096-AD02-46A0E9FD4654}"/>
+                <a16:creationId xmlns:a16="http://schemas.microsoft.com/office/drawing/2014/main" id="{F69AC0DA-B1CE-4C77-BE2E-4C75F79AE327}"/>
               </a:ext>
             </a:extLst>
           </p:cNvPr>
@@ -40497,7 +40497,7 @@
           <p:cNvPr id="27" name="">
             <a:extLst xmlns:a="http://schemas.openxmlformats.org/drawingml/2006/main">
               <a:ext uri="{FF2B5EF4-FFF2-40B4-BE49-F238E27FC236}">
-                <a16:creationId xmlns:a16="http://schemas.microsoft.com/office/drawing/2014/main" id="{B76FD8BF-68E9-4B69-880D-BFFB0D2AE6BC}"/>
+                <a16:creationId xmlns:a16="http://schemas.microsoft.com/office/drawing/2014/main" id="{2F9A8CB2-D900-4B7C-95AF-8D551B254B37}"/>
               </a:ext>
             </a:extLst>
           </p:cNvPr>
@@ -40555,7 +40555,7 @@
           <p:cNvPr id="28" name="">
             <a:extLst xmlns:a="http://schemas.openxmlformats.org/drawingml/2006/main">
               <a:ext uri="{FF2B5EF4-FFF2-40B4-BE49-F238E27FC236}">
-                <a16:creationId xmlns:a16="http://schemas.microsoft.com/office/drawing/2014/main" id="{98BC255C-8757-42BA-824E-27D45ED48E7A}"/>
+                <a16:creationId xmlns:a16="http://schemas.microsoft.com/office/drawing/2014/main" id="{E1F9DB22-EFE2-4A42-A15C-FBB9F54A8E17}"/>
               </a:ext>
             </a:extLst>
           </p:cNvPr>
@@ -40588,7 +40588,7 @@
           <p:cNvPr id="29" name="">
             <a:extLst xmlns:a="http://schemas.openxmlformats.org/drawingml/2006/main">
               <a:ext uri="{FF2B5EF4-FFF2-40B4-BE49-F238E27FC236}">
-                <a16:creationId xmlns:a16="http://schemas.microsoft.com/office/drawing/2014/main" id="{2FA8D5CE-D44A-448C-8D22-E4B6AF9F4731}"/>
+                <a16:creationId xmlns:a16="http://schemas.microsoft.com/office/drawing/2014/main" id="{91B895AE-B613-46A3-B82D-A51141CAF48E}"/>
               </a:ext>
             </a:extLst>
           </p:cNvPr>
@@ -40646,7 +40646,7 @@
           <p:cNvPr id="30" name="">
             <a:extLst xmlns:a="http://schemas.openxmlformats.org/drawingml/2006/main">
               <a:ext uri="{FF2B5EF4-FFF2-40B4-BE49-F238E27FC236}">
-                <a16:creationId xmlns:a16="http://schemas.microsoft.com/office/drawing/2014/main" id="{A1A027CE-D28A-4CAE-AE2B-3D4FE4527313}"/>
+                <a16:creationId xmlns:a16="http://schemas.microsoft.com/office/drawing/2014/main" id="{159463FE-83E5-42C6-B5B5-C5BB83FFE656}"/>
               </a:ext>
             </a:extLst>
           </p:cNvPr>
@@ -40679,7 +40679,7 @@
           <p:cNvPr id="31" name="">
             <a:extLst xmlns:a="http://schemas.openxmlformats.org/drawingml/2006/main">
               <a:ext uri="{FF2B5EF4-FFF2-40B4-BE49-F238E27FC236}">
-                <a16:creationId xmlns:a16="http://schemas.microsoft.com/office/drawing/2014/main" id="{91EC9D83-89BE-4C66-A72A-A5EDC5CECDA3}"/>
+                <a16:creationId xmlns:a16="http://schemas.microsoft.com/office/drawing/2014/main" id="{DD2DF67C-9546-4F27-B566-475F4636217C}"/>
               </a:ext>
             </a:extLst>
           </p:cNvPr>
@@ -40737,7 +40737,7 @@
           <p:cNvPr id="32" name="">
             <a:extLst xmlns:a="http://schemas.openxmlformats.org/drawingml/2006/main">
               <a:ext uri="{FF2B5EF4-FFF2-40B4-BE49-F238E27FC236}">
-                <a16:creationId xmlns:a16="http://schemas.microsoft.com/office/drawing/2014/main" id="{29837E7D-E9D1-4F88-B71D-0410E1848BD7}"/>
+                <a16:creationId xmlns:a16="http://schemas.microsoft.com/office/drawing/2014/main" id="{1E609CF5-10B1-4E81-BDE6-6F3A5D8C1400}"/>
               </a:ext>
             </a:extLst>
           </p:cNvPr>
@@ -40770,7 +40770,7 @@
           <p:cNvPr id="33" name="">
             <a:extLst xmlns:a="http://schemas.openxmlformats.org/drawingml/2006/main">
               <a:ext uri="{FF2B5EF4-FFF2-40B4-BE49-F238E27FC236}">
-                <a16:creationId xmlns:a16="http://schemas.microsoft.com/office/drawing/2014/main" id="{E0E5A8C6-FB23-46C9-8E28-E881F055D173}"/>
+                <a16:creationId xmlns:a16="http://schemas.microsoft.com/office/drawing/2014/main" id="{33C9FEFE-BC7D-48FD-9596-801976067A79}"/>
               </a:ext>
             </a:extLst>
           </p:cNvPr>
@@ -40828,7 +40828,7 @@
           <p:cNvPr id="34" name="">
             <a:extLst xmlns:a="http://schemas.openxmlformats.org/drawingml/2006/main">
               <a:ext uri="{FF2B5EF4-FFF2-40B4-BE49-F238E27FC236}">
-                <a16:creationId xmlns:a16="http://schemas.microsoft.com/office/drawing/2014/main" id="{BAE39A4E-D684-4DDA-AB31-2B70E30DCD88}"/>
+                <a16:creationId xmlns:a16="http://schemas.microsoft.com/office/drawing/2014/main" id="{B1FF483E-B3B8-459E-BFC7-00A06C1A934A}"/>
               </a:ext>
             </a:extLst>
           </p:cNvPr>
@@ -40861,7 +40861,7 @@
           <p:cNvPr id="35" name="">
             <a:extLst xmlns:a="http://schemas.openxmlformats.org/drawingml/2006/main">
               <a:ext uri="{FF2B5EF4-FFF2-40B4-BE49-F238E27FC236}">
-                <a16:creationId xmlns:a16="http://schemas.microsoft.com/office/drawing/2014/main" id="{CFFAF462-6240-49C1-820C-445EAD67BBCE}"/>
+                <a16:creationId xmlns:a16="http://schemas.microsoft.com/office/drawing/2014/main" id="{0C9470AC-452A-47CB-BDD5-15C8D0A7C68C}"/>
               </a:ext>
             </a:extLst>
           </p:cNvPr>
@@ -40919,7 +40919,7 @@
           <p:cNvPr id="36" name="">
             <a:extLst xmlns:a="http://schemas.openxmlformats.org/drawingml/2006/main">
               <a:ext uri="{FF2B5EF4-FFF2-40B4-BE49-F238E27FC236}">
-                <a16:creationId xmlns:a16="http://schemas.microsoft.com/office/drawing/2014/main" id="{212F1AFE-284E-4C5C-BD41-9CAC12275771}"/>
+                <a16:creationId xmlns:a16="http://schemas.microsoft.com/office/drawing/2014/main" id="{968770CE-9A31-4150-B954-804AA9C34637}"/>
               </a:ext>
             </a:extLst>
           </p:cNvPr>
@@ -40952,7 +40952,7 @@
           <p:cNvPr id="37" name="">
             <a:extLst xmlns:a="http://schemas.openxmlformats.org/drawingml/2006/main">
               <a:ext uri="{FF2B5EF4-FFF2-40B4-BE49-F238E27FC236}">
-                <a16:creationId xmlns:a16="http://schemas.microsoft.com/office/drawing/2014/main" id="{8DC2B65C-0999-4B7D-9C30-B0C13A14C4F3}"/>
+                <a16:creationId xmlns:a16="http://schemas.microsoft.com/office/drawing/2014/main" id="{E0E1FB32-B5A2-4FCB-A55E-01D0634A1A91}"/>
               </a:ext>
             </a:extLst>
           </p:cNvPr>
@@ -41010,7 +41010,7 @@
           <p:cNvPr id="38" name="">
             <a:extLst xmlns:a="http://schemas.openxmlformats.org/drawingml/2006/main">
               <a:ext uri="{FF2B5EF4-FFF2-40B4-BE49-F238E27FC236}">
-                <a16:creationId xmlns:a16="http://schemas.microsoft.com/office/drawing/2014/main" id="{22E2D1DB-8872-4AB2-A75E-DF3879B86F5C}"/>
+                <a16:creationId xmlns:a16="http://schemas.microsoft.com/office/drawing/2014/main" id="{AD6CCFC0-8DD7-4522-8EC5-DB5C338F3532}"/>
               </a:ext>
             </a:extLst>
           </p:cNvPr>
@@ -41043,7 +41043,7 @@
           <p:cNvPr id="39" name="">
             <a:extLst xmlns:a="http://schemas.openxmlformats.org/drawingml/2006/main">
               <a:ext uri="{FF2B5EF4-FFF2-40B4-BE49-F238E27FC236}">
-                <a16:creationId xmlns:a16="http://schemas.microsoft.com/office/drawing/2014/main" id="{AB2B3D15-94CA-443A-8E89-41D65D23F831}"/>
+                <a16:creationId xmlns:a16="http://schemas.microsoft.com/office/drawing/2014/main" id="{637787E1-1C34-4213-9A42-03630E1FAD17}"/>
               </a:ext>
             </a:extLst>
           </p:cNvPr>
@@ -41101,7 +41101,7 @@
           <p:cNvPr id="40" name="">
             <a:extLst xmlns:a="http://schemas.openxmlformats.org/drawingml/2006/main">
               <a:ext uri="{FF2B5EF4-FFF2-40B4-BE49-F238E27FC236}">
-                <a16:creationId xmlns:a16="http://schemas.microsoft.com/office/drawing/2014/main" id="{00F30043-08E0-4E7E-97DD-E5C2FC89CA91}"/>
+                <a16:creationId xmlns:a16="http://schemas.microsoft.com/office/drawing/2014/main" id="{1EF38874-22F0-4F1E-9186-AE7F589FEEAF}"/>
               </a:ext>
             </a:extLst>
           </p:cNvPr>
@@ -41134,7 +41134,7 @@
           <p:cNvPr id="41" name="">
             <a:extLst xmlns:a="http://schemas.openxmlformats.org/drawingml/2006/main">
               <a:ext uri="{FF2B5EF4-FFF2-40B4-BE49-F238E27FC236}">
-                <a16:creationId xmlns:a16="http://schemas.microsoft.com/office/drawing/2014/main" id="{1FBC2E82-7530-4538-BDB4-A917E67F1B56}"/>
+                <a16:creationId xmlns:a16="http://schemas.microsoft.com/office/drawing/2014/main" id="{0E27C509-AA08-4F7B-9AF4-B27008DF23F3}"/>
               </a:ext>
             </a:extLst>
           </p:cNvPr>
@@ -41192,7 +41192,7 @@
           <p:cNvPr id="42" name="">
             <a:extLst xmlns:a="http://schemas.openxmlformats.org/drawingml/2006/main">
               <a:ext uri="{FF2B5EF4-FFF2-40B4-BE49-F238E27FC236}">
-                <a16:creationId xmlns:a16="http://schemas.microsoft.com/office/drawing/2014/main" id="{C81E480B-5391-497A-B3A2-F85314F30067}"/>
+                <a16:creationId xmlns:a16="http://schemas.microsoft.com/office/drawing/2014/main" id="{A27B8C94-1AB6-4082-BA51-13464A17EA2E}"/>
               </a:ext>
             </a:extLst>
           </p:cNvPr>
@@ -41225,7 +41225,7 @@
           <p:cNvPr id="43" name="">
             <a:extLst xmlns:a="http://schemas.openxmlformats.org/drawingml/2006/main">
               <a:ext uri="{FF2B5EF4-FFF2-40B4-BE49-F238E27FC236}">
-                <a16:creationId xmlns:a16="http://schemas.microsoft.com/office/drawing/2014/main" id="{A338D683-3037-40DB-8642-B7E008CD2AAF}"/>
+                <a16:creationId xmlns:a16="http://schemas.microsoft.com/office/drawing/2014/main" id="{907869E6-11DD-4620-BAE2-43AA6B318776}"/>
               </a:ext>
             </a:extLst>
           </p:cNvPr>
@@ -41283,7 +41283,7 @@
           <p:cNvPr id="44" name="">
             <a:extLst xmlns:a="http://schemas.openxmlformats.org/drawingml/2006/main">
               <a:ext uri="{FF2B5EF4-FFF2-40B4-BE49-F238E27FC236}">
-                <a16:creationId xmlns:a16="http://schemas.microsoft.com/office/drawing/2014/main" id="{A9BDFE6A-54D1-4C4A-B5B1-C631CCE22B67}"/>
+                <a16:creationId xmlns:a16="http://schemas.microsoft.com/office/drawing/2014/main" id="{9BBA1C36-89A7-4EB5-B1F2-3BFD92909AC8}"/>
               </a:ext>
             </a:extLst>
           </p:cNvPr>
@@ -41316,7 +41316,7 @@
           <p:cNvPr id="45" name="">
             <a:extLst xmlns:a="http://schemas.openxmlformats.org/drawingml/2006/main">
               <a:ext uri="{FF2B5EF4-FFF2-40B4-BE49-F238E27FC236}">
-                <a16:creationId xmlns:a16="http://schemas.microsoft.com/office/drawing/2014/main" id="{97128894-F462-446C-A862-B5DBDA60E919}"/>
+                <a16:creationId xmlns:a16="http://schemas.microsoft.com/office/drawing/2014/main" id="{93451CBF-A155-459B-AEF8-7FC7DF49EDCF}"/>
               </a:ext>
             </a:extLst>
           </p:cNvPr>
@@ -41374,7 +41374,7 @@
           <p:cNvPr id="46" name="">
             <a:extLst xmlns:a="http://schemas.openxmlformats.org/drawingml/2006/main">
               <a:ext uri="{FF2B5EF4-FFF2-40B4-BE49-F238E27FC236}">
-                <a16:creationId xmlns:a16="http://schemas.microsoft.com/office/drawing/2014/main" id="{49C33540-8F96-4B40-BEDF-4A0AD6AD6972}"/>
+                <a16:creationId xmlns:a16="http://schemas.microsoft.com/office/drawing/2014/main" id="{89B80948-F2C0-4624-A9A8-6DE1FE715217}"/>
               </a:ext>
             </a:extLst>
           </p:cNvPr>
@@ -41407,7 +41407,7 @@
           <p:cNvPr id="47" name="">
             <a:extLst xmlns:a="http://schemas.openxmlformats.org/drawingml/2006/main">
               <a:ext uri="{FF2B5EF4-FFF2-40B4-BE49-F238E27FC236}">
-                <a16:creationId xmlns:a16="http://schemas.microsoft.com/office/drawing/2014/main" id="{FFB7099E-5337-4DE4-879C-A26878BA151A}"/>
+                <a16:creationId xmlns:a16="http://schemas.microsoft.com/office/drawing/2014/main" id="{57C7331A-CA55-4899-8D42-F383C87EC864}"/>
               </a:ext>
             </a:extLst>
           </p:cNvPr>
@@ -41465,7 +41465,7 @@
           <p:cNvPr id="48" name="">
             <a:extLst xmlns:a="http://schemas.openxmlformats.org/drawingml/2006/main">
               <a:ext uri="{FF2B5EF4-FFF2-40B4-BE49-F238E27FC236}">
-                <a16:creationId xmlns:a16="http://schemas.microsoft.com/office/drawing/2014/main" id="{F580CD34-8306-4123-85C3-E21AFCC88F14}"/>
+                <a16:creationId xmlns:a16="http://schemas.microsoft.com/office/drawing/2014/main" id="{6E75F77D-6B03-45F2-9E35-DAB292DBFC2B}"/>
               </a:ext>
             </a:extLst>
           </p:cNvPr>
@@ -41498,7 +41498,7 @@
           <p:cNvPr id="49" name="">
             <a:extLst xmlns:a="http://schemas.openxmlformats.org/drawingml/2006/main">
               <a:ext uri="{FF2B5EF4-FFF2-40B4-BE49-F238E27FC236}">
-                <a16:creationId xmlns:a16="http://schemas.microsoft.com/office/drawing/2014/main" id="{D7EADF7E-E049-4245-A12B-85FB923E459C}"/>
+                <a16:creationId xmlns:a16="http://schemas.microsoft.com/office/drawing/2014/main" id="{FAD31F37-6C8E-40AC-A593-A7630DA73BF8}"/>
               </a:ext>
             </a:extLst>
           </p:cNvPr>
@@ -41556,7 +41556,7 @@
           <p:cNvPr id="50" name="">
             <a:extLst xmlns:a="http://schemas.openxmlformats.org/drawingml/2006/main">
               <a:ext uri="{FF2B5EF4-FFF2-40B4-BE49-F238E27FC236}">
-                <a16:creationId xmlns:a16="http://schemas.microsoft.com/office/drawing/2014/main" id="{5360F97E-7F3C-4F33-9A06-8DC84792758C}"/>
+                <a16:creationId xmlns:a16="http://schemas.microsoft.com/office/drawing/2014/main" id="{0C9D3D76-A8C8-4975-A2D9-918407B9E178}"/>
               </a:ext>
             </a:extLst>
           </p:cNvPr>
@@ -41589,7 +41589,7 @@
           <p:cNvPr id="51" name="">
             <a:extLst xmlns:a="http://schemas.openxmlformats.org/drawingml/2006/main">
               <a:ext uri="{FF2B5EF4-FFF2-40B4-BE49-F238E27FC236}">
-                <a16:creationId xmlns:a16="http://schemas.microsoft.com/office/drawing/2014/main" id="{A72F3E24-DE0B-4FD0-84F7-D6D4E894B9CA}"/>
+                <a16:creationId xmlns:a16="http://schemas.microsoft.com/office/drawing/2014/main" id="{37634752-BA7F-4288-B062-15E2DF40EFFC}"/>
               </a:ext>
             </a:extLst>
           </p:cNvPr>
@@ -41647,7 +41647,7 @@
           <p:cNvPr id="52" name="">
             <a:extLst xmlns:a="http://schemas.openxmlformats.org/drawingml/2006/main">
               <a:ext uri="{FF2B5EF4-FFF2-40B4-BE49-F238E27FC236}">
-                <a16:creationId xmlns:a16="http://schemas.microsoft.com/office/drawing/2014/main" id="{9F84F730-292A-434B-8140-DD289743ABD8}"/>
+                <a16:creationId xmlns:a16="http://schemas.microsoft.com/office/drawing/2014/main" id="{F5A1515C-3A35-4466-B8ED-E203C551E735}"/>
               </a:ext>
             </a:extLst>
           </p:cNvPr>
@@ -41680,7 +41680,7 @@
           <p:cNvPr id="53" name="">
             <a:extLst xmlns:a="http://schemas.openxmlformats.org/drawingml/2006/main">
               <a:ext uri="{FF2B5EF4-FFF2-40B4-BE49-F238E27FC236}">
-                <a16:creationId xmlns:a16="http://schemas.microsoft.com/office/drawing/2014/main" id="{7D34247E-CE4A-433B-B4BB-A77C89EF7155}"/>
+                <a16:creationId xmlns:a16="http://schemas.microsoft.com/office/drawing/2014/main" id="{9F049ACE-454B-41C2-A0EB-9301D450CEB0}"/>
               </a:ext>
             </a:extLst>
           </p:cNvPr>
@@ -41738,7 +41738,7 @@
           <p:cNvPr id="54" name="">
             <a:extLst xmlns:a="http://schemas.openxmlformats.org/drawingml/2006/main">
               <a:ext uri="{FF2B5EF4-FFF2-40B4-BE49-F238E27FC236}">
-                <a16:creationId xmlns:a16="http://schemas.microsoft.com/office/drawing/2014/main" id="{C8E5DEF3-87AF-4386-9180-D8AC75DB4116}"/>
+                <a16:creationId xmlns:a16="http://schemas.microsoft.com/office/drawing/2014/main" id="{BE0DD1CE-9DFF-42D4-9CF7-9EACA72ED522}"/>
               </a:ext>
             </a:extLst>
           </p:cNvPr>
@@ -41771,7 +41771,7 @@
           <p:cNvPr id="55" name="">
             <a:extLst xmlns:a="http://schemas.openxmlformats.org/drawingml/2006/main">
               <a:ext uri="{FF2B5EF4-FFF2-40B4-BE49-F238E27FC236}">
-                <a16:creationId xmlns:a16="http://schemas.microsoft.com/office/drawing/2014/main" id="{A7CC1D58-F52B-40E3-A468-DD51A0E12B31}"/>
+                <a16:creationId xmlns:a16="http://schemas.microsoft.com/office/drawing/2014/main" id="{ED35CC38-0995-4AC1-BC08-A0E796800A39}"/>
               </a:ext>
             </a:extLst>
           </p:cNvPr>
@@ -41829,7 +41829,7 @@
           <p:cNvPr id="56" name="">
             <a:extLst xmlns:a="http://schemas.openxmlformats.org/drawingml/2006/main">
               <a:ext uri="{FF2B5EF4-FFF2-40B4-BE49-F238E27FC236}">
-                <a16:creationId xmlns:a16="http://schemas.microsoft.com/office/drawing/2014/main" id="{D31A8E24-66D0-44B7-9C40-510D8618C42A}"/>
+                <a16:creationId xmlns:a16="http://schemas.microsoft.com/office/drawing/2014/main" id="{D98E51CA-8D91-42FD-8A96-A0EC007B0C17}"/>
               </a:ext>
             </a:extLst>
           </p:cNvPr>
@@ -41862,7 +41862,7 @@
           <p:cNvPr id="57" name="">
             <a:extLst xmlns:a="http://schemas.openxmlformats.org/drawingml/2006/main">
               <a:ext uri="{FF2B5EF4-FFF2-40B4-BE49-F238E27FC236}">
-                <a16:creationId xmlns:a16="http://schemas.microsoft.com/office/drawing/2014/main" id="{7D1A1CD7-C623-4D29-B9BB-FD69D069F70F}"/>
+                <a16:creationId xmlns:a16="http://schemas.microsoft.com/office/drawing/2014/main" id="{EF34D7D3-89F4-43D0-94E6-20653AA7AF3F}"/>
               </a:ext>
             </a:extLst>
           </p:cNvPr>
@@ -41920,7 +41920,7 @@
           <p:cNvPr id="58" name="">
             <a:extLst xmlns:a="http://schemas.openxmlformats.org/drawingml/2006/main">
               <a:ext uri="{FF2B5EF4-FFF2-40B4-BE49-F238E27FC236}">
-                <a16:creationId xmlns:a16="http://schemas.microsoft.com/office/drawing/2014/main" id="{A91EFBFC-9AAC-44A7-A034-CA35D80D8618}"/>
+                <a16:creationId xmlns:a16="http://schemas.microsoft.com/office/drawing/2014/main" id="{342ECBA5-1E9A-4F09-B287-06A05A9947D4}"/>
               </a:ext>
             </a:extLst>
           </p:cNvPr>
@@ -41953,7 +41953,7 @@
           <p:cNvPr id="59" name="">
             <a:extLst xmlns:a="http://schemas.openxmlformats.org/drawingml/2006/main">
               <a:ext uri="{FF2B5EF4-FFF2-40B4-BE49-F238E27FC236}">
-                <a16:creationId xmlns:a16="http://schemas.microsoft.com/office/drawing/2014/main" id="{A55C0B49-3D08-491E-893D-D0E5709DA8D7}"/>
+                <a16:creationId xmlns:a16="http://schemas.microsoft.com/office/drawing/2014/main" id="{565E59E5-B75D-4E25-96D6-56632352ABA5}"/>
               </a:ext>
             </a:extLst>
           </p:cNvPr>
@@ -42011,7 +42011,7 @@
           <p:cNvPr id="60" name="">
             <a:extLst xmlns:a="http://schemas.openxmlformats.org/drawingml/2006/main">
               <a:ext uri="{FF2B5EF4-FFF2-40B4-BE49-F238E27FC236}">
-                <a16:creationId xmlns:a16="http://schemas.microsoft.com/office/drawing/2014/main" id="{F32874B0-4005-4A79-B530-CF06524326D7}"/>
+                <a16:creationId xmlns:a16="http://schemas.microsoft.com/office/drawing/2014/main" id="{7170C414-CF02-4C61-9F31-A89813762FC3}"/>
               </a:ext>
             </a:extLst>
           </p:cNvPr>
@@ -42044,7 +42044,7 @@
           <p:cNvPr id="61" name="">
             <a:extLst xmlns:a="http://schemas.openxmlformats.org/drawingml/2006/main">
               <a:ext uri="{FF2B5EF4-FFF2-40B4-BE49-F238E27FC236}">
-                <a16:creationId xmlns:a16="http://schemas.microsoft.com/office/drawing/2014/main" id="{7AEB97A8-1238-47CA-9B95-2ED1DB1DFE4E}"/>
+                <a16:creationId xmlns:a16="http://schemas.microsoft.com/office/drawing/2014/main" id="{814AB3C8-8D82-4294-AD09-AC7599947B8D}"/>
               </a:ext>
             </a:extLst>
           </p:cNvPr>
@@ -42102,7 +42102,7 @@
           <p:cNvPr id="62" name="">
             <a:extLst xmlns:a="http://schemas.openxmlformats.org/drawingml/2006/main">
               <a:ext uri="{FF2B5EF4-FFF2-40B4-BE49-F238E27FC236}">
-                <a16:creationId xmlns:a16="http://schemas.microsoft.com/office/drawing/2014/main" id="{45934CEA-E33E-4A84-AB9A-801E60305318}"/>
+                <a16:creationId xmlns:a16="http://schemas.microsoft.com/office/drawing/2014/main" id="{4E72D04E-DA43-4D99-8CB1-2997881065D5}"/>
               </a:ext>
             </a:extLst>
           </p:cNvPr>
@@ -42135,7 +42135,7 @@
           <p:cNvPr id="63" name="">
             <a:extLst xmlns:a="http://schemas.openxmlformats.org/drawingml/2006/main">
               <a:ext uri="{FF2B5EF4-FFF2-40B4-BE49-F238E27FC236}">
-                <a16:creationId xmlns:a16="http://schemas.microsoft.com/office/drawing/2014/main" id="{748748B9-ECD3-435C-ADE9-7CE59C041A1F}"/>
+                <a16:creationId xmlns:a16="http://schemas.microsoft.com/office/drawing/2014/main" id="{B93A8C10-1C52-45BC-BB3D-BF643C7A25A4}"/>
               </a:ext>
             </a:extLst>
           </p:cNvPr>
@@ -42193,7 +42193,7 @@
           <p:cNvPr id="64" name="">
             <a:extLst xmlns:a="http://schemas.openxmlformats.org/drawingml/2006/main">
               <a:ext uri="{FF2B5EF4-FFF2-40B4-BE49-F238E27FC236}">
-                <a16:creationId xmlns:a16="http://schemas.microsoft.com/office/drawing/2014/main" id="{5D817CF9-2F3A-41B5-8CB6-76724402D847}"/>
+                <a16:creationId xmlns:a16="http://schemas.microsoft.com/office/drawing/2014/main" id="{87058533-F56A-4129-B197-9550DBA1A3B7}"/>
               </a:ext>
             </a:extLst>
           </p:cNvPr>
@@ -42226,7 +42226,7 @@
           <p:cNvPr id="65" name="">
             <a:extLst xmlns:a="http://schemas.openxmlformats.org/drawingml/2006/main">
               <a:ext uri="{FF2B5EF4-FFF2-40B4-BE49-F238E27FC236}">
-                <a16:creationId xmlns:a16="http://schemas.microsoft.com/office/drawing/2014/main" id="{DAE079BC-1E24-49F0-8A6C-10D8FF60FBF5}"/>
+                <a16:creationId xmlns:a16="http://schemas.microsoft.com/office/drawing/2014/main" id="{356FCD64-B318-4CCA-9F5A-86A7F243BAC9}"/>
               </a:ext>
             </a:extLst>
           </p:cNvPr>
@@ -42284,7 +42284,7 @@
           <p:cNvPr id="66" name="">
             <a:extLst xmlns:a="http://schemas.openxmlformats.org/drawingml/2006/main">
               <a:ext uri="{FF2B5EF4-FFF2-40B4-BE49-F238E27FC236}">
-                <a16:creationId xmlns:a16="http://schemas.microsoft.com/office/drawing/2014/main" id="{0D4EBC9B-2318-4031-BCF5-53D5EBDF4715}"/>
+                <a16:creationId xmlns:a16="http://schemas.microsoft.com/office/drawing/2014/main" id="{1925C7B7-1EF7-4EBA-BF3F-A78316F38836}"/>
               </a:ext>
             </a:extLst>
           </p:cNvPr>
@@ -42317,7 +42317,7 @@
           <p:cNvPr id="67" name="">
             <a:extLst xmlns:a="http://schemas.openxmlformats.org/drawingml/2006/main">
               <a:ext uri="{FF2B5EF4-FFF2-40B4-BE49-F238E27FC236}">
-                <a16:creationId xmlns:a16="http://schemas.microsoft.com/office/drawing/2014/main" id="{F0F238EF-CC8B-4AE4-81A0-50EB5D297941}"/>
+                <a16:creationId xmlns:a16="http://schemas.microsoft.com/office/drawing/2014/main" id="{A7D85DDC-9B25-455C-AB17-AAAE8E097C15}"/>
               </a:ext>
             </a:extLst>
           </p:cNvPr>
@@ -42375,7 +42375,7 @@
           <p:cNvPr id="68" name="">
             <a:extLst xmlns:a="http://schemas.openxmlformats.org/drawingml/2006/main">
               <a:ext uri="{FF2B5EF4-FFF2-40B4-BE49-F238E27FC236}">
-                <a16:creationId xmlns:a16="http://schemas.microsoft.com/office/drawing/2014/main" id="{E42B6C04-4DD5-4117-9E3F-8F16067AF365}"/>
+                <a16:creationId xmlns:a16="http://schemas.microsoft.com/office/drawing/2014/main" id="{D5E045C8-53F3-4EAF-9B90-007B9395613A}"/>
               </a:ext>
             </a:extLst>
           </p:cNvPr>
@@ -42408,7 +42408,7 @@
           <p:cNvPr id="69" name="">
             <a:extLst xmlns:a="http://schemas.openxmlformats.org/drawingml/2006/main">
               <a:ext uri="{FF2B5EF4-FFF2-40B4-BE49-F238E27FC236}">
-                <a16:creationId xmlns:a16="http://schemas.microsoft.com/office/drawing/2014/main" id="{3FE5F49B-0700-4D5B-B7B4-1400A06FEFB8}"/>
+                <a16:creationId xmlns:a16="http://schemas.microsoft.com/office/drawing/2014/main" id="{C5386148-5D85-42A4-A7F8-494BEF2BF4D7}"/>
               </a:ext>
             </a:extLst>
           </p:cNvPr>
@@ -42466,7 +42466,7 @@
           <p:cNvPr id="70" name="">
             <a:extLst xmlns:a="http://schemas.openxmlformats.org/drawingml/2006/main">
               <a:ext uri="{FF2B5EF4-FFF2-40B4-BE49-F238E27FC236}">
-                <a16:creationId xmlns:a16="http://schemas.microsoft.com/office/drawing/2014/main" id="{1684F090-16E5-4ADF-B9CE-0793A0333A75}"/>
+                <a16:creationId xmlns:a16="http://schemas.microsoft.com/office/drawing/2014/main" id="{F59F320C-C7C0-4DEB-9567-6BDE39013E30}"/>
               </a:ext>
             </a:extLst>
           </p:cNvPr>
@@ -42499,7 +42499,7 @@
           <p:cNvPr id="71" name="">
             <a:extLst xmlns:a="http://schemas.openxmlformats.org/drawingml/2006/main">
               <a:ext uri="{FF2B5EF4-FFF2-40B4-BE49-F238E27FC236}">
-                <a16:creationId xmlns:a16="http://schemas.microsoft.com/office/drawing/2014/main" id="{A56D10F4-DC8B-4E61-A35A-B8B27138D474}"/>
+                <a16:creationId xmlns:a16="http://schemas.microsoft.com/office/drawing/2014/main" id="{C563BDC2-F3E0-4059-9755-E781C53A0EE7}"/>
               </a:ext>
             </a:extLst>
           </p:cNvPr>
@@ -42557,7 +42557,7 @@
           <p:cNvPr id="72" name="">
             <a:extLst xmlns:a="http://schemas.openxmlformats.org/drawingml/2006/main">
               <a:ext uri="{FF2B5EF4-FFF2-40B4-BE49-F238E27FC236}">
-                <a16:creationId xmlns:a16="http://schemas.microsoft.com/office/drawing/2014/main" id="{01DE36DF-432B-48D0-BB43-0956E5C9DBF3}"/>
+                <a16:creationId xmlns:a16="http://schemas.microsoft.com/office/drawing/2014/main" id="{EC92DEC0-59A5-481C-B69C-8D78781BB2EA}"/>
               </a:ext>
             </a:extLst>
           </p:cNvPr>
@@ -42590,7 +42590,7 @@
           <p:cNvPr id="73" name="">
             <a:extLst xmlns:a="http://schemas.openxmlformats.org/drawingml/2006/main">
               <a:ext uri="{FF2B5EF4-FFF2-40B4-BE49-F238E27FC236}">
-                <a16:creationId xmlns:a16="http://schemas.microsoft.com/office/drawing/2014/main" id="{CA180D1F-99E5-4807-A0DD-C8492DD9C349}"/>
+                <a16:creationId xmlns:a16="http://schemas.microsoft.com/office/drawing/2014/main" id="{89697271-AB15-40BD-85DA-DD946B8872B4}"/>
               </a:ext>
             </a:extLst>
           </p:cNvPr>
@@ -42648,7 +42648,7 @@
           <p:cNvPr id="74" name="">
             <a:extLst xmlns:a="http://schemas.openxmlformats.org/drawingml/2006/main">
               <a:ext uri="{FF2B5EF4-FFF2-40B4-BE49-F238E27FC236}">
-                <a16:creationId xmlns:a16="http://schemas.microsoft.com/office/drawing/2014/main" id="{4B3EB2D5-D137-4E8A-80E6-5D38EE8A3F0D}"/>
+                <a16:creationId xmlns:a16="http://schemas.microsoft.com/office/drawing/2014/main" id="{AE7D1DCC-9E00-40DA-A92C-19766689488F}"/>
               </a:ext>
             </a:extLst>
           </p:cNvPr>
@@ -42681,7 +42681,7 @@
           <p:cNvPr id="75" name="">
             <a:extLst xmlns:a="http://schemas.openxmlformats.org/drawingml/2006/main">
               <a:ext uri="{FF2B5EF4-FFF2-40B4-BE49-F238E27FC236}">
-                <a16:creationId xmlns:a16="http://schemas.microsoft.com/office/drawing/2014/main" id="{A017C262-D489-4D37-97B3-D7DD95A2DF66}"/>
+                <a16:creationId xmlns:a16="http://schemas.microsoft.com/office/drawing/2014/main" id="{D3189BA1-3E36-4E29-A3AC-A55C4492FA0C}"/>
               </a:ext>
             </a:extLst>
           </p:cNvPr>
@@ -42739,7 +42739,7 @@
           <p:cNvPr id="76" name="">
             <a:extLst xmlns:a="http://schemas.openxmlformats.org/drawingml/2006/main">
               <a:ext uri="{FF2B5EF4-FFF2-40B4-BE49-F238E27FC236}">
-                <a16:creationId xmlns:a16="http://schemas.microsoft.com/office/drawing/2014/main" id="{556D7A20-E6D5-472A-963E-727D84717E40}"/>
+                <a16:creationId xmlns:a16="http://schemas.microsoft.com/office/drawing/2014/main" id="{C541020E-3C16-4BE4-8DD1-6B9411AE56C2}"/>
               </a:ext>
             </a:extLst>
           </p:cNvPr>
@@ -42772,7 +42772,7 @@
           <p:cNvPr id="77" name="">
             <a:extLst xmlns:a="http://schemas.openxmlformats.org/drawingml/2006/main">
               <a:ext uri="{FF2B5EF4-FFF2-40B4-BE49-F238E27FC236}">
-                <a16:creationId xmlns:a16="http://schemas.microsoft.com/office/drawing/2014/main" id="{34D2E922-8957-42AC-9951-6B6B1338CFD1}"/>
+                <a16:creationId xmlns:a16="http://schemas.microsoft.com/office/drawing/2014/main" id="{0757D820-452D-497D-9ABF-52164BC649EF}"/>
               </a:ext>
             </a:extLst>
           </p:cNvPr>
@@ -42830,7 +42830,7 @@
           <p:cNvPr id="78" name="">
             <a:extLst xmlns:a="http://schemas.openxmlformats.org/drawingml/2006/main">
               <a:ext uri="{FF2B5EF4-FFF2-40B4-BE49-F238E27FC236}">
-                <a16:creationId xmlns:a16="http://schemas.microsoft.com/office/drawing/2014/main" id="{176ADFA7-29E6-4C00-A6C9-336762518F70}"/>
+                <a16:creationId xmlns:a16="http://schemas.microsoft.com/office/drawing/2014/main" id="{04E084B5-6D1A-410E-B352-FDAA0536E239}"/>
               </a:ext>
             </a:extLst>
           </p:cNvPr>
@@ -42888,7 +42888,7 @@
           <p:cNvPr id="79" name="">
             <a:extLst xmlns:a="http://schemas.openxmlformats.org/drawingml/2006/main">
               <a:ext uri="{FF2B5EF4-FFF2-40B4-BE49-F238E27FC236}">
-                <a16:creationId xmlns:a16="http://schemas.microsoft.com/office/drawing/2014/main" id="{BBBCCC1C-823C-46D7-8964-CD0A8E50DD69}"/>
+                <a16:creationId xmlns:a16="http://schemas.microsoft.com/office/drawing/2014/main" id="{017F291B-8B25-405B-88C7-0FE3F0A67482}"/>
               </a:ext>
             </a:extLst>
           </p:cNvPr>
@@ -42946,7 +42946,7 @@
           <p:cNvPr id="80" name="">
             <a:extLst xmlns:a="http://schemas.openxmlformats.org/drawingml/2006/main">
               <a:ext uri="{FF2B5EF4-FFF2-40B4-BE49-F238E27FC236}">
-                <a16:creationId xmlns:a16="http://schemas.microsoft.com/office/drawing/2014/main" id="{A04BC9E2-A52B-4239-8B14-497AF1F0C326}"/>
+                <a16:creationId xmlns:a16="http://schemas.microsoft.com/office/drawing/2014/main" id="{3B166A2F-9F31-478E-A390-962865683771}"/>
               </a:ext>
             </a:extLst>
           </p:cNvPr>
@@ -42979,7 +42979,7 @@
           <p:cNvPr id="81" name="">
             <a:extLst xmlns:a="http://schemas.openxmlformats.org/drawingml/2006/main">
               <a:ext uri="{FF2B5EF4-FFF2-40B4-BE49-F238E27FC236}">
-                <a16:creationId xmlns:a16="http://schemas.microsoft.com/office/drawing/2014/main" id="{D18F7584-9308-468D-B0CB-E75BDAB35F2C}"/>
+                <a16:creationId xmlns:a16="http://schemas.microsoft.com/office/drawing/2014/main" id="{B1CC97B6-9BA7-4507-B499-2087034337B7}"/>
               </a:ext>
             </a:extLst>
           </p:cNvPr>
@@ -43037,7 +43037,7 @@
           <p:cNvPr id="82" name="">
             <a:extLst xmlns:a="http://schemas.openxmlformats.org/drawingml/2006/main">
               <a:ext uri="{FF2B5EF4-FFF2-40B4-BE49-F238E27FC236}">
-                <a16:creationId xmlns:a16="http://schemas.microsoft.com/office/drawing/2014/main" id="{AD97CAC5-9AA0-4D49-BE16-41958FE7B859}"/>
+                <a16:creationId xmlns:a16="http://schemas.microsoft.com/office/drawing/2014/main" id="{78422616-DC9F-4581-AFF2-82C941E3038B}"/>
               </a:ext>
             </a:extLst>
           </p:cNvPr>
@@ -43095,7 +43095,7 @@
           <p:cNvPr id="83" name="">
             <a:extLst xmlns:a="http://schemas.openxmlformats.org/drawingml/2006/main">
               <a:ext uri="{FF2B5EF4-FFF2-40B4-BE49-F238E27FC236}">
-                <a16:creationId xmlns:a16="http://schemas.microsoft.com/office/drawing/2014/main" id="{46231B0F-9F5B-457A-8FBE-BD12303C9F2B}"/>
+                <a16:creationId xmlns:a16="http://schemas.microsoft.com/office/drawing/2014/main" id="{62107559-E12E-4BE2-9B07-02BD91854C01}"/>
               </a:ext>
             </a:extLst>
           </p:cNvPr>
@@ -43153,7 +43153,7 @@
           <p:cNvPr id="84" name="">
             <a:extLst xmlns:a="http://schemas.openxmlformats.org/drawingml/2006/main">
               <a:ext uri="{FF2B5EF4-FFF2-40B4-BE49-F238E27FC236}">
-                <a16:creationId xmlns:a16="http://schemas.microsoft.com/office/drawing/2014/main" id="{2078D2E4-9DBC-4480-A89A-77AC612AC325}"/>
+                <a16:creationId xmlns:a16="http://schemas.microsoft.com/office/drawing/2014/main" id="{CE06CE4B-8890-49BA-A51B-C5D86DC52A77}"/>
               </a:ext>
             </a:extLst>
           </p:cNvPr>
@@ -43186,7 +43186,7 @@
           <p:cNvPr id="85" name="">
             <a:extLst xmlns:a="http://schemas.openxmlformats.org/drawingml/2006/main">
               <a:ext uri="{FF2B5EF4-FFF2-40B4-BE49-F238E27FC236}">
-                <a16:creationId xmlns:a16="http://schemas.microsoft.com/office/drawing/2014/main" id="{5133CBB7-365A-4609-83CA-D0F49208F152}"/>
+                <a16:creationId xmlns:a16="http://schemas.microsoft.com/office/drawing/2014/main" id="{A450A2F2-AD66-4A57-91CC-D3BB1BEF134F}"/>
               </a:ext>
             </a:extLst>
           </p:cNvPr>
@@ -43244,7 +43244,7 @@
           <p:cNvPr id="86" name="">
             <a:extLst xmlns:a="http://schemas.openxmlformats.org/drawingml/2006/main">
               <a:ext uri="{FF2B5EF4-FFF2-40B4-BE49-F238E27FC236}">
-                <a16:creationId xmlns:a16="http://schemas.microsoft.com/office/drawing/2014/main" id="{443A3570-08BE-49AF-9030-DF5D7010897F}"/>
+                <a16:creationId xmlns:a16="http://schemas.microsoft.com/office/drawing/2014/main" id="{E8C62DFF-2F6B-4E0A-8150-7DB93226EE01}"/>
               </a:ext>
             </a:extLst>
           </p:cNvPr>
@@ -43302,7 +43302,7 @@
           <p:cNvPr id="87" name="">
             <a:extLst xmlns:a="http://schemas.openxmlformats.org/drawingml/2006/main">
               <a:ext uri="{FF2B5EF4-FFF2-40B4-BE49-F238E27FC236}">
-                <a16:creationId xmlns:a16="http://schemas.microsoft.com/office/drawing/2014/main" id="{94AB90DB-9039-46D8-9626-8673808461E3}"/>
+                <a16:creationId xmlns:a16="http://schemas.microsoft.com/office/drawing/2014/main" id="{D49ABC4A-9469-408A-8875-24C717B1BC12}"/>
               </a:ext>
             </a:extLst>
           </p:cNvPr>
@@ -43360,7 +43360,7 @@
           <p:cNvPr id="88" name="">
             <a:extLst xmlns:a="http://schemas.openxmlformats.org/drawingml/2006/main">
               <a:ext uri="{FF2B5EF4-FFF2-40B4-BE49-F238E27FC236}">
-                <a16:creationId xmlns:a16="http://schemas.microsoft.com/office/drawing/2014/main" id="{F0DDC1B2-B9D6-4F23-883F-703615D23D43}"/>
+                <a16:creationId xmlns:a16="http://schemas.microsoft.com/office/drawing/2014/main" id="{A5F53234-8B84-46F2-88A2-1A4F7734E9DE}"/>
               </a:ext>
             </a:extLst>
           </p:cNvPr>
@@ -43393,7 +43393,7 @@
           <p:cNvPr id="89" name="">
             <a:extLst xmlns:a="http://schemas.openxmlformats.org/drawingml/2006/main">
               <a:ext uri="{FF2B5EF4-FFF2-40B4-BE49-F238E27FC236}">
-                <a16:creationId xmlns:a16="http://schemas.microsoft.com/office/drawing/2014/main" id="{6515EC68-F1D5-4853-A08A-E4B46F9C0574}"/>
+                <a16:creationId xmlns:a16="http://schemas.microsoft.com/office/drawing/2014/main" id="{AA0AF45A-BC98-4774-8299-E5B6D8F6B940}"/>
               </a:ext>
             </a:extLst>
           </p:cNvPr>
@@ -43451,7 +43451,7 @@
           <p:cNvPr id="90" name="">
             <a:extLst xmlns:a="http://schemas.openxmlformats.org/drawingml/2006/main">
               <a:ext uri="{FF2B5EF4-FFF2-40B4-BE49-F238E27FC236}">
-                <a16:creationId xmlns:a16="http://schemas.microsoft.com/office/drawing/2014/main" id="{21B01C32-2384-4AAD-8858-6D2D9A74EA1A}"/>
+                <a16:creationId xmlns:a16="http://schemas.microsoft.com/office/drawing/2014/main" id="{2BE3146B-D14E-4469-86B3-A9B2D8868487}"/>
               </a:ext>
             </a:extLst>
           </p:cNvPr>
@@ -43509,7 +43509,7 @@
           <p:cNvPr id="91" name="">
             <a:extLst xmlns:a="http://schemas.openxmlformats.org/drawingml/2006/main">
               <a:ext uri="{FF2B5EF4-FFF2-40B4-BE49-F238E27FC236}">
-                <a16:creationId xmlns:a16="http://schemas.microsoft.com/office/drawing/2014/main" id="{6B5D82AC-8A83-410C-8671-6DB7FB3D671D}"/>
+                <a16:creationId xmlns:a16="http://schemas.microsoft.com/office/drawing/2014/main" id="{E88316E8-5033-45C5-9F3E-009DE3D22EA9}"/>
               </a:ext>
             </a:extLst>
           </p:cNvPr>
@@ -43567,7 +43567,7 @@
           <p:cNvPr id="92" name="">
             <a:extLst xmlns:a="http://schemas.openxmlformats.org/drawingml/2006/main">
               <a:ext uri="{FF2B5EF4-FFF2-40B4-BE49-F238E27FC236}">
-                <a16:creationId xmlns:a16="http://schemas.microsoft.com/office/drawing/2014/main" id="{27ECD054-3BED-49F0-B7DB-FCB71E2336CA}"/>
+                <a16:creationId xmlns:a16="http://schemas.microsoft.com/office/drawing/2014/main" id="{67793E59-B0B0-4FFE-A214-5BB956E54BFD}"/>
               </a:ext>
             </a:extLst>
           </p:cNvPr>
@@ -43600,7 +43600,7 @@
           <p:cNvPr id="93" name="">
             <a:extLst xmlns:a="http://schemas.openxmlformats.org/drawingml/2006/main">
               <a:ext uri="{FF2B5EF4-FFF2-40B4-BE49-F238E27FC236}">
-                <a16:creationId xmlns:a16="http://schemas.microsoft.com/office/drawing/2014/main" id="{AC41F55C-F54C-4555-AC1F-0784B7048E23}"/>
+                <a16:creationId xmlns:a16="http://schemas.microsoft.com/office/drawing/2014/main" id="{71A76EF8-7896-49EF-AF03-8455E9CA3B59}"/>
               </a:ext>
             </a:extLst>
           </p:cNvPr>
@@ -43658,7 +43658,7 @@
                 <a:latin typeface="Microsoft YaHei"/>
                 <a:ea typeface="Microsoft YaHei"/>
                 <a:cs typeface="Microsoft YaHei"/>
-                <a:hlinkClick xmlns:r="http://schemas.openxmlformats.org/officeDocument/2006/relationships" r:id="Rf549340181d84a0d"/>
+                <a:hlinkClick xmlns:r="http://schemas.openxmlformats.org/officeDocument/2006/relationships" r:id="R923ff8798d43439c"/>
               </a:rPr>
               <a:t>Claude Workflow</a:t>
             </a:r>
@@ -43670,7 +43670,7 @@
                 <a:latin typeface="Microsoft YaHei"/>
                 <a:ea typeface="Microsoft YaHei"/>
                 <a:cs typeface="Microsoft YaHei"/>
-                <a:hlinkClick xmlns:r="http://schemas.openxmlformats.org/officeDocument/2006/relationships" r:id="R3fb1a9ef3a234751"/>
+                <a:hlinkClick xmlns:r="http://schemas.openxmlformats.org/officeDocument/2006/relationships" r:id="R159b70284cf64daa"/>
               </a:rPr>
               <a:t> · Claude Goal</a:t>
             </a:r>
@@ -43682,7 +43682,7 @@
                 <a:latin typeface="Microsoft YaHei"/>
                 <a:ea typeface="Microsoft YaHei"/>
                 <a:cs typeface="Microsoft YaHei"/>
-                <a:hlinkClick xmlns:r="http://schemas.openxmlformats.org/officeDocument/2006/relationships" r:id="Rd0fc933a36e3419f"/>
+                <a:hlinkClick xmlns:r="http://schemas.openxmlformats.org/officeDocument/2006/relationships" r:id="R5b74709f491e438b"/>
               </a:rPr>
               <a:t> · Qoder SDD</a:t>
             </a:r>
@@ -43694,7 +43694,7 @@
                 <a:latin typeface="Microsoft YaHei"/>
                 <a:ea typeface="Microsoft YaHei"/>
                 <a:cs typeface="Microsoft YaHei"/>
-                <a:hlinkClick xmlns:r="http://schemas.openxmlformats.org/officeDocument/2006/relationships" r:id="R47c7b45955cb4001"/>
+                <a:hlinkClick xmlns:r="http://schemas.openxmlformats.org/officeDocument/2006/relationships" r:id="R6cea7d83c618439a"/>
               </a:rPr>
               <a:t> · Trae SOLO</a:t>
             </a:r>
@@ -43706,7 +43706,7 @@
           <p:cNvPr id="94" name="">
             <a:extLst xmlns:a="http://schemas.openxmlformats.org/drawingml/2006/main">
               <a:ext uri="{FF2B5EF4-FFF2-40B4-BE49-F238E27FC236}">
-                <a16:creationId xmlns:a16="http://schemas.microsoft.com/office/drawing/2014/main" id="{7422F571-AA98-4B59-B202-D4BECB8A033C}"/>
+                <a16:creationId xmlns:a16="http://schemas.microsoft.com/office/drawing/2014/main" id="{6C97CEED-4117-42A6-A659-D30DC3B61F04}"/>
               </a:ext>
             </a:extLst>
           </p:cNvPr>
@@ -43762,7 +43762,7 @@
     </p:spTree>
     <p:extLst>
       <p:ext uri="{BB962C8B-B14F-4D97-AF65-F5344CB8AC3E}">
-        <p14:creationId xmlns:p14="http://schemas.microsoft.com/office/powerpoint/2010/main" val="1527785648"/>
+        <p14:creationId xmlns:p14="http://schemas.microsoft.com/office/powerpoint/2010/main" val="1907494857"/>
       </p:ext>
     </p:extLst>
   </p:cSld>
@@ -43793,7 +43793,7 @@
           <p:cNvPr id="42" name="">
             <a:extLst xmlns:a="http://schemas.openxmlformats.org/drawingml/2006/main">
               <a:ext uri="{FF2B5EF4-FFF2-40B4-BE49-F238E27FC236}">
-                <a16:creationId xmlns:a16="http://schemas.microsoft.com/office/drawing/2014/main" id="{4013650C-B360-4440-A305-48CE6D032793}"/>
+                <a16:creationId xmlns:a16="http://schemas.microsoft.com/office/drawing/2014/main" id="{3080B6F6-862A-4719-805D-0F3117F7BE63}"/>
               </a:ext>
             </a:extLst>
           </p:cNvPr>
@@ -43826,7 +43826,7 @@
           <p:cNvPr id="2" name="">
             <a:extLst xmlns:a="http://schemas.openxmlformats.org/drawingml/2006/main">
               <a:ext uri="{FF2B5EF4-FFF2-40B4-BE49-F238E27FC236}">
-                <a16:creationId xmlns:a16="http://schemas.microsoft.com/office/drawing/2014/main" id="{1901B8BA-E998-48F5-98A4-202BF0BE78A6}"/>
+                <a16:creationId xmlns:a16="http://schemas.microsoft.com/office/drawing/2014/main" id="{85A1A05A-0FB6-49C4-9930-B2863582D19C}"/>
               </a:ext>
             </a:extLst>
           </p:cNvPr>
@@ -43884,7 +43884,7 @@
           <p:cNvPr id="3" name="">
             <a:extLst xmlns:a="http://schemas.openxmlformats.org/drawingml/2006/main">
               <a:ext uri="{FF2B5EF4-FFF2-40B4-BE49-F238E27FC236}">
-                <a16:creationId xmlns:a16="http://schemas.microsoft.com/office/drawing/2014/main" id="{8A16017A-F703-4876-B3CE-5005973649E2}"/>
+                <a16:creationId xmlns:a16="http://schemas.microsoft.com/office/drawing/2014/main" id="{0932A367-2389-4BFD-AFFA-63D511A25F7E}"/>
               </a:ext>
             </a:extLst>
           </p:cNvPr>
@@ -43916,7 +43916,7 @@
             <a:pPr algn="l">
               <a:defRPr sz="2325" b="1">
                 <a:solidFill>
-                  <a:srgbClr val="1D1D1A"/>
+                  <a:srgbClr val="8A0F17"/>
                 </a:solidFill>
                 <a:latin typeface="Microsoft YaHei"/>
                 <a:ea typeface="Microsoft YaHei"/>
@@ -43926,7 +43926,7 @@
             <a:r>
               <a:rPr sz="2325" b="1">
                 <a:solidFill>
-                  <a:srgbClr val="1D1D1A"/>
+                  <a:srgbClr val="8A0F17"/>
                 </a:solidFill>
                 <a:latin typeface="Microsoft YaHei"/>
                 <a:ea typeface="Microsoft YaHei"/>
@@ -43942,7 +43942,7 @@
           <p:cNvPr id="4" name="">
             <a:extLst xmlns:a="http://schemas.openxmlformats.org/drawingml/2006/main">
               <a:ext uri="{FF2B5EF4-FFF2-40B4-BE49-F238E27FC236}">
-                <a16:creationId xmlns:a16="http://schemas.microsoft.com/office/drawing/2014/main" id="{B1186722-90D0-44FD-A140-B8DB40C38EF3}"/>
+                <a16:creationId xmlns:a16="http://schemas.microsoft.com/office/drawing/2014/main" id="{D595C9C2-20AE-48DE-BA17-D0CEDB4AACD7}"/>
               </a:ext>
             </a:extLst>
           </p:cNvPr>
@@ -43975,7 +43975,7 @@
           <p:cNvPr id="5" name="">
             <a:extLst xmlns:a="http://schemas.openxmlformats.org/drawingml/2006/main">
               <a:ext uri="{FF2B5EF4-FFF2-40B4-BE49-F238E27FC236}">
-                <a16:creationId xmlns:a16="http://schemas.microsoft.com/office/drawing/2014/main" id="{7010A234-BFD5-4D2F-A4BA-16A711925C1D}"/>
+                <a16:creationId xmlns:a16="http://schemas.microsoft.com/office/drawing/2014/main" id="{44593559-1A81-441E-8516-A762F85ADB6D}"/>
               </a:ext>
             </a:extLst>
           </p:cNvPr>
@@ -44033,7 +44033,7 @@
           <p:cNvPr id="6" name="">
             <a:extLst xmlns:a="http://schemas.openxmlformats.org/drawingml/2006/main">
               <a:ext uri="{FF2B5EF4-FFF2-40B4-BE49-F238E27FC236}">
-                <a16:creationId xmlns:a16="http://schemas.microsoft.com/office/drawing/2014/main" id="{D3DB53FF-6A0A-4FFF-9F68-BAE383C95417}"/>
+                <a16:creationId xmlns:a16="http://schemas.microsoft.com/office/drawing/2014/main" id="{52735391-A0A8-47D1-B402-9A0CD1373DDC}"/>
               </a:ext>
             </a:extLst>
           </p:cNvPr>
@@ -44091,7 +44091,7 @@
           <p:cNvPr id="7" name="">
             <a:extLst xmlns:a="http://schemas.openxmlformats.org/drawingml/2006/main">
               <a:ext uri="{FF2B5EF4-FFF2-40B4-BE49-F238E27FC236}">
-                <a16:creationId xmlns:a16="http://schemas.microsoft.com/office/drawing/2014/main" id="{DD2FD795-F856-4595-89E4-8F4FC4303DBE}"/>
+                <a16:creationId xmlns:a16="http://schemas.microsoft.com/office/drawing/2014/main" id="{BB9EC975-18D5-4C5F-9960-1BD30121FE7A}"/>
               </a:ext>
             </a:extLst>
           </p:cNvPr>
@@ -44124,7 +44124,7 @@
           <p:cNvPr id="8" name="">
             <a:extLst xmlns:a="http://schemas.openxmlformats.org/drawingml/2006/main">
               <a:ext uri="{FF2B5EF4-FFF2-40B4-BE49-F238E27FC236}">
-                <a16:creationId xmlns:a16="http://schemas.microsoft.com/office/drawing/2014/main" id="{4AFABD46-4A02-4B10-B14B-19856B9E738C}"/>
+                <a16:creationId xmlns:a16="http://schemas.microsoft.com/office/drawing/2014/main" id="{F5A89864-6720-4038-B3AF-C5B6848BD02C}"/>
               </a:ext>
             </a:extLst>
           </p:cNvPr>
@@ -44157,7 +44157,7 @@
           <p:cNvPr id="9" name="">
             <a:extLst xmlns:a="http://schemas.openxmlformats.org/drawingml/2006/main">
               <a:ext uri="{FF2B5EF4-FFF2-40B4-BE49-F238E27FC236}">
-                <a16:creationId xmlns:a16="http://schemas.microsoft.com/office/drawing/2014/main" id="{16DB2867-3BEF-48DF-98F5-BBCE45734FA1}"/>
+                <a16:creationId xmlns:a16="http://schemas.microsoft.com/office/drawing/2014/main" id="{B925FB33-1209-45E2-AEC6-B3A863F77F43}"/>
               </a:ext>
             </a:extLst>
           </p:cNvPr>
@@ -44215,7 +44215,7 @@
           <p:cNvPr id="10" name="">
             <a:extLst xmlns:a="http://schemas.openxmlformats.org/drawingml/2006/main">
               <a:ext uri="{FF2B5EF4-FFF2-40B4-BE49-F238E27FC236}">
-                <a16:creationId xmlns:a16="http://schemas.microsoft.com/office/drawing/2014/main" id="{B37BAAAE-3640-4F4E-A32A-ACC9072C7FC3}"/>
+                <a16:creationId xmlns:a16="http://schemas.microsoft.com/office/drawing/2014/main" id="{F9A23306-0F27-437A-92C9-16C37D3F4CCF}"/>
               </a:ext>
             </a:extLst>
           </p:cNvPr>
@@ -44273,7 +44273,7 @@
           <p:cNvPr id="11" name="">
             <a:extLst xmlns:a="http://schemas.openxmlformats.org/drawingml/2006/main">
               <a:ext uri="{FF2B5EF4-FFF2-40B4-BE49-F238E27FC236}">
-                <a16:creationId xmlns:a16="http://schemas.microsoft.com/office/drawing/2014/main" id="{CEEA3E7F-D20B-4490-8C68-DD0D79544D13}"/>
+                <a16:creationId xmlns:a16="http://schemas.microsoft.com/office/drawing/2014/main" id="{EC25C21A-3973-4097-B19C-7C3BBD7AD5B9}"/>
               </a:ext>
             </a:extLst>
           </p:cNvPr>
@@ -44306,7 +44306,7 @@
           <p:cNvPr id="12" name="">
             <a:extLst xmlns:a="http://schemas.openxmlformats.org/drawingml/2006/main">
               <a:ext uri="{FF2B5EF4-FFF2-40B4-BE49-F238E27FC236}">
-                <a16:creationId xmlns:a16="http://schemas.microsoft.com/office/drawing/2014/main" id="{692F8899-2CB0-44A4-8C22-5F548B3DD303}"/>
+                <a16:creationId xmlns:a16="http://schemas.microsoft.com/office/drawing/2014/main" id="{8488D5CC-C5B5-41A0-AF71-82CE528EE819}"/>
               </a:ext>
             </a:extLst>
           </p:cNvPr>
@@ -44364,7 +44364,7 @@
           <p:cNvPr id="13" name="">
             <a:extLst xmlns:a="http://schemas.openxmlformats.org/drawingml/2006/main">
               <a:ext uri="{FF2B5EF4-FFF2-40B4-BE49-F238E27FC236}">
-                <a16:creationId xmlns:a16="http://schemas.microsoft.com/office/drawing/2014/main" id="{161FE1B9-5C66-4C6B-B297-F7F9A23EEBD6}"/>
+                <a16:creationId xmlns:a16="http://schemas.microsoft.com/office/drawing/2014/main" id="{88E3439D-F3EA-4945-88F4-82CF13F07DA8}"/>
               </a:ext>
             </a:extLst>
           </p:cNvPr>
@@ -44422,7 +44422,7 @@
           <p:cNvPr id="14" name="">
             <a:extLst xmlns:a="http://schemas.openxmlformats.org/drawingml/2006/main">
               <a:ext uri="{FF2B5EF4-FFF2-40B4-BE49-F238E27FC236}">
-                <a16:creationId xmlns:a16="http://schemas.microsoft.com/office/drawing/2014/main" id="{27313619-D9A2-4F26-9F83-4A4B677AF376}"/>
+                <a16:creationId xmlns:a16="http://schemas.microsoft.com/office/drawing/2014/main" id="{E34D13D1-FBBA-426B-BB5F-72A33759C27A}"/>
               </a:ext>
             </a:extLst>
           </p:cNvPr>
@@ -44455,7 +44455,7 @@
           <p:cNvPr id="15" name="">
             <a:extLst xmlns:a="http://schemas.openxmlformats.org/drawingml/2006/main">
               <a:ext uri="{FF2B5EF4-FFF2-40B4-BE49-F238E27FC236}">
-                <a16:creationId xmlns:a16="http://schemas.microsoft.com/office/drawing/2014/main" id="{077BD32D-67ED-4F4A-B515-1BDAAC4A2196}"/>
+                <a16:creationId xmlns:a16="http://schemas.microsoft.com/office/drawing/2014/main" id="{4806AB62-2C51-452F-B17E-5930D0E00364}"/>
               </a:ext>
             </a:extLst>
           </p:cNvPr>
@@ -44513,7 +44513,7 @@
           <p:cNvPr id="16" name="">
             <a:extLst xmlns:a="http://schemas.openxmlformats.org/drawingml/2006/main">
               <a:ext uri="{FF2B5EF4-FFF2-40B4-BE49-F238E27FC236}">
-                <a16:creationId xmlns:a16="http://schemas.microsoft.com/office/drawing/2014/main" id="{2FC07FF4-70D7-4B3B-A39E-39419A6A7E84}"/>
+                <a16:creationId xmlns:a16="http://schemas.microsoft.com/office/drawing/2014/main" id="{F1C8FA12-9840-4361-9E9B-C94701C8F3FE}"/>
               </a:ext>
             </a:extLst>
           </p:cNvPr>
@@ -44571,7 +44571,7 @@
           <p:cNvPr id="17" name="">
             <a:extLst xmlns:a="http://schemas.openxmlformats.org/drawingml/2006/main">
               <a:ext uri="{FF2B5EF4-FFF2-40B4-BE49-F238E27FC236}">
-                <a16:creationId xmlns:a16="http://schemas.microsoft.com/office/drawing/2014/main" id="{28984D60-5D72-4DAF-8D8C-FB3AE575F90E}"/>
+                <a16:creationId xmlns:a16="http://schemas.microsoft.com/office/drawing/2014/main" id="{D651945D-FE62-4FFA-879C-3FC2951BF407}"/>
               </a:ext>
             </a:extLst>
           </p:cNvPr>
@@ -44604,7 +44604,7 @@
           <p:cNvPr id="18" name="">
             <a:extLst xmlns:a="http://schemas.openxmlformats.org/drawingml/2006/main">
               <a:ext uri="{FF2B5EF4-FFF2-40B4-BE49-F238E27FC236}">
-                <a16:creationId xmlns:a16="http://schemas.microsoft.com/office/drawing/2014/main" id="{FD0FD5BB-9DA8-45DE-991E-0FD8C4E6E0A0}"/>
+                <a16:creationId xmlns:a16="http://schemas.microsoft.com/office/drawing/2014/main" id="{DAAE5010-5CD1-412F-B481-4E52536DFD90}"/>
               </a:ext>
             </a:extLst>
           </p:cNvPr>
@@ -44662,7 +44662,7 @@
           <p:cNvPr id="19" name="">
             <a:extLst xmlns:a="http://schemas.openxmlformats.org/drawingml/2006/main">
               <a:ext uri="{FF2B5EF4-FFF2-40B4-BE49-F238E27FC236}">
-                <a16:creationId xmlns:a16="http://schemas.microsoft.com/office/drawing/2014/main" id="{8B8FEAB0-9B4B-46D2-95E0-7A6CDDE14886}"/>
+                <a16:creationId xmlns:a16="http://schemas.microsoft.com/office/drawing/2014/main" id="{3E1D9C32-E01C-443D-9BD5-72BB4984D57D}"/>
               </a:ext>
             </a:extLst>
           </p:cNvPr>
@@ -44720,7 +44720,7 @@
           <p:cNvPr id="20" name="">
             <a:extLst xmlns:a="http://schemas.openxmlformats.org/drawingml/2006/main">
               <a:ext uri="{FF2B5EF4-FFF2-40B4-BE49-F238E27FC236}">
-                <a16:creationId xmlns:a16="http://schemas.microsoft.com/office/drawing/2014/main" id="{9E67709B-FABD-4C1D-9AC9-4A3A2ECC5657}"/>
+                <a16:creationId xmlns:a16="http://schemas.microsoft.com/office/drawing/2014/main" id="{11734A88-7C43-435E-8864-A7C0214987CD}"/>
               </a:ext>
             </a:extLst>
           </p:cNvPr>
@@ -44778,7 +44778,7 @@
           <p:cNvPr id="21" name="">
             <a:extLst xmlns:a="http://schemas.openxmlformats.org/drawingml/2006/main">
               <a:ext uri="{FF2B5EF4-FFF2-40B4-BE49-F238E27FC236}">
-                <a16:creationId xmlns:a16="http://schemas.microsoft.com/office/drawing/2014/main" id="{7D5110BC-1EF8-432D-84E1-A299EBEF01FE}"/>
+                <a16:creationId xmlns:a16="http://schemas.microsoft.com/office/drawing/2014/main" id="{3F0C1297-96B0-4181-AD58-1DCD0C10C0A6}"/>
               </a:ext>
             </a:extLst>
           </p:cNvPr>
@@ -44811,7 +44811,7 @@
           <p:cNvPr id="22" name="">
             <a:extLst xmlns:a="http://schemas.openxmlformats.org/drawingml/2006/main">
               <a:ext uri="{FF2B5EF4-FFF2-40B4-BE49-F238E27FC236}">
-                <a16:creationId xmlns:a16="http://schemas.microsoft.com/office/drawing/2014/main" id="{1F5EAED0-7E29-4BDB-A4CD-9892AB607F60}"/>
+                <a16:creationId xmlns:a16="http://schemas.microsoft.com/office/drawing/2014/main" id="{16D6770E-A3F7-4A28-807B-0E61A9166F93}"/>
               </a:ext>
             </a:extLst>
           </p:cNvPr>
@@ -44869,7 +44869,7 @@
           <p:cNvPr id="23" name="">
             <a:extLst xmlns:a="http://schemas.openxmlformats.org/drawingml/2006/main">
               <a:ext uri="{FF2B5EF4-FFF2-40B4-BE49-F238E27FC236}">
-                <a16:creationId xmlns:a16="http://schemas.microsoft.com/office/drawing/2014/main" id="{050824FC-05F8-4990-ADC9-E475FAA8AB7D}"/>
+                <a16:creationId xmlns:a16="http://schemas.microsoft.com/office/drawing/2014/main" id="{62260934-D4F2-4457-A7EB-F3332649CD9E}"/>
               </a:ext>
             </a:extLst>
           </p:cNvPr>
@@ -44927,7 +44927,7 @@
           <p:cNvPr id="24" name="">
             <a:extLst xmlns:a="http://schemas.openxmlformats.org/drawingml/2006/main">
               <a:ext uri="{FF2B5EF4-FFF2-40B4-BE49-F238E27FC236}">
-                <a16:creationId xmlns:a16="http://schemas.microsoft.com/office/drawing/2014/main" id="{AB67AA5C-DFC8-47DA-B2ED-CD6FFB0EF2AD}"/>
+                <a16:creationId xmlns:a16="http://schemas.microsoft.com/office/drawing/2014/main" id="{F5301110-FFA9-4E8E-9F4E-B326D09396FC}"/>
               </a:ext>
             </a:extLst>
           </p:cNvPr>
@@ -44985,7 +44985,7 @@
           <p:cNvPr id="25" name="">
             <a:extLst xmlns:a="http://schemas.openxmlformats.org/drawingml/2006/main">
               <a:ext uri="{FF2B5EF4-FFF2-40B4-BE49-F238E27FC236}">
-                <a16:creationId xmlns:a16="http://schemas.microsoft.com/office/drawing/2014/main" id="{985E6451-15E5-42EA-B3ED-5BAF6C518EE0}"/>
+                <a16:creationId xmlns:a16="http://schemas.microsoft.com/office/drawing/2014/main" id="{63B4ABE3-C421-4E70-8B58-34D287C9BB3E}"/>
               </a:ext>
             </a:extLst>
           </p:cNvPr>
@@ -45018,7 +45018,7 @@
           <p:cNvPr id="26" name="">
             <a:extLst xmlns:a="http://schemas.openxmlformats.org/drawingml/2006/main">
               <a:ext uri="{FF2B5EF4-FFF2-40B4-BE49-F238E27FC236}">
-                <a16:creationId xmlns:a16="http://schemas.microsoft.com/office/drawing/2014/main" id="{A944CCE9-B9DC-4EDD-8560-335B9154EEE9}"/>
+                <a16:creationId xmlns:a16="http://schemas.microsoft.com/office/drawing/2014/main" id="{0BB33B3E-FC00-4183-8667-B072CE15CF5A}"/>
               </a:ext>
             </a:extLst>
           </p:cNvPr>
@@ -45076,7 +45076,7 @@
           <p:cNvPr id="27" name="">
             <a:extLst xmlns:a="http://schemas.openxmlformats.org/drawingml/2006/main">
               <a:ext uri="{FF2B5EF4-FFF2-40B4-BE49-F238E27FC236}">
-                <a16:creationId xmlns:a16="http://schemas.microsoft.com/office/drawing/2014/main" id="{2A46C445-40AD-40FF-99AD-0B12F167FB66}"/>
+                <a16:creationId xmlns:a16="http://schemas.microsoft.com/office/drawing/2014/main" id="{51777D17-C37A-4720-BEEB-E844076FDA21}"/>
               </a:ext>
             </a:extLst>
           </p:cNvPr>
@@ -45134,7 +45134,7 @@
           <p:cNvPr id="28" name="">
             <a:extLst xmlns:a="http://schemas.openxmlformats.org/drawingml/2006/main">
               <a:ext uri="{FF2B5EF4-FFF2-40B4-BE49-F238E27FC236}">
-                <a16:creationId xmlns:a16="http://schemas.microsoft.com/office/drawing/2014/main" id="{29BC79A8-A401-4277-8758-0F6AD7C7E174}"/>
+                <a16:creationId xmlns:a16="http://schemas.microsoft.com/office/drawing/2014/main" id="{88004F7B-79EC-4BAC-895C-4BFE87074AC0}"/>
               </a:ext>
             </a:extLst>
           </p:cNvPr>
@@ -45192,7 +45192,7 @@
           <p:cNvPr id="29" name="">
             <a:extLst xmlns:a="http://schemas.openxmlformats.org/drawingml/2006/main">
               <a:ext uri="{FF2B5EF4-FFF2-40B4-BE49-F238E27FC236}">
-                <a16:creationId xmlns:a16="http://schemas.microsoft.com/office/drawing/2014/main" id="{DEA777A5-A023-4458-BF6B-EEE7329123DC}"/>
+                <a16:creationId xmlns:a16="http://schemas.microsoft.com/office/drawing/2014/main" id="{EB51D5FF-4656-459B-955D-4E3F5A009FF7}"/>
               </a:ext>
             </a:extLst>
           </p:cNvPr>
@@ -45225,7 +45225,7 @@
           <p:cNvPr id="30" name="">
             <a:extLst xmlns:a="http://schemas.openxmlformats.org/drawingml/2006/main">
               <a:ext uri="{FF2B5EF4-FFF2-40B4-BE49-F238E27FC236}">
-                <a16:creationId xmlns:a16="http://schemas.microsoft.com/office/drawing/2014/main" id="{89D7F54F-6666-4F7C-A09C-C52D5F1FCBC2}"/>
+                <a16:creationId xmlns:a16="http://schemas.microsoft.com/office/drawing/2014/main" id="{02437AD9-1DB5-4495-BC5E-E41FEB45DDD2}"/>
               </a:ext>
             </a:extLst>
           </p:cNvPr>
@@ -45283,7 +45283,7 @@
           <p:cNvPr id="31" name="">
             <a:extLst xmlns:a="http://schemas.openxmlformats.org/drawingml/2006/main">
               <a:ext uri="{FF2B5EF4-FFF2-40B4-BE49-F238E27FC236}">
-                <a16:creationId xmlns:a16="http://schemas.microsoft.com/office/drawing/2014/main" id="{04B73B29-9955-4EC2-8C61-ADC85360EC3F}"/>
+                <a16:creationId xmlns:a16="http://schemas.microsoft.com/office/drawing/2014/main" id="{9F757269-6DEE-48C2-9854-774DC3A3E6F5}"/>
               </a:ext>
             </a:extLst>
           </p:cNvPr>
@@ -45341,7 +45341,7 @@
           <p:cNvPr id="32" name="">
             <a:extLst xmlns:a="http://schemas.openxmlformats.org/drawingml/2006/main">
               <a:ext uri="{FF2B5EF4-FFF2-40B4-BE49-F238E27FC236}">
-                <a16:creationId xmlns:a16="http://schemas.microsoft.com/office/drawing/2014/main" id="{98D06117-3A81-4A87-84A1-A68C50B5A8DE}"/>
+                <a16:creationId xmlns:a16="http://schemas.microsoft.com/office/drawing/2014/main" id="{5DC801BC-8395-496D-A247-E757A05E006E}"/>
               </a:ext>
             </a:extLst>
           </p:cNvPr>
@@ -45399,7 +45399,7 @@
           <p:cNvPr id="33" name="">
             <a:extLst xmlns:a="http://schemas.openxmlformats.org/drawingml/2006/main">
               <a:ext uri="{FF2B5EF4-FFF2-40B4-BE49-F238E27FC236}">
-                <a16:creationId xmlns:a16="http://schemas.microsoft.com/office/drawing/2014/main" id="{DC21E91B-94A8-44CD-A121-22B2B765F4DE}"/>
+                <a16:creationId xmlns:a16="http://schemas.microsoft.com/office/drawing/2014/main" id="{C53EC693-1CB3-4446-A4EB-628E873FFCAB}"/>
               </a:ext>
             </a:extLst>
           </p:cNvPr>
@@ -45432,7 +45432,7 @@
           <p:cNvPr id="34" name="">
             <a:extLst xmlns:a="http://schemas.openxmlformats.org/drawingml/2006/main">
               <a:ext uri="{FF2B5EF4-FFF2-40B4-BE49-F238E27FC236}">
-                <a16:creationId xmlns:a16="http://schemas.microsoft.com/office/drawing/2014/main" id="{AC0D6E40-83FE-46E2-8B64-B7A99400ADC9}"/>
+                <a16:creationId xmlns:a16="http://schemas.microsoft.com/office/drawing/2014/main" id="{BDC9664A-4083-470C-9418-2AF15F3096CB}"/>
               </a:ext>
             </a:extLst>
           </p:cNvPr>
@@ -45490,7 +45490,7 @@
           <p:cNvPr id="35" name="">
             <a:extLst xmlns:a="http://schemas.openxmlformats.org/drawingml/2006/main">
               <a:ext uri="{FF2B5EF4-FFF2-40B4-BE49-F238E27FC236}">
-                <a16:creationId xmlns:a16="http://schemas.microsoft.com/office/drawing/2014/main" id="{0ADC4C7E-284A-4163-8245-5FB25020DAD9}"/>
+                <a16:creationId xmlns:a16="http://schemas.microsoft.com/office/drawing/2014/main" id="{30A87326-AEC5-476E-A1CD-CF7871F3FFBE}"/>
               </a:ext>
             </a:extLst>
           </p:cNvPr>
@@ -45548,7 +45548,7 @@
           <p:cNvPr id="36" name="">
             <a:extLst xmlns:a="http://schemas.openxmlformats.org/drawingml/2006/main">
               <a:ext uri="{FF2B5EF4-FFF2-40B4-BE49-F238E27FC236}">
-                <a16:creationId xmlns:a16="http://schemas.microsoft.com/office/drawing/2014/main" id="{5883E9CC-6F58-4204-98DF-0FA295553198}"/>
+                <a16:creationId xmlns:a16="http://schemas.microsoft.com/office/drawing/2014/main" id="{328FD179-34AE-4188-8BB0-04D1DF6FA4EA}"/>
               </a:ext>
             </a:extLst>
           </p:cNvPr>
@@ -45606,7 +45606,7 @@
           <p:cNvPr id="37" name="">
             <a:extLst xmlns:a="http://schemas.openxmlformats.org/drawingml/2006/main">
               <a:ext uri="{FF2B5EF4-FFF2-40B4-BE49-F238E27FC236}">
-                <a16:creationId xmlns:a16="http://schemas.microsoft.com/office/drawing/2014/main" id="{31F33DAB-57FA-42E8-8B1E-62B685722059}"/>
+                <a16:creationId xmlns:a16="http://schemas.microsoft.com/office/drawing/2014/main" id="{0B5F7A39-0DE5-4ECA-AFAF-A0C119370ED3}"/>
               </a:ext>
             </a:extLst>
           </p:cNvPr>
@@ -45639,7 +45639,7 @@
           <p:cNvPr id="38" name="">
             <a:extLst xmlns:a="http://schemas.openxmlformats.org/drawingml/2006/main">
               <a:ext uri="{FF2B5EF4-FFF2-40B4-BE49-F238E27FC236}">
-                <a16:creationId xmlns:a16="http://schemas.microsoft.com/office/drawing/2014/main" id="{EA955DBB-BBFE-40F0-AC7A-5243529E8C98}"/>
+                <a16:creationId xmlns:a16="http://schemas.microsoft.com/office/drawing/2014/main" id="{B8C2E071-A928-4249-8535-A8CFB360289C}"/>
               </a:ext>
             </a:extLst>
           </p:cNvPr>
@@ -45697,7 +45697,7 @@
           <p:cNvPr id="39" name="">
             <a:extLst xmlns:a="http://schemas.openxmlformats.org/drawingml/2006/main">
               <a:ext uri="{FF2B5EF4-FFF2-40B4-BE49-F238E27FC236}">
-                <a16:creationId xmlns:a16="http://schemas.microsoft.com/office/drawing/2014/main" id="{995CA939-EB19-4471-AF2C-228685251CFB}"/>
+                <a16:creationId xmlns:a16="http://schemas.microsoft.com/office/drawing/2014/main" id="{A293741C-088B-42DA-8BE6-B5E42DDE2391}"/>
               </a:ext>
             </a:extLst>
           </p:cNvPr>
@@ -45730,7 +45730,7 @@
           <p:cNvPr id="40" name="">
             <a:extLst xmlns:a="http://schemas.openxmlformats.org/drawingml/2006/main">
               <a:ext uri="{FF2B5EF4-FFF2-40B4-BE49-F238E27FC236}">
-                <a16:creationId xmlns:a16="http://schemas.microsoft.com/office/drawing/2014/main" id="{67476A27-D3E7-4BF4-973D-41B2C6F7A0FE}"/>
+                <a16:creationId xmlns:a16="http://schemas.microsoft.com/office/drawing/2014/main" id="{7E365229-68FC-42CE-88EC-5BC2A6B35E0D}"/>
               </a:ext>
             </a:extLst>
           </p:cNvPr>
@@ -45788,7 +45788,7 @@
                 <a:latin typeface="Microsoft YaHei"/>
                 <a:ea typeface="Microsoft YaHei"/>
                 <a:cs typeface="Microsoft YaHei"/>
-                <a:hlinkClick xmlns:r="http://schemas.openxmlformats.org/officeDocument/2006/relationships" r:id="R59d4b9f383604280"/>
+                <a:hlinkClick xmlns:r="http://schemas.openxmlformats.org/officeDocument/2006/relationships" r:id="Rf9fd9ab894dd4522"/>
               </a:rPr>
               <a:t>Claude Agent Teams</a:t>
             </a:r>
@@ -45800,7 +45800,7 @@
                 <a:latin typeface="Microsoft YaHei"/>
                 <a:ea typeface="Microsoft YaHei"/>
                 <a:cs typeface="Microsoft YaHei"/>
-                <a:hlinkClick xmlns:r="http://schemas.openxmlformats.org/officeDocument/2006/relationships" r:id="R50f473d2c5b544d5"/>
+                <a:hlinkClick xmlns:r="http://schemas.openxmlformats.org/officeDocument/2006/relationships" r:id="Rd08aca3f83704ac0"/>
               </a:rPr>
               <a:t> · Claude Workflows</a:t>
             </a:r>
@@ -45812,7 +45812,7 @@
                 <a:latin typeface="Microsoft YaHei"/>
                 <a:ea typeface="Microsoft YaHei"/>
                 <a:cs typeface="Microsoft YaHei"/>
-                <a:hlinkClick xmlns:r="http://schemas.openxmlformats.org/officeDocument/2006/relationships" r:id="R03e452b7f4fb4b59"/>
+                <a:hlinkClick xmlns:r="http://schemas.openxmlformats.org/officeDocument/2006/relationships" r:id="R45b10178d5ef4f80"/>
               </a:rPr>
               <a:t> · Qoder Quest</a:t>
             </a:r>
@@ -45824,7 +45824,7 @@
                 <a:latin typeface="Microsoft YaHei"/>
                 <a:ea typeface="Microsoft YaHei"/>
                 <a:cs typeface="Microsoft YaHei"/>
-                <a:hlinkClick xmlns:r="http://schemas.openxmlformats.org/officeDocument/2006/relationships" r:id="R9b87c82629384930"/>
+                <a:hlinkClick xmlns:r="http://schemas.openxmlformats.org/officeDocument/2006/relationships" r:id="R57f6b9aa427a434b"/>
               </a:rPr>
               <a:t> · 码道 AgentTeam</a:t>
             </a:r>
@@ -45836,7 +45836,7 @@
           <p:cNvPr id="41" name="">
             <a:extLst xmlns:a="http://schemas.openxmlformats.org/drawingml/2006/main">
               <a:ext uri="{FF2B5EF4-FFF2-40B4-BE49-F238E27FC236}">
-                <a16:creationId xmlns:a16="http://schemas.microsoft.com/office/drawing/2014/main" id="{AD9A9597-FD2B-48BB-81ED-A47F09C47652}"/>
+                <a16:creationId xmlns:a16="http://schemas.microsoft.com/office/drawing/2014/main" id="{EFB0B5EB-79A4-4DC7-A9E2-CF309EAC6016}"/>
               </a:ext>
             </a:extLst>
           </p:cNvPr>
@@ -45892,7 +45892,7 @@
     </p:spTree>
     <p:extLst>
       <p:ext uri="{BB962C8B-B14F-4D97-AF65-F5344CB8AC3E}">
-        <p14:creationId xmlns:p14="http://schemas.microsoft.com/office/powerpoint/2010/main" val="798471184"/>
+        <p14:creationId xmlns:p14="http://schemas.microsoft.com/office/powerpoint/2010/main" val="110752989"/>
       </p:ext>
     </p:extLst>
   </p:cSld>
